--- a/docs/decks/L11.pptx
+++ b/docs/decks/L11.pptx
@@ -26,9 +26,10 @@
     <p:sldId id="274" r:id="rId20"/>
     <p:sldId id="275" r:id="rId21"/>
     <p:sldId id="276" r:id="rId22"/>
+    <p:sldId id="277" r:id="rId23"/>
   </p:sldIdLst>
   <p:notesMasterIdLst>
-    <p:notesMasterId r:id="rId23"/>
+    <p:notesMasterId r:id="rId24"/>
   </p:notesMasterIdLst>
   <p:sldSz cx="12192000" cy="6858000"/>
   <p:notesSz cx="6858000" cy="12192000"/>
@@ -1690,6 +1691,94 @@
             <a:fld id="{F7021451-1387-4CA6-816F-3879F97B5CBC}" type="slidenum">
               <a:rPr lang="en-US"/>
               <a:t>21</a:t>
+            </a:fld>
+            <a:endParaRPr lang="en-US"/>
+          </a:p>
+        </p:txBody>
+      </p:sp>
+    </p:spTree>
+    <p:extLst>
+      <p:ext uri="{BB962C8B-B14F-4D97-AF65-F5344CB8AC3E}">
+        <p14:creationId xmlns:p14="http://schemas.microsoft.com/office/powerpoint/2010/main" val="1024086991"/>
+      </p:ext>
+    </p:extLst>
+  </p:cSld>
+  <p:clrMapOvr>
+    <a:masterClrMapping/>
+  </p:clrMapOvr>
+</p:notes>
+</file>
+
+<file path=ppt/notesSlides/notesSlide22.xml><?xml version="1.0" encoding="utf-8"?>
+<p:notes xmlns:a="http://schemas.openxmlformats.org/drawingml/2006/main" xmlns:r="http://schemas.openxmlformats.org/officeDocument/2006/relationships" xmlns:p="http://schemas.openxmlformats.org/presentationml/2006/main">
+  <p:cSld>
+    <p:spTree>
+      <p:nvGrpSpPr>
+        <p:cNvPr id="1" name=""/>
+        <p:cNvGrpSpPr/>
+        <p:nvPr/>
+      </p:nvGrpSpPr>
+      <p:grpSpPr>
+        <a:xfrm>
+          <a:off x="0" y="0"/>
+          <a:ext cx="0" cy="0"/>
+          <a:chOff x="0" y="0"/>
+          <a:chExt cx="0" cy="0"/>
+        </a:xfrm>
+      </p:grpSpPr>
+      <p:sp>
+        <p:nvSpPr>
+          <p:cNvPr id="2" name="Slide Image Placeholder 1"/>
+          <p:cNvSpPr>
+            <a:spLocks noGrp="1" noRot="1" noChangeAspect="1"/>
+          </p:cNvSpPr>
+          <p:nvPr>
+            <p:ph type="sldImg"/>
+          </p:nvPr>
+        </p:nvSpPr>
+        <p:spPr/>
+      </p:sp>
+      <p:sp>
+        <p:nvSpPr>
+          <p:cNvPr id="3" name="Notes Placeholder 2"/>
+          <p:cNvSpPr>
+            <a:spLocks noGrp="1"/>
+          </p:cNvSpPr>
+          <p:nvPr>
+            <p:ph type="body" idx="1"/>
+          </p:nvPr>
+        </p:nvSpPr>
+        <p:spPr/>
+        <p:txBody>
+          <a:bodyPr/>
+          <a:lstStyle/>
+          <a:p>
+            <a:r>
+              <a:rPr lang="en-US" dirty="0"/>
+              <a:t/>
+            </a:r>
+            <a:endParaRPr lang="en-US" dirty="0"/>
+          </a:p>
+        </p:txBody>
+      </p:sp>
+      <p:sp>
+        <p:nvSpPr>
+          <p:cNvPr id="4" name="Slide Number Placeholder 3"/>
+          <p:cNvSpPr>
+            <a:spLocks noGrp="1"/>
+          </p:cNvSpPr>
+          <p:nvPr>
+            <p:ph type="sldNum" sz="quarter" idx="10"/>
+          </p:nvPr>
+        </p:nvSpPr>
+        <p:spPr/>
+        <p:txBody>
+          <a:bodyPr/>
+          <a:lstStyle/>
+          <a:p>
+            <a:fld id="{F7021451-1387-4CA6-816F-3879F97B5CBC}" type="slidenum">
+              <a:rPr lang="en-US"/>
+              <a:t>22</a:t>
             </a:fld>
             <a:endParaRPr lang="en-US"/>
           </a:p>
@@ -5024,7 +5113,7 @@
                 <a:ea typeface="Calibri" pitchFamily="34" charset="-122"/>
                 <a:cs typeface="Calibri" pitchFamily="34" charset="-120"/>
               </a:rPr>
-              <a:t>Feature flag, артефакти релізу, механічні перевірки</a:t>
+              <a:t>Feature flag і артефакти релізу</a:t>
             </a:r>
             <a:endParaRPr lang="en-US" sz="2500" dirty="0"/>
           </a:p>
@@ -5975,7 +6064,7 @@
                 <a:ea typeface="Courier New" pitchFamily="34" charset="-122"/>
                 <a:cs typeface="Courier New" pitchFamily="34" charset="-120"/>
               </a:rPr>
-              <a:t>08</a:t>
+              <a:t>07</a:t>
             </a:r>
             <a:endParaRPr lang="en-US" sz="2600" dirty="0"/>
           </a:p>
@@ -6014,7 +6103,7 @@
                 <a:ea typeface="Calibri" pitchFamily="34" charset="-122"/>
                 <a:cs typeface="Calibri" pitchFamily="34" charset="-120"/>
               </a:rPr>
-              <a:t>Canary: частка трафіку замість усього</a:t>
+              <a:t>У гейті живуть не тільки evals</a:t>
             </a:r>
             <a:endParaRPr lang="en-US" sz="2500" dirty="0"/>
           </a:p>
@@ -6022,7 +6111,46 @@
       </p:sp>
       <p:sp>
         <p:nvSpPr>
-          <p:cNvPr id="4" name="Shape 2"/>
+          <p:cNvPr id="4" name="Text 2"/>
+          <p:cNvSpPr/>
+          <p:nvPr/>
+        </p:nvSpPr>
+        <p:spPr>
+          <a:xfrm>
+            <a:off x="1225296" y="1005840"/>
+            <a:ext cx="8223199" cy="292608"/>
+          </a:xfrm>
+          <a:prstGeom prst="rect">
+            <a:avLst/>
+          </a:prstGeom>
+          <a:noFill/>
+          <a:ln/>
+        </p:spPr>
+        <p:txBody>
+          <a:bodyPr wrap="square" lIns="0" tIns="0" rIns="0" bIns="0" rtlCol="0" anchor="t"/>
+          <a:lstStyle/>
+          <a:p>
+            <a:pPr indent="0" marL="0">
+              <a:buNone/>
+            </a:pPr>
+            <a:r>
+              <a:rPr lang="en-US" sz="1300" dirty="0">
+                <a:solidFill>
+                  <a:srgbClr val="565C6B"/>
+                </a:solidFill>
+                <a:latin typeface="Calibri" pitchFamily="34" charset="0"/>
+                <a:ea typeface="Calibri" pitchFamily="34" charset="-122"/>
+                <a:cs typeface="Calibri" pitchFamily="34" charset="-120"/>
+              </a:rPr>
+              <a:t>Клас поломок, які до моделі навіть не доходять — кілька рядків кожна</a:t>
+            </a:r>
+            <a:endParaRPr lang="en-US" sz="1300" dirty="0"/>
+          </a:p>
+        </p:txBody>
+      </p:sp>
+      <p:sp>
+        <p:nvSpPr>
+          <p:cNvPr id="5" name="Shape 3"/>
           <p:cNvSpPr/>
           <p:nvPr/>
         </p:nvSpPr>
@@ -6044,7 +6172,7 @@
       </p:sp>
       <p:sp>
         <p:nvSpPr>
-          <p:cNvPr id="5" name="Text 3"/>
+          <p:cNvPr id="6" name="Text 4"/>
           <p:cNvSpPr/>
           <p:nvPr/>
         </p:nvSpPr>
@@ -6083,426 +6211,988 @@
       </p:sp>
       <p:sp>
         <p:nvSpPr>
-          <p:cNvPr id="6" name="Shape 4"/>
-          <p:cNvSpPr/>
-          <p:nvPr/>
-        </p:nvSpPr>
-        <p:spPr>
-          <a:xfrm>
-            <a:off x="9411919" y="530352"/>
-            <a:ext cx="960120" cy="274320"/>
-          </a:xfrm>
-          <a:prstGeom prst="roundRect">
-            <a:avLst>
-              <a:gd name="adj" fmla="val 50000"/>
-            </a:avLst>
-          </a:prstGeom>
-          <a:solidFill>
-            <a:srgbClr val="F8F0E2"/>
-          </a:solidFill>
-          <a:ln/>
-        </p:spPr>
-      </p:sp>
-      <p:sp>
-        <p:nvSpPr>
           <p:cNvPr id="7" name="Text 5"/>
           <p:cNvSpPr/>
           <p:nvPr/>
         </p:nvSpPr>
         <p:spPr>
           <a:xfrm>
-            <a:off x="9411919" y="530352"/>
-            <a:ext cx="960120" cy="274320"/>
-          </a:xfrm>
-          <a:prstGeom prst="rect">
-            <a:avLst/>
-          </a:prstGeom>
-          <a:noFill/>
-          <a:ln/>
-        </p:spPr>
-        <p:txBody>
-          <a:bodyPr wrap="square" lIns="0" tIns="0" rIns="0" bIns="0" rtlCol="0" anchor="ctr"/>
-          <a:lstStyle/>
-          <a:p>
-            <a:pPr algn="ctr" indent="0" marL="0">
-              <a:buNone/>
-            </a:pPr>
-            <a:r>
-              <a:rPr lang="en-US" sz="900" b="1" spc="100" kern="0" dirty="0">
-                <a:solidFill>
-                  <a:srgbClr val="9A5B12"/>
+            <a:off x="566928" y="6455664"/>
+            <a:ext cx="5486400" cy="274320"/>
+          </a:xfrm>
+          <a:prstGeom prst="rect">
+            <a:avLst/>
+          </a:prstGeom>
+          <a:noFill/>
+          <a:ln/>
+        </p:spPr>
+        <p:txBody>
+          <a:bodyPr wrap="square" lIns="0" tIns="0" rIns="0" bIns="0" rtlCol="0" anchor="ctr"/>
+          <a:lstStyle/>
+          <a:p>
+            <a:pPr indent="0" marL="0">
+              <a:buNone/>
+            </a:pPr>
+            <a:r>
+              <a:rPr lang="en-US" sz="850" dirty="0">
+                <a:solidFill>
+                  <a:srgbClr val="8A90A0"/>
                 </a:solidFill>
                 <a:latin typeface="Courier New" pitchFamily="34" charset="0"/>
                 <a:ea typeface="Courier New" pitchFamily="34" charset="-122"/>
                 <a:cs typeface="Courier New" pitchFamily="34" charset="-120"/>
               </a:rPr>
-              <a:t>ОПЦІЙНО</a:t>
-            </a:r>
-            <a:endParaRPr lang="en-US" sz="900" dirty="0"/>
-          </a:p>
-        </p:txBody>
-      </p:sp>
-      <p:sp>
-        <p:nvSpPr>
-          <p:cNvPr id="8" name="Text 6"/>
-          <p:cNvSpPr/>
-          <p:nvPr/>
-        </p:nvSpPr>
-        <p:spPr>
-          <a:xfrm>
-            <a:off x="566928" y="6455664"/>
-            <a:ext cx="5486400" cy="274320"/>
-          </a:xfrm>
-          <a:prstGeom prst="rect">
-            <a:avLst/>
-          </a:prstGeom>
-          <a:noFill/>
-          <a:ln/>
-        </p:spPr>
-        <p:txBody>
-          <a:bodyPr wrap="square" lIns="0" tIns="0" rIns="0" bIns="0" rtlCol="0" anchor="ctr"/>
-          <a:lstStyle/>
-          <a:p>
-            <a:pPr indent="0" marL="0">
-              <a:buNone/>
-            </a:pPr>
-            <a:r>
-              <a:rPr lang="en-US" sz="850" dirty="0">
-                <a:solidFill>
-                  <a:srgbClr val="8A90A0"/>
+              <a:t>SupportGW · LLMOps Bootcamp · Урок 11 з 12</a:t>
+            </a:r>
+            <a:endParaRPr lang="en-US" sz="850" dirty="0"/>
+          </a:p>
+        </p:txBody>
+      </p:sp>
+      <p:graphicFrame>
+        <p:nvGraphicFramePr>
+          <p:cNvPr id="14" name="Table 0"/>
+          <p:cNvGraphicFramePr>
+            <a:graphicFrameLocks noGrp="1"/>
+          </p:cNvGraphicFramePr>
+          <p:nvPr>
+            <p:extLst>
+              <p:ext uri="{D42A27DB-BD31-4B8C-83A1-F6EECF244321}">
+                <p14:modId xmlns:p14="http://schemas.microsoft.com/office/powerpoint/2010/main" val="1579011935"/>
+              </p:ext>
+            </p:extLst>
+          </p:nvPr>
+        </p:nvGraphicFramePr>
+        <p:xfrm>
+          <a:off x="566928" y="1783080"/>
+          <a:ext cx="11064240" cy="914400"/>
+        </p:xfrm>
+        <a:graphic>
+          <a:graphicData uri="http://schemas.openxmlformats.org/drawingml/2006/table">
+            <a:tbl>
+              <a:tblPr/>
+              <a:tblGrid>
+                <a:gridCol w="5120640"/>
+                <a:gridCol w="5943600"/>
+              </a:tblGrid>
+              <a:tr h="530352">
+                <a:tc>
+                  <a:txBody>
+                    <a:bodyPr/>
+                    <a:lstStyle/>
+                    <a:p>
+                      <a:pPr indent="0" marL="0">
+                        <a:buNone/>
+                      </a:pPr>
+                      <a:r>
+                        <a:rPr lang="en-US" sz="900" b="1" spc="100" kern="0" dirty="0">
+                          <a:solidFill>
+                            <a:srgbClr val="8A90A0"/>
+                          </a:solidFill>
+                          <a:latin typeface="Courier New" pitchFamily="34" charset="0"/>
+                          <a:ea typeface="Courier New" pitchFamily="34" charset="-122"/>
+                          <a:cs typeface="Courier New" pitchFamily="34" charset="-120"/>
+                        </a:rPr>
+                        <a:t>перевірка</a:t>
+                      </a:r>
+                      <a:endParaRPr lang="en-US" sz="900" dirty="0">
+                        <a:latin typeface="Courier New" charset="0"/>
+                        <a:ea typeface="Courier New" charset="0"/>
+                        <a:cs typeface="Courier New" charset="0"/>
+                      </a:endParaRPr>
+                    </a:p>
+                  </a:txBody>
+                  <a:tcPr marL="73152" marR="73152" marT="73152" marB="73152" anchor="ctr">
+                    <a:lnL w="6350" cap="flat" cmpd="sng" algn="ctr">
+                      <a:solidFill>
+                        <a:srgbClr val="E4E6EC"/>
+                      </a:solidFill>
+                      <a:prstDash val="solid"/>
+                      <a:round/>
+                      <a:headEnd type="none" w="med" len="med"/>
+                      <a:tailEnd type="none" w="med" len="med"/>
+                    </a:lnL>
+                    <a:lnR w="6350" cap="flat" cmpd="sng" algn="ctr">
+                      <a:solidFill>
+                        <a:srgbClr val="E4E6EC"/>
+                      </a:solidFill>
+                      <a:prstDash val="solid"/>
+                      <a:round/>
+                      <a:headEnd type="none" w="med" len="med"/>
+                      <a:tailEnd type="none" w="med" len="med"/>
+                    </a:lnR>
+                    <a:lnT w="6350" cap="flat" cmpd="sng" algn="ctr">
+                      <a:solidFill>
+                        <a:srgbClr val="E4E6EC"/>
+                      </a:solidFill>
+                      <a:prstDash val="solid"/>
+                      <a:round/>
+                      <a:headEnd type="none" w="med" len="med"/>
+                      <a:tailEnd type="none" w="med" len="med"/>
+                    </a:lnT>
+                    <a:lnB w="6350" cap="flat" cmpd="sng" algn="ctr">
+                      <a:solidFill>
+                        <a:srgbClr val="E4E6EC"/>
+                      </a:solidFill>
+                      <a:prstDash val="solid"/>
+                      <a:round/>
+                      <a:headEnd type="none" w="med" len="med"/>
+                      <a:tailEnd type="none" w="med" len="med"/>
+                    </a:lnB>
+                    <a:solidFill>
+                      <a:srgbClr val="FAFAFC"/>
+                    </a:solidFill>
+                  </a:tcPr>
+                </a:tc>
+                <a:tc>
+                  <a:txBody>
+                    <a:bodyPr/>
+                    <a:lstStyle/>
+                    <a:p>
+                      <a:pPr indent="0" marL="0">
+                        <a:buNone/>
+                      </a:pPr>
+                      <a:r>
+                        <a:rPr lang="en-US" sz="900" b="1" spc="100" kern="0" dirty="0">
+                          <a:solidFill>
+                            <a:srgbClr val="8A90A0"/>
+                          </a:solidFill>
+                          <a:latin typeface="Courier New" pitchFamily="34" charset="0"/>
+                          <a:ea typeface="Courier New" pitchFamily="34" charset="-122"/>
+                          <a:cs typeface="Courier New" pitchFamily="34" charset="-120"/>
+                        </a:rPr>
+                        <a:t>що ловить</a:t>
+                      </a:r>
+                      <a:endParaRPr lang="en-US" sz="900" dirty="0">
+                        <a:latin typeface="Courier New" charset="0"/>
+                        <a:ea typeface="Courier New" charset="0"/>
+                        <a:cs typeface="Courier New" charset="0"/>
+                      </a:endParaRPr>
+                    </a:p>
+                  </a:txBody>
+                  <a:tcPr marL="73152" marR="73152" marT="73152" marB="73152" anchor="ctr">
+                    <a:lnL w="6350" cap="flat" cmpd="sng" algn="ctr">
+                      <a:solidFill>
+                        <a:srgbClr val="E4E6EC"/>
+                      </a:solidFill>
+                      <a:prstDash val="solid"/>
+                      <a:round/>
+                      <a:headEnd type="none" w="med" len="med"/>
+                      <a:tailEnd type="none" w="med" len="med"/>
+                    </a:lnL>
+                    <a:lnR w="6350" cap="flat" cmpd="sng" algn="ctr">
+                      <a:solidFill>
+                        <a:srgbClr val="E4E6EC"/>
+                      </a:solidFill>
+                      <a:prstDash val="solid"/>
+                      <a:round/>
+                      <a:headEnd type="none" w="med" len="med"/>
+                      <a:tailEnd type="none" w="med" len="med"/>
+                    </a:lnR>
+                    <a:lnT w="6350" cap="flat" cmpd="sng" algn="ctr">
+                      <a:solidFill>
+                        <a:srgbClr val="E4E6EC"/>
+                      </a:solidFill>
+                      <a:prstDash val="solid"/>
+                      <a:round/>
+                      <a:headEnd type="none" w="med" len="med"/>
+                      <a:tailEnd type="none" w="med" len="med"/>
+                    </a:lnT>
+                    <a:lnB w="6350" cap="flat" cmpd="sng" algn="ctr">
+                      <a:solidFill>
+                        <a:srgbClr val="E4E6EC"/>
+                      </a:solidFill>
+                      <a:prstDash val="solid"/>
+                      <a:round/>
+                      <a:headEnd type="none" w="med" len="med"/>
+                      <a:tailEnd type="none" w="med" len="med"/>
+                    </a:lnB>
+                    <a:solidFill>
+                      <a:srgbClr val="FAFAFC"/>
+                    </a:solidFill>
+                  </a:tcPr>
+                </a:tc>
+              </a:tr>
+              <a:tr h="530352">
+                <a:tc>
+                  <a:txBody>
+                    <a:bodyPr/>
+                    <a:lstStyle/>
+                    <a:p>
+                      <a:pPr indent="0" marL="0">
+                        <a:buNone/>
+                      </a:pPr>
+                      <a:r>
+                        <a:rPr lang="en-US" sz="1150" b="1" dirty="0">
+                          <a:solidFill>
+                            <a:srgbClr val="1B1D23"/>
+                          </a:solidFill>
+                          <a:latin typeface="Calibri" pitchFamily="34" charset="0"/>
+                          <a:ea typeface="Calibri" pitchFamily="34" charset="-122"/>
+                          <a:cs typeface="Calibri" pitchFamily="34" charset="-120"/>
+                        </a:rPr>
+                        <a:t>Шаблон промпта: усі плейсхолдери на місці</a:t>
+                      </a:r>
+                      <a:endParaRPr lang="en-US" sz="1150" dirty="0">
+                        <a:latin typeface="Calibri" charset="0"/>
+                        <a:ea typeface="Calibri" charset="0"/>
+                        <a:cs typeface="Calibri" charset="0"/>
+                      </a:endParaRPr>
+                    </a:p>
+                  </a:txBody>
+                  <a:tcPr marL="73152" marR="73152" marT="73152" marB="73152" anchor="ctr">
+                    <a:lnL w="6350" cap="flat" cmpd="sng" algn="ctr">
+                      <a:solidFill>
+                        <a:srgbClr val="E4E6EC"/>
+                      </a:solidFill>
+                      <a:prstDash val="solid"/>
+                      <a:round/>
+                      <a:headEnd type="none" w="med" len="med"/>
+                      <a:tailEnd type="none" w="med" len="med"/>
+                    </a:lnL>
+                    <a:lnR w="6350" cap="flat" cmpd="sng" algn="ctr">
+                      <a:solidFill>
+                        <a:srgbClr val="E4E6EC"/>
+                      </a:solidFill>
+                      <a:prstDash val="solid"/>
+                      <a:round/>
+                      <a:headEnd type="none" w="med" len="med"/>
+                      <a:tailEnd type="none" w="med" len="med"/>
+                    </a:lnR>
+                    <a:lnT w="6350" cap="flat" cmpd="sng" algn="ctr">
+                      <a:solidFill>
+                        <a:srgbClr val="E4E6EC"/>
+                      </a:solidFill>
+                      <a:prstDash val="solid"/>
+                      <a:round/>
+                      <a:headEnd type="none" w="med" len="med"/>
+                      <a:tailEnd type="none" w="med" len="med"/>
+                    </a:lnT>
+                    <a:lnB w="6350" cap="flat" cmpd="sng" algn="ctr">
+                      <a:solidFill>
+                        <a:srgbClr val="E4E6EC"/>
+                      </a:solidFill>
+                      <a:prstDash val="solid"/>
+                      <a:round/>
+                      <a:headEnd type="none" w="med" len="med"/>
+                      <a:tailEnd type="none" w="med" len="med"/>
+                    </a:lnB>
+                    <a:solidFill>
+                      <a:srgbClr val="FFFFFF"/>
+                    </a:solidFill>
+                  </a:tcPr>
+                </a:tc>
+                <a:tc>
+                  <a:txBody>
+                    <a:bodyPr/>
+                    <a:lstStyle/>
+                    <a:p>
+                      <a:pPr indent="0" marL="0">
+                        <a:buNone/>
+                      </a:pPr>
+                      <a:r>
+                        <a:rPr lang="en-US" sz="1150" dirty="0">
+                          <a:solidFill>
+                            <a:srgbClr val="1B1D23"/>
+                          </a:solidFill>
+                          <a:latin typeface="Calibri" pitchFamily="34" charset="0"/>
+                          <a:ea typeface="Calibri" pitchFamily="34" charset="-122"/>
+                          <a:cs typeface="Calibri" pitchFamily="34" charset="-120"/>
+                        </a:rPr>
+                        <a:t>одна одрукована дужка — і в модель їде текст із дужками</a:t>
+                      </a:r>
+                      <a:endParaRPr lang="en-US" sz="1150" dirty="0">
+                        <a:latin typeface="Calibri" charset="0"/>
+                        <a:ea typeface="Calibri" charset="0"/>
+                        <a:cs typeface="Calibri" charset="0"/>
+                      </a:endParaRPr>
+                    </a:p>
+                  </a:txBody>
+                  <a:tcPr marL="73152" marR="73152" marT="73152" marB="73152" anchor="ctr">
+                    <a:lnL w="6350" cap="flat" cmpd="sng" algn="ctr">
+                      <a:solidFill>
+                        <a:srgbClr val="E4E6EC"/>
+                      </a:solidFill>
+                      <a:prstDash val="solid"/>
+                      <a:round/>
+                      <a:headEnd type="none" w="med" len="med"/>
+                      <a:tailEnd type="none" w="med" len="med"/>
+                    </a:lnL>
+                    <a:lnR w="6350" cap="flat" cmpd="sng" algn="ctr">
+                      <a:solidFill>
+                        <a:srgbClr val="E4E6EC"/>
+                      </a:solidFill>
+                      <a:prstDash val="solid"/>
+                      <a:round/>
+                      <a:headEnd type="none" w="med" len="med"/>
+                      <a:tailEnd type="none" w="med" len="med"/>
+                    </a:lnR>
+                    <a:lnT w="6350" cap="flat" cmpd="sng" algn="ctr">
+                      <a:solidFill>
+                        <a:srgbClr val="E4E6EC"/>
+                      </a:solidFill>
+                      <a:prstDash val="solid"/>
+                      <a:round/>
+                      <a:headEnd type="none" w="med" len="med"/>
+                      <a:tailEnd type="none" w="med" len="med"/>
+                    </a:lnT>
+                    <a:lnB w="6350" cap="flat" cmpd="sng" algn="ctr">
+                      <a:solidFill>
+                        <a:srgbClr val="E4E6EC"/>
+                      </a:solidFill>
+                      <a:prstDash val="solid"/>
+                      <a:round/>
+                      <a:headEnd type="none" w="med" len="med"/>
+                      <a:tailEnd type="none" w="med" len="med"/>
+                    </a:lnB>
+                    <a:solidFill>
+                      <a:srgbClr val="FFFFFF"/>
+                    </a:solidFill>
+                  </a:tcPr>
+                </a:tc>
+              </a:tr>
+              <a:tr h="530352">
+                <a:tc>
+                  <a:txBody>
+                    <a:bodyPr/>
+                    <a:lstStyle/>
+                    <a:p>
+                      <a:pPr indent="0" marL="0">
+                        <a:buNone/>
+                      </a:pPr>
+                      <a:r>
+                        <a:rPr lang="en-US" sz="1150" b="1" dirty="0">
+                          <a:solidFill>
+                            <a:srgbClr val="1B1D23"/>
+                          </a:solidFill>
+                          <a:latin typeface="Calibri" pitchFamily="34" charset="0"/>
+                          <a:ea typeface="Calibri" pitchFamily="34" charset="-122"/>
+                          <a:cs typeface="Calibri" pitchFamily="34" charset="-120"/>
+                        </a:rPr>
+                        <a:t>Схеми інструментів — валідний JSON Schema</a:t>
+                      </a:r>
+                      <a:endParaRPr lang="en-US" sz="1150" dirty="0">
+                        <a:latin typeface="Calibri" charset="0"/>
+                        <a:ea typeface="Calibri" charset="0"/>
+                        <a:cs typeface="Calibri" charset="0"/>
+                      </a:endParaRPr>
+                    </a:p>
+                  </a:txBody>
+                  <a:tcPr marL="73152" marR="73152" marT="73152" marB="73152" anchor="ctr">
+                    <a:lnL w="6350" cap="flat" cmpd="sng" algn="ctr">
+                      <a:solidFill>
+                        <a:srgbClr val="E4E6EC"/>
+                      </a:solidFill>
+                      <a:prstDash val="solid"/>
+                      <a:round/>
+                      <a:headEnd type="none" w="med" len="med"/>
+                      <a:tailEnd type="none" w="med" len="med"/>
+                    </a:lnL>
+                    <a:lnR w="6350" cap="flat" cmpd="sng" algn="ctr">
+                      <a:solidFill>
+                        <a:srgbClr val="E4E6EC"/>
+                      </a:solidFill>
+                      <a:prstDash val="solid"/>
+                      <a:round/>
+                      <a:headEnd type="none" w="med" len="med"/>
+                      <a:tailEnd type="none" w="med" len="med"/>
+                    </a:lnR>
+                    <a:lnT w="6350" cap="flat" cmpd="sng" algn="ctr">
+                      <a:solidFill>
+                        <a:srgbClr val="E4E6EC"/>
+                      </a:solidFill>
+                      <a:prstDash val="solid"/>
+                      <a:round/>
+                      <a:headEnd type="none" w="med" len="med"/>
+                      <a:tailEnd type="none" w="med" len="med"/>
+                    </a:lnT>
+                    <a:lnB w="6350" cap="flat" cmpd="sng" algn="ctr">
+                      <a:solidFill>
+                        <a:srgbClr val="E4E6EC"/>
+                      </a:solidFill>
+                      <a:prstDash val="solid"/>
+                      <a:round/>
+                      <a:headEnd type="none" w="med" len="med"/>
+                      <a:tailEnd type="none" w="med" len="med"/>
+                    </a:lnB>
+                    <a:solidFill>
+                      <a:srgbClr val="FFFFFF"/>
+                    </a:solidFill>
+                  </a:tcPr>
+                </a:tc>
+                <a:tc>
+                  <a:txBody>
+                    <a:bodyPr/>
+                    <a:lstStyle/>
+                    <a:p>
+                      <a:pPr indent="0" marL="0">
+                        <a:buNone/>
+                      </a:pPr>
+                      <a:r>
+                        <a:rPr lang="en-US" sz="1150" dirty="0">
+                          <a:solidFill>
+                            <a:srgbClr val="1B1D23"/>
+                          </a:solidFill>
+                          <a:latin typeface="Calibri" pitchFamily="34" charset="0"/>
+                          <a:ea typeface="Calibri" pitchFamily="34" charset="-122"/>
+                          <a:cs typeface="Calibri" pitchFamily="34" charset="-120"/>
+                        </a:rPr>
+                        <a:t>зламану схему провайдер відкине вже на проді</a:t>
+                      </a:r>
+                      <a:endParaRPr lang="en-US" sz="1150" dirty="0">
+                        <a:latin typeface="Calibri" charset="0"/>
+                        <a:ea typeface="Calibri" charset="0"/>
+                        <a:cs typeface="Calibri" charset="0"/>
+                      </a:endParaRPr>
+                    </a:p>
+                  </a:txBody>
+                  <a:tcPr marL="73152" marR="73152" marT="73152" marB="73152" anchor="ctr">
+                    <a:lnL w="6350" cap="flat" cmpd="sng" algn="ctr">
+                      <a:solidFill>
+                        <a:srgbClr val="E4E6EC"/>
+                      </a:solidFill>
+                      <a:prstDash val="solid"/>
+                      <a:round/>
+                      <a:headEnd type="none" w="med" len="med"/>
+                      <a:tailEnd type="none" w="med" len="med"/>
+                    </a:lnL>
+                    <a:lnR w="6350" cap="flat" cmpd="sng" algn="ctr">
+                      <a:solidFill>
+                        <a:srgbClr val="E4E6EC"/>
+                      </a:solidFill>
+                      <a:prstDash val="solid"/>
+                      <a:round/>
+                      <a:headEnd type="none" w="med" len="med"/>
+                      <a:tailEnd type="none" w="med" len="med"/>
+                    </a:lnR>
+                    <a:lnT w="6350" cap="flat" cmpd="sng" algn="ctr">
+                      <a:solidFill>
+                        <a:srgbClr val="E4E6EC"/>
+                      </a:solidFill>
+                      <a:prstDash val="solid"/>
+                      <a:round/>
+                      <a:headEnd type="none" w="med" len="med"/>
+                      <a:tailEnd type="none" w="med" len="med"/>
+                    </a:lnT>
+                    <a:lnB w="6350" cap="flat" cmpd="sng" algn="ctr">
+                      <a:solidFill>
+                        <a:srgbClr val="E4E6EC"/>
+                      </a:solidFill>
+                      <a:prstDash val="solid"/>
+                      <a:round/>
+                      <a:headEnd type="none" w="med" len="med"/>
+                      <a:tailEnd type="none" w="med" len="med"/>
+                    </a:lnB>
+                    <a:solidFill>
+                      <a:srgbClr val="FFFFFF"/>
+                    </a:solidFill>
+                  </a:tcPr>
+                </a:tc>
+              </a:tr>
+              <a:tr h="530352">
+                <a:tc>
+                  <a:txBody>
+                    <a:bodyPr/>
+                    <a:lstStyle/>
+                    <a:p>
+                      <a:pPr indent="0" marL="0">
+                        <a:buNone/>
+                      </a:pPr>
+                      <a:r>
+                        <a:rPr lang="en-US" sz="1150" b="1" dirty="0">
+                          <a:solidFill>
+                            <a:srgbClr val="1B1D23"/>
+                          </a:solidFill>
+                          <a:latin typeface="Calibri" pitchFamily="34" charset="0"/>
+                          <a:ea typeface="Calibri" pitchFamily="34" charset="-122"/>
+                          <a:cs typeface="Calibri" pitchFamily="34" charset="-120"/>
+                        </a:rPr>
+                        <a:t>Прайс покриває всі моделі з конфіга</a:t>
+                      </a:r>
+                      <a:endParaRPr lang="en-US" sz="1150" dirty="0">
+                        <a:latin typeface="Calibri" charset="0"/>
+                        <a:ea typeface="Calibri" charset="0"/>
+                        <a:cs typeface="Calibri" charset="0"/>
+                      </a:endParaRPr>
+                    </a:p>
+                  </a:txBody>
+                  <a:tcPr marL="73152" marR="73152" marT="73152" marB="73152" anchor="ctr">
+                    <a:lnL w="6350" cap="flat" cmpd="sng" algn="ctr">
+                      <a:solidFill>
+                        <a:srgbClr val="E4E6EC"/>
+                      </a:solidFill>
+                      <a:prstDash val="solid"/>
+                      <a:round/>
+                      <a:headEnd type="none" w="med" len="med"/>
+                      <a:tailEnd type="none" w="med" len="med"/>
+                    </a:lnL>
+                    <a:lnR w="6350" cap="flat" cmpd="sng" algn="ctr">
+                      <a:solidFill>
+                        <a:srgbClr val="E4E6EC"/>
+                      </a:solidFill>
+                      <a:prstDash val="solid"/>
+                      <a:round/>
+                      <a:headEnd type="none" w="med" len="med"/>
+                      <a:tailEnd type="none" w="med" len="med"/>
+                    </a:lnR>
+                    <a:lnT w="6350" cap="flat" cmpd="sng" algn="ctr">
+                      <a:solidFill>
+                        <a:srgbClr val="E4E6EC"/>
+                      </a:solidFill>
+                      <a:prstDash val="solid"/>
+                      <a:round/>
+                      <a:headEnd type="none" w="med" len="med"/>
+                      <a:tailEnd type="none" w="med" len="med"/>
+                    </a:lnT>
+                    <a:lnB w="6350" cap="flat" cmpd="sng" algn="ctr">
+                      <a:solidFill>
+                        <a:srgbClr val="E4E6EC"/>
+                      </a:solidFill>
+                      <a:prstDash val="solid"/>
+                      <a:round/>
+                      <a:headEnd type="none" w="med" len="med"/>
+                      <a:tailEnd type="none" w="med" len="med"/>
+                    </a:lnB>
+                    <a:solidFill>
+                      <a:srgbClr val="FFFFFF"/>
+                    </a:solidFill>
+                  </a:tcPr>
+                </a:tc>
+                <a:tc>
+                  <a:txBody>
+                    <a:bodyPr/>
+                    <a:lstStyle/>
+                    <a:p>
+                      <a:pPr indent="0" marL="0">
+                        <a:buNone/>
+                      </a:pPr>
+                      <a:r>
+                        <a:rPr lang="en-US" sz="1150" dirty="0">
+                          <a:solidFill>
+                            <a:srgbClr val="1B1D23"/>
+                          </a:solidFill>
+                          <a:latin typeface="Calibri" pitchFamily="34" charset="0"/>
+                          <a:ea typeface="Calibri" pitchFamily="34" charset="-122"/>
+                          <a:cs typeface="Calibri" pitchFamily="34" charset="-120"/>
+                        </a:rPr>
+                        <a:t>інакше cost_usd тихо стає null, і облік бреше (урок 4)</a:t>
+                      </a:r>
+                      <a:endParaRPr lang="en-US" sz="1150" dirty="0">
+                        <a:latin typeface="Calibri" charset="0"/>
+                        <a:ea typeface="Calibri" charset="0"/>
+                        <a:cs typeface="Calibri" charset="0"/>
+                      </a:endParaRPr>
+                    </a:p>
+                  </a:txBody>
+                  <a:tcPr marL="73152" marR="73152" marT="73152" marB="73152" anchor="ctr">
+                    <a:lnL w="6350" cap="flat" cmpd="sng" algn="ctr">
+                      <a:solidFill>
+                        <a:srgbClr val="E4E6EC"/>
+                      </a:solidFill>
+                      <a:prstDash val="solid"/>
+                      <a:round/>
+                      <a:headEnd type="none" w="med" len="med"/>
+                      <a:tailEnd type="none" w="med" len="med"/>
+                    </a:lnL>
+                    <a:lnR w="6350" cap="flat" cmpd="sng" algn="ctr">
+                      <a:solidFill>
+                        <a:srgbClr val="E4E6EC"/>
+                      </a:solidFill>
+                      <a:prstDash val="solid"/>
+                      <a:round/>
+                      <a:headEnd type="none" w="med" len="med"/>
+                      <a:tailEnd type="none" w="med" len="med"/>
+                    </a:lnR>
+                    <a:lnT w="6350" cap="flat" cmpd="sng" algn="ctr">
+                      <a:solidFill>
+                        <a:srgbClr val="E4E6EC"/>
+                      </a:solidFill>
+                      <a:prstDash val="solid"/>
+                      <a:round/>
+                      <a:headEnd type="none" w="med" len="med"/>
+                      <a:tailEnd type="none" w="med" len="med"/>
+                    </a:lnT>
+                    <a:lnB w="6350" cap="flat" cmpd="sng" algn="ctr">
+                      <a:solidFill>
+                        <a:srgbClr val="E4E6EC"/>
+                      </a:solidFill>
+                      <a:prstDash val="solid"/>
+                      <a:round/>
+                      <a:headEnd type="none" w="med" len="med"/>
+                      <a:tailEnd type="none" w="med" len="med"/>
+                    </a:lnB>
+                    <a:solidFill>
+                      <a:srgbClr val="FFFFFF"/>
+                    </a:solidFill>
+                  </a:tcPr>
+                </a:tc>
+              </a:tr>
+              <a:tr h="530352">
+                <a:tc>
+                  <a:txBody>
+                    <a:bodyPr/>
+                    <a:lstStyle/>
+                    <a:p>
+                      <a:pPr indent="0" marL="0">
+                        <a:buNone/>
+                      </a:pPr>
+                      <a:r>
+                        <a:rPr lang="en-US" sz="1150" b="1" dirty="0">
+                          <a:solidFill>
+                            <a:srgbClr val="1B1D23"/>
+                          </a:solidFill>
+                          <a:latin typeface="Calibri" pitchFamily="34" charset="0"/>
+                          <a:ea typeface="Calibri" pitchFamily="34" charset="-122"/>
+                          <a:cs typeface="Calibri" pitchFamily="34" charset="-120"/>
+                        </a:rPr>
+                        <a:t>Моделі запінені, а не alias'и</a:t>
+                      </a:r>
+                      <a:endParaRPr lang="en-US" sz="1150" dirty="0">
+                        <a:latin typeface="Calibri" charset="0"/>
+                        <a:ea typeface="Calibri" charset="0"/>
+                        <a:cs typeface="Calibri" charset="0"/>
+                      </a:endParaRPr>
+                    </a:p>
+                  </a:txBody>
+                  <a:tcPr marL="73152" marR="73152" marT="73152" marB="73152" anchor="ctr">
+                    <a:lnL w="6350" cap="flat" cmpd="sng" algn="ctr">
+                      <a:solidFill>
+                        <a:srgbClr val="E4E6EC"/>
+                      </a:solidFill>
+                      <a:prstDash val="solid"/>
+                      <a:round/>
+                      <a:headEnd type="none" w="med" len="med"/>
+                      <a:tailEnd type="none" w="med" len="med"/>
+                    </a:lnL>
+                    <a:lnR w="6350" cap="flat" cmpd="sng" algn="ctr">
+                      <a:solidFill>
+                        <a:srgbClr val="E4E6EC"/>
+                      </a:solidFill>
+                      <a:prstDash val="solid"/>
+                      <a:round/>
+                      <a:headEnd type="none" w="med" len="med"/>
+                      <a:tailEnd type="none" w="med" len="med"/>
+                    </a:lnR>
+                    <a:lnT w="6350" cap="flat" cmpd="sng" algn="ctr">
+                      <a:solidFill>
+                        <a:srgbClr val="E4E6EC"/>
+                      </a:solidFill>
+                      <a:prstDash val="solid"/>
+                      <a:round/>
+                      <a:headEnd type="none" w="med" len="med"/>
+                      <a:tailEnd type="none" w="med" len="med"/>
+                    </a:lnT>
+                    <a:lnB w="6350" cap="flat" cmpd="sng" algn="ctr">
+                      <a:solidFill>
+                        <a:srgbClr val="E4E6EC"/>
+                      </a:solidFill>
+                      <a:prstDash val="solid"/>
+                      <a:round/>
+                      <a:headEnd type="none" w="med" len="med"/>
+                      <a:tailEnd type="none" w="med" len="med"/>
+                    </a:lnB>
+                    <a:solidFill>
+                      <a:srgbClr val="FFFFFF"/>
+                    </a:solidFill>
+                  </a:tcPr>
+                </a:tc>
+                <a:tc>
+                  <a:txBody>
+                    <a:bodyPr/>
+                    <a:lstStyle/>
+                    <a:p>
+                      <a:pPr indent="0" marL="0">
+                        <a:buNone/>
+                      </a:pPr>
+                      <a:r>
+                        <a:rPr lang="en-US" sz="1150" dirty="0">
+                          <a:solidFill>
+                            <a:srgbClr val="1B1D23"/>
+                          </a:solidFill>
+                          <a:latin typeface="Calibri" pitchFamily="34" charset="0"/>
+                          <a:ea typeface="Calibri" pitchFamily="34" charset="-122"/>
+                          <a:cs typeface="Calibri" pitchFamily="34" charset="-120"/>
+                        </a:rPr>
+                        <a:t>«регресія без коміта» від оновлення провайдера (урок 3)</a:t>
+                      </a:r>
+                      <a:endParaRPr lang="en-US" sz="1150" dirty="0">
+                        <a:latin typeface="Calibri" charset="0"/>
+                        <a:ea typeface="Calibri" charset="0"/>
+                        <a:cs typeface="Calibri" charset="0"/>
+                      </a:endParaRPr>
+                    </a:p>
+                  </a:txBody>
+                  <a:tcPr marL="73152" marR="73152" marT="73152" marB="73152" anchor="ctr">
+                    <a:lnL w="6350" cap="flat" cmpd="sng" algn="ctr">
+                      <a:solidFill>
+                        <a:srgbClr val="E4E6EC"/>
+                      </a:solidFill>
+                      <a:prstDash val="solid"/>
+                      <a:round/>
+                      <a:headEnd type="none" w="med" len="med"/>
+                      <a:tailEnd type="none" w="med" len="med"/>
+                    </a:lnL>
+                    <a:lnR w="6350" cap="flat" cmpd="sng" algn="ctr">
+                      <a:solidFill>
+                        <a:srgbClr val="E4E6EC"/>
+                      </a:solidFill>
+                      <a:prstDash val="solid"/>
+                      <a:round/>
+                      <a:headEnd type="none" w="med" len="med"/>
+                      <a:tailEnd type="none" w="med" len="med"/>
+                    </a:lnR>
+                    <a:lnT w="6350" cap="flat" cmpd="sng" algn="ctr">
+                      <a:solidFill>
+                        <a:srgbClr val="E4E6EC"/>
+                      </a:solidFill>
+                      <a:prstDash val="solid"/>
+                      <a:round/>
+                      <a:headEnd type="none" w="med" len="med"/>
+                      <a:tailEnd type="none" w="med" len="med"/>
+                    </a:lnT>
+                    <a:lnB w="6350" cap="flat" cmpd="sng" algn="ctr">
+                      <a:solidFill>
+                        <a:srgbClr val="E4E6EC"/>
+                      </a:solidFill>
+                      <a:prstDash val="solid"/>
+                      <a:round/>
+                      <a:headEnd type="none" w="med" len="med"/>
+                      <a:tailEnd type="none" w="med" len="med"/>
+                    </a:lnB>
+                    <a:solidFill>
+                      <a:srgbClr val="FFFFFF"/>
+                    </a:solidFill>
+                  </a:tcPr>
+                </a:tc>
+              </a:tr>
+              <a:tr h="530352">
+                <a:tc>
+                  <a:txBody>
+                    <a:bodyPr/>
+                    <a:lstStyle/>
+                    <a:p>
+                      <a:pPr indent="0" marL="0">
+                        <a:buNone/>
+                      </a:pPr>
+                      <a:r>
+                        <a:rPr lang="en-US" sz="1150" b="1" dirty="0">
+                          <a:solidFill>
+                            <a:srgbClr val="B3261E"/>
+                          </a:solidFill>
+                          <a:latin typeface="Calibri" pitchFamily="34" charset="0"/>
+                          <a:ea typeface="Calibri" pitchFamily="34" charset="-122"/>
+                          <a:cs typeface="Calibri" pitchFamily="34" charset="-120"/>
+                        </a:rPr>
+                        <a:t>У діфі немає ключів і секретів</a:t>
+                      </a:r>
+                      <a:endParaRPr lang="en-US" sz="1150" dirty="0">
+                        <a:latin typeface="Calibri" charset="0"/>
+                        <a:ea typeface="Calibri" charset="0"/>
+                        <a:cs typeface="Calibri" charset="0"/>
+                      </a:endParaRPr>
+                    </a:p>
+                  </a:txBody>
+                  <a:tcPr marL="73152" marR="73152" marT="73152" marB="73152" anchor="ctr">
+                    <a:lnL w="6350" cap="flat" cmpd="sng" algn="ctr">
+                      <a:solidFill>
+                        <a:srgbClr val="E4E6EC"/>
+                      </a:solidFill>
+                      <a:prstDash val="solid"/>
+                      <a:round/>
+                      <a:headEnd type="none" w="med" len="med"/>
+                      <a:tailEnd type="none" w="med" len="med"/>
+                    </a:lnL>
+                    <a:lnR w="6350" cap="flat" cmpd="sng" algn="ctr">
+                      <a:solidFill>
+                        <a:srgbClr val="E4E6EC"/>
+                      </a:solidFill>
+                      <a:prstDash val="solid"/>
+                      <a:round/>
+                      <a:headEnd type="none" w="med" len="med"/>
+                      <a:tailEnd type="none" w="med" len="med"/>
+                    </a:lnR>
+                    <a:lnT w="6350" cap="flat" cmpd="sng" algn="ctr">
+                      <a:solidFill>
+                        <a:srgbClr val="E4E6EC"/>
+                      </a:solidFill>
+                      <a:prstDash val="solid"/>
+                      <a:round/>
+                      <a:headEnd type="none" w="med" len="med"/>
+                      <a:tailEnd type="none" w="med" len="med"/>
+                    </a:lnT>
+                    <a:lnB w="6350" cap="flat" cmpd="sng" algn="ctr">
+                      <a:solidFill>
+                        <a:srgbClr val="E4E6EC"/>
+                      </a:solidFill>
+                      <a:prstDash val="solid"/>
+                      <a:round/>
+                      <a:headEnd type="none" w="med" len="med"/>
+                      <a:tailEnd type="none" w="med" len="med"/>
+                    </a:lnB>
+                    <a:solidFill>
+                      <a:srgbClr val="F9E9E8"/>
+                    </a:solidFill>
+                  </a:tcPr>
+                </a:tc>
+                <a:tc>
+                  <a:txBody>
+                    <a:bodyPr/>
+                    <a:lstStyle/>
+                    <a:p>
+                      <a:pPr indent="0" marL="0">
+                        <a:buNone/>
+                      </a:pPr>
+                      <a:r>
+                        <a:rPr lang="en-US" sz="1150" dirty="0">
+                          <a:solidFill>
+                            <a:srgbClr val="1B1D23"/>
+                          </a:solidFill>
+                          <a:latin typeface="Calibri" pitchFamily="34" charset="0"/>
+                          <a:ea typeface="Calibri" pitchFamily="34" charset="-122"/>
+                          <a:cs typeface="Calibri" pitchFamily="34" charset="-120"/>
+                        </a:rPr>
+                        <a:t>найдорожча помилка з найкоротшим фіксом</a:t>
+                      </a:r>
+                      <a:endParaRPr lang="en-US" sz="1150" dirty="0">
+                        <a:latin typeface="Calibri" charset="0"/>
+                        <a:ea typeface="Calibri" charset="0"/>
+                        <a:cs typeface="Calibri" charset="0"/>
+                      </a:endParaRPr>
+                    </a:p>
+                  </a:txBody>
+                  <a:tcPr marL="73152" marR="73152" marT="73152" marB="73152" anchor="ctr">
+                    <a:lnL w="6350" cap="flat" cmpd="sng" algn="ctr">
+                      <a:solidFill>
+                        <a:srgbClr val="E4E6EC"/>
+                      </a:solidFill>
+                      <a:prstDash val="solid"/>
+                      <a:round/>
+                      <a:headEnd type="none" w="med" len="med"/>
+                      <a:tailEnd type="none" w="med" len="med"/>
+                    </a:lnL>
+                    <a:lnR w="6350" cap="flat" cmpd="sng" algn="ctr">
+                      <a:solidFill>
+                        <a:srgbClr val="E4E6EC"/>
+                      </a:solidFill>
+                      <a:prstDash val="solid"/>
+                      <a:round/>
+                      <a:headEnd type="none" w="med" len="med"/>
+                      <a:tailEnd type="none" w="med" len="med"/>
+                    </a:lnR>
+                    <a:lnT w="6350" cap="flat" cmpd="sng" algn="ctr">
+                      <a:solidFill>
+                        <a:srgbClr val="E4E6EC"/>
+                      </a:solidFill>
+                      <a:prstDash val="solid"/>
+                      <a:round/>
+                      <a:headEnd type="none" w="med" len="med"/>
+                      <a:tailEnd type="none" w="med" len="med"/>
+                    </a:lnT>
+                    <a:lnB w="6350" cap="flat" cmpd="sng" algn="ctr">
+                      <a:solidFill>
+                        <a:srgbClr val="E4E6EC"/>
+                      </a:solidFill>
+                      <a:prstDash val="solid"/>
+                      <a:round/>
+                      <a:headEnd type="none" w="med" len="med"/>
+                      <a:tailEnd type="none" w="med" len="med"/>
+                    </a:lnB>
+                    <a:solidFill>
+                      <a:srgbClr val="F9E9E8"/>
+                    </a:solidFill>
+                  </a:tcPr>
+                </a:tc>
+              </a:tr>
+            </a:tbl>
+          </a:graphicData>
+        </a:graphic>
+      </p:graphicFrame>
+      <p:sp>
+        <p:nvSpPr>
+          <p:cNvPr id="9" name="Shape 6"/>
+          <p:cNvSpPr/>
+          <p:nvPr/>
+        </p:nvSpPr>
+        <p:spPr>
+          <a:xfrm>
+            <a:off x="566928" y="5074920"/>
+            <a:ext cx="11064240" cy="1005840"/>
+          </a:xfrm>
+          <a:prstGeom prst="roundRect">
+            <a:avLst>
+              <a:gd name="adj" fmla="val 10909"/>
+            </a:avLst>
+          </a:prstGeom>
+          <a:solidFill>
+            <a:srgbClr val="E9F3EE"/>
+          </a:solidFill>
+          <a:ln/>
+        </p:spPr>
+      </p:sp>
+      <p:sp>
+        <p:nvSpPr>
+          <p:cNvPr id="10" name="Text 7"/>
+          <p:cNvSpPr/>
+          <p:nvPr/>
+        </p:nvSpPr>
+        <p:spPr>
+          <a:xfrm>
+            <a:off x="786384" y="5202936"/>
+            <a:ext cx="10625328" cy="219456"/>
+          </a:xfrm>
+          <a:prstGeom prst="rect">
+            <a:avLst/>
+          </a:prstGeom>
+          <a:noFill/>
+          <a:ln/>
+        </p:spPr>
+        <p:txBody>
+          <a:bodyPr wrap="square" lIns="0" tIns="0" rIns="0" bIns="0" rtlCol="0" anchor="ctr"/>
+          <a:lstStyle/>
+          <a:p>
+            <a:pPr indent="0" marL="0">
+              <a:buNone/>
+            </a:pPr>
+            <a:r>
+              <a:rPr lang="en-US" sz="950" b="1" spc="150" kern="0" dirty="0">
+                <a:solidFill>
+                  <a:srgbClr val="177245"/>
                 </a:solidFill>
                 <a:latin typeface="Courier New" pitchFamily="34" charset="0"/>
                 <a:ea typeface="Courier New" pitchFamily="34" charset="-122"/>
                 <a:cs typeface="Courier New" pitchFamily="34" charset="-120"/>
               </a:rPr>
-              <a:t>SupportGW · LLMOps Bootcamp · Урок 11 з 12</a:t>
-            </a:r>
-            <a:endParaRPr lang="en-US" sz="850" dirty="0"/>
-          </a:p>
-        </p:txBody>
-      </p:sp>
-      <p:sp>
-        <p:nvSpPr>
-          <p:cNvPr id="9" name="Shape 7"/>
-          <p:cNvSpPr/>
-          <p:nvPr/>
-        </p:nvSpPr>
-        <p:spPr>
-          <a:xfrm>
-            <a:off x="1481328" y="2103120"/>
-            <a:ext cx="2834640" cy="777240"/>
-          </a:xfrm>
-          <a:prstGeom prst="roundRect">
-            <a:avLst>
-              <a:gd name="adj" fmla="val 11765"/>
-            </a:avLst>
-          </a:prstGeom>
-          <a:solidFill>
-            <a:srgbClr val="E9F3EE"/>
-          </a:solidFill>
-          <a:ln/>
-        </p:spPr>
-      </p:sp>
-      <p:sp>
-        <p:nvSpPr>
-          <p:cNvPr id="10" name="Text 8"/>
-          <p:cNvSpPr/>
-          <p:nvPr/>
-        </p:nvSpPr>
-        <p:spPr>
-          <a:xfrm>
-            <a:off x="1536192" y="2103120"/>
-            <a:ext cx="2724912" cy="777240"/>
-          </a:xfrm>
-          <a:prstGeom prst="rect">
-            <a:avLst/>
-          </a:prstGeom>
-          <a:noFill/>
-          <a:ln/>
-        </p:spPr>
-        <p:txBody>
-          <a:bodyPr wrap="square" lIns="0" tIns="0" rIns="0" bIns="0" rtlCol="0" anchor="ctr"/>
-          <a:lstStyle/>
-          <a:p>
-            <a:pPr algn="ctr" indent="0" marL="0">
-              <a:buNone/>
-            </a:pPr>
-            <a:r>
-              <a:rPr lang="en-US" sz="1150" b="1" dirty="0">
-                <a:solidFill>
-                  <a:srgbClr val="177245"/>
-                </a:solidFill>
-                <a:latin typeface="Courier New" pitchFamily="34" charset="0"/>
-                <a:ea typeface="Courier New" pitchFamily="34" charset="-122"/>
-                <a:cs typeface="Courier New" pitchFamily="34" charset="-120"/>
-              </a:rPr>
-              <a:t>90% — стара версія</a:t>
-            </a:r>
-            <a:endParaRPr lang="en-US" sz="1150" dirty="0"/>
-          </a:p>
-        </p:txBody>
-      </p:sp>
-      <p:sp>
-        <p:nvSpPr>
-          <p:cNvPr id="11" name="Shape 9"/>
-          <p:cNvSpPr/>
-          <p:nvPr/>
-        </p:nvSpPr>
-        <p:spPr>
-          <a:xfrm>
-            <a:off x="4407408" y="2491740"/>
-            <a:ext cx="164592" cy="0"/>
-          </a:xfrm>
-          <a:prstGeom prst="line">
-            <a:avLst/>
-          </a:prstGeom>
-          <a:noFill/>
-          <a:ln w="15875">
-            <a:solidFill>
-              <a:srgbClr val="8A90A0"/>
-            </a:solidFill>
-            <a:prstDash val="solid"/>
-          </a:ln>
-        </p:spPr>
-      </p:sp>
-      <p:sp>
-        <p:nvSpPr>
-          <p:cNvPr id="12" name="Shape 10"/>
-          <p:cNvSpPr/>
-          <p:nvPr/>
-        </p:nvSpPr>
-        <p:spPr>
-          <a:xfrm rot="5400000">
-            <a:off x="4535424" y="2423160"/>
-            <a:ext cx="146304" cy="137160"/>
-          </a:xfrm>
-          <a:prstGeom prst="triangle">
-            <a:avLst/>
-          </a:prstGeom>
-          <a:solidFill>
-            <a:srgbClr val="8A90A0"/>
-          </a:solidFill>
-          <a:ln/>
-        </p:spPr>
-      </p:sp>
-      <p:sp>
-        <p:nvSpPr>
-          <p:cNvPr id="13" name="Shape 11"/>
-          <p:cNvSpPr/>
-          <p:nvPr/>
-        </p:nvSpPr>
-        <p:spPr>
-          <a:xfrm>
-            <a:off x="4773168" y="2103120"/>
-            <a:ext cx="2834640" cy="777240"/>
-          </a:xfrm>
-          <a:prstGeom prst="roundRect">
-            <a:avLst>
-              <a:gd name="adj" fmla="val 11765"/>
-            </a:avLst>
-          </a:prstGeom>
-          <a:solidFill>
-            <a:srgbClr val="F8F0E2"/>
-          </a:solidFill>
-          <a:ln/>
-        </p:spPr>
-      </p:sp>
-      <p:sp>
-        <p:nvSpPr>
-          <p:cNvPr id="14" name="Text 12"/>
-          <p:cNvSpPr/>
-          <p:nvPr/>
-        </p:nvSpPr>
-        <p:spPr>
-          <a:xfrm>
-            <a:off x="4828032" y="2103120"/>
-            <a:ext cx="2724912" cy="777240"/>
-          </a:xfrm>
-          <a:prstGeom prst="rect">
-            <a:avLst/>
-          </a:prstGeom>
-          <a:noFill/>
-          <a:ln/>
-        </p:spPr>
-        <p:txBody>
-          <a:bodyPr wrap="square" lIns="0" tIns="0" rIns="0" bIns="0" rtlCol="0" anchor="ctr"/>
-          <a:lstStyle/>
-          <a:p>
-            <a:pPr algn="ctr" indent="0" marL="0">
-              <a:buNone/>
-            </a:pPr>
-            <a:r>
-              <a:rPr lang="en-US" sz="1150" b="1" dirty="0">
-                <a:solidFill>
-                  <a:srgbClr val="9A5B12"/>
-                </a:solidFill>
-                <a:latin typeface="Courier New" pitchFamily="34" charset="0"/>
-                <a:ea typeface="Courier New" pitchFamily="34" charset="-122"/>
-                <a:cs typeface="Courier New" pitchFamily="34" charset="-120"/>
-              </a:rPr>
-              <a:t>10% — нова</a:t>
-            </a:r>
-            <a:endParaRPr lang="en-US" sz="1150" dirty="0"/>
-          </a:p>
-        </p:txBody>
-      </p:sp>
-      <p:sp>
-        <p:nvSpPr>
-          <p:cNvPr id="15" name="Shape 13"/>
-          <p:cNvSpPr/>
-          <p:nvPr/>
-        </p:nvSpPr>
-        <p:spPr>
-          <a:xfrm>
-            <a:off x="7699248" y="2491740"/>
-            <a:ext cx="164592" cy="0"/>
-          </a:xfrm>
-          <a:prstGeom prst="line">
-            <a:avLst/>
-          </a:prstGeom>
-          <a:noFill/>
-          <a:ln w="15875">
-            <a:solidFill>
-              <a:srgbClr val="8A90A0"/>
-            </a:solidFill>
-            <a:prstDash val="solid"/>
-          </a:ln>
-        </p:spPr>
-      </p:sp>
-      <p:sp>
-        <p:nvSpPr>
-          <p:cNvPr id="16" name="Shape 14"/>
-          <p:cNvSpPr/>
-          <p:nvPr/>
-        </p:nvSpPr>
-        <p:spPr>
-          <a:xfrm rot="5400000">
-            <a:off x="7827264" y="2423160"/>
-            <a:ext cx="146304" cy="137160"/>
-          </a:xfrm>
-          <a:prstGeom prst="triangle">
-            <a:avLst/>
-          </a:prstGeom>
-          <a:solidFill>
-            <a:srgbClr val="8A90A0"/>
-          </a:solidFill>
-          <a:ln/>
-        </p:spPr>
-      </p:sp>
-      <p:sp>
-        <p:nvSpPr>
-          <p:cNvPr id="17" name="Shape 15"/>
-          <p:cNvSpPr/>
-          <p:nvPr/>
-        </p:nvSpPr>
-        <p:spPr>
-          <a:xfrm>
-            <a:off x="8065008" y="2103120"/>
-            <a:ext cx="2834640" cy="777240"/>
-          </a:xfrm>
-          <a:prstGeom prst="roundRect">
-            <a:avLst>
-              <a:gd name="adj" fmla="val 11765"/>
-            </a:avLst>
-          </a:prstGeom>
-          <a:solidFill>
-            <a:srgbClr val="ECEBFB"/>
-          </a:solidFill>
-          <a:ln/>
-        </p:spPr>
-      </p:sp>
-      <p:sp>
-        <p:nvSpPr>
-          <p:cNvPr id="18" name="Text 16"/>
-          <p:cNvSpPr/>
-          <p:nvPr/>
-        </p:nvSpPr>
-        <p:spPr>
-          <a:xfrm>
-            <a:off x="8119872" y="2103120"/>
-            <a:ext cx="2724912" cy="777240"/>
-          </a:xfrm>
-          <a:prstGeom prst="rect">
-            <a:avLst/>
-          </a:prstGeom>
-          <a:noFill/>
-          <a:ln/>
-        </p:spPr>
-        <p:txBody>
-          <a:bodyPr wrap="square" lIns="0" tIns="0" rIns="0" bIns="0" rtlCol="0" anchor="ctr"/>
-          <a:lstStyle/>
-          <a:p>
-            <a:pPr algn="ctr" indent="0" marL="0">
-              <a:buNone/>
-            </a:pPr>
-            <a:r>
-              <a:rPr lang="en-US" sz="1150" b="1" dirty="0">
-                <a:solidFill>
-                  <a:srgbClr val="4038C4"/>
-                </a:solidFill>
-                <a:latin typeface="Courier New" pitchFamily="34" charset="0"/>
-                <a:ea typeface="Courier New" pitchFamily="34" charset="-122"/>
-                <a:cs typeface="Courier New" pitchFamily="34" charset="-120"/>
-              </a:rPr>
-              <a:t>порівняння метрик</a:t>
-            </a:r>
-            <a:endParaRPr lang="en-US" sz="1150" dirty="0"/>
-          </a:p>
-        </p:txBody>
-      </p:sp>
-      <p:sp>
-        <p:nvSpPr>
-          <p:cNvPr id="19" name="Shape 17"/>
-          <p:cNvSpPr/>
-          <p:nvPr/>
-        </p:nvSpPr>
-        <p:spPr>
-          <a:xfrm>
-            <a:off x="566928" y="3291840"/>
-            <a:ext cx="5349240" cy="1554480"/>
-          </a:xfrm>
-          <a:prstGeom prst="roundRect">
-            <a:avLst>
-              <a:gd name="adj" fmla="val 7059"/>
-            </a:avLst>
-          </a:prstGeom>
-          <a:solidFill>
-            <a:srgbClr val="FFFFFF"/>
-          </a:solidFill>
-          <a:ln w="12700">
-            <a:solidFill>
-              <a:srgbClr val="E4E6EC"/>
-            </a:solidFill>
-            <a:prstDash val="solid"/>
-          </a:ln>
-        </p:spPr>
-      </p:sp>
-      <p:sp>
-        <p:nvSpPr>
-          <p:cNvPr id="20" name="Text 18"/>
-          <p:cNvSpPr/>
-          <p:nvPr/>
-        </p:nvSpPr>
-        <p:spPr>
-          <a:xfrm>
-            <a:off x="768096" y="3447288"/>
-            <a:ext cx="4946904" cy="438912"/>
-          </a:xfrm>
-          <a:prstGeom prst="rect">
-            <a:avLst/>
-          </a:prstGeom>
-          <a:noFill/>
-          <a:ln/>
-        </p:spPr>
-        <p:txBody>
-          <a:bodyPr wrap="square" lIns="0" tIns="0" rIns="0" bIns="0" rtlCol="0" anchor="ctr"/>
-          <a:lstStyle/>
-          <a:p>
-            <a:pPr indent="0" marL="0">
-              <a:buNone/>
-            </a:pPr>
-            <a:r>
-              <a:rPr lang="en-US" sz="1450" b="1" dirty="0">
+              <a:t>ПОРЯДОК ЯК У ПІРАМІДІ ТЕСТІВ</a:t>
+            </a:r>
+            <a:endParaRPr lang="en-US" sz="950" dirty="0"/>
+          </a:p>
+        </p:txBody>
+      </p:sp>
+      <p:sp>
+        <p:nvSpPr>
+          <p:cNvPr id="11" name="Text 8"/>
+          <p:cNvSpPr/>
+          <p:nvPr/>
+        </p:nvSpPr>
+        <p:spPr>
+          <a:xfrm>
+            <a:off x="786384" y="5458968"/>
+            <a:ext cx="10625328" cy="493776"/>
+          </a:xfrm>
+          <a:prstGeom prst="rect">
+            <a:avLst/>
+          </a:prstGeom>
+          <a:noFill/>
+          <a:ln/>
+        </p:spPr>
+        <p:txBody>
+          <a:bodyPr wrap="square" lIns="0" tIns="0" rIns="0" bIns="0" rtlCol="0" anchor="ctr"/>
+          <a:lstStyle/>
+          <a:p>
+            <a:pPr indent="0" marL="0">
+              <a:buNone/>
+            </a:pPr>
+            <a:r>
+              <a:rPr lang="en-US" sz="1300" dirty="0">
                 <a:solidFill>
                   <a:srgbClr val="1B1D23"/>
                 </a:solidFill>
@@ -6510,207 +7200,7 @@
                 <a:ea typeface="Calibri" pitchFamily="34" charset="-122"/>
                 <a:cs typeface="Calibri" pitchFamily="34" charset="-120"/>
               </a:rPr>
-              <a:t>Композиція, а не новий механізм</a:t>
-            </a:r>
-            <a:endParaRPr lang="en-US" sz="1450" dirty="0"/>
-          </a:p>
-        </p:txBody>
-      </p:sp>
-      <p:sp>
-        <p:nvSpPr>
-          <p:cNvPr id="21" name="Text 19"/>
-          <p:cNvSpPr/>
-          <p:nvPr/>
-        </p:nvSpPr>
-        <p:spPr>
-          <a:xfrm>
-            <a:off x="768096" y="3977640"/>
-            <a:ext cx="4946904" cy="713232"/>
-          </a:xfrm>
-          <a:prstGeom prst="rect">
-            <a:avLst/>
-          </a:prstGeom>
-          <a:noFill/>
-          <a:ln/>
-        </p:spPr>
-        <p:txBody>
-          <a:bodyPr wrap="square" lIns="0" tIns="0" rIns="0" bIns="0" rtlCol="0" anchor="t"/>
-          <a:lstStyle/>
-          <a:p>
-            <a:pPr indent="0" marL="0">
-              <a:buNone/>
-            </a:pPr>
-            <a:r>
-              <a:rPr lang="en-US" sz="1200" dirty="0">
-                <a:solidFill>
-                  <a:srgbClr val="565C6B"/>
-                </a:solidFill>
-                <a:latin typeface="Calibri" pitchFamily="34" charset="0"/>
-                <a:ea typeface="Calibri" pitchFamily="34" charset="-122"/>
-                <a:cs typeface="Calibri" pitchFamily="34" charset="-120"/>
-              </a:rPr>
-              <a:t>routing (урок 3) + реєстр версій (урок 2) + лог (урок 1) — усе вже є</a:t>
-            </a:r>
-            <a:endParaRPr lang="en-US" sz="1200" dirty="0"/>
-          </a:p>
-        </p:txBody>
-      </p:sp>
-      <p:sp>
-        <p:nvSpPr>
-          <p:cNvPr id="22" name="Shape 20"/>
-          <p:cNvSpPr/>
-          <p:nvPr/>
-        </p:nvSpPr>
-        <p:spPr>
-          <a:xfrm>
-            <a:off x="6281928" y="3291840"/>
-            <a:ext cx="5349240" cy="1554480"/>
-          </a:xfrm>
-          <a:prstGeom prst="roundRect">
-            <a:avLst>
-              <a:gd name="adj" fmla="val 7059"/>
-            </a:avLst>
-          </a:prstGeom>
-          <a:solidFill>
-            <a:srgbClr val="ECEBFB"/>
-          </a:solidFill>
-          <a:ln/>
-        </p:spPr>
-      </p:sp>
-      <p:sp>
-        <p:nvSpPr>
-          <p:cNvPr id="23" name="Text 21"/>
-          <p:cNvSpPr/>
-          <p:nvPr/>
-        </p:nvSpPr>
-        <p:spPr>
-          <a:xfrm>
-            <a:off x="6483096" y="3447288"/>
-            <a:ext cx="4946904" cy="438912"/>
-          </a:xfrm>
-          <a:prstGeom prst="rect">
-            <a:avLst/>
-          </a:prstGeom>
-          <a:noFill/>
-          <a:ln/>
-        </p:spPr>
-        <p:txBody>
-          <a:bodyPr wrap="square" lIns="0" tIns="0" rIns="0" bIns="0" rtlCol="0" anchor="ctr"/>
-          <a:lstStyle/>
-          <a:p>
-            <a:pPr indent="0" marL="0">
-              <a:buNone/>
-            </a:pPr>
-            <a:r>
-              <a:rPr lang="en-US" sz="1450" b="1" dirty="0">
-                <a:solidFill>
-                  <a:srgbClr val="4038C4"/>
-                </a:solidFill>
-                <a:latin typeface="Calibri" pitchFamily="34" charset="0"/>
-                <a:ea typeface="Calibri" pitchFamily="34" charset="-122"/>
-                <a:cs typeface="Calibri" pitchFamily="34" charset="-120"/>
-              </a:rPr>
-              <a:t>Ділити за користувачем</a:t>
-            </a:r>
-            <a:endParaRPr lang="en-US" sz="1450" dirty="0"/>
-          </a:p>
-        </p:txBody>
-      </p:sp>
-      <p:sp>
-        <p:nvSpPr>
-          <p:cNvPr id="24" name="Text 22"/>
-          <p:cNvSpPr/>
-          <p:nvPr/>
-        </p:nvSpPr>
-        <p:spPr>
-          <a:xfrm>
-            <a:off x="6483096" y="3977640"/>
-            <a:ext cx="4946904" cy="713232"/>
-          </a:xfrm>
-          <a:prstGeom prst="rect">
-            <a:avLst/>
-          </a:prstGeom>
-          <a:noFill/>
-          <a:ln/>
-        </p:spPr>
-        <p:txBody>
-          <a:bodyPr wrap="square" lIns="0" tIns="0" rIns="0" bIns="0" rtlCol="0" anchor="t"/>
-          <a:lstStyle/>
-          <a:p>
-            <a:pPr indent="0" marL="0">
-              <a:buNone/>
-            </a:pPr>
-            <a:r>
-              <a:rPr lang="en-US" sz="1200" dirty="0">
-                <a:solidFill>
-                  <a:srgbClr val="1B1D23"/>
-                </a:solidFill>
-                <a:latin typeface="Calibri" pitchFamily="34" charset="0"/>
-                <a:ea typeface="Calibri" pitchFamily="34" charset="-122"/>
-                <a:cs typeface="Calibri" pitchFamily="34" charset="-120"/>
-              </a:rPr>
-              <a:t>той самий стабільний вибір за ключем, що й для A/B промптів</a:t>
-            </a:r>
-            <a:endParaRPr lang="en-US" sz="1200" dirty="0"/>
-          </a:p>
-        </p:txBody>
-      </p:sp>
-      <p:sp>
-        <p:nvSpPr>
-          <p:cNvPr id="25" name="Shape 23"/>
-          <p:cNvSpPr/>
-          <p:nvPr/>
-        </p:nvSpPr>
-        <p:spPr>
-          <a:xfrm>
-            <a:off x="566928" y="4983480"/>
-            <a:ext cx="11064240" cy="868680"/>
-          </a:xfrm>
-          <a:prstGeom prst="roundRect">
-            <a:avLst>
-              <a:gd name="adj" fmla="val 12632"/>
-            </a:avLst>
-          </a:prstGeom>
-          <a:solidFill>
-            <a:srgbClr val="F8F0E2"/>
-          </a:solidFill>
-          <a:ln/>
-        </p:spPr>
-      </p:sp>
-      <p:sp>
-        <p:nvSpPr>
-          <p:cNvPr id="26" name="Text 24"/>
-          <p:cNvSpPr/>
-          <p:nvPr/>
-        </p:nvSpPr>
-        <p:spPr>
-          <a:xfrm>
-            <a:off x="786384" y="5129784"/>
-            <a:ext cx="10625328" cy="576072"/>
-          </a:xfrm>
-          <a:prstGeom prst="rect">
-            <a:avLst/>
-          </a:prstGeom>
-          <a:noFill/>
-          <a:ln/>
-        </p:spPr>
-        <p:txBody>
-          <a:bodyPr wrap="square" lIns="0" tIns="0" rIns="0" bIns="0" rtlCol="0" anchor="ctr"/>
-          <a:lstStyle/>
-          <a:p>
-            <a:pPr indent="0" marL="0">
-              <a:buNone/>
-            </a:pPr>
-            <a:r>
-              <a:rPr lang="en-US" sz="1300" dirty="0">
-                <a:solidFill>
-                  <a:srgbClr val="1B1D23"/>
-                </a:solidFill>
-                <a:latin typeface="Calibri" pitchFamily="34" charset="0"/>
-                <a:ea typeface="Calibri" pitchFamily="34" charset="-122"/>
-                <a:cs typeface="Calibri" pitchFamily="34" charset="-120"/>
-              </a:rPr>
-              <a:t>Canary без заздалегідь названої метрики порівняння — це просто повільніший спосіб викотити зміну.</a:t>
+              <a:t>Найдешевше — механічні перевірки конфігів і схем, дорожче — eval-прогін зі стеком, найдорожче — модельні перевірки з реальним ключем. У цьому порядку 80% поломок ловляться за секунди, не піднімаючи жодного контейнера.</a:t>
             </a:r>
             <a:endParaRPr lang="en-US" sz="1300" dirty="0"/>
           </a:p>
@@ -6829,7 +7319,7 @@
                 <a:ea typeface="Courier New" pitchFamily="34" charset="-122"/>
                 <a:cs typeface="Courier New" pitchFamily="34" charset="-120"/>
               </a:rPr>
-              <a:t>09</a:t>
+              <a:t>08</a:t>
             </a:r>
             <a:endParaRPr lang="en-US" sz="2600" dirty="0"/>
           </a:p>
@@ -6868,7 +7358,7 @@
                 <a:ea typeface="Calibri" pitchFamily="34" charset="-122"/>
                 <a:cs typeface="Calibri" pitchFamily="34" charset="-120"/>
               </a:rPr>
-              <a:t>Rollback-критерії пишуться до пожежі</a:t>
+              <a:t>Canary: частка трафіку замість усього</a:t>
             </a:r>
             <a:endParaRPr lang="en-US" sz="2500" dirty="0"/>
           </a:p>
@@ -6937,64 +7427,64 @@
       </p:sp>
       <p:sp>
         <p:nvSpPr>
-          <p:cNvPr id="6" name="Text 4"/>
-          <p:cNvSpPr/>
-          <p:nvPr/>
-        </p:nvSpPr>
-        <p:spPr>
-          <a:xfrm>
-            <a:off x="566928" y="6455664"/>
-            <a:ext cx="5486400" cy="274320"/>
-          </a:xfrm>
-          <a:prstGeom prst="rect">
-            <a:avLst/>
-          </a:prstGeom>
-          <a:noFill/>
-          <a:ln/>
-        </p:spPr>
-        <p:txBody>
-          <a:bodyPr wrap="square" lIns="0" tIns="0" rIns="0" bIns="0" rtlCol="0" anchor="ctr"/>
-          <a:lstStyle/>
-          <a:p>
-            <a:pPr indent="0" marL="0">
-              <a:buNone/>
-            </a:pPr>
-            <a:r>
-              <a:rPr lang="en-US" sz="850" dirty="0">
-                <a:solidFill>
-                  <a:srgbClr val="8A90A0"/>
+          <p:cNvPr id="6" name="Shape 4"/>
+          <p:cNvSpPr/>
+          <p:nvPr/>
+        </p:nvSpPr>
+        <p:spPr>
+          <a:xfrm>
+            <a:off x="9411919" y="530352"/>
+            <a:ext cx="960120" cy="274320"/>
+          </a:xfrm>
+          <a:prstGeom prst="roundRect">
+            <a:avLst>
+              <a:gd name="adj" fmla="val 50000"/>
+            </a:avLst>
+          </a:prstGeom>
+          <a:solidFill>
+            <a:srgbClr val="F8F0E2"/>
+          </a:solidFill>
+          <a:ln/>
+        </p:spPr>
+      </p:sp>
+      <p:sp>
+        <p:nvSpPr>
+          <p:cNvPr id="7" name="Text 5"/>
+          <p:cNvSpPr/>
+          <p:nvPr/>
+        </p:nvSpPr>
+        <p:spPr>
+          <a:xfrm>
+            <a:off x="9411919" y="530352"/>
+            <a:ext cx="960120" cy="274320"/>
+          </a:xfrm>
+          <a:prstGeom prst="rect">
+            <a:avLst/>
+          </a:prstGeom>
+          <a:noFill/>
+          <a:ln/>
+        </p:spPr>
+        <p:txBody>
+          <a:bodyPr wrap="square" lIns="0" tIns="0" rIns="0" bIns="0" rtlCol="0" anchor="ctr"/>
+          <a:lstStyle/>
+          <a:p>
+            <a:pPr algn="ctr" indent="0" marL="0">
+              <a:buNone/>
+            </a:pPr>
+            <a:r>
+              <a:rPr lang="en-US" sz="900" b="1" spc="100" kern="0" dirty="0">
+                <a:solidFill>
+                  <a:srgbClr val="9A5B12"/>
                 </a:solidFill>
                 <a:latin typeface="Courier New" pitchFamily="34" charset="0"/>
                 <a:ea typeface="Courier New" pitchFamily="34" charset="-122"/>
                 <a:cs typeface="Courier New" pitchFamily="34" charset="-120"/>
               </a:rPr>
-              <a:t>SupportGW · LLMOps Bootcamp · Урок 11 з 12</a:t>
-            </a:r>
-            <a:endParaRPr lang="en-US" sz="850" dirty="0"/>
-          </a:p>
-        </p:txBody>
-      </p:sp>
-      <p:sp>
-        <p:nvSpPr>
-          <p:cNvPr id="7" name="Shape 5"/>
-          <p:cNvSpPr/>
-          <p:nvPr/>
-        </p:nvSpPr>
-        <p:spPr>
-          <a:xfrm>
-            <a:off x="566928" y="1737360"/>
-            <a:ext cx="11064240" cy="2057400"/>
-          </a:xfrm>
-          <a:prstGeom prst="roundRect">
-            <a:avLst>
-              <a:gd name="adj" fmla="val 5333"/>
-            </a:avLst>
-          </a:prstGeom>
-          <a:solidFill>
-            <a:srgbClr val="14161C"/>
-          </a:solidFill>
-          <a:ln/>
-        </p:spPr>
+              <a:t>ОПЦІЙНО</a:t>
+            </a:r>
+            <a:endParaRPr lang="en-US" sz="900" dirty="0"/>
+          </a:p>
+        </p:txBody>
       </p:sp>
       <p:sp>
         <p:nvSpPr>
@@ -7004,282 +7494,343 @@
         </p:nvSpPr>
         <p:spPr>
           <a:xfrm>
-            <a:off x="786384" y="1883664"/>
-            <a:ext cx="10625328" cy="1764792"/>
-          </a:xfrm>
-          <a:prstGeom prst="rect">
-            <a:avLst/>
-          </a:prstGeom>
-          <a:noFill/>
-          <a:ln/>
-        </p:spPr>
-        <p:txBody>
-          <a:bodyPr wrap="square" lIns="0" tIns="0" rIns="0" bIns="0" rtlCol="0" anchor="t"/>
-          <a:lstStyle/>
-          <a:p>
-            <a:pPr indent="0" marL="0">
-              <a:lnSpc>
-                <a:spcPct val="130000"/>
-              </a:lnSpc>
-              <a:buNone/>
-            </a:pPr>
-            <a:r>
-              <a:rPr lang="en-US" sz="1200" dirty="0">
-                <a:solidFill>
-                  <a:srgbClr val="82AAFF"/>
+            <a:off x="566928" y="6455664"/>
+            <a:ext cx="5486400" cy="274320"/>
+          </a:xfrm>
+          <a:prstGeom prst="rect">
+            <a:avLst/>
+          </a:prstGeom>
+          <a:noFill/>
+          <a:ln/>
+        </p:spPr>
+        <p:txBody>
+          <a:bodyPr wrap="square" lIns="0" tIns="0" rIns="0" bIns="0" rtlCol="0" anchor="ctr"/>
+          <a:lstStyle/>
+          <a:p>
+            <a:pPr indent="0" marL="0">
+              <a:buNone/>
+            </a:pPr>
+            <a:r>
+              <a:rPr lang="en-US" sz="850" dirty="0">
+                <a:solidFill>
+                  <a:srgbClr val="8A90A0"/>
                 </a:solidFill>
                 <a:latin typeface="Courier New" pitchFamily="34" charset="0"/>
                 <a:ea typeface="Courier New" pitchFamily="34" charset="-122"/>
                 <a:cs typeface="Courier New" pitchFamily="34" charset="-120"/>
               </a:rPr>
-              <a:t>Відкочуємо, якщо:</a:t>
-            </a:r>
-            <a:endParaRPr lang="en-US" sz="1200" dirty="0"/>
-          </a:p>
-          <a:p>
-            <a:pPr indent="0" marL="0">
-              <a:lnSpc>
-                <a:spcPct val="130000"/>
-              </a:lnSpc>
-              <a:buNone/>
-            </a:pPr>
-            <a:r>
-              <a:rPr lang="en-US" sz="1200" dirty="0">
-                <a:solidFill>
-                  <a:srgbClr val="F78C6C"/>
+              <a:t>SupportGW · LLMOps Bootcamp · Урок 11 з 12</a:t>
+            </a:r>
+            <a:endParaRPr lang="en-US" sz="850" dirty="0"/>
+          </a:p>
+        </p:txBody>
+      </p:sp>
+      <p:sp>
+        <p:nvSpPr>
+          <p:cNvPr id="9" name="Shape 7"/>
+          <p:cNvSpPr/>
+          <p:nvPr/>
+        </p:nvSpPr>
+        <p:spPr>
+          <a:xfrm>
+            <a:off x="1481328" y="2103120"/>
+            <a:ext cx="2834640" cy="777240"/>
+          </a:xfrm>
+          <a:prstGeom prst="roundRect">
+            <a:avLst>
+              <a:gd name="adj" fmla="val 11765"/>
+            </a:avLst>
+          </a:prstGeom>
+          <a:solidFill>
+            <a:srgbClr val="E9F3EE"/>
+          </a:solidFill>
+          <a:ln/>
+        </p:spPr>
+      </p:sp>
+      <p:sp>
+        <p:nvSpPr>
+          <p:cNvPr id="10" name="Text 8"/>
+          <p:cNvSpPr/>
+          <p:nvPr/>
+        </p:nvSpPr>
+        <p:spPr>
+          <a:xfrm>
+            <a:off x="1536192" y="2103120"/>
+            <a:ext cx="2724912" cy="777240"/>
+          </a:xfrm>
+          <a:prstGeom prst="rect">
+            <a:avLst/>
+          </a:prstGeom>
+          <a:noFill/>
+          <a:ln/>
+        </p:spPr>
+        <p:txBody>
+          <a:bodyPr wrap="square" lIns="0" tIns="0" rIns="0" bIns="0" rtlCol="0" anchor="ctr"/>
+          <a:lstStyle/>
+          <a:p>
+            <a:pPr algn="ctr" indent="0" marL="0">
+              <a:buNone/>
+            </a:pPr>
+            <a:r>
+              <a:rPr lang="en-US" sz="1150" b="1" dirty="0">
+                <a:solidFill>
+                  <a:srgbClr val="177245"/>
                 </a:solidFill>
                 <a:latin typeface="Courier New" pitchFamily="34" charset="0"/>
                 <a:ea typeface="Courier New" pitchFamily="34" charset="-122"/>
                 <a:cs typeface="Courier New" pitchFamily="34" charset="-120"/>
               </a:rPr>
-              <a:t>  eval pass rate &lt; 5/6         </a:t>
-            </a:r>
-            <a:pPr indent="0" marL="0">
-              <a:lnSpc>
-                <a:spcPct val="130000"/>
-              </a:lnSpc>
-              <a:buNone/>
-            </a:pPr>
-            <a:r>
-              <a:rPr lang="en-US" sz="1200" dirty="0">
-                <a:solidFill>
-                  <a:srgbClr val="6A7385"/>
+              <a:t>90% — стара версія</a:t>
+            </a:r>
+            <a:endParaRPr lang="en-US" sz="1150" dirty="0"/>
+          </a:p>
+        </p:txBody>
+      </p:sp>
+      <p:sp>
+        <p:nvSpPr>
+          <p:cNvPr id="11" name="Shape 9"/>
+          <p:cNvSpPr/>
+          <p:nvPr/>
+        </p:nvSpPr>
+        <p:spPr>
+          <a:xfrm>
+            <a:off x="4407408" y="2491740"/>
+            <a:ext cx="164592" cy="0"/>
+          </a:xfrm>
+          <a:prstGeom prst="line">
+            <a:avLst/>
+          </a:prstGeom>
+          <a:noFill/>
+          <a:ln w="15875">
+            <a:solidFill>
+              <a:srgbClr val="8A90A0"/>
+            </a:solidFill>
+            <a:prstDash val="solid"/>
+          </a:ln>
+        </p:spPr>
+      </p:sp>
+      <p:sp>
+        <p:nvSpPr>
+          <p:cNvPr id="12" name="Shape 10"/>
+          <p:cNvSpPr/>
+          <p:nvPr/>
+        </p:nvSpPr>
+        <p:spPr>
+          <a:xfrm rot="5400000">
+            <a:off x="4535424" y="2423160"/>
+            <a:ext cx="146304" cy="137160"/>
+          </a:xfrm>
+          <a:prstGeom prst="triangle">
+            <a:avLst/>
+          </a:prstGeom>
+          <a:solidFill>
+            <a:srgbClr val="8A90A0"/>
+          </a:solidFill>
+          <a:ln/>
+        </p:spPr>
+      </p:sp>
+      <p:sp>
+        <p:nvSpPr>
+          <p:cNvPr id="13" name="Shape 11"/>
+          <p:cNvSpPr/>
+          <p:nvPr/>
+        </p:nvSpPr>
+        <p:spPr>
+          <a:xfrm>
+            <a:off x="4773168" y="2103120"/>
+            <a:ext cx="2834640" cy="777240"/>
+          </a:xfrm>
+          <a:prstGeom prst="roundRect">
+            <a:avLst>
+              <a:gd name="adj" fmla="val 11765"/>
+            </a:avLst>
+          </a:prstGeom>
+          <a:solidFill>
+            <a:srgbClr val="F8F0E2"/>
+          </a:solidFill>
+          <a:ln/>
+        </p:spPr>
+      </p:sp>
+      <p:sp>
+        <p:nvSpPr>
+          <p:cNvPr id="14" name="Text 12"/>
+          <p:cNvSpPr/>
+          <p:nvPr/>
+        </p:nvSpPr>
+        <p:spPr>
+          <a:xfrm>
+            <a:off x="4828032" y="2103120"/>
+            <a:ext cx="2724912" cy="777240"/>
+          </a:xfrm>
+          <a:prstGeom prst="rect">
+            <a:avLst/>
+          </a:prstGeom>
+          <a:noFill/>
+          <a:ln/>
+        </p:spPr>
+        <p:txBody>
+          <a:bodyPr wrap="square" lIns="0" tIns="0" rIns="0" bIns="0" rtlCol="0" anchor="ctr"/>
+          <a:lstStyle/>
+          <a:p>
+            <a:pPr algn="ctr" indent="0" marL="0">
+              <a:buNone/>
+            </a:pPr>
+            <a:r>
+              <a:rPr lang="en-US" sz="1150" b="1" dirty="0">
+                <a:solidFill>
+                  <a:srgbClr val="9A5B12"/>
                 </a:solidFill>
                 <a:latin typeface="Courier New" pitchFamily="34" charset="0"/>
                 <a:ea typeface="Courier New" pitchFamily="34" charset="-122"/>
                 <a:cs typeface="Courier New" pitchFamily="34" charset="-120"/>
               </a:rPr>
-              <a:t>(прогін після деплою)</a:t>
-            </a:r>
-            <a:endParaRPr lang="en-US" sz="1200" dirty="0"/>
-          </a:p>
-          <a:p>
-            <a:pPr indent="0" marL="0">
-              <a:lnSpc>
-                <a:spcPct val="130000"/>
-              </a:lnSpc>
-              <a:buNone/>
-            </a:pPr>
-            <a:r>
-              <a:rPr lang="en-US" sz="1200" dirty="0">
-                <a:solidFill>
-                  <a:srgbClr val="F78C6C"/>
+              <a:t>10% — нова</a:t>
+            </a:r>
+            <a:endParaRPr lang="en-US" sz="1150" dirty="0"/>
+          </a:p>
+        </p:txBody>
+      </p:sp>
+      <p:sp>
+        <p:nvSpPr>
+          <p:cNvPr id="15" name="Shape 13"/>
+          <p:cNvSpPr/>
+          <p:nvPr/>
+        </p:nvSpPr>
+        <p:spPr>
+          <a:xfrm>
+            <a:off x="7699248" y="2491740"/>
+            <a:ext cx="164592" cy="0"/>
+          </a:xfrm>
+          <a:prstGeom prst="line">
+            <a:avLst/>
+          </a:prstGeom>
+          <a:noFill/>
+          <a:ln w="15875">
+            <a:solidFill>
+              <a:srgbClr val="8A90A0"/>
+            </a:solidFill>
+            <a:prstDash val="solid"/>
+          </a:ln>
+        </p:spPr>
+      </p:sp>
+      <p:sp>
+        <p:nvSpPr>
+          <p:cNvPr id="16" name="Shape 14"/>
+          <p:cNvSpPr/>
+          <p:nvPr/>
+        </p:nvSpPr>
+        <p:spPr>
+          <a:xfrm rot="5400000">
+            <a:off x="7827264" y="2423160"/>
+            <a:ext cx="146304" cy="137160"/>
+          </a:xfrm>
+          <a:prstGeom prst="triangle">
+            <a:avLst/>
+          </a:prstGeom>
+          <a:solidFill>
+            <a:srgbClr val="8A90A0"/>
+          </a:solidFill>
+          <a:ln/>
+        </p:spPr>
+      </p:sp>
+      <p:sp>
+        <p:nvSpPr>
+          <p:cNvPr id="17" name="Shape 15"/>
+          <p:cNvSpPr/>
+          <p:nvPr/>
+        </p:nvSpPr>
+        <p:spPr>
+          <a:xfrm>
+            <a:off x="8065008" y="2103120"/>
+            <a:ext cx="2834640" cy="777240"/>
+          </a:xfrm>
+          <a:prstGeom prst="roundRect">
+            <a:avLst>
+              <a:gd name="adj" fmla="val 11765"/>
+            </a:avLst>
+          </a:prstGeom>
+          <a:solidFill>
+            <a:srgbClr val="ECEBFB"/>
+          </a:solidFill>
+          <a:ln/>
+        </p:spPr>
+      </p:sp>
+      <p:sp>
+        <p:nvSpPr>
+          <p:cNvPr id="18" name="Text 16"/>
+          <p:cNvSpPr/>
+          <p:nvPr/>
+        </p:nvSpPr>
+        <p:spPr>
+          <a:xfrm>
+            <a:off x="8119872" y="2103120"/>
+            <a:ext cx="2724912" cy="777240"/>
+          </a:xfrm>
+          <a:prstGeom prst="rect">
+            <a:avLst/>
+          </a:prstGeom>
+          <a:noFill/>
+          <a:ln/>
+        </p:spPr>
+        <p:txBody>
+          <a:bodyPr wrap="square" lIns="0" tIns="0" rIns="0" bIns="0" rtlCol="0" anchor="ctr"/>
+          <a:lstStyle/>
+          <a:p>
+            <a:pPr algn="ctr" indent="0" marL="0">
+              <a:buNone/>
+            </a:pPr>
+            <a:r>
+              <a:rPr lang="en-US" sz="1150" b="1" dirty="0">
+                <a:solidFill>
+                  <a:srgbClr val="4038C4"/>
                 </a:solidFill>
                 <a:latin typeface="Courier New" pitchFamily="34" charset="0"/>
                 <a:ea typeface="Courier New" pitchFamily="34" charset="-122"/>
                 <a:cs typeface="Courier New" pitchFamily="34" charset="-120"/>
               </a:rPr>
-              <a:t>  або fallback_events зростає  </a:t>
-            </a:r>
-            <a:pPr indent="0" marL="0">
-              <a:lnSpc>
-                <a:spcPct val="130000"/>
-              </a:lnSpc>
-              <a:buNone/>
-            </a:pPr>
-            <a:r>
-              <a:rPr lang="en-US" sz="1200" dirty="0">
-                <a:solidFill>
-                  <a:srgbClr val="6A7385"/>
-                </a:solidFill>
-                <a:latin typeface="Courier New" pitchFamily="34" charset="0"/>
-                <a:ea typeface="Courier New" pitchFamily="34" charset="-122"/>
-                <a:cs typeface="Courier New" pitchFamily="34" charset="-120"/>
-              </a:rPr>
-              <a:t>протягом 15 хв</a:t>
-            </a:r>
-            <a:endParaRPr lang="en-US" sz="1200" dirty="0"/>
-          </a:p>
-          <a:p>
-            <a:pPr indent="0" marL="0">
-              <a:lnSpc>
-                <a:spcPct val="130000"/>
-              </a:lnSpc>
-              <a:buNone/>
-            </a:pPr>
-            <a:r>
-              <a:rPr lang="en-US" sz="1200" dirty="0">
-                <a:solidFill>
-                  <a:srgbClr val="F78C6C"/>
-                </a:solidFill>
-                <a:latin typeface="Courier New" pitchFamily="34" charset="0"/>
-                <a:ea typeface="Courier New" pitchFamily="34" charset="-122"/>
-                <a:cs typeface="Courier New" pitchFamily="34" charset="-120"/>
-              </a:rPr>
-              <a:t>  або error rate &gt; 5%          </a:t>
-            </a:r>
-            <a:pPr indent="0" marL="0">
-              <a:lnSpc>
-                <a:spcPct val="130000"/>
-              </a:lnSpc>
-              <a:buNone/>
-            </a:pPr>
-            <a:r>
-              <a:rPr lang="en-US" sz="1200" dirty="0">
-                <a:solidFill>
-                  <a:srgbClr val="6A7385"/>
-                </a:solidFill>
-                <a:latin typeface="Courier New" pitchFamily="34" charset="0"/>
-                <a:ea typeface="Courier New" pitchFamily="34" charset="-122"/>
-                <a:cs typeface="Courier New" pitchFamily="34" charset="-120"/>
-              </a:rPr>
-              <a:t>протягом 15 хв</a:t>
-            </a:r>
-            <a:endParaRPr lang="en-US" sz="1200" dirty="0"/>
-          </a:p>
-          <a:p>
-            <a:pPr indent="0" marL="0">
-              <a:lnSpc>
-                <a:spcPct val="130000"/>
-              </a:lnSpc>
-              <a:buNone/>
-            </a:pPr>
-            <a:r>
-              <a:rPr lang="en-US" sz="1200" dirty="0">
-                <a:solidFill>
-                  <a:srgbClr val="C3E88D"/>
-                </a:solidFill>
-                <a:latin typeface="Courier New" pitchFamily="34" charset="0"/>
-                <a:ea typeface="Courier New" pitchFamily="34" charset="-122"/>
-                <a:cs typeface="Courier New" pitchFamily="34" charset="-120"/>
-              </a:rPr>
-              <a:t>Хто смикає: черговий, без погоджень.</a:t>
-            </a:r>
-            <a:endParaRPr lang="en-US" sz="1200" dirty="0"/>
-          </a:p>
-          <a:p>
-            <a:pPr indent="0" marL="0">
-              <a:lnSpc>
-                <a:spcPct val="130000"/>
-              </a:lnSpc>
-              <a:buNone/>
-            </a:pPr>
-            <a:r>
-              <a:rPr lang="en-US" sz="1200" dirty="0">
-                <a:solidFill>
-                  <a:srgbClr val="C3E88D"/>
-                </a:solidFill>
-                <a:latin typeface="Courier New" pitchFamily="34" charset="0"/>
-                <a:ea typeface="Courier New" pitchFamily="34" charset="-122"/>
-                <a:cs typeface="Courier New" pitchFamily="34" charset="-120"/>
-              </a:rPr>
-              <a:t>Як: activate попередньої версії — одна команда.</a:t>
-            </a:r>
-            <a:endParaRPr lang="en-US" sz="1200" dirty="0"/>
-          </a:p>
-        </p:txBody>
-      </p:sp>
-      <p:sp>
-        <p:nvSpPr>
-          <p:cNvPr id="9" name="Shape 7"/>
-          <p:cNvSpPr/>
-          <p:nvPr/>
-        </p:nvSpPr>
-        <p:spPr>
-          <a:xfrm>
-            <a:off x="566928" y="4023360"/>
-            <a:ext cx="3520440" cy="1463040"/>
+              <a:t>порівняння метрик</a:t>
+            </a:r>
+            <a:endParaRPr lang="en-US" sz="1150" dirty="0"/>
+          </a:p>
+        </p:txBody>
+      </p:sp>
+      <p:sp>
+        <p:nvSpPr>
+          <p:cNvPr id="19" name="Shape 17"/>
+          <p:cNvSpPr/>
+          <p:nvPr/>
+        </p:nvSpPr>
+        <p:spPr>
+          <a:xfrm>
+            <a:off x="566928" y="3291840"/>
+            <a:ext cx="5349240" cy="1554480"/>
           </a:xfrm>
           <a:prstGeom prst="roundRect">
             <a:avLst>
-              <a:gd name="adj" fmla="val 7500"/>
+              <a:gd name="adj" fmla="val 7059"/>
             </a:avLst>
           </a:prstGeom>
           <a:solidFill>
-            <a:srgbClr val="E9F3EE"/>
+            <a:srgbClr val="FFFFFF"/>
           </a:solidFill>
-          <a:ln/>
-        </p:spPr>
-      </p:sp>
-      <p:sp>
-        <p:nvSpPr>
-          <p:cNvPr id="10" name="Shape 8"/>
-          <p:cNvSpPr/>
-          <p:nvPr/>
-        </p:nvSpPr>
-        <p:spPr>
-          <a:xfrm>
-            <a:off x="768096" y="4206240"/>
-            <a:ext cx="384048" cy="384048"/>
-          </a:xfrm>
-          <a:prstGeom prst="ellipse">
-            <a:avLst/>
-          </a:prstGeom>
-          <a:solidFill>
-            <a:srgbClr val="177245"/>
-          </a:solidFill>
-          <a:ln/>
-        </p:spPr>
-      </p:sp>
-      <p:sp>
-        <p:nvSpPr>
-          <p:cNvPr id="11" name="Text 9"/>
-          <p:cNvSpPr/>
-          <p:nvPr/>
-        </p:nvSpPr>
-        <p:spPr>
-          <a:xfrm>
-            <a:off x="768096" y="4206240"/>
-            <a:ext cx="384048" cy="384048"/>
-          </a:xfrm>
-          <a:prstGeom prst="rect">
-            <a:avLst/>
-          </a:prstGeom>
-          <a:noFill/>
-          <a:ln/>
-        </p:spPr>
-        <p:txBody>
-          <a:bodyPr wrap="square" lIns="0" tIns="0" rIns="0" bIns="0" rtlCol="0" anchor="ctr"/>
-          <a:lstStyle/>
-          <a:p>
-            <a:pPr algn="ctr" indent="0" marL="0">
-              <a:buNone/>
-            </a:pPr>
-            <a:r>
-              <a:rPr lang="en-US" sz="1200" b="1" dirty="0">
-                <a:solidFill>
-                  <a:srgbClr val="E9F3EE"/>
-                </a:solidFill>
-                <a:latin typeface="Courier New" pitchFamily="34" charset="0"/>
-                <a:ea typeface="Courier New" pitchFamily="34" charset="-122"/>
-                <a:cs typeface="Courier New" pitchFamily="34" charset="-120"/>
-              </a:rPr>
-              <a:t>1</a:t>
-            </a:r>
-            <a:endParaRPr lang="en-US" sz="1200" dirty="0"/>
-          </a:p>
-        </p:txBody>
-      </p:sp>
-      <p:sp>
-        <p:nvSpPr>
-          <p:cNvPr id="12" name="Text 10"/>
-          <p:cNvSpPr/>
-          <p:nvPr/>
-        </p:nvSpPr>
-        <p:spPr>
-          <a:xfrm>
-            <a:off x="1280160" y="4178808"/>
-            <a:ext cx="2606040" cy="438912"/>
+          <a:ln w="12700">
+            <a:solidFill>
+              <a:srgbClr val="E4E6EC"/>
+            </a:solidFill>
+            <a:prstDash val="solid"/>
+          </a:ln>
+        </p:spPr>
+      </p:sp>
+      <p:sp>
+        <p:nvSpPr>
+          <p:cNvPr id="20" name="Text 18"/>
+          <p:cNvSpPr/>
+          <p:nvPr/>
+        </p:nvSpPr>
+        <p:spPr>
+          <a:xfrm>
+            <a:off x="768096" y="3447288"/>
+            <a:ext cx="4946904" cy="438912"/>
           </a:xfrm>
           <a:prstGeom prst="rect">
             <a:avLst/>
@@ -7297,13 +7848,13 @@
             <a:r>
               <a:rPr lang="en-US" sz="1450" b="1" dirty="0">
                 <a:solidFill>
-                  <a:srgbClr val="177245"/>
+                  <a:srgbClr val="1B1D23"/>
                 </a:solidFill>
                 <a:latin typeface="Calibri" pitchFamily="34" charset="0"/>
                 <a:ea typeface="Calibri" pitchFamily="34" charset="-122"/>
                 <a:cs typeface="Calibri" pitchFamily="34" charset="-120"/>
               </a:rPr>
-              <a:t>Умова</a:t>
+              <a:t>Композиція, а не новий механізм</a:t>
             </a:r>
             <a:endParaRPr lang="en-US" sz="1450" dirty="0"/>
           </a:p>
@@ -7311,14 +7862,14 @@
       </p:sp>
       <p:sp>
         <p:nvSpPr>
-          <p:cNvPr id="13" name="Text 11"/>
-          <p:cNvSpPr/>
-          <p:nvPr/>
-        </p:nvSpPr>
-        <p:spPr>
-          <a:xfrm>
-            <a:off x="768096" y="4709160"/>
-            <a:ext cx="3118104" cy="621792"/>
+          <p:cNvPr id="21" name="Text 19"/>
+          <p:cNvSpPr/>
+          <p:nvPr/>
+        </p:nvSpPr>
+        <p:spPr>
+          <a:xfrm>
+            <a:off x="768096" y="3977640"/>
+            <a:ext cx="4946904" cy="713232"/>
           </a:xfrm>
           <a:prstGeom prst="rect">
             <a:avLst/>
@@ -7336,13 +7887,13 @@
             <a:r>
               <a:rPr lang="en-US" sz="1200" dirty="0">
                 <a:solidFill>
-                  <a:srgbClr val="1B1D23"/>
+                  <a:srgbClr val="565C6B"/>
                 </a:solidFill>
                 <a:latin typeface="Calibri" pitchFamily="34" charset="0"/>
                 <a:ea typeface="Calibri" pitchFamily="34" charset="-122"/>
                 <a:cs typeface="Calibri" pitchFamily="34" charset="-120"/>
               </a:rPr>
-              <a:t>конкретна метрика і поріг, а не «якщо стане погано»</a:t>
+              <a:t>routing (урок 3) + реєстр версій (урок 2) + лог (урок 1) — усе вже є</a:t>
             </a:r>
             <a:endParaRPr lang="en-US" sz="1200" dirty="0"/>
           </a:p>
@@ -7350,95 +7901,36 @@
       </p:sp>
       <p:sp>
         <p:nvSpPr>
-          <p:cNvPr id="14" name="Shape 12"/>
-          <p:cNvSpPr/>
-          <p:nvPr/>
-        </p:nvSpPr>
-        <p:spPr>
-          <a:xfrm>
-            <a:off x="4270248" y="4023360"/>
-            <a:ext cx="3520440" cy="1463040"/>
+          <p:cNvPr id="22" name="Shape 20"/>
+          <p:cNvSpPr/>
+          <p:nvPr/>
+        </p:nvSpPr>
+        <p:spPr>
+          <a:xfrm>
+            <a:off x="6281928" y="3291840"/>
+            <a:ext cx="5349240" cy="1554480"/>
           </a:xfrm>
           <a:prstGeom prst="roundRect">
             <a:avLst>
-              <a:gd name="adj" fmla="val 7500"/>
+              <a:gd name="adj" fmla="val 7059"/>
             </a:avLst>
           </a:prstGeom>
           <a:solidFill>
-            <a:srgbClr val="E9F3EE"/>
+            <a:srgbClr val="ECEBFB"/>
           </a:solidFill>
           <a:ln/>
         </p:spPr>
       </p:sp>
       <p:sp>
         <p:nvSpPr>
-          <p:cNvPr id="15" name="Shape 13"/>
-          <p:cNvSpPr/>
-          <p:nvPr/>
-        </p:nvSpPr>
-        <p:spPr>
-          <a:xfrm>
-            <a:off x="4471416" y="4206240"/>
-            <a:ext cx="384048" cy="384048"/>
-          </a:xfrm>
-          <a:prstGeom prst="ellipse">
-            <a:avLst/>
-          </a:prstGeom>
-          <a:solidFill>
-            <a:srgbClr val="177245"/>
-          </a:solidFill>
-          <a:ln/>
-        </p:spPr>
-      </p:sp>
-      <p:sp>
-        <p:nvSpPr>
-          <p:cNvPr id="16" name="Text 14"/>
-          <p:cNvSpPr/>
-          <p:nvPr/>
-        </p:nvSpPr>
-        <p:spPr>
-          <a:xfrm>
-            <a:off x="4471416" y="4206240"/>
-            <a:ext cx="384048" cy="384048"/>
-          </a:xfrm>
-          <a:prstGeom prst="rect">
-            <a:avLst/>
-          </a:prstGeom>
-          <a:noFill/>
-          <a:ln/>
-        </p:spPr>
-        <p:txBody>
-          <a:bodyPr wrap="square" lIns="0" tIns="0" rIns="0" bIns="0" rtlCol="0" anchor="ctr"/>
-          <a:lstStyle/>
-          <a:p>
-            <a:pPr algn="ctr" indent="0" marL="0">
-              <a:buNone/>
-            </a:pPr>
-            <a:r>
-              <a:rPr lang="en-US" sz="1200" b="1" dirty="0">
-                <a:solidFill>
-                  <a:srgbClr val="E9F3EE"/>
-                </a:solidFill>
-                <a:latin typeface="Courier New" pitchFamily="34" charset="0"/>
-                <a:ea typeface="Courier New" pitchFamily="34" charset="-122"/>
-                <a:cs typeface="Courier New" pitchFamily="34" charset="-120"/>
-              </a:rPr>
-              <a:t>2</a:t>
-            </a:r>
-            <a:endParaRPr lang="en-US" sz="1200" dirty="0"/>
-          </a:p>
-        </p:txBody>
-      </p:sp>
-      <p:sp>
-        <p:nvSpPr>
-          <p:cNvPr id="17" name="Text 15"/>
-          <p:cNvSpPr/>
-          <p:nvPr/>
-        </p:nvSpPr>
-        <p:spPr>
-          <a:xfrm>
-            <a:off x="4983480" y="4178808"/>
-            <a:ext cx="2606040" cy="438912"/>
+          <p:cNvPr id="23" name="Text 21"/>
+          <p:cNvSpPr/>
+          <p:nvPr/>
+        </p:nvSpPr>
+        <p:spPr>
+          <a:xfrm>
+            <a:off x="6483096" y="3447288"/>
+            <a:ext cx="4946904" cy="438912"/>
           </a:xfrm>
           <a:prstGeom prst="rect">
             <a:avLst/>
@@ -7456,13 +7948,13 @@
             <a:r>
               <a:rPr lang="en-US" sz="1450" b="1" dirty="0">
                 <a:solidFill>
-                  <a:srgbClr val="177245"/>
+                  <a:srgbClr val="4038C4"/>
                 </a:solidFill>
                 <a:latin typeface="Calibri" pitchFamily="34" charset="0"/>
                 <a:ea typeface="Calibri" pitchFamily="34" charset="-122"/>
                 <a:cs typeface="Calibri" pitchFamily="34" charset="-120"/>
               </a:rPr>
-              <a:t>Хто</a:t>
+              <a:t>Ділити за користувачем</a:t>
             </a:r>
             <a:endParaRPr lang="en-US" sz="1450" dirty="0"/>
           </a:p>
@@ -7470,14 +7962,14 @@
       </p:sp>
       <p:sp>
         <p:nvSpPr>
-          <p:cNvPr id="18" name="Text 16"/>
-          <p:cNvSpPr/>
-          <p:nvPr/>
-        </p:nvSpPr>
-        <p:spPr>
-          <a:xfrm>
-            <a:off x="4471416" y="4709160"/>
-            <a:ext cx="3118104" cy="621792"/>
+          <p:cNvPr id="24" name="Text 22"/>
+          <p:cNvSpPr/>
+          <p:nvPr/>
+        </p:nvSpPr>
+        <p:spPr>
+          <a:xfrm>
+            <a:off x="6483096" y="3977640"/>
+            <a:ext cx="4946904" cy="713232"/>
           </a:xfrm>
           <a:prstGeom prst="rect">
             <a:avLst/>
@@ -7501,7 +7993,7 @@
                 <a:ea typeface="Calibri" pitchFamily="34" charset="-122"/>
                 <a:cs typeface="Calibri" pitchFamily="34" charset="-120"/>
               </a:rPr>
-              <a:t>названа роль, яка має право смикнути, не питаючи дозволу</a:t>
+              <a:t>той самий стабільний вибір за ключем, що й для A/B промптів</a:t>
             </a:r>
             <a:endParaRPr lang="en-US" sz="1200" dirty="0"/>
           </a:p>
@@ -7509,219 +8001,60 @@
       </p:sp>
       <p:sp>
         <p:nvSpPr>
-          <p:cNvPr id="19" name="Shape 17"/>
-          <p:cNvSpPr/>
-          <p:nvPr/>
-        </p:nvSpPr>
-        <p:spPr>
-          <a:xfrm>
-            <a:off x="7973568" y="4023360"/>
-            <a:ext cx="3520440" cy="1463040"/>
+          <p:cNvPr id="25" name="Shape 23"/>
+          <p:cNvSpPr/>
+          <p:nvPr/>
+        </p:nvSpPr>
+        <p:spPr>
+          <a:xfrm>
+            <a:off x="566928" y="4983480"/>
+            <a:ext cx="11064240" cy="868680"/>
           </a:xfrm>
           <a:prstGeom prst="roundRect">
             <a:avLst>
-              <a:gd name="adj" fmla="val 7500"/>
+              <a:gd name="adj" fmla="val 12632"/>
             </a:avLst>
           </a:prstGeom>
           <a:solidFill>
-            <a:srgbClr val="E9F3EE"/>
+            <a:srgbClr val="F8F0E2"/>
           </a:solidFill>
           <a:ln/>
         </p:spPr>
       </p:sp>
       <p:sp>
         <p:nvSpPr>
-          <p:cNvPr id="20" name="Shape 18"/>
-          <p:cNvSpPr/>
-          <p:nvPr/>
-        </p:nvSpPr>
-        <p:spPr>
-          <a:xfrm>
-            <a:off x="8174736" y="4206240"/>
-            <a:ext cx="384048" cy="384048"/>
-          </a:xfrm>
-          <a:prstGeom prst="ellipse">
-            <a:avLst/>
-          </a:prstGeom>
-          <a:solidFill>
-            <a:srgbClr val="177245"/>
-          </a:solidFill>
-          <a:ln/>
-        </p:spPr>
-      </p:sp>
-      <p:sp>
-        <p:nvSpPr>
-          <p:cNvPr id="21" name="Text 19"/>
-          <p:cNvSpPr/>
-          <p:nvPr/>
-        </p:nvSpPr>
-        <p:spPr>
-          <a:xfrm>
-            <a:off x="8174736" y="4206240"/>
-            <a:ext cx="384048" cy="384048"/>
-          </a:xfrm>
-          <a:prstGeom prst="rect">
-            <a:avLst/>
-          </a:prstGeom>
-          <a:noFill/>
-          <a:ln/>
-        </p:spPr>
-        <p:txBody>
-          <a:bodyPr wrap="square" lIns="0" tIns="0" rIns="0" bIns="0" rtlCol="0" anchor="ctr"/>
-          <a:lstStyle/>
-          <a:p>
-            <a:pPr algn="ctr" indent="0" marL="0">
-              <a:buNone/>
-            </a:pPr>
-            <a:r>
-              <a:rPr lang="en-US" sz="1200" b="1" dirty="0">
-                <a:solidFill>
-                  <a:srgbClr val="E9F3EE"/>
-                </a:solidFill>
-                <a:latin typeface="Courier New" pitchFamily="34" charset="0"/>
-                <a:ea typeface="Courier New" pitchFamily="34" charset="-122"/>
-                <a:cs typeface="Courier New" pitchFamily="34" charset="-120"/>
-              </a:rPr>
-              <a:t>3</a:t>
-            </a:r>
-            <a:endParaRPr lang="en-US" sz="1200" dirty="0"/>
-          </a:p>
-        </p:txBody>
-      </p:sp>
-      <p:sp>
-        <p:nvSpPr>
-          <p:cNvPr id="22" name="Text 20"/>
-          <p:cNvSpPr/>
-          <p:nvPr/>
-        </p:nvSpPr>
-        <p:spPr>
-          <a:xfrm>
-            <a:off x="8686800" y="4178808"/>
-            <a:ext cx="2606040" cy="438912"/>
-          </a:xfrm>
-          <a:prstGeom prst="rect">
-            <a:avLst/>
-          </a:prstGeom>
-          <a:noFill/>
-          <a:ln/>
-        </p:spPr>
-        <p:txBody>
-          <a:bodyPr wrap="square" lIns="0" tIns="0" rIns="0" bIns="0" rtlCol="0" anchor="ctr"/>
-          <a:lstStyle/>
-          <a:p>
-            <a:pPr indent="0" marL="0">
-              <a:buNone/>
-            </a:pPr>
-            <a:r>
-              <a:rPr lang="en-US" sz="1450" b="1" dirty="0">
-                <a:solidFill>
-                  <a:srgbClr val="177245"/>
+          <p:cNvPr id="26" name="Text 24"/>
+          <p:cNvSpPr/>
+          <p:nvPr/>
+        </p:nvSpPr>
+        <p:spPr>
+          <a:xfrm>
+            <a:off x="786384" y="5129784"/>
+            <a:ext cx="10625328" cy="576072"/>
+          </a:xfrm>
+          <a:prstGeom prst="rect">
+            <a:avLst/>
+          </a:prstGeom>
+          <a:noFill/>
+          <a:ln/>
+        </p:spPr>
+        <p:txBody>
+          <a:bodyPr wrap="square" lIns="0" tIns="0" rIns="0" bIns="0" rtlCol="0" anchor="ctr"/>
+          <a:lstStyle/>
+          <a:p>
+            <a:pPr indent="0" marL="0">
+              <a:buNone/>
+            </a:pPr>
+            <a:r>
+              <a:rPr lang="en-US" sz="1300" dirty="0">
+                <a:solidFill>
+                  <a:srgbClr val="1B1D23"/>
                 </a:solidFill>
                 <a:latin typeface="Calibri" pitchFamily="34" charset="0"/>
                 <a:ea typeface="Calibri" pitchFamily="34" charset="-122"/>
                 <a:cs typeface="Calibri" pitchFamily="34" charset="-120"/>
               </a:rPr>
-              <a:t>Чим</a:t>
-            </a:r>
-            <a:endParaRPr lang="en-US" sz="1450" dirty="0"/>
-          </a:p>
-        </p:txBody>
-      </p:sp>
-      <p:sp>
-        <p:nvSpPr>
-          <p:cNvPr id="23" name="Text 21"/>
-          <p:cNvSpPr/>
-          <p:nvPr/>
-        </p:nvSpPr>
-        <p:spPr>
-          <a:xfrm>
-            <a:off x="8174736" y="4709160"/>
-            <a:ext cx="3118104" cy="621792"/>
-          </a:xfrm>
-          <a:prstGeom prst="rect">
-            <a:avLst/>
-          </a:prstGeom>
-          <a:noFill/>
-          <a:ln/>
-        </p:spPr>
-        <p:txBody>
-          <a:bodyPr wrap="square" lIns="0" tIns="0" rIns="0" bIns="0" rtlCol="0" anchor="t"/>
-          <a:lstStyle/>
-          <a:p>
-            <a:pPr indent="0" marL="0">
-              <a:buNone/>
-            </a:pPr>
-            <a:r>
-              <a:rPr lang="en-US" sz="1200" dirty="0">
-                <a:solidFill>
-                  <a:srgbClr val="1B1D23"/>
-                </a:solidFill>
-                <a:latin typeface="Calibri" pitchFamily="34" charset="0"/>
-                <a:ea typeface="Calibri" pitchFamily="34" charset="-122"/>
-                <a:cs typeface="Calibri" pitchFamily="34" charset="-120"/>
-              </a:rPr>
-              <a:t>точна команда — щоб виконати її о 3-й ночі без роздумів</a:t>
-            </a:r>
-            <a:endParaRPr lang="en-US" sz="1200" dirty="0"/>
-          </a:p>
-        </p:txBody>
-      </p:sp>
-      <p:sp>
-        <p:nvSpPr>
-          <p:cNvPr id="24" name="Shape 22"/>
-          <p:cNvSpPr/>
-          <p:nvPr/>
-        </p:nvSpPr>
-        <p:spPr>
-          <a:xfrm>
-            <a:off x="566928" y="5623560"/>
-            <a:ext cx="11064240" cy="658368"/>
-          </a:xfrm>
-          <a:prstGeom prst="roundRect">
-            <a:avLst>
-              <a:gd name="adj" fmla="val 16667"/>
-            </a:avLst>
-          </a:prstGeom>
-          <a:solidFill>
-            <a:srgbClr val="ECEBFB"/>
-          </a:solidFill>
-          <a:ln/>
-        </p:spPr>
-      </p:sp>
-      <p:sp>
-        <p:nvSpPr>
-          <p:cNvPr id="25" name="Text 23"/>
-          <p:cNvSpPr/>
-          <p:nvPr/>
-        </p:nvSpPr>
-        <p:spPr>
-          <a:xfrm>
-            <a:off x="786384" y="5769864"/>
-            <a:ext cx="10625328" cy="365760"/>
-          </a:xfrm>
-          <a:prstGeom prst="rect">
-            <a:avLst/>
-          </a:prstGeom>
-          <a:noFill/>
-          <a:ln/>
-        </p:spPr>
-        <p:txBody>
-          <a:bodyPr wrap="square" lIns="0" tIns="0" rIns="0" bIns="0" rtlCol="0" anchor="ctr"/>
-          <a:lstStyle/>
-          <a:p>
-            <a:pPr indent="0" marL="0">
-              <a:buNone/>
-            </a:pPr>
-            <a:r>
-              <a:rPr lang="en-US" sz="1300" dirty="0">
-                <a:solidFill>
-                  <a:srgbClr val="1B1D23"/>
-                </a:solidFill>
-                <a:latin typeface="Calibri" pitchFamily="34" charset="0"/>
-                <a:ea typeface="Calibri" pitchFamily="34" charset="-122"/>
-                <a:cs typeface="Calibri" pitchFamily="34" charset="-120"/>
-              </a:rPr>
-              <a:t>Рішення, ухвалене заздалегідь, виконується за секунди; рішення під час інциденту обговорюється хвилинами.</a:t>
+              <a:t>Canary без заздалегідь названої метрики порівняння — це просто повільніший спосіб викотити зміну.</a:t>
             </a:r>
             <a:endParaRPr lang="en-US" sz="1300" dirty="0"/>
           </a:p>
@@ -7815,8 +8148,47 @@
         </p:nvSpPr>
         <p:spPr>
           <a:xfrm>
-            <a:off x="566928" y="365760"/>
-            <a:ext cx="8881567" cy="603504"/>
+            <a:off x="566928" y="384048"/>
+            <a:ext cx="566928" cy="566928"/>
+          </a:xfrm>
+          <a:prstGeom prst="rect">
+            <a:avLst/>
+          </a:prstGeom>
+          <a:noFill/>
+          <a:ln/>
+        </p:spPr>
+        <p:txBody>
+          <a:bodyPr wrap="square" lIns="0" tIns="0" rIns="0" bIns="0" rtlCol="0" anchor="ctr"/>
+          <a:lstStyle/>
+          <a:p>
+            <a:pPr algn="l" indent="0" marL="0">
+              <a:buNone/>
+            </a:pPr>
+            <a:r>
+              <a:rPr lang="en-US" sz="2600" b="1" dirty="0">
+                <a:solidFill>
+                  <a:srgbClr val="C9C5F2"/>
+                </a:solidFill>
+                <a:latin typeface="Courier New" pitchFamily="34" charset="0"/>
+                <a:ea typeface="Courier New" pitchFamily="34" charset="-122"/>
+                <a:cs typeface="Courier New" pitchFamily="34" charset="-120"/>
+              </a:rPr>
+              <a:t>09</a:t>
+            </a:r>
+            <a:endParaRPr lang="en-US" sz="2600" dirty="0"/>
+          </a:p>
+        </p:txBody>
+      </p:sp>
+      <p:sp>
+        <p:nvSpPr>
+          <p:cNvPr id="3" name="Text 1"/>
+          <p:cNvSpPr/>
+          <p:nvPr/>
+        </p:nvSpPr>
+        <p:spPr>
+          <a:xfrm>
+            <a:off x="1225296" y="365760"/>
+            <a:ext cx="8223199" cy="603504"/>
           </a:xfrm>
           <a:prstGeom prst="rect">
             <a:avLst/>
@@ -7840,7 +8212,7 @@
                 <a:ea typeface="Calibri" pitchFamily="34" charset="-122"/>
                 <a:cs typeface="Calibri" pitchFamily="34" charset="-120"/>
               </a:rPr>
-              <a:t>Зараз ви побачите — і навіщо</a:t>
+              <a:t>Rollback-критерії пишуться до пожежі</a:t>
             </a:r>
             <a:endParaRPr lang="en-US" sz="2500" dirty="0"/>
           </a:p>
@@ -7848,7 +8220,7 @@
       </p:sp>
       <p:sp>
         <p:nvSpPr>
-          <p:cNvPr id="3" name="Shape 1"/>
+          <p:cNvPr id="4" name="Shape 2"/>
           <p:cNvSpPr/>
           <p:nvPr/>
         </p:nvSpPr>
@@ -7863,14 +8235,14 @@
             </a:avLst>
           </a:prstGeom>
           <a:solidFill>
-            <a:srgbClr val="E9F3EE"/>
+            <a:srgbClr val="ECEBFB"/>
           </a:solidFill>
           <a:ln/>
         </p:spPr>
       </p:sp>
       <p:sp>
         <p:nvSpPr>
-          <p:cNvPr id="4" name="Text 2"/>
+          <p:cNvPr id="5" name="Text 3"/>
           <p:cNvSpPr/>
           <p:nvPr/>
         </p:nvSpPr>
@@ -7895,13 +8267,13 @@
             <a:r>
               <a:rPr lang="en-US" sz="900" b="1" spc="100" kern="0" dirty="0">
                 <a:solidFill>
-                  <a:srgbClr val="177245"/>
+                  <a:srgbClr val="4038C4"/>
                 </a:solidFill>
                 <a:latin typeface="Courier New" pitchFamily="34" charset="0"/>
                 <a:ea typeface="Courier New" pitchFamily="34" charset="-122"/>
                 <a:cs typeface="Courier New" pitchFamily="34" charset="-120"/>
               </a:rPr>
-              <a:t>ПРАКТИКА</a:t>
+              <a:t>ТЕОРІЯ</a:t>
             </a:r>
             <a:endParaRPr lang="en-US" sz="900" dirty="0"/>
           </a:p>
@@ -7909,7 +8281,7 @@
       </p:sp>
       <p:sp>
         <p:nvSpPr>
-          <p:cNvPr id="5" name="Text 3"/>
+          <p:cNvPr id="6" name="Text 4"/>
           <p:cNvSpPr/>
           <p:nvPr/>
         </p:nvSpPr>
@@ -7948,14 +8320,229 @@
       </p:sp>
       <p:sp>
         <p:nvSpPr>
-          <p:cNvPr id="6" name="Shape 4"/>
+          <p:cNvPr id="7" name="Shape 5"/>
           <p:cNvSpPr/>
           <p:nvPr/>
         </p:nvSpPr>
         <p:spPr>
           <a:xfrm>
             <a:off x="566928" y="1737360"/>
-            <a:ext cx="5532120" cy="1463040"/>
+            <a:ext cx="11064240" cy="2057400"/>
+          </a:xfrm>
+          <a:prstGeom prst="roundRect">
+            <a:avLst>
+              <a:gd name="adj" fmla="val 5333"/>
+            </a:avLst>
+          </a:prstGeom>
+          <a:solidFill>
+            <a:srgbClr val="14161C"/>
+          </a:solidFill>
+          <a:ln/>
+        </p:spPr>
+      </p:sp>
+      <p:sp>
+        <p:nvSpPr>
+          <p:cNvPr id="8" name="Text 6"/>
+          <p:cNvSpPr/>
+          <p:nvPr/>
+        </p:nvSpPr>
+        <p:spPr>
+          <a:xfrm>
+            <a:off x="786384" y="1883664"/>
+            <a:ext cx="10625328" cy="1764792"/>
+          </a:xfrm>
+          <a:prstGeom prst="rect">
+            <a:avLst/>
+          </a:prstGeom>
+          <a:noFill/>
+          <a:ln/>
+        </p:spPr>
+        <p:txBody>
+          <a:bodyPr wrap="square" lIns="0" tIns="0" rIns="0" bIns="0" rtlCol="0" anchor="t"/>
+          <a:lstStyle/>
+          <a:p>
+            <a:pPr indent="0" marL="0">
+              <a:lnSpc>
+                <a:spcPct val="130000"/>
+              </a:lnSpc>
+              <a:buNone/>
+            </a:pPr>
+            <a:r>
+              <a:rPr lang="en-US" sz="1200" dirty="0">
+                <a:solidFill>
+                  <a:srgbClr val="82AAFF"/>
+                </a:solidFill>
+                <a:latin typeface="Courier New" pitchFamily="34" charset="0"/>
+                <a:ea typeface="Courier New" pitchFamily="34" charset="-122"/>
+                <a:cs typeface="Courier New" pitchFamily="34" charset="-120"/>
+              </a:rPr>
+              <a:t>Відкочуємо, якщо:</a:t>
+            </a:r>
+            <a:endParaRPr lang="en-US" sz="1200" dirty="0"/>
+          </a:p>
+          <a:p>
+            <a:pPr indent="0" marL="0">
+              <a:lnSpc>
+                <a:spcPct val="130000"/>
+              </a:lnSpc>
+              <a:buNone/>
+            </a:pPr>
+            <a:r>
+              <a:rPr lang="en-US" sz="1200" dirty="0">
+                <a:solidFill>
+                  <a:srgbClr val="F78C6C"/>
+                </a:solidFill>
+                <a:latin typeface="Courier New" pitchFamily="34" charset="0"/>
+                <a:ea typeface="Courier New" pitchFamily="34" charset="-122"/>
+                <a:cs typeface="Courier New" pitchFamily="34" charset="-120"/>
+              </a:rPr>
+              <a:t>  eval pass rate &lt; 5/6         </a:t>
+            </a:r>
+            <a:pPr indent="0" marL="0">
+              <a:lnSpc>
+                <a:spcPct val="130000"/>
+              </a:lnSpc>
+              <a:buNone/>
+            </a:pPr>
+            <a:r>
+              <a:rPr lang="en-US" sz="1200" dirty="0">
+                <a:solidFill>
+                  <a:srgbClr val="6A7385"/>
+                </a:solidFill>
+                <a:latin typeface="Courier New" pitchFamily="34" charset="0"/>
+                <a:ea typeface="Courier New" pitchFamily="34" charset="-122"/>
+                <a:cs typeface="Courier New" pitchFamily="34" charset="-120"/>
+              </a:rPr>
+              <a:t>(прогін після деплою)</a:t>
+            </a:r>
+            <a:endParaRPr lang="en-US" sz="1200" dirty="0"/>
+          </a:p>
+          <a:p>
+            <a:pPr indent="0" marL="0">
+              <a:lnSpc>
+                <a:spcPct val="130000"/>
+              </a:lnSpc>
+              <a:buNone/>
+            </a:pPr>
+            <a:r>
+              <a:rPr lang="en-US" sz="1200" dirty="0">
+                <a:solidFill>
+                  <a:srgbClr val="F78C6C"/>
+                </a:solidFill>
+                <a:latin typeface="Courier New" pitchFamily="34" charset="0"/>
+                <a:ea typeface="Courier New" pitchFamily="34" charset="-122"/>
+                <a:cs typeface="Courier New" pitchFamily="34" charset="-120"/>
+              </a:rPr>
+              <a:t>  або fallback_events зростає  </a:t>
+            </a:r>
+            <a:pPr indent="0" marL="0">
+              <a:lnSpc>
+                <a:spcPct val="130000"/>
+              </a:lnSpc>
+              <a:buNone/>
+            </a:pPr>
+            <a:r>
+              <a:rPr lang="en-US" sz="1200" dirty="0">
+                <a:solidFill>
+                  <a:srgbClr val="6A7385"/>
+                </a:solidFill>
+                <a:latin typeface="Courier New" pitchFamily="34" charset="0"/>
+                <a:ea typeface="Courier New" pitchFamily="34" charset="-122"/>
+                <a:cs typeface="Courier New" pitchFamily="34" charset="-120"/>
+              </a:rPr>
+              <a:t>протягом 15 хв</a:t>
+            </a:r>
+            <a:endParaRPr lang="en-US" sz="1200" dirty="0"/>
+          </a:p>
+          <a:p>
+            <a:pPr indent="0" marL="0">
+              <a:lnSpc>
+                <a:spcPct val="130000"/>
+              </a:lnSpc>
+              <a:buNone/>
+            </a:pPr>
+            <a:r>
+              <a:rPr lang="en-US" sz="1200" dirty="0">
+                <a:solidFill>
+                  <a:srgbClr val="F78C6C"/>
+                </a:solidFill>
+                <a:latin typeface="Courier New" pitchFamily="34" charset="0"/>
+                <a:ea typeface="Courier New" pitchFamily="34" charset="-122"/>
+                <a:cs typeface="Courier New" pitchFamily="34" charset="-120"/>
+              </a:rPr>
+              <a:t>  або error rate &gt; 5%          </a:t>
+            </a:r>
+            <a:pPr indent="0" marL="0">
+              <a:lnSpc>
+                <a:spcPct val="130000"/>
+              </a:lnSpc>
+              <a:buNone/>
+            </a:pPr>
+            <a:r>
+              <a:rPr lang="en-US" sz="1200" dirty="0">
+                <a:solidFill>
+                  <a:srgbClr val="6A7385"/>
+                </a:solidFill>
+                <a:latin typeface="Courier New" pitchFamily="34" charset="0"/>
+                <a:ea typeface="Courier New" pitchFamily="34" charset="-122"/>
+                <a:cs typeface="Courier New" pitchFamily="34" charset="-120"/>
+              </a:rPr>
+              <a:t>протягом 15 хв</a:t>
+            </a:r>
+            <a:endParaRPr lang="en-US" sz="1200" dirty="0"/>
+          </a:p>
+          <a:p>
+            <a:pPr indent="0" marL="0">
+              <a:lnSpc>
+                <a:spcPct val="130000"/>
+              </a:lnSpc>
+              <a:buNone/>
+            </a:pPr>
+            <a:r>
+              <a:rPr lang="en-US" sz="1200" dirty="0">
+                <a:solidFill>
+                  <a:srgbClr val="C3E88D"/>
+                </a:solidFill>
+                <a:latin typeface="Courier New" pitchFamily="34" charset="0"/>
+                <a:ea typeface="Courier New" pitchFamily="34" charset="-122"/>
+                <a:cs typeface="Courier New" pitchFamily="34" charset="-120"/>
+              </a:rPr>
+              <a:t>Хто смикає: черговий, без погоджень.</a:t>
+            </a:r>
+            <a:endParaRPr lang="en-US" sz="1200" dirty="0"/>
+          </a:p>
+          <a:p>
+            <a:pPr indent="0" marL="0">
+              <a:lnSpc>
+                <a:spcPct val="130000"/>
+              </a:lnSpc>
+              <a:buNone/>
+            </a:pPr>
+            <a:r>
+              <a:rPr lang="en-US" sz="1200" dirty="0">
+                <a:solidFill>
+                  <a:srgbClr val="C3E88D"/>
+                </a:solidFill>
+                <a:latin typeface="Courier New" pitchFamily="34" charset="0"/>
+                <a:ea typeface="Courier New" pitchFamily="34" charset="-122"/>
+                <a:cs typeface="Courier New" pitchFamily="34" charset="-120"/>
+              </a:rPr>
+              <a:t>Як: activate попередньої версії — одна команда.</a:t>
+            </a:r>
+            <a:endParaRPr lang="en-US" sz="1200" dirty="0"/>
+          </a:p>
+        </p:txBody>
+      </p:sp>
+      <p:sp>
+        <p:nvSpPr>
+          <p:cNvPr id="9" name="Shape 7"/>
+          <p:cNvSpPr/>
+          <p:nvPr/>
+        </p:nvSpPr>
+        <p:spPr>
+          <a:xfrm>
+            <a:off x="566928" y="4023360"/>
+            <a:ext cx="3520440" cy="1463040"/>
           </a:xfrm>
           <a:prstGeom prst="roundRect">
             <a:avLst>
@@ -7970,13 +8557,13 @@
       </p:sp>
       <p:sp>
         <p:nvSpPr>
-          <p:cNvPr id="7" name="Shape 5"/>
-          <p:cNvSpPr/>
-          <p:nvPr/>
-        </p:nvSpPr>
-        <p:spPr>
-          <a:xfrm>
-            <a:off x="768096" y="1920240"/>
+          <p:cNvPr id="10" name="Shape 8"/>
+          <p:cNvSpPr/>
+          <p:nvPr/>
+        </p:nvSpPr>
+        <p:spPr>
+          <a:xfrm>
+            <a:off x="768096" y="4206240"/>
             <a:ext cx="384048" cy="384048"/>
           </a:xfrm>
           <a:prstGeom prst="ellipse">
@@ -7990,13 +8577,13 @@
       </p:sp>
       <p:sp>
         <p:nvSpPr>
-          <p:cNvPr id="8" name="Text 6"/>
-          <p:cNvSpPr/>
-          <p:nvPr/>
-        </p:nvSpPr>
-        <p:spPr>
-          <a:xfrm>
-            <a:off x="768096" y="1920240"/>
+          <p:cNvPr id="11" name="Text 9"/>
+          <p:cNvSpPr/>
+          <p:nvPr/>
+        </p:nvSpPr>
+        <p:spPr>
+          <a:xfrm>
+            <a:off x="768096" y="4206240"/>
             <a:ext cx="384048" cy="384048"/>
           </a:xfrm>
           <a:prstGeom prst="rect">
@@ -8029,14 +8616,14 @@
       </p:sp>
       <p:sp>
         <p:nvSpPr>
-          <p:cNvPr id="9" name="Text 7"/>
-          <p:cNvSpPr/>
-          <p:nvPr/>
-        </p:nvSpPr>
-        <p:spPr>
-          <a:xfrm>
-            <a:off x="1280160" y="1892808"/>
-            <a:ext cx="4617720" cy="438912"/>
+          <p:cNvPr id="12" name="Text 10"/>
+          <p:cNvSpPr/>
+          <p:nvPr/>
+        </p:nvSpPr>
+        <p:spPr>
+          <a:xfrm>
+            <a:off x="1280160" y="4178808"/>
+            <a:ext cx="2606040" cy="438912"/>
           </a:xfrm>
           <a:prstGeom prst="rect">
             <a:avLst/>
@@ -8060,7 +8647,7 @@
                 <a:ea typeface="Calibri" pitchFamily="34" charset="-122"/>
                 <a:cs typeface="Calibri" pitchFamily="34" charset="-120"/>
               </a:rPr>
-              <a:t>eval-gate.yml по кроках</a:t>
+              <a:t>Умова</a:t>
             </a:r>
             <a:endParaRPr lang="en-US" sz="1450" dirty="0"/>
           </a:p>
@@ -8068,14 +8655,14 @@
       </p:sp>
       <p:sp>
         <p:nvSpPr>
-          <p:cNvPr id="10" name="Text 8"/>
-          <p:cNvSpPr/>
-          <p:nvPr/>
-        </p:nvSpPr>
-        <p:spPr>
-          <a:xfrm>
-            <a:off x="768096" y="2423160"/>
-            <a:ext cx="5129784" cy="621792"/>
+          <p:cNvPr id="13" name="Text 11"/>
+          <p:cNvSpPr/>
+          <p:nvPr/>
+        </p:nvSpPr>
+        <p:spPr>
+          <a:xfrm>
+            <a:off x="768096" y="4709160"/>
+            <a:ext cx="3118104" cy="621792"/>
           </a:xfrm>
           <a:prstGeom prst="rect">
             <a:avLst/>
@@ -8099,7 +8686,7 @@
                 <a:ea typeface="Calibri" pitchFamily="34" charset="-122"/>
                 <a:cs typeface="Calibri" pitchFamily="34" charset="-120"/>
               </a:rPr>
-              <a:t>кожен крок — відповідь на конкретні граблі</a:t>
+              <a:t>конкретна метрика і поріг, а не «якщо стане погано»</a:t>
             </a:r>
             <a:endParaRPr lang="en-US" sz="1200" dirty="0"/>
           </a:p>
@@ -8107,14 +8694,14 @@
       </p:sp>
       <p:sp>
         <p:nvSpPr>
-          <p:cNvPr id="11" name="Shape 9"/>
-          <p:cNvSpPr/>
-          <p:nvPr/>
-        </p:nvSpPr>
-        <p:spPr>
-          <a:xfrm>
-            <a:off x="6281928" y="1737360"/>
-            <a:ext cx="5532120" cy="1463040"/>
+          <p:cNvPr id="14" name="Shape 12"/>
+          <p:cNvSpPr/>
+          <p:nvPr/>
+        </p:nvSpPr>
+        <p:spPr>
+          <a:xfrm>
+            <a:off x="4270248" y="4023360"/>
+            <a:ext cx="3520440" cy="1463040"/>
           </a:xfrm>
           <a:prstGeom prst="roundRect">
             <a:avLst>
@@ -8122,40 +8709,40 @@
             </a:avLst>
           </a:prstGeom>
           <a:solidFill>
-            <a:srgbClr val="F9E9E8"/>
+            <a:srgbClr val="E9F3EE"/>
           </a:solidFill>
           <a:ln/>
         </p:spPr>
       </p:sp>
       <p:sp>
         <p:nvSpPr>
-          <p:cNvPr id="12" name="Shape 10"/>
-          <p:cNvSpPr/>
-          <p:nvPr/>
-        </p:nvSpPr>
-        <p:spPr>
-          <a:xfrm>
-            <a:off x="6483096" y="1920240"/>
+          <p:cNvPr id="15" name="Shape 13"/>
+          <p:cNvSpPr/>
+          <p:nvPr/>
+        </p:nvSpPr>
+        <p:spPr>
+          <a:xfrm>
+            <a:off x="4471416" y="4206240"/>
             <a:ext cx="384048" cy="384048"/>
           </a:xfrm>
           <a:prstGeom prst="ellipse">
             <a:avLst/>
           </a:prstGeom>
           <a:solidFill>
-            <a:srgbClr val="B3261E"/>
+            <a:srgbClr val="177245"/>
           </a:solidFill>
           <a:ln/>
         </p:spPr>
       </p:sp>
       <p:sp>
         <p:nvSpPr>
-          <p:cNvPr id="13" name="Text 11"/>
-          <p:cNvSpPr/>
-          <p:nvPr/>
-        </p:nvSpPr>
-        <p:spPr>
-          <a:xfrm>
-            <a:off x="6483096" y="1920240"/>
+          <p:cNvPr id="16" name="Text 14"/>
+          <p:cNvSpPr/>
+          <p:nvPr/>
+        </p:nvSpPr>
+        <p:spPr>
+          <a:xfrm>
+            <a:off x="4471416" y="4206240"/>
             <a:ext cx="384048" cy="384048"/>
           </a:xfrm>
           <a:prstGeom prst="rect">
@@ -8174,7 +8761,7 @@
             <a:r>
               <a:rPr lang="en-US" sz="1200" b="1" dirty="0">
                 <a:solidFill>
-                  <a:srgbClr val="F9E9E8"/>
+                  <a:srgbClr val="E9F3EE"/>
                 </a:solidFill>
                 <a:latin typeface="Courier New" pitchFamily="34" charset="0"/>
                 <a:ea typeface="Courier New" pitchFamily="34" charset="-122"/>
@@ -8188,14 +8775,14 @@
       </p:sp>
       <p:sp>
         <p:nvSpPr>
-          <p:cNvPr id="14" name="Text 12"/>
-          <p:cNvSpPr/>
-          <p:nvPr/>
-        </p:nvSpPr>
-        <p:spPr>
-          <a:xfrm>
-            <a:off x="6995160" y="1892808"/>
-            <a:ext cx="4617720" cy="438912"/>
+          <p:cNvPr id="17" name="Text 15"/>
+          <p:cNvSpPr/>
+          <p:nvPr/>
+        </p:nvSpPr>
+        <p:spPr>
+          <a:xfrm>
+            <a:off x="4983480" y="4178808"/>
+            <a:ext cx="2606040" cy="438912"/>
           </a:xfrm>
           <a:prstGeom prst="rect">
             <a:avLst/>
@@ -8213,13 +8800,13 @@
             <a:r>
               <a:rPr lang="en-US" sz="1450" b="1" dirty="0">
                 <a:solidFill>
-                  <a:srgbClr val="B3261E"/>
+                  <a:srgbClr val="177245"/>
                 </a:solidFill>
                 <a:latin typeface="Calibri" pitchFamily="34" charset="0"/>
                 <a:ea typeface="Calibri" pitchFamily="34" charset="-122"/>
                 <a:cs typeface="Calibri" pitchFamily="34" charset="-120"/>
               </a:rPr>
-              <a:t>PR зі зламаним промптом</a:t>
+              <a:t>Хто</a:t>
             </a:r>
             <a:endParaRPr lang="en-US" sz="1450" dirty="0"/>
           </a:p>
@@ -8227,14 +8814,14 @@
       </p:sp>
       <p:sp>
         <p:nvSpPr>
-          <p:cNvPr id="15" name="Text 13"/>
-          <p:cNvSpPr/>
-          <p:nvPr/>
-        </p:nvSpPr>
-        <p:spPr>
-          <a:xfrm>
-            <a:off x="6483096" y="2423160"/>
-            <a:ext cx="5129784" cy="621792"/>
+          <p:cNvPr id="18" name="Text 16"/>
+          <p:cNvSpPr/>
+          <p:nvPr/>
+        </p:nvSpPr>
+        <p:spPr>
+          <a:xfrm>
+            <a:off x="4471416" y="4709160"/>
+            <a:ext cx="3118104" cy="621792"/>
           </a:xfrm>
           <a:prstGeom prst="rect">
             <a:avLst/>
@@ -8258,7 +8845,7 @@
                 <a:ea typeface="Calibri" pitchFamily="34" charset="-122"/>
                 <a:cs typeface="Calibri" pitchFamily="34" charset="-120"/>
               </a:rPr>
-              <a:t>Actions червоний, merge заблоковано</a:t>
+              <a:t>названа роль, яка має право смикнути, не питаючи дозволу</a:t>
             </a:r>
             <a:endParaRPr lang="en-US" sz="1200" dirty="0"/>
           </a:p>
@@ -8266,14 +8853,14 @@
       </p:sp>
       <p:sp>
         <p:nvSpPr>
-          <p:cNvPr id="16" name="Shape 14"/>
-          <p:cNvSpPr/>
-          <p:nvPr/>
-        </p:nvSpPr>
-        <p:spPr>
-          <a:xfrm>
-            <a:off x="566928" y="3383280"/>
-            <a:ext cx="5532120" cy="1463040"/>
+          <p:cNvPr id="19" name="Shape 17"/>
+          <p:cNvSpPr/>
+          <p:nvPr/>
+        </p:nvSpPr>
+        <p:spPr>
+          <a:xfrm>
+            <a:off x="7973568" y="4023360"/>
+            <a:ext cx="3520440" cy="1463040"/>
           </a:xfrm>
           <a:prstGeom prst="roundRect">
             <a:avLst>
@@ -8288,13 +8875,13 @@
       </p:sp>
       <p:sp>
         <p:nvSpPr>
-          <p:cNvPr id="17" name="Shape 15"/>
-          <p:cNvSpPr/>
-          <p:nvPr/>
-        </p:nvSpPr>
-        <p:spPr>
-          <a:xfrm>
-            <a:off x="768096" y="3566160"/>
+          <p:cNvPr id="20" name="Shape 18"/>
+          <p:cNvSpPr/>
+          <p:nvPr/>
+        </p:nvSpPr>
+        <p:spPr>
+          <a:xfrm>
+            <a:off x="8174736" y="4206240"/>
             <a:ext cx="384048" cy="384048"/>
           </a:xfrm>
           <a:prstGeom prst="ellipse">
@@ -8308,13 +8895,13 @@
       </p:sp>
       <p:sp>
         <p:nvSpPr>
-          <p:cNvPr id="18" name="Text 16"/>
-          <p:cNvSpPr/>
-          <p:nvPr/>
-        </p:nvSpPr>
-        <p:spPr>
-          <a:xfrm>
-            <a:off x="768096" y="3566160"/>
+          <p:cNvPr id="21" name="Text 19"/>
+          <p:cNvSpPr/>
+          <p:nvPr/>
+        </p:nvSpPr>
+        <p:spPr>
+          <a:xfrm>
+            <a:off x="8174736" y="4206240"/>
             <a:ext cx="384048" cy="384048"/>
           </a:xfrm>
           <a:prstGeom prst="rect">
@@ -8347,14 +8934,14 @@
       </p:sp>
       <p:sp>
         <p:nvSpPr>
-          <p:cNvPr id="19" name="Text 17"/>
-          <p:cNvSpPr/>
-          <p:nvPr/>
-        </p:nvSpPr>
-        <p:spPr>
-          <a:xfrm>
-            <a:off x="1280160" y="3538728"/>
-            <a:ext cx="4617720" cy="438912"/>
+          <p:cNvPr id="22" name="Text 20"/>
+          <p:cNvSpPr/>
+          <p:nvPr/>
+        </p:nvSpPr>
+        <p:spPr>
+          <a:xfrm>
+            <a:off x="8686800" y="4178808"/>
+            <a:ext cx="2606040" cy="438912"/>
           </a:xfrm>
           <a:prstGeom prst="rect">
             <a:avLst/>
@@ -8378,7 +8965,7 @@
                 <a:ea typeface="Calibri" pitchFamily="34" charset="-122"/>
                 <a:cs typeface="Calibri" pitchFamily="34" charset="-120"/>
               </a:rPr>
-              <a:t>фікс → зелений</a:t>
+              <a:t>Чим</a:t>
             </a:r>
             <a:endParaRPr lang="en-US" sz="1450" dirty="0"/>
           </a:p>
@@ -8386,14 +8973,14 @@
       </p:sp>
       <p:sp>
         <p:nvSpPr>
-          <p:cNvPr id="20" name="Text 18"/>
-          <p:cNvSpPr/>
-          <p:nvPr/>
-        </p:nvSpPr>
-        <p:spPr>
-          <a:xfrm>
-            <a:off x="768096" y="4069080"/>
-            <a:ext cx="5129784" cy="621792"/>
+          <p:cNvPr id="23" name="Text 21"/>
+          <p:cNvSpPr/>
+          <p:nvPr/>
+        </p:nvSpPr>
+        <p:spPr>
+          <a:xfrm>
+            <a:off x="8174736" y="4709160"/>
+            <a:ext cx="3118104" cy="621792"/>
           </a:xfrm>
           <a:prstGeom prst="rect">
             <a:avLst/>
@@ -8417,7 +9004,7 @@
                 <a:ea typeface="Calibri" pitchFamily="34" charset="-122"/>
                 <a:cs typeface="Calibri" pitchFamily="34" charset="-120"/>
               </a:rPr>
-              <a:t>той самий PR стає мержабельним</a:t>
+              <a:t>точна команда — щоб виконати її о 3-й ночі без роздумів</a:t>
             </a:r>
             <a:endParaRPr lang="en-US" sz="1200" dirty="0"/>
           </a:p>
@@ -8425,258 +9012,60 @@
       </p:sp>
       <p:sp>
         <p:nvSpPr>
-          <p:cNvPr id="21" name="Shape 19"/>
-          <p:cNvSpPr/>
-          <p:nvPr/>
-        </p:nvSpPr>
-        <p:spPr>
-          <a:xfrm>
-            <a:off x="6281928" y="3383280"/>
-            <a:ext cx="5532120" cy="1463040"/>
+          <p:cNvPr id="24" name="Shape 22"/>
+          <p:cNvSpPr/>
+          <p:nvPr/>
+        </p:nvSpPr>
+        <p:spPr>
+          <a:xfrm>
+            <a:off x="566928" y="5623560"/>
+            <a:ext cx="11064240" cy="658368"/>
           </a:xfrm>
           <a:prstGeom prst="roundRect">
             <a:avLst>
-              <a:gd name="adj" fmla="val 7500"/>
+              <a:gd name="adj" fmla="val 16667"/>
             </a:avLst>
           </a:prstGeom>
           <a:solidFill>
-            <a:srgbClr val="E9F3EE"/>
+            <a:srgbClr val="ECEBFB"/>
           </a:solidFill>
           <a:ln/>
         </p:spPr>
       </p:sp>
       <p:sp>
         <p:nvSpPr>
-          <p:cNvPr id="22" name="Shape 20"/>
-          <p:cNvSpPr/>
-          <p:nvPr/>
-        </p:nvSpPr>
-        <p:spPr>
-          <a:xfrm>
-            <a:off x="6483096" y="3566160"/>
-            <a:ext cx="384048" cy="384048"/>
-          </a:xfrm>
-          <a:prstGeom prst="ellipse">
-            <a:avLst/>
-          </a:prstGeom>
-          <a:solidFill>
-            <a:srgbClr val="177245"/>
-          </a:solidFill>
-          <a:ln/>
-        </p:spPr>
-      </p:sp>
-      <p:sp>
-        <p:nvSpPr>
-          <p:cNvPr id="23" name="Text 21"/>
-          <p:cNvSpPr/>
-          <p:nvPr/>
-        </p:nvSpPr>
-        <p:spPr>
-          <a:xfrm>
-            <a:off x="6483096" y="3566160"/>
-            <a:ext cx="384048" cy="384048"/>
-          </a:xfrm>
-          <a:prstGeom prst="rect">
-            <a:avLst/>
-          </a:prstGeom>
-          <a:noFill/>
-          <a:ln/>
-        </p:spPr>
-        <p:txBody>
-          <a:bodyPr wrap="square" lIns="0" tIns="0" rIns="0" bIns="0" rtlCol="0" anchor="ctr"/>
-          <a:lstStyle/>
-          <a:p>
-            <a:pPr algn="ctr" indent="0" marL="0">
-              <a:buNone/>
-            </a:pPr>
-            <a:r>
-              <a:rPr lang="en-US" sz="1200" b="1" dirty="0">
-                <a:solidFill>
-                  <a:srgbClr val="E9F3EE"/>
-                </a:solidFill>
-                <a:latin typeface="Courier New" pitchFamily="34" charset="0"/>
-                <a:ea typeface="Courier New" pitchFamily="34" charset="-122"/>
-                <a:cs typeface="Courier New" pitchFamily="34" charset="-120"/>
-              </a:rPr>
-              <a:t>4</a:t>
-            </a:r>
-            <a:endParaRPr lang="en-US" sz="1200" dirty="0"/>
-          </a:p>
-        </p:txBody>
-      </p:sp>
-      <p:sp>
-        <p:nvSpPr>
-          <p:cNvPr id="24" name="Text 22"/>
-          <p:cNvSpPr/>
-          <p:nvPr/>
-        </p:nvSpPr>
-        <p:spPr>
-          <a:xfrm>
-            <a:off x="6995160" y="3538728"/>
-            <a:ext cx="4617720" cy="438912"/>
-          </a:xfrm>
-          <a:prstGeom prst="rect">
-            <a:avLst/>
-          </a:prstGeom>
-          <a:noFill/>
-          <a:ln/>
-        </p:spPr>
-        <p:txBody>
-          <a:bodyPr wrap="square" lIns="0" tIns="0" rIns="0" bIns="0" rtlCol="0" anchor="ctr"/>
-          <a:lstStyle/>
-          <a:p>
-            <a:pPr indent="0" marL="0">
-              <a:buNone/>
-            </a:pPr>
-            <a:r>
-              <a:rPr lang="en-US" sz="1450" b="1" dirty="0">
-                <a:solidFill>
-                  <a:srgbClr val="177245"/>
+          <p:cNvPr id="25" name="Text 23"/>
+          <p:cNvSpPr/>
+          <p:nvPr/>
+        </p:nvSpPr>
+        <p:spPr>
+          <a:xfrm>
+            <a:off x="786384" y="5769864"/>
+            <a:ext cx="10625328" cy="365760"/>
+          </a:xfrm>
+          <a:prstGeom prst="rect">
+            <a:avLst/>
+          </a:prstGeom>
+          <a:noFill/>
+          <a:ln/>
+        </p:spPr>
+        <p:txBody>
+          <a:bodyPr wrap="square" lIns="0" tIns="0" rIns="0" bIns="0" rtlCol="0" anchor="ctr"/>
+          <a:lstStyle/>
+          <a:p>
+            <a:pPr indent="0" marL="0">
+              <a:buNone/>
+            </a:pPr>
+            <a:r>
+              <a:rPr lang="en-US" sz="1300" dirty="0">
+                <a:solidFill>
+                  <a:srgbClr val="1B1D23"/>
                 </a:solidFill>
                 <a:latin typeface="Calibri" pitchFamily="34" charset="0"/>
                 <a:ea typeface="Calibri" pitchFamily="34" charset="-122"/>
                 <a:cs typeface="Calibri" pitchFamily="34" charset="-120"/>
               </a:rPr>
-              <a:t>required check у налаштуваннях</a:t>
-            </a:r>
-            <a:endParaRPr lang="en-US" sz="1450" dirty="0"/>
-          </a:p>
-        </p:txBody>
-      </p:sp>
-      <p:sp>
-        <p:nvSpPr>
-          <p:cNvPr id="25" name="Text 23"/>
-          <p:cNvSpPr/>
-          <p:nvPr/>
-        </p:nvSpPr>
-        <p:spPr>
-          <a:xfrm>
-            <a:off x="6483096" y="4069080"/>
-            <a:ext cx="5129784" cy="621792"/>
-          </a:xfrm>
-          <a:prstGeom prst="rect">
-            <a:avLst/>
-          </a:prstGeom>
-          <a:noFill/>
-          <a:ln/>
-        </p:spPr>
-        <p:txBody>
-          <a:bodyPr wrap="square" lIns="0" tIns="0" rIns="0" bIns="0" rtlCol="0" anchor="t"/>
-          <a:lstStyle/>
-          <a:p>
-            <a:pPr indent="0" marL="0">
-              <a:buNone/>
-            </a:pPr>
-            <a:r>
-              <a:rPr lang="en-US" sz="1200" dirty="0">
-                <a:solidFill>
-                  <a:srgbClr val="1B1D23"/>
-                </a:solidFill>
-                <a:latin typeface="Calibri" pitchFamily="34" charset="0"/>
-                <a:ea typeface="Calibri" pitchFamily="34" charset="-122"/>
-                <a:cs typeface="Calibri" pitchFamily="34" charset="-120"/>
-              </a:rPr>
-              <a:t>job eval, а не workflow</a:t>
-            </a:r>
-            <a:endParaRPr lang="en-US" sz="1200" dirty="0"/>
-          </a:p>
-        </p:txBody>
-      </p:sp>
-      <p:sp>
-        <p:nvSpPr>
-          <p:cNvPr id="26" name="Shape 24"/>
-          <p:cNvSpPr/>
-          <p:nvPr/>
-        </p:nvSpPr>
-        <p:spPr>
-          <a:xfrm>
-            <a:off x="566928" y="5074920"/>
-            <a:ext cx="11064240" cy="1051560"/>
-          </a:xfrm>
-          <a:prstGeom prst="roundRect">
-            <a:avLst>
-              <a:gd name="adj" fmla="val 10435"/>
-            </a:avLst>
-          </a:prstGeom>
-          <a:solidFill>
-            <a:srgbClr val="ECEBFB"/>
-          </a:solidFill>
-          <a:ln/>
-        </p:spPr>
-      </p:sp>
-      <p:sp>
-        <p:nvSpPr>
-          <p:cNvPr id="27" name="Text 25"/>
-          <p:cNvSpPr/>
-          <p:nvPr/>
-        </p:nvSpPr>
-        <p:spPr>
-          <a:xfrm>
-            <a:off x="786384" y="5202936"/>
-            <a:ext cx="10625328" cy="219456"/>
-          </a:xfrm>
-          <a:prstGeom prst="rect">
-            <a:avLst/>
-          </a:prstGeom>
-          <a:noFill/>
-          <a:ln/>
-        </p:spPr>
-        <p:txBody>
-          <a:bodyPr wrap="square" lIns="0" tIns="0" rIns="0" bIns="0" rtlCol="0" anchor="ctr"/>
-          <a:lstStyle/>
-          <a:p>
-            <a:pPr indent="0" marL="0">
-              <a:buNone/>
-            </a:pPr>
-            <a:r>
-              <a:rPr lang="en-US" sz="950" b="1" spc="150" kern="0" dirty="0">
-                <a:solidFill>
-                  <a:srgbClr val="4038C4"/>
-                </a:solidFill>
-                <a:latin typeface="Courier New" pitchFamily="34" charset="0"/>
-                <a:ea typeface="Courier New" pitchFamily="34" charset="-122"/>
-                <a:cs typeface="Courier New" pitchFamily="34" charset="-120"/>
-              </a:rPr>
-              <a:t>НАВІЩО</a:t>
-            </a:r>
-            <a:endParaRPr lang="en-US" sz="950" dirty="0"/>
-          </a:p>
-        </p:txBody>
-      </p:sp>
-      <p:sp>
-        <p:nvSpPr>
-          <p:cNvPr id="28" name="Text 26"/>
-          <p:cNvSpPr/>
-          <p:nvPr/>
-        </p:nvSpPr>
-        <p:spPr>
-          <a:xfrm>
-            <a:off x="786384" y="5458968"/>
-            <a:ext cx="10625328" cy="539496"/>
-          </a:xfrm>
-          <a:prstGeom prst="rect">
-            <a:avLst/>
-          </a:prstGeom>
-          <a:noFill/>
-          <a:ln/>
-        </p:spPr>
-        <p:txBody>
-          <a:bodyPr wrap="square" lIns="0" tIns="0" rIns="0" bIns="0" rtlCol="0" anchor="ctr"/>
-          <a:lstStyle/>
-          <a:p>
-            <a:pPr indent="0" marL="0">
-              <a:buNone/>
-            </a:pPr>
-            <a:r>
-              <a:rPr lang="en-US" sz="1300" dirty="0">
-                <a:solidFill>
-                  <a:srgbClr val="1B1D23"/>
-                </a:solidFill>
-                <a:latin typeface="Calibri" pitchFamily="34" charset="0"/>
-                <a:ea typeface="Calibri" pitchFamily="34" charset="-122"/>
-                <a:cs typeface="Calibri" pitchFamily="34" charset="-120"/>
-              </a:rPr>
-              <a:t>Побачити, як якість перестає залежати від дисципліни: перевірка, яку ви вміли робити руками, стає умовою мержу — і працює без вас.</a:t>
+              <a:t>Рішення, ухвалене заздалегідь, виконується за секунди; рішення під час інциденту обговорюється хвилинами.</a:t>
             </a:r>
             <a:endParaRPr lang="en-US" sz="1300" dirty="0"/>
           </a:p>
@@ -8795,7 +9184,7 @@
                 <a:ea typeface="Calibri" pitchFamily="34" charset="-122"/>
                 <a:cs typeface="Calibri" pitchFamily="34" charset="-120"/>
               </a:rPr>
-              <a:t>Лабораторна: чотири кроки + опційний</a:t>
+              <a:t>Зараз ви побачите — і навіщо</a:t>
             </a:r>
             <a:endParaRPr lang="en-US" sz="2500" dirty="0"/>
           </a:p>
@@ -8909,28 +9298,50 @@
         </p:nvSpPr>
         <p:spPr>
           <a:xfrm>
-            <a:off x="566928" y="1828800"/>
-            <a:ext cx="457200" cy="457200"/>
+            <a:off x="566928" y="1737360"/>
+            <a:ext cx="5532120" cy="1463040"/>
+          </a:xfrm>
+          <a:prstGeom prst="roundRect">
+            <a:avLst>
+              <a:gd name="adj" fmla="val 7500"/>
+            </a:avLst>
+          </a:prstGeom>
+          <a:solidFill>
+            <a:srgbClr val="E9F3EE"/>
+          </a:solidFill>
+          <a:ln/>
+        </p:spPr>
+      </p:sp>
+      <p:sp>
+        <p:nvSpPr>
+          <p:cNvPr id="7" name="Shape 5"/>
+          <p:cNvSpPr/>
+          <p:nvPr/>
+        </p:nvSpPr>
+        <p:spPr>
+          <a:xfrm>
+            <a:off x="768096" y="1920240"/>
+            <a:ext cx="384048" cy="384048"/>
           </a:xfrm>
           <a:prstGeom prst="ellipse">
             <a:avLst/>
           </a:prstGeom>
           <a:solidFill>
-            <a:srgbClr val="4038C4"/>
+            <a:srgbClr val="177245"/>
           </a:solidFill>
           <a:ln/>
         </p:spPr>
       </p:sp>
       <p:sp>
         <p:nvSpPr>
-          <p:cNvPr id="7" name="Text 5"/>
-          <p:cNvSpPr/>
-          <p:nvPr/>
-        </p:nvSpPr>
-        <p:spPr>
-          <a:xfrm>
-            <a:off x="566928" y="1828800"/>
-            <a:ext cx="457200" cy="457200"/>
+          <p:cNvPr id="8" name="Text 6"/>
+          <p:cNvSpPr/>
+          <p:nvPr/>
+        </p:nvSpPr>
+        <p:spPr>
+          <a:xfrm>
+            <a:off x="768096" y="1920240"/>
+            <a:ext cx="384048" cy="384048"/>
           </a:xfrm>
           <a:prstGeom prst="rect">
             <a:avLst/>
@@ -8946,9 +9357,9 @@
               <a:buNone/>
             </a:pPr>
             <a:r>
-              <a:rPr lang="en-US" sz="1300" b="1" dirty="0">
-                <a:solidFill>
-                  <a:srgbClr val="FFFFFF"/>
+              <a:rPr lang="en-US" sz="1200" b="1" dirty="0">
+                <a:solidFill>
+                  <a:srgbClr val="E9F3EE"/>
                 </a:solidFill>
                 <a:latin typeface="Courier New" pitchFamily="34" charset="0"/>
                 <a:ea typeface="Courier New" pitchFamily="34" charset="-122"/>
@@ -8956,93 +9367,140 @@
               </a:rPr>
               <a:t>1</a:t>
             </a:r>
-            <a:endParaRPr lang="en-US" sz="1300" dirty="0"/>
-          </a:p>
-        </p:txBody>
-      </p:sp>
-      <p:sp>
-        <p:nvSpPr>
-          <p:cNvPr id="8" name="Text 6"/>
-          <p:cNvSpPr/>
-          <p:nvPr/>
-        </p:nvSpPr>
-        <p:spPr>
-          <a:xfrm>
-            <a:off x="1188720" y="1828800"/>
-            <a:ext cx="10424160" cy="457200"/>
-          </a:xfrm>
-          <a:prstGeom prst="rect">
-            <a:avLst/>
-          </a:prstGeom>
-          <a:noFill/>
-          <a:ln/>
-        </p:spPr>
-        <p:txBody>
-          <a:bodyPr wrap="square" lIns="0" tIns="0" rIns="0" bIns="0" rtlCol="0" anchor="ctr"/>
-          <a:lstStyle/>
-          <a:p>
-            <a:pPr indent="0" marL="0">
-              <a:buNone/>
-            </a:pPr>
-            <a:r>
-              <a:rPr lang="en-US" sz="1400" b="1" dirty="0">
-                <a:solidFill>
-                  <a:srgbClr val="1B1D23"/>
+            <a:endParaRPr lang="en-US" sz="1200" dirty="0"/>
+          </a:p>
+        </p:txBody>
+      </p:sp>
+      <p:sp>
+        <p:nvSpPr>
+          <p:cNvPr id="9" name="Text 7"/>
+          <p:cNvSpPr/>
+          <p:nvPr/>
+        </p:nvSpPr>
+        <p:spPr>
+          <a:xfrm>
+            <a:off x="1280160" y="1892808"/>
+            <a:ext cx="4617720" cy="438912"/>
+          </a:xfrm>
+          <a:prstGeom prst="rect">
+            <a:avLst/>
+          </a:prstGeom>
+          <a:noFill/>
+          <a:ln/>
+        </p:spPr>
+        <p:txBody>
+          <a:bodyPr wrap="square" lIns="0" tIns="0" rIns="0" bIns="0" rtlCol="0" anchor="ctr"/>
+          <a:lstStyle/>
+          <a:p>
+            <a:pPr indent="0" marL="0">
+              <a:buNone/>
+            </a:pPr>
+            <a:r>
+              <a:rPr lang="en-US" sz="1450" b="1" dirty="0">
+                <a:solidFill>
+                  <a:srgbClr val="177245"/>
                 </a:solidFill>
                 <a:latin typeface="Calibri" pitchFamily="34" charset="0"/>
                 <a:ea typeface="Calibri" pitchFamily="34" charset="-122"/>
                 <a:cs typeface="Calibri" pitchFamily="34" charset="-120"/>
               </a:rPr>
-              <a:t>Прочитати workflow  </a:t>
-            </a:r>
+              <a:t>eval-gate.yml по кроках</a:t>
+            </a:r>
+            <a:endParaRPr lang="en-US" sz="1450" dirty="0"/>
+          </a:p>
+        </p:txBody>
+      </p:sp>
+      <p:sp>
+        <p:nvSpPr>
+          <p:cNvPr id="10" name="Text 8"/>
+          <p:cNvSpPr/>
+          <p:nvPr/>
+        </p:nvSpPr>
+        <p:spPr>
+          <a:xfrm>
+            <a:off x="768096" y="2423160"/>
+            <a:ext cx="5129784" cy="621792"/>
+          </a:xfrm>
+          <a:prstGeom prst="rect">
+            <a:avLst/>
+          </a:prstGeom>
+          <a:noFill/>
+          <a:ln/>
+        </p:spPr>
+        <p:txBody>
+          <a:bodyPr wrap="square" lIns="0" tIns="0" rIns="0" bIns="0" rtlCol="0" anchor="t"/>
+          <a:lstStyle/>
+          <a:p>
             <a:pPr indent="0" marL="0">
               <a:buNone/>
             </a:pPr>
             <a:r>
               <a:rPr lang="en-US" sz="1200" dirty="0">
                 <a:solidFill>
-                  <a:srgbClr val="565C6B"/>
+                  <a:srgbClr val="1B1D23"/>
                 </a:solidFill>
                 <a:latin typeface="Calibri" pitchFamily="34" charset="0"/>
                 <a:ea typeface="Calibri" pitchFamily="34" charset="-122"/>
                 <a:cs typeface="Calibri" pitchFamily="34" charset="-120"/>
               </a:rPr>
-              <a:t>eval-gate.yml: навіщо кожен крок</a:t>
-            </a:r>
-            <a:endParaRPr lang="en-US" sz="1400" dirty="0"/>
-          </a:p>
-        </p:txBody>
-      </p:sp>
-      <p:sp>
-        <p:nvSpPr>
-          <p:cNvPr id="9" name="Shape 7"/>
-          <p:cNvSpPr/>
-          <p:nvPr/>
-        </p:nvSpPr>
-        <p:spPr>
-          <a:xfrm>
-            <a:off x="566928" y="2670048"/>
-            <a:ext cx="457200" cy="457200"/>
+              <a:t>кожен крок — відповідь на конкретні граблі</a:t>
+            </a:r>
+            <a:endParaRPr lang="en-US" sz="1200" dirty="0"/>
+          </a:p>
+        </p:txBody>
+      </p:sp>
+      <p:sp>
+        <p:nvSpPr>
+          <p:cNvPr id="11" name="Shape 9"/>
+          <p:cNvSpPr/>
+          <p:nvPr/>
+        </p:nvSpPr>
+        <p:spPr>
+          <a:xfrm>
+            <a:off x="6281928" y="1737360"/>
+            <a:ext cx="5532120" cy="1463040"/>
+          </a:xfrm>
+          <a:prstGeom prst="roundRect">
+            <a:avLst>
+              <a:gd name="adj" fmla="val 7500"/>
+            </a:avLst>
+          </a:prstGeom>
+          <a:solidFill>
+            <a:srgbClr val="F9E9E8"/>
+          </a:solidFill>
+          <a:ln/>
+        </p:spPr>
+      </p:sp>
+      <p:sp>
+        <p:nvSpPr>
+          <p:cNvPr id="12" name="Shape 10"/>
+          <p:cNvSpPr/>
+          <p:nvPr/>
+        </p:nvSpPr>
+        <p:spPr>
+          <a:xfrm>
+            <a:off x="6483096" y="1920240"/>
+            <a:ext cx="384048" cy="384048"/>
           </a:xfrm>
           <a:prstGeom prst="ellipse">
             <a:avLst/>
           </a:prstGeom>
           <a:solidFill>
-            <a:srgbClr val="4038C4"/>
+            <a:srgbClr val="B3261E"/>
           </a:solidFill>
           <a:ln/>
         </p:spPr>
       </p:sp>
       <p:sp>
         <p:nvSpPr>
-          <p:cNvPr id="10" name="Text 8"/>
-          <p:cNvSpPr/>
-          <p:nvPr/>
-        </p:nvSpPr>
-        <p:spPr>
-          <a:xfrm>
-            <a:off x="566928" y="2670048"/>
-            <a:ext cx="457200" cy="457200"/>
+          <p:cNvPr id="13" name="Text 11"/>
+          <p:cNvSpPr/>
+          <p:nvPr/>
+        </p:nvSpPr>
+        <p:spPr>
+          <a:xfrm>
+            <a:off x="6483096" y="1920240"/>
+            <a:ext cx="384048" cy="384048"/>
           </a:xfrm>
           <a:prstGeom prst="rect">
             <a:avLst/>
@@ -9058,9 +9516,9 @@
               <a:buNone/>
             </a:pPr>
             <a:r>
-              <a:rPr lang="en-US" sz="1300" b="1" dirty="0">
-                <a:solidFill>
-                  <a:srgbClr val="FFFFFF"/>
+              <a:rPr lang="en-US" sz="1200" b="1" dirty="0">
+                <a:solidFill>
+                  <a:srgbClr val="F9E9E8"/>
                 </a:solidFill>
                 <a:latin typeface="Courier New" pitchFamily="34" charset="0"/>
                 <a:ea typeface="Courier New" pitchFamily="34" charset="-122"/>
@@ -9068,93 +9526,140 @@
               </a:rPr>
               <a:t>2</a:t>
             </a:r>
-            <a:endParaRPr lang="en-US" sz="1300" dirty="0"/>
-          </a:p>
-        </p:txBody>
-      </p:sp>
-      <p:sp>
-        <p:nvSpPr>
-          <p:cNvPr id="11" name="Text 9"/>
-          <p:cNvSpPr/>
-          <p:nvPr/>
-        </p:nvSpPr>
-        <p:spPr>
-          <a:xfrm>
-            <a:off x="1188720" y="2670048"/>
-            <a:ext cx="10424160" cy="457200"/>
-          </a:xfrm>
-          <a:prstGeom prst="rect">
-            <a:avLst/>
-          </a:prstGeom>
-          <a:noFill/>
-          <a:ln/>
-        </p:spPr>
-        <p:txBody>
-          <a:bodyPr wrap="square" lIns="0" tIns="0" rIns="0" bIns="0" rtlCol="0" anchor="ctr"/>
-          <a:lstStyle/>
-          <a:p>
-            <a:pPr indent="0" marL="0">
-              <a:buNone/>
-            </a:pPr>
-            <a:r>
-              <a:rPr lang="en-US" sz="1400" b="1" dirty="0">
-                <a:solidFill>
-                  <a:srgbClr val="1B1D23"/>
+            <a:endParaRPr lang="en-US" sz="1200" dirty="0"/>
+          </a:p>
+        </p:txBody>
+      </p:sp>
+      <p:sp>
+        <p:nvSpPr>
+          <p:cNvPr id="14" name="Text 12"/>
+          <p:cNvSpPr/>
+          <p:nvPr/>
+        </p:nvSpPr>
+        <p:spPr>
+          <a:xfrm>
+            <a:off x="6995160" y="1892808"/>
+            <a:ext cx="4617720" cy="438912"/>
+          </a:xfrm>
+          <a:prstGeom prst="rect">
+            <a:avLst/>
+          </a:prstGeom>
+          <a:noFill/>
+          <a:ln/>
+        </p:spPr>
+        <p:txBody>
+          <a:bodyPr wrap="square" lIns="0" tIns="0" rIns="0" bIns="0" rtlCol="0" anchor="ctr"/>
+          <a:lstStyle/>
+          <a:p>
+            <a:pPr indent="0" marL="0">
+              <a:buNone/>
+            </a:pPr>
+            <a:r>
+              <a:rPr lang="en-US" sz="1450" b="1" dirty="0">
+                <a:solidFill>
+                  <a:srgbClr val="B3261E"/>
                 </a:solidFill>
                 <a:latin typeface="Calibri" pitchFamily="34" charset="0"/>
                 <a:ea typeface="Calibri" pitchFamily="34" charset="-122"/>
                 <a:cs typeface="Calibri" pitchFamily="34" charset="-120"/>
               </a:rPr>
-              <a:t>Зламати навмисно  </a:t>
-            </a:r>
+              <a:t>PR зі зламаним промптом</a:t>
+            </a:r>
+            <a:endParaRPr lang="en-US" sz="1450" dirty="0"/>
+          </a:p>
+        </p:txBody>
+      </p:sp>
+      <p:sp>
+        <p:nvSpPr>
+          <p:cNvPr id="15" name="Text 13"/>
+          <p:cNvSpPr/>
+          <p:nvPr/>
+        </p:nvSpPr>
+        <p:spPr>
+          <a:xfrm>
+            <a:off x="6483096" y="2423160"/>
+            <a:ext cx="5129784" cy="621792"/>
+          </a:xfrm>
+          <a:prstGeom prst="rect">
+            <a:avLst/>
+          </a:prstGeom>
+          <a:noFill/>
+          <a:ln/>
+        </p:spPr>
+        <p:txBody>
+          <a:bodyPr wrap="square" lIns="0" tIns="0" rIns="0" bIns="0" rtlCol="0" anchor="t"/>
+          <a:lstStyle/>
+          <a:p>
             <a:pPr indent="0" marL="0">
               <a:buNone/>
             </a:pPr>
             <a:r>
               <a:rPr lang="en-US" sz="1200" dirty="0">
                 <a:solidFill>
-                  <a:srgbClr val="565C6B"/>
+                  <a:srgbClr val="1B1D23"/>
                 </a:solidFill>
                 <a:latin typeface="Calibri" pitchFamily="34" charset="0"/>
                 <a:ea typeface="Calibri" pitchFamily="34" charset="-122"/>
                 <a:cs typeface="Calibri" pitchFamily="34" charset="-120"/>
               </a:rPr>
-              <a:t>PR зі зіпсованим промптом → червоний прогін</a:t>
-            </a:r>
-            <a:endParaRPr lang="en-US" sz="1400" dirty="0"/>
-          </a:p>
-        </p:txBody>
-      </p:sp>
-      <p:sp>
-        <p:nvSpPr>
-          <p:cNvPr id="12" name="Shape 10"/>
-          <p:cNvSpPr/>
-          <p:nvPr/>
-        </p:nvSpPr>
-        <p:spPr>
-          <a:xfrm>
-            <a:off x="566928" y="3511296"/>
-            <a:ext cx="457200" cy="457200"/>
+              <a:t>Actions червоний, merge заблоковано</a:t>
+            </a:r>
+            <a:endParaRPr lang="en-US" sz="1200" dirty="0"/>
+          </a:p>
+        </p:txBody>
+      </p:sp>
+      <p:sp>
+        <p:nvSpPr>
+          <p:cNvPr id="16" name="Shape 14"/>
+          <p:cNvSpPr/>
+          <p:nvPr/>
+        </p:nvSpPr>
+        <p:spPr>
+          <a:xfrm>
+            <a:off x="566928" y="3383280"/>
+            <a:ext cx="5532120" cy="1463040"/>
+          </a:xfrm>
+          <a:prstGeom prst="roundRect">
+            <a:avLst>
+              <a:gd name="adj" fmla="val 7500"/>
+            </a:avLst>
+          </a:prstGeom>
+          <a:solidFill>
+            <a:srgbClr val="E9F3EE"/>
+          </a:solidFill>
+          <a:ln/>
+        </p:spPr>
+      </p:sp>
+      <p:sp>
+        <p:nvSpPr>
+          <p:cNvPr id="17" name="Shape 15"/>
+          <p:cNvSpPr/>
+          <p:nvPr/>
+        </p:nvSpPr>
+        <p:spPr>
+          <a:xfrm>
+            <a:off x="768096" y="3566160"/>
+            <a:ext cx="384048" cy="384048"/>
           </a:xfrm>
           <a:prstGeom prst="ellipse">
             <a:avLst/>
           </a:prstGeom>
           <a:solidFill>
-            <a:srgbClr val="4038C4"/>
+            <a:srgbClr val="177245"/>
           </a:solidFill>
           <a:ln/>
         </p:spPr>
       </p:sp>
       <p:sp>
         <p:nvSpPr>
-          <p:cNvPr id="13" name="Text 11"/>
-          <p:cNvSpPr/>
-          <p:nvPr/>
-        </p:nvSpPr>
-        <p:spPr>
-          <a:xfrm>
-            <a:off x="566928" y="3511296"/>
-            <a:ext cx="457200" cy="457200"/>
+          <p:cNvPr id="18" name="Text 16"/>
+          <p:cNvSpPr/>
+          <p:nvPr/>
+        </p:nvSpPr>
+        <p:spPr>
+          <a:xfrm>
+            <a:off x="768096" y="3566160"/>
+            <a:ext cx="384048" cy="384048"/>
           </a:xfrm>
           <a:prstGeom prst="rect">
             <a:avLst/>
@@ -9170,9 +9675,9 @@
               <a:buNone/>
             </a:pPr>
             <a:r>
-              <a:rPr lang="en-US" sz="1300" b="1" dirty="0">
-                <a:solidFill>
-                  <a:srgbClr val="FFFFFF"/>
+              <a:rPr lang="en-US" sz="1200" b="1" dirty="0">
+                <a:solidFill>
+                  <a:srgbClr val="E9F3EE"/>
                 </a:solidFill>
                 <a:latin typeface="Courier New" pitchFamily="34" charset="0"/>
                 <a:ea typeface="Courier New" pitchFamily="34" charset="-122"/>
@@ -9180,93 +9685,140 @@
               </a:rPr>
               <a:t>3</a:t>
             </a:r>
-            <a:endParaRPr lang="en-US" sz="1300" dirty="0"/>
-          </a:p>
-        </p:txBody>
-      </p:sp>
-      <p:sp>
-        <p:nvSpPr>
-          <p:cNvPr id="14" name="Text 12"/>
-          <p:cNvSpPr/>
-          <p:nvPr/>
-        </p:nvSpPr>
-        <p:spPr>
-          <a:xfrm>
-            <a:off x="1188720" y="3511296"/>
-            <a:ext cx="10424160" cy="457200"/>
-          </a:xfrm>
-          <a:prstGeom prst="rect">
-            <a:avLst/>
-          </a:prstGeom>
-          <a:noFill/>
-          <a:ln/>
-        </p:spPr>
-        <p:txBody>
-          <a:bodyPr wrap="square" lIns="0" tIns="0" rIns="0" bIns="0" rtlCol="0" anchor="ctr"/>
-          <a:lstStyle/>
-          <a:p>
-            <a:pPr indent="0" marL="0">
-              <a:buNone/>
-            </a:pPr>
-            <a:r>
-              <a:rPr lang="en-US" sz="1400" b="1" dirty="0">
-                <a:solidFill>
-                  <a:srgbClr val="1B1D23"/>
+            <a:endParaRPr lang="en-US" sz="1200" dirty="0"/>
+          </a:p>
+        </p:txBody>
+      </p:sp>
+      <p:sp>
+        <p:nvSpPr>
+          <p:cNvPr id="19" name="Text 17"/>
+          <p:cNvSpPr/>
+          <p:nvPr/>
+        </p:nvSpPr>
+        <p:spPr>
+          <a:xfrm>
+            <a:off x="1280160" y="3538728"/>
+            <a:ext cx="4617720" cy="438912"/>
+          </a:xfrm>
+          <a:prstGeom prst="rect">
+            <a:avLst/>
+          </a:prstGeom>
+          <a:noFill/>
+          <a:ln/>
+        </p:spPr>
+        <p:txBody>
+          <a:bodyPr wrap="square" lIns="0" tIns="0" rIns="0" bIns="0" rtlCol="0" anchor="ctr"/>
+          <a:lstStyle/>
+          <a:p>
+            <a:pPr indent="0" marL="0">
+              <a:buNone/>
+            </a:pPr>
+            <a:r>
+              <a:rPr lang="en-US" sz="1450" b="1" dirty="0">
+                <a:solidFill>
+                  <a:srgbClr val="177245"/>
                 </a:solidFill>
                 <a:latin typeface="Calibri" pitchFamily="34" charset="0"/>
                 <a:ea typeface="Calibri" pitchFamily="34" charset="-122"/>
                 <a:cs typeface="Calibri" pitchFamily="34" charset="-120"/>
               </a:rPr>
-              <a:t>Полагодити  </a:t>
-            </a:r>
+              <a:t>фікс → зелений</a:t>
+            </a:r>
+            <a:endParaRPr lang="en-US" sz="1450" dirty="0"/>
+          </a:p>
+        </p:txBody>
+      </p:sp>
+      <p:sp>
+        <p:nvSpPr>
+          <p:cNvPr id="20" name="Text 18"/>
+          <p:cNvSpPr/>
+          <p:nvPr/>
+        </p:nvSpPr>
+        <p:spPr>
+          <a:xfrm>
+            <a:off x="768096" y="4069080"/>
+            <a:ext cx="5129784" cy="621792"/>
+          </a:xfrm>
+          <a:prstGeom prst="rect">
+            <a:avLst/>
+          </a:prstGeom>
+          <a:noFill/>
+          <a:ln/>
+        </p:spPr>
+        <p:txBody>
+          <a:bodyPr wrap="square" lIns="0" tIns="0" rIns="0" bIns="0" rtlCol="0" anchor="t"/>
+          <a:lstStyle/>
+          <a:p>
             <a:pPr indent="0" marL="0">
               <a:buNone/>
             </a:pPr>
             <a:r>
               <a:rPr lang="en-US" sz="1200" dirty="0">
                 <a:solidFill>
-                  <a:srgbClr val="565C6B"/>
+                  <a:srgbClr val="1B1D23"/>
                 </a:solidFill>
                 <a:latin typeface="Calibri" pitchFamily="34" charset="0"/>
                 <a:ea typeface="Calibri" pitchFamily="34" charset="-122"/>
                 <a:cs typeface="Calibri" pitchFamily="34" charset="-120"/>
               </a:rPr>
-              <a:t>фікс у тому ж PR → зелений прогін</a:t>
-            </a:r>
-            <a:endParaRPr lang="en-US" sz="1400" dirty="0"/>
-          </a:p>
-        </p:txBody>
-      </p:sp>
-      <p:sp>
-        <p:nvSpPr>
-          <p:cNvPr id="15" name="Shape 13"/>
-          <p:cNvSpPr/>
-          <p:nvPr/>
-        </p:nvSpPr>
-        <p:spPr>
-          <a:xfrm>
-            <a:off x="566928" y="4352544"/>
-            <a:ext cx="457200" cy="457200"/>
+              <a:t>той самий PR стає мержабельним</a:t>
+            </a:r>
+            <a:endParaRPr lang="en-US" sz="1200" dirty="0"/>
+          </a:p>
+        </p:txBody>
+      </p:sp>
+      <p:sp>
+        <p:nvSpPr>
+          <p:cNvPr id="21" name="Shape 19"/>
+          <p:cNvSpPr/>
+          <p:nvPr/>
+        </p:nvSpPr>
+        <p:spPr>
+          <a:xfrm>
+            <a:off x="6281928" y="3383280"/>
+            <a:ext cx="5532120" cy="1463040"/>
+          </a:xfrm>
+          <a:prstGeom prst="roundRect">
+            <a:avLst>
+              <a:gd name="adj" fmla="val 7500"/>
+            </a:avLst>
+          </a:prstGeom>
+          <a:solidFill>
+            <a:srgbClr val="E9F3EE"/>
+          </a:solidFill>
+          <a:ln/>
+        </p:spPr>
+      </p:sp>
+      <p:sp>
+        <p:nvSpPr>
+          <p:cNvPr id="22" name="Shape 20"/>
+          <p:cNvSpPr/>
+          <p:nvPr/>
+        </p:nvSpPr>
+        <p:spPr>
+          <a:xfrm>
+            <a:off x="6483096" y="3566160"/>
+            <a:ext cx="384048" cy="384048"/>
           </a:xfrm>
           <a:prstGeom prst="ellipse">
             <a:avLst/>
           </a:prstGeom>
           <a:solidFill>
-            <a:srgbClr val="4038C4"/>
+            <a:srgbClr val="177245"/>
           </a:solidFill>
           <a:ln/>
         </p:spPr>
       </p:sp>
       <p:sp>
         <p:nvSpPr>
-          <p:cNvPr id="16" name="Text 14"/>
-          <p:cNvSpPr/>
-          <p:nvPr/>
-        </p:nvSpPr>
-        <p:spPr>
-          <a:xfrm>
-            <a:off x="566928" y="4352544"/>
-            <a:ext cx="457200" cy="457200"/>
+          <p:cNvPr id="23" name="Text 21"/>
+          <p:cNvSpPr/>
+          <p:nvPr/>
+        </p:nvSpPr>
+        <p:spPr>
+          <a:xfrm>
+            <a:off x="6483096" y="3566160"/>
+            <a:ext cx="384048" cy="384048"/>
           </a:xfrm>
           <a:prstGeom prst="rect">
             <a:avLst/>
@@ -9282,9 +9834,9 @@
               <a:buNone/>
             </a:pPr>
             <a:r>
-              <a:rPr lang="en-US" sz="1300" b="1" dirty="0">
-                <a:solidFill>
-                  <a:srgbClr val="FFFFFF"/>
+              <a:rPr lang="en-US" sz="1200" b="1" dirty="0">
+                <a:solidFill>
+                  <a:srgbClr val="E9F3EE"/>
                 </a:solidFill>
                 <a:latin typeface="Courier New" pitchFamily="34" charset="0"/>
                 <a:ea typeface="Courier New" pitchFamily="34" charset="-122"/>
@@ -9292,172 +9844,185 @@
               </a:rPr>
               <a:t>4</a:t>
             </a:r>
-            <a:endParaRPr lang="en-US" sz="1300" dirty="0"/>
-          </a:p>
-        </p:txBody>
-      </p:sp>
-      <p:sp>
-        <p:nvSpPr>
-          <p:cNvPr id="17" name="Text 15"/>
-          <p:cNvSpPr/>
-          <p:nvPr/>
-        </p:nvSpPr>
-        <p:spPr>
-          <a:xfrm>
-            <a:off x="1188720" y="4352544"/>
-            <a:ext cx="10424160" cy="457200"/>
-          </a:xfrm>
-          <a:prstGeom prst="rect">
-            <a:avLst/>
-          </a:prstGeom>
-          <a:noFill/>
-          <a:ln/>
-        </p:spPr>
-        <p:txBody>
-          <a:bodyPr wrap="square" lIns="0" tIns="0" rIns="0" bIns="0" rtlCol="0" anchor="ctr"/>
-          <a:lstStyle/>
-          <a:p>
-            <a:pPr indent="0" marL="0">
-              <a:buNone/>
-            </a:pPr>
-            <a:r>
-              <a:rPr lang="en-US" sz="1400" b="1" dirty="0">
-                <a:solidFill>
-                  <a:srgbClr val="1B1D23"/>
+            <a:endParaRPr lang="en-US" sz="1200" dirty="0"/>
+          </a:p>
+        </p:txBody>
+      </p:sp>
+      <p:sp>
+        <p:nvSpPr>
+          <p:cNvPr id="24" name="Text 22"/>
+          <p:cNvSpPr/>
+          <p:nvPr/>
+        </p:nvSpPr>
+        <p:spPr>
+          <a:xfrm>
+            <a:off x="6995160" y="3538728"/>
+            <a:ext cx="4617720" cy="438912"/>
+          </a:xfrm>
+          <a:prstGeom prst="rect">
+            <a:avLst/>
+          </a:prstGeom>
+          <a:noFill/>
+          <a:ln/>
+        </p:spPr>
+        <p:txBody>
+          <a:bodyPr wrap="square" lIns="0" tIns="0" rIns="0" bIns="0" rtlCol="0" anchor="ctr"/>
+          <a:lstStyle/>
+          <a:p>
+            <a:pPr indent="0" marL="0">
+              <a:buNone/>
+            </a:pPr>
+            <a:r>
+              <a:rPr lang="en-US" sz="1450" b="1" dirty="0">
+                <a:solidFill>
+                  <a:srgbClr val="177245"/>
                 </a:solidFill>
                 <a:latin typeface="Calibri" pitchFamily="34" charset="0"/>
                 <a:ea typeface="Calibri" pitchFamily="34" charset="-122"/>
                 <a:cs typeface="Calibri" pitchFamily="34" charset="-120"/>
               </a:rPr>
-              <a:t>Увімкнути protection  </a:t>
-            </a:r>
+              <a:t>required check у налаштуваннях</a:t>
+            </a:r>
+            <a:endParaRPr lang="en-US" sz="1450" dirty="0"/>
+          </a:p>
+        </p:txBody>
+      </p:sp>
+      <p:sp>
+        <p:nvSpPr>
+          <p:cNvPr id="25" name="Text 23"/>
+          <p:cNvSpPr/>
+          <p:nvPr/>
+        </p:nvSpPr>
+        <p:spPr>
+          <a:xfrm>
+            <a:off x="6483096" y="4069080"/>
+            <a:ext cx="5129784" cy="621792"/>
+          </a:xfrm>
+          <a:prstGeom prst="rect">
+            <a:avLst/>
+          </a:prstGeom>
+          <a:noFill/>
+          <a:ln/>
+        </p:spPr>
+        <p:txBody>
+          <a:bodyPr wrap="square" lIns="0" tIns="0" rIns="0" bIns="0" rtlCol="0" anchor="t"/>
+          <a:lstStyle/>
+          <a:p>
             <a:pPr indent="0" marL="0">
               <a:buNone/>
             </a:pPr>
             <a:r>
               <a:rPr lang="en-US" sz="1200" dirty="0">
                 <a:solidFill>
-                  <a:srgbClr val="565C6B"/>
+                  <a:srgbClr val="1B1D23"/>
                 </a:solidFill>
                 <a:latin typeface="Calibri" pitchFamily="34" charset="0"/>
                 <a:ea typeface="Calibri" pitchFamily="34" charset="-122"/>
                 <a:cs typeface="Calibri" pitchFamily="34" charset="-120"/>
               </a:rPr>
-              <a:t>required check = job eval; перевірити спробою мержу</a:t>
-            </a:r>
-            <a:endParaRPr lang="en-US" sz="1400" dirty="0"/>
-          </a:p>
-        </p:txBody>
-      </p:sp>
-      <p:sp>
-        <p:nvSpPr>
-          <p:cNvPr id="18" name="Shape 16"/>
-          <p:cNvSpPr/>
-          <p:nvPr/>
-        </p:nvSpPr>
-        <p:spPr>
-          <a:xfrm>
-            <a:off x="566928" y="5193792"/>
-            <a:ext cx="457200" cy="457200"/>
-          </a:xfrm>
-          <a:prstGeom prst="ellipse">
-            <a:avLst/>
+              <a:t>job eval, а не workflow</a:t>
+            </a:r>
+            <a:endParaRPr lang="en-US" sz="1200" dirty="0"/>
+          </a:p>
+        </p:txBody>
+      </p:sp>
+      <p:sp>
+        <p:nvSpPr>
+          <p:cNvPr id="26" name="Shape 24"/>
+          <p:cNvSpPr/>
+          <p:nvPr/>
+        </p:nvSpPr>
+        <p:spPr>
+          <a:xfrm>
+            <a:off x="566928" y="5074920"/>
+            <a:ext cx="11064240" cy="1051560"/>
+          </a:xfrm>
+          <a:prstGeom prst="roundRect">
+            <a:avLst>
+              <a:gd name="adj" fmla="val 10435"/>
+            </a:avLst>
           </a:prstGeom>
           <a:solidFill>
-            <a:srgbClr val="9A5B12"/>
+            <a:srgbClr val="ECEBFB"/>
           </a:solidFill>
           <a:ln/>
         </p:spPr>
       </p:sp>
       <p:sp>
         <p:nvSpPr>
-          <p:cNvPr id="19" name="Text 17"/>
-          <p:cNvSpPr/>
-          <p:nvPr/>
-        </p:nvSpPr>
-        <p:spPr>
-          <a:xfrm>
-            <a:off x="566928" y="5193792"/>
-            <a:ext cx="457200" cy="457200"/>
-          </a:xfrm>
-          <a:prstGeom prst="rect">
-            <a:avLst/>
-          </a:prstGeom>
-          <a:noFill/>
-          <a:ln/>
-        </p:spPr>
-        <p:txBody>
-          <a:bodyPr wrap="square" lIns="0" tIns="0" rIns="0" bIns="0" rtlCol="0" anchor="ctr"/>
-          <a:lstStyle/>
-          <a:p>
-            <a:pPr algn="ctr" indent="0" marL="0">
-              <a:buNone/>
-            </a:pPr>
-            <a:r>
-              <a:rPr lang="en-US" sz="1300" b="1" dirty="0">
-                <a:solidFill>
-                  <a:srgbClr val="FFFFFF"/>
+          <p:cNvPr id="27" name="Text 25"/>
+          <p:cNvSpPr/>
+          <p:nvPr/>
+        </p:nvSpPr>
+        <p:spPr>
+          <a:xfrm>
+            <a:off x="786384" y="5202936"/>
+            <a:ext cx="10625328" cy="219456"/>
+          </a:xfrm>
+          <a:prstGeom prst="rect">
+            <a:avLst/>
+          </a:prstGeom>
+          <a:noFill/>
+          <a:ln/>
+        </p:spPr>
+        <p:txBody>
+          <a:bodyPr wrap="square" lIns="0" tIns="0" rIns="0" bIns="0" rtlCol="0" anchor="ctr"/>
+          <a:lstStyle/>
+          <a:p>
+            <a:pPr indent="0" marL="0">
+              <a:buNone/>
+            </a:pPr>
+            <a:r>
+              <a:rPr lang="en-US" sz="950" b="1" spc="150" kern="0" dirty="0">
+                <a:solidFill>
+                  <a:srgbClr val="4038C4"/>
                 </a:solidFill>
                 <a:latin typeface="Courier New" pitchFamily="34" charset="0"/>
                 <a:ea typeface="Courier New" pitchFamily="34" charset="-122"/>
                 <a:cs typeface="Courier New" pitchFamily="34" charset="-120"/>
               </a:rPr>
-              <a:t>5</a:t>
-            </a:r>
-            <a:endParaRPr lang="en-US" sz="1300" dirty="0"/>
-          </a:p>
-        </p:txBody>
-      </p:sp>
-      <p:sp>
-        <p:nvSpPr>
-          <p:cNvPr id="20" name="Text 18"/>
-          <p:cNvSpPr/>
-          <p:nvPr/>
-        </p:nvSpPr>
-        <p:spPr>
-          <a:xfrm>
-            <a:off x="1188720" y="5193792"/>
-            <a:ext cx="10424160" cy="457200"/>
-          </a:xfrm>
-          <a:prstGeom prst="rect">
-            <a:avLst/>
-          </a:prstGeom>
-          <a:noFill/>
-          <a:ln/>
-        </p:spPr>
-        <p:txBody>
-          <a:bodyPr wrap="square" lIns="0" tIns="0" rIns="0" bIns="0" rtlCol="0" anchor="ctr"/>
-          <a:lstStyle/>
-          <a:p>
-            <a:pPr indent="0" marL="0">
-              <a:buNone/>
-            </a:pPr>
-            <a:r>
-              <a:rPr lang="en-US" sz="1400" b="1" dirty="0">
-                <a:solidFill>
-                  <a:srgbClr val="9A5B12"/>
+              <a:t>НАВІЩО</a:t>
+            </a:r>
+            <a:endParaRPr lang="en-US" sz="950" dirty="0"/>
+          </a:p>
+        </p:txBody>
+      </p:sp>
+      <p:sp>
+        <p:nvSpPr>
+          <p:cNvPr id="28" name="Text 26"/>
+          <p:cNvSpPr/>
+          <p:nvPr/>
+        </p:nvSpPr>
+        <p:spPr>
+          <a:xfrm>
+            <a:off x="786384" y="5458968"/>
+            <a:ext cx="10625328" cy="539496"/>
+          </a:xfrm>
+          <a:prstGeom prst="rect">
+            <a:avLst/>
+          </a:prstGeom>
+          <a:noFill/>
+          <a:ln/>
+        </p:spPr>
+        <p:txBody>
+          <a:bodyPr wrap="square" lIns="0" tIns="0" rIns="0" bIns="0" rtlCol="0" anchor="ctr"/>
+          <a:lstStyle/>
+          <a:p>
+            <a:pPr indent="0" marL="0">
+              <a:buNone/>
+            </a:pPr>
+            <a:r>
+              <a:rPr lang="en-US" sz="1300" dirty="0">
+                <a:solidFill>
+                  <a:srgbClr val="1B1D23"/>
                 </a:solidFill>
                 <a:latin typeface="Calibri" pitchFamily="34" charset="0"/>
                 <a:ea typeface="Calibri" pitchFamily="34" charset="-122"/>
                 <a:cs typeface="Calibri" pitchFamily="34" charset="-120"/>
               </a:rPr>
-              <a:t>Canary-план · опційно  </a:t>
-            </a:r>
-            <a:pPr indent="0" marL="0">
-              <a:buNone/>
-            </a:pPr>
-            <a:r>
-              <a:rPr lang="en-US" sz="1200" dirty="0">
-                <a:solidFill>
-                  <a:srgbClr val="565C6B"/>
-                </a:solidFill>
-                <a:latin typeface="Calibri" pitchFamily="34" charset="0"/>
-                <a:ea typeface="Calibri" pitchFamily="34" charset="-122"/>
-                <a:cs typeface="Calibri" pitchFamily="34" charset="-120"/>
-              </a:rPr>
-              <a:t>розподіл 90/10 своїм роутером + метрики порівняння</a:t>
-            </a:r>
-            <a:endParaRPr lang="en-US" sz="1400" dirty="0"/>
+              <a:t>Побачити, як якість перестає залежати від дисципліни: перевірка, яку ви вміли робити руками, стає умовою мержу — і працює без вас.</a:t>
+            </a:r>
+            <a:endParaRPr lang="en-US" sz="1300" dirty="0"/>
           </a:p>
         </p:txBody>
       </p:sp>
@@ -9574,7 +10139,7 @@
                 <a:ea typeface="Calibri" pitchFamily="34" charset="-122"/>
                 <a:cs typeface="Calibri" pitchFamily="34" charset="-120"/>
               </a:rPr>
-              <a:t>Що це довело</a:t>
+              <a:t>Лабораторна: чотири кроки + опційний</a:t>
             </a:r>
             <a:endParaRPr lang="en-US" sz="2500" dirty="0"/>
           </a:p>
@@ -9597,7 +10162,7 @@
             </a:avLst>
           </a:prstGeom>
           <a:solidFill>
-            <a:srgbClr val="ECEBFB"/>
+            <a:srgbClr val="E9F3EE"/>
           </a:solidFill>
           <a:ln/>
         </p:spPr>
@@ -9629,13 +10194,13 @@
             <a:r>
               <a:rPr lang="en-US" sz="900" b="1" spc="100" kern="0" dirty="0">
                 <a:solidFill>
-                  <a:srgbClr val="4038C4"/>
+                  <a:srgbClr val="177245"/>
                 </a:solidFill>
                 <a:latin typeface="Courier New" pitchFamily="34" charset="0"/>
                 <a:ea typeface="Courier New" pitchFamily="34" charset="-122"/>
                 <a:cs typeface="Courier New" pitchFamily="34" charset="-120"/>
               </a:rPr>
-              <a:t>ТЕОРІЯ</a:t>
+              <a:t>ПРАКТИКА</a:t>
             </a:r>
             <a:endParaRPr lang="en-US" sz="900" dirty="0"/>
           </a:p>
@@ -9688,16 +10253,14 @@
         </p:nvSpPr>
         <p:spPr>
           <a:xfrm>
-            <a:off x="566928" y="1737360"/>
-            <a:ext cx="3566160" cy="1828800"/>
-          </a:xfrm>
-          <a:prstGeom prst="roundRect">
-            <a:avLst>
-              <a:gd name="adj" fmla="val 6000"/>
-            </a:avLst>
+            <a:off x="566928" y="1828800"/>
+            <a:ext cx="457200" cy="457200"/>
+          </a:xfrm>
+          <a:prstGeom prst="ellipse">
+            <a:avLst/>
           </a:prstGeom>
           <a:solidFill>
-            <a:srgbClr val="E9F3EE"/>
+            <a:srgbClr val="4038C4"/>
           </a:solidFill>
           <a:ln/>
         </p:spPr>
@@ -9710,73 +10273,87 @@
         </p:nvSpPr>
         <p:spPr>
           <a:xfrm>
-            <a:off x="768096" y="1892808"/>
-            <a:ext cx="3163824" cy="438912"/>
-          </a:xfrm>
-          <a:prstGeom prst="rect">
-            <a:avLst/>
-          </a:prstGeom>
-          <a:noFill/>
-          <a:ln/>
-        </p:spPr>
-        <p:txBody>
-          <a:bodyPr wrap="square" lIns="0" tIns="0" rIns="0" bIns="0" rtlCol="0" anchor="ctr"/>
-          <a:lstStyle/>
-          <a:p>
-            <a:pPr indent="0" marL="0">
-              <a:buNone/>
-            </a:pPr>
-            <a:r>
-              <a:rPr lang="en-US" sz="1450" b="1" dirty="0">
-                <a:solidFill>
-                  <a:srgbClr val="177245"/>
+            <a:off x="566928" y="1828800"/>
+            <a:ext cx="457200" cy="457200"/>
+          </a:xfrm>
+          <a:prstGeom prst="rect">
+            <a:avLst/>
+          </a:prstGeom>
+          <a:noFill/>
+          <a:ln/>
+        </p:spPr>
+        <p:txBody>
+          <a:bodyPr wrap="square" lIns="0" tIns="0" rIns="0" bIns="0" rtlCol="0" anchor="ctr"/>
+          <a:lstStyle/>
+          <a:p>
+            <a:pPr algn="ctr" indent="0" marL="0">
+              <a:buNone/>
+            </a:pPr>
+            <a:r>
+              <a:rPr lang="en-US" sz="1300" b="1" dirty="0">
+                <a:solidFill>
+                  <a:srgbClr val="FFFFFF"/>
+                </a:solidFill>
+                <a:latin typeface="Courier New" pitchFamily="34" charset="0"/>
+                <a:ea typeface="Courier New" pitchFamily="34" charset="-122"/>
+                <a:cs typeface="Courier New" pitchFamily="34" charset="-120"/>
+              </a:rPr>
+              <a:t>1</a:t>
+            </a:r>
+            <a:endParaRPr lang="en-US" sz="1300" dirty="0"/>
+          </a:p>
+        </p:txBody>
+      </p:sp>
+      <p:sp>
+        <p:nvSpPr>
+          <p:cNvPr id="8" name="Text 6"/>
+          <p:cNvSpPr/>
+          <p:nvPr/>
+        </p:nvSpPr>
+        <p:spPr>
+          <a:xfrm>
+            <a:off x="1188720" y="1828800"/>
+            <a:ext cx="10424160" cy="457200"/>
+          </a:xfrm>
+          <a:prstGeom prst="rect">
+            <a:avLst/>
+          </a:prstGeom>
+          <a:noFill/>
+          <a:ln/>
+        </p:spPr>
+        <p:txBody>
+          <a:bodyPr wrap="square" lIns="0" tIns="0" rIns="0" bIns="0" rtlCol="0" anchor="ctr"/>
+          <a:lstStyle/>
+          <a:p>
+            <a:pPr indent="0" marL="0">
+              <a:buNone/>
+            </a:pPr>
+            <a:r>
+              <a:rPr lang="en-US" sz="1400" b="1" dirty="0">
+                <a:solidFill>
+                  <a:srgbClr val="1B1D23"/>
                 </a:solidFill>
                 <a:latin typeface="Calibri" pitchFamily="34" charset="0"/>
                 <a:ea typeface="Calibri" pitchFamily="34" charset="-122"/>
                 <a:cs typeface="Calibri" pitchFamily="34" charset="-120"/>
               </a:rPr>
-              <a:t>Регресія не пройде</a:t>
-            </a:r>
-            <a:endParaRPr lang="en-US" sz="1450" dirty="0"/>
-          </a:p>
-        </p:txBody>
-      </p:sp>
-      <p:sp>
-        <p:nvSpPr>
-          <p:cNvPr id="8" name="Text 6"/>
-          <p:cNvSpPr/>
-          <p:nvPr/>
-        </p:nvSpPr>
-        <p:spPr>
-          <a:xfrm>
-            <a:off x="768096" y="2423160"/>
-            <a:ext cx="3163824" cy="987552"/>
-          </a:xfrm>
-          <a:prstGeom prst="rect">
-            <a:avLst/>
-          </a:prstGeom>
-          <a:noFill/>
-          <a:ln/>
-        </p:spPr>
-        <p:txBody>
-          <a:bodyPr wrap="square" lIns="0" tIns="0" rIns="0" bIns="0" rtlCol="0" anchor="t"/>
-          <a:lstStyle/>
-          <a:p>
+              <a:t>Прочитати workflow  </a:t>
+            </a:r>
             <a:pPr indent="0" marL="0">
               <a:buNone/>
             </a:pPr>
             <a:r>
               <a:rPr lang="en-US" sz="1200" dirty="0">
                 <a:solidFill>
-                  <a:srgbClr val="1B1D23"/>
+                  <a:srgbClr val="565C6B"/>
                 </a:solidFill>
                 <a:latin typeface="Calibri" pitchFamily="34" charset="0"/>
                 <a:ea typeface="Calibri" pitchFamily="34" charset="-122"/>
                 <a:cs typeface="Calibri" pitchFamily="34" charset="-120"/>
               </a:rPr>
-              <a:t>червоний прогін блокує merge механічно, а не за домовленістю</a:t>
-            </a:r>
-            <a:endParaRPr lang="en-US" sz="1200" dirty="0"/>
+              <a:t>eval-gate.yml: навіщо кожен крок</a:t>
+            </a:r>
+            <a:endParaRPr lang="en-US" sz="1400" dirty="0"/>
           </a:p>
         </p:txBody>
       </p:sp>
@@ -9788,16 +10365,14 @@
         </p:nvSpPr>
         <p:spPr>
           <a:xfrm>
-            <a:off x="4315968" y="1737360"/>
-            <a:ext cx="3566160" cy="1828800"/>
-          </a:xfrm>
-          <a:prstGeom prst="roundRect">
-            <a:avLst>
-              <a:gd name="adj" fmla="val 6000"/>
-            </a:avLst>
+            <a:off x="566928" y="2670048"/>
+            <a:ext cx="457200" cy="457200"/>
+          </a:xfrm>
+          <a:prstGeom prst="ellipse">
+            <a:avLst/>
           </a:prstGeom>
           <a:solidFill>
-            <a:srgbClr val="ECEBFB"/>
+            <a:srgbClr val="4038C4"/>
           </a:solidFill>
           <a:ln/>
         </p:spPr>
@@ -9810,73 +10385,87 @@
         </p:nvSpPr>
         <p:spPr>
           <a:xfrm>
-            <a:off x="4517136" y="1892808"/>
-            <a:ext cx="3163824" cy="438912"/>
-          </a:xfrm>
-          <a:prstGeom prst="rect">
-            <a:avLst/>
-          </a:prstGeom>
-          <a:noFill/>
-          <a:ln/>
-        </p:spPr>
-        <p:txBody>
-          <a:bodyPr wrap="square" lIns="0" tIns="0" rIns="0" bIns="0" rtlCol="0" anchor="ctr"/>
-          <a:lstStyle/>
-          <a:p>
-            <a:pPr indent="0" marL="0">
-              <a:buNone/>
-            </a:pPr>
-            <a:r>
-              <a:rPr lang="en-US" sz="1450" b="1" dirty="0">
-                <a:solidFill>
-                  <a:srgbClr val="4038C4"/>
+            <a:off x="566928" y="2670048"/>
+            <a:ext cx="457200" cy="457200"/>
+          </a:xfrm>
+          <a:prstGeom prst="rect">
+            <a:avLst/>
+          </a:prstGeom>
+          <a:noFill/>
+          <a:ln/>
+        </p:spPr>
+        <p:txBody>
+          <a:bodyPr wrap="square" lIns="0" tIns="0" rIns="0" bIns="0" rtlCol="0" anchor="ctr"/>
+          <a:lstStyle/>
+          <a:p>
+            <a:pPr algn="ctr" indent="0" marL="0">
+              <a:buNone/>
+            </a:pPr>
+            <a:r>
+              <a:rPr lang="en-US" sz="1300" b="1" dirty="0">
+                <a:solidFill>
+                  <a:srgbClr val="FFFFFF"/>
+                </a:solidFill>
+                <a:latin typeface="Courier New" pitchFamily="34" charset="0"/>
+                <a:ea typeface="Courier New" pitchFamily="34" charset="-122"/>
+                <a:cs typeface="Courier New" pitchFamily="34" charset="-120"/>
+              </a:rPr>
+              <a:t>2</a:t>
+            </a:r>
+            <a:endParaRPr lang="en-US" sz="1300" dirty="0"/>
+          </a:p>
+        </p:txBody>
+      </p:sp>
+      <p:sp>
+        <p:nvSpPr>
+          <p:cNvPr id="11" name="Text 9"/>
+          <p:cNvSpPr/>
+          <p:nvPr/>
+        </p:nvSpPr>
+        <p:spPr>
+          <a:xfrm>
+            <a:off x="1188720" y="2670048"/>
+            <a:ext cx="10424160" cy="457200"/>
+          </a:xfrm>
+          <a:prstGeom prst="rect">
+            <a:avLst/>
+          </a:prstGeom>
+          <a:noFill/>
+          <a:ln/>
+        </p:spPr>
+        <p:txBody>
+          <a:bodyPr wrap="square" lIns="0" tIns="0" rIns="0" bIns="0" rtlCol="0" anchor="ctr"/>
+          <a:lstStyle/>
+          <a:p>
+            <a:pPr indent="0" marL="0">
+              <a:buNone/>
+            </a:pPr>
+            <a:r>
+              <a:rPr lang="en-US" sz="1400" b="1" dirty="0">
+                <a:solidFill>
+                  <a:srgbClr val="1B1D23"/>
                 </a:solidFill>
                 <a:latin typeface="Calibri" pitchFamily="34" charset="0"/>
                 <a:ea typeface="Calibri" pitchFamily="34" charset="-122"/>
                 <a:cs typeface="Calibri" pitchFamily="34" charset="-120"/>
               </a:rPr>
-              <a:t>Гейт теж код</a:t>
-            </a:r>
-            <a:endParaRPr lang="en-US" sz="1450" dirty="0"/>
-          </a:p>
-        </p:txBody>
-      </p:sp>
-      <p:sp>
-        <p:nvSpPr>
-          <p:cNvPr id="11" name="Text 9"/>
-          <p:cNvSpPr/>
-          <p:nvPr/>
-        </p:nvSpPr>
-        <p:spPr>
-          <a:xfrm>
-            <a:off x="4517136" y="2423160"/>
-            <a:ext cx="3163824" cy="987552"/>
-          </a:xfrm>
-          <a:prstGeom prst="rect">
-            <a:avLst/>
-          </a:prstGeom>
-          <a:noFill/>
-          <a:ln/>
-        </p:spPr>
-        <p:txBody>
-          <a:bodyPr wrap="square" lIns="0" tIns="0" rIns="0" bIns="0" rtlCol="0" anchor="t"/>
-          <a:lstStyle/>
-          <a:p>
+              <a:t>Зламати навмисно  </a:t>
+            </a:r>
             <a:pPr indent="0" marL="0">
               <a:buNone/>
             </a:pPr>
             <a:r>
               <a:rPr lang="en-US" sz="1200" dirty="0">
                 <a:solidFill>
-                  <a:srgbClr val="1B1D23"/>
+                  <a:srgbClr val="565C6B"/>
                 </a:solidFill>
                 <a:latin typeface="Calibri" pitchFamily="34" charset="0"/>
                 <a:ea typeface="Calibri" pitchFamily="34" charset="-122"/>
                 <a:cs typeface="Calibri" pitchFamily="34" charset="-120"/>
               </a:rPr>
-              <a:t>два червоні прогони, поки він сам не запрацював, — нормальна історія</a:t>
-            </a:r>
-            <a:endParaRPr lang="en-US" sz="1200" dirty="0"/>
+              <a:t>PR зі зіпсованим промптом → червоний прогін</a:t>
+            </a:r>
+            <a:endParaRPr lang="en-US" sz="1400" dirty="0"/>
           </a:p>
         </p:txBody>
       </p:sp>
@@ -9888,23 +10477,16 @@
         </p:nvSpPr>
         <p:spPr>
           <a:xfrm>
-            <a:off x="8065008" y="1737360"/>
-            <a:ext cx="3566160" cy="1828800"/>
-          </a:xfrm>
-          <a:prstGeom prst="roundRect">
-            <a:avLst>
-              <a:gd name="adj" fmla="val 6000"/>
-            </a:avLst>
+            <a:off x="566928" y="3511296"/>
+            <a:ext cx="457200" cy="457200"/>
+          </a:xfrm>
+          <a:prstGeom prst="ellipse">
+            <a:avLst/>
           </a:prstGeom>
           <a:solidFill>
-            <a:srgbClr val="FFFFFF"/>
+            <a:srgbClr val="4038C4"/>
           </a:solidFill>
-          <a:ln w="12700">
-            <a:solidFill>
-              <a:srgbClr val="E4E6EC"/>
-            </a:solidFill>
-            <a:prstDash val="solid"/>
-          </a:ln>
+          <a:ln/>
         </p:spPr>
       </p:sp>
       <p:sp>
@@ -9915,24 +10497,63 @@
         </p:nvSpPr>
         <p:spPr>
           <a:xfrm>
-            <a:off x="8266176" y="1892808"/>
-            <a:ext cx="3163824" cy="438912"/>
-          </a:xfrm>
-          <a:prstGeom prst="rect">
-            <a:avLst/>
-          </a:prstGeom>
-          <a:noFill/>
-          <a:ln/>
-        </p:spPr>
-        <p:txBody>
-          <a:bodyPr wrap="square" lIns="0" tIns="0" rIns="0" bIns="0" rtlCol="0" anchor="ctr"/>
-          <a:lstStyle/>
-          <a:p>
-            <a:pPr indent="0" marL="0">
-              <a:buNone/>
-            </a:pPr>
-            <a:r>
-              <a:rPr lang="en-US" sz="1450" b="1" dirty="0">
+            <a:off x="566928" y="3511296"/>
+            <a:ext cx="457200" cy="457200"/>
+          </a:xfrm>
+          <a:prstGeom prst="rect">
+            <a:avLst/>
+          </a:prstGeom>
+          <a:noFill/>
+          <a:ln/>
+        </p:spPr>
+        <p:txBody>
+          <a:bodyPr wrap="square" lIns="0" tIns="0" rIns="0" bIns="0" rtlCol="0" anchor="ctr"/>
+          <a:lstStyle/>
+          <a:p>
+            <a:pPr algn="ctr" indent="0" marL="0">
+              <a:buNone/>
+            </a:pPr>
+            <a:r>
+              <a:rPr lang="en-US" sz="1300" b="1" dirty="0">
+                <a:solidFill>
+                  <a:srgbClr val="FFFFFF"/>
+                </a:solidFill>
+                <a:latin typeface="Courier New" pitchFamily="34" charset="0"/>
+                <a:ea typeface="Courier New" pitchFamily="34" charset="-122"/>
+                <a:cs typeface="Courier New" pitchFamily="34" charset="-120"/>
+              </a:rPr>
+              <a:t>3</a:t>
+            </a:r>
+            <a:endParaRPr lang="en-US" sz="1300" dirty="0"/>
+          </a:p>
+        </p:txBody>
+      </p:sp>
+      <p:sp>
+        <p:nvSpPr>
+          <p:cNvPr id="14" name="Text 12"/>
+          <p:cNvSpPr/>
+          <p:nvPr/>
+        </p:nvSpPr>
+        <p:spPr>
+          <a:xfrm>
+            <a:off x="1188720" y="3511296"/>
+            <a:ext cx="10424160" cy="457200"/>
+          </a:xfrm>
+          <a:prstGeom prst="rect">
+            <a:avLst/>
+          </a:prstGeom>
+          <a:noFill/>
+          <a:ln/>
+        </p:spPr>
+        <p:txBody>
+          <a:bodyPr wrap="square" lIns="0" tIns="0" rIns="0" bIns="0" rtlCol="0" anchor="ctr"/>
+          <a:lstStyle/>
+          <a:p>
+            <a:pPr indent="0" marL="0">
+              <a:buNone/>
+            </a:pPr>
+            <a:r>
+              <a:rPr lang="en-US" sz="1400" b="1" dirty="0">
                 <a:solidFill>
                   <a:srgbClr val="1B1D23"/>
                 </a:solidFill>
@@ -9940,33 +10561,8 @@
                 <a:ea typeface="Calibri" pitchFamily="34" charset="-122"/>
                 <a:cs typeface="Calibri" pitchFamily="34" charset="-120"/>
               </a:rPr>
-              <a:t>Відкат — рішення заздалегідь</a:t>
-            </a:r>
-            <a:endParaRPr lang="en-US" sz="1450" dirty="0"/>
-          </a:p>
-        </p:txBody>
-      </p:sp>
-      <p:sp>
-        <p:nvSpPr>
-          <p:cNvPr id="14" name="Text 12"/>
-          <p:cNvSpPr/>
-          <p:nvPr/>
-        </p:nvSpPr>
-        <p:spPr>
-          <a:xfrm>
-            <a:off x="8266176" y="2423160"/>
-            <a:ext cx="3163824" cy="987552"/>
-          </a:xfrm>
-          <a:prstGeom prst="rect">
-            <a:avLst/>
-          </a:prstGeom>
-          <a:noFill/>
-          <a:ln/>
-        </p:spPr>
-        <p:txBody>
-          <a:bodyPr wrap="square" lIns="0" tIns="0" rIns="0" bIns="0" rtlCol="0" anchor="t"/>
-          <a:lstStyle/>
-          <a:p>
+              <a:t>Полагодити  </a:t>
+            </a:r>
             <a:pPr indent="0" marL="0">
               <a:buNone/>
             </a:pPr>
@@ -9979,9 +10575,9 @@
                 <a:ea typeface="Calibri" pitchFamily="34" charset="-122"/>
                 <a:cs typeface="Calibri" pitchFamily="34" charset="-120"/>
               </a:rPr>
-              <a:t>умови, роль і команда записані до, а не під час інциденту</a:t>
-            </a:r>
-            <a:endParaRPr lang="en-US" sz="1200" dirty="0"/>
+              <a:t>фікс у тому ж PR → зелений прогін</a:t>
+            </a:r>
+            <a:endParaRPr lang="en-US" sz="1400" dirty="0"/>
           </a:p>
         </p:txBody>
       </p:sp>
@@ -9993,16 +10589,14 @@
         </p:nvSpPr>
         <p:spPr>
           <a:xfrm>
-            <a:off x="566928" y="3977640"/>
-            <a:ext cx="11064240" cy="1234440"/>
-          </a:xfrm>
-          <a:prstGeom prst="roundRect">
-            <a:avLst>
-              <a:gd name="adj" fmla="val 8889"/>
-            </a:avLst>
+            <a:off x="566928" y="4352544"/>
+            <a:ext cx="457200" cy="457200"/>
+          </a:xfrm>
+          <a:prstGeom prst="ellipse">
+            <a:avLst/>
           </a:prstGeom>
           <a:solidFill>
-            <a:srgbClr val="FFFFFF"/>
+            <a:srgbClr val="4038C4"/>
           </a:solidFill>
           <a:ln/>
         </p:spPr>
@@ -10015,24 +10609,63 @@
         </p:nvSpPr>
         <p:spPr>
           <a:xfrm>
-            <a:off x="786384" y="4123944"/>
-            <a:ext cx="10625328" cy="941832"/>
-          </a:xfrm>
-          <a:prstGeom prst="rect">
-            <a:avLst/>
-          </a:prstGeom>
-          <a:noFill/>
-          <a:ln/>
-        </p:spPr>
-        <p:txBody>
-          <a:bodyPr wrap="square" lIns="0" tIns="0" rIns="0" bIns="0" rtlCol="0" anchor="ctr"/>
-          <a:lstStyle/>
-          <a:p>
-            <a:pPr indent="0" marL="0">
-              <a:buNone/>
-            </a:pPr>
-            <a:r>
-              <a:rPr lang="en-US" sz="1300" dirty="0">
+            <a:off x="566928" y="4352544"/>
+            <a:ext cx="457200" cy="457200"/>
+          </a:xfrm>
+          <a:prstGeom prst="rect">
+            <a:avLst/>
+          </a:prstGeom>
+          <a:noFill/>
+          <a:ln/>
+        </p:spPr>
+        <p:txBody>
+          <a:bodyPr wrap="square" lIns="0" tIns="0" rIns="0" bIns="0" rtlCol="0" anchor="ctr"/>
+          <a:lstStyle/>
+          <a:p>
+            <a:pPr algn="ctr" indent="0" marL="0">
+              <a:buNone/>
+            </a:pPr>
+            <a:r>
+              <a:rPr lang="en-US" sz="1300" b="1" dirty="0">
+                <a:solidFill>
+                  <a:srgbClr val="FFFFFF"/>
+                </a:solidFill>
+                <a:latin typeface="Courier New" pitchFamily="34" charset="0"/>
+                <a:ea typeface="Courier New" pitchFamily="34" charset="-122"/>
+                <a:cs typeface="Courier New" pitchFamily="34" charset="-120"/>
+              </a:rPr>
+              <a:t>4</a:t>
+            </a:r>
+            <a:endParaRPr lang="en-US" sz="1300" dirty="0"/>
+          </a:p>
+        </p:txBody>
+      </p:sp>
+      <p:sp>
+        <p:nvSpPr>
+          <p:cNvPr id="17" name="Text 15"/>
+          <p:cNvSpPr/>
+          <p:nvPr/>
+        </p:nvSpPr>
+        <p:spPr>
+          <a:xfrm>
+            <a:off x="1188720" y="4352544"/>
+            <a:ext cx="10424160" cy="457200"/>
+          </a:xfrm>
+          <a:prstGeom prst="rect">
+            <a:avLst/>
+          </a:prstGeom>
+          <a:noFill/>
+          <a:ln/>
+        </p:spPr>
+        <p:txBody>
+          <a:bodyPr wrap="square" lIns="0" tIns="0" rIns="0" bIns="0" rtlCol="0" anchor="ctr"/>
+          <a:lstStyle/>
+          <a:p>
+            <a:pPr indent="0" marL="0">
+              <a:buNone/>
+            </a:pPr>
+            <a:r>
+              <a:rPr lang="en-US" sz="1400" b="1" dirty="0">
                 <a:solidFill>
                   <a:srgbClr val="1B1D23"/>
                 </a:solidFill>
@@ -10040,9 +10673,135 @@
                 <a:ea typeface="Calibri" pitchFamily="34" charset="-122"/>
                 <a:cs typeface="Calibri" pitchFamily="34" charset="-120"/>
               </a:rPr>
-              <a:t>Контур замкнувся: зміна проходить перевірку, перевірка блокує регресію, відкат описаний. Лишилося зібрати це в operating model — останній урок.</a:t>
+              <a:t>Увімкнути protection  </a:t>
+            </a:r>
+            <a:pPr indent="0" marL="0">
+              <a:buNone/>
+            </a:pPr>
+            <a:r>
+              <a:rPr lang="en-US" sz="1200" dirty="0">
+                <a:solidFill>
+                  <a:srgbClr val="565C6B"/>
+                </a:solidFill>
+                <a:latin typeface="Calibri" pitchFamily="34" charset="0"/>
+                <a:ea typeface="Calibri" pitchFamily="34" charset="-122"/>
+                <a:cs typeface="Calibri" pitchFamily="34" charset="-120"/>
+              </a:rPr>
+              <a:t>required check = job eval; перевірити спробою мержу</a:t>
+            </a:r>
+            <a:endParaRPr lang="en-US" sz="1400" dirty="0"/>
+          </a:p>
+        </p:txBody>
+      </p:sp>
+      <p:sp>
+        <p:nvSpPr>
+          <p:cNvPr id="18" name="Shape 16"/>
+          <p:cNvSpPr/>
+          <p:nvPr/>
+        </p:nvSpPr>
+        <p:spPr>
+          <a:xfrm>
+            <a:off x="566928" y="5193792"/>
+            <a:ext cx="457200" cy="457200"/>
+          </a:xfrm>
+          <a:prstGeom prst="ellipse">
+            <a:avLst/>
+          </a:prstGeom>
+          <a:solidFill>
+            <a:srgbClr val="9A5B12"/>
+          </a:solidFill>
+          <a:ln/>
+        </p:spPr>
+      </p:sp>
+      <p:sp>
+        <p:nvSpPr>
+          <p:cNvPr id="19" name="Text 17"/>
+          <p:cNvSpPr/>
+          <p:nvPr/>
+        </p:nvSpPr>
+        <p:spPr>
+          <a:xfrm>
+            <a:off x="566928" y="5193792"/>
+            <a:ext cx="457200" cy="457200"/>
+          </a:xfrm>
+          <a:prstGeom prst="rect">
+            <a:avLst/>
+          </a:prstGeom>
+          <a:noFill/>
+          <a:ln/>
+        </p:spPr>
+        <p:txBody>
+          <a:bodyPr wrap="square" lIns="0" tIns="0" rIns="0" bIns="0" rtlCol="0" anchor="ctr"/>
+          <a:lstStyle/>
+          <a:p>
+            <a:pPr algn="ctr" indent="0" marL="0">
+              <a:buNone/>
+            </a:pPr>
+            <a:r>
+              <a:rPr lang="en-US" sz="1300" b="1" dirty="0">
+                <a:solidFill>
+                  <a:srgbClr val="FFFFFF"/>
+                </a:solidFill>
+                <a:latin typeface="Courier New" pitchFamily="34" charset="0"/>
+                <a:ea typeface="Courier New" pitchFamily="34" charset="-122"/>
+                <a:cs typeface="Courier New" pitchFamily="34" charset="-120"/>
+              </a:rPr>
+              <a:t>5</a:t>
             </a:r>
             <a:endParaRPr lang="en-US" sz="1300" dirty="0"/>
+          </a:p>
+        </p:txBody>
+      </p:sp>
+      <p:sp>
+        <p:nvSpPr>
+          <p:cNvPr id="20" name="Text 18"/>
+          <p:cNvSpPr/>
+          <p:nvPr/>
+        </p:nvSpPr>
+        <p:spPr>
+          <a:xfrm>
+            <a:off x="1188720" y="5193792"/>
+            <a:ext cx="10424160" cy="457200"/>
+          </a:xfrm>
+          <a:prstGeom prst="rect">
+            <a:avLst/>
+          </a:prstGeom>
+          <a:noFill/>
+          <a:ln/>
+        </p:spPr>
+        <p:txBody>
+          <a:bodyPr wrap="square" lIns="0" tIns="0" rIns="0" bIns="0" rtlCol="0" anchor="ctr"/>
+          <a:lstStyle/>
+          <a:p>
+            <a:pPr indent="0" marL="0">
+              <a:buNone/>
+            </a:pPr>
+            <a:r>
+              <a:rPr lang="en-US" sz="1400" b="1" dirty="0">
+                <a:solidFill>
+                  <a:srgbClr val="9A5B12"/>
+                </a:solidFill>
+                <a:latin typeface="Calibri" pitchFamily="34" charset="0"/>
+                <a:ea typeface="Calibri" pitchFamily="34" charset="-122"/>
+                <a:cs typeface="Calibri" pitchFamily="34" charset="-120"/>
+              </a:rPr>
+              <a:t>Canary-план · опційно  </a:t>
+            </a:r>
+            <a:pPr indent="0" marL="0">
+              <a:buNone/>
+            </a:pPr>
+            <a:r>
+              <a:rPr lang="en-US" sz="1200" dirty="0">
+                <a:solidFill>
+                  <a:srgbClr val="565C6B"/>
+                </a:solidFill>
+                <a:latin typeface="Calibri" pitchFamily="34" charset="0"/>
+                <a:ea typeface="Calibri" pitchFamily="34" charset="-122"/>
+                <a:cs typeface="Calibri" pitchFamily="34" charset="-120"/>
+              </a:rPr>
+              <a:t>розподіл 90/10 своїм роутером + метрики порівняння</a:t>
+            </a:r>
+            <a:endParaRPr lang="en-US" sz="1400" dirty="0"/>
           </a:p>
         </p:txBody>
       </p:sp>
@@ -10159,7 +10918,7 @@
                 <a:ea typeface="Calibri" pitchFamily="34" charset="-122"/>
                 <a:cs typeface="Calibri" pitchFamily="34" charset="-120"/>
               </a:rPr>
-              <a:t>Перевір себе</a:t>
+              <a:t>Що це довело</a:t>
             </a:r>
             <a:endParaRPr lang="en-US" sz="2500" dirty="0"/>
           </a:p>
@@ -10273,12 +11032,212 @@
         </p:nvSpPr>
         <p:spPr>
           <a:xfrm>
-            <a:off x="566928" y="1783080"/>
-            <a:ext cx="11064240" cy="1874520"/>
+            <a:off x="566928" y="1737360"/>
+            <a:ext cx="3566160" cy="1828800"/>
           </a:xfrm>
           <a:prstGeom prst="roundRect">
             <a:avLst>
-              <a:gd name="adj" fmla="val 5854"/>
+              <a:gd name="adj" fmla="val 6000"/>
+            </a:avLst>
+          </a:prstGeom>
+          <a:solidFill>
+            <a:srgbClr val="E9F3EE"/>
+          </a:solidFill>
+          <a:ln/>
+        </p:spPr>
+      </p:sp>
+      <p:sp>
+        <p:nvSpPr>
+          <p:cNvPr id="7" name="Text 5"/>
+          <p:cNvSpPr/>
+          <p:nvPr/>
+        </p:nvSpPr>
+        <p:spPr>
+          <a:xfrm>
+            <a:off x="768096" y="1892808"/>
+            <a:ext cx="3163824" cy="438912"/>
+          </a:xfrm>
+          <a:prstGeom prst="rect">
+            <a:avLst/>
+          </a:prstGeom>
+          <a:noFill/>
+          <a:ln/>
+        </p:spPr>
+        <p:txBody>
+          <a:bodyPr wrap="square" lIns="0" tIns="0" rIns="0" bIns="0" rtlCol="0" anchor="ctr"/>
+          <a:lstStyle/>
+          <a:p>
+            <a:pPr indent="0" marL="0">
+              <a:buNone/>
+            </a:pPr>
+            <a:r>
+              <a:rPr lang="en-US" sz="1450" b="1" dirty="0">
+                <a:solidFill>
+                  <a:srgbClr val="177245"/>
+                </a:solidFill>
+                <a:latin typeface="Calibri" pitchFamily="34" charset="0"/>
+                <a:ea typeface="Calibri" pitchFamily="34" charset="-122"/>
+                <a:cs typeface="Calibri" pitchFamily="34" charset="-120"/>
+              </a:rPr>
+              <a:t>Регресія не пройде</a:t>
+            </a:r>
+            <a:endParaRPr lang="en-US" sz="1450" dirty="0"/>
+          </a:p>
+        </p:txBody>
+      </p:sp>
+      <p:sp>
+        <p:nvSpPr>
+          <p:cNvPr id="8" name="Text 6"/>
+          <p:cNvSpPr/>
+          <p:nvPr/>
+        </p:nvSpPr>
+        <p:spPr>
+          <a:xfrm>
+            <a:off x="768096" y="2423160"/>
+            <a:ext cx="3163824" cy="987552"/>
+          </a:xfrm>
+          <a:prstGeom prst="rect">
+            <a:avLst/>
+          </a:prstGeom>
+          <a:noFill/>
+          <a:ln/>
+        </p:spPr>
+        <p:txBody>
+          <a:bodyPr wrap="square" lIns="0" tIns="0" rIns="0" bIns="0" rtlCol="0" anchor="t"/>
+          <a:lstStyle/>
+          <a:p>
+            <a:pPr indent="0" marL="0">
+              <a:buNone/>
+            </a:pPr>
+            <a:r>
+              <a:rPr lang="en-US" sz="1200" dirty="0">
+                <a:solidFill>
+                  <a:srgbClr val="1B1D23"/>
+                </a:solidFill>
+                <a:latin typeface="Calibri" pitchFamily="34" charset="0"/>
+                <a:ea typeface="Calibri" pitchFamily="34" charset="-122"/>
+                <a:cs typeface="Calibri" pitchFamily="34" charset="-120"/>
+              </a:rPr>
+              <a:t>червоний прогін блокує merge механічно, а не за домовленістю</a:t>
+            </a:r>
+            <a:endParaRPr lang="en-US" sz="1200" dirty="0"/>
+          </a:p>
+        </p:txBody>
+      </p:sp>
+      <p:sp>
+        <p:nvSpPr>
+          <p:cNvPr id="9" name="Shape 7"/>
+          <p:cNvSpPr/>
+          <p:nvPr/>
+        </p:nvSpPr>
+        <p:spPr>
+          <a:xfrm>
+            <a:off x="4315968" y="1737360"/>
+            <a:ext cx="3566160" cy="1828800"/>
+          </a:xfrm>
+          <a:prstGeom prst="roundRect">
+            <a:avLst>
+              <a:gd name="adj" fmla="val 6000"/>
+            </a:avLst>
+          </a:prstGeom>
+          <a:solidFill>
+            <a:srgbClr val="ECEBFB"/>
+          </a:solidFill>
+          <a:ln/>
+        </p:spPr>
+      </p:sp>
+      <p:sp>
+        <p:nvSpPr>
+          <p:cNvPr id="10" name="Text 8"/>
+          <p:cNvSpPr/>
+          <p:nvPr/>
+        </p:nvSpPr>
+        <p:spPr>
+          <a:xfrm>
+            <a:off x="4517136" y="1892808"/>
+            <a:ext cx="3163824" cy="438912"/>
+          </a:xfrm>
+          <a:prstGeom prst="rect">
+            <a:avLst/>
+          </a:prstGeom>
+          <a:noFill/>
+          <a:ln/>
+        </p:spPr>
+        <p:txBody>
+          <a:bodyPr wrap="square" lIns="0" tIns="0" rIns="0" bIns="0" rtlCol="0" anchor="ctr"/>
+          <a:lstStyle/>
+          <a:p>
+            <a:pPr indent="0" marL="0">
+              <a:buNone/>
+            </a:pPr>
+            <a:r>
+              <a:rPr lang="en-US" sz="1450" b="1" dirty="0">
+                <a:solidFill>
+                  <a:srgbClr val="4038C4"/>
+                </a:solidFill>
+                <a:latin typeface="Calibri" pitchFamily="34" charset="0"/>
+                <a:ea typeface="Calibri" pitchFamily="34" charset="-122"/>
+                <a:cs typeface="Calibri" pitchFamily="34" charset="-120"/>
+              </a:rPr>
+              <a:t>Гейт теж код</a:t>
+            </a:r>
+            <a:endParaRPr lang="en-US" sz="1450" dirty="0"/>
+          </a:p>
+        </p:txBody>
+      </p:sp>
+      <p:sp>
+        <p:nvSpPr>
+          <p:cNvPr id="11" name="Text 9"/>
+          <p:cNvSpPr/>
+          <p:nvPr/>
+        </p:nvSpPr>
+        <p:spPr>
+          <a:xfrm>
+            <a:off x="4517136" y="2423160"/>
+            <a:ext cx="3163824" cy="987552"/>
+          </a:xfrm>
+          <a:prstGeom prst="rect">
+            <a:avLst/>
+          </a:prstGeom>
+          <a:noFill/>
+          <a:ln/>
+        </p:spPr>
+        <p:txBody>
+          <a:bodyPr wrap="square" lIns="0" tIns="0" rIns="0" bIns="0" rtlCol="0" anchor="t"/>
+          <a:lstStyle/>
+          <a:p>
+            <a:pPr indent="0" marL="0">
+              <a:buNone/>
+            </a:pPr>
+            <a:r>
+              <a:rPr lang="en-US" sz="1200" dirty="0">
+                <a:solidFill>
+                  <a:srgbClr val="1B1D23"/>
+                </a:solidFill>
+                <a:latin typeface="Calibri" pitchFamily="34" charset="0"/>
+                <a:ea typeface="Calibri" pitchFamily="34" charset="-122"/>
+                <a:cs typeface="Calibri" pitchFamily="34" charset="-120"/>
+              </a:rPr>
+              <a:t>два червоні прогони, поки він сам не запрацював, — нормальна історія</a:t>
+            </a:r>
+            <a:endParaRPr lang="en-US" sz="1200" dirty="0"/>
+          </a:p>
+        </p:txBody>
+      </p:sp>
+      <p:sp>
+        <p:nvSpPr>
+          <p:cNvPr id="12" name="Shape 10"/>
+          <p:cNvSpPr/>
+          <p:nvPr/>
+        </p:nvSpPr>
+        <p:spPr>
+          <a:xfrm>
+            <a:off x="8065008" y="1737360"/>
+            <a:ext cx="3566160" cy="1828800"/>
+          </a:xfrm>
+          <a:prstGeom prst="roundRect">
+            <a:avLst>
+              <a:gd name="adj" fmla="val 6000"/>
             </a:avLst>
           </a:prstGeom>
           <a:solidFill>
@@ -10294,460 +11253,140 @@
       </p:sp>
       <p:sp>
         <p:nvSpPr>
-          <p:cNvPr id="7" name="Shape 5"/>
-          <p:cNvSpPr/>
-          <p:nvPr/>
-        </p:nvSpPr>
-        <p:spPr>
-          <a:xfrm>
-            <a:off x="978408" y="2157984"/>
-            <a:ext cx="256032" cy="256032"/>
-          </a:xfrm>
-          <a:prstGeom prst="roundRect">
-            <a:avLst>
-              <a:gd name="adj" fmla="val 21429"/>
-            </a:avLst>
-          </a:prstGeom>
-          <a:solidFill>
-            <a:srgbClr val="E9F3EE"/>
-          </a:solidFill>
-          <a:ln w="12700">
-            <a:solidFill>
-              <a:srgbClr val="177245"/>
-            </a:solidFill>
-            <a:prstDash val="solid"/>
-          </a:ln>
-        </p:spPr>
-      </p:sp>
-      <p:sp>
-        <p:nvSpPr>
-          <p:cNvPr id="8" name="Text 6"/>
-          <p:cNvSpPr/>
-          <p:nvPr/>
-        </p:nvSpPr>
-        <p:spPr>
-          <a:xfrm>
-            <a:off x="978408" y="2157984"/>
-            <a:ext cx="256032" cy="256032"/>
-          </a:xfrm>
-          <a:prstGeom prst="rect">
-            <a:avLst/>
-          </a:prstGeom>
-          <a:noFill/>
-          <a:ln/>
-        </p:spPr>
-        <p:txBody>
-          <a:bodyPr wrap="square" lIns="0" tIns="0" rIns="0" bIns="0" rtlCol="0" anchor="ctr"/>
-          <a:lstStyle/>
-          <a:p>
-            <a:pPr algn="ctr" indent="0" marL="0">
-              <a:buNone/>
-            </a:pPr>
-            <a:r>
-              <a:rPr lang="en-US" sz="1000" b="1" dirty="0">
-                <a:solidFill>
-                  <a:srgbClr val="177245"/>
+          <p:cNvPr id="13" name="Text 11"/>
+          <p:cNvSpPr/>
+          <p:nvPr/>
+        </p:nvSpPr>
+        <p:spPr>
+          <a:xfrm>
+            <a:off x="8266176" y="1892808"/>
+            <a:ext cx="3163824" cy="438912"/>
+          </a:xfrm>
+          <a:prstGeom prst="rect">
+            <a:avLst/>
+          </a:prstGeom>
+          <a:noFill/>
+          <a:ln/>
+        </p:spPr>
+        <p:txBody>
+          <a:bodyPr wrap="square" lIns="0" tIns="0" rIns="0" bIns="0" rtlCol="0" anchor="ctr"/>
+          <a:lstStyle/>
+          <a:p>
+            <a:pPr indent="0" marL="0">
+              <a:buNone/>
+            </a:pPr>
+            <a:r>
+              <a:rPr lang="en-US" sz="1450" b="1" dirty="0">
+                <a:solidFill>
+                  <a:srgbClr val="1B1D23"/>
                 </a:solidFill>
                 <a:latin typeface="Calibri" pitchFamily="34" charset="0"/>
                 <a:ea typeface="Calibri" pitchFamily="34" charset="-122"/>
                 <a:cs typeface="Calibri" pitchFamily="34" charset="-120"/>
               </a:rPr>
-              <a:t>✓</a:t>
-            </a:r>
-            <a:endParaRPr lang="en-US" sz="1000" dirty="0"/>
-          </a:p>
-        </p:txBody>
-      </p:sp>
-      <p:sp>
-        <p:nvSpPr>
-          <p:cNvPr id="9" name="Text 7"/>
-          <p:cNvSpPr/>
-          <p:nvPr/>
-        </p:nvSpPr>
-        <p:spPr>
-          <a:xfrm>
-            <a:off x="1362456" y="2103120"/>
-            <a:ext cx="4617720" cy="384048"/>
-          </a:xfrm>
-          <a:prstGeom prst="rect">
-            <a:avLst/>
-          </a:prstGeom>
-          <a:noFill/>
-          <a:ln/>
-        </p:spPr>
-        <p:txBody>
-          <a:bodyPr wrap="square" lIns="0" tIns="0" rIns="0" bIns="0" rtlCol="0" anchor="ctr"/>
-          <a:lstStyle/>
-          <a:p>
-            <a:pPr indent="0" marL="0">
-              <a:buNone/>
-            </a:pPr>
-            <a:r>
-              <a:rPr lang="en-US" sz="1250" dirty="0">
-                <a:solidFill>
-                  <a:srgbClr val="1B1D23"/>
+              <a:t>Відкат — рішення заздалегідь</a:t>
+            </a:r>
+            <a:endParaRPr lang="en-US" sz="1450" dirty="0"/>
+          </a:p>
+        </p:txBody>
+      </p:sp>
+      <p:sp>
+        <p:nvSpPr>
+          <p:cNvPr id="14" name="Text 12"/>
+          <p:cNvSpPr/>
+          <p:nvPr/>
+        </p:nvSpPr>
+        <p:spPr>
+          <a:xfrm>
+            <a:off x="8266176" y="2423160"/>
+            <a:ext cx="3163824" cy="987552"/>
+          </a:xfrm>
+          <a:prstGeom prst="rect">
+            <a:avLst/>
+          </a:prstGeom>
+          <a:noFill/>
+          <a:ln/>
+        </p:spPr>
+        <p:txBody>
+          <a:bodyPr wrap="square" lIns="0" tIns="0" rIns="0" bIns="0" rtlCol="0" anchor="t"/>
+          <a:lstStyle/>
+          <a:p>
+            <a:pPr indent="0" marL="0">
+              <a:buNone/>
+            </a:pPr>
+            <a:r>
+              <a:rPr lang="en-US" sz="1200" dirty="0">
+                <a:solidFill>
+                  <a:srgbClr val="565C6B"/>
                 </a:solidFill>
                 <a:latin typeface="Calibri" pitchFamily="34" charset="0"/>
                 <a:ea typeface="Calibri" pitchFamily="34" charset="-122"/>
                 <a:cs typeface="Calibri" pitchFamily="34" charset="-120"/>
               </a:rPr>
-              <a:t>в історії Actions є червоний і зелений прогін</a:t>
-            </a:r>
-            <a:endParaRPr lang="en-US" sz="1250" dirty="0"/>
-          </a:p>
-        </p:txBody>
-      </p:sp>
-      <p:sp>
-        <p:nvSpPr>
-          <p:cNvPr id="10" name="Shape 8"/>
-          <p:cNvSpPr/>
-          <p:nvPr/>
-        </p:nvSpPr>
-        <p:spPr>
-          <a:xfrm>
-            <a:off x="978408" y="2724912"/>
-            <a:ext cx="256032" cy="256032"/>
+              <a:t>умови, роль і команда записані до, а не під час інциденту</a:t>
+            </a:r>
+            <a:endParaRPr lang="en-US" sz="1200" dirty="0"/>
+          </a:p>
+        </p:txBody>
+      </p:sp>
+      <p:sp>
+        <p:nvSpPr>
+          <p:cNvPr id="15" name="Shape 13"/>
+          <p:cNvSpPr/>
+          <p:nvPr/>
+        </p:nvSpPr>
+        <p:spPr>
+          <a:xfrm>
+            <a:off x="566928" y="3977640"/>
+            <a:ext cx="11064240" cy="1234440"/>
           </a:xfrm>
           <a:prstGeom prst="roundRect">
             <a:avLst>
-              <a:gd name="adj" fmla="val 21429"/>
+              <a:gd name="adj" fmla="val 8889"/>
             </a:avLst>
           </a:prstGeom>
           <a:solidFill>
-            <a:srgbClr val="E9F3EE"/>
+            <a:srgbClr val="FFFFFF"/>
           </a:solidFill>
-          <a:ln w="12700">
-            <a:solidFill>
-              <a:srgbClr val="177245"/>
-            </a:solidFill>
-            <a:prstDash val="solid"/>
-          </a:ln>
-        </p:spPr>
-      </p:sp>
-      <p:sp>
-        <p:nvSpPr>
-          <p:cNvPr id="11" name="Text 9"/>
-          <p:cNvSpPr/>
-          <p:nvPr/>
-        </p:nvSpPr>
-        <p:spPr>
-          <a:xfrm>
-            <a:off x="978408" y="2724912"/>
-            <a:ext cx="256032" cy="256032"/>
-          </a:xfrm>
-          <a:prstGeom prst="rect">
-            <a:avLst/>
-          </a:prstGeom>
-          <a:noFill/>
-          <a:ln/>
-        </p:spPr>
-        <p:txBody>
-          <a:bodyPr wrap="square" lIns="0" tIns="0" rIns="0" bIns="0" rtlCol="0" anchor="ctr"/>
-          <a:lstStyle/>
-          <a:p>
-            <a:pPr algn="ctr" indent="0" marL="0">
-              <a:buNone/>
-            </a:pPr>
-            <a:r>
-              <a:rPr lang="en-US" sz="1000" b="1" dirty="0">
-                <a:solidFill>
-                  <a:srgbClr val="177245"/>
+          <a:ln/>
+        </p:spPr>
+      </p:sp>
+      <p:sp>
+        <p:nvSpPr>
+          <p:cNvPr id="16" name="Text 14"/>
+          <p:cNvSpPr/>
+          <p:nvPr/>
+        </p:nvSpPr>
+        <p:spPr>
+          <a:xfrm>
+            <a:off x="786384" y="4123944"/>
+            <a:ext cx="10625328" cy="941832"/>
+          </a:xfrm>
+          <a:prstGeom prst="rect">
+            <a:avLst/>
+          </a:prstGeom>
+          <a:noFill/>
+          <a:ln/>
+        </p:spPr>
+        <p:txBody>
+          <a:bodyPr wrap="square" lIns="0" tIns="0" rIns="0" bIns="0" rtlCol="0" anchor="ctr"/>
+          <a:lstStyle/>
+          <a:p>
+            <a:pPr indent="0" marL="0">
+              <a:buNone/>
+            </a:pPr>
+            <a:r>
+              <a:rPr lang="en-US" sz="1300" dirty="0">
+                <a:solidFill>
+                  <a:srgbClr val="1B1D23"/>
                 </a:solidFill>
                 <a:latin typeface="Calibri" pitchFamily="34" charset="0"/>
                 <a:ea typeface="Calibri" pitchFamily="34" charset="-122"/>
                 <a:cs typeface="Calibri" pitchFamily="34" charset="-120"/>
               </a:rPr>
-              <a:t>✓</a:t>
-            </a:r>
-            <a:endParaRPr lang="en-US" sz="1000" dirty="0"/>
-          </a:p>
-        </p:txBody>
-      </p:sp>
-      <p:sp>
-        <p:nvSpPr>
-          <p:cNvPr id="12" name="Text 10"/>
-          <p:cNvSpPr/>
-          <p:nvPr/>
-        </p:nvSpPr>
-        <p:spPr>
-          <a:xfrm>
-            <a:off x="1362456" y="2670048"/>
-            <a:ext cx="4617720" cy="384048"/>
-          </a:xfrm>
-          <a:prstGeom prst="rect">
-            <a:avLst/>
-          </a:prstGeom>
-          <a:noFill/>
-          <a:ln/>
-        </p:spPr>
-        <p:txBody>
-          <a:bodyPr wrap="square" lIns="0" tIns="0" rIns="0" bIns="0" rtlCol="0" anchor="ctr"/>
-          <a:lstStyle/>
-          <a:p>
-            <a:pPr indent="0" marL="0">
-              <a:buNone/>
-            </a:pPr>
-            <a:r>
-              <a:rPr lang="en-US" sz="1250" dirty="0">
-                <a:solidFill>
-                  <a:srgbClr val="1B1D23"/>
-                </a:solidFill>
-                <a:latin typeface="Calibri" pitchFamily="34" charset="0"/>
-                <a:ea typeface="Calibri" pitchFamily="34" charset="-122"/>
-                <a:cs typeface="Calibri" pitchFamily="34" charset="-120"/>
-              </a:rPr>
-              <a:t>merge червоного PR справді заблокований</a:t>
-            </a:r>
-            <a:endParaRPr lang="en-US" sz="1250" dirty="0"/>
-          </a:p>
-        </p:txBody>
-      </p:sp>
-      <p:sp>
-        <p:nvSpPr>
-          <p:cNvPr id="13" name="Shape 11"/>
-          <p:cNvSpPr/>
-          <p:nvPr/>
-        </p:nvSpPr>
-        <p:spPr>
-          <a:xfrm>
-            <a:off x="6144768" y="2157984"/>
-            <a:ext cx="256032" cy="256032"/>
-          </a:xfrm>
-          <a:prstGeom prst="roundRect">
-            <a:avLst>
-              <a:gd name="adj" fmla="val 21429"/>
-            </a:avLst>
-          </a:prstGeom>
-          <a:solidFill>
-            <a:srgbClr val="E9F3EE"/>
-          </a:solidFill>
-          <a:ln w="12700">
-            <a:solidFill>
-              <a:srgbClr val="177245"/>
-            </a:solidFill>
-            <a:prstDash val="solid"/>
-          </a:ln>
-        </p:spPr>
-      </p:sp>
-      <p:sp>
-        <p:nvSpPr>
-          <p:cNvPr id="14" name="Text 12"/>
-          <p:cNvSpPr/>
-          <p:nvPr/>
-        </p:nvSpPr>
-        <p:spPr>
-          <a:xfrm>
-            <a:off x="6144768" y="2157984"/>
-            <a:ext cx="256032" cy="256032"/>
-          </a:xfrm>
-          <a:prstGeom prst="rect">
-            <a:avLst/>
-          </a:prstGeom>
-          <a:noFill/>
-          <a:ln/>
-        </p:spPr>
-        <p:txBody>
-          <a:bodyPr wrap="square" lIns="0" tIns="0" rIns="0" bIns="0" rtlCol="0" anchor="ctr"/>
-          <a:lstStyle/>
-          <a:p>
-            <a:pPr algn="ctr" indent="0" marL="0">
-              <a:buNone/>
-            </a:pPr>
-            <a:r>
-              <a:rPr lang="en-US" sz="1000" b="1" dirty="0">
-                <a:solidFill>
-                  <a:srgbClr val="177245"/>
-                </a:solidFill>
-                <a:latin typeface="Calibri" pitchFamily="34" charset="0"/>
-                <a:ea typeface="Calibri" pitchFamily="34" charset="-122"/>
-                <a:cs typeface="Calibri" pitchFamily="34" charset="-120"/>
-              </a:rPr>
-              <a:t>✓</a:t>
-            </a:r>
-            <a:endParaRPr lang="en-US" sz="1000" dirty="0"/>
-          </a:p>
-        </p:txBody>
-      </p:sp>
-      <p:sp>
-        <p:nvSpPr>
-          <p:cNvPr id="15" name="Text 13"/>
-          <p:cNvSpPr/>
-          <p:nvPr/>
-        </p:nvSpPr>
-        <p:spPr>
-          <a:xfrm>
-            <a:off x="6528816" y="2103120"/>
-            <a:ext cx="4617720" cy="384048"/>
-          </a:xfrm>
-          <a:prstGeom prst="rect">
-            <a:avLst/>
-          </a:prstGeom>
-          <a:noFill/>
-          <a:ln/>
-        </p:spPr>
-        <p:txBody>
-          <a:bodyPr wrap="square" lIns="0" tIns="0" rIns="0" bIns="0" rtlCol="0" anchor="ctr"/>
-          <a:lstStyle/>
-          <a:p>
-            <a:pPr indent="0" marL="0">
-              <a:buNone/>
-            </a:pPr>
-            <a:r>
-              <a:rPr lang="en-US" sz="1250" dirty="0">
-                <a:solidFill>
-                  <a:srgbClr val="1B1D23"/>
-                </a:solidFill>
-                <a:latin typeface="Calibri" pitchFamily="34" charset="0"/>
-                <a:ea typeface="Calibri" pitchFamily="34" charset="-122"/>
-                <a:cs typeface="Calibri" pitchFamily="34" charset="-120"/>
-              </a:rPr>
-              <a:t>rollback-критерії записані: умова, хто, чим</a:t>
-            </a:r>
-            <a:endParaRPr lang="en-US" sz="1250" dirty="0"/>
-          </a:p>
-        </p:txBody>
-      </p:sp>
-      <p:sp>
-        <p:nvSpPr>
-          <p:cNvPr id="16" name="Shape 14"/>
-          <p:cNvSpPr/>
-          <p:nvPr/>
-        </p:nvSpPr>
-        <p:spPr>
-          <a:xfrm>
-            <a:off x="6144768" y="2724912"/>
-            <a:ext cx="256032" cy="256032"/>
-          </a:xfrm>
-          <a:prstGeom prst="roundRect">
-            <a:avLst>
-              <a:gd name="adj" fmla="val 21429"/>
-            </a:avLst>
-          </a:prstGeom>
-          <a:solidFill>
-            <a:srgbClr val="E9F3EE"/>
-          </a:solidFill>
-          <a:ln w="12700">
-            <a:solidFill>
-              <a:srgbClr val="177245"/>
-            </a:solidFill>
-            <a:prstDash val="solid"/>
-          </a:ln>
-        </p:spPr>
-      </p:sp>
-      <p:sp>
-        <p:nvSpPr>
-          <p:cNvPr id="17" name="Text 15"/>
-          <p:cNvSpPr/>
-          <p:nvPr/>
-        </p:nvSpPr>
-        <p:spPr>
-          <a:xfrm>
-            <a:off x="6144768" y="2724912"/>
-            <a:ext cx="256032" cy="256032"/>
-          </a:xfrm>
-          <a:prstGeom prst="rect">
-            <a:avLst/>
-          </a:prstGeom>
-          <a:noFill/>
-          <a:ln/>
-        </p:spPr>
-        <p:txBody>
-          <a:bodyPr wrap="square" lIns="0" tIns="0" rIns="0" bIns="0" rtlCol="0" anchor="ctr"/>
-          <a:lstStyle/>
-          <a:p>
-            <a:pPr algn="ctr" indent="0" marL="0">
-              <a:buNone/>
-            </a:pPr>
-            <a:r>
-              <a:rPr lang="en-US" sz="1000" b="1" dirty="0">
-                <a:solidFill>
-                  <a:srgbClr val="177245"/>
-                </a:solidFill>
-                <a:latin typeface="Calibri" pitchFamily="34" charset="0"/>
-                <a:ea typeface="Calibri" pitchFamily="34" charset="-122"/>
-                <a:cs typeface="Calibri" pitchFamily="34" charset="-120"/>
-              </a:rPr>
-              <a:t>✓</a:t>
-            </a:r>
-            <a:endParaRPr lang="en-US" sz="1000" dirty="0"/>
-          </a:p>
-        </p:txBody>
-      </p:sp>
-      <p:sp>
-        <p:nvSpPr>
-          <p:cNvPr id="18" name="Text 16"/>
-          <p:cNvSpPr/>
-          <p:nvPr/>
-        </p:nvSpPr>
-        <p:spPr>
-          <a:xfrm>
-            <a:off x="6528816" y="2670048"/>
-            <a:ext cx="4617720" cy="384048"/>
-          </a:xfrm>
-          <a:prstGeom prst="rect">
-            <a:avLst/>
-          </a:prstGeom>
-          <a:noFill/>
-          <a:ln/>
-        </p:spPr>
-        <p:txBody>
-          <a:bodyPr wrap="square" lIns="0" tIns="0" rIns="0" bIns="0" rtlCol="0" anchor="ctr"/>
-          <a:lstStyle/>
-          <a:p>
-            <a:pPr indent="0" marL="0">
-              <a:buNone/>
-            </a:pPr>
-            <a:r>
-              <a:rPr lang="en-US" sz="1250" dirty="0">
-                <a:solidFill>
-                  <a:srgbClr val="1B1D23"/>
-                </a:solidFill>
-                <a:latin typeface="Calibri" pitchFamily="34" charset="0"/>
-                <a:ea typeface="Calibri" pitchFamily="34" charset="-122"/>
-                <a:cs typeface="Calibri" pitchFamily="34" charset="-120"/>
-              </a:rPr>
-              <a:t>поясню, чому читач деплоїться перед писарем</a:t>
-            </a:r>
-            <a:endParaRPr lang="en-US" sz="1250" dirty="0"/>
-          </a:p>
-        </p:txBody>
-      </p:sp>
-      <p:sp>
-        <p:nvSpPr>
-          <p:cNvPr id="19" name="Text 17"/>
-          <p:cNvSpPr/>
-          <p:nvPr/>
-        </p:nvSpPr>
-        <p:spPr>
-          <a:xfrm>
-            <a:off x="566928" y="3886200"/>
-            <a:ext cx="10972800" cy="320040"/>
-          </a:xfrm>
-          <a:prstGeom prst="rect">
-            <a:avLst/>
-          </a:prstGeom>
-          <a:noFill/>
-          <a:ln/>
-        </p:spPr>
-        <p:txBody>
-          <a:bodyPr wrap="square" lIns="0" tIns="0" rIns="0" bIns="0" rtlCol="0" anchor="ctr"/>
-          <a:lstStyle/>
-          <a:p>
-            <a:pPr indent="0" marL="0">
-              <a:buNone/>
-            </a:pPr>
-            <a:r>
-              <a:rPr lang="en-US" sz="1200" i="1" dirty="0">
-                <a:solidFill>
-                  <a:srgbClr val="8A90A0"/>
-                </a:solidFill>
-                <a:latin typeface="Calibri" pitchFamily="34" charset="0"/>
-                <a:ea typeface="Calibri" pitchFamily="34" charset="-122"/>
-                <a:cs typeface="Calibri" pitchFamily="34" charset="-120"/>
-              </a:rPr>
-              <a:t>Де завагалися — туди і повертайтеся. Питання — у канал потоку або на Q&amp;A.</a:t>
-            </a:r>
-            <a:endParaRPr lang="en-US" sz="1200" dirty="0"/>
+              <a:t>Контур замкнувся: зміна проходить перевірку, перевірка блокує регресію, відкат описаний. Лишилося зібрати це в operating model — останній урок.</a:t>
+            </a:r>
+            <a:endParaRPr lang="en-US" sz="1300" dirty="0"/>
           </a:p>
         </p:txBody>
       </p:sp>
@@ -10864,7 +11503,7 @@
                 <a:ea typeface="Calibri" pitchFamily="34" charset="-122"/>
                 <a:cs typeface="Calibri" pitchFamily="34" charset="-120"/>
               </a:rPr>
-              <a:t>Антипатерни тижня</a:t>
+              <a:t>Перевір себе</a:t>
             </a:r>
             <a:endParaRPr lang="en-US" sz="2500" dirty="0"/>
           </a:p>
@@ -10887,7 +11526,7 @@
             </a:avLst>
           </a:prstGeom>
           <a:solidFill>
-            <a:srgbClr val="ECEBFB"/>
+            <a:srgbClr val="F8F0E2"/>
           </a:solidFill>
           <a:ln/>
         </p:spPr>
@@ -10919,13 +11558,13 @@
             <a:r>
               <a:rPr lang="en-US" sz="900" b="1" spc="100" kern="0" dirty="0">
                 <a:solidFill>
-                  <a:srgbClr val="4038C4"/>
+                  <a:srgbClr val="9A5B12"/>
                 </a:solidFill>
                 <a:latin typeface="Courier New" pitchFamily="34" charset="0"/>
                 <a:ea typeface="Courier New" pitchFamily="34" charset="-122"/>
                 <a:cs typeface="Courier New" pitchFamily="34" charset="-120"/>
               </a:rPr>
-              <a:t>ТЕОРІЯ</a:t>
+              <a:t>РЕФЛЕКСІЯ</a:t>
             </a:r>
             <a:endParaRPr lang="en-US" sz="900" dirty="0"/>
           </a:p>
@@ -10979,11 +11618,11 @@
         <p:spPr>
           <a:xfrm>
             <a:off x="566928" y="1783080"/>
-            <a:ext cx="11064240" cy="731520"/>
+            <a:ext cx="11064240" cy="1874520"/>
           </a:xfrm>
           <a:prstGeom prst="roundRect">
             <a:avLst>
-              <a:gd name="adj" fmla="val 12500"/>
+              <a:gd name="adj" fmla="val 5854"/>
             </a:avLst>
           </a:prstGeom>
           <a:solidFill>
@@ -11005,16 +11644,23 @@
         </p:nvSpPr>
         <p:spPr>
           <a:xfrm>
-            <a:off x="768096" y="1956816"/>
-            <a:ext cx="384048" cy="384048"/>
-          </a:xfrm>
-          <a:prstGeom prst="ellipse">
-            <a:avLst/>
+            <a:off x="978408" y="2157984"/>
+            <a:ext cx="256032" cy="256032"/>
+          </a:xfrm>
+          <a:prstGeom prst="roundRect">
+            <a:avLst>
+              <a:gd name="adj" fmla="val 21429"/>
+            </a:avLst>
           </a:prstGeom>
           <a:solidFill>
-            <a:srgbClr val="F9E9E8"/>
+            <a:srgbClr val="E9F3EE"/>
           </a:solidFill>
-          <a:ln/>
+          <a:ln w="12700">
+            <a:solidFill>
+              <a:srgbClr val="177245"/>
+            </a:solidFill>
+            <a:prstDash val="solid"/>
+          </a:ln>
         </p:spPr>
       </p:sp>
       <p:sp>
@@ -11025,8 +11671,8 @@
         </p:nvSpPr>
         <p:spPr>
           <a:xfrm>
-            <a:off x="768096" y="1956816"/>
-            <a:ext cx="384048" cy="384048"/>
+            <a:off x="978408" y="2157984"/>
+            <a:ext cx="256032" cy="256032"/>
           </a:xfrm>
           <a:prstGeom prst="rect">
             <a:avLst/>
@@ -11042,17 +11688,17 @@
               <a:buNone/>
             </a:pPr>
             <a:r>
-              <a:rPr lang="en-US" sz="1300" b="1" dirty="0">
-                <a:solidFill>
-                  <a:srgbClr val="B3261E"/>
+              <a:rPr lang="en-US" sz="1000" b="1" dirty="0">
+                <a:solidFill>
+                  <a:srgbClr val="177245"/>
                 </a:solidFill>
                 <a:latin typeface="Calibri" pitchFamily="34" charset="0"/>
                 <a:ea typeface="Calibri" pitchFamily="34" charset="-122"/>
                 <a:cs typeface="Calibri" pitchFamily="34" charset="-120"/>
               </a:rPr>
-              <a:t>✕</a:t>
-            </a:r>
-            <a:endParaRPr lang="en-US" sz="1300" dirty="0"/>
+              <a:t>✓</a:t>
+            </a:r>
+            <a:endParaRPr lang="en-US" sz="1000" dirty="0"/>
           </a:p>
         </p:txBody>
       </p:sp>
@@ -11064,24 +11710,24 @@
         </p:nvSpPr>
         <p:spPr>
           <a:xfrm>
-            <a:off x="1298448" y="1783080"/>
-            <a:ext cx="10149840" cy="731520"/>
-          </a:xfrm>
-          <a:prstGeom prst="rect">
-            <a:avLst/>
-          </a:prstGeom>
-          <a:noFill/>
-          <a:ln/>
-        </p:spPr>
-        <p:txBody>
-          <a:bodyPr wrap="square" lIns="0" tIns="0" rIns="0" bIns="0" rtlCol="0" anchor="ctr"/>
-          <a:lstStyle/>
-          <a:p>
-            <a:pPr indent="0" marL="0">
-              <a:buNone/>
-            </a:pPr>
-            <a:r>
-              <a:rPr lang="en-US" sz="1300" b="1" dirty="0">
+            <a:off x="1362456" y="2103120"/>
+            <a:ext cx="4617720" cy="384048"/>
+          </a:xfrm>
+          <a:prstGeom prst="rect">
+            <a:avLst/>
+          </a:prstGeom>
+          <a:noFill/>
+          <a:ln/>
+        </p:spPr>
+        <p:txBody>
+          <a:bodyPr wrap="square" lIns="0" tIns="0" rIns="0" bIns="0" rtlCol="0" anchor="ctr"/>
+          <a:lstStyle/>
+          <a:p>
+            <a:pPr indent="0" marL="0">
+              <a:buNone/>
+            </a:pPr>
+            <a:r>
+              <a:rPr lang="en-US" sz="1250" dirty="0">
                 <a:solidFill>
                   <a:srgbClr val="1B1D23"/>
                 </a:solidFill>
@@ -11089,48 +11735,139 @@
                 <a:ea typeface="Calibri" pitchFamily="34" charset="-122"/>
                 <a:cs typeface="Calibri" pitchFamily="34" charset="-120"/>
               </a:rPr>
-              <a:t>Мерж повз червоний гейт   </a:t>
-            </a:r>
-            <a:pPr indent="0" marL="0">
-              <a:buNone/>
-            </a:pPr>
-            <a:r>
-              <a:rPr lang="en-US" sz="1150" dirty="0">
-                <a:solidFill>
-                  <a:srgbClr val="565C6B"/>
+              <a:t>в історії Actions є червоний і зелений прогін</a:t>
+            </a:r>
+            <a:endParaRPr lang="en-US" sz="1250" dirty="0"/>
+          </a:p>
+        </p:txBody>
+      </p:sp>
+      <p:sp>
+        <p:nvSpPr>
+          <p:cNvPr id="10" name="Shape 8"/>
+          <p:cNvSpPr/>
+          <p:nvPr/>
+        </p:nvSpPr>
+        <p:spPr>
+          <a:xfrm>
+            <a:off x="978408" y="2724912"/>
+            <a:ext cx="256032" cy="256032"/>
+          </a:xfrm>
+          <a:prstGeom prst="roundRect">
+            <a:avLst>
+              <a:gd name="adj" fmla="val 21429"/>
+            </a:avLst>
+          </a:prstGeom>
+          <a:solidFill>
+            <a:srgbClr val="E9F3EE"/>
+          </a:solidFill>
+          <a:ln w="12700">
+            <a:solidFill>
+              <a:srgbClr val="177245"/>
+            </a:solidFill>
+            <a:prstDash val="solid"/>
+          </a:ln>
+        </p:spPr>
+      </p:sp>
+      <p:sp>
+        <p:nvSpPr>
+          <p:cNvPr id="11" name="Text 9"/>
+          <p:cNvSpPr/>
+          <p:nvPr/>
+        </p:nvSpPr>
+        <p:spPr>
+          <a:xfrm>
+            <a:off x="978408" y="2724912"/>
+            <a:ext cx="256032" cy="256032"/>
+          </a:xfrm>
+          <a:prstGeom prst="rect">
+            <a:avLst/>
+          </a:prstGeom>
+          <a:noFill/>
+          <a:ln/>
+        </p:spPr>
+        <p:txBody>
+          <a:bodyPr wrap="square" lIns="0" tIns="0" rIns="0" bIns="0" rtlCol="0" anchor="ctr"/>
+          <a:lstStyle/>
+          <a:p>
+            <a:pPr algn="ctr" indent="0" marL="0">
+              <a:buNone/>
+            </a:pPr>
+            <a:r>
+              <a:rPr lang="en-US" sz="1000" b="1" dirty="0">
+                <a:solidFill>
+                  <a:srgbClr val="177245"/>
                 </a:solidFill>
                 <a:latin typeface="Calibri" pitchFamily="34" charset="0"/>
                 <a:ea typeface="Calibri" pitchFamily="34" charset="-122"/>
                 <a:cs typeface="Calibri" pitchFamily="34" charset="-120"/>
               </a:rPr>
-              <a:t>один прецедент — і за місяць гейт обходять усі</a:t>
-            </a:r>
-            <a:endParaRPr lang="en-US" sz="1300" dirty="0"/>
-          </a:p>
-        </p:txBody>
-      </p:sp>
-      <p:sp>
-        <p:nvSpPr>
-          <p:cNvPr id="10" name="Shape 8"/>
-          <p:cNvSpPr/>
-          <p:nvPr/>
-        </p:nvSpPr>
-        <p:spPr>
-          <a:xfrm>
-            <a:off x="566928" y="2651760"/>
-            <a:ext cx="11064240" cy="731520"/>
+              <a:t>✓</a:t>
+            </a:r>
+            <a:endParaRPr lang="en-US" sz="1000" dirty="0"/>
+          </a:p>
+        </p:txBody>
+      </p:sp>
+      <p:sp>
+        <p:nvSpPr>
+          <p:cNvPr id="12" name="Text 10"/>
+          <p:cNvSpPr/>
+          <p:nvPr/>
+        </p:nvSpPr>
+        <p:spPr>
+          <a:xfrm>
+            <a:off x="1362456" y="2670048"/>
+            <a:ext cx="4617720" cy="384048"/>
+          </a:xfrm>
+          <a:prstGeom prst="rect">
+            <a:avLst/>
+          </a:prstGeom>
+          <a:noFill/>
+          <a:ln/>
+        </p:spPr>
+        <p:txBody>
+          <a:bodyPr wrap="square" lIns="0" tIns="0" rIns="0" bIns="0" rtlCol="0" anchor="ctr"/>
+          <a:lstStyle/>
+          <a:p>
+            <a:pPr indent="0" marL="0">
+              <a:buNone/>
+            </a:pPr>
+            <a:r>
+              <a:rPr lang="en-US" sz="1250" dirty="0">
+                <a:solidFill>
+                  <a:srgbClr val="1B1D23"/>
+                </a:solidFill>
+                <a:latin typeface="Calibri" pitchFamily="34" charset="0"/>
+                <a:ea typeface="Calibri" pitchFamily="34" charset="-122"/>
+                <a:cs typeface="Calibri" pitchFamily="34" charset="-120"/>
+              </a:rPr>
+              <a:t>merge червоного PR справді заблокований</a:t>
+            </a:r>
+            <a:endParaRPr lang="en-US" sz="1250" dirty="0"/>
+          </a:p>
+        </p:txBody>
+      </p:sp>
+      <p:sp>
+        <p:nvSpPr>
+          <p:cNvPr id="13" name="Shape 11"/>
+          <p:cNvSpPr/>
+          <p:nvPr/>
+        </p:nvSpPr>
+        <p:spPr>
+          <a:xfrm>
+            <a:off x="6144768" y="2157984"/>
+            <a:ext cx="256032" cy="256032"/>
           </a:xfrm>
           <a:prstGeom prst="roundRect">
             <a:avLst>
-              <a:gd name="adj" fmla="val 12500"/>
+              <a:gd name="adj" fmla="val 21429"/>
             </a:avLst>
           </a:prstGeom>
           <a:solidFill>
-            <a:srgbClr val="FFFFFF"/>
+            <a:srgbClr val="E9F3EE"/>
           </a:solidFill>
           <a:ln w="12700">
             <a:solidFill>
-              <a:srgbClr val="E4E6EC"/>
+              <a:srgbClr val="177245"/>
             </a:solidFill>
             <a:prstDash val="solid"/>
           </a:ln>
@@ -11138,34 +11875,14 @@
       </p:sp>
       <p:sp>
         <p:nvSpPr>
-          <p:cNvPr id="11" name="Shape 9"/>
-          <p:cNvSpPr/>
-          <p:nvPr/>
-        </p:nvSpPr>
-        <p:spPr>
-          <a:xfrm>
-            <a:off x="768096" y="2825496"/>
-            <a:ext cx="384048" cy="384048"/>
-          </a:xfrm>
-          <a:prstGeom prst="ellipse">
-            <a:avLst/>
-          </a:prstGeom>
-          <a:solidFill>
-            <a:srgbClr val="F9E9E8"/>
-          </a:solidFill>
-          <a:ln/>
-        </p:spPr>
-      </p:sp>
-      <p:sp>
-        <p:nvSpPr>
-          <p:cNvPr id="12" name="Text 10"/>
-          <p:cNvSpPr/>
-          <p:nvPr/>
-        </p:nvSpPr>
-        <p:spPr>
-          <a:xfrm>
-            <a:off x="768096" y="2825496"/>
-            <a:ext cx="384048" cy="384048"/>
+          <p:cNvPr id="14" name="Text 12"/>
+          <p:cNvSpPr/>
+          <p:nvPr/>
+        </p:nvSpPr>
+        <p:spPr>
+          <a:xfrm>
+            <a:off x="6144768" y="2157984"/>
+            <a:ext cx="256032" cy="256032"/>
           </a:xfrm>
           <a:prstGeom prst="rect">
             <a:avLst/>
@@ -11181,46 +11898,46 @@
               <a:buNone/>
             </a:pPr>
             <a:r>
-              <a:rPr lang="en-US" sz="1300" b="1" dirty="0">
-                <a:solidFill>
-                  <a:srgbClr val="B3261E"/>
+              <a:rPr lang="en-US" sz="1000" b="1" dirty="0">
+                <a:solidFill>
+                  <a:srgbClr val="177245"/>
                 </a:solidFill>
                 <a:latin typeface="Calibri" pitchFamily="34" charset="0"/>
                 <a:ea typeface="Calibri" pitchFamily="34" charset="-122"/>
                 <a:cs typeface="Calibri" pitchFamily="34" charset="-120"/>
               </a:rPr>
-              <a:t>✕</a:t>
-            </a:r>
-            <a:endParaRPr lang="en-US" sz="1300" dirty="0"/>
-          </a:p>
-        </p:txBody>
-      </p:sp>
-      <p:sp>
-        <p:nvSpPr>
-          <p:cNvPr id="13" name="Text 11"/>
-          <p:cNvSpPr/>
-          <p:nvPr/>
-        </p:nvSpPr>
-        <p:spPr>
-          <a:xfrm>
-            <a:off x="1298448" y="2651760"/>
-            <a:ext cx="10149840" cy="731520"/>
-          </a:xfrm>
-          <a:prstGeom prst="rect">
-            <a:avLst/>
-          </a:prstGeom>
-          <a:noFill/>
-          <a:ln/>
-        </p:spPr>
-        <p:txBody>
-          <a:bodyPr wrap="square" lIns="0" tIns="0" rIns="0" bIns="0" rtlCol="0" anchor="ctr"/>
-          <a:lstStyle/>
-          <a:p>
-            <a:pPr indent="0" marL="0">
-              <a:buNone/>
-            </a:pPr>
-            <a:r>
-              <a:rPr lang="en-US" sz="1300" b="1" dirty="0">
+              <a:t>✓</a:t>
+            </a:r>
+            <a:endParaRPr lang="en-US" sz="1000" dirty="0"/>
+          </a:p>
+        </p:txBody>
+      </p:sp>
+      <p:sp>
+        <p:nvSpPr>
+          <p:cNvPr id="15" name="Text 13"/>
+          <p:cNvSpPr/>
+          <p:nvPr/>
+        </p:nvSpPr>
+        <p:spPr>
+          <a:xfrm>
+            <a:off x="6528816" y="2103120"/>
+            <a:ext cx="4617720" cy="384048"/>
+          </a:xfrm>
+          <a:prstGeom prst="rect">
+            <a:avLst/>
+          </a:prstGeom>
+          <a:noFill/>
+          <a:ln/>
+        </p:spPr>
+        <p:txBody>
+          <a:bodyPr wrap="square" lIns="0" tIns="0" rIns="0" bIns="0" rtlCol="0" anchor="ctr"/>
+          <a:lstStyle/>
+          <a:p>
+            <a:pPr indent="0" marL="0">
+              <a:buNone/>
+            </a:pPr>
+            <a:r>
+              <a:rPr lang="en-US" sz="1250" dirty="0">
                 <a:solidFill>
                   <a:srgbClr val="1B1D23"/>
                 </a:solidFill>
@@ -11228,440 +11945,153 @@
                 <a:ea typeface="Calibri" pitchFamily="34" charset="-122"/>
                 <a:cs typeface="Calibri" pitchFamily="34" charset="-120"/>
               </a:rPr>
-              <a:t>Protection на неіснуючий чек   </a:t>
-            </a:r>
-            <a:pPr indent="0" marL="0">
-              <a:buNone/>
-            </a:pPr>
-            <a:r>
-              <a:rPr lang="en-US" sz="1150" dirty="0">
-                <a:solidFill>
-                  <a:srgbClr val="565C6B"/>
+              <a:t>rollback-критерії записані: умова, хто, чим</a:t>
+            </a:r>
+            <a:endParaRPr lang="en-US" sz="1250" dirty="0"/>
+          </a:p>
+        </p:txBody>
+      </p:sp>
+      <p:sp>
+        <p:nvSpPr>
+          <p:cNvPr id="16" name="Shape 14"/>
+          <p:cNvSpPr/>
+          <p:nvPr/>
+        </p:nvSpPr>
+        <p:spPr>
+          <a:xfrm>
+            <a:off x="6144768" y="2724912"/>
+            <a:ext cx="256032" cy="256032"/>
+          </a:xfrm>
+          <a:prstGeom prst="roundRect">
+            <a:avLst>
+              <a:gd name="adj" fmla="val 21429"/>
+            </a:avLst>
+          </a:prstGeom>
+          <a:solidFill>
+            <a:srgbClr val="E9F3EE"/>
+          </a:solidFill>
+          <a:ln w="12700">
+            <a:solidFill>
+              <a:srgbClr val="177245"/>
+            </a:solidFill>
+            <a:prstDash val="solid"/>
+          </a:ln>
+        </p:spPr>
+      </p:sp>
+      <p:sp>
+        <p:nvSpPr>
+          <p:cNvPr id="17" name="Text 15"/>
+          <p:cNvSpPr/>
+          <p:nvPr/>
+        </p:nvSpPr>
+        <p:spPr>
+          <a:xfrm>
+            <a:off x="6144768" y="2724912"/>
+            <a:ext cx="256032" cy="256032"/>
+          </a:xfrm>
+          <a:prstGeom prst="rect">
+            <a:avLst/>
+          </a:prstGeom>
+          <a:noFill/>
+          <a:ln/>
+        </p:spPr>
+        <p:txBody>
+          <a:bodyPr wrap="square" lIns="0" tIns="0" rIns="0" bIns="0" rtlCol="0" anchor="ctr"/>
+          <a:lstStyle/>
+          <a:p>
+            <a:pPr algn="ctr" indent="0" marL="0">
+              <a:buNone/>
+            </a:pPr>
+            <a:r>
+              <a:rPr lang="en-US" sz="1000" b="1" dirty="0">
+                <a:solidFill>
+                  <a:srgbClr val="177245"/>
                 </a:solidFill>
                 <a:latin typeface="Calibri" pitchFamily="34" charset="0"/>
                 <a:ea typeface="Calibri" pitchFamily="34" charset="-122"/>
                 <a:cs typeface="Calibri" pitchFamily="34" charset="-120"/>
               </a:rPr>
-              <a:t>захист, який нічого не блокує, гірший за відсутній</a:t>
-            </a:r>
-            <a:endParaRPr lang="en-US" sz="1300" dirty="0"/>
-          </a:p>
-        </p:txBody>
-      </p:sp>
-      <p:sp>
-        <p:nvSpPr>
-          <p:cNvPr id="14" name="Shape 12"/>
-          <p:cNvSpPr/>
-          <p:nvPr/>
-        </p:nvSpPr>
-        <p:spPr>
-          <a:xfrm>
-            <a:off x="566928" y="3520440"/>
-            <a:ext cx="11064240" cy="731520"/>
-          </a:xfrm>
-          <a:prstGeom prst="roundRect">
-            <a:avLst>
-              <a:gd name="adj" fmla="val 12500"/>
-            </a:avLst>
-          </a:prstGeom>
-          <a:solidFill>
-            <a:srgbClr val="FFFFFF"/>
-          </a:solidFill>
-          <a:ln w="12700">
-            <a:solidFill>
-              <a:srgbClr val="E4E6EC"/>
-            </a:solidFill>
-            <a:prstDash val="solid"/>
-          </a:ln>
-        </p:spPr>
-      </p:sp>
-      <p:sp>
-        <p:nvSpPr>
-          <p:cNvPr id="15" name="Shape 13"/>
-          <p:cNvSpPr/>
-          <p:nvPr/>
-        </p:nvSpPr>
-        <p:spPr>
-          <a:xfrm>
-            <a:off x="768096" y="3694176"/>
-            <a:ext cx="384048" cy="384048"/>
-          </a:xfrm>
-          <a:prstGeom prst="ellipse">
-            <a:avLst/>
-          </a:prstGeom>
-          <a:solidFill>
-            <a:srgbClr val="F9E9E8"/>
-          </a:solidFill>
-          <a:ln/>
-        </p:spPr>
-      </p:sp>
-      <p:sp>
-        <p:nvSpPr>
-          <p:cNvPr id="16" name="Text 14"/>
-          <p:cNvSpPr/>
-          <p:nvPr/>
-        </p:nvSpPr>
-        <p:spPr>
-          <a:xfrm>
-            <a:off x="768096" y="3694176"/>
-            <a:ext cx="384048" cy="384048"/>
-          </a:xfrm>
-          <a:prstGeom prst="rect">
-            <a:avLst/>
-          </a:prstGeom>
-          <a:noFill/>
-          <a:ln/>
-        </p:spPr>
-        <p:txBody>
-          <a:bodyPr wrap="square" lIns="0" tIns="0" rIns="0" bIns="0" rtlCol="0" anchor="ctr"/>
-          <a:lstStyle/>
-          <a:p>
-            <a:pPr algn="ctr" indent="0" marL="0">
-              <a:buNone/>
-            </a:pPr>
-            <a:r>
-              <a:rPr lang="en-US" sz="1300" b="1" dirty="0">
-                <a:solidFill>
-                  <a:srgbClr val="B3261E"/>
+              <a:t>✓</a:t>
+            </a:r>
+            <a:endParaRPr lang="en-US" sz="1000" dirty="0"/>
+          </a:p>
+        </p:txBody>
+      </p:sp>
+      <p:sp>
+        <p:nvSpPr>
+          <p:cNvPr id="18" name="Text 16"/>
+          <p:cNvSpPr/>
+          <p:nvPr/>
+        </p:nvSpPr>
+        <p:spPr>
+          <a:xfrm>
+            <a:off x="6528816" y="2670048"/>
+            <a:ext cx="4617720" cy="384048"/>
+          </a:xfrm>
+          <a:prstGeom prst="rect">
+            <a:avLst/>
+          </a:prstGeom>
+          <a:noFill/>
+          <a:ln/>
+        </p:spPr>
+        <p:txBody>
+          <a:bodyPr wrap="square" lIns="0" tIns="0" rIns="0" bIns="0" rtlCol="0" anchor="ctr"/>
+          <a:lstStyle/>
+          <a:p>
+            <a:pPr indent="0" marL="0">
+              <a:buNone/>
+            </a:pPr>
+            <a:r>
+              <a:rPr lang="en-US" sz="1250" dirty="0">
+                <a:solidFill>
+                  <a:srgbClr val="1B1D23"/>
                 </a:solidFill>
                 <a:latin typeface="Calibri" pitchFamily="34" charset="0"/>
                 <a:ea typeface="Calibri" pitchFamily="34" charset="-122"/>
                 <a:cs typeface="Calibri" pitchFamily="34" charset="-120"/>
               </a:rPr>
-              <a:t>✕</a:t>
-            </a:r>
-            <a:endParaRPr lang="en-US" sz="1300" dirty="0"/>
-          </a:p>
-        </p:txBody>
-      </p:sp>
-      <p:sp>
-        <p:nvSpPr>
-          <p:cNvPr id="17" name="Text 15"/>
-          <p:cNvSpPr/>
-          <p:nvPr/>
-        </p:nvSpPr>
-        <p:spPr>
-          <a:xfrm>
-            <a:off x="1298448" y="3520440"/>
-            <a:ext cx="10149840" cy="731520"/>
-          </a:xfrm>
-          <a:prstGeom prst="rect">
-            <a:avLst/>
-          </a:prstGeom>
-          <a:noFill/>
-          <a:ln/>
-        </p:spPr>
-        <p:txBody>
-          <a:bodyPr wrap="square" lIns="0" tIns="0" rIns="0" bIns="0" rtlCol="0" anchor="ctr"/>
-          <a:lstStyle/>
-          <a:p>
-            <a:pPr indent="0" marL="0">
-              <a:buNone/>
-            </a:pPr>
-            <a:r>
-              <a:rPr lang="en-US" sz="1300" b="1" dirty="0">
-                <a:solidFill>
-                  <a:srgbClr val="1B1D23"/>
+              <a:t>поясню, чому читач деплоїться перед писарем</a:t>
+            </a:r>
+            <a:endParaRPr lang="en-US" sz="1250" dirty="0"/>
+          </a:p>
+        </p:txBody>
+      </p:sp>
+      <p:sp>
+        <p:nvSpPr>
+          <p:cNvPr id="19" name="Text 17"/>
+          <p:cNvSpPr/>
+          <p:nvPr/>
+        </p:nvSpPr>
+        <p:spPr>
+          <a:xfrm>
+            <a:off x="566928" y="3886200"/>
+            <a:ext cx="10972800" cy="320040"/>
+          </a:xfrm>
+          <a:prstGeom prst="rect">
+            <a:avLst/>
+          </a:prstGeom>
+          <a:noFill/>
+          <a:ln/>
+        </p:spPr>
+        <p:txBody>
+          <a:bodyPr wrap="square" lIns="0" tIns="0" rIns="0" bIns="0" rtlCol="0" anchor="ctr"/>
+          <a:lstStyle/>
+          <a:p>
+            <a:pPr indent="0" marL="0">
+              <a:buNone/>
+            </a:pPr>
+            <a:r>
+              <a:rPr lang="en-US" sz="1200" i="1" dirty="0">
+                <a:solidFill>
+                  <a:srgbClr val="8A90A0"/>
                 </a:solidFill>
                 <a:latin typeface="Calibri" pitchFamily="34" charset="0"/>
                 <a:ea typeface="Calibri" pitchFamily="34" charset="-122"/>
                 <a:cs typeface="Calibri" pitchFamily="34" charset="-120"/>
               </a:rPr>
-              <a:t>Гейт, що триває пів години   </a:t>
-            </a:r>
-            <a:pPr indent="0" marL="0">
-              <a:buNone/>
-            </a:pPr>
-            <a:r>
-              <a:rPr lang="en-US" sz="1150" dirty="0">
-                <a:solidFill>
-                  <a:srgbClr val="565C6B"/>
-                </a:solidFill>
-                <a:latin typeface="Calibri" pitchFamily="34" charset="0"/>
-                <a:ea typeface="Calibri" pitchFamily="34" charset="-122"/>
-                <a:cs typeface="Calibri" pitchFamily="34" charset="-120"/>
-              </a:rPr>
-              <a:t>обхід стає раціональним рішенням</a:t>
-            </a:r>
-            <a:endParaRPr lang="en-US" sz="1300" dirty="0"/>
-          </a:p>
-        </p:txBody>
-      </p:sp>
-      <p:sp>
-        <p:nvSpPr>
-          <p:cNvPr id="18" name="Shape 16"/>
-          <p:cNvSpPr/>
-          <p:nvPr/>
-        </p:nvSpPr>
-        <p:spPr>
-          <a:xfrm>
-            <a:off x="566928" y="4389120"/>
-            <a:ext cx="11064240" cy="731520"/>
-          </a:xfrm>
-          <a:prstGeom prst="roundRect">
-            <a:avLst>
-              <a:gd name="adj" fmla="val 12500"/>
-            </a:avLst>
-          </a:prstGeom>
-          <a:solidFill>
-            <a:srgbClr val="FFFFFF"/>
-          </a:solidFill>
-          <a:ln w="12700">
-            <a:solidFill>
-              <a:srgbClr val="E4E6EC"/>
-            </a:solidFill>
-            <a:prstDash val="solid"/>
-          </a:ln>
-        </p:spPr>
-      </p:sp>
-      <p:sp>
-        <p:nvSpPr>
-          <p:cNvPr id="19" name="Shape 17"/>
-          <p:cNvSpPr/>
-          <p:nvPr/>
-        </p:nvSpPr>
-        <p:spPr>
-          <a:xfrm>
-            <a:off x="768096" y="4562856"/>
-            <a:ext cx="384048" cy="384048"/>
-          </a:xfrm>
-          <a:prstGeom prst="ellipse">
-            <a:avLst/>
-          </a:prstGeom>
-          <a:solidFill>
-            <a:srgbClr val="F9E9E8"/>
-          </a:solidFill>
-          <a:ln/>
-        </p:spPr>
-      </p:sp>
-      <p:sp>
-        <p:nvSpPr>
-          <p:cNvPr id="20" name="Text 18"/>
-          <p:cNvSpPr/>
-          <p:nvPr/>
-        </p:nvSpPr>
-        <p:spPr>
-          <a:xfrm>
-            <a:off x="768096" y="4562856"/>
-            <a:ext cx="384048" cy="384048"/>
-          </a:xfrm>
-          <a:prstGeom prst="rect">
-            <a:avLst/>
-          </a:prstGeom>
-          <a:noFill/>
-          <a:ln/>
-        </p:spPr>
-        <p:txBody>
-          <a:bodyPr wrap="square" lIns="0" tIns="0" rIns="0" bIns="0" rtlCol="0" anchor="ctr"/>
-          <a:lstStyle/>
-          <a:p>
-            <a:pPr algn="ctr" indent="0" marL="0">
-              <a:buNone/>
-            </a:pPr>
-            <a:r>
-              <a:rPr lang="en-US" sz="1300" b="1" dirty="0">
-                <a:solidFill>
-                  <a:srgbClr val="B3261E"/>
-                </a:solidFill>
-                <a:latin typeface="Calibri" pitchFamily="34" charset="0"/>
-                <a:ea typeface="Calibri" pitchFamily="34" charset="-122"/>
-                <a:cs typeface="Calibri" pitchFamily="34" charset="-120"/>
-              </a:rPr>
-              <a:t>✕</a:t>
-            </a:r>
-            <a:endParaRPr lang="en-US" sz="1300" dirty="0"/>
-          </a:p>
-        </p:txBody>
-      </p:sp>
-      <p:sp>
-        <p:nvSpPr>
-          <p:cNvPr id="21" name="Text 19"/>
-          <p:cNvSpPr/>
-          <p:nvPr/>
-        </p:nvSpPr>
-        <p:spPr>
-          <a:xfrm>
-            <a:off x="1298448" y="4389120"/>
-            <a:ext cx="10149840" cy="731520"/>
-          </a:xfrm>
-          <a:prstGeom prst="rect">
-            <a:avLst/>
-          </a:prstGeom>
-          <a:noFill/>
-          <a:ln/>
-        </p:spPr>
-        <p:txBody>
-          <a:bodyPr wrap="square" lIns="0" tIns="0" rIns="0" bIns="0" rtlCol="0" anchor="ctr"/>
-          <a:lstStyle/>
-          <a:p>
-            <a:pPr indent="0" marL="0">
-              <a:buNone/>
-            </a:pPr>
-            <a:r>
-              <a:rPr lang="en-US" sz="1300" b="1" dirty="0">
-                <a:solidFill>
-                  <a:srgbClr val="1B1D23"/>
-                </a:solidFill>
-                <a:latin typeface="Calibri" pitchFamily="34" charset="0"/>
-                <a:ea typeface="Calibri" pitchFamily="34" charset="-122"/>
-                <a:cs typeface="Calibri" pitchFamily="34" charset="-120"/>
-              </a:rPr>
-              <a:t>Feature flag без плану прибирання   </a:t>
-            </a:r>
-            <a:pPr indent="0" marL="0">
-              <a:buNone/>
-            </a:pPr>
-            <a:r>
-              <a:rPr lang="en-US" sz="1150" dirty="0">
-                <a:solidFill>
-                  <a:srgbClr val="565C6B"/>
-                </a:solidFill>
-                <a:latin typeface="Calibri" pitchFamily="34" charset="0"/>
-                <a:ea typeface="Calibri" pitchFamily="34" charset="-122"/>
-                <a:cs typeface="Calibri" pitchFamily="34" charset="-120"/>
-              </a:rPr>
-              <a:t>кладовище мертвих гілок через рік</a:t>
-            </a:r>
-            <a:endParaRPr lang="en-US" sz="1300" dirty="0"/>
-          </a:p>
-        </p:txBody>
-      </p:sp>
-      <p:sp>
-        <p:nvSpPr>
-          <p:cNvPr id="22" name="Shape 20"/>
-          <p:cNvSpPr/>
-          <p:nvPr/>
-        </p:nvSpPr>
-        <p:spPr>
-          <a:xfrm>
-            <a:off x="566928" y="5257800"/>
-            <a:ext cx="11064240" cy="731520"/>
-          </a:xfrm>
-          <a:prstGeom prst="roundRect">
-            <a:avLst>
-              <a:gd name="adj" fmla="val 12500"/>
-            </a:avLst>
-          </a:prstGeom>
-          <a:solidFill>
-            <a:srgbClr val="FFFFFF"/>
-          </a:solidFill>
-          <a:ln w="12700">
-            <a:solidFill>
-              <a:srgbClr val="E4E6EC"/>
-            </a:solidFill>
-            <a:prstDash val="solid"/>
-          </a:ln>
-        </p:spPr>
-      </p:sp>
-      <p:sp>
-        <p:nvSpPr>
-          <p:cNvPr id="23" name="Shape 21"/>
-          <p:cNvSpPr/>
-          <p:nvPr/>
-        </p:nvSpPr>
-        <p:spPr>
-          <a:xfrm>
-            <a:off x="768096" y="5431536"/>
-            <a:ext cx="384048" cy="384048"/>
-          </a:xfrm>
-          <a:prstGeom prst="ellipse">
-            <a:avLst/>
-          </a:prstGeom>
-          <a:solidFill>
-            <a:srgbClr val="F9E9E8"/>
-          </a:solidFill>
-          <a:ln/>
-        </p:spPr>
-      </p:sp>
-      <p:sp>
-        <p:nvSpPr>
-          <p:cNvPr id="24" name="Text 22"/>
-          <p:cNvSpPr/>
-          <p:nvPr/>
-        </p:nvSpPr>
-        <p:spPr>
-          <a:xfrm>
-            <a:off x="768096" y="5431536"/>
-            <a:ext cx="384048" cy="384048"/>
-          </a:xfrm>
-          <a:prstGeom prst="rect">
-            <a:avLst/>
-          </a:prstGeom>
-          <a:noFill/>
-          <a:ln/>
-        </p:spPr>
-        <p:txBody>
-          <a:bodyPr wrap="square" lIns="0" tIns="0" rIns="0" bIns="0" rtlCol="0" anchor="ctr"/>
-          <a:lstStyle/>
-          <a:p>
-            <a:pPr algn="ctr" indent="0" marL="0">
-              <a:buNone/>
-            </a:pPr>
-            <a:r>
-              <a:rPr lang="en-US" sz="1300" b="1" dirty="0">
-                <a:solidFill>
-                  <a:srgbClr val="B3261E"/>
-                </a:solidFill>
-                <a:latin typeface="Calibri" pitchFamily="34" charset="0"/>
-                <a:ea typeface="Calibri" pitchFamily="34" charset="-122"/>
-                <a:cs typeface="Calibri" pitchFamily="34" charset="-120"/>
-              </a:rPr>
-              <a:t>✕</a:t>
-            </a:r>
-            <a:endParaRPr lang="en-US" sz="1300" dirty="0"/>
-          </a:p>
-        </p:txBody>
-      </p:sp>
-      <p:sp>
-        <p:nvSpPr>
-          <p:cNvPr id="25" name="Text 23"/>
-          <p:cNvSpPr/>
-          <p:nvPr/>
-        </p:nvSpPr>
-        <p:spPr>
-          <a:xfrm>
-            <a:off x="1298448" y="5257800"/>
-            <a:ext cx="10149840" cy="731520"/>
-          </a:xfrm>
-          <a:prstGeom prst="rect">
-            <a:avLst/>
-          </a:prstGeom>
-          <a:noFill/>
-          <a:ln/>
-        </p:spPr>
-        <p:txBody>
-          <a:bodyPr wrap="square" lIns="0" tIns="0" rIns="0" bIns="0" rtlCol="0" anchor="ctr"/>
-          <a:lstStyle/>
-          <a:p>
-            <a:pPr indent="0" marL="0">
-              <a:buNone/>
-            </a:pPr>
-            <a:r>
-              <a:rPr lang="en-US" sz="1300" b="1" dirty="0">
-                <a:solidFill>
-                  <a:srgbClr val="1B1D23"/>
-                </a:solidFill>
-                <a:latin typeface="Calibri" pitchFamily="34" charset="0"/>
-                <a:ea typeface="Calibri" pitchFamily="34" charset="-122"/>
-                <a:cs typeface="Calibri" pitchFamily="34" charset="-120"/>
-              </a:rPr>
-              <a:t>Rollback-критерії під час інциденту   </a:t>
-            </a:r>
-            <a:pPr indent="0" marL="0">
-              <a:buNone/>
-            </a:pPr>
-            <a:r>
-              <a:rPr lang="en-US" sz="1150" dirty="0">
-                <a:solidFill>
-                  <a:srgbClr val="565C6B"/>
-                </a:solidFill>
-                <a:latin typeface="Calibri" pitchFamily="34" charset="0"/>
-                <a:ea typeface="Calibri" pitchFamily="34" charset="-122"/>
-                <a:cs typeface="Calibri" pitchFamily="34" charset="-120"/>
-              </a:rPr>
-              <a:t>рішення обговорюється, поки користувачі чекають</a:t>
-            </a:r>
-            <a:endParaRPr lang="en-US" sz="1300" dirty="0"/>
+              <a:t>Де завагалися — туди і повертайтеся. Питання — у канал потоку або на Q&amp;A.</a:t>
+            </a:r>
+            <a:endParaRPr lang="en-US" sz="1200" dirty="0"/>
           </a:p>
         </p:txBody>
       </p:sp>
@@ -12856,7 +13286,7 @@
                 <a:ea typeface="Calibri" pitchFamily="34" charset="-122"/>
                 <a:cs typeface="Calibri" pitchFamily="34" charset="-120"/>
               </a:rPr>
-              <a:t>Домашнє завдання</a:t>
+              <a:t>Антипатерни тижня</a:t>
             </a:r>
             <a:endParaRPr lang="en-US" sz="2500" dirty="0"/>
           </a:p>
@@ -12879,7 +13309,7 @@
             </a:avLst>
           </a:prstGeom>
           <a:solidFill>
-            <a:srgbClr val="E9F3EE"/>
+            <a:srgbClr val="F8F0E2"/>
           </a:solidFill>
           <a:ln/>
         </p:spPr>
@@ -12911,13 +13341,13 @@
             <a:r>
               <a:rPr lang="en-US" sz="900" b="1" spc="100" kern="0" dirty="0">
                 <a:solidFill>
-                  <a:srgbClr val="177245"/>
+                  <a:srgbClr val="9A5B12"/>
                 </a:solidFill>
                 <a:latin typeface="Courier New" pitchFamily="34" charset="0"/>
                 <a:ea typeface="Courier New" pitchFamily="34" charset="-122"/>
                 <a:cs typeface="Courier New" pitchFamily="34" charset="-120"/>
               </a:rPr>
-              <a:t>ПРАКТИКА</a:t>
+              <a:t>РЕФЛЕКСІЯ</a:t>
             </a:r>
             <a:endParaRPr lang="en-US" sz="900" dirty="0"/>
           </a:p>
@@ -12970,12 +13400,12 @@
         </p:nvSpPr>
         <p:spPr>
           <a:xfrm>
-            <a:off x="566928" y="1737360"/>
-            <a:ext cx="5349240" cy="2194560"/>
+            <a:off x="566928" y="1783080"/>
+            <a:ext cx="11064240" cy="731520"/>
           </a:xfrm>
           <a:prstGeom prst="roundRect">
             <a:avLst>
-              <a:gd name="adj" fmla="val 5000"/>
+              <a:gd name="adj" fmla="val 12500"/>
             </a:avLst>
           </a:prstGeom>
           <a:solidFill>
@@ -12991,92 +13421,103 @@
       </p:sp>
       <p:sp>
         <p:nvSpPr>
-          <p:cNvPr id="7" name="Text 5"/>
-          <p:cNvSpPr/>
-          <p:nvPr/>
-        </p:nvSpPr>
-        <p:spPr>
-          <a:xfrm>
-            <a:off x="768096" y="1892808"/>
-            <a:ext cx="4946904" cy="438912"/>
-          </a:xfrm>
-          <a:prstGeom prst="rect">
-            <a:avLst/>
-          </a:prstGeom>
-          <a:noFill/>
-          <a:ln/>
-        </p:spPr>
-        <p:txBody>
-          <a:bodyPr wrap="square" lIns="0" tIns="0" rIns="0" bIns="0" rtlCol="0" anchor="ctr"/>
-          <a:lstStyle/>
-          <a:p>
-            <a:pPr indent="0" marL="0">
-              <a:buNone/>
-            </a:pPr>
-            <a:r>
-              <a:rPr lang="en-US" sz="1450" b="1" dirty="0">
-                <a:solidFill>
-                  <a:srgbClr val="1B1D23"/>
+          <p:cNvPr id="7" name="Shape 5"/>
+          <p:cNvSpPr/>
+          <p:nvPr/>
+        </p:nvSpPr>
+        <p:spPr>
+          <a:xfrm>
+            <a:off x="768096" y="1956816"/>
+            <a:ext cx="384048" cy="384048"/>
+          </a:xfrm>
+          <a:prstGeom prst="ellipse">
+            <a:avLst/>
+          </a:prstGeom>
+          <a:solidFill>
+            <a:srgbClr val="F9E9E8"/>
+          </a:solidFill>
+          <a:ln/>
+        </p:spPr>
+      </p:sp>
+      <p:sp>
+        <p:nvSpPr>
+          <p:cNvPr id="8" name="Text 6"/>
+          <p:cNvSpPr/>
+          <p:nvPr/>
+        </p:nvSpPr>
+        <p:spPr>
+          <a:xfrm>
+            <a:off x="768096" y="1956816"/>
+            <a:ext cx="384048" cy="384048"/>
+          </a:xfrm>
+          <a:prstGeom prst="rect">
+            <a:avLst/>
+          </a:prstGeom>
+          <a:noFill/>
+          <a:ln/>
+        </p:spPr>
+        <p:txBody>
+          <a:bodyPr wrap="square" lIns="0" tIns="0" rIns="0" bIns="0" rtlCol="0" anchor="ctr"/>
+          <a:lstStyle/>
+          <a:p>
+            <a:pPr algn="ctr" indent="0" marL="0">
+              <a:buNone/>
+            </a:pPr>
+            <a:r>
+              <a:rPr lang="en-US" sz="1300" b="1" dirty="0">
+                <a:solidFill>
+                  <a:srgbClr val="B3261E"/>
                 </a:solidFill>
                 <a:latin typeface="Calibri" pitchFamily="34" charset="0"/>
                 <a:ea typeface="Calibri" pitchFamily="34" charset="-122"/>
                 <a:cs typeface="Calibri" pitchFamily="34" charset="-120"/>
               </a:rPr>
-              <a:t>Обов'язково — без здачі</a:t>
-            </a:r>
-            <a:endParaRPr lang="en-US" sz="1450" dirty="0"/>
-          </a:p>
-        </p:txBody>
-      </p:sp>
-      <p:sp>
-        <p:nvSpPr>
-          <p:cNvPr id="8" name="Text 6"/>
-          <p:cNvSpPr/>
-          <p:nvPr/>
-        </p:nvSpPr>
-        <p:spPr>
-          <a:xfrm>
-            <a:off x="768096" y="2423160"/>
-            <a:ext cx="4946904" cy="1353312"/>
-          </a:xfrm>
-          <a:prstGeom prst="rect">
-            <a:avLst/>
-          </a:prstGeom>
-          <a:noFill/>
-          <a:ln/>
-        </p:spPr>
-        <p:txBody>
-          <a:bodyPr wrap="square" lIns="0" tIns="0" rIns="0" bIns="0" rtlCol="0" anchor="t"/>
-          <a:lstStyle/>
-          <a:p>
-            <a:pPr indent="0" marL="0">
-              <a:buNone/>
-            </a:pPr>
-            <a:r>
-              <a:rPr lang="en-US" sz="1200" dirty="0">
-                <a:solidFill>
-                  <a:srgbClr val="565C6B"/>
+              <a:t>✕</a:t>
+            </a:r>
+            <a:endParaRPr lang="en-US" sz="1300" dirty="0"/>
+          </a:p>
+        </p:txBody>
+      </p:sp>
+      <p:sp>
+        <p:nvSpPr>
+          <p:cNvPr id="9" name="Text 7"/>
+          <p:cNvSpPr/>
+          <p:nvPr/>
+        </p:nvSpPr>
+        <p:spPr>
+          <a:xfrm>
+            <a:off x="1298448" y="1783080"/>
+            <a:ext cx="10149840" cy="731520"/>
+          </a:xfrm>
+          <a:prstGeom prst="rect">
+            <a:avLst/>
+          </a:prstGeom>
+          <a:noFill/>
+          <a:ln/>
+        </p:spPr>
+        <p:txBody>
+          <a:bodyPr wrap="square" lIns="0" tIns="0" rIns="0" bIns="0" rtlCol="0" anchor="ctr"/>
+          <a:lstStyle/>
+          <a:p>
+            <a:pPr indent="0" marL="0">
+              <a:buNone/>
+            </a:pPr>
+            <a:r>
+              <a:rPr lang="en-US" sz="1300" b="1" dirty="0">
+                <a:solidFill>
+                  <a:srgbClr val="1B1D23"/>
                 </a:solidFill>
                 <a:latin typeface="Calibri" pitchFamily="34" charset="0"/>
                 <a:ea typeface="Calibri" pitchFamily="34" charset="-122"/>
                 <a:cs typeface="Calibri" pitchFamily="34" charset="-120"/>
               </a:rPr>
-              <a:t>• закріпити лабу: червоний і зелений прогін гейта в історії Actions</a:t>
-            </a:r>
-            <a:endParaRPr lang="en-US" sz="1200" dirty="0"/>
-          </a:p>
-          <a:p>
-            <a:pPr indent="0" marL="0">
-              <a:buNone/>
-            </a:pPr>
-            <a:endParaRPr lang="en-US" sz="1200" dirty="0"/>
-          </a:p>
-          <a:p>
-            <a:pPr indent="0" marL="0">
-              <a:buNone/>
-            </a:pPr>
-            <a:r>
-              <a:rPr lang="en-US" sz="1200" dirty="0">
+              <a:t>Мерж повз червоний гейт   </a:t>
+            </a:r>
+            <a:pPr indent="0" marL="0">
+              <a:buNone/>
+            </a:pPr>
+            <a:r>
+              <a:rPr lang="en-US" sz="1150" dirty="0">
                 <a:solidFill>
                   <a:srgbClr val="565C6B"/>
                 </a:solidFill>
@@ -13084,157 +13525,173 @@
                 <a:ea typeface="Calibri" pitchFamily="34" charset="-122"/>
                 <a:cs typeface="Calibri" pitchFamily="34" charset="-120"/>
               </a:rPr>
-              <a:t>• записати rollback-критерії для своєї системи</a:t>
-            </a:r>
-            <a:endParaRPr lang="en-US" sz="1200" dirty="0"/>
-          </a:p>
-          <a:p>
-            <a:pPr indent="0" marL="0">
-              <a:buNone/>
-            </a:pPr>
-            <a:endParaRPr lang="en-US" sz="1200" dirty="0"/>
-          </a:p>
-          <a:p>
-            <a:pPr indent="0" marL="0">
-              <a:buNone/>
-            </a:pPr>
-            <a:r>
-              <a:rPr lang="en-US" sz="1200" dirty="0">
-                <a:solidFill>
-                  <a:srgbClr val="565C6B"/>
+              <a:t>один прецедент — і за місяць гейт обходять усі</a:t>
+            </a:r>
+            <a:endParaRPr lang="en-US" sz="1300" dirty="0"/>
+          </a:p>
+        </p:txBody>
+      </p:sp>
+      <p:sp>
+        <p:nvSpPr>
+          <p:cNvPr id="10" name="Shape 8"/>
+          <p:cNvSpPr/>
+          <p:nvPr/>
+        </p:nvSpPr>
+        <p:spPr>
+          <a:xfrm>
+            <a:off x="566928" y="2651760"/>
+            <a:ext cx="11064240" cy="731520"/>
+          </a:xfrm>
+          <a:prstGeom prst="roundRect">
+            <a:avLst>
+              <a:gd name="adj" fmla="val 12500"/>
+            </a:avLst>
+          </a:prstGeom>
+          <a:solidFill>
+            <a:srgbClr val="FFFFFF"/>
+          </a:solidFill>
+          <a:ln w="12700">
+            <a:solidFill>
+              <a:srgbClr val="E4E6EC"/>
+            </a:solidFill>
+            <a:prstDash val="solid"/>
+          </a:ln>
+        </p:spPr>
+      </p:sp>
+      <p:sp>
+        <p:nvSpPr>
+          <p:cNvPr id="11" name="Shape 9"/>
+          <p:cNvSpPr/>
+          <p:nvPr/>
+        </p:nvSpPr>
+        <p:spPr>
+          <a:xfrm>
+            <a:off x="768096" y="2825496"/>
+            <a:ext cx="384048" cy="384048"/>
+          </a:xfrm>
+          <a:prstGeom prst="ellipse">
+            <a:avLst/>
+          </a:prstGeom>
+          <a:solidFill>
+            <a:srgbClr val="F9E9E8"/>
+          </a:solidFill>
+          <a:ln/>
+        </p:spPr>
+      </p:sp>
+      <p:sp>
+        <p:nvSpPr>
+          <p:cNvPr id="12" name="Text 10"/>
+          <p:cNvSpPr/>
+          <p:nvPr/>
+        </p:nvSpPr>
+        <p:spPr>
+          <a:xfrm>
+            <a:off x="768096" y="2825496"/>
+            <a:ext cx="384048" cy="384048"/>
+          </a:xfrm>
+          <a:prstGeom prst="rect">
+            <a:avLst/>
+          </a:prstGeom>
+          <a:noFill/>
+          <a:ln/>
+        </p:spPr>
+        <p:txBody>
+          <a:bodyPr wrap="square" lIns="0" tIns="0" rIns="0" bIns="0" rtlCol="0" anchor="ctr"/>
+          <a:lstStyle/>
+          <a:p>
+            <a:pPr algn="ctr" indent="0" marL="0">
+              <a:buNone/>
+            </a:pPr>
+            <a:r>
+              <a:rPr lang="en-US" sz="1300" b="1" dirty="0">
+                <a:solidFill>
+                  <a:srgbClr val="B3261E"/>
                 </a:solidFill>
                 <a:latin typeface="Calibri" pitchFamily="34" charset="0"/>
                 <a:ea typeface="Calibri" pitchFamily="34" charset="-122"/>
                 <a:cs typeface="Calibri" pitchFamily="34" charset="-120"/>
               </a:rPr>
-              <a:t>• переконатися, що гейт швидкий і його падіння зрозуміле з логів</a:t>
-            </a:r>
-            <a:endParaRPr lang="en-US" sz="1200" dirty="0"/>
-          </a:p>
-        </p:txBody>
-      </p:sp>
-      <p:sp>
-        <p:nvSpPr>
-          <p:cNvPr id="9" name="Shape 7"/>
-          <p:cNvSpPr/>
-          <p:nvPr/>
-        </p:nvSpPr>
-        <p:spPr>
-          <a:xfrm>
-            <a:off x="6281928" y="1737360"/>
-            <a:ext cx="5349240" cy="2194560"/>
-          </a:xfrm>
-          <a:prstGeom prst="roundRect">
-            <a:avLst>
-              <a:gd name="adj" fmla="val 5000"/>
-            </a:avLst>
-          </a:prstGeom>
-          <a:solidFill>
-            <a:srgbClr val="F8F0E2"/>
-          </a:solidFill>
-          <a:ln/>
-        </p:spPr>
-      </p:sp>
-      <p:sp>
-        <p:nvSpPr>
-          <p:cNvPr id="10" name="Text 8"/>
-          <p:cNvSpPr/>
-          <p:nvPr/>
-        </p:nvSpPr>
-        <p:spPr>
-          <a:xfrm>
-            <a:off x="6483096" y="1892808"/>
-            <a:ext cx="4946904" cy="438912"/>
-          </a:xfrm>
-          <a:prstGeom prst="rect">
-            <a:avLst/>
-          </a:prstGeom>
-          <a:noFill/>
-          <a:ln/>
-        </p:spPr>
-        <p:txBody>
-          <a:bodyPr wrap="square" lIns="0" tIns="0" rIns="0" bIns="0" rtlCol="0" anchor="ctr"/>
-          <a:lstStyle/>
-          <a:p>
-            <a:pPr indent="0" marL="0">
-              <a:buNone/>
-            </a:pPr>
-            <a:r>
-              <a:rPr lang="en-US" sz="1450" b="1" dirty="0">
-                <a:solidFill>
-                  <a:srgbClr val="9A5B12"/>
+              <a:t>✕</a:t>
+            </a:r>
+            <a:endParaRPr lang="en-US" sz="1300" dirty="0"/>
+          </a:p>
+        </p:txBody>
+      </p:sp>
+      <p:sp>
+        <p:nvSpPr>
+          <p:cNvPr id="13" name="Text 11"/>
+          <p:cNvSpPr/>
+          <p:nvPr/>
+        </p:nvSpPr>
+        <p:spPr>
+          <a:xfrm>
+            <a:off x="1298448" y="2651760"/>
+            <a:ext cx="10149840" cy="731520"/>
+          </a:xfrm>
+          <a:prstGeom prst="rect">
+            <a:avLst/>
+          </a:prstGeom>
+          <a:noFill/>
+          <a:ln/>
+        </p:spPr>
+        <p:txBody>
+          <a:bodyPr wrap="square" lIns="0" tIns="0" rIns="0" bIns="0" rtlCol="0" anchor="ctr"/>
+          <a:lstStyle/>
+          <a:p>
+            <a:pPr indent="0" marL="0">
+              <a:buNone/>
+            </a:pPr>
+            <a:r>
+              <a:rPr lang="en-US" sz="1300" b="1" dirty="0">
+                <a:solidFill>
+                  <a:srgbClr val="1B1D23"/>
                 </a:solidFill>
                 <a:latin typeface="Calibri" pitchFamily="34" charset="0"/>
                 <a:ea typeface="Calibri" pitchFamily="34" charset="-122"/>
                 <a:cs typeface="Calibri" pitchFamily="34" charset="-120"/>
               </a:rPr>
-              <a:t>Опційно</a:t>
-            </a:r>
-            <a:endParaRPr lang="en-US" sz="1450" dirty="0"/>
-          </a:p>
-        </p:txBody>
-      </p:sp>
-      <p:sp>
-        <p:nvSpPr>
-          <p:cNvPr id="11" name="Text 9"/>
-          <p:cNvSpPr/>
-          <p:nvPr/>
-        </p:nvSpPr>
-        <p:spPr>
-          <a:xfrm>
-            <a:off x="6483096" y="2423160"/>
-            <a:ext cx="4946904" cy="1353312"/>
-          </a:xfrm>
-          <a:prstGeom prst="rect">
-            <a:avLst/>
-          </a:prstGeom>
-          <a:noFill/>
-          <a:ln/>
-        </p:spPr>
-        <p:txBody>
-          <a:bodyPr wrap="square" lIns="0" tIns="0" rIns="0" bIns="0" rtlCol="0" anchor="t"/>
-          <a:lstStyle/>
-          <a:p>
-            <a:pPr indent="0" marL="0">
-              <a:buNone/>
-            </a:pPr>
-            <a:r>
-              <a:rPr lang="en-US" sz="1200" dirty="0">
-                <a:solidFill>
-                  <a:srgbClr val="1B1D23"/>
+              <a:t>Protection на неіснуючий чек   </a:t>
+            </a:r>
+            <a:pPr indent="0" marL="0">
+              <a:buNone/>
+            </a:pPr>
+            <a:r>
+              <a:rPr lang="en-US" sz="1150" dirty="0">
+                <a:solidFill>
+                  <a:srgbClr val="565C6B"/>
                 </a:solidFill>
                 <a:latin typeface="Calibri" pitchFamily="34" charset="0"/>
                 <a:ea typeface="Calibri" pitchFamily="34" charset="-122"/>
                 <a:cs typeface="Calibri" pitchFamily="34" charset="-120"/>
               </a:rPr>
-              <a:t>• canary-план: розподіл 90/10 своїм роутером, метрики порівняння, критерії promote/rollback</a:t>
-            </a:r>
-            <a:endParaRPr lang="en-US" sz="1200" dirty="0"/>
-          </a:p>
-        </p:txBody>
-      </p:sp>
-      <p:sp>
-        <p:nvSpPr>
-          <p:cNvPr id="12" name="Shape 10"/>
-          <p:cNvSpPr/>
-          <p:nvPr/>
-        </p:nvSpPr>
-        <p:spPr>
-          <a:xfrm>
-            <a:off x="566928" y="4206240"/>
-            <a:ext cx="11064240" cy="1463040"/>
+              <a:t>захист, який нічого не блокує, гірший за відсутній</a:t>
+            </a:r>
+            <a:endParaRPr lang="en-US" sz="1300" dirty="0"/>
+          </a:p>
+        </p:txBody>
+      </p:sp>
+      <p:sp>
+        <p:nvSpPr>
+          <p:cNvPr id="14" name="Shape 12"/>
+          <p:cNvSpPr/>
+          <p:nvPr/>
+        </p:nvSpPr>
+        <p:spPr>
+          <a:xfrm>
+            <a:off x="566928" y="3520440"/>
+            <a:ext cx="11064240" cy="731520"/>
           </a:xfrm>
           <a:prstGeom prst="roundRect">
             <a:avLst>
-              <a:gd name="adj" fmla="val 8750"/>
+              <a:gd name="adj" fmla="val 12500"/>
             </a:avLst>
           </a:prstGeom>
           <a:solidFill>
             <a:srgbClr val="FFFFFF"/>
           </a:solidFill>
-          <a:ln w="19050">
+          <a:ln w="12700">
             <a:solidFill>
-              <a:srgbClr val="4038C4"/>
+              <a:srgbClr val="E4E6EC"/>
             </a:solidFill>
             <a:prstDash val="solid"/>
           </a:ln>
@@ -13242,69 +13699,89 @@
       </p:sp>
       <p:sp>
         <p:nvSpPr>
-          <p:cNvPr id="13" name="Text 11"/>
-          <p:cNvSpPr/>
-          <p:nvPr/>
-        </p:nvSpPr>
-        <p:spPr>
-          <a:xfrm>
-            <a:off x="841248" y="4389120"/>
-            <a:ext cx="10515600" cy="365760"/>
-          </a:xfrm>
-          <a:prstGeom prst="rect">
-            <a:avLst/>
-          </a:prstGeom>
-          <a:noFill/>
-          <a:ln/>
-        </p:spPr>
-        <p:txBody>
-          <a:bodyPr wrap="square" lIns="0" tIns="0" rIns="0" bIns="0" rtlCol="0" anchor="ctr"/>
-          <a:lstStyle/>
-          <a:p>
-            <a:pPr indent="0" marL="0">
-              <a:buNone/>
-            </a:pPr>
-            <a:r>
-              <a:rPr lang="en-US" sz="1500" b="1" dirty="0">
-                <a:solidFill>
-                  <a:srgbClr val="4038C4"/>
+          <p:cNvPr id="15" name="Shape 13"/>
+          <p:cNvSpPr/>
+          <p:nvPr/>
+        </p:nvSpPr>
+        <p:spPr>
+          <a:xfrm>
+            <a:off x="768096" y="3694176"/>
+            <a:ext cx="384048" cy="384048"/>
+          </a:xfrm>
+          <a:prstGeom prst="ellipse">
+            <a:avLst/>
+          </a:prstGeom>
+          <a:solidFill>
+            <a:srgbClr val="F9E9E8"/>
+          </a:solidFill>
+          <a:ln/>
+        </p:spPr>
+      </p:sp>
+      <p:sp>
+        <p:nvSpPr>
+          <p:cNvPr id="16" name="Text 14"/>
+          <p:cNvSpPr/>
+          <p:nvPr/>
+        </p:nvSpPr>
+        <p:spPr>
+          <a:xfrm>
+            <a:off x="768096" y="3694176"/>
+            <a:ext cx="384048" cy="384048"/>
+          </a:xfrm>
+          <a:prstGeom prst="rect">
+            <a:avLst/>
+          </a:prstGeom>
+          <a:noFill/>
+          <a:ln/>
+        </p:spPr>
+        <p:txBody>
+          <a:bodyPr wrap="square" lIns="0" tIns="0" rIns="0" bIns="0" rtlCol="0" anchor="ctr"/>
+          <a:lstStyle/>
+          <a:p>
+            <a:pPr algn="ctr" indent="0" marL="0">
+              <a:buNone/>
+            </a:pPr>
+            <a:r>
+              <a:rPr lang="en-US" sz="1300" b="1" dirty="0">
+                <a:solidFill>
+                  <a:srgbClr val="B3261E"/>
                 </a:solidFill>
                 <a:latin typeface="Calibri" pitchFamily="34" charset="0"/>
                 <a:ea typeface="Calibri" pitchFamily="34" charset="-122"/>
                 <a:cs typeface="Calibri" pitchFamily="34" charset="-120"/>
               </a:rPr>
-              <a:t>ДЗ тижня 6 — після наступного уроку</a:t>
-            </a:r>
-            <a:endParaRPr lang="en-US" sz="1500" dirty="0"/>
-          </a:p>
-        </p:txBody>
-      </p:sp>
-      <p:sp>
-        <p:nvSpPr>
-          <p:cNvPr id="14" name="Text 12"/>
-          <p:cNvSpPr/>
-          <p:nvPr/>
-        </p:nvSpPr>
-        <p:spPr>
-          <a:xfrm>
-            <a:off x="841248" y="4800600"/>
-            <a:ext cx="10515600" cy="731520"/>
-          </a:xfrm>
-          <a:prstGeom prst="rect">
-            <a:avLst/>
-          </a:prstGeom>
-          <a:noFill/>
-          <a:ln/>
-        </p:spPr>
-        <p:txBody>
-          <a:bodyPr wrap="square" lIns="0" tIns="0" rIns="0" bIns="0" rtlCol="0" anchor="t"/>
-          <a:lstStyle/>
-          <a:p>
-            <a:pPr indent="0" marL="0">
-              <a:buNone/>
-            </a:pPr>
-            <a:r>
-              <a:rPr lang="en-US" sz="1250" dirty="0">
+              <a:t>✕</a:t>
+            </a:r>
+            <a:endParaRPr lang="en-US" sz="1300" dirty="0"/>
+          </a:p>
+        </p:txBody>
+      </p:sp>
+      <p:sp>
+        <p:nvSpPr>
+          <p:cNvPr id="17" name="Text 15"/>
+          <p:cNvSpPr/>
+          <p:nvPr/>
+        </p:nvSpPr>
+        <p:spPr>
+          <a:xfrm>
+            <a:off x="1298448" y="3520440"/>
+            <a:ext cx="10149840" cy="731520"/>
+          </a:xfrm>
+          <a:prstGeom prst="rect">
+            <a:avLst/>
+          </a:prstGeom>
+          <a:noFill/>
+          <a:ln/>
+        </p:spPr>
+        <p:txBody>
+          <a:bodyPr wrap="square" lIns="0" tIns="0" rIns="0" bIns="0" rtlCol="0" anchor="ctr"/>
+          <a:lstStyle/>
+          <a:p>
+            <a:pPr indent="0" marL="0">
+              <a:buNone/>
+            </a:pPr>
+            <a:r>
+              <a:rPr lang="en-US" sz="1300" b="1" dirty="0">
                 <a:solidFill>
                   <a:srgbClr val="1B1D23"/>
                 </a:solidFill>
@@ -13312,9 +13789,301 @@
                 <a:ea typeface="Calibri" pitchFamily="34" charset="-122"/>
                 <a:cs typeface="Calibri" pitchFamily="34" charset="-120"/>
               </a:rPr>
-              <a:t>Фінальне ДЗ збирає все: CI-гейт із сьогоднішньої лаби, інцидент-демо в окремому INCIDENT_RUNBOOK.md і повна збірка системи з чистого клону. Сьогоднішній гейт — його найбільша частина, і вона вже готова.</a:t>
-            </a:r>
-            <a:endParaRPr lang="en-US" sz="1250" dirty="0"/>
+              <a:t>Гейт, що триває пів години   </a:t>
+            </a:r>
+            <a:pPr indent="0" marL="0">
+              <a:buNone/>
+            </a:pPr>
+            <a:r>
+              <a:rPr lang="en-US" sz="1150" dirty="0">
+                <a:solidFill>
+                  <a:srgbClr val="565C6B"/>
+                </a:solidFill>
+                <a:latin typeface="Calibri" pitchFamily="34" charset="0"/>
+                <a:ea typeface="Calibri" pitchFamily="34" charset="-122"/>
+                <a:cs typeface="Calibri" pitchFamily="34" charset="-120"/>
+              </a:rPr>
+              <a:t>обхід стає раціональним рішенням</a:t>
+            </a:r>
+            <a:endParaRPr lang="en-US" sz="1300" dirty="0"/>
+          </a:p>
+        </p:txBody>
+      </p:sp>
+      <p:sp>
+        <p:nvSpPr>
+          <p:cNvPr id="18" name="Shape 16"/>
+          <p:cNvSpPr/>
+          <p:nvPr/>
+        </p:nvSpPr>
+        <p:spPr>
+          <a:xfrm>
+            <a:off x="566928" y="4389120"/>
+            <a:ext cx="11064240" cy="731520"/>
+          </a:xfrm>
+          <a:prstGeom prst="roundRect">
+            <a:avLst>
+              <a:gd name="adj" fmla="val 12500"/>
+            </a:avLst>
+          </a:prstGeom>
+          <a:solidFill>
+            <a:srgbClr val="FFFFFF"/>
+          </a:solidFill>
+          <a:ln w="12700">
+            <a:solidFill>
+              <a:srgbClr val="E4E6EC"/>
+            </a:solidFill>
+            <a:prstDash val="solid"/>
+          </a:ln>
+        </p:spPr>
+      </p:sp>
+      <p:sp>
+        <p:nvSpPr>
+          <p:cNvPr id="19" name="Shape 17"/>
+          <p:cNvSpPr/>
+          <p:nvPr/>
+        </p:nvSpPr>
+        <p:spPr>
+          <a:xfrm>
+            <a:off x="768096" y="4562856"/>
+            <a:ext cx="384048" cy="384048"/>
+          </a:xfrm>
+          <a:prstGeom prst="ellipse">
+            <a:avLst/>
+          </a:prstGeom>
+          <a:solidFill>
+            <a:srgbClr val="F9E9E8"/>
+          </a:solidFill>
+          <a:ln/>
+        </p:spPr>
+      </p:sp>
+      <p:sp>
+        <p:nvSpPr>
+          <p:cNvPr id="20" name="Text 18"/>
+          <p:cNvSpPr/>
+          <p:nvPr/>
+        </p:nvSpPr>
+        <p:spPr>
+          <a:xfrm>
+            <a:off x="768096" y="4562856"/>
+            <a:ext cx="384048" cy="384048"/>
+          </a:xfrm>
+          <a:prstGeom prst="rect">
+            <a:avLst/>
+          </a:prstGeom>
+          <a:noFill/>
+          <a:ln/>
+        </p:spPr>
+        <p:txBody>
+          <a:bodyPr wrap="square" lIns="0" tIns="0" rIns="0" bIns="0" rtlCol="0" anchor="ctr"/>
+          <a:lstStyle/>
+          <a:p>
+            <a:pPr algn="ctr" indent="0" marL="0">
+              <a:buNone/>
+            </a:pPr>
+            <a:r>
+              <a:rPr lang="en-US" sz="1300" b="1" dirty="0">
+                <a:solidFill>
+                  <a:srgbClr val="B3261E"/>
+                </a:solidFill>
+                <a:latin typeface="Calibri" pitchFamily="34" charset="0"/>
+                <a:ea typeface="Calibri" pitchFamily="34" charset="-122"/>
+                <a:cs typeface="Calibri" pitchFamily="34" charset="-120"/>
+              </a:rPr>
+              <a:t>✕</a:t>
+            </a:r>
+            <a:endParaRPr lang="en-US" sz="1300" dirty="0"/>
+          </a:p>
+        </p:txBody>
+      </p:sp>
+      <p:sp>
+        <p:nvSpPr>
+          <p:cNvPr id="21" name="Text 19"/>
+          <p:cNvSpPr/>
+          <p:nvPr/>
+        </p:nvSpPr>
+        <p:spPr>
+          <a:xfrm>
+            <a:off x="1298448" y="4389120"/>
+            <a:ext cx="10149840" cy="731520"/>
+          </a:xfrm>
+          <a:prstGeom prst="rect">
+            <a:avLst/>
+          </a:prstGeom>
+          <a:noFill/>
+          <a:ln/>
+        </p:spPr>
+        <p:txBody>
+          <a:bodyPr wrap="square" lIns="0" tIns="0" rIns="0" bIns="0" rtlCol="0" anchor="ctr"/>
+          <a:lstStyle/>
+          <a:p>
+            <a:pPr indent="0" marL="0">
+              <a:buNone/>
+            </a:pPr>
+            <a:r>
+              <a:rPr lang="en-US" sz="1300" b="1" dirty="0">
+                <a:solidFill>
+                  <a:srgbClr val="1B1D23"/>
+                </a:solidFill>
+                <a:latin typeface="Calibri" pitchFamily="34" charset="0"/>
+                <a:ea typeface="Calibri" pitchFamily="34" charset="-122"/>
+                <a:cs typeface="Calibri" pitchFamily="34" charset="-120"/>
+              </a:rPr>
+              <a:t>Feature flag без плану прибирання   </a:t>
+            </a:r>
+            <a:pPr indent="0" marL="0">
+              <a:buNone/>
+            </a:pPr>
+            <a:r>
+              <a:rPr lang="en-US" sz="1150" dirty="0">
+                <a:solidFill>
+                  <a:srgbClr val="565C6B"/>
+                </a:solidFill>
+                <a:latin typeface="Calibri" pitchFamily="34" charset="0"/>
+                <a:ea typeface="Calibri" pitchFamily="34" charset="-122"/>
+                <a:cs typeface="Calibri" pitchFamily="34" charset="-120"/>
+              </a:rPr>
+              <a:t>кладовище мертвих гілок через рік</a:t>
+            </a:r>
+            <a:endParaRPr lang="en-US" sz="1300" dirty="0"/>
+          </a:p>
+        </p:txBody>
+      </p:sp>
+      <p:sp>
+        <p:nvSpPr>
+          <p:cNvPr id="22" name="Shape 20"/>
+          <p:cNvSpPr/>
+          <p:nvPr/>
+        </p:nvSpPr>
+        <p:spPr>
+          <a:xfrm>
+            <a:off x="566928" y="5257800"/>
+            <a:ext cx="11064240" cy="731520"/>
+          </a:xfrm>
+          <a:prstGeom prst="roundRect">
+            <a:avLst>
+              <a:gd name="adj" fmla="val 12500"/>
+            </a:avLst>
+          </a:prstGeom>
+          <a:solidFill>
+            <a:srgbClr val="FFFFFF"/>
+          </a:solidFill>
+          <a:ln w="12700">
+            <a:solidFill>
+              <a:srgbClr val="E4E6EC"/>
+            </a:solidFill>
+            <a:prstDash val="solid"/>
+          </a:ln>
+        </p:spPr>
+      </p:sp>
+      <p:sp>
+        <p:nvSpPr>
+          <p:cNvPr id="23" name="Shape 21"/>
+          <p:cNvSpPr/>
+          <p:nvPr/>
+        </p:nvSpPr>
+        <p:spPr>
+          <a:xfrm>
+            <a:off x="768096" y="5431536"/>
+            <a:ext cx="384048" cy="384048"/>
+          </a:xfrm>
+          <a:prstGeom prst="ellipse">
+            <a:avLst/>
+          </a:prstGeom>
+          <a:solidFill>
+            <a:srgbClr val="F9E9E8"/>
+          </a:solidFill>
+          <a:ln/>
+        </p:spPr>
+      </p:sp>
+      <p:sp>
+        <p:nvSpPr>
+          <p:cNvPr id="24" name="Text 22"/>
+          <p:cNvSpPr/>
+          <p:nvPr/>
+        </p:nvSpPr>
+        <p:spPr>
+          <a:xfrm>
+            <a:off x="768096" y="5431536"/>
+            <a:ext cx="384048" cy="384048"/>
+          </a:xfrm>
+          <a:prstGeom prst="rect">
+            <a:avLst/>
+          </a:prstGeom>
+          <a:noFill/>
+          <a:ln/>
+        </p:spPr>
+        <p:txBody>
+          <a:bodyPr wrap="square" lIns="0" tIns="0" rIns="0" bIns="0" rtlCol="0" anchor="ctr"/>
+          <a:lstStyle/>
+          <a:p>
+            <a:pPr algn="ctr" indent="0" marL="0">
+              <a:buNone/>
+            </a:pPr>
+            <a:r>
+              <a:rPr lang="en-US" sz="1300" b="1" dirty="0">
+                <a:solidFill>
+                  <a:srgbClr val="B3261E"/>
+                </a:solidFill>
+                <a:latin typeface="Calibri" pitchFamily="34" charset="0"/>
+                <a:ea typeface="Calibri" pitchFamily="34" charset="-122"/>
+                <a:cs typeface="Calibri" pitchFamily="34" charset="-120"/>
+              </a:rPr>
+              <a:t>✕</a:t>
+            </a:r>
+            <a:endParaRPr lang="en-US" sz="1300" dirty="0"/>
+          </a:p>
+        </p:txBody>
+      </p:sp>
+      <p:sp>
+        <p:nvSpPr>
+          <p:cNvPr id="25" name="Text 23"/>
+          <p:cNvSpPr/>
+          <p:nvPr/>
+        </p:nvSpPr>
+        <p:spPr>
+          <a:xfrm>
+            <a:off x="1298448" y="5257800"/>
+            <a:ext cx="10149840" cy="731520"/>
+          </a:xfrm>
+          <a:prstGeom prst="rect">
+            <a:avLst/>
+          </a:prstGeom>
+          <a:noFill/>
+          <a:ln/>
+        </p:spPr>
+        <p:txBody>
+          <a:bodyPr wrap="square" lIns="0" tIns="0" rIns="0" bIns="0" rtlCol="0" anchor="ctr"/>
+          <a:lstStyle/>
+          <a:p>
+            <a:pPr indent="0" marL="0">
+              <a:buNone/>
+            </a:pPr>
+            <a:r>
+              <a:rPr lang="en-US" sz="1300" b="1" dirty="0">
+                <a:solidFill>
+                  <a:srgbClr val="1B1D23"/>
+                </a:solidFill>
+                <a:latin typeface="Calibri" pitchFamily="34" charset="0"/>
+                <a:ea typeface="Calibri" pitchFamily="34" charset="-122"/>
+                <a:cs typeface="Calibri" pitchFamily="34" charset="-120"/>
+              </a:rPr>
+              <a:t>Rollback-критерії під час інциденту   </a:t>
+            </a:r>
+            <a:pPr indent="0" marL="0">
+              <a:buNone/>
+            </a:pPr>
+            <a:r>
+              <a:rPr lang="en-US" sz="1150" dirty="0">
+                <a:solidFill>
+                  <a:srgbClr val="565C6B"/>
+                </a:solidFill>
+                <a:latin typeface="Calibri" pitchFamily="34" charset="0"/>
+                <a:ea typeface="Calibri" pitchFamily="34" charset="-122"/>
+                <a:cs typeface="Calibri" pitchFamily="34" charset="-120"/>
+              </a:rPr>
+              <a:t>рішення обговорюється, поки користувачі чекають</a:t>
+            </a:r>
+            <a:endParaRPr lang="en-US" sz="1300" dirty="0"/>
           </a:p>
         </p:txBody>
       </p:sp>
@@ -13377,6 +14146,581 @@
 <file path=ppt/slides/slide21.xml><?xml version="1.0" encoding="utf-8"?>
 <p:sld xmlns:a="http://schemas.openxmlformats.org/drawingml/2006/main" xmlns:r="http://schemas.openxmlformats.org/officeDocument/2006/relationships" xmlns:p="http://schemas.openxmlformats.org/presentationml/2006/main">
   <p:cSld name="Slide 21">
+    <p:bg>
+      <p:bgPr>
+        <a:solidFill>
+          <a:srgbClr val="F6F7F9"/>
+        </a:solidFill>
+      </p:bgPr>
+    </p:bg>
+    <p:spTree>
+      <p:nvGrpSpPr>
+        <p:cNvPr id="1" name=""/>
+        <p:cNvGrpSpPr/>
+        <p:nvPr/>
+      </p:nvGrpSpPr>
+      <p:grpSpPr>
+        <a:xfrm>
+          <a:off x="0" y="0"/>
+          <a:ext cx="0" cy="0"/>
+          <a:chOff x="0" y="0"/>
+          <a:chExt cx="0" cy="0"/>
+        </a:xfrm>
+      </p:grpSpPr>
+      <p:sp>
+        <p:nvSpPr>
+          <p:cNvPr id="2" name="Text 0"/>
+          <p:cNvSpPr/>
+          <p:nvPr/>
+        </p:nvSpPr>
+        <p:spPr>
+          <a:xfrm>
+            <a:off x="566928" y="365760"/>
+            <a:ext cx="8881567" cy="603504"/>
+          </a:xfrm>
+          <a:prstGeom prst="rect">
+            <a:avLst/>
+          </a:prstGeom>
+          <a:noFill/>
+          <a:ln/>
+        </p:spPr>
+        <p:txBody>
+          <a:bodyPr wrap="square" lIns="0" tIns="0" rIns="0" bIns="0" rtlCol="0" anchor="ctr"/>
+          <a:lstStyle/>
+          <a:p>
+            <a:pPr indent="0" marL="0">
+              <a:buNone/>
+            </a:pPr>
+            <a:r>
+              <a:rPr lang="en-US" sz="2500" b="1" dirty="0">
+                <a:solidFill>
+                  <a:srgbClr val="1B1D23"/>
+                </a:solidFill>
+                <a:latin typeface="Calibri" pitchFamily="34" charset="0"/>
+                <a:ea typeface="Calibri" pitchFamily="34" charset="-122"/>
+                <a:cs typeface="Calibri" pitchFamily="34" charset="-120"/>
+              </a:rPr>
+              <a:t>Домашнє завдання</a:t>
+            </a:r>
+            <a:endParaRPr lang="en-US" sz="2500" dirty="0"/>
+          </a:p>
+        </p:txBody>
+      </p:sp>
+      <p:sp>
+        <p:nvSpPr>
+          <p:cNvPr id="3" name="Shape 1"/>
+          <p:cNvSpPr/>
+          <p:nvPr/>
+        </p:nvSpPr>
+        <p:spPr>
+          <a:xfrm>
+            <a:off x="10481767" y="530352"/>
+            <a:ext cx="1143000" cy="274320"/>
+          </a:xfrm>
+          <a:prstGeom prst="roundRect">
+            <a:avLst>
+              <a:gd name="adj" fmla="val 50000"/>
+            </a:avLst>
+          </a:prstGeom>
+          <a:solidFill>
+            <a:srgbClr val="E9F3EE"/>
+          </a:solidFill>
+          <a:ln/>
+        </p:spPr>
+      </p:sp>
+      <p:sp>
+        <p:nvSpPr>
+          <p:cNvPr id="4" name="Text 2"/>
+          <p:cNvSpPr/>
+          <p:nvPr/>
+        </p:nvSpPr>
+        <p:spPr>
+          <a:xfrm>
+            <a:off x="10481767" y="530352"/>
+            <a:ext cx="1143000" cy="274320"/>
+          </a:xfrm>
+          <a:prstGeom prst="rect">
+            <a:avLst/>
+          </a:prstGeom>
+          <a:noFill/>
+          <a:ln/>
+        </p:spPr>
+        <p:txBody>
+          <a:bodyPr wrap="square" lIns="0" tIns="0" rIns="0" bIns="0" rtlCol="0" anchor="ctr"/>
+          <a:lstStyle/>
+          <a:p>
+            <a:pPr algn="ctr" indent="0" marL="0">
+              <a:buNone/>
+            </a:pPr>
+            <a:r>
+              <a:rPr lang="en-US" sz="900" b="1" spc="100" kern="0" dirty="0">
+                <a:solidFill>
+                  <a:srgbClr val="177245"/>
+                </a:solidFill>
+                <a:latin typeface="Courier New" pitchFamily="34" charset="0"/>
+                <a:ea typeface="Courier New" pitchFamily="34" charset="-122"/>
+                <a:cs typeface="Courier New" pitchFamily="34" charset="-120"/>
+              </a:rPr>
+              <a:t>ПРАКТИКА</a:t>
+            </a:r>
+            <a:endParaRPr lang="en-US" sz="900" dirty="0"/>
+          </a:p>
+        </p:txBody>
+      </p:sp>
+      <p:sp>
+        <p:nvSpPr>
+          <p:cNvPr id="5" name="Text 3"/>
+          <p:cNvSpPr/>
+          <p:nvPr/>
+        </p:nvSpPr>
+        <p:spPr>
+          <a:xfrm>
+            <a:off x="566928" y="6455664"/>
+            <a:ext cx="5486400" cy="274320"/>
+          </a:xfrm>
+          <a:prstGeom prst="rect">
+            <a:avLst/>
+          </a:prstGeom>
+          <a:noFill/>
+          <a:ln/>
+        </p:spPr>
+        <p:txBody>
+          <a:bodyPr wrap="square" lIns="0" tIns="0" rIns="0" bIns="0" rtlCol="0" anchor="ctr"/>
+          <a:lstStyle/>
+          <a:p>
+            <a:pPr indent="0" marL="0">
+              <a:buNone/>
+            </a:pPr>
+            <a:r>
+              <a:rPr lang="en-US" sz="850" dirty="0">
+                <a:solidFill>
+                  <a:srgbClr val="8A90A0"/>
+                </a:solidFill>
+                <a:latin typeface="Courier New" pitchFamily="34" charset="0"/>
+                <a:ea typeface="Courier New" pitchFamily="34" charset="-122"/>
+                <a:cs typeface="Courier New" pitchFamily="34" charset="-120"/>
+              </a:rPr>
+              <a:t>SupportGW · LLMOps Bootcamp · Урок 11 з 12</a:t>
+            </a:r>
+            <a:endParaRPr lang="en-US" sz="850" dirty="0"/>
+          </a:p>
+        </p:txBody>
+      </p:sp>
+      <p:sp>
+        <p:nvSpPr>
+          <p:cNvPr id="6" name="Shape 4"/>
+          <p:cNvSpPr/>
+          <p:nvPr/>
+        </p:nvSpPr>
+        <p:spPr>
+          <a:xfrm>
+            <a:off x="566928" y="1737360"/>
+            <a:ext cx="5349240" cy="2194560"/>
+          </a:xfrm>
+          <a:prstGeom prst="roundRect">
+            <a:avLst>
+              <a:gd name="adj" fmla="val 5000"/>
+            </a:avLst>
+          </a:prstGeom>
+          <a:solidFill>
+            <a:srgbClr val="FFFFFF"/>
+          </a:solidFill>
+          <a:ln w="12700">
+            <a:solidFill>
+              <a:srgbClr val="E4E6EC"/>
+            </a:solidFill>
+            <a:prstDash val="solid"/>
+          </a:ln>
+        </p:spPr>
+      </p:sp>
+      <p:sp>
+        <p:nvSpPr>
+          <p:cNvPr id="7" name="Text 5"/>
+          <p:cNvSpPr/>
+          <p:nvPr/>
+        </p:nvSpPr>
+        <p:spPr>
+          <a:xfrm>
+            <a:off x="768096" y="1892808"/>
+            <a:ext cx="4946904" cy="438912"/>
+          </a:xfrm>
+          <a:prstGeom prst="rect">
+            <a:avLst/>
+          </a:prstGeom>
+          <a:noFill/>
+          <a:ln/>
+        </p:spPr>
+        <p:txBody>
+          <a:bodyPr wrap="square" lIns="0" tIns="0" rIns="0" bIns="0" rtlCol="0" anchor="ctr"/>
+          <a:lstStyle/>
+          <a:p>
+            <a:pPr indent="0" marL="0">
+              <a:buNone/>
+            </a:pPr>
+            <a:r>
+              <a:rPr lang="en-US" sz="1450" b="1" dirty="0">
+                <a:solidFill>
+                  <a:srgbClr val="1B1D23"/>
+                </a:solidFill>
+                <a:latin typeface="Calibri" pitchFamily="34" charset="0"/>
+                <a:ea typeface="Calibri" pitchFamily="34" charset="-122"/>
+                <a:cs typeface="Calibri" pitchFamily="34" charset="-120"/>
+              </a:rPr>
+              <a:t>Обов'язково — без здачі</a:t>
+            </a:r>
+            <a:endParaRPr lang="en-US" sz="1450" dirty="0"/>
+          </a:p>
+        </p:txBody>
+      </p:sp>
+      <p:sp>
+        <p:nvSpPr>
+          <p:cNvPr id="8" name="Text 6"/>
+          <p:cNvSpPr/>
+          <p:nvPr/>
+        </p:nvSpPr>
+        <p:spPr>
+          <a:xfrm>
+            <a:off x="768096" y="2423160"/>
+            <a:ext cx="4946904" cy="1353312"/>
+          </a:xfrm>
+          <a:prstGeom prst="rect">
+            <a:avLst/>
+          </a:prstGeom>
+          <a:noFill/>
+          <a:ln/>
+        </p:spPr>
+        <p:txBody>
+          <a:bodyPr wrap="square" lIns="0" tIns="0" rIns="0" bIns="0" rtlCol="0" anchor="t"/>
+          <a:lstStyle/>
+          <a:p>
+            <a:pPr indent="0" marL="0">
+              <a:buNone/>
+            </a:pPr>
+            <a:r>
+              <a:rPr lang="en-US" sz="1200" dirty="0">
+                <a:solidFill>
+                  <a:srgbClr val="565C6B"/>
+                </a:solidFill>
+                <a:latin typeface="Calibri" pitchFamily="34" charset="0"/>
+                <a:ea typeface="Calibri" pitchFamily="34" charset="-122"/>
+                <a:cs typeface="Calibri" pitchFamily="34" charset="-120"/>
+              </a:rPr>
+              <a:t>• закріпити лабу: червоний і зелений прогін гейта в історії Actions</a:t>
+            </a:r>
+            <a:endParaRPr lang="en-US" sz="1200" dirty="0"/>
+          </a:p>
+          <a:p>
+            <a:pPr indent="0" marL="0">
+              <a:buNone/>
+            </a:pPr>
+            <a:endParaRPr lang="en-US" sz="1200" dirty="0"/>
+          </a:p>
+          <a:p>
+            <a:pPr indent="0" marL="0">
+              <a:buNone/>
+            </a:pPr>
+            <a:r>
+              <a:rPr lang="en-US" sz="1200" dirty="0">
+                <a:solidFill>
+                  <a:srgbClr val="565C6B"/>
+                </a:solidFill>
+                <a:latin typeface="Calibri" pitchFamily="34" charset="0"/>
+                <a:ea typeface="Calibri" pitchFamily="34" charset="-122"/>
+                <a:cs typeface="Calibri" pitchFamily="34" charset="-120"/>
+              </a:rPr>
+              <a:t>• записати rollback-критерії для своєї системи</a:t>
+            </a:r>
+            <a:endParaRPr lang="en-US" sz="1200" dirty="0"/>
+          </a:p>
+          <a:p>
+            <a:pPr indent="0" marL="0">
+              <a:buNone/>
+            </a:pPr>
+            <a:endParaRPr lang="en-US" sz="1200" dirty="0"/>
+          </a:p>
+          <a:p>
+            <a:pPr indent="0" marL="0">
+              <a:buNone/>
+            </a:pPr>
+            <a:r>
+              <a:rPr lang="en-US" sz="1200" dirty="0">
+                <a:solidFill>
+                  <a:srgbClr val="565C6B"/>
+                </a:solidFill>
+                <a:latin typeface="Calibri" pitchFamily="34" charset="0"/>
+                <a:ea typeface="Calibri" pitchFamily="34" charset="-122"/>
+                <a:cs typeface="Calibri" pitchFamily="34" charset="-120"/>
+              </a:rPr>
+              <a:t>• переконатися, що гейт швидкий і його падіння зрозуміле з логів</a:t>
+            </a:r>
+            <a:endParaRPr lang="en-US" sz="1200" dirty="0"/>
+          </a:p>
+        </p:txBody>
+      </p:sp>
+      <p:sp>
+        <p:nvSpPr>
+          <p:cNvPr id="9" name="Shape 7"/>
+          <p:cNvSpPr/>
+          <p:nvPr/>
+        </p:nvSpPr>
+        <p:spPr>
+          <a:xfrm>
+            <a:off x="6281928" y="1737360"/>
+            <a:ext cx="5349240" cy="2194560"/>
+          </a:xfrm>
+          <a:prstGeom prst="roundRect">
+            <a:avLst>
+              <a:gd name="adj" fmla="val 5000"/>
+            </a:avLst>
+          </a:prstGeom>
+          <a:solidFill>
+            <a:srgbClr val="F8F0E2"/>
+          </a:solidFill>
+          <a:ln/>
+        </p:spPr>
+      </p:sp>
+      <p:sp>
+        <p:nvSpPr>
+          <p:cNvPr id="10" name="Text 8"/>
+          <p:cNvSpPr/>
+          <p:nvPr/>
+        </p:nvSpPr>
+        <p:spPr>
+          <a:xfrm>
+            <a:off x="6483096" y="1892808"/>
+            <a:ext cx="4946904" cy="438912"/>
+          </a:xfrm>
+          <a:prstGeom prst="rect">
+            <a:avLst/>
+          </a:prstGeom>
+          <a:noFill/>
+          <a:ln/>
+        </p:spPr>
+        <p:txBody>
+          <a:bodyPr wrap="square" lIns="0" tIns="0" rIns="0" bIns="0" rtlCol="0" anchor="ctr"/>
+          <a:lstStyle/>
+          <a:p>
+            <a:pPr indent="0" marL="0">
+              <a:buNone/>
+            </a:pPr>
+            <a:r>
+              <a:rPr lang="en-US" sz="1450" b="1" dirty="0">
+                <a:solidFill>
+                  <a:srgbClr val="9A5B12"/>
+                </a:solidFill>
+                <a:latin typeface="Calibri" pitchFamily="34" charset="0"/>
+                <a:ea typeface="Calibri" pitchFamily="34" charset="-122"/>
+                <a:cs typeface="Calibri" pitchFamily="34" charset="-120"/>
+              </a:rPr>
+              <a:t>Опційно</a:t>
+            </a:r>
+            <a:endParaRPr lang="en-US" sz="1450" dirty="0"/>
+          </a:p>
+        </p:txBody>
+      </p:sp>
+      <p:sp>
+        <p:nvSpPr>
+          <p:cNvPr id="11" name="Text 9"/>
+          <p:cNvSpPr/>
+          <p:nvPr/>
+        </p:nvSpPr>
+        <p:spPr>
+          <a:xfrm>
+            <a:off x="6483096" y="2423160"/>
+            <a:ext cx="4946904" cy="1353312"/>
+          </a:xfrm>
+          <a:prstGeom prst="rect">
+            <a:avLst/>
+          </a:prstGeom>
+          <a:noFill/>
+          <a:ln/>
+        </p:spPr>
+        <p:txBody>
+          <a:bodyPr wrap="square" lIns="0" tIns="0" rIns="0" bIns="0" rtlCol="0" anchor="t"/>
+          <a:lstStyle/>
+          <a:p>
+            <a:pPr indent="0" marL="0">
+              <a:buNone/>
+            </a:pPr>
+            <a:r>
+              <a:rPr lang="en-US" sz="1200" dirty="0">
+                <a:solidFill>
+                  <a:srgbClr val="1B1D23"/>
+                </a:solidFill>
+                <a:latin typeface="Calibri" pitchFamily="34" charset="0"/>
+                <a:ea typeface="Calibri" pitchFamily="34" charset="-122"/>
+                <a:cs typeface="Calibri" pitchFamily="34" charset="-120"/>
+              </a:rPr>
+              <a:t>• canary-план: розподіл 90/10 своїм роутером, метрики порівняння, критерії promote/rollback</a:t>
+            </a:r>
+            <a:endParaRPr lang="en-US" sz="1200" dirty="0"/>
+          </a:p>
+        </p:txBody>
+      </p:sp>
+      <p:sp>
+        <p:nvSpPr>
+          <p:cNvPr id="12" name="Shape 10"/>
+          <p:cNvSpPr/>
+          <p:nvPr/>
+        </p:nvSpPr>
+        <p:spPr>
+          <a:xfrm>
+            <a:off x="566928" y="4206240"/>
+            <a:ext cx="11064240" cy="1463040"/>
+          </a:xfrm>
+          <a:prstGeom prst="roundRect">
+            <a:avLst>
+              <a:gd name="adj" fmla="val 8750"/>
+            </a:avLst>
+          </a:prstGeom>
+          <a:solidFill>
+            <a:srgbClr val="FFFFFF"/>
+          </a:solidFill>
+          <a:ln w="19050">
+            <a:solidFill>
+              <a:srgbClr val="4038C4"/>
+            </a:solidFill>
+            <a:prstDash val="solid"/>
+          </a:ln>
+        </p:spPr>
+      </p:sp>
+      <p:sp>
+        <p:nvSpPr>
+          <p:cNvPr id="13" name="Text 11"/>
+          <p:cNvSpPr/>
+          <p:nvPr/>
+        </p:nvSpPr>
+        <p:spPr>
+          <a:xfrm>
+            <a:off x="841248" y="4389120"/>
+            <a:ext cx="10515600" cy="365760"/>
+          </a:xfrm>
+          <a:prstGeom prst="rect">
+            <a:avLst/>
+          </a:prstGeom>
+          <a:noFill/>
+          <a:ln/>
+        </p:spPr>
+        <p:txBody>
+          <a:bodyPr wrap="square" lIns="0" tIns="0" rIns="0" bIns="0" rtlCol="0" anchor="ctr"/>
+          <a:lstStyle/>
+          <a:p>
+            <a:pPr indent="0" marL="0">
+              <a:buNone/>
+            </a:pPr>
+            <a:r>
+              <a:rPr lang="en-US" sz="1500" b="1" dirty="0">
+                <a:solidFill>
+                  <a:srgbClr val="4038C4"/>
+                </a:solidFill>
+                <a:latin typeface="Calibri" pitchFamily="34" charset="0"/>
+                <a:ea typeface="Calibri" pitchFamily="34" charset="-122"/>
+                <a:cs typeface="Calibri" pitchFamily="34" charset="-120"/>
+              </a:rPr>
+              <a:t>ДЗ тижня 6 — після наступного уроку</a:t>
+            </a:r>
+            <a:endParaRPr lang="en-US" sz="1500" dirty="0"/>
+          </a:p>
+        </p:txBody>
+      </p:sp>
+      <p:sp>
+        <p:nvSpPr>
+          <p:cNvPr id="14" name="Text 12"/>
+          <p:cNvSpPr/>
+          <p:nvPr/>
+        </p:nvSpPr>
+        <p:spPr>
+          <a:xfrm>
+            <a:off x="841248" y="4800600"/>
+            <a:ext cx="10515600" cy="731520"/>
+          </a:xfrm>
+          <a:prstGeom prst="rect">
+            <a:avLst/>
+          </a:prstGeom>
+          <a:noFill/>
+          <a:ln/>
+        </p:spPr>
+        <p:txBody>
+          <a:bodyPr wrap="square" lIns="0" tIns="0" rIns="0" bIns="0" rtlCol="0" anchor="t"/>
+          <a:lstStyle/>
+          <a:p>
+            <a:pPr indent="0" marL="0">
+              <a:buNone/>
+            </a:pPr>
+            <a:r>
+              <a:rPr lang="en-US" sz="1250" dirty="0">
+                <a:solidFill>
+                  <a:srgbClr val="1B1D23"/>
+                </a:solidFill>
+                <a:latin typeface="Calibri" pitchFamily="34" charset="0"/>
+                <a:ea typeface="Calibri" pitchFamily="34" charset="-122"/>
+                <a:cs typeface="Calibri" pitchFamily="34" charset="-120"/>
+              </a:rPr>
+              <a:t>Фінальне ДЗ збирає все: CI-гейт із сьогоднішньої лаби, інцидент-демо в окремому INCIDENT_RUNBOOK.md і повна збірка системи з чистого клону. Сьогоднішній гейт — його найбільша частина, і вона вже готова.</a:t>
+            </a:r>
+            <a:endParaRPr lang="en-US" sz="1250" dirty="0"/>
+          </a:p>
+        </p:txBody>
+      </p:sp>
+      <p:sp>
+        <p:nvSpPr>
+          <p:cNvPr id="25" name="Slide Number Placeholder 0"/>
+          <p:cNvSpPr>
+            <a:spLocks noGrp="1"/>
+          </p:cNvSpPr>
+          <p:nvPr>
+            <p:ph type="sldNum" sz="quarter" idx="4294967295"/>
+          </p:nvPr>
+        </p:nvSpPr>
+        <p:spPr>
+          <a:xfrm>
+            <a:off x="11323015" y="6455664"/>
+            <a:ext cx="365760" cy="274320"/>
+          </a:xfrm>
+          <a:prstGeom prst="rect">
+            <a:avLst/>
+          </a:prstGeom>
+          <a:extLst>
+            <a:ext uri="{C572A759-6A51-4108-AA02-DFA0A04FC94B}">
+              <ma14:wrappingTextBoxFlag xmlns:ma14="http://schemas.microsoft.com/office/mac/drawingml/2011/main" val="0"/>
+            </a:ext>
+          </a:extLst>
+        </p:spPr>
+        <p:txBody>
+          <a:bodyPr/>
+          <a:lstStyle>
+            <a:lvl1pPr>
+              <a:defRPr sz="850">
+                <a:solidFill>
+                  <a:srgbClr val="8A90A0"/>
+                </a:solidFill>
+                <a:latin typeface="Courier New"/>
+                <a:ea typeface="Courier New"/>
+                <a:cs typeface="Courier New"/>
+              </a:defRPr>
+            </a:lvl1pPr>
+          </a:lstStyle>
+          <a:p>
+            <a:pPr algn="l"/>
+            <a:fld id="{F7021451-1387-4CA6-816F-3879F97B5CBC}" type="slidenum">
+              <a:rPr b="0" lang="en-US"/>
+              <a:t>21</a:t>
+            </a:fld>
+            <a:endParaRPr lang="en-US"/>
+          </a:p>
+        </p:txBody>
+      </p:sp>
+    </p:spTree>
+  </p:cSld>
+  <p:clrMapOvr>
+    <a:masterClrMapping/>
+  </p:clrMapOvr>
+</p:sld>
+</file>
+
+<file path=ppt/slides/slide22.xml><?xml version="1.0" encoding="utf-8"?>
+<p:sld xmlns:a="http://schemas.openxmlformats.org/drawingml/2006/main" xmlns:r="http://schemas.openxmlformats.org/officeDocument/2006/relationships" xmlns:p="http://schemas.openxmlformats.org/presentationml/2006/main">
+  <p:cSld name="Slide 22">
     <p:bg>
       <p:bgPr>
         <a:solidFill>

--- a/docs/decks/L11.pptx
+++ b/docs/decks/L11.pptx
@@ -15403,9 +15403,14 @@
             </a:avLst>
           </a:prstGeom>
           <a:solidFill>
-            <a:srgbClr val="ECEBFB"/>
+            <a:srgbClr val="FFFFFF"/>
           </a:solidFill>
-          <a:ln/>
+          <a:ln w="12700">
+            <a:solidFill>
+              <a:srgbClr val="E4E6EC"/>
+            </a:solidFill>
+            <a:prstDash val="solid"/>
+          </a:ln>
         </p:spPr>
       </p:sp>
       <p:sp>
@@ -15423,7 +15428,7 @@
             <a:avLst/>
           </a:prstGeom>
           <a:solidFill>
-            <a:srgbClr val="4038C4"/>
+            <a:srgbClr val="1B1D23"/>
           </a:solidFill>
           <a:ln/>
         </p:spPr>
@@ -15455,7 +15460,7 @@
             <a:r>
               <a:rPr lang="en-US" sz="1200" b="1" dirty="0">
                 <a:solidFill>
-                  <a:srgbClr val="ECEBFB"/>
+                  <a:srgbClr val="FFFFFF"/>
                 </a:solidFill>
                 <a:latin typeface="Courier New" pitchFamily="34" charset="0"/>
                 <a:ea typeface="Courier New" pitchFamily="34" charset="-122"/>
@@ -15494,7 +15499,7 @@
             <a:r>
               <a:rPr lang="en-US" sz="1450" b="1" dirty="0">
                 <a:solidFill>
-                  <a:srgbClr val="4038C4"/>
+                  <a:srgbClr val="1B1D23"/>
                 </a:solidFill>
                 <a:latin typeface="Calibri" pitchFamily="34" charset="0"/>
                 <a:ea typeface="Calibri" pitchFamily="34" charset="-122"/>
@@ -15523,9 +15528,14 @@
             </a:avLst>
           </a:prstGeom>
           <a:solidFill>
-            <a:srgbClr val="ECEBFB"/>
+            <a:srgbClr val="FFFFFF"/>
           </a:solidFill>
-          <a:ln/>
+          <a:ln w="12700">
+            <a:solidFill>
+              <a:srgbClr val="E4E6EC"/>
+            </a:solidFill>
+            <a:prstDash val="solid"/>
+          </a:ln>
         </p:spPr>
       </p:sp>
       <p:sp>
@@ -15543,7 +15553,7 @@
             <a:avLst/>
           </a:prstGeom>
           <a:solidFill>
-            <a:srgbClr val="4038C4"/>
+            <a:srgbClr val="1B1D23"/>
           </a:solidFill>
           <a:ln/>
         </p:spPr>
@@ -15575,7 +15585,7 @@
             <a:r>
               <a:rPr lang="en-US" sz="1200" b="1" dirty="0">
                 <a:solidFill>
-                  <a:srgbClr val="ECEBFB"/>
+                  <a:srgbClr val="FFFFFF"/>
                 </a:solidFill>
                 <a:latin typeface="Courier New" pitchFamily="34" charset="0"/>
                 <a:ea typeface="Courier New" pitchFamily="34" charset="-122"/>
@@ -15614,7 +15624,7 @@
             <a:r>
               <a:rPr lang="en-US" sz="1450" b="1" dirty="0">
                 <a:solidFill>
-                  <a:srgbClr val="4038C4"/>
+                  <a:srgbClr val="1B1D23"/>
                 </a:solidFill>
                 <a:latin typeface="Calibri" pitchFamily="34" charset="0"/>
                 <a:ea typeface="Calibri" pitchFamily="34" charset="-122"/>
@@ -15643,9 +15653,14 @@
             </a:avLst>
           </a:prstGeom>
           <a:solidFill>
-            <a:srgbClr val="ECEBFB"/>
+            <a:srgbClr val="FFFFFF"/>
           </a:solidFill>
-          <a:ln/>
+          <a:ln w="12700">
+            <a:solidFill>
+              <a:srgbClr val="E4E6EC"/>
+            </a:solidFill>
+            <a:prstDash val="solid"/>
+          </a:ln>
         </p:spPr>
       </p:sp>
       <p:sp>
@@ -15663,7 +15678,7 @@
             <a:avLst/>
           </a:prstGeom>
           <a:solidFill>
-            <a:srgbClr val="4038C4"/>
+            <a:srgbClr val="1B1D23"/>
           </a:solidFill>
           <a:ln/>
         </p:spPr>
@@ -15695,7 +15710,7 @@
             <a:r>
               <a:rPr lang="en-US" sz="1200" b="1" dirty="0">
                 <a:solidFill>
-                  <a:srgbClr val="ECEBFB"/>
+                  <a:srgbClr val="FFFFFF"/>
                 </a:solidFill>
                 <a:latin typeface="Courier New" pitchFamily="34" charset="0"/>
                 <a:ea typeface="Courier New" pitchFamily="34" charset="-122"/>
@@ -15734,7 +15749,7 @@
             <a:r>
               <a:rPr lang="en-US" sz="1450" b="1" dirty="0">
                 <a:solidFill>
-                  <a:srgbClr val="4038C4"/>
+                  <a:srgbClr val="1B1D23"/>
                 </a:solidFill>
                 <a:latin typeface="Calibri" pitchFamily="34" charset="0"/>
                 <a:ea typeface="Calibri" pitchFamily="34" charset="-122"/>
@@ -15763,9 +15778,14 @@
             </a:avLst>
           </a:prstGeom>
           <a:solidFill>
-            <a:srgbClr val="ECEBFB"/>
+            <a:srgbClr val="FFFFFF"/>
           </a:solidFill>
-          <a:ln/>
+          <a:ln w="12700">
+            <a:solidFill>
+              <a:srgbClr val="E4E6EC"/>
+            </a:solidFill>
+            <a:prstDash val="solid"/>
+          </a:ln>
         </p:spPr>
       </p:sp>
       <p:sp>
@@ -15783,7 +15803,7 @@
             <a:avLst/>
           </a:prstGeom>
           <a:solidFill>
-            <a:srgbClr val="4038C4"/>
+            <a:srgbClr val="1B1D23"/>
           </a:solidFill>
           <a:ln/>
         </p:spPr>
@@ -15815,7 +15835,7 @@
             <a:r>
               <a:rPr lang="en-US" sz="1200" b="1" dirty="0">
                 <a:solidFill>
-                  <a:srgbClr val="ECEBFB"/>
+                  <a:srgbClr val="FFFFFF"/>
                 </a:solidFill>
                 <a:latin typeface="Courier New" pitchFamily="34" charset="0"/>
                 <a:ea typeface="Courier New" pitchFamily="34" charset="-122"/>
@@ -15854,7 +15874,7 @@
             <a:r>
               <a:rPr lang="en-US" sz="1450" b="1" dirty="0">
                 <a:solidFill>
-                  <a:srgbClr val="4038C4"/>
+                  <a:srgbClr val="1B1D23"/>
                 </a:solidFill>
                 <a:latin typeface="Calibri" pitchFamily="34" charset="0"/>
                 <a:ea typeface="Calibri" pitchFamily="34" charset="-122"/>
@@ -15883,9 +15903,14 @@
             </a:avLst>
           </a:prstGeom>
           <a:solidFill>
-            <a:srgbClr val="ECEBFB"/>
+            <a:srgbClr val="FFFFFF"/>
           </a:solidFill>
-          <a:ln/>
+          <a:ln w="12700">
+            <a:solidFill>
+              <a:srgbClr val="E4E6EC"/>
+            </a:solidFill>
+            <a:prstDash val="solid"/>
+          </a:ln>
         </p:spPr>
       </p:sp>
       <p:sp>
@@ -15903,7 +15928,7 @@
             <a:avLst/>
           </a:prstGeom>
           <a:solidFill>
-            <a:srgbClr val="4038C4"/>
+            <a:srgbClr val="1B1D23"/>
           </a:solidFill>
           <a:ln/>
         </p:spPr>
@@ -15935,7 +15960,7 @@
             <a:r>
               <a:rPr lang="en-US" sz="1200" b="1" dirty="0">
                 <a:solidFill>
-                  <a:srgbClr val="ECEBFB"/>
+                  <a:srgbClr val="FFFFFF"/>
                 </a:solidFill>
                 <a:latin typeface="Courier New" pitchFamily="34" charset="0"/>
                 <a:ea typeface="Courier New" pitchFamily="34" charset="-122"/>
@@ -15974,7 +15999,7 @@
             <a:r>
               <a:rPr lang="en-US" sz="1450" b="1" dirty="0">
                 <a:solidFill>
-                  <a:srgbClr val="4038C4"/>
+                  <a:srgbClr val="1B1D23"/>
                 </a:solidFill>
                 <a:latin typeface="Calibri" pitchFamily="34" charset="0"/>
                 <a:ea typeface="Calibri" pitchFamily="34" charset="-122"/>

--- a/docs/decks/L11.pptx
+++ b/docs/decks/L11.pptx
@@ -8321,9 +8321,14 @@
             </a:avLst>
           </a:prstGeom>
           <a:solidFill>
-            <a:srgbClr val="141018"/>
+            <a:srgbClr val="F5F4FA"/>
           </a:solidFill>
-          <a:ln/>
+          <a:ln w="12700">
+            <a:solidFill>
+              <a:srgbClr val="E6E7EC"/>
+            </a:solidFill>
+            <a:prstDash val="solid"/>
+          </a:ln>
         </p:spPr>
       </p:sp>
       <p:sp>
@@ -8356,7 +8361,7 @@
             <a:r>
               <a:rPr lang="en-US" sz="1200" dirty="0">
                 <a:solidFill>
-                  <a:srgbClr val="82AAFF"/>
+                  <a:srgbClr val="5A05F4"/>
                 </a:solidFill>
                 <a:latin typeface="Courier New" pitchFamily="34" charset="0"/>
                 <a:ea typeface="Courier New" pitchFamily="34" charset="-122"/>
@@ -8376,7 +8381,7 @@
             <a:r>
               <a:rPr lang="en-US" sz="1200" dirty="0">
                 <a:solidFill>
-                  <a:srgbClr val="F78C6C"/>
+                  <a:srgbClr val="B45309"/>
                 </a:solidFill>
                 <a:latin typeface="Courier New" pitchFamily="34" charset="0"/>
                 <a:ea typeface="Courier New" pitchFamily="34" charset="-122"/>
@@ -8393,7 +8398,7 @@
             <a:r>
               <a:rPr lang="en-US" sz="1200" dirty="0">
                 <a:solidFill>
-                  <a:srgbClr val="6A7385"/>
+                  <a:srgbClr val="8A7FA6"/>
                 </a:solidFill>
                 <a:latin typeface="Courier New" pitchFamily="34" charset="0"/>
                 <a:ea typeface="Courier New" pitchFamily="34" charset="-122"/>
@@ -8413,7 +8418,7 @@
             <a:r>
               <a:rPr lang="en-US" sz="1200" dirty="0">
                 <a:solidFill>
-                  <a:srgbClr val="F78C6C"/>
+                  <a:srgbClr val="B45309"/>
                 </a:solidFill>
                 <a:latin typeface="Courier New" pitchFamily="34" charset="0"/>
                 <a:ea typeface="Courier New" pitchFamily="34" charset="-122"/>
@@ -8430,7 +8435,7 @@
             <a:r>
               <a:rPr lang="en-US" sz="1200" dirty="0">
                 <a:solidFill>
-                  <a:srgbClr val="6A7385"/>
+                  <a:srgbClr val="8A7FA6"/>
                 </a:solidFill>
                 <a:latin typeface="Courier New" pitchFamily="34" charset="0"/>
                 <a:ea typeface="Courier New" pitchFamily="34" charset="-122"/>
@@ -8450,7 +8455,7 @@
             <a:r>
               <a:rPr lang="en-US" sz="1200" dirty="0">
                 <a:solidFill>
-                  <a:srgbClr val="F78C6C"/>
+                  <a:srgbClr val="B45309"/>
                 </a:solidFill>
                 <a:latin typeface="Courier New" pitchFamily="34" charset="0"/>
                 <a:ea typeface="Courier New" pitchFamily="34" charset="-122"/>
@@ -8467,7 +8472,7 @@
             <a:r>
               <a:rPr lang="en-US" sz="1200" dirty="0">
                 <a:solidFill>
-                  <a:srgbClr val="6A7385"/>
+                  <a:srgbClr val="8A7FA6"/>
                 </a:solidFill>
                 <a:latin typeface="Courier New" pitchFamily="34" charset="0"/>
                 <a:ea typeface="Courier New" pitchFamily="34" charset="-122"/>
@@ -8487,7 +8492,7 @@
             <a:r>
               <a:rPr lang="en-US" sz="1200" dirty="0">
                 <a:solidFill>
-                  <a:srgbClr val="C3E88D"/>
+                  <a:srgbClr val="177245"/>
                 </a:solidFill>
                 <a:latin typeface="Courier New" pitchFamily="34" charset="0"/>
                 <a:ea typeface="Courier New" pitchFamily="34" charset="-122"/>
@@ -8507,7 +8512,7 @@
             <a:r>
               <a:rPr lang="en-US" sz="1200" dirty="0">
                 <a:solidFill>
-                  <a:srgbClr val="C3E88D"/>
+                  <a:srgbClr val="177245"/>
                 </a:solidFill>
                 <a:latin typeface="Courier New" pitchFamily="34" charset="0"/>
                 <a:ea typeface="Courier New" pitchFamily="34" charset="-122"/>
@@ -20561,9 +20566,14 @@
             </a:avLst>
           </a:prstGeom>
           <a:solidFill>
-            <a:srgbClr val="141018"/>
+            <a:srgbClr val="F5F4FA"/>
           </a:solidFill>
-          <a:ln/>
+          <a:ln w="12700">
+            <a:solidFill>
+              <a:srgbClr val="E6E7EC"/>
+            </a:solidFill>
+            <a:prstDash val="solid"/>
+          </a:ln>
         </p:spPr>
       </p:sp>
       <p:sp>
@@ -20596,7 +20606,7 @@
             <a:r>
               <a:rPr lang="en-US" sz="1050" dirty="0">
                 <a:solidFill>
-                  <a:srgbClr val="82AAFF"/>
+                  <a:srgbClr val="5A05F4"/>
                 </a:solidFill>
                 <a:latin typeface="Courier New" pitchFamily="34" charset="0"/>
                 <a:ea typeface="Courier New" pitchFamily="34" charset="-122"/>
@@ -20613,7 +20623,7 @@
             <a:r>
               <a:rPr lang="en-US" sz="1050" dirty="0">
                 <a:solidFill>
-                  <a:srgbClr val="6A7385"/>
+                  <a:srgbClr val="8A7FA6"/>
                 </a:solidFill>
                 <a:latin typeface="Courier New" pitchFamily="34" charset="0"/>
                 <a:ea typeface="Courier New" pitchFamily="34" charset="-122"/>
@@ -20633,7 +20643,7 @@
             <a:r>
               <a:rPr lang="en-US" sz="1050" dirty="0">
                 <a:solidFill>
-                  <a:srgbClr val="ECE8F6"/>
+                  <a:srgbClr val="23262F"/>
                 </a:solidFill>
                 <a:latin typeface="Courier New" pitchFamily="34" charset="0"/>
                 <a:ea typeface="Courier New" pitchFamily="34" charset="-122"/>
@@ -20653,7 +20663,7 @@
             <a:r>
               <a:rPr lang="en-US" sz="1050" dirty="0">
                 <a:solidFill>
-                  <a:srgbClr val="82AAFF"/>
+                  <a:srgbClr val="5A05F4"/>
                 </a:solidFill>
                 <a:latin typeface="Courier New" pitchFamily="34" charset="0"/>
                 <a:ea typeface="Courier New" pitchFamily="34" charset="-122"/>
@@ -20673,7 +20683,7 @@
             <a:r>
               <a:rPr lang="en-US" sz="1050" dirty="0">
                 <a:solidFill>
-                  <a:srgbClr val="ECE8F6"/>
+                  <a:srgbClr val="23262F"/>
                 </a:solidFill>
                 <a:latin typeface="Courier New" pitchFamily="34" charset="0"/>
                 <a:ea typeface="Courier New" pitchFamily="34" charset="-122"/>
@@ -20693,7 +20703,7 @@
             <a:r>
               <a:rPr lang="en-US" sz="1050" dirty="0">
                 <a:solidFill>
-                  <a:srgbClr val="ECE8F6"/>
+                  <a:srgbClr val="23262F"/>
                 </a:solidFill>
                 <a:latin typeface="Courier New" pitchFamily="34" charset="0"/>
                 <a:ea typeface="Courier New" pitchFamily="34" charset="-122"/>
@@ -20713,7 +20723,7 @@
             <a:r>
               <a:rPr lang="en-US" sz="1050" dirty="0">
                 <a:solidFill>
-                  <a:srgbClr val="ECE8F6"/>
+                  <a:srgbClr val="23262F"/>
                 </a:solidFill>
                 <a:latin typeface="Courier New" pitchFamily="34" charset="0"/>
                 <a:ea typeface="Courier New" pitchFamily="34" charset="-122"/>
@@ -20733,7 +20743,7 @@
             <a:r>
               <a:rPr lang="en-US" sz="1050" dirty="0">
                 <a:solidFill>
-                  <a:srgbClr val="ECE8F6"/>
+                  <a:srgbClr val="23262F"/>
                 </a:solidFill>
                 <a:latin typeface="Courier New" pitchFamily="34" charset="0"/>
                 <a:ea typeface="Courier New" pitchFamily="34" charset="-122"/>
@@ -20753,7 +20763,7 @@
             <a:r>
               <a:rPr lang="en-US" sz="1050" dirty="0">
                 <a:solidFill>
-                  <a:srgbClr val="82AAFF"/>
+                  <a:srgbClr val="5A05F4"/>
                 </a:solidFill>
                 <a:latin typeface="Courier New" pitchFamily="34" charset="0"/>
                 <a:ea typeface="Courier New" pitchFamily="34" charset="-122"/>
@@ -20770,7 +20780,7 @@
             <a:r>
               <a:rPr lang="en-US" sz="1050" dirty="0">
                 <a:solidFill>
-                  <a:srgbClr val="6A7385"/>
+                  <a:srgbClr val="8A7FA6"/>
                 </a:solidFill>
                 <a:latin typeface="Courier New" pitchFamily="34" charset="0"/>
                 <a:ea typeface="Courier New" pitchFamily="34" charset="-122"/>
@@ -20790,7 +20800,7 @@
             <a:r>
               <a:rPr lang="en-US" sz="1050" dirty="0">
                 <a:solidFill>
-                  <a:srgbClr val="82AAFF"/>
+                  <a:srgbClr val="5A05F4"/>
                 </a:solidFill>
                 <a:latin typeface="Courier New" pitchFamily="34" charset="0"/>
                 <a:ea typeface="Courier New" pitchFamily="34" charset="-122"/>
@@ -20810,7 +20820,7 @@
             <a:r>
               <a:rPr lang="en-US" sz="1050" dirty="0">
                 <a:solidFill>
-                  <a:srgbClr val="ECE8F6"/>
+                  <a:srgbClr val="23262F"/>
                 </a:solidFill>
                 <a:latin typeface="Courier New" pitchFamily="34" charset="0"/>
                 <a:ea typeface="Courier New" pitchFamily="34" charset="-122"/>
@@ -20830,7 +20840,7 @@
             <a:r>
               <a:rPr lang="en-US" sz="1050" dirty="0">
                 <a:solidFill>
-                  <a:srgbClr val="ECE8F6"/>
+                  <a:srgbClr val="23262F"/>
                 </a:solidFill>
                 <a:latin typeface="Courier New" pitchFamily="34" charset="0"/>
                 <a:ea typeface="Courier New" pitchFamily="34" charset="-122"/>
@@ -20850,7 +20860,7 @@
             <a:r>
               <a:rPr lang="en-US" sz="1050" dirty="0">
                 <a:solidFill>
-                  <a:srgbClr val="82AAFF"/>
+                  <a:srgbClr val="5A05F4"/>
                 </a:solidFill>
                 <a:latin typeface="Courier New" pitchFamily="34" charset="0"/>
                 <a:ea typeface="Courier New" pitchFamily="34" charset="-122"/>
@@ -20867,7 +20877,7 @@
             <a:r>
               <a:rPr lang="en-US" sz="1050" dirty="0">
                 <a:solidFill>
-                  <a:srgbClr val="6A7385"/>
+                  <a:srgbClr val="8A7FA6"/>
                 </a:solidFill>
                 <a:latin typeface="Courier New" pitchFamily="34" charset="0"/>
                 <a:ea typeface="Courier New" pitchFamily="34" charset="-122"/>
@@ -20887,7 +20897,7 @@
             <a:r>
               <a:rPr lang="en-US" sz="1050" dirty="0">
                 <a:solidFill>
-                  <a:srgbClr val="82AAFF"/>
+                  <a:srgbClr val="5A05F4"/>
                 </a:solidFill>
                 <a:latin typeface="Courier New" pitchFamily="34" charset="0"/>
                 <a:ea typeface="Courier New" pitchFamily="34" charset="-122"/>
@@ -20904,7 +20914,7 @@
             <a:r>
               <a:rPr lang="en-US" sz="1050" dirty="0">
                 <a:solidFill>
-                  <a:srgbClr val="6A7385"/>
+                  <a:srgbClr val="8A7FA6"/>
                 </a:solidFill>
                 <a:latin typeface="Courier New" pitchFamily="34" charset="0"/>
                 <a:ea typeface="Courier New" pitchFamily="34" charset="-122"/>

--- a/docs/decks/L11.pptx
+++ b/docs/decks/L11.pptx
@@ -523,7 +523,7 @@
           <a:p>
             <a:r>
               <a:rPr lang="en-US" dirty="0"/>
-              <a:t/>
+              <a:t>Вітаю на одинадцятому уроці — передостанньому в курсі. З другого уроку ми повторюємо мантру: зміна промпта — це реліз. Сьогодні ця фраза нарешті перестане бути гаслом і стане механізмом: eval, який ви збудували минулого тижня, перетвориться на гейт у CI — перевірку, що запускається на кожен PR і фізично не пускає регресію в main. Кнопка merge буде заблокована не чиєюсь пильністю, а exit code вашого прогону. По дорозі — чесні історії про те, чим CI відрізняється від локальної машини: наш гейт теж падав на першому запуску, і ви побачите чому. Далі — два шматки релізної дисципліни, про які рідко думають до першого болю: порядок викочування залежних компонентів і rollback-критерії, які пишуться до пожежі, а не під час неї. Опційно — canary для промптів. І найприємніше: майже нічого нового ми сьогодні не пишемо. Всі складники гейта вже існують — ми їх лише з'єднуємо.</a:t>
             </a:r>
             <a:endParaRPr lang="en-US" dirty="0"/>
           </a:p>
@@ -611,7 +611,7 @@
           <a:p>
             <a:r>
               <a:rPr lang="en-US" dirty="0"/>
-              <a:t/>
+              <a:t>Тепер про культуру. Червоний гейт на вашому PR — це неприємно: ви поспішали, а вас зупинили. Правильна рамка: гейт щойно зловив регресію до користувачів, а не після. Він зробив за секунди те, що інакше зробила б підтримка за тиждень скарг: знайшов, що «маленька правка» ламає поведінку. Червоне — це найдешевший момент дізнатися. Але культурна рівновага тут крихка, і руйнується вона одним способом: змержити повз червоний гейт «бо терміново». Одна така історія — і гейта немає: наступний, кому червоно і терміново, згадає прецедент, і за місяць гейт — це прапорець, який усі обходять. Якщо гейт справді помилково червоний — лагодьте гейт: флейковий кейс, поріг — у тому ж PR або окремим. Обхід — ніколи; винятки з правила «якість блокує merge» не масштабуються. І дзеркальне правило для авторів гейта: тримайте його швидким і чесним. Гейт, що йде двадцять хвилин або падає через флейки, викликає законне роздратування — і його знесуть з аргументом «він заважає працювати». Швидкий, стабільний, зрозумілий у падінні — три властивості, які купують гейту довге життя.</a:t>
             </a:r>
             <a:endParaRPr lang="en-US" dirty="0"/>
           </a:p>
@@ -699,7 +699,7 @@
           <a:p>
             <a:r>
               <a:rPr lang="en-US" dirty="0"/>
-              <a:t/>
+              <a:t>Зелений гейт каже: «цей стан системи здоровий». Він не каже: «шлях від старого стану до нового безпечний». Якщо зміна зачіпає кілька компонентів, деплой у неправильному порядку ламає систему навіть з ідеальними тестами: компонент А вже шле нове поле, компонент Б ще не вміє його читати — і привіт, помилки на проді при двох «здорових» версіях. У нашому стеку це питання виникає, щойно зміна перетинає межі. Нова колонка в БД і код, що її пише, — спершу міграція, потім код. Нове ім'я моделі в конфізі gateway і роутер, що на нього шле, — спершу конфіг, потім роутер. Новий формат відповіді сервісу і консоль, що його читає, — спершу сервіс із сумісністю, потім споживач. Загальний шаблон: спершу деплоїться той, хто читає — навчений розуміти і старе, і нове, — потім той, хто пише нове. Проміжний стан, коли в системі живуть обидві версії, має бути робочим, бо ви в ньому обов'язково побудете: хвилину при штатному релізі або годину при відкаті половини. У повній формі це називають expand, migrate, contract: розширити — додати нове поряд зі старим; мігрувати — перевести споживачів; звузити — прибрати старе окремим релізом, коли лог підтверджує, що старим ніхто не користується. Три нудні кроки замість одного сміливого — і кожен можна відкотити окремо. Сміливий один крок теж можна відкотити — разом з усім, що встигло зламатися.</a:t>
             </a:r>
             <a:endParaRPr lang="en-US" dirty="0"/>
           </a:p>
@@ -787,7 +787,7 @@
           <a:p>
             <a:r>
               <a:rPr lang="en-US" dirty="0"/>
-              <a:t/>
+              <a:t>Гейт не пускає погану зміну в main. Порядок викочування береже від зламаного проміжного стану. Лишається третє питання, яке ставлять під час інциденту: як вимкнути щось прямо зараз, не чекаючи збірки. У світі промптів на це є дві різні відповіді, і їх варто не плутати. Відкат версії в реєстрі — урок 2 — повертає попередню поведінку: це операція над вмістом, одна активація, секунди, слід в audit trail. Feature flag — це вимикач над механізмом: обійти кеш, вимкнути маршрутизацію на дорогу модель, перевести систему в режим «тільки ввічлива заглушка», відключити tool-виклики цілком. Перше відповідає на «промпт зламався», друге — на «зламався або дорого коштує сам механізм». Технічно прапорець — це рядок у таблиці або значення в конфізі, який читається на кожному запиті, з коротким кешем, щоб не бити базу. Дорослий вигляд у нього такий: значення за замовчуванням — безпечне: прапорець недоступний або база не відповіла — система працює в безпечному режимі, а не падає. Зміна прапорця — теж подія, з автором і часом: інакше через тиждень ніхто не пояснить, чому кеш вимкнений уже п'ятий день. І кожен прапорець має термін життя: прапорці накопичуються, і за рік ніхто не знає, які комбінації взагалі протестовані. Прапорець без плану видалення — це технічний борг з таймером.</a:t>
             </a:r>
             <a:endParaRPr lang="en-US" dirty="0"/>
           </a:p>
@@ -875,7 +875,7 @@
           <a:p>
             <a:r>
               <a:rPr lang="en-US" dirty="0"/>
-              <a:t/>
+              <a:t>Eval-прогін ловить регресію поведінки. Але в LLM-системі є цілий клас поломок, які до моделі навіть не доходять, — і вони ловляться дешевими механічними перевірками в тому самому workflow. Кожна з них — кілька рядків, і кожна колись зекономить вечір. Шаблон промпта містить усі очікувані плейсхолдери і жодного невідомого — інакше одна одрукована дужка, і підстановка тихо не відбувається: у модель їде текст із дужками. Схеми інструментів — валідний JSON Schema, бо зламану схему провайдер відкине вже на проді. Прайс покриває всі моделі з конфіга gateway — інакше cost_usd тихо стає null, і облік бреше, урок 4. Моделі в конфізі запінені, а не alias'и — захист від «регресії без коміта» при оновленні провайдера, урок 3. І в діфі немає ключів і секретів — найдорожча помилка з найкоротшим фіксом. Логіка та сама, що з пірамідою тестів: найдешевше — механічні перевірки конфігів і схем, дорожче — eval-прогін зі стеком, найдорожче — модельні перевірки з реальним ключем. Ставте їх у цьому порядку — і 80 відсотків поломок ловитимуться за секунди, не піднімаючи жодного контейнера. Я на цьому вчився дорогою ціною: гейт, який перевіряв лише «змістовну» частину, спокійно пропустив реліз, де в конфізі з'явилася модель без ціни. Формально все зелене — eval'и проходили, тести проходили. Помітили через тиждень, коли хтось спитав, чому в звіті вартості дірка рівно з тієї дати. Найдорожчі поломки майже завжди такі: не «система не працює», а «система тихо перестала знати правду про себе».</a:t>
             </a:r>
             <a:endParaRPr lang="en-US" dirty="0"/>
           </a:p>
@@ -963,7 +963,7 @@
           <a:p>
             <a:r>
               <a:rPr lang="en-US" dirty="0"/>
-              <a:t/>
+              <a:t>Це опційний блок. Гейт перевіряє зміну до релізу на золотому наборі. Але золотий набір — це 10–20 кейсів, а прод — тисячі живих запитів. Опційна техніка для обережних релізів — canary: нова версія промпта отримує 10 відсотків трафіку, стара — 90. Далі порівнюєте метрики двох груп — а метрики у вас є з тижня 5: error rate, fallback, вартість, і скарги як фінальний суддя. Добре — розкатуєте на всіх; погано — rollback однією командою, якою ви володієте з тижня 1. Найприємніше — скільки тут нового коду: майже нуль. Механіка розподілу трафіку — той самий routing з уроку 3, тільки критерій не «тип задачі», а «відсоток запитів»: найпростіше — за хешем ідентифікатора сесії, щоб той самий користувач стабільно бачив ту саму версію. Версії промпта — реєстр з уроку 2. Порівняння метрик — зрізи по prompt_version у лозі, який ви ведете з уроку 1. Canary — це не інструмент, який купують; це композиція механізмів, які ви вже збудували. І чесне попередження про межі: canary потребує обсягу. 10 відсотків трафіку — це скільки запитів на годину у вашій системі? Якщо три, порівняння метрик двох груп — це ворожіння на шумі: різниця між «одна помилка» і «нуль помилок» нічого не означає. На малому трафіку чесніша стратегія — гейт до релізу плюс швидкий rollback після: ви все одно дізнаєтесь про проблему швидко, просто від усіх користувачів одразу. Canary окупається там, де десята частина — це вже статистика. План — розділення трафіку, метрики порівняння, критерії promote/rollback — опційна частина ДЗ тижня 6; реалізація — для найзавзятіших.</a:t>
             </a:r>
             <a:endParaRPr lang="en-US" dirty="0"/>
           </a:p>
@@ -1051,7 +1051,7 @@
           <a:p>
             <a:r>
               <a:rPr lang="en-US" dirty="0"/>
-              <a:t/>
+              <a:t>Останній шматок релізної дисципліни — найдешевший і найчастіше пропущений. Перед викочуванням будь-якої значущої зміни відповідь на питання «коли смикаємо назад» має бути записана. Формула проста, і вона на екрані. Умова — конкретна метрика і поріг: eval pass rate нижче п'яти з шести на прогоні після деплою, або fallback_events зростає протягом п'ятнадцяти хвилин, або error rate вище п'яти відсотків протягом тих самих п'ятнадцяти хвилин. Не «якщо стане погано» — стане погано ви й так побачите, питання в тому, чи буде домовленість, що це вже привід. Хто смикає — названа роль, черговий, без погоджень: якщо для відкату треба когось знайти й переконати, критерій не працює. І чим — точна команда: активація попередньої версії, одна операція, яку виконують о третій ночі не думаючи. Чому саме заздалегідь: під час інциденту думати пізно, під час інциденту треба виконувати. Записаний критерій знімає найдорожчу розмову поганого вечора — «може, ще почекаємо, ніби вирівнюється». Не вирівнюється. Критерій пробитий — відкат, розбір завтра. І зверніть увагу на останній рядок: «одна команда» — це вимога до архітектури, яку ви вже виконали. Rollback за секунди існує у вас з уроку 2, і саме сьогодні він нарешті отримав умову спрацювання. Ці три рядки — умова, роль, команда — і є ваша обов'язкова частина ДЗ.</a:t>
             </a:r>
             <a:endParaRPr lang="en-US" dirty="0"/>
           </a:p>
@@ -1139,7 +1139,7 @@
           <a:p>
             <a:r>
               <a:rPr lang="en-US" dirty="0"/>
-              <a:t/>
+              <a:t>Перш ніж перейти до екрана — що саме ви зараз побачите і навіщо. Послідовність така: спершу проходимо eval-gate.yml по кроках — уже знайомий вам розтин, тепер наживо. Потім PR зі зламаним промптом — і вкладка Actions, де прогін червоніє: ті самі три з шести, що ви бачили локально минулого уроку, тепер їх бачить кнопка merge. Далі фікс промпта, пуш — і гейт зеленіє: merge розблоковано. І на завершення — налаштування репозиторію: required check, той самий job eval, через який кнопка взагалі вміє блокуватися. Навіщо це все: побачити, що перевірка більше не залежить від людини. Той самий прогін, що ви робили руками, тепер робить CI на кожен PR — і історія «червоний → зелений» лишається в PR як доказ, що гейт працює. [Ведучому: це найкрихкіший урок за продакшном. PR зі зламаним промптом створити ДО запису — червоний прогін уже готовий, на камері лише refresh. Фікс-пуш → зелений чекати з вимкненим записом — монтажна склейка. Required check показувати на заздалегідь налаштованому репо; required check = job eval. УВАГА: історій про CI дві, з РІЗНИХ репозиторіїв — «два червоні прогони, потім зелений» це PR #1 у репозиторії курсу (ci-smoke, merged), а demo-PR із лаби — PR #1 у репозиторії еталонів (closed, один червоний → зелений, зроблений на скороченій базі) — показувати обидва і не плутати. Між червоним і зеленим прогоном не забути повернути v2 — інакше наступні дублі почнуться з «не знаю». Вкладка Actions відкрита заздалегідь.]</a:t>
             </a:r>
             <a:endParaRPr lang="en-US" dirty="0"/>
           </a:p>
@@ -1227,7 +1227,7 @@
           <a:p>
             <a:r>
               <a:rPr lang="en-US" dirty="0"/>
-              <a:t/>
+              <a:t>Крок перший: розібрати workflow. Прочитати eval-gate.yml крок за кроком: checkout, compose up без UI, wait service, wait gateway — тепер ви знаєте чому, — evals, логи при падінні, down. Пояснити собі кожен крок. Крок другий: червоний прогін. Гілка зі зламаним промптом, PR — Actions червоніє. Подивитися лог прогону в CI: ті самі три з шести, що ви бачили локально на минулому уроці, — тепер їх бачить кнопка merge. Крок третій: зелений прогін. Полагодити промпт у тій самій гілці, пуш — гейт зеленіє, merge. В історії PR лишаються обидва прогони — це і є доказ, що гейт працює, і рівно це ментор перевірятиме у ДЗ тижня 6. Як має виглядати результат — живий demo-PR у репозиторії еталонів: червоний прогін, фікс, зелений. Уточнення: demo-PR — це ілюстрація формату, а не еталон рішення тижня; зроблений він на скороченій базі, тож діф не збігатиметься з твоїм. Крок четвертий: rollback-критерії. Написати свої: три умови, хто смикає, якою командою. Покласти поруч із fallback-порядком і budget-політикою — ваша папка операційних рішень майже зібрана. І опційний п'ятий: canary на папері. План: як розділити трафік 90/10 своїм роутером, які метрики порівнювати між групами, критерії promote і rollback.</a:t>
             </a:r>
             <a:endParaRPr lang="en-US" dirty="0"/>
           </a:p>
@@ -1315,7 +1315,7 @@
           <a:p>
             <a:r>
               <a:rPr lang="en-US" dirty="0"/>
-              <a:t/>
+              <a:t>Зафіксуємо, що ми щойно побачили — і що це доводить. Перше: перевірка стала механізмом. Той самий eval-прогін, що ви запускали руками на минулому уроці, тепер робить CI на кожен PR — для зміни промпта, для правки роутера, для правки README. Дисципліна більше не ланка ланцюга. Друге: кнопка merge реально слухає exit code. PR зі зламаним промптом фізично не мержиться — і не тому, що хтось пильний, а тому, що required check, job eval, тримає кнопку заблокованою, поки прогін червоний. Третє: доказ лишається в історії. Червоний прогін, фікс, зелений — усе в одному PR. Це і є артефакт, який ментор перевірятиме у ДЗ тижня 6: не слова «у мене все працює», а історія Actions, яку видно будь-кому. Реліз промпта тепер проходить той самий процес, що й реліз коду. Поза CI лишаються два шматки дисципліни, які ми сьогодні теж закрили: порядок викочування залежних компонентів і записані rollback-критерії.</a:t>
             </a:r>
             <a:endParaRPr lang="en-US" dirty="0"/>
           </a:p>
@@ -1403,7 +1403,7 @@
           <a:p>
             <a:r>
               <a:rPr lang="en-US" dirty="0"/>
-              <a:t/>
+              <a:t>Перш ніж розійтися — чесна перевірка, без оцінок. Пройдіться по чотирьох пунктах обов'язкової доріжки. У моєму репо є червоний і зелений прогін гейта — обидва, в історії Actions. Можу пояснити кожен крок workflow — і навіщо там окреме очікування gateway, а не лише health-check сервісу. Rollback-критерії записані до викочування, з командою відкату. І розумію, чому порядок деплою залежних компонентів — частина релізу, навіть коли всі тести зелені. І три питання з минулих тижнів, без підглядання. Чому поріг evals — не сто відсотків, і яку сліпу пляму має правило N мінус один? Це урок 10. Які чотири частини в правильного алерту? Урок 9. І чому незворотна дія не виконується «бо модель попросила»? Уроки 6 і 8. Якщо на щось відповіді немає — повертайтеся у відповідний блок або урок. Питання, які лишилися, — несіть у канал потоку або на Q&amp;A.</a:t>
             </a:r>
             <a:endParaRPr lang="en-US" dirty="0"/>
           </a:p>
@@ -1491,7 +1491,7 @@
           <a:p>
             <a:r>
               <a:rPr lang="en-US" dirty="0"/>
-              <a:t/>
+              <a:t>Домовимось про результат уроку — конкретними діями. Після сьогоднішнього заняття ви зможете: увімкнути eval-гейт на кожен PR і показати в історії Actions доказ «червоний → зелений» — саме його ментор перевірятиме у ДЗ тижня 6. Пояснити кожен крок workflow гейта — і навіщо там окреме очікування gateway, а не лише health-check сервісу. Налаштувати branch protection з правильним required check — і не наступити на пастку «job проти workflow». Записати rollback-критерії до викочування: три умови, хто смикає, якою командою. Пояснити, чому порядок деплою залежних компонентів — частина релізу, навіть коли всі тести зелені. І відрізнити відкат версії промпта від feature flag — та сказати, коли доречний який. Кожен пункт ви перевірите руками ще сьогодні — у лабораторній, у власному репозиторії.</a:t>
             </a:r>
             <a:endParaRPr lang="en-US" dirty="0"/>
           </a:p>
@@ -1579,7 +1579,7 @@
           <a:p>
             <a:r>
               <a:rPr lang="en-US" dirty="0"/>
-              <a:t/>
+              <a:t>П'ять способів звести нанівець сьогоднішній урок — усі перевірені чужими граблями. Eval, який запускають руками «коли не забудуть»: його не запускатимуть — п'ятниця, дедлайн, «одне слово поміняв»; весь блок 01 був про це. Мержити повз червоний гейт «бо терміново»: одна така історія — і гейта немає, наступний згадає прецедент, і за місяць гейт — прапорець, який усі обходять. Гейт, ніколи не проганяний на реальному CI: тоді його перший запуск станеться на чужому терміновому PR — з bash -e, холодним gateway і всіма сюрпризами одразу. Дякуємо, не треба. Викочування без rollback-критеріїв: під час інциденту треба виконувати, а не дискутувати «може, ще почекаємо». І останнє — ігнорувати порядок деплою залежних компонентів: зелені тести не рятують від неправильної послідовності, компонент А вже пише нове, компонент Б ще не вміє читати.</a:t>
             </a:r>
             <a:endParaRPr lang="en-US" dirty="0"/>
           </a:p>
@@ -1667,7 +1667,7 @@
           <a:p>
             <a:r>
               <a:rPr lang="en-US" dirty="0"/>
-              <a:t/>
+              <a:t>Обов'язково до наступного уроку — без здачі. Закріпити лабу: у своєму репозиторії — червоний і зелений прогін гейта в історії Actions. Записати rollback-критерії для своєї системи: умови, хто, якою командою. І переконатися, що гейт швидкий і його падіння зрозуміле з логів — три властивості з блока 05 тепер стосуються вашого власного гейта. Опційно — canary-план: розподіл 90/10 своїм роутером, метрики порівняння, критерії promote і rollback. Це план на папері, не реалізація. І про ДЗ тижня: фінальне ДЗ тижня 6 збирає все — CI-гейт із сьогоднішньої лаби, інцидент-демо в окремому файлі INCIDENT_RUNBOOK.md з посиланням із README, і повну збірку системи з чистого клону. Після наступного уроку — критерії і здача; сьогоднішній гейт — його найбільша частина, і вона вже готова. Тобто найважче ви зробили сьогодні.</a:t>
             </a:r>
             <a:endParaRPr lang="en-US" dirty="0"/>
           </a:p>
@@ -1755,7 +1755,7 @@
           <a:p>
             <a:r>
               <a:rPr lang="en-US" dirty="0"/>
-              <a:t/>
+              <a:t>Підсумуємо. Перевірки, від яких залежить прод, мають запускатися механізмом, а не людиною: гейт прибирає з ланцюга слабку ланку — дисципліну. Сам гейт — це композиція того, що ви вже мали: ваш eval, exit code і CI; а блокує merge лише правильно обраний required check — job eval, не назва workflow. CI — інше середовище: bash -e, холодні старти, інші тайминги — тому гейт проганяють на реальному CI до того, як він комусь заблокує реліз. Порядок викочування — частина релізу: спершу деплоїться той, хто читає, потім той, хто пише нове; у повній формі — expand, migrate, contract. І rollback-критерії пишуться до пожежі: три умови, хто смикає, одна команда — бо під час інциденту треба виконувати, а не дискутувати. Наступний урок — останній. Збираємо все докупи: повний прогін системи від точки А, яку ви бачили на першому уроці, до точки Б, яку збудували самі; інцидент-демо наживо за runbook'ом — і розмова про те, як принести LLMOps у свою команду. Курс закінчується, а ваш gateway тільки починає жити. До зустрічі на фіналі.</a:t>
             </a:r>
             <a:endParaRPr lang="en-US" dirty="0"/>
           </a:p>
@@ -1843,7 +1843,7 @@
           <a:p>
             <a:r>
               <a:rPr lang="en-US" dirty="0"/>
-              <a:t/>
+              <a:t>Маршрут такий. Спершу — чому перевірка, що залежить від дисципліни, приречена, і як гейт прибирає з ланцюга слабку ланку. Далі — з чого гейт складається: ваш eval, exit code і CI, плюс адміністративна дрібниця про required check, без якої все це лише кольорова іконка. Потім розтин workflow крок за кроком і чесний блок про те, чим CI відрізняється від вашого ноутбука — з історіями наших власних червоних прогонів. Блок п'ять — про культуру: чому червоний гейт — подарунок і чому обхід «бо терміново» вбиває гейт назавжди. Шостий і сьомий — порядок викочування, feature flag і сумісність артефактів: промпт, код і схеми як один реліз. Восьмий, опційний, — canary для промптів. Дев'ятий — rollback-критерії, найдешевший і найчастіше пропущений шматок релізної дисципліни. Потім демо і лабораторна — гейт у бою у вашому власному репозиторії, перевірка себе, антипатерни і домашнє завдання.</a:t>
             </a:r>
             <a:endParaRPr lang="en-US" dirty="0"/>
           </a:p>
@@ -1931,7 +1931,7 @@
           <a:p>
             <a:r>
               <a:rPr lang="en-US" dirty="0"/>
-              <a:t/>
+              <a:t>Домовимось про шість слів. Quality gate, або просто гейт, — автоматична перевірка, без якої зміна не потрапляє в основну гілку. Required check — та сама перевірка, позначена в налаштуваннях репозиторію як обов'язкова; тут є пастка з назвою, і ми її розберемо. Branch protection — захист гілки: набір правил, що саме має статися перед мержем. Canary — викочування на частку трафіку перед повним релізом. Feature flag — вимикач, який змінює поведінку системи без деплою. І rollback-критерії — записані заздалегідь умови, за яких ви відкочуєтесь: що саме має статися, хто ухвалює рішення і якою командою воно виконується. Ключове слово тут — заздалегідь: під час інциденту такі речі не пишуться.</a:t>
             </a:r>
             <a:endParaRPr lang="en-US" dirty="0"/>
           </a:p>
@@ -2019,7 +2019,7 @@
           <a:p>
             <a:r>
               <a:rPr lang="en-US" dirty="0"/>
-              <a:t/>
+              <a:t>У вас уже є eval, який ловить регресію, — минулий урок закінчився саме цим. Але поки його треба запускати руками — його не запускатимуть. Не зі зла: п'ятниця, дедлайн, «та я ж одне слово поміняв». Усі найгірші регресії заїжджають у main саме так — через маленькі зміни, які «не потребували перевірки». І зверніть увагу на парадокс: що менша зміна, то менше бажання її перевіряти — і то важче потім знайти, що саме зламалося. Гейт у CI знімає це питання назавжди, бо прибирає з ланцюга саме слабку ланку: перевірка більше не залежить від дисципліни. PR зі зламаним промптом фізично не мержиться — не тому, що хтось пильний, а тому, що кнопка merge заблокована. І це змінює не лише якість — це змінює культуру: промпт остаточно стає кодом з усіма наслідками, від рев'ю до заблокованого мержа. Друга тема сьогодні, про яку рідко думають до першого болю, — порядок викочування: зміна з зеленими тестами все одно може покласти систему, якщо компоненти виїхали в неправильній послідовності. До неї дійдемо в блоці 06.</a:t>
             </a:r>
             <a:endParaRPr lang="en-US" dirty="0"/>
           </a:p>
@@ -2107,7 +2107,7 @@
           <a:p>
             <a:r>
               <a:rPr lang="en-US" dirty="0"/>
-              <a:t/>
+              <a:t>Хороша новина: сьогодні ми майже нічого не пишемо. Всі складники гейта вже існують. Run.py повертає нуль або одиницю — це урок 10. Стек піднімається однією командою docker compose up — це урок 1. Поріг обраний і обґрунтований. CI-система лише виконує це у чистому середовищі на кожен PR і фарбує кнопку merge у колір exit code. Уся цінність — у словах «на кожен PR». Той самий прогін, який ви робили руками, тепер відбувається завжди: для зміни промпта, для правки роутера, для «я тільки README поправив». Так, і для нього — і це правильно: ви здивуєтесь, скільки разів «правка README» насправді чіпала щось поруч. І зверніть увагу на архітектурну красу: гейт нічого не знає про LLM. Він знає про exit code. Уся LLM-специфіка — датасет, grader, поріг — інкапсульована в eval-контурі, який ви збудували минулого тижня. Це означає, що гейт не треба буде переписувати, коли зміниться модель, промпт чи навіть провайдер.</a:t>
             </a:r>
             <a:endParaRPr lang="en-US" dirty="0"/>
           </a:p>
@@ -2195,7 +2195,7 @@
           <a:p>
             <a:r>
               <a:rPr lang="en-US" dirty="0"/>
-              <a:t/>
+              <a:t>Одна адміністративна дрібниця, без якої все це — лише кольорова іконка: сам по собі червоний workflow merge не забороняє. Блокування вмикається в налаштуваннях репозиторію — гілка main захищається, а перевірка позначається обов'язковою, required status check. Шлях: Settings, Branches, Add branch protection rule, Require status checks to pass — і вибрати чек eval. Тут увага на тонкість, на якій легко втратити годину: у списку GitHub показує назву job — eval, а не назву workflow — eval-gate. Обравши неіснуючий eval-gate, ви отримаєте protection, який нічого не блокує. Виглядає налаштованим, не працює. Без цього кроку гейт «радить»; з правильним чеком — вирішує. Перевірте це у власному репо, коли робитимете ДЗ тижня 6. І одне чесне застереження: на приватному репозиторії безкоштовного плану branch protection може бути недоступний — тоді гейт лишається «радником», і це треба чесно зазначити в PR.</a:t>
             </a:r>
             <a:endParaRPr lang="en-US" dirty="0"/>
           </a:p>
@@ -2283,7 +2283,7 @@
           <a:p>
             <a:r>
               <a:rPr lang="en-US" dirty="0"/>
-              <a:t/>
+              <a:t>Відкрийте eval-gate.yml у стартері — читаємо як послідовність відповідей на конкретні болі. Стек піднімається без UI: evals ходять в API, збирати фронтенд у CI — марні хвилини. Очікування сервісу — цикл із сорока спроб, і всередині «if curl; then», а не «curl &amp;&amp;» — чому саме так, розповість наступний блок. Окреме очікування gateway — теж не з теорії: холодний LiteLLM дає 500 на перший запит. Logs on failure — бо червоний прогін без логів це загадка, а з логами — діагноз. Down з if: always() — прибрати за собою навіть після падіння. І про threshold 5: це число — частина датасету, а не константа шаблона. Після ДЗ тижня 5 у наборі близько десяти кейсів — поріг у workflow оновлюється разом із ним. Правило: N мінус один при N до десяти, далі 85 відсотків з округленням угору. Перевірка «поріг відповідає розміру датасету» — гарний кандидат у механічні перевірки гейта, про них у блоці 07.</a:t>
             </a:r>
             <a:endParaRPr lang="en-US" dirty="0"/>
           </a:p>
@@ -2371,7 +2371,7 @@
           <a:p>
             <a:r>
               <a:rPr lang="en-US" dirty="0"/>
-              <a:t/>
+              <a:t>Чесна історія з підготовки цього курсу. Локально гейт працював ідеально. Перший запуск у GitHub Actions упав за 57 секунд. Причина: Actions виконує кроки з bash -e — перший же невдалий curl у циклі очікування вбивав крок цілком, хоча локально той самий цикл спокійно ретраїв, поки сервіс прокидався. Звідси та сама форма «if curl; then» у workflow — невдала проба стає умовою, а не помилкою. Другий сюрприз: холодний старт LiteLLM у CI давав 500 на найперший запит — локально ви цього не бачите, бо поки відкриваєте браузер, gateway встигає прогрітися. У CI між up і першим запитом — мілісекунди. Довелося додати явне очікування готовності gateway — POST-пробу до самого ендпоінта, а не просто health-check. Таких сюрпризів у CI-інтеграціях назбирується колекція — ще один із моєї практики на великій платформі: крок пайплайна вважав виклик невдалим, хоча зовнішня система чесно виконала роботу — просто відповіла редиректом 303 замість очікуваного 200, і перевірка «код == 200» фарбувала здоровий прогін у червоне. Успіх у HTTP — це діапазон і контракт, а не одне магічне число. Формула для всіх подібних граблів однакова: точна умова успіху, явні очікування готовності, і жодних припущень, що чуже середовище поводиться як ваш ноутбук.</a:t>
             </a:r>
             <a:endParaRPr lang="en-US" dirty="0"/>
           </a:p>
@@ -3683,7 +3683,7 @@
       </p:pic>
       <p:sp>
         <p:nvSpPr>
-          <p:cNvPr id="7" name="Shape 4"/>
+          <p:cNvPr id="8" name="Shape 4"/>
           <p:cNvSpPr/>
           <p:nvPr/>
         </p:nvSpPr>
@@ -3705,7 +3705,7 @@
       </p:sp>
       <p:sp>
         <p:nvSpPr>
-          <p:cNvPr id="8" name="Text 5"/>
+          <p:cNvPr id="9" name="Text 5"/>
           <p:cNvSpPr/>
           <p:nvPr/>
         </p:nvSpPr>
@@ -3744,7 +3744,7 @@
       </p:sp>
       <p:sp>
         <p:nvSpPr>
-          <p:cNvPr id="9" name="Text 6"/>
+          <p:cNvPr id="10" name="Text 6"/>
           <p:cNvSpPr/>
           <p:nvPr/>
         </p:nvSpPr>
@@ -3783,7 +3783,7 @@
       </p:sp>
       <p:sp>
         <p:nvSpPr>
-          <p:cNvPr id="10" name="Shape 7"/>
+          <p:cNvPr id="11" name="Shape 7"/>
           <p:cNvSpPr/>
           <p:nvPr/>
         </p:nvSpPr>
@@ -3805,7 +3805,7 @@
       </p:sp>
       <p:sp>
         <p:nvSpPr>
-          <p:cNvPr id="11" name="Text 8"/>
+          <p:cNvPr id="12" name="Text 8"/>
           <p:cNvSpPr/>
           <p:nvPr/>
         </p:nvSpPr>
@@ -3844,7 +3844,7 @@
       </p:sp>
       <p:sp>
         <p:nvSpPr>
-          <p:cNvPr id="12" name="Text 9"/>
+          <p:cNvPr id="13" name="Text 9"/>
           <p:cNvSpPr/>
           <p:nvPr/>
         </p:nvSpPr>
@@ -3883,7 +3883,7 @@
       </p:sp>
       <p:sp>
         <p:nvSpPr>
-          <p:cNvPr id="13" name="Shape 10"/>
+          <p:cNvPr id="14" name="Shape 10"/>
           <p:cNvSpPr/>
           <p:nvPr/>
         </p:nvSpPr>
@@ -3905,7 +3905,7 @@
       </p:sp>
       <p:sp>
         <p:nvSpPr>
-          <p:cNvPr id="14" name="Text 11"/>
+          <p:cNvPr id="15" name="Text 11"/>
           <p:cNvSpPr/>
           <p:nvPr/>
         </p:nvSpPr>
@@ -3944,7 +3944,7 @@
       </p:sp>
       <p:sp>
         <p:nvSpPr>
-          <p:cNvPr id="15" name="Text 12"/>
+          <p:cNvPr id="16" name="Text 12"/>
           <p:cNvSpPr/>
           <p:nvPr/>
         </p:nvSpPr>
@@ -3978,7 +3978,7 @@
                 <a:ea typeface="Montserrat" pitchFamily="34" charset="-122"/>
                 <a:cs typeface="Montserrat" pitchFamily="34" charset="-120"/>
               </a:rPr>
-              <a:t>Змержити повз червоний гейт «бо терміново». Одна така історія — і гейта немає: за місяць це прапорець, який усі обходять. Якщо гейт помилково червоний — лагодьте гейт, не обходьте.</a:t>
+              <a:t>Один мерж повз червоний гейт — і за місяць його обходять усі.</a:t>
             </a:r>
             <a:endParaRPr lang="en-US" sz="1300" dirty="0"/>
           </a:p>
@@ -3986,7 +3986,7 @@
       </p:sp>
       <p:sp>
         <p:nvSpPr>
-          <p:cNvPr id="16" name="Shape 13"/>
+          <p:cNvPr id="17" name="Shape 13"/>
           <p:cNvSpPr/>
           <p:nvPr/>
         </p:nvSpPr>
@@ -4008,7 +4008,7 @@
       </p:sp>
       <p:sp>
         <p:nvSpPr>
-          <p:cNvPr id="17" name="Text 14"/>
+          <p:cNvPr id="18" name="Text 14"/>
           <p:cNvSpPr/>
           <p:nvPr/>
         </p:nvSpPr>
@@ -4042,7 +4042,7 @@
                 <a:ea typeface="Montserrat" pitchFamily="34" charset="-122"/>
                 <a:cs typeface="Montserrat" pitchFamily="34" charset="-120"/>
               </a:rPr>
-              <a:t>Дзеркальне правило для авторів гейта: він має бути швидким, стабільним і зрозумілим у падінні — інакше обхід стане раціональним.</a:t>
+              <a:t>Гейт має бути швидким, стабільним і зрозумілим у падінні.</a:t>
             </a:r>
             <a:endParaRPr lang="en-US" sz="1300" dirty="0"/>
           </a:p>
@@ -4214,7 +4214,7 @@
         </p:nvSpPr>
         <p:spPr>
           <a:xfrm>
-            <a:off x="1280160" y="1024128"/>
+            <a:off x="1280160" y="1193140"/>
             <a:ext cx="777240" cy="256032"/>
           </a:xfrm>
           <a:prstGeom prst="roundRect">
@@ -4236,7 +4236,7 @@
         </p:nvSpPr>
         <p:spPr>
           <a:xfrm>
-            <a:off x="1280160" y="1024128"/>
+            <a:off x="1280160" y="1193140"/>
             <a:ext cx="777240" cy="256032"/>
           </a:xfrm>
           <a:prstGeom prst="rect">
@@ -4293,7 +4293,7 @@
       </p:pic>
       <p:sp>
         <p:nvSpPr>
-          <p:cNvPr id="7" name="Shape 4"/>
+          <p:cNvPr id="8" name="Shape 4"/>
           <p:cNvSpPr/>
           <p:nvPr/>
         </p:nvSpPr>
@@ -4315,7 +4315,7 @@
       </p:sp>
       <p:sp>
         <p:nvSpPr>
-          <p:cNvPr id="8" name="Text 5"/>
+          <p:cNvPr id="9" name="Text 5"/>
           <p:cNvSpPr/>
           <p:nvPr/>
         </p:nvSpPr>
@@ -4354,7 +4354,7 @@
       </p:sp>
       <p:sp>
         <p:nvSpPr>
-          <p:cNvPr id="9" name="Shape 6"/>
+          <p:cNvPr id="10" name="Shape 6"/>
           <p:cNvSpPr/>
           <p:nvPr/>
         </p:nvSpPr>
@@ -4377,7 +4377,7 @@
       </p:sp>
       <p:sp>
         <p:nvSpPr>
-          <p:cNvPr id="10" name="Shape 7"/>
+          <p:cNvPr id="11" name="Shape 7"/>
           <p:cNvSpPr/>
           <p:nvPr/>
         </p:nvSpPr>
@@ -4397,7 +4397,7 @@
       </p:sp>
       <p:sp>
         <p:nvSpPr>
-          <p:cNvPr id="11" name="Shape 8"/>
+          <p:cNvPr id="12" name="Shape 8"/>
           <p:cNvSpPr/>
           <p:nvPr/>
         </p:nvSpPr>
@@ -4424,7 +4424,7 @@
       </p:sp>
       <p:sp>
         <p:nvSpPr>
-          <p:cNvPr id="12" name="Text 9"/>
+          <p:cNvPr id="13" name="Text 9"/>
           <p:cNvSpPr/>
           <p:nvPr/>
         </p:nvSpPr>
@@ -4463,7 +4463,7 @@
       </p:sp>
       <p:sp>
         <p:nvSpPr>
-          <p:cNvPr id="13" name="Shape 10"/>
+          <p:cNvPr id="14" name="Shape 10"/>
           <p:cNvSpPr/>
           <p:nvPr/>
         </p:nvSpPr>
@@ -4486,7 +4486,7 @@
       </p:sp>
       <p:sp>
         <p:nvSpPr>
-          <p:cNvPr id="14" name="Shape 11"/>
+          <p:cNvPr id="15" name="Shape 11"/>
           <p:cNvSpPr/>
           <p:nvPr/>
         </p:nvSpPr>
@@ -4506,7 +4506,7 @@
       </p:sp>
       <p:sp>
         <p:nvSpPr>
-          <p:cNvPr id="15" name="Shape 12"/>
+          <p:cNvPr id="16" name="Shape 12"/>
           <p:cNvSpPr/>
           <p:nvPr/>
         </p:nvSpPr>
@@ -4533,7 +4533,7 @@
       </p:sp>
       <p:sp>
         <p:nvSpPr>
-          <p:cNvPr id="16" name="Text 13"/>
+          <p:cNvPr id="17" name="Text 13"/>
           <p:cNvSpPr/>
           <p:nvPr/>
         </p:nvSpPr>
@@ -4572,7 +4572,7 @@
       </p:sp>
       <p:sp>
         <p:nvSpPr>
-          <p:cNvPr id="17" name="Text 14"/>
+          <p:cNvPr id="18" name="Text 14"/>
           <p:cNvSpPr/>
           <p:nvPr/>
         </p:nvSpPr>
@@ -4611,7 +4611,7 @@
       </p:sp>
       <p:sp>
         <p:nvSpPr>
-          <p:cNvPr id="18" name="Shape 15"/>
+          <p:cNvPr id="19" name="Shape 15"/>
           <p:cNvSpPr/>
           <p:nvPr/>
         </p:nvSpPr>
@@ -4638,7 +4638,7 @@
       </p:sp>
       <p:sp>
         <p:nvSpPr>
-          <p:cNvPr id="19" name="Text 16"/>
+          <p:cNvPr id="20" name="Text 16"/>
           <p:cNvSpPr/>
           <p:nvPr/>
         </p:nvSpPr>
@@ -4677,7 +4677,7 @@
       </p:sp>
       <p:sp>
         <p:nvSpPr>
-          <p:cNvPr id="20" name="Text 17"/>
+          <p:cNvPr id="21" name="Text 17"/>
           <p:cNvSpPr/>
           <p:nvPr/>
         </p:nvSpPr>
@@ -4716,7 +4716,7 @@
       </p:sp>
       <p:sp>
         <p:nvSpPr>
-          <p:cNvPr id="21" name="Shape 18"/>
+          <p:cNvPr id="22" name="Shape 18"/>
           <p:cNvSpPr/>
           <p:nvPr/>
         </p:nvSpPr>
@@ -4738,7 +4738,7 @@
       </p:sp>
       <p:sp>
         <p:nvSpPr>
-          <p:cNvPr id="22" name="Text 19"/>
+          <p:cNvPr id="23" name="Text 19"/>
           <p:cNvSpPr/>
           <p:nvPr/>
         </p:nvSpPr>
@@ -4777,7 +4777,7 @@
       </p:sp>
       <p:sp>
         <p:nvSpPr>
-          <p:cNvPr id="23" name="Text 20"/>
+          <p:cNvPr id="24" name="Text 20"/>
           <p:cNvSpPr/>
           <p:nvPr/>
         </p:nvSpPr>
@@ -4816,7 +4816,7 @@
       </p:sp>
       <p:sp>
         <p:nvSpPr>
-          <p:cNvPr id="24" name="Shape 21"/>
+          <p:cNvPr id="25" name="Shape 21"/>
           <p:cNvSpPr/>
           <p:nvPr/>
         </p:nvSpPr>
@@ -4843,7 +4843,7 @@
       </p:sp>
       <p:sp>
         <p:nvSpPr>
-          <p:cNvPr id="25" name="Text 22"/>
+          <p:cNvPr id="26" name="Text 22"/>
           <p:cNvSpPr/>
           <p:nvPr/>
         </p:nvSpPr>
@@ -4882,7 +4882,7 @@
       </p:sp>
       <p:sp>
         <p:nvSpPr>
-          <p:cNvPr id="26" name="Text 23"/>
+          <p:cNvPr id="27" name="Text 23"/>
           <p:cNvSpPr/>
           <p:nvPr/>
         </p:nvSpPr>
@@ -4921,7 +4921,7 @@
       </p:sp>
       <p:sp>
         <p:nvSpPr>
-          <p:cNvPr id="27" name="Shape 24"/>
+          <p:cNvPr id="28" name="Shape 24"/>
           <p:cNvSpPr/>
           <p:nvPr/>
         </p:nvSpPr>
@@ -4943,7 +4943,7 @@
       </p:sp>
       <p:sp>
         <p:nvSpPr>
-          <p:cNvPr id="28" name="Text 25"/>
+          <p:cNvPr id="29" name="Text 25"/>
           <p:cNvSpPr/>
           <p:nvPr/>
         </p:nvSpPr>
@@ -5228,7 +5228,7 @@
       </p:pic>
       <p:sp>
         <p:nvSpPr>
-          <p:cNvPr id="7" name="Shape 4"/>
+          <p:cNvPr id="8" name="Shape 4"/>
           <p:cNvSpPr/>
           <p:nvPr/>
         </p:nvSpPr>
@@ -5250,7 +5250,7 @@
       </p:sp>
       <p:sp>
         <p:nvSpPr>
-          <p:cNvPr id="8" name="Text 5"/>
+          <p:cNvPr id="9" name="Text 5"/>
           <p:cNvSpPr/>
           <p:nvPr/>
         </p:nvSpPr>
@@ -5289,7 +5289,7 @@
       </p:sp>
       <p:sp>
         <p:nvSpPr>
-          <p:cNvPr id="9" name="Text 6"/>
+          <p:cNvPr id="10" name="Text 6"/>
           <p:cNvSpPr/>
           <p:nvPr/>
         </p:nvSpPr>
@@ -5331,7 +5331,7 @@
       </p:sp>
       <p:sp>
         <p:nvSpPr>
-          <p:cNvPr id="10" name="Shape 7"/>
+          <p:cNvPr id="11" name="Shape 7"/>
           <p:cNvSpPr/>
           <p:nvPr/>
         </p:nvSpPr>
@@ -5353,7 +5353,7 @@
       </p:sp>
       <p:sp>
         <p:nvSpPr>
-          <p:cNvPr id="11" name="Text 8"/>
+          <p:cNvPr id="12" name="Text 8"/>
           <p:cNvSpPr/>
           <p:nvPr/>
         </p:nvSpPr>
@@ -5392,7 +5392,7 @@
       </p:sp>
       <p:sp>
         <p:nvSpPr>
-          <p:cNvPr id="12" name="Text 9"/>
+          <p:cNvPr id="13" name="Text 9"/>
           <p:cNvSpPr/>
           <p:nvPr/>
         </p:nvSpPr>
@@ -5434,7 +5434,7 @@
       </p:sp>
       <p:sp>
         <p:nvSpPr>
-          <p:cNvPr id="13" name="Shape 10"/>
+          <p:cNvPr id="14" name="Shape 10"/>
           <p:cNvSpPr/>
           <p:nvPr/>
         </p:nvSpPr>
@@ -5461,7 +5461,7 @@
       </p:sp>
       <p:sp>
         <p:nvSpPr>
-          <p:cNvPr id="14" name="Text 11"/>
+          <p:cNvPr id="15" name="Text 11"/>
           <p:cNvSpPr/>
           <p:nvPr/>
         </p:nvSpPr>
@@ -5500,7 +5500,7 @@
       </p:sp>
       <p:sp>
         <p:nvSpPr>
-          <p:cNvPr id="15" name="Shape 12"/>
+          <p:cNvPr id="16" name="Shape 12"/>
           <p:cNvSpPr/>
           <p:nvPr/>
         </p:nvSpPr>
@@ -5523,7 +5523,7 @@
       </p:sp>
       <p:sp>
         <p:nvSpPr>
-          <p:cNvPr id="16" name="Shape 13"/>
+          <p:cNvPr id="17" name="Shape 13"/>
           <p:cNvSpPr/>
           <p:nvPr/>
         </p:nvSpPr>
@@ -5543,7 +5543,7 @@
       </p:sp>
       <p:sp>
         <p:nvSpPr>
-          <p:cNvPr id="17" name="Shape 14"/>
+          <p:cNvPr id="18" name="Shape 14"/>
           <p:cNvSpPr/>
           <p:nvPr/>
         </p:nvSpPr>
@@ -5570,7 +5570,7 @@
       </p:sp>
       <p:sp>
         <p:nvSpPr>
-          <p:cNvPr id="18" name="Text 15"/>
+          <p:cNvPr id="19" name="Text 15"/>
           <p:cNvSpPr/>
           <p:nvPr/>
         </p:nvSpPr>
@@ -5609,7 +5609,7 @@
       </p:sp>
       <p:sp>
         <p:nvSpPr>
-          <p:cNvPr id="19" name="Shape 16"/>
+          <p:cNvPr id="20" name="Shape 16"/>
           <p:cNvSpPr/>
           <p:nvPr/>
         </p:nvSpPr>
@@ -5632,7 +5632,7 @@
       </p:sp>
       <p:sp>
         <p:nvSpPr>
-          <p:cNvPr id="20" name="Shape 17"/>
+          <p:cNvPr id="21" name="Shape 17"/>
           <p:cNvSpPr/>
           <p:nvPr/>
         </p:nvSpPr>
@@ -5652,7 +5652,7 @@
       </p:sp>
       <p:sp>
         <p:nvSpPr>
-          <p:cNvPr id="21" name="Shape 18"/>
+          <p:cNvPr id="22" name="Shape 18"/>
           <p:cNvSpPr/>
           <p:nvPr/>
         </p:nvSpPr>
@@ -5679,7 +5679,7 @@
       </p:sp>
       <p:sp>
         <p:nvSpPr>
-          <p:cNvPr id="22" name="Text 19"/>
+          <p:cNvPr id="23" name="Text 19"/>
           <p:cNvSpPr/>
           <p:nvPr/>
         </p:nvSpPr>
@@ -5718,7 +5718,7 @@
       </p:sp>
       <p:sp>
         <p:nvSpPr>
-          <p:cNvPr id="23" name="Shape 20"/>
+          <p:cNvPr id="24" name="Shape 20"/>
           <p:cNvSpPr/>
           <p:nvPr/>
         </p:nvSpPr>
@@ -5741,7 +5741,7 @@
       </p:sp>
       <p:sp>
         <p:nvSpPr>
-          <p:cNvPr id="24" name="Shape 21"/>
+          <p:cNvPr id="25" name="Shape 21"/>
           <p:cNvSpPr/>
           <p:nvPr/>
         </p:nvSpPr>
@@ -5761,7 +5761,7 @@
       </p:sp>
       <p:sp>
         <p:nvSpPr>
-          <p:cNvPr id="25" name="Shape 22"/>
+          <p:cNvPr id="26" name="Shape 22"/>
           <p:cNvSpPr/>
           <p:nvPr/>
         </p:nvSpPr>
@@ -5788,7 +5788,7 @@
       </p:sp>
       <p:sp>
         <p:nvSpPr>
-          <p:cNvPr id="26" name="Text 23"/>
+          <p:cNvPr id="27" name="Text 23"/>
           <p:cNvSpPr/>
           <p:nvPr/>
         </p:nvSpPr>
@@ -5827,7 +5827,7 @@
       </p:sp>
       <p:sp>
         <p:nvSpPr>
-          <p:cNvPr id="27" name="Text 24"/>
+          <p:cNvPr id="28" name="Text 24"/>
           <p:cNvSpPr/>
           <p:nvPr/>
         </p:nvSpPr>
@@ -5866,7 +5866,7 @@
       </p:sp>
       <p:sp>
         <p:nvSpPr>
-          <p:cNvPr id="28" name="Shape 25"/>
+          <p:cNvPr id="29" name="Shape 25"/>
           <p:cNvSpPr/>
           <p:nvPr/>
         </p:nvSpPr>
@@ -5888,7 +5888,7 @@
       </p:sp>
       <p:sp>
         <p:nvSpPr>
-          <p:cNvPr id="29" name="Text 26"/>
+          <p:cNvPr id="30" name="Text 26"/>
           <p:cNvSpPr/>
           <p:nvPr/>
         </p:nvSpPr>
@@ -5927,7 +5927,7 @@
       </p:sp>
       <p:sp>
         <p:nvSpPr>
-          <p:cNvPr id="30" name="Text 27"/>
+          <p:cNvPr id="31" name="Text 27"/>
           <p:cNvSpPr/>
           <p:nvPr/>
         </p:nvSpPr>
@@ -7112,7 +7112,7 @@
       </p:graphicFrame>
       <p:sp>
         <p:nvSpPr>
-          <p:cNvPr id="9" name="Shape 5"/>
+          <p:cNvPr id="10" name="Shape 5"/>
           <p:cNvSpPr/>
           <p:nvPr/>
         </p:nvSpPr>
@@ -7134,7 +7134,7 @@
       </p:sp>
       <p:sp>
         <p:nvSpPr>
-          <p:cNvPr id="10" name="Text 6"/>
+          <p:cNvPr id="11" name="Text 6"/>
           <p:cNvSpPr/>
           <p:nvPr/>
         </p:nvSpPr>
@@ -7173,7 +7173,7 @@
       </p:sp>
       <p:sp>
         <p:nvSpPr>
-          <p:cNvPr id="11" name="Text 7"/>
+          <p:cNvPr id="12" name="Text 7"/>
           <p:cNvSpPr/>
           <p:nvPr/>
         </p:nvSpPr>
@@ -7379,7 +7379,7 @@
         </p:nvSpPr>
         <p:spPr>
           <a:xfrm>
-            <a:off x="1280160" y="1024128"/>
+            <a:off x="1280160" y="1193140"/>
             <a:ext cx="777240" cy="256032"/>
           </a:xfrm>
           <a:prstGeom prst="roundRect">
@@ -7401,7 +7401,7 @@
         </p:nvSpPr>
         <p:spPr>
           <a:xfrm>
-            <a:off x="1280160" y="1024128"/>
+            <a:off x="1280160" y="1193140"/>
             <a:ext cx="777240" cy="256032"/>
           </a:xfrm>
           <a:prstGeom prst="rect">
@@ -7440,7 +7440,7 @@
         </p:nvSpPr>
         <p:spPr>
           <a:xfrm>
-            <a:off x="2167128" y="1024128"/>
+            <a:off x="2167128" y="1193140"/>
             <a:ext cx="864108" cy="256032"/>
           </a:xfrm>
           <a:prstGeom prst="roundRect">
@@ -7462,7 +7462,7 @@
         </p:nvSpPr>
         <p:spPr>
           <a:xfrm>
-            <a:off x="2167128" y="1024128"/>
+            <a:off x="2167128" y="1193140"/>
             <a:ext cx="864108" cy="256032"/>
           </a:xfrm>
           <a:prstGeom prst="rect">
@@ -7519,7 +7519,7 @@
       </p:pic>
       <p:sp>
         <p:nvSpPr>
-          <p:cNvPr id="9" name="Shape 6"/>
+          <p:cNvPr id="10" name="Shape 6"/>
           <p:cNvSpPr/>
           <p:nvPr/>
         </p:nvSpPr>
@@ -7541,7 +7541,7 @@
       </p:sp>
       <p:sp>
         <p:nvSpPr>
-          <p:cNvPr id="10" name="Text 7"/>
+          <p:cNvPr id="11" name="Text 7"/>
           <p:cNvSpPr/>
           <p:nvPr/>
         </p:nvSpPr>
@@ -7580,7 +7580,7 @@
       </p:sp>
       <p:sp>
         <p:nvSpPr>
-          <p:cNvPr id="11" name="Shape 8"/>
+          <p:cNvPr id="12" name="Shape 8"/>
           <p:cNvSpPr/>
           <p:nvPr/>
         </p:nvSpPr>
@@ -7603,7 +7603,7 @@
       </p:sp>
       <p:sp>
         <p:nvSpPr>
-          <p:cNvPr id="12" name="Shape 9"/>
+          <p:cNvPr id="13" name="Shape 9"/>
           <p:cNvSpPr/>
           <p:nvPr/>
         </p:nvSpPr>
@@ -7623,7 +7623,7 @@
       </p:sp>
       <p:sp>
         <p:nvSpPr>
-          <p:cNvPr id="13" name="Shape 10"/>
+          <p:cNvPr id="14" name="Shape 10"/>
           <p:cNvSpPr/>
           <p:nvPr/>
         </p:nvSpPr>
@@ -7645,7 +7645,7 @@
       </p:sp>
       <p:sp>
         <p:nvSpPr>
-          <p:cNvPr id="14" name="Text 11"/>
+          <p:cNvPr id="15" name="Text 11"/>
           <p:cNvSpPr/>
           <p:nvPr/>
         </p:nvSpPr>
@@ -7684,7 +7684,7 @@
       </p:sp>
       <p:sp>
         <p:nvSpPr>
-          <p:cNvPr id="15" name="Shape 12"/>
+          <p:cNvPr id="16" name="Shape 12"/>
           <p:cNvSpPr/>
           <p:nvPr/>
         </p:nvSpPr>
@@ -7707,7 +7707,7 @@
       </p:sp>
       <p:sp>
         <p:nvSpPr>
-          <p:cNvPr id="16" name="Shape 13"/>
+          <p:cNvPr id="17" name="Shape 13"/>
           <p:cNvSpPr/>
           <p:nvPr/>
         </p:nvSpPr>
@@ -7727,7 +7727,7 @@
       </p:sp>
       <p:sp>
         <p:nvSpPr>
-          <p:cNvPr id="17" name="Shape 14"/>
+          <p:cNvPr id="18" name="Shape 14"/>
           <p:cNvSpPr/>
           <p:nvPr/>
         </p:nvSpPr>
@@ -7749,7 +7749,7 @@
       </p:sp>
       <p:sp>
         <p:nvSpPr>
-          <p:cNvPr id="18" name="Text 15"/>
+          <p:cNvPr id="19" name="Text 15"/>
           <p:cNvSpPr/>
           <p:nvPr/>
         </p:nvSpPr>
@@ -7788,7 +7788,7 @@
       </p:sp>
       <p:sp>
         <p:nvSpPr>
-          <p:cNvPr id="19" name="Shape 16"/>
+          <p:cNvPr id="20" name="Shape 16"/>
           <p:cNvSpPr/>
           <p:nvPr/>
         </p:nvSpPr>
@@ -7815,7 +7815,7 @@
       </p:sp>
       <p:sp>
         <p:nvSpPr>
-          <p:cNvPr id="20" name="Text 17"/>
+          <p:cNvPr id="21" name="Text 17"/>
           <p:cNvSpPr/>
           <p:nvPr/>
         </p:nvSpPr>
@@ -7854,7 +7854,7 @@
       </p:sp>
       <p:sp>
         <p:nvSpPr>
-          <p:cNvPr id="21" name="Text 18"/>
+          <p:cNvPr id="22" name="Text 18"/>
           <p:cNvSpPr/>
           <p:nvPr/>
         </p:nvSpPr>
@@ -7896,7 +7896,7 @@
       </p:sp>
       <p:sp>
         <p:nvSpPr>
-          <p:cNvPr id="22" name="Shape 19"/>
+          <p:cNvPr id="23" name="Shape 19"/>
           <p:cNvSpPr/>
           <p:nvPr/>
         </p:nvSpPr>
@@ -7918,7 +7918,7 @@
       </p:sp>
       <p:sp>
         <p:nvSpPr>
-          <p:cNvPr id="23" name="Text 20"/>
+          <p:cNvPr id="24" name="Text 20"/>
           <p:cNvSpPr/>
           <p:nvPr/>
         </p:nvSpPr>
@@ -7957,7 +7957,7 @@
       </p:sp>
       <p:sp>
         <p:nvSpPr>
-          <p:cNvPr id="24" name="Text 21"/>
+          <p:cNvPr id="25" name="Text 21"/>
           <p:cNvSpPr/>
           <p:nvPr/>
         </p:nvSpPr>
@@ -7999,7 +7999,7 @@
       </p:sp>
       <p:sp>
         <p:nvSpPr>
-          <p:cNvPr id="25" name="Shape 22"/>
+          <p:cNvPr id="26" name="Shape 22"/>
           <p:cNvSpPr/>
           <p:nvPr/>
         </p:nvSpPr>
@@ -8021,7 +8021,7 @@
       </p:sp>
       <p:sp>
         <p:nvSpPr>
-          <p:cNvPr id="26" name="Text 23"/>
+          <p:cNvPr id="27" name="Text 23"/>
           <p:cNvSpPr/>
           <p:nvPr/>
         </p:nvSpPr>
@@ -8227,7 +8227,7 @@
         </p:nvSpPr>
         <p:spPr>
           <a:xfrm>
-            <a:off x="1280160" y="1024128"/>
+            <a:off x="1280160" y="1193140"/>
             <a:ext cx="777240" cy="256032"/>
           </a:xfrm>
           <a:prstGeom prst="roundRect">
@@ -8249,7 +8249,7 @@
         </p:nvSpPr>
         <p:spPr>
           <a:xfrm>
-            <a:off x="1280160" y="1024128"/>
+            <a:off x="1280160" y="1193140"/>
             <a:ext cx="777240" cy="256032"/>
           </a:xfrm>
           <a:prstGeom prst="rect">
@@ -8306,7 +8306,7 @@
       </p:pic>
       <p:sp>
         <p:nvSpPr>
-          <p:cNvPr id="7" name="Shape 4"/>
+          <p:cNvPr id="8" name="Shape 4"/>
           <p:cNvSpPr/>
           <p:nvPr/>
         </p:nvSpPr>
@@ -8333,7 +8333,7 @@
       </p:sp>
       <p:sp>
         <p:nvSpPr>
-          <p:cNvPr id="8" name="Text 5"/>
+          <p:cNvPr id="9" name="Text 5"/>
           <p:cNvSpPr/>
           <p:nvPr/>
         </p:nvSpPr>
@@ -8526,7 +8526,7 @@
       </p:sp>
       <p:sp>
         <p:nvSpPr>
-          <p:cNvPr id="9" name="Shape 6"/>
+          <p:cNvPr id="10" name="Shape 6"/>
           <p:cNvSpPr/>
           <p:nvPr/>
         </p:nvSpPr>
@@ -8548,7 +8548,7 @@
       </p:sp>
       <p:sp>
         <p:nvSpPr>
-          <p:cNvPr id="10" name="Shape 7"/>
+          <p:cNvPr id="11" name="Shape 7"/>
           <p:cNvSpPr/>
           <p:nvPr/>
         </p:nvSpPr>
@@ -8568,7 +8568,7 @@
       </p:sp>
       <p:sp>
         <p:nvSpPr>
-          <p:cNvPr id="11" name="Text 8"/>
+          <p:cNvPr id="12" name="Text 8"/>
           <p:cNvSpPr/>
           <p:nvPr/>
         </p:nvSpPr>
@@ -8607,7 +8607,7 @@
       </p:sp>
       <p:sp>
         <p:nvSpPr>
-          <p:cNvPr id="12" name="Text 9"/>
+          <p:cNvPr id="13" name="Text 9"/>
           <p:cNvSpPr/>
           <p:nvPr/>
         </p:nvSpPr>
@@ -8646,7 +8646,7 @@
       </p:sp>
       <p:sp>
         <p:nvSpPr>
-          <p:cNvPr id="13" name="Text 10"/>
+          <p:cNvPr id="14" name="Text 10"/>
           <p:cNvSpPr/>
           <p:nvPr/>
         </p:nvSpPr>
@@ -8688,7 +8688,7 @@
       </p:sp>
       <p:sp>
         <p:nvSpPr>
-          <p:cNvPr id="14" name="Shape 11"/>
+          <p:cNvPr id="15" name="Shape 11"/>
           <p:cNvSpPr/>
           <p:nvPr/>
         </p:nvSpPr>
@@ -8710,7 +8710,7 @@
       </p:sp>
       <p:sp>
         <p:nvSpPr>
-          <p:cNvPr id="15" name="Shape 12"/>
+          <p:cNvPr id="16" name="Shape 12"/>
           <p:cNvSpPr/>
           <p:nvPr/>
         </p:nvSpPr>
@@ -8730,7 +8730,7 @@
       </p:sp>
       <p:sp>
         <p:nvSpPr>
-          <p:cNvPr id="16" name="Text 13"/>
+          <p:cNvPr id="17" name="Text 13"/>
           <p:cNvSpPr/>
           <p:nvPr/>
         </p:nvSpPr>
@@ -8769,7 +8769,7 @@
       </p:sp>
       <p:sp>
         <p:nvSpPr>
-          <p:cNvPr id="17" name="Text 14"/>
+          <p:cNvPr id="18" name="Text 14"/>
           <p:cNvSpPr/>
           <p:nvPr/>
         </p:nvSpPr>
@@ -8808,7 +8808,7 @@
       </p:sp>
       <p:sp>
         <p:nvSpPr>
-          <p:cNvPr id="18" name="Text 15"/>
+          <p:cNvPr id="19" name="Text 15"/>
           <p:cNvSpPr/>
           <p:nvPr/>
         </p:nvSpPr>
@@ -8850,7 +8850,7 @@
       </p:sp>
       <p:sp>
         <p:nvSpPr>
-          <p:cNvPr id="19" name="Shape 16"/>
+          <p:cNvPr id="20" name="Shape 16"/>
           <p:cNvSpPr/>
           <p:nvPr/>
         </p:nvSpPr>
@@ -8872,7 +8872,7 @@
       </p:sp>
       <p:sp>
         <p:nvSpPr>
-          <p:cNvPr id="20" name="Shape 17"/>
+          <p:cNvPr id="21" name="Shape 17"/>
           <p:cNvSpPr/>
           <p:nvPr/>
         </p:nvSpPr>
@@ -8892,7 +8892,7 @@
       </p:sp>
       <p:sp>
         <p:nvSpPr>
-          <p:cNvPr id="21" name="Text 18"/>
+          <p:cNvPr id="22" name="Text 18"/>
           <p:cNvSpPr/>
           <p:nvPr/>
         </p:nvSpPr>
@@ -8931,7 +8931,7 @@
       </p:sp>
       <p:sp>
         <p:nvSpPr>
-          <p:cNvPr id="22" name="Text 19"/>
+          <p:cNvPr id="23" name="Text 19"/>
           <p:cNvSpPr/>
           <p:nvPr/>
         </p:nvSpPr>
@@ -8970,7 +8970,7 @@
       </p:sp>
       <p:sp>
         <p:nvSpPr>
-          <p:cNvPr id="23" name="Text 20"/>
+          <p:cNvPr id="24" name="Text 20"/>
           <p:cNvSpPr/>
           <p:nvPr/>
         </p:nvSpPr>
@@ -9012,7 +9012,7 @@
       </p:sp>
       <p:sp>
         <p:nvSpPr>
-          <p:cNvPr id="24" name="Shape 21"/>
+          <p:cNvPr id="25" name="Shape 21"/>
           <p:cNvSpPr/>
           <p:nvPr/>
         </p:nvSpPr>
@@ -9034,7 +9034,7 @@
       </p:sp>
       <p:sp>
         <p:nvSpPr>
-          <p:cNvPr id="25" name="Text 22"/>
+          <p:cNvPr id="26" name="Text 22"/>
           <p:cNvSpPr/>
           <p:nvPr/>
         </p:nvSpPr>
@@ -9280,7 +9280,7 @@
       </p:pic>
       <p:sp>
         <p:nvSpPr>
-          <p:cNvPr id="6" name="Shape 3"/>
+          <p:cNvPr id="7" name="Shape 3"/>
           <p:cNvSpPr/>
           <p:nvPr/>
         </p:nvSpPr>
@@ -9302,7 +9302,7 @@
       </p:sp>
       <p:sp>
         <p:nvSpPr>
-          <p:cNvPr id="7" name="Shape 4"/>
+          <p:cNvPr id="8" name="Shape 4"/>
           <p:cNvSpPr/>
           <p:nvPr/>
         </p:nvSpPr>
@@ -9322,7 +9322,7 @@
       </p:sp>
       <p:sp>
         <p:nvSpPr>
-          <p:cNvPr id="8" name="Text 5"/>
+          <p:cNvPr id="9" name="Text 5"/>
           <p:cNvSpPr/>
           <p:nvPr/>
         </p:nvSpPr>
@@ -9361,7 +9361,7 @@
       </p:sp>
       <p:sp>
         <p:nvSpPr>
-          <p:cNvPr id="9" name="Text 6"/>
+          <p:cNvPr id="10" name="Text 6"/>
           <p:cNvSpPr/>
           <p:nvPr/>
         </p:nvSpPr>
@@ -9400,7 +9400,7 @@
       </p:sp>
       <p:sp>
         <p:nvSpPr>
-          <p:cNvPr id="10" name="Text 7"/>
+          <p:cNvPr id="11" name="Text 7"/>
           <p:cNvSpPr/>
           <p:nvPr/>
         </p:nvSpPr>
@@ -9442,7 +9442,7 @@
       </p:sp>
       <p:sp>
         <p:nvSpPr>
-          <p:cNvPr id="11" name="Shape 8"/>
+          <p:cNvPr id="12" name="Shape 8"/>
           <p:cNvSpPr/>
           <p:nvPr/>
         </p:nvSpPr>
@@ -9464,7 +9464,7 @@
       </p:sp>
       <p:sp>
         <p:nvSpPr>
-          <p:cNvPr id="12" name="Shape 9"/>
+          <p:cNvPr id="13" name="Shape 9"/>
           <p:cNvSpPr/>
           <p:nvPr/>
         </p:nvSpPr>
@@ -9484,7 +9484,7 @@
       </p:sp>
       <p:sp>
         <p:nvSpPr>
-          <p:cNvPr id="13" name="Text 10"/>
+          <p:cNvPr id="14" name="Text 10"/>
           <p:cNvSpPr/>
           <p:nvPr/>
         </p:nvSpPr>
@@ -9523,7 +9523,7 @@
       </p:sp>
       <p:sp>
         <p:nvSpPr>
-          <p:cNvPr id="14" name="Text 11"/>
+          <p:cNvPr id="15" name="Text 11"/>
           <p:cNvSpPr/>
           <p:nvPr/>
         </p:nvSpPr>
@@ -9562,7 +9562,7 @@
       </p:sp>
       <p:sp>
         <p:nvSpPr>
-          <p:cNvPr id="15" name="Text 12"/>
+          <p:cNvPr id="16" name="Text 12"/>
           <p:cNvSpPr/>
           <p:nvPr/>
         </p:nvSpPr>
@@ -9604,7 +9604,7 @@
       </p:sp>
       <p:sp>
         <p:nvSpPr>
-          <p:cNvPr id="16" name="Shape 13"/>
+          <p:cNvPr id="17" name="Shape 13"/>
           <p:cNvSpPr/>
           <p:nvPr/>
         </p:nvSpPr>
@@ -9626,7 +9626,7 @@
       </p:sp>
       <p:sp>
         <p:nvSpPr>
-          <p:cNvPr id="17" name="Shape 14"/>
+          <p:cNvPr id="18" name="Shape 14"/>
           <p:cNvSpPr/>
           <p:nvPr/>
         </p:nvSpPr>
@@ -9646,7 +9646,7 @@
       </p:sp>
       <p:sp>
         <p:nvSpPr>
-          <p:cNvPr id="18" name="Text 15"/>
+          <p:cNvPr id="19" name="Text 15"/>
           <p:cNvSpPr/>
           <p:nvPr/>
         </p:nvSpPr>
@@ -9685,7 +9685,7 @@
       </p:sp>
       <p:sp>
         <p:nvSpPr>
-          <p:cNvPr id="19" name="Text 16"/>
+          <p:cNvPr id="20" name="Text 16"/>
           <p:cNvSpPr/>
           <p:nvPr/>
         </p:nvSpPr>
@@ -9724,7 +9724,7 @@
       </p:sp>
       <p:sp>
         <p:nvSpPr>
-          <p:cNvPr id="20" name="Text 17"/>
+          <p:cNvPr id="21" name="Text 17"/>
           <p:cNvSpPr/>
           <p:nvPr/>
         </p:nvSpPr>
@@ -9766,7 +9766,7 @@
       </p:sp>
       <p:sp>
         <p:nvSpPr>
-          <p:cNvPr id="21" name="Shape 18"/>
+          <p:cNvPr id="22" name="Shape 18"/>
           <p:cNvSpPr/>
           <p:nvPr/>
         </p:nvSpPr>
@@ -9788,7 +9788,7 @@
       </p:sp>
       <p:sp>
         <p:nvSpPr>
-          <p:cNvPr id="22" name="Shape 19"/>
+          <p:cNvPr id="23" name="Shape 19"/>
           <p:cNvSpPr/>
           <p:nvPr/>
         </p:nvSpPr>
@@ -9808,7 +9808,7 @@
       </p:sp>
       <p:sp>
         <p:nvSpPr>
-          <p:cNvPr id="23" name="Text 20"/>
+          <p:cNvPr id="24" name="Text 20"/>
           <p:cNvSpPr/>
           <p:nvPr/>
         </p:nvSpPr>
@@ -9847,7 +9847,7 @@
       </p:sp>
       <p:sp>
         <p:nvSpPr>
-          <p:cNvPr id="24" name="Text 21"/>
+          <p:cNvPr id="25" name="Text 21"/>
           <p:cNvSpPr/>
           <p:nvPr/>
         </p:nvSpPr>
@@ -9886,7 +9886,7 @@
       </p:sp>
       <p:sp>
         <p:nvSpPr>
-          <p:cNvPr id="25" name="Text 22"/>
+          <p:cNvPr id="26" name="Text 22"/>
           <p:cNvSpPr/>
           <p:nvPr/>
         </p:nvSpPr>
@@ -9928,7 +9928,7 @@
       </p:sp>
       <p:sp>
         <p:nvSpPr>
-          <p:cNvPr id="26" name="Shape 23"/>
+          <p:cNvPr id="27" name="Shape 23"/>
           <p:cNvSpPr/>
           <p:nvPr/>
         </p:nvSpPr>
@@ -9950,7 +9950,7 @@
       </p:sp>
       <p:sp>
         <p:nvSpPr>
-          <p:cNvPr id="27" name="Text 24"/>
+          <p:cNvPr id="28" name="Text 24"/>
           <p:cNvSpPr/>
           <p:nvPr/>
         </p:nvSpPr>
@@ -9989,7 +9989,7 @@
       </p:sp>
       <p:sp>
         <p:nvSpPr>
-          <p:cNvPr id="28" name="Text 25"/>
+          <p:cNvPr id="29" name="Text 25"/>
           <p:cNvSpPr/>
           <p:nvPr/>
         </p:nvSpPr>
@@ -10235,7 +10235,7 @@
       </p:pic>
       <p:sp>
         <p:nvSpPr>
-          <p:cNvPr id="6" name="Shape 3"/>
+          <p:cNvPr id="7" name="Shape 3"/>
           <p:cNvSpPr/>
           <p:nvPr/>
         </p:nvSpPr>
@@ -10255,7 +10255,7 @@
       </p:sp>
       <p:sp>
         <p:nvSpPr>
-          <p:cNvPr id="7" name="Text 4"/>
+          <p:cNvPr id="8" name="Text 4"/>
           <p:cNvSpPr/>
           <p:nvPr/>
         </p:nvSpPr>
@@ -10294,7 +10294,7 @@
       </p:sp>
       <p:sp>
         <p:nvSpPr>
-          <p:cNvPr id="8" name="Text 5"/>
+          <p:cNvPr id="9" name="Text 5"/>
           <p:cNvSpPr/>
           <p:nvPr/>
         </p:nvSpPr>
@@ -10347,7 +10347,7 @@
       </p:sp>
       <p:sp>
         <p:nvSpPr>
-          <p:cNvPr id="9" name="Shape 6"/>
+          <p:cNvPr id="10" name="Shape 6"/>
           <p:cNvSpPr/>
           <p:nvPr/>
         </p:nvSpPr>
@@ -10367,7 +10367,7 @@
       </p:sp>
       <p:sp>
         <p:nvSpPr>
-          <p:cNvPr id="10" name="Text 7"/>
+          <p:cNvPr id="11" name="Text 7"/>
           <p:cNvSpPr/>
           <p:nvPr/>
         </p:nvSpPr>
@@ -10406,7 +10406,7 @@
       </p:sp>
       <p:sp>
         <p:nvSpPr>
-          <p:cNvPr id="11" name="Text 8"/>
+          <p:cNvPr id="12" name="Text 8"/>
           <p:cNvSpPr/>
           <p:nvPr/>
         </p:nvSpPr>
@@ -10459,7 +10459,7 @@
       </p:sp>
       <p:sp>
         <p:nvSpPr>
-          <p:cNvPr id="12" name="Shape 9"/>
+          <p:cNvPr id="13" name="Shape 9"/>
           <p:cNvSpPr/>
           <p:nvPr/>
         </p:nvSpPr>
@@ -10479,7 +10479,7 @@
       </p:sp>
       <p:sp>
         <p:nvSpPr>
-          <p:cNvPr id="13" name="Text 10"/>
+          <p:cNvPr id="14" name="Text 10"/>
           <p:cNvSpPr/>
           <p:nvPr/>
         </p:nvSpPr>
@@ -10518,7 +10518,7 @@
       </p:sp>
       <p:sp>
         <p:nvSpPr>
-          <p:cNvPr id="14" name="Text 11"/>
+          <p:cNvPr id="15" name="Text 11"/>
           <p:cNvSpPr/>
           <p:nvPr/>
         </p:nvSpPr>
@@ -10571,7 +10571,7 @@
       </p:sp>
       <p:sp>
         <p:nvSpPr>
-          <p:cNvPr id="15" name="Shape 12"/>
+          <p:cNvPr id="16" name="Shape 12"/>
           <p:cNvSpPr/>
           <p:nvPr/>
         </p:nvSpPr>
@@ -10591,7 +10591,7 @@
       </p:sp>
       <p:sp>
         <p:nvSpPr>
-          <p:cNvPr id="16" name="Text 13"/>
+          <p:cNvPr id="17" name="Text 13"/>
           <p:cNvSpPr/>
           <p:nvPr/>
         </p:nvSpPr>
@@ -10630,7 +10630,7 @@
       </p:sp>
       <p:sp>
         <p:nvSpPr>
-          <p:cNvPr id="17" name="Text 14"/>
+          <p:cNvPr id="18" name="Text 14"/>
           <p:cNvSpPr/>
           <p:nvPr/>
         </p:nvSpPr>
@@ -10683,7 +10683,7 @@
       </p:sp>
       <p:sp>
         <p:nvSpPr>
-          <p:cNvPr id="18" name="Shape 15"/>
+          <p:cNvPr id="19" name="Shape 15"/>
           <p:cNvSpPr/>
           <p:nvPr/>
         </p:nvSpPr>
@@ -10703,7 +10703,7 @@
       </p:sp>
       <p:sp>
         <p:nvSpPr>
-          <p:cNvPr id="19" name="Text 16"/>
+          <p:cNvPr id="20" name="Text 16"/>
           <p:cNvSpPr/>
           <p:nvPr/>
         </p:nvSpPr>
@@ -10742,7 +10742,7 @@
       </p:sp>
       <p:sp>
         <p:nvSpPr>
-          <p:cNvPr id="20" name="Text 17"/>
+          <p:cNvPr id="21" name="Text 17"/>
           <p:cNvSpPr/>
           <p:nvPr/>
         </p:nvSpPr>
@@ -10999,7 +10999,7 @@
       </p:pic>
       <p:sp>
         <p:nvSpPr>
-          <p:cNvPr id="6" name="Shape 3"/>
+          <p:cNvPr id="7" name="Shape 3"/>
           <p:cNvSpPr/>
           <p:nvPr/>
         </p:nvSpPr>
@@ -11021,7 +11021,7 @@
       </p:sp>
       <p:sp>
         <p:nvSpPr>
-          <p:cNvPr id="7" name="Text 4"/>
+          <p:cNvPr id="8" name="Text 4"/>
           <p:cNvSpPr/>
           <p:nvPr/>
         </p:nvSpPr>
@@ -11060,7 +11060,7 @@
       </p:sp>
       <p:sp>
         <p:nvSpPr>
-          <p:cNvPr id="8" name="Text 5"/>
+          <p:cNvPr id="9" name="Text 5"/>
           <p:cNvSpPr/>
           <p:nvPr/>
         </p:nvSpPr>
@@ -11102,7 +11102,7 @@
       </p:sp>
       <p:sp>
         <p:nvSpPr>
-          <p:cNvPr id="9" name="Shape 6"/>
+          <p:cNvPr id="10" name="Shape 6"/>
           <p:cNvSpPr/>
           <p:nvPr/>
         </p:nvSpPr>
@@ -11124,7 +11124,7 @@
       </p:sp>
       <p:sp>
         <p:nvSpPr>
-          <p:cNvPr id="10" name="Text 7"/>
+          <p:cNvPr id="11" name="Text 7"/>
           <p:cNvSpPr/>
           <p:nvPr/>
         </p:nvSpPr>
@@ -11163,7 +11163,7 @@
       </p:sp>
       <p:sp>
         <p:nvSpPr>
-          <p:cNvPr id="11" name="Text 8"/>
+          <p:cNvPr id="12" name="Text 8"/>
           <p:cNvSpPr/>
           <p:nvPr/>
         </p:nvSpPr>
@@ -11205,7 +11205,7 @@
       </p:sp>
       <p:sp>
         <p:nvSpPr>
-          <p:cNvPr id="12" name="Shape 9"/>
+          <p:cNvPr id="13" name="Shape 9"/>
           <p:cNvSpPr/>
           <p:nvPr/>
         </p:nvSpPr>
@@ -11232,7 +11232,7 @@
       </p:sp>
       <p:sp>
         <p:nvSpPr>
-          <p:cNvPr id="13" name="Text 10"/>
+          <p:cNvPr id="14" name="Text 10"/>
           <p:cNvSpPr/>
           <p:nvPr/>
         </p:nvSpPr>
@@ -11271,7 +11271,7 @@
       </p:sp>
       <p:sp>
         <p:nvSpPr>
-          <p:cNvPr id="14" name="Text 11"/>
+          <p:cNvPr id="15" name="Text 11"/>
           <p:cNvSpPr/>
           <p:nvPr/>
         </p:nvSpPr>
@@ -11313,7 +11313,7 @@
       </p:sp>
       <p:sp>
         <p:nvSpPr>
-          <p:cNvPr id="15" name="Shape 12"/>
+          <p:cNvPr id="16" name="Shape 12"/>
           <p:cNvSpPr/>
           <p:nvPr/>
         </p:nvSpPr>
@@ -11340,7 +11340,7 @@
       </p:sp>
       <p:sp>
         <p:nvSpPr>
-          <p:cNvPr id="16" name="Text 13"/>
+          <p:cNvPr id="17" name="Text 13"/>
           <p:cNvSpPr/>
           <p:nvPr/>
         </p:nvSpPr>
@@ -11586,7 +11586,7 @@
       </p:pic>
       <p:sp>
         <p:nvSpPr>
-          <p:cNvPr id="6" name="Shape 3"/>
+          <p:cNvPr id="7" name="Shape 3"/>
           <p:cNvSpPr/>
           <p:nvPr/>
         </p:nvSpPr>
@@ -11613,7 +11613,7 @@
       </p:sp>
       <p:sp>
         <p:nvSpPr>
-          <p:cNvPr id="7" name="Shape 4"/>
+          <p:cNvPr id="8" name="Shape 4"/>
           <p:cNvSpPr/>
           <p:nvPr/>
         </p:nvSpPr>
@@ -11640,14 +11640,54 @@
       </p:sp>
       <p:sp>
         <p:nvSpPr>
-          <p:cNvPr id="8" name="Text 5"/>
-          <p:cNvSpPr/>
-          <p:nvPr/>
-        </p:nvSpPr>
-        <p:spPr>
-          <a:xfrm>
-            <a:off x="978408" y="2157984"/>
-            <a:ext cx="256032" cy="256032"/>
+          <p:cNvPr id="9" name="Shape 5"/>
+          <p:cNvSpPr/>
+          <p:nvPr/>
+        </p:nvSpPr>
+        <p:spPr>
+          <a:xfrm rot="2700000">
+            <a:off x="1041227" y="2297430"/>
+            <a:ext cx="58156" cy="27432"/>
+          </a:xfrm>
+          <a:prstGeom prst="rect">
+            <a:avLst/>
+          </a:prstGeom>
+          <a:solidFill>
+            <a:srgbClr val="5A05F4"/>
+          </a:solidFill>
+          <a:ln/>
+        </p:spPr>
+      </p:sp>
+      <p:sp>
+        <p:nvSpPr>
+          <p:cNvPr id="10" name="Shape 6"/>
+          <p:cNvSpPr/>
+          <p:nvPr/>
+        </p:nvSpPr>
+        <p:spPr>
+          <a:xfrm rot="-3000000">
+            <a:off x="1069025" y="2271370"/>
+            <a:ext cx="121432" cy="27432"/>
+          </a:xfrm>
+          <a:prstGeom prst="rect">
+            <a:avLst/>
+          </a:prstGeom>
+          <a:solidFill>
+            <a:srgbClr val="5A05F4"/>
+          </a:solidFill>
+          <a:ln/>
+        </p:spPr>
+      </p:sp>
+      <p:sp>
+        <p:nvSpPr>
+          <p:cNvPr id="11" name="Text 7"/>
+          <p:cNvSpPr/>
+          <p:nvPr/>
+        </p:nvSpPr>
+        <p:spPr>
+          <a:xfrm>
+            <a:off x="1362456" y="2103120"/>
+            <a:ext cx="4617720" cy="384048"/>
           </a:xfrm>
           <a:prstGeom prst="rect">
             <a:avLst/>
@@ -11659,57 +11699,18 @@
           <a:bodyPr wrap="square" lIns="0" tIns="0" rIns="0" bIns="0" rtlCol="0" anchor="ctr"/>
           <a:lstStyle/>
           <a:p>
-            <a:pPr algn="ctr" indent="0" marL="0">
-              <a:buNone/>
-            </a:pPr>
-            <a:r>
-              <a:rPr lang="en-US" sz="1000" b="1" dirty="0">
-                <a:solidFill>
-                  <a:srgbClr val="5A05F4"/>
+            <a:pPr indent="0" marL="0">
+              <a:buNone/>
+            </a:pPr>
+            <a:r>
+              <a:rPr lang="en-US" sz="1250" dirty="0">
+                <a:solidFill>
+                  <a:srgbClr val="111318"/>
                 </a:solidFill>
                 <a:latin typeface="Montserrat" pitchFamily="34" charset="0"/>
                 <a:ea typeface="Montserrat" pitchFamily="34" charset="-122"/>
                 <a:cs typeface="Montserrat" pitchFamily="34" charset="-120"/>
               </a:rPr>
-              <a:t>✓</a:t>
-            </a:r>
-            <a:endParaRPr lang="en-US" sz="1000" dirty="0"/>
-          </a:p>
-        </p:txBody>
-      </p:sp>
-      <p:sp>
-        <p:nvSpPr>
-          <p:cNvPr id="9" name="Text 6"/>
-          <p:cNvSpPr/>
-          <p:nvPr/>
-        </p:nvSpPr>
-        <p:spPr>
-          <a:xfrm>
-            <a:off x="1362456" y="2103120"/>
-            <a:ext cx="4617720" cy="384048"/>
-          </a:xfrm>
-          <a:prstGeom prst="rect">
-            <a:avLst/>
-          </a:prstGeom>
-          <a:noFill/>
-          <a:ln/>
-        </p:spPr>
-        <p:txBody>
-          <a:bodyPr wrap="square" lIns="0" tIns="0" rIns="0" bIns="0" rtlCol="0" anchor="ctr"/>
-          <a:lstStyle/>
-          <a:p>
-            <a:pPr indent="0" marL="0">
-              <a:buNone/>
-            </a:pPr>
-            <a:r>
-              <a:rPr lang="en-US" sz="1250" dirty="0">
-                <a:solidFill>
-                  <a:srgbClr val="111318"/>
-                </a:solidFill>
-                <a:latin typeface="Montserrat" pitchFamily="34" charset="0"/>
-                <a:ea typeface="Montserrat" pitchFamily="34" charset="-122"/>
-                <a:cs typeface="Montserrat" pitchFamily="34" charset="-120"/>
-              </a:rPr>
               <a:t>в історії Actions є червоний і зелений прогін</a:t>
             </a:r>
             <a:endParaRPr lang="en-US" sz="1250" dirty="0"/>
@@ -11718,7 +11719,7 @@
       </p:sp>
       <p:sp>
         <p:nvSpPr>
-          <p:cNvPr id="10" name="Shape 7"/>
+          <p:cNvPr id="12" name="Shape 8"/>
           <p:cNvSpPr/>
           <p:nvPr/>
         </p:nvSpPr>
@@ -11745,14 +11746,54 @@
       </p:sp>
       <p:sp>
         <p:nvSpPr>
-          <p:cNvPr id="11" name="Text 8"/>
-          <p:cNvSpPr/>
-          <p:nvPr/>
-        </p:nvSpPr>
-        <p:spPr>
-          <a:xfrm>
-            <a:off x="978408" y="2724912"/>
-            <a:ext cx="256032" cy="256032"/>
+          <p:cNvPr id="13" name="Shape 9"/>
+          <p:cNvSpPr/>
+          <p:nvPr/>
+        </p:nvSpPr>
+        <p:spPr>
+          <a:xfrm rot="2700000">
+            <a:off x="1041227" y="2864358"/>
+            <a:ext cx="58156" cy="27432"/>
+          </a:xfrm>
+          <a:prstGeom prst="rect">
+            <a:avLst/>
+          </a:prstGeom>
+          <a:solidFill>
+            <a:srgbClr val="5A05F4"/>
+          </a:solidFill>
+          <a:ln/>
+        </p:spPr>
+      </p:sp>
+      <p:sp>
+        <p:nvSpPr>
+          <p:cNvPr id="14" name="Shape 10"/>
+          <p:cNvSpPr/>
+          <p:nvPr/>
+        </p:nvSpPr>
+        <p:spPr>
+          <a:xfrm rot="-3000000">
+            <a:off x="1069025" y="2838298"/>
+            <a:ext cx="121432" cy="27432"/>
+          </a:xfrm>
+          <a:prstGeom prst="rect">
+            <a:avLst/>
+          </a:prstGeom>
+          <a:solidFill>
+            <a:srgbClr val="5A05F4"/>
+          </a:solidFill>
+          <a:ln/>
+        </p:spPr>
+      </p:sp>
+      <p:sp>
+        <p:nvSpPr>
+          <p:cNvPr id="15" name="Text 11"/>
+          <p:cNvSpPr/>
+          <p:nvPr/>
+        </p:nvSpPr>
+        <p:spPr>
+          <a:xfrm>
+            <a:off x="1362456" y="2670048"/>
+            <a:ext cx="4617720" cy="384048"/>
           </a:xfrm>
           <a:prstGeom prst="rect">
             <a:avLst/>
@@ -11764,57 +11805,18 @@
           <a:bodyPr wrap="square" lIns="0" tIns="0" rIns="0" bIns="0" rtlCol="0" anchor="ctr"/>
           <a:lstStyle/>
           <a:p>
-            <a:pPr algn="ctr" indent="0" marL="0">
-              <a:buNone/>
-            </a:pPr>
-            <a:r>
-              <a:rPr lang="en-US" sz="1000" b="1" dirty="0">
-                <a:solidFill>
-                  <a:srgbClr val="5A05F4"/>
+            <a:pPr indent="0" marL="0">
+              <a:buNone/>
+            </a:pPr>
+            <a:r>
+              <a:rPr lang="en-US" sz="1250" dirty="0">
+                <a:solidFill>
+                  <a:srgbClr val="111318"/>
                 </a:solidFill>
                 <a:latin typeface="Montserrat" pitchFamily="34" charset="0"/>
                 <a:ea typeface="Montserrat" pitchFamily="34" charset="-122"/>
                 <a:cs typeface="Montserrat" pitchFamily="34" charset="-120"/>
               </a:rPr>
-              <a:t>✓</a:t>
-            </a:r>
-            <a:endParaRPr lang="en-US" sz="1000" dirty="0"/>
-          </a:p>
-        </p:txBody>
-      </p:sp>
-      <p:sp>
-        <p:nvSpPr>
-          <p:cNvPr id="12" name="Text 9"/>
-          <p:cNvSpPr/>
-          <p:nvPr/>
-        </p:nvSpPr>
-        <p:spPr>
-          <a:xfrm>
-            <a:off x="1362456" y="2670048"/>
-            <a:ext cx="4617720" cy="384048"/>
-          </a:xfrm>
-          <a:prstGeom prst="rect">
-            <a:avLst/>
-          </a:prstGeom>
-          <a:noFill/>
-          <a:ln/>
-        </p:spPr>
-        <p:txBody>
-          <a:bodyPr wrap="square" lIns="0" tIns="0" rIns="0" bIns="0" rtlCol="0" anchor="ctr"/>
-          <a:lstStyle/>
-          <a:p>
-            <a:pPr indent="0" marL="0">
-              <a:buNone/>
-            </a:pPr>
-            <a:r>
-              <a:rPr lang="en-US" sz="1250" dirty="0">
-                <a:solidFill>
-                  <a:srgbClr val="111318"/>
-                </a:solidFill>
-                <a:latin typeface="Montserrat" pitchFamily="34" charset="0"/>
-                <a:ea typeface="Montserrat" pitchFamily="34" charset="-122"/>
-                <a:cs typeface="Montserrat" pitchFamily="34" charset="-120"/>
-              </a:rPr>
               <a:t>merge червоного PR справді заблокований</a:t>
             </a:r>
             <a:endParaRPr lang="en-US" sz="1250" dirty="0"/>
@@ -11823,7 +11825,7 @@
       </p:sp>
       <p:sp>
         <p:nvSpPr>
-          <p:cNvPr id="13" name="Shape 10"/>
+          <p:cNvPr id="16" name="Shape 12"/>
           <p:cNvSpPr/>
           <p:nvPr/>
         </p:nvSpPr>
@@ -11850,14 +11852,54 @@
       </p:sp>
       <p:sp>
         <p:nvSpPr>
-          <p:cNvPr id="14" name="Text 11"/>
-          <p:cNvSpPr/>
-          <p:nvPr/>
-        </p:nvSpPr>
-        <p:spPr>
-          <a:xfrm>
-            <a:off x="6144768" y="2157984"/>
-            <a:ext cx="256032" cy="256032"/>
+          <p:cNvPr id="17" name="Shape 13"/>
+          <p:cNvSpPr/>
+          <p:nvPr/>
+        </p:nvSpPr>
+        <p:spPr>
+          <a:xfrm rot="2700000">
+            <a:off x="6207587" y="2297430"/>
+            <a:ext cx="58156" cy="27432"/>
+          </a:xfrm>
+          <a:prstGeom prst="rect">
+            <a:avLst/>
+          </a:prstGeom>
+          <a:solidFill>
+            <a:srgbClr val="5A05F4"/>
+          </a:solidFill>
+          <a:ln/>
+        </p:spPr>
+      </p:sp>
+      <p:sp>
+        <p:nvSpPr>
+          <p:cNvPr id="18" name="Shape 14"/>
+          <p:cNvSpPr/>
+          <p:nvPr/>
+        </p:nvSpPr>
+        <p:spPr>
+          <a:xfrm rot="-3000000">
+            <a:off x="6235385" y="2271370"/>
+            <a:ext cx="121432" cy="27432"/>
+          </a:xfrm>
+          <a:prstGeom prst="rect">
+            <a:avLst/>
+          </a:prstGeom>
+          <a:solidFill>
+            <a:srgbClr val="5A05F4"/>
+          </a:solidFill>
+          <a:ln/>
+        </p:spPr>
+      </p:sp>
+      <p:sp>
+        <p:nvSpPr>
+          <p:cNvPr id="19" name="Text 15"/>
+          <p:cNvSpPr/>
+          <p:nvPr/>
+        </p:nvSpPr>
+        <p:spPr>
+          <a:xfrm>
+            <a:off x="6528816" y="2103120"/>
+            <a:ext cx="4617720" cy="384048"/>
           </a:xfrm>
           <a:prstGeom prst="rect">
             <a:avLst/>
@@ -11869,57 +11911,18 @@
           <a:bodyPr wrap="square" lIns="0" tIns="0" rIns="0" bIns="0" rtlCol="0" anchor="ctr"/>
           <a:lstStyle/>
           <a:p>
-            <a:pPr algn="ctr" indent="0" marL="0">
-              <a:buNone/>
-            </a:pPr>
-            <a:r>
-              <a:rPr lang="en-US" sz="1000" b="1" dirty="0">
-                <a:solidFill>
-                  <a:srgbClr val="5A05F4"/>
+            <a:pPr indent="0" marL="0">
+              <a:buNone/>
+            </a:pPr>
+            <a:r>
+              <a:rPr lang="en-US" sz="1250" dirty="0">
+                <a:solidFill>
+                  <a:srgbClr val="111318"/>
                 </a:solidFill>
                 <a:latin typeface="Montserrat" pitchFamily="34" charset="0"/>
                 <a:ea typeface="Montserrat" pitchFamily="34" charset="-122"/>
                 <a:cs typeface="Montserrat" pitchFamily="34" charset="-120"/>
               </a:rPr>
-              <a:t>✓</a:t>
-            </a:r>
-            <a:endParaRPr lang="en-US" sz="1000" dirty="0"/>
-          </a:p>
-        </p:txBody>
-      </p:sp>
-      <p:sp>
-        <p:nvSpPr>
-          <p:cNvPr id="15" name="Text 12"/>
-          <p:cNvSpPr/>
-          <p:nvPr/>
-        </p:nvSpPr>
-        <p:spPr>
-          <a:xfrm>
-            <a:off x="6528816" y="2103120"/>
-            <a:ext cx="4617720" cy="384048"/>
-          </a:xfrm>
-          <a:prstGeom prst="rect">
-            <a:avLst/>
-          </a:prstGeom>
-          <a:noFill/>
-          <a:ln/>
-        </p:spPr>
-        <p:txBody>
-          <a:bodyPr wrap="square" lIns="0" tIns="0" rIns="0" bIns="0" rtlCol="0" anchor="ctr"/>
-          <a:lstStyle/>
-          <a:p>
-            <a:pPr indent="0" marL="0">
-              <a:buNone/>
-            </a:pPr>
-            <a:r>
-              <a:rPr lang="en-US" sz="1250" dirty="0">
-                <a:solidFill>
-                  <a:srgbClr val="111318"/>
-                </a:solidFill>
-                <a:latin typeface="Montserrat" pitchFamily="34" charset="0"/>
-                <a:ea typeface="Montserrat" pitchFamily="34" charset="-122"/>
-                <a:cs typeface="Montserrat" pitchFamily="34" charset="-120"/>
-              </a:rPr>
               <a:t>rollback-критерії записані: умова, хто, чим</a:t>
             </a:r>
             <a:endParaRPr lang="en-US" sz="1250" dirty="0"/>
@@ -11928,7 +11931,7 @@
       </p:sp>
       <p:sp>
         <p:nvSpPr>
-          <p:cNvPr id="16" name="Shape 13"/>
+          <p:cNvPr id="20" name="Shape 16"/>
           <p:cNvSpPr/>
           <p:nvPr/>
         </p:nvSpPr>
@@ -11955,14 +11958,54 @@
       </p:sp>
       <p:sp>
         <p:nvSpPr>
-          <p:cNvPr id="17" name="Text 14"/>
-          <p:cNvSpPr/>
-          <p:nvPr/>
-        </p:nvSpPr>
-        <p:spPr>
-          <a:xfrm>
-            <a:off x="6144768" y="2724912"/>
-            <a:ext cx="256032" cy="256032"/>
+          <p:cNvPr id="21" name="Shape 17"/>
+          <p:cNvSpPr/>
+          <p:nvPr/>
+        </p:nvSpPr>
+        <p:spPr>
+          <a:xfrm rot="2700000">
+            <a:off x="6207587" y="2864358"/>
+            <a:ext cx="58156" cy="27432"/>
+          </a:xfrm>
+          <a:prstGeom prst="rect">
+            <a:avLst/>
+          </a:prstGeom>
+          <a:solidFill>
+            <a:srgbClr val="5A05F4"/>
+          </a:solidFill>
+          <a:ln/>
+        </p:spPr>
+      </p:sp>
+      <p:sp>
+        <p:nvSpPr>
+          <p:cNvPr id="22" name="Shape 18"/>
+          <p:cNvSpPr/>
+          <p:nvPr/>
+        </p:nvSpPr>
+        <p:spPr>
+          <a:xfrm rot="-3000000">
+            <a:off x="6235385" y="2838298"/>
+            <a:ext cx="121432" cy="27432"/>
+          </a:xfrm>
+          <a:prstGeom prst="rect">
+            <a:avLst/>
+          </a:prstGeom>
+          <a:solidFill>
+            <a:srgbClr val="5A05F4"/>
+          </a:solidFill>
+          <a:ln/>
+        </p:spPr>
+      </p:sp>
+      <p:sp>
+        <p:nvSpPr>
+          <p:cNvPr id="23" name="Text 19"/>
+          <p:cNvSpPr/>
+          <p:nvPr/>
+        </p:nvSpPr>
+        <p:spPr>
+          <a:xfrm>
+            <a:off x="6528816" y="2670048"/>
+            <a:ext cx="4617720" cy="384048"/>
           </a:xfrm>
           <a:prstGeom prst="rect">
             <a:avLst/>
@@ -11974,57 +12017,18 @@
           <a:bodyPr wrap="square" lIns="0" tIns="0" rIns="0" bIns="0" rtlCol="0" anchor="ctr"/>
           <a:lstStyle/>
           <a:p>
-            <a:pPr algn="ctr" indent="0" marL="0">
-              <a:buNone/>
-            </a:pPr>
-            <a:r>
-              <a:rPr lang="en-US" sz="1000" b="1" dirty="0">
-                <a:solidFill>
-                  <a:srgbClr val="5A05F4"/>
+            <a:pPr indent="0" marL="0">
+              <a:buNone/>
+            </a:pPr>
+            <a:r>
+              <a:rPr lang="en-US" sz="1250" dirty="0">
+                <a:solidFill>
+                  <a:srgbClr val="111318"/>
                 </a:solidFill>
                 <a:latin typeface="Montserrat" pitchFamily="34" charset="0"/>
                 <a:ea typeface="Montserrat" pitchFamily="34" charset="-122"/>
                 <a:cs typeface="Montserrat" pitchFamily="34" charset="-120"/>
               </a:rPr>
-              <a:t>✓</a:t>
-            </a:r>
-            <a:endParaRPr lang="en-US" sz="1000" dirty="0"/>
-          </a:p>
-        </p:txBody>
-      </p:sp>
-      <p:sp>
-        <p:nvSpPr>
-          <p:cNvPr id="18" name="Text 15"/>
-          <p:cNvSpPr/>
-          <p:nvPr/>
-        </p:nvSpPr>
-        <p:spPr>
-          <a:xfrm>
-            <a:off x="6528816" y="2670048"/>
-            <a:ext cx="4617720" cy="384048"/>
-          </a:xfrm>
-          <a:prstGeom prst="rect">
-            <a:avLst/>
-          </a:prstGeom>
-          <a:noFill/>
-          <a:ln/>
-        </p:spPr>
-        <p:txBody>
-          <a:bodyPr wrap="square" lIns="0" tIns="0" rIns="0" bIns="0" rtlCol="0" anchor="ctr"/>
-          <a:lstStyle/>
-          <a:p>
-            <a:pPr indent="0" marL="0">
-              <a:buNone/>
-            </a:pPr>
-            <a:r>
-              <a:rPr lang="en-US" sz="1250" dirty="0">
-                <a:solidFill>
-                  <a:srgbClr val="111318"/>
-                </a:solidFill>
-                <a:latin typeface="Montserrat" pitchFamily="34" charset="0"/>
-                <a:ea typeface="Montserrat" pitchFamily="34" charset="-122"/>
-                <a:cs typeface="Montserrat" pitchFamily="34" charset="-120"/>
-              </a:rPr>
               <a:t>поясню, чому читач деплоїться перед писарем</a:t>
             </a:r>
             <a:endParaRPr lang="en-US" sz="1250" dirty="0"/>
@@ -12033,7 +12037,7 @@
       </p:sp>
       <p:sp>
         <p:nvSpPr>
-          <p:cNvPr id="19" name="Text 16"/>
+          <p:cNvPr id="24" name="Text 20"/>
           <p:cNvSpPr/>
           <p:nvPr/>
         </p:nvSpPr>
@@ -12318,7 +12322,7 @@
       </p:pic>
       <p:sp>
         <p:nvSpPr>
-          <p:cNvPr id="7" name="Shape 4"/>
+          <p:cNvPr id="8" name="Shape 4"/>
           <p:cNvSpPr/>
           <p:nvPr/>
         </p:nvSpPr>
@@ -12345,7 +12349,7 @@
       </p:sp>
       <p:sp>
         <p:nvSpPr>
-          <p:cNvPr id="8" name="Shape 5"/>
+          <p:cNvPr id="9" name="Shape 5"/>
           <p:cNvSpPr/>
           <p:nvPr/>
         </p:nvSpPr>
@@ -12365,7 +12369,7 @@
       </p:sp>
       <p:sp>
         <p:nvSpPr>
-          <p:cNvPr id="9" name="Text 6"/>
+          <p:cNvPr id="10" name="Text 6"/>
           <p:cNvSpPr/>
           <p:nvPr/>
         </p:nvSpPr>
@@ -12404,7 +12408,7 @@
       </p:sp>
       <p:sp>
         <p:nvSpPr>
-          <p:cNvPr id="10" name="Text 7"/>
+          <p:cNvPr id="11" name="Text 7"/>
           <p:cNvSpPr/>
           <p:nvPr/>
         </p:nvSpPr>
@@ -12443,7 +12447,7 @@
       </p:sp>
       <p:sp>
         <p:nvSpPr>
-          <p:cNvPr id="11" name="Text 8"/>
+          <p:cNvPr id="12" name="Text 8"/>
           <p:cNvSpPr/>
           <p:nvPr/>
         </p:nvSpPr>
@@ -12485,7 +12489,7 @@
       </p:sp>
       <p:sp>
         <p:nvSpPr>
-          <p:cNvPr id="12" name="Shape 9"/>
+          <p:cNvPr id="13" name="Shape 9"/>
           <p:cNvSpPr/>
           <p:nvPr/>
         </p:nvSpPr>
@@ -12512,7 +12516,7 @@
       </p:sp>
       <p:sp>
         <p:nvSpPr>
-          <p:cNvPr id="13" name="Shape 10"/>
+          <p:cNvPr id="14" name="Shape 10"/>
           <p:cNvSpPr/>
           <p:nvPr/>
         </p:nvSpPr>
@@ -12532,7 +12536,7 @@
       </p:sp>
       <p:sp>
         <p:nvSpPr>
-          <p:cNvPr id="14" name="Text 11"/>
+          <p:cNvPr id="15" name="Text 11"/>
           <p:cNvSpPr/>
           <p:nvPr/>
         </p:nvSpPr>
@@ -12571,7 +12575,7 @@
       </p:sp>
       <p:sp>
         <p:nvSpPr>
-          <p:cNvPr id="15" name="Text 12"/>
+          <p:cNvPr id="16" name="Text 12"/>
           <p:cNvSpPr/>
           <p:nvPr/>
         </p:nvSpPr>
@@ -12610,7 +12614,7 @@
       </p:sp>
       <p:sp>
         <p:nvSpPr>
-          <p:cNvPr id="16" name="Text 13"/>
+          <p:cNvPr id="17" name="Text 13"/>
           <p:cNvSpPr/>
           <p:nvPr/>
         </p:nvSpPr>
@@ -12652,7 +12656,7 @@
       </p:sp>
       <p:sp>
         <p:nvSpPr>
-          <p:cNvPr id="17" name="Shape 14"/>
+          <p:cNvPr id="18" name="Shape 14"/>
           <p:cNvSpPr/>
           <p:nvPr/>
         </p:nvSpPr>
@@ -12679,7 +12683,7 @@
       </p:sp>
       <p:sp>
         <p:nvSpPr>
-          <p:cNvPr id="18" name="Shape 15"/>
+          <p:cNvPr id="19" name="Shape 15"/>
           <p:cNvSpPr/>
           <p:nvPr/>
         </p:nvSpPr>
@@ -12699,7 +12703,7 @@
       </p:sp>
       <p:sp>
         <p:nvSpPr>
-          <p:cNvPr id="19" name="Text 16"/>
+          <p:cNvPr id="20" name="Text 16"/>
           <p:cNvSpPr/>
           <p:nvPr/>
         </p:nvSpPr>
@@ -12738,7 +12742,7 @@
       </p:sp>
       <p:sp>
         <p:nvSpPr>
-          <p:cNvPr id="20" name="Text 17"/>
+          <p:cNvPr id="21" name="Text 17"/>
           <p:cNvSpPr/>
           <p:nvPr/>
         </p:nvSpPr>
@@ -12777,7 +12781,7 @@
       </p:sp>
       <p:sp>
         <p:nvSpPr>
-          <p:cNvPr id="21" name="Text 18"/>
+          <p:cNvPr id="22" name="Text 18"/>
           <p:cNvSpPr/>
           <p:nvPr/>
         </p:nvSpPr>
@@ -12819,7 +12823,7 @@
       </p:sp>
       <p:sp>
         <p:nvSpPr>
-          <p:cNvPr id="22" name="Shape 19"/>
+          <p:cNvPr id="23" name="Shape 19"/>
           <p:cNvSpPr/>
           <p:nvPr/>
         </p:nvSpPr>
@@ -12846,7 +12850,7 @@
       </p:sp>
       <p:sp>
         <p:nvSpPr>
-          <p:cNvPr id="23" name="Shape 20"/>
+          <p:cNvPr id="24" name="Shape 20"/>
           <p:cNvSpPr/>
           <p:nvPr/>
         </p:nvSpPr>
@@ -12866,7 +12870,7 @@
       </p:sp>
       <p:sp>
         <p:nvSpPr>
-          <p:cNvPr id="24" name="Text 21"/>
+          <p:cNvPr id="25" name="Text 21"/>
           <p:cNvSpPr/>
           <p:nvPr/>
         </p:nvSpPr>
@@ -12905,7 +12909,7 @@
       </p:sp>
       <p:sp>
         <p:nvSpPr>
-          <p:cNvPr id="25" name="Text 22"/>
+          <p:cNvPr id="26" name="Text 22"/>
           <p:cNvSpPr/>
           <p:nvPr/>
         </p:nvSpPr>
@@ -12944,7 +12948,7 @@
       </p:sp>
       <p:sp>
         <p:nvSpPr>
-          <p:cNvPr id="26" name="Text 23"/>
+          <p:cNvPr id="27" name="Text 23"/>
           <p:cNvSpPr/>
           <p:nvPr/>
         </p:nvSpPr>
@@ -12986,7 +12990,7 @@
       </p:sp>
       <p:sp>
         <p:nvSpPr>
-          <p:cNvPr id="27" name="Shape 24"/>
+          <p:cNvPr id="28" name="Shape 24"/>
           <p:cNvSpPr/>
           <p:nvPr/>
         </p:nvSpPr>
@@ -13013,7 +13017,7 @@
       </p:sp>
       <p:sp>
         <p:nvSpPr>
-          <p:cNvPr id="28" name="Shape 25"/>
+          <p:cNvPr id="29" name="Shape 25"/>
           <p:cNvSpPr/>
           <p:nvPr/>
         </p:nvSpPr>
@@ -13033,7 +13037,7 @@
       </p:sp>
       <p:sp>
         <p:nvSpPr>
-          <p:cNvPr id="29" name="Text 26"/>
+          <p:cNvPr id="30" name="Text 26"/>
           <p:cNvSpPr/>
           <p:nvPr/>
         </p:nvSpPr>
@@ -13072,7 +13076,7 @@
       </p:sp>
       <p:sp>
         <p:nvSpPr>
-          <p:cNvPr id="30" name="Text 27"/>
+          <p:cNvPr id="31" name="Text 27"/>
           <p:cNvSpPr/>
           <p:nvPr/>
         </p:nvSpPr>
@@ -13111,7 +13115,7 @@
       </p:sp>
       <p:sp>
         <p:nvSpPr>
-          <p:cNvPr id="31" name="Text 28"/>
+          <p:cNvPr id="32" name="Text 28"/>
           <p:cNvSpPr/>
           <p:nvPr/>
         </p:nvSpPr>
@@ -13357,7 +13361,7 @@
       </p:pic>
       <p:sp>
         <p:nvSpPr>
-          <p:cNvPr id="6" name="Shape 3"/>
+          <p:cNvPr id="7" name="Shape 3"/>
           <p:cNvSpPr/>
           <p:nvPr/>
         </p:nvSpPr>
@@ -13384,7 +13388,7 @@
       </p:sp>
       <p:sp>
         <p:nvSpPr>
-          <p:cNvPr id="7" name="Shape 4"/>
+          <p:cNvPr id="8" name="Shape 4"/>
           <p:cNvSpPr/>
           <p:nvPr/>
         </p:nvSpPr>
@@ -13404,14 +13408,54 @@
       </p:sp>
       <p:sp>
         <p:nvSpPr>
-          <p:cNvPr id="8" name="Text 5"/>
-          <p:cNvSpPr/>
-          <p:nvPr/>
-        </p:nvSpPr>
-        <p:spPr>
-          <a:xfrm>
-            <a:off x="768096" y="1956816"/>
-            <a:ext cx="384048" cy="384048"/>
+          <p:cNvPr id="9" name="Shape 5"/>
+          <p:cNvSpPr/>
+          <p:nvPr/>
+        </p:nvSpPr>
+        <p:spPr>
+          <a:xfrm rot="2700000">
+            <a:off x="871789" y="2133094"/>
+            <a:ext cx="176662" cy="31492"/>
+          </a:xfrm>
+          <a:prstGeom prst="rect">
+            <a:avLst/>
+          </a:prstGeom>
+          <a:solidFill>
+            <a:srgbClr val="C62A2A"/>
+          </a:solidFill>
+          <a:ln/>
+        </p:spPr>
+      </p:sp>
+      <p:sp>
+        <p:nvSpPr>
+          <p:cNvPr id="10" name="Shape 6"/>
+          <p:cNvSpPr/>
+          <p:nvPr/>
+        </p:nvSpPr>
+        <p:spPr>
+          <a:xfrm rot="-2700000">
+            <a:off x="871789" y="2133094"/>
+            <a:ext cx="176662" cy="31492"/>
+          </a:xfrm>
+          <a:prstGeom prst="rect">
+            <a:avLst/>
+          </a:prstGeom>
+          <a:solidFill>
+            <a:srgbClr val="C62A2A"/>
+          </a:solidFill>
+          <a:ln/>
+        </p:spPr>
+      </p:sp>
+      <p:sp>
+        <p:nvSpPr>
+          <p:cNvPr id="11" name="Text 7"/>
+          <p:cNvSpPr/>
+          <p:nvPr/>
+        </p:nvSpPr>
+        <p:spPr>
+          <a:xfrm>
+            <a:off x="1298448" y="1783080"/>
+            <a:ext cx="10149840" cy="731520"/>
           </a:xfrm>
           <a:prstGeom prst="rect">
             <a:avLst/>
@@ -13423,71 +13467,32 @@
           <a:bodyPr wrap="square" lIns="0" tIns="0" rIns="0" bIns="0" rtlCol="0" anchor="ctr"/>
           <a:lstStyle/>
           <a:p>
-            <a:pPr algn="ctr" indent="0" marL="0">
+            <a:pPr indent="0" marL="0">
               <a:buNone/>
             </a:pPr>
             <a:r>
               <a:rPr lang="en-US" sz="1300" b="1" dirty="0">
                 <a:solidFill>
-                  <a:srgbClr val="C62A2A"/>
+                  <a:srgbClr val="111318"/>
                 </a:solidFill>
                 <a:latin typeface="Montserrat" pitchFamily="34" charset="0"/>
                 <a:ea typeface="Montserrat" pitchFamily="34" charset="-122"/>
                 <a:cs typeface="Montserrat" pitchFamily="34" charset="-120"/>
               </a:rPr>
-              <a:t>✕</a:t>
-            </a:r>
-            <a:endParaRPr lang="en-US" sz="1300" dirty="0"/>
-          </a:p>
-        </p:txBody>
-      </p:sp>
-      <p:sp>
-        <p:nvSpPr>
-          <p:cNvPr id="9" name="Text 6"/>
-          <p:cNvSpPr/>
-          <p:nvPr/>
-        </p:nvSpPr>
-        <p:spPr>
-          <a:xfrm>
-            <a:off x="1298448" y="1783080"/>
-            <a:ext cx="10149840" cy="731520"/>
-          </a:xfrm>
-          <a:prstGeom prst="rect">
-            <a:avLst/>
-          </a:prstGeom>
-          <a:noFill/>
-          <a:ln/>
-        </p:spPr>
-        <p:txBody>
-          <a:bodyPr wrap="square" lIns="0" tIns="0" rIns="0" bIns="0" rtlCol="0" anchor="ctr"/>
-          <a:lstStyle/>
-          <a:p>
-            <a:pPr indent="0" marL="0">
-              <a:buNone/>
-            </a:pPr>
-            <a:r>
-              <a:rPr lang="en-US" sz="1300" b="1" dirty="0">
-                <a:solidFill>
-                  <a:srgbClr val="111318"/>
+              <a:t>Мерж повз червоний гейт   </a:t>
+            </a:r>
+            <a:pPr indent="0" marL="0">
+              <a:buNone/>
+            </a:pPr>
+            <a:r>
+              <a:rPr lang="en-US" sz="1150" dirty="0">
+                <a:solidFill>
+                  <a:srgbClr val="555B66"/>
                 </a:solidFill>
                 <a:latin typeface="Montserrat" pitchFamily="34" charset="0"/>
                 <a:ea typeface="Montserrat" pitchFamily="34" charset="-122"/>
                 <a:cs typeface="Montserrat" pitchFamily="34" charset="-120"/>
               </a:rPr>
-              <a:t>Мерж повз червоний гейт   </a:t>
-            </a:r>
-            <a:pPr indent="0" marL="0">
-              <a:buNone/>
-            </a:pPr>
-            <a:r>
-              <a:rPr lang="en-US" sz="1150" dirty="0">
-                <a:solidFill>
-                  <a:srgbClr val="555B66"/>
-                </a:solidFill>
-                <a:latin typeface="Montserrat" pitchFamily="34" charset="0"/>
-                <a:ea typeface="Montserrat" pitchFamily="34" charset="-122"/>
-                <a:cs typeface="Montserrat" pitchFamily="34" charset="-120"/>
-              </a:rPr>
               <a:t>один прецедент — і за місяць гейт обходять усі</a:t>
             </a:r>
             <a:endParaRPr lang="en-US" sz="1300" dirty="0"/>
@@ -13496,7 +13501,7 @@
       </p:sp>
       <p:sp>
         <p:nvSpPr>
-          <p:cNvPr id="10" name="Shape 7"/>
+          <p:cNvPr id="12" name="Shape 8"/>
           <p:cNvSpPr/>
           <p:nvPr/>
         </p:nvSpPr>
@@ -13523,7 +13528,7 @@
       </p:sp>
       <p:sp>
         <p:nvSpPr>
-          <p:cNvPr id="11" name="Shape 8"/>
+          <p:cNvPr id="13" name="Shape 9"/>
           <p:cNvSpPr/>
           <p:nvPr/>
         </p:nvSpPr>
@@ -13543,14 +13548,54 @@
       </p:sp>
       <p:sp>
         <p:nvSpPr>
-          <p:cNvPr id="12" name="Text 9"/>
-          <p:cNvSpPr/>
-          <p:nvPr/>
-        </p:nvSpPr>
-        <p:spPr>
-          <a:xfrm>
-            <a:off x="768096" y="2825496"/>
-            <a:ext cx="384048" cy="384048"/>
+          <p:cNvPr id="14" name="Shape 10"/>
+          <p:cNvSpPr/>
+          <p:nvPr/>
+        </p:nvSpPr>
+        <p:spPr>
+          <a:xfrm rot="2700000">
+            <a:off x="871789" y="3001774"/>
+            <a:ext cx="176662" cy="31492"/>
+          </a:xfrm>
+          <a:prstGeom prst="rect">
+            <a:avLst/>
+          </a:prstGeom>
+          <a:solidFill>
+            <a:srgbClr val="C62A2A"/>
+          </a:solidFill>
+          <a:ln/>
+        </p:spPr>
+      </p:sp>
+      <p:sp>
+        <p:nvSpPr>
+          <p:cNvPr id="15" name="Shape 11"/>
+          <p:cNvSpPr/>
+          <p:nvPr/>
+        </p:nvSpPr>
+        <p:spPr>
+          <a:xfrm rot="-2700000">
+            <a:off x="871789" y="3001774"/>
+            <a:ext cx="176662" cy="31492"/>
+          </a:xfrm>
+          <a:prstGeom prst="rect">
+            <a:avLst/>
+          </a:prstGeom>
+          <a:solidFill>
+            <a:srgbClr val="C62A2A"/>
+          </a:solidFill>
+          <a:ln/>
+        </p:spPr>
+      </p:sp>
+      <p:sp>
+        <p:nvSpPr>
+          <p:cNvPr id="16" name="Text 12"/>
+          <p:cNvSpPr/>
+          <p:nvPr/>
+        </p:nvSpPr>
+        <p:spPr>
+          <a:xfrm>
+            <a:off x="1298448" y="2651760"/>
+            <a:ext cx="10149840" cy="731520"/>
           </a:xfrm>
           <a:prstGeom prst="rect">
             <a:avLst/>
@@ -13562,71 +13607,32 @@
           <a:bodyPr wrap="square" lIns="0" tIns="0" rIns="0" bIns="0" rtlCol="0" anchor="ctr"/>
           <a:lstStyle/>
           <a:p>
-            <a:pPr algn="ctr" indent="0" marL="0">
+            <a:pPr indent="0" marL="0">
               <a:buNone/>
             </a:pPr>
             <a:r>
               <a:rPr lang="en-US" sz="1300" b="1" dirty="0">
                 <a:solidFill>
-                  <a:srgbClr val="C62A2A"/>
+                  <a:srgbClr val="111318"/>
                 </a:solidFill>
                 <a:latin typeface="Montserrat" pitchFamily="34" charset="0"/>
                 <a:ea typeface="Montserrat" pitchFamily="34" charset="-122"/>
                 <a:cs typeface="Montserrat" pitchFamily="34" charset="-120"/>
               </a:rPr>
-              <a:t>✕</a:t>
-            </a:r>
-            <a:endParaRPr lang="en-US" sz="1300" dirty="0"/>
-          </a:p>
-        </p:txBody>
-      </p:sp>
-      <p:sp>
-        <p:nvSpPr>
-          <p:cNvPr id="13" name="Text 10"/>
-          <p:cNvSpPr/>
-          <p:nvPr/>
-        </p:nvSpPr>
-        <p:spPr>
-          <a:xfrm>
-            <a:off x="1298448" y="2651760"/>
-            <a:ext cx="10149840" cy="731520"/>
-          </a:xfrm>
-          <a:prstGeom prst="rect">
-            <a:avLst/>
-          </a:prstGeom>
-          <a:noFill/>
-          <a:ln/>
-        </p:spPr>
-        <p:txBody>
-          <a:bodyPr wrap="square" lIns="0" tIns="0" rIns="0" bIns="0" rtlCol="0" anchor="ctr"/>
-          <a:lstStyle/>
-          <a:p>
-            <a:pPr indent="0" marL="0">
-              <a:buNone/>
-            </a:pPr>
-            <a:r>
-              <a:rPr lang="en-US" sz="1300" b="1" dirty="0">
-                <a:solidFill>
-                  <a:srgbClr val="111318"/>
+              <a:t>Protection на неіснуючий чек   </a:t>
+            </a:r>
+            <a:pPr indent="0" marL="0">
+              <a:buNone/>
+            </a:pPr>
+            <a:r>
+              <a:rPr lang="en-US" sz="1150" dirty="0">
+                <a:solidFill>
+                  <a:srgbClr val="555B66"/>
                 </a:solidFill>
                 <a:latin typeface="Montserrat" pitchFamily="34" charset="0"/>
                 <a:ea typeface="Montserrat" pitchFamily="34" charset="-122"/>
                 <a:cs typeface="Montserrat" pitchFamily="34" charset="-120"/>
               </a:rPr>
-              <a:t>Protection на неіснуючий чек   </a:t>
-            </a:r>
-            <a:pPr indent="0" marL="0">
-              <a:buNone/>
-            </a:pPr>
-            <a:r>
-              <a:rPr lang="en-US" sz="1150" dirty="0">
-                <a:solidFill>
-                  <a:srgbClr val="555B66"/>
-                </a:solidFill>
-                <a:latin typeface="Montserrat" pitchFamily="34" charset="0"/>
-                <a:ea typeface="Montserrat" pitchFamily="34" charset="-122"/>
-                <a:cs typeface="Montserrat" pitchFamily="34" charset="-120"/>
-              </a:rPr>
               <a:t>захист, який нічого не блокує, гірший за відсутній</a:t>
             </a:r>
             <a:endParaRPr lang="en-US" sz="1300" dirty="0"/>
@@ -13635,7 +13641,7 @@
       </p:sp>
       <p:sp>
         <p:nvSpPr>
-          <p:cNvPr id="14" name="Shape 11"/>
+          <p:cNvPr id="17" name="Shape 13"/>
           <p:cNvSpPr/>
           <p:nvPr/>
         </p:nvSpPr>
@@ -13662,7 +13668,7 @@
       </p:sp>
       <p:sp>
         <p:nvSpPr>
-          <p:cNvPr id="15" name="Shape 12"/>
+          <p:cNvPr id="18" name="Shape 14"/>
           <p:cNvSpPr/>
           <p:nvPr/>
         </p:nvSpPr>
@@ -13682,14 +13688,54 @@
       </p:sp>
       <p:sp>
         <p:nvSpPr>
-          <p:cNvPr id="16" name="Text 13"/>
-          <p:cNvSpPr/>
-          <p:nvPr/>
-        </p:nvSpPr>
-        <p:spPr>
-          <a:xfrm>
-            <a:off x="768096" y="3694176"/>
-            <a:ext cx="384048" cy="384048"/>
+          <p:cNvPr id="19" name="Shape 15"/>
+          <p:cNvSpPr/>
+          <p:nvPr/>
+        </p:nvSpPr>
+        <p:spPr>
+          <a:xfrm rot="2700000">
+            <a:off x="871789" y="3870454"/>
+            <a:ext cx="176662" cy="31492"/>
+          </a:xfrm>
+          <a:prstGeom prst="rect">
+            <a:avLst/>
+          </a:prstGeom>
+          <a:solidFill>
+            <a:srgbClr val="C62A2A"/>
+          </a:solidFill>
+          <a:ln/>
+        </p:spPr>
+      </p:sp>
+      <p:sp>
+        <p:nvSpPr>
+          <p:cNvPr id="20" name="Shape 16"/>
+          <p:cNvSpPr/>
+          <p:nvPr/>
+        </p:nvSpPr>
+        <p:spPr>
+          <a:xfrm rot="-2700000">
+            <a:off x="871789" y="3870454"/>
+            <a:ext cx="176662" cy="31492"/>
+          </a:xfrm>
+          <a:prstGeom prst="rect">
+            <a:avLst/>
+          </a:prstGeom>
+          <a:solidFill>
+            <a:srgbClr val="C62A2A"/>
+          </a:solidFill>
+          <a:ln/>
+        </p:spPr>
+      </p:sp>
+      <p:sp>
+        <p:nvSpPr>
+          <p:cNvPr id="21" name="Text 17"/>
+          <p:cNvSpPr/>
+          <p:nvPr/>
+        </p:nvSpPr>
+        <p:spPr>
+          <a:xfrm>
+            <a:off x="1298448" y="3520440"/>
+            <a:ext cx="10149840" cy="731520"/>
           </a:xfrm>
           <a:prstGeom prst="rect">
             <a:avLst/>
@@ -13701,71 +13747,32 @@
           <a:bodyPr wrap="square" lIns="0" tIns="0" rIns="0" bIns="0" rtlCol="0" anchor="ctr"/>
           <a:lstStyle/>
           <a:p>
-            <a:pPr algn="ctr" indent="0" marL="0">
+            <a:pPr indent="0" marL="0">
               <a:buNone/>
             </a:pPr>
             <a:r>
               <a:rPr lang="en-US" sz="1300" b="1" dirty="0">
                 <a:solidFill>
-                  <a:srgbClr val="C62A2A"/>
+                  <a:srgbClr val="111318"/>
                 </a:solidFill>
                 <a:latin typeface="Montserrat" pitchFamily="34" charset="0"/>
                 <a:ea typeface="Montserrat" pitchFamily="34" charset="-122"/>
                 <a:cs typeface="Montserrat" pitchFamily="34" charset="-120"/>
               </a:rPr>
-              <a:t>✕</a:t>
-            </a:r>
-            <a:endParaRPr lang="en-US" sz="1300" dirty="0"/>
-          </a:p>
-        </p:txBody>
-      </p:sp>
-      <p:sp>
-        <p:nvSpPr>
-          <p:cNvPr id="17" name="Text 14"/>
-          <p:cNvSpPr/>
-          <p:nvPr/>
-        </p:nvSpPr>
-        <p:spPr>
-          <a:xfrm>
-            <a:off x="1298448" y="3520440"/>
-            <a:ext cx="10149840" cy="731520"/>
-          </a:xfrm>
-          <a:prstGeom prst="rect">
-            <a:avLst/>
-          </a:prstGeom>
-          <a:noFill/>
-          <a:ln/>
-        </p:spPr>
-        <p:txBody>
-          <a:bodyPr wrap="square" lIns="0" tIns="0" rIns="0" bIns="0" rtlCol="0" anchor="ctr"/>
-          <a:lstStyle/>
-          <a:p>
-            <a:pPr indent="0" marL="0">
-              <a:buNone/>
-            </a:pPr>
-            <a:r>
-              <a:rPr lang="en-US" sz="1300" b="1" dirty="0">
-                <a:solidFill>
-                  <a:srgbClr val="111318"/>
+              <a:t>Гейт, що триває пів години   </a:t>
+            </a:r>
+            <a:pPr indent="0" marL="0">
+              <a:buNone/>
+            </a:pPr>
+            <a:r>
+              <a:rPr lang="en-US" sz="1150" dirty="0">
+                <a:solidFill>
+                  <a:srgbClr val="555B66"/>
                 </a:solidFill>
                 <a:latin typeface="Montserrat" pitchFamily="34" charset="0"/>
                 <a:ea typeface="Montserrat" pitchFamily="34" charset="-122"/>
                 <a:cs typeface="Montserrat" pitchFamily="34" charset="-120"/>
               </a:rPr>
-              <a:t>Гейт, що триває пів години   </a:t>
-            </a:r>
-            <a:pPr indent="0" marL="0">
-              <a:buNone/>
-            </a:pPr>
-            <a:r>
-              <a:rPr lang="en-US" sz="1150" dirty="0">
-                <a:solidFill>
-                  <a:srgbClr val="555B66"/>
-                </a:solidFill>
-                <a:latin typeface="Montserrat" pitchFamily="34" charset="0"/>
-                <a:ea typeface="Montserrat" pitchFamily="34" charset="-122"/>
-                <a:cs typeface="Montserrat" pitchFamily="34" charset="-120"/>
-              </a:rPr>
               <a:t>обхід стає раціональним рішенням</a:t>
             </a:r>
             <a:endParaRPr lang="en-US" sz="1300" dirty="0"/>
@@ -13774,7 +13781,7 @@
       </p:sp>
       <p:sp>
         <p:nvSpPr>
-          <p:cNvPr id="18" name="Shape 15"/>
+          <p:cNvPr id="22" name="Shape 18"/>
           <p:cNvSpPr/>
           <p:nvPr/>
         </p:nvSpPr>
@@ -13801,7 +13808,7 @@
       </p:sp>
       <p:sp>
         <p:nvSpPr>
-          <p:cNvPr id="19" name="Shape 16"/>
+          <p:cNvPr id="23" name="Shape 19"/>
           <p:cNvSpPr/>
           <p:nvPr/>
         </p:nvSpPr>
@@ -13821,14 +13828,54 @@
       </p:sp>
       <p:sp>
         <p:nvSpPr>
-          <p:cNvPr id="20" name="Text 17"/>
-          <p:cNvSpPr/>
-          <p:nvPr/>
-        </p:nvSpPr>
-        <p:spPr>
-          <a:xfrm>
-            <a:off x="768096" y="4562856"/>
-            <a:ext cx="384048" cy="384048"/>
+          <p:cNvPr id="24" name="Shape 20"/>
+          <p:cNvSpPr/>
+          <p:nvPr/>
+        </p:nvSpPr>
+        <p:spPr>
+          <a:xfrm rot="2700000">
+            <a:off x="871789" y="4739134"/>
+            <a:ext cx="176662" cy="31492"/>
+          </a:xfrm>
+          <a:prstGeom prst="rect">
+            <a:avLst/>
+          </a:prstGeom>
+          <a:solidFill>
+            <a:srgbClr val="C62A2A"/>
+          </a:solidFill>
+          <a:ln/>
+        </p:spPr>
+      </p:sp>
+      <p:sp>
+        <p:nvSpPr>
+          <p:cNvPr id="25" name="Shape 21"/>
+          <p:cNvSpPr/>
+          <p:nvPr/>
+        </p:nvSpPr>
+        <p:spPr>
+          <a:xfrm rot="-2700000">
+            <a:off x="871789" y="4739134"/>
+            <a:ext cx="176662" cy="31492"/>
+          </a:xfrm>
+          <a:prstGeom prst="rect">
+            <a:avLst/>
+          </a:prstGeom>
+          <a:solidFill>
+            <a:srgbClr val="C62A2A"/>
+          </a:solidFill>
+          <a:ln/>
+        </p:spPr>
+      </p:sp>
+      <p:sp>
+        <p:nvSpPr>
+          <p:cNvPr id="26" name="Text 22"/>
+          <p:cNvSpPr/>
+          <p:nvPr/>
+        </p:nvSpPr>
+        <p:spPr>
+          <a:xfrm>
+            <a:off x="1298448" y="4389120"/>
+            <a:ext cx="10149840" cy="731520"/>
           </a:xfrm>
           <a:prstGeom prst="rect">
             <a:avLst/>
@@ -13840,71 +13887,32 @@
           <a:bodyPr wrap="square" lIns="0" tIns="0" rIns="0" bIns="0" rtlCol="0" anchor="ctr"/>
           <a:lstStyle/>
           <a:p>
-            <a:pPr algn="ctr" indent="0" marL="0">
+            <a:pPr indent="0" marL="0">
               <a:buNone/>
             </a:pPr>
             <a:r>
               <a:rPr lang="en-US" sz="1300" b="1" dirty="0">
                 <a:solidFill>
-                  <a:srgbClr val="C62A2A"/>
+                  <a:srgbClr val="111318"/>
                 </a:solidFill>
                 <a:latin typeface="Montserrat" pitchFamily="34" charset="0"/>
                 <a:ea typeface="Montserrat" pitchFamily="34" charset="-122"/>
                 <a:cs typeface="Montserrat" pitchFamily="34" charset="-120"/>
               </a:rPr>
-              <a:t>✕</a:t>
-            </a:r>
-            <a:endParaRPr lang="en-US" sz="1300" dirty="0"/>
-          </a:p>
-        </p:txBody>
-      </p:sp>
-      <p:sp>
-        <p:nvSpPr>
-          <p:cNvPr id="21" name="Text 18"/>
-          <p:cNvSpPr/>
-          <p:nvPr/>
-        </p:nvSpPr>
-        <p:spPr>
-          <a:xfrm>
-            <a:off x="1298448" y="4389120"/>
-            <a:ext cx="10149840" cy="731520"/>
-          </a:xfrm>
-          <a:prstGeom prst="rect">
-            <a:avLst/>
-          </a:prstGeom>
-          <a:noFill/>
-          <a:ln/>
-        </p:spPr>
-        <p:txBody>
-          <a:bodyPr wrap="square" lIns="0" tIns="0" rIns="0" bIns="0" rtlCol="0" anchor="ctr"/>
-          <a:lstStyle/>
-          <a:p>
-            <a:pPr indent="0" marL="0">
-              <a:buNone/>
-            </a:pPr>
-            <a:r>
-              <a:rPr lang="en-US" sz="1300" b="1" dirty="0">
-                <a:solidFill>
-                  <a:srgbClr val="111318"/>
+              <a:t>Feature flag без плану прибирання   </a:t>
+            </a:r>
+            <a:pPr indent="0" marL="0">
+              <a:buNone/>
+            </a:pPr>
+            <a:r>
+              <a:rPr lang="en-US" sz="1150" dirty="0">
+                <a:solidFill>
+                  <a:srgbClr val="555B66"/>
                 </a:solidFill>
                 <a:latin typeface="Montserrat" pitchFamily="34" charset="0"/>
                 <a:ea typeface="Montserrat" pitchFamily="34" charset="-122"/>
                 <a:cs typeface="Montserrat" pitchFamily="34" charset="-120"/>
               </a:rPr>
-              <a:t>Feature flag без плану прибирання   </a:t>
-            </a:r>
-            <a:pPr indent="0" marL="0">
-              <a:buNone/>
-            </a:pPr>
-            <a:r>
-              <a:rPr lang="en-US" sz="1150" dirty="0">
-                <a:solidFill>
-                  <a:srgbClr val="555B66"/>
-                </a:solidFill>
-                <a:latin typeface="Montserrat" pitchFamily="34" charset="0"/>
-                <a:ea typeface="Montserrat" pitchFamily="34" charset="-122"/>
-                <a:cs typeface="Montserrat" pitchFamily="34" charset="-120"/>
-              </a:rPr>
               <a:t>кладовище мертвих гілок через рік</a:t>
             </a:r>
             <a:endParaRPr lang="en-US" sz="1300" dirty="0"/>
@@ -13913,7 +13921,7 @@
       </p:sp>
       <p:sp>
         <p:nvSpPr>
-          <p:cNvPr id="22" name="Shape 19"/>
+          <p:cNvPr id="27" name="Shape 23"/>
           <p:cNvSpPr/>
           <p:nvPr/>
         </p:nvSpPr>
@@ -13940,7 +13948,7 @@
       </p:sp>
       <p:sp>
         <p:nvSpPr>
-          <p:cNvPr id="23" name="Shape 20"/>
+          <p:cNvPr id="28" name="Shape 24"/>
           <p:cNvSpPr/>
           <p:nvPr/>
         </p:nvSpPr>
@@ -13960,46 +13968,47 @@
       </p:sp>
       <p:sp>
         <p:nvSpPr>
-          <p:cNvPr id="24" name="Text 21"/>
-          <p:cNvSpPr/>
-          <p:nvPr/>
-        </p:nvSpPr>
-        <p:spPr>
-          <a:xfrm>
-            <a:off x="768096" y="5431536"/>
-            <a:ext cx="384048" cy="384048"/>
-          </a:xfrm>
-          <a:prstGeom prst="rect">
-            <a:avLst/>
-          </a:prstGeom>
-          <a:noFill/>
-          <a:ln/>
-        </p:spPr>
-        <p:txBody>
-          <a:bodyPr wrap="square" lIns="0" tIns="0" rIns="0" bIns="0" rtlCol="0" anchor="ctr"/>
-          <a:lstStyle/>
-          <a:p>
-            <a:pPr algn="ctr" indent="0" marL="0">
-              <a:buNone/>
-            </a:pPr>
-            <a:r>
-              <a:rPr lang="en-US" sz="1300" b="1" dirty="0">
-                <a:solidFill>
-                  <a:srgbClr val="C62A2A"/>
-                </a:solidFill>
-                <a:latin typeface="Montserrat" pitchFamily="34" charset="0"/>
-                <a:ea typeface="Montserrat" pitchFamily="34" charset="-122"/>
-                <a:cs typeface="Montserrat" pitchFamily="34" charset="-120"/>
-              </a:rPr>
-              <a:t>✕</a:t>
-            </a:r>
-            <a:endParaRPr lang="en-US" sz="1300" dirty="0"/>
-          </a:p>
-        </p:txBody>
-      </p:sp>
-      <p:sp>
-        <p:nvSpPr>
-          <p:cNvPr id="25" name="Text 22"/>
+          <p:cNvPr id="29" name="Shape 25"/>
+          <p:cNvSpPr/>
+          <p:nvPr/>
+        </p:nvSpPr>
+        <p:spPr>
+          <a:xfrm rot="2700000">
+            <a:off x="871789" y="5607814"/>
+            <a:ext cx="176662" cy="31492"/>
+          </a:xfrm>
+          <a:prstGeom prst="rect">
+            <a:avLst/>
+          </a:prstGeom>
+          <a:solidFill>
+            <a:srgbClr val="C62A2A"/>
+          </a:solidFill>
+          <a:ln/>
+        </p:spPr>
+      </p:sp>
+      <p:sp>
+        <p:nvSpPr>
+          <p:cNvPr id="30" name="Shape 26"/>
+          <p:cNvSpPr/>
+          <p:nvPr/>
+        </p:nvSpPr>
+        <p:spPr>
+          <a:xfrm rot="-2700000">
+            <a:off x="871789" y="5607814"/>
+            <a:ext cx="176662" cy="31492"/>
+          </a:xfrm>
+          <a:prstGeom prst="rect">
+            <a:avLst/>
+          </a:prstGeom>
+          <a:solidFill>
+            <a:srgbClr val="C62A2A"/>
+          </a:solidFill>
+          <a:ln/>
+        </p:spPr>
+      </p:sp>
+      <p:sp>
+        <p:nvSpPr>
+          <p:cNvPr id="31" name="Text 27"/>
           <p:cNvSpPr/>
           <p:nvPr/>
         </p:nvSpPr>
@@ -14256,7 +14265,7 @@
       </p:pic>
       <p:sp>
         <p:nvSpPr>
-          <p:cNvPr id="6" name="Shape 3"/>
+          <p:cNvPr id="7" name="Shape 3"/>
           <p:cNvSpPr/>
           <p:nvPr/>
         </p:nvSpPr>
@@ -14283,7 +14292,7 @@
       </p:sp>
       <p:sp>
         <p:nvSpPr>
-          <p:cNvPr id="7" name="Text 4"/>
+          <p:cNvPr id="8" name="Text 4"/>
           <p:cNvSpPr/>
           <p:nvPr/>
         </p:nvSpPr>
@@ -14322,7 +14331,7 @@
       </p:sp>
       <p:sp>
         <p:nvSpPr>
-          <p:cNvPr id="8" name="Text 5"/>
+          <p:cNvPr id="9" name="Text 5"/>
           <p:cNvSpPr/>
           <p:nvPr/>
         </p:nvSpPr>
@@ -14422,7 +14431,7 @@
       </p:sp>
       <p:sp>
         <p:nvSpPr>
-          <p:cNvPr id="9" name="Shape 6"/>
+          <p:cNvPr id="10" name="Shape 6"/>
           <p:cNvSpPr/>
           <p:nvPr/>
         </p:nvSpPr>
@@ -14444,7 +14453,7 @@
       </p:sp>
       <p:sp>
         <p:nvSpPr>
-          <p:cNvPr id="10" name="Text 7"/>
+          <p:cNvPr id="11" name="Text 7"/>
           <p:cNvSpPr/>
           <p:nvPr/>
         </p:nvSpPr>
@@ -14483,7 +14492,7 @@
       </p:sp>
       <p:sp>
         <p:nvSpPr>
-          <p:cNvPr id="11" name="Text 8"/>
+          <p:cNvPr id="12" name="Text 8"/>
           <p:cNvSpPr/>
           <p:nvPr/>
         </p:nvSpPr>
@@ -14525,7 +14534,7 @@
       </p:sp>
       <p:sp>
         <p:nvSpPr>
-          <p:cNvPr id="12" name="Shape 9"/>
+          <p:cNvPr id="13" name="Shape 9"/>
           <p:cNvSpPr/>
           <p:nvPr/>
         </p:nvSpPr>
@@ -14552,7 +14561,7 @@
       </p:sp>
       <p:sp>
         <p:nvSpPr>
-          <p:cNvPr id="13" name="Text 10"/>
+          <p:cNvPr id="14" name="Text 10"/>
           <p:cNvSpPr/>
           <p:nvPr/>
         </p:nvSpPr>
@@ -14591,7 +14600,7 @@
       </p:sp>
       <p:sp>
         <p:nvSpPr>
-          <p:cNvPr id="14" name="Text 11"/>
+          <p:cNvPr id="15" name="Text 11"/>
           <p:cNvSpPr/>
           <p:nvPr/>
         </p:nvSpPr>
@@ -15357,7 +15366,7 @@
       </p:pic>
       <p:sp>
         <p:nvSpPr>
-          <p:cNvPr id="6" name="Shape 3"/>
+          <p:cNvPr id="7" name="Shape 3"/>
           <p:cNvSpPr/>
           <p:nvPr/>
         </p:nvSpPr>
@@ -15384,7 +15393,7 @@
       </p:sp>
       <p:sp>
         <p:nvSpPr>
-          <p:cNvPr id="7" name="Shape 4"/>
+          <p:cNvPr id="8" name="Shape 4"/>
           <p:cNvSpPr/>
           <p:nvPr/>
         </p:nvSpPr>
@@ -15404,7 +15413,7 @@
       </p:sp>
       <p:sp>
         <p:nvSpPr>
-          <p:cNvPr id="8" name="Text 5"/>
+          <p:cNvPr id="9" name="Text 5"/>
           <p:cNvSpPr/>
           <p:nvPr/>
         </p:nvSpPr>
@@ -15443,7 +15452,7 @@
       </p:sp>
       <p:sp>
         <p:nvSpPr>
-          <p:cNvPr id="9" name="Text 6"/>
+          <p:cNvPr id="10" name="Text 6"/>
           <p:cNvSpPr/>
           <p:nvPr/>
         </p:nvSpPr>
@@ -15482,7 +15491,7 @@
       </p:sp>
       <p:sp>
         <p:nvSpPr>
-          <p:cNvPr id="10" name="Shape 7"/>
+          <p:cNvPr id="11" name="Shape 7"/>
           <p:cNvSpPr/>
           <p:nvPr/>
         </p:nvSpPr>
@@ -15509,7 +15518,7 @@
       </p:sp>
       <p:sp>
         <p:nvSpPr>
-          <p:cNvPr id="11" name="Shape 8"/>
+          <p:cNvPr id="12" name="Shape 8"/>
           <p:cNvSpPr/>
           <p:nvPr/>
         </p:nvSpPr>
@@ -15529,7 +15538,7 @@
       </p:sp>
       <p:sp>
         <p:nvSpPr>
-          <p:cNvPr id="12" name="Text 9"/>
+          <p:cNvPr id="13" name="Text 9"/>
           <p:cNvSpPr/>
           <p:nvPr/>
         </p:nvSpPr>
@@ -15568,7 +15577,7 @@
       </p:sp>
       <p:sp>
         <p:nvSpPr>
-          <p:cNvPr id="13" name="Text 10"/>
+          <p:cNvPr id="14" name="Text 10"/>
           <p:cNvSpPr/>
           <p:nvPr/>
         </p:nvSpPr>
@@ -15607,7 +15616,7 @@
       </p:sp>
       <p:sp>
         <p:nvSpPr>
-          <p:cNvPr id="14" name="Shape 11"/>
+          <p:cNvPr id="15" name="Shape 11"/>
           <p:cNvSpPr/>
           <p:nvPr/>
         </p:nvSpPr>
@@ -15634,7 +15643,7 @@
       </p:sp>
       <p:sp>
         <p:nvSpPr>
-          <p:cNvPr id="15" name="Shape 12"/>
+          <p:cNvPr id="16" name="Shape 12"/>
           <p:cNvSpPr/>
           <p:nvPr/>
         </p:nvSpPr>
@@ -15654,7 +15663,7 @@
       </p:sp>
       <p:sp>
         <p:nvSpPr>
-          <p:cNvPr id="16" name="Text 13"/>
+          <p:cNvPr id="17" name="Text 13"/>
           <p:cNvSpPr/>
           <p:nvPr/>
         </p:nvSpPr>
@@ -15693,7 +15702,7 @@
       </p:sp>
       <p:sp>
         <p:nvSpPr>
-          <p:cNvPr id="17" name="Text 14"/>
+          <p:cNvPr id="18" name="Text 14"/>
           <p:cNvSpPr/>
           <p:nvPr/>
         </p:nvSpPr>
@@ -15732,7 +15741,7 @@
       </p:sp>
       <p:sp>
         <p:nvSpPr>
-          <p:cNvPr id="18" name="Shape 15"/>
+          <p:cNvPr id="19" name="Shape 15"/>
           <p:cNvSpPr/>
           <p:nvPr/>
         </p:nvSpPr>
@@ -15759,7 +15768,7 @@
       </p:sp>
       <p:sp>
         <p:nvSpPr>
-          <p:cNvPr id="19" name="Shape 16"/>
+          <p:cNvPr id="20" name="Shape 16"/>
           <p:cNvSpPr/>
           <p:nvPr/>
         </p:nvSpPr>
@@ -15779,7 +15788,7 @@
       </p:sp>
       <p:sp>
         <p:nvSpPr>
-          <p:cNvPr id="20" name="Text 17"/>
+          <p:cNvPr id="21" name="Text 17"/>
           <p:cNvSpPr/>
           <p:nvPr/>
         </p:nvSpPr>
@@ -15818,7 +15827,7 @@
       </p:sp>
       <p:sp>
         <p:nvSpPr>
-          <p:cNvPr id="21" name="Text 18"/>
+          <p:cNvPr id="22" name="Text 18"/>
           <p:cNvSpPr/>
           <p:nvPr/>
         </p:nvSpPr>
@@ -15857,7 +15866,7 @@
       </p:sp>
       <p:sp>
         <p:nvSpPr>
-          <p:cNvPr id="22" name="Shape 19"/>
+          <p:cNvPr id="23" name="Shape 19"/>
           <p:cNvSpPr/>
           <p:nvPr/>
         </p:nvSpPr>
@@ -15884,7 +15893,7 @@
       </p:sp>
       <p:sp>
         <p:nvSpPr>
-          <p:cNvPr id="23" name="Shape 20"/>
+          <p:cNvPr id="24" name="Shape 20"/>
           <p:cNvSpPr/>
           <p:nvPr/>
         </p:nvSpPr>
@@ -15904,7 +15913,7 @@
       </p:sp>
       <p:sp>
         <p:nvSpPr>
-          <p:cNvPr id="24" name="Text 21"/>
+          <p:cNvPr id="25" name="Text 21"/>
           <p:cNvSpPr/>
           <p:nvPr/>
         </p:nvSpPr>
@@ -15943,7 +15952,7 @@
       </p:sp>
       <p:sp>
         <p:nvSpPr>
-          <p:cNvPr id="25" name="Text 22"/>
+          <p:cNvPr id="26" name="Text 22"/>
           <p:cNvSpPr/>
           <p:nvPr/>
         </p:nvSpPr>
@@ -15982,7 +15991,7 @@
       </p:sp>
       <p:sp>
         <p:nvSpPr>
-          <p:cNvPr id="26" name="Shape 23"/>
+          <p:cNvPr id="27" name="Shape 23"/>
           <p:cNvSpPr/>
           <p:nvPr/>
         </p:nvSpPr>
@@ -16009,7 +16018,7 @@
       </p:sp>
       <p:sp>
         <p:nvSpPr>
-          <p:cNvPr id="27" name="Shape 24"/>
+          <p:cNvPr id="28" name="Shape 24"/>
           <p:cNvSpPr/>
           <p:nvPr/>
         </p:nvSpPr>
@@ -16029,7 +16038,7 @@
       </p:sp>
       <p:sp>
         <p:nvSpPr>
-          <p:cNvPr id="28" name="Text 25"/>
+          <p:cNvPr id="29" name="Text 25"/>
           <p:cNvSpPr/>
           <p:nvPr/>
         </p:nvSpPr>
@@ -16068,7 +16077,7 @@
       </p:sp>
       <p:sp>
         <p:nvSpPr>
-          <p:cNvPr id="29" name="Text 26"/>
+          <p:cNvPr id="30" name="Text 26"/>
           <p:cNvSpPr/>
           <p:nvPr/>
         </p:nvSpPr>
@@ -16107,7 +16116,7 @@
       </p:sp>
       <p:sp>
         <p:nvSpPr>
-          <p:cNvPr id="30" name="Shape 27"/>
+          <p:cNvPr id="31" name="Shape 27"/>
           <p:cNvSpPr/>
           <p:nvPr/>
         </p:nvSpPr>
@@ -16134,7 +16143,7 @@
       </p:sp>
       <p:sp>
         <p:nvSpPr>
-          <p:cNvPr id="31" name="Shape 28"/>
+          <p:cNvPr id="32" name="Shape 28"/>
           <p:cNvSpPr/>
           <p:nvPr/>
         </p:nvSpPr>
@@ -16154,7 +16163,7 @@
       </p:sp>
       <p:sp>
         <p:nvSpPr>
-          <p:cNvPr id="32" name="Text 29"/>
+          <p:cNvPr id="33" name="Text 29"/>
           <p:cNvSpPr/>
           <p:nvPr/>
         </p:nvSpPr>
@@ -16193,7 +16202,7 @@
       </p:sp>
       <p:sp>
         <p:nvSpPr>
-          <p:cNvPr id="33" name="Text 30"/>
+          <p:cNvPr id="34" name="Text 30"/>
           <p:cNvSpPr/>
           <p:nvPr/>
         </p:nvSpPr>
@@ -16232,7 +16241,7 @@
       </p:sp>
       <p:sp>
         <p:nvSpPr>
-          <p:cNvPr id="34" name="Shape 31"/>
+          <p:cNvPr id="35" name="Shape 31"/>
           <p:cNvSpPr/>
           <p:nvPr/>
         </p:nvSpPr>
@@ -16254,7 +16263,7 @@
       </p:sp>
       <p:sp>
         <p:nvSpPr>
-          <p:cNvPr id="35" name="Shape 32"/>
+          <p:cNvPr id="36" name="Shape 32"/>
           <p:cNvSpPr/>
           <p:nvPr/>
         </p:nvSpPr>
@@ -16274,7 +16283,7 @@
       </p:sp>
       <p:sp>
         <p:nvSpPr>
-          <p:cNvPr id="36" name="Text 33"/>
+          <p:cNvPr id="37" name="Text 33"/>
           <p:cNvSpPr/>
           <p:nvPr/>
         </p:nvSpPr>
@@ -16313,7 +16322,7 @@
       </p:sp>
       <p:sp>
         <p:nvSpPr>
-          <p:cNvPr id="37" name="Text 34"/>
+          <p:cNvPr id="38" name="Text 34"/>
           <p:cNvSpPr/>
           <p:nvPr/>
         </p:nvSpPr>
@@ -16352,7 +16361,7 @@
       </p:sp>
       <p:sp>
         <p:nvSpPr>
-          <p:cNvPr id="38" name="Shape 35"/>
+          <p:cNvPr id="39" name="Shape 35"/>
           <p:cNvSpPr/>
           <p:nvPr/>
         </p:nvSpPr>
@@ -16379,7 +16388,7 @@
       </p:sp>
       <p:sp>
         <p:nvSpPr>
-          <p:cNvPr id="39" name="Shape 36"/>
+          <p:cNvPr id="40" name="Shape 36"/>
           <p:cNvSpPr/>
           <p:nvPr/>
         </p:nvSpPr>
@@ -16399,7 +16408,7 @@
       </p:sp>
       <p:sp>
         <p:nvSpPr>
-          <p:cNvPr id="40" name="Text 37"/>
+          <p:cNvPr id="41" name="Text 37"/>
           <p:cNvSpPr/>
           <p:nvPr/>
         </p:nvSpPr>
@@ -16438,7 +16447,7 @@
       </p:sp>
       <p:sp>
         <p:nvSpPr>
-          <p:cNvPr id="41" name="Text 38"/>
+          <p:cNvPr id="42" name="Text 38"/>
           <p:cNvSpPr/>
           <p:nvPr/>
         </p:nvSpPr>
@@ -16477,7 +16486,7 @@
       </p:sp>
       <p:sp>
         <p:nvSpPr>
-          <p:cNvPr id="42" name="Shape 39"/>
+          <p:cNvPr id="43" name="Shape 39"/>
           <p:cNvSpPr/>
           <p:nvPr/>
         </p:nvSpPr>
@@ -16504,7 +16513,7 @@
       </p:sp>
       <p:sp>
         <p:nvSpPr>
-          <p:cNvPr id="43" name="Shape 40"/>
+          <p:cNvPr id="44" name="Shape 40"/>
           <p:cNvSpPr/>
           <p:nvPr/>
         </p:nvSpPr>
@@ -16524,7 +16533,7 @@
       </p:sp>
       <p:sp>
         <p:nvSpPr>
-          <p:cNvPr id="44" name="Text 41"/>
+          <p:cNvPr id="45" name="Text 41"/>
           <p:cNvSpPr/>
           <p:nvPr/>
         </p:nvSpPr>
@@ -16563,7 +16572,7 @@
       </p:sp>
       <p:sp>
         <p:nvSpPr>
-          <p:cNvPr id="45" name="Text 42"/>
+          <p:cNvPr id="46" name="Text 42"/>
           <p:cNvSpPr/>
           <p:nvPr/>
         </p:nvSpPr>
@@ -16602,7 +16611,7 @@
       </p:sp>
       <p:sp>
         <p:nvSpPr>
-          <p:cNvPr id="46" name="Shape 43"/>
+          <p:cNvPr id="47" name="Shape 43"/>
           <p:cNvSpPr/>
           <p:nvPr/>
         </p:nvSpPr>
@@ -16629,7 +16638,7 @@
       </p:sp>
       <p:sp>
         <p:nvSpPr>
-          <p:cNvPr id="47" name="Shape 44"/>
+          <p:cNvPr id="48" name="Shape 44"/>
           <p:cNvSpPr/>
           <p:nvPr/>
         </p:nvSpPr>
@@ -16649,7 +16658,7 @@
       </p:sp>
       <p:sp>
         <p:nvSpPr>
-          <p:cNvPr id="48" name="Text 45"/>
+          <p:cNvPr id="49" name="Text 45"/>
           <p:cNvSpPr/>
           <p:nvPr/>
         </p:nvSpPr>
@@ -16688,7 +16697,7 @@
       </p:sp>
       <p:sp>
         <p:nvSpPr>
-          <p:cNvPr id="49" name="Text 46"/>
+          <p:cNvPr id="50" name="Text 46"/>
           <p:cNvSpPr/>
           <p:nvPr/>
         </p:nvSpPr>
@@ -16727,7 +16736,7 @@
       </p:sp>
       <p:sp>
         <p:nvSpPr>
-          <p:cNvPr id="50" name="Shape 47"/>
+          <p:cNvPr id="51" name="Shape 47"/>
           <p:cNvSpPr/>
           <p:nvPr/>
         </p:nvSpPr>
@@ -16754,7 +16763,7 @@
       </p:sp>
       <p:sp>
         <p:nvSpPr>
-          <p:cNvPr id="51" name="Text 48"/>
+          <p:cNvPr id="52" name="Text 48"/>
           <p:cNvSpPr/>
           <p:nvPr/>
         </p:nvSpPr>
@@ -17042,7 +17051,7 @@
       </p:pic>
       <p:sp>
         <p:nvSpPr>
-          <p:cNvPr id="7" name="Shape 4"/>
+          <p:cNvPr id="8" name="Shape 4"/>
           <p:cNvSpPr/>
           <p:nvPr/>
         </p:nvSpPr>
@@ -17069,7 +17078,7 @@
       </p:sp>
       <p:sp>
         <p:nvSpPr>
-          <p:cNvPr id="8" name="Text 5"/>
+          <p:cNvPr id="9" name="Text 5"/>
           <p:cNvSpPr/>
           <p:nvPr/>
         </p:nvSpPr>
@@ -17108,7 +17117,7 @@
       </p:sp>
       <p:sp>
         <p:nvSpPr>
-          <p:cNvPr id="9" name="Text 6"/>
+          <p:cNvPr id="10" name="Text 6"/>
           <p:cNvSpPr/>
           <p:nvPr/>
         </p:nvSpPr>
@@ -17150,7 +17159,7 @@
       </p:sp>
       <p:sp>
         <p:nvSpPr>
-          <p:cNvPr id="10" name="Shape 7"/>
+          <p:cNvPr id="11" name="Shape 7"/>
           <p:cNvSpPr/>
           <p:nvPr/>
         </p:nvSpPr>
@@ -17177,7 +17186,7 @@
       </p:sp>
       <p:sp>
         <p:nvSpPr>
-          <p:cNvPr id="11" name="Text 8"/>
+          <p:cNvPr id="12" name="Text 8"/>
           <p:cNvSpPr/>
           <p:nvPr/>
         </p:nvSpPr>
@@ -17216,7 +17225,7 @@
       </p:sp>
       <p:sp>
         <p:nvSpPr>
-          <p:cNvPr id="12" name="Text 9"/>
+          <p:cNvPr id="13" name="Text 9"/>
           <p:cNvSpPr/>
           <p:nvPr/>
         </p:nvSpPr>
@@ -17258,7 +17267,7 @@
       </p:sp>
       <p:sp>
         <p:nvSpPr>
-          <p:cNvPr id="13" name="Shape 10"/>
+          <p:cNvPr id="14" name="Shape 10"/>
           <p:cNvSpPr/>
           <p:nvPr/>
         </p:nvSpPr>
@@ -17285,7 +17294,7 @@
       </p:sp>
       <p:sp>
         <p:nvSpPr>
-          <p:cNvPr id="14" name="Text 11"/>
+          <p:cNvPr id="15" name="Text 11"/>
           <p:cNvSpPr/>
           <p:nvPr/>
         </p:nvSpPr>
@@ -17324,7 +17333,7 @@
       </p:sp>
       <p:sp>
         <p:nvSpPr>
-          <p:cNvPr id="15" name="Text 12"/>
+          <p:cNvPr id="16" name="Text 12"/>
           <p:cNvSpPr/>
           <p:nvPr/>
         </p:nvSpPr>
@@ -17366,7 +17375,7 @@
       </p:sp>
       <p:sp>
         <p:nvSpPr>
-          <p:cNvPr id="16" name="Shape 13"/>
+          <p:cNvPr id="17" name="Shape 13"/>
           <p:cNvSpPr/>
           <p:nvPr/>
         </p:nvSpPr>
@@ -17393,7 +17402,7 @@
       </p:sp>
       <p:sp>
         <p:nvSpPr>
-          <p:cNvPr id="17" name="Text 14"/>
+          <p:cNvPr id="18" name="Text 14"/>
           <p:cNvSpPr/>
           <p:nvPr/>
         </p:nvSpPr>
@@ -17432,7 +17441,7 @@
       </p:sp>
       <p:sp>
         <p:nvSpPr>
-          <p:cNvPr id="18" name="Text 15"/>
+          <p:cNvPr id="19" name="Text 15"/>
           <p:cNvSpPr/>
           <p:nvPr/>
         </p:nvSpPr>
@@ -17474,7 +17483,7 @@
       </p:sp>
       <p:sp>
         <p:nvSpPr>
-          <p:cNvPr id="19" name="Shape 16"/>
+          <p:cNvPr id="20" name="Shape 16"/>
           <p:cNvSpPr/>
           <p:nvPr/>
         </p:nvSpPr>
@@ -17501,7 +17510,7 @@
       </p:sp>
       <p:sp>
         <p:nvSpPr>
-          <p:cNvPr id="20" name="Text 17"/>
+          <p:cNvPr id="21" name="Text 17"/>
           <p:cNvSpPr/>
           <p:nvPr/>
         </p:nvSpPr>
@@ -17540,7 +17549,7 @@
       </p:sp>
       <p:sp>
         <p:nvSpPr>
-          <p:cNvPr id="21" name="Text 18"/>
+          <p:cNvPr id="22" name="Text 18"/>
           <p:cNvSpPr/>
           <p:nvPr/>
         </p:nvSpPr>
@@ -17582,7 +17591,7 @@
       </p:sp>
       <p:sp>
         <p:nvSpPr>
-          <p:cNvPr id="22" name="Shape 19"/>
+          <p:cNvPr id="23" name="Shape 19"/>
           <p:cNvSpPr/>
           <p:nvPr/>
         </p:nvSpPr>
@@ -17609,7 +17618,7 @@
       </p:sp>
       <p:sp>
         <p:nvSpPr>
-          <p:cNvPr id="23" name="Text 20"/>
+          <p:cNvPr id="24" name="Text 20"/>
           <p:cNvSpPr/>
           <p:nvPr/>
         </p:nvSpPr>
@@ -17648,7 +17657,7 @@
       </p:sp>
       <p:sp>
         <p:nvSpPr>
-          <p:cNvPr id="24" name="Text 21"/>
+          <p:cNvPr id="25" name="Text 21"/>
           <p:cNvSpPr/>
           <p:nvPr/>
         </p:nvSpPr>
@@ -17690,7 +17699,7 @@
       </p:sp>
       <p:sp>
         <p:nvSpPr>
-          <p:cNvPr id="25" name="Shape 22"/>
+          <p:cNvPr id="26" name="Shape 22"/>
           <p:cNvSpPr/>
           <p:nvPr/>
         </p:nvSpPr>
@@ -17717,7 +17726,7 @@
       </p:sp>
       <p:sp>
         <p:nvSpPr>
-          <p:cNvPr id="26" name="Text 23"/>
+          <p:cNvPr id="27" name="Text 23"/>
           <p:cNvSpPr/>
           <p:nvPr/>
         </p:nvSpPr>
@@ -17923,7 +17932,7 @@
         </p:nvSpPr>
         <p:spPr>
           <a:xfrm>
-            <a:off x="1280160" y="1024128"/>
+            <a:off x="1280160" y="1193140"/>
             <a:ext cx="777240" cy="256032"/>
           </a:xfrm>
           <a:prstGeom prst="roundRect">
@@ -17945,7 +17954,7 @@
         </p:nvSpPr>
         <p:spPr>
           <a:xfrm>
-            <a:off x="1280160" y="1024128"/>
+            <a:off x="1280160" y="1193140"/>
             <a:ext cx="777240" cy="256032"/>
           </a:xfrm>
           <a:prstGeom prst="rect">
@@ -18002,7 +18011,7 @@
       </p:pic>
       <p:sp>
         <p:nvSpPr>
-          <p:cNvPr id="7" name="Shape 4"/>
+          <p:cNvPr id="8" name="Shape 4"/>
           <p:cNvSpPr/>
           <p:nvPr/>
         </p:nvSpPr>
@@ -18024,7 +18033,7 @@
       </p:sp>
       <p:sp>
         <p:nvSpPr>
-          <p:cNvPr id="8" name="Text 5"/>
+          <p:cNvPr id="9" name="Text 5"/>
           <p:cNvSpPr/>
           <p:nvPr/>
         </p:nvSpPr>
@@ -18063,7 +18072,7 @@
       </p:sp>
       <p:sp>
         <p:nvSpPr>
-          <p:cNvPr id="9" name="Text 6"/>
+          <p:cNvPr id="10" name="Text 6"/>
           <p:cNvSpPr/>
           <p:nvPr/>
         </p:nvSpPr>
@@ -18105,7 +18114,7 @@
       </p:sp>
       <p:sp>
         <p:nvSpPr>
-          <p:cNvPr id="10" name="Shape 7"/>
+          <p:cNvPr id="11" name="Shape 7"/>
           <p:cNvSpPr/>
           <p:nvPr/>
         </p:nvSpPr>
@@ -18127,7 +18136,7 @@
       </p:sp>
       <p:sp>
         <p:nvSpPr>
-          <p:cNvPr id="11" name="Text 8"/>
+          <p:cNvPr id="12" name="Text 8"/>
           <p:cNvSpPr/>
           <p:nvPr/>
         </p:nvSpPr>
@@ -18166,7 +18175,7 @@
       </p:sp>
       <p:sp>
         <p:nvSpPr>
-          <p:cNvPr id="12" name="Text 9"/>
+          <p:cNvPr id="13" name="Text 9"/>
           <p:cNvSpPr/>
           <p:nvPr/>
         </p:nvSpPr>
@@ -18208,7 +18217,7 @@
       </p:sp>
       <p:sp>
         <p:nvSpPr>
-          <p:cNvPr id="13" name="Shape 10"/>
+          <p:cNvPr id="14" name="Shape 10"/>
           <p:cNvSpPr/>
           <p:nvPr/>
         </p:nvSpPr>
@@ -18230,7 +18239,7 @@
       </p:sp>
       <p:sp>
         <p:nvSpPr>
-          <p:cNvPr id="14" name="Text 11"/>
+          <p:cNvPr id="15" name="Text 11"/>
           <p:cNvSpPr/>
           <p:nvPr/>
         </p:nvSpPr>
@@ -18264,7 +18273,7 @@
                 <a:ea typeface="Montserrat" pitchFamily="34" charset="-122"/>
                 <a:cs typeface="Montserrat" pitchFamily="34" charset="-120"/>
               </a:rPr>
-              <a:t>Це змінює культуру: промпт остаточно стає кодом — з усіма наслідками, від рев'ю до заблокованого мержа.</a:t>
+              <a:t>Промпт остаточно стає кодом — з рев'ю і заблокованим мержем.</a:t>
             </a:r>
             <a:endParaRPr lang="en-US" sz="1300" dirty="0"/>
           </a:p>
@@ -18272,7 +18281,7 @@
       </p:sp>
       <p:sp>
         <p:nvSpPr>
-          <p:cNvPr id="15" name="Shape 12"/>
+          <p:cNvPr id="16" name="Shape 12"/>
           <p:cNvSpPr/>
           <p:nvPr/>
         </p:nvSpPr>
@@ -18294,7 +18303,7 @@
       </p:sp>
       <p:sp>
         <p:nvSpPr>
-          <p:cNvPr id="16" name="Text 13"/>
+          <p:cNvPr id="17" name="Text 13"/>
           <p:cNvSpPr/>
           <p:nvPr/>
         </p:nvSpPr>
@@ -18333,7 +18342,7 @@
       </p:sp>
       <p:sp>
         <p:nvSpPr>
-          <p:cNvPr id="17" name="Text 14"/>
+          <p:cNvPr id="18" name="Text 14"/>
           <p:cNvSpPr/>
           <p:nvPr/>
         </p:nvSpPr>
@@ -18367,7 +18376,7 @@
                 <a:ea typeface="Montserrat" pitchFamily="34" charset="-122"/>
                 <a:cs typeface="Montserrat" pitchFamily="34" charset="-120"/>
               </a:rPr>
-              <a:t>Усе, що тримається на «не забути», колись буде забуто — питання лише, наскільки дорого. Перевірки, від яких залежить прод, запускаються механізмом.</a:t>
+              <a:t>Усе, що тримається на «не забути», буде забуто. Перевірки запускає механізм.</a:t>
             </a:r>
             <a:endParaRPr lang="en-US" sz="1300" dirty="0"/>
           </a:p>
@@ -18618,7 +18627,7 @@
       </p:pic>
       <p:sp>
         <p:nvSpPr>
-          <p:cNvPr id="7" name="Shape 4"/>
+          <p:cNvPr id="8" name="Shape 4"/>
           <p:cNvSpPr/>
           <p:nvPr/>
         </p:nvSpPr>
@@ -18645,7 +18654,7 @@
       </p:sp>
       <p:sp>
         <p:nvSpPr>
-          <p:cNvPr id="8" name="Text 5"/>
+          <p:cNvPr id="9" name="Text 5"/>
           <p:cNvSpPr/>
           <p:nvPr/>
         </p:nvSpPr>
@@ -18684,7 +18693,7 @@
       </p:sp>
       <p:sp>
         <p:nvSpPr>
-          <p:cNvPr id="9" name="Shape 6"/>
+          <p:cNvPr id="10" name="Shape 6"/>
           <p:cNvSpPr/>
           <p:nvPr/>
         </p:nvSpPr>
@@ -18707,7 +18716,7 @@
       </p:sp>
       <p:sp>
         <p:nvSpPr>
-          <p:cNvPr id="10" name="Shape 7"/>
+          <p:cNvPr id="11" name="Shape 7"/>
           <p:cNvSpPr/>
           <p:nvPr/>
         </p:nvSpPr>
@@ -18727,7 +18736,7 @@
       </p:sp>
       <p:sp>
         <p:nvSpPr>
-          <p:cNvPr id="11" name="Shape 8"/>
+          <p:cNvPr id="12" name="Shape 8"/>
           <p:cNvSpPr/>
           <p:nvPr/>
         </p:nvSpPr>
@@ -18754,7 +18763,7 @@
       </p:sp>
       <p:sp>
         <p:nvSpPr>
-          <p:cNvPr id="12" name="Text 9"/>
+          <p:cNvPr id="13" name="Text 9"/>
           <p:cNvSpPr/>
           <p:nvPr/>
         </p:nvSpPr>
@@ -18793,7 +18802,7 @@
       </p:sp>
       <p:sp>
         <p:nvSpPr>
-          <p:cNvPr id="13" name="Shape 10"/>
+          <p:cNvPr id="14" name="Shape 10"/>
           <p:cNvSpPr/>
           <p:nvPr/>
         </p:nvSpPr>
@@ -18816,7 +18825,7 @@
       </p:sp>
       <p:sp>
         <p:nvSpPr>
-          <p:cNvPr id="14" name="Shape 11"/>
+          <p:cNvPr id="15" name="Shape 11"/>
           <p:cNvSpPr/>
           <p:nvPr/>
         </p:nvSpPr>
@@ -18836,7 +18845,7 @@
       </p:sp>
       <p:sp>
         <p:nvSpPr>
-          <p:cNvPr id="15" name="Shape 12"/>
+          <p:cNvPr id="16" name="Shape 12"/>
           <p:cNvSpPr/>
           <p:nvPr/>
         </p:nvSpPr>
@@ -18863,7 +18872,7 @@
       </p:sp>
       <p:sp>
         <p:nvSpPr>
-          <p:cNvPr id="16" name="Text 13"/>
+          <p:cNvPr id="17" name="Text 13"/>
           <p:cNvSpPr/>
           <p:nvPr/>
         </p:nvSpPr>
@@ -18902,7 +18911,7 @@
       </p:sp>
       <p:sp>
         <p:nvSpPr>
-          <p:cNvPr id="17" name="Shape 14"/>
+          <p:cNvPr id="18" name="Shape 14"/>
           <p:cNvSpPr/>
           <p:nvPr/>
         </p:nvSpPr>
@@ -18925,7 +18934,7 @@
       </p:sp>
       <p:sp>
         <p:nvSpPr>
-          <p:cNvPr id="18" name="Shape 15"/>
+          <p:cNvPr id="19" name="Shape 15"/>
           <p:cNvSpPr/>
           <p:nvPr/>
         </p:nvSpPr>
@@ -18945,7 +18954,7 @@
       </p:sp>
       <p:sp>
         <p:nvSpPr>
-          <p:cNvPr id="19" name="Shape 16"/>
+          <p:cNvPr id="20" name="Shape 16"/>
           <p:cNvSpPr/>
           <p:nvPr/>
         </p:nvSpPr>
@@ -18967,7 +18976,7 @@
       </p:sp>
       <p:sp>
         <p:nvSpPr>
-          <p:cNvPr id="20" name="Text 17"/>
+          <p:cNvPr id="21" name="Text 17"/>
           <p:cNvSpPr/>
           <p:nvPr/>
         </p:nvSpPr>
@@ -19006,7 +19015,7 @@
       </p:sp>
       <p:sp>
         <p:nvSpPr>
-          <p:cNvPr id="21" name="Shape 18"/>
+          <p:cNvPr id="22" name="Shape 18"/>
           <p:cNvSpPr/>
           <p:nvPr/>
         </p:nvSpPr>
@@ -19029,7 +19038,7 @@
       </p:sp>
       <p:sp>
         <p:nvSpPr>
-          <p:cNvPr id="22" name="Shape 19"/>
+          <p:cNvPr id="23" name="Shape 19"/>
           <p:cNvSpPr/>
           <p:nvPr/>
         </p:nvSpPr>
@@ -19049,7 +19058,7 @@
       </p:sp>
       <p:sp>
         <p:nvSpPr>
-          <p:cNvPr id="23" name="Shape 20"/>
+          <p:cNvPr id="24" name="Shape 20"/>
           <p:cNvSpPr/>
           <p:nvPr/>
         </p:nvSpPr>
@@ -19071,7 +19080,7 @@
       </p:sp>
       <p:sp>
         <p:nvSpPr>
-          <p:cNvPr id="24" name="Text 21"/>
+          <p:cNvPr id="25" name="Text 21"/>
           <p:cNvSpPr/>
           <p:nvPr/>
         </p:nvSpPr>
@@ -19110,7 +19119,7 @@
       </p:sp>
       <p:sp>
         <p:nvSpPr>
-          <p:cNvPr id="25" name="Shape 22"/>
+          <p:cNvPr id="26" name="Shape 22"/>
           <p:cNvSpPr/>
           <p:nvPr/>
         </p:nvSpPr>
@@ -19132,7 +19141,7 @@
       </p:sp>
       <p:sp>
         <p:nvSpPr>
-          <p:cNvPr id="26" name="Text 23"/>
+          <p:cNvPr id="27" name="Text 23"/>
           <p:cNvSpPr/>
           <p:nvPr/>
         </p:nvSpPr>
@@ -19171,7 +19180,7 @@
       </p:sp>
       <p:sp>
         <p:nvSpPr>
-          <p:cNvPr id="27" name="Text 24"/>
+          <p:cNvPr id="28" name="Text 24"/>
           <p:cNvSpPr/>
           <p:nvPr/>
         </p:nvSpPr>
@@ -19213,7 +19222,7 @@
       </p:sp>
       <p:sp>
         <p:nvSpPr>
-          <p:cNvPr id="28" name="Shape 25"/>
+          <p:cNvPr id="29" name="Shape 25"/>
           <p:cNvSpPr/>
           <p:nvPr/>
         </p:nvSpPr>
@@ -19235,7 +19244,7 @@
       </p:sp>
       <p:sp>
         <p:nvSpPr>
-          <p:cNvPr id="29" name="Text 26"/>
+          <p:cNvPr id="30" name="Text 26"/>
           <p:cNvSpPr/>
           <p:nvPr/>
         </p:nvSpPr>
@@ -19274,7 +19283,7 @@
       </p:sp>
       <p:sp>
         <p:nvSpPr>
-          <p:cNvPr id="30" name="Text 27"/>
+          <p:cNvPr id="31" name="Text 27"/>
           <p:cNvSpPr/>
           <p:nvPr/>
         </p:nvSpPr>
@@ -19316,7 +19325,7 @@
       </p:sp>
       <p:sp>
         <p:nvSpPr>
-          <p:cNvPr id="31" name="Shape 28"/>
+          <p:cNvPr id="32" name="Shape 28"/>
           <p:cNvSpPr/>
           <p:nvPr/>
         </p:nvSpPr>
@@ -19343,7 +19352,7 @@
       </p:sp>
       <p:sp>
         <p:nvSpPr>
-          <p:cNvPr id="32" name="Text 29"/>
+          <p:cNvPr id="33" name="Text 29"/>
           <p:cNvSpPr/>
           <p:nvPr/>
         </p:nvSpPr>
@@ -19549,7 +19558,7 @@
         </p:nvSpPr>
         <p:spPr>
           <a:xfrm>
-            <a:off x="1280160" y="1024128"/>
+            <a:off x="1280160" y="1193140"/>
             <a:ext cx="777240" cy="256032"/>
           </a:xfrm>
           <a:prstGeom prst="roundRect">
@@ -19571,7 +19580,7 @@
         </p:nvSpPr>
         <p:spPr>
           <a:xfrm>
-            <a:off x="1280160" y="1024128"/>
+            <a:off x="1280160" y="1193140"/>
             <a:ext cx="777240" cy="256032"/>
           </a:xfrm>
           <a:prstGeom prst="rect">
@@ -19628,7 +19637,7 @@
       </p:pic>
       <p:sp>
         <p:nvSpPr>
-          <p:cNvPr id="7" name="Shape 4"/>
+          <p:cNvPr id="8" name="Shape 4"/>
           <p:cNvSpPr/>
           <p:nvPr/>
         </p:nvSpPr>
@@ -19655,7 +19664,7 @@
       </p:sp>
       <p:sp>
         <p:nvSpPr>
-          <p:cNvPr id="8" name="Text 5"/>
+          <p:cNvPr id="9" name="Text 5"/>
           <p:cNvSpPr/>
           <p:nvPr/>
         </p:nvSpPr>
@@ -19694,7 +19703,7 @@
       </p:sp>
       <p:sp>
         <p:nvSpPr>
-          <p:cNvPr id="9" name="Text 6"/>
+          <p:cNvPr id="10" name="Text 6"/>
           <p:cNvSpPr/>
           <p:nvPr/>
         </p:nvSpPr>
@@ -19733,7 +19742,7 @@
       </p:sp>
       <p:sp>
         <p:nvSpPr>
-          <p:cNvPr id="10" name="Shape 7"/>
+          <p:cNvPr id="11" name="Shape 7"/>
           <p:cNvSpPr/>
           <p:nvPr/>
         </p:nvSpPr>
@@ -19755,7 +19764,7 @@
       </p:sp>
       <p:sp>
         <p:nvSpPr>
-          <p:cNvPr id="11" name="Text 8"/>
+          <p:cNvPr id="12" name="Text 8"/>
           <p:cNvSpPr/>
           <p:nvPr/>
         </p:nvSpPr>
@@ -19794,7 +19803,7 @@
       </p:sp>
       <p:sp>
         <p:nvSpPr>
-          <p:cNvPr id="12" name="Text 9"/>
+          <p:cNvPr id="13" name="Text 9"/>
           <p:cNvSpPr/>
           <p:nvPr/>
         </p:nvSpPr>
@@ -19833,7 +19842,7 @@
       </p:sp>
       <p:sp>
         <p:nvSpPr>
-          <p:cNvPr id="13" name="Shape 10"/>
+          <p:cNvPr id="14" name="Shape 10"/>
           <p:cNvSpPr/>
           <p:nvPr/>
         </p:nvSpPr>
@@ -19855,7 +19864,7 @@
       </p:sp>
       <p:sp>
         <p:nvSpPr>
-          <p:cNvPr id="14" name="Text 11"/>
+          <p:cNvPr id="15" name="Text 11"/>
           <p:cNvSpPr/>
           <p:nvPr/>
         </p:nvSpPr>
@@ -19894,7 +19903,7 @@
       </p:sp>
       <p:sp>
         <p:nvSpPr>
-          <p:cNvPr id="15" name="Text 12"/>
+          <p:cNvPr id="16" name="Text 12"/>
           <p:cNvSpPr/>
           <p:nvPr/>
         </p:nvSpPr>
@@ -19933,7 +19942,7 @@
       </p:sp>
       <p:sp>
         <p:nvSpPr>
-          <p:cNvPr id="16" name="Shape 13"/>
+          <p:cNvPr id="17" name="Shape 13"/>
           <p:cNvSpPr/>
           <p:nvPr/>
         </p:nvSpPr>
@@ -19955,7 +19964,7 @@
       </p:sp>
       <p:sp>
         <p:nvSpPr>
-          <p:cNvPr id="17" name="Text 14"/>
+          <p:cNvPr id="18" name="Text 14"/>
           <p:cNvSpPr/>
           <p:nvPr/>
         </p:nvSpPr>
@@ -19994,7 +20003,7 @@
       </p:sp>
       <p:sp>
         <p:nvSpPr>
-          <p:cNvPr id="18" name="Text 15"/>
+          <p:cNvPr id="19" name="Text 15"/>
           <p:cNvSpPr/>
           <p:nvPr/>
         </p:nvSpPr>
@@ -20033,7 +20042,7 @@
       </p:sp>
       <p:sp>
         <p:nvSpPr>
-          <p:cNvPr id="19" name="Shape 16"/>
+          <p:cNvPr id="20" name="Shape 16"/>
           <p:cNvSpPr/>
           <p:nvPr/>
         </p:nvSpPr>
@@ -20055,7 +20064,7 @@
       </p:sp>
       <p:sp>
         <p:nvSpPr>
-          <p:cNvPr id="20" name="Text 17"/>
+          <p:cNvPr id="21" name="Text 17"/>
           <p:cNvSpPr/>
           <p:nvPr/>
         </p:nvSpPr>
@@ -20094,7 +20103,7 @@
       </p:sp>
       <p:sp>
         <p:nvSpPr>
-          <p:cNvPr id="21" name="Text 18"/>
+          <p:cNvPr id="22" name="Text 18"/>
           <p:cNvSpPr/>
           <p:nvPr/>
         </p:nvSpPr>
@@ -20128,7 +20137,7 @@
                 <a:ea typeface="Montserrat" pitchFamily="34" charset="-122"/>
                 <a:cs typeface="Montserrat" pitchFamily="34" charset="-120"/>
               </a:rPr>
-              <a:t>У списку показується назва job (eval), а не назва workflow (eval-gate). Обравши неіснуючий, ви отримаєте protection, який нічого не блокує.</a:t>
+              <a:t>У списку — назва job (eval), а не workflow. Неіснуючий чек нічого не блокує.</a:t>
             </a:r>
             <a:endParaRPr lang="en-US" sz="1300" dirty="0"/>
           </a:p>
@@ -20136,7 +20145,7 @@
       </p:sp>
       <p:sp>
         <p:nvSpPr>
-          <p:cNvPr id="22" name="Shape 19"/>
+          <p:cNvPr id="23" name="Shape 19"/>
           <p:cNvSpPr/>
           <p:nvPr/>
         </p:nvSpPr>
@@ -20158,7 +20167,7 @@
       </p:sp>
       <p:sp>
         <p:nvSpPr>
-          <p:cNvPr id="23" name="Text 20"/>
+          <p:cNvPr id="24" name="Text 20"/>
           <p:cNvSpPr/>
           <p:nvPr/>
         </p:nvSpPr>
@@ -20197,7 +20206,7 @@
       </p:sp>
       <p:sp>
         <p:nvSpPr>
-          <p:cNvPr id="24" name="Text 21"/>
+          <p:cNvPr id="25" name="Text 21"/>
           <p:cNvSpPr/>
           <p:nvPr/>
         </p:nvSpPr>
@@ -20239,7 +20248,7 @@
       </p:sp>
       <p:sp>
         <p:nvSpPr>
-          <p:cNvPr id="25" name="Shape 22"/>
+          <p:cNvPr id="26" name="Shape 22"/>
           <p:cNvSpPr/>
           <p:nvPr/>
         </p:nvSpPr>
@@ -20266,7 +20275,7 @@
       </p:sp>
       <p:sp>
         <p:nvSpPr>
-          <p:cNvPr id="26" name="Text 23"/>
+          <p:cNvPr id="27" name="Text 23"/>
           <p:cNvSpPr/>
           <p:nvPr/>
         </p:nvSpPr>
@@ -20300,7 +20309,7 @@
                 <a:ea typeface="Montserrat" pitchFamily="34" charset="-122"/>
                 <a:cs typeface="Montserrat" pitchFamily="34" charset="-120"/>
               </a:rPr>
-              <a:t>Перевірте налаштування спробою мержу червоного PR — інакше ви не знаєте, чи гейт справді гейт.</a:t>
+              <a:t>Перевірте гейт спробою мержу червоного PR.</a:t>
             </a:r>
             <a:endParaRPr lang="en-US" sz="1300" dirty="0"/>
           </a:p>
@@ -20472,7 +20481,7 @@
         </p:nvSpPr>
         <p:spPr>
           <a:xfrm>
-            <a:off x="1280160" y="1024128"/>
+            <a:off x="1280160" y="1193140"/>
             <a:ext cx="777240" cy="256032"/>
           </a:xfrm>
           <a:prstGeom prst="roundRect">
@@ -20494,7 +20503,7 @@
         </p:nvSpPr>
         <p:spPr>
           <a:xfrm>
-            <a:off x="1280160" y="1024128"/>
+            <a:off x="1280160" y="1193140"/>
             <a:ext cx="777240" cy="256032"/>
           </a:xfrm>
           <a:prstGeom prst="rect">
@@ -20551,7 +20560,7 @@
       </p:pic>
       <p:sp>
         <p:nvSpPr>
-          <p:cNvPr id="7" name="Shape 4"/>
+          <p:cNvPr id="8" name="Shape 4"/>
           <p:cNvSpPr/>
           <p:nvPr/>
         </p:nvSpPr>
@@ -20578,7 +20587,7 @@
       </p:sp>
       <p:sp>
         <p:nvSpPr>
-          <p:cNvPr id="8" name="Text 5"/>
+          <p:cNvPr id="9" name="Text 5"/>
           <p:cNvSpPr/>
           <p:nvPr/>
         </p:nvSpPr>
@@ -20928,7 +20937,7 @@
       </p:sp>
       <p:sp>
         <p:nvSpPr>
-          <p:cNvPr id="9" name="Text 6"/>
+          <p:cNvPr id="10" name="Text 6"/>
           <p:cNvSpPr/>
           <p:nvPr/>
         </p:nvSpPr>
@@ -20967,7 +20976,7 @@
       </p:sp>
       <p:sp>
         <p:nvSpPr>
-          <p:cNvPr id="10" name="Text 7"/>
+          <p:cNvPr id="11" name="Text 7"/>
           <p:cNvSpPr/>
           <p:nvPr/>
         </p:nvSpPr>
@@ -21006,7 +21015,7 @@
       </p:sp>
       <p:sp>
         <p:nvSpPr>
-          <p:cNvPr id="11" name="Text 8"/>
+          <p:cNvPr id="12" name="Text 8"/>
           <p:cNvSpPr/>
           <p:nvPr/>
         </p:nvSpPr>
@@ -21045,7 +21054,7 @@
       </p:sp>
       <p:sp>
         <p:nvSpPr>
-          <p:cNvPr id="12" name="Text 9"/>
+          <p:cNvPr id="13" name="Text 9"/>
           <p:cNvSpPr/>
           <p:nvPr/>
         </p:nvSpPr>
@@ -21084,7 +21093,7 @@
       </p:sp>
       <p:sp>
         <p:nvSpPr>
-          <p:cNvPr id="13" name="Text 10"/>
+          <p:cNvPr id="14" name="Text 10"/>
           <p:cNvSpPr/>
           <p:nvPr/>
         </p:nvSpPr>
@@ -21123,7 +21132,7 @@
       </p:sp>
       <p:sp>
         <p:nvSpPr>
-          <p:cNvPr id="14" name="Text 11"/>
+          <p:cNvPr id="15" name="Text 11"/>
           <p:cNvSpPr/>
           <p:nvPr/>
         </p:nvSpPr>
@@ -21162,7 +21171,7 @@
       </p:sp>
       <p:sp>
         <p:nvSpPr>
-          <p:cNvPr id="15" name="Text 12"/>
+          <p:cNvPr id="16" name="Text 12"/>
           <p:cNvSpPr/>
           <p:nvPr/>
         </p:nvSpPr>
@@ -21201,7 +21210,7 @@
       </p:sp>
       <p:sp>
         <p:nvSpPr>
-          <p:cNvPr id="16" name="Text 13"/>
+          <p:cNvPr id="17" name="Text 13"/>
           <p:cNvSpPr/>
           <p:nvPr/>
         </p:nvSpPr>
@@ -21240,7 +21249,7 @@
       </p:sp>
       <p:sp>
         <p:nvSpPr>
-          <p:cNvPr id="17" name="Text 14"/>
+          <p:cNvPr id="18" name="Text 14"/>
           <p:cNvSpPr/>
           <p:nvPr/>
         </p:nvSpPr>
@@ -21279,7 +21288,7 @@
       </p:sp>
       <p:sp>
         <p:nvSpPr>
-          <p:cNvPr id="18" name="Text 15"/>
+          <p:cNvPr id="19" name="Text 15"/>
           <p:cNvSpPr/>
           <p:nvPr/>
         </p:nvSpPr>
@@ -21318,7 +21327,7 @@
       </p:sp>
       <p:sp>
         <p:nvSpPr>
-          <p:cNvPr id="19" name="Shape 16"/>
+          <p:cNvPr id="20" name="Shape 16"/>
           <p:cNvSpPr/>
           <p:nvPr/>
         </p:nvSpPr>
@@ -21340,7 +21349,7 @@
       </p:sp>
       <p:sp>
         <p:nvSpPr>
-          <p:cNvPr id="20" name="Text 17"/>
+          <p:cNvPr id="21" name="Text 17"/>
           <p:cNvSpPr/>
           <p:nvPr/>
         </p:nvSpPr>
@@ -21546,7 +21555,7 @@
         </p:nvSpPr>
         <p:spPr>
           <a:xfrm>
-            <a:off x="1280160" y="1024128"/>
+            <a:off x="1280160" y="1193140"/>
             <a:ext cx="777240" cy="256032"/>
           </a:xfrm>
           <a:prstGeom prst="roundRect">
@@ -21568,7 +21577,7 @@
         </p:nvSpPr>
         <p:spPr>
           <a:xfrm>
-            <a:off x="1280160" y="1024128"/>
+            <a:off x="1280160" y="1193140"/>
             <a:ext cx="777240" cy="256032"/>
           </a:xfrm>
           <a:prstGeom prst="rect">
@@ -21625,7 +21634,7 @@
       </p:pic>
       <p:sp>
         <p:nvSpPr>
-          <p:cNvPr id="7" name="Shape 4"/>
+          <p:cNvPr id="8" name="Shape 4"/>
           <p:cNvSpPr/>
           <p:nvPr/>
         </p:nvSpPr>
@@ -21647,7 +21656,7 @@
       </p:sp>
       <p:sp>
         <p:nvSpPr>
-          <p:cNvPr id="8" name="Text 5"/>
+          <p:cNvPr id="9" name="Text 5"/>
           <p:cNvSpPr/>
           <p:nvPr/>
         </p:nvSpPr>
@@ -21686,7 +21695,7 @@
       </p:sp>
       <p:sp>
         <p:nvSpPr>
-          <p:cNvPr id="9" name="Text 6"/>
+          <p:cNvPr id="10" name="Text 6"/>
           <p:cNvSpPr/>
           <p:nvPr/>
         </p:nvSpPr>
@@ -21720,7 +21729,7 @@
                 <a:ea typeface="Montserrat" pitchFamily="34" charset="-122"/>
                 <a:cs typeface="Montserrat" pitchFamily="34" charset="-120"/>
               </a:rPr>
-              <a:t>Actions виконує кроки з bash -e: перший невдалий curl у циклі очікування вбиває крок цілком</a:t>
+              <a:t>Actions виконує кроки з bash -e: перший невдалий curl убиває крок</a:t>
             </a:r>
             <a:endParaRPr lang="en-US" sz="1200" dirty="0"/>
           </a:p>
@@ -21728,7 +21737,7 @@
       </p:sp>
       <p:sp>
         <p:nvSpPr>
-          <p:cNvPr id="10" name="Shape 7"/>
+          <p:cNvPr id="11" name="Shape 7"/>
           <p:cNvSpPr/>
           <p:nvPr/>
         </p:nvSpPr>
@@ -21750,7 +21759,7 @@
       </p:sp>
       <p:sp>
         <p:nvSpPr>
-          <p:cNvPr id="11" name="Text 8"/>
+          <p:cNvPr id="12" name="Text 8"/>
           <p:cNvSpPr/>
           <p:nvPr/>
         </p:nvSpPr>
@@ -21789,7 +21798,7 @@
       </p:sp>
       <p:sp>
         <p:nvSpPr>
-          <p:cNvPr id="12" name="Text 9"/>
+          <p:cNvPr id="13" name="Text 9"/>
           <p:cNvSpPr/>
           <p:nvPr/>
         </p:nvSpPr>
@@ -21831,7 +21840,7 @@
       </p:sp>
       <p:sp>
         <p:nvSpPr>
-          <p:cNvPr id="13" name="Shape 10"/>
+          <p:cNvPr id="14" name="Shape 10"/>
           <p:cNvSpPr/>
           <p:nvPr/>
         </p:nvSpPr>
@@ -21853,7 +21862,7 @@
       </p:sp>
       <p:sp>
         <p:nvSpPr>
-          <p:cNvPr id="14" name="Text 11"/>
+          <p:cNvPr id="15" name="Text 11"/>
           <p:cNvSpPr/>
           <p:nvPr/>
         </p:nvSpPr>
@@ -21887,7 +21896,7 @@
                 <a:ea typeface="Montserrat" pitchFamily="34" charset="-122"/>
                 <a:cs typeface="Montserrat" pitchFamily="34" charset="-120"/>
               </a:rPr>
-              <a:t>В історії PR так і лишилися два червоні прогони, потім зелений. Це не сором — це процес: гейт теж код, і він теж проходить налагодження.</a:t>
+              <a:t>Два червоні прогони, потім зелений — це не сором, а налагодження гейта.</a:t>
             </a:r>
             <a:endParaRPr lang="en-US" sz="1300" dirty="0"/>
           </a:p>
@@ -21895,7 +21904,7 @@
       </p:sp>
       <p:sp>
         <p:nvSpPr>
-          <p:cNvPr id="15" name="Shape 12"/>
+          <p:cNvPr id="16" name="Shape 12"/>
           <p:cNvSpPr/>
           <p:nvPr/>
         </p:nvSpPr>
@@ -21917,7 +21926,7 @@
       </p:sp>
       <p:sp>
         <p:nvSpPr>
-          <p:cNvPr id="16" name="Text 13"/>
+          <p:cNvPr id="17" name="Text 13"/>
           <p:cNvSpPr/>
           <p:nvPr/>
         </p:nvSpPr>
@@ -21956,7 +21965,7 @@
       </p:sp>
       <p:sp>
         <p:nvSpPr>
-          <p:cNvPr id="17" name="Text 14"/>
+          <p:cNvPr id="18" name="Text 14"/>
           <p:cNvSpPr/>
           <p:nvPr/>
         </p:nvSpPr>
@@ -21990,7 +21999,7 @@
                 <a:ea typeface="Montserrat" pitchFamily="34" charset="-122"/>
                 <a:cs typeface="Montserrat" pitchFamily="34" charset="-120"/>
               </a:rPr>
-              <a:t>Гейт треба прогнати на свідомо зламаному PR — інакше ви перевірили, що він пропускає, але не що він блокує.</a:t>
+              <a:t>Гейт треба прогнати на зламаному PR — інакше не знаєте, чи він блокує.</a:t>
             </a:r>
             <a:endParaRPr lang="en-US" sz="1300" dirty="0"/>
           </a:p>

--- a/docs/decks/L11.pptx
+++ b/docs/decks/L11.pptx
@@ -523,7 +523,7 @@
           <a:p>
             <a:r>
               <a:rPr lang="en-US" dirty="0"/>
-              <a:t>Вітаю на одинадцятому уроці — передостанньому в курсі. З другого уроку ми повторюємо мантру: зміна промпта — це реліз. Сьогодні ця фраза нарешті перестане бути гаслом і стане механізмом: eval, який ви збудували минулого тижня, перетвориться на гейт у CI — перевірку, що запускається на кожен PR і фізично не пускає регресію в main. Кнопка merge буде заблокована не чиєюсь пильністю, а exit code вашого прогону. По дорозі — чесні історії про те, чим CI відрізняється від локальної машини: наш гейт теж падав на першому запуску, і ви побачите чому. Далі — два шматки релізної дисципліни, про які рідко думають до першого болю: порядок викочування залежних компонентів і rollback-критерії, які пишуться до пожежі, а не під час неї. Опційно — canary для промптів. І найприємніше: майже нічого нового ми сьогодні не пишемо. Всі складники гейта вже існують — ми їх лише з'єднуємо.</a:t>
+              <a:t/>
             </a:r>
             <a:endParaRPr lang="en-US" dirty="0"/>
           </a:p>
@@ -611,7 +611,7 @@
           <a:p>
             <a:r>
               <a:rPr lang="en-US" dirty="0"/>
-              <a:t>Тепер про культуру. Червоний гейт на вашому PR — це неприємно: ви поспішали, а вас зупинили. Правильна рамка: гейт щойно зловив регресію до користувачів, а не після. Він зробив за секунди те, що інакше зробила б підтримка за тиждень скарг: знайшов, що «маленька правка» ламає поведінку. Червоне — це найдешевший момент дізнатися. Але культурна рівновага тут крихка, і руйнується вона одним способом: змержити повз червоний гейт «бо терміново». Одна така історія — і гейта немає: наступний, кому червоно і терміново, згадає прецедент, і за місяць гейт — це прапорець, який усі обходять. Якщо гейт справді помилково червоний — лагодьте гейт: флейковий кейс, поріг — у тому ж PR або окремим. Обхід — ніколи; винятки з правила «якість блокує merge» не масштабуються. І дзеркальне правило для авторів гейта: тримайте його швидким і чесним. Гейт, що йде двадцять хвилин або падає через флейки, викликає законне роздратування — і його знесуть з аргументом «він заважає працювати». Швидкий, стабільний, зрозумілий у падінні — три властивості, які купують гейту довге життя.</a:t>
+              <a:t/>
             </a:r>
             <a:endParaRPr lang="en-US" dirty="0"/>
           </a:p>
@@ -699,7 +699,7 @@
           <a:p>
             <a:r>
               <a:rPr lang="en-US" dirty="0"/>
-              <a:t>Зелений гейт каже: «цей стан системи здоровий». Він не каже: «шлях від старого стану до нового безпечний». Якщо зміна зачіпає кілька компонентів, деплой у неправильному порядку ламає систему навіть з ідеальними тестами: компонент А вже шле нове поле, компонент Б ще не вміє його читати — і привіт, помилки на проді при двох «здорових» версіях. У нашому стеку це питання виникає, щойно зміна перетинає межі. Нова колонка в БД і код, що її пише, — спершу міграція, потім код. Нове ім'я моделі в конфізі gateway і роутер, що на нього шле, — спершу конфіг, потім роутер. Новий формат відповіді сервісу і консоль, що його читає, — спершу сервіс із сумісністю, потім споживач. Загальний шаблон: спершу деплоїться той, хто читає — навчений розуміти і старе, і нове, — потім той, хто пише нове. Проміжний стан, коли в системі живуть обидві версії, має бути робочим, бо ви в ньому обов'язково побудете: хвилину при штатному релізі або годину при відкаті половини. У повній формі це називають expand, migrate, contract: розширити — додати нове поряд зі старим; мігрувати — перевести споживачів; звузити — прибрати старе окремим релізом, коли лог підтверджує, що старим ніхто не користується. Три нудні кроки замість одного сміливого — і кожен можна відкотити окремо. Сміливий один крок теж можна відкотити — разом з усім, що встигло зламатися.</a:t>
+              <a:t/>
             </a:r>
             <a:endParaRPr lang="en-US" dirty="0"/>
           </a:p>
@@ -787,7 +787,7 @@
           <a:p>
             <a:r>
               <a:rPr lang="en-US" dirty="0"/>
-              <a:t>Гейт не пускає погану зміну в main. Порядок викочування береже від зламаного проміжного стану. Лишається третє питання, яке ставлять під час інциденту: як вимкнути щось прямо зараз, не чекаючи збірки. У світі промптів на це є дві різні відповіді, і їх варто не плутати. Відкат версії в реєстрі — урок 2 — повертає попередню поведінку: це операція над вмістом, одна активація, секунди, слід в audit trail. Feature flag — це вимикач над механізмом: обійти кеш, вимкнути маршрутизацію на дорогу модель, перевести систему в режим «тільки ввічлива заглушка», відключити tool-виклики цілком. Перше відповідає на «промпт зламався», друге — на «зламався або дорого коштує сам механізм». Технічно прапорець — це рядок у таблиці або значення в конфізі, який читається на кожному запиті, з коротким кешем, щоб не бити базу. Дорослий вигляд у нього такий: значення за замовчуванням — безпечне: прапорець недоступний або база не відповіла — система працює в безпечному режимі, а не падає. Зміна прапорця — теж подія, з автором і часом: інакше через тиждень ніхто не пояснить, чому кеш вимкнений уже п'ятий день. І кожен прапорець має термін життя: прапорці накопичуються, і за рік ніхто не знає, які комбінації взагалі протестовані. Прапорець без плану видалення — це технічний борг з таймером.</a:t>
+              <a:t/>
             </a:r>
             <a:endParaRPr lang="en-US" dirty="0"/>
           </a:p>
@@ -875,7 +875,7 @@
           <a:p>
             <a:r>
               <a:rPr lang="en-US" dirty="0"/>
-              <a:t>Eval-прогін ловить регресію поведінки. Але в LLM-системі є цілий клас поломок, які до моделі навіть не доходять, — і вони ловляться дешевими механічними перевірками в тому самому workflow. Кожна з них — кілька рядків, і кожна колись зекономить вечір. Шаблон промпта містить усі очікувані плейсхолдери і жодного невідомого — інакше одна одрукована дужка, і підстановка тихо не відбувається: у модель їде текст із дужками. Схеми інструментів — валідний JSON Schema, бо зламану схему провайдер відкине вже на проді. Прайс покриває всі моделі з конфіга gateway — інакше cost_usd тихо стає null, і облік бреше, урок 4. Моделі в конфізі запінені, а не alias'и — захист від «регресії без коміта» при оновленні провайдера, урок 3. І в діфі немає ключів і секретів — найдорожча помилка з найкоротшим фіксом. Логіка та сама, що з пірамідою тестів: найдешевше — механічні перевірки конфігів і схем, дорожче — eval-прогін зі стеком, найдорожче — модельні перевірки з реальним ключем. Ставте їх у цьому порядку — і 80 відсотків поломок ловитимуться за секунди, не піднімаючи жодного контейнера. Я на цьому вчився дорогою ціною: гейт, який перевіряв лише «змістовну» частину, спокійно пропустив реліз, де в конфізі з'явилася модель без ціни. Формально все зелене — eval'и проходили, тести проходили. Помітили через тиждень, коли хтось спитав, чому в звіті вартості дірка рівно з тієї дати. Найдорожчі поломки майже завжди такі: не «система не працює», а «система тихо перестала знати правду про себе».</a:t>
+              <a:t/>
             </a:r>
             <a:endParaRPr lang="en-US" dirty="0"/>
           </a:p>
@@ -963,7 +963,7 @@
           <a:p>
             <a:r>
               <a:rPr lang="en-US" dirty="0"/>
-              <a:t>Це опційний блок. Гейт перевіряє зміну до релізу на золотому наборі. Але золотий набір — це 10–20 кейсів, а прод — тисячі живих запитів. Опційна техніка для обережних релізів — canary: нова версія промпта отримує 10 відсотків трафіку, стара — 90. Далі порівнюєте метрики двох груп — а метрики у вас є з тижня 5: error rate, fallback, вартість, і скарги як фінальний суддя. Добре — розкатуєте на всіх; погано — rollback однією командою, якою ви володієте з тижня 1. Найприємніше — скільки тут нового коду: майже нуль. Механіка розподілу трафіку — той самий routing з уроку 3, тільки критерій не «тип задачі», а «відсоток запитів»: найпростіше — за хешем ідентифікатора сесії, щоб той самий користувач стабільно бачив ту саму версію. Версії промпта — реєстр з уроку 2. Порівняння метрик — зрізи по prompt_version у лозі, який ви ведете з уроку 1. Canary — це не інструмент, який купують; це композиція механізмів, які ви вже збудували. І чесне попередження про межі: canary потребує обсягу. 10 відсотків трафіку — це скільки запитів на годину у вашій системі? Якщо три, порівняння метрик двох груп — це ворожіння на шумі: різниця між «одна помилка» і «нуль помилок» нічого не означає. На малому трафіку чесніша стратегія — гейт до релізу плюс швидкий rollback після: ви все одно дізнаєтесь про проблему швидко, просто від усіх користувачів одразу. Canary окупається там, де десята частина — це вже статистика. План — розділення трафіку, метрики порівняння, критерії promote/rollback — опційна частина ДЗ тижня 6; реалізація — для найзавзятіших.</a:t>
+              <a:t/>
             </a:r>
             <a:endParaRPr lang="en-US" dirty="0"/>
           </a:p>
@@ -1051,7 +1051,7 @@
           <a:p>
             <a:r>
               <a:rPr lang="en-US" dirty="0"/>
-              <a:t>Останній шматок релізної дисципліни — найдешевший і найчастіше пропущений. Перед викочуванням будь-якої значущої зміни відповідь на питання «коли смикаємо назад» має бути записана. Формула проста, і вона на екрані. Умова — конкретна метрика і поріг: eval pass rate нижче п'яти з шести на прогоні після деплою, або fallback_events зростає протягом п'ятнадцяти хвилин, або error rate вище п'яти відсотків протягом тих самих п'ятнадцяти хвилин. Не «якщо стане погано» — стане погано ви й так побачите, питання в тому, чи буде домовленість, що це вже привід. Хто смикає — названа роль, черговий, без погоджень: якщо для відкату треба когось знайти й переконати, критерій не працює. І чим — точна команда: активація попередньої версії, одна операція, яку виконують о третій ночі не думаючи. Чому саме заздалегідь: під час інциденту думати пізно, під час інциденту треба виконувати. Записаний критерій знімає найдорожчу розмову поганого вечора — «може, ще почекаємо, ніби вирівнюється». Не вирівнюється. Критерій пробитий — відкат, розбір завтра. І зверніть увагу на останній рядок: «одна команда» — це вимога до архітектури, яку ви вже виконали. Rollback за секунди існує у вас з уроку 2, і саме сьогодні він нарешті отримав умову спрацювання. Ці три рядки — умова, роль, команда — і є ваша обов'язкова частина ДЗ.</a:t>
+              <a:t/>
             </a:r>
             <a:endParaRPr lang="en-US" dirty="0"/>
           </a:p>
@@ -1139,7 +1139,7 @@
           <a:p>
             <a:r>
               <a:rPr lang="en-US" dirty="0"/>
-              <a:t>Перш ніж перейти до екрана — що саме ви зараз побачите і навіщо. Послідовність така: спершу проходимо eval-gate.yml по кроках — уже знайомий вам розтин, тепер наживо. Потім PR зі зламаним промптом — і вкладка Actions, де прогін червоніє: ті самі три з шести, що ви бачили локально минулого уроку, тепер їх бачить кнопка merge. Далі фікс промпта, пуш — і гейт зеленіє: merge розблоковано. І на завершення — налаштування репозиторію: required check, той самий job eval, через який кнопка взагалі вміє блокуватися. Навіщо це все: побачити, що перевірка більше не залежить від людини. Той самий прогін, що ви робили руками, тепер робить CI на кожен PR — і історія «червоний → зелений» лишається в PR як доказ, що гейт працює. [Ведучому: це найкрихкіший урок за продакшном. PR зі зламаним промптом створити ДО запису — червоний прогін уже готовий, на камері лише refresh. Фікс-пуш → зелений чекати з вимкненим записом — монтажна склейка. Required check показувати на заздалегідь налаштованому репо; required check = job eval. УВАГА: історій про CI дві, з РІЗНИХ репозиторіїв — «два червоні прогони, потім зелений» це PR #1 у репозиторії курсу (ci-smoke, merged), а demo-PR із лаби — PR #1 у репозиторії еталонів (closed, один червоний → зелений, зроблений на скороченій базі) — показувати обидва і не плутати. Між червоним і зеленим прогоном не забути повернути v2 — інакше наступні дублі почнуться з «не знаю». Вкладка Actions відкрита заздалегідь.]</a:t>
+              <a:t/>
             </a:r>
             <a:endParaRPr lang="en-US" dirty="0"/>
           </a:p>
@@ -1227,7 +1227,7 @@
           <a:p>
             <a:r>
               <a:rPr lang="en-US" dirty="0"/>
-              <a:t>Крок перший: розібрати workflow. Прочитати eval-gate.yml крок за кроком: checkout, compose up без UI, wait service, wait gateway — тепер ви знаєте чому, — evals, логи при падінні, down. Пояснити собі кожен крок. Крок другий: червоний прогін. Гілка зі зламаним промптом, PR — Actions червоніє. Подивитися лог прогону в CI: ті самі три з шести, що ви бачили локально на минулому уроці, — тепер їх бачить кнопка merge. Крок третій: зелений прогін. Полагодити промпт у тій самій гілці, пуш — гейт зеленіє, merge. В історії PR лишаються обидва прогони — це і є доказ, що гейт працює, і рівно це ментор перевірятиме у ДЗ тижня 6. Як має виглядати результат — живий demo-PR у репозиторії еталонів: червоний прогін, фікс, зелений. Уточнення: demo-PR — це ілюстрація формату, а не еталон рішення тижня; зроблений він на скороченій базі, тож діф не збігатиметься з твоїм. Крок четвертий: rollback-критерії. Написати свої: три умови, хто смикає, якою командою. Покласти поруч із fallback-порядком і budget-політикою — ваша папка операційних рішень майже зібрана. І опційний п'ятий: canary на папері. План: як розділити трафік 90/10 своїм роутером, які метрики порівнювати між групами, критерії promote і rollback.</a:t>
+              <a:t/>
             </a:r>
             <a:endParaRPr lang="en-US" dirty="0"/>
           </a:p>
@@ -1315,7 +1315,7 @@
           <a:p>
             <a:r>
               <a:rPr lang="en-US" dirty="0"/>
-              <a:t>Зафіксуємо, що ми щойно побачили — і що це доводить. Перше: перевірка стала механізмом. Той самий eval-прогін, що ви запускали руками на минулому уроці, тепер робить CI на кожен PR — для зміни промпта, для правки роутера, для правки README. Дисципліна більше не ланка ланцюга. Друге: кнопка merge реально слухає exit code. PR зі зламаним промптом фізично не мержиться — і не тому, що хтось пильний, а тому, що required check, job eval, тримає кнопку заблокованою, поки прогін червоний. Третє: доказ лишається в історії. Червоний прогін, фікс, зелений — усе в одному PR. Це і є артефакт, який ментор перевірятиме у ДЗ тижня 6: не слова «у мене все працює», а історія Actions, яку видно будь-кому. Реліз промпта тепер проходить той самий процес, що й реліз коду. Поза CI лишаються два шматки дисципліни, які ми сьогодні теж закрили: порядок викочування залежних компонентів і записані rollback-критерії.</a:t>
+              <a:t/>
             </a:r>
             <a:endParaRPr lang="en-US" dirty="0"/>
           </a:p>
@@ -1403,7 +1403,7 @@
           <a:p>
             <a:r>
               <a:rPr lang="en-US" dirty="0"/>
-              <a:t>Перш ніж розійтися — чесна перевірка, без оцінок. Пройдіться по чотирьох пунктах обов'язкової доріжки. У моєму репо є червоний і зелений прогін гейта — обидва, в історії Actions. Можу пояснити кожен крок workflow — і навіщо там окреме очікування gateway, а не лише health-check сервісу. Rollback-критерії записані до викочування, з командою відкату. І розумію, чому порядок деплою залежних компонентів — частина релізу, навіть коли всі тести зелені. І три питання з минулих тижнів, без підглядання. Чому поріг evals — не сто відсотків, і яку сліпу пляму має правило N мінус один? Це урок 10. Які чотири частини в правильного алерту? Урок 9. І чому незворотна дія не виконується «бо модель попросила»? Уроки 6 і 8. Якщо на щось відповіді немає — повертайтеся у відповідний блок або урок. Питання, які лишилися, — несіть у канал потоку або на Q&amp;A.</a:t>
+              <a:t/>
             </a:r>
             <a:endParaRPr lang="en-US" dirty="0"/>
           </a:p>
@@ -1491,7 +1491,7 @@
           <a:p>
             <a:r>
               <a:rPr lang="en-US" dirty="0"/>
-              <a:t>Домовимось про результат уроку — конкретними діями. Після сьогоднішнього заняття ви зможете: увімкнути eval-гейт на кожен PR і показати в історії Actions доказ «червоний → зелений» — саме його ментор перевірятиме у ДЗ тижня 6. Пояснити кожен крок workflow гейта — і навіщо там окреме очікування gateway, а не лише health-check сервісу. Налаштувати branch protection з правильним required check — і не наступити на пастку «job проти workflow». Записати rollback-критерії до викочування: три умови, хто смикає, якою командою. Пояснити, чому порядок деплою залежних компонентів — частина релізу, навіть коли всі тести зелені. І відрізнити відкат версії промпта від feature flag — та сказати, коли доречний який. Кожен пункт ви перевірите руками ще сьогодні — у лабораторній, у власному репозиторії.</a:t>
+              <a:t/>
             </a:r>
             <a:endParaRPr lang="en-US" dirty="0"/>
           </a:p>
@@ -1579,7 +1579,7 @@
           <a:p>
             <a:r>
               <a:rPr lang="en-US" dirty="0"/>
-              <a:t>П'ять способів звести нанівець сьогоднішній урок — усі перевірені чужими граблями. Eval, який запускають руками «коли не забудуть»: його не запускатимуть — п'ятниця, дедлайн, «одне слово поміняв»; весь блок 01 був про це. Мержити повз червоний гейт «бо терміново»: одна така історія — і гейта немає, наступний згадає прецедент, і за місяць гейт — прапорець, який усі обходять. Гейт, ніколи не проганяний на реальному CI: тоді його перший запуск станеться на чужому терміновому PR — з bash -e, холодним gateway і всіма сюрпризами одразу. Дякуємо, не треба. Викочування без rollback-критеріїв: під час інциденту треба виконувати, а не дискутувати «може, ще почекаємо». І останнє — ігнорувати порядок деплою залежних компонентів: зелені тести не рятують від неправильної послідовності, компонент А вже пише нове, компонент Б ще не вміє читати.</a:t>
+              <a:t/>
             </a:r>
             <a:endParaRPr lang="en-US" dirty="0"/>
           </a:p>
@@ -1667,7 +1667,7 @@
           <a:p>
             <a:r>
               <a:rPr lang="en-US" dirty="0"/>
-              <a:t>Обов'язково до наступного уроку — без здачі. Закріпити лабу: у своєму репозиторії — червоний і зелений прогін гейта в історії Actions. Записати rollback-критерії для своєї системи: умови, хто, якою командою. І переконатися, що гейт швидкий і його падіння зрозуміле з логів — три властивості з блока 05 тепер стосуються вашого власного гейта. Опційно — canary-план: розподіл 90/10 своїм роутером, метрики порівняння, критерії promote і rollback. Це план на папері, не реалізація. І про ДЗ тижня: фінальне ДЗ тижня 6 збирає все — CI-гейт із сьогоднішньої лаби, інцидент-демо в окремому файлі INCIDENT_RUNBOOK.md з посиланням із README, і повну збірку системи з чистого клону. Після наступного уроку — критерії і здача; сьогоднішній гейт — його найбільша частина, і вона вже готова. Тобто найважче ви зробили сьогодні.</a:t>
+              <a:t/>
             </a:r>
             <a:endParaRPr lang="en-US" dirty="0"/>
           </a:p>
@@ -1755,7 +1755,7 @@
           <a:p>
             <a:r>
               <a:rPr lang="en-US" dirty="0"/>
-              <a:t>Підсумуємо. Перевірки, від яких залежить прод, мають запускатися механізмом, а не людиною: гейт прибирає з ланцюга слабку ланку — дисципліну. Сам гейт — це композиція того, що ви вже мали: ваш eval, exit code і CI; а блокує merge лише правильно обраний required check — job eval, не назва workflow. CI — інше середовище: bash -e, холодні старти, інші тайминги — тому гейт проганяють на реальному CI до того, як він комусь заблокує реліз. Порядок викочування — частина релізу: спершу деплоїться той, хто читає, потім той, хто пише нове; у повній формі — expand, migrate, contract. І rollback-критерії пишуться до пожежі: три умови, хто смикає, одна команда — бо під час інциденту треба виконувати, а не дискутувати. Наступний урок — останній. Збираємо все докупи: повний прогін системи від точки А, яку ви бачили на першому уроці, до точки Б, яку збудували самі; інцидент-демо наживо за runbook'ом — і розмова про те, як принести LLMOps у свою команду. Курс закінчується, а ваш gateway тільки починає жити. До зустрічі на фіналі.</a:t>
+              <a:t/>
             </a:r>
             <a:endParaRPr lang="en-US" dirty="0"/>
           </a:p>
@@ -1843,7 +1843,7 @@
           <a:p>
             <a:r>
               <a:rPr lang="en-US" dirty="0"/>
-              <a:t>Маршрут такий. Спершу — чому перевірка, що залежить від дисципліни, приречена, і як гейт прибирає з ланцюга слабку ланку. Далі — з чого гейт складається: ваш eval, exit code і CI, плюс адміністративна дрібниця про required check, без якої все це лише кольорова іконка. Потім розтин workflow крок за кроком і чесний блок про те, чим CI відрізняється від вашого ноутбука — з історіями наших власних червоних прогонів. Блок п'ять — про культуру: чому червоний гейт — подарунок і чому обхід «бо терміново» вбиває гейт назавжди. Шостий і сьомий — порядок викочування, feature flag і сумісність артефактів: промпт, код і схеми як один реліз. Восьмий, опційний, — canary для промптів. Дев'ятий — rollback-критерії, найдешевший і найчастіше пропущений шматок релізної дисципліни. Потім демо і лабораторна — гейт у бою у вашому власному репозиторії, перевірка себе, антипатерни і домашнє завдання.</a:t>
+              <a:t/>
             </a:r>
             <a:endParaRPr lang="en-US" dirty="0"/>
           </a:p>
@@ -1931,7 +1931,7 @@
           <a:p>
             <a:r>
               <a:rPr lang="en-US" dirty="0"/>
-              <a:t>Домовимось про шість слів. Quality gate, або просто гейт, — автоматична перевірка, без якої зміна не потрапляє в основну гілку. Required check — та сама перевірка, позначена в налаштуваннях репозиторію як обов'язкова; тут є пастка з назвою, і ми її розберемо. Branch protection — захист гілки: набір правил, що саме має статися перед мержем. Canary — викочування на частку трафіку перед повним релізом. Feature flag — вимикач, який змінює поведінку системи без деплою. І rollback-критерії — записані заздалегідь умови, за яких ви відкочуєтесь: що саме має статися, хто ухвалює рішення і якою командою воно виконується. Ключове слово тут — заздалегідь: під час інциденту такі речі не пишуться.</a:t>
+              <a:t/>
             </a:r>
             <a:endParaRPr lang="en-US" dirty="0"/>
           </a:p>
@@ -2019,7 +2019,7 @@
           <a:p>
             <a:r>
               <a:rPr lang="en-US" dirty="0"/>
-              <a:t>У вас уже є eval, який ловить регресію, — минулий урок закінчився саме цим. Але поки його треба запускати руками — його не запускатимуть. Не зі зла: п'ятниця, дедлайн, «та я ж одне слово поміняв». Усі найгірші регресії заїжджають у main саме так — через маленькі зміни, які «не потребували перевірки». І зверніть увагу на парадокс: що менша зміна, то менше бажання її перевіряти — і то важче потім знайти, що саме зламалося. Гейт у CI знімає це питання назавжди, бо прибирає з ланцюга саме слабку ланку: перевірка більше не залежить від дисципліни. PR зі зламаним промптом фізично не мержиться — не тому, що хтось пильний, а тому, що кнопка merge заблокована. І це змінює не лише якість — це змінює культуру: промпт остаточно стає кодом з усіма наслідками, від рев'ю до заблокованого мержа. Друга тема сьогодні, про яку рідко думають до першого болю, — порядок викочування: зміна з зеленими тестами все одно може покласти систему, якщо компоненти виїхали в неправильній послідовності. До неї дійдемо в блоці 06.</a:t>
+              <a:t/>
             </a:r>
             <a:endParaRPr lang="en-US" dirty="0"/>
           </a:p>
@@ -2107,7 +2107,7 @@
           <a:p>
             <a:r>
               <a:rPr lang="en-US" dirty="0"/>
-              <a:t>Хороша новина: сьогодні ми майже нічого не пишемо. Всі складники гейта вже існують. Run.py повертає нуль або одиницю — це урок 10. Стек піднімається однією командою docker compose up — це урок 1. Поріг обраний і обґрунтований. CI-система лише виконує це у чистому середовищі на кожен PR і фарбує кнопку merge у колір exit code. Уся цінність — у словах «на кожен PR». Той самий прогін, який ви робили руками, тепер відбувається завжди: для зміни промпта, для правки роутера, для «я тільки README поправив». Так, і для нього — і це правильно: ви здивуєтесь, скільки разів «правка README» насправді чіпала щось поруч. І зверніть увагу на архітектурну красу: гейт нічого не знає про LLM. Він знає про exit code. Уся LLM-специфіка — датасет, grader, поріг — інкапсульована в eval-контурі, який ви збудували минулого тижня. Це означає, що гейт не треба буде переписувати, коли зміниться модель, промпт чи навіть провайдер.</a:t>
+              <a:t/>
             </a:r>
             <a:endParaRPr lang="en-US" dirty="0"/>
           </a:p>
@@ -2195,7 +2195,7 @@
           <a:p>
             <a:r>
               <a:rPr lang="en-US" dirty="0"/>
-              <a:t>Одна адміністративна дрібниця, без якої все це — лише кольорова іконка: сам по собі червоний workflow merge не забороняє. Блокування вмикається в налаштуваннях репозиторію — гілка main захищається, а перевірка позначається обов'язковою, required status check. Шлях: Settings, Branches, Add branch protection rule, Require status checks to pass — і вибрати чек eval. Тут увага на тонкість, на якій легко втратити годину: у списку GitHub показує назву job — eval, а не назву workflow — eval-gate. Обравши неіснуючий eval-gate, ви отримаєте protection, який нічого не блокує. Виглядає налаштованим, не працює. Без цього кроку гейт «радить»; з правильним чеком — вирішує. Перевірте це у власному репо, коли робитимете ДЗ тижня 6. І одне чесне застереження: на приватному репозиторії безкоштовного плану branch protection може бути недоступний — тоді гейт лишається «радником», і це треба чесно зазначити в PR.</a:t>
+              <a:t/>
             </a:r>
             <a:endParaRPr lang="en-US" dirty="0"/>
           </a:p>
@@ -2283,7 +2283,7 @@
           <a:p>
             <a:r>
               <a:rPr lang="en-US" dirty="0"/>
-              <a:t>Відкрийте eval-gate.yml у стартері — читаємо як послідовність відповідей на конкретні болі. Стек піднімається без UI: evals ходять в API, збирати фронтенд у CI — марні хвилини. Очікування сервісу — цикл із сорока спроб, і всередині «if curl; then», а не «curl &amp;&amp;» — чому саме так, розповість наступний блок. Окреме очікування gateway — теж не з теорії: холодний LiteLLM дає 500 на перший запит. Logs on failure — бо червоний прогін без логів це загадка, а з логами — діагноз. Down з if: always() — прибрати за собою навіть після падіння. І про threshold 5: це число — частина датасету, а не константа шаблона. Після ДЗ тижня 5 у наборі близько десяти кейсів — поріг у workflow оновлюється разом із ним. Правило: N мінус один при N до десяти, далі 85 відсотків з округленням угору. Перевірка «поріг відповідає розміру датасету» — гарний кандидат у механічні перевірки гейта, про них у блоці 07.</a:t>
+              <a:t/>
             </a:r>
             <a:endParaRPr lang="en-US" dirty="0"/>
           </a:p>
@@ -2371,7 +2371,7 @@
           <a:p>
             <a:r>
               <a:rPr lang="en-US" dirty="0"/>
-              <a:t>Чесна історія з підготовки цього курсу. Локально гейт працював ідеально. Перший запуск у GitHub Actions упав за 57 секунд. Причина: Actions виконує кроки з bash -e — перший же невдалий curl у циклі очікування вбивав крок цілком, хоча локально той самий цикл спокійно ретраїв, поки сервіс прокидався. Звідси та сама форма «if curl; then» у workflow — невдала проба стає умовою, а не помилкою. Другий сюрприз: холодний старт LiteLLM у CI давав 500 на найперший запит — локально ви цього не бачите, бо поки відкриваєте браузер, gateway встигає прогрітися. У CI між up і першим запитом — мілісекунди. Довелося додати явне очікування готовності gateway — POST-пробу до самого ендпоінта, а не просто health-check. Таких сюрпризів у CI-інтеграціях назбирується колекція — ще один із моєї практики на великій платформі: крок пайплайна вважав виклик невдалим, хоча зовнішня система чесно виконала роботу — просто відповіла редиректом 303 замість очікуваного 200, і перевірка «код == 200» фарбувала здоровий прогін у червоне. Успіх у HTTP — це діапазон і контракт, а не одне магічне число. Формула для всіх подібних граблів однакова: точна умова успіху, явні очікування готовності, і жодних припущень, що чуже середовище поводиться як ваш ноутбук.</a:t>
+              <a:t/>
             </a:r>
             <a:endParaRPr lang="en-US" dirty="0"/>
           </a:p>
@@ -3683,7 +3683,7 @@
       </p:pic>
       <p:sp>
         <p:nvSpPr>
-          <p:cNvPr id="8" name="Shape 4"/>
+          <p:cNvPr id="7" name="Shape 4"/>
           <p:cNvSpPr/>
           <p:nvPr/>
         </p:nvSpPr>
@@ -3705,7 +3705,7 @@
       </p:sp>
       <p:sp>
         <p:nvSpPr>
-          <p:cNvPr id="9" name="Text 5"/>
+          <p:cNvPr id="8" name="Text 5"/>
           <p:cNvSpPr/>
           <p:nvPr/>
         </p:nvSpPr>
@@ -3744,7 +3744,7 @@
       </p:sp>
       <p:sp>
         <p:nvSpPr>
-          <p:cNvPr id="10" name="Text 6"/>
+          <p:cNvPr id="9" name="Text 6"/>
           <p:cNvSpPr/>
           <p:nvPr/>
         </p:nvSpPr>
@@ -3783,7 +3783,7 @@
       </p:sp>
       <p:sp>
         <p:nvSpPr>
-          <p:cNvPr id="11" name="Shape 7"/>
+          <p:cNvPr id="10" name="Shape 7"/>
           <p:cNvSpPr/>
           <p:nvPr/>
         </p:nvSpPr>
@@ -3805,7 +3805,7 @@
       </p:sp>
       <p:sp>
         <p:nvSpPr>
-          <p:cNvPr id="12" name="Text 8"/>
+          <p:cNvPr id="11" name="Text 8"/>
           <p:cNvSpPr/>
           <p:nvPr/>
         </p:nvSpPr>
@@ -3844,7 +3844,7 @@
       </p:sp>
       <p:sp>
         <p:nvSpPr>
-          <p:cNvPr id="13" name="Text 9"/>
+          <p:cNvPr id="12" name="Text 9"/>
           <p:cNvSpPr/>
           <p:nvPr/>
         </p:nvSpPr>
@@ -3883,7 +3883,7 @@
       </p:sp>
       <p:sp>
         <p:nvSpPr>
-          <p:cNvPr id="14" name="Shape 10"/>
+          <p:cNvPr id="13" name="Shape 10"/>
           <p:cNvSpPr/>
           <p:nvPr/>
         </p:nvSpPr>
@@ -3905,7 +3905,7 @@
       </p:sp>
       <p:sp>
         <p:nvSpPr>
-          <p:cNvPr id="15" name="Text 11"/>
+          <p:cNvPr id="14" name="Text 11"/>
           <p:cNvSpPr/>
           <p:nvPr/>
         </p:nvSpPr>
@@ -3944,7 +3944,7 @@
       </p:sp>
       <p:sp>
         <p:nvSpPr>
-          <p:cNvPr id="16" name="Text 12"/>
+          <p:cNvPr id="15" name="Text 12"/>
           <p:cNvSpPr/>
           <p:nvPr/>
         </p:nvSpPr>
@@ -3986,7 +3986,7 @@
       </p:sp>
       <p:sp>
         <p:nvSpPr>
-          <p:cNvPr id="17" name="Shape 13"/>
+          <p:cNvPr id="16" name="Shape 13"/>
           <p:cNvSpPr/>
           <p:nvPr/>
         </p:nvSpPr>
@@ -4008,7 +4008,7 @@
       </p:sp>
       <p:sp>
         <p:nvSpPr>
-          <p:cNvPr id="18" name="Text 14"/>
+          <p:cNvPr id="17" name="Text 14"/>
           <p:cNvSpPr/>
           <p:nvPr/>
         </p:nvSpPr>
@@ -4293,7 +4293,7 @@
       </p:pic>
       <p:sp>
         <p:nvSpPr>
-          <p:cNvPr id="8" name="Shape 4"/>
+          <p:cNvPr id="7" name="Shape 4"/>
           <p:cNvSpPr/>
           <p:nvPr/>
         </p:nvSpPr>
@@ -4315,7 +4315,7 @@
       </p:sp>
       <p:sp>
         <p:nvSpPr>
-          <p:cNvPr id="9" name="Text 5"/>
+          <p:cNvPr id="8" name="Text 5"/>
           <p:cNvSpPr/>
           <p:nvPr/>
         </p:nvSpPr>
@@ -4354,7 +4354,7 @@
       </p:sp>
       <p:sp>
         <p:nvSpPr>
-          <p:cNvPr id="10" name="Shape 6"/>
+          <p:cNvPr id="9" name="Shape 6"/>
           <p:cNvSpPr/>
           <p:nvPr/>
         </p:nvSpPr>
@@ -4377,7 +4377,7 @@
       </p:sp>
       <p:sp>
         <p:nvSpPr>
-          <p:cNvPr id="11" name="Shape 7"/>
+          <p:cNvPr id="10" name="Shape 7"/>
           <p:cNvSpPr/>
           <p:nvPr/>
         </p:nvSpPr>
@@ -4397,7 +4397,7 @@
       </p:sp>
       <p:sp>
         <p:nvSpPr>
-          <p:cNvPr id="12" name="Shape 8"/>
+          <p:cNvPr id="11" name="Shape 8"/>
           <p:cNvSpPr/>
           <p:nvPr/>
         </p:nvSpPr>
@@ -4424,7 +4424,7 @@
       </p:sp>
       <p:sp>
         <p:nvSpPr>
-          <p:cNvPr id="13" name="Text 9"/>
+          <p:cNvPr id="12" name="Text 9"/>
           <p:cNvSpPr/>
           <p:nvPr/>
         </p:nvSpPr>
@@ -4463,7 +4463,7 @@
       </p:sp>
       <p:sp>
         <p:nvSpPr>
-          <p:cNvPr id="14" name="Shape 10"/>
+          <p:cNvPr id="13" name="Shape 10"/>
           <p:cNvSpPr/>
           <p:nvPr/>
         </p:nvSpPr>
@@ -4486,7 +4486,7 @@
       </p:sp>
       <p:sp>
         <p:nvSpPr>
-          <p:cNvPr id="15" name="Shape 11"/>
+          <p:cNvPr id="14" name="Shape 11"/>
           <p:cNvSpPr/>
           <p:nvPr/>
         </p:nvSpPr>
@@ -4506,7 +4506,7 @@
       </p:sp>
       <p:sp>
         <p:nvSpPr>
-          <p:cNvPr id="16" name="Shape 12"/>
+          <p:cNvPr id="15" name="Shape 12"/>
           <p:cNvSpPr/>
           <p:nvPr/>
         </p:nvSpPr>
@@ -4533,7 +4533,7 @@
       </p:sp>
       <p:sp>
         <p:nvSpPr>
-          <p:cNvPr id="17" name="Text 13"/>
+          <p:cNvPr id="16" name="Text 13"/>
           <p:cNvSpPr/>
           <p:nvPr/>
         </p:nvSpPr>
@@ -4572,7 +4572,7 @@
       </p:sp>
       <p:sp>
         <p:nvSpPr>
-          <p:cNvPr id="18" name="Text 14"/>
+          <p:cNvPr id="17" name="Text 14"/>
           <p:cNvSpPr/>
           <p:nvPr/>
         </p:nvSpPr>
@@ -4611,7 +4611,7 @@
       </p:sp>
       <p:sp>
         <p:nvSpPr>
-          <p:cNvPr id="19" name="Shape 15"/>
+          <p:cNvPr id="18" name="Shape 15"/>
           <p:cNvSpPr/>
           <p:nvPr/>
         </p:nvSpPr>
@@ -4638,7 +4638,7 @@
       </p:sp>
       <p:sp>
         <p:nvSpPr>
-          <p:cNvPr id="20" name="Text 16"/>
+          <p:cNvPr id="19" name="Text 16"/>
           <p:cNvSpPr/>
           <p:nvPr/>
         </p:nvSpPr>
@@ -4677,7 +4677,7 @@
       </p:sp>
       <p:sp>
         <p:nvSpPr>
-          <p:cNvPr id="21" name="Text 17"/>
+          <p:cNvPr id="20" name="Text 17"/>
           <p:cNvSpPr/>
           <p:nvPr/>
         </p:nvSpPr>
@@ -4716,7 +4716,7 @@
       </p:sp>
       <p:sp>
         <p:nvSpPr>
-          <p:cNvPr id="22" name="Shape 18"/>
+          <p:cNvPr id="21" name="Shape 18"/>
           <p:cNvSpPr/>
           <p:nvPr/>
         </p:nvSpPr>
@@ -4738,7 +4738,7 @@
       </p:sp>
       <p:sp>
         <p:nvSpPr>
-          <p:cNvPr id="23" name="Text 19"/>
+          <p:cNvPr id="22" name="Text 19"/>
           <p:cNvSpPr/>
           <p:nvPr/>
         </p:nvSpPr>
@@ -4777,7 +4777,7 @@
       </p:sp>
       <p:sp>
         <p:nvSpPr>
-          <p:cNvPr id="24" name="Text 20"/>
+          <p:cNvPr id="23" name="Text 20"/>
           <p:cNvSpPr/>
           <p:nvPr/>
         </p:nvSpPr>
@@ -4816,7 +4816,7 @@
       </p:sp>
       <p:sp>
         <p:nvSpPr>
-          <p:cNvPr id="25" name="Shape 21"/>
+          <p:cNvPr id="24" name="Shape 21"/>
           <p:cNvSpPr/>
           <p:nvPr/>
         </p:nvSpPr>
@@ -4843,7 +4843,7 @@
       </p:sp>
       <p:sp>
         <p:nvSpPr>
-          <p:cNvPr id="26" name="Text 22"/>
+          <p:cNvPr id="25" name="Text 22"/>
           <p:cNvSpPr/>
           <p:nvPr/>
         </p:nvSpPr>
@@ -4882,7 +4882,7 @@
       </p:sp>
       <p:sp>
         <p:nvSpPr>
-          <p:cNvPr id="27" name="Text 23"/>
+          <p:cNvPr id="26" name="Text 23"/>
           <p:cNvSpPr/>
           <p:nvPr/>
         </p:nvSpPr>
@@ -4921,7 +4921,7 @@
       </p:sp>
       <p:sp>
         <p:nvSpPr>
-          <p:cNvPr id="28" name="Shape 24"/>
+          <p:cNvPr id="27" name="Shape 24"/>
           <p:cNvSpPr/>
           <p:nvPr/>
         </p:nvSpPr>
@@ -4943,7 +4943,7 @@
       </p:sp>
       <p:sp>
         <p:nvSpPr>
-          <p:cNvPr id="29" name="Text 25"/>
+          <p:cNvPr id="28" name="Text 25"/>
           <p:cNvSpPr/>
           <p:nvPr/>
         </p:nvSpPr>
@@ -5228,7 +5228,7 @@
       </p:pic>
       <p:sp>
         <p:nvSpPr>
-          <p:cNvPr id="8" name="Shape 4"/>
+          <p:cNvPr id="7" name="Shape 4"/>
           <p:cNvSpPr/>
           <p:nvPr/>
         </p:nvSpPr>
@@ -5250,7 +5250,7 @@
       </p:sp>
       <p:sp>
         <p:nvSpPr>
-          <p:cNvPr id="9" name="Text 5"/>
+          <p:cNvPr id="8" name="Text 5"/>
           <p:cNvSpPr/>
           <p:nvPr/>
         </p:nvSpPr>
@@ -5289,7 +5289,7 @@
       </p:sp>
       <p:sp>
         <p:nvSpPr>
-          <p:cNvPr id="10" name="Text 6"/>
+          <p:cNvPr id="9" name="Text 6"/>
           <p:cNvSpPr/>
           <p:nvPr/>
         </p:nvSpPr>
@@ -5331,7 +5331,7 @@
       </p:sp>
       <p:sp>
         <p:nvSpPr>
-          <p:cNvPr id="11" name="Shape 7"/>
+          <p:cNvPr id="10" name="Shape 7"/>
           <p:cNvSpPr/>
           <p:nvPr/>
         </p:nvSpPr>
@@ -5353,7 +5353,7 @@
       </p:sp>
       <p:sp>
         <p:nvSpPr>
-          <p:cNvPr id="12" name="Text 8"/>
+          <p:cNvPr id="11" name="Text 8"/>
           <p:cNvSpPr/>
           <p:nvPr/>
         </p:nvSpPr>
@@ -5392,7 +5392,7 @@
       </p:sp>
       <p:sp>
         <p:nvSpPr>
-          <p:cNvPr id="13" name="Text 9"/>
+          <p:cNvPr id="12" name="Text 9"/>
           <p:cNvSpPr/>
           <p:nvPr/>
         </p:nvSpPr>
@@ -5434,7 +5434,7 @@
       </p:sp>
       <p:sp>
         <p:nvSpPr>
-          <p:cNvPr id="14" name="Shape 10"/>
+          <p:cNvPr id="13" name="Shape 10"/>
           <p:cNvSpPr/>
           <p:nvPr/>
         </p:nvSpPr>
@@ -5461,7 +5461,7 @@
       </p:sp>
       <p:sp>
         <p:nvSpPr>
-          <p:cNvPr id="15" name="Text 11"/>
+          <p:cNvPr id="14" name="Text 11"/>
           <p:cNvSpPr/>
           <p:nvPr/>
         </p:nvSpPr>
@@ -5500,7 +5500,7 @@
       </p:sp>
       <p:sp>
         <p:nvSpPr>
-          <p:cNvPr id="16" name="Shape 12"/>
+          <p:cNvPr id="15" name="Shape 12"/>
           <p:cNvSpPr/>
           <p:nvPr/>
         </p:nvSpPr>
@@ -5523,7 +5523,7 @@
       </p:sp>
       <p:sp>
         <p:nvSpPr>
-          <p:cNvPr id="17" name="Shape 13"/>
+          <p:cNvPr id="16" name="Shape 13"/>
           <p:cNvSpPr/>
           <p:nvPr/>
         </p:nvSpPr>
@@ -5543,7 +5543,7 @@
       </p:sp>
       <p:sp>
         <p:nvSpPr>
-          <p:cNvPr id="18" name="Shape 14"/>
+          <p:cNvPr id="17" name="Shape 14"/>
           <p:cNvSpPr/>
           <p:nvPr/>
         </p:nvSpPr>
@@ -5570,7 +5570,7 @@
       </p:sp>
       <p:sp>
         <p:nvSpPr>
-          <p:cNvPr id="19" name="Text 15"/>
+          <p:cNvPr id="18" name="Text 15"/>
           <p:cNvSpPr/>
           <p:nvPr/>
         </p:nvSpPr>
@@ -5609,7 +5609,7 @@
       </p:sp>
       <p:sp>
         <p:nvSpPr>
-          <p:cNvPr id="20" name="Shape 16"/>
+          <p:cNvPr id="19" name="Shape 16"/>
           <p:cNvSpPr/>
           <p:nvPr/>
         </p:nvSpPr>
@@ -5632,7 +5632,7 @@
       </p:sp>
       <p:sp>
         <p:nvSpPr>
-          <p:cNvPr id="21" name="Shape 17"/>
+          <p:cNvPr id="20" name="Shape 17"/>
           <p:cNvSpPr/>
           <p:nvPr/>
         </p:nvSpPr>
@@ -5652,7 +5652,7 @@
       </p:sp>
       <p:sp>
         <p:nvSpPr>
-          <p:cNvPr id="22" name="Shape 18"/>
+          <p:cNvPr id="21" name="Shape 18"/>
           <p:cNvSpPr/>
           <p:nvPr/>
         </p:nvSpPr>
@@ -5679,7 +5679,7 @@
       </p:sp>
       <p:sp>
         <p:nvSpPr>
-          <p:cNvPr id="23" name="Text 19"/>
+          <p:cNvPr id="22" name="Text 19"/>
           <p:cNvSpPr/>
           <p:nvPr/>
         </p:nvSpPr>
@@ -5718,7 +5718,7 @@
       </p:sp>
       <p:sp>
         <p:nvSpPr>
-          <p:cNvPr id="24" name="Shape 20"/>
+          <p:cNvPr id="23" name="Shape 20"/>
           <p:cNvSpPr/>
           <p:nvPr/>
         </p:nvSpPr>
@@ -5741,7 +5741,7 @@
       </p:sp>
       <p:sp>
         <p:nvSpPr>
-          <p:cNvPr id="25" name="Shape 21"/>
+          <p:cNvPr id="24" name="Shape 21"/>
           <p:cNvSpPr/>
           <p:nvPr/>
         </p:nvSpPr>
@@ -5761,7 +5761,7 @@
       </p:sp>
       <p:sp>
         <p:nvSpPr>
-          <p:cNvPr id="26" name="Shape 22"/>
+          <p:cNvPr id="25" name="Shape 22"/>
           <p:cNvSpPr/>
           <p:nvPr/>
         </p:nvSpPr>
@@ -5788,7 +5788,7 @@
       </p:sp>
       <p:sp>
         <p:nvSpPr>
-          <p:cNvPr id="27" name="Text 23"/>
+          <p:cNvPr id="26" name="Text 23"/>
           <p:cNvSpPr/>
           <p:nvPr/>
         </p:nvSpPr>
@@ -5827,7 +5827,7 @@
       </p:sp>
       <p:sp>
         <p:nvSpPr>
-          <p:cNvPr id="28" name="Text 24"/>
+          <p:cNvPr id="27" name="Text 24"/>
           <p:cNvSpPr/>
           <p:nvPr/>
         </p:nvSpPr>
@@ -5866,7 +5866,7 @@
       </p:sp>
       <p:sp>
         <p:nvSpPr>
-          <p:cNvPr id="29" name="Shape 25"/>
+          <p:cNvPr id="28" name="Shape 25"/>
           <p:cNvSpPr/>
           <p:nvPr/>
         </p:nvSpPr>
@@ -5888,7 +5888,7 @@
       </p:sp>
       <p:sp>
         <p:nvSpPr>
-          <p:cNvPr id="30" name="Text 26"/>
+          <p:cNvPr id="29" name="Text 26"/>
           <p:cNvSpPr/>
           <p:nvPr/>
         </p:nvSpPr>
@@ -5927,7 +5927,7 @@
       </p:sp>
       <p:sp>
         <p:nvSpPr>
-          <p:cNvPr id="31" name="Text 27"/>
+          <p:cNvPr id="30" name="Text 27"/>
           <p:cNvSpPr/>
           <p:nvPr/>
         </p:nvSpPr>
@@ -7112,7 +7112,7 @@
       </p:graphicFrame>
       <p:sp>
         <p:nvSpPr>
-          <p:cNvPr id="10" name="Shape 5"/>
+          <p:cNvPr id="9" name="Shape 5"/>
           <p:cNvSpPr/>
           <p:nvPr/>
         </p:nvSpPr>
@@ -7134,7 +7134,7 @@
       </p:sp>
       <p:sp>
         <p:nvSpPr>
-          <p:cNvPr id="11" name="Text 6"/>
+          <p:cNvPr id="10" name="Text 6"/>
           <p:cNvSpPr/>
           <p:nvPr/>
         </p:nvSpPr>
@@ -7173,7 +7173,7 @@
       </p:sp>
       <p:sp>
         <p:nvSpPr>
-          <p:cNvPr id="12" name="Text 7"/>
+          <p:cNvPr id="11" name="Text 7"/>
           <p:cNvSpPr/>
           <p:nvPr/>
         </p:nvSpPr>
@@ -7519,7 +7519,7 @@
       </p:pic>
       <p:sp>
         <p:nvSpPr>
-          <p:cNvPr id="10" name="Shape 6"/>
+          <p:cNvPr id="9" name="Shape 6"/>
           <p:cNvSpPr/>
           <p:nvPr/>
         </p:nvSpPr>
@@ -7541,7 +7541,7 @@
       </p:sp>
       <p:sp>
         <p:nvSpPr>
-          <p:cNvPr id="11" name="Text 7"/>
+          <p:cNvPr id="10" name="Text 7"/>
           <p:cNvSpPr/>
           <p:nvPr/>
         </p:nvSpPr>
@@ -7580,7 +7580,7 @@
       </p:sp>
       <p:sp>
         <p:nvSpPr>
-          <p:cNvPr id="12" name="Shape 8"/>
+          <p:cNvPr id="11" name="Shape 8"/>
           <p:cNvSpPr/>
           <p:nvPr/>
         </p:nvSpPr>
@@ -7603,7 +7603,7 @@
       </p:sp>
       <p:sp>
         <p:nvSpPr>
-          <p:cNvPr id="13" name="Shape 9"/>
+          <p:cNvPr id="12" name="Shape 9"/>
           <p:cNvSpPr/>
           <p:nvPr/>
         </p:nvSpPr>
@@ -7623,7 +7623,7 @@
       </p:sp>
       <p:sp>
         <p:nvSpPr>
-          <p:cNvPr id="14" name="Shape 10"/>
+          <p:cNvPr id="13" name="Shape 10"/>
           <p:cNvSpPr/>
           <p:nvPr/>
         </p:nvSpPr>
@@ -7645,7 +7645,7 @@
       </p:sp>
       <p:sp>
         <p:nvSpPr>
-          <p:cNvPr id="15" name="Text 11"/>
+          <p:cNvPr id="14" name="Text 11"/>
           <p:cNvSpPr/>
           <p:nvPr/>
         </p:nvSpPr>
@@ -7684,7 +7684,7 @@
       </p:sp>
       <p:sp>
         <p:nvSpPr>
-          <p:cNvPr id="16" name="Shape 12"/>
+          <p:cNvPr id="15" name="Shape 12"/>
           <p:cNvSpPr/>
           <p:nvPr/>
         </p:nvSpPr>
@@ -7707,7 +7707,7 @@
       </p:sp>
       <p:sp>
         <p:nvSpPr>
-          <p:cNvPr id="17" name="Shape 13"/>
+          <p:cNvPr id="16" name="Shape 13"/>
           <p:cNvSpPr/>
           <p:nvPr/>
         </p:nvSpPr>
@@ -7727,7 +7727,7 @@
       </p:sp>
       <p:sp>
         <p:nvSpPr>
-          <p:cNvPr id="18" name="Shape 14"/>
+          <p:cNvPr id="17" name="Shape 14"/>
           <p:cNvSpPr/>
           <p:nvPr/>
         </p:nvSpPr>
@@ -7749,7 +7749,7 @@
       </p:sp>
       <p:sp>
         <p:nvSpPr>
-          <p:cNvPr id="19" name="Text 15"/>
+          <p:cNvPr id="18" name="Text 15"/>
           <p:cNvSpPr/>
           <p:nvPr/>
         </p:nvSpPr>
@@ -7788,7 +7788,7 @@
       </p:sp>
       <p:sp>
         <p:nvSpPr>
-          <p:cNvPr id="20" name="Shape 16"/>
+          <p:cNvPr id="19" name="Shape 16"/>
           <p:cNvSpPr/>
           <p:nvPr/>
         </p:nvSpPr>
@@ -7815,7 +7815,7 @@
       </p:sp>
       <p:sp>
         <p:nvSpPr>
-          <p:cNvPr id="21" name="Text 17"/>
+          <p:cNvPr id="20" name="Text 17"/>
           <p:cNvSpPr/>
           <p:nvPr/>
         </p:nvSpPr>
@@ -7854,7 +7854,7 @@
       </p:sp>
       <p:sp>
         <p:nvSpPr>
-          <p:cNvPr id="22" name="Text 18"/>
+          <p:cNvPr id="21" name="Text 18"/>
           <p:cNvSpPr/>
           <p:nvPr/>
         </p:nvSpPr>
@@ -7896,7 +7896,7 @@
       </p:sp>
       <p:sp>
         <p:nvSpPr>
-          <p:cNvPr id="23" name="Shape 19"/>
+          <p:cNvPr id="22" name="Shape 19"/>
           <p:cNvSpPr/>
           <p:nvPr/>
         </p:nvSpPr>
@@ -7918,7 +7918,7 @@
       </p:sp>
       <p:sp>
         <p:nvSpPr>
-          <p:cNvPr id="24" name="Text 20"/>
+          <p:cNvPr id="23" name="Text 20"/>
           <p:cNvSpPr/>
           <p:nvPr/>
         </p:nvSpPr>
@@ -7957,7 +7957,7 @@
       </p:sp>
       <p:sp>
         <p:nvSpPr>
-          <p:cNvPr id="25" name="Text 21"/>
+          <p:cNvPr id="24" name="Text 21"/>
           <p:cNvSpPr/>
           <p:nvPr/>
         </p:nvSpPr>
@@ -7999,7 +7999,7 @@
       </p:sp>
       <p:sp>
         <p:nvSpPr>
-          <p:cNvPr id="26" name="Shape 22"/>
+          <p:cNvPr id="25" name="Shape 22"/>
           <p:cNvSpPr/>
           <p:nvPr/>
         </p:nvSpPr>
@@ -8021,7 +8021,7 @@
       </p:sp>
       <p:sp>
         <p:nvSpPr>
-          <p:cNvPr id="27" name="Text 23"/>
+          <p:cNvPr id="26" name="Text 23"/>
           <p:cNvSpPr/>
           <p:nvPr/>
         </p:nvSpPr>
@@ -8306,7 +8306,7 @@
       </p:pic>
       <p:sp>
         <p:nvSpPr>
-          <p:cNvPr id="8" name="Shape 4"/>
+          <p:cNvPr id="7" name="Shape 4"/>
           <p:cNvSpPr/>
           <p:nvPr/>
         </p:nvSpPr>
@@ -8333,7 +8333,7 @@
       </p:sp>
       <p:sp>
         <p:nvSpPr>
-          <p:cNvPr id="9" name="Text 5"/>
+          <p:cNvPr id="8" name="Text 5"/>
           <p:cNvSpPr/>
           <p:nvPr/>
         </p:nvSpPr>
@@ -8526,7 +8526,7 @@
       </p:sp>
       <p:sp>
         <p:nvSpPr>
-          <p:cNvPr id="10" name="Shape 6"/>
+          <p:cNvPr id="9" name="Shape 6"/>
           <p:cNvSpPr/>
           <p:nvPr/>
         </p:nvSpPr>
@@ -8548,7 +8548,7 @@
       </p:sp>
       <p:sp>
         <p:nvSpPr>
-          <p:cNvPr id="11" name="Shape 7"/>
+          <p:cNvPr id="10" name="Shape 7"/>
           <p:cNvSpPr/>
           <p:nvPr/>
         </p:nvSpPr>
@@ -8568,7 +8568,7 @@
       </p:sp>
       <p:sp>
         <p:nvSpPr>
-          <p:cNvPr id="12" name="Text 8"/>
+          <p:cNvPr id="11" name="Text 8"/>
           <p:cNvSpPr/>
           <p:nvPr/>
         </p:nvSpPr>
@@ -8607,7 +8607,7 @@
       </p:sp>
       <p:sp>
         <p:nvSpPr>
-          <p:cNvPr id="13" name="Text 9"/>
+          <p:cNvPr id="12" name="Text 9"/>
           <p:cNvSpPr/>
           <p:nvPr/>
         </p:nvSpPr>
@@ -8646,7 +8646,7 @@
       </p:sp>
       <p:sp>
         <p:nvSpPr>
-          <p:cNvPr id="14" name="Text 10"/>
+          <p:cNvPr id="13" name="Text 10"/>
           <p:cNvSpPr/>
           <p:nvPr/>
         </p:nvSpPr>
@@ -8688,7 +8688,7 @@
       </p:sp>
       <p:sp>
         <p:nvSpPr>
-          <p:cNvPr id="15" name="Shape 11"/>
+          <p:cNvPr id="14" name="Shape 11"/>
           <p:cNvSpPr/>
           <p:nvPr/>
         </p:nvSpPr>
@@ -8710,7 +8710,7 @@
       </p:sp>
       <p:sp>
         <p:nvSpPr>
-          <p:cNvPr id="16" name="Shape 12"/>
+          <p:cNvPr id="15" name="Shape 12"/>
           <p:cNvSpPr/>
           <p:nvPr/>
         </p:nvSpPr>
@@ -8730,7 +8730,7 @@
       </p:sp>
       <p:sp>
         <p:nvSpPr>
-          <p:cNvPr id="17" name="Text 13"/>
+          <p:cNvPr id="16" name="Text 13"/>
           <p:cNvSpPr/>
           <p:nvPr/>
         </p:nvSpPr>
@@ -8769,7 +8769,7 @@
       </p:sp>
       <p:sp>
         <p:nvSpPr>
-          <p:cNvPr id="18" name="Text 14"/>
+          <p:cNvPr id="17" name="Text 14"/>
           <p:cNvSpPr/>
           <p:nvPr/>
         </p:nvSpPr>
@@ -8808,7 +8808,7 @@
       </p:sp>
       <p:sp>
         <p:nvSpPr>
-          <p:cNvPr id="19" name="Text 15"/>
+          <p:cNvPr id="18" name="Text 15"/>
           <p:cNvSpPr/>
           <p:nvPr/>
         </p:nvSpPr>
@@ -8850,7 +8850,7 @@
       </p:sp>
       <p:sp>
         <p:nvSpPr>
-          <p:cNvPr id="20" name="Shape 16"/>
+          <p:cNvPr id="19" name="Shape 16"/>
           <p:cNvSpPr/>
           <p:nvPr/>
         </p:nvSpPr>
@@ -8872,7 +8872,7 @@
       </p:sp>
       <p:sp>
         <p:nvSpPr>
-          <p:cNvPr id="21" name="Shape 17"/>
+          <p:cNvPr id="20" name="Shape 17"/>
           <p:cNvSpPr/>
           <p:nvPr/>
         </p:nvSpPr>
@@ -8892,7 +8892,7 @@
       </p:sp>
       <p:sp>
         <p:nvSpPr>
-          <p:cNvPr id="22" name="Text 18"/>
+          <p:cNvPr id="21" name="Text 18"/>
           <p:cNvSpPr/>
           <p:nvPr/>
         </p:nvSpPr>
@@ -8931,7 +8931,7 @@
       </p:sp>
       <p:sp>
         <p:nvSpPr>
-          <p:cNvPr id="23" name="Text 19"/>
+          <p:cNvPr id="22" name="Text 19"/>
           <p:cNvSpPr/>
           <p:nvPr/>
         </p:nvSpPr>
@@ -8970,7 +8970,7 @@
       </p:sp>
       <p:sp>
         <p:nvSpPr>
-          <p:cNvPr id="24" name="Text 20"/>
+          <p:cNvPr id="23" name="Text 20"/>
           <p:cNvSpPr/>
           <p:nvPr/>
         </p:nvSpPr>
@@ -9012,7 +9012,7 @@
       </p:sp>
       <p:sp>
         <p:nvSpPr>
-          <p:cNvPr id="25" name="Shape 21"/>
+          <p:cNvPr id="24" name="Shape 21"/>
           <p:cNvSpPr/>
           <p:nvPr/>
         </p:nvSpPr>
@@ -9034,7 +9034,7 @@
       </p:sp>
       <p:sp>
         <p:nvSpPr>
-          <p:cNvPr id="26" name="Text 22"/>
+          <p:cNvPr id="25" name="Text 22"/>
           <p:cNvSpPr/>
           <p:nvPr/>
         </p:nvSpPr>
@@ -9280,7 +9280,7 @@
       </p:pic>
       <p:sp>
         <p:nvSpPr>
-          <p:cNvPr id="7" name="Shape 3"/>
+          <p:cNvPr id="6" name="Shape 3"/>
           <p:cNvSpPr/>
           <p:nvPr/>
         </p:nvSpPr>
@@ -9302,7 +9302,7 @@
       </p:sp>
       <p:sp>
         <p:nvSpPr>
-          <p:cNvPr id="8" name="Shape 4"/>
+          <p:cNvPr id="7" name="Shape 4"/>
           <p:cNvSpPr/>
           <p:nvPr/>
         </p:nvSpPr>
@@ -9322,7 +9322,7 @@
       </p:sp>
       <p:sp>
         <p:nvSpPr>
-          <p:cNvPr id="9" name="Text 5"/>
+          <p:cNvPr id="8" name="Text 5"/>
           <p:cNvSpPr/>
           <p:nvPr/>
         </p:nvSpPr>
@@ -9361,7 +9361,7 @@
       </p:sp>
       <p:sp>
         <p:nvSpPr>
-          <p:cNvPr id="10" name="Text 6"/>
+          <p:cNvPr id="9" name="Text 6"/>
           <p:cNvSpPr/>
           <p:nvPr/>
         </p:nvSpPr>
@@ -9400,7 +9400,7 @@
       </p:sp>
       <p:sp>
         <p:nvSpPr>
-          <p:cNvPr id="11" name="Text 7"/>
+          <p:cNvPr id="10" name="Text 7"/>
           <p:cNvSpPr/>
           <p:nvPr/>
         </p:nvSpPr>
@@ -9442,7 +9442,7 @@
       </p:sp>
       <p:sp>
         <p:nvSpPr>
-          <p:cNvPr id="12" name="Shape 8"/>
+          <p:cNvPr id="11" name="Shape 8"/>
           <p:cNvSpPr/>
           <p:nvPr/>
         </p:nvSpPr>
@@ -9464,7 +9464,7 @@
       </p:sp>
       <p:sp>
         <p:nvSpPr>
-          <p:cNvPr id="13" name="Shape 9"/>
+          <p:cNvPr id="12" name="Shape 9"/>
           <p:cNvSpPr/>
           <p:nvPr/>
         </p:nvSpPr>
@@ -9484,7 +9484,7 @@
       </p:sp>
       <p:sp>
         <p:nvSpPr>
-          <p:cNvPr id="14" name="Text 10"/>
+          <p:cNvPr id="13" name="Text 10"/>
           <p:cNvSpPr/>
           <p:nvPr/>
         </p:nvSpPr>
@@ -9523,7 +9523,7 @@
       </p:sp>
       <p:sp>
         <p:nvSpPr>
-          <p:cNvPr id="15" name="Text 11"/>
+          <p:cNvPr id="14" name="Text 11"/>
           <p:cNvSpPr/>
           <p:nvPr/>
         </p:nvSpPr>
@@ -9562,7 +9562,7 @@
       </p:sp>
       <p:sp>
         <p:nvSpPr>
-          <p:cNvPr id="16" name="Text 12"/>
+          <p:cNvPr id="15" name="Text 12"/>
           <p:cNvSpPr/>
           <p:nvPr/>
         </p:nvSpPr>
@@ -9604,7 +9604,7 @@
       </p:sp>
       <p:sp>
         <p:nvSpPr>
-          <p:cNvPr id="17" name="Shape 13"/>
+          <p:cNvPr id="16" name="Shape 13"/>
           <p:cNvSpPr/>
           <p:nvPr/>
         </p:nvSpPr>
@@ -9626,7 +9626,7 @@
       </p:sp>
       <p:sp>
         <p:nvSpPr>
-          <p:cNvPr id="18" name="Shape 14"/>
+          <p:cNvPr id="17" name="Shape 14"/>
           <p:cNvSpPr/>
           <p:nvPr/>
         </p:nvSpPr>
@@ -9646,7 +9646,7 @@
       </p:sp>
       <p:sp>
         <p:nvSpPr>
-          <p:cNvPr id="19" name="Text 15"/>
+          <p:cNvPr id="18" name="Text 15"/>
           <p:cNvSpPr/>
           <p:nvPr/>
         </p:nvSpPr>
@@ -9685,7 +9685,7 @@
       </p:sp>
       <p:sp>
         <p:nvSpPr>
-          <p:cNvPr id="20" name="Text 16"/>
+          <p:cNvPr id="19" name="Text 16"/>
           <p:cNvSpPr/>
           <p:nvPr/>
         </p:nvSpPr>
@@ -9724,7 +9724,7 @@
       </p:sp>
       <p:sp>
         <p:nvSpPr>
-          <p:cNvPr id="21" name="Text 17"/>
+          <p:cNvPr id="20" name="Text 17"/>
           <p:cNvSpPr/>
           <p:nvPr/>
         </p:nvSpPr>
@@ -9766,7 +9766,7 @@
       </p:sp>
       <p:sp>
         <p:nvSpPr>
-          <p:cNvPr id="22" name="Shape 18"/>
+          <p:cNvPr id="21" name="Shape 18"/>
           <p:cNvSpPr/>
           <p:nvPr/>
         </p:nvSpPr>
@@ -9788,7 +9788,7 @@
       </p:sp>
       <p:sp>
         <p:nvSpPr>
-          <p:cNvPr id="23" name="Shape 19"/>
+          <p:cNvPr id="22" name="Shape 19"/>
           <p:cNvSpPr/>
           <p:nvPr/>
         </p:nvSpPr>
@@ -9808,7 +9808,7 @@
       </p:sp>
       <p:sp>
         <p:nvSpPr>
-          <p:cNvPr id="24" name="Text 20"/>
+          <p:cNvPr id="23" name="Text 20"/>
           <p:cNvSpPr/>
           <p:nvPr/>
         </p:nvSpPr>
@@ -9847,7 +9847,7 @@
       </p:sp>
       <p:sp>
         <p:nvSpPr>
-          <p:cNvPr id="25" name="Text 21"/>
+          <p:cNvPr id="24" name="Text 21"/>
           <p:cNvSpPr/>
           <p:nvPr/>
         </p:nvSpPr>
@@ -9886,7 +9886,7 @@
       </p:sp>
       <p:sp>
         <p:nvSpPr>
-          <p:cNvPr id="26" name="Text 22"/>
+          <p:cNvPr id="25" name="Text 22"/>
           <p:cNvSpPr/>
           <p:nvPr/>
         </p:nvSpPr>
@@ -9928,7 +9928,7 @@
       </p:sp>
       <p:sp>
         <p:nvSpPr>
-          <p:cNvPr id="27" name="Shape 23"/>
+          <p:cNvPr id="26" name="Shape 23"/>
           <p:cNvSpPr/>
           <p:nvPr/>
         </p:nvSpPr>
@@ -9950,7 +9950,7 @@
       </p:sp>
       <p:sp>
         <p:nvSpPr>
-          <p:cNvPr id="28" name="Text 24"/>
+          <p:cNvPr id="27" name="Text 24"/>
           <p:cNvSpPr/>
           <p:nvPr/>
         </p:nvSpPr>
@@ -9989,7 +9989,7 @@
       </p:sp>
       <p:sp>
         <p:nvSpPr>
-          <p:cNvPr id="29" name="Text 25"/>
+          <p:cNvPr id="28" name="Text 25"/>
           <p:cNvSpPr/>
           <p:nvPr/>
         </p:nvSpPr>
@@ -10235,7 +10235,7 @@
       </p:pic>
       <p:sp>
         <p:nvSpPr>
-          <p:cNvPr id="7" name="Shape 3"/>
+          <p:cNvPr id="6" name="Shape 3"/>
           <p:cNvSpPr/>
           <p:nvPr/>
         </p:nvSpPr>
@@ -10255,7 +10255,7 @@
       </p:sp>
       <p:sp>
         <p:nvSpPr>
-          <p:cNvPr id="8" name="Text 4"/>
+          <p:cNvPr id="7" name="Text 4"/>
           <p:cNvSpPr/>
           <p:nvPr/>
         </p:nvSpPr>
@@ -10294,7 +10294,7 @@
       </p:sp>
       <p:sp>
         <p:nvSpPr>
-          <p:cNvPr id="9" name="Text 5"/>
+          <p:cNvPr id="8" name="Text 5"/>
           <p:cNvSpPr/>
           <p:nvPr/>
         </p:nvSpPr>
@@ -10347,7 +10347,7 @@
       </p:sp>
       <p:sp>
         <p:nvSpPr>
-          <p:cNvPr id="10" name="Shape 6"/>
+          <p:cNvPr id="9" name="Shape 6"/>
           <p:cNvSpPr/>
           <p:nvPr/>
         </p:nvSpPr>
@@ -10367,7 +10367,7 @@
       </p:sp>
       <p:sp>
         <p:nvSpPr>
-          <p:cNvPr id="11" name="Text 7"/>
+          <p:cNvPr id="10" name="Text 7"/>
           <p:cNvSpPr/>
           <p:nvPr/>
         </p:nvSpPr>
@@ -10406,7 +10406,7 @@
       </p:sp>
       <p:sp>
         <p:nvSpPr>
-          <p:cNvPr id="12" name="Text 8"/>
+          <p:cNvPr id="11" name="Text 8"/>
           <p:cNvSpPr/>
           <p:nvPr/>
         </p:nvSpPr>
@@ -10459,7 +10459,7 @@
       </p:sp>
       <p:sp>
         <p:nvSpPr>
-          <p:cNvPr id="13" name="Shape 9"/>
+          <p:cNvPr id="12" name="Shape 9"/>
           <p:cNvSpPr/>
           <p:nvPr/>
         </p:nvSpPr>
@@ -10479,7 +10479,7 @@
       </p:sp>
       <p:sp>
         <p:nvSpPr>
-          <p:cNvPr id="14" name="Text 10"/>
+          <p:cNvPr id="13" name="Text 10"/>
           <p:cNvSpPr/>
           <p:nvPr/>
         </p:nvSpPr>
@@ -10518,7 +10518,7 @@
       </p:sp>
       <p:sp>
         <p:nvSpPr>
-          <p:cNvPr id="15" name="Text 11"/>
+          <p:cNvPr id="14" name="Text 11"/>
           <p:cNvSpPr/>
           <p:nvPr/>
         </p:nvSpPr>
@@ -10571,7 +10571,7 @@
       </p:sp>
       <p:sp>
         <p:nvSpPr>
-          <p:cNvPr id="16" name="Shape 12"/>
+          <p:cNvPr id="15" name="Shape 12"/>
           <p:cNvSpPr/>
           <p:nvPr/>
         </p:nvSpPr>
@@ -10591,7 +10591,7 @@
       </p:sp>
       <p:sp>
         <p:nvSpPr>
-          <p:cNvPr id="17" name="Text 13"/>
+          <p:cNvPr id="16" name="Text 13"/>
           <p:cNvSpPr/>
           <p:nvPr/>
         </p:nvSpPr>
@@ -10630,7 +10630,7 @@
       </p:sp>
       <p:sp>
         <p:nvSpPr>
-          <p:cNvPr id="18" name="Text 14"/>
+          <p:cNvPr id="17" name="Text 14"/>
           <p:cNvSpPr/>
           <p:nvPr/>
         </p:nvSpPr>
@@ -10683,7 +10683,7 @@
       </p:sp>
       <p:sp>
         <p:nvSpPr>
-          <p:cNvPr id="19" name="Shape 15"/>
+          <p:cNvPr id="18" name="Shape 15"/>
           <p:cNvSpPr/>
           <p:nvPr/>
         </p:nvSpPr>
@@ -10703,7 +10703,7 @@
       </p:sp>
       <p:sp>
         <p:nvSpPr>
-          <p:cNvPr id="20" name="Text 16"/>
+          <p:cNvPr id="19" name="Text 16"/>
           <p:cNvSpPr/>
           <p:nvPr/>
         </p:nvSpPr>
@@ -10742,7 +10742,7 @@
       </p:sp>
       <p:sp>
         <p:nvSpPr>
-          <p:cNvPr id="21" name="Text 17"/>
+          <p:cNvPr id="20" name="Text 17"/>
           <p:cNvSpPr/>
           <p:nvPr/>
         </p:nvSpPr>
@@ -10999,7 +10999,7 @@
       </p:pic>
       <p:sp>
         <p:nvSpPr>
-          <p:cNvPr id="7" name="Shape 3"/>
+          <p:cNvPr id="6" name="Shape 3"/>
           <p:cNvSpPr/>
           <p:nvPr/>
         </p:nvSpPr>
@@ -11021,7 +11021,7 @@
       </p:sp>
       <p:sp>
         <p:nvSpPr>
-          <p:cNvPr id="8" name="Text 4"/>
+          <p:cNvPr id="7" name="Text 4"/>
           <p:cNvSpPr/>
           <p:nvPr/>
         </p:nvSpPr>
@@ -11060,7 +11060,7 @@
       </p:sp>
       <p:sp>
         <p:nvSpPr>
-          <p:cNvPr id="9" name="Text 5"/>
+          <p:cNvPr id="8" name="Text 5"/>
           <p:cNvSpPr/>
           <p:nvPr/>
         </p:nvSpPr>
@@ -11102,7 +11102,7 @@
       </p:sp>
       <p:sp>
         <p:nvSpPr>
-          <p:cNvPr id="10" name="Shape 6"/>
+          <p:cNvPr id="9" name="Shape 6"/>
           <p:cNvSpPr/>
           <p:nvPr/>
         </p:nvSpPr>
@@ -11124,7 +11124,7 @@
       </p:sp>
       <p:sp>
         <p:nvSpPr>
-          <p:cNvPr id="11" name="Text 7"/>
+          <p:cNvPr id="10" name="Text 7"/>
           <p:cNvSpPr/>
           <p:nvPr/>
         </p:nvSpPr>
@@ -11163,7 +11163,7 @@
       </p:sp>
       <p:sp>
         <p:nvSpPr>
-          <p:cNvPr id="12" name="Text 8"/>
+          <p:cNvPr id="11" name="Text 8"/>
           <p:cNvSpPr/>
           <p:nvPr/>
         </p:nvSpPr>
@@ -11205,7 +11205,7 @@
       </p:sp>
       <p:sp>
         <p:nvSpPr>
-          <p:cNvPr id="13" name="Shape 9"/>
+          <p:cNvPr id="12" name="Shape 9"/>
           <p:cNvSpPr/>
           <p:nvPr/>
         </p:nvSpPr>
@@ -11232,7 +11232,7 @@
       </p:sp>
       <p:sp>
         <p:nvSpPr>
-          <p:cNvPr id="14" name="Text 10"/>
+          <p:cNvPr id="13" name="Text 10"/>
           <p:cNvSpPr/>
           <p:nvPr/>
         </p:nvSpPr>
@@ -11271,7 +11271,7 @@
       </p:sp>
       <p:sp>
         <p:nvSpPr>
-          <p:cNvPr id="15" name="Text 11"/>
+          <p:cNvPr id="14" name="Text 11"/>
           <p:cNvSpPr/>
           <p:nvPr/>
         </p:nvSpPr>
@@ -11313,7 +11313,7 @@
       </p:sp>
       <p:sp>
         <p:nvSpPr>
-          <p:cNvPr id="16" name="Shape 12"/>
+          <p:cNvPr id="15" name="Shape 12"/>
           <p:cNvSpPr/>
           <p:nvPr/>
         </p:nvSpPr>
@@ -11340,7 +11340,7 @@
       </p:sp>
       <p:sp>
         <p:nvSpPr>
-          <p:cNvPr id="17" name="Text 13"/>
+          <p:cNvPr id="16" name="Text 13"/>
           <p:cNvSpPr/>
           <p:nvPr/>
         </p:nvSpPr>
@@ -11586,7 +11586,7 @@
       </p:pic>
       <p:sp>
         <p:nvSpPr>
-          <p:cNvPr id="7" name="Shape 3"/>
+          <p:cNvPr id="6" name="Shape 3"/>
           <p:cNvSpPr/>
           <p:nvPr/>
         </p:nvSpPr>
@@ -11613,7 +11613,7 @@
       </p:sp>
       <p:sp>
         <p:nvSpPr>
-          <p:cNvPr id="8" name="Shape 4"/>
+          <p:cNvPr id="7" name="Shape 4"/>
           <p:cNvSpPr/>
           <p:nvPr/>
         </p:nvSpPr>
@@ -11640,7 +11640,7 @@
       </p:sp>
       <p:sp>
         <p:nvSpPr>
-          <p:cNvPr id="9" name="Shape 5"/>
+          <p:cNvPr id="8" name="Shape 5"/>
           <p:cNvSpPr/>
           <p:nvPr/>
         </p:nvSpPr>
@@ -11660,7 +11660,7 @@
       </p:sp>
       <p:sp>
         <p:nvSpPr>
-          <p:cNvPr id="10" name="Shape 6"/>
+          <p:cNvPr id="9" name="Shape 6"/>
           <p:cNvSpPr/>
           <p:nvPr/>
         </p:nvSpPr>
@@ -11680,7 +11680,7 @@
       </p:sp>
       <p:sp>
         <p:nvSpPr>
-          <p:cNvPr id="11" name="Text 7"/>
+          <p:cNvPr id="10" name="Text 7"/>
           <p:cNvSpPr/>
           <p:nvPr/>
         </p:nvSpPr>
@@ -11719,7 +11719,7 @@
       </p:sp>
       <p:sp>
         <p:nvSpPr>
-          <p:cNvPr id="12" name="Shape 8"/>
+          <p:cNvPr id="11" name="Shape 8"/>
           <p:cNvSpPr/>
           <p:nvPr/>
         </p:nvSpPr>
@@ -11746,7 +11746,7 @@
       </p:sp>
       <p:sp>
         <p:nvSpPr>
-          <p:cNvPr id="13" name="Shape 9"/>
+          <p:cNvPr id="12" name="Shape 9"/>
           <p:cNvSpPr/>
           <p:nvPr/>
         </p:nvSpPr>
@@ -11766,7 +11766,7 @@
       </p:sp>
       <p:sp>
         <p:nvSpPr>
-          <p:cNvPr id="14" name="Shape 10"/>
+          <p:cNvPr id="13" name="Shape 10"/>
           <p:cNvSpPr/>
           <p:nvPr/>
         </p:nvSpPr>
@@ -11786,7 +11786,7 @@
       </p:sp>
       <p:sp>
         <p:nvSpPr>
-          <p:cNvPr id="15" name="Text 11"/>
+          <p:cNvPr id="14" name="Text 11"/>
           <p:cNvSpPr/>
           <p:nvPr/>
         </p:nvSpPr>
@@ -11825,7 +11825,7 @@
       </p:sp>
       <p:sp>
         <p:nvSpPr>
-          <p:cNvPr id="16" name="Shape 12"/>
+          <p:cNvPr id="15" name="Shape 12"/>
           <p:cNvSpPr/>
           <p:nvPr/>
         </p:nvSpPr>
@@ -11852,7 +11852,7 @@
       </p:sp>
       <p:sp>
         <p:nvSpPr>
-          <p:cNvPr id="17" name="Shape 13"/>
+          <p:cNvPr id="16" name="Shape 13"/>
           <p:cNvSpPr/>
           <p:nvPr/>
         </p:nvSpPr>
@@ -11872,7 +11872,7 @@
       </p:sp>
       <p:sp>
         <p:nvSpPr>
-          <p:cNvPr id="18" name="Shape 14"/>
+          <p:cNvPr id="17" name="Shape 14"/>
           <p:cNvSpPr/>
           <p:nvPr/>
         </p:nvSpPr>
@@ -11892,7 +11892,7 @@
       </p:sp>
       <p:sp>
         <p:nvSpPr>
-          <p:cNvPr id="19" name="Text 15"/>
+          <p:cNvPr id="18" name="Text 15"/>
           <p:cNvSpPr/>
           <p:nvPr/>
         </p:nvSpPr>
@@ -11931,7 +11931,7 @@
       </p:sp>
       <p:sp>
         <p:nvSpPr>
-          <p:cNvPr id="20" name="Shape 16"/>
+          <p:cNvPr id="19" name="Shape 16"/>
           <p:cNvSpPr/>
           <p:nvPr/>
         </p:nvSpPr>
@@ -11958,7 +11958,7 @@
       </p:sp>
       <p:sp>
         <p:nvSpPr>
-          <p:cNvPr id="21" name="Shape 17"/>
+          <p:cNvPr id="20" name="Shape 17"/>
           <p:cNvSpPr/>
           <p:nvPr/>
         </p:nvSpPr>
@@ -11978,7 +11978,7 @@
       </p:sp>
       <p:sp>
         <p:nvSpPr>
-          <p:cNvPr id="22" name="Shape 18"/>
+          <p:cNvPr id="21" name="Shape 18"/>
           <p:cNvSpPr/>
           <p:nvPr/>
         </p:nvSpPr>
@@ -11998,7 +11998,7 @@
       </p:sp>
       <p:sp>
         <p:nvSpPr>
-          <p:cNvPr id="23" name="Text 19"/>
+          <p:cNvPr id="22" name="Text 19"/>
           <p:cNvSpPr/>
           <p:nvPr/>
         </p:nvSpPr>
@@ -12037,7 +12037,7 @@
       </p:sp>
       <p:sp>
         <p:nvSpPr>
-          <p:cNvPr id="24" name="Text 20"/>
+          <p:cNvPr id="23" name="Text 20"/>
           <p:cNvSpPr/>
           <p:nvPr/>
         </p:nvSpPr>
@@ -12322,7 +12322,7 @@
       </p:pic>
       <p:sp>
         <p:nvSpPr>
-          <p:cNvPr id="8" name="Shape 4"/>
+          <p:cNvPr id="7" name="Shape 4"/>
           <p:cNvSpPr/>
           <p:nvPr/>
         </p:nvSpPr>
@@ -12349,7 +12349,7 @@
       </p:sp>
       <p:sp>
         <p:nvSpPr>
-          <p:cNvPr id="9" name="Shape 5"/>
+          <p:cNvPr id="8" name="Shape 5"/>
           <p:cNvSpPr/>
           <p:nvPr/>
         </p:nvSpPr>
@@ -12369,7 +12369,7 @@
       </p:sp>
       <p:sp>
         <p:nvSpPr>
-          <p:cNvPr id="10" name="Text 6"/>
+          <p:cNvPr id="9" name="Text 6"/>
           <p:cNvSpPr/>
           <p:nvPr/>
         </p:nvSpPr>
@@ -12408,7 +12408,7 @@
       </p:sp>
       <p:sp>
         <p:nvSpPr>
-          <p:cNvPr id="11" name="Text 7"/>
+          <p:cNvPr id="10" name="Text 7"/>
           <p:cNvSpPr/>
           <p:nvPr/>
         </p:nvSpPr>
@@ -12447,7 +12447,7 @@
       </p:sp>
       <p:sp>
         <p:nvSpPr>
-          <p:cNvPr id="12" name="Text 8"/>
+          <p:cNvPr id="11" name="Text 8"/>
           <p:cNvSpPr/>
           <p:nvPr/>
         </p:nvSpPr>
@@ -12489,7 +12489,7 @@
       </p:sp>
       <p:sp>
         <p:nvSpPr>
-          <p:cNvPr id="13" name="Shape 9"/>
+          <p:cNvPr id="12" name="Shape 9"/>
           <p:cNvSpPr/>
           <p:nvPr/>
         </p:nvSpPr>
@@ -12516,7 +12516,7 @@
       </p:sp>
       <p:sp>
         <p:nvSpPr>
-          <p:cNvPr id="14" name="Shape 10"/>
+          <p:cNvPr id="13" name="Shape 10"/>
           <p:cNvSpPr/>
           <p:nvPr/>
         </p:nvSpPr>
@@ -12536,7 +12536,7 @@
       </p:sp>
       <p:sp>
         <p:nvSpPr>
-          <p:cNvPr id="15" name="Text 11"/>
+          <p:cNvPr id="14" name="Text 11"/>
           <p:cNvSpPr/>
           <p:nvPr/>
         </p:nvSpPr>
@@ -12575,7 +12575,7 @@
       </p:sp>
       <p:sp>
         <p:nvSpPr>
-          <p:cNvPr id="16" name="Text 12"/>
+          <p:cNvPr id="15" name="Text 12"/>
           <p:cNvSpPr/>
           <p:nvPr/>
         </p:nvSpPr>
@@ -12614,7 +12614,7 @@
       </p:sp>
       <p:sp>
         <p:nvSpPr>
-          <p:cNvPr id="17" name="Text 13"/>
+          <p:cNvPr id="16" name="Text 13"/>
           <p:cNvSpPr/>
           <p:nvPr/>
         </p:nvSpPr>
@@ -12656,7 +12656,7 @@
       </p:sp>
       <p:sp>
         <p:nvSpPr>
-          <p:cNvPr id="18" name="Shape 14"/>
+          <p:cNvPr id="17" name="Shape 14"/>
           <p:cNvSpPr/>
           <p:nvPr/>
         </p:nvSpPr>
@@ -12683,7 +12683,7 @@
       </p:sp>
       <p:sp>
         <p:nvSpPr>
-          <p:cNvPr id="19" name="Shape 15"/>
+          <p:cNvPr id="18" name="Shape 15"/>
           <p:cNvSpPr/>
           <p:nvPr/>
         </p:nvSpPr>
@@ -12703,7 +12703,7 @@
       </p:sp>
       <p:sp>
         <p:nvSpPr>
-          <p:cNvPr id="20" name="Text 16"/>
+          <p:cNvPr id="19" name="Text 16"/>
           <p:cNvSpPr/>
           <p:nvPr/>
         </p:nvSpPr>
@@ -12742,7 +12742,7 @@
       </p:sp>
       <p:sp>
         <p:nvSpPr>
-          <p:cNvPr id="21" name="Text 17"/>
+          <p:cNvPr id="20" name="Text 17"/>
           <p:cNvSpPr/>
           <p:nvPr/>
         </p:nvSpPr>
@@ -12781,7 +12781,7 @@
       </p:sp>
       <p:sp>
         <p:nvSpPr>
-          <p:cNvPr id="22" name="Text 18"/>
+          <p:cNvPr id="21" name="Text 18"/>
           <p:cNvSpPr/>
           <p:nvPr/>
         </p:nvSpPr>
@@ -12823,7 +12823,7 @@
       </p:sp>
       <p:sp>
         <p:nvSpPr>
-          <p:cNvPr id="23" name="Shape 19"/>
+          <p:cNvPr id="22" name="Shape 19"/>
           <p:cNvSpPr/>
           <p:nvPr/>
         </p:nvSpPr>
@@ -12850,7 +12850,7 @@
       </p:sp>
       <p:sp>
         <p:nvSpPr>
-          <p:cNvPr id="24" name="Shape 20"/>
+          <p:cNvPr id="23" name="Shape 20"/>
           <p:cNvSpPr/>
           <p:nvPr/>
         </p:nvSpPr>
@@ -12870,7 +12870,7 @@
       </p:sp>
       <p:sp>
         <p:nvSpPr>
-          <p:cNvPr id="25" name="Text 21"/>
+          <p:cNvPr id="24" name="Text 21"/>
           <p:cNvSpPr/>
           <p:nvPr/>
         </p:nvSpPr>
@@ -12909,7 +12909,7 @@
       </p:sp>
       <p:sp>
         <p:nvSpPr>
-          <p:cNvPr id="26" name="Text 22"/>
+          <p:cNvPr id="25" name="Text 22"/>
           <p:cNvSpPr/>
           <p:nvPr/>
         </p:nvSpPr>
@@ -12948,7 +12948,7 @@
       </p:sp>
       <p:sp>
         <p:nvSpPr>
-          <p:cNvPr id="27" name="Text 23"/>
+          <p:cNvPr id="26" name="Text 23"/>
           <p:cNvSpPr/>
           <p:nvPr/>
         </p:nvSpPr>
@@ -12990,7 +12990,7 @@
       </p:sp>
       <p:sp>
         <p:nvSpPr>
-          <p:cNvPr id="28" name="Shape 24"/>
+          <p:cNvPr id="27" name="Shape 24"/>
           <p:cNvSpPr/>
           <p:nvPr/>
         </p:nvSpPr>
@@ -13017,7 +13017,7 @@
       </p:sp>
       <p:sp>
         <p:nvSpPr>
-          <p:cNvPr id="29" name="Shape 25"/>
+          <p:cNvPr id="28" name="Shape 25"/>
           <p:cNvSpPr/>
           <p:nvPr/>
         </p:nvSpPr>
@@ -13037,7 +13037,7 @@
       </p:sp>
       <p:sp>
         <p:nvSpPr>
-          <p:cNvPr id="30" name="Text 26"/>
+          <p:cNvPr id="29" name="Text 26"/>
           <p:cNvSpPr/>
           <p:nvPr/>
         </p:nvSpPr>
@@ -13076,7 +13076,7 @@
       </p:sp>
       <p:sp>
         <p:nvSpPr>
-          <p:cNvPr id="31" name="Text 27"/>
+          <p:cNvPr id="30" name="Text 27"/>
           <p:cNvSpPr/>
           <p:nvPr/>
         </p:nvSpPr>
@@ -13115,7 +13115,7 @@
       </p:sp>
       <p:sp>
         <p:nvSpPr>
-          <p:cNvPr id="32" name="Text 28"/>
+          <p:cNvPr id="31" name="Text 28"/>
           <p:cNvSpPr/>
           <p:nvPr/>
         </p:nvSpPr>
@@ -13361,7 +13361,7 @@
       </p:pic>
       <p:sp>
         <p:nvSpPr>
-          <p:cNvPr id="7" name="Shape 3"/>
+          <p:cNvPr id="6" name="Shape 3"/>
           <p:cNvSpPr/>
           <p:nvPr/>
         </p:nvSpPr>
@@ -13388,7 +13388,7 @@
       </p:sp>
       <p:sp>
         <p:nvSpPr>
-          <p:cNvPr id="8" name="Shape 4"/>
+          <p:cNvPr id="7" name="Shape 4"/>
           <p:cNvSpPr/>
           <p:nvPr/>
         </p:nvSpPr>
@@ -13408,7 +13408,7 @@
       </p:sp>
       <p:sp>
         <p:nvSpPr>
-          <p:cNvPr id="9" name="Shape 5"/>
+          <p:cNvPr id="8" name="Shape 5"/>
           <p:cNvSpPr/>
           <p:nvPr/>
         </p:nvSpPr>
@@ -13428,7 +13428,7 @@
       </p:sp>
       <p:sp>
         <p:nvSpPr>
-          <p:cNvPr id="10" name="Shape 6"/>
+          <p:cNvPr id="9" name="Shape 6"/>
           <p:cNvSpPr/>
           <p:nvPr/>
         </p:nvSpPr>
@@ -13448,7 +13448,7 @@
       </p:sp>
       <p:sp>
         <p:nvSpPr>
-          <p:cNvPr id="11" name="Text 7"/>
+          <p:cNvPr id="10" name="Text 7"/>
           <p:cNvSpPr/>
           <p:nvPr/>
         </p:nvSpPr>
@@ -13501,7 +13501,7 @@
       </p:sp>
       <p:sp>
         <p:nvSpPr>
-          <p:cNvPr id="12" name="Shape 8"/>
+          <p:cNvPr id="11" name="Shape 8"/>
           <p:cNvSpPr/>
           <p:nvPr/>
         </p:nvSpPr>
@@ -13528,7 +13528,7 @@
       </p:sp>
       <p:sp>
         <p:nvSpPr>
-          <p:cNvPr id="13" name="Shape 9"/>
+          <p:cNvPr id="12" name="Shape 9"/>
           <p:cNvSpPr/>
           <p:nvPr/>
         </p:nvSpPr>
@@ -13548,7 +13548,7 @@
       </p:sp>
       <p:sp>
         <p:nvSpPr>
-          <p:cNvPr id="14" name="Shape 10"/>
+          <p:cNvPr id="13" name="Shape 10"/>
           <p:cNvSpPr/>
           <p:nvPr/>
         </p:nvSpPr>
@@ -13568,7 +13568,7 @@
       </p:sp>
       <p:sp>
         <p:nvSpPr>
-          <p:cNvPr id="15" name="Shape 11"/>
+          <p:cNvPr id="14" name="Shape 11"/>
           <p:cNvSpPr/>
           <p:nvPr/>
         </p:nvSpPr>
@@ -13588,7 +13588,7 @@
       </p:sp>
       <p:sp>
         <p:nvSpPr>
-          <p:cNvPr id="16" name="Text 12"/>
+          <p:cNvPr id="15" name="Text 12"/>
           <p:cNvSpPr/>
           <p:nvPr/>
         </p:nvSpPr>
@@ -13641,7 +13641,7 @@
       </p:sp>
       <p:sp>
         <p:nvSpPr>
-          <p:cNvPr id="17" name="Shape 13"/>
+          <p:cNvPr id="16" name="Shape 13"/>
           <p:cNvSpPr/>
           <p:nvPr/>
         </p:nvSpPr>
@@ -13668,7 +13668,7 @@
       </p:sp>
       <p:sp>
         <p:nvSpPr>
-          <p:cNvPr id="18" name="Shape 14"/>
+          <p:cNvPr id="17" name="Shape 14"/>
           <p:cNvSpPr/>
           <p:nvPr/>
         </p:nvSpPr>
@@ -13688,7 +13688,7 @@
       </p:sp>
       <p:sp>
         <p:nvSpPr>
-          <p:cNvPr id="19" name="Shape 15"/>
+          <p:cNvPr id="18" name="Shape 15"/>
           <p:cNvSpPr/>
           <p:nvPr/>
         </p:nvSpPr>
@@ -13708,7 +13708,7 @@
       </p:sp>
       <p:sp>
         <p:nvSpPr>
-          <p:cNvPr id="20" name="Shape 16"/>
+          <p:cNvPr id="19" name="Shape 16"/>
           <p:cNvSpPr/>
           <p:nvPr/>
         </p:nvSpPr>
@@ -13728,7 +13728,7 @@
       </p:sp>
       <p:sp>
         <p:nvSpPr>
-          <p:cNvPr id="21" name="Text 17"/>
+          <p:cNvPr id="20" name="Text 17"/>
           <p:cNvSpPr/>
           <p:nvPr/>
         </p:nvSpPr>
@@ -13781,7 +13781,7 @@
       </p:sp>
       <p:sp>
         <p:nvSpPr>
-          <p:cNvPr id="22" name="Shape 18"/>
+          <p:cNvPr id="21" name="Shape 18"/>
           <p:cNvSpPr/>
           <p:nvPr/>
         </p:nvSpPr>
@@ -13808,7 +13808,7 @@
       </p:sp>
       <p:sp>
         <p:nvSpPr>
-          <p:cNvPr id="23" name="Shape 19"/>
+          <p:cNvPr id="22" name="Shape 19"/>
           <p:cNvSpPr/>
           <p:nvPr/>
         </p:nvSpPr>
@@ -13828,7 +13828,7 @@
       </p:sp>
       <p:sp>
         <p:nvSpPr>
-          <p:cNvPr id="24" name="Shape 20"/>
+          <p:cNvPr id="23" name="Shape 20"/>
           <p:cNvSpPr/>
           <p:nvPr/>
         </p:nvSpPr>
@@ -13848,7 +13848,7 @@
       </p:sp>
       <p:sp>
         <p:nvSpPr>
-          <p:cNvPr id="25" name="Shape 21"/>
+          <p:cNvPr id="24" name="Shape 21"/>
           <p:cNvSpPr/>
           <p:nvPr/>
         </p:nvSpPr>
@@ -13868,7 +13868,7 @@
       </p:sp>
       <p:sp>
         <p:nvSpPr>
-          <p:cNvPr id="26" name="Text 22"/>
+          <p:cNvPr id="25" name="Text 22"/>
           <p:cNvSpPr/>
           <p:nvPr/>
         </p:nvSpPr>
@@ -13921,7 +13921,7 @@
       </p:sp>
       <p:sp>
         <p:nvSpPr>
-          <p:cNvPr id="27" name="Shape 23"/>
+          <p:cNvPr id="26" name="Shape 23"/>
           <p:cNvSpPr/>
           <p:nvPr/>
         </p:nvSpPr>
@@ -13948,7 +13948,7 @@
       </p:sp>
       <p:sp>
         <p:nvSpPr>
-          <p:cNvPr id="28" name="Shape 24"/>
+          <p:cNvPr id="27" name="Shape 24"/>
           <p:cNvSpPr/>
           <p:nvPr/>
         </p:nvSpPr>
@@ -13968,7 +13968,7 @@
       </p:sp>
       <p:sp>
         <p:nvSpPr>
-          <p:cNvPr id="29" name="Shape 25"/>
+          <p:cNvPr id="28" name="Shape 25"/>
           <p:cNvSpPr/>
           <p:nvPr/>
         </p:nvSpPr>
@@ -13988,7 +13988,7 @@
       </p:sp>
       <p:sp>
         <p:nvSpPr>
-          <p:cNvPr id="30" name="Shape 26"/>
+          <p:cNvPr id="29" name="Shape 26"/>
           <p:cNvSpPr/>
           <p:nvPr/>
         </p:nvSpPr>
@@ -14008,7 +14008,7 @@
       </p:sp>
       <p:sp>
         <p:nvSpPr>
-          <p:cNvPr id="31" name="Text 27"/>
+          <p:cNvPr id="30" name="Text 27"/>
           <p:cNvSpPr/>
           <p:nvPr/>
         </p:nvSpPr>
@@ -14265,7 +14265,7 @@
       </p:pic>
       <p:sp>
         <p:nvSpPr>
-          <p:cNvPr id="7" name="Shape 3"/>
+          <p:cNvPr id="6" name="Shape 3"/>
           <p:cNvSpPr/>
           <p:nvPr/>
         </p:nvSpPr>
@@ -14292,7 +14292,7 @@
       </p:sp>
       <p:sp>
         <p:nvSpPr>
-          <p:cNvPr id="8" name="Text 4"/>
+          <p:cNvPr id="7" name="Text 4"/>
           <p:cNvSpPr/>
           <p:nvPr/>
         </p:nvSpPr>
@@ -14331,7 +14331,7 @@
       </p:sp>
       <p:sp>
         <p:nvSpPr>
-          <p:cNvPr id="9" name="Text 5"/>
+          <p:cNvPr id="8" name="Text 5"/>
           <p:cNvSpPr/>
           <p:nvPr/>
         </p:nvSpPr>
@@ -14431,7 +14431,7 @@
       </p:sp>
       <p:sp>
         <p:nvSpPr>
-          <p:cNvPr id="10" name="Shape 6"/>
+          <p:cNvPr id="9" name="Shape 6"/>
           <p:cNvSpPr/>
           <p:nvPr/>
         </p:nvSpPr>
@@ -14453,7 +14453,7 @@
       </p:sp>
       <p:sp>
         <p:nvSpPr>
-          <p:cNvPr id="11" name="Text 7"/>
+          <p:cNvPr id="10" name="Text 7"/>
           <p:cNvSpPr/>
           <p:nvPr/>
         </p:nvSpPr>
@@ -14492,7 +14492,7 @@
       </p:sp>
       <p:sp>
         <p:nvSpPr>
-          <p:cNvPr id="12" name="Text 8"/>
+          <p:cNvPr id="11" name="Text 8"/>
           <p:cNvSpPr/>
           <p:nvPr/>
         </p:nvSpPr>
@@ -14534,7 +14534,7 @@
       </p:sp>
       <p:sp>
         <p:nvSpPr>
-          <p:cNvPr id="13" name="Shape 9"/>
+          <p:cNvPr id="12" name="Shape 9"/>
           <p:cNvSpPr/>
           <p:nvPr/>
         </p:nvSpPr>
@@ -14561,7 +14561,7 @@
       </p:sp>
       <p:sp>
         <p:nvSpPr>
-          <p:cNvPr id="14" name="Text 10"/>
+          <p:cNvPr id="13" name="Text 10"/>
           <p:cNvSpPr/>
           <p:nvPr/>
         </p:nvSpPr>
@@ -14600,7 +14600,7 @@
       </p:sp>
       <p:sp>
         <p:nvSpPr>
-          <p:cNvPr id="15" name="Text 11"/>
+          <p:cNvPr id="14" name="Text 11"/>
           <p:cNvSpPr/>
           <p:nvPr/>
         </p:nvSpPr>
@@ -15366,7 +15366,7 @@
       </p:pic>
       <p:sp>
         <p:nvSpPr>
-          <p:cNvPr id="7" name="Shape 3"/>
+          <p:cNvPr id="6" name="Shape 3"/>
           <p:cNvSpPr/>
           <p:nvPr/>
         </p:nvSpPr>
@@ -15393,7 +15393,7 @@
       </p:sp>
       <p:sp>
         <p:nvSpPr>
-          <p:cNvPr id="8" name="Shape 4"/>
+          <p:cNvPr id="7" name="Shape 4"/>
           <p:cNvSpPr/>
           <p:nvPr/>
         </p:nvSpPr>
@@ -15413,7 +15413,7 @@
       </p:sp>
       <p:sp>
         <p:nvSpPr>
-          <p:cNvPr id="9" name="Text 5"/>
+          <p:cNvPr id="8" name="Text 5"/>
           <p:cNvSpPr/>
           <p:nvPr/>
         </p:nvSpPr>
@@ -15452,7 +15452,7 @@
       </p:sp>
       <p:sp>
         <p:nvSpPr>
-          <p:cNvPr id="10" name="Text 6"/>
+          <p:cNvPr id="9" name="Text 6"/>
           <p:cNvSpPr/>
           <p:nvPr/>
         </p:nvSpPr>
@@ -15491,7 +15491,7 @@
       </p:sp>
       <p:sp>
         <p:nvSpPr>
-          <p:cNvPr id="11" name="Shape 7"/>
+          <p:cNvPr id="10" name="Shape 7"/>
           <p:cNvSpPr/>
           <p:nvPr/>
         </p:nvSpPr>
@@ -15518,7 +15518,7 @@
       </p:sp>
       <p:sp>
         <p:nvSpPr>
-          <p:cNvPr id="12" name="Shape 8"/>
+          <p:cNvPr id="11" name="Shape 8"/>
           <p:cNvSpPr/>
           <p:nvPr/>
         </p:nvSpPr>
@@ -15538,7 +15538,7 @@
       </p:sp>
       <p:sp>
         <p:nvSpPr>
-          <p:cNvPr id="13" name="Text 9"/>
+          <p:cNvPr id="12" name="Text 9"/>
           <p:cNvSpPr/>
           <p:nvPr/>
         </p:nvSpPr>
@@ -15577,7 +15577,7 @@
       </p:sp>
       <p:sp>
         <p:nvSpPr>
-          <p:cNvPr id="14" name="Text 10"/>
+          <p:cNvPr id="13" name="Text 10"/>
           <p:cNvSpPr/>
           <p:nvPr/>
         </p:nvSpPr>
@@ -15616,7 +15616,7 @@
       </p:sp>
       <p:sp>
         <p:nvSpPr>
-          <p:cNvPr id="15" name="Shape 11"/>
+          <p:cNvPr id="14" name="Shape 11"/>
           <p:cNvSpPr/>
           <p:nvPr/>
         </p:nvSpPr>
@@ -15643,7 +15643,7 @@
       </p:sp>
       <p:sp>
         <p:nvSpPr>
-          <p:cNvPr id="16" name="Shape 12"/>
+          <p:cNvPr id="15" name="Shape 12"/>
           <p:cNvSpPr/>
           <p:nvPr/>
         </p:nvSpPr>
@@ -15663,7 +15663,7 @@
       </p:sp>
       <p:sp>
         <p:nvSpPr>
-          <p:cNvPr id="17" name="Text 13"/>
+          <p:cNvPr id="16" name="Text 13"/>
           <p:cNvSpPr/>
           <p:nvPr/>
         </p:nvSpPr>
@@ -15702,7 +15702,7 @@
       </p:sp>
       <p:sp>
         <p:nvSpPr>
-          <p:cNvPr id="18" name="Text 14"/>
+          <p:cNvPr id="17" name="Text 14"/>
           <p:cNvSpPr/>
           <p:nvPr/>
         </p:nvSpPr>
@@ -15741,7 +15741,7 @@
       </p:sp>
       <p:sp>
         <p:nvSpPr>
-          <p:cNvPr id="19" name="Shape 15"/>
+          <p:cNvPr id="18" name="Shape 15"/>
           <p:cNvSpPr/>
           <p:nvPr/>
         </p:nvSpPr>
@@ -15768,7 +15768,7 @@
       </p:sp>
       <p:sp>
         <p:nvSpPr>
-          <p:cNvPr id="20" name="Shape 16"/>
+          <p:cNvPr id="19" name="Shape 16"/>
           <p:cNvSpPr/>
           <p:nvPr/>
         </p:nvSpPr>
@@ -15788,7 +15788,7 @@
       </p:sp>
       <p:sp>
         <p:nvSpPr>
-          <p:cNvPr id="21" name="Text 17"/>
+          <p:cNvPr id="20" name="Text 17"/>
           <p:cNvSpPr/>
           <p:nvPr/>
         </p:nvSpPr>
@@ -15827,7 +15827,7 @@
       </p:sp>
       <p:sp>
         <p:nvSpPr>
-          <p:cNvPr id="22" name="Text 18"/>
+          <p:cNvPr id="21" name="Text 18"/>
           <p:cNvSpPr/>
           <p:nvPr/>
         </p:nvSpPr>
@@ -15866,7 +15866,7 @@
       </p:sp>
       <p:sp>
         <p:nvSpPr>
-          <p:cNvPr id="23" name="Shape 19"/>
+          <p:cNvPr id="22" name="Shape 19"/>
           <p:cNvSpPr/>
           <p:nvPr/>
         </p:nvSpPr>
@@ -15893,7 +15893,7 @@
       </p:sp>
       <p:sp>
         <p:nvSpPr>
-          <p:cNvPr id="24" name="Shape 20"/>
+          <p:cNvPr id="23" name="Shape 20"/>
           <p:cNvSpPr/>
           <p:nvPr/>
         </p:nvSpPr>
@@ -15913,7 +15913,7 @@
       </p:sp>
       <p:sp>
         <p:nvSpPr>
-          <p:cNvPr id="25" name="Text 21"/>
+          <p:cNvPr id="24" name="Text 21"/>
           <p:cNvSpPr/>
           <p:nvPr/>
         </p:nvSpPr>
@@ -15952,7 +15952,7 @@
       </p:sp>
       <p:sp>
         <p:nvSpPr>
-          <p:cNvPr id="26" name="Text 22"/>
+          <p:cNvPr id="25" name="Text 22"/>
           <p:cNvSpPr/>
           <p:nvPr/>
         </p:nvSpPr>
@@ -15991,7 +15991,7 @@
       </p:sp>
       <p:sp>
         <p:nvSpPr>
-          <p:cNvPr id="27" name="Shape 23"/>
+          <p:cNvPr id="26" name="Shape 23"/>
           <p:cNvSpPr/>
           <p:nvPr/>
         </p:nvSpPr>
@@ -16018,7 +16018,7 @@
       </p:sp>
       <p:sp>
         <p:nvSpPr>
-          <p:cNvPr id="28" name="Shape 24"/>
+          <p:cNvPr id="27" name="Shape 24"/>
           <p:cNvSpPr/>
           <p:nvPr/>
         </p:nvSpPr>
@@ -16038,7 +16038,7 @@
       </p:sp>
       <p:sp>
         <p:nvSpPr>
-          <p:cNvPr id="29" name="Text 25"/>
+          <p:cNvPr id="28" name="Text 25"/>
           <p:cNvSpPr/>
           <p:nvPr/>
         </p:nvSpPr>
@@ -16077,7 +16077,7 @@
       </p:sp>
       <p:sp>
         <p:nvSpPr>
-          <p:cNvPr id="30" name="Text 26"/>
+          <p:cNvPr id="29" name="Text 26"/>
           <p:cNvSpPr/>
           <p:nvPr/>
         </p:nvSpPr>
@@ -16116,7 +16116,7 @@
       </p:sp>
       <p:sp>
         <p:nvSpPr>
-          <p:cNvPr id="31" name="Shape 27"/>
+          <p:cNvPr id="30" name="Shape 27"/>
           <p:cNvSpPr/>
           <p:nvPr/>
         </p:nvSpPr>
@@ -16143,7 +16143,7 @@
       </p:sp>
       <p:sp>
         <p:nvSpPr>
-          <p:cNvPr id="32" name="Shape 28"/>
+          <p:cNvPr id="31" name="Shape 28"/>
           <p:cNvSpPr/>
           <p:nvPr/>
         </p:nvSpPr>
@@ -16163,7 +16163,7 @@
       </p:sp>
       <p:sp>
         <p:nvSpPr>
-          <p:cNvPr id="33" name="Text 29"/>
+          <p:cNvPr id="32" name="Text 29"/>
           <p:cNvSpPr/>
           <p:nvPr/>
         </p:nvSpPr>
@@ -16202,7 +16202,7 @@
       </p:sp>
       <p:sp>
         <p:nvSpPr>
-          <p:cNvPr id="34" name="Text 30"/>
+          <p:cNvPr id="33" name="Text 30"/>
           <p:cNvSpPr/>
           <p:nvPr/>
         </p:nvSpPr>
@@ -16241,7 +16241,7 @@
       </p:sp>
       <p:sp>
         <p:nvSpPr>
-          <p:cNvPr id="35" name="Shape 31"/>
+          <p:cNvPr id="34" name="Shape 31"/>
           <p:cNvSpPr/>
           <p:nvPr/>
         </p:nvSpPr>
@@ -16263,7 +16263,7 @@
       </p:sp>
       <p:sp>
         <p:nvSpPr>
-          <p:cNvPr id="36" name="Shape 32"/>
+          <p:cNvPr id="35" name="Shape 32"/>
           <p:cNvSpPr/>
           <p:nvPr/>
         </p:nvSpPr>
@@ -16283,7 +16283,7 @@
       </p:sp>
       <p:sp>
         <p:nvSpPr>
-          <p:cNvPr id="37" name="Text 33"/>
+          <p:cNvPr id="36" name="Text 33"/>
           <p:cNvSpPr/>
           <p:nvPr/>
         </p:nvSpPr>
@@ -16322,7 +16322,7 @@
       </p:sp>
       <p:sp>
         <p:nvSpPr>
-          <p:cNvPr id="38" name="Text 34"/>
+          <p:cNvPr id="37" name="Text 34"/>
           <p:cNvSpPr/>
           <p:nvPr/>
         </p:nvSpPr>
@@ -16361,7 +16361,7 @@
       </p:sp>
       <p:sp>
         <p:nvSpPr>
-          <p:cNvPr id="39" name="Shape 35"/>
+          <p:cNvPr id="38" name="Shape 35"/>
           <p:cNvSpPr/>
           <p:nvPr/>
         </p:nvSpPr>
@@ -16388,7 +16388,7 @@
       </p:sp>
       <p:sp>
         <p:nvSpPr>
-          <p:cNvPr id="40" name="Shape 36"/>
+          <p:cNvPr id="39" name="Shape 36"/>
           <p:cNvSpPr/>
           <p:nvPr/>
         </p:nvSpPr>
@@ -16408,7 +16408,7 @@
       </p:sp>
       <p:sp>
         <p:nvSpPr>
-          <p:cNvPr id="41" name="Text 37"/>
+          <p:cNvPr id="40" name="Text 37"/>
           <p:cNvSpPr/>
           <p:nvPr/>
         </p:nvSpPr>
@@ -16447,7 +16447,7 @@
       </p:sp>
       <p:sp>
         <p:nvSpPr>
-          <p:cNvPr id="42" name="Text 38"/>
+          <p:cNvPr id="41" name="Text 38"/>
           <p:cNvSpPr/>
           <p:nvPr/>
         </p:nvSpPr>
@@ -16486,7 +16486,7 @@
       </p:sp>
       <p:sp>
         <p:nvSpPr>
-          <p:cNvPr id="43" name="Shape 39"/>
+          <p:cNvPr id="42" name="Shape 39"/>
           <p:cNvSpPr/>
           <p:nvPr/>
         </p:nvSpPr>
@@ -16513,7 +16513,7 @@
       </p:sp>
       <p:sp>
         <p:nvSpPr>
-          <p:cNvPr id="44" name="Shape 40"/>
+          <p:cNvPr id="43" name="Shape 40"/>
           <p:cNvSpPr/>
           <p:nvPr/>
         </p:nvSpPr>
@@ -16533,7 +16533,7 @@
       </p:sp>
       <p:sp>
         <p:nvSpPr>
-          <p:cNvPr id="45" name="Text 41"/>
+          <p:cNvPr id="44" name="Text 41"/>
           <p:cNvSpPr/>
           <p:nvPr/>
         </p:nvSpPr>
@@ -16572,7 +16572,7 @@
       </p:sp>
       <p:sp>
         <p:nvSpPr>
-          <p:cNvPr id="46" name="Text 42"/>
+          <p:cNvPr id="45" name="Text 42"/>
           <p:cNvSpPr/>
           <p:nvPr/>
         </p:nvSpPr>
@@ -16611,7 +16611,7 @@
       </p:sp>
       <p:sp>
         <p:nvSpPr>
-          <p:cNvPr id="47" name="Shape 43"/>
+          <p:cNvPr id="46" name="Shape 43"/>
           <p:cNvSpPr/>
           <p:nvPr/>
         </p:nvSpPr>
@@ -16638,7 +16638,7 @@
       </p:sp>
       <p:sp>
         <p:nvSpPr>
-          <p:cNvPr id="48" name="Shape 44"/>
+          <p:cNvPr id="47" name="Shape 44"/>
           <p:cNvSpPr/>
           <p:nvPr/>
         </p:nvSpPr>
@@ -16658,7 +16658,7 @@
       </p:sp>
       <p:sp>
         <p:nvSpPr>
-          <p:cNvPr id="49" name="Text 45"/>
+          <p:cNvPr id="48" name="Text 45"/>
           <p:cNvSpPr/>
           <p:nvPr/>
         </p:nvSpPr>
@@ -16697,7 +16697,7 @@
       </p:sp>
       <p:sp>
         <p:nvSpPr>
-          <p:cNvPr id="50" name="Text 46"/>
+          <p:cNvPr id="49" name="Text 46"/>
           <p:cNvSpPr/>
           <p:nvPr/>
         </p:nvSpPr>
@@ -16736,7 +16736,7 @@
       </p:sp>
       <p:sp>
         <p:nvSpPr>
-          <p:cNvPr id="51" name="Shape 47"/>
+          <p:cNvPr id="50" name="Shape 47"/>
           <p:cNvSpPr/>
           <p:nvPr/>
         </p:nvSpPr>
@@ -16763,7 +16763,7 @@
       </p:sp>
       <p:sp>
         <p:nvSpPr>
-          <p:cNvPr id="52" name="Text 48"/>
+          <p:cNvPr id="51" name="Text 48"/>
           <p:cNvSpPr/>
           <p:nvPr/>
         </p:nvSpPr>
@@ -17051,7 +17051,7 @@
       </p:pic>
       <p:sp>
         <p:nvSpPr>
-          <p:cNvPr id="8" name="Shape 4"/>
+          <p:cNvPr id="7" name="Shape 4"/>
           <p:cNvSpPr/>
           <p:nvPr/>
         </p:nvSpPr>
@@ -17078,7 +17078,7 @@
       </p:sp>
       <p:sp>
         <p:nvSpPr>
-          <p:cNvPr id="9" name="Text 5"/>
+          <p:cNvPr id="8" name="Text 5"/>
           <p:cNvSpPr/>
           <p:nvPr/>
         </p:nvSpPr>
@@ -17117,7 +17117,7 @@
       </p:sp>
       <p:sp>
         <p:nvSpPr>
-          <p:cNvPr id="10" name="Text 6"/>
+          <p:cNvPr id="9" name="Text 6"/>
           <p:cNvSpPr/>
           <p:nvPr/>
         </p:nvSpPr>
@@ -17159,7 +17159,7 @@
       </p:sp>
       <p:sp>
         <p:nvSpPr>
-          <p:cNvPr id="11" name="Shape 7"/>
+          <p:cNvPr id="10" name="Shape 7"/>
           <p:cNvSpPr/>
           <p:nvPr/>
         </p:nvSpPr>
@@ -17186,7 +17186,7 @@
       </p:sp>
       <p:sp>
         <p:nvSpPr>
-          <p:cNvPr id="12" name="Text 8"/>
+          <p:cNvPr id="11" name="Text 8"/>
           <p:cNvSpPr/>
           <p:nvPr/>
         </p:nvSpPr>
@@ -17225,7 +17225,7 @@
       </p:sp>
       <p:sp>
         <p:nvSpPr>
-          <p:cNvPr id="13" name="Text 9"/>
+          <p:cNvPr id="12" name="Text 9"/>
           <p:cNvSpPr/>
           <p:nvPr/>
         </p:nvSpPr>
@@ -17267,7 +17267,7 @@
       </p:sp>
       <p:sp>
         <p:nvSpPr>
-          <p:cNvPr id="14" name="Shape 10"/>
+          <p:cNvPr id="13" name="Shape 10"/>
           <p:cNvSpPr/>
           <p:nvPr/>
         </p:nvSpPr>
@@ -17294,7 +17294,7 @@
       </p:sp>
       <p:sp>
         <p:nvSpPr>
-          <p:cNvPr id="15" name="Text 11"/>
+          <p:cNvPr id="14" name="Text 11"/>
           <p:cNvSpPr/>
           <p:nvPr/>
         </p:nvSpPr>
@@ -17333,7 +17333,7 @@
       </p:sp>
       <p:sp>
         <p:nvSpPr>
-          <p:cNvPr id="16" name="Text 12"/>
+          <p:cNvPr id="15" name="Text 12"/>
           <p:cNvSpPr/>
           <p:nvPr/>
         </p:nvSpPr>
@@ -17375,7 +17375,7 @@
       </p:sp>
       <p:sp>
         <p:nvSpPr>
-          <p:cNvPr id="17" name="Shape 13"/>
+          <p:cNvPr id="16" name="Shape 13"/>
           <p:cNvSpPr/>
           <p:nvPr/>
         </p:nvSpPr>
@@ -17402,7 +17402,7 @@
       </p:sp>
       <p:sp>
         <p:nvSpPr>
-          <p:cNvPr id="18" name="Text 14"/>
+          <p:cNvPr id="17" name="Text 14"/>
           <p:cNvSpPr/>
           <p:nvPr/>
         </p:nvSpPr>
@@ -17441,7 +17441,7 @@
       </p:sp>
       <p:sp>
         <p:nvSpPr>
-          <p:cNvPr id="19" name="Text 15"/>
+          <p:cNvPr id="18" name="Text 15"/>
           <p:cNvSpPr/>
           <p:nvPr/>
         </p:nvSpPr>
@@ -17483,7 +17483,7 @@
       </p:sp>
       <p:sp>
         <p:nvSpPr>
-          <p:cNvPr id="20" name="Shape 16"/>
+          <p:cNvPr id="19" name="Shape 16"/>
           <p:cNvSpPr/>
           <p:nvPr/>
         </p:nvSpPr>
@@ -17510,7 +17510,7 @@
       </p:sp>
       <p:sp>
         <p:nvSpPr>
-          <p:cNvPr id="21" name="Text 17"/>
+          <p:cNvPr id="20" name="Text 17"/>
           <p:cNvSpPr/>
           <p:nvPr/>
         </p:nvSpPr>
@@ -17549,7 +17549,7 @@
       </p:sp>
       <p:sp>
         <p:nvSpPr>
-          <p:cNvPr id="22" name="Text 18"/>
+          <p:cNvPr id="21" name="Text 18"/>
           <p:cNvSpPr/>
           <p:nvPr/>
         </p:nvSpPr>
@@ -17591,7 +17591,7 @@
       </p:sp>
       <p:sp>
         <p:nvSpPr>
-          <p:cNvPr id="23" name="Shape 19"/>
+          <p:cNvPr id="22" name="Shape 19"/>
           <p:cNvSpPr/>
           <p:nvPr/>
         </p:nvSpPr>
@@ -17618,7 +17618,7 @@
       </p:sp>
       <p:sp>
         <p:nvSpPr>
-          <p:cNvPr id="24" name="Text 20"/>
+          <p:cNvPr id="23" name="Text 20"/>
           <p:cNvSpPr/>
           <p:nvPr/>
         </p:nvSpPr>
@@ -17657,7 +17657,7 @@
       </p:sp>
       <p:sp>
         <p:nvSpPr>
-          <p:cNvPr id="25" name="Text 21"/>
+          <p:cNvPr id="24" name="Text 21"/>
           <p:cNvSpPr/>
           <p:nvPr/>
         </p:nvSpPr>
@@ -17699,7 +17699,7 @@
       </p:sp>
       <p:sp>
         <p:nvSpPr>
-          <p:cNvPr id="26" name="Shape 22"/>
+          <p:cNvPr id="25" name="Shape 22"/>
           <p:cNvSpPr/>
           <p:nvPr/>
         </p:nvSpPr>
@@ -17726,7 +17726,7 @@
       </p:sp>
       <p:sp>
         <p:nvSpPr>
-          <p:cNvPr id="27" name="Text 23"/>
+          <p:cNvPr id="26" name="Text 23"/>
           <p:cNvSpPr/>
           <p:nvPr/>
         </p:nvSpPr>
@@ -18011,7 +18011,7 @@
       </p:pic>
       <p:sp>
         <p:nvSpPr>
-          <p:cNvPr id="8" name="Shape 4"/>
+          <p:cNvPr id="7" name="Shape 4"/>
           <p:cNvSpPr/>
           <p:nvPr/>
         </p:nvSpPr>
@@ -18033,7 +18033,7 @@
       </p:sp>
       <p:sp>
         <p:nvSpPr>
-          <p:cNvPr id="9" name="Text 5"/>
+          <p:cNvPr id="8" name="Text 5"/>
           <p:cNvSpPr/>
           <p:nvPr/>
         </p:nvSpPr>
@@ -18072,7 +18072,7 @@
       </p:sp>
       <p:sp>
         <p:nvSpPr>
-          <p:cNvPr id="10" name="Text 6"/>
+          <p:cNvPr id="9" name="Text 6"/>
           <p:cNvSpPr/>
           <p:nvPr/>
         </p:nvSpPr>
@@ -18114,7 +18114,7 @@
       </p:sp>
       <p:sp>
         <p:nvSpPr>
-          <p:cNvPr id="11" name="Shape 7"/>
+          <p:cNvPr id="10" name="Shape 7"/>
           <p:cNvSpPr/>
           <p:nvPr/>
         </p:nvSpPr>
@@ -18136,7 +18136,7 @@
       </p:sp>
       <p:sp>
         <p:nvSpPr>
-          <p:cNvPr id="12" name="Text 8"/>
+          <p:cNvPr id="11" name="Text 8"/>
           <p:cNvSpPr/>
           <p:nvPr/>
         </p:nvSpPr>
@@ -18175,7 +18175,7 @@
       </p:sp>
       <p:sp>
         <p:nvSpPr>
-          <p:cNvPr id="13" name="Text 9"/>
+          <p:cNvPr id="12" name="Text 9"/>
           <p:cNvSpPr/>
           <p:nvPr/>
         </p:nvSpPr>
@@ -18217,7 +18217,7 @@
       </p:sp>
       <p:sp>
         <p:nvSpPr>
-          <p:cNvPr id="14" name="Shape 10"/>
+          <p:cNvPr id="13" name="Shape 10"/>
           <p:cNvSpPr/>
           <p:nvPr/>
         </p:nvSpPr>
@@ -18239,7 +18239,7 @@
       </p:sp>
       <p:sp>
         <p:nvSpPr>
-          <p:cNvPr id="15" name="Text 11"/>
+          <p:cNvPr id="14" name="Text 11"/>
           <p:cNvSpPr/>
           <p:nvPr/>
         </p:nvSpPr>
@@ -18281,7 +18281,7 @@
       </p:sp>
       <p:sp>
         <p:nvSpPr>
-          <p:cNvPr id="16" name="Shape 12"/>
+          <p:cNvPr id="15" name="Shape 12"/>
           <p:cNvSpPr/>
           <p:nvPr/>
         </p:nvSpPr>
@@ -18303,7 +18303,7 @@
       </p:sp>
       <p:sp>
         <p:nvSpPr>
-          <p:cNvPr id="17" name="Text 13"/>
+          <p:cNvPr id="16" name="Text 13"/>
           <p:cNvSpPr/>
           <p:nvPr/>
         </p:nvSpPr>
@@ -18342,7 +18342,7 @@
       </p:sp>
       <p:sp>
         <p:nvSpPr>
-          <p:cNvPr id="18" name="Text 14"/>
+          <p:cNvPr id="17" name="Text 14"/>
           <p:cNvSpPr/>
           <p:nvPr/>
         </p:nvSpPr>
@@ -18627,7 +18627,7 @@
       </p:pic>
       <p:sp>
         <p:nvSpPr>
-          <p:cNvPr id="8" name="Shape 4"/>
+          <p:cNvPr id="7" name="Shape 4"/>
           <p:cNvSpPr/>
           <p:nvPr/>
         </p:nvSpPr>
@@ -18654,7 +18654,7 @@
       </p:sp>
       <p:sp>
         <p:nvSpPr>
-          <p:cNvPr id="9" name="Text 5"/>
+          <p:cNvPr id="8" name="Text 5"/>
           <p:cNvSpPr/>
           <p:nvPr/>
         </p:nvSpPr>
@@ -18693,7 +18693,7 @@
       </p:sp>
       <p:sp>
         <p:nvSpPr>
-          <p:cNvPr id="10" name="Shape 6"/>
+          <p:cNvPr id="9" name="Shape 6"/>
           <p:cNvSpPr/>
           <p:nvPr/>
         </p:nvSpPr>
@@ -18716,7 +18716,7 @@
       </p:sp>
       <p:sp>
         <p:nvSpPr>
-          <p:cNvPr id="11" name="Shape 7"/>
+          <p:cNvPr id="10" name="Shape 7"/>
           <p:cNvSpPr/>
           <p:nvPr/>
         </p:nvSpPr>
@@ -18736,7 +18736,7 @@
       </p:sp>
       <p:sp>
         <p:nvSpPr>
-          <p:cNvPr id="12" name="Shape 8"/>
+          <p:cNvPr id="11" name="Shape 8"/>
           <p:cNvSpPr/>
           <p:nvPr/>
         </p:nvSpPr>
@@ -18763,7 +18763,7 @@
       </p:sp>
       <p:sp>
         <p:nvSpPr>
-          <p:cNvPr id="13" name="Text 9"/>
+          <p:cNvPr id="12" name="Text 9"/>
           <p:cNvSpPr/>
           <p:nvPr/>
         </p:nvSpPr>
@@ -18802,7 +18802,7 @@
       </p:sp>
       <p:sp>
         <p:nvSpPr>
-          <p:cNvPr id="14" name="Shape 10"/>
+          <p:cNvPr id="13" name="Shape 10"/>
           <p:cNvSpPr/>
           <p:nvPr/>
         </p:nvSpPr>
@@ -18825,7 +18825,7 @@
       </p:sp>
       <p:sp>
         <p:nvSpPr>
-          <p:cNvPr id="15" name="Shape 11"/>
+          <p:cNvPr id="14" name="Shape 11"/>
           <p:cNvSpPr/>
           <p:nvPr/>
         </p:nvSpPr>
@@ -18845,7 +18845,7 @@
       </p:sp>
       <p:sp>
         <p:nvSpPr>
-          <p:cNvPr id="16" name="Shape 12"/>
+          <p:cNvPr id="15" name="Shape 12"/>
           <p:cNvSpPr/>
           <p:nvPr/>
         </p:nvSpPr>
@@ -18872,7 +18872,7 @@
       </p:sp>
       <p:sp>
         <p:nvSpPr>
-          <p:cNvPr id="17" name="Text 13"/>
+          <p:cNvPr id="16" name="Text 13"/>
           <p:cNvSpPr/>
           <p:nvPr/>
         </p:nvSpPr>
@@ -18911,7 +18911,7 @@
       </p:sp>
       <p:sp>
         <p:nvSpPr>
-          <p:cNvPr id="18" name="Shape 14"/>
+          <p:cNvPr id="17" name="Shape 14"/>
           <p:cNvSpPr/>
           <p:nvPr/>
         </p:nvSpPr>
@@ -18934,7 +18934,7 @@
       </p:sp>
       <p:sp>
         <p:nvSpPr>
-          <p:cNvPr id="19" name="Shape 15"/>
+          <p:cNvPr id="18" name="Shape 15"/>
           <p:cNvSpPr/>
           <p:nvPr/>
         </p:nvSpPr>
@@ -18954,7 +18954,7 @@
       </p:sp>
       <p:sp>
         <p:nvSpPr>
-          <p:cNvPr id="20" name="Shape 16"/>
+          <p:cNvPr id="19" name="Shape 16"/>
           <p:cNvSpPr/>
           <p:nvPr/>
         </p:nvSpPr>
@@ -18976,7 +18976,7 @@
       </p:sp>
       <p:sp>
         <p:nvSpPr>
-          <p:cNvPr id="21" name="Text 17"/>
+          <p:cNvPr id="20" name="Text 17"/>
           <p:cNvSpPr/>
           <p:nvPr/>
         </p:nvSpPr>
@@ -19015,7 +19015,7 @@
       </p:sp>
       <p:sp>
         <p:nvSpPr>
-          <p:cNvPr id="22" name="Shape 18"/>
+          <p:cNvPr id="21" name="Shape 18"/>
           <p:cNvSpPr/>
           <p:nvPr/>
         </p:nvSpPr>
@@ -19038,7 +19038,7 @@
       </p:sp>
       <p:sp>
         <p:nvSpPr>
-          <p:cNvPr id="23" name="Shape 19"/>
+          <p:cNvPr id="22" name="Shape 19"/>
           <p:cNvSpPr/>
           <p:nvPr/>
         </p:nvSpPr>
@@ -19058,7 +19058,7 @@
       </p:sp>
       <p:sp>
         <p:nvSpPr>
-          <p:cNvPr id="24" name="Shape 20"/>
+          <p:cNvPr id="23" name="Shape 20"/>
           <p:cNvSpPr/>
           <p:nvPr/>
         </p:nvSpPr>
@@ -19080,7 +19080,7 @@
       </p:sp>
       <p:sp>
         <p:nvSpPr>
-          <p:cNvPr id="25" name="Text 21"/>
+          <p:cNvPr id="24" name="Text 21"/>
           <p:cNvSpPr/>
           <p:nvPr/>
         </p:nvSpPr>
@@ -19119,7 +19119,7 @@
       </p:sp>
       <p:sp>
         <p:nvSpPr>
-          <p:cNvPr id="26" name="Shape 22"/>
+          <p:cNvPr id="25" name="Shape 22"/>
           <p:cNvSpPr/>
           <p:nvPr/>
         </p:nvSpPr>
@@ -19141,7 +19141,7 @@
       </p:sp>
       <p:sp>
         <p:nvSpPr>
-          <p:cNvPr id="27" name="Text 23"/>
+          <p:cNvPr id="26" name="Text 23"/>
           <p:cNvSpPr/>
           <p:nvPr/>
         </p:nvSpPr>
@@ -19180,7 +19180,7 @@
       </p:sp>
       <p:sp>
         <p:nvSpPr>
-          <p:cNvPr id="28" name="Text 24"/>
+          <p:cNvPr id="27" name="Text 24"/>
           <p:cNvSpPr/>
           <p:nvPr/>
         </p:nvSpPr>
@@ -19222,7 +19222,7 @@
       </p:sp>
       <p:sp>
         <p:nvSpPr>
-          <p:cNvPr id="29" name="Shape 25"/>
+          <p:cNvPr id="28" name="Shape 25"/>
           <p:cNvSpPr/>
           <p:nvPr/>
         </p:nvSpPr>
@@ -19244,7 +19244,7 @@
       </p:sp>
       <p:sp>
         <p:nvSpPr>
-          <p:cNvPr id="30" name="Text 26"/>
+          <p:cNvPr id="29" name="Text 26"/>
           <p:cNvSpPr/>
           <p:nvPr/>
         </p:nvSpPr>
@@ -19283,7 +19283,7 @@
       </p:sp>
       <p:sp>
         <p:nvSpPr>
-          <p:cNvPr id="31" name="Text 27"/>
+          <p:cNvPr id="30" name="Text 27"/>
           <p:cNvSpPr/>
           <p:nvPr/>
         </p:nvSpPr>
@@ -19325,7 +19325,7 @@
       </p:sp>
       <p:sp>
         <p:nvSpPr>
-          <p:cNvPr id="32" name="Shape 28"/>
+          <p:cNvPr id="31" name="Shape 28"/>
           <p:cNvSpPr/>
           <p:nvPr/>
         </p:nvSpPr>
@@ -19352,7 +19352,7 @@
       </p:sp>
       <p:sp>
         <p:nvSpPr>
-          <p:cNvPr id="33" name="Text 29"/>
+          <p:cNvPr id="32" name="Text 29"/>
           <p:cNvSpPr/>
           <p:nvPr/>
         </p:nvSpPr>
@@ -19637,7 +19637,7 @@
       </p:pic>
       <p:sp>
         <p:nvSpPr>
-          <p:cNvPr id="8" name="Shape 4"/>
+          <p:cNvPr id="7" name="Shape 4"/>
           <p:cNvSpPr/>
           <p:nvPr/>
         </p:nvSpPr>
@@ -19664,7 +19664,7 @@
       </p:sp>
       <p:sp>
         <p:nvSpPr>
-          <p:cNvPr id="9" name="Text 5"/>
+          <p:cNvPr id="8" name="Text 5"/>
           <p:cNvSpPr/>
           <p:nvPr/>
         </p:nvSpPr>
@@ -19703,7 +19703,7 @@
       </p:sp>
       <p:sp>
         <p:nvSpPr>
-          <p:cNvPr id="10" name="Text 6"/>
+          <p:cNvPr id="9" name="Text 6"/>
           <p:cNvSpPr/>
           <p:nvPr/>
         </p:nvSpPr>
@@ -19742,7 +19742,7 @@
       </p:sp>
       <p:sp>
         <p:nvSpPr>
-          <p:cNvPr id="11" name="Shape 7"/>
+          <p:cNvPr id="10" name="Shape 7"/>
           <p:cNvSpPr/>
           <p:nvPr/>
         </p:nvSpPr>
@@ -19764,7 +19764,7 @@
       </p:sp>
       <p:sp>
         <p:nvSpPr>
-          <p:cNvPr id="12" name="Text 8"/>
+          <p:cNvPr id="11" name="Text 8"/>
           <p:cNvSpPr/>
           <p:nvPr/>
         </p:nvSpPr>
@@ -19803,7 +19803,7 @@
       </p:sp>
       <p:sp>
         <p:nvSpPr>
-          <p:cNvPr id="13" name="Text 9"/>
+          <p:cNvPr id="12" name="Text 9"/>
           <p:cNvSpPr/>
           <p:nvPr/>
         </p:nvSpPr>
@@ -19842,7 +19842,7 @@
       </p:sp>
       <p:sp>
         <p:nvSpPr>
-          <p:cNvPr id="14" name="Shape 10"/>
+          <p:cNvPr id="13" name="Shape 10"/>
           <p:cNvSpPr/>
           <p:nvPr/>
         </p:nvSpPr>
@@ -19864,7 +19864,7 @@
       </p:sp>
       <p:sp>
         <p:nvSpPr>
-          <p:cNvPr id="15" name="Text 11"/>
+          <p:cNvPr id="14" name="Text 11"/>
           <p:cNvSpPr/>
           <p:nvPr/>
         </p:nvSpPr>
@@ -19903,7 +19903,7 @@
       </p:sp>
       <p:sp>
         <p:nvSpPr>
-          <p:cNvPr id="16" name="Text 12"/>
+          <p:cNvPr id="15" name="Text 12"/>
           <p:cNvSpPr/>
           <p:nvPr/>
         </p:nvSpPr>
@@ -19942,7 +19942,7 @@
       </p:sp>
       <p:sp>
         <p:nvSpPr>
-          <p:cNvPr id="17" name="Shape 13"/>
+          <p:cNvPr id="16" name="Shape 13"/>
           <p:cNvSpPr/>
           <p:nvPr/>
         </p:nvSpPr>
@@ -19964,7 +19964,7 @@
       </p:sp>
       <p:sp>
         <p:nvSpPr>
-          <p:cNvPr id="18" name="Text 14"/>
+          <p:cNvPr id="17" name="Text 14"/>
           <p:cNvSpPr/>
           <p:nvPr/>
         </p:nvSpPr>
@@ -20003,7 +20003,7 @@
       </p:sp>
       <p:sp>
         <p:nvSpPr>
-          <p:cNvPr id="19" name="Text 15"/>
+          <p:cNvPr id="18" name="Text 15"/>
           <p:cNvSpPr/>
           <p:nvPr/>
         </p:nvSpPr>
@@ -20042,7 +20042,7 @@
       </p:sp>
       <p:sp>
         <p:nvSpPr>
-          <p:cNvPr id="20" name="Shape 16"/>
+          <p:cNvPr id="19" name="Shape 16"/>
           <p:cNvSpPr/>
           <p:nvPr/>
         </p:nvSpPr>
@@ -20064,7 +20064,7 @@
       </p:sp>
       <p:sp>
         <p:nvSpPr>
-          <p:cNvPr id="21" name="Text 17"/>
+          <p:cNvPr id="20" name="Text 17"/>
           <p:cNvSpPr/>
           <p:nvPr/>
         </p:nvSpPr>
@@ -20103,7 +20103,7 @@
       </p:sp>
       <p:sp>
         <p:nvSpPr>
-          <p:cNvPr id="22" name="Text 18"/>
+          <p:cNvPr id="21" name="Text 18"/>
           <p:cNvSpPr/>
           <p:nvPr/>
         </p:nvSpPr>
@@ -20145,7 +20145,7 @@
       </p:sp>
       <p:sp>
         <p:nvSpPr>
-          <p:cNvPr id="23" name="Shape 19"/>
+          <p:cNvPr id="22" name="Shape 19"/>
           <p:cNvSpPr/>
           <p:nvPr/>
         </p:nvSpPr>
@@ -20167,7 +20167,7 @@
       </p:sp>
       <p:sp>
         <p:nvSpPr>
-          <p:cNvPr id="24" name="Text 20"/>
+          <p:cNvPr id="23" name="Text 20"/>
           <p:cNvSpPr/>
           <p:nvPr/>
         </p:nvSpPr>
@@ -20206,7 +20206,7 @@
       </p:sp>
       <p:sp>
         <p:nvSpPr>
-          <p:cNvPr id="25" name="Text 21"/>
+          <p:cNvPr id="24" name="Text 21"/>
           <p:cNvSpPr/>
           <p:nvPr/>
         </p:nvSpPr>
@@ -20248,7 +20248,7 @@
       </p:sp>
       <p:sp>
         <p:nvSpPr>
-          <p:cNvPr id="26" name="Shape 22"/>
+          <p:cNvPr id="25" name="Shape 22"/>
           <p:cNvSpPr/>
           <p:nvPr/>
         </p:nvSpPr>
@@ -20275,7 +20275,7 @@
       </p:sp>
       <p:sp>
         <p:nvSpPr>
-          <p:cNvPr id="27" name="Text 23"/>
+          <p:cNvPr id="26" name="Text 23"/>
           <p:cNvSpPr/>
           <p:nvPr/>
         </p:nvSpPr>
@@ -20560,7 +20560,7 @@
       </p:pic>
       <p:sp>
         <p:nvSpPr>
-          <p:cNvPr id="8" name="Shape 4"/>
+          <p:cNvPr id="7" name="Shape 4"/>
           <p:cNvSpPr/>
           <p:nvPr/>
         </p:nvSpPr>
@@ -20587,7 +20587,7 @@
       </p:sp>
       <p:sp>
         <p:nvSpPr>
-          <p:cNvPr id="9" name="Text 5"/>
+          <p:cNvPr id="8" name="Text 5"/>
           <p:cNvSpPr/>
           <p:nvPr/>
         </p:nvSpPr>
@@ -20937,7 +20937,7 @@
       </p:sp>
       <p:sp>
         <p:nvSpPr>
-          <p:cNvPr id="10" name="Text 6"/>
+          <p:cNvPr id="9" name="Text 6"/>
           <p:cNvSpPr/>
           <p:nvPr/>
         </p:nvSpPr>
@@ -20976,7 +20976,7 @@
       </p:sp>
       <p:sp>
         <p:nvSpPr>
-          <p:cNvPr id="11" name="Text 7"/>
+          <p:cNvPr id="10" name="Text 7"/>
           <p:cNvSpPr/>
           <p:nvPr/>
         </p:nvSpPr>
@@ -21015,7 +21015,7 @@
       </p:sp>
       <p:sp>
         <p:nvSpPr>
-          <p:cNvPr id="12" name="Text 8"/>
+          <p:cNvPr id="11" name="Text 8"/>
           <p:cNvSpPr/>
           <p:nvPr/>
         </p:nvSpPr>
@@ -21054,7 +21054,7 @@
       </p:sp>
       <p:sp>
         <p:nvSpPr>
-          <p:cNvPr id="13" name="Text 9"/>
+          <p:cNvPr id="12" name="Text 9"/>
           <p:cNvSpPr/>
           <p:nvPr/>
         </p:nvSpPr>
@@ -21093,7 +21093,7 @@
       </p:sp>
       <p:sp>
         <p:nvSpPr>
-          <p:cNvPr id="14" name="Text 10"/>
+          <p:cNvPr id="13" name="Text 10"/>
           <p:cNvSpPr/>
           <p:nvPr/>
         </p:nvSpPr>
@@ -21132,7 +21132,7 @@
       </p:sp>
       <p:sp>
         <p:nvSpPr>
-          <p:cNvPr id="15" name="Text 11"/>
+          <p:cNvPr id="14" name="Text 11"/>
           <p:cNvSpPr/>
           <p:nvPr/>
         </p:nvSpPr>
@@ -21171,7 +21171,7 @@
       </p:sp>
       <p:sp>
         <p:nvSpPr>
-          <p:cNvPr id="16" name="Text 12"/>
+          <p:cNvPr id="15" name="Text 12"/>
           <p:cNvSpPr/>
           <p:nvPr/>
         </p:nvSpPr>
@@ -21210,7 +21210,7 @@
       </p:sp>
       <p:sp>
         <p:nvSpPr>
-          <p:cNvPr id="17" name="Text 13"/>
+          <p:cNvPr id="16" name="Text 13"/>
           <p:cNvSpPr/>
           <p:nvPr/>
         </p:nvSpPr>
@@ -21249,7 +21249,7 @@
       </p:sp>
       <p:sp>
         <p:nvSpPr>
-          <p:cNvPr id="18" name="Text 14"/>
+          <p:cNvPr id="17" name="Text 14"/>
           <p:cNvSpPr/>
           <p:nvPr/>
         </p:nvSpPr>
@@ -21288,7 +21288,7 @@
       </p:sp>
       <p:sp>
         <p:nvSpPr>
-          <p:cNvPr id="19" name="Text 15"/>
+          <p:cNvPr id="18" name="Text 15"/>
           <p:cNvSpPr/>
           <p:nvPr/>
         </p:nvSpPr>
@@ -21327,7 +21327,7 @@
       </p:sp>
       <p:sp>
         <p:nvSpPr>
-          <p:cNvPr id="20" name="Shape 16"/>
+          <p:cNvPr id="19" name="Shape 16"/>
           <p:cNvSpPr/>
           <p:nvPr/>
         </p:nvSpPr>
@@ -21349,7 +21349,7 @@
       </p:sp>
       <p:sp>
         <p:nvSpPr>
-          <p:cNvPr id="21" name="Text 17"/>
+          <p:cNvPr id="20" name="Text 17"/>
           <p:cNvSpPr/>
           <p:nvPr/>
         </p:nvSpPr>
@@ -21634,7 +21634,7 @@
       </p:pic>
       <p:sp>
         <p:nvSpPr>
-          <p:cNvPr id="8" name="Shape 4"/>
+          <p:cNvPr id="7" name="Shape 4"/>
           <p:cNvSpPr/>
           <p:nvPr/>
         </p:nvSpPr>
@@ -21656,7 +21656,7 @@
       </p:sp>
       <p:sp>
         <p:nvSpPr>
-          <p:cNvPr id="9" name="Text 5"/>
+          <p:cNvPr id="8" name="Text 5"/>
           <p:cNvSpPr/>
           <p:nvPr/>
         </p:nvSpPr>
@@ -21695,7 +21695,7 @@
       </p:sp>
       <p:sp>
         <p:nvSpPr>
-          <p:cNvPr id="10" name="Text 6"/>
+          <p:cNvPr id="9" name="Text 6"/>
           <p:cNvSpPr/>
           <p:nvPr/>
         </p:nvSpPr>
@@ -21737,7 +21737,7 @@
       </p:sp>
       <p:sp>
         <p:nvSpPr>
-          <p:cNvPr id="11" name="Shape 7"/>
+          <p:cNvPr id="10" name="Shape 7"/>
           <p:cNvSpPr/>
           <p:nvPr/>
         </p:nvSpPr>
@@ -21759,7 +21759,7 @@
       </p:sp>
       <p:sp>
         <p:nvSpPr>
-          <p:cNvPr id="12" name="Text 8"/>
+          <p:cNvPr id="11" name="Text 8"/>
           <p:cNvSpPr/>
           <p:nvPr/>
         </p:nvSpPr>
@@ -21798,7 +21798,7 @@
       </p:sp>
       <p:sp>
         <p:nvSpPr>
-          <p:cNvPr id="13" name="Text 9"/>
+          <p:cNvPr id="12" name="Text 9"/>
           <p:cNvSpPr/>
           <p:nvPr/>
         </p:nvSpPr>
@@ -21840,7 +21840,7 @@
       </p:sp>
       <p:sp>
         <p:nvSpPr>
-          <p:cNvPr id="14" name="Shape 10"/>
+          <p:cNvPr id="13" name="Shape 10"/>
           <p:cNvSpPr/>
           <p:nvPr/>
         </p:nvSpPr>
@@ -21862,7 +21862,7 @@
       </p:sp>
       <p:sp>
         <p:nvSpPr>
-          <p:cNvPr id="15" name="Text 11"/>
+          <p:cNvPr id="14" name="Text 11"/>
           <p:cNvSpPr/>
           <p:nvPr/>
         </p:nvSpPr>
@@ -21904,7 +21904,7 @@
       </p:sp>
       <p:sp>
         <p:nvSpPr>
-          <p:cNvPr id="16" name="Shape 12"/>
+          <p:cNvPr id="15" name="Shape 12"/>
           <p:cNvSpPr/>
           <p:nvPr/>
         </p:nvSpPr>
@@ -21926,7 +21926,7 @@
       </p:sp>
       <p:sp>
         <p:nvSpPr>
-          <p:cNvPr id="17" name="Text 13"/>
+          <p:cNvPr id="16" name="Text 13"/>
           <p:cNvSpPr/>
           <p:nvPr/>
         </p:nvSpPr>
@@ -21965,7 +21965,7 @@
       </p:sp>
       <p:sp>
         <p:nvSpPr>
-          <p:cNvPr id="18" name="Text 14"/>
+          <p:cNvPr id="17" name="Text 14"/>
           <p:cNvSpPr/>
           <p:nvPr/>
         </p:nvSpPr>

--- a/docs/decks/L11.pptx
+++ b/docs/decks/L11.pptx
@@ -19644,11 +19644,11 @@
         <p:spPr>
           <a:xfrm>
             <a:off x="566928" y="1783080"/>
-            <a:ext cx="6766560" cy="713232"/>
+            <a:ext cx="6766560" cy="603504"/>
           </a:xfrm>
           <a:prstGeom prst="roundRect">
             <a:avLst>
-              <a:gd name="adj" fmla="val 12821"/>
+              <a:gd name="adj" fmla="val 15152"/>
             </a:avLst>
           </a:prstGeom>
           <a:solidFill>
@@ -19671,7 +19671,7 @@
         <p:spPr>
           <a:xfrm>
             <a:off x="786384" y="1783080"/>
-            <a:ext cx="2300630" cy="713232"/>
+            <a:ext cx="2300630" cy="603504"/>
           </a:xfrm>
           <a:prstGeom prst="rect">
             <a:avLst/>
@@ -19710,7 +19710,7 @@
         <p:spPr>
           <a:xfrm>
             <a:off x="3087014" y="1783080"/>
-            <a:ext cx="3975811" cy="713232"/>
+            <a:ext cx="3975811" cy="603504"/>
           </a:xfrm>
           <a:prstGeom prst="rect">
             <a:avLst/>
@@ -19748,12 +19748,12 @@
         </p:nvSpPr>
         <p:spPr>
           <a:xfrm>
-            <a:off x="566928" y="2606040"/>
-            <a:ext cx="6766560" cy="713232"/>
+            <a:off x="566928" y="2496312"/>
+            <a:ext cx="6766560" cy="603504"/>
           </a:xfrm>
           <a:prstGeom prst="roundRect">
             <a:avLst>
-              <a:gd name="adj" fmla="val 12821"/>
+              <a:gd name="adj" fmla="val 15152"/>
             </a:avLst>
           </a:prstGeom>
           <a:solidFill>
@@ -19770,8 +19770,8 @@
         </p:nvSpPr>
         <p:spPr>
           <a:xfrm>
-            <a:off x="786384" y="2606040"/>
-            <a:ext cx="2300630" cy="713232"/>
+            <a:off x="786384" y="2496312"/>
+            <a:ext cx="2300630" cy="603504"/>
           </a:xfrm>
           <a:prstGeom prst="rect">
             <a:avLst/>
@@ -19809,8 +19809,8 @@
         </p:nvSpPr>
         <p:spPr>
           <a:xfrm>
-            <a:off x="3087014" y="2606040"/>
-            <a:ext cx="3975811" cy="713232"/>
+            <a:off x="3087014" y="2496312"/>
+            <a:ext cx="3975811" cy="603504"/>
           </a:xfrm>
           <a:prstGeom prst="rect">
             <a:avLst/>
@@ -19848,12 +19848,12 @@
         </p:nvSpPr>
         <p:spPr>
           <a:xfrm>
-            <a:off x="566928" y="3429000"/>
-            <a:ext cx="6766560" cy="713232"/>
+            <a:off x="566928" y="3209544"/>
+            <a:ext cx="6766560" cy="603504"/>
           </a:xfrm>
           <a:prstGeom prst="roundRect">
             <a:avLst>
-              <a:gd name="adj" fmla="val 12821"/>
+              <a:gd name="adj" fmla="val 15152"/>
             </a:avLst>
           </a:prstGeom>
           <a:solidFill>
@@ -19870,8 +19870,8 @@
         </p:nvSpPr>
         <p:spPr>
           <a:xfrm>
-            <a:off x="786384" y="3429000"/>
-            <a:ext cx="2300630" cy="713232"/>
+            <a:off x="786384" y="3209544"/>
+            <a:ext cx="2300630" cy="603504"/>
           </a:xfrm>
           <a:prstGeom prst="rect">
             <a:avLst/>
@@ -19909,8 +19909,8 @@
         </p:nvSpPr>
         <p:spPr>
           <a:xfrm>
-            <a:off x="3087014" y="3429000"/>
-            <a:ext cx="3975811" cy="713232"/>
+            <a:off x="3087014" y="3209544"/>
+            <a:ext cx="3975811" cy="603504"/>
           </a:xfrm>
           <a:prstGeom prst="rect">
             <a:avLst/>
@@ -19948,12 +19948,12 @@
         </p:nvSpPr>
         <p:spPr>
           <a:xfrm>
-            <a:off x="566928" y="4251960"/>
-            <a:ext cx="6766560" cy="713232"/>
+            <a:off x="566928" y="3922776"/>
+            <a:ext cx="6766560" cy="603504"/>
           </a:xfrm>
           <a:prstGeom prst="roundRect">
             <a:avLst>
-              <a:gd name="adj" fmla="val 12821"/>
+              <a:gd name="adj" fmla="val 15152"/>
             </a:avLst>
           </a:prstGeom>
           <a:solidFill>
@@ -19970,8 +19970,8 @@
         </p:nvSpPr>
         <p:spPr>
           <a:xfrm>
-            <a:off x="786384" y="4251960"/>
-            <a:ext cx="2300630" cy="713232"/>
+            <a:off x="786384" y="3922776"/>
+            <a:ext cx="2300630" cy="603504"/>
           </a:xfrm>
           <a:prstGeom prst="rect">
             <a:avLst/>
@@ -20009,8 +20009,8 @@
         </p:nvSpPr>
         <p:spPr>
           <a:xfrm>
-            <a:off x="3087014" y="4251960"/>
-            <a:ext cx="3975811" cy="713232"/>
+            <a:off x="3087014" y="3922776"/>
+            <a:ext cx="3975811" cy="603504"/>
           </a:xfrm>
           <a:prstGeom prst="rect">
             <a:avLst/>
@@ -20048,218 +20048,12 @@
         </p:nvSpPr>
         <p:spPr>
           <a:xfrm>
-            <a:off x="7635240" y="1783080"/>
-            <a:ext cx="3995928" cy="2194560"/>
+            <a:off x="566928" y="4617720"/>
+            <a:ext cx="1348740" cy="420624"/>
           </a:xfrm>
           <a:prstGeom prst="roundRect">
             <a:avLst>
-              <a:gd name="adj" fmla="val 5000"/>
-            </a:avLst>
-          </a:prstGeom>
-          <a:solidFill>
-            <a:srgbClr val="FBE9E9"/>
-          </a:solidFill>
-          <a:ln/>
-        </p:spPr>
-      </p:sp>
-      <p:sp>
-        <p:nvSpPr>
-          <p:cNvPr id="20" name="Text 17"/>
-          <p:cNvSpPr/>
-          <p:nvPr/>
-        </p:nvSpPr>
-        <p:spPr>
-          <a:xfrm>
-            <a:off x="7854696" y="1911096"/>
-            <a:ext cx="3557016" cy="219456"/>
-          </a:xfrm>
-          <a:prstGeom prst="rect">
-            <a:avLst/>
-          </a:prstGeom>
-          <a:noFill/>
-          <a:ln/>
-        </p:spPr>
-        <p:txBody>
-          <a:bodyPr wrap="square" lIns="0" tIns="0" rIns="0" bIns="0" rtlCol="0" anchor="ctr"/>
-          <a:lstStyle/>
-          <a:p>
-            <a:pPr indent="0" marL="0">
-              <a:buNone/>
-            </a:pPr>
-            <a:r>
-              <a:rPr lang="en-US" sz="950" b="1" spc="150" kern="0" dirty="0">
-                <a:solidFill>
-                  <a:srgbClr val="C62A2A"/>
-                </a:solidFill>
-                <a:latin typeface="Courier New" pitchFamily="34" charset="0"/>
-                <a:ea typeface="Courier New" pitchFamily="34" charset="-122"/>
-                <a:cs typeface="Courier New" pitchFamily="34" charset="-120"/>
-              </a:rPr>
-              <a:t>ПАСТКА: JOB, А НЕ WORKFLOW</a:t>
-            </a:r>
-            <a:endParaRPr lang="en-US" sz="950" dirty="0"/>
-          </a:p>
-        </p:txBody>
-      </p:sp>
-      <p:sp>
-        <p:nvSpPr>
-          <p:cNvPr id="21" name="Text 18"/>
-          <p:cNvSpPr/>
-          <p:nvPr/>
-        </p:nvSpPr>
-        <p:spPr>
-          <a:xfrm>
-            <a:off x="7854696" y="2167128"/>
-            <a:ext cx="3557016" cy="1682496"/>
-          </a:xfrm>
-          <a:prstGeom prst="rect">
-            <a:avLst/>
-          </a:prstGeom>
-          <a:noFill/>
-          <a:ln/>
-        </p:spPr>
-        <p:txBody>
-          <a:bodyPr wrap="square" lIns="0" tIns="0" rIns="0" bIns="0" rtlCol="0" anchor="ctr"/>
-          <a:lstStyle/>
-          <a:p>
-            <a:pPr indent="0" marL="0">
-              <a:lnSpc>
-                <a:spcPct val="112000"/>
-              </a:lnSpc>
-              <a:buNone/>
-            </a:pPr>
-            <a:r>
-              <a:rPr lang="en-US" sz="1300" dirty="0">
-                <a:solidFill>
-                  <a:srgbClr val="111318"/>
-                </a:solidFill>
-                <a:latin typeface="Montserrat" pitchFamily="34" charset="0"/>
-                <a:ea typeface="Montserrat" pitchFamily="34" charset="-122"/>
-                <a:cs typeface="Montserrat" pitchFamily="34" charset="-120"/>
-              </a:rPr>
-              <a:t>У списку — назва job (eval), а не workflow. Неіснуючий чек нічого не блокує.</a:t>
-            </a:r>
-            <a:endParaRPr lang="en-US" sz="1300" dirty="0"/>
-          </a:p>
-        </p:txBody>
-      </p:sp>
-      <p:sp>
-        <p:nvSpPr>
-          <p:cNvPr id="22" name="Shape 19"/>
-          <p:cNvSpPr/>
-          <p:nvPr/>
-        </p:nvSpPr>
-        <p:spPr>
-          <a:xfrm>
-            <a:off x="7635240" y="4114800"/>
-            <a:ext cx="3995928" cy="1051560"/>
-          </a:xfrm>
-          <a:prstGeom prst="roundRect">
-            <a:avLst>
-              <a:gd name="adj" fmla="val 10435"/>
-            </a:avLst>
-          </a:prstGeom>
-          <a:solidFill>
-            <a:srgbClr val="F8F0E2"/>
-          </a:solidFill>
-          <a:ln/>
-        </p:spPr>
-      </p:sp>
-      <p:sp>
-        <p:nvSpPr>
-          <p:cNvPr id="23" name="Text 20"/>
-          <p:cNvSpPr/>
-          <p:nvPr/>
-        </p:nvSpPr>
-        <p:spPr>
-          <a:xfrm>
-            <a:off x="7854696" y="4242816"/>
-            <a:ext cx="3557016" cy="219456"/>
-          </a:xfrm>
-          <a:prstGeom prst="rect">
-            <a:avLst/>
-          </a:prstGeom>
-          <a:noFill/>
-          <a:ln/>
-        </p:spPr>
-        <p:txBody>
-          <a:bodyPr wrap="square" lIns="0" tIns="0" rIns="0" bIns="0" rtlCol="0" anchor="ctr"/>
-          <a:lstStyle/>
-          <a:p>
-            <a:pPr indent="0" marL="0">
-              <a:buNone/>
-            </a:pPr>
-            <a:r>
-              <a:rPr lang="en-US" sz="950" b="1" spc="150" kern="0" dirty="0">
-                <a:solidFill>
-                  <a:srgbClr val="9A5B12"/>
-                </a:solidFill>
-                <a:latin typeface="Courier New" pitchFamily="34" charset="0"/>
-                <a:ea typeface="Courier New" pitchFamily="34" charset="-122"/>
-                <a:cs typeface="Courier New" pitchFamily="34" charset="-120"/>
-              </a:rPr>
-              <a:t>БЕЗКОШТОВНИЙ ПЛАН</a:t>
-            </a:r>
-            <a:endParaRPr lang="en-US" sz="950" dirty="0"/>
-          </a:p>
-        </p:txBody>
-      </p:sp>
-      <p:sp>
-        <p:nvSpPr>
-          <p:cNvPr id="24" name="Text 21"/>
-          <p:cNvSpPr/>
-          <p:nvPr/>
-        </p:nvSpPr>
-        <p:spPr>
-          <a:xfrm>
-            <a:off x="7854696" y="4498848"/>
-            <a:ext cx="3557016" cy="539496"/>
-          </a:xfrm>
-          <a:prstGeom prst="rect">
-            <a:avLst/>
-          </a:prstGeom>
-          <a:noFill/>
-          <a:ln/>
-        </p:spPr>
-        <p:txBody>
-          <a:bodyPr wrap="square" lIns="0" tIns="0" rIns="0" bIns="0" rtlCol="0" anchor="ctr"/>
-          <a:lstStyle/>
-          <a:p>
-            <a:pPr indent="0" marL="0">
-              <a:lnSpc>
-                <a:spcPct val="112000"/>
-              </a:lnSpc>
-              <a:buNone/>
-            </a:pPr>
-            <a:r>
-              <a:rPr lang="en-US" sz="1300" dirty="0">
-                <a:solidFill>
-                  <a:srgbClr val="111318"/>
-                </a:solidFill>
-                <a:latin typeface="Montserrat" pitchFamily="34" charset="0"/>
-                <a:ea typeface="Montserrat" pitchFamily="34" charset="-122"/>
-                <a:cs typeface="Montserrat" pitchFamily="34" charset="-120"/>
-              </a:rPr>
-              <a:t>на приватному репозиторії protection може бути недоступний — перевірте заздалегідь.</a:t>
-            </a:r>
-            <a:endParaRPr lang="en-US" sz="1300" dirty="0"/>
-          </a:p>
-        </p:txBody>
-      </p:sp>
-      <p:sp>
-        <p:nvSpPr>
-          <p:cNvPr id="25" name="Shape 22"/>
-          <p:cNvSpPr/>
-          <p:nvPr/>
-        </p:nvSpPr>
-        <p:spPr>
-          <a:xfrm>
-            <a:off x="566928" y="5257800"/>
-            <a:ext cx="11064240" cy="594360"/>
-          </a:xfrm>
-          <a:prstGeom prst="roundRect">
-            <a:avLst>
-              <a:gd name="adj" fmla="val 18462"/>
+              <a:gd name="adj" fmla="val 21739"/>
             </a:avLst>
           </a:prstGeom>
           <a:solidFill>
@@ -20275,7 +20069,591 @@
       </p:sp>
       <p:sp>
         <p:nvSpPr>
-          <p:cNvPr id="26" name="Text 23"/>
+          <p:cNvPr id="20" name="Text 17"/>
+          <p:cNvSpPr/>
+          <p:nvPr/>
+        </p:nvSpPr>
+        <p:spPr>
+          <a:xfrm>
+            <a:off x="621792" y="4617720"/>
+            <a:ext cx="1239012" cy="420624"/>
+          </a:xfrm>
+          <a:prstGeom prst="rect">
+            <a:avLst/>
+          </a:prstGeom>
+          <a:noFill/>
+          <a:ln/>
+        </p:spPr>
+        <p:txBody>
+          <a:bodyPr wrap="square" lIns="0" tIns="0" rIns="0" bIns="0" rtlCol="0" anchor="ctr"/>
+          <a:lstStyle/>
+          <a:p>
+            <a:pPr algn="ctr" indent="0" marL="0">
+              <a:buNone/>
+            </a:pPr>
+            <a:r>
+              <a:rPr lang="en-US" sz="900" dirty="0">
+                <a:solidFill>
+                  <a:srgbClr val="111318"/>
+                </a:solidFill>
+                <a:latin typeface="Courier New" pitchFamily="34" charset="0"/>
+                <a:ea typeface="Courier New" pitchFamily="34" charset="-122"/>
+                <a:cs typeface="Courier New" pitchFamily="34" charset="-120"/>
+              </a:rPr>
+              <a:t>PR</a:t>
+            </a:r>
+            <a:endParaRPr lang="en-US" sz="900" dirty="0"/>
+          </a:p>
+        </p:txBody>
+      </p:sp>
+      <p:sp>
+        <p:nvSpPr>
+          <p:cNvPr id="21" name="Shape 18"/>
+          <p:cNvSpPr/>
+          <p:nvPr/>
+        </p:nvSpPr>
+        <p:spPr>
+          <a:xfrm>
+            <a:off x="2007108" y="4828032"/>
+            <a:ext cx="164592" cy="0"/>
+          </a:xfrm>
+          <a:prstGeom prst="line">
+            <a:avLst/>
+          </a:prstGeom>
+          <a:noFill/>
+          <a:ln w="15875">
+            <a:solidFill>
+              <a:srgbClr val="C9B8FB"/>
+            </a:solidFill>
+            <a:prstDash val="solid"/>
+          </a:ln>
+        </p:spPr>
+      </p:sp>
+      <p:sp>
+        <p:nvSpPr>
+          <p:cNvPr id="22" name="Shape 19"/>
+          <p:cNvSpPr/>
+          <p:nvPr/>
+        </p:nvSpPr>
+        <p:spPr>
+          <a:xfrm rot="5400000">
+            <a:off x="2135124" y="4759452"/>
+            <a:ext cx="146304" cy="137160"/>
+          </a:xfrm>
+          <a:prstGeom prst="triangle">
+            <a:avLst/>
+          </a:prstGeom>
+          <a:solidFill>
+            <a:srgbClr val="C9B8FB"/>
+          </a:solidFill>
+          <a:ln/>
+        </p:spPr>
+      </p:sp>
+      <p:sp>
+        <p:nvSpPr>
+          <p:cNvPr id="23" name="Shape 20"/>
+          <p:cNvSpPr/>
+          <p:nvPr/>
+        </p:nvSpPr>
+        <p:spPr>
+          <a:xfrm>
+            <a:off x="2372868" y="4617720"/>
+            <a:ext cx="1348740" cy="420624"/>
+          </a:xfrm>
+          <a:prstGeom prst="roundRect">
+            <a:avLst>
+              <a:gd name="adj" fmla="val 21739"/>
+            </a:avLst>
+          </a:prstGeom>
+          <a:solidFill>
+            <a:srgbClr val="EFEAFE"/>
+          </a:solidFill>
+          <a:ln/>
+        </p:spPr>
+      </p:sp>
+      <p:sp>
+        <p:nvSpPr>
+          <p:cNvPr id="24" name="Text 21"/>
+          <p:cNvSpPr/>
+          <p:nvPr/>
+        </p:nvSpPr>
+        <p:spPr>
+          <a:xfrm>
+            <a:off x="2427732" y="4617720"/>
+            <a:ext cx="1239012" cy="420624"/>
+          </a:xfrm>
+          <a:prstGeom prst="rect">
+            <a:avLst/>
+          </a:prstGeom>
+          <a:noFill/>
+          <a:ln/>
+        </p:spPr>
+        <p:txBody>
+          <a:bodyPr wrap="square" lIns="0" tIns="0" rIns="0" bIns="0" rtlCol="0" anchor="ctr"/>
+          <a:lstStyle/>
+          <a:p>
+            <a:pPr algn="ctr" indent="0" marL="0">
+              <a:buNone/>
+            </a:pPr>
+            <a:r>
+              <a:rPr lang="en-US" sz="900" b="1" dirty="0">
+                <a:solidFill>
+                  <a:srgbClr val="5A05F4"/>
+                </a:solidFill>
+                <a:latin typeface="Courier New" pitchFamily="34" charset="0"/>
+                <a:ea typeface="Courier New" pitchFamily="34" charset="-122"/>
+                <a:cs typeface="Courier New" pitchFamily="34" charset="-120"/>
+              </a:rPr>
+              <a:t>job eval</a:t>
+            </a:r>
+            <a:endParaRPr lang="en-US" sz="900" dirty="0"/>
+          </a:p>
+        </p:txBody>
+      </p:sp>
+      <p:sp>
+        <p:nvSpPr>
+          <p:cNvPr id="25" name="Shape 22"/>
+          <p:cNvSpPr/>
+          <p:nvPr/>
+        </p:nvSpPr>
+        <p:spPr>
+          <a:xfrm>
+            <a:off x="3813048" y="4828032"/>
+            <a:ext cx="164592" cy="0"/>
+          </a:xfrm>
+          <a:prstGeom prst="line">
+            <a:avLst/>
+          </a:prstGeom>
+          <a:noFill/>
+          <a:ln w="15875">
+            <a:solidFill>
+              <a:srgbClr val="C9B8FB"/>
+            </a:solidFill>
+            <a:prstDash val="solid"/>
+          </a:ln>
+        </p:spPr>
+      </p:sp>
+      <p:sp>
+        <p:nvSpPr>
+          <p:cNvPr id="26" name="Shape 23"/>
+          <p:cNvSpPr/>
+          <p:nvPr/>
+        </p:nvSpPr>
+        <p:spPr>
+          <a:xfrm rot="5400000">
+            <a:off x="3941064" y="4759452"/>
+            <a:ext cx="146304" cy="137160"/>
+          </a:xfrm>
+          <a:prstGeom prst="triangle">
+            <a:avLst/>
+          </a:prstGeom>
+          <a:solidFill>
+            <a:srgbClr val="C9B8FB"/>
+          </a:solidFill>
+          <a:ln/>
+        </p:spPr>
+      </p:sp>
+      <p:sp>
+        <p:nvSpPr>
+          <p:cNvPr id="27" name="Shape 24"/>
+          <p:cNvSpPr/>
+          <p:nvPr/>
+        </p:nvSpPr>
+        <p:spPr>
+          <a:xfrm>
+            <a:off x="4178808" y="4617720"/>
+            <a:ext cx="1348740" cy="420624"/>
+          </a:xfrm>
+          <a:prstGeom prst="roundRect">
+            <a:avLst>
+              <a:gd name="adj" fmla="val 21739"/>
+            </a:avLst>
+          </a:prstGeom>
+          <a:solidFill>
+            <a:srgbClr val="E9F4EF"/>
+          </a:solidFill>
+          <a:ln/>
+        </p:spPr>
+      </p:sp>
+      <p:sp>
+        <p:nvSpPr>
+          <p:cNvPr id="28" name="Text 25"/>
+          <p:cNvSpPr/>
+          <p:nvPr/>
+        </p:nvSpPr>
+        <p:spPr>
+          <a:xfrm>
+            <a:off x="4233672" y="4617720"/>
+            <a:ext cx="1239012" cy="420624"/>
+          </a:xfrm>
+          <a:prstGeom prst="rect">
+            <a:avLst/>
+          </a:prstGeom>
+          <a:noFill/>
+          <a:ln/>
+        </p:spPr>
+        <p:txBody>
+          <a:bodyPr wrap="square" lIns="0" tIns="0" rIns="0" bIns="0" rtlCol="0" anchor="ctr"/>
+          <a:lstStyle/>
+          <a:p>
+            <a:pPr algn="ctr" indent="0" marL="0">
+              <a:buNone/>
+            </a:pPr>
+            <a:r>
+              <a:rPr lang="en-US" sz="900" b="1" dirty="0">
+                <a:solidFill>
+                  <a:srgbClr val="1B8A5A"/>
+                </a:solidFill>
+                <a:latin typeface="Courier New" pitchFamily="34" charset="0"/>
+                <a:ea typeface="Courier New" pitchFamily="34" charset="-122"/>
+                <a:cs typeface="Courier New" pitchFamily="34" charset="-120"/>
+              </a:rPr>
+              <a:t>protection</a:t>
+            </a:r>
+            <a:endParaRPr lang="en-US" sz="900" dirty="0"/>
+          </a:p>
+        </p:txBody>
+      </p:sp>
+      <p:sp>
+        <p:nvSpPr>
+          <p:cNvPr id="29" name="Shape 26"/>
+          <p:cNvSpPr/>
+          <p:nvPr/>
+        </p:nvSpPr>
+        <p:spPr>
+          <a:xfrm>
+            <a:off x="5618988" y="4828032"/>
+            <a:ext cx="164592" cy="0"/>
+          </a:xfrm>
+          <a:prstGeom prst="line">
+            <a:avLst/>
+          </a:prstGeom>
+          <a:noFill/>
+          <a:ln w="15875">
+            <a:solidFill>
+              <a:srgbClr val="C9B8FB"/>
+            </a:solidFill>
+            <a:prstDash val="solid"/>
+          </a:ln>
+        </p:spPr>
+      </p:sp>
+      <p:sp>
+        <p:nvSpPr>
+          <p:cNvPr id="30" name="Shape 27"/>
+          <p:cNvSpPr/>
+          <p:nvPr/>
+        </p:nvSpPr>
+        <p:spPr>
+          <a:xfrm rot="5400000">
+            <a:off x="5747004" y="4759452"/>
+            <a:ext cx="146304" cy="137160"/>
+          </a:xfrm>
+          <a:prstGeom prst="triangle">
+            <a:avLst/>
+          </a:prstGeom>
+          <a:solidFill>
+            <a:srgbClr val="C9B8FB"/>
+          </a:solidFill>
+          <a:ln/>
+        </p:spPr>
+      </p:sp>
+      <p:sp>
+        <p:nvSpPr>
+          <p:cNvPr id="31" name="Shape 28"/>
+          <p:cNvSpPr/>
+          <p:nvPr/>
+        </p:nvSpPr>
+        <p:spPr>
+          <a:xfrm>
+            <a:off x="5984748" y="4617720"/>
+            <a:ext cx="1348740" cy="420624"/>
+          </a:xfrm>
+          <a:prstGeom prst="roundRect">
+            <a:avLst>
+              <a:gd name="adj" fmla="val 21739"/>
+            </a:avLst>
+          </a:prstGeom>
+          <a:solidFill>
+            <a:srgbClr val="FBE9E9"/>
+          </a:solidFill>
+          <a:ln/>
+        </p:spPr>
+      </p:sp>
+      <p:sp>
+        <p:nvSpPr>
+          <p:cNvPr id="32" name="Text 29"/>
+          <p:cNvSpPr/>
+          <p:nvPr/>
+        </p:nvSpPr>
+        <p:spPr>
+          <a:xfrm>
+            <a:off x="6039612" y="4617720"/>
+            <a:ext cx="1239012" cy="420624"/>
+          </a:xfrm>
+          <a:prstGeom prst="rect">
+            <a:avLst/>
+          </a:prstGeom>
+          <a:noFill/>
+          <a:ln/>
+        </p:spPr>
+        <p:txBody>
+          <a:bodyPr wrap="square" lIns="0" tIns="0" rIns="0" bIns="0" rtlCol="0" anchor="ctr"/>
+          <a:lstStyle/>
+          <a:p>
+            <a:pPr algn="ctr" indent="0" marL="0">
+              <a:buNone/>
+            </a:pPr>
+            <a:r>
+              <a:rPr lang="en-US" sz="900" b="1" dirty="0">
+                <a:solidFill>
+                  <a:srgbClr val="C62A2A"/>
+                </a:solidFill>
+                <a:latin typeface="Courier New" pitchFamily="34" charset="0"/>
+                <a:ea typeface="Courier New" pitchFamily="34" charset="-122"/>
+                <a:cs typeface="Courier New" pitchFamily="34" charset="-120"/>
+              </a:rPr>
+              <a:t>merge</a:t>
+            </a:r>
+            <a:endParaRPr lang="en-US" sz="900" dirty="0"/>
+          </a:p>
+        </p:txBody>
+      </p:sp>
+      <p:sp>
+        <p:nvSpPr>
+          <p:cNvPr id="33" name="Shape 30"/>
+          <p:cNvSpPr/>
+          <p:nvPr/>
+        </p:nvSpPr>
+        <p:spPr>
+          <a:xfrm>
+            <a:off x="7635240" y="1783080"/>
+            <a:ext cx="3995928" cy="2194560"/>
+          </a:xfrm>
+          <a:prstGeom prst="roundRect">
+            <a:avLst>
+              <a:gd name="adj" fmla="val 5000"/>
+            </a:avLst>
+          </a:prstGeom>
+          <a:solidFill>
+            <a:srgbClr val="FBE9E9"/>
+          </a:solidFill>
+          <a:ln/>
+        </p:spPr>
+      </p:sp>
+      <p:sp>
+        <p:nvSpPr>
+          <p:cNvPr id="34" name="Text 31"/>
+          <p:cNvSpPr/>
+          <p:nvPr/>
+        </p:nvSpPr>
+        <p:spPr>
+          <a:xfrm>
+            <a:off x="7854696" y="1911096"/>
+            <a:ext cx="3557016" cy="219456"/>
+          </a:xfrm>
+          <a:prstGeom prst="rect">
+            <a:avLst/>
+          </a:prstGeom>
+          <a:noFill/>
+          <a:ln/>
+        </p:spPr>
+        <p:txBody>
+          <a:bodyPr wrap="square" lIns="0" tIns="0" rIns="0" bIns="0" rtlCol="0" anchor="ctr"/>
+          <a:lstStyle/>
+          <a:p>
+            <a:pPr indent="0" marL="0">
+              <a:buNone/>
+            </a:pPr>
+            <a:r>
+              <a:rPr lang="en-US" sz="950" b="1" spc="150" kern="0" dirty="0">
+                <a:solidFill>
+                  <a:srgbClr val="C62A2A"/>
+                </a:solidFill>
+                <a:latin typeface="Courier New" pitchFamily="34" charset="0"/>
+                <a:ea typeface="Courier New" pitchFamily="34" charset="-122"/>
+                <a:cs typeface="Courier New" pitchFamily="34" charset="-120"/>
+              </a:rPr>
+              <a:t>ПАСТКА: JOB, А НЕ WORKFLOW</a:t>
+            </a:r>
+            <a:endParaRPr lang="en-US" sz="950" dirty="0"/>
+          </a:p>
+        </p:txBody>
+      </p:sp>
+      <p:sp>
+        <p:nvSpPr>
+          <p:cNvPr id="35" name="Text 32"/>
+          <p:cNvSpPr/>
+          <p:nvPr/>
+        </p:nvSpPr>
+        <p:spPr>
+          <a:xfrm>
+            <a:off x="7854696" y="2167128"/>
+            <a:ext cx="3557016" cy="1682496"/>
+          </a:xfrm>
+          <a:prstGeom prst="rect">
+            <a:avLst/>
+          </a:prstGeom>
+          <a:noFill/>
+          <a:ln/>
+        </p:spPr>
+        <p:txBody>
+          <a:bodyPr wrap="square" lIns="0" tIns="0" rIns="0" bIns="0" rtlCol="0" anchor="ctr"/>
+          <a:lstStyle/>
+          <a:p>
+            <a:pPr indent="0" marL="0">
+              <a:lnSpc>
+                <a:spcPct val="112000"/>
+              </a:lnSpc>
+              <a:buNone/>
+            </a:pPr>
+            <a:r>
+              <a:rPr lang="en-US" sz="1300" dirty="0">
+                <a:solidFill>
+                  <a:srgbClr val="111318"/>
+                </a:solidFill>
+                <a:latin typeface="Montserrat" pitchFamily="34" charset="0"/>
+                <a:ea typeface="Montserrat" pitchFamily="34" charset="-122"/>
+                <a:cs typeface="Montserrat" pitchFamily="34" charset="-120"/>
+              </a:rPr>
+              <a:t>У списку — назва job (eval), а не workflow. Неіснуючий чек нічого не блокує.</a:t>
+            </a:r>
+            <a:endParaRPr lang="en-US" sz="1300" dirty="0"/>
+          </a:p>
+        </p:txBody>
+      </p:sp>
+      <p:sp>
+        <p:nvSpPr>
+          <p:cNvPr id="36" name="Shape 33"/>
+          <p:cNvSpPr/>
+          <p:nvPr/>
+        </p:nvSpPr>
+        <p:spPr>
+          <a:xfrm>
+            <a:off x="7635240" y="4114800"/>
+            <a:ext cx="3995928" cy="1051560"/>
+          </a:xfrm>
+          <a:prstGeom prst="roundRect">
+            <a:avLst>
+              <a:gd name="adj" fmla="val 10435"/>
+            </a:avLst>
+          </a:prstGeom>
+          <a:solidFill>
+            <a:srgbClr val="F8F0E2"/>
+          </a:solidFill>
+          <a:ln/>
+        </p:spPr>
+      </p:sp>
+      <p:sp>
+        <p:nvSpPr>
+          <p:cNvPr id="37" name="Text 34"/>
+          <p:cNvSpPr/>
+          <p:nvPr/>
+        </p:nvSpPr>
+        <p:spPr>
+          <a:xfrm>
+            <a:off x="7854696" y="4242816"/>
+            <a:ext cx="3557016" cy="219456"/>
+          </a:xfrm>
+          <a:prstGeom prst="rect">
+            <a:avLst/>
+          </a:prstGeom>
+          <a:noFill/>
+          <a:ln/>
+        </p:spPr>
+        <p:txBody>
+          <a:bodyPr wrap="square" lIns="0" tIns="0" rIns="0" bIns="0" rtlCol="0" anchor="ctr"/>
+          <a:lstStyle/>
+          <a:p>
+            <a:pPr indent="0" marL="0">
+              <a:buNone/>
+            </a:pPr>
+            <a:r>
+              <a:rPr lang="en-US" sz="950" b="1" spc="150" kern="0" dirty="0">
+                <a:solidFill>
+                  <a:srgbClr val="9A5B12"/>
+                </a:solidFill>
+                <a:latin typeface="Courier New" pitchFamily="34" charset="0"/>
+                <a:ea typeface="Courier New" pitchFamily="34" charset="-122"/>
+                <a:cs typeface="Courier New" pitchFamily="34" charset="-120"/>
+              </a:rPr>
+              <a:t>БЕЗКОШТОВНИЙ ПЛАН</a:t>
+            </a:r>
+            <a:endParaRPr lang="en-US" sz="950" dirty="0"/>
+          </a:p>
+        </p:txBody>
+      </p:sp>
+      <p:sp>
+        <p:nvSpPr>
+          <p:cNvPr id="38" name="Text 35"/>
+          <p:cNvSpPr/>
+          <p:nvPr/>
+        </p:nvSpPr>
+        <p:spPr>
+          <a:xfrm>
+            <a:off x="7854696" y="4498848"/>
+            <a:ext cx="3557016" cy="539496"/>
+          </a:xfrm>
+          <a:prstGeom prst="rect">
+            <a:avLst/>
+          </a:prstGeom>
+          <a:noFill/>
+          <a:ln/>
+        </p:spPr>
+        <p:txBody>
+          <a:bodyPr wrap="square" lIns="0" tIns="0" rIns="0" bIns="0" rtlCol="0" anchor="ctr"/>
+          <a:lstStyle/>
+          <a:p>
+            <a:pPr indent="0" marL="0">
+              <a:lnSpc>
+                <a:spcPct val="112000"/>
+              </a:lnSpc>
+              <a:buNone/>
+            </a:pPr>
+            <a:r>
+              <a:rPr lang="en-US" sz="1300" dirty="0">
+                <a:solidFill>
+                  <a:srgbClr val="111318"/>
+                </a:solidFill>
+                <a:latin typeface="Montserrat" pitchFamily="34" charset="0"/>
+                <a:ea typeface="Montserrat" pitchFamily="34" charset="-122"/>
+                <a:cs typeface="Montserrat" pitchFamily="34" charset="-120"/>
+              </a:rPr>
+              <a:t>на приватному репозиторії protection може бути недоступний — перевірте заздалегідь.</a:t>
+            </a:r>
+            <a:endParaRPr lang="en-US" sz="1300" dirty="0"/>
+          </a:p>
+        </p:txBody>
+      </p:sp>
+      <p:sp>
+        <p:nvSpPr>
+          <p:cNvPr id="39" name="Shape 36"/>
+          <p:cNvSpPr/>
+          <p:nvPr/>
+        </p:nvSpPr>
+        <p:spPr>
+          <a:xfrm>
+            <a:off x="566928" y="5257800"/>
+            <a:ext cx="11064240" cy="594360"/>
+          </a:xfrm>
+          <a:prstGeom prst="roundRect">
+            <a:avLst>
+              <a:gd name="adj" fmla="val 18462"/>
+            </a:avLst>
+          </a:prstGeom>
+          <a:solidFill>
+            <a:srgbClr val="FFFFFF"/>
+          </a:solidFill>
+          <a:ln w="12700">
+            <a:solidFill>
+              <a:srgbClr val="E6E7EC"/>
+            </a:solidFill>
+            <a:prstDash val="solid"/>
+          </a:ln>
+        </p:spPr>
+      </p:sp>
+      <p:sp>
+        <p:nvSpPr>
+          <p:cNvPr id="40" name="Text 37"/>
           <p:cNvSpPr/>
           <p:nvPr/>
         </p:nvSpPr>

--- a/docs/decks/L11.pptx
+++ b/docs/decks/L11.pptx
@@ -2447,7 +2447,7 @@
         </p:nvSpPr>
         <p:spPr>
           <a:xfrm>
-            <a:off x="11368735" y="6437376"/>
+            <a:off x="11368735" y="6327648"/>
             <a:ext cx="365760" cy="274320"/>
           </a:xfrm>
           <a:prstGeom prst="rect">
@@ -2483,6 +2483,62 @@
           </a:p>
         </p:txBody>
       </p:sp>
+    </p:spTree>
+  </p:cSld>
+  <p:clrMapOvr>
+    <a:masterClrMapping/>
+  </p:clrMapOvr>
+</p:sldLayout>
+</file>
+
+<file path=ppt/slideLayouts/slideLayout2.xml><?xml version="1.0" encoding="utf-8"?>
+<p:sldLayout xmlns:a="http://schemas.openxmlformats.org/drawingml/2006/main" xmlns:r="http://schemas.openxmlformats.org/officeDocument/2006/relationships" xmlns:p="http://schemas.openxmlformats.org/presentationml/2006/main" preserve="1">
+  <p:cSld name="NEO">
+    <p:bg>
+      <p:bgPr>
+        <a:solidFill>
+          <a:srgbClr val="000000"/>
+        </a:solidFill>
+      </p:bgPr>
+    </p:bg>
+    <p:spTree>
+      <p:nvGrpSpPr>
+        <p:cNvPr id="1" name=""/>
+        <p:cNvGrpSpPr/>
+        <p:nvPr/>
+      </p:nvGrpSpPr>
+      <p:grpSpPr>
+        <a:xfrm>
+          <a:off x="0" y="0"/>
+          <a:ext cx="0" cy="0"/>
+          <a:chOff x="0" y="0"/>
+          <a:chExt cx="0" cy="0"/>
+        </a:xfrm>
+      </p:grpSpPr>
+      <p:pic>
+        <p:nvPicPr>
+          <p:cNvPr id="2" name="Image 0" descr="preencoded.png">    </p:cNvPr>
+          <p:cNvPicPr>
+            <a:picLocks noChangeAspect="1"/>
+          </p:cNvPicPr>
+          <p:nvPr/>
+        </p:nvPicPr>
+        <p:blipFill>
+          <a:blip r:embed="rId1"/>
+          <a:stretch>
+            <a:fillRect/>
+          </a:stretch>
+        </p:blipFill>
+        <p:spPr>
+          <a:xfrm>
+            <a:off x="0" y="0"/>
+            <a:ext cx="12191695" cy="6858000"/>
+          </a:xfrm>
+          <a:prstGeom prst="rect">
+            <a:avLst/>
+          </a:prstGeom>
+        </p:spPr>
+      </p:pic>
     </p:spTree>
   </p:cSld>
   <p:clrMapOvr>
@@ -2520,7 +2576,7 @@
         </p:nvSpPr>
         <p:spPr>
           <a:xfrm>
-            <a:off x="11368735" y="6437376"/>
+            <a:off x="11368735" y="6327648"/>
             <a:ext cx="365760" cy="274320"/>
           </a:xfrm>
           <a:prstGeom prst="rect">
@@ -2561,6 +2617,7 @@
   <p:clrMap bg1="lt1" tx1="dk1" bg2="lt2" tx2="dk2" accent1="accent1" accent2="accent2" accent3="accent3" accent4="accent4" accent5="accent5" accent6="accent6" hlink="hlink" folHlink="folHlink"/>
   <p:sldLayoutIdLst>
     <p:sldLayoutId id="2147483649" r:id="rId1"/>
+    <p:sldLayoutId id="2147483650" r:id="rId2"/>
   </p:sldLayoutIdLst>
   <p:hf sldNum="0" hdr="0" ftr="0" dt="0"/>
   <p:txStyles>
@@ -2819,13 +2876,6 @@
 <file path=ppt/slides/slide1.xml><?xml version="1.0" encoding="utf-8"?>
 <p:sld xmlns:a="http://schemas.openxmlformats.org/drawingml/2006/main" xmlns:r="http://schemas.openxmlformats.org/officeDocument/2006/relationships" xmlns:p="http://schemas.openxmlformats.org/presentationml/2006/main">
   <p:cSld name="Slide 1">
-    <p:bg>
-      <p:bgPr>
-        <a:solidFill>
-          <a:srgbClr val="1B0942"/>
-        </a:solidFill>
-      </p:bgPr>
-    </p:bg>
     <p:spTree>
       <p:nvGrpSpPr>
         <p:cNvPr id="1" name=""/>
@@ -3497,13 +3547,6 @@
 <file path=ppt/slides/slide10.xml><?xml version="1.0" encoding="utf-8"?>
 <p:sld xmlns:a="http://schemas.openxmlformats.org/drawingml/2006/main" xmlns:r="http://schemas.openxmlformats.org/officeDocument/2006/relationships" xmlns:p="http://schemas.openxmlformats.org/presentationml/2006/main">
   <p:cSld name="Slide 10">
-    <p:bg>
-      <p:bgPr>
-        <a:solidFill>
-          <a:srgbClr val="FFFFFF"/>
-        </a:solidFill>
-      </p:bgPr>
-    </p:bg>
     <p:spTree>
       <p:nvGrpSpPr>
         <p:cNvPr id="1" name=""/>
@@ -3520,7 +3563,29 @@
       </p:grpSpPr>
       <p:sp>
         <p:nvSpPr>
-          <p:cNvPr id="2" name="Text 0"/>
+          <p:cNvPr id="2" name="Shape 0"/>
+          <p:cNvSpPr/>
+          <p:nvPr/>
+        </p:nvSpPr>
+        <p:spPr>
+          <a:xfrm>
+            <a:off x="231343" y="194767"/>
+            <a:ext cx="11716207" cy="6473952"/>
+          </a:xfrm>
+          <a:prstGeom prst="roundRect">
+            <a:avLst>
+              <a:gd name="adj" fmla="val 3107"/>
+            </a:avLst>
+          </a:prstGeom>
+          <a:solidFill>
+            <a:srgbClr val="FFFFFF"/>
+          </a:solidFill>
+          <a:ln/>
+        </p:spPr>
+      </p:sp>
+      <p:sp>
+        <p:nvSpPr>
+          <p:cNvPr id="3" name="Text 1"/>
           <p:cNvSpPr/>
           <p:nvPr/>
         </p:nvSpPr>
@@ -3559,7 +3624,7 @@
       </p:sp>
       <p:sp>
         <p:nvSpPr>
-          <p:cNvPr id="3" name="Text 1"/>
+          <p:cNvPr id="4" name="Text 2"/>
           <p:cNvSpPr/>
           <p:nvPr/>
         </p:nvSpPr>
@@ -3598,7 +3663,7 @@
       </p:sp>
       <p:sp>
         <p:nvSpPr>
-          <p:cNvPr id="4" name="Shape 2"/>
+          <p:cNvPr id="5" name="Shape 3"/>
           <p:cNvSpPr/>
           <p:nvPr/>
         </p:nvSpPr>
@@ -3620,7 +3685,7 @@
       </p:sp>
       <p:sp>
         <p:nvSpPr>
-          <p:cNvPr id="5" name="Text 3"/>
+          <p:cNvPr id="6" name="Text 4"/>
           <p:cNvSpPr/>
           <p:nvPr/>
         </p:nvSpPr>
@@ -3659,7 +3724,7 @@
       </p:sp>
       <p:pic>
         <p:nvPicPr>
-          <p:cNvPr id="6" name="Image 0" descr="preencoded.png">    </p:cNvPr>
+          <p:cNvPr id="7" name="Image 0" descr="preencoded.png">    </p:cNvPr>
           <p:cNvPicPr>
             <a:picLocks noChangeAspect="1"/>
           </p:cNvPicPr>
@@ -3673,7 +3738,7 @@
         </p:blipFill>
         <p:spPr>
           <a:xfrm>
-            <a:off x="566928" y="6254496"/>
+            <a:off x="566928" y="6126480"/>
             <a:ext cx="1481328" cy="457200"/>
           </a:xfrm>
           <a:prstGeom prst="rect">
@@ -3683,7 +3748,7 @@
       </p:pic>
       <p:sp>
         <p:nvSpPr>
-          <p:cNvPr id="7" name="Shape 4"/>
+          <p:cNvPr id="8" name="Shape 5"/>
           <p:cNvSpPr/>
           <p:nvPr/>
         </p:nvSpPr>
@@ -3705,7 +3770,7 @@
       </p:sp>
       <p:sp>
         <p:nvSpPr>
-          <p:cNvPr id="8" name="Text 5"/>
+          <p:cNvPr id="9" name="Text 6"/>
           <p:cNvSpPr/>
           <p:nvPr/>
         </p:nvSpPr>
@@ -3744,7 +3809,7 @@
       </p:sp>
       <p:sp>
         <p:nvSpPr>
-          <p:cNvPr id="9" name="Text 6"/>
+          <p:cNvPr id="10" name="Text 7"/>
           <p:cNvSpPr/>
           <p:nvPr/>
         </p:nvSpPr>
@@ -3783,7 +3848,7 @@
       </p:sp>
       <p:sp>
         <p:nvSpPr>
-          <p:cNvPr id="10" name="Shape 7"/>
+          <p:cNvPr id="11" name="Shape 8"/>
           <p:cNvSpPr/>
           <p:nvPr/>
         </p:nvSpPr>
@@ -3805,7 +3870,7 @@
       </p:sp>
       <p:sp>
         <p:nvSpPr>
-          <p:cNvPr id="11" name="Text 8"/>
+          <p:cNvPr id="12" name="Text 9"/>
           <p:cNvSpPr/>
           <p:nvPr/>
         </p:nvSpPr>
@@ -3844,7 +3909,7 @@
       </p:sp>
       <p:sp>
         <p:nvSpPr>
-          <p:cNvPr id="12" name="Text 9"/>
+          <p:cNvPr id="13" name="Text 10"/>
           <p:cNvSpPr/>
           <p:nvPr/>
         </p:nvSpPr>
@@ -3883,7 +3948,7 @@
       </p:sp>
       <p:sp>
         <p:nvSpPr>
-          <p:cNvPr id="13" name="Shape 10"/>
+          <p:cNvPr id="14" name="Shape 11"/>
           <p:cNvSpPr/>
           <p:nvPr/>
         </p:nvSpPr>
@@ -3905,7 +3970,7 @@
       </p:sp>
       <p:sp>
         <p:nvSpPr>
-          <p:cNvPr id="14" name="Text 11"/>
+          <p:cNvPr id="15" name="Text 12"/>
           <p:cNvSpPr/>
           <p:nvPr/>
         </p:nvSpPr>
@@ -3944,7 +4009,7 @@
       </p:sp>
       <p:sp>
         <p:nvSpPr>
-          <p:cNvPr id="15" name="Text 12"/>
+          <p:cNvPr id="16" name="Text 13"/>
           <p:cNvSpPr/>
           <p:nvPr/>
         </p:nvSpPr>
@@ -3986,7 +4051,7 @@
       </p:sp>
       <p:sp>
         <p:nvSpPr>
-          <p:cNvPr id="16" name="Shape 13"/>
+          <p:cNvPr id="17" name="Shape 14"/>
           <p:cNvSpPr/>
           <p:nvPr/>
         </p:nvSpPr>
@@ -4008,7 +4073,7 @@
       </p:sp>
       <p:sp>
         <p:nvSpPr>
-          <p:cNvPr id="17" name="Text 14"/>
+          <p:cNvPr id="18" name="Text 15"/>
           <p:cNvSpPr/>
           <p:nvPr/>
         </p:nvSpPr>
@@ -4060,7 +4125,7 @@
         </p:nvSpPr>
         <p:spPr>
           <a:xfrm>
-            <a:off x="11368735" y="6437376"/>
+            <a:off x="11368735" y="6327648"/>
             <a:ext cx="365760" cy="274320"/>
           </a:xfrm>
           <a:prstGeom prst="rect">
@@ -4107,13 +4172,6 @@
 <file path=ppt/slides/slide11.xml><?xml version="1.0" encoding="utf-8"?>
 <p:sld xmlns:a="http://schemas.openxmlformats.org/drawingml/2006/main" xmlns:r="http://schemas.openxmlformats.org/officeDocument/2006/relationships" xmlns:p="http://schemas.openxmlformats.org/presentationml/2006/main">
   <p:cSld name="Slide 11">
-    <p:bg>
-      <p:bgPr>
-        <a:solidFill>
-          <a:srgbClr val="FFFFFF"/>
-        </a:solidFill>
-      </p:bgPr>
-    </p:bg>
     <p:spTree>
       <p:nvGrpSpPr>
         <p:cNvPr id="1" name=""/>
@@ -4130,7 +4188,29 @@
       </p:grpSpPr>
       <p:sp>
         <p:nvSpPr>
-          <p:cNvPr id="2" name="Text 0"/>
+          <p:cNvPr id="2" name="Shape 0"/>
+          <p:cNvSpPr/>
+          <p:nvPr/>
+        </p:nvSpPr>
+        <p:spPr>
+          <a:xfrm>
+            <a:off x="231343" y="194767"/>
+            <a:ext cx="11716207" cy="6473952"/>
+          </a:xfrm>
+          <a:prstGeom prst="roundRect">
+            <a:avLst>
+              <a:gd name="adj" fmla="val 3107"/>
+            </a:avLst>
+          </a:prstGeom>
+          <a:solidFill>
+            <a:srgbClr val="FFFFFF"/>
+          </a:solidFill>
+          <a:ln/>
+        </p:spPr>
+      </p:sp>
+      <p:sp>
+        <p:nvSpPr>
+          <p:cNvPr id="3" name="Text 1"/>
           <p:cNvSpPr/>
           <p:nvPr/>
         </p:nvSpPr>
@@ -4169,7 +4249,7 @@
       </p:sp>
       <p:sp>
         <p:nvSpPr>
-          <p:cNvPr id="3" name="Text 1"/>
+          <p:cNvPr id="4" name="Text 2"/>
           <p:cNvSpPr/>
           <p:nvPr/>
         </p:nvSpPr>
@@ -4208,7 +4288,7 @@
       </p:sp>
       <p:sp>
         <p:nvSpPr>
-          <p:cNvPr id="4" name="Shape 2"/>
+          <p:cNvPr id="5" name="Shape 3"/>
           <p:cNvSpPr/>
           <p:nvPr/>
         </p:nvSpPr>
@@ -4230,7 +4310,7 @@
       </p:sp>
       <p:sp>
         <p:nvSpPr>
-          <p:cNvPr id="5" name="Text 3"/>
+          <p:cNvPr id="6" name="Text 4"/>
           <p:cNvSpPr/>
           <p:nvPr/>
         </p:nvSpPr>
@@ -4269,7 +4349,7 @@
       </p:sp>
       <p:pic>
         <p:nvPicPr>
-          <p:cNvPr id="6" name="Image 0" descr="preencoded.png">    </p:cNvPr>
+          <p:cNvPr id="7" name="Image 0" descr="preencoded.png">    </p:cNvPr>
           <p:cNvPicPr>
             <a:picLocks noChangeAspect="1"/>
           </p:cNvPicPr>
@@ -4283,7 +4363,7 @@
         </p:blipFill>
         <p:spPr>
           <a:xfrm>
-            <a:off x="566928" y="6254496"/>
+            <a:off x="566928" y="6126480"/>
             <a:ext cx="1481328" cy="457200"/>
           </a:xfrm>
           <a:prstGeom prst="rect">
@@ -4293,7 +4373,7 @@
       </p:pic>
       <p:sp>
         <p:nvSpPr>
-          <p:cNvPr id="7" name="Shape 4"/>
+          <p:cNvPr id="8" name="Shape 5"/>
           <p:cNvSpPr/>
           <p:nvPr/>
         </p:nvSpPr>
@@ -4315,7 +4395,7 @@
       </p:sp>
       <p:sp>
         <p:nvSpPr>
-          <p:cNvPr id="8" name="Text 5"/>
+          <p:cNvPr id="9" name="Text 6"/>
           <p:cNvSpPr/>
           <p:nvPr/>
         </p:nvSpPr>
@@ -4354,7 +4434,7 @@
       </p:sp>
       <p:sp>
         <p:nvSpPr>
-          <p:cNvPr id="9" name="Shape 6"/>
+          <p:cNvPr id="10" name="Shape 7"/>
           <p:cNvSpPr/>
           <p:nvPr/>
         </p:nvSpPr>
@@ -4377,7 +4457,7 @@
       </p:sp>
       <p:sp>
         <p:nvSpPr>
-          <p:cNvPr id="10" name="Shape 7"/>
+          <p:cNvPr id="11" name="Shape 8"/>
           <p:cNvSpPr/>
           <p:nvPr/>
         </p:nvSpPr>
@@ -4397,7 +4477,7 @@
       </p:sp>
       <p:sp>
         <p:nvSpPr>
-          <p:cNvPr id="11" name="Shape 8"/>
+          <p:cNvPr id="12" name="Shape 9"/>
           <p:cNvSpPr/>
           <p:nvPr/>
         </p:nvSpPr>
@@ -4424,7 +4504,7 @@
       </p:sp>
       <p:sp>
         <p:nvSpPr>
-          <p:cNvPr id="12" name="Text 9"/>
+          <p:cNvPr id="13" name="Text 10"/>
           <p:cNvSpPr/>
           <p:nvPr/>
         </p:nvSpPr>
@@ -4463,7 +4543,7 @@
       </p:sp>
       <p:sp>
         <p:nvSpPr>
-          <p:cNvPr id="13" name="Shape 10"/>
+          <p:cNvPr id="14" name="Shape 11"/>
           <p:cNvSpPr/>
           <p:nvPr/>
         </p:nvSpPr>
@@ -4486,7 +4566,7 @@
       </p:sp>
       <p:sp>
         <p:nvSpPr>
-          <p:cNvPr id="14" name="Shape 11"/>
+          <p:cNvPr id="15" name="Shape 12"/>
           <p:cNvSpPr/>
           <p:nvPr/>
         </p:nvSpPr>
@@ -4506,7 +4586,7 @@
       </p:sp>
       <p:sp>
         <p:nvSpPr>
-          <p:cNvPr id="15" name="Shape 12"/>
+          <p:cNvPr id="16" name="Shape 13"/>
           <p:cNvSpPr/>
           <p:nvPr/>
         </p:nvSpPr>
@@ -4533,7 +4613,7 @@
       </p:sp>
       <p:sp>
         <p:nvSpPr>
-          <p:cNvPr id="16" name="Text 13"/>
+          <p:cNvPr id="17" name="Text 14"/>
           <p:cNvSpPr/>
           <p:nvPr/>
         </p:nvSpPr>
@@ -4572,7 +4652,7 @@
       </p:sp>
       <p:sp>
         <p:nvSpPr>
-          <p:cNvPr id="17" name="Text 14"/>
+          <p:cNvPr id="18" name="Text 15"/>
           <p:cNvSpPr/>
           <p:nvPr/>
         </p:nvSpPr>
@@ -4611,7 +4691,7 @@
       </p:sp>
       <p:sp>
         <p:nvSpPr>
-          <p:cNvPr id="18" name="Shape 15"/>
+          <p:cNvPr id="19" name="Shape 16"/>
           <p:cNvSpPr/>
           <p:nvPr/>
         </p:nvSpPr>
@@ -4638,7 +4718,7 @@
       </p:sp>
       <p:sp>
         <p:nvSpPr>
-          <p:cNvPr id="19" name="Text 16"/>
+          <p:cNvPr id="20" name="Text 17"/>
           <p:cNvSpPr/>
           <p:nvPr/>
         </p:nvSpPr>
@@ -4677,7 +4757,7 @@
       </p:sp>
       <p:sp>
         <p:nvSpPr>
-          <p:cNvPr id="20" name="Text 17"/>
+          <p:cNvPr id="21" name="Text 18"/>
           <p:cNvSpPr/>
           <p:nvPr/>
         </p:nvSpPr>
@@ -4716,7 +4796,7 @@
       </p:sp>
       <p:sp>
         <p:nvSpPr>
-          <p:cNvPr id="21" name="Shape 18"/>
+          <p:cNvPr id="22" name="Shape 19"/>
           <p:cNvSpPr/>
           <p:nvPr/>
         </p:nvSpPr>
@@ -4738,7 +4818,7 @@
       </p:sp>
       <p:sp>
         <p:nvSpPr>
-          <p:cNvPr id="22" name="Text 19"/>
+          <p:cNvPr id="23" name="Text 20"/>
           <p:cNvSpPr/>
           <p:nvPr/>
         </p:nvSpPr>
@@ -4777,7 +4857,7 @@
       </p:sp>
       <p:sp>
         <p:nvSpPr>
-          <p:cNvPr id="23" name="Text 20"/>
+          <p:cNvPr id="24" name="Text 21"/>
           <p:cNvSpPr/>
           <p:nvPr/>
         </p:nvSpPr>
@@ -4816,7 +4896,7 @@
       </p:sp>
       <p:sp>
         <p:nvSpPr>
-          <p:cNvPr id="24" name="Shape 21"/>
+          <p:cNvPr id="25" name="Shape 22"/>
           <p:cNvSpPr/>
           <p:nvPr/>
         </p:nvSpPr>
@@ -4843,7 +4923,7 @@
       </p:sp>
       <p:sp>
         <p:nvSpPr>
-          <p:cNvPr id="25" name="Text 22"/>
+          <p:cNvPr id="26" name="Text 23"/>
           <p:cNvSpPr/>
           <p:nvPr/>
         </p:nvSpPr>
@@ -4882,7 +4962,7 @@
       </p:sp>
       <p:sp>
         <p:nvSpPr>
-          <p:cNvPr id="26" name="Text 23"/>
+          <p:cNvPr id="27" name="Text 24"/>
           <p:cNvSpPr/>
           <p:nvPr/>
         </p:nvSpPr>
@@ -4921,7 +5001,7 @@
       </p:sp>
       <p:sp>
         <p:nvSpPr>
-          <p:cNvPr id="27" name="Shape 24"/>
+          <p:cNvPr id="28" name="Shape 25"/>
           <p:cNvSpPr/>
           <p:nvPr/>
         </p:nvSpPr>
@@ -4943,7 +5023,7 @@
       </p:sp>
       <p:sp>
         <p:nvSpPr>
-          <p:cNvPr id="28" name="Text 25"/>
+          <p:cNvPr id="29" name="Text 26"/>
           <p:cNvSpPr/>
           <p:nvPr/>
         </p:nvSpPr>
@@ -4995,7 +5075,7 @@
         </p:nvSpPr>
         <p:spPr>
           <a:xfrm>
-            <a:off x="11368735" y="6437376"/>
+            <a:off x="11368735" y="6327648"/>
             <a:ext cx="365760" cy="274320"/>
           </a:xfrm>
           <a:prstGeom prst="rect">
@@ -5042,13 +5122,6 @@
 <file path=ppt/slides/slide12.xml><?xml version="1.0" encoding="utf-8"?>
 <p:sld xmlns:a="http://schemas.openxmlformats.org/drawingml/2006/main" xmlns:r="http://schemas.openxmlformats.org/officeDocument/2006/relationships" xmlns:p="http://schemas.openxmlformats.org/presentationml/2006/main">
   <p:cSld name="Slide 12">
-    <p:bg>
-      <p:bgPr>
-        <a:solidFill>
-          <a:srgbClr val="FFFFFF"/>
-        </a:solidFill>
-      </p:bgPr>
-    </p:bg>
     <p:spTree>
       <p:nvGrpSpPr>
         <p:cNvPr id="1" name=""/>
@@ -5065,7 +5138,29 @@
       </p:grpSpPr>
       <p:sp>
         <p:nvSpPr>
-          <p:cNvPr id="2" name="Text 0"/>
+          <p:cNvPr id="2" name="Shape 0"/>
+          <p:cNvSpPr/>
+          <p:nvPr/>
+        </p:nvSpPr>
+        <p:spPr>
+          <a:xfrm>
+            <a:off x="231343" y="194767"/>
+            <a:ext cx="11716207" cy="6473952"/>
+          </a:xfrm>
+          <a:prstGeom prst="roundRect">
+            <a:avLst>
+              <a:gd name="adj" fmla="val 3107"/>
+            </a:avLst>
+          </a:prstGeom>
+          <a:solidFill>
+            <a:srgbClr val="FFFFFF"/>
+          </a:solidFill>
+          <a:ln/>
+        </p:spPr>
+      </p:sp>
+      <p:sp>
+        <p:nvSpPr>
+          <p:cNvPr id="3" name="Text 1"/>
           <p:cNvSpPr/>
           <p:nvPr/>
         </p:nvSpPr>
@@ -5104,7 +5199,7 @@
       </p:sp>
       <p:sp>
         <p:nvSpPr>
-          <p:cNvPr id="3" name="Text 1"/>
+          <p:cNvPr id="4" name="Text 2"/>
           <p:cNvSpPr/>
           <p:nvPr/>
         </p:nvSpPr>
@@ -5143,7 +5238,7 @@
       </p:sp>
       <p:sp>
         <p:nvSpPr>
-          <p:cNvPr id="4" name="Shape 2"/>
+          <p:cNvPr id="5" name="Shape 3"/>
           <p:cNvSpPr/>
           <p:nvPr/>
         </p:nvSpPr>
@@ -5165,7 +5260,7 @@
       </p:sp>
       <p:sp>
         <p:nvSpPr>
-          <p:cNvPr id="5" name="Text 3"/>
+          <p:cNvPr id="6" name="Text 4"/>
           <p:cNvSpPr/>
           <p:nvPr/>
         </p:nvSpPr>
@@ -5204,7 +5299,7 @@
       </p:sp>
       <p:pic>
         <p:nvPicPr>
-          <p:cNvPr id="6" name="Image 0" descr="preencoded.png">    </p:cNvPr>
+          <p:cNvPr id="7" name="Image 0" descr="preencoded.png">    </p:cNvPr>
           <p:cNvPicPr>
             <a:picLocks noChangeAspect="1"/>
           </p:cNvPicPr>
@@ -5218,7 +5313,7 @@
         </p:blipFill>
         <p:spPr>
           <a:xfrm>
-            <a:off x="566928" y="6254496"/>
+            <a:off x="566928" y="6126480"/>
             <a:ext cx="1481328" cy="457200"/>
           </a:xfrm>
           <a:prstGeom prst="rect">
@@ -5228,7 +5323,7 @@
       </p:pic>
       <p:sp>
         <p:nvSpPr>
-          <p:cNvPr id="7" name="Shape 4"/>
+          <p:cNvPr id="8" name="Shape 5"/>
           <p:cNvSpPr/>
           <p:nvPr/>
         </p:nvSpPr>
@@ -5250,7 +5345,7 @@
       </p:sp>
       <p:sp>
         <p:nvSpPr>
-          <p:cNvPr id="8" name="Text 5"/>
+          <p:cNvPr id="9" name="Text 6"/>
           <p:cNvSpPr/>
           <p:nvPr/>
         </p:nvSpPr>
@@ -5289,7 +5384,7 @@
       </p:sp>
       <p:sp>
         <p:nvSpPr>
-          <p:cNvPr id="9" name="Text 6"/>
+          <p:cNvPr id="10" name="Text 7"/>
           <p:cNvSpPr/>
           <p:nvPr/>
         </p:nvSpPr>
@@ -5331,7 +5426,7 @@
       </p:sp>
       <p:sp>
         <p:nvSpPr>
-          <p:cNvPr id="10" name="Shape 7"/>
+          <p:cNvPr id="11" name="Shape 8"/>
           <p:cNvSpPr/>
           <p:nvPr/>
         </p:nvSpPr>
@@ -5353,7 +5448,7 @@
       </p:sp>
       <p:sp>
         <p:nvSpPr>
-          <p:cNvPr id="11" name="Text 8"/>
+          <p:cNvPr id="12" name="Text 9"/>
           <p:cNvSpPr/>
           <p:nvPr/>
         </p:nvSpPr>
@@ -5392,7 +5487,7 @@
       </p:sp>
       <p:sp>
         <p:nvSpPr>
-          <p:cNvPr id="12" name="Text 9"/>
+          <p:cNvPr id="13" name="Text 10"/>
           <p:cNvSpPr/>
           <p:nvPr/>
         </p:nvSpPr>
@@ -5434,7 +5529,7 @@
       </p:sp>
       <p:sp>
         <p:nvSpPr>
-          <p:cNvPr id="13" name="Shape 10"/>
+          <p:cNvPr id="14" name="Shape 11"/>
           <p:cNvSpPr/>
           <p:nvPr/>
         </p:nvSpPr>
@@ -5461,7 +5556,7 @@
       </p:sp>
       <p:sp>
         <p:nvSpPr>
-          <p:cNvPr id="14" name="Text 11"/>
+          <p:cNvPr id="15" name="Text 12"/>
           <p:cNvSpPr/>
           <p:nvPr/>
         </p:nvSpPr>
@@ -5500,7 +5595,7 @@
       </p:sp>
       <p:sp>
         <p:nvSpPr>
-          <p:cNvPr id="15" name="Shape 12"/>
+          <p:cNvPr id="16" name="Shape 13"/>
           <p:cNvSpPr/>
           <p:nvPr/>
         </p:nvSpPr>
@@ -5523,7 +5618,7 @@
       </p:sp>
       <p:sp>
         <p:nvSpPr>
-          <p:cNvPr id="16" name="Shape 13"/>
+          <p:cNvPr id="17" name="Shape 14"/>
           <p:cNvSpPr/>
           <p:nvPr/>
         </p:nvSpPr>
@@ -5543,7 +5638,7 @@
       </p:sp>
       <p:sp>
         <p:nvSpPr>
-          <p:cNvPr id="17" name="Shape 14"/>
+          <p:cNvPr id="18" name="Shape 15"/>
           <p:cNvSpPr/>
           <p:nvPr/>
         </p:nvSpPr>
@@ -5570,7 +5665,7 @@
       </p:sp>
       <p:sp>
         <p:nvSpPr>
-          <p:cNvPr id="18" name="Text 15"/>
+          <p:cNvPr id="19" name="Text 16"/>
           <p:cNvSpPr/>
           <p:nvPr/>
         </p:nvSpPr>
@@ -5609,7 +5704,7 @@
       </p:sp>
       <p:sp>
         <p:nvSpPr>
-          <p:cNvPr id="19" name="Shape 16"/>
+          <p:cNvPr id="20" name="Shape 17"/>
           <p:cNvSpPr/>
           <p:nvPr/>
         </p:nvSpPr>
@@ -5632,7 +5727,7 @@
       </p:sp>
       <p:sp>
         <p:nvSpPr>
-          <p:cNvPr id="20" name="Shape 17"/>
+          <p:cNvPr id="21" name="Shape 18"/>
           <p:cNvSpPr/>
           <p:nvPr/>
         </p:nvSpPr>
@@ -5652,7 +5747,7 @@
       </p:sp>
       <p:sp>
         <p:nvSpPr>
-          <p:cNvPr id="21" name="Shape 18"/>
+          <p:cNvPr id="22" name="Shape 19"/>
           <p:cNvSpPr/>
           <p:nvPr/>
         </p:nvSpPr>
@@ -5679,7 +5774,7 @@
       </p:sp>
       <p:sp>
         <p:nvSpPr>
-          <p:cNvPr id="22" name="Text 19"/>
+          <p:cNvPr id="23" name="Text 20"/>
           <p:cNvSpPr/>
           <p:nvPr/>
         </p:nvSpPr>
@@ -5718,7 +5813,7 @@
       </p:sp>
       <p:sp>
         <p:nvSpPr>
-          <p:cNvPr id="23" name="Shape 20"/>
+          <p:cNvPr id="24" name="Shape 21"/>
           <p:cNvSpPr/>
           <p:nvPr/>
         </p:nvSpPr>
@@ -5741,7 +5836,7 @@
       </p:sp>
       <p:sp>
         <p:nvSpPr>
-          <p:cNvPr id="24" name="Shape 21"/>
+          <p:cNvPr id="25" name="Shape 22"/>
           <p:cNvSpPr/>
           <p:nvPr/>
         </p:nvSpPr>
@@ -5761,7 +5856,7 @@
       </p:sp>
       <p:sp>
         <p:nvSpPr>
-          <p:cNvPr id="25" name="Shape 22"/>
+          <p:cNvPr id="26" name="Shape 23"/>
           <p:cNvSpPr/>
           <p:nvPr/>
         </p:nvSpPr>
@@ -5788,7 +5883,7 @@
       </p:sp>
       <p:sp>
         <p:nvSpPr>
-          <p:cNvPr id="26" name="Text 23"/>
+          <p:cNvPr id="27" name="Text 24"/>
           <p:cNvSpPr/>
           <p:nvPr/>
         </p:nvSpPr>
@@ -5827,7 +5922,7 @@
       </p:sp>
       <p:sp>
         <p:nvSpPr>
-          <p:cNvPr id="27" name="Text 24"/>
+          <p:cNvPr id="28" name="Text 25"/>
           <p:cNvSpPr/>
           <p:nvPr/>
         </p:nvSpPr>
@@ -5866,7 +5961,7 @@
       </p:sp>
       <p:sp>
         <p:nvSpPr>
-          <p:cNvPr id="28" name="Shape 25"/>
+          <p:cNvPr id="29" name="Shape 26"/>
           <p:cNvSpPr/>
           <p:nvPr/>
         </p:nvSpPr>
@@ -5888,7 +5983,7 @@
       </p:sp>
       <p:sp>
         <p:nvSpPr>
-          <p:cNvPr id="29" name="Text 26"/>
+          <p:cNvPr id="30" name="Text 27"/>
           <p:cNvSpPr/>
           <p:nvPr/>
         </p:nvSpPr>
@@ -5927,7 +6022,7 @@
       </p:sp>
       <p:sp>
         <p:nvSpPr>
-          <p:cNvPr id="30" name="Text 27"/>
+          <p:cNvPr id="31" name="Text 28"/>
           <p:cNvSpPr/>
           <p:nvPr/>
         </p:nvSpPr>
@@ -5979,7 +6074,7 @@
         </p:nvSpPr>
         <p:spPr>
           <a:xfrm>
-            <a:off x="11368735" y="6437376"/>
+            <a:off x="11368735" y="6327648"/>
             <a:ext cx="365760" cy="274320"/>
           </a:xfrm>
           <a:prstGeom prst="rect">
@@ -6026,13 +6121,6 @@
 <file path=ppt/slides/slide13.xml><?xml version="1.0" encoding="utf-8"?>
 <p:sld xmlns:a="http://schemas.openxmlformats.org/drawingml/2006/main" xmlns:r="http://schemas.openxmlformats.org/officeDocument/2006/relationships" xmlns:p="http://schemas.openxmlformats.org/presentationml/2006/main">
   <p:cSld name="Slide 13">
-    <p:bg>
-      <p:bgPr>
-        <a:solidFill>
-          <a:srgbClr val="FFFFFF"/>
-        </a:solidFill>
-      </p:bgPr>
-    </p:bg>
     <p:spTree>
       <p:nvGrpSpPr>
         <p:cNvPr id="1" name=""/>
@@ -6049,7 +6137,29 @@
       </p:grpSpPr>
       <p:sp>
         <p:nvSpPr>
-          <p:cNvPr id="2" name="Text 0"/>
+          <p:cNvPr id="2" name="Shape 0"/>
+          <p:cNvSpPr/>
+          <p:nvPr/>
+        </p:nvSpPr>
+        <p:spPr>
+          <a:xfrm>
+            <a:off x="231343" y="194767"/>
+            <a:ext cx="11716207" cy="6473952"/>
+          </a:xfrm>
+          <a:prstGeom prst="roundRect">
+            <a:avLst>
+              <a:gd name="adj" fmla="val 3107"/>
+            </a:avLst>
+          </a:prstGeom>
+          <a:solidFill>
+            <a:srgbClr val="FFFFFF"/>
+          </a:solidFill>
+          <a:ln/>
+        </p:spPr>
+      </p:sp>
+      <p:sp>
+        <p:nvSpPr>
+          <p:cNvPr id="3" name="Text 1"/>
           <p:cNvSpPr/>
           <p:nvPr/>
         </p:nvSpPr>
@@ -6088,7 +6198,7 @@
       </p:sp>
       <p:sp>
         <p:nvSpPr>
-          <p:cNvPr id="3" name="Text 1"/>
+          <p:cNvPr id="4" name="Text 2"/>
           <p:cNvSpPr/>
           <p:nvPr/>
         </p:nvSpPr>
@@ -6127,7 +6237,7 @@
       </p:sp>
       <p:sp>
         <p:nvSpPr>
-          <p:cNvPr id="4" name="Text 2"/>
+          <p:cNvPr id="5" name="Text 3"/>
           <p:cNvSpPr/>
           <p:nvPr/>
         </p:nvSpPr>
@@ -6169,7 +6279,7 @@
       </p:sp>
       <p:sp>
         <p:nvSpPr>
-          <p:cNvPr id="5" name="Shape 3"/>
+          <p:cNvPr id="6" name="Shape 4"/>
           <p:cNvSpPr/>
           <p:nvPr/>
         </p:nvSpPr>
@@ -6191,7 +6301,7 @@
       </p:sp>
       <p:sp>
         <p:nvSpPr>
-          <p:cNvPr id="6" name="Text 4"/>
+          <p:cNvPr id="7" name="Text 5"/>
           <p:cNvSpPr/>
           <p:nvPr/>
         </p:nvSpPr>
@@ -6230,7 +6340,7 @@
       </p:sp>
       <p:pic>
         <p:nvPicPr>
-          <p:cNvPr id="7" name="Image 0" descr="preencoded.png">    </p:cNvPr>
+          <p:cNvPr id="8" name="Image 0" descr="preencoded.png">    </p:cNvPr>
           <p:cNvPicPr>
             <a:picLocks noChangeAspect="1"/>
           </p:cNvPicPr>
@@ -6244,7 +6354,7 @@
         </p:blipFill>
         <p:spPr>
           <a:xfrm>
-            <a:off x="566928" y="6254496"/>
+            <a:off x="566928" y="6126480"/>
             <a:ext cx="1481328" cy="457200"/>
           </a:xfrm>
           <a:prstGeom prst="rect">
@@ -7112,7 +7222,7 @@
       </p:graphicFrame>
       <p:sp>
         <p:nvSpPr>
-          <p:cNvPr id="9" name="Shape 5"/>
+          <p:cNvPr id="10" name="Shape 6"/>
           <p:cNvSpPr/>
           <p:nvPr/>
         </p:nvSpPr>
@@ -7134,7 +7244,7 @@
       </p:sp>
       <p:sp>
         <p:nvSpPr>
-          <p:cNvPr id="10" name="Text 6"/>
+          <p:cNvPr id="11" name="Text 7"/>
           <p:cNvSpPr/>
           <p:nvPr/>
         </p:nvSpPr>
@@ -7173,7 +7283,7 @@
       </p:sp>
       <p:sp>
         <p:nvSpPr>
-          <p:cNvPr id="11" name="Text 7"/>
+          <p:cNvPr id="12" name="Text 8"/>
           <p:cNvSpPr/>
           <p:nvPr/>
         </p:nvSpPr>
@@ -7225,7 +7335,7 @@
         </p:nvSpPr>
         <p:spPr>
           <a:xfrm>
-            <a:off x="11368735" y="6437376"/>
+            <a:off x="11368735" y="6327648"/>
             <a:ext cx="365760" cy="274320"/>
           </a:xfrm>
           <a:prstGeom prst="rect">
@@ -7272,13 +7382,6 @@
 <file path=ppt/slides/slide14.xml><?xml version="1.0" encoding="utf-8"?>
 <p:sld xmlns:a="http://schemas.openxmlformats.org/drawingml/2006/main" xmlns:r="http://schemas.openxmlformats.org/officeDocument/2006/relationships" xmlns:p="http://schemas.openxmlformats.org/presentationml/2006/main">
   <p:cSld name="Slide 14">
-    <p:bg>
-      <p:bgPr>
-        <a:solidFill>
-          <a:srgbClr val="FFFFFF"/>
-        </a:solidFill>
-      </p:bgPr>
-    </p:bg>
     <p:spTree>
       <p:nvGrpSpPr>
         <p:cNvPr id="1" name=""/>
@@ -7295,7 +7398,29 @@
       </p:grpSpPr>
       <p:sp>
         <p:nvSpPr>
-          <p:cNvPr id="2" name="Text 0"/>
+          <p:cNvPr id="2" name="Shape 0"/>
+          <p:cNvSpPr/>
+          <p:nvPr/>
+        </p:nvSpPr>
+        <p:spPr>
+          <a:xfrm>
+            <a:off x="231343" y="194767"/>
+            <a:ext cx="11716207" cy="6473952"/>
+          </a:xfrm>
+          <a:prstGeom prst="roundRect">
+            <a:avLst>
+              <a:gd name="adj" fmla="val 3107"/>
+            </a:avLst>
+          </a:prstGeom>
+          <a:solidFill>
+            <a:srgbClr val="FFFFFF"/>
+          </a:solidFill>
+          <a:ln/>
+        </p:spPr>
+      </p:sp>
+      <p:sp>
+        <p:nvSpPr>
+          <p:cNvPr id="3" name="Text 1"/>
           <p:cNvSpPr/>
           <p:nvPr/>
         </p:nvSpPr>
@@ -7334,7 +7459,7 @@
       </p:sp>
       <p:sp>
         <p:nvSpPr>
-          <p:cNvPr id="3" name="Text 1"/>
+          <p:cNvPr id="4" name="Text 2"/>
           <p:cNvSpPr/>
           <p:nvPr/>
         </p:nvSpPr>
@@ -7373,7 +7498,7 @@
       </p:sp>
       <p:sp>
         <p:nvSpPr>
-          <p:cNvPr id="4" name="Shape 2"/>
+          <p:cNvPr id="5" name="Shape 3"/>
           <p:cNvSpPr/>
           <p:nvPr/>
         </p:nvSpPr>
@@ -7395,7 +7520,7 @@
       </p:sp>
       <p:sp>
         <p:nvSpPr>
-          <p:cNvPr id="5" name="Text 3"/>
+          <p:cNvPr id="6" name="Text 4"/>
           <p:cNvSpPr/>
           <p:nvPr/>
         </p:nvSpPr>
@@ -7434,7 +7559,7 @@
       </p:sp>
       <p:sp>
         <p:nvSpPr>
-          <p:cNvPr id="6" name="Shape 4"/>
+          <p:cNvPr id="7" name="Shape 5"/>
           <p:cNvSpPr/>
           <p:nvPr/>
         </p:nvSpPr>
@@ -7456,7 +7581,7 @@
       </p:sp>
       <p:sp>
         <p:nvSpPr>
-          <p:cNvPr id="7" name="Text 5"/>
+          <p:cNvPr id="8" name="Text 6"/>
           <p:cNvSpPr/>
           <p:nvPr/>
         </p:nvSpPr>
@@ -7495,7 +7620,7 @@
       </p:sp>
       <p:pic>
         <p:nvPicPr>
-          <p:cNvPr id="8" name="Image 0" descr="preencoded.png">    </p:cNvPr>
+          <p:cNvPr id="9" name="Image 0" descr="preencoded.png">    </p:cNvPr>
           <p:cNvPicPr>
             <a:picLocks noChangeAspect="1"/>
           </p:cNvPicPr>
@@ -7509,7 +7634,7 @@
         </p:blipFill>
         <p:spPr>
           <a:xfrm>
-            <a:off x="566928" y="6254496"/>
+            <a:off x="566928" y="6126480"/>
             <a:ext cx="1481328" cy="457200"/>
           </a:xfrm>
           <a:prstGeom prst="rect">
@@ -7519,7 +7644,7 @@
       </p:pic>
       <p:sp>
         <p:nvSpPr>
-          <p:cNvPr id="9" name="Shape 6"/>
+          <p:cNvPr id="10" name="Shape 7"/>
           <p:cNvSpPr/>
           <p:nvPr/>
         </p:nvSpPr>
@@ -7541,7 +7666,7 @@
       </p:sp>
       <p:sp>
         <p:nvSpPr>
-          <p:cNvPr id="10" name="Text 7"/>
+          <p:cNvPr id="11" name="Text 8"/>
           <p:cNvSpPr/>
           <p:nvPr/>
         </p:nvSpPr>
@@ -7580,7 +7705,7 @@
       </p:sp>
       <p:sp>
         <p:nvSpPr>
-          <p:cNvPr id="11" name="Shape 8"/>
+          <p:cNvPr id="12" name="Shape 9"/>
           <p:cNvSpPr/>
           <p:nvPr/>
         </p:nvSpPr>
@@ -7603,7 +7728,7 @@
       </p:sp>
       <p:sp>
         <p:nvSpPr>
-          <p:cNvPr id="12" name="Shape 9"/>
+          <p:cNvPr id="13" name="Shape 10"/>
           <p:cNvSpPr/>
           <p:nvPr/>
         </p:nvSpPr>
@@ -7623,7 +7748,7 @@
       </p:sp>
       <p:sp>
         <p:nvSpPr>
-          <p:cNvPr id="13" name="Shape 10"/>
+          <p:cNvPr id="14" name="Shape 11"/>
           <p:cNvSpPr/>
           <p:nvPr/>
         </p:nvSpPr>
@@ -7645,7 +7770,7 @@
       </p:sp>
       <p:sp>
         <p:nvSpPr>
-          <p:cNvPr id="14" name="Text 11"/>
+          <p:cNvPr id="15" name="Text 12"/>
           <p:cNvSpPr/>
           <p:nvPr/>
         </p:nvSpPr>
@@ -7684,7 +7809,7 @@
       </p:sp>
       <p:sp>
         <p:nvSpPr>
-          <p:cNvPr id="15" name="Shape 12"/>
+          <p:cNvPr id="16" name="Shape 13"/>
           <p:cNvSpPr/>
           <p:nvPr/>
         </p:nvSpPr>
@@ -7707,7 +7832,7 @@
       </p:sp>
       <p:sp>
         <p:nvSpPr>
-          <p:cNvPr id="16" name="Shape 13"/>
+          <p:cNvPr id="17" name="Shape 14"/>
           <p:cNvSpPr/>
           <p:nvPr/>
         </p:nvSpPr>
@@ -7727,7 +7852,7 @@
       </p:sp>
       <p:sp>
         <p:nvSpPr>
-          <p:cNvPr id="17" name="Shape 14"/>
+          <p:cNvPr id="18" name="Shape 15"/>
           <p:cNvSpPr/>
           <p:nvPr/>
         </p:nvSpPr>
@@ -7749,7 +7874,7 @@
       </p:sp>
       <p:sp>
         <p:nvSpPr>
-          <p:cNvPr id="18" name="Text 15"/>
+          <p:cNvPr id="19" name="Text 16"/>
           <p:cNvSpPr/>
           <p:nvPr/>
         </p:nvSpPr>
@@ -7788,7 +7913,7 @@
       </p:sp>
       <p:sp>
         <p:nvSpPr>
-          <p:cNvPr id="19" name="Shape 16"/>
+          <p:cNvPr id="20" name="Shape 17"/>
           <p:cNvSpPr/>
           <p:nvPr/>
         </p:nvSpPr>
@@ -7815,7 +7940,7 @@
       </p:sp>
       <p:sp>
         <p:nvSpPr>
-          <p:cNvPr id="20" name="Text 17"/>
+          <p:cNvPr id="21" name="Text 18"/>
           <p:cNvSpPr/>
           <p:nvPr/>
         </p:nvSpPr>
@@ -7854,7 +7979,7 @@
       </p:sp>
       <p:sp>
         <p:nvSpPr>
-          <p:cNvPr id="21" name="Text 18"/>
+          <p:cNvPr id="22" name="Text 19"/>
           <p:cNvSpPr/>
           <p:nvPr/>
         </p:nvSpPr>
@@ -7896,7 +8021,7 @@
       </p:sp>
       <p:sp>
         <p:nvSpPr>
-          <p:cNvPr id="22" name="Shape 19"/>
+          <p:cNvPr id="23" name="Shape 20"/>
           <p:cNvSpPr/>
           <p:nvPr/>
         </p:nvSpPr>
@@ -7918,7 +8043,7 @@
       </p:sp>
       <p:sp>
         <p:nvSpPr>
-          <p:cNvPr id="23" name="Text 20"/>
+          <p:cNvPr id="24" name="Text 21"/>
           <p:cNvSpPr/>
           <p:nvPr/>
         </p:nvSpPr>
@@ -7957,7 +8082,7 @@
       </p:sp>
       <p:sp>
         <p:nvSpPr>
-          <p:cNvPr id="24" name="Text 21"/>
+          <p:cNvPr id="25" name="Text 22"/>
           <p:cNvSpPr/>
           <p:nvPr/>
         </p:nvSpPr>
@@ -7999,7 +8124,7 @@
       </p:sp>
       <p:sp>
         <p:nvSpPr>
-          <p:cNvPr id="25" name="Shape 22"/>
+          <p:cNvPr id="26" name="Shape 23"/>
           <p:cNvSpPr/>
           <p:nvPr/>
         </p:nvSpPr>
@@ -8021,7 +8146,7 @@
       </p:sp>
       <p:sp>
         <p:nvSpPr>
-          <p:cNvPr id="26" name="Text 23"/>
+          <p:cNvPr id="27" name="Text 24"/>
           <p:cNvSpPr/>
           <p:nvPr/>
         </p:nvSpPr>
@@ -8073,7 +8198,7 @@
         </p:nvSpPr>
         <p:spPr>
           <a:xfrm>
-            <a:off x="11368735" y="6437376"/>
+            <a:off x="11368735" y="6327648"/>
             <a:ext cx="365760" cy="274320"/>
           </a:xfrm>
           <a:prstGeom prst="rect">
@@ -8120,13 +8245,6 @@
 <file path=ppt/slides/slide15.xml><?xml version="1.0" encoding="utf-8"?>
 <p:sld xmlns:a="http://schemas.openxmlformats.org/drawingml/2006/main" xmlns:r="http://schemas.openxmlformats.org/officeDocument/2006/relationships" xmlns:p="http://schemas.openxmlformats.org/presentationml/2006/main">
   <p:cSld name="Slide 15">
-    <p:bg>
-      <p:bgPr>
-        <a:solidFill>
-          <a:srgbClr val="FFFFFF"/>
-        </a:solidFill>
-      </p:bgPr>
-    </p:bg>
     <p:spTree>
       <p:nvGrpSpPr>
         <p:cNvPr id="1" name=""/>
@@ -8143,7 +8261,29 @@
       </p:grpSpPr>
       <p:sp>
         <p:nvSpPr>
-          <p:cNvPr id="2" name="Text 0"/>
+          <p:cNvPr id="2" name="Shape 0"/>
+          <p:cNvSpPr/>
+          <p:nvPr/>
+        </p:nvSpPr>
+        <p:spPr>
+          <a:xfrm>
+            <a:off x="231343" y="194767"/>
+            <a:ext cx="11716207" cy="6473952"/>
+          </a:xfrm>
+          <a:prstGeom prst="roundRect">
+            <a:avLst>
+              <a:gd name="adj" fmla="val 3107"/>
+            </a:avLst>
+          </a:prstGeom>
+          <a:solidFill>
+            <a:srgbClr val="FFFFFF"/>
+          </a:solidFill>
+          <a:ln/>
+        </p:spPr>
+      </p:sp>
+      <p:sp>
+        <p:nvSpPr>
+          <p:cNvPr id="3" name="Text 1"/>
           <p:cNvSpPr/>
           <p:nvPr/>
         </p:nvSpPr>
@@ -8182,7 +8322,7 @@
       </p:sp>
       <p:sp>
         <p:nvSpPr>
-          <p:cNvPr id="3" name="Text 1"/>
+          <p:cNvPr id="4" name="Text 2"/>
           <p:cNvSpPr/>
           <p:nvPr/>
         </p:nvSpPr>
@@ -8221,7 +8361,7 @@
       </p:sp>
       <p:sp>
         <p:nvSpPr>
-          <p:cNvPr id="4" name="Shape 2"/>
+          <p:cNvPr id="5" name="Shape 3"/>
           <p:cNvSpPr/>
           <p:nvPr/>
         </p:nvSpPr>
@@ -8243,7 +8383,7 @@
       </p:sp>
       <p:sp>
         <p:nvSpPr>
-          <p:cNvPr id="5" name="Text 3"/>
+          <p:cNvPr id="6" name="Text 4"/>
           <p:cNvSpPr/>
           <p:nvPr/>
         </p:nvSpPr>
@@ -8282,7 +8422,7 @@
       </p:sp>
       <p:pic>
         <p:nvPicPr>
-          <p:cNvPr id="6" name="Image 0" descr="preencoded.png">    </p:cNvPr>
+          <p:cNvPr id="7" name="Image 0" descr="preencoded.png">    </p:cNvPr>
           <p:cNvPicPr>
             <a:picLocks noChangeAspect="1"/>
           </p:cNvPicPr>
@@ -8296,7 +8436,7 @@
         </p:blipFill>
         <p:spPr>
           <a:xfrm>
-            <a:off x="566928" y="6254496"/>
+            <a:off x="566928" y="6126480"/>
             <a:ext cx="1481328" cy="457200"/>
           </a:xfrm>
           <a:prstGeom prst="rect">
@@ -8306,7 +8446,7 @@
       </p:pic>
       <p:sp>
         <p:nvSpPr>
-          <p:cNvPr id="7" name="Shape 4"/>
+          <p:cNvPr id="8" name="Shape 5"/>
           <p:cNvSpPr/>
           <p:nvPr/>
         </p:nvSpPr>
@@ -8333,7 +8473,7 @@
       </p:sp>
       <p:sp>
         <p:nvSpPr>
-          <p:cNvPr id="8" name="Text 5"/>
+          <p:cNvPr id="9" name="Text 6"/>
           <p:cNvSpPr/>
           <p:nvPr/>
         </p:nvSpPr>
@@ -8526,7 +8666,7 @@
       </p:sp>
       <p:sp>
         <p:nvSpPr>
-          <p:cNvPr id="9" name="Shape 6"/>
+          <p:cNvPr id="10" name="Shape 7"/>
           <p:cNvSpPr/>
           <p:nvPr/>
         </p:nvSpPr>
@@ -8548,7 +8688,7 @@
       </p:sp>
       <p:sp>
         <p:nvSpPr>
-          <p:cNvPr id="10" name="Shape 7"/>
+          <p:cNvPr id="11" name="Shape 8"/>
           <p:cNvSpPr/>
           <p:nvPr/>
         </p:nvSpPr>
@@ -8568,7 +8708,7 @@
       </p:sp>
       <p:sp>
         <p:nvSpPr>
-          <p:cNvPr id="11" name="Text 8"/>
+          <p:cNvPr id="12" name="Text 9"/>
           <p:cNvSpPr/>
           <p:nvPr/>
         </p:nvSpPr>
@@ -8607,7 +8747,7 @@
       </p:sp>
       <p:sp>
         <p:nvSpPr>
-          <p:cNvPr id="12" name="Text 9"/>
+          <p:cNvPr id="13" name="Text 10"/>
           <p:cNvSpPr/>
           <p:nvPr/>
         </p:nvSpPr>
@@ -8646,7 +8786,7 @@
       </p:sp>
       <p:sp>
         <p:nvSpPr>
-          <p:cNvPr id="13" name="Text 10"/>
+          <p:cNvPr id="14" name="Text 11"/>
           <p:cNvSpPr/>
           <p:nvPr/>
         </p:nvSpPr>
@@ -8688,7 +8828,7 @@
       </p:sp>
       <p:sp>
         <p:nvSpPr>
-          <p:cNvPr id="14" name="Shape 11"/>
+          <p:cNvPr id="15" name="Shape 12"/>
           <p:cNvSpPr/>
           <p:nvPr/>
         </p:nvSpPr>
@@ -8710,7 +8850,7 @@
       </p:sp>
       <p:sp>
         <p:nvSpPr>
-          <p:cNvPr id="15" name="Shape 12"/>
+          <p:cNvPr id="16" name="Shape 13"/>
           <p:cNvSpPr/>
           <p:nvPr/>
         </p:nvSpPr>
@@ -8730,7 +8870,7 @@
       </p:sp>
       <p:sp>
         <p:nvSpPr>
-          <p:cNvPr id="16" name="Text 13"/>
+          <p:cNvPr id="17" name="Text 14"/>
           <p:cNvSpPr/>
           <p:nvPr/>
         </p:nvSpPr>
@@ -8769,7 +8909,7 @@
       </p:sp>
       <p:sp>
         <p:nvSpPr>
-          <p:cNvPr id="17" name="Text 14"/>
+          <p:cNvPr id="18" name="Text 15"/>
           <p:cNvSpPr/>
           <p:nvPr/>
         </p:nvSpPr>
@@ -8808,7 +8948,7 @@
       </p:sp>
       <p:sp>
         <p:nvSpPr>
-          <p:cNvPr id="18" name="Text 15"/>
+          <p:cNvPr id="19" name="Text 16"/>
           <p:cNvSpPr/>
           <p:nvPr/>
         </p:nvSpPr>
@@ -8850,7 +8990,7 @@
       </p:sp>
       <p:sp>
         <p:nvSpPr>
-          <p:cNvPr id="19" name="Shape 16"/>
+          <p:cNvPr id="20" name="Shape 17"/>
           <p:cNvSpPr/>
           <p:nvPr/>
         </p:nvSpPr>
@@ -8872,7 +9012,7 @@
       </p:sp>
       <p:sp>
         <p:nvSpPr>
-          <p:cNvPr id="20" name="Shape 17"/>
+          <p:cNvPr id="21" name="Shape 18"/>
           <p:cNvSpPr/>
           <p:nvPr/>
         </p:nvSpPr>
@@ -8892,7 +9032,7 @@
       </p:sp>
       <p:sp>
         <p:nvSpPr>
-          <p:cNvPr id="21" name="Text 18"/>
+          <p:cNvPr id="22" name="Text 19"/>
           <p:cNvSpPr/>
           <p:nvPr/>
         </p:nvSpPr>
@@ -8931,7 +9071,7 @@
       </p:sp>
       <p:sp>
         <p:nvSpPr>
-          <p:cNvPr id="22" name="Text 19"/>
+          <p:cNvPr id="23" name="Text 20"/>
           <p:cNvSpPr/>
           <p:nvPr/>
         </p:nvSpPr>
@@ -8970,7 +9110,7 @@
       </p:sp>
       <p:sp>
         <p:nvSpPr>
-          <p:cNvPr id="23" name="Text 20"/>
+          <p:cNvPr id="24" name="Text 21"/>
           <p:cNvSpPr/>
           <p:nvPr/>
         </p:nvSpPr>
@@ -9012,7 +9152,7 @@
       </p:sp>
       <p:sp>
         <p:nvSpPr>
-          <p:cNvPr id="24" name="Shape 21"/>
+          <p:cNvPr id="25" name="Shape 22"/>
           <p:cNvSpPr/>
           <p:nvPr/>
         </p:nvSpPr>
@@ -9034,7 +9174,7 @@
       </p:sp>
       <p:sp>
         <p:nvSpPr>
-          <p:cNvPr id="25" name="Text 22"/>
+          <p:cNvPr id="26" name="Text 23"/>
           <p:cNvSpPr/>
           <p:nvPr/>
         </p:nvSpPr>
@@ -9086,7 +9226,7 @@
         </p:nvSpPr>
         <p:spPr>
           <a:xfrm>
-            <a:off x="11368735" y="6437376"/>
+            <a:off x="11368735" y="6327648"/>
             <a:ext cx="365760" cy="274320"/>
           </a:xfrm>
           <a:prstGeom prst="rect">
@@ -9133,13 +9273,6 @@
 <file path=ppt/slides/slide16.xml><?xml version="1.0" encoding="utf-8"?>
 <p:sld xmlns:a="http://schemas.openxmlformats.org/drawingml/2006/main" xmlns:r="http://schemas.openxmlformats.org/officeDocument/2006/relationships" xmlns:p="http://schemas.openxmlformats.org/presentationml/2006/main">
   <p:cSld name="Slide 16">
-    <p:bg>
-      <p:bgPr>
-        <a:solidFill>
-          <a:srgbClr val="FFFFFF"/>
-        </a:solidFill>
-      </p:bgPr>
-    </p:bg>
     <p:spTree>
       <p:nvGrpSpPr>
         <p:cNvPr id="1" name=""/>
@@ -9156,7 +9289,29 @@
       </p:grpSpPr>
       <p:sp>
         <p:nvSpPr>
-          <p:cNvPr id="2" name="Text 0"/>
+          <p:cNvPr id="2" name="Shape 0"/>
+          <p:cNvSpPr/>
+          <p:nvPr/>
+        </p:nvSpPr>
+        <p:spPr>
+          <a:xfrm>
+            <a:off x="231343" y="194767"/>
+            <a:ext cx="11716207" cy="6473952"/>
+          </a:xfrm>
+          <a:prstGeom prst="roundRect">
+            <a:avLst>
+              <a:gd name="adj" fmla="val 3107"/>
+            </a:avLst>
+          </a:prstGeom>
+          <a:solidFill>
+            <a:srgbClr val="FFFFFF"/>
+          </a:solidFill>
+          <a:ln/>
+        </p:spPr>
+      </p:sp>
+      <p:sp>
+        <p:nvSpPr>
+          <p:cNvPr id="3" name="Text 1"/>
           <p:cNvSpPr/>
           <p:nvPr/>
         </p:nvSpPr>
@@ -9195,7 +9350,7 @@
       </p:sp>
       <p:sp>
         <p:nvSpPr>
-          <p:cNvPr id="3" name="Shape 1"/>
+          <p:cNvPr id="4" name="Shape 2"/>
           <p:cNvSpPr/>
           <p:nvPr/>
         </p:nvSpPr>
@@ -9217,7 +9372,7 @@
       </p:sp>
       <p:sp>
         <p:nvSpPr>
-          <p:cNvPr id="4" name="Text 2"/>
+          <p:cNvPr id="5" name="Text 3"/>
           <p:cNvSpPr/>
           <p:nvPr/>
         </p:nvSpPr>
@@ -9256,7 +9411,7 @@
       </p:sp>
       <p:pic>
         <p:nvPicPr>
-          <p:cNvPr id="5" name="Image 0" descr="preencoded.png">    </p:cNvPr>
+          <p:cNvPr id="6" name="Image 0" descr="preencoded.png">    </p:cNvPr>
           <p:cNvPicPr>
             <a:picLocks noChangeAspect="1"/>
           </p:cNvPicPr>
@@ -9270,7 +9425,7 @@
         </p:blipFill>
         <p:spPr>
           <a:xfrm>
-            <a:off x="566928" y="6254496"/>
+            <a:off x="566928" y="6126480"/>
             <a:ext cx="1481328" cy="457200"/>
           </a:xfrm>
           <a:prstGeom prst="rect">
@@ -9280,7 +9435,7 @@
       </p:pic>
       <p:sp>
         <p:nvSpPr>
-          <p:cNvPr id="6" name="Shape 3"/>
+          <p:cNvPr id="7" name="Shape 4"/>
           <p:cNvSpPr/>
           <p:nvPr/>
         </p:nvSpPr>
@@ -9302,7 +9457,7 @@
       </p:sp>
       <p:sp>
         <p:nvSpPr>
-          <p:cNvPr id="7" name="Shape 4"/>
+          <p:cNvPr id="8" name="Shape 5"/>
           <p:cNvSpPr/>
           <p:nvPr/>
         </p:nvSpPr>
@@ -9322,7 +9477,7 @@
       </p:sp>
       <p:sp>
         <p:nvSpPr>
-          <p:cNvPr id="8" name="Text 5"/>
+          <p:cNvPr id="9" name="Text 6"/>
           <p:cNvSpPr/>
           <p:nvPr/>
         </p:nvSpPr>
@@ -9361,7 +9516,7 @@
       </p:sp>
       <p:sp>
         <p:nvSpPr>
-          <p:cNvPr id="9" name="Text 6"/>
+          <p:cNvPr id="10" name="Text 7"/>
           <p:cNvSpPr/>
           <p:nvPr/>
         </p:nvSpPr>
@@ -9400,7 +9555,7 @@
       </p:sp>
       <p:sp>
         <p:nvSpPr>
-          <p:cNvPr id="10" name="Text 7"/>
+          <p:cNvPr id="11" name="Text 8"/>
           <p:cNvSpPr/>
           <p:nvPr/>
         </p:nvSpPr>
@@ -9442,7 +9597,7 @@
       </p:sp>
       <p:sp>
         <p:nvSpPr>
-          <p:cNvPr id="11" name="Shape 8"/>
+          <p:cNvPr id="12" name="Shape 9"/>
           <p:cNvSpPr/>
           <p:nvPr/>
         </p:nvSpPr>
@@ -9464,7 +9619,7 @@
       </p:sp>
       <p:sp>
         <p:nvSpPr>
-          <p:cNvPr id="12" name="Shape 9"/>
+          <p:cNvPr id="13" name="Shape 10"/>
           <p:cNvSpPr/>
           <p:nvPr/>
         </p:nvSpPr>
@@ -9484,7 +9639,7 @@
       </p:sp>
       <p:sp>
         <p:nvSpPr>
-          <p:cNvPr id="13" name="Text 10"/>
+          <p:cNvPr id="14" name="Text 11"/>
           <p:cNvSpPr/>
           <p:nvPr/>
         </p:nvSpPr>
@@ -9523,7 +9678,7 @@
       </p:sp>
       <p:sp>
         <p:nvSpPr>
-          <p:cNvPr id="14" name="Text 11"/>
+          <p:cNvPr id="15" name="Text 12"/>
           <p:cNvSpPr/>
           <p:nvPr/>
         </p:nvSpPr>
@@ -9562,7 +9717,7 @@
       </p:sp>
       <p:sp>
         <p:nvSpPr>
-          <p:cNvPr id="15" name="Text 12"/>
+          <p:cNvPr id="16" name="Text 13"/>
           <p:cNvSpPr/>
           <p:nvPr/>
         </p:nvSpPr>
@@ -9604,7 +9759,7 @@
       </p:sp>
       <p:sp>
         <p:nvSpPr>
-          <p:cNvPr id="16" name="Shape 13"/>
+          <p:cNvPr id="17" name="Shape 14"/>
           <p:cNvSpPr/>
           <p:nvPr/>
         </p:nvSpPr>
@@ -9626,7 +9781,7 @@
       </p:sp>
       <p:sp>
         <p:nvSpPr>
-          <p:cNvPr id="17" name="Shape 14"/>
+          <p:cNvPr id="18" name="Shape 15"/>
           <p:cNvSpPr/>
           <p:nvPr/>
         </p:nvSpPr>
@@ -9646,7 +9801,7 @@
       </p:sp>
       <p:sp>
         <p:nvSpPr>
-          <p:cNvPr id="18" name="Text 15"/>
+          <p:cNvPr id="19" name="Text 16"/>
           <p:cNvSpPr/>
           <p:nvPr/>
         </p:nvSpPr>
@@ -9685,7 +9840,7 @@
       </p:sp>
       <p:sp>
         <p:nvSpPr>
-          <p:cNvPr id="19" name="Text 16"/>
+          <p:cNvPr id="20" name="Text 17"/>
           <p:cNvSpPr/>
           <p:nvPr/>
         </p:nvSpPr>
@@ -9724,7 +9879,7 @@
       </p:sp>
       <p:sp>
         <p:nvSpPr>
-          <p:cNvPr id="20" name="Text 17"/>
+          <p:cNvPr id="21" name="Text 18"/>
           <p:cNvSpPr/>
           <p:nvPr/>
         </p:nvSpPr>
@@ -9766,7 +9921,7 @@
       </p:sp>
       <p:sp>
         <p:nvSpPr>
-          <p:cNvPr id="21" name="Shape 18"/>
+          <p:cNvPr id="22" name="Shape 19"/>
           <p:cNvSpPr/>
           <p:nvPr/>
         </p:nvSpPr>
@@ -9788,7 +9943,7 @@
       </p:sp>
       <p:sp>
         <p:nvSpPr>
-          <p:cNvPr id="22" name="Shape 19"/>
+          <p:cNvPr id="23" name="Shape 20"/>
           <p:cNvSpPr/>
           <p:nvPr/>
         </p:nvSpPr>
@@ -9808,7 +9963,7 @@
       </p:sp>
       <p:sp>
         <p:nvSpPr>
-          <p:cNvPr id="23" name="Text 20"/>
+          <p:cNvPr id="24" name="Text 21"/>
           <p:cNvSpPr/>
           <p:nvPr/>
         </p:nvSpPr>
@@ -9847,7 +10002,7 @@
       </p:sp>
       <p:sp>
         <p:nvSpPr>
-          <p:cNvPr id="24" name="Text 21"/>
+          <p:cNvPr id="25" name="Text 22"/>
           <p:cNvSpPr/>
           <p:nvPr/>
         </p:nvSpPr>
@@ -9886,7 +10041,7 @@
       </p:sp>
       <p:sp>
         <p:nvSpPr>
-          <p:cNvPr id="25" name="Text 22"/>
+          <p:cNvPr id="26" name="Text 23"/>
           <p:cNvSpPr/>
           <p:nvPr/>
         </p:nvSpPr>
@@ -9928,7 +10083,7 @@
       </p:sp>
       <p:sp>
         <p:nvSpPr>
-          <p:cNvPr id="26" name="Shape 23"/>
+          <p:cNvPr id="27" name="Shape 24"/>
           <p:cNvSpPr/>
           <p:nvPr/>
         </p:nvSpPr>
@@ -9950,7 +10105,7 @@
       </p:sp>
       <p:sp>
         <p:nvSpPr>
-          <p:cNvPr id="27" name="Text 24"/>
+          <p:cNvPr id="28" name="Text 25"/>
           <p:cNvSpPr/>
           <p:nvPr/>
         </p:nvSpPr>
@@ -9989,7 +10144,7 @@
       </p:sp>
       <p:sp>
         <p:nvSpPr>
-          <p:cNvPr id="28" name="Text 25"/>
+          <p:cNvPr id="29" name="Text 26"/>
           <p:cNvSpPr/>
           <p:nvPr/>
         </p:nvSpPr>
@@ -10041,7 +10196,7 @@
         </p:nvSpPr>
         <p:spPr>
           <a:xfrm>
-            <a:off x="11368735" y="6437376"/>
+            <a:off x="11368735" y="6327648"/>
             <a:ext cx="365760" cy="274320"/>
           </a:xfrm>
           <a:prstGeom prst="rect">
@@ -10088,13 +10243,6 @@
 <file path=ppt/slides/slide17.xml><?xml version="1.0" encoding="utf-8"?>
 <p:sld xmlns:a="http://schemas.openxmlformats.org/drawingml/2006/main" xmlns:r="http://schemas.openxmlformats.org/officeDocument/2006/relationships" xmlns:p="http://schemas.openxmlformats.org/presentationml/2006/main">
   <p:cSld name="Slide 17">
-    <p:bg>
-      <p:bgPr>
-        <a:solidFill>
-          <a:srgbClr val="FFFFFF"/>
-        </a:solidFill>
-      </p:bgPr>
-    </p:bg>
     <p:spTree>
       <p:nvGrpSpPr>
         <p:cNvPr id="1" name=""/>
@@ -10111,7 +10259,29 @@
       </p:grpSpPr>
       <p:sp>
         <p:nvSpPr>
-          <p:cNvPr id="2" name="Text 0"/>
+          <p:cNvPr id="2" name="Shape 0"/>
+          <p:cNvSpPr/>
+          <p:nvPr/>
+        </p:nvSpPr>
+        <p:spPr>
+          <a:xfrm>
+            <a:off x="231343" y="194767"/>
+            <a:ext cx="11716207" cy="6473952"/>
+          </a:xfrm>
+          <a:prstGeom prst="roundRect">
+            <a:avLst>
+              <a:gd name="adj" fmla="val 3107"/>
+            </a:avLst>
+          </a:prstGeom>
+          <a:solidFill>
+            <a:srgbClr val="FFFFFF"/>
+          </a:solidFill>
+          <a:ln/>
+        </p:spPr>
+      </p:sp>
+      <p:sp>
+        <p:nvSpPr>
+          <p:cNvPr id="3" name="Text 1"/>
           <p:cNvSpPr/>
           <p:nvPr/>
         </p:nvSpPr>
@@ -10150,7 +10320,7 @@
       </p:sp>
       <p:sp>
         <p:nvSpPr>
-          <p:cNvPr id="3" name="Shape 1"/>
+          <p:cNvPr id="4" name="Shape 2"/>
           <p:cNvSpPr/>
           <p:nvPr/>
         </p:nvSpPr>
@@ -10172,7 +10342,7 @@
       </p:sp>
       <p:sp>
         <p:nvSpPr>
-          <p:cNvPr id="4" name="Text 2"/>
+          <p:cNvPr id="5" name="Text 3"/>
           <p:cNvSpPr/>
           <p:nvPr/>
         </p:nvSpPr>
@@ -10211,7 +10381,7 @@
       </p:sp>
       <p:pic>
         <p:nvPicPr>
-          <p:cNvPr id="5" name="Image 0" descr="preencoded.png">    </p:cNvPr>
+          <p:cNvPr id="6" name="Image 0" descr="preencoded.png">    </p:cNvPr>
           <p:cNvPicPr>
             <a:picLocks noChangeAspect="1"/>
           </p:cNvPicPr>
@@ -10225,7 +10395,7 @@
         </p:blipFill>
         <p:spPr>
           <a:xfrm>
-            <a:off x="566928" y="6254496"/>
+            <a:off x="566928" y="6126480"/>
             <a:ext cx="1481328" cy="457200"/>
           </a:xfrm>
           <a:prstGeom prst="rect">
@@ -10235,7 +10405,7 @@
       </p:pic>
       <p:sp>
         <p:nvSpPr>
-          <p:cNvPr id="6" name="Shape 3"/>
+          <p:cNvPr id="7" name="Shape 4"/>
           <p:cNvSpPr/>
           <p:nvPr/>
         </p:nvSpPr>
@@ -10255,7 +10425,7 @@
       </p:sp>
       <p:sp>
         <p:nvSpPr>
-          <p:cNvPr id="7" name="Text 4"/>
+          <p:cNvPr id="8" name="Text 5"/>
           <p:cNvSpPr/>
           <p:nvPr/>
         </p:nvSpPr>
@@ -10294,7 +10464,7 @@
       </p:sp>
       <p:sp>
         <p:nvSpPr>
-          <p:cNvPr id="8" name="Text 5"/>
+          <p:cNvPr id="9" name="Text 6"/>
           <p:cNvSpPr/>
           <p:nvPr/>
         </p:nvSpPr>
@@ -10347,7 +10517,7 @@
       </p:sp>
       <p:sp>
         <p:nvSpPr>
-          <p:cNvPr id="9" name="Shape 6"/>
+          <p:cNvPr id="10" name="Shape 7"/>
           <p:cNvSpPr/>
           <p:nvPr/>
         </p:nvSpPr>
@@ -10367,7 +10537,7 @@
       </p:sp>
       <p:sp>
         <p:nvSpPr>
-          <p:cNvPr id="10" name="Text 7"/>
+          <p:cNvPr id="11" name="Text 8"/>
           <p:cNvSpPr/>
           <p:nvPr/>
         </p:nvSpPr>
@@ -10406,7 +10576,7 @@
       </p:sp>
       <p:sp>
         <p:nvSpPr>
-          <p:cNvPr id="11" name="Text 8"/>
+          <p:cNvPr id="12" name="Text 9"/>
           <p:cNvSpPr/>
           <p:nvPr/>
         </p:nvSpPr>
@@ -10459,7 +10629,7 @@
       </p:sp>
       <p:sp>
         <p:nvSpPr>
-          <p:cNvPr id="12" name="Shape 9"/>
+          <p:cNvPr id="13" name="Shape 10"/>
           <p:cNvSpPr/>
           <p:nvPr/>
         </p:nvSpPr>
@@ -10479,7 +10649,7 @@
       </p:sp>
       <p:sp>
         <p:nvSpPr>
-          <p:cNvPr id="13" name="Text 10"/>
+          <p:cNvPr id="14" name="Text 11"/>
           <p:cNvSpPr/>
           <p:nvPr/>
         </p:nvSpPr>
@@ -10518,7 +10688,7 @@
       </p:sp>
       <p:sp>
         <p:nvSpPr>
-          <p:cNvPr id="14" name="Text 11"/>
+          <p:cNvPr id="15" name="Text 12"/>
           <p:cNvSpPr/>
           <p:nvPr/>
         </p:nvSpPr>
@@ -10571,7 +10741,7 @@
       </p:sp>
       <p:sp>
         <p:nvSpPr>
-          <p:cNvPr id="15" name="Shape 12"/>
+          <p:cNvPr id="16" name="Shape 13"/>
           <p:cNvSpPr/>
           <p:nvPr/>
         </p:nvSpPr>
@@ -10591,7 +10761,7 @@
       </p:sp>
       <p:sp>
         <p:nvSpPr>
-          <p:cNvPr id="16" name="Text 13"/>
+          <p:cNvPr id="17" name="Text 14"/>
           <p:cNvSpPr/>
           <p:nvPr/>
         </p:nvSpPr>
@@ -10630,7 +10800,7 @@
       </p:sp>
       <p:sp>
         <p:nvSpPr>
-          <p:cNvPr id="17" name="Text 14"/>
+          <p:cNvPr id="18" name="Text 15"/>
           <p:cNvSpPr/>
           <p:nvPr/>
         </p:nvSpPr>
@@ -10683,7 +10853,7 @@
       </p:sp>
       <p:sp>
         <p:nvSpPr>
-          <p:cNvPr id="18" name="Shape 15"/>
+          <p:cNvPr id="19" name="Shape 16"/>
           <p:cNvSpPr/>
           <p:nvPr/>
         </p:nvSpPr>
@@ -10703,7 +10873,7 @@
       </p:sp>
       <p:sp>
         <p:nvSpPr>
-          <p:cNvPr id="19" name="Text 16"/>
+          <p:cNvPr id="20" name="Text 17"/>
           <p:cNvSpPr/>
           <p:nvPr/>
         </p:nvSpPr>
@@ -10742,7 +10912,7 @@
       </p:sp>
       <p:sp>
         <p:nvSpPr>
-          <p:cNvPr id="20" name="Text 17"/>
+          <p:cNvPr id="21" name="Text 18"/>
           <p:cNvSpPr/>
           <p:nvPr/>
         </p:nvSpPr>
@@ -10805,7 +10975,7 @@
         </p:nvSpPr>
         <p:spPr>
           <a:xfrm>
-            <a:off x="11368735" y="6437376"/>
+            <a:off x="11368735" y="6327648"/>
             <a:ext cx="365760" cy="274320"/>
           </a:xfrm>
           <a:prstGeom prst="rect">
@@ -10852,13 +11022,6 @@
 <file path=ppt/slides/slide18.xml><?xml version="1.0" encoding="utf-8"?>
 <p:sld xmlns:a="http://schemas.openxmlformats.org/drawingml/2006/main" xmlns:r="http://schemas.openxmlformats.org/officeDocument/2006/relationships" xmlns:p="http://schemas.openxmlformats.org/presentationml/2006/main">
   <p:cSld name="Slide 18">
-    <p:bg>
-      <p:bgPr>
-        <a:solidFill>
-          <a:srgbClr val="FFFFFF"/>
-        </a:solidFill>
-      </p:bgPr>
-    </p:bg>
     <p:spTree>
       <p:nvGrpSpPr>
         <p:cNvPr id="1" name=""/>
@@ -10875,7 +11038,29 @@
       </p:grpSpPr>
       <p:sp>
         <p:nvSpPr>
-          <p:cNvPr id="2" name="Text 0"/>
+          <p:cNvPr id="2" name="Shape 0"/>
+          <p:cNvSpPr/>
+          <p:nvPr/>
+        </p:nvSpPr>
+        <p:spPr>
+          <a:xfrm>
+            <a:off x="231343" y="194767"/>
+            <a:ext cx="11716207" cy="6473952"/>
+          </a:xfrm>
+          <a:prstGeom prst="roundRect">
+            <a:avLst>
+              <a:gd name="adj" fmla="val 3107"/>
+            </a:avLst>
+          </a:prstGeom>
+          <a:solidFill>
+            <a:srgbClr val="FFFFFF"/>
+          </a:solidFill>
+          <a:ln/>
+        </p:spPr>
+      </p:sp>
+      <p:sp>
+        <p:nvSpPr>
+          <p:cNvPr id="3" name="Text 1"/>
           <p:cNvSpPr/>
           <p:nvPr/>
         </p:nvSpPr>
@@ -10914,7 +11099,7 @@
       </p:sp>
       <p:sp>
         <p:nvSpPr>
-          <p:cNvPr id="3" name="Shape 1"/>
+          <p:cNvPr id="4" name="Shape 2"/>
           <p:cNvSpPr/>
           <p:nvPr/>
         </p:nvSpPr>
@@ -10936,7 +11121,7 @@
       </p:sp>
       <p:sp>
         <p:nvSpPr>
-          <p:cNvPr id="4" name="Text 2"/>
+          <p:cNvPr id="5" name="Text 3"/>
           <p:cNvSpPr/>
           <p:nvPr/>
         </p:nvSpPr>
@@ -10975,7 +11160,7 @@
       </p:sp>
       <p:pic>
         <p:nvPicPr>
-          <p:cNvPr id="5" name="Image 0" descr="preencoded.png">    </p:cNvPr>
+          <p:cNvPr id="6" name="Image 0" descr="preencoded.png">    </p:cNvPr>
           <p:cNvPicPr>
             <a:picLocks noChangeAspect="1"/>
           </p:cNvPicPr>
@@ -10989,7 +11174,7 @@
         </p:blipFill>
         <p:spPr>
           <a:xfrm>
-            <a:off x="566928" y="6254496"/>
+            <a:off x="566928" y="6126480"/>
             <a:ext cx="1481328" cy="457200"/>
           </a:xfrm>
           <a:prstGeom prst="rect">
@@ -10999,7 +11184,7 @@
       </p:pic>
       <p:sp>
         <p:nvSpPr>
-          <p:cNvPr id="6" name="Shape 3"/>
+          <p:cNvPr id="7" name="Shape 4"/>
           <p:cNvSpPr/>
           <p:nvPr/>
         </p:nvSpPr>
@@ -11021,7 +11206,7 @@
       </p:sp>
       <p:sp>
         <p:nvSpPr>
-          <p:cNvPr id="7" name="Text 4"/>
+          <p:cNvPr id="8" name="Text 5"/>
           <p:cNvSpPr/>
           <p:nvPr/>
         </p:nvSpPr>
@@ -11060,7 +11245,7 @@
       </p:sp>
       <p:sp>
         <p:nvSpPr>
-          <p:cNvPr id="8" name="Text 5"/>
+          <p:cNvPr id="9" name="Text 6"/>
           <p:cNvSpPr/>
           <p:nvPr/>
         </p:nvSpPr>
@@ -11102,7 +11287,7 @@
       </p:sp>
       <p:sp>
         <p:nvSpPr>
-          <p:cNvPr id="9" name="Shape 6"/>
+          <p:cNvPr id="10" name="Shape 7"/>
           <p:cNvSpPr/>
           <p:nvPr/>
         </p:nvSpPr>
@@ -11124,7 +11309,7 @@
       </p:sp>
       <p:sp>
         <p:nvSpPr>
-          <p:cNvPr id="10" name="Text 7"/>
+          <p:cNvPr id="11" name="Text 8"/>
           <p:cNvSpPr/>
           <p:nvPr/>
         </p:nvSpPr>
@@ -11163,7 +11348,7 @@
       </p:sp>
       <p:sp>
         <p:nvSpPr>
-          <p:cNvPr id="11" name="Text 8"/>
+          <p:cNvPr id="12" name="Text 9"/>
           <p:cNvSpPr/>
           <p:nvPr/>
         </p:nvSpPr>
@@ -11205,7 +11390,7 @@
       </p:sp>
       <p:sp>
         <p:nvSpPr>
-          <p:cNvPr id="12" name="Shape 9"/>
+          <p:cNvPr id="13" name="Shape 10"/>
           <p:cNvSpPr/>
           <p:nvPr/>
         </p:nvSpPr>
@@ -11232,7 +11417,7 @@
       </p:sp>
       <p:sp>
         <p:nvSpPr>
-          <p:cNvPr id="13" name="Text 10"/>
+          <p:cNvPr id="14" name="Text 11"/>
           <p:cNvSpPr/>
           <p:nvPr/>
         </p:nvSpPr>
@@ -11271,7 +11456,7 @@
       </p:sp>
       <p:sp>
         <p:nvSpPr>
-          <p:cNvPr id="14" name="Text 11"/>
+          <p:cNvPr id="15" name="Text 12"/>
           <p:cNvSpPr/>
           <p:nvPr/>
         </p:nvSpPr>
@@ -11313,7 +11498,7 @@
       </p:sp>
       <p:sp>
         <p:nvSpPr>
-          <p:cNvPr id="15" name="Shape 12"/>
+          <p:cNvPr id="16" name="Shape 13"/>
           <p:cNvSpPr/>
           <p:nvPr/>
         </p:nvSpPr>
@@ -11340,7 +11525,7 @@
       </p:sp>
       <p:sp>
         <p:nvSpPr>
-          <p:cNvPr id="16" name="Text 13"/>
+          <p:cNvPr id="17" name="Text 14"/>
           <p:cNvSpPr/>
           <p:nvPr/>
         </p:nvSpPr>
@@ -11392,7 +11577,7 @@
         </p:nvSpPr>
         <p:spPr>
           <a:xfrm>
-            <a:off x="11368735" y="6437376"/>
+            <a:off x="11368735" y="6327648"/>
             <a:ext cx="365760" cy="274320"/>
           </a:xfrm>
           <a:prstGeom prst="rect">
@@ -11439,13 +11624,6 @@
 <file path=ppt/slides/slide19.xml><?xml version="1.0" encoding="utf-8"?>
 <p:sld xmlns:a="http://schemas.openxmlformats.org/drawingml/2006/main" xmlns:r="http://schemas.openxmlformats.org/officeDocument/2006/relationships" xmlns:p="http://schemas.openxmlformats.org/presentationml/2006/main">
   <p:cSld name="Slide 19">
-    <p:bg>
-      <p:bgPr>
-        <a:solidFill>
-          <a:srgbClr val="FFFFFF"/>
-        </a:solidFill>
-      </p:bgPr>
-    </p:bg>
     <p:spTree>
       <p:nvGrpSpPr>
         <p:cNvPr id="1" name=""/>
@@ -11462,7 +11640,29 @@
       </p:grpSpPr>
       <p:sp>
         <p:nvSpPr>
-          <p:cNvPr id="2" name="Text 0"/>
+          <p:cNvPr id="2" name="Shape 0"/>
+          <p:cNvSpPr/>
+          <p:nvPr/>
+        </p:nvSpPr>
+        <p:spPr>
+          <a:xfrm>
+            <a:off x="231343" y="194767"/>
+            <a:ext cx="11716207" cy="6473952"/>
+          </a:xfrm>
+          <a:prstGeom prst="roundRect">
+            <a:avLst>
+              <a:gd name="adj" fmla="val 3107"/>
+            </a:avLst>
+          </a:prstGeom>
+          <a:solidFill>
+            <a:srgbClr val="FFFFFF"/>
+          </a:solidFill>
+          <a:ln/>
+        </p:spPr>
+      </p:sp>
+      <p:sp>
+        <p:nvSpPr>
+          <p:cNvPr id="3" name="Text 1"/>
           <p:cNvSpPr/>
           <p:nvPr/>
         </p:nvSpPr>
@@ -11501,7 +11701,7 @@
       </p:sp>
       <p:sp>
         <p:nvSpPr>
-          <p:cNvPr id="3" name="Shape 1"/>
+          <p:cNvPr id="4" name="Shape 2"/>
           <p:cNvSpPr/>
           <p:nvPr/>
         </p:nvSpPr>
@@ -11523,7 +11723,7 @@
       </p:sp>
       <p:sp>
         <p:nvSpPr>
-          <p:cNvPr id="4" name="Text 2"/>
+          <p:cNvPr id="5" name="Text 3"/>
           <p:cNvSpPr/>
           <p:nvPr/>
         </p:nvSpPr>
@@ -11562,7 +11762,7 @@
       </p:sp>
       <p:pic>
         <p:nvPicPr>
-          <p:cNvPr id="5" name="Image 0" descr="preencoded.png">    </p:cNvPr>
+          <p:cNvPr id="6" name="Image 0" descr="preencoded.png">    </p:cNvPr>
           <p:cNvPicPr>
             <a:picLocks noChangeAspect="1"/>
           </p:cNvPicPr>
@@ -11576,7 +11776,7 @@
         </p:blipFill>
         <p:spPr>
           <a:xfrm>
-            <a:off x="566928" y="6254496"/>
+            <a:off x="566928" y="6126480"/>
             <a:ext cx="1481328" cy="457200"/>
           </a:xfrm>
           <a:prstGeom prst="rect">
@@ -11586,7 +11786,7 @@
       </p:pic>
       <p:sp>
         <p:nvSpPr>
-          <p:cNvPr id="6" name="Shape 3"/>
+          <p:cNvPr id="7" name="Shape 4"/>
           <p:cNvSpPr/>
           <p:nvPr/>
         </p:nvSpPr>
@@ -11613,7 +11813,7 @@
       </p:sp>
       <p:sp>
         <p:nvSpPr>
-          <p:cNvPr id="7" name="Shape 4"/>
+          <p:cNvPr id="8" name="Shape 5"/>
           <p:cNvSpPr/>
           <p:nvPr/>
         </p:nvSpPr>
@@ -11640,7 +11840,7 @@
       </p:sp>
       <p:sp>
         <p:nvSpPr>
-          <p:cNvPr id="8" name="Shape 5"/>
+          <p:cNvPr id="9" name="Shape 6"/>
           <p:cNvSpPr/>
           <p:nvPr/>
         </p:nvSpPr>
@@ -11660,7 +11860,7 @@
       </p:sp>
       <p:sp>
         <p:nvSpPr>
-          <p:cNvPr id="9" name="Shape 6"/>
+          <p:cNvPr id="10" name="Shape 7"/>
           <p:cNvSpPr/>
           <p:nvPr/>
         </p:nvSpPr>
@@ -11680,7 +11880,7 @@
       </p:sp>
       <p:sp>
         <p:nvSpPr>
-          <p:cNvPr id="10" name="Text 7"/>
+          <p:cNvPr id="11" name="Text 8"/>
           <p:cNvSpPr/>
           <p:nvPr/>
         </p:nvSpPr>
@@ -11719,7 +11919,7 @@
       </p:sp>
       <p:sp>
         <p:nvSpPr>
-          <p:cNvPr id="11" name="Shape 8"/>
+          <p:cNvPr id="12" name="Shape 9"/>
           <p:cNvSpPr/>
           <p:nvPr/>
         </p:nvSpPr>
@@ -11746,7 +11946,7 @@
       </p:sp>
       <p:sp>
         <p:nvSpPr>
-          <p:cNvPr id="12" name="Shape 9"/>
+          <p:cNvPr id="13" name="Shape 10"/>
           <p:cNvSpPr/>
           <p:nvPr/>
         </p:nvSpPr>
@@ -11766,7 +11966,7 @@
       </p:sp>
       <p:sp>
         <p:nvSpPr>
-          <p:cNvPr id="13" name="Shape 10"/>
+          <p:cNvPr id="14" name="Shape 11"/>
           <p:cNvSpPr/>
           <p:nvPr/>
         </p:nvSpPr>
@@ -11786,7 +11986,7 @@
       </p:sp>
       <p:sp>
         <p:nvSpPr>
-          <p:cNvPr id="14" name="Text 11"/>
+          <p:cNvPr id="15" name="Text 12"/>
           <p:cNvSpPr/>
           <p:nvPr/>
         </p:nvSpPr>
@@ -11825,7 +12025,7 @@
       </p:sp>
       <p:sp>
         <p:nvSpPr>
-          <p:cNvPr id="15" name="Shape 12"/>
+          <p:cNvPr id="16" name="Shape 13"/>
           <p:cNvSpPr/>
           <p:nvPr/>
         </p:nvSpPr>
@@ -11852,7 +12052,7 @@
       </p:sp>
       <p:sp>
         <p:nvSpPr>
-          <p:cNvPr id="16" name="Shape 13"/>
+          <p:cNvPr id="17" name="Shape 14"/>
           <p:cNvSpPr/>
           <p:nvPr/>
         </p:nvSpPr>
@@ -11872,7 +12072,7 @@
       </p:sp>
       <p:sp>
         <p:nvSpPr>
-          <p:cNvPr id="17" name="Shape 14"/>
+          <p:cNvPr id="18" name="Shape 15"/>
           <p:cNvSpPr/>
           <p:nvPr/>
         </p:nvSpPr>
@@ -11892,7 +12092,7 @@
       </p:sp>
       <p:sp>
         <p:nvSpPr>
-          <p:cNvPr id="18" name="Text 15"/>
+          <p:cNvPr id="19" name="Text 16"/>
           <p:cNvSpPr/>
           <p:nvPr/>
         </p:nvSpPr>
@@ -11931,7 +12131,7 @@
       </p:sp>
       <p:sp>
         <p:nvSpPr>
-          <p:cNvPr id="19" name="Shape 16"/>
+          <p:cNvPr id="20" name="Shape 17"/>
           <p:cNvSpPr/>
           <p:nvPr/>
         </p:nvSpPr>
@@ -11958,7 +12158,7 @@
       </p:sp>
       <p:sp>
         <p:nvSpPr>
-          <p:cNvPr id="20" name="Shape 17"/>
+          <p:cNvPr id="21" name="Shape 18"/>
           <p:cNvSpPr/>
           <p:nvPr/>
         </p:nvSpPr>
@@ -11978,7 +12178,7 @@
       </p:sp>
       <p:sp>
         <p:nvSpPr>
-          <p:cNvPr id="21" name="Shape 18"/>
+          <p:cNvPr id="22" name="Shape 19"/>
           <p:cNvSpPr/>
           <p:nvPr/>
         </p:nvSpPr>
@@ -11998,7 +12198,7 @@
       </p:sp>
       <p:sp>
         <p:nvSpPr>
-          <p:cNvPr id="22" name="Text 19"/>
+          <p:cNvPr id="23" name="Text 20"/>
           <p:cNvSpPr/>
           <p:nvPr/>
         </p:nvSpPr>
@@ -12037,7 +12237,7 @@
       </p:sp>
       <p:sp>
         <p:nvSpPr>
-          <p:cNvPr id="23" name="Text 20"/>
+          <p:cNvPr id="24" name="Text 21"/>
           <p:cNvSpPr/>
           <p:nvPr/>
         </p:nvSpPr>
@@ -12086,7 +12286,7 @@
         </p:nvSpPr>
         <p:spPr>
           <a:xfrm>
-            <a:off x="11368735" y="6437376"/>
+            <a:off x="11368735" y="6327648"/>
             <a:ext cx="365760" cy="274320"/>
           </a:xfrm>
           <a:prstGeom prst="rect">
@@ -12133,13 +12333,6 @@
 <file path=ppt/slides/slide2.xml><?xml version="1.0" encoding="utf-8"?>
 <p:sld xmlns:a="http://schemas.openxmlformats.org/drawingml/2006/main" xmlns:r="http://schemas.openxmlformats.org/officeDocument/2006/relationships" xmlns:p="http://schemas.openxmlformats.org/presentationml/2006/main">
   <p:cSld name="Slide 2">
-    <p:bg>
-      <p:bgPr>
-        <a:solidFill>
-          <a:srgbClr val="FFFFFF"/>
-        </a:solidFill>
-      </p:bgPr>
-    </p:bg>
     <p:spTree>
       <p:nvGrpSpPr>
         <p:cNvPr id="1" name=""/>
@@ -12156,7 +12349,29 @@
       </p:grpSpPr>
       <p:sp>
         <p:nvSpPr>
-          <p:cNvPr id="2" name="Text 0"/>
+          <p:cNvPr id="2" name="Shape 0"/>
+          <p:cNvSpPr/>
+          <p:nvPr/>
+        </p:nvSpPr>
+        <p:spPr>
+          <a:xfrm>
+            <a:off x="231343" y="194767"/>
+            <a:ext cx="11716207" cy="6473952"/>
+          </a:xfrm>
+          <a:prstGeom prst="roundRect">
+            <a:avLst>
+              <a:gd name="adj" fmla="val 3107"/>
+            </a:avLst>
+          </a:prstGeom>
+          <a:solidFill>
+            <a:srgbClr val="FFFFFF"/>
+          </a:solidFill>
+          <a:ln/>
+        </p:spPr>
+      </p:sp>
+      <p:sp>
+        <p:nvSpPr>
+          <p:cNvPr id="3" name="Text 1"/>
           <p:cNvSpPr/>
           <p:nvPr/>
         </p:nvSpPr>
@@ -12195,7 +12410,7 @@
       </p:sp>
       <p:sp>
         <p:nvSpPr>
-          <p:cNvPr id="3" name="Text 1"/>
+          <p:cNvPr id="4" name="Text 2"/>
           <p:cNvSpPr/>
           <p:nvPr/>
         </p:nvSpPr>
@@ -12237,7 +12452,7 @@
       </p:sp>
       <p:sp>
         <p:nvSpPr>
-          <p:cNvPr id="4" name="Shape 2"/>
+          <p:cNvPr id="5" name="Shape 3"/>
           <p:cNvSpPr/>
           <p:nvPr/>
         </p:nvSpPr>
@@ -12259,7 +12474,7 @@
       </p:sp>
       <p:sp>
         <p:nvSpPr>
-          <p:cNvPr id="5" name="Text 3"/>
+          <p:cNvPr id="6" name="Text 4"/>
           <p:cNvSpPr/>
           <p:nvPr/>
         </p:nvSpPr>
@@ -12298,7 +12513,7 @@
       </p:sp>
       <p:pic>
         <p:nvPicPr>
-          <p:cNvPr id="6" name="Image 0" descr="preencoded.png">    </p:cNvPr>
+          <p:cNvPr id="7" name="Image 0" descr="preencoded.png">    </p:cNvPr>
           <p:cNvPicPr>
             <a:picLocks noChangeAspect="1"/>
           </p:cNvPicPr>
@@ -12312,7 +12527,7 @@
         </p:blipFill>
         <p:spPr>
           <a:xfrm>
-            <a:off x="566928" y="6254496"/>
+            <a:off x="566928" y="6126480"/>
             <a:ext cx="1481328" cy="457200"/>
           </a:xfrm>
           <a:prstGeom prst="rect">
@@ -12322,7 +12537,7 @@
       </p:pic>
       <p:sp>
         <p:nvSpPr>
-          <p:cNvPr id="7" name="Shape 4"/>
+          <p:cNvPr id="8" name="Shape 5"/>
           <p:cNvSpPr/>
           <p:nvPr/>
         </p:nvSpPr>
@@ -12349,7 +12564,7 @@
       </p:sp>
       <p:sp>
         <p:nvSpPr>
-          <p:cNvPr id="8" name="Shape 5"/>
+          <p:cNvPr id="9" name="Shape 6"/>
           <p:cNvSpPr/>
           <p:nvPr/>
         </p:nvSpPr>
@@ -12369,7 +12584,7 @@
       </p:sp>
       <p:sp>
         <p:nvSpPr>
-          <p:cNvPr id="9" name="Text 6"/>
+          <p:cNvPr id="10" name="Text 7"/>
           <p:cNvSpPr/>
           <p:nvPr/>
         </p:nvSpPr>
@@ -12408,7 +12623,7 @@
       </p:sp>
       <p:sp>
         <p:nvSpPr>
-          <p:cNvPr id="10" name="Text 7"/>
+          <p:cNvPr id="11" name="Text 8"/>
           <p:cNvSpPr/>
           <p:nvPr/>
         </p:nvSpPr>
@@ -12447,7 +12662,7 @@
       </p:sp>
       <p:sp>
         <p:nvSpPr>
-          <p:cNvPr id="11" name="Text 8"/>
+          <p:cNvPr id="12" name="Text 9"/>
           <p:cNvSpPr/>
           <p:nvPr/>
         </p:nvSpPr>
@@ -12489,7 +12704,7 @@
       </p:sp>
       <p:sp>
         <p:nvSpPr>
-          <p:cNvPr id="12" name="Shape 9"/>
+          <p:cNvPr id="13" name="Shape 10"/>
           <p:cNvSpPr/>
           <p:nvPr/>
         </p:nvSpPr>
@@ -12516,7 +12731,7 @@
       </p:sp>
       <p:sp>
         <p:nvSpPr>
-          <p:cNvPr id="13" name="Shape 10"/>
+          <p:cNvPr id="14" name="Shape 11"/>
           <p:cNvSpPr/>
           <p:nvPr/>
         </p:nvSpPr>
@@ -12536,7 +12751,7 @@
       </p:sp>
       <p:sp>
         <p:nvSpPr>
-          <p:cNvPr id="14" name="Text 11"/>
+          <p:cNvPr id="15" name="Text 12"/>
           <p:cNvSpPr/>
           <p:nvPr/>
         </p:nvSpPr>
@@ -12575,7 +12790,7 @@
       </p:sp>
       <p:sp>
         <p:nvSpPr>
-          <p:cNvPr id="15" name="Text 12"/>
+          <p:cNvPr id="16" name="Text 13"/>
           <p:cNvSpPr/>
           <p:nvPr/>
         </p:nvSpPr>
@@ -12614,7 +12829,7 @@
       </p:sp>
       <p:sp>
         <p:nvSpPr>
-          <p:cNvPr id="16" name="Text 13"/>
+          <p:cNvPr id="17" name="Text 14"/>
           <p:cNvSpPr/>
           <p:nvPr/>
         </p:nvSpPr>
@@ -12656,7 +12871,7 @@
       </p:sp>
       <p:sp>
         <p:nvSpPr>
-          <p:cNvPr id="17" name="Shape 14"/>
+          <p:cNvPr id="18" name="Shape 15"/>
           <p:cNvSpPr/>
           <p:nvPr/>
         </p:nvSpPr>
@@ -12683,7 +12898,7 @@
       </p:sp>
       <p:sp>
         <p:nvSpPr>
-          <p:cNvPr id="18" name="Shape 15"/>
+          <p:cNvPr id="19" name="Shape 16"/>
           <p:cNvSpPr/>
           <p:nvPr/>
         </p:nvSpPr>
@@ -12703,7 +12918,7 @@
       </p:sp>
       <p:sp>
         <p:nvSpPr>
-          <p:cNvPr id="19" name="Text 16"/>
+          <p:cNvPr id="20" name="Text 17"/>
           <p:cNvSpPr/>
           <p:nvPr/>
         </p:nvSpPr>
@@ -12742,7 +12957,7 @@
       </p:sp>
       <p:sp>
         <p:nvSpPr>
-          <p:cNvPr id="20" name="Text 17"/>
+          <p:cNvPr id="21" name="Text 18"/>
           <p:cNvSpPr/>
           <p:nvPr/>
         </p:nvSpPr>
@@ -12781,7 +12996,7 @@
       </p:sp>
       <p:sp>
         <p:nvSpPr>
-          <p:cNvPr id="21" name="Text 18"/>
+          <p:cNvPr id="22" name="Text 19"/>
           <p:cNvSpPr/>
           <p:nvPr/>
         </p:nvSpPr>
@@ -12823,7 +13038,7 @@
       </p:sp>
       <p:sp>
         <p:nvSpPr>
-          <p:cNvPr id="22" name="Shape 19"/>
+          <p:cNvPr id="23" name="Shape 20"/>
           <p:cNvSpPr/>
           <p:nvPr/>
         </p:nvSpPr>
@@ -12850,7 +13065,7 @@
       </p:sp>
       <p:sp>
         <p:nvSpPr>
-          <p:cNvPr id="23" name="Shape 20"/>
+          <p:cNvPr id="24" name="Shape 21"/>
           <p:cNvSpPr/>
           <p:nvPr/>
         </p:nvSpPr>
@@ -12870,7 +13085,7 @@
       </p:sp>
       <p:sp>
         <p:nvSpPr>
-          <p:cNvPr id="24" name="Text 21"/>
+          <p:cNvPr id="25" name="Text 22"/>
           <p:cNvSpPr/>
           <p:nvPr/>
         </p:nvSpPr>
@@ -12909,7 +13124,7 @@
       </p:sp>
       <p:sp>
         <p:nvSpPr>
-          <p:cNvPr id="25" name="Text 22"/>
+          <p:cNvPr id="26" name="Text 23"/>
           <p:cNvSpPr/>
           <p:nvPr/>
         </p:nvSpPr>
@@ -12948,7 +13163,7 @@
       </p:sp>
       <p:sp>
         <p:nvSpPr>
-          <p:cNvPr id="26" name="Text 23"/>
+          <p:cNvPr id="27" name="Text 24"/>
           <p:cNvSpPr/>
           <p:nvPr/>
         </p:nvSpPr>
@@ -12990,7 +13205,7 @@
       </p:sp>
       <p:sp>
         <p:nvSpPr>
-          <p:cNvPr id="27" name="Shape 24"/>
+          <p:cNvPr id="28" name="Shape 25"/>
           <p:cNvSpPr/>
           <p:nvPr/>
         </p:nvSpPr>
@@ -13017,7 +13232,7 @@
       </p:sp>
       <p:sp>
         <p:nvSpPr>
-          <p:cNvPr id="28" name="Shape 25"/>
+          <p:cNvPr id="29" name="Shape 26"/>
           <p:cNvSpPr/>
           <p:nvPr/>
         </p:nvSpPr>
@@ -13037,7 +13252,7 @@
       </p:sp>
       <p:sp>
         <p:nvSpPr>
-          <p:cNvPr id="29" name="Text 26"/>
+          <p:cNvPr id="30" name="Text 27"/>
           <p:cNvSpPr/>
           <p:nvPr/>
         </p:nvSpPr>
@@ -13076,7 +13291,7 @@
       </p:sp>
       <p:sp>
         <p:nvSpPr>
-          <p:cNvPr id="30" name="Text 27"/>
+          <p:cNvPr id="31" name="Text 28"/>
           <p:cNvSpPr/>
           <p:nvPr/>
         </p:nvSpPr>
@@ -13115,7 +13330,7 @@
       </p:sp>
       <p:sp>
         <p:nvSpPr>
-          <p:cNvPr id="31" name="Text 28"/>
+          <p:cNvPr id="32" name="Text 29"/>
           <p:cNvSpPr/>
           <p:nvPr/>
         </p:nvSpPr>
@@ -13167,7 +13382,7 @@
         </p:nvSpPr>
         <p:spPr>
           <a:xfrm>
-            <a:off x="11368735" y="6437376"/>
+            <a:off x="11368735" y="6327648"/>
             <a:ext cx="365760" cy="274320"/>
           </a:xfrm>
           <a:prstGeom prst="rect">
@@ -13214,13 +13429,6 @@
 <file path=ppt/slides/slide20.xml><?xml version="1.0" encoding="utf-8"?>
 <p:sld xmlns:a="http://schemas.openxmlformats.org/drawingml/2006/main" xmlns:r="http://schemas.openxmlformats.org/officeDocument/2006/relationships" xmlns:p="http://schemas.openxmlformats.org/presentationml/2006/main">
   <p:cSld name="Slide 20">
-    <p:bg>
-      <p:bgPr>
-        <a:solidFill>
-          <a:srgbClr val="FFFFFF"/>
-        </a:solidFill>
-      </p:bgPr>
-    </p:bg>
     <p:spTree>
       <p:nvGrpSpPr>
         <p:cNvPr id="1" name=""/>
@@ -13237,7 +13445,29 @@
       </p:grpSpPr>
       <p:sp>
         <p:nvSpPr>
-          <p:cNvPr id="2" name="Text 0"/>
+          <p:cNvPr id="2" name="Shape 0"/>
+          <p:cNvSpPr/>
+          <p:nvPr/>
+        </p:nvSpPr>
+        <p:spPr>
+          <a:xfrm>
+            <a:off x="231343" y="194767"/>
+            <a:ext cx="11716207" cy="6473952"/>
+          </a:xfrm>
+          <a:prstGeom prst="roundRect">
+            <a:avLst>
+              <a:gd name="adj" fmla="val 3107"/>
+            </a:avLst>
+          </a:prstGeom>
+          <a:solidFill>
+            <a:srgbClr val="FFFFFF"/>
+          </a:solidFill>
+          <a:ln/>
+        </p:spPr>
+      </p:sp>
+      <p:sp>
+        <p:nvSpPr>
+          <p:cNvPr id="3" name="Text 1"/>
           <p:cNvSpPr/>
           <p:nvPr/>
         </p:nvSpPr>
@@ -13276,7 +13506,7 @@
       </p:sp>
       <p:sp>
         <p:nvSpPr>
-          <p:cNvPr id="3" name="Shape 1"/>
+          <p:cNvPr id="4" name="Shape 2"/>
           <p:cNvSpPr/>
           <p:nvPr/>
         </p:nvSpPr>
@@ -13298,7 +13528,7 @@
       </p:sp>
       <p:sp>
         <p:nvSpPr>
-          <p:cNvPr id="4" name="Text 2"/>
+          <p:cNvPr id="5" name="Text 3"/>
           <p:cNvSpPr/>
           <p:nvPr/>
         </p:nvSpPr>
@@ -13337,7 +13567,7 @@
       </p:sp>
       <p:pic>
         <p:nvPicPr>
-          <p:cNvPr id="5" name="Image 0" descr="preencoded.png">    </p:cNvPr>
+          <p:cNvPr id="6" name="Image 0" descr="preencoded.png">    </p:cNvPr>
           <p:cNvPicPr>
             <a:picLocks noChangeAspect="1"/>
           </p:cNvPicPr>
@@ -13351,7 +13581,7 @@
         </p:blipFill>
         <p:spPr>
           <a:xfrm>
-            <a:off x="566928" y="6254496"/>
+            <a:off x="566928" y="6126480"/>
             <a:ext cx="1481328" cy="457200"/>
           </a:xfrm>
           <a:prstGeom prst="rect">
@@ -13361,7 +13591,7 @@
       </p:pic>
       <p:sp>
         <p:nvSpPr>
-          <p:cNvPr id="6" name="Shape 3"/>
+          <p:cNvPr id="7" name="Shape 4"/>
           <p:cNvSpPr/>
           <p:nvPr/>
         </p:nvSpPr>
@@ -13388,7 +13618,7 @@
       </p:sp>
       <p:sp>
         <p:nvSpPr>
-          <p:cNvPr id="7" name="Shape 4"/>
+          <p:cNvPr id="8" name="Shape 5"/>
           <p:cNvSpPr/>
           <p:nvPr/>
         </p:nvSpPr>
@@ -13408,7 +13638,7 @@
       </p:sp>
       <p:sp>
         <p:nvSpPr>
-          <p:cNvPr id="8" name="Shape 5"/>
+          <p:cNvPr id="9" name="Shape 6"/>
           <p:cNvSpPr/>
           <p:nvPr/>
         </p:nvSpPr>
@@ -13428,7 +13658,7 @@
       </p:sp>
       <p:sp>
         <p:nvSpPr>
-          <p:cNvPr id="9" name="Shape 6"/>
+          <p:cNvPr id="10" name="Shape 7"/>
           <p:cNvSpPr/>
           <p:nvPr/>
         </p:nvSpPr>
@@ -13448,7 +13678,7 @@
       </p:sp>
       <p:sp>
         <p:nvSpPr>
-          <p:cNvPr id="10" name="Text 7"/>
+          <p:cNvPr id="11" name="Text 8"/>
           <p:cNvSpPr/>
           <p:nvPr/>
         </p:nvSpPr>
@@ -13501,7 +13731,7 @@
       </p:sp>
       <p:sp>
         <p:nvSpPr>
-          <p:cNvPr id="11" name="Shape 8"/>
+          <p:cNvPr id="12" name="Shape 9"/>
           <p:cNvSpPr/>
           <p:nvPr/>
         </p:nvSpPr>
@@ -13528,7 +13758,7 @@
       </p:sp>
       <p:sp>
         <p:nvSpPr>
-          <p:cNvPr id="12" name="Shape 9"/>
+          <p:cNvPr id="13" name="Shape 10"/>
           <p:cNvSpPr/>
           <p:nvPr/>
         </p:nvSpPr>
@@ -13548,7 +13778,7 @@
       </p:sp>
       <p:sp>
         <p:nvSpPr>
-          <p:cNvPr id="13" name="Shape 10"/>
+          <p:cNvPr id="14" name="Shape 11"/>
           <p:cNvSpPr/>
           <p:nvPr/>
         </p:nvSpPr>
@@ -13568,7 +13798,7 @@
       </p:sp>
       <p:sp>
         <p:nvSpPr>
-          <p:cNvPr id="14" name="Shape 11"/>
+          <p:cNvPr id="15" name="Shape 12"/>
           <p:cNvSpPr/>
           <p:nvPr/>
         </p:nvSpPr>
@@ -13588,7 +13818,7 @@
       </p:sp>
       <p:sp>
         <p:nvSpPr>
-          <p:cNvPr id="15" name="Text 12"/>
+          <p:cNvPr id="16" name="Text 13"/>
           <p:cNvSpPr/>
           <p:nvPr/>
         </p:nvSpPr>
@@ -13641,7 +13871,7 @@
       </p:sp>
       <p:sp>
         <p:nvSpPr>
-          <p:cNvPr id="16" name="Shape 13"/>
+          <p:cNvPr id="17" name="Shape 14"/>
           <p:cNvSpPr/>
           <p:nvPr/>
         </p:nvSpPr>
@@ -13668,7 +13898,7 @@
       </p:sp>
       <p:sp>
         <p:nvSpPr>
-          <p:cNvPr id="17" name="Shape 14"/>
+          <p:cNvPr id="18" name="Shape 15"/>
           <p:cNvSpPr/>
           <p:nvPr/>
         </p:nvSpPr>
@@ -13688,7 +13918,7 @@
       </p:sp>
       <p:sp>
         <p:nvSpPr>
-          <p:cNvPr id="18" name="Shape 15"/>
+          <p:cNvPr id="19" name="Shape 16"/>
           <p:cNvSpPr/>
           <p:nvPr/>
         </p:nvSpPr>
@@ -13708,7 +13938,7 @@
       </p:sp>
       <p:sp>
         <p:nvSpPr>
-          <p:cNvPr id="19" name="Shape 16"/>
+          <p:cNvPr id="20" name="Shape 17"/>
           <p:cNvSpPr/>
           <p:nvPr/>
         </p:nvSpPr>
@@ -13728,7 +13958,7 @@
       </p:sp>
       <p:sp>
         <p:nvSpPr>
-          <p:cNvPr id="20" name="Text 17"/>
+          <p:cNvPr id="21" name="Text 18"/>
           <p:cNvSpPr/>
           <p:nvPr/>
         </p:nvSpPr>
@@ -13781,7 +14011,7 @@
       </p:sp>
       <p:sp>
         <p:nvSpPr>
-          <p:cNvPr id="21" name="Shape 18"/>
+          <p:cNvPr id="22" name="Shape 19"/>
           <p:cNvSpPr/>
           <p:nvPr/>
         </p:nvSpPr>
@@ -13808,7 +14038,7 @@
       </p:sp>
       <p:sp>
         <p:nvSpPr>
-          <p:cNvPr id="22" name="Shape 19"/>
+          <p:cNvPr id="23" name="Shape 20"/>
           <p:cNvSpPr/>
           <p:nvPr/>
         </p:nvSpPr>
@@ -13828,7 +14058,7 @@
       </p:sp>
       <p:sp>
         <p:nvSpPr>
-          <p:cNvPr id="23" name="Shape 20"/>
+          <p:cNvPr id="24" name="Shape 21"/>
           <p:cNvSpPr/>
           <p:nvPr/>
         </p:nvSpPr>
@@ -13848,7 +14078,7 @@
       </p:sp>
       <p:sp>
         <p:nvSpPr>
-          <p:cNvPr id="24" name="Shape 21"/>
+          <p:cNvPr id="25" name="Shape 22"/>
           <p:cNvSpPr/>
           <p:nvPr/>
         </p:nvSpPr>
@@ -13868,7 +14098,7 @@
       </p:sp>
       <p:sp>
         <p:nvSpPr>
-          <p:cNvPr id="25" name="Text 22"/>
+          <p:cNvPr id="26" name="Text 23"/>
           <p:cNvSpPr/>
           <p:nvPr/>
         </p:nvSpPr>
@@ -13921,7 +14151,7 @@
       </p:sp>
       <p:sp>
         <p:nvSpPr>
-          <p:cNvPr id="26" name="Shape 23"/>
+          <p:cNvPr id="27" name="Shape 24"/>
           <p:cNvSpPr/>
           <p:nvPr/>
         </p:nvSpPr>
@@ -13948,7 +14178,7 @@
       </p:sp>
       <p:sp>
         <p:nvSpPr>
-          <p:cNvPr id="27" name="Shape 24"/>
+          <p:cNvPr id="28" name="Shape 25"/>
           <p:cNvSpPr/>
           <p:nvPr/>
         </p:nvSpPr>
@@ -13968,7 +14198,7 @@
       </p:sp>
       <p:sp>
         <p:nvSpPr>
-          <p:cNvPr id="28" name="Shape 25"/>
+          <p:cNvPr id="29" name="Shape 26"/>
           <p:cNvSpPr/>
           <p:nvPr/>
         </p:nvSpPr>
@@ -13988,7 +14218,7 @@
       </p:sp>
       <p:sp>
         <p:nvSpPr>
-          <p:cNvPr id="29" name="Shape 26"/>
+          <p:cNvPr id="30" name="Shape 27"/>
           <p:cNvSpPr/>
           <p:nvPr/>
         </p:nvSpPr>
@@ -14008,7 +14238,7 @@
       </p:sp>
       <p:sp>
         <p:nvSpPr>
-          <p:cNvPr id="30" name="Text 27"/>
+          <p:cNvPr id="31" name="Text 28"/>
           <p:cNvSpPr/>
           <p:nvPr/>
         </p:nvSpPr>
@@ -14071,7 +14301,7 @@
         </p:nvSpPr>
         <p:spPr>
           <a:xfrm>
-            <a:off x="11368735" y="6437376"/>
+            <a:off x="11368735" y="6327648"/>
             <a:ext cx="365760" cy="274320"/>
           </a:xfrm>
           <a:prstGeom prst="rect">
@@ -14118,13 +14348,6 @@
 <file path=ppt/slides/slide21.xml><?xml version="1.0" encoding="utf-8"?>
 <p:sld xmlns:a="http://schemas.openxmlformats.org/drawingml/2006/main" xmlns:r="http://schemas.openxmlformats.org/officeDocument/2006/relationships" xmlns:p="http://schemas.openxmlformats.org/presentationml/2006/main">
   <p:cSld name="Slide 21">
-    <p:bg>
-      <p:bgPr>
-        <a:solidFill>
-          <a:srgbClr val="FFFFFF"/>
-        </a:solidFill>
-      </p:bgPr>
-    </p:bg>
     <p:spTree>
       <p:nvGrpSpPr>
         <p:cNvPr id="1" name=""/>
@@ -14141,7 +14364,29 @@
       </p:grpSpPr>
       <p:sp>
         <p:nvSpPr>
-          <p:cNvPr id="2" name="Text 0"/>
+          <p:cNvPr id="2" name="Shape 0"/>
+          <p:cNvSpPr/>
+          <p:nvPr/>
+        </p:nvSpPr>
+        <p:spPr>
+          <a:xfrm>
+            <a:off x="231343" y="194767"/>
+            <a:ext cx="11716207" cy="6473952"/>
+          </a:xfrm>
+          <a:prstGeom prst="roundRect">
+            <a:avLst>
+              <a:gd name="adj" fmla="val 3107"/>
+            </a:avLst>
+          </a:prstGeom>
+          <a:solidFill>
+            <a:srgbClr val="FFFFFF"/>
+          </a:solidFill>
+          <a:ln/>
+        </p:spPr>
+      </p:sp>
+      <p:sp>
+        <p:nvSpPr>
+          <p:cNvPr id="3" name="Text 1"/>
           <p:cNvSpPr/>
           <p:nvPr/>
         </p:nvSpPr>
@@ -14180,7 +14425,7 @@
       </p:sp>
       <p:sp>
         <p:nvSpPr>
-          <p:cNvPr id="3" name="Shape 1"/>
+          <p:cNvPr id="4" name="Shape 2"/>
           <p:cNvSpPr/>
           <p:nvPr/>
         </p:nvSpPr>
@@ -14202,7 +14447,7 @@
       </p:sp>
       <p:sp>
         <p:nvSpPr>
-          <p:cNvPr id="4" name="Text 2"/>
+          <p:cNvPr id="5" name="Text 3"/>
           <p:cNvSpPr/>
           <p:nvPr/>
         </p:nvSpPr>
@@ -14241,7 +14486,7 @@
       </p:sp>
       <p:pic>
         <p:nvPicPr>
-          <p:cNvPr id="5" name="Image 0" descr="preencoded.png">    </p:cNvPr>
+          <p:cNvPr id="6" name="Image 0" descr="preencoded.png">    </p:cNvPr>
           <p:cNvPicPr>
             <a:picLocks noChangeAspect="1"/>
           </p:cNvPicPr>
@@ -14255,7 +14500,7 @@
         </p:blipFill>
         <p:spPr>
           <a:xfrm>
-            <a:off x="566928" y="6254496"/>
+            <a:off x="566928" y="6126480"/>
             <a:ext cx="1481328" cy="457200"/>
           </a:xfrm>
           <a:prstGeom prst="rect">
@@ -14265,7 +14510,7 @@
       </p:pic>
       <p:sp>
         <p:nvSpPr>
-          <p:cNvPr id="6" name="Shape 3"/>
+          <p:cNvPr id="7" name="Shape 4"/>
           <p:cNvSpPr/>
           <p:nvPr/>
         </p:nvSpPr>
@@ -14292,7 +14537,7 @@
       </p:sp>
       <p:sp>
         <p:nvSpPr>
-          <p:cNvPr id="7" name="Text 4"/>
+          <p:cNvPr id="8" name="Text 5"/>
           <p:cNvSpPr/>
           <p:nvPr/>
         </p:nvSpPr>
@@ -14331,7 +14576,7 @@
       </p:sp>
       <p:sp>
         <p:nvSpPr>
-          <p:cNvPr id="8" name="Text 5"/>
+          <p:cNvPr id="9" name="Text 6"/>
           <p:cNvSpPr/>
           <p:nvPr/>
         </p:nvSpPr>
@@ -14431,7 +14676,7 @@
       </p:sp>
       <p:sp>
         <p:nvSpPr>
-          <p:cNvPr id="9" name="Shape 6"/>
+          <p:cNvPr id="10" name="Shape 7"/>
           <p:cNvSpPr/>
           <p:nvPr/>
         </p:nvSpPr>
@@ -14453,7 +14698,7 @@
       </p:sp>
       <p:sp>
         <p:nvSpPr>
-          <p:cNvPr id="10" name="Text 7"/>
+          <p:cNvPr id="11" name="Text 8"/>
           <p:cNvSpPr/>
           <p:nvPr/>
         </p:nvSpPr>
@@ -14492,7 +14737,7 @@
       </p:sp>
       <p:sp>
         <p:nvSpPr>
-          <p:cNvPr id="11" name="Text 8"/>
+          <p:cNvPr id="12" name="Text 9"/>
           <p:cNvSpPr/>
           <p:nvPr/>
         </p:nvSpPr>
@@ -14534,7 +14779,7 @@
       </p:sp>
       <p:sp>
         <p:nvSpPr>
-          <p:cNvPr id="12" name="Shape 9"/>
+          <p:cNvPr id="13" name="Shape 10"/>
           <p:cNvSpPr/>
           <p:nvPr/>
         </p:nvSpPr>
@@ -14561,7 +14806,7 @@
       </p:sp>
       <p:sp>
         <p:nvSpPr>
-          <p:cNvPr id="13" name="Text 10"/>
+          <p:cNvPr id="14" name="Text 11"/>
           <p:cNvSpPr/>
           <p:nvPr/>
         </p:nvSpPr>
@@ -14600,7 +14845,7 @@
       </p:sp>
       <p:sp>
         <p:nvSpPr>
-          <p:cNvPr id="14" name="Text 11"/>
+          <p:cNvPr id="15" name="Text 12"/>
           <p:cNvSpPr/>
           <p:nvPr/>
         </p:nvSpPr>
@@ -14649,7 +14894,7 @@
         </p:nvSpPr>
         <p:spPr>
           <a:xfrm>
-            <a:off x="11368735" y="6437376"/>
+            <a:off x="11368735" y="6327648"/>
             <a:ext cx="365760" cy="274320"/>
           </a:xfrm>
           <a:prstGeom prst="rect">
@@ -14696,13 +14941,6 @@
 <file path=ppt/slides/slide22.xml><?xml version="1.0" encoding="utf-8"?>
 <p:sld xmlns:a="http://schemas.openxmlformats.org/drawingml/2006/main" xmlns:r="http://schemas.openxmlformats.org/officeDocument/2006/relationships" xmlns:p="http://schemas.openxmlformats.org/presentationml/2006/main">
   <p:cSld name="Slide 22">
-    <p:bg>
-      <p:bgPr>
-        <a:solidFill>
-          <a:srgbClr val="1B0942"/>
-        </a:solidFill>
-      </p:bgPr>
-    </p:bg>
     <p:spTree>
       <p:nvGrpSpPr>
         <p:cNvPr id="1" name=""/>
@@ -15219,13 +15457,6 @@
 <file path=ppt/slides/slide3.xml><?xml version="1.0" encoding="utf-8"?>
 <p:sld xmlns:a="http://schemas.openxmlformats.org/drawingml/2006/main" xmlns:r="http://schemas.openxmlformats.org/officeDocument/2006/relationships" xmlns:p="http://schemas.openxmlformats.org/presentationml/2006/main">
   <p:cSld name="Slide 3">
-    <p:bg>
-      <p:bgPr>
-        <a:solidFill>
-          <a:srgbClr val="FFFFFF"/>
-        </a:solidFill>
-      </p:bgPr>
-    </p:bg>
     <p:spTree>
       <p:nvGrpSpPr>
         <p:cNvPr id="1" name=""/>
@@ -15242,7 +15473,29 @@
       </p:grpSpPr>
       <p:sp>
         <p:nvSpPr>
-          <p:cNvPr id="2" name="Text 0"/>
+          <p:cNvPr id="2" name="Shape 0"/>
+          <p:cNvSpPr/>
+          <p:nvPr/>
+        </p:nvSpPr>
+        <p:spPr>
+          <a:xfrm>
+            <a:off x="231343" y="194767"/>
+            <a:ext cx="11716207" cy="6473952"/>
+          </a:xfrm>
+          <a:prstGeom prst="roundRect">
+            <a:avLst>
+              <a:gd name="adj" fmla="val 3107"/>
+            </a:avLst>
+          </a:prstGeom>
+          <a:solidFill>
+            <a:srgbClr val="FFFFFF"/>
+          </a:solidFill>
+          <a:ln/>
+        </p:spPr>
+      </p:sp>
+      <p:sp>
+        <p:nvSpPr>
+          <p:cNvPr id="3" name="Text 1"/>
           <p:cNvSpPr/>
           <p:nvPr/>
         </p:nvSpPr>
@@ -15281,7 +15534,7 @@
       </p:sp>
       <p:sp>
         <p:nvSpPr>
-          <p:cNvPr id="3" name="Shape 1"/>
+          <p:cNvPr id="4" name="Shape 2"/>
           <p:cNvSpPr/>
           <p:nvPr/>
         </p:nvSpPr>
@@ -15303,7 +15556,7 @@
       </p:sp>
       <p:sp>
         <p:nvSpPr>
-          <p:cNvPr id="4" name="Text 2"/>
+          <p:cNvPr id="5" name="Text 3"/>
           <p:cNvSpPr/>
           <p:nvPr/>
         </p:nvSpPr>
@@ -15342,7 +15595,7 @@
       </p:sp>
       <p:pic>
         <p:nvPicPr>
-          <p:cNvPr id="5" name="Image 0" descr="preencoded.png">    </p:cNvPr>
+          <p:cNvPr id="6" name="Image 0" descr="preencoded.png">    </p:cNvPr>
           <p:cNvPicPr>
             <a:picLocks noChangeAspect="1"/>
           </p:cNvPicPr>
@@ -15356,7 +15609,7 @@
         </p:blipFill>
         <p:spPr>
           <a:xfrm>
-            <a:off x="566928" y="6254496"/>
+            <a:off x="566928" y="6126480"/>
             <a:ext cx="1481328" cy="457200"/>
           </a:xfrm>
           <a:prstGeom prst="rect">
@@ -15366,7 +15619,7 @@
       </p:pic>
       <p:sp>
         <p:nvSpPr>
-          <p:cNvPr id="6" name="Shape 3"/>
+          <p:cNvPr id="7" name="Shape 4"/>
           <p:cNvSpPr/>
           <p:nvPr/>
         </p:nvSpPr>
@@ -15393,7 +15646,7 @@
       </p:sp>
       <p:sp>
         <p:nvSpPr>
-          <p:cNvPr id="7" name="Shape 4"/>
+          <p:cNvPr id="8" name="Shape 5"/>
           <p:cNvSpPr/>
           <p:nvPr/>
         </p:nvSpPr>
@@ -15413,7 +15666,7 @@
       </p:sp>
       <p:sp>
         <p:nvSpPr>
-          <p:cNvPr id="8" name="Text 5"/>
+          <p:cNvPr id="9" name="Text 6"/>
           <p:cNvSpPr/>
           <p:nvPr/>
         </p:nvSpPr>
@@ -15452,7 +15705,7 @@
       </p:sp>
       <p:sp>
         <p:nvSpPr>
-          <p:cNvPr id="9" name="Text 6"/>
+          <p:cNvPr id="10" name="Text 7"/>
           <p:cNvSpPr/>
           <p:nvPr/>
         </p:nvSpPr>
@@ -15491,7 +15744,7 @@
       </p:sp>
       <p:sp>
         <p:nvSpPr>
-          <p:cNvPr id="10" name="Shape 7"/>
+          <p:cNvPr id="11" name="Shape 8"/>
           <p:cNvSpPr/>
           <p:nvPr/>
         </p:nvSpPr>
@@ -15518,7 +15771,7 @@
       </p:sp>
       <p:sp>
         <p:nvSpPr>
-          <p:cNvPr id="11" name="Shape 8"/>
+          <p:cNvPr id="12" name="Shape 9"/>
           <p:cNvSpPr/>
           <p:nvPr/>
         </p:nvSpPr>
@@ -15538,7 +15791,7 @@
       </p:sp>
       <p:sp>
         <p:nvSpPr>
-          <p:cNvPr id="12" name="Text 9"/>
+          <p:cNvPr id="13" name="Text 10"/>
           <p:cNvSpPr/>
           <p:nvPr/>
         </p:nvSpPr>
@@ -15577,7 +15830,7 @@
       </p:sp>
       <p:sp>
         <p:nvSpPr>
-          <p:cNvPr id="13" name="Text 10"/>
+          <p:cNvPr id="14" name="Text 11"/>
           <p:cNvSpPr/>
           <p:nvPr/>
         </p:nvSpPr>
@@ -15616,7 +15869,7 @@
       </p:sp>
       <p:sp>
         <p:nvSpPr>
-          <p:cNvPr id="14" name="Shape 11"/>
+          <p:cNvPr id="15" name="Shape 12"/>
           <p:cNvSpPr/>
           <p:nvPr/>
         </p:nvSpPr>
@@ -15643,7 +15896,7 @@
       </p:sp>
       <p:sp>
         <p:nvSpPr>
-          <p:cNvPr id="15" name="Shape 12"/>
+          <p:cNvPr id="16" name="Shape 13"/>
           <p:cNvSpPr/>
           <p:nvPr/>
         </p:nvSpPr>
@@ -15663,7 +15916,7 @@
       </p:sp>
       <p:sp>
         <p:nvSpPr>
-          <p:cNvPr id="16" name="Text 13"/>
+          <p:cNvPr id="17" name="Text 14"/>
           <p:cNvSpPr/>
           <p:nvPr/>
         </p:nvSpPr>
@@ -15702,7 +15955,7 @@
       </p:sp>
       <p:sp>
         <p:nvSpPr>
-          <p:cNvPr id="17" name="Text 14"/>
+          <p:cNvPr id="18" name="Text 15"/>
           <p:cNvSpPr/>
           <p:nvPr/>
         </p:nvSpPr>
@@ -15741,7 +15994,7 @@
       </p:sp>
       <p:sp>
         <p:nvSpPr>
-          <p:cNvPr id="18" name="Shape 15"/>
+          <p:cNvPr id="19" name="Shape 16"/>
           <p:cNvSpPr/>
           <p:nvPr/>
         </p:nvSpPr>
@@ -15768,7 +16021,7 @@
       </p:sp>
       <p:sp>
         <p:nvSpPr>
-          <p:cNvPr id="19" name="Shape 16"/>
+          <p:cNvPr id="20" name="Shape 17"/>
           <p:cNvSpPr/>
           <p:nvPr/>
         </p:nvSpPr>
@@ -15788,7 +16041,7 @@
       </p:sp>
       <p:sp>
         <p:nvSpPr>
-          <p:cNvPr id="20" name="Text 17"/>
+          <p:cNvPr id="21" name="Text 18"/>
           <p:cNvSpPr/>
           <p:nvPr/>
         </p:nvSpPr>
@@ -15827,7 +16080,7 @@
       </p:sp>
       <p:sp>
         <p:nvSpPr>
-          <p:cNvPr id="21" name="Text 18"/>
+          <p:cNvPr id="22" name="Text 19"/>
           <p:cNvSpPr/>
           <p:nvPr/>
         </p:nvSpPr>
@@ -15866,7 +16119,7 @@
       </p:sp>
       <p:sp>
         <p:nvSpPr>
-          <p:cNvPr id="22" name="Shape 19"/>
+          <p:cNvPr id="23" name="Shape 20"/>
           <p:cNvSpPr/>
           <p:nvPr/>
         </p:nvSpPr>
@@ -15893,7 +16146,7 @@
       </p:sp>
       <p:sp>
         <p:nvSpPr>
-          <p:cNvPr id="23" name="Shape 20"/>
+          <p:cNvPr id="24" name="Shape 21"/>
           <p:cNvSpPr/>
           <p:nvPr/>
         </p:nvSpPr>
@@ -15913,7 +16166,7 @@
       </p:sp>
       <p:sp>
         <p:nvSpPr>
-          <p:cNvPr id="24" name="Text 21"/>
+          <p:cNvPr id="25" name="Text 22"/>
           <p:cNvSpPr/>
           <p:nvPr/>
         </p:nvSpPr>
@@ -15952,7 +16205,7 @@
       </p:sp>
       <p:sp>
         <p:nvSpPr>
-          <p:cNvPr id="25" name="Text 22"/>
+          <p:cNvPr id="26" name="Text 23"/>
           <p:cNvSpPr/>
           <p:nvPr/>
         </p:nvSpPr>
@@ -15991,7 +16244,7 @@
       </p:sp>
       <p:sp>
         <p:nvSpPr>
-          <p:cNvPr id="26" name="Shape 23"/>
+          <p:cNvPr id="27" name="Shape 24"/>
           <p:cNvSpPr/>
           <p:nvPr/>
         </p:nvSpPr>
@@ -16018,7 +16271,7 @@
       </p:sp>
       <p:sp>
         <p:nvSpPr>
-          <p:cNvPr id="27" name="Shape 24"/>
+          <p:cNvPr id="28" name="Shape 25"/>
           <p:cNvSpPr/>
           <p:nvPr/>
         </p:nvSpPr>
@@ -16038,7 +16291,7 @@
       </p:sp>
       <p:sp>
         <p:nvSpPr>
-          <p:cNvPr id="28" name="Text 25"/>
+          <p:cNvPr id="29" name="Text 26"/>
           <p:cNvSpPr/>
           <p:nvPr/>
         </p:nvSpPr>
@@ -16077,7 +16330,7 @@
       </p:sp>
       <p:sp>
         <p:nvSpPr>
-          <p:cNvPr id="29" name="Text 26"/>
+          <p:cNvPr id="30" name="Text 27"/>
           <p:cNvSpPr/>
           <p:nvPr/>
         </p:nvSpPr>
@@ -16116,7 +16369,7 @@
       </p:sp>
       <p:sp>
         <p:nvSpPr>
-          <p:cNvPr id="30" name="Shape 27"/>
+          <p:cNvPr id="31" name="Shape 28"/>
           <p:cNvSpPr/>
           <p:nvPr/>
         </p:nvSpPr>
@@ -16143,7 +16396,7 @@
       </p:sp>
       <p:sp>
         <p:nvSpPr>
-          <p:cNvPr id="31" name="Shape 28"/>
+          <p:cNvPr id="32" name="Shape 29"/>
           <p:cNvSpPr/>
           <p:nvPr/>
         </p:nvSpPr>
@@ -16163,7 +16416,7 @@
       </p:sp>
       <p:sp>
         <p:nvSpPr>
-          <p:cNvPr id="32" name="Text 29"/>
+          <p:cNvPr id="33" name="Text 30"/>
           <p:cNvSpPr/>
           <p:nvPr/>
         </p:nvSpPr>
@@ -16202,7 +16455,7 @@
       </p:sp>
       <p:sp>
         <p:nvSpPr>
-          <p:cNvPr id="33" name="Text 30"/>
+          <p:cNvPr id="34" name="Text 31"/>
           <p:cNvSpPr/>
           <p:nvPr/>
         </p:nvSpPr>
@@ -16241,7 +16494,7 @@
       </p:sp>
       <p:sp>
         <p:nvSpPr>
-          <p:cNvPr id="34" name="Shape 31"/>
+          <p:cNvPr id="35" name="Shape 32"/>
           <p:cNvSpPr/>
           <p:nvPr/>
         </p:nvSpPr>
@@ -16263,7 +16516,7 @@
       </p:sp>
       <p:sp>
         <p:nvSpPr>
-          <p:cNvPr id="35" name="Shape 32"/>
+          <p:cNvPr id="36" name="Shape 33"/>
           <p:cNvSpPr/>
           <p:nvPr/>
         </p:nvSpPr>
@@ -16283,7 +16536,7 @@
       </p:sp>
       <p:sp>
         <p:nvSpPr>
-          <p:cNvPr id="36" name="Text 33"/>
+          <p:cNvPr id="37" name="Text 34"/>
           <p:cNvSpPr/>
           <p:nvPr/>
         </p:nvSpPr>
@@ -16322,7 +16575,7 @@
       </p:sp>
       <p:sp>
         <p:nvSpPr>
-          <p:cNvPr id="37" name="Text 34"/>
+          <p:cNvPr id="38" name="Text 35"/>
           <p:cNvSpPr/>
           <p:nvPr/>
         </p:nvSpPr>
@@ -16361,7 +16614,7 @@
       </p:sp>
       <p:sp>
         <p:nvSpPr>
-          <p:cNvPr id="38" name="Shape 35"/>
+          <p:cNvPr id="39" name="Shape 36"/>
           <p:cNvSpPr/>
           <p:nvPr/>
         </p:nvSpPr>
@@ -16388,7 +16641,7 @@
       </p:sp>
       <p:sp>
         <p:nvSpPr>
-          <p:cNvPr id="39" name="Shape 36"/>
+          <p:cNvPr id="40" name="Shape 37"/>
           <p:cNvSpPr/>
           <p:nvPr/>
         </p:nvSpPr>
@@ -16408,7 +16661,7 @@
       </p:sp>
       <p:sp>
         <p:nvSpPr>
-          <p:cNvPr id="40" name="Text 37"/>
+          <p:cNvPr id="41" name="Text 38"/>
           <p:cNvSpPr/>
           <p:nvPr/>
         </p:nvSpPr>
@@ -16447,7 +16700,7 @@
       </p:sp>
       <p:sp>
         <p:nvSpPr>
-          <p:cNvPr id="41" name="Text 38"/>
+          <p:cNvPr id="42" name="Text 39"/>
           <p:cNvSpPr/>
           <p:nvPr/>
         </p:nvSpPr>
@@ -16486,7 +16739,7 @@
       </p:sp>
       <p:sp>
         <p:nvSpPr>
-          <p:cNvPr id="42" name="Shape 39"/>
+          <p:cNvPr id="43" name="Shape 40"/>
           <p:cNvSpPr/>
           <p:nvPr/>
         </p:nvSpPr>
@@ -16513,7 +16766,7 @@
       </p:sp>
       <p:sp>
         <p:nvSpPr>
-          <p:cNvPr id="43" name="Shape 40"/>
+          <p:cNvPr id="44" name="Shape 41"/>
           <p:cNvSpPr/>
           <p:nvPr/>
         </p:nvSpPr>
@@ -16533,7 +16786,7 @@
       </p:sp>
       <p:sp>
         <p:nvSpPr>
-          <p:cNvPr id="44" name="Text 41"/>
+          <p:cNvPr id="45" name="Text 42"/>
           <p:cNvSpPr/>
           <p:nvPr/>
         </p:nvSpPr>
@@ -16572,7 +16825,7 @@
       </p:sp>
       <p:sp>
         <p:nvSpPr>
-          <p:cNvPr id="45" name="Text 42"/>
+          <p:cNvPr id="46" name="Text 43"/>
           <p:cNvSpPr/>
           <p:nvPr/>
         </p:nvSpPr>
@@ -16611,7 +16864,7 @@
       </p:sp>
       <p:sp>
         <p:nvSpPr>
-          <p:cNvPr id="46" name="Shape 43"/>
+          <p:cNvPr id="47" name="Shape 44"/>
           <p:cNvSpPr/>
           <p:nvPr/>
         </p:nvSpPr>
@@ -16638,7 +16891,7 @@
       </p:sp>
       <p:sp>
         <p:nvSpPr>
-          <p:cNvPr id="47" name="Shape 44"/>
+          <p:cNvPr id="48" name="Shape 45"/>
           <p:cNvSpPr/>
           <p:nvPr/>
         </p:nvSpPr>
@@ -16658,7 +16911,7 @@
       </p:sp>
       <p:sp>
         <p:nvSpPr>
-          <p:cNvPr id="48" name="Text 45"/>
+          <p:cNvPr id="49" name="Text 46"/>
           <p:cNvSpPr/>
           <p:nvPr/>
         </p:nvSpPr>
@@ -16697,7 +16950,7 @@
       </p:sp>
       <p:sp>
         <p:nvSpPr>
-          <p:cNvPr id="49" name="Text 46"/>
+          <p:cNvPr id="50" name="Text 47"/>
           <p:cNvSpPr/>
           <p:nvPr/>
         </p:nvSpPr>
@@ -16736,7 +16989,7 @@
       </p:sp>
       <p:sp>
         <p:nvSpPr>
-          <p:cNvPr id="50" name="Shape 47"/>
+          <p:cNvPr id="51" name="Shape 48"/>
           <p:cNvSpPr/>
           <p:nvPr/>
         </p:nvSpPr>
@@ -16763,7 +17016,7 @@
       </p:sp>
       <p:sp>
         <p:nvSpPr>
-          <p:cNvPr id="51" name="Text 48"/>
+          <p:cNvPr id="52" name="Text 49"/>
           <p:cNvSpPr/>
           <p:nvPr/>
         </p:nvSpPr>
@@ -16815,7 +17068,7 @@
         </p:nvSpPr>
         <p:spPr>
           <a:xfrm>
-            <a:off x="11368735" y="6437376"/>
+            <a:off x="11368735" y="6327648"/>
             <a:ext cx="365760" cy="274320"/>
           </a:xfrm>
           <a:prstGeom prst="rect">
@@ -16862,13 +17115,6 @@
 <file path=ppt/slides/slide4.xml><?xml version="1.0" encoding="utf-8"?>
 <p:sld xmlns:a="http://schemas.openxmlformats.org/drawingml/2006/main" xmlns:r="http://schemas.openxmlformats.org/officeDocument/2006/relationships" xmlns:p="http://schemas.openxmlformats.org/presentationml/2006/main">
   <p:cSld name="Slide 4">
-    <p:bg>
-      <p:bgPr>
-        <a:solidFill>
-          <a:srgbClr val="FFFFFF"/>
-        </a:solidFill>
-      </p:bgPr>
-    </p:bg>
     <p:spTree>
       <p:nvGrpSpPr>
         <p:cNvPr id="1" name=""/>
@@ -16885,7 +17131,29 @@
       </p:grpSpPr>
       <p:sp>
         <p:nvSpPr>
-          <p:cNvPr id="2" name="Text 0"/>
+          <p:cNvPr id="2" name="Shape 0"/>
+          <p:cNvSpPr/>
+          <p:nvPr/>
+        </p:nvSpPr>
+        <p:spPr>
+          <a:xfrm>
+            <a:off x="231343" y="194767"/>
+            <a:ext cx="11716207" cy="6473952"/>
+          </a:xfrm>
+          <a:prstGeom prst="roundRect">
+            <a:avLst>
+              <a:gd name="adj" fmla="val 3107"/>
+            </a:avLst>
+          </a:prstGeom>
+          <a:solidFill>
+            <a:srgbClr val="FFFFFF"/>
+          </a:solidFill>
+          <a:ln/>
+        </p:spPr>
+      </p:sp>
+      <p:sp>
+        <p:nvSpPr>
+          <p:cNvPr id="3" name="Text 1"/>
           <p:cNvSpPr/>
           <p:nvPr/>
         </p:nvSpPr>
@@ -16924,7 +17192,7 @@
       </p:sp>
       <p:sp>
         <p:nvSpPr>
-          <p:cNvPr id="3" name="Text 1"/>
+          <p:cNvPr id="4" name="Text 2"/>
           <p:cNvSpPr/>
           <p:nvPr/>
         </p:nvSpPr>
@@ -16966,7 +17234,7 @@
       </p:sp>
       <p:sp>
         <p:nvSpPr>
-          <p:cNvPr id="4" name="Shape 2"/>
+          <p:cNvPr id="5" name="Shape 3"/>
           <p:cNvSpPr/>
           <p:nvPr/>
         </p:nvSpPr>
@@ -16988,7 +17256,7 @@
       </p:sp>
       <p:sp>
         <p:nvSpPr>
-          <p:cNvPr id="5" name="Text 3"/>
+          <p:cNvPr id="6" name="Text 4"/>
           <p:cNvSpPr/>
           <p:nvPr/>
         </p:nvSpPr>
@@ -17027,7 +17295,7 @@
       </p:sp>
       <p:pic>
         <p:nvPicPr>
-          <p:cNvPr id="6" name="Image 0" descr="preencoded.png">    </p:cNvPr>
+          <p:cNvPr id="7" name="Image 0" descr="preencoded.png">    </p:cNvPr>
           <p:cNvPicPr>
             <a:picLocks noChangeAspect="1"/>
           </p:cNvPicPr>
@@ -17041,7 +17309,7 @@
         </p:blipFill>
         <p:spPr>
           <a:xfrm>
-            <a:off x="566928" y="6254496"/>
+            <a:off x="566928" y="6126480"/>
             <a:ext cx="1481328" cy="457200"/>
           </a:xfrm>
           <a:prstGeom prst="rect">
@@ -17051,7 +17319,7 @@
       </p:pic>
       <p:sp>
         <p:nvSpPr>
-          <p:cNvPr id="7" name="Shape 4"/>
+          <p:cNvPr id="8" name="Shape 5"/>
           <p:cNvSpPr/>
           <p:nvPr/>
         </p:nvSpPr>
@@ -17078,7 +17346,7 @@
       </p:sp>
       <p:sp>
         <p:nvSpPr>
-          <p:cNvPr id="8" name="Text 5"/>
+          <p:cNvPr id="9" name="Text 6"/>
           <p:cNvSpPr/>
           <p:nvPr/>
         </p:nvSpPr>
@@ -17117,7 +17385,7 @@
       </p:sp>
       <p:sp>
         <p:nvSpPr>
-          <p:cNvPr id="9" name="Text 6"/>
+          <p:cNvPr id="10" name="Text 7"/>
           <p:cNvSpPr/>
           <p:nvPr/>
         </p:nvSpPr>
@@ -17159,7 +17427,7 @@
       </p:sp>
       <p:sp>
         <p:nvSpPr>
-          <p:cNvPr id="10" name="Shape 7"/>
+          <p:cNvPr id="11" name="Shape 8"/>
           <p:cNvSpPr/>
           <p:nvPr/>
         </p:nvSpPr>
@@ -17186,7 +17454,7 @@
       </p:sp>
       <p:sp>
         <p:nvSpPr>
-          <p:cNvPr id="11" name="Text 8"/>
+          <p:cNvPr id="12" name="Text 9"/>
           <p:cNvSpPr/>
           <p:nvPr/>
         </p:nvSpPr>
@@ -17225,7 +17493,7 @@
       </p:sp>
       <p:sp>
         <p:nvSpPr>
-          <p:cNvPr id="12" name="Text 9"/>
+          <p:cNvPr id="13" name="Text 10"/>
           <p:cNvSpPr/>
           <p:nvPr/>
         </p:nvSpPr>
@@ -17267,7 +17535,7 @@
       </p:sp>
       <p:sp>
         <p:nvSpPr>
-          <p:cNvPr id="13" name="Shape 10"/>
+          <p:cNvPr id="14" name="Shape 11"/>
           <p:cNvSpPr/>
           <p:nvPr/>
         </p:nvSpPr>
@@ -17294,7 +17562,7 @@
       </p:sp>
       <p:sp>
         <p:nvSpPr>
-          <p:cNvPr id="14" name="Text 11"/>
+          <p:cNvPr id="15" name="Text 12"/>
           <p:cNvSpPr/>
           <p:nvPr/>
         </p:nvSpPr>
@@ -17333,7 +17601,7 @@
       </p:sp>
       <p:sp>
         <p:nvSpPr>
-          <p:cNvPr id="15" name="Text 12"/>
+          <p:cNvPr id="16" name="Text 13"/>
           <p:cNvSpPr/>
           <p:nvPr/>
         </p:nvSpPr>
@@ -17375,7 +17643,7 @@
       </p:sp>
       <p:sp>
         <p:nvSpPr>
-          <p:cNvPr id="16" name="Shape 13"/>
+          <p:cNvPr id="17" name="Shape 14"/>
           <p:cNvSpPr/>
           <p:nvPr/>
         </p:nvSpPr>
@@ -17402,7 +17670,7 @@
       </p:sp>
       <p:sp>
         <p:nvSpPr>
-          <p:cNvPr id="17" name="Text 14"/>
+          <p:cNvPr id="18" name="Text 15"/>
           <p:cNvSpPr/>
           <p:nvPr/>
         </p:nvSpPr>
@@ -17441,7 +17709,7 @@
       </p:sp>
       <p:sp>
         <p:nvSpPr>
-          <p:cNvPr id="18" name="Text 15"/>
+          <p:cNvPr id="19" name="Text 16"/>
           <p:cNvSpPr/>
           <p:nvPr/>
         </p:nvSpPr>
@@ -17483,7 +17751,7 @@
       </p:sp>
       <p:sp>
         <p:nvSpPr>
-          <p:cNvPr id="19" name="Shape 16"/>
+          <p:cNvPr id="20" name="Shape 17"/>
           <p:cNvSpPr/>
           <p:nvPr/>
         </p:nvSpPr>
@@ -17510,7 +17778,7 @@
       </p:sp>
       <p:sp>
         <p:nvSpPr>
-          <p:cNvPr id="20" name="Text 17"/>
+          <p:cNvPr id="21" name="Text 18"/>
           <p:cNvSpPr/>
           <p:nvPr/>
         </p:nvSpPr>
@@ -17549,7 +17817,7 @@
       </p:sp>
       <p:sp>
         <p:nvSpPr>
-          <p:cNvPr id="21" name="Text 18"/>
+          <p:cNvPr id="22" name="Text 19"/>
           <p:cNvSpPr/>
           <p:nvPr/>
         </p:nvSpPr>
@@ -17591,7 +17859,7 @@
       </p:sp>
       <p:sp>
         <p:nvSpPr>
-          <p:cNvPr id="22" name="Shape 19"/>
+          <p:cNvPr id="23" name="Shape 20"/>
           <p:cNvSpPr/>
           <p:nvPr/>
         </p:nvSpPr>
@@ -17618,7 +17886,7 @@
       </p:sp>
       <p:sp>
         <p:nvSpPr>
-          <p:cNvPr id="23" name="Text 20"/>
+          <p:cNvPr id="24" name="Text 21"/>
           <p:cNvSpPr/>
           <p:nvPr/>
         </p:nvSpPr>
@@ -17657,7 +17925,7 @@
       </p:sp>
       <p:sp>
         <p:nvSpPr>
-          <p:cNvPr id="24" name="Text 21"/>
+          <p:cNvPr id="25" name="Text 22"/>
           <p:cNvSpPr/>
           <p:nvPr/>
         </p:nvSpPr>
@@ -17699,7 +17967,7 @@
       </p:sp>
       <p:sp>
         <p:nvSpPr>
-          <p:cNvPr id="25" name="Shape 22"/>
+          <p:cNvPr id="26" name="Shape 23"/>
           <p:cNvSpPr/>
           <p:nvPr/>
         </p:nvSpPr>
@@ -17726,7 +17994,7 @@
       </p:sp>
       <p:sp>
         <p:nvSpPr>
-          <p:cNvPr id="26" name="Text 23"/>
+          <p:cNvPr id="27" name="Text 24"/>
           <p:cNvSpPr/>
           <p:nvPr/>
         </p:nvSpPr>
@@ -17778,7 +18046,7 @@
         </p:nvSpPr>
         <p:spPr>
           <a:xfrm>
-            <a:off x="11368735" y="6437376"/>
+            <a:off x="11368735" y="6327648"/>
             <a:ext cx="365760" cy="274320"/>
           </a:xfrm>
           <a:prstGeom prst="rect">
@@ -17825,13 +18093,6 @@
 <file path=ppt/slides/slide5.xml><?xml version="1.0" encoding="utf-8"?>
 <p:sld xmlns:a="http://schemas.openxmlformats.org/drawingml/2006/main" xmlns:r="http://schemas.openxmlformats.org/officeDocument/2006/relationships" xmlns:p="http://schemas.openxmlformats.org/presentationml/2006/main">
   <p:cSld name="Slide 5">
-    <p:bg>
-      <p:bgPr>
-        <a:solidFill>
-          <a:srgbClr val="FFFFFF"/>
-        </a:solidFill>
-      </p:bgPr>
-    </p:bg>
     <p:spTree>
       <p:nvGrpSpPr>
         <p:cNvPr id="1" name=""/>
@@ -17848,7 +18109,29 @@
       </p:grpSpPr>
       <p:sp>
         <p:nvSpPr>
-          <p:cNvPr id="2" name="Text 0"/>
+          <p:cNvPr id="2" name="Shape 0"/>
+          <p:cNvSpPr/>
+          <p:nvPr/>
+        </p:nvSpPr>
+        <p:spPr>
+          <a:xfrm>
+            <a:off x="231343" y="194767"/>
+            <a:ext cx="11716207" cy="6473952"/>
+          </a:xfrm>
+          <a:prstGeom prst="roundRect">
+            <a:avLst>
+              <a:gd name="adj" fmla="val 3107"/>
+            </a:avLst>
+          </a:prstGeom>
+          <a:solidFill>
+            <a:srgbClr val="FFFFFF"/>
+          </a:solidFill>
+          <a:ln/>
+        </p:spPr>
+      </p:sp>
+      <p:sp>
+        <p:nvSpPr>
+          <p:cNvPr id="3" name="Text 1"/>
           <p:cNvSpPr/>
           <p:nvPr/>
         </p:nvSpPr>
@@ -17887,7 +18170,7 @@
       </p:sp>
       <p:sp>
         <p:nvSpPr>
-          <p:cNvPr id="3" name="Text 1"/>
+          <p:cNvPr id="4" name="Text 2"/>
           <p:cNvSpPr/>
           <p:nvPr/>
         </p:nvSpPr>
@@ -17926,7 +18209,7 @@
       </p:sp>
       <p:sp>
         <p:nvSpPr>
-          <p:cNvPr id="4" name="Shape 2"/>
+          <p:cNvPr id="5" name="Shape 3"/>
           <p:cNvSpPr/>
           <p:nvPr/>
         </p:nvSpPr>
@@ -17948,7 +18231,7 @@
       </p:sp>
       <p:sp>
         <p:nvSpPr>
-          <p:cNvPr id="5" name="Text 3"/>
+          <p:cNvPr id="6" name="Text 4"/>
           <p:cNvSpPr/>
           <p:nvPr/>
         </p:nvSpPr>
@@ -17987,7 +18270,7 @@
       </p:sp>
       <p:pic>
         <p:nvPicPr>
-          <p:cNvPr id="6" name="Image 0" descr="preencoded.png">    </p:cNvPr>
+          <p:cNvPr id="7" name="Image 0" descr="preencoded.png">    </p:cNvPr>
           <p:cNvPicPr>
             <a:picLocks noChangeAspect="1"/>
           </p:cNvPicPr>
@@ -18001,7 +18284,7 @@
         </p:blipFill>
         <p:spPr>
           <a:xfrm>
-            <a:off x="566928" y="6254496"/>
+            <a:off x="566928" y="6126480"/>
             <a:ext cx="1481328" cy="457200"/>
           </a:xfrm>
           <a:prstGeom prst="rect">
@@ -18011,7 +18294,7 @@
       </p:pic>
       <p:sp>
         <p:nvSpPr>
-          <p:cNvPr id="7" name="Shape 4"/>
+          <p:cNvPr id="8" name="Shape 5"/>
           <p:cNvSpPr/>
           <p:nvPr/>
         </p:nvSpPr>
@@ -18033,7 +18316,7 @@
       </p:sp>
       <p:sp>
         <p:nvSpPr>
-          <p:cNvPr id="8" name="Text 5"/>
+          <p:cNvPr id="9" name="Text 6"/>
           <p:cNvSpPr/>
           <p:nvPr/>
         </p:nvSpPr>
@@ -18072,7 +18355,7 @@
       </p:sp>
       <p:sp>
         <p:nvSpPr>
-          <p:cNvPr id="9" name="Text 6"/>
+          <p:cNvPr id="10" name="Text 7"/>
           <p:cNvSpPr/>
           <p:nvPr/>
         </p:nvSpPr>
@@ -18114,7 +18397,7 @@
       </p:sp>
       <p:sp>
         <p:nvSpPr>
-          <p:cNvPr id="10" name="Shape 7"/>
+          <p:cNvPr id="11" name="Shape 8"/>
           <p:cNvSpPr/>
           <p:nvPr/>
         </p:nvSpPr>
@@ -18136,7 +18419,7 @@
       </p:sp>
       <p:sp>
         <p:nvSpPr>
-          <p:cNvPr id="11" name="Text 8"/>
+          <p:cNvPr id="12" name="Text 9"/>
           <p:cNvSpPr/>
           <p:nvPr/>
         </p:nvSpPr>
@@ -18175,7 +18458,7 @@
       </p:sp>
       <p:sp>
         <p:nvSpPr>
-          <p:cNvPr id="12" name="Text 9"/>
+          <p:cNvPr id="13" name="Text 10"/>
           <p:cNvSpPr/>
           <p:nvPr/>
         </p:nvSpPr>
@@ -18217,7 +18500,7 @@
       </p:sp>
       <p:sp>
         <p:nvSpPr>
-          <p:cNvPr id="13" name="Shape 10"/>
+          <p:cNvPr id="14" name="Shape 11"/>
           <p:cNvSpPr/>
           <p:nvPr/>
         </p:nvSpPr>
@@ -18239,7 +18522,7 @@
       </p:sp>
       <p:sp>
         <p:nvSpPr>
-          <p:cNvPr id="14" name="Text 11"/>
+          <p:cNvPr id="15" name="Text 12"/>
           <p:cNvSpPr/>
           <p:nvPr/>
         </p:nvSpPr>
@@ -18281,7 +18564,7 @@
       </p:sp>
       <p:sp>
         <p:nvSpPr>
-          <p:cNvPr id="15" name="Shape 12"/>
+          <p:cNvPr id="16" name="Shape 13"/>
           <p:cNvSpPr/>
           <p:nvPr/>
         </p:nvSpPr>
@@ -18303,7 +18586,7 @@
       </p:sp>
       <p:sp>
         <p:nvSpPr>
-          <p:cNvPr id="16" name="Text 13"/>
+          <p:cNvPr id="17" name="Text 14"/>
           <p:cNvSpPr/>
           <p:nvPr/>
         </p:nvSpPr>
@@ -18342,7 +18625,7 @@
       </p:sp>
       <p:sp>
         <p:nvSpPr>
-          <p:cNvPr id="17" name="Text 14"/>
+          <p:cNvPr id="18" name="Text 15"/>
           <p:cNvSpPr/>
           <p:nvPr/>
         </p:nvSpPr>
@@ -18394,7 +18677,7 @@
         </p:nvSpPr>
         <p:spPr>
           <a:xfrm>
-            <a:off x="11368735" y="6437376"/>
+            <a:off x="11368735" y="6327648"/>
             <a:ext cx="365760" cy="274320"/>
           </a:xfrm>
           <a:prstGeom prst="rect">
@@ -18441,13 +18724,6 @@
 <file path=ppt/slides/slide6.xml><?xml version="1.0" encoding="utf-8"?>
 <p:sld xmlns:a="http://schemas.openxmlformats.org/drawingml/2006/main" xmlns:r="http://schemas.openxmlformats.org/officeDocument/2006/relationships" xmlns:p="http://schemas.openxmlformats.org/presentationml/2006/main">
   <p:cSld name="Slide 6">
-    <p:bg>
-      <p:bgPr>
-        <a:solidFill>
-          <a:srgbClr val="FFFFFF"/>
-        </a:solidFill>
-      </p:bgPr>
-    </p:bg>
     <p:spTree>
       <p:nvGrpSpPr>
         <p:cNvPr id="1" name=""/>
@@ -18464,7 +18740,29 @@
       </p:grpSpPr>
       <p:sp>
         <p:nvSpPr>
-          <p:cNvPr id="2" name="Text 0"/>
+          <p:cNvPr id="2" name="Shape 0"/>
+          <p:cNvSpPr/>
+          <p:nvPr/>
+        </p:nvSpPr>
+        <p:spPr>
+          <a:xfrm>
+            <a:off x="231343" y="194767"/>
+            <a:ext cx="11716207" cy="6473952"/>
+          </a:xfrm>
+          <a:prstGeom prst="roundRect">
+            <a:avLst>
+              <a:gd name="adj" fmla="val 3107"/>
+            </a:avLst>
+          </a:prstGeom>
+          <a:solidFill>
+            <a:srgbClr val="FFFFFF"/>
+          </a:solidFill>
+          <a:ln/>
+        </p:spPr>
+      </p:sp>
+      <p:sp>
+        <p:nvSpPr>
+          <p:cNvPr id="3" name="Text 1"/>
           <p:cNvSpPr/>
           <p:nvPr/>
         </p:nvSpPr>
@@ -18503,7 +18801,7 @@
       </p:sp>
       <p:sp>
         <p:nvSpPr>
-          <p:cNvPr id="3" name="Text 1"/>
+          <p:cNvPr id="4" name="Text 2"/>
           <p:cNvSpPr/>
           <p:nvPr/>
         </p:nvSpPr>
@@ -18542,7 +18840,7 @@
       </p:sp>
       <p:sp>
         <p:nvSpPr>
-          <p:cNvPr id="4" name="Shape 2"/>
+          <p:cNvPr id="5" name="Shape 3"/>
           <p:cNvSpPr/>
           <p:nvPr/>
         </p:nvSpPr>
@@ -18564,7 +18862,7 @@
       </p:sp>
       <p:sp>
         <p:nvSpPr>
-          <p:cNvPr id="5" name="Text 3"/>
+          <p:cNvPr id="6" name="Text 4"/>
           <p:cNvSpPr/>
           <p:nvPr/>
         </p:nvSpPr>
@@ -18603,7 +18901,7 @@
       </p:sp>
       <p:pic>
         <p:nvPicPr>
-          <p:cNvPr id="6" name="Image 0" descr="preencoded.png">    </p:cNvPr>
+          <p:cNvPr id="7" name="Image 0" descr="preencoded.png">    </p:cNvPr>
           <p:cNvPicPr>
             <a:picLocks noChangeAspect="1"/>
           </p:cNvPicPr>
@@ -18617,7 +18915,7 @@
         </p:blipFill>
         <p:spPr>
           <a:xfrm>
-            <a:off x="566928" y="6254496"/>
+            <a:off x="566928" y="6126480"/>
             <a:ext cx="1481328" cy="457200"/>
           </a:xfrm>
           <a:prstGeom prst="rect">
@@ -18627,7 +18925,7 @@
       </p:pic>
       <p:sp>
         <p:nvSpPr>
-          <p:cNvPr id="7" name="Shape 4"/>
+          <p:cNvPr id="8" name="Shape 5"/>
           <p:cNvSpPr/>
           <p:nvPr/>
         </p:nvSpPr>
@@ -18654,7 +18952,7 @@
       </p:sp>
       <p:sp>
         <p:nvSpPr>
-          <p:cNvPr id="8" name="Text 5"/>
+          <p:cNvPr id="9" name="Text 6"/>
           <p:cNvSpPr/>
           <p:nvPr/>
         </p:nvSpPr>
@@ -18693,7 +18991,7 @@
       </p:sp>
       <p:sp>
         <p:nvSpPr>
-          <p:cNvPr id="9" name="Shape 6"/>
+          <p:cNvPr id="10" name="Shape 7"/>
           <p:cNvSpPr/>
           <p:nvPr/>
         </p:nvSpPr>
@@ -18716,7 +19014,7 @@
       </p:sp>
       <p:sp>
         <p:nvSpPr>
-          <p:cNvPr id="10" name="Shape 7"/>
+          <p:cNvPr id="11" name="Shape 8"/>
           <p:cNvSpPr/>
           <p:nvPr/>
         </p:nvSpPr>
@@ -18736,7 +19034,7 @@
       </p:sp>
       <p:sp>
         <p:nvSpPr>
-          <p:cNvPr id="11" name="Shape 8"/>
+          <p:cNvPr id="12" name="Shape 9"/>
           <p:cNvSpPr/>
           <p:nvPr/>
         </p:nvSpPr>
@@ -18763,7 +19061,7 @@
       </p:sp>
       <p:sp>
         <p:nvSpPr>
-          <p:cNvPr id="12" name="Text 9"/>
+          <p:cNvPr id="13" name="Text 10"/>
           <p:cNvSpPr/>
           <p:nvPr/>
         </p:nvSpPr>
@@ -18802,7 +19100,7 @@
       </p:sp>
       <p:sp>
         <p:nvSpPr>
-          <p:cNvPr id="13" name="Shape 10"/>
+          <p:cNvPr id="14" name="Shape 11"/>
           <p:cNvSpPr/>
           <p:nvPr/>
         </p:nvSpPr>
@@ -18825,7 +19123,7 @@
       </p:sp>
       <p:sp>
         <p:nvSpPr>
-          <p:cNvPr id="14" name="Shape 11"/>
+          <p:cNvPr id="15" name="Shape 12"/>
           <p:cNvSpPr/>
           <p:nvPr/>
         </p:nvSpPr>
@@ -18845,7 +19143,7 @@
       </p:sp>
       <p:sp>
         <p:nvSpPr>
-          <p:cNvPr id="15" name="Shape 12"/>
+          <p:cNvPr id="16" name="Shape 13"/>
           <p:cNvSpPr/>
           <p:nvPr/>
         </p:nvSpPr>
@@ -18872,7 +19170,7 @@
       </p:sp>
       <p:sp>
         <p:nvSpPr>
-          <p:cNvPr id="16" name="Text 13"/>
+          <p:cNvPr id="17" name="Text 14"/>
           <p:cNvSpPr/>
           <p:nvPr/>
         </p:nvSpPr>
@@ -18911,7 +19209,7 @@
       </p:sp>
       <p:sp>
         <p:nvSpPr>
-          <p:cNvPr id="17" name="Shape 14"/>
+          <p:cNvPr id="18" name="Shape 15"/>
           <p:cNvSpPr/>
           <p:nvPr/>
         </p:nvSpPr>
@@ -18934,7 +19232,7 @@
       </p:sp>
       <p:sp>
         <p:nvSpPr>
-          <p:cNvPr id="18" name="Shape 15"/>
+          <p:cNvPr id="19" name="Shape 16"/>
           <p:cNvSpPr/>
           <p:nvPr/>
         </p:nvSpPr>
@@ -18954,7 +19252,7 @@
       </p:sp>
       <p:sp>
         <p:nvSpPr>
-          <p:cNvPr id="19" name="Shape 16"/>
+          <p:cNvPr id="20" name="Shape 17"/>
           <p:cNvSpPr/>
           <p:nvPr/>
         </p:nvSpPr>
@@ -18976,7 +19274,7 @@
       </p:sp>
       <p:sp>
         <p:nvSpPr>
-          <p:cNvPr id="20" name="Text 17"/>
+          <p:cNvPr id="21" name="Text 18"/>
           <p:cNvSpPr/>
           <p:nvPr/>
         </p:nvSpPr>
@@ -19015,7 +19313,7 @@
       </p:sp>
       <p:sp>
         <p:nvSpPr>
-          <p:cNvPr id="21" name="Shape 18"/>
+          <p:cNvPr id="22" name="Shape 19"/>
           <p:cNvSpPr/>
           <p:nvPr/>
         </p:nvSpPr>
@@ -19038,7 +19336,7 @@
       </p:sp>
       <p:sp>
         <p:nvSpPr>
-          <p:cNvPr id="22" name="Shape 19"/>
+          <p:cNvPr id="23" name="Shape 20"/>
           <p:cNvSpPr/>
           <p:nvPr/>
         </p:nvSpPr>
@@ -19058,7 +19356,7 @@
       </p:sp>
       <p:sp>
         <p:nvSpPr>
-          <p:cNvPr id="23" name="Shape 20"/>
+          <p:cNvPr id="24" name="Shape 21"/>
           <p:cNvSpPr/>
           <p:nvPr/>
         </p:nvSpPr>
@@ -19080,7 +19378,7 @@
       </p:sp>
       <p:sp>
         <p:nvSpPr>
-          <p:cNvPr id="24" name="Text 21"/>
+          <p:cNvPr id="25" name="Text 22"/>
           <p:cNvSpPr/>
           <p:nvPr/>
         </p:nvSpPr>
@@ -19119,7 +19417,7 @@
       </p:sp>
       <p:sp>
         <p:nvSpPr>
-          <p:cNvPr id="25" name="Shape 22"/>
+          <p:cNvPr id="26" name="Shape 23"/>
           <p:cNvSpPr/>
           <p:nvPr/>
         </p:nvSpPr>
@@ -19141,7 +19439,7 @@
       </p:sp>
       <p:sp>
         <p:nvSpPr>
-          <p:cNvPr id="26" name="Text 23"/>
+          <p:cNvPr id="27" name="Text 24"/>
           <p:cNvSpPr/>
           <p:nvPr/>
         </p:nvSpPr>
@@ -19180,7 +19478,7 @@
       </p:sp>
       <p:sp>
         <p:nvSpPr>
-          <p:cNvPr id="27" name="Text 24"/>
+          <p:cNvPr id="28" name="Text 25"/>
           <p:cNvSpPr/>
           <p:nvPr/>
         </p:nvSpPr>
@@ -19222,7 +19520,7 @@
       </p:sp>
       <p:sp>
         <p:nvSpPr>
-          <p:cNvPr id="28" name="Shape 25"/>
+          <p:cNvPr id="29" name="Shape 26"/>
           <p:cNvSpPr/>
           <p:nvPr/>
         </p:nvSpPr>
@@ -19244,7 +19542,7 @@
       </p:sp>
       <p:sp>
         <p:nvSpPr>
-          <p:cNvPr id="29" name="Text 26"/>
+          <p:cNvPr id="30" name="Text 27"/>
           <p:cNvSpPr/>
           <p:nvPr/>
         </p:nvSpPr>
@@ -19283,7 +19581,7 @@
       </p:sp>
       <p:sp>
         <p:nvSpPr>
-          <p:cNvPr id="30" name="Text 27"/>
+          <p:cNvPr id="31" name="Text 28"/>
           <p:cNvSpPr/>
           <p:nvPr/>
         </p:nvSpPr>
@@ -19325,7 +19623,7 @@
       </p:sp>
       <p:sp>
         <p:nvSpPr>
-          <p:cNvPr id="31" name="Shape 28"/>
+          <p:cNvPr id="32" name="Shape 29"/>
           <p:cNvSpPr/>
           <p:nvPr/>
         </p:nvSpPr>
@@ -19352,7 +19650,7 @@
       </p:sp>
       <p:sp>
         <p:nvSpPr>
-          <p:cNvPr id="32" name="Text 29"/>
+          <p:cNvPr id="33" name="Text 30"/>
           <p:cNvSpPr/>
           <p:nvPr/>
         </p:nvSpPr>
@@ -19404,7 +19702,7 @@
         </p:nvSpPr>
         <p:spPr>
           <a:xfrm>
-            <a:off x="11368735" y="6437376"/>
+            <a:off x="11368735" y="6327648"/>
             <a:ext cx="365760" cy="274320"/>
           </a:xfrm>
           <a:prstGeom prst="rect">
@@ -19451,13 +19749,6 @@
 <file path=ppt/slides/slide7.xml><?xml version="1.0" encoding="utf-8"?>
 <p:sld xmlns:a="http://schemas.openxmlformats.org/drawingml/2006/main" xmlns:r="http://schemas.openxmlformats.org/officeDocument/2006/relationships" xmlns:p="http://schemas.openxmlformats.org/presentationml/2006/main">
   <p:cSld name="Slide 7">
-    <p:bg>
-      <p:bgPr>
-        <a:solidFill>
-          <a:srgbClr val="FFFFFF"/>
-        </a:solidFill>
-      </p:bgPr>
-    </p:bg>
     <p:spTree>
       <p:nvGrpSpPr>
         <p:cNvPr id="1" name=""/>
@@ -19474,7 +19765,29 @@
       </p:grpSpPr>
       <p:sp>
         <p:nvSpPr>
-          <p:cNvPr id="2" name="Text 0"/>
+          <p:cNvPr id="2" name="Shape 0"/>
+          <p:cNvSpPr/>
+          <p:nvPr/>
+        </p:nvSpPr>
+        <p:spPr>
+          <a:xfrm>
+            <a:off x="231343" y="194767"/>
+            <a:ext cx="11716207" cy="6473952"/>
+          </a:xfrm>
+          <a:prstGeom prst="roundRect">
+            <a:avLst>
+              <a:gd name="adj" fmla="val 3107"/>
+            </a:avLst>
+          </a:prstGeom>
+          <a:solidFill>
+            <a:srgbClr val="FFFFFF"/>
+          </a:solidFill>
+          <a:ln/>
+        </p:spPr>
+      </p:sp>
+      <p:sp>
+        <p:nvSpPr>
+          <p:cNvPr id="3" name="Text 1"/>
           <p:cNvSpPr/>
           <p:nvPr/>
         </p:nvSpPr>
@@ -19513,7 +19826,7 @@
       </p:sp>
       <p:sp>
         <p:nvSpPr>
-          <p:cNvPr id="3" name="Text 1"/>
+          <p:cNvPr id="4" name="Text 2"/>
           <p:cNvSpPr/>
           <p:nvPr/>
         </p:nvSpPr>
@@ -19552,7 +19865,7 @@
       </p:sp>
       <p:sp>
         <p:nvSpPr>
-          <p:cNvPr id="4" name="Shape 2"/>
+          <p:cNvPr id="5" name="Shape 3"/>
           <p:cNvSpPr/>
           <p:nvPr/>
         </p:nvSpPr>
@@ -19574,7 +19887,7 @@
       </p:sp>
       <p:sp>
         <p:nvSpPr>
-          <p:cNvPr id="5" name="Text 3"/>
+          <p:cNvPr id="6" name="Text 4"/>
           <p:cNvSpPr/>
           <p:nvPr/>
         </p:nvSpPr>
@@ -19613,7 +19926,7 @@
       </p:sp>
       <p:pic>
         <p:nvPicPr>
-          <p:cNvPr id="6" name="Image 0" descr="preencoded.png">    </p:cNvPr>
+          <p:cNvPr id="7" name="Image 0" descr="preencoded.png">    </p:cNvPr>
           <p:cNvPicPr>
             <a:picLocks noChangeAspect="1"/>
           </p:cNvPicPr>
@@ -19627,7 +19940,7 @@
         </p:blipFill>
         <p:spPr>
           <a:xfrm>
-            <a:off x="566928" y="6254496"/>
+            <a:off x="566928" y="6126480"/>
             <a:ext cx="1481328" cy="457200"/>
           </a:xfrm>
           <a:prstGeom prst="rect">
@@ -19637,7 +19950,7 @@
       </p:pic>
       <p:sp>
         <p:nvSpPr>
-          <p:cNvPr id="7" name="Shape 4"/>
+          <p:cNvPr id="8" name="Shape 5"/>
           <p:cNvSpPr/>
           <p:nvPr/>
         </p:nvSpPr>
@@ -19664,7 +19977,7 @@
       </p:sp>
       <p:sp>
         <p:nvSpPr>
-          <p:cNvPr id="8" name="Text 5"/>
+          <p:cNvPr id="9" name="Text 6"/>
           <p:cNvSpPr/>
           <p:nvPr/>
         </p:nvSpPr>
@@ -19703,7 +20016,7 @@
       </p:sp>
       <p:sp>
         <p:nvSpPr>
-          <p:cNvPr id="9" name="Text 6"/>
+          <p:cNvPr id="10" name="Text 7"/>
           <p:cNvSpPr/>
           <p:nvPr/>
         </p:nvSpPr>
@@ -19742,7 +20055,7 @@
       </p:sp>
       <p:sp>
         <p:nvSpPr>
-          <p:cNvPr id="10" name="Shape 7"/>
+          <p:cNvPr id="11" name="Shape 8"/>
           <p:cNvSpPr/>
           <p:nvPr/>
         </p:nvSpPr>
@@ -19764,7 +20077,7 @@
       </p:sp>
       <p:sp>
         <p:nvSpPr>
-          <p:cNvPr id="11" name="Text 8"/>
+          <p:cNvPr id="12" name="Text 9"/>
           <p:cNvSpPr/>
           <p:nvPr/>
         </p:nvSpPr>
@@ -19803,7 +20116,7 @@
       </p:sp>
       <p:sp>
         <p:nvSpPr>
-          <p:cNvPr id="12" name="Text 9"/>
+          <p:cNvPr id="13" name="Text 10"/>
           <p:cNvSpPr/>
           <p:nvPr/>
         </p:nvSpPr>
@@ -19842,7 +20155,7 @@
       </p:sp>
       <p:sp>
         <p:nvSpPr>
-          <p:cNvPr id="13" name="Shape 10"/>
+          <p:cNvPr id="14" name="Shape 11"/>
           <p:cNvSpPr/>
           <p:nvPr/>
         </p:nvSpPr>
@@ -19864,7 +20177,7 @@
       </p:sp>
       <p:sp>
         <p:nvSpPr>
-          <p:cNvPr id="14" name="Text 11"/>
+          <p:cNvPr id="15" name="Text 12"/>
           <p:cNvSpPr/>
           <p:nvPr/>
         </p:nvSpPr>
@@ -19903,7 +20216,7 @@
       </p:sp>
       <p:sp>
         <p:nvSpPr>
-          <p:cNvPr id="15" name="Text 12"/>
+          <p:cNvPr id="16" name="Text 13"/>
           <p:cNvSpPr/>
           <p:nvPr/>
         </p:nvSpPr>
@@ -19942,7 +20255,7 @@
       </p:sp>
       <p:sp>
         <p:nvSpPr>
-          <p:cNvPr id="16" name="Shape 13"/>
+          <p:cNvPr id="17" name="Shape 14"/>
           <p:cNvSpPr/>
           <p:nvPr/>
         </p:nvSpPr>
@@ -19964,7 +20277,7 @@
       </p:sp>
       <p:sp>
         <p:nvSpPr>
-          <p:cNvPr id="17" name="Text 14"/>
+          <p:cNvPr id="18" name="Text 15"/>
           <p:cNvSpPr/>
           <p:nvPr/>
         </p:nvSpPr>
@@ -20003,7 +20316,7 @@
       </p:sp>
       <p:sp>
         <p:nvSpPr>
-          <p:cNvPr id="18" name="Text 15"/>
+          <p:cNvPr id="19" name="Text 16"/>
           <p:cNvSpPr/>
           <p:nvPr/>
         </p:nvSpPr>
@@ -20042,7 +20355,7 @@
       </p:sp>
       <p:sp>
         <p:nvSpPr>
-          <p:cNvPr id="19" name="Shape 16"/>
+          <p:cNvPr id="20" name="Shape 17"/>
           <p:cNvSpPr/>
           <p:nvPr/>
         </p:nvSpPr>
@@ -20069,7 +20382,7 @@
       </p:sp>
       <p:sp>
         <p:nvSpPr>
-          <p:cNvPr id="20" name="Text 17"/>
+          <p:cNvPr id="21" name="Text 18"/>
           <p:cNvSpPr/>
           <p:nvPr/>
         </p:nvSpPr>
@@ -20108,7 +20421,7 @@
       </p:sp>
       <p:sp>
         <p:nvSpPr>
-          <p:cNvPr id="21" name="Shape 18"/>
+          <p:cNvPr id="22" name="Shape 19"/>
           <p:cNvSpPr/>
           <p:nvPr/>
         </p:nvSpPr>
@@ -20131,7 +20444,7 @@
       </p:sp>
       <p:sp>
         <p:nvSpPr>
-          <p:cNvPr id="22" name="Shape 19"/>
+          <p:cNvPr id="23" name="Shape 20"/>
           <p:cNvSpPr/>
           <p:nvPr/>
         </p:nvSpPr>
@@ -20151,7 +20464,7 @@
       </p:sp>
       <p:sp>
         <p:nvSpPr>
-          <p:cNvPr id="23" name="Shape 20"/>
+          <p:cNvPr id="24" name="Shape 21"/>
           <p:cNvSpPr/>
           <p:nvPr/>
         </p:nvSpPr>
@@ -20173,7 +20486,7 @@
       </p:sp>
       <p:sp>
         <p:nvSpPr>
-          <p:cNvPr id="24" name="Text 21"/>
+          <p:cNvPr id="25" name="Text 22"/>
           <p:cNvSpPr/>
           <p:nvPr/>
         </p:nvSpPr>
@@ -20212,7 +20525,7 @@
       </p:sp>
       <p:sp>
         <p:nvSpPr>
-          <p:cNvPr id="25" name="Shape 22"/>
+          <p:cNvPr id="26" name="Shape 23"/>
           <p:cNvSpPr/>
           <p:nvPr/>
         </p:nvSpPr>
@@ -20235,7 +20548,7 @@
       </p:sp>
       <p:sp>
         <p:nvSpPr>
-          <p:cNvPr id="26" name="Shape 23"/>
+          <p:cNvPr id="27" name="Shape 24"/>
           <p:cNvSpPr/>
           <p:nvPr/>
         </p:nvSpPr>
@@ -20255,7 +20568,7 @@
       </p:sp>
       <p:sp>
         <p:nvSpPr>
-          <p:cNvPr id="27" name="Shape 24"/>
+          <p:cNvPr id="28" name="Shape 25"/>
           <p:cNvSpPr/>
           <p:nvPr/>
         </p:nvSpPr>
@@ -20277,7 +20590,7 @@
       </p:sp>
       <p:sp>
         <p:nvSpPr>
-          <p:cNvPr id="28" name="Text 25"/>
+          <p:cNvPr id="29" name="Text 26"/>
           <p:cNvSpPr/>
           <p:nvPr/>
         </p:nvSpPr>
@@ -20316,7 +20629,7 @@
       </p:sp>
       <p:sp>
         <p:nvSpPr>
-          <p:cNvPr id="29" name="Shape 26"/>
+          <p:cNvPr id="30" name="Shape 27"/>
           <p:cNvSpPr/>
           <p:nvPr/>
         </p:nvSpPr>
@@ -20339,7 +20652,7 @@
       </p:sp>
       <p:sp>
         <p:nvSpPr>
-          <p:cNvPr id="30" name="Shape 27"/>
+          <p:cNvPr id="31" name="Shape 28"/>
           <p:cNvSpPr/>
           <p:nvPr/>
         </p:nvSpPr>
@@ -20359,7 +20672,7 @@
       </p:sp>
       <p:sp>
         <p:nvSpPr>
-          <p:cNvPr id="31" name="Shape 28"/>
+          <p:cNvPr id="32" name="Shape 29"/>
           <p:cNvSpPr/>
           <p:nvPr/>
         </p:nvSpPr>
@@ -20381,7 +20694,7 @@
       </p:sp>
       <p:sp>
         <p:nvSpPr>
-          <p:cNvPr id="32" name="Text 29"/>
+          <p:cNvPr id="33" name="Text 30"/>
           <p:cNvSpPr/>
           <p:nvPr/>
         </p:nvSpPr>
@@ -20420,7 +20733,7 @@
       </p:sp>
       <p:sp>
         <p:nvSpPr>
-          <p:cNvPr id="33" name="Shape 30"/>
+          <p:cNvPr id="34" name="Shape 31"/>
           <p:cNvSpPr/>
           <p:nvPr/>
         </p:nvSpPr>
@@ -20442,7 +20755,7 @@
       </p:sp>
       <p:sp>
         <p:nvSpPr>
-          <p:cNvPr id="34" name="Text 31"/>
+          <p:cNvPr id="35" name="Text 32"/>
           <p:cNvSpPr/>
           <p:nvPr/>
         </p:nvSpPr>
@@ -20481,7 +20794,7 @@
       </p:sp>
       <p:sp>
         <p:nvSpPr>
-          <p:cNvPr id="35" name="Text 32"/>
+          <p:cNvPr id="36" name="Text 33"/>
           <p:cNvSpPr/>
           <p:nvPr/>
         </p:nvSpPr>
@@ -20523,7 +20836,7 @@
       </p:sp>
       <p:sp>
         <p:nvSpPr>
-          <p:cNvPr id="36" name="Shape 33"/>
+          <p:cNvPr id="37" name="Shape 34"/>
           <p:cNvSpPr/>
           <p:nvPr/>
         </p:nvSpPr>
@@ -20545,7 +20858,7 @@
       </p:sp>
       <p:sp>
         <p:nvSpPr>
-          <p:cNvPr id="37" name="Text 34"/>
+          <p:cNvPr id="38" name="Text 35"/>
           <p:cNvSpPr/>
           <p:nvPr/>
         </p:nvSpPr>
@@ -20584,7 +20897,7 @@
       </p:sp>
       <p:sp>
         <p:nvSpPr>
-          <p:cNvPr id="38" name="Text 35"/>
+          <p:cNvPr id="39" name="Text 36"/>
           <p:cNvSpPr/>
           <p:nvPr/>
         </p:nvSpPr>
@@ -20626,7 +20939,7 @@
       </p:sp>
       <p:sp>
         <p:nvSpPr>
-          <p:cNvPr id="39" name="Shape 36"/>
+          <p:cNvPr id="40" name="Shape 37"/>
           <p:cNvSpPr/>
           <p:nvPr/>
         </p:nvSpPr>
@@ -20653,7 +20966,7 @@
       </p:sp>
       <p:sp>
         <p:nvSpPr>
-          <p:cNvPr id="40" name="Text 37"/>
+          <p:cNvPr id="41" name="Text 38"/>
           <p:cNvSpPr/>
           <p:nvPr/>
         </p:nvSpPr>
@@ -20705,7 +21018,7 @@
         </p:nvSpPr>
         <p:spPr>
           <a:xfrm>
-            <a:off x="11368735" y="6437376"/>
+            <a:off x="11368735" y="6327648"/>
             <a:ext cx="365760" cy="274320"/>
           </a:xfrm>
           <a:prstGeom prst="rect">
@@ -20752,13 +21065,6 @@
 <file path=ppt/slides/slide8.xml><?xml version="1.0" encoding="utf-8"?>
 <p:sld xmlns:a="http://schemas.openxmlformats.org/drawingml/2006/main" xmlns:r="http://schemas.openxmlformats.org/officeDocument/2006/relationships" xmlns:p="http://schemas.openxmlformats.org/presentationml/2006/main">
   <p:cSld name="Slide 8">
-    <p:bg>
-      <p:bgPr>
-        <a:solidFill>
-          <a:srgbClr val="FFFFFF"/>
-        </a:solidFill>
-      </p:bgPr>
-    </p:bg>
     <p:spTree>
       <p:nvGrpSpPr>
         <p:cNvPr id="1" name=""/>
@@ -20775,7 +21081,29 @@
       </p:grpSpPr>
       <p:sp>
         <p:nvSpPr>
-          <p:cNvPr id="2" name="Text 0"/>
+          <p:cNvPr id="2" name="Shape 0"/>
+          <p:cNvSpPr/>
+          <p:nvPr/>
+        </p:nvSpPr>
+        <p:spPr>
+          <a:xfrm>
+            <a:off x="231343" y="194767"/>
+            <a:ext cx="11716207" cy="6473952"/>
+          </a:xfrm>
+          <a:prstGeom prst="roundRect">
+            <a:avLst>
+              <a:gd name="adj" fmla="val 3107"/>
+            </a:avLst>
+          </a:prstGeom>
+          <a:solidFill>
+            <a:srgbClr val="FFFFFF"/>
+          </a:solidFill>
+          <a:ln/>
+        </p:spPr>
+      </p:sp>
+      <p:sp>
+        <p:nvSpPr>
+          <p:cNvPr id="3" name="Text 1"/>
           <p:cNvSpPr/>
           <p:nvPr/>
         </p:nvSpPr>
@@ -20814,7 +21142,7 @@
       </p:sp>
       <p:sp>
         <p:nvSpPr>
-          <p:cNvPr id="3" name="Text 1"/>
+          <p:cNvPr id="4" name="Text 2"/>
           <p:cNvSpPr/>
           <p:nvPr/>
         </p:nvSpPr>
@@ -20853,7 +21181,7 @@
       </p:sp>
       <p:sp>
         <p:nvSpPr>
-          <p:cNvPr id="4" name="Shape 2"/>
+          <p:cNvPr id="5" name="Shape 3"/>
           <p:cNvSpPr/>
           <p:nvPr/>
         </p:nvSpPr>
@@ -20875,7 +21203,7 @@
       </p:sp>
       <p:sp>
         <p:nvSpPr>
-          <p:cNvPr id="5" name="Text 3"/>
+          <p:cNvPr id="6" name="Text 4"/>
           <p:cNvSpPr/>
           <p:nvPr/>
         </p:nvSpPr>
@@ -20914,7 +21242,7 @@
       </p:sp>
       <p:pic>
         <p:nvPicPr>
-          <p:cNvPr id="6" name="Image 0" descr="preencoded.png">    </p:cNvPr>
+          <p:cNvPr id="7" name="Image 0" descr="preencoded.png">    </p:cNvPr>
           <p:cNvPicPr>
             <a:picLocks noChangeAspect="1"/>
           </p:cNvPicPr>
@@ -20928,7 +21256,7 @@
         </p:blipFill>
         <p:spPr>
           <a:xfrm>
-            <a:off x="566928" y="6254496"/>
+            <a:off x="566928" y="6126480"/>
             <a:ext cx="1481328" cy="457200"/>
           </a:xfrm>
           <a:prstGeom prst="rect">
@@ -20938,7 +21266,7 @@
       </p:pic>
       <p:sp>
         <p:nvSpPr>
-          <p:cNvPr id="7" name="Shape 4"/>
+          <p:cNvPr id="8" name="Shape 5"/>
           <p:cNvSpPr/>
           <p:nvPr/>
         </p:nvSpPr>
@@ -20965,7 +21293,7 @@
       </p:sp>
       <p:sp>
         <p:nvSpPr>
-          <p:cNvPr id="8" name="Text 5"/>
+          <p:cNvPr id="9" name="Text 6"/>
           <p:cNvSpPr/>
           <p:nvPr/>
         </p:nvSpPr>
@@ -21315,7 +21643,7 @@
       </p:sp>
       <p:sp>
         <p:nvSpPr>
-          <p:cNvPr id="9" name="Text 6"/>
+          <p:cNvPr id="10" name="Text 7"/>
           <p:cNvSpPr/>
           <p:nvPr/>
         </p:nvSpPr>
@@ -21354,7 +21682,7 @@
       </p:sp>
       <p:sp>
         <p:nvSpPr>
-          <p:cNvPr id="10" name="Text 7"/>
+          <p:cNvPr id="11" name="Text 8"/>
           <p:cNvSpPr/>
           <p:nvPr/>
         </p:nvSpPr>
@@ -21393,7 +21721,7 @@
       </p:sp>
       <p:sp>
         <p:nvSpPr>
-          <p:cNvPr id="11" name="Text 8"/>
+          <p:cNvPr id="12" name="Text 9"/>
           <p:cNvSpPr/>
           <p:nvPr/>
         </p:nvSpPr>
@@ -21432,7 +21760,7 @@
       </p:sp>
       <p:sp>
         <p:nvSpPr>
-          <p:cNvPr id="12" name="Text 9"/>
+          <p:cNvPr id="13" name="Text 10"/>
           <p:cNvSpPr/>
           <p:nvPr/>
         </p:nvSpPr>
@@ -21471,7 +21799,7 @@
       </p:sp>
       <p:sp>
         <p:nvSpPr>
-          <p:cNvPr id="13" name="Text 10"/>
+          <p:cNvPr id="14" name="Text 11"/>
           <p:cNvSpPr/>
           <p:nvPr/>
         </p:nvSpPr>
@@ -21510,7 +21838,7 @@
       </p:sp>
       <p:sp>
         <p:nvSpPr>
-          <p:cNvPr id="14" name="Text 11"/>
+          <p:cNvPr id="15" name="Text 12"/>
           <p:cNvSpPr/>
           <p:nvPr/>
         </p:nvSpPr>
@@ -21549,7 +21877,7 @@
       </p:sp>
       <p:sp>
         <p:nvSpPr>
-          <p:cNvPr id="15" name="Text 12"/>
+          <p:cNvPr id="16" name="Text 13"/>
           <p:cNvSpPr/>
           <p:nvPr/>
         </p:nvSpPr>
@@ -21588,7 +21916,7 @@
       </p:sp>
       <p:sp>
         <p:nvSpPr>
-          <p:cNvPr id="16" name="Text 13"/>
+          <p:cNvPr id="17" name="Text 14"/>
           <p:cNvSpPr/>
           <p:nvPr/>
         </p:nvSpPr>
@@ -21627,7 +21955,7 @@
       </p:sp>
       <p:sp>
         <p:nvSpPr>
-          <p:cNvPr id="17" name="Text 14"/>
+          <p:cNvPr id="18" name="Text 15"/>
           <p:cNvSpPr/>
           <p:nvPr/>
         </p:nvSpPr>
@@ -21666,7 +21994,7 @@
       </p:sp>
       <p:sp>
         <p:nvSpPr>
-          <p:cNvPr id="18" name="Text 15"/>
+          <p:cNvPr id="19" name="Text 16"/>
           <p:cNvSpPr/>
           <p:nvPr/>
         </p:nvSpPr>
@@ -21705,7 +22033,7 @@
       </p:sp>
       <p:sp>
         <p:nvSpPr>
-          <p:cNvPr id="19" name="Shape 16"/>
+          <p:cNvPr id="20" name="Shape 17"/>
           <p:cNvSpPr/>
           <p:nvPr/>
         </p:nvSpPr>
@@ -21727,7 +22055,7 @@
       </p:sp>
       <p:sp>
         <p:nvSpPr>
-          <p:cNvPr id="20" name="Text 17"/>
+          <p:cNvPr id="21" name="Text 18"/>
           <p:cNvSpPr/>
           <p:nvPr/>
         </p:nvSpPr>
@@ -21779,7 +22107,7 @@
         </p:nvSpPr>
         <p:spPr>
           <a:xfrm>
-            <a:off x="11368735" y="6437376"/>
+            <a:off x="11368735" y="6327648"/>
             <a:ext cx="365760" cy="274320"/>
           </a:xfrm>
           <a:prstGeom prst="rect">
@@ -21826,13 +22154,6 @@
 <file path=ppt/slides/slide9.xml><?xml version="1.0" encoding="utf-8"?>
 <p:sld xmlns:a="http://schemas.openxmlformats.org/drawingml/2006/main" xmlns:r="http://schemas.openxmlformats.org/officeDocument/2006/relationships" xmlns:p="http://schemas.openxmlformats.org/presentationml/2006/main">
   <p:cSld name="Slide 9">
-    <p:bg>
-      <p:bgPr>
-        <a:solidFill>
-          <a:srgbClr val="FFFFFF"/>
-        </a:solidFill>
-      </p:bgPr>
-    </p:bg>
     <p:spTree>
       <p:nvGrpSpPr>
         <p:cNvPr id="1" name=""/>
@@ -21849,7 +22170,29 @@
       </p:grpSpPr>
       <p:sp>
         <p:nvSpPr>
-          <p:cNvPr id="2" name="Text 0"/>
+          <p:cNvPr id="2" name="Shape 0"/>
+          <p:cNvSpPr/>
+          <p:nvPr/>
+        </p:nvSpPr>
+        <p:spPr>
+          <a:xfrm>
+            <a:off x="231343" y="194767"/>
+            <a:ext cx="11716207" cy="6473952"/>
+          </a:xfrm>
+          <a:prstGeom prst="roundRect">
+            <a:avLst>
+              <a:gd name="adj" fmla="val 3107"/>
+            </a:avLst>
+          </a:prstGeom>
+          <a:solidFill>
+            <a:srgbClr val="FFFFFF"/>
+          </a:solidFill>
+          <a:ln/>
+        </p:spPr>
+      </p:sp>
+      <p:sp>
+        <p:nvSpPr>
+          <p:cNvPr id="3" name="Text 1"/>
           <p:cNvSpPr/>
           <p:nvPr/>
         </p:nvSpPr>
@@ -21888,7 +22231,7 @@
       </p:sp>
       <p:sp>
         <p:nvSpPr>
-          <p:cNvPr id="3" name="Text 1"/>
+          <p:cNvPr id="4" name="Text 2"/>
           <p:cNvSpPr/>
           <p:nvPr/>
         </p:nvSpPr>
@@ -21927,7 +22270,7 @@
       </p:sp>
       <p:sp>
         <p:nvSpPr>
-          <p:cNvPr id="4" name="Shape 2"/>
+          <p:cNvPr id="5" name="Shape 3"/>
           <p:cNvSpPr/>
           <p:nvPr/>
         </p:nvSpPr>
@@ -21949,7 +22292,7 @@
       </p:sp>
       <p:sp>
         <p:nvSpPr>
-          <p:cNvPr id="5" name="Text 3"/>
+          <p:cNvPr id="6" name="Text 4"/>
           <p:cNvSpPr/>
           <p:nvPr/>
         </p:nvSpPr>
@@ -21988,7 +22331,7 @@
       </p:sp>
       <p:pic>
         <p:nvPicPr>
-          <p:cNvPr id="6" name="Image 0" descr="preencoded.png">    </p:cNvPr>
+          <p:cNvPr id="7" name="Image 0" descr="preencoded.png">    </p:cNvPr>
           <p:cNvPicPr>
             <a:picLocks noChangeAspect="1"/>
           </p:cNvPicPr>
@@ -22002,7 +22345,7 @@
         </p:blipFill>
         <p:spPr>
           <a:xfrm>
-            <a:off x="566928" y="6254496"/>
+            <a:off x="566928" y="6126480"/>
             <a:ext cx="1481328" cy="457200"/>
           </a:xfrm>
           <a:prstGeom prst="rect">
@@ -22012,7 +22355,7 @@
       </p:pic>
       <p:sp>
         <p:nvSpPr>
-          <p:cNvPr id="7" name="Shape 4"/>
+          <p:cNvPr id="8" name="Shape 5"/>
           <p:cNvSpPr/>
           <p:nvPr/>
         </p:nvSpPr>
@@ -22034,7 +22377,7 @@
       </p:sp>
       <p:sp>
         <p:nvSpPr>
-          <p:cNvPr id="8" name="Text 5"/>
+          <p:cNvPr id="9" name="Text 6"/>
           <p:cNvSpPr/>
           <p:nvPr/>
         </p:nvSpPr>
@@ -22073,7 +22416,7 @@
       </p:sp>
       <p:sp>
         <p:nvSpPr>
-          <p:cNvPr id="9" name="Text 6"/>
+          <p:cNvPr id="10" name="Text 7"/>
           <p:cNvSpPr/>
           <p:nvPr/>
         </p:nvSpPr>
@@ -22115,7 +22458,7 @@
       </p:sp>
       <p:sp>
         <p:nvSpPr>
-          <p:cNvPr id="10" name="Shape 7"/>
+          <p:cNvPr id="11" name="Shape 8"/>
           <p:cNvSpPr/>
           <p:nvPr/>
         </p:nvSpPr>
@@ -22137,7 +22480,7 @@
       </p:sp>
       <p:sp>
         <p:nvSpPr>
-          <p:cNvPr id="11" name="Text 8"/>
+          <p:cNvPr id="12" name="Text 9"/>
           <p:cNvSpPr/>
           <p:nvPr/>
         </p:nvSpPr>
@@ -22176,7 +22519,7 @@
       </p:sp>
       <p:sp>
         <p:nvSpPr>
-          <p:cNvPr id="12" name="Text 9"/>
+          <p:cNvPr id="13" name="Text 10"/>
           <p:cNvSpPr/>
           <p:nvPr/>
         </p:nvSpPr>
@@ -22218,7 +22561,7 @@
       </p:sp>
       <p:sp>
         <p:nvSpPr>
-          <p:cNvPr id="13" name="Shape 10"/>
+          <p:cNvPr id="14" name="Shape 11"/>
           <p:cNvSpPr/>
           <p:nvPr/>
         </p:nvSpPr>
@@ -22240,7 +22583,7 @@
       </p:sp>
       <p:sp>
         <p:nvSpPr>
-          <p:cNvPr id="14" name="Text 11"/>
+          <p:cNvPr id="15" name="Text 12"/>
           <p:cNvSpPr/>
           <p:nvPr/>
         </p:nvSpPr>
@@ -22282,7 +22625,7 @@
       </p:sp>
       <p:sp>
         <p:nvSpPr>
-          <p:cNvPr id="15" name="Shape 12"/>
+          <p:cNvPr id="16" name="Shape 13"/>
           <p:cNvSpPr/>
           <p:nvPr/>
         </p:nvSpPr>
@@ -22304,7 +22647,7 @@
       </p:sp>
       <p:sp>
         <p:nvSpPr>
-          <p:cNvPr id="16" name="Text 13"/>
+          <p:cNvPr id="17" name="Text 14"/>
           <p:cNvSpPr/>
           <p:nvPr/>
         </p:nvSpPr>
@@ -22343,7 +22686,7 @@
       </p:sp>
       <p:sp>
         <p:nvSpPr>
-          <p:cNvPr id="17" name="Text 14"/>
+          <p:cNvPr id="18" name="Text 15"/>
           <p:cNvSpPr/>
           <p:nvPr/>
         </p:nvSpPr>
@@ -22395,7 +22738,7 @@
         </p:nvSpPr>
         <p:spPr>
           <a:xfrm>
-            <a:off x="11368735" y="6437376"/>
+            <a:off x="11368735" y="6327648"/>
             <a:ext cx="365760" cy="274320"/>
           </a:xfrm>
           <a:prstGeom prst="rect">

--- a/docs/decks/L11.pptx
+++ b/docs/decks/L11.pptx
@@ -2465,7 +2465,7 @@
             <a:lvl1pPr>
               <a:defRPr sz="850">
                 <a:solidFill>
-                  <a:srgbClr val="9AA1AD"/>
+                  <a:srgbClr val="8A82A0"/>
                 </a:solidFill>
                 <a:latin typeface="Courier New"/>
                 <a:ea typeface="Courier New"/>
@@ -2594,7 +2594,7 @@
             <a:lvl1pPr>
               <a:defRPr sz="850">
                 <a:solidFill>
-                  <a:srgbClr val="9AA1AD"/>
+                  <a:srgbClr val="8A82A0"/>
                 </a:solidFill>
                 <a:latin typeface="Courier New"/>
                 <a:ea typeface="Courier New"/>
@@ -2947,7 +2947,7 @@
           </a:prstGeom>
           <a:ln w="12700">
             <a:solidFill>
-              <a:srgbClr val="C9B8FB">
+              <a:srgbClr val="9B7BE8">
                 <a:alpha val="24000"/>
               </a:srgbClr>
             </a:solidFill>
@@ -2973,7 +2973,7 @@
           </a:prstGeom>
           <a:ln w="12700">
             <a:solidFill>
-              <a:srgbClr val="C9B8FB">
+              <a:srgbClr val="9B7BE8">
                 <a:alpha val="42000"/>
               </a:srgbClr>
             </a:solidFill>
@@ -2999,7 +2999,7 @@
           </a:prstGeom>
           <a:ln w="12700">
             <a:solidFill>
-              <a:srgbClr val="C9B8FB">
+              <a:srgbClr val="9B7BE8">
                 <a:alpha val="66000"/>
               </a:srgbClr>
             </a:solidFill>
@@ -3168,7 +3168,7 @@
           </a:prstGeom>
           <a:ln w="12700">
             <a:solidFill>
-              <a:srgbClr val="C9B8FB">
+              <a:srgbClr val="9B7BE8">
                 <a:alpha val="60000"/>
               </a:srgbClr>
             </a:solidFill>
@@ -3233,7 +3233,7 @@
           </a:prstGeom>
           <a:ln w="12700">
             <a:solidFill>
-              <a:srgbClr val="C9B8FB">
+              <a:srgbClr val="9B7BE8">
                 <a:alpha val="60000"/>
               </a:srgbClr>
             </a:solidFill>
@@ -3298,7 +3298,7 @@
           </a:prstGeom>
           <a:ln w="12700">
             <a:solidFill>
-              <a:srgbClr val="C9B8FB">
+              <a:srgbClr val="9B7BE8">
                 <a:alpha val="60000"/>
               </a:srgbClr>
             </a:solidFill>
@@ -3363,7 +3363,7 @@
           </a:prstGeom>
           <a:ln w="12700">
             <a:solidFill>
-              <a:srgbClr val="C9B8FB">
+              <a:srgbClr val="9B7BE8">
                 <a:alpha val="60000"/>
               </a:srgbClr>
             </a:solidFill>
@@ -3428,7 +3428,7 @@
           </a:prstGeom>
           <a:ln w="12700">
             <a:solidFill>
-              <a:srgbClr val="C9B8FB">
+              <a:srgbClr val="9B7BE8">
                 <a:alpha val="60000"/>
               </a:srgbClr>
             </a:solidFill>
@@ -3563,29 +3563,7 @@
       </p:grpSpPr>
       <p:sp>
         <p:nvSpPr>
-          <p:cNvPr id="2" name="Shape 0"/>
-          <p:cNvSpPr/>
-          <p:nvPr/>
-        </p:nvSpPr>
-        <p:spPr>
-          <a:xfrm>
-            <a:off x="231343" y="194767"/>
-            <a:ext cx="11716207" cy="6473952"/>
-          </a:xfrm>
-          <a:prstGeom prst="roundRect">
-            <a:avLst>
-              <a:gd name="adj" fmla="val 3107"/>
-            </a:avLst>
-          </a:prstGeom>
-          <a:solidFill>
-            <a:srgbClr val="FFFFFF"/>
-          </a:solidFill>
-          <a:ln/>
-        </p:spPr>
-      </p:sp>
-      <p:sp>
-        <p:nvSpPr>
-          <p:cNvPr id="3" name="Text 1"/>
+          <p:cNvPr id="2" name="Text 0"/>
           <p:cNvSpPr/>
           <p:nvPr/>
         </p:nvSpPr>
@@ -3610,7 +3588,7 @@
             <a:r>
               <a:rPr lang="en-US" sz="2600" b="1" dirty="0">
                 <a:solidFill>
-                  <a:srgbClr val="5A05F4"/>
+                  <a:srgbClr val="C9A6FF"/>
                 </a:solidFill>
                 <a:latin typeface="Courier New" pitchFamily="34" charset="0"/>
                 <a:ea typeface="Courier New" pitchFamily="34" charset="-122"/>
@@ -3624,7 +3602,7 @@
       </p:sp>
       <p:sp>
         <p:nvSpPr>
-          <p:cNvPr id="4" name="Text 2"/>
+          <p:cNvPr id="3" name="Text 1"/>
           <p:cNvSpPr/>
           <p:nvPr/>
         </p:nvSpPr>
@@ -3649,7 +3627,7 @@
             <a:r>
               <a:rPr lang="en-US" sz="2400" b="1" dirty="0">
                 <a:solidFill>
-                  <a:srgbClr val="111318"/>
+                  <a:srgbClr val="FFFFFF"/>
                 </a:solidFill>
                 <a:latin typeface="Montserrat" pitchFamily="34" charset="0"/>
                 <a:ea typeface="Montserrat" pitchFamily="34" charset="-122"/>
@@ -3663,7 +3641,7 @@
       </p:sp>
       <p:sp>
         <p:nvSpPr>
-          <p:cNvPr id="5" name="Shape 3"/>
+          <p:cNvPr id="4" name="Shape 2"/>
           <p:cNvSpPr/>
           <p:nvPr/>
         </p:nvSpPr>
@@ -3678,14 +3656,14 @@
             </a:avLst>
           </a:prstGeom>
           <a:solidFill>
-            <a:srgbClr val="5A05F4"/>
+            <a:srgbClr val="C9A6FF"/>
           </a:solidFill>
           <a:ln/>
         </p:spPr>
       </p:sp>
       <p:sp>
         <p:nvSpPr>
-          <p:cNvPr id="6" name="Text 4"/>
+          <p:cNvPr id="5" name="Text 3"/>
           <p:cNvSpPr/>
           <p:nvPr/>
         </p:nvSpPr>
@@ -3710,7 +3688,7 @@
             <a:r>
               <a:rPr lang="en-US" sz="900" b="1" spc="100" kern="0" dirty="0">
                 <a:solidFill>
-                  <a:srgbClr val="FFFFFF"/>
+                  <a:srgbClr val="1C1140"/>
                 </a:solidFill>
                 <a:latin typeface="Courier New" pitchFamily="34" charset="0"/>
                 <a:ea typeface="Courier New" pitchFamily="34" charset="-122"/>
@@ -3724,7 +3702,7 @@
       </p:sp>
       <p:pic>
         <p:nvPicPr>
-          <p:cNvPr id="7" name="Image 0" descr="preencoded.png">    </p:cNvPr>
+          <p:cNvPr id="6" name="Image 0" descr="preencoded.png">    </p:cNvPr>
           <p:cNvPicPr>
             <a:picLocks noChangeAspect="1"/>
           </p:cNvPicPr>
@@ -3748,7 +3726,7 @@
       </p:pic>
       <p:sp>
         <p:nvSpPr>
-          <p:cNvPr id="8" name="Shape 5"/>
+          <p:cNvPr id="7" name="Shape 4"/>
           <p:cNvSpPr/>
           <p:nvPr/>
         </p:nvSpPr>
@@ -3763,14 +3741,14 @@
             </a:avLst>
           </a:prstGeom>
           <a:solidFill>
-            <a:srgbClr val="E9F4EF"/>
+            <a:srgbClr val="102A20"/>
           </a:solidFill>
           <a:ln/>
         </p:spPr>
       </p:sp>
       <p:sp>
         <p:nvSpPr>
-          <p:cNvPr id="9" name="Text 6"/>
+          <p:cNvPr id="8" name="Text 5"/>
           <p:cNvSpPr/>
           <p:nvPr/>
         </p:nvSpPr>
@@ -3795,7 +3773,7 @@
             <a:r>
               <a:rPr lang="en-US" sz="3000" b="1" dirty="0">
                 <a:solidFill>
-                  <a:srgbClr val="1B8A5A"/>
+                  <a:srgbClr val="5FD6A0"/>
                 </a:solidFill>
                 <a:latin typeface="Montserrat" pitchFamily="34" charset="0"/>
                 <a:ea typeface="Montserrat" pitchFamily="34" charset="-122"/>
@@ -3809,7 +3787,7 @@
       </p:sp>
       <p:sp>
         <p:nvSpPr>
-          <p:cNvPr id="10" name="Text 7"/>
+          <p:cNvPr id="9" name="Text 6"/>
           <p:cNvSpPr/>
           <p:nvPr/>
         </p:nvSpPr>
@@ -3834,7 +3812,7 @@
             <a:r>
               <a:rPr lang="en-US" sz="1150" dirty="0">
                 <a:solidFill>
-                  <a:srgbClr val="1B8A5A"/>
+                  <a:srgbClr val="5FD6A0"/>
                 </a:solidFill>
                 <a:latin typeface="Montserrat" pitchFamily="34" charset="0"/>
                 <a:ea typeface="Montserrat" pitchFamily="34" charset="-122"/>
@@ -3848,7 +3826,7 @@
       </p:sp>
       <p:sp>
         <p:nvSpPr>
-          <p:cNvPr id="11" name="Shape 8"/>
+          <p:cNvPr id="10" name="Shape 7"/>
           <p:cNvSpPr/>
           <p:nvPr/>
         </p:nvSpPr>
@@ -3863,14 +3841,14 @@
             </a:avLst>
           </a:prstGeom>
           <a:solidFill>
-            <a:srgbClr val="FBE9E9"/>
+            <a:srgbClr val="2E1418"/>
           </a:solidFill>
           <a:ln/>
         </p:spPr>
       </p:sp>
       <p:sp>
         <p:nvSpPr>
-          <p:cNvPr id="12" name="Text 9"/>
+          <p:cNvPr id="11" name="Text 8"/>
           <p:cNvSpPr/>
           <p:nvPr/>
         </p:nvSpPr>
@@ -3895,7 +3873,7 @@
             <a:r>
               <a:rPr lang="en-US" sz="3000" b="1" dirty="0">
                 <a:solidFill>
-                  <a:srgbClr val="C62A2A"/>
+                  <a:srgbClr val="FF7B7B"/>
                 </a:solidFill>
                 <a:latin typeface="Montserrat" pitchFamily="34" charset="0"/>
                 <a:ea typeface="Montserrat" pitchFamily="34" charset="-122"/>
@@ -3909,7 +3887,7 @@
       </p:sp>
       <p:sp>
         <p:nvSpPr>
-          <p:cNvPr id="13" name="Text 10"/>
+          <p:cNvPr id="12" name="Text 9"/>
           <p:cNvSpPr/>
           <p:nvPr/>
         </p:nvSpPr>
@@ -3934,7 +3912,7 @@
             <a:r>
               <a:rPr lang="en-US" sz="1150" dirty="0">
                 <a:solidFill>
-                  <a:srgbClr val="C62A2A"/>
+                  <a:srgbClr val="FF7B7B"/>
                 </a:solidFill>
                 <a:latin typeface="Montserrat" pitchFamily="34" charset="0"/>
                 <a:ea typeface="Montserrat" pitchFamily="34" charset="-122"/>
@@ -3948,7 +3926,7 @@
       </p:sp>
       <p:sp>
         <p:nvSpPr>
-          <p:cNvPr id="14" name="Shape 11"/>
+          <p:cNvPr id="13" name="Shape 10"/>
           <p:cNvSpPr/>
           <p:nvPr/>
         </p:nvSpPr>
@@ -3963,14 +3941,14 @@
             </a:avLst>
           </a:prstGeom>
           <a:solidFill>
-            <a:srgbClr val="FBE9E9"/>
+            <a:srgbClr val="2E1418"/>
           </a:solidFill>
           <a:ln/>
         </p:spPr>
       </p:sp>
       <p:sp>
         <p:nvSpPr>
-          <p:cNvPr id="15" name="Text 12"/>
+          <p:cNvPr id="14" name="Text 11"/>
           <p:cNvSpPr/>
           <p:nvPr/>
         </p:nvSpPr>
@@ -3995,7 +3973,7 @@
             <a:r>
               <a:rPr lang="en-US" sz="950" b="1" spc="150" kern="0" dirty="0">
                 <a:solidFill>
-                  <a:srgbClr val="C62A2A"/>
+                  <a:srgbClr val="FF7B7B"/>
                 </a:solidFill>
                 <a:latin typeface="Courier New" pitchFamily="34" charset="0"/>
                 <a:ea typeface="Courier New" pitchFamily="34" charset="-122"/>
@@ -4009,7 +3987,7 @@
       </p:sp>
       <p:sp>
         <p:nvSpPr>
-          <p:cNvPr id="16" name="Text 13"/>
+          <p:cNvPr id="15" name="Text 12"/>
           <p:cNvSpPr/>
           <p:nvPr/>
         </p:nvSpPr>
@@ -4037,7 +4015,7 @@
             <a:r>
               <a:rPr lang="en-US" sz="1300" dirty="0">
                 <a:solidFill>
-                  <a:srgbClr val="111318"/>
+                  <a:srgbClr val="FFFFFF"/>
                 </a:solidFill>
                 <a:latin typeface="Montserrat" pitchFamily="34" charset="0"/>
                 <a:ea typeface="Montserrat" pitchFamily="34" charset="-122"/>
@@ -4051,7 +4029,7 @@
       </p:sp>
       <p:sp>
         <p:nvSpPr>
-          <p:cNvPr id="17" name="Shape 14"/>
+          <p:cNvPr id="16" name="Shape 13"/>
           <p:cNvSpPr/>
           <p:nvPr/>
         </p:nvSpPr>
@@ -4073,7 +4051,7 @@
       </p:sp>
       <p:sp>
         <p:nvSpPr>
-          <p:cNvPr id="18" name="Text 15"/>
+          <p:cNvPr id="17" name="Text 14"/>
           <p:cNvSpPr/>
           <p:nvPr/>
         </p:nvSpPr>
@@ -4143,7 +4121,7 @@
             <a:lvl1pPr>
               <a:defRPr sz="850">
                 <a:solidFill>
-                  <a:srgbClr val="9AA1AD"/>
+                  <a:srgbClr val="8A82A0"/>
                 </a:solidFill>
                 <a:latin typeface="Courier New"/>
                 <a:ea typeface="Courier New"/>
@@ -4188,29 +4166,7 @@
       </p:grpSpPr>
       <p:sp>
         <p:nvSpPr>
-          <p:cNvPr id="2" name="Shape 0"/>
-          <p:cNvSpPr/>
-          <p:nvPr/>
-        </p:nvSpPr>
-        <p:spPr>
-          <a:xfrm>
-            <a:off x="231343" y="194767"/>
-            <a:ext cx="11716207" cy="6473952"/>
-          </a:xfrm>
-          <a:prstGeom prst="roundRect">
-            <a:avLst>
-              <a:gd name="adj" fmla="val 3107"/>
-            </a:avLst>
-          </a:prstGeom>
-          <a:solidFill>
-            <a:srgbClr val="FFFFFF"/>
-          </a:solidFill>
-          <a:ln/>
-        </p:spPr>
-      </p:sp>
-      <p:sp>
-        <p:nvSpPr>
-          <p:cNvPr id="3" name="Text 1"/>
+          <p:cNvPr id="2" name="Text 0"/>
           <p:cNvSpPr/>
           <p:nvPr/>
         </p:nvSpPr>
@@ -4235,7 +4191,7 @@
             <a:r>
               <a:rPr lang="en-US" sz="2600" b="1" dirty="0">
                 <a:solidFill>
-                  <a:srgbClr val="5A05F4"/>
+                  <a:srgbClr val="C9A6FF"/>
                 </a:solidFill>
                 <a:latin typeface="Courier New" pitchFamily="34" charset="0"/>
                 <a:ea typeface="Courier New" pitchFamily="34" charset="-122"/>
@@ -4249,7 +4205,7 @@
       </p:sp>
       <p:sp>
         <p:nvSpPr>
-          <p:cNvPr id="4" name="Text 2"/>
+          <p:cNvPr id="3" name="Text 1"/>
           <p:cNvSpPr/>
           <p:nvPr/>
         </p:nvSpPr>
@@ -4274,7 +4230,7 @@
             <a:r>
               <a:rPr lang="en-US" sz="2400" b="1" dirty="0">
                 <a:solidFill>
-                  <a:srgbClr val="111318"/>
+                  <a:srgbClr val="FFFFFF"/>
                 </a:solidFill>
                 <a:latin typeface="Montserrat" pitchFamily="34" charset="0"/>
                 <a:ea typeface="Montserrat" pitchFamily="34" charset="-122"/>
@@ -4288,7 +4244,7 @@
       </p:sp>
       <p:sp>
         <p:nvSpPr>
-          <p:cNvPr id="5" name="Shape 3"/>
+          <p:cNvPr id="4" name="Shape 2"/>
           <p:cNvSpPr/>
           <p:nvPr/>
         </p:nvSpPr>
@@ -4303,14 +4259,14 @@
             </a:avLst>
           </a:prstGeom>
           <a:solidFill>
-            <a:srgbClr val="5A05F4"/>
+            <a:srgbClr val="C9A6FF"/>
           </a:solidFill>
           <a:ln/>
         </p:spPr>
       </p:sp>
       <p:sp>
         <p:nvSpPr>
-          <p:cNvPr id="6" name="Text 4"/>
+          <p:cNvPr id="5" name="Text 3"/>
           <p:cNvSpPr/>
           <p:nvPr/>
         </p:nvSpPr>
@@ -4335,7 +4291,7 @@
             <a:r>
               <a:rPr lang="en-US" sz="900" b="1" spc="100" kern="0" dirty="0">
                 <a:solidFill>
-                  <a:srgbClr val="FFFFFF"/>
+                  <a:srgbClr val="1C1140"/>
                 </a:solidFill>
                 <a:latin typeface="Courier New" pitchFamily="34" charset="0"/>
                 <a:ea typeface="Courier New" pitchFamily="34" charset="-122"/>
@@ -4349,7 +4305,7 @@
       </p:sp>
       <p:pic>
         <p:nvPicPr>
-          <p:cNvPr id="7" name="Image 0" descr="preencoded.png">    </p:cNvPr>
+          <p:cNvPr id="6" name="Image 0" descr="preencoded.png">    </p:cNvPr>
           <p:cNvPicPr>
             <a:picLocks noChangeAspect="1"/>
           </p:cNvPicPr>
@@ -4373,7 +4329,7 @@
       </p:pic>
       <p:sp>
         <p:nvSpPr>
-          <p:cNvPr id="8" name="Shape 5"/>
+          <p:cNvPr id="7" name="Shape 4"/>
           <p:cNvSpPr/>
           <p:nvPr/>
         </p:nvSpPr>
@@ -4388,14 +4344,14 @@
             </a:avLst>
           </a:prstGeom>
           <a:solidFill>
-            <a:srgbClr val="EFEAFE"/>
+            <a:srgbClr val="1C1140"/>
           </a:solidFill>
           <a:ln/>
         </p:spPr>
       </p:sp>
       <p:sp>
         <p:nvSpPr>
-          <p:cNvPr id="9" name="Text 6"/>
+          <p:cNvPr id="8" name="Text 5"/>
           <p:cNvSpPr/>
           <p:nvPr/>
         </p:nvSpPr>
@@ -4420,7 +4376,7 @@
             <a:r>
               <a:rPr lang="en-US" sz="1100" b="1" dirty="0">
                 <a:solidFill>
-                  <a:srgbClr val="5A05F4"/>
+                  <a:srgbClr val="C9A6FF"/>
                 </a:solidFill>
                 <a:latin typeface="Courier New" pitchFamily="34" charset="0"/>
                 <a:ea typeface="Courier New" pitchFamily="34" charset="-122"/>
@@ -4434,7 +4390,7 @@
       </p:sp>
       <p:sp>
         <p:nvSpPr>
-          <p:cNvPr id="10" name="Shape 7"/>
+          <p:cNvPr id="9" name="Shape 6"/>
           <p:cNvSpPr/>
           <p:nvPr/>
         </p:nvSpPr>
@@ -4449,7 +4405,7 @@
           <a:noFill/>
           <a:ln w="15875">
             <a:solidFill>
-              <a:srgbClr val="C9B8FB"/>
+              <a:srgbClr val="9B7BE8"/>
             </a:solidFill>
             <a:prstDash val="solid"/>
           </a:ln>
@@ -4457,7 +4413,7 @@
       </p:sp>
       <p:sp>
         <p:nvSpPr>
-          <p:cNvPr id="11" name="Shape 8"/>
+          <p:cNvPr id="10" name="Shape 7"/>
           <p:cNvSpPr/>
           <p:nvPr/>
         </p:nvSpPr>
@@ -4470,14 +4426,14 @@
             <a:avLst/>
           </a:prstGeom>
           <a:solidFill>
-            <a:srgbClr val="C9B8FB"/>
+            <a:srgbClr val="9B7BE8"/>
           </a:solidFill>
           <a:ln/>
         </p:spPr>
       </p:sp>
       <p:sp>
         <p:nvSpPr>
-          <p:cNvPr id="12" name="Shape 9"/>
+          <p:cNvPr id="11" name="Shape 8"/>
           <p:cNvSpPr/>
           <p:nvPr/>
         </p:nvSpPr>
@@ -4492,11 +4448,11 @@
             </a:avLst>
           </a:prstGeom>
           <a:solidFill>
-            <a:srgbClr val="FFFFFF"/>
+            <a:srgbClr val="17141F"/>
           </a:solidFill>
           <a:ln w="12700">
             <a:solidFill>
-              <a:srgbClr val="E6E7EC"/>
+              <a:srgbClr val="2E2A3A"/>
             </a:solidFill>
             <a:prstDash val="solid"/>
           </a:ln>
@@ -4504,7 +4460,7 @@
       </p:sp>
       <p:sp>
         <p:nvSpPr>
-          <p:cNvPr id="13" name="Text 10"/>
+          <p:cNvPr id="12" name="Text 9"/>
           <p:cNvSpPr/>
           <p:nvPr/>
         </p:nvSpPr>
@@ -4529,7 +4485,7 @@
             <a:r>
               <a:rPr lang="en-US" sz="1100" dirty="0">
                 <a:solidFill>
-                  <a:srgbClr val="111318"/>
+                  <a:srgbClr val="FFFFFF"/>
                 </a:solidFill>
                 <a:latin typeface="Courier New" pitchFamily="34" charset="0"/>
                 <a:ea typeface="Courier New" pitchFamily="34" charset="-122"/>
@@ -4543,7 +4499,7 @@
       </p:sp>
       <p:sp>
         <p:nvSpPr>
-          <p:cNvPr id="14" name="Shape 11"/>
+          <p:cNvPr id="13" name="Shape 10"/>
           <p:cNvSpPr/>
           <p:nvPr/>
         </p:nvSpPr>
@@ -4558,7 +4514,7 @@
           <a:noFill/>
           <a:ln w="15875">
             <a:solidFill>
-              <a:srgbClr val="C9B8FB"/>
+              <a:srgbClr val="9B7BE8"/>
             </a:solidFill>
             <a:prstDash val="solid"/>
           </a:ln>
@@ -4566,7 +4522,7 @@
       </p:sp>
       <p:sp>
         <p:nvSpPr>
-          <p:cNvPr id="15" name="Shape 12"/>
+          <p:cNvPr id="14" name="Shape 11"/>
           <p:cNvSpPr/>
           <p:nvPr/>
         </p:nvSpPr>
@@ -4579,14 +4535,14 @@
             <a:avLst/>
           </a:prstGeom>
           <a:solidFill>
-            <a:srgbClr val="C9B8FB"/>
+            <a:srgbClr val="9B7BE8"/>
           </a:solidFill>
           <a:ln/>
         </p:spPr>
       </p:sp>
       <p:sp>
         <p:nvSpPr>
-          <p:cNvPr id="16" name="Shape 13"/>
+          <p:cNvPr id="15" name="Shape 12"/>
           <p:cNvSpPr/>
           <p:nvPr/>
         </p:nvSpPr>
@@ -4601,11 +4557,11 @@
             </a:avLst>
           </a:prstGeom>
           <a:solidFill>
-            <a:srgbClr val="FFFFFF"/>
+            <a:srgbClr val="17141F"/>
           </a:solidFill>
           <a:ln w="12700">
             <a:solidFill>
-              <a:srgbClr val="E6E7EC"/>
+              <a:srgbClr val="2E2A3A"/>
             </a:solidFill>
             <a:prstDash val="solid"/>
           </a:ln>
@@ -4613,7 +4569,7 @@
       </p:sp>
       <p:sp>
         <p:nvSpPr>
-          <p:cNvPr id="17" name="Text 14"/>
+          <p:cNvPr id="16" name="Text 13"/>
           <p:cNvSpPr/>
           <p:nvPr/>
         </p:nvSpPr>
@@ -4638,7 +4594,7 @@
             <a:r>
               <a:rPr lang="en-US" sz="1100" dirty="0">
                 <a:solidFill>
-                  <a:srgbClr val="111318"/>
+                  <a:srgbClr val="FFFFFF"/>
                 </a:solidFill>
                 <a:latin typeface="Courier New" pitchFamily="34" charset="0"/>
                 <a:ea typeface="Courier New" pitchFamily="34" charset="-122"/>
@@ -4652,7 +4608,7 @@
       </p:sp>
       <p:sp>
         <p:nvSpPr>
-          <p:cNvPr id="18" name="Text 15"/>
+          <p:cNvPr id="17" name="Text 14"/>
           <p:cNvSpPr/>
           <p:nvPr/>
         </p:nvSpPr>
@@ -4677,7 +4633,7 @@
             <a:r>
               <a:rPr lang="en-US" sz="1200" i="1" dirty="0">
                 <a:solidFill>
-                  <a:srgbClr val="555B66"/>
+                  <a:srgbClr val="AFA9BE"/>
                 </a:solidFill>
                 <a:latin typeface="Montserrat" pitchFamily="34" charset="0"/>
                 <a:ea typeface="Montserrat" pitchFamily="34" charset="-122"/>
@@ -4691,7 +4647,7 @@
       </p:sp>
       <p:sp>
         <p:nvSpPr>
-          <p:cNvPr id="19" name="Shape 16"/>
+          <p:cNvPr id="18" name="Shape 15"/>
           <p:cNvSpPr/>
           <p:nvPr/>
         </p:nvSpPr>
@@ -4706,11 +4662,11 @@
             </a:avLst>
           </a:prstGeom>
           <a:solidFill>
-            <a:srgbClr val="FFFFFF"/>
+            <a:srgbClr val="17141F"/>
           </a:solidFill>
           <a:ln w="12700">
             <a:solidFill>
-              <a:srgbClr val="E6E7EC"/>
+              <a:srgbClr val="2E2A3A"/>
             </a:solidFill>
             <a:prstDash val="solid"/>
           </a:ln>
@@ -4718,7 +4674,7 @@
       </p:sp>
       <p:sp>
         <p:nvSpPr>
-          <p:cNvPr id="20" name="Text 17"/>
+          <p:cNvPr id="19" name="Text 16"/>
           <p:cNvSpPr/>
           <p:nvPr/>
         </p:nvSpPr>
@@ -4743,7 +4699,7 @@
             <a:r>
               <a:rPr lang="en-US" sz="1350" b="1" dirty="0">
                 <a:solidFill>
-                  <a:srgbClr val="111318"/>
+                  <a:srgbClr val="FFFFFF"/>
                 </a:solidFill>
                 <a:latin typeface="Montserrat" pitchFamily="34" charset="0"/>
                 <a:ea typeface="Montserrat" pitchFamily="34" charset="-122"/>
@@ -4757,7 +4713,7 @@
       </p:sp>
       <p:sp>
         <p:nvSpPr>
-          <p:cNvPr id="21" name="Text 18"/>
+          <p:cNvPr id="20" name="Text 17"/>
           <p:cNvSpPr/>
           <p:nvPr/>
         </p:nvSpPr>
@@ -4782,7 +4738,7 @@
             <a:r>
               <a:rPr lang="en-US" sz="1150" dirty="0">
                 <a:solidFill>
-                  <a:srgbClr val="555B66"/>
+                  <a:srgbClr val="AFA9BE"/>
                 </a:solidFill>
                 <a:latin typeface="Montserrat" pitchFamily="34" charset="0"/>
                 <a:ea typeface="Montserrat" pitchFamily="34" charset="-122"/>
@@ -4796,7 +4752,7 @@
       </p:sp>
       <p:sp>
         <p:nvSpPr>
-          <p:cNvPr id="22" name="Shape 19"/>
+          <p:cNvPr id="21" name="Shape 18"/>
           <p:cNvSpPr/>
           <p:nvPr/>
         </p:nvSpPr>
@@ -4811,14 +4767,14 @@
             </a:avLst>
           </a:prstGeom>
           <a:solidFill>
-            <a:srgbClr val="EFEAFE"/>
+            <a:srgbClr val="1C1140"/>
           </a:solidFill>
           <a:ln/>
         </p:spPr>
       </p:sp>
       <p:sp>
         <p:nvSpPr>
-          <p:cNvPr id="23" name="Text 20"/>
+          <p:cNvPr id="22" name="Text 19"/>
           <p:cNvSpPr/>
           <p:nvPr/>
         </p:nvSpPr>
@@ -4843,7 +4799,7 @@
             <a:r>
               <a:rPr lang="en-US" sz="1350" b="1" dirty="0">
                 <a:solidFill>
-                  <a:srgbClr val="5A05F4"/>
+                  <a:srgbClr val="C9A6FF"/>
                 </a:solidFill>
                 <a:latin typeface="Montserrat" pitchFamily="34" charset="0"/>
                 <a:ea typeface="Montserrat" pitchFamily="34" charset="-122"/>
@@ -4857,7 +4813,7 @@
       </p:sp>
       <p:sp>
         <p:nvSpPr>
-          <p:cNvPr id="24" name="Text 21"/>
+          <p:cNvPr id="23" name="Text 20"/>
           <p:cNvSpPr/>
           <p:nvPr/>
         </p:nvSpPr>
@@ -4882,7 +4838,7 @@
             <a:r>
               <a:rPr lang="en-US" sz="1150" dirty="0">
                 <a:solidFill>
-                  <a:srgbClr val="111318"/>
+                  <a:srgbClr val="FFFFFF"/>
                 </a:solidFill>
                 <a:latin typeface="Montserrat" pitchFamily="34" charset="0"/>
                 <a:ea typeface="Montserrat" pitchFamily="34" charset="-122"/>
@@ -4896,7 +4852,7 @@
       </p:sp>
       <p:sp>
         <p:nvSpPr>
-          <p:cNvPr id="25" name="Shape 22"/>
+          <p:cNvPr id="24" name="Shape 21"/>
           <p:cNvSpPr/>
           <p:nvPr/>
         </p:nvSpPr>
@@ -4911,11 +4867,11 @@
             </a:avLst>
           </a:prstGeom>
           <a:solidFill>
-            <a:srgbClr val="FFFFFF"/>
+            <a:srgbClr val="17141F"/>
           </a:solidFill>
           <a:ln w="12700">
             <a:solidFill>
-              <a:srgbClr val="E6E7EC"/>
+              <a:srgbClr val="2E2A3A"/>
             </a:solidFill>
             <a:prstDash val="solid"/>
           </a:ln>
@@ -4923,7 +4879,7 @@
       </p:sp>
       <p:sp>
         <p:nvSpPr>
-          <p:cNvPr id="26" name="Text 23"/>
+          <p:cNvPr id="25" name="Text 22"/>
           <p:cNvSpPr/>
           <p:nvPr/>
         </p:nvSpPr>
@@ -4948,7 +4904,7 @@
             <a:r>
               <a:rPr lang="en-US" sz="1350" b="1" dirty="0">
                 <a:solidFill>
-                  <a:srgbClr val="111318"/>
+                  <a:srgbClr val="FFFFFF"/>
                 </a:solidFill>
                 <a:latin typeface="Montserrat" pitchFamily="34" charset="0"/>
                 <a:ea typeface="Montserrat" pitchFamily="34" charset="-122"/>
@@ -4962,7 +4918,7 @@
       </p:sp>
       <p:sp>
         <p:nvSpPr>
-          <p:cNvPr id="27" name="Text 24"/>
+          <p:cNvPr id="26" name="Text 23"/>
           <p:cNvSpPr/>
           <p:nvPr/>
         </p:nvSpPr>
@@ -4987,7 +4943,7 @@
             <a:r>
               <a:rPr lang="en-US" sz="1150" dirty="0">
                 <a:solidFill>
-                  <a:srgbClr val="555B66"/>
+                  <a:srgbClr val="AFA9BE"/>
                 </a:solidFill>
                 <a:latin typeface="Montserrat" pitchFamily="34" charset="0"/>
                 <a:ea typeface="Montserrat" pitchFamily="34" charset="-122"/>
@@ -5001,7 +4957,7 @@
       </p:sp>
       <p:sp>
         <p:nvSpPr>
-          <p:cNvPr id="28" name="Shape 25"/>
+          <p:cNvPr id="27" name="Shape 24"/>
           <p:cNvSpPr/>
           <p:nvPr/>
         </p:nvSpPr>
@@ -5016,14 +4972,14 @@
             </a:avLst>
           </a:prstGeom>
           <a:solidFill>
-            <a:srgbClr val="E9F4EF"/>
+            <a:srgbClr val="102A20"/>
           </a:solidFill>
           <a:ln/>
         </p:spPr>
       </p:sp>
       <p:sp>
         <p:nvSpPr>
-          <p:cNvPr id="29" name="Text 26"/>
+          <p:cNvPr id="28" name="Text 25"/>
           <p:cNvSpPr/>
           <p:nvPr/>
         </p:nvSpPr>
@@ -5051,7 +5007,7 @@
             <a:r>
               <a:rPr lang="en-US" sz="1300" dirty="0">
                 <a:solidFill>
-                  <a:srgbClr val="111318"/>
+                  <a:srgbClr val="FFFFFF"/>
                 </a:solidFill>
                 <a:latin typeface="Montserrat" pitchFamily="34" charset="0"/>
                 <a:ea typeface="Montserrat" pitchFamily="34" charset="-122"/>
@@ -5093,7 +5049,7 @@
             <a:lvl1pPr>
               <a:defRPr sz="850">
                 <a:solidFill>
-                  <a:srgbClr val="9AA1AD"/>
+                  <a:srgbClr val="8A82A0"/>
                 </a:solidFill>
                 <a:latin typeface="Courier New"/>
                 <a:ea typeface="Courier New"/>
@@ -5138,29 +5094,7 @@
       </p:grpSpPr>
       <p:sp>
         <p:nvSpPr>
-          <p:cNvPr id="2" name="Shape 0"/>
-          <p:cNvSpPr/>
-          <p:nvPr/>
-        </p:nvSpPr>
-        <p:spPr>
-          <a:xfrm>
-            <a:off x="231343" y="194767"/>
-            <a:ext cx="11716207" cy="6473952"/>
-          </a:xfrm>
-          <a:prstGeom prst="roundRect">
-            <a:avLst>
-              <a:gd name="adj" fmla="val 3107"/>
-            </a:avLst>
-          </a:prstGeom>
-          <a:solidFill>
-            <a:srgbClr val="FFFFFF"/>
-          </a:solidFill>
-          <a:ln/>
-        </p:spPr>
-      </p:sp>
-      <p:sp>
-        <p:nvSpPr>
-          <p:cNvPr id="3" name="Text 1"/>
+          <p:cNvPr id="2" name="Text 0"/>
           <p:cNvSpPr/>
           <p:nvPr/>
         </p:nvSpPr>
@@ -5185,7 +5119,7 @@
             <a:r>
               <a:rPr lang="en-US" sz="2600" b="1" dirty="0">
                 <a:solidFill>
-                  <a:srgbClr val="5A05F4"/>
+                  <a:srgbClr val="C9A6FF"/>
                 </a:solidFill>
                 <a:latin typeface="Courier New" pitchFamily="34" charset="0"/>
                 <a:ea typeface="Courier New" pitchFamily="34" charset="-122"/>
@@ -5199,7 +5133,7 @@
       </p:sp>
       <p:sp>
         <p:nvSpPr>
-          <p:cNvPr id="4" name="Text 2"/>
+          <p:cNvPr id="3" name="Text 1"/>
           <p:cNvSpPr/>
           <p:nvPr/>
         </p:nvSpPr>
@@ -5224,7 +5158,7 @@
             <a:r>
               <a:rPr lang="en-US" sz="2400" b="1" dirty="0">
                 <a:solidFill>
-                  <a:srgbClr val="111318"/>
+                  <a:srgbClr val="FFFFFF"/>
                 </a:solidFill>
                 <a:latin typeface="Montserrat" pitchFamily="34" charset="0"/>
                 <a:ea typeface="Montserrat" pitchFamily="34" charset="-122"/>
@@ -5238,7 +5172,7 @@
       </p:sp>
       <p:sp>
         <p:nvSpPr>
-          <p:cNvPr id="5" name="Shape 3"/>
+          <p:cNvPr id="4" name="Shape 2"/>
           <p:cNvSpPr/>
           <p:nvPr/>
         </p:nvSpPr>
@@ -5253,14 +5187,14 @@
             </a:avLst>
           </a:prstGeom>
           <a:solidFill>
-            <a:srgbClr val="5A05F4"/>
+            <a:srgbClr val="C9A6FF"/>
           </a:solidFill>
           <a:ln/>
         </p:spPr>
       </p:sp>
       <p:sp>
         <p:nvSpPr>
-          <p:cNvPr id="6" name="Text 4"/>
+          <p:cNvPr id="5" name="Text 3"/>
           <p:cNvSpPr/>
           <p:nvPr/>
         </p:nvSpPr>
@@ -5285,7 +5219,7 @@
             <a:r>
               <a:rPr lang="en-US" sz="900" b="1" spc="100" kern="0" dirty="0">
                 <a:solidFill>
-                  <a:srgbClr val="FFFFFF"/>
+                  <a:srgbClr val="1C1140"/>
                 </a:solidFill>
                 <a:latin typeface="Courier New" pitchFamily="34" charset="0"/>
                 <a:ea typeface="Courier New" pitchFamily="34" charset="-122"/>
@@ -5299,7 +5233,7 @@
       </p:sp>
       <p:pic>
         <p:nvPicPr>
-          <p:cNvPr id="7" name="Image 0" descr="preencoded.png">    </p:cNvPr>
+          <p:cNvPr id="6" name="Image 0" descr="preencoded.png">    </p:cNvPr>
           <p:cNvPicPr>
             <a:picLocks noChangeAspect="1"/>
           </p:cNvPicPr>
@@ -5323,7 +5257,7 @@
       </p:pic>
       <p:sp>
         <p:nvSpPr>
-          <p:cNvPr id="8" name="Shape 5"/>
+          <p:cNvPr id="7" name="Shape 4"/>
           <p:cNvSpPr/>
           <p:nvPr/>
         </p:nvSpPr>
@@ -5338,14 +5272,14 @@
             </a:avLst>
           </a:prstGeom>
           <a:solidFill>
-            <a:srgbClr val="E9F4EF"/>
+            <a:srgbClr val="102A20"/>
           </a:solidFill>
           <a:ln/>
         </p:spPr>
       </p:sp>
       <p:sp>
         <p:nvSpPr>
-          <p:cNvPr id="9" name="Text 6"/>
+          <p:cNvPr id="8" name="Text 5"/>
           <p:cNvSpPr/>
           <p:nvPr/>
         </p:nvSpPr>
@@ -5370,7 +5304,7 @@
             <a:r>
               <a:rPr lang="en-US" sz="1450" b="1" dirty="0">
                 <a:solidFill>
-                  <a:srgbClr val="1B8A5A"/>
+                  <a:srgbClr val="5FD6A0"/>
                 </a:solidFill>
                 <a:latin typeface="Montserrat" pitchFamily="34" charset="0"/>
                 <a:ea typeface="Montserrat" pitchFamily="34" charset="-122"/>
@@ -5384,7 +5318,7 @@
       </p:sp>
       <p:sp>
         <p:nvSpPr>
-          <p:cNvPr id="10" name="Text 7"/>
+          <p:cNvPr id="9" name="Text 6"/>
           <p:cNvSpPr/>
           <p:nvPr/>
         </p:nvSpPr>
@@ -5412,7 +5346,7 @@
             <a:r>
               <a:rPr lang="en-US" sz="1200" dirty="0">
                 <a:solidFill>
-                  <a:srgbClr val="111318"/>
+                  <a:srgbClr val="FFFFFF"/>
                 </a:solidFill>
                 <a:latin typeface="Montserrat" pitchFamily="34" charset="0"/>
                 <a:ea typeface="Montserrat" pitchFamily="34" charset="-122"/>
@@ -5426,7 +5360,7 @@
       </p:sp>
       <p:sp>
         <p:nvSpPr>
-          <p:cNvPr id="11" name="Shape 8"/>
+          <p:cNvPr id="10" name="Shape 7"/>
           <p:cNvSpPr/>
           <p:nvPr/>
         </p:nvSpPr>
@@ -5441,14 +5375,14 @@
             </a:avLst>
           </a:prstGeom>
           <a:solidFill>
-            <a:srgbClr val="EFEAFE"/>
+            <a:srgbClr val="1C1140"/>
           </a:solidFill>
           <a:ln/>
         </p:spPr>
       </p:sp>
       <p:sp>
         <p:nvSpPr>
-          <p:cNvPr id="12" name="Text 9"/>
+          <p:cNvPr id="11" name="Text 8"/>
           <p:cNvSpPr/>
           <p:nvPr/>
         </p:nvSpPr>
@@ -5473,7 +5407,7 @@
             <a:r>
               <a:rPr lang="en-US" sz="1450" b="1" dirty="0">
                 <a:solidFill>
-                  <a:srgbClr val="5A05F4"/>
+                  <a:srgbClr val="C9A6FF"/>
                 </a:solidFill>
                 <a:latin typeface="Montserrat" pitchFamily="34" charset="0"/>
                 <a:ea typeface="Montserrat" pitchFamily="34" charset="-122"/>
@@ -5487,7 +5421,7 @@
       </p:sp>
       <p:sp>
         <p:nvSpPr>
-          <p:cNvPr id="13" name="Text 10"/>
+          <p:cNvPr id="12" name="Text 9"/>
           <p:cNvSpPr/>
           <p:nvPr/>
         </p:nvSpPr>
@@ -5515,7 +5449,7 @@
             <a:r>
               <a:rPr lang="en-US" sz="1200" dirty="0">
                 <a:solidFill>
-                  <a:srgbClr val="111318"/>
+                  <a:srgbClr val="FFFFFF"/>
                 </a:solidFill>
                 <a:latin typeface="Montserrat" pitchFamily="34" charset="0"/>
                 <a:ea typeface="Montserrat" pitchFamily="34" charset="-122"/>
@@ -5529,7 +5463,7 @@
       </p:sp>
       <p:sp>
         <p:nvSpPr>
-          <p:cNvPr id="14" name="Shape 11"/>
+          <p:cNvPr id="13" name="Shape 10"/>
           <p:cNvSpPr/>
           <p:nvPr/>
         </p:nvSpPr>
@@ -5544,11 +5478,11 @@
             </a:avLst>
           </a:prstGeom>
           <a:solidFill>
-            <a:srgbClr val="FFFFFF"/>
+            <a:srgbClr val="17141F"/>
           </a:solidFill>
           <a:ln w="12700">
             <a:solidFill>
-              <a:srgbClr val="E6E7EC"/>
+              <a:srgbClr val="2E2A3A"/>
             </a:solidFill>
             <a:prstDash val="solid"/>
           </a:ln>
@@ -5556,7 +5490,7 @@
       </p:sp>
       <p:sp>
         <p:nvSpPr>
-          <p:cNvPr id="15" name="Text 12"/>
+          <p:cNvPr id="14" name="Text 11"/>
           <p:cNvSpPr/>
           <p:nvPr/>
         </p:nvSpPr>
@@ -5581,7 +5515,7 @@
             <a:r>
               <a:rPr lang="en-US" sz="1050" dirty="0">
                 <a:solidFill>
-                  <a:srgbClr val="111318"/>
+                  <a:srgbClr val="FFFFFF"/>
                 </a:solidFill>
                 <a:latin typeface="Courier New" pitchFamily="34" charset="0"/>
                 <a:ea typeface="Courier New" pitchFamily="34" charset="-122"/>
@@ -5595,7 +5529,7 @@
       </p:sp>
       <p:sp>
         <p:nvSpPr>
-          <p:cNvPr id="16" name="Shape 13"/>
+          <p:cNvPr id="15" name="Shape 12"/>
           <p:cNvSpPr/>
           <p:nvPr/>
         </p:nvSpPr>
@@ -5610,7 +5544,7 @@
           <a:noFill/>
           <a:ln w="15875">
             <a:solidFill>
-              <a:srgbClr val="C9B8FB"/>
+              <a:srgbClr val="9B7BE8"/>
             </a:solidFill>
             <a:prstDash val="solid"/>
           </a:ln>
@@ -5618,7 +5552,7 @@
       </p:sp>
       <p:sp>
         <p:nvSpPr>
-          <p:cNvPr id="17" name="Shape 14"/>
+          <p:cNvPr id="16" name="Shape 13"/>
           <p:cNvSpPr/>
           <p:nvPr/>
         </p:nvSpPr>
@@ -5631,14 +5565,14 @@
             <a:avLst/>
           </a:prstGeom>
           <a:solidFill>
-            <a:srgbClr val="C9B8FB"/>
+            <a:srgbClr val="9B7BE8"/>
           </a:solidFill>
           <a:ln/>
         </p:spPr>
       </p:sp>
       <p:sp>
         <p:nvSpPr>
-          <p:cNvPr id="18" name="Shape 15"/>
+          <p:cNvPr id="17" name="Shape 14"/>
           <p:cNvSpPr/>
           <p:nvPr/>
         </p:nvSpPr>
@@ -5653,11 +5587,11 @@
             </a:avLst>
           </a:prstGeom>
           <a:solidFill>
-            <a:srgbClr val="FFFFFF"/>
+            <a:srgbClr val="17141F"/>
           </a:solidFill>
           <a:ln w="12700">
             <a:solidFill>
-              <a:srgbClr val="E6E7EC"/>
+              <a:srgbClr val="2E2A3A"/>
             </a:solidFill>
             <a:prstDash val="solid"/>
           </a:ln>
@@ -5665,7 +5599,7 @@
       </p:sp>
       <p:sp>
         <p:nvSpPr>
-          <p:cNvPr id="19" name="Text 16"/>
+          <p:cNvPr id="18" name="Text 15"/>
           <p:cNvSpPr/>
           <p:nvPr/>
         </p:nvSpPr>
@@ -5690,7 +5624,7 @@
             <a:r>
               <a:rPr lang="en-US" sz="1050" dirty="0">
                 <a:solidFill>
-                  <a:srgbClr val="111318"/>
+                  <a:srgbClr val="FFFFFF"/>
                 </a:solidFill>
                 <a:latin typeface="Courier New" pitchFamily="34" charset="0"/>
                 <a:ea typeface="Courier New" pitchFamily="34" charset="-122"/>
@@ -5704,7 +5638,7 @@
       </p:sp>
       <p:sp>
         <p:nvSpPr>
-          <p:cNvPr id="20" name="Shape 17"/>
+          <p:cNvPr id="19" name="Shape 16"/>
           <p:cNvSpPr/>
           <p:nvPr/>
         </p:nvSpPr>
@@ -5719,7 +5653,7 @@
           <a:noFill/>
           <a:ln w="15875">
             <a:solidFill>
-              <a:srgbClr val="C9B8FB"/>
+              <a:srgbClr val="9B7BE8"/>
             </a:solidFill>
             <a:prstDash val="solid"/>
           </a:ln>
@@ -5727,7 +5661,7 @@
       </p:sp>
       <p:sp>
         <p:nvSpPr>
-          <p:cNvPr id="21" name="Shape 18"/>
+          <p:cNvPr id="20" name="Shape 17"/>
           <p:cNvSpPr/>
           <p:nvPr/>
         </p:nvSpPr>
@@ -5740,14 +5674,14 @@
             <a:avLst/>
           </a:prstGeom>
           <a:solidFill>
-            <a:srgbClr val="C9B8FB"/>
+            <a:srgbClr val="9B7BE8"/>
           </a:solidFill>
           <a:ln/>
         </p:spPr>
       </p:sp>
       <p:sp>
         <p:nvSpPr>
-          <p:cNvPr id="22" name="Shape 19"/>
+          <p:cNvPr id="21" name="Shape 18"/>
           <p:cNvSpPr/>
           <p:nvPr/>
         </p:nvSpPr>
@@ -5762,11 +5696,11 @@
             </a:avLst>
           </a:prstGeom>
           <a:solidFill>
-            <a:srgbClr val="FFFFFF"/>
+            <a:srgbClr val="17141F"/>
           </a:solidFill>
           <a:ln w="12700">
             <a:solidFill>
-              <a:srgbClr val="E6E7EC"/>
+              <a:srgbClr val="2E2A3A"/>
             </a:solidFill>
             <a:prstDash val="solid"/>
           </a:ln>
@@ -5774,7 +5708,7 @@
       </p:sp>
       <p:sp>
         <p:nvSpPr>
-          <p:cNvPr id="23" name="Text 20"/>
+          <p:cNvPr id="22" name="Text 19"/>
           <p:cNvSpPr/>
           <p:nvPr/>
         </p:nvSpPr>
@@ -5799,7 +5733,7 @@
             <a:r>
               <a:rPr lang="en-US" sz="1050" dirty="0">
                 <a:solidFill>
-                  <a:srgbClr val="111318"/>
+                  <a:srgbClr val="FFFFFF"/>
                 </a:solidFill>
                 <a:latin typeface="Courier New" pitchFamily="34" charset="0"/>
                 <a:ea typeface="Courier New" pitchFamily="34" charset="-122"/>
@@ -5813,7 +5747,7 @@
       </p:sp>
       <p:sp>
         <p:nvSpPr>
-          <p:cNvPr id="24" name="Shape 21"/>
+          <p:cNvPr id="23" name="Shape 20"/>
           <p:cNvSpPr/>
           <p:nvPr/>
         </p:nvSpPr>
@@ -5828,7 +5762,7 @@
           <a:noFill/>
           <a:ln w="15875">
             <a:solidFill>
-              <a:srgbClr val="C9B8FB"/>
+              <a:srgbClr val="9B7BE8"/>
             </a:solidFill>
             <a:prstDash val="solid"/>
           </a:ln>
@@ -5836,7 +5770,7 @@
       </p:sp>
       <p:sp>
         <p:nvSpPr>
-          <p:cNvPr id="25" name="Shape 22"/>
+          <p:cNvPr id="24" name="Shape 21"/>
           <p:cNvSpPr/>
           <p:nvPr/>
         </p:nvSpPr>
@@ -5849,14 +5783,14 @@
             <a:avLst/>
           </a:prstGeom>
           <a:solidFill>
-            <a:srgbClr val="C9B8FB"/>
+            <a:srgbClr val="9B7BE8"/>
           </a:solidFill>
           <a:ln/>
         </p:spPr>
       </p:sp>
       <p:sp>
         <p:nvSpPr>
-          <p:cNvPr id="26" name="Shape 23"/>
+          <p:cNvPr id="25" name="Shape 22"/>
           <p:cNvSpPr/>
           <p:nvPr/>
         </p:nvSpPr>
@@ -5871,11 +5805,11 @@
             </a:avLst>
           </a:prstGeom>
           <a:solidFill>
-            <a:srgbClr val="FFFFFF"/>
+            <a:srgbClr val="17141F"/>
           </a:solidFill>
           <a:ln w="12700">
             <a:solidFill>
-              <a:srgbClr val="E6E7EC"/>
+              <a:srgbClr val="2E2A3A"/>
             </a:solidFill>
             <a:prstDash val="solid"/>
           </a:ln>
@@ -5883,7 +5817,7 @@
       </p:sp>
       <p:sp>
         <p:nvSpPr>
-          <p:cNvPr id="27" name="Text 24"/>
+          <p:cNvPr id="26" name="Text 23"/>
           <p:cNvSpPr/>
           <p:nvPr/>
         </p:nvSpPr>
@@ -5908,7 +5842,7 @@
             <a:r>
               <a:rPr lang="en-US" sz="1050" dirty="0">
                 <a:solidFill>
-                  <a:srgbClr val="111318"/>
+                  <a:srgbClr val="FFFFFF"/>
                 </a:solidFill>
                 <a:latin typeface="Courier New" pitchFamily="34" charset="0"/>
                 <a:ea typeface="Courier New" pitchFamily="34" charset="-122"/>
@@ -5922,7 +5856,7 @@
       </p:sp>
       <p:sp>
         <p:nvSpPr>
-          <p:cNvPr id="28" name="Text 25"/>
+          <p:cNvPr id="27" name="Text 24"/>
           <p:cNvSpPr/>
           <p:nvPr/>
         </p:nvSpPr>
@@ -5947,7 +5881,7 @@
             <a:r>
               <a:rPr lang="en-US" sz="1200" i="1" dirty="0">
                 <a:solidFill>
-                  <a:srgbClr val="555B66"/>
+                  <a:srgbClr val="AFA9BE"/>
                 </a:solidFill>
                 <a:latin typeface="Montserrat" pitchFamily="34" charset="0"/>
                 <a:ea typeface="Montserrat" pitchFamily="34" charset="-122"/>
@@ -5961,7 +5895,7 @@
       </p:sp>
       <p:sp>
         <p:nvSpPr>
-          <p:cNvPr id="29" name="Shape 26"/>
+          <p:cNvPr id="28" name="Shape 25"/>
           <p:cNvSpPr/>
           <p:nvPr/>
         </p:nvSpPr>
@@ -5976,14 +5910,14 @@
             </a:avLst>
           </a:prstGeom>
           <a:solidFill>
-            <a:srgbClr val="FBE9E9"/>
+            <a:srgbClr val="2E1418"/>
           </a:solidFill>
           <a:ln/>
         </p:spPr>
       </p:sp>
       <p:sp>
         <p:nvSpPr>
-          <p:cNvPr id="30" name="Text 27"/>
+          <p:cNvPr id="29" name="Text 26"/>
           <p:cNvSpPr/>
           <p:nvPr/>
         </p:nvSpPr>
@@ -6008,7 +5942,7 @@
             <a:r>
               <a:rPr lang="en-US" sz="950" b="1" spc="150" kern="0" dirty="0">
                 <a:solidFill>
-                  <a:srgbClr val="C62A2A"/>
+                  <a:srgbClr val="FF7B7B"/>
                 </a:solidFill>
                 <a:latin typeface="Courier New" pitchFamily="34" charset="0"/>
                 <a:ea typeface="Courier New" pitchFamily="34" charset="-122"/>
@@ -6022,7 +5956,7 @@
       </p:sp>
       <p:sp>
         <p:nvSpPr>
-          <p:cNvPr id="31" name="Text 28"/>
+          <p:cNvPr id="30" name="Text 27"/>
           <p:cNvSpPr/>
           <p:nvPr/>
         </p:nvSpPr>
@@ -6050,7 +5984,7 @@
             <a:r>
               <a:rPr lang="en-US" sz="1300" dirty="0">
                 <a:solidFill>
-                  <a:srgbClr val="111318"/>
+                  <a:srgbClr val="FFFFFF"/>
                 </a:solidFill>
                 <a:latin typeface="Montserrat" pitchFamily="34" charset="0"/>
                 <a:ea typeface="Montserrat" pitchFamily="34" charset="-122"/>
@@ -6092,7 +6026,7 @@
             <a:lvl1pPr>
               <a:defRPr sz="850">
                 <a:solidFill>
-                  <a:srgbClr val="9AA1AD"/>
+                  <a:srgbClr val="8A82A0"/>
                 </a:solidFill>
                 <a:latin typeface="Courier New"/>
                 <a:ea typeface="Courier New"/>
@@ -6137,29 +6071,7 @@
       </p:grpSpPr>
       <p:sp>
         <p:nvSpPr>
-          <p:cNvPr id="2" name="Shape 0"/>
-          <p:cNvSpPr/>
-          <p:nvPr/>
-        </p:nvSpPr>
-        <p:spPr>
-          <a:xfrm>
-            <a:off x="231343" y="194767"/>
-            <a:ext cx="11716207" cy="6473952"/>
-          </a:xfrm>
-          <a:prstGeom prst="roundRect">
-            <a:avLst>
-              <a:gd name="adj" fmla="val 3107"/>
-            </a:avLst>
-          </a:prstGeom>
-          <a:solidFill>
-            <a:srgbClr val="FFFFFF"/>
-          </a:solidFill>
-          <a:ln/>
-        </p:spPr>
-      </p:sp>
-      <p:sp>
-        <p:nvSpPr>
-          <p:cNvPr id="3" name="Text 1"/>
+          <p:cNvPr id="2" name="Text 0"/>
           <p:cNvSpPr/>
           <p:nvPr/>
         </p:nvSpPr>
@@ -6184,7 +6096,7 @@
             <a:r>
               <a:rPr lang="en-US" sz="2600" b="1" dirty="0">
                 <a:solidFill>
-                  <a:srgbClr val="5A05F4"/>
+                  <a:srgbClr val="C9A6FF"/>
                 </a:solidFill>
                 <a:latin typeface="Courier New" pitchFamily="34" charset="0"/>
                 <a:ea typeface="Courier New" pitchFamily="34" charset="-122"/>
@@ -6198,7 +6110,7 @@
       </p:sp>
       <p:sp>
         <p:nvSpPr>
-          <p:cNvPr id="4" name="Text 2"/>
+          <p:cNvPr id="3" name="Text 1"/>
           <p:cNvSpPr/>
           <p:nvPr/>
         </p:nvSpPr>
@@ -6223,7 +6135,7 @@
             <a:r>
               <a:rPr lang="en-US" sz="2400" b="1" dirty="0">
                 <a:solidFill>
-                  <a:srgbClr val="111318"/>
+                  <a:srgbClr val="FFFFFF"/>
                 </a:solidFill>
                 <a:latin typeface="Montserrat" pitchFamily="34" charset="0"/>
                 <a:ea typeface="Montserrat" pitchFamily="34" charset="-122"/>
@@ -6237,7 +6149,7 @@
       </p:sp>
       <p:sp>
         <p:nvSpPr>
-          <p:cNvPr id="5" name="Text 3"/>
+          <p:cNvPr id="4" name="Text 2"/>
           <p:cNvSpPr/>
           <p:nvPr/>
         </p:nvSpPr>
@@ -6265,7 +6177,7 @@
             <a:r>
               <a:rPr lang="en-US" sz="1300" dirty="0">
                 <a:solidFill>
-                  <a:srgbClr val="555B66"/>
+                  <a:srgbClr val="AFA9BE"/>
                 </a:solidFill>
                 <a:latin typeface="Montserrat" pitchFamily="34" charset="0"/>
                 <a:ea typeface="Montserrat" pitchFamily="34" charset="-122"/>
@@ -6279,7 +6191,7 @@
       </p:sp>
       <p:sp>
         <p:nvSpPr>
-          <p:cNvPr id="6" name="Shape 4"/>
+          <p:cNvPr id="5" name="Shape 3"/>
           <p:cNvSpPr/>
           <p:nvPr/>
         </p:nvSpPr>
@@ -6294,14 +6206,14 @@
             </a:avLst>
           </a:prstGeom>
           <a:solidFill>
-            <a:srgbClr val="5A05F4"/>
+            <a:srgbClr val="C9A6FF"/>
           </a:solidFill>
           <a:ln/>
         </p:spPr>
       </p:sp>
       <p:sp>
         <p:nvSpPr>
-          <p:cNvPr id="7" name="Text 5"/>
+          <p:cNvPr id="6" name="Text 4"/>
           <p:cNvSpPr/>
           <p:nvPr/>
         </p:nvSpPr>
@@ -6326,7 +6238,7 @@
             <a:r>
               <a:rPr lang="en-US" sz="900" b="1" spc="100" kern="0" dirty="0">
                 <a:solidFill>
-                  <a:srgbClr val="FFFFFF"/>
+                  <a:srgbClr val="1C1140"/>
                 </a:solidFill>
                 <a:latin typeface="Courier New" pitchFamily="34" charset="0"/>
                 <a:ea typeface="Courier New" pitchFamily="34" charset="-122"/>
@@ -6340,7 +6252,7 @@
       </p:sp>
       <p:pic>
         <p:nvPicPr>
-          <p:cNvPr id="8" name="Image 0" descr="preencoded.png">    </p:cNvPr>
+          <p:cNvPr id="7" name="Image 0" descr="preencoded.png">    </p:cNvPr>
           <p:cNvPicPr>
             <a:picLocks noChangeAspect="1"/>
           </p:cNvPicPr>
@@ -6400,7 +6312,7 @@
                       <a:r>
                         <a:rPr lang="en-US" sz="900" b="1" spc="100" kern="0" dirty="0">
                           <a:solidFill>
-                            <a:srgbClr val="9AA1AD"/>
+                            <a:srgbClr val="AFA9BE"/>
                           </a:solidFill>
                           <a:latin typeface="Courier New" pitchFamily="34" charset="0"/>
                           <a:ea typeface="Courier New" pitchFamily="34" charset="-122"/>
@@ -6418,7 +6330,7 @@
                   <a:tcPr marL="73152" marR="73152" marT="73152" marB="73152" anchor="ctr">
                     <a:lnL w="6350" cap="flat" cmpd="sng" algn="ctr">
                       <a:solidFill>
-                        <a:srgbClr val="E6E7EC"/>
+                        <a:srgbClr val="2E2A3A"/>
                       </a:solidFill>
                       <a:prstDash val="solid"/>
                       <a:round/>
@@ -6427,7 +6339,7 @@
                     </a:lnL>
                     <a:lnR w="6350" cap="flat" cmpd="sng" algn="ctr">
                       <a:solidFill>
-                        <a:srgbClr val="E6E7EC"/>
+                        <a:srgbClr val="2E2A3A"/>
                       </a:solidFill>
                       <a:prstDash val="solid"/>
                       <a:round/>
@@ -6436,7 +6348,7 @@
                     </a:lnR>
                     <a:lnT w="6350" cap="flat" cmpd="sng" algn="ctr">
                       <a:solidFill>
-                        <a:srgbClr val="E6E7EC"/>
+                        <a:srgbClr val="2E2A3A"/>
                       </a:solidFill>
                       <a:prstDash val="solid"/>
                       <a:round/>
@@ -6445,7 +6357,7 @@
                     </a:lnT>
                     <a:lnB w="6350" cap="flat" cmpd="sng" algn="ctr">
                       <a:solidFill>
-                        <a:srgbClr val="E6E7EC"/>
+                        <a:srgbClr val="2E2A3A"/>
                       </a:solidFill>
                       <a:prstDash val="solid"/>
                       <a:round/>
@@ -6453,7 +6365,7 @@
                       <a:tailEnd type="none" w="med" len="med"/>
                     </a:lnB>
                     <a:solidFill>
-                      <a:srgbClr val="F6F5FB"/>
+                      <a:srgbClr val="1F1B2A"/>
                     </a:solidFill>
                   </a:tcPr>
                 </a:tc>
@@ -6468,7 +6380,7 @@
                       <a:r>
                         <a:rPr lang="en-US" sz="900" b="1" spc="100" kern="0" dirty="0">
                           <a:solidFill>
-                            <a:srgbClr val="9AA1AD"/>
+                            <a:srgbClr val="AFA9BE"/>
                           </a:solidFill>
                           <a:latin typeface="Courier New" pitchFamily="34" charset="0"/>
                           <a:ea typeface="Courier New" pitchFamily="34" charset="-122"/>
@@ -6486,7 +6398,7 @@
                   <a:tcPr marL="73152" marR="73152" marT="73152" marB="73152" anchor="ctr">
                     <a:lnL w="6350" cap="flat" cmpd="sng" algn="ctr">
                       <a:solidFill>
-                        <a:srgbClr val="E6E7EC"/>
+                        <a:srgbClr val="2E2A3A"/>
                       </a:solidFill>
                       <a:prstDash val="solid"/>
                       <a:round/>
@@ -6495,7 +6407,7 @@
                     </a:lnL>
                     <a:lnR w="6350" cap="flat" cmpd="sng" algn="ctr">
                       <a:solidFill>
-                        <a:srgbClr val="E6E7EC"/>
+                        <a:srgbClr val="2E2A3A"/>
                       </a:solidFill>
                       <a:prstDash val="solid"/>
                       <a:round/>
@@ -6504,7 +6416,7 @@
                     </a:lnR>
                     <a:lnT w="6350" cap="flat" cmpd="sng" algn="ctr">
                       <a:solidFill>
-                        <a:srgbClr val="E6E7EC"/>
+                        <a:srgbClr val="2E2A3A"/>
                       </a:solidFill>
                       <a:prstDash val="solid"/>
                       <a:round/>
@@ -6513,7 +6425,7 @@
                     </a:lnT>
                     <a:lnB w="6350" cap="flat" cmpd="sng" algn="ctr">
                       <a:solidFill>
-                        <a:srgbClr val="E6E7EC"/>
+                        <a:srgbClr val="2E2A3A"/>
                       </a:solidFill>
                       <a:prstDash val="solid"/>
                       <a:round/>
@@ -6521,7 +6433,7 @@
                       <a:tailEnd type="none" w="med" len="med"/>
                     </a:lnB>
                     <a:solidFill>
-                      <a:srgbClr val="F6F5FB"/>
+                      <a:srgbClr val="1F1B2A"/>
                     </a:solidFill>
                   </a:tcPr>
                 </a:tc>
@@ -6538,7 +6450,7 @@
                       <a:r>
                         <a:rPr lang="en-US" sz="1150" b="1" dirty="0">
                           <a:solidFill>
-                            <a:srgbClr val="111318"/>
+                            <a:srgbClr val="FFFFFF"/>
                           </a:solidFill>
                           <a:latin typeface="Montserrat" pitchFamily="34" charset="0"/>
                           <a:ea typeface="Montserrat" pitchFamily="34" charset="-122"/>
@@ -6556,7 +6468,7 @@
                   <a:tcPr marL="73152" marR="73152" marT="73152" marB="73152" anchor="ctr">
                     <a:lnL w="6350" cap="flat" cmpd="sng" algn="ctr">
                       <a:solidFill>
-                        <a:srgbClr val="E6E7EC"/>
+                        <a:srgbClr val="2E2A3A"/>
                       </a:solidFill>
                       <a:prstDash val="solid"/>
                       <a:round/>
@@ -6565,7 +6477,7 @@
                     </a:lnL>
                     <a:lnR w="6350" cap="flat" cmpd="sng" algn="ctr">
                       <a:solidFill>
-                        <a:srgbClr val="E6E7EC"/>
+                        <a:srgbClr val="2E2A3A"/>
                       </a:solidFill>
                       <a:prstDash val="solid"/>
                       <a:round/>
@@ -6574,7 +6486,7 @@
                     </a:lnR>
                     <a:lnT w="6350" cap="flat" cmpd="sng" algn="ctr">
                       <a:solidFill>
-                        <a:srgbClr val="E6E7EC"/>
+                        <a:srgbClr val="2E2A3A"/>
                       </a:solidFill>
                       <a:prstDash val="solid"/>
                       <a:round/>
@@ -6583,7 +6495,7 @@
                     </a:lnT>
                     <a:lnB w="6350" cap="flat" cmpd="sng" algn="ctr">
                       <a:solidFill>
-                        <a:srgbClr val="E6E7EC"/>
+                        <a:srgbClr val="2E2A3A"/>
                       </a:solidFill>
                       <a:prstDash val="solid"/>
                       <a:round/>
@@ -6591,7 +6503,7 @@
                       <a:tailEnd type="none" w="med" len="med"/>
                     </a:lnB>
                     <a:solidFill>
-                      <a:srgbClr val="FFFFFF"/>
+                      <a:srgbClr val="17141F"/>
                     </a:solidFill>
                   </a:tcPr>
                 </a:tc>
@@ -6606,7 +6518,7 @@
                       <a:r>
                         <a:rPr lang="en-US" sz="1150" dirty="0">
                           <a:solidFill>
-                            <a:srgbClr val="111318"/>
+                            <a:srgbClr val="FFFFFF"/>
                           </a:solidFill>
                           <a:latin typeface="Montserrat" pitchFamily="34" charset="0"/>
                           <a:ea typeface="Montserrat" pitchFamily="34" charset="-122"/>
@@ -6624,7 +6536,7 @@
                   <a:tcPr marL="73152" marR="73152" marT="73152" marB="73152" anchor="ctr">
                     <a:lnL w="6350" cap="flat" cmpd="sng" algn="ctr">
                       <a:solidFill>
-                        <a:srgbClr val="E6E7EC"/>
+                        <a:srgbClr val="2E2A3A"/>
                       </a:solidFill>
                       <a:prstDash val="solid"/>
                       <a:round/>
@@ -6633,7 +6545,7 @@
                     </a:lnL>
                     <a:lnR w="6350" cap="flat" cmpd="sng" algn="ctr">
                       <a:solidFill>
-                        <a:srgbClr val="E6E7EC"/>
+                        <a:srgbClr val="2E2A3A"/>
                       </a:solidFill>
                       <a:prstDash val="solid"/>
                       <a:round/>
@@ -6642,7 +6554,7 @@
                     </a:lnR>
                     <a:lnT w="6350" cap="flat" cmpd="sng" algn="ctr">
                       <a:solidFill>
-                        <a:srgbClr val="E6E7EC"/>
+                        <a:srgbClr val="2E2A3A"/>
                       </a:solidFill>
                       <a:prstDash val="solid"/>
                       <a:round/>
@@ -6651,7 +6563,7 @@
                     </a:lnT>
                     <a:lnB w="6350" cap="flat" cmpd="sng" algn="ctr">
                       <a:solidFill>
-                        <a:srgbClr val="E6E7EC"/>
+                        <a:srgbClr val="2E2A3A"/>
                       </a:solidFill>
                       <a:prstDash val="solid"/>
                       <a:round/>
@@ -6659,7 +6571,7 @@
                       <a:tailEnd type="none" w="med" len="med"/>
                     </a:lnB>
                     <a:solidFill>
-                      <a:srgbClr val="FFFFFF"/>
+                      <a:srgbClr val="17141F"/>
                     </a:solidFill>
                   </a:tcPr>
                 </a:tc>
@@ -6676,7 +6588,7 @@
                       <a:r>
                         <a:rPr lang="en-US" sz="1150" b="1" dirty="0">
                           <a:solidFill>
-                            <a:srgbClr val="111318"/>
+                            <a:srgbClr val="FFFFFF"/>
                           </a:solidFill>
                           <a:latin typeface="Montserrat" pitchFamily="34" charset="0"/>
                           <a:ea typeface="Montserrat" pitchFamily="34" charset="-122"/>
@@ -6694,7 +6606,7 @@
                   <a:tcPr marL="73152" marR="73152" marT="73152" marB="73152" anchor="ctr">
                     <a:lnL w="6350" cap="flat" cmpd="sng" algn="ctr">
                       <a:solidFill>
-                        <a:srgbClr val="E6E7EC"/>
+                        <a:srgbClr val="2E2A3A"/>
                       </a:solidFill>
                       <a:prstDash val="solid"/>
                       <a:round/>
@@ -6703,7 +6615,7 @@
                     </a:lnL>
                     <a:lnR w="6350" cap="flat" cmpd="sng" algn="ctr">
                       <a:solidFill>
-                        <a:srgbClr val="E6E7EC"/>
+                        <a:srgbClr val="2E2A3A"/>
                       </a:solidFill>
                       <a:prstDash val="solid"/>
                       <a:round/>
@@ -6712,7 +6624,7 @@
                     </a:lnR>
                     <a:lnT w="6350" cap="flat" cmpd="sng" algn="ctr">
                       <a:solidFill>
-                        <a:srgbClr val="E6E7EC"/>
+                        <a:srgbClr val="2E2A3A"/>
                       </a:solidFill>
                       <a:prstDash val="solid"/>
                       <a:round/>
@@ -6721,7 +6633,7 @@
                     </a:lnT>
                     <a:lnB w="6350" cap="flat" cmpd="sng" algn="ctr">
                       <a:solidFill>
-                        <a:srgbClr val="E6E7EC"/>
+                        <a:srgbClr val="2E2A3A"/>
                       </a:solidFill>
                       <a:prstDash val="solid"/>
                       <a:round/>
@@ -6729,7 +6641,7 @@
                       <a:tailEnd type="none" w="med" len="med"/>
                     </a:lnB>
                     <a:solidFill>
-                      <a:srgbClr val="FFFFFF"/>
+                      <a:srgbClr val="17141F"/>
                     </a:solidFill>
                   </a:tcPr>
                 </a:tc>
@@ -6744,7 +6656,7 @@
                       <a:r>
                         <a:rPr lang="en-US" sz="1150" dirty="0">
                           <a:solidFill>
-                            <a:srgbClr val="111318"/>
+                            <a:srgbClr val="FFFFFF"/>
                           </a:solidFill>
                           <a:latin typeface="Montserrat" pitchFamily="34" charset="0"/>
                           <a:ea typeface="Montserrat" pitchFamily="34" charset="-122"/>
@@ -6762,7 +6674,7 @@
                   <a:tcPr marL="73152" marR="73152" marT="73152" marB="73152" anchor="ctr">
                     <a:lnL w="6350" cap="flat" cmpd="sng" algn="ctr">
                       <a:solidFill>
-                        <a:srgbClr val="E6E7EC"/>
+                        <a:srgbClr val="2E2A3A"/>
                       </a:solidFill>
                       <a:prstDash val="solid"/>
                       <a:round/>
@@ -6771,7 +6683,7 @@
                     </a:lnL>
                     <a:lnR w="6350" cap="flat" cmpd="sng" algn="ctr">
                       <a:solidFill>
-                        <a:srgbClr val="E6E7EC"/>
+                        <a:srgbClr val="2E2A3A"/>
                       </a:solidFill>
                       <a:prstDash val="solid"/>
                       <a:round/>
@@ -6780,7 +6692,7 @@
                     </a:lnR>
                     <a:lnT w="6350" cap="flat" cmpd="sng" algn="ctr">
                       <a:solidFill>
-                        <a:srgbClr val="E6E7EC"/>
+                        <a:srgbClr val="2E2A3A"/>
                       </a:solidFill>
                       <a:prstDash val="solid"/>
                       <a:round/>
@@ -6789,7 +6701,7 @@
                     </a:lnT>
                     <a:lnB w="6350" cap="flat" cmpd="sng" algn="ctr">
                       <a:solidFill>
-                        <a:srgbClr val="E6E7EC"/>
+                        <a:srgbClr val="2E2A3A"/>
                       </a:solidFill>
                       <a:prstDash val="solid"/>
                       <a:round/>
@@ -6797,7 +6709,7 @@
                       <a:tailEnd type="none" w="med" len="med"/>
                     </a:lnB>
                     <a:solidFill>
-                      <a:srgbClr val="FFFFFF"/>
+                      <a:srgbClr val="17141F"/>
                     </a:solidFill>
                   </a:tcPr>
                 </a:tc>
@@ -6814,7 +6726,7 @@
                       <a:r>
                         <a:rPr lang="en-US" sz="1150" b="1" dirty="0">
                           <a:solidFill>
-                            <a:srgbClr val="111318"/>
+                            <a:srgbClr val="FFFFFF"/>
                           </a:solidFill>
                           <a:latin typeface="Montserrat" pitchFamily="34" charset="0"/>
                           <a:ea typeface="Montserrat" pitchFamily="34" charset="-122"/>
@@ -6832,7 +6744,7 @@
                   <a:tcPr marL="73152" marR="73152" marT="73152" marB="73152" anchor="ctr">
                     <a:lnL w="6350" cap="flat" cmpd="sng" algn="ctr">
                       <a:solidFill>
-                        <a:srgbClr val="E6E7EC"/>
+                        <a:srgbClr val="2E2A3A"/>
                       </a:solidFill>
                       <a:prstDash val="solid"/>
                       <a:round/>
@@ -6841,7 +6753,7 @@
                     </a:lnL>
                     <a:lnR w="6350" cap="flat" cmpd="sng" algn="ctr">
                       <a:solidFill>
-                        <a:srgbClr val="E6E7EC"/>
+                        <a:srgbClr val="2E2A3A"/>
                       </a:solidFill>
                       <a:prstDash val="solid"/>
                       <a:round/>
@@ -6850,7 +6762,7 @@
                     </a:lnR>
                     <a:lnT w="6350" cap="flat" cmpd="sng" algn="ctr">
                       <a:solidFill>
-                        <a:srgbClr val="E6E7EC"/>
+                        <a:srgbClr val="2E2A3A"/>
                       </a:solidFill>
                       <a:prstDash val="solid"/>
                       <a:round/>
@@ -6859,7 +6771,7 @@
                     </a:lnT>
                     <a:lnB w="6350" cap="flat" cmpd="sng" algn="ctr">
                       <a:solidFill>
-                        <a:srgbClr val="E6E7EC"/>
+                        <a:srgbClr val="2E2A3A"/>
                       </a:solidFill>
                       <a:prstDash val="solid"/>
                       <a:round/>
@@ -6867,7 +6779,7 @@
                       <a:tailEnd type="none" w="med" len="med"/>
                     </a:lnB>
                     <a:solidFill>
-                      <a:srgbClr val="FFFFFF"/>
+                      <a:srgbClr val="17141F"/>
                     </a:solidFill>
                   </a:tcPr>
                 </a:tc>
@@ -6882,7 +6794,7 @@
                       <a:r>
                         <a:rPr lang="en-US" sz="1150" dirty="0">
                           <a:solidFill>
-                            <a:srgbClr val="111318"/>
+                            <a:srgbClr val="FFFFFF"/>
                           </a:solidFill>
                           <a:latin typeface="Montserrat" pitchFamily="34" charset="0"/>
                           <a:ea typeface="Montserrat" pitchFamily="34" charset="-122"/>
@@ -6900,7 +6812,7 @@
                   <a:tcPr marL="73152" marR="73152" marT="73152" marB="73152" anchor="ctr">
                     <a:lnL w="6350" cap="flat" cmpd="sng" algn="ctr">
                       <a:solidFill>
-                        <a:srgbClr val="E6E7EC"/>
+                        <a:srgbClr val="2E2A3A"/>
                       </a:solidFill>
                       <a:prstDash val="solid"/>
                       <a:round/>
@@ -6909,7 +6821,7 @@
                     </a:lnL>
                     <a:lnR w="6350" cap="flat" cmpd="sng" algn="ctr">
                       <a:solidFill>
-                        <a:srgbClr val="E6E7EC"/>
+                        <a:srgbClr val="2E2A3A"/>
                       </a:solidFill>
                       <a:prstDash val="solid"/>
                       <a:round/>
@@ -6918,7 +6830,7 @@
                     </a:lnR>
                     <a:lnT w="6350" cap="flat" cmpd="sng" algn="ctr">
                       <a:solidFill>
-                        <a:srgbClr val="E6E7EC"/>
+                        <a:srgbClr val="2E2A3A"/>
                       </a:solidFill>
                       <a:prstDash val="solid"/>
                       <a:round/>
@@ -6927,7 +6839,7 @@
                     </a:lnT>
                     <a:lnB w="6350" cap="flat" cmpd="sng" algn="ctr">
                       <a:solidFill>
-                        <a:srgbClr val="E6E7EC"/>
+                        <a:srgbClr val="2E2A3A"/>
                       </a:solidFill>
                       <a:prstDash val="solid"/>
                       <a:round/>
@@ -6935,7 +6847,7 @@
                       <a:tailEnd type="none" w="med" len="med"/>
                     </a:lnB>
                     <a:solidFill>
-                      <a:srgbClr val="FFFFFF"/>
+                      <a:srgbClr val="17141F"/>
                     </a:solidFill>
                   </a:tcPr>
                 </a:tc>
@@ -6952,7 +6864,7 @@
                       <a:r>
                         <a:rPr lang="en-US" sz="1150" b="1" dirty="0">
                           <a:solidFill>
-                            <a:srgbClr val="111318"/>
+                            <a:srgbClr val="FFFFFF"/>
                           </a:solidFill>
                           <a:latin typeface="Montserrat" pitchFamily="34" charset="0"/>
                           <a:ea typeface="Montserrat" pitchFamily="34" charset="-122"/>
@@ -6970,7 +6882,7 @@
                   <a:tcPr marL="73152" marR="73152" marT="73152" marB="73152" anchor="ctr">
                     <a:lnL w="6350" cap="flat" cmpd="sng" algn="ctr">
                       <a:solidFill>
-                        <a:srgbClr val="E6E7EC"/>
+                        <a:srgbClr val="2E2A3A"/>
                       </a:solidFill>
                       <a:prstDash val="solid"/>
                       <a:round/>
@@ -6979,7 +6891,7 @@
                     </a:lnL>
                     <a:lnR w="6350" cap="flat" cmpd="sng" algn="ctr">
                       <a:solidFill>
-                        <a:srgbClr val="E6E7EC"/>
+                        <a:srgbClr val="2E2A3A"/>
                       </a:solidFill>
                       <a:prstDash val="solid"/>
                       <a:round/>
@@ -6988,7 +6900,7 @@
                     </a:lnR>
                     <a:lnT w="6350" cap="flat" cmpd="sng" algn="ctr">
                       <a:solidFill>
-                        <a:srgbClr val="E6E7EC"/>
+                        <a:srgbClr val="2E2A3A"/>
                       </a:solidFill>
                       <a:prstDash val="solid"/>
                       <a:round/>
@@ -6997,7 +6909,7 @@
                     </a:lnT>
                     <a:lnB w="6350" cap="flat" cmpd="sng" algn="ctr">
                       <a:solidFill>
-                        <a:srgbClr val="E6E7EC"/>
+                        <a:srgbClr val="2E2A3A"/>
                       </a:solidFill>
                       <a:prstDash val="solid"/>
                       <a:round/>
@@ -7005,7 +6917,7 @@
                       <a:tailEnd type="none" w="med" len="med"/>
                     </a:lnB>
                     <a:solidFill>
-                      <a:srgbClr val="FFFFFF"/>
+                      <a:srgbClr val="17141F"/>
                     </a:solidFill>
                   </a:tcPr>
                 </a:tc>
@@ -7020,7 +6932,7 @@
                       <a:r>
                         <a:rPr lang="en-US" sz="1150" dirty="0">
                           <a:solidFill>
-                            <a:srgbClr val="111318"/>
+                            <a:srgbClr val="FFFFFF"/>
                           </a:solidFill>
                           <a:latin typeface="Montserrat" pitchFamily="34" charset="0"/>
                           <a:ea typeface="Montserrat" pitchFamily="34" charset="-122"/>
@@ -7038,7 +6950,7 @@
                   <a:tcPr marL="73152" marR="73152" marT="73152" marB="73152" anchor="ctr">
                     <a:lnL w="6350" cap="flat" cmpd="sng" algn="ctr">
                       <a:solidFill>
-                        <a:srgbClr val="E6E7EC"/>
+                        <a:srgbClr val="2E2A3A"/>
                       </a:solidFill>
                       <a:prstDash val="solid"/>
                       <a:round/>
@@ -7047,7 +6959,7 @@
                     </a:lnL>
                     <a:lnR w="6350" cap="flat" cmpd="sng" algn="ctr">
                       <a:solidFill>
-                        <a:srgbClr val="E6E7EC"/>
+                        <a:srgbClr val="2E2A3A"/>
                       </a:solidFill>
                       <a:prstDash val="solid"/>
                       <a:round/>
@@ -7056,7 +6968,7 @@
                     </a:lnR>
                     <a:lnT w="6350" cap="flat" cmpd="sng" algn="ctr">
                       <a:solidFill>
-                        <a:srgbClr val="E6E7EC"/>
+                        <a:srgbClr val="2E2A3A"/>
                       </a:solidFill>
                       <a:prstDash val="solid"/>
                       <a:round/>
@@ -7065,7 +6977,7 @@
                     </a:lnT>
                     <a:lnB w="6350" cap="flat" cmpd="sng" algn="ctr">
                       <a:solidFill>
-                        <a:srgbClr val="E6E7EC"/>
+                        <a:srgbClr val="2E2A3A"/>
                       </a:solidFill>
                       <a:prstDash val="solid"/>
                       <a:round/>
@@ -7073,7 +6985,7 @@
                       <a:tailEnd type="none" w="med" len="med"/>
                     </a:lnB>
                     <a:solidFill>
-                      <a:srgbClr val="FFFFFF"/>
+                      <a:srgbClr val="17141F"/>
                     </a:solidFill>
                   </a:tcPr>
                 </a:tc>
@@ -7090,7 +7002,7 @@
                       <a:r>
                         <a:rPr lang="en-US" sz="1150" b="1" dirty="0">
                           <a:solidFill>
-                            <a:srgbClr val="C62A2A"/>
+                            <a:srgbClr val="FF7B7B"/>
                           </a:solidFill>
                           <a:latin typeface="Montserrat" pitchFamily="34" charset="0"/>
                           <a:ea typeface="Montserrat" pitchFamily="34" charset="-122"/>
@@ -7108,7 +7020,7 @@
                   <a:tcPr marL="73152" marR="73152" marT="73152" marB="73152" anchor="ctr">
                     <a:lnL w="6350" cap="flat" cmpd="sng" algn="ctr">
                       <a:solidFill>
-                        <a:srgbClr val="E6E7EC"/>
+                        <a:srgbClr val="2E2A3A"/>
                       </a:solidFill>
                       <a:prstDash val="solid"/>
                       <a:round/>
@@ -7117,7 +7029,7 @@
                     </a:lnL>
                     <a:lnR w="6350" cap="flat" cmpd="sng" algn="ctr">
                       <a:solidFill>
-                        <a:srgbClr val="E6E7EC"/>
+                        <a:srgbClr val="2E2A3A"/>
                       </a:solidFill>
                       <a:prstDash val="solid"/>
                       <a:round/>
@@ -7126,7 +7038,7 @@
                     </a:lnR>
                     <a:lnT w="6350" cap="flat" cmpd="sng" algn="ctr">
                       <a:solidFill>
-                        <a:srgbClr val="E6E7EC"/>
+                        <a:srgbClr val="2E2A3A"/>
                       </a:solidFill>
                       <a:prstDash val="solid"/>
                       <a:round/>
@@ -7135,7 +7047,7 @@
                     </a:lnT>
                     <a:lnB w="6350" cap="flat" cmpd="sng" algn="ctr">
                       <a:solidFill>
-                        <a:srgbClr val="E6E7EC"/>
+                        <a:srgbClr val="2E2A3A"/>
                       </a:solidFill>
                       <a:prstDash val="solid"/>
                       <a:round/>
@@ -7143,7 +7055,7 @@
                       <a:tailEnd type="none" w="med" len="med"/>
                     </a:lnB>
                     <a:solidFill>
-                      <a:srgbClr val="FBE9E9"/>
+                      <a:srgbClr val="2E1418"/>
                     </a:solidFill>
                   </a:tcPr>
                 </a:tc>
@@ -7158,7 +7070,7 @@
                       <a:r>
                         <a:rPr lang="en-US" sz="1150" dirty="0">
                           <a:solidFill>
-                            <a:srgbClr val="111318"/>
+                            <a:srgbClr val="FFFFFF"/>
                           </a:solidFill>
                           <a:latin typeface="Montserrat" pitchFamily="34" charset="0"/>
                           <a:ea typeface="Montserrat" pitchFamily="34" charset="-122"/>
@@ -7176,7 +7088,7 @@
                   <a:tcPr marL="73152" marR="73152" marT="73152" marB="73152" anchor="ctr">
                     <a:lnL w="6350" cap="flat" cmpd="sng" algn="ctr">
                       <a:solidFill>
-                        <a:srgbClr val="E6E7EC"/>
+                        <a:srgbClr val="2E2A3A"/>
                       </a:solidFill>
                       <a:prstDash val="solid"/>
                       <a:round/>
@@ -7185,7 +7097,7 @@
                     </a:lnL>
                     <a:lnR w="6350" cap="flat" cmpd="sng" algn="ctr">
                       <a:solidFill>
-                        <a:srgbClr val="E6E7EC"/>
+                        <a:srgbClr val="2E2A3A"/>
                       </a:solidFill>
                       <a:prstDash val="solid"/>
                       <a:round/>
@@ -7194,7 +7106,7 @@
                     </a:lnR>
                     <a:lnT w="6350" cap="flat" cmpd="sng" algn="ctr">
                       <a:solidFill>
-                        <a:srgbClr val="E6E7EC"/>
+                        <a:srgbClr val="2E2A3A"/>
                       </a:solidFill>
                       <a:prstDash val="solid"/>
                       <a:round/>
@@ -7203,7 +7115,7 @@
                     </a:lnT>
                     <a:lnB w="6350" cap="flat" cmpd="sng" algn="ctr">
                       <a:solidFill>
-                        <a:srgbClr val="E6E7EC"/>
+                        <a:srgbClr val="2E2A3A"/>
                       </a:solidFill>
                       <a:prstDash val="solid"/>
                       <a:round/>
@@ -7211,7 +7123,7 @@
                       <a:tailEnd type="none" w="med" len="med"/>
                     </a:lnB>
                     <a:solidFill>
-                      <a:srgbClr val="FBE9E9"/>
+                      <a:srgbClr val="2E1418"/>
                     </a:solidFill>
                   </a:tcPr>
                 </a:tc>
@@ -7222,7 +7134,7 @@
       </p:graphicFrame>
       <p:sp>
         <p:nvSpPr>
-          <p:cNvPr id="10" name="Shape 6"/>
+          <p:cNvPr id="9" name="Shape 5"/>
           <p:cNvSpPr/>
           <p:nvPr/>
         </p:nvSpPr>
@@ -7237,14 +7149,14 @@
             </a:avLst>
           </a:prstGeom>
           <a:solidFill>
-            <a:srgbClr val="E9F4EF"/>
+            <a:srgbClr val="102A20"/>
           </a:solidFill>
           <a:ln/>
         </p:spPr>
       </p:sp>
       <p:sp>
         <p:nvSpPr>
-          <p:cNvPr id="11" name="Text 7"/>
+          <p:cNvPr id="10" name="Text 6"/>
           <p:cNvSpPr/>
           <p:nvPr/>
         </p:nvSpPr>
@@ -7269,7 +7181,7 @@
             <a:r>
               <a:rPr lang="en-US" sz="950" b="1" spc="150" kern="0" dirty="0">
                 <a:solidFill>
-                  <a:srgbClr val="1B8A5A"/>
+                  <a:srgbClr val="5FD6A0"/>
                 </a:solidFill>
                 <a:latin typeface="Courier New" pitchFamily="34" charset="0"/>
                 <a:ea typeface="Courier New" pitchFamily="34" charset="-122"/>
@@ -7283,7 +7195,7 @@
       </p:sp>
       <p:sp>
         <p:nvSpPr>
-          <p:cNvPr id="12" name="Text 8"/>
+          <p:cNvPr id="11" name="Text 7"/>
           <p:cNvSpPr/>
           <p:nvPr/>
         </p:nvSpPr>
@@ -7311,7 +7223,7 @@
             <a:r>
               <a:rPr lang="en-US" sz="1300" dirty="0">
                 <a:solidFill>
-                  <a:srgbClr val="111318"/>
+                  <a:srgbClr val="FFFFFF"/>
                 </a:solidFill>
                 <a:latin typeface="Montserrat" pitchFamily="34" charset="0"/>
                 <a:ea typeface="Montserrat" pitchFamily="34" charset="-122"/>
@@ -7353,7 +7265,7 @@
             <a:lvl1pPr>
               <a:defRPr sz="850">
                 <a:solidFill>
-                  <a:srgbClr val="9AA1AD"/>
+                  <a:srgbClr val="8A82A0"/>
                 </a:solidFill>
                 <a:latin typeface="Courier New"/>
                 <a:ea typeface="Courier New"/>
@@ -7398,29 +7310,7 @@
       </p:grpSpPr>
       <p:sp>
         <p:nvSpPr>
-          <p:cNvPr id="2" name="Shape 0"/>
-          <p:cNvSpPr/>
-          <p:nvPr/>
-        </p:nvSpPr>
-        <p:spPr>
-          <a:xfrm>
-            <a:off x="231343" y="194767"/>
-            <a:ext cx="11716207" cy="6473952"/>
-          </a:xfrm>
-          <a:prstGeom prst="roundRect">
-            <a:avLst>
-              <a:gd name="adj" fmla="val 3107"/>
-            </a:avLst>
-          </a:prstGeom>
-          <a:solidFill>
-            <a:srgbClr val="FFFFFF"/>
-          </a:solidFill>
-          <a:ln/>
-        </p:spPr>
-      </p:sp>
-      <p:sp>
-        <p:nvSpPr>
-          <p:cNvPr id="3" name="Text 1"/>
+          <p:cNvPr id="2" name="Text 0"/>
           <p:cNvSpPr/>
           <p:nvPr/>
         </p:nvSpPr>
@@ -7445,7 +7335,7 @@
             <a:r>
               <a:rPr lang="en-US" sz="2600" b="1" dirty="0">
                 <a:solidFill>
-                  <a:srgbClr val="5A05F4"/>
+                  <a:srgbClr val="C9A6FF"/>
                 </a:solidFill>
                 <a:latin typeface="Courier New" pitchFamily="34" charset="0"/>
                 <a:ea typeface="Courier New" pitchFamily="34" charset="-122"/>
@@ -7459,7 +7349,7 @@
       </p:sp>
       <p:sp>
         <p:nvSpPr>
-          <p:cNvPr id="4" name="Text 2"/>
+          <p:cNvPr id="3" name="Text 1"/>
           <p:cNvSpPr/>
           <p:nvPr/>
         </p:nvSpPr>
@@ -7484,7 +7374,7 @@
             <a:r>
               <a:rPr lang="en-US" sz="2400" b="1" dirty="0">
                 <a:solidFill>
-                  <a:srgbClr val="111318"/>
+                  <a:srgbClr val="FFFFFF"/>
                 </a:solidFill>
                 <a:latin typeface="Montserrat" pitchFamily="34" charset="0"/>
                 <a:ea typeface="Montserrat" pitchFamily="34" charset="-122"/>
@@ -7498,7 +7388,7 @@
       </p:sp>
       <p:sp>
         <p:nvSpPr>
-          <p:cNvPr id="5" name="Shape 3"/>
+          <p:cNvPr id="4" name="Shape 2"/>
           <p:cNvSpPr/>
           <p:nvPr/>
         </p:nvSpPr>
@@ -7513,14 +7403,14 @@
             </a:avLst>
           </a:prstGeom>
           <a:solidFill>
-            <a:srgbClr val="5A05F4"/>
+            <a:srgbClr val="C9A6FF"/>
           </a:solidFill>
           <a:ln/>
         </p:spPr>
       </p:sp>
       <p:sp>
         <p:nvSpPr>
-          <p:cNvPr id="6" name="Text 4"/>
+          <p:cNvPr id="5" name="Text 3"/>
           <p:cNvSpPr/>
           <p:nvPr/>
         </p:nvSpPr>
@@ -7545,7 +7435,7 @@
             <a:r>
               <a:rPr lang="en-US" sz="900" b="1" spc="100" kern="0" dirty="0">
                 <a:solidFill>
-                  <a:srgbClr val="FFFFFF"/>
+                  <a:srgbClr val="1C1140"/>
                 </a:solidFill>
                 <a:latin typeface="Courier New" pitchFamily="34" charset="0"/>
                 <a:ea typeface="Courier New" pitchFamily="34" charset="-122"/>
@@ -7559,7 +7449,7 @@
       </p:sp>
       <p:sp>
         <p:nvSpPr>
-          <p:cNvPr id="7" name="Shape 5"/>
+          <p:cNvPr id="6" name="Shape 4"/>
           <p:cNvSpPr/>
           <p:nvPr/>
         </p:nvSpPr>
@@ -7574,14 +7464,14 @@
             </a:avLst>
           </a:prstGeom>
           <a:solidFill>
-            <a:srgbClr val="F8F0E2"/>
+            <a:srgbClr val="2A2010"/>
           </a:solidFill>
           <a:ln/>
         </p:spPr>
       </p:sp>
       <p:sp>
         <p:nvSpPr>
-          <p:cNvPr id="8" name="Text 6"/>
+          <p:cNvPr id="7" name="Text 5"/>
           <p:cNvSpPr/>
           <p:nvPr/>
         </p:nvSpPr>
@@ -7606,7 +7496,7 @@
             <a:r>
               <a:rPr lang="en-US" sz="900" b="1" spc="100" kern="0" dirty="0">
                 <a:solidFill>
-                  <a:srgbClr val="9A5B12"/>
+                  <a:srgbClr val="E8A857"/>
                 </a:solidFill>
                 <a:latin typeface="Courier New" pitchFamily="34" charset="0"/>
                 <a:ea typeface="Courier New" pitchFamily="34" charset="-122"/>
@@ -7620,7 +7510,7 @@
       </p:sp>
       <p:pic>
         <p:nvPicPr>
-          <p:cNvPr id="9" name="Image 0" descr="preencoded.png">    </p:cNvPr>
+          <p:cNvPr id="8" name="Image 0" descr="preencoded.png">    </p:cNvPr>
           <p:cNvPicPr>
             <a:picLocks noChangeAspect="1"/>
           </p:cNvPicPr>
@@ -7644,7 +7534,7 @@
       </p:pic>
       <p:sp>
         <p:nvSpPr>
-          <p:cNvPr id="10" name="Shape 7"/>
+          <p:cNvPr id="9" name="Shape 6"/>
           <p:cNvSpPr/>
           <p:nvPr/>
         </p:nvSpPr>
@@ -7659,14 +7549,14 @@
             </a:avLst>
           </a:prstGeom>
           <a:solidFill>
-            <a:srgbClr val="E9F4EF"/>
+            <a:srgbClr val="102A20"/>
           </a:solidFill>
           <a:ln/>
         </p:spPr>
       </p:sp>
       <p:sp>
         <p:nvSpPr>
-          <p:cNvPr id="11" name="Text 8"/>
+          <p:cNvPr id="10" name="Text 7"/>
           <p:cNvSpPr/>
           <p:nvPr/>
         </p:nvSpPr>
@@ -7691,7 +7581,7 @@
             <a:r>
               <a:rPr lang="en-US" sz="1150" b="1" dirty="0">
                 <a:solidFill>
-                  <a:srgbClr val="1B8A5A"/>
+                  <a:srgbClr val="5FD6A0"/>
                 </a:solidFill>
                 <a:latin typeface="Courier New" pitchFamily="34" charset="0"/>
                 <a:ea typeface="Courier New" pitchFamily="34" charset="-122"/>
@@ -7705,7 +7595,7 @@
       </p:sp>
       <p:sp>
         <p:nvSpPr>
-          <p:cNvPr id="12" name="Shape 9"/>
+          <p:cNvPr id="11" name="Shape 8"/>
           <p:cNvSpPr/>
           <p:nvPr/>
         </p:nvSpPr>
@@ -7720,7 +7610,7 @@
           <a:noFill/>
           <a:ln w="15875">
             <a:solidFill>
-              <a:srgbClr val="C9B8FB"/>
+              <a:srgbClr val="9B7BE8"/>
             </a:solidFill>
             <a:prstDash val="solid"/>
           </a:ln>
@@ -7728,7 +7618,7 @@
       </p:sp>
       <p:sp>
         <p:nvSpPr>
-          <p:cNvPr id="13" name="Shape 10"/>
+          <p:cNvPr id="12" name="Shape 9"/>
           <p:cNvSpPr/>
           <p:nvPr/>
         </p:nvSpPr>
@@ -7741,14 +7631,14 @@
             <a:avLst/>
           </a:prstGeom>
           <a:solidFill>
-            <a:srgbClr val="C9B8FB"/>
+            <a:srgbClr val="9B7BE8"/>
           </a:solidFill>
           <a:ln/>
         </p:spPr>
       </p:sp>
       <p:sp>
         <p:nvSpPr>
-          <p:cNvPr id="14" name="Shape 11"/>
+          <p:cNvPr id="13" name="Shape 10"/>
           <p:cNvSpPr/>
           <p:nvPr/>
         </p:nvSpPr>
@@ -7763,14 +7653,14 @@
             </a:avLst>
           </a:prstGeom>
           <a:solidFill>
-            <a:srgbClr val="F8F0E2"/>
+            <a:srgbClr val="2A2010"/>
           </a:solidFill>
           <a:ln/>
         </p:spPr>
       </p:sp>
       <p:sp>
         <p:nvSpPr>
-          <p:cNvPr id="15" name="Text 12"/>
+          <p:cNvPr id="14" name="Text 11"/>
           <p:cNvSpPr/>
           <p:nvPr/>
         </p:nvSpPr>
@@ -7795,7 +7685,7 @@
             <a:r>
               <a:rPr lang="en-US" sz="1150" b="1" dirty="0">
                 <a:solidFill>
-                  <a:srgbClr val="9A5B12"/>
+                  <a:srgbClr val="E8A857"/>
                 </a:solidFill>
                 <a:latin typeface="Courier New" pitchFamily="34" charset="0"/>
                 <a:ea typeface="Courier New" pitchFamily="34" charset="-122"/>
@@ -7809,7 +7699,7 @@
       </p:sp>
       <p:sp>
         <p:nvSpPr>
-          <p:cNvPr id="16" name="Shape 13"/>
+          <p:cNvPr id="15" name="Shape 12"/>
           <p:cNvSpPr/>
           <p:nvPr/>
         </p:nvSpPr>
@@ -7824,7 +7714,7 @@
           <a:noFill/>
           <a:ln w="15875">
             <a:solidFill>
-              <a:srgbClr val="C9B8FB"/>
+              <a:srgbClr val="9B7BE8"/>
             </a:solidFill>
             <a:prstDash val="solid"/>
           </a:ln>
@@ -7832,7 +7722,7 @@
       </p:sp>
       <p:sp>
         <p:nvSpPr>
-          <p:cNvPr id="17" name="Shape 14"/>
+          <p:cNvPr id="16" name="Shape 13"/>
           <p:cNvSpPr/>
           <p:nvPr/>
         </p:nvSpPr>
@@ -7845,14 +7735,14 @@
             <a:avLst/>
           </a:prstGeom>
           <a:solidFill>
-            <a:srgbClr val="C9B8FB"/>
+            <a:srgbClr val="9B7BE8"/>
           </a:solidFill>
           <a:ln/>
         </p:spPr>
       </p:sp>
       <p:sp>
         <p:nvSpPr>
-          <p:cNvPr id="18" name="Shape 15"/>
+          <p:cNvPr id="17" name="Shape 14"/>
           <p:cNvSpPr/>
           <p:nvPr/>
         </p:nvSpPr>
@@ -7867,14 +7757,14 @@
             </a:avLst>
           </a:prstGeom>
           <a:solidFill>
-            <a:srgbClr val="EFEAFE"/>
+            <a:srgbClr val="1C1140"/>
           </a:solidFill>
           <a:ln/>
         </p:spPr>
       </p:sp>
       <p:sp>
         <p:nvSpPr>
-          <p:cNvPr id="19" name="Text 16"/>
+          <p:cNvPr id="18" name="Text 15"/>
           <p:cNvSpPr/>
           <p:nvPr/>
         </p:nvSpPr>
@@ -7899,7 +7789,7 @@
             <a:r>
               <a:rPr lang="en-US" sz="1150" b="1" dirty="0">
                 <a:solidFill>
-                  <a:srgbClr val="5A05F4"/>
+                  <a:srgbClr val="C9A6FF"/>
                 </a:solidFill>
                 <a:latin typeface="Courier New" pitchFamily="34" charset="0"/>
                 <a:ea typeface="Courier New" pitchFamily="34" charset="-122"/>
@@ -7913,7 +7803,7 @@
       </p:sp>
       <p:sp>
         <p:nvSpPr>
-          <p:cNvPr id="20" name="Shape 17"/>
+          <p:cNvPr id="19" name="Shape 16"/>
           <p:cNvSpPr/>
           <p:nvPr/>
         </p:nvSpPr>
@@ -7928,11 +7818,11 @@
             </a:avLst>
           </a:prstGeom>
           <a:solidFill>
-            <a:srgbClr val="FFFFFF"/>
+            <a:srgbClr val="17141F"/>
           </a:solidFill>
           <a:ln w="12700">
             <a:solidFill>
-              <a:srgbClr val="E6E7EC"/>
+              <a:srgbClr val="2E2A3A"/>
             </a:solidFill>
             <a:prstDash val="solid"/>
           </a:ln>
@@ -7940,7 +7830,7 @@
       </p:sp>
       <p:sp>
         <p:nvSpPr>
-          <p:cNvPr id="21" name="Text 18"/>
+          <p:cNvPr id="20" name="Text 17"/>
           <p:cNvSpPr/>
           <p:nvPr/>
         </p:nvSpPr>
@@ -7965,7 +7855,7 @@
             <a:r>
               <a:rPr lang="en-US" sz="1450" b="1" dirty="0">
                 <a:solidFill>
-                  <a:srgbClr val="111318"/>
+                  <a:srgbClr val="FFFFFF"/>
                 </a:solidFill>
                 <a:latin typeface="Montserrat" pitchFamily="34" charset="0"/>
                 <a:ea typeface="Montserrat" pitchFamily="34" charset="-122"/>
@@ -7979,7 +7869,7 @@
       </p:sp>
       <p:sp>
         <p:nvSpPr>
-          <p:cNvPr id="22" name="Text 19"/>
+          <p:cNvPr id="21" name="Text 18"/>
           <p:cNvSpPr/>
           <p:nvPr/>
         </p:nvSpPr>
@@ -8007,7 +7897,7 @@
             <a:r>
               <a:rPr lang="en-US" sz="1200" dirty="0">
                 <a:solidFill>
-                  <a:srgbClr val="555B66"/>
+                  <a:srgbClr val="AFA9BE"/>
                 </a:solidFill>
                 <a:latin typeface="Montserrat" pitchFamily="34" charset="0"/>
                 <a:ea typeface="Montserrat" pitchFamily="34" charset="-122"/>
@@ -8021,7 +7911,7 @@
       </p:sp>
       <p:sp>
         <p:nvSpPr>
-          <p:cNvPr id="23" name="Shape 20"/>
+          <p:cNvPr id="22" name="Shape 19"/>
           <p:cNvSpPr/>
           <p:nvPr/>
         </p:nvSpPr>
@@ -8036,14 +7926,14 @@
             </a:avLst>
           </a:prstGeom>
           <a:solidFill>
-            <a:srgbClr val="EFEAFE"/>
+            <a:srgbClr val="1C1140"/>
           </a:solidFill>
           <a:ln/>
         </p:spPr>
       </p:sp>
       <p:sp>
         <p:nvSpPr>
-          <p:cNvPr id="24" name="Text 21"/>
+          <p:cNvPr id="23" name="Text 20"/>
           <p:cNvSpPr/>
           <p:nvPr/>
         </p:nvSpPr>
@@ -8068,7 +7958,7 @@
             <a:r>
               <a:rPr lang="en-US" sz="1450" b="1" dirty="0">
                 <a:solidFill>
-                  <a:srgbClr val="5A05F4"/>
+                  <a:srgbClr val="C9A6FF"/>
                 </a:solidFill>
                 <a:latin typeface="Montserrat" pitchFamily="34" charset="0"/>
                 <a:ea typeface="Montserrat" pitchFamily="34" charset="-122"/>
@@ -8082,7 +7972,7 @@
       </p:sp>
       <p:sp>
         <p:nvSpPr>
-          <p:cNvPr id="25" name="Text 22"/>
+          <p:cNvPr id="24" name="Text 21"/>
           <p:cNvSpPr/>
           <p:nvPr/>
         </p:nvSpPr>
@@ -8110,7 +8000,7 @@
             <a:r>
               <a:rPr lang="en-US" sz="1200" dirty="0">
                 <a:solidFill>
-                  <a:srgbClr val="111318"/>
+                  <a:srgbClr val="FFFFFF"/>
                 </a:solidFill>
                 <a:latin typeface="Montserrat" pitchFamily="34" charset="0"/>
                 <a:ea typeface="Montserrat" pitchFamily="34" charset="-122"/>
@@ -8124,7 +8014,7 @@
       </p:sp>
       <p:sp>
         <p:nvSpPr>
-          <p:cNvPr id="26" name="Shape 23"/>
+          <p:cNvPr id="25" name="Shape 22"/>
           <p:cNvSpPr/>
           <p:nvPr/>
         </p:nvSpPr>
@@ -8139,14 +8029,14 @@
             </a:avLst>
           </a:prstGeom>
           <a:solidFill>
-            <a:srgbClr val="F8F0E2"/>
+            <a:srgbClr val="2A2010"/>
           </a:solidFill>
           <a:ln/>
         </p:spPr>
       </p:sp>
       <p:sp>
         <p:nvSpPr>
-          <p:cNvPr id="27" name="Text 24"/>
+          <p:cNvPr id="26" name="Text 23"/>
           <p:cNvSpPr/>
           <p:nvPr/>
         </p:nvSpPr>
@@ -8174,7 +8064,7 @@
             <a:r>
               <a:rPr lang="en-US" sz="1300" dirty="0">
                 <a:solidFill>
-                  <a:srgbClr val="111318"/>
+                  <a:srgbClr val="FFFFFF"/>
                 </a:solidFill>
                 <a:latin typeface="Montserrat" pitchFamily="34" charset="0"/>
                 <a:ea typeface="Montserrat" pitchFamily="34" charset="-122"/>
@@ -8216,7 +8106,7 @@
             <a:lvl1pPr>
               <a:defRPr sz="850">
                 <a:solidFill>
-                  <a:srgbClr val="9AA1AD"/>
+                  <a:srgbClr val="8A82A0"/>
                 </a:solidFill>
                 <a:latin typeface="Courier New"/>
                 <a:ea typeface="Courier New"/>
@@ -8261,29 +8151,7 @@
       </p:grpSpPr>
       <p:sp>
         <p:nvSpPr>
-          <p:cNvPr id="2" name="Shape 0"/>
-          <p:cNvSpPr/>
-          <p:nvPr/>
-        </p:nvSpPr>
-        <p:spPr>
-          <a:xfrm>
-            <a:off x="231343" y="194767"/>
-            <a:ext cx="11716207" cy="6473952"/>
-          </a:xfrm>
-          <a:prstGeom prst="roundRect">
-            <a:avLst>
-              <a:gd name="adj" fmla="val 3107"/>
-            </a:avLst>
-          </a:prstGeom>
-          <a:solidFill>
-            <a:srgbClr val="FFFFFF"/>
-          </a:solidFill>
-          <a:ln/>
-        </p:spPr>
-      </p:sp>
-      <p:sp>
-        <p:nvSpPr>
-          <p:cNvPr id="3" name="Text 1"/>
+          <p:cNvPr id="2" name="Text 0"/>
           <p:cNvSpPr/>
           <p:nvPr/>
         </p:nvSpPr>
@@ -8308,7 +8176,7 @@
             <a:r>
               <a:rPr lang="en-US" sz="2600" b="1" dirty="0">
                 <a:solidFill>
-                  <a:srgbClr val="5A05F4"/>
+                  <a:srgbClr val="C9A6FF"/>
                 </a:solidFill>
                 <a:latin typeface="Courier New" pitchFamily="34" charset="0"/>
                 <a:ea typeface="Courier New" pitchFamily="34" charset="-122"/>
@@ -8322,7 +8190,7 @@
       </p:sp>
       <p:sp>
         <p:nvSpPr>
-          <p:cNvPr id="4" name="Text 2"/>
+          <p:cNvPr id="3" name="Text 1"/>
           <p:cNvSpPr/>
           <p:nvPr/>
         </p:nvSpPr>
@@ -8347,7 +8215,7 @@
             <a:r>
               <a:rPr lang="en-US" sz="2400" b="1" dirty="0">
                 <a:solidFill>
-                  <a:srgbClr val="111318"/>
+                  <a:srgbClr val="FFFFFF"/>
                 </a:solidFill>
                 <a:latin typeface="Montserrat" pitchFamily="34" charset="0"/>
                 <a:ea typeface="Montserrat" pitchFamily="34" charset="-122"/>
@@ -8361,7 +8229,7 @@
       </p:sp>
       <p:sp>
         <p:nvSpPr>
-          <p:cNvPr id="5" name="Shape 3"/>
+          <p:cNvPr id="4" name="Shape 2"/>
           <p:cNvSpPr/>
           <p:nvPr/>
         </p:nvSpPr>
@@ -8376,14 +8244,14 @@
             </a:avLst>
           </a:prstGeom>
           <a:solidFill>
-            <a:srgbClr val="5A05F4"/>
+            <a:srgbClr val="C9A6FF"/>
           </a:solidFill>
           <a:ln/>
         </p:spPr>
       </p:sp>
       <p:sp>
         <p:nvSpPr>
-          <p:cNvPr id="6" name="Text 4"/>
+          <p:cNvPr id="5" name="Text 3"/>
           <p:cNvSpPr/>
           <p:nvPr/>
         </p:nvSpPr>
@@ -8408,7 +8276,7 @@
             <a:r>
               <a:rPr lang="en-US" sz="900" b="1" spc="100" kern="0" dirty="0">
                 <a:solidFill>
-                  <a:srgbClr val="FFFFFF"/>
+                  <a:srgbClr val="1C1140"/>
                 </a:solidFill>
                 <a:latin typeface="Courier New" pitchFamily="34" charset="0"/>
                 <a:ea typeface="Courier New" pitchFamily="34" charset="-122"/>
@@ -8422,7 +8290,7 @@
       </p:sp>
       <p:pic>
         <p:nvPicPr>
-          <p:cNvPr id="7" name="Image 0" descr="preencoded.png">    </p:cNvPr>
+          <p:cNvPr id="6" name="Image 0" descr="preencoded.png">    </p:cNvPr>
           <p:cNvPicPr>
             <a:picLocks noChangeAspect="1"/>
           </p:cNvPicPr>
@@ -8446,7 +8314,7 @@
       </p:pic>
       <p:sp>
         <p:nvSpPr>
-          <p:cNvPr id="8" name="Shape 5"/>
+          <p:cNvPr id="7" name="Shape 4"/>
           <p:cNvSpPr/>
           <p:nvPr/>
         </p:nvSpPr>
@@ -8461,11 +8329,11 @@
             </a:avLst>
           </a:prstGeom>
           <a:solidFill>
-            <a:srgbClr val="F5F4FA"/>
+            <a:srgbClr val="12101A"/>
           </a:solidFill>
           <a:ln w="12700">
             <a:solidFill>
-              <a:srgbClr val="E6E7EC"/>
+              <a:srgbClr val="2E2A3A"/>
             </a:solidFill>
             <a:prstDash val="solid"/>
           </a:ln>
@@ -8473,7 +8341,7 @@
       </p:sp>
       <p:sp>
         <p:nvSpPr>
-          <p:cNvPr id="9" name="Text 6"/>
+          <p:cNvPr id="8" name="Text 5"/>
           <p:cNvSpPr/>
           <p:nvPr/>
         </p:nvSpPr>
@@ -8501,7 +8369,7 @@
             <a:r>
               <a:rPr lang="en-US" sz="1200" dirty="0">
                 <a:solidFill>
-                  <a:srgbClr val="5A05F4"/>
+                  <a:srgbClr val="C9A6FF"/>
                 </a:solidFill>
                 <a:latin typeface="Courier New" pitchFamily="34" charset="0"/>
                 <a:ea typeface="Courier New" pitchFamily="34" charset="-122"/>
@@ -8521,7 +8389,7 @@
             <a:r>
               <a:rPr lang="en-US" sz="1200" dirty="0">
                 <a:solidFill>
-                  <a:srgbClr val="B45309"/>
+                  <a:srgbClr val="F0B36B"/>
                 </a:solidFill>
                 <a:latin typeface="Courier New" pitchFamily="34" charset="0"/>
                 <a:ea typeface="Courier New" pitchFamily="34" charset="-122"/>
@@ -8538,7 +8406,7 @@
             <a:r>
               <a:rPr lang="en-US" sz="1200" dirty="0">
                 <a:solidFill>
-                  <a:srgbClr val="8A7FA6"/>
+                  <a:srgbClr val="8A82A0"/>
                 </a:solidFill>
                 <a:latin typeface="Courier New" pitchFamily="34" charset="0"/>
                 <a:ea typeface="Courier New" pitchFamily="34" charset="-122"/>
@@ -8558,7 +8426,7 @@
             <a:r>
               <a:rPr lang="en-US" sz="1200" dirty="0">
                 <a:solidFill>
-                  <a:srgbClr val="B45309"/>
+                  <a:srgbClr val="F0B36B"/>
                 </a:solidFill>
                 <a:latin typeface="Courier New" pitchFamily="34" charset="0"/>
                 <a:ea typeface="Courier New" pitchFamily="34" charset="-122"/>
@@ -8575,7 +8443,7 @@
             <a:r>
               <a:rPr lang="en-US" sz="1200" dirty="0">
                 <a:solidFill>
-                  <a:srgbClr val="8A7FA6"/>
+                  <a:srgbClr val="8A82A0"/>
                 </a:solidFill>
                 <a:latin typeface="Courier New" pitchFamily="34" charset="0"/>
                 <a:ea typeface="Courier New" pitchFamily="34" charset="-122"/>
@@ -8595,7 +8463,7 @@
             <a:r>
               <a:rPr lang="en-US" sz="1200" dirty="0">
                 <a:solidFill>
-                  <a:srgbClr val="B45309"/>
+                  <a:srgbClr val="F0B36B"/>
                 </a:solidFill>
                 <a:latin typeface="Courier New" pitchFamily="34" charset="0"/>
                 <a:ea typeface="Courier New" pitchFamily="34" charset="-122"/>
@@ -8612,7 +8480,7 @@
             <a:r>
               <a:rPr lang="en-US" sz="1200" dirty="0">
                 <a:solidFill>
-                  <a:srgbClr val="8A7FA6"/>
+                  <a:srgbClr val="8A82A0"/>
                 </a:solidFill>
                 <a:latin typeface="Courier New" pitchFamily="34" charset="0"/>
                 <a:ea typeface="Courier New" pitchFamily="34" charset="-122"/>
@@ -8632,7 +8500,7 @@
             <a:r>
               <a:rPr lang="en-US" sz="1200" dirty="0">
                 <a:solidFill>
-                  <a:srgbClr val="177245"/>
+                  <a:srgbClr val="7FD9A6"/>
                 </a:solidFill>
                 <a:latin typeface="Courier New" pitchFamily="34" charset="0"/>
                 <a:ea typeface="Courier New" pitchFamily="34" charset="-122"/>
@@ -8652,7 +8520,7 @@
             <a:r>
               <a:rPr lang="en-US" sz="1200" dirty="0">
                 <a:solidFill>
-                  <a:srgbClr val="177245"/>
+                  <a:srgbClr val="7FD9A6"/>
                 </a:solidFill>
                 <a:latin typeface="Courier New" pitchFamily="34" charset="0"/>
                 <a:ea typeface="Courier New" pitchFamily="34" charset="-122"/>
@@ -8666,7 +8534,7 @@
       </p:sp>
       <p:sp>
         <p:nvSpPr>
-          <p:cNvPr id="10" name="Shape 7"/>
+          <p:cNvPr id="9" name="Shape 6"/>
           <p:cNvSpPr/>
           <p:nvPr/>
         </p:nvSpPr>
@@ -8681,14 +8549,14 @@
             </a:avLst>
           </a:prstGeom>
           <a:solidFill>
-            <a:srgbClr val="E9F4EF"/>
+            <a:srgbClr val="102A20"/>
           </a:solidFill>
           <a:ln/>
         </p:spPr>
       </p:sp>
       <p:sp>
         <p:nvSpPr>
-          <p:cNvPr id="11" name="Shape 8"/>
+          <p:cNvPr id="10" name="Shape 7"/>
           <p:cNvSpPr/>
           <p:nvPr/>
         </p:nvSpPr>
@@ -8701,14 +8569,14 @@
             <a:avLst/>
           </a:prstGeom>
           <a:solidFill>
-            <a:srgbClr val="1B8A5A"/>
+            <a:srgbClr val="5FD6A0"/>
           </a:solidFill>
           <a:ln/>
         </p:spPr>
       </p:sp>
       <p:sp>
         <p:nvSpPr>
-          <p:cNvPr id="12" name="Text 9"/>
+          <p:cNvPr id="11" name="Text 8"/>
           <p:cNvSpPr/>
           <p:nvPr/>
         </p:nvSpPr>
@@ -8733,7 +8601,7 @@
             <a:r>
               <a:rPr lang="en-US" sz="1200" b="1" dirty="0">
                 <a:solidFill>
-                  <a:srgbClr val="E9F4EF"/>
+                  <a:srgbClr val="102A20"/>
                 </a:solidFill>
                 <a:latin typeface="Courier New" pitchFamily="34" charset="0"/>
                 <a:ea typeface="Courier New" pitchFamily="34" charset="-122"/>
@@ -8747,7 +8615,7 @@
       </p:sp>
       <p:sp>
         <p:nvSpPr>
-          <p:cNvPr id="13" name="Text 10"/>
+          <p:cNvPr id="12" name="Text 9"/>
           <p:cNvSpPr/>
           <p:nvPr/>
         </p:nvSpPr>
@@ -8772,7 +8640,7 @@
             <a:r>
               <a:rPr lang="en-US" sz="1450" b="1" dirty="0">
                 <a:solidFill>
-                  <a:srgbClr val="1B8A5A"/>
+                  <a:srgbClr val="5FD6A0"/>
                 </a:solidFill>
                 <a:latin typeface="Montserrat" pitchFamily="34" charset="0"/>
                 <a:ea typeface="Montserrat" pitchFamily="34" charset="-122"/>
@@ -8786,7 +8654,7 @@
       </p:sp>
       <p:sp>
         <p:nvSpPr>
-          <p:cNvPr id="14" name="Text 11"/>
+          <p:cNvPr id="13" name="Text 10"/>
           <p:cNvSpPr/>
           <p:nvPr/>
         </p:nvSpPr>
@@ -8814,7 +8682,7 @@
             <a:r>
               <a:rPr lang="en-US" sz="1200" dirty="0">
                 <a:solidFill>
-                  <a:srgbClr val="111318"/>
+                  <a:srgbClr val="FFFFFF"/>
                 </a:solidFill>
                 <a:latin typeface="Montserrat" pitchFamily="34" charset="0"/>
                 <a:ea typeface="Montserrat" pitchFamily="34" charset="-122"/>
@@ -8828,7 +8696,7 @@
       </p:sp>
       <p:sp>
         <p:nvSpPr>
-          <p:cNvPr id="15" name="Shape 12"/>
+          <p:cNvPr id="14" name="Shape 11"/>
           <p:cNvSpPr/>
           <p:nvPr/>
         </p:nvSpPr>
@@ -8843,14 +8711,14 @@
             </a:avLst>
           </a:prstGeom>
           <a:solidFill>
-            <a:srgbClr val="E9F4EF"/>
+            <a:srgbClr val="102A20"/>
           </a:solidFill>
           <a:ln/>
         </p:spPr>
       </p:sp>
       <p:sp>
         <p:nvSpPr>
-          <p:cNvPr id="16" name="Shape 13"/>
+          <p:cNvPr id="15" name="Shape 12"/>
           <p:cNvSpPr/>
           <p:nvPr/>
         </p:nvSpPr>
@@ -8863,14 +8731,14 @@
             <a:avLst/>
           </a:prstGeom>
           <a:solidFill>
-            <a:srgbClr val="1B8A5A"/>
+            <a:srgbClr val="5FD6A0"/>
           </a:solidFill>
           <a:ln/>
         </p:spPr>
       </p:sp>
       <p:sp>
         <p:nvSpPr>
-          <p:cNvPr id="17" name="Text 14"/>
+          <p:cNvPr id="16" name="Text 13"/>
           <p:cNvSpPr/>
           <p:nvPr/>
         </p:nvSpPr>
@@ -8895,7 +8763,7 @@
             <a:r>
               <a:rPr lang="en-US" sz="1200" b="1" dirty="0">
                 <a:solidFill>
-                  <a:srgbClr val="E9F4EF"/>
+                  <a:srgbClr val="102A20"/>
                 </a:solidFill>
                 <a:latin typeface="Courier New" pitchFamily="34" charset="0"/>
                 <a:ea typeface="Courier New" pitchFamily="34" charset="-122"/>
@@ -8909,7 +8777,7 @@
       </p:sp>
       <p:sp>
         <p:nvSpPr>
-          <p:cNvPr id="18" name="Text 15"/>
+          <p:cNvPr id="17" name="Text 14"/>
           <p:cNvSpPr/>
           <p:nvPr/>
         </p:nvSpPr>
@@ -8934,7 +8802,7 @@
             <a:r>
               <a:rPr lang="en-US" sz="1450" b="1" dirty="0">
                 <a:solidFill>
-                  <a:srgbClr val="1B8A5A"/>
+                  <a:srgbClr val="5FD6A0"/>
                 </a:solidFill>
                 <a:latin typeface="Montserrat" pitchFamily="34" charset="0"/>
                 <a:ea typeface="Montserrat" pitchFamily="34" charset="-122"/>
@@ -8948,7 +8816,7 @@
       </p:sp>
       <p:sp>
         <p:nvSpPr>
-          <p:cNvPr id="19" name="Text 16"/>
+          <p:cNvPr id="18" name="Text 15"/>
           <p:cNvSpPr/>
           <p:nvPr/>
         </p:nvSpPr>
@@ -8976,7 +8844,7 @@
             <a:r>
               <a:rPr lang="en-US" sz="1200" dirty="0">
                 <a:solidFill>
-                  <a:srgbClr val="111318"/>
+                  <a:srgbClr val="FFFFFF"/>
                 </a:solidFill>
                 <a:latin typeface="Montserrat" pitchFamily="34" charset="0"/>
                 <a:ea typeface="Montserrat" pitchFamily="34" charset="-122"/>
@@ -8990,7 +8858,7 @@
       </p:sp>
       <p:sp>
         <p:nvSpPr>
-          <p:cNvPr id="20" name="Shape 17"/>
+          <p:cNvPr id="19" name="Shape 16"/>
           <p:cNvSpPr/>
           <p:nvPr/>
         </p:nvSpPr>
@@ -9005,14 +8873,14 @@
             </a:avLst>
           </a:prstGeom>
           <a:solidFill>
-            <a:srgbClr val="E9F4EF"/>
+            <a:srgbClr val="102A20"/>
           </a:solidFill>
           <a:ln/>
         </p:spPr>
       </p:sp>
       <p:sp>
         <p:nvSpPr>
-          <p:cNvPr id="21" name="Shape 18"/>
+          <p:cNvPr id="20" name="Shape 17"/>
           <p:cNvSpPr/>
           <p:nvPr/>
         </p:nvSpPr>
@@ -9025,14 +8893,14 @@
             <a:avLst/>
           </a:prstGeom>
           <a:solidFill>
-            <a:srgbClr val="1B8A5A"/>
+            <a:srgbClr val="5FD6A0"/>
           </a:solidFill>
           <a:ln/>
         </p:spPr>
       </p:sp>
       <p:sp>
         <p:nvSpPr>
-          <p:cNvPr id="22" name="Text 19"/>
+          <p:cNvPr id="21" name="Text 18"/>
           <p:cNvSpPr/>
           <p:nvPr/>
         </p:nvSpPr>
@@ -9057,7 +8925,7 @@
             <a:r>
               <a:rPr lang="en-US" sz="1200" b="1" dirty="0">
                 <a:solidFill>
-                  <a:srgbClr val="E9F4EF"/>
+                  <a:srgbClr val="102A20"/>
                 </a:solidFill>
                 <a:latin typeface="Courier New" pitchFamily="34" charset="0"/>
                 <a:ea typeface="Courier New" pitchFamily="34" charset="-122"/>
@@ -9071,7 +8939,7 @@
       </p:sp>
       <p:sp>
         <p:nvSpPr>
-          <p:cNvPr id="23" name="Text 20"/>
+          <p:cNvPr id="22" name="Text 19"/>
           <p:cNvSpPr/>
           <p:nvPr/>
         </p:nvSpPr>
@@ -9096,7 +8964,7 @@
             <a:r>
               <a:rPr lang="en-US" sz="1450" b="1" dirty="0">
                 <a:solidFill>
-                  <a:srgbClr val="1B8A5A"/>
+                  <a:srgbClr val="5FD6A0"/>
                 </a:solidFill>
                 <a:latin typeface="Montserrat" pitchFamily="34" charset="0"/>
                 <a:ea typeface="Montserrat" pitchFamily="34" charset="-122"/>
@@ -9110,7 +8978,7 @@
       </p:sp>
       <p:sp>
         <p:nvSpPr>
-          <p:cNvPr id="24" name="Text 21"/>
+          <p:cNvPr id="23" name="Text 20"/>
           <p:cNvSpPr/>
           <p:nvPr/>
         </p:nvSpPr>
@@ -9138,7 +9006,7 @@
             <a:r>
               <a:rPr lang="en-US" sz="1200" dirty="0">
                 <a:solidFill>
-                  <a:srgbClr val="111318"/>
+                  <a:srgbClr val="FFFFFF"/>
                 </a:solidFill>
                 <a:latin typeface="Montserrat" pitchFamily="34" charset="0"/>
                 <a:ea typeface="Montserrat" pitchFamily="34" charset="-122"/>
@@ -9152,7 +9020,7 @@
       </p:sp>
       <p:sp>
         <p:nvSpPr>
-          <p:cNvPr id="25" name="Shape 22"/>
+          <p:cNvPr id="24" name="Shape 21"/>
           <p:cNvSpPr/>
           <p:nvPr/>
         </p:nvSpPr>
@@ -9174,7 +9042,7 @@
       </p:sp>
       <p:sp>
         <p:nvSpPr>
-          <p:cNvPr id="26" name="Text 23"/>
+          <p:cNvPr id="25" name="Text 22"/>
           <p:cNvSpPr/>
           <p:nvPr/>
         </p:nvSpPr>
@@ -9244,7 +9112,7 @@
             <a:lvl1pPr>
               <a:defRPr sz="850">
                 <a:solidFill>
-                  <a:srgbClr val="9AA1AD"/>
+                  <a:srgbClr val="8A82A0"/>
                 </a:solidFill>
                 <a:latin typeface="Courier New"/>
                 <a:ea typeface="Courier New"/>
@@ -9289,29 +9157,7 @@
       </p:grpSpPr>
       <p:sp>
         <p:nvSpPr>
-          <p:cNvPr id="2" name="Shape 0"/>
-          <p:cNvSpPr/>
-          <p:nvPr/>
-        </p:nvSpPr>
-        <p:spPr>
-          <a:xfrm>
-            <a:off x="231343" y="194767"/>
-            <a:ext cx="11716207" cy="6473952"/>
-          </a:xfrm>
-          <a:prstGeom prst="roundRect">
-            <a:avLst>
-              <a:gd name="adj" fmla="val 3107"/>
-            </a:avLst>
-          </a:prstGeom>
-          <a:solidFill>
-            <a:srgbClr val="FFFFFF"/>
-          </a:solidFill>
-          <a:ln/>
-        </p:spPr>
-      </p:sp>
-      <p:sp>
-        <p:nvSpPr>
-          <p:cNvPr id="3" name="Text 1"/>
+          <p:cNvPr id="2" name="Text 0"/>
           <p:cNvSpPr/>
           <p:nvPr/>
         </p:nvSpPr>
@@ -9336,7 +9182,7 @@
             <a:r>
               <a:rPr lang="en-US" sz="2400" b="1" dirty="0">
                 <a:solidFill>
-                  <a:srgbClr val="111318"/>
+                  <a:srgbClr val="FFFFFF"/>
                 </a:solidFill>
                 <a:latin typeface="Montserrat" pitchFamily="34" charset="0"/>
                 <a:ea typeface="Montserrat" pitchFamily="34" charset="-122"/>
@@ -9350,7 +9196,7 @@
       </p:sp>
       <p:sp>
         <p:nvSpPr>
-          <p:cNvPr id="4" name="Shape 2"/>
+          <p:cNvPr id="3" name="Shape 1"/>
           <p:cNvSpPr/>
           <p:nvPr/>
         </p:nvSpPr>
@@ -9365,14 +9211,14 @@
             </a:avLst>
           </a:prstGeom>
           <a:solidFill>
-            <a:srgbClr val="1B8A5A"/>
+            <a:srgbClr val="5FD6A0"/>
           </a:solidFill>
           <a:ln/>
         </p:spPr>
       </p:sp>
       <p:sp>
         <p:nvSpPr>
-          <p:cNvPr id="5" name="Text 3"/>
+          <p:cNvPr id="4" name="Text 2"/>
           <p:cNvSpPr/>
           <p:nvPr/>
         </p:nvSpPr>
@@ -9397,7 +9243,7 @@
             <a:r>
               <a:rPr lang="en-US" sz="900" b="1" spc="100" kern="0" dirty="0">
                 <a:solidFill>
-                  <a:srgbClr val="FFFFFF"/>
+                  <a:srgbClr val="102A20"/>
                 </a:solidFill>
                 <a:latin typeface="Courier New" pitchFamily="34" charset="0"/>
                 <a:ea typeface="Courier New" pitchFamily="34" charset="-122"/>
@@ -9411,7 +9257,7 @@
       </p:sp>
       <p:pic>
         <p:nvPicPr>
-          <p:cNvPr id="6" name="Image 0" descr="preencoded.png">    </p:cNvPr>
+          <p:cNvPr id="5" name="Image 0" descr="preencoded.png">    </p:cNvPr>
           <p:cNvPicPr>
             <a:picLocks noChangeAspect="1"/>
           </p:cNvPicPr>
@@ -9435,7 +9281,7 @@
       </p:pic>
       <p:sp>
         <p:nvSpPr>
-          <p:cNvPr id="7" name="Shape 4"/>
+          <p:cNvPr id="6" name="Shape 3"/>
           <p:cNvSpPr/>
           <p:nvPr/>
         </p:nvSpPr>
@@ -9450,14 +9296,14 @@
             </a:avLst>
           </a:prstGeom>
           <a:solidFill>
-            <a:srgbClr val="E9F4EF"/>
+            <a:srgbClr val="102A20"/>
           </a:solidFill>
           <a:ln/>
         </p:spPr>
       </p:sp>
       <p:sp>
         <p:nvSpPr>
-          <p:cNvPr id="8" name="Shape 5"/>
+          <p:cNvPr id="7" name="Shape 4"/>
           <p:cNvSpPr/>
           <p:nvPr/>
         </p:nvSpPr>
@@ -9470,14 +9316,14 @@
             <a:avLst/>
           </a:prstGeom>
           <a:solidFill>
-            <a:srgbClr val="1B8A5A"/>
+            <a:srgbClr val="5FD6A0"/>
           </a:solidFill>
           <a:ln/>
         </p:spPr>
       </p:sp>
       <p:sp>
         <p:nvSpPr>
-          <p:cNvPr id="9" name="Text 6"/>
+          <p:cNvPr id="8" name="Text 5"/>
           <p:cNvSpPr/>
           <p:nvPr/>
         </p:nvSpPr>
@@ -9502,7 +9348,7 @@
             <a:r>
               <a:rPr lang="en-US" sz="1200" b="1" dirty="0">
                 <a:solidFill>
-                  <a:srgbClr val="E9F4EF"/>
+                  <a:srgbClr val="102A20"/>
                 </a:solidFill>
                 <a:latin typeface="Courier New" pitchFamily="34" charset="0"/>
                 <a:ea typeface="Courier New" pitchFamily="34" charset="-122"/>
@@ -9516,7 +9362,7 @@
       </p:sp>
       <p:sp>
         <p:nvSpPr>
-          <p:cNvPr id="10" name="Text 7"/>
+          <p:cNvPr id="9" name="Text 6"/>
           <p:cNvSpPr/>
           <p:nvPr/>
         </p:nvSpPr>
@@ -9541,7 +9387,7 @@
             <a:r>
               <a:rPr lang="en-US" sz="1450" b="1" dirty="0">
                 <a:solidFill>
-                  <a:srgbClr val="1B8A5A"/>
+                  <a:srgbClr val="5FD6A0"/>
                 </a:solidFill>
                 <a:latin typeface="Montserrat" pitchFamily="34" charset="0"/>
                 <a:ea typeface="Montserrat" pitchFamily="34" charset="-122"/>
@@ -9555,7 +9401,7 @@
       </p:sp>
       <p:sp>
         <p:nvSpPr>
-          <p:cNvPr id="11" name="Text 8"/>
+          <p:cNvPr id="10" name="Text 7"/>
           <p:cNvSpPr/>
           <p:nvPr/>
         </p:nvSpPr>
@@ -9583,7 +9429,7 @@
             <a:r>
               <a:rPr lang="en-US" sz="1200" dirty="0">
                 <a:solidFill>
-                  <a:srgbClr val="111318"/>
+                  <a:srgbClr val="FFFFFF"/>
                 </a:solidFill>
                 <a:latin typeface="Montserrat" pitchFamily="34" charset="0"/>
                 <a:ea typeface="Montserrat" pitchFamily="34" charset="-122"/>
@@ -9597,7 +9443,7 @@
       </p:sp>
       <p:sp>
         <p:nvSpPr>
-          <p:cNvPr id="12" name="Shape 9"/>
+          <p:cNvPr id="11" name="Shape 8"/>
           <p:cNvSpPr/>
           <p:nvPr/>
         </p:nvSpPr>
@@ -9612,14 +9458,14 @@
             </a:avLst>
           </a:prstGeom>
           <a:solidFill>
-            <a:srgbClr val="FBE9E9"/>
+            <a:srgbClr val="2E1418"/>
           </a:solidFill>
           <a:ln/>
         </p:spPr>
       </p:sp>
       <p:sp>
         <p:nvSpPr>
-          <p:cNvPr id="13" name="Shape 10"/>
+          <p:cNvPr id="12" name="Shape 9"/>
           <p:cNvSpPr/>
           <p:nvPr/>
         </p:nvSpPr>
@@ -9632,14 +9478,14 @@
             <a:avLst/>
           </a:prstGeom>
           <a:solidFill>
-            <a:srgbClr val="C62A2A"/>
+            <a:srgbClr val="FF7B7B"/>
           </a:solidFill>
           <a:ln/>
         </p:spPr>
       </p:sp>
       <p:sp>
         <p:nvSpPr>
-          <p:cNvPr id="14" name="Text 11"/>
+          <p:cNvPr id="13" name="Text 10"/>
           <p:cNvSpPr/>
           <p:nvPr/>
         </p:nvSpPr>
@@ -9664,7 +9510,7 @@
             <a:r>
               <a:rPr lang="en-US" sz="1200" b="1" dirty="0">
                 <a:solidFill>
-                  <a:srgbClr val="FBE9E9"/>
+                  <a:srgbClr val="2E1418"/>
                 </a:solidFill>
                 <a:latin typeface="Courier New" pitchFamily="34" charset="0"/>
                 <a:ea typeface="Courier New" pitchFamily="34" charset="-122"/>
@@ -9678,7 +9524,7 @@
       </p:sp>
       <p:sp>
         <p:nvSpPr>
-          <p:cNvPr id="15" name="Text 12"/>
+          <p:cNvPr id="14" name="Text 11"/>
           <p:cNvSpPr/>
           <p:nvPr/>
         </p:nvSpPr>
@@ -9703,7 +9549,7 @@
             <a:r>
               <a:rPr lang="en-US" sz="1450" b="1" dirty="0">
                 <a:solidFill>
-                  <a:srgbClr val="C62A2A"/>
+                  <a:srgbClr val="FF7B7B"/>
                 </a:solidFill>
                 <a:latin typeface="Montserrat" pitchFamily="34" charset="0"/>
                 <a:ea typeface="Montserrat" pitchFamily="34" charset="-122"/>
@@ -9717,7 +9563,7 @@
       </p:sp>
       <p:sp>
         <p:nvSpPr>
-          <p:cNvPr id="16" name="Text 13"/>
+          <p:cNvPr id="15" name="Text 12"/>
           <p:cNvSpPr/>
           <p:nvPr/>
         </p:nvSpPr>
@@ -9745,7 +9591,7 @@
             <a:r>
               <a:rPr lang="en-US" sz="1200" dirty="0">
                 <a:solidFill>
-                  <a:srgbClr val="111318"/>
+                  <a:srgbClr val="FFFFFF"/>
                 </a:solidFill>
                 <a:latin typeface="Montserrat" pitchFamily="34" charset="0"/>
                 <a:ea typeface="Montserrat" pitchFamily="34" charset="-122"/>
@@ -9759,7 +9605,7 @@
       </p:sp>
       <p:sp>
         <p:nvSpPr>
-          <p:cNvPr id="17" name="Shape 14"/>
+          <p:cNvPr id="16" name="Shape 13"/>
           <p:cNvSpPr/>
           <p:nvPr/>
         </p:nvSpPr>
@@ -9774,14 +9620,14 @@
             </a:avLst>
           </a:prstGeom>
           <a:solidFill>
-            <a:srgbClr val="E9F4EF"/>
+            <a:srgbClr val="102A20"/>
           </a:solidFill>
           <a:ln/>
         </p:spPr>
       </p:sp>
       <p:sp>
         <p:nvSpPr>
-          <p:cNvPr id="18" name="Shape 15"/>
+          <p:cNvPr id="17" name="Shape 14"/>
           <p:cNvSpPr/>
           <p:nvPr/>
         </p:nvSpPr>
@@ -9794,14 +9640,14 @@
             <a:avLst/>
           </a:prstGeom>
           <a:solidFill>
-            <a:srgbClr val="1B8A5A"/>
+            <a:srgbClr val="5FD6A0"/>
           </a:solidFill>
           <a:ln/>
         </p:spPr>
       </p:sp>
       <p:sp>
         <p:nvSpPr>
-          <p:cNvPr id="19" name="Text 16"/>
+          <p:cNvPr id="18" name="Text 15"/>
           <p:cNvSpPr/>
           <p:nvPr/>
         </p:nvSpPr>
@@ -9826,7 +9672,7 @@
             <a:r>
               <a:rPr lang="en-US" sz="1200" b="1" dirty="0">
                 <a:solidFill>
-                  <a:srgbClr val="E9F4EF"/>
+                  <a:srgbClr val="102A20"/>
                 </a:solidFill>
                 <a:latin typeface="Courier New" pitchFamily="34" charset="0"/>
                 <a:ea typeface="Courier New" pitchFamily="34" charset="-122"/>
@@ -9840,7 +9686,7 @@
       </p:sp>
       <p:sp>
         <p:nvSpPr>
-          <p:cNvPr id="20" name="Text 17"/>
+          <p:cNvPr id="19" name="Text 16"/>
           <p:cNvSpPr/>
           <p:nvPr/>
         </p:nvSpPr>
@@ -9865,7 +9711,7 @@
             <a:r>
               <a:rPr lang="en-US" sz="1450" b="1" dirty="0">
                 <a:solidFill>
-                  <a:srgbClr val="1B8A5A"/>
+                  <a:srgbClr val="5FD6A0"/>
                 </a:solidFill>
                 <a:latin typeface="Montserrat" pitchFamily="34" charset="0"/>
                 <a:ea typeface="Montserrat" pitchFamily="34" charset="-122"/>
@@ -9879,7 +9725,7 @@
       </p:sp>
       <p:sp>
         <p:nvSpPr>
-          <p:cNvPr id="21" name="Text 18"/>
+          <p:cNvPr id="20" name="Text 17"/>
           <p:cNvSpPr/>
           <p:nvPr/>
         </p:nvSpPr>
@@ -9907,7 +9753,7 @@
             <a:r>
               <a:rPr lang="en-US" sz="1200" dirty="0">
                 <a:solidFill>
-                  <a:srgbClr val="111318"/>
+                  <a:srgbClr val="FFFFFF"/>
                 </a:solidFill>
                 <a:latin typeface="Montserrat" pitchFamily="34" charset="0"/>
                 <a:ea typeface="Montserrat" pitchFamily="34" charset="-122"/>
@@ -9921,7 +9767,7 @@
       </p:sp>
       <p:sp>
         <p:nvSpPr>
-          <p:cNvPr id="22" name="Shape 19"/>
+          <p:cNvPr id="21" name="Shape 18"/>
           <p:cNvSpPr/>
           <p:nvPr/>
         </p:nvSpPr>
@@ -9936,14 +9782,14 @@
             </a:avLst>
           </a:prstGeom>
           <a:solidFill>
-            <a:srgbClr val="E9F4EF"/>
+            <a:srgbClr val="102A20"/>
           </a:solidFill>
           <a:ln/>
         </p:spPr>
       </p:sp>
       <p:sp>
         <p:nvSpPr>
-          <p:cNvPr id="23" name="Shape 20"/>
+          <p:cNvPr id="22" name="Shape 19"/>
           <p:cNvSpPr/>
           <p:nvPr/>
         </p:nvSpPr>
@@ -9956,14 +9802,14 @@
             <a:avLst/>
           </a:prstGeom>
           <a:solidFill>
-            <a:srgbClr val="1B8A5A"/>
+            <a:srgbClr val="5FD6A0"/>
           </a:solidFill>
           <a:ln/>
         </p:spPr>
       </p:sp>
       <p:sp>
         <p:nvSpPr>
-          <p:cNvPr id="24" name="Text 21"/>
+          <p:cNvPr id="23" name="Text 20"/>
           <p:cNvSpPr/>
           <p:nvPr/>
         </p:nvSpPr>
@@ -9988,7 +9834,7 @@
             <a:r>
               <a:rPr lang="en-US" sz="1200" b="1" dirty="0">
                 <a:solidFill>
-                  <a:srgbClr val="E9F4EF"/>
+                  <a:srgbClr val="102A20"/>
                 </a:solidFill>
                 <a:latin typeface="Courier New" pitchFamily="34" charset="0"/>
                 <a:ea typeface="Courier New" pitchFamily="34" charset="-122"/>
@@ -10002,7 +9848,7 @@
       </p:sp>
       <p:sp>
         <p:nvSpPr>
-          <p:cNvPr id="25" name="Text 22"/>
+          <p:cNvPr id="24" name="Text 21"/>
           <p:cNvSpPr/>
           <p:nvPr/>
         </p:nvSpPr>
@@ -10027,7 +9873,7 @@
             <a:r>
               <a:rPr lang="en-US" sz="1450" b="1" dirty="0">
                 <a:solidFill>
-                  <a:srgbClr val="1B8A5A"/>
+                  <a:srgbClr val="5FD6A0"/>
                 </a:solidFill>
                 <a:latin typeface="Montserrat" pitchFamily="34" charset="0"/>
                 <a:ea typeface="Montserrat" pitchFamily="34" charset="-122"/>
@@ -10041,7 +9887,7 @@
       </p:sp>
       <p:sp>
         <p:nvSpPr>
-          <p:cNvPr id="26" name="Text 23"/>
+          <p:cNvPr id="25" name="Text 22"/>
           <p:cNvSpPr/>
           <p:nvPr/>
         </p:nvSpPr>
@@ -10069,7 +9915,7 @@
             <a:r>
               <a:rPr lang="en-US" sz="1200" dirty="0">
                 <a:solidFill>
-                  <a:srgbClr val="111318"/>
+                  <a:srgbClr val="FFFFFF"/>
                 </a:solidFill>
                 <a:latin typeface="Montserrat" pitchFamily="34" charset="0"/>
                 <a:ea typeface="Montserrat" pitchFamily="34" charset="-122"/>
@@ -10083,7 +9929,7 @@
       </p:sp>
       <p:sp>
         <p:nvSpPr>
-          <p:cNvPr id="27" name="Shape 24"/>
+          <p:cNvPr id="26" name="Shape 23"/>
           <p:cNvSpPr/>
           <p:nvPr/>
         </p:nvSpPr>
@@ -10105,7 +9951,7 @@
       </p:sp>
       <p:sp>
         <p:nvSpPr>
-          <p:cNvPr id="28" name="Text 25"/>
+          <p:cNvPr id="27" name="Text 24"/>
           <p:cNvSpPr/>
           <p:nvPr/>
         </p:nvSpPr>
@@ -10144,7 +9990,7 @@
       </p:sp>
       <p:sp>
         <p:nvSpPr>
-          <p:cNvPr id="29" name="Text 26"/>
+          <p:cNvPr id="28" name="Text 25"/>
           <p:cNvSpPr/>
           <p:nvPr/>
         </p:nvSpPr>
@@ -10214,7 +10060,7 @@
             <a:lvl1pPr>
               <a:defRPr sz="850">
                 <a:solidFill>
-                  <a:srgbClr val="9AA1AD"/>
+                  <a:srgbClr val="8A82A0"/>
                 </a:solidFill>
                 <a:latin typeface="Courier New"/>
                 <a:ea typeface="Courier New"/>
@@ -10259,29 +10105,7 @@
       </p:grpSpPr>
       <p:sp>
         <p:nvSpPr>
-          <p:cNvPr id="2" name="Shape 0"/>
-          <p:cNvSpPr/>
-          <p:nvPr/>
-        </p:nvSpPr>
-        <p:spPr>
-          <a:xfrm>
-            <a:off x="231343" y="194767"/>
-            <a:ext cx="11716207" cy="6473952"/>
-          </a:xfrm>
-          <a:prstGeom prst="roundRect">
-            <a:avLst>
-              <a:gd name="adj" fmla="val 3107"/>
-            </a:avLst>
-          </a:prstGeom>
-          <a:solidFill>
-            <a:srgbClr val="FFFFFF"/>
-          </a:solidFill>
-          <a:ln/>
-        </p:spPr>
-      </p:sp>
-      <p:sp>
-        <p:nvSpPr>
-          <p:cNvPr id="3" name="Text 1"/>
+          <p:cNvPr id="2" name="Text 0"/>
           <p:cNvSpPr/>
           <p:nvPr/>
         </p:nvSpPr>
@@ -10306,7 +10130,7 @@
             <a:r>
               <a:rPr lang="en-US" sz="2400" b="1" dirty="0">
                 <a:solidFill>
-                  <a:srgbClr val="111318"/>
+                  <a:srgbClr val="FFFFFF"/>
                 </a:solidFill>
                 <a:latin typeface="Montserrat" pitchFamily="34" charset="0"/>
                 <a:ea typeface="Montserrat" pitchFamily="34" charset="-122"/>
@@ -10320,7 +10144,7 @@
       </p:sp>
       <p:sp>
         <p:nvSpPr>
-          <p:cNvPr id="4" name="Shape 2"/>
+          <p:cNvPr id="3" name="Shape 1"/>
           <p:cNvSpPr/>
           <p:nvPr/>
         </p:nvSpPr>
@@ -10335,14 +10159,14 @@
             </a:avLst>
           </a:prstGeom>
           <a:solidFill>
-            <a:srgbClr val="1B8A5A"/>
+            <a:srgbClr val="5FD6A0"/>
           </a:solidFill>
           <a:ln/>
         </p:spPr>
       </p:sp>
       <p:sp>
         <p:nvSpPr>
-          <p:cNvPr id="5" name="Text 3"/>
+          <p:cNvPr id="4" name="Text 2"/>
           <p:cNvSpPr/>
           <p:nvPr/>
         </p:nvSpPr>
@@ -10367,7 +10191,7 @@
             <a:r>
               <a:rPr lang="en-US" sz="900" b="1" spc="100" kern="0" dirty="0">
                 <a:solidFill>
-                  <a:srgbClr val="FFFFFF"/>
+                  <a:srgbClr val="102A20"/>
                 </a:solidFill>
                 <a:latin typeface="Courier New" pitchFamily="34" charset="0"/>
                 <a:ea typeface="Courier New" pitchFamily="34" charset="-122"/>
@@ -10381,7 +10205,7 @@
       </p:sp>
       <p:pic>
         <p:nvPicPr>
-          <p:cNvPr id="6" name="Image 0" descr="preencoded.png">    </p:cNvPr>
+          <p:cNvPr id="5" name="Image 0" descr="preencoded.png">    </p:cNvPr>
           <p:cNvPicPr>
             <a:picLocks noChangeAspect="1"/>
           </p:cNvPicPr>
@@ -10405,7 +10229,7 @@
       </p:pic>
       <p:sp>
         <p:nvSpPr>
-          <p:cNvPr id="7" name="Shape 4"/>
+          <p:cNvPr id="6" name="Shape 3"/>
           <p:cNvSpPr/>
           <p:nvPr/>
         </p:nvSpPr>
@@ -10418,14 +10242,14 @@
             <a:avLst/>
           </a:prstGeom>
           <a:solidFill>
-            <a:srgbClr val="5A05F4"/>
+            <a:srgbClr val="C9A6FF"/>
           </a:solidFill>
           <a:ln/>
         </p:spPr>
       </p:sp>
       <p:sp>
         <p:nvSpPr>
-          <p:cNvPr id="8" name="Text 5"/>
+          <p:cNvPr id="7" name="Text 4"/>
           <p:cNvSpPr/>
           <p:nvPr/>
         </p:nvSpPr>
@@ -10450,7 +10274,7 @@
             <a:r>
               <a:rPr lang="en-US" sz="1300" b="1" dirty="0">
                 <a:solidFill>
-                  <a:srgbClr val="FFFFFF"/>
+                  <a:srgbClr val="1C1140"/>
                 </a:solidFill>
                 <a:latin typeface="Courier New" pitchFamily="34" charset="0"/>
                 <a:ea typeface="Courier New" pitchFamily="34" charset="-122"/>
@@ -10464,7 +10288,7 @@
       </p:sp>
       <p:sp>
         <p:nvSpPr>
-          <p:cNvPr id="9" name="Text 6"/>
+          <p:cNvPr id="8" name="Text 5"/>
           <p:cNvSpPr/>
           <p:nvPr/>
         </p:nvSpPr>
@@ -10489,7 +10313,7 @@
             <a:r>
               <a:rPr lang="en-US" sz="1400" b="1" dirty="0">
                 <a:solidFill>
-                  <a:srgbClr val="111318"/>
+                  <a:srgbClr val="FFFFFF"/>
                 </a:solidFill>
                 <a:latin typeface="Montserrat" pitchFamily="34" charset="0"/>
                 <a:ea typeface="Montserrat" pitchFamily="34" charset="-122"/>
@@ -10503,7 +10327,7 @@
             <a:r>
               <a:rPr lang="en-US" sz="1200" dirty="0">
                 <a:solidFill>
-                  <a:srgbClr val="555B66"/>
+                  <a:srgbClr val="AFA9BE"/>
                 </a:solidFill>
                 <a:latin typeface="Montserrat" pitchFamily="34" charset="0"/>
                 <a:ea typeface="Montserrat" pitchFamily="34" charset="-122"/>
@@ -10517,7 +10341,7 @@
       </p:sp>
       <p:sp>
         <p:nvSpPr>
-          <p:cNvPr id="10" name="Shape 7"/>
+          <p:cNvPr id="9" name="Shape 6"/>
           <p:cNvSpPr/>
           <p:nvPr/>
         </p:nvSpPr>
@@ -10530,14 +10354,14 @@
             <a:avLst/>
           </a:prstGeom>
           <a:solidFill>
-            <a:srgbClr val="5A05F4"/>
+            <a:srgbClr val="C9A6FF"/>
           </a:solidFill>
           <a:ln/>
         </p:spPr>
       </p:sp>
       <p:sp>
         <p:nvSpPr>
-          <p:cNvPr id="11" name="Text 8"/>
+          <p:cNvPr id="10" name="Text 7"/>
           <p:cNvSpPr/>
           <p:nvPr/>
         </p:nvSpPr>
@@ -10562,7 +10386,7 @@
             <a:r>
               <a:rPr lang="en-US" sz="1300" b="1" dirty="0">
                 <a:solidFill>
-                  <a:srgbClr val="FFFFFF"/>
+                  <a:srgbClr val="1C1140"/>
                 </a:solidFill>
                 <a:latin typeface="Courier New" pitchFamily="34" charset="0"/>
                 <a:ea typeface="Courier New" pitchFamily="34" charset="-122"/>
@@ -10576,7 +10400,7 @@
       </p:sp>
       <p:sp>
         <p:nvSpPr>
-          <p:cNvPr id="12" name="Text 9"/>
+          <p:cNvPr id="11" name="Text 8"/>
           <p:cNvSpPr/>
           <p:nvPr/>
         </p:nvSpPr>
@@ -10601,7 +10425,7 @@
             <a:r>
               <a:rPr lang="en-US" sz="1400" b="1" dirty="0">
                 <a:solidFill>
-                  <a:srgbClr val="111318"/>
+                  <a:srgbClr val="FFFFFF"/>
                 </a:solidFill>
                 <a:latin typeface="Montserrat" pitchFamily="34" charset="0"/>
                 <a:ea typeface="Montserrat" pitchFamily="34" charset="-122"/>
@@ -10615,7 +10439,7 @@
             <a:r>
               <a:rPr lang="en-US" sz="1200" dirty="0">
                 <a:solidFill>
-                  <a:srgbClr val="555B66"/>
+                  <a:srgbClr val="AFA9BE"/>
                 </a:solidFill>
                 <a:latin typeface="Montserrat" pitchFamily="34" charset="0"/>
                 <a:ea typeface="Montserrat" pitchFamily="34" charset="-122"/>
@@ -10629,7 +10453,7 @@
       </p:sp>
       <p:sp>
         <p:nvSpPr>
-          <p:cNvPr id="13" name="Shape 10"/>
+          <p:cNvPr id="12" name="Shape 9"/>
           <p:cNvSpPr/>
           <p:nvPr/>
         </p:nvSpPr>
@@ -10642,14 +10466,14 @@
             <a:avLst/>
           </a:prstGeom>
           <a:solidFill>
-            <a:srgbClr val="5A05F4"/>
+            <a:srgbClr val="C9A6FF"/>
           </a:solidFill>
           <a:ln/>
         </p:spPr>
       </p:sp>
       <p:sp>
         <p:nvSpPr>
-          <p:cNvPr id="14" name="Text 11"/>
+          <p:cNvPr id="13" name="Text 10"/>
           <p:cNvSpPr/>
           <p:nvPr/>
         </p:nvSpPr>
@@ -10674,7 +10498,7 @@
             <a:r>
               <a:rPr lang="en-US" sz="1300" b="1" dirty="0">
                 <a:solidFill>
-                  <a:srgbClr val="FFFFFF"/>
+                  <a:srgbClr val="1C1140"/>
                 </a:solidFill>
                 <a:latin typeface="Courier New" pitchFamily="34" charset="0"/>
                 <a:ea typeface="Courier New" pitchFamily="34" charset="-122"/>
@@ -10688,7 +10512,7 @@
       </p:sp>
       <p:sp>
         <p:nvSpPr>
-          <p:cNvPr id="15" name="Text 12"/>
+          <p:cNvPr id="14" name="Text 11"/>
           <p:cNvSpPr/>
           <p:nvPr/>
         </p:nvSpPr>
@@ -10713,7 +10537,7 @@
             <a:r>
               <a:rPr lang="en-US" sz="1400" b="1" dirty="0">
                 <a:solidFill>
-                  <a:srgbClr val="111318"/>
+                  <a:srgbClr val="FFFFFF"/>
                 </a:solidFill>
                 <a:latin typeface="Montserrat" pitchFamily="34" charset="0"/>
                 <a:ea typeface="Montserrat" pitchFamily="34" charset="-122"/>
@@ -10727,7 +10551,7 @@
             <a:r>
               <a:rPr lang="en-US" sz="1200" dirty="0">
                 <a:solidFill>
-                  <a:srgbClr val="555B66"/>
+                  <a:srgbClr val="AFA9BE"/>
                 </a:solidFill>
                 <a:latin typeface="Montserrat" pitchFamily="34" charset="0"/>
                 <a:ea typeface="Montserrat" pitchFamily="34" charset="-122"/>
@@ -10741,7 +10565,7 @@
       </p:sp>
       <p:sp>
         <p:nvSpPr>
-          <p:cNvPr id="16" name="Shape 13"/>
+          <p:cNvPr id="15" name="Shape 12"/>
           <p:cNvSpPr/>
           <p:nvPr/>
         </p:nvSpPr>
@@ -10754,14 +10578,14 @@
             <a:avLst/>
           </a:prstGeom>
           <a:solidFill>
-            <a:srgbClr val="5A05F4"/>
+            <a:srgbClr val="C9A6FF"/>
           </a:solidFill>
           <a:ln/>
         </p:spPr>
       </p:sp>
       <p:sp>
         <p:nvSpPr>
-          <p:cNvPr id="17" name="Text 14"/>
+          <p:cNvPr id="16" name="Text 13"/>
           <p:cNvSpPr/>
           <p:nvPr/>
         </p:nvSpPr>
@@ -10786,7 +10610,7 @@
             <a:r>
               <a:rPr lang="en-US" sz="1300" b="1" dirty="0">
                 <a:solidFill>
-                  <a:srgbClr val="FFFFFF"/>
+                  <a:srgbClr val="1C1140"/>
                 </a:solidFill>
                 <a:latin typeface="Courier New" pitchFamily="34" charset="0"/>
                 <a:ea typeface="Courier New" pitchFamily="34" charset="-122"/>
@@ -10800,7 +10624,7 @@
       </p:sp>
       <p:sp>
         <p:nvSpPr>
-          <p:cNvPr id="18" name="Text 15"/>
+          <p:cNvPr id="17" name="Text 14"/>
           <p:cNvSpPr/>
           <p:nvPr/>
         </p:nvSpPr>
@@ -10825,7 +10649,7 @@
             <a:r>
               <a:rPr lang="en-US" sz="1400" b="1" dirty="0">
                 <a:solidFill>
-                  <a:srgbClr val="111318"/>
+                  <a:srgbClr val="FFFFFF"/>
                 </a:solidFill>
                 <a:latin typeface="Montserrat" pitchFamily="34" charset="0"/>
                 <a:ea typeface="Montserrat" pitchFamily="34" charset="-122"/>
@@ -10839,7 +10663,7 @@
             <a:r>
               <a:rPr lang="en-US" sz="1200" dirty="0">
                 <a:solidFill>
-                  <a:srgbClr val="555B66"/>
+                  <a:srgbClr val="AFA9BE"/>
                 </a:solidFill>
                 <a:latin typeface="Montserrat" pitchFamily="34" charset="0"/>
                 <a:ea typeface="Montserrat" pitchFamily="34" charset="-122"/>
@@ -10853,7 +10677,7 @@
       </p:sp>
       <p:sp>
         <p:nvSpPr>
-          <p:cNvPr id="19" name="Shape 16"/>
+          <p:cNvPr id="18" name="Shape 15"/>
           <p:cNvSpPr/>
           <p:nvPr/>
         </p:nvSpPr>
@@ -10866,14 +10690,14 @@
             <a:avLst/>
           </a:prstGeom>
           <a:solidFill>
-            <a:srgbClr val="9A5B12"/>
+            <a:srgbClr val="E8A857"/>
           </a:solidFill>
           <a:ln/>
         </p:spPr>
       </p:sp>
       <p:sp>
         <p:nvSpPr>
-          <p:cNvPr id="20" name="Text 17"/>
+          <p:cNvPr id="19" name="Text 16"/>
           <p:cNvSpPr/>
           <p:nvPr/>
         </p:nvSpPr>
@@ -10898,7 +10722,7 @@
             <a:r>
               <a:rPr lang="en-US" sz="1300" b="1" dirty="0">
                 <a:solidFill>
-                  <a:srgbClr val="FFFFFF"/>
+                  <a:srgbClr val="2A2010"/>
                 </a:solidFill>
                 <a:latin typeface="Courier New" pitchFamily="34" charset="0"/>
                 <a:ea typeface="Courier New" pitchFamily="34" charset="-122"/>
@@ -10912,7 +10736,7 @@
       </p:sp>
       <p:sp>
         <p:nvSpPr>
-          <p:cNvPr id="21" name="Text 18"/>
+          <p:cNvPr id="20" name="Text 17"/>
           <p:cNvSpPr/>
           <p:nvPr/>
         </p:nvSpPr>
@@ -10937,7 +10761,7 @@
             <a:r>
               <a:rPr lang="en-US" sz="1400" b="1" dirty="0">
                 <a:solidFill>
-                  <a:srgbClr val="9A5B12"/>
+                  <a:srgbClr val="E8A857"/>
                 </a:solidFill>
                 <a:latin typeface="Montserrat" pitchFamily="34" charset="0"/>
                 <a:ea typeface="Montserrat" pitchFamily="34" charset="-122"/>
@@ -10951,7 +10775,7 @@
             <a:r>
               <a:rPr lang="en-US" sz="1200" dirty="0">
                 <a:solidFill>
-                  <a:srgbClr val="555B66"/>
+                  <a:srgbClr val="AFA9BE"/>
                 </a:solidFill>
                 <a:latin typeface="Montserrat" pitchFamily="34" charset="0"/>
                 <a:ea typeface="Montserrat" pitchFamily="34" charset="-122"/>
@@ -10993,7 +10817,7 @@
             <a:lvl1pPr>
               <a:defRPr sz="850">
                 <a:solidFill>
-                  <a:srgbClr val="9AA1AD"/>
+                  <a:srgbClr val="8A82A0"/>
                 </a:solidFill>
                 <a:latin typeface="Courier New"/>
                 <a:ea typeface="Courier New"/>
@@ -11038,29 +10862,7 @@
       </p:grpSpPr>
       <p:sp>
         <p:nvSpPr>
-          <p:cNvPr id="2" name="Shape 0"/>
-          <p:cNvSpPr/>
-          <p:nvPr/>
-        </p:nvSpPr>
-        <p:spPr>
-          <a:xfrm>
-            <a:off x="231343" y="194767"/>
-            <a:ext cx="11716207" cy="6473952"/>
-          </a:xfrm>
-          <a:prstGeom prst="roundRect">
-            <a:avLst>
-              <a:gd name="adj" fmla="val 3107"/>
-            </a:avLst>
-          </a:prstGeom>
-          <a:solidFill>
-            <a:srgbClr val="FFFFFF"/>
-          </a:solidFill>
-          <a:ln/>
-        </p:spPr>
-      </p:sp>
-      <p:sp>
-        <p:nvSpPr>
-          <p:cNvPr id="3" name="Text 1"/>
+          <p:cNvPr id="2" name="Text 0"/>
           <p:cNvSpPr/>
           <p:nvPr/>
         </p:nvSpPr>
@@ -11085,7 +10887,7 @@
             <a:r>
               <a:rPr lang="en-US" sz="2400" b="1" dirty="0">
                 <a:solidFill>
-                  <a:srgbClr val="111318"/>
+                  <a:srgbClr val="FFFFFF"/>
                 </a:solidFill>
                 <a:latin typeface="Montserrat" pitchFamily="34" charset="0"/>
                 <a:ea typeface="Montserrat" pitchFamily="34" charset="-122"/>
@@ -11099,7 +10901,7 @@
       </p:sp>
       <p:sp>
         <p:nvSpPr>
-          <p:cNvPr id="4" name="Shape 2"/>
+          <p:cNvPr id="3" name="Shape 1"/>
           <p:cNvSpPr/>
           <p:nvPr/>
         </p:nvSpPr>
@@ -11114,14 +10916,14 @@
             </a:avLst>
           </a:prstGeom>
           <a:solidFill>
-            <a:srgbClr val="9A5B12"/>
+            <a:srgbClr val="E8A857"/>
           </a:solidFill>
           <a:ln/>
         </p:spPr>
       </p:sp>
       <p:sp>
         <p:nvSpPr>
-          <p:cNvPr id="5" name="Text 3"/>
+          <p:cNvPr id="4" name="Text 2"/>
           <p:cNvSpPr/>
           <p:nvPr/>
         </p:nvSpPr>
@@ -11146,7 +10948,7 @@
             <a:r>
               <a:rPr lang="en-US" sz="900" b="1" spc="100" kern="0" dirty="0">
                 <a:solidFill>
-                  <a:srgbClr val="FFFFFF"/>
+                  <a:srgbClr val="2A2010"/>
                 </a:solidFill>
                 <a:latin typeface="Courier New" pitchFamily="34" charset="0"/>
                 <a:ea typeface="Courier New" pitchFamily="34" charset="-122"/>
@@ -11160,7 +10962,7 @@
       </p:sp>
       <p:pic>
         <p:nvPicPr>
-          <p:cNvPr id="6" name="Image 0" descr="preencoded.png">    </p:cNvPr>
+          <p:cNvPr id="5" name="Image 0" descr="preencoded.png">    </p:cNvPr>
           <p:cNvPicPr>
             <a:picLocks noChangeAspect="1"/>
           </p:cNvPicPr>
@@ -11184,7 +10986,7 @@
       </p:pic>
       <p:sp>
         <p:nvSpPr>
-          <p:cNvPr id="7" name="Shape 4"/>
+          <p:cNvPr id="6" name="Shape 3"/>
           <p:cNvSpPr/>
           <p:nvPr/>
         </p:nvSpPr>
@@ -11199,14 +11001,14 @@
             </a:avLst>
           </a:prstGeom>
           <a:solidFill>
-            <a:srgbClr val="E9F4EF"/>
+            <a:srgbClr val="102A20"/>
           </a:solidFill>
           <a:ln/>
         </p:spPr>
       </p:sp>
       <p:sp>
         <p:nvSpPr>
-          <p:cNvPr id="8" name="Text 5"/>
+          <p:cNvPr id="7" name="Text 4"/>
           <p:cNvSpPr/>
           <p:nvPr/>
         </p:nvSpPr>
@@ -11231,7 +11033,7 @@
             <a:r>
               <a:rPr lang="en-US" sz="1450" b="1" dirty="0">
                 <a:solidFill>
-                  <a:srgbClr val="1B8A5A"/>
+                  <a:srgbClr val="5FD6A0"/>
                 </a:solidFill>
                 <a:latin typeface="Montserrat" pitchFamily="34" charset="0"/>
                 <a:ea typeface="Montserrat" pitchFamily="34" charset="-122"/>
@@ -11245,7 +11047,7 @@
       </p:sp>
       <p:sp>
         <p:nvSpPr>
-          <p:cNvPr id="9" name="Text 6"/>
+          <p:cNvPr id="8" name="Text 5"/>
           <p:cNvSpPr/>
           <p:nvPr/>
         </p:nvSpPr>
@@ -11273,7 +11075,7 @@
             <a:r>
               <a:rPr lang="en-US" sz="1200" dirty="0">
                 <a:solidFill>
-                  <a:srgbClr val="111318"/>
+                  <a:srgbClr val="FFFFFF"/>
                 </a:solidFill>
                 <a:latin typeface="Montserrat" pitchFamily="34" charset="0"/>
                 <a:ea typeface="Montserrat" pitchFamily="34" charset="-122"/>
@@ -11287,7 +11089,7 @@
       </p:sp>
       <p:sp>
         <p:nvSpPr>
-          <p:cNvPr id="10" name="Shape 7"/>
+          <p:cNvPr id="9" name="Shape 6"/>
           <p:cNvSpPr/>
           <p:nvPr/>
         </p:nvSpPr>
@@ -11302,14 +11104,14 @@
             </a:avLst>
           </a:prstGeom>
           <a:solidFill>
-            <a:srgbClr val="EFEAFE"/>
+            <a:srgbClr val="1C1140"/>
           </a:solidFill>
           <a:ln/>
         </p:spPr>
       </p:sp>
       <p:sp>
         <p:nvSpPr>
-          <p:cNvPr id="11" name="Text 8"/>
+          <p:cNvPr id="10" name="Text 7"/>
           <p:cNvSpPr/>
           <p:nvPr/>
         </p:nvSpPr>
@@ -11334,7 +11136,7 @@
             <a:r>
               <a:rPr lang="en-US" sz="1450" b="1" dirty="0">
                 <a:solidFill>
-                  <a:srgbClr val="5A05F4"/>
+                  <a:srgbClr val="C9A6FF"/>
                 </a:solidFill>
                 <a:latin typeface="Montserrat" pitchFamily="34" charset="0"/>
                 <a:ea typeface="Montserrat" pitchFamily="34" charset="-122"/>
@@ -11348,7 +11150,7 @@
       </p:sp>
       <p:sp>
         <p:nvSpPr>
-          <p:cNvPr id="12" name="Text 9"/>
+          <p:cNvPr id="11" name="Text 8"/>
           <p:cNvSpPr/>
           <p:nvPr/>
         </p:nvSpPr>
@@ -11376,7 +11178,7 @@
             <a:r>
               <a:rPr lang="en-US" sz="1200" dirty="0">
                 <a:solidFill>
-                  <a:srgbClr val="111318"/>
+                  <a:srgbClr val="FFFFFF"/>
                 </a:solidFill>
                 <a:latin typeface="Montserrat" pitchFamily="34" charset="0"/>
                 <a:ea typeface="Montserrat" pitchFamily="34" charset="-122"/>
@@ -11390,7 +11192,7 @@
       </p:sp>
       <p:sp>
         <p:nvSpPr>
-          <p:cNvPr id="13" name="Shape 10"/>
+          <p:cNvPr id="12" name="Shape 9"/>
           <p:cNvSpPr/>
           <p:nvPr/>
         </p:nvSpPr>
@@ -11405,11 +11207,11 @@
             </a:avLst>
           </a:prstGeom>
           <a:solidFill>
-            <a:srgbClr val="FFFFFF"/>
+            <a:srgbClr val="17141F"/>
           </a:solidFill>
           <a:ln w="12700">
             <a:solidFill>
-              <a:srgbClr val="E6E7EC"/>
+              <a:srgbClr val="2E2A3A"/>
             </a:solidFill>
             <a:prstDash val="solid"/>
           </a:ln>
@@ -11417,7 +11219,7 @@
       </p:sp>
       <p:sp>
         <p:nvSpPr>
-          <p:cNvPr id="14" name="Text 11"/>
+          <p:cNvPr id="13" name="Text 10"/>
           <p:cNvSpPr/>
           <p:nvPr/>
         </p:nvSpPr>
@@ -11442,7 +11244,7 @@
             <a:r>
               <a:rPr lang="en-US" sz="1450" b="1" dirty="0">
                 <a:solidFill>
-                  <a:srgbClr val="111318"/>
+                  <a:srgbClr val="FFFFFF"/>
                 </a:solidFill>
                 <a:latin typeface="Montserrat" pitchFamily="34" charset="0"/>
                 <a:ea typeface="Montserrat" pitchFamily="34" charset="-122"/>
@@ -11456,7 +11258,7 @@
       </p:sp>
       <p:sp>
         <p:nvSpPr>
-          <p:cNvPr id="15" name="Text 12"/>
+          <p:cNvPr id="14" name="Text 11"/>
           <p:cNvSpPr/>
           <p:nvPr/>
         </p:nvSpPr>
@@ -11484,7 +11286,7 @@
             <a:r>
               <a:rPr lang="en-US" sz="1200" dirty="0">
                 <a:solidFill>
-                  <a:srgbClr val="555B66"/>
+                  <a:srgbClr val="AFA9BE"/>
                 </a:solidFill>
                 <a:latin typeface="Montserrat" pitchFamily="34" charset="0"/>
                 <a:ea typeface="Montserrat" pitchFamily="34" charset="-122"/>
@@ -11498,7 +11300,7 @@
       </p:sp>
       <p:sp>
         <p:nvSpPr>
-          <p:cNvPr id="16" name="Shape 13"/>
+          <p:cNvPr id="15" name="Shape 12"/>
           <p:cNvSpPr/>
           <p:nvPr/>
         </p:nvSpPr>
@@ -11513,11 +11315,11 @@
             </a:avLst>
           </a:prstGeom>
           <a:solidFill>
-            <a:srgbClr val="FFFFFF"/>
+            <a:srgbClr val="17141F"/>
           </a:solidFill>
           <a:ln w="12700">
             <a:solidFill>
-              <a:srgbClr val="E6E7EC"/>
+              <a:srgbClr val="2E2A3A"/>
             </a:solidFill>
             <a:prstDash val="solid"/>
           </a:ln>
@@ -11525,7 +11327,7 @@
       </p:sp>
       <p:sp>
         <p:nvSpPr>
-          <p:cNvPr id="17" name="Text 14"/>
+          <p:cNvPr id="16" name="Text 13"/>
           <p:cNvSpPr/>
           <p:nvPr/>
         </p:nvSpPr>
@@ -11553,7 +11355,7 @@
             <a:r>
               <a:rPr lang="en-US" sz="1300" dirty="0">
                 <a:solidFill>
-                  <a:srgbClr val="111318"/>
+                  <a:srgbClr val="FFFFFF"/>
                 </a:solidFill>
                 <a:latin typeface="Montserrat" pitchFamily="34" charset="0"/>
                 <a:ea typeface="Montserrat" pitchFamily="34" charset="-122"/>
@@ -11595,7 +11397,7 @@
             <a:lvl1pPr>
               <a:defRPr sz="850">
                 <a:solidFill>
-                  <a:srgbClr val="9AA1AD"/>
+                  <a:srgbClr val="8A82A0"/>
                 </a:solidFill>
                 <a:latin typeface="Courier New"/>
                 <a:ea typeface="Courier New"/>
@@ -11640,29 +11442,7 @@
       </p:grpSpPr>
       <p:sp>
         <p:nvSpPr>
-          <p:cNvPr id="2" name="Shape 0"/>
-          <p:cNvSpPr/>
-          <p:nvPr/>
-        </p:nvSpPr>
-        <p:spPr>
-          <a:xfrm>
-            <a:off x="231343" y="194767"/>
-            <a:ext cx="11716207" cy="6473952"/>
-          </a:xfrm>
-          <a:prstGeom prst="roundRect">
-            <a:avLst>
-              <a:gd name="adj" fmla="val 3107"/>
-            </a:avLst>
-          </a:prstGeom>
-          <a:solidFill>
-            <a:srgbClr val="FFFFFF"/>
-          </a:solidFill>
-          <a:ln/>
-        </p:spPr>
-      </p:sp>
-      <p:sp>
-        <p:nvSpPr>
-          <p:cNvPr id="3" name="Text 1"/>
+          <p:cNvPr id="2" name="Text 0"/>
           <p:cNvSpPr/>
           <p:nvPr/>
         </p:nvSpPr>
@@ -11687,7 +11467,7 @@
             <a:r>
               <a:rPr lang="en-US" sz="2400" b="1" dirty="0">
                 <a:solidFill>
-                  <a:srgbClr val="111318"/>
+                  <a:srgbClr val="FFFFFF"/>
                 </a:solidFill>
                 <a:latin typeface="Montserrat" pitchFamily="34" charset="0"/>
                 <a:ea typeface="Montserrat" pitchFamily="34" charset="-122"/>
@@ -11701,7 +11481,7 @@
       </p:sp>
       <p:sp>
         <p:nvSpPr>
-          <p:cNvPr id="4" name="Shape 2"/>
+          <p:cNvPr id="3" name="Shape 1"/>
           <p:cNvSpPr/>
           <p:nvPr/>
         </p:nvSpPr>
@@ -11716,14 +11496,14 @@
             </a:avLst>
           </a:prstGeom>
           <a:solidFill>
-            <a:srgbClr val="9A5B12"/>
+            <a:srgbClr val="E8A857"/>
           </a:solidFill>
           <a:ln/>
         </p:spPr>
       </p:sp>
       <p:sp>
         <p:nvSpPr>
-          <p:cNvPr id="5" name="Text 3"/>
+          <p:cNvPr id="4" name="Text 2"/>
           <p:cNvSpPr/>
           <p:nvPr/>
         </p:nvSpPr>
@@ -11748,7 +11528,7 @@
             <a:r>
               <a:rPr lang="en-US" sz="900" b="1" spc="100" kern="0" dirty="0">
                 <a:solidFill>
-                  <a:srgbClr val="FFFFFF"/>
+                  <a:srgbClr val="2A2010"/>
                 </a:solidFill>
                 <a:latin typeface="Courier New" pitchFamily="34" charset="0"/>
                 <a:ea typeface="Courier New" pitchFamily="34" charset="-122"/>
@@ -11762,7 +11542,7 @@
       </p:sp>
       <p:pic>
         <p:nvPicPr>
-          <p:cNvPr id="6" name="Image 0" descr="preencoded.png">    </p:cNvPr>
+          <p:cNvPr id="5" name="Image 0" descr="preencoded.png">    </p:cNvPr>
           <p:cNvPicPr>
             <a:picLocks noChangeAspect="1"/>
           </p:cNvPicPr>
@@ -11786,7 +11566,7 @@
       </p:pic>
       <p:sp>
         <p:nvSpPr>
-          <p:cNvPr id="7" name="Shape 4"/>
+          <p:cNvPr id="6" name="Shape 3"/>
           <p:cNvSpPr/>
           <p:nvPr/>
         </p:nvSpPr>
@@ -11801,11 +11581,11 @@
             </a:avLst>
           </a:prstGeom>
           <a:solidFill>
-            <a:srgbClr val="FFFFFF"/>
+            <a:srgbClr val="17141F"/>
           </a:solidFill>
           <a:ln w="12700">
             <a:solidFill>
-              <a:srgbClr val="E6E7EC"/>
+              <a:srgbClr val="2E2A3A"/>
             </a:solidFill>
             <a:prstDash val="solid"/>
           </a:ln>
@@ -11813,7 +11593,7 @@
       </p:sp>
       <p:sp>
         <p:nvSpPr>
-          <p:cNvPr id="8" name="Shape 5"/>
+          <p:cNvPr id="7" name="Shape 4"/>
           <p:cNvSpPr/>
           <p:nvPr/>
         </p:nvSpPr>
@@ -11828,11 +11608,11 @@
             </a:avLst>
           </a:prstGeom>
           <a:solidFill>
-            <a:srgbClr val="EFEAFE"/>
+            <a:srgbClr val="1C1140"/>
           </a:solidFill>
           <a:ln w="12700">
             <a:solidFill>
-              <a:srgbClr val="5A05F4"/>
+              <a:srgbClr val="C9A6FF"/>
             </a:solidFill>
             <a:prstDash val="solid"/>
           </a:ln>
@@ -11840,7 +11620,7 @@
       </p:sp>
       <p:sp>
         <p:nvSpPr>
-          <p:cNvPr id="9" name="Shape 6"/>
+          <p:cNvPr id="8" name="Shape 5"/>
           <p:cNvSpPr/>
           <p:nvPr/>
         </p:nvSpPr>
@@ -11853,14 +11633,14 @@
             <a:avLst/>
           </a:prstGeom>
           <a:solidFill>
-            <a:srgbClr val="5A05F4"/>
+            <a:srgbClr val="C9A6FF"/>
           </a:solidFill>
           <a:ln/>
         </p:spPr>
       </p:sp>
       <p:sp>
         <p:nvSpPr>
-          <p:cNvPr id="10" name="Shape 7"/>
+          <p:cNvPr id="9" name="Shape 6"/>
           <p:cNvSpPr/>
           <p:nvPr/>
         </p:nvSpPr>
@@ -11873,14 +11653,14 @@
             <a:avLst/>
           </a:prstGeom>
           <a:solidFill>
-            <a:srgbClr val="5A05F4"/>
+            <a:srgbClr val="C9A6FF"/>
           </a:solidFill>
           <a:ln/>
         </p:spPr>
       </p:sp>
       <p:sp>
         <p:nvSpPr>
-          <p:cNvPr id="11" name="Text 8"/>
+          <p:cNvPr id="10" name="Text 7"/>
           <p:cNvSpPr/>
           <p:nvPr/>
         </p:nvSpPr>
@@ -11905,7 +11685,7 @@
             <a:r>
               <a:rPr lang="en-US" sz="1250" dirty="0">
                 <a:solidFill>
-                  <a:srgbClr val="111318"/>
+                  <a:srgbClr val="FFFFFF"/>
                 </a:solidFill>
                 <a:latin typeface="Montserrat" pitchFamily="34" charset="0"/>
                 <a:ea typeface="Montserrat" pitchFamily="34" charset="-122"/>
@@ -11919,7 +11699,7 @@
       </p:sp>
       <p:sp>
         <p:nvSpPr>
-          <p:cNvPr id="12" name="Shape 9"/>
+          <p:cNvPr id="11" name="Shape 8"/>
           <p:cNvSpPr/>
           <p:nvPr/>
         </p:nvSpPr>
@@ -11934,11 +11714,11 @@
             </a:avLst>
           </a:prstGeom>
           <a:solidFill>
-            <a:srgbClr val="EFEAFE"/>
+            <a:srgbClr val="1C1140"/>
           </a:solidFill>
           <a:ln w="12700">
             <a:solidFill>
-              <a:srgbClr val="5A05F4"/>
+              <a:srgbClr val="C9A6FF"/>
             </a:solidFill>
             <a:prstDash val="solid"/>
           </a:ln>
@@ -11946,7 +11726,7 @@
       </p:sp>
       <p:sp>
         <p:nvSpPr>
-          <p:cNvPr id="13" name="Shape 10"/>
+          <p:cNvPr id="12" name="Shape 9"/>
           <p:cNvSpPr/>
           <p:nvPr/>
         </p:nvSpPr>
@@ -11959,14 +11739,14 @@
             <a:avLst/>
           </a:prstGeom>
           <a:solidFill>
-            <a:srgbClr val="5A05F4"/>
+            <a:srgbClr val="C9A6FF"/>
           </a:solidFill>
           <a:ln/>
         </p:spPr>
       </p:sp>
       <p:sp>
         <p:nvSpPr>
-          <p:cNvPr id="14" name="Shape 11"/>
+          <p:cNvPr id="13" name="Shape 10"/>
           <p:cNvSpPr/>
           <p:nvPr/>
         </p:nvSpPr>
@@ -11979,14 +11759,14 @@
             <a:avLst/>
           </a:prstGeom>
           <a:solidFill>
-            <a:srgbClr val="5A05F4"/>
+            <a:srgbClr val="C9A6FF"/>
           </a:solidFill>
           <a:ln/>
         </p:spPr>
       </p:sp>
       <p:sp>
         <p:nvSpPr>
-          <p:cNvPr id="15" name="Text 12"/>
+          <p:cNvPr id="14" name="Text 11"/>
           <p:cNvSpPr/>
           <p:nvPr/>
         </p:nvSpPr>
@@ -12011,7 +11791,7 @@
             <a:r>
               <a:rPr lang="en-US" sz="1250" dirty="0">
                 <a:solidFill>
-                  <a:srgbClr val="111318"/>
+                  <a:srgbClr val="FFFFFF"/>
                 </a:solidFill>
                 <a:latin typeface="Montserrat" pitchFamily="34" charset="0"/>
                 <a:ea typeface="Montserrat" pitchFamily="34" charset="-122"/>
@@ -12025,7 +11805,7 @@
       </p:sp>
       <p:sp>
         <p:nvSpPr>
-          <p:cNvPr id="16" name="Shape 13"/>
+          <p:cNvPr id="15" name="Shape 12"/>
           <p:cNvSpPr/>
           <p:nvPr/>
         </p:nvSpPr>
@@ -12040,11 +11820,11 @@
             </a:avLst>
           </a:prstGeom>
           <a:solidFill>
-            <a:srgbClr val="EFEAFE"/>
+            <a:srgbClr val="1C1140"/>
           </a:solidFill>
           <a:ln w="12700">
             <a:solidFill>
-              <a:srgbClr val="5A05F4"/>
+              <a:srgbClr val="C9A6FF"/>
             </a:solidFill>
             <a:prstDash val="solid"/>
           </a:ln>
@@ -12052,7 +11832,7 @@
       </p:sp>
       <p:sp>
         <p:nvSpPr>
-          <p:cNvPr id="17" name="Shape 14"/>
+          <p:cNvPr id="16" name="Shape 13"/>
           <p:cNvSpPr/>
           <p:nvPr/>
         </p:nvSpPr>
@@ -12065,14 +11845,14 @@
             <a:avLst/>
           </a:prstGeom>
           <a:solidFill>
-            <a:srgbClr val="5A05F4"/>
+            <a:srgbClr val="C9A6FF"/>
           </a:solidFill>
           <a:ln/>
         </p:spPr>
       </p:sp>
       <p:sp>
         <p:nvSpPr>
-          <p:cNvPr id="18" name="Shape 15"/>
+          <p:cNvPr id="17" name="Shape 14"/>
           <p:cNvSpPr/>
           <p:nvPr/>
         </p:nvSpPr>
@@ -12085,14 +11865,14 @@
             <a:avLst/>
           </a:prstGeom>
           <a:solidFill>
-            <a:srgbClr val="5A05F4"/>
+            <a:srgbClr val="C9A6FF"/>
           </a:solidFill>
           <a:ln/>
         </p:spPr>
       </p:sp>
       <p:sp>
         <p:nvSpPr>
-          <p:cNvPr id="19" name="Text 16"/>
+          <p:cNvPr id="18" name="Text 15"/>
           <p:cNvSpPr/>
           <p:nvPr/>
         </p:nvSpPr>
@@ -12117,7 +11897,7 @@
             <a:r>
               <a:rPr lang="en-US" sz="1250" dirty="0">
                 <a:solidFill>
-                  <a:srgbClr val="111318"/>
+                  <a:srgbClr val="FFFFFF"/>
                 </a:solidFill>
                 <a:latin typeface="Montserrat" pitchFamily="34" charset="0"/>
                 <a:ea typeface="Montserrat" pitchFamily="34" charset="-122"/>
@@ -12131,7 +11911,7 @@
       </p:sp>
       <p:sp>
         <p:nvSpPr>
-          <p:cNvPr id="20" name="Shape 17"/>
+          <p:cNvPr id="19" name="Shape 16"/>
           <p:cNvSpPr/>
           <p:nvPr/>
         </p:nvSpPr>
@@ -12146,11 +11926,11 @@
             </a:avLst>
           </a:prstGeom>
           <a:solidFill>
-            <a:srgbClr val="EFEAFE"/>
+            <a:srgbClr val="1C1140"/>
           </a:solidFill>
           <a:ln w="12700">
             <a:solidFill>
-              <a:srgbClr val="5A05F4"/>
+              <a:srgbClr val="C9A6FF"/>
             </a:solidFill>
             <a:prstDash val="solid"/>
           </a:ln>
@@ -12158,7 +11938,7 @@
       </p:sp>
       <p:sp>
         <p:nvSpPr>
-          <p:cNvPr id="21" name="Shape 18"/>
+          <p:cNvPr id="20" name="Shape 17"/>
           <p:cNvSpPr/>
           <p:nvPr/>
         </p:nvSpPr>
@@ -12171,14 +11951,14 @@
             <a:avLst/>
           </a:prstGeom>
           <a:solidFill>
-            <a:srgbClr val="5A05F4"/>
+            <a:srgbClr val="C9A6FF"/>
           </a:solidFill>
           <a:ln/>
         </p:spPr>
       </p:sp>
       <p:sp>
         <p:nvSpPr>
-          <p:cNvPr id="22" name="Shape 19"/>
+          <p:cNvPr id="21" name="Shape 18"/>
           <p:cNvSpPr/>
           <p:nvPr/>
         </p:nvSpPr>
@@ -12191,14 +11971,14 @@
             <a:avLst/>
           </a:prstGeom>
           <a:solidFill>
-            <a:srgbClr val="5A05F4"/>
+            <a:srgbClr val="C9A6FF"/>
           </a:solidFill>
           <a:ln/>
         </p:spPr>
       </p:sp>
       <p:sp>
         <p:nvSpPr>
-          <p:cNvPr id="23" name="Text 20"/>
+          <p:cNvPr id="22" name="Text 19"/>
           <p:cNvSpPr/>
           <p:nvPr/>
         </p:nvSpPr>
@@ -12223,7 +12003,7 @@
             <a:r>
               <a:rPr lang="en-US" sz="1250" dirty="0">
                 <a:solidFill>
-                  <a:srgbClr val="111318"/>
+                  <a:srgbClr val="FFFFFF"/>
                 </a:solidFill>
                 <a:latin typeface="Montserrat" pitchFamily="34" charset="0"/>
                 <a:ea typeface="Montserrat" pitchFamily="34" charset="-122"/>
@@ -12237,7 +12017,7 @@
       </p:sp>
       <p:sp>
         <p:nvSpPr>
-          <p:cNvPr id="24" name="Text 21"/>
+          <p:cNvPr id="23" name="Text 20"/>
           <p:cNvSpPr/>
           <p:nvPr/>
         </p:nvSpPr>
@@ -12262,7 +12042,7 @@
             <a:r>
               <a:rPr lang="en-US" sz="1200" i="1" dirty="0">
                 <a:solidFill>
-                  <a:srgbClr val="9AA1AD"/>
+                  <a:srgbClr val="8A82A0"/>
                 </a:solidFill>
                 <a:latin typeface="Montserrat" pitchFamily="34" charset="0"/>
                 <a:ea typeface="Montserrat" pitchFamily="34" charset="-122"/>
@@ -12304,7 +12084,7 @@
             <a:lvl1pPr>
               <a:defRPr sz="850">
                 <a:solidFill>
-                  <a:srgbClr val="9AA1AD"/>
+                  <a:srgbClr val="8A82A0"/>
                 </a:solidFill>
                 <a:latin typeface="Courier New"/>
                 <a:ea typeface="Courier New"/>
@@ -12349,29 +12129,7 @@
       </p:grpSpPr>
       <p:sp>
         <p:nvSpPr>
-          <p:cNvPr id="2" name="Shape 0"/>
-          <p:cNvSpPr/>
-          <p:nvPr/>
-        </p:nvSpPr>
-        <p:spPr>
-          <a:xfrm>
-            <a:off x="231343" y="194767"/>
-            <a:ext cx="11716207" cy="6473952"/>
-          </a:xfrm>
-          <a:prstGeom prst="roundRect">
-            <a:avLst>
-              <a:gd name="adj" fmla="val 3107"/>
-            </a:avLst>
-          </a:prstGeom>
-          <a:solidFill>
-            <a:srgbClr val="FFFFFF"/>
-          </a:solidFill>
-          <a:ln/>
-        </p:spPr>
-      </p:sp>
-      <p:sp>
-        <p:nvSpPr>
-          <p:cNvPr id="3" name="Text 1"/>
+          <p:cNvPr id="2" name="Text 0"/>
           <p:cNvSpPr/>
           <p:nvPr/>
         </p:nvSpPr>
@@ -12396,7 +12154,7 @@
             <a:r>
               <a:rPr lang="en-US" sz="2400" b="1" dirty="0">
                 <a:solidFill>
-                  <a:srgbClr val="111318"/>
+                  <a:srgbClr val="FFFFFF"/>
                 </a:solidFill>
                 <a:latin typeface="Montserrat" pitchFamily="34" charset="0"/>
                 <a:ea typeface="Montserrat" pitchFamily="34" charset="-122"/>
@@ -12410,7 +12168,7 @@
       </p:sp>
       <p:sp>
         <p:nvSpPr>
-          <p:cNvPr id="4" name="Text 2"/>
+          <p:cNvPr id="3" name="Text 1"/>
           <p:cNvSpPr/>
           <p:nvPr/>
         </p:nvSpPr>
@@ -12438,7 +12196,7 @@
             <a:r>
               <a:rPr lang="en-US" sz="1300" dirty="0">
                 <a:solidFill>
-                  <a:srgbClr val="555B66"/>
+                  <a:srgbClr val="AFA9BE"/>
                 </a:solidFill>
                 <a:latin typeface="Montserrat" pitchFamily="34" charset="0"/>
                 <a:ea typeface="Montserrat" pitchFamily="34" charset="-122"/>
@@ -12452,7 +12210,7 @@
       </p:sp>
       <p:sp>
         <p:nvSpPr>
-          <p:cNvPr id="5" name="Shape 3"/>
+          <p:cNvPr id="4" name="Shape 2"/>
           <p:cNvSpPr/>
           <p:nvPr/>
         </p:nvSpPr>
@@ -12467,14 +12225,14 @@
             </a:avLst>
           </a:prstGeom>
           <a:solidFill>
-            <a:srgbClr val="5A05F4"/>
+            <a:srgbClr val="C9A6FF"/>
           </a:solidFill>
           <a:ln/>
         </p:spPr>
       </p:sp>
       <p:sp>
         <p:nvSpPr>
-          <p:cNvPr id="6" name="Text 4"/>
+          <p:cNvPr id="5" name="Text 3"/>
           <p:cNvSpPr/>
           <p:nvPr/>
         </p:nvSpPr>
@@ -12499,7 +12257,7 @@
             <a:r>
               <a:rPr lang="en-US" sz="900" b="1" spc="100" kern="0" dirty="0">
                 <a:solidFill>
-                  <a:srgbClr val="FFFFFF"/>
+                  <a:srgbClr val="1C1140"/>
                 </a:solidFill>
                 <a:latin typeface="Courier New" pitchFamily="34" charset="0"/>
                 <a:ea typeface="Courier New" pitchFamily="34" charset="-122"/>
@@ -12513,7 +12271,7 @@
       </p:sp>
       <p:pic>
         <p:nvPicPr>
-          <p:cNvPr id="7" name="Image 0" descr="preencoded.png">    </p:cNvPr>
+          <p:cNvPr id="6" name="Image 0" descr="preencoded.png">    </p:cNvPr>
           <p:cNvPicPr>
             <a:picLocks noChangeAspect="1"/>
           </p:cNvPicPr>
@@ -12537,7 +12295,7 @@
       </p:pic>
       <p:sp>
         <p:nvSpPr>
-          <p:cNvPr id="8" name="Shape 5"/>
+          <p:cNvPr id="7" name="Shape 4"/>
           <p:cNvSpPr/>
           <p:nvPr/>
         </p:nvSpPr>
@@ -12552,11 +12310,11 @@
             </a:avLst>
           </a:prstGeom>
           <a:solidFill>
-            <a:srgbClr val="FFFFFF"/>
+            <a:srgbClr val="17141F"/>
           </a:solidFill>
           <a:ln w="12700">
             <a:solidFill>
-              <a:srgbClr val="E6E7EC"/>
+              <a:srgbClr val="2E2A3A"/>
             </a:solidFill>
             <a:prstDash val="solid"/>
           </a:ln>
@@ -12564,7 +12322,7 @@
       </p:sp>
       <p:sp>
         <p:nvSpPr>
-          <p:cNvPr id="9" name="Shape 6"/>
+          <p:cNvPr id="8" name="Shape 5"/>
           <p:cNvSpPr/>
           <p:nvPr/>
         </p:nvSpPr>
@@ -12584,7 +12342,7 @@
       </p:sp>
       <p:sp>
         <p:nvSpPr>
-          <p:cNvPr id="10" name="Text 7"/>
+          <p:cNvPr id="9" name="Text 6"/>
           <p:cNvSpPr/>
           <p:nvPr/>
         </p:nvSpPr>
@@ -12623,7 +12381,7 @@
       </p:sp>
       <p:sp>
         <p:nvSpPr>
-          <p:cNvPr id="11" name="Text 8"/>
+          <p:cNvPr id="10" name="Text 7"/>
           <p:cNvSpPr/>
           <p:nvPr/>
         </p:nvSpPr>
@@ -12648,7 +12406,7 @@
             <a:r>
               <a:rPr lang="en-US" sz="1450" b="1" dirty="0">
                 <a:solidFill>
-                  <a:srgbClr val="111318"/>
+                  <a:srgbClr val="FFFFFF"/>
                 </a:solidFill>
                 <a:latin typeface="Montserrat" pitchFamily="34" charset="0"/>
                 <a:ea typeface="Montserrat" pitchFamily="34" charset="-122"/>
@@ -12662,7 +12420,7 @@
       </p:sp>
       <p:sp>
         <p:nvSpPr>
-          <p:cNvPr id="12" name="Text 9"/>
+          <p:cNvPr id="11" name="Text 8"/>
           <p:cNvSpPr/>
           <p:nvPr/>
         </p:nvSpPr>
@@ -12690,7 +12448,7 @@
             <a:r>
               <a:rPr lang="en-US" sz="1200" dirty="0">
                 <a:solidFill>
-                  <a:srgbClr val="555B66"/>
+                  <a:srgbClr val="AFA9BE"/>
                 </a:solidFill>
                 <a:latin typeface="Montserrat" pitchFamily="34" charset="0"/>
                 <a:ea typeface="Montserrat" pitchFamily="34" charset="-122"/>
@@ -12704,7 +12462,7 @@
       </p:sp>
       <p:sp>
         <p:nvSpPr>
-          <p:cNvPr id="13" name="Shape 10"/>
+          <p:cNvPr id="12" name="Shape 9"/>
           <p:cNvSpPr/>
           <p:nvPr/>
         </p:nvSpPr>
@@ -12719,11 +12477,11 @@
             </a:avLst>
           </a:prstGeom>
           <a:solidFill>
-            <a:srgbClr val="FFFFFF"/>
+            <a:srgbClr val="17141F"/>
           </a:solidFill>
           <a:ln w="12700">
             <a:solidFill>
-              <a:srgbClr val="E6E7EC"/>
+              <a:srgbClr val="2E2A3A"/>
             </a:solidFill>
             <a:prstDash val="solid"/>
           </a:ln>
@@ -12731,7 +12489,7 @@
       </p:sp>
       <p:sp>
         <p:nvSpPr>
-          <p:cNvPr id="14" name="Shape 11"/>
+          <p:cNvPr id="13" name="Shape 10"/>
           <p:cNvSpPr/>
           <p:nvPr/>
         </p:nvSpPr>
@@ -12751,7 +12509,7 @@
       </p:sp>
       <p:sp>
         <p:nvSpPr>
-          <p:cNvPr id="15" name="Text 12"/>
+          <p:cNvPr id="14" name="Text 11"/>
           <p:cNvSpPr/>
           <p:nvPr/>
         </p:nvSpPr>
@@ -12790,7 +12548,7 @@
       </p:sp>
       <p:sp>
         <p:nvSpPr>
-          <p:cNvPr id="16" name="Text 13"/>
+          <p:cNvPr id="15" name="Text 12"/>
           <p:cNvSpPr/>
           <p:nvPr/>
         </p:nvSpPr>
@@ -12815,7 +12573,7 @@
             <a:r>
               <a:rPr lang="en-US" sz="1450" b="1" dirty="0">
                 <a:solidFill>
-                  <a:srgbClr val="111318"/>
+                  <a:srgbClr val="FFFFFF"/>
                 </a:solidFill>
                 <a:latin typeface="Montserrat" pitchFamily="34" charset="0"/>
                 <a:ea typeface="Montserrat" pitchFamily="34" charset="-122"/>
@@ -12829,7 +12587,7 @@
       </p:sp>
       <p:sp>
         <p:nvSpPr>
-          <p:cNvPr id="17" name="Text 14"/>
+          <p:cNvPr id="16" name="Text 13"/>
           <p:cNvSpPr/>
           <p:nvPr/>
         </p:nvSpPr>
@@ -12857,7 +12615,7 @@
             <a:r>
               <a:rPr lang="en-US" sz="1200" dirty="0">
                 <a:solidFill>
-                  <a:srgbClr val="555B66"/>
+                  <a:srgbClr val="AFA9BE"/>
                 </a:solidFill>
                 <a:latin typeface="Montserrat" pitchFamily="34" charset="0"/>
                 <a:ea typeface="Montserrat" pitchFamily="34" charset="-122"/>
@@ -12871,7 +12629,7 @@
       </p:sp>
       <p:sp>
         <p:nvSpPr>
-          <p:cNvPr id="18" name="Shape 15"/>
+          <p:cNvPr id="17" name="Shape 14"/>
           <p:cNvSpPr/>
           <p:nvPr/>
         </p:nvSpPr>
@@ -12886,11 +12644,11 @@
             </a:avLst>
           </a:prstGeom>
           <a:solidFill>
-            <a:srgbClr val="FFFFFF"/>
+            <a:srgbClr val="17141F"/>
           </a:solidFill>
           <a:ln w="12700">
             <a:solidFill>
-              <a:srgbClr val="E6E7EC"/>
+              <a:srgbClr val="2E2A3A"/>
             </a:solidFill>
             <a:prstDash val="solid"/>
           </a:ln>
@@ -12898,7 +12656,7 @@
       </p:sp>
       <p:sp>
         <p:nvSpPr>
-          <p:cNvPr id="19" name="Shape 16"/>
+          <p:cNvPr id="18" name="Shape 15"/>
           <p:cNvSpPr/>
           <p:nvPr/>
         </p:nvSpPr>
@@ -12918,7 +12676,7 @@
       </p:sp>
       <p:sp>
         <p:nvSpPr>
-          <p:cNvPr id="20" name="Text 17"/>
+          <p:cNvPr id="19" name="Text 16"/>
           <p:cNvSpPr/>
           <p:nvPr/>
         </p:nvSpPr>
@@ -12957,7 +12715,7 @@
       </p:sp>
       <p:sp>
         <p:nvSpPr>
-          <p:cNvPr id="21" name="Text 18"/>
+          <p:cNvPr id="20" name="Text 17"/>
           <p:cNvSpPr/>
           <p:nvPr/>
         </p:nvSpPr>
@@ -12982,7 +12740,7 @@
             <a:r>
               <a:rPr lang="en-US" sz="1450" b="1" dirty="0">
                 <a:solidFill>
-                  <a:srgbClr val="111318"/>
+                  <a:srgbClr val="FFFFFF"/>
                 </a:solidFill>
                 <a:latin typeface="Montserrat" pitchFamily="34" charset="0"/>
                 <a:ea typeface="Montserrat" pitchFamily="34" charset="-122"/>
@@ -12996,7 +12754,7 @@
       </p:sp>
       <p:sp>
         <p:nvSpPr>
-          <p:cNvPr id="22" name="Text 19"/>
+          <p:cNvPr id="21" name="Text 18"/>
           <p:cNvSpPr/>
           <p:nvPr/>
         </p:nvSpPr>
@@ -13024,7 +12782,7 @@
             <a:r>
               <a:rPr lang="en-US" sz="1200" dirty="0">
                 <a:solidFill>
-                  <a:srgbClr val="555B66"/>
+                  <a:srgbClr val="AFA9BE"/>
                 </a:solidFill>
                 <a:latin typeface="Montserrat" pitchFamily="34" charset="0"/>
                 <a:ea typeface="Montserrat" pitchFamily="34" charset="-122"/>
@@ -13038,7 +12796,7 @@
       </p:sp>
       <p:sp>
         <p:nvSpPr>
-          <p:cNvPr id="23" name="Shape 20"/>
+          <p:cNvPr id="22" name="Shape 19"/>
           <p:cNvSpPr/>
           <p:nvPr/>
         </p:nvSpPr>
@@ -13053,11 +12811,11 @@
             </a:avLst>
           </a:prstGeom>
           <a:solidFill>
-            <a:srgbClr val="FFFFFF"/>
+            <a:srgbClr val="17141F"/>
           </a:solidFill>
           <a:ln w="12700">
             <a:solidFill>
-              <a:srgbClr val="E6E7EC"/>
+              <a:srgbClr val="2E2A3A"/>
             </a:solidFill>
             <a:prstDash val="solid"/>
           </a:ln>
@@ -13065,7 +12823,7 @@
       </p:sp>
       <p:sp>
         <p:nvSpPr>
-          <p:cNvPr id="24" name="Shape 21"/>
+          <p:cNvPr id="23" name="Shape 20"/>
           <p:cNvSpPr/>
           <p:nvPr/>
         </p:nvSpPr>
@@ -13085,7 +12843,7 @@
       </p:sp>
       <p:sp>
         <p:nvSpPr>
-          <p:cNvPr id="25" name="Text 22"/>
+          <p:cNvPr id="24" name="Text 21"/>
           <p:cNvSpPr/>
           <p:nvPr/>
         </p:nvSpPr>
@@ -13124,7 +12882,7 @@
       </p:sp>
       <p:sp>
         <p:nvSpPr>
-          <p:cNvPr id="26" name="Text 23"/>
+          <p:cNvPr id="25" name="Text 22"/>
           <p:cNvSpPr/>
           <p:nvPr/>
         </p:nvSpPr>
@@ -13149,7 +12907,7 @@
             <a:r>
               <a:rPr lang="en-US" sz="1450" b="1" dirty="0">
                 <a:solidFill>
-                  <a:srgbClr val="111318"/>
+                  <a:srgbClr val="FFFFFF"/>
                 </a:solidFill>
                 <a:latin typeface="Montserrat" pitchFamily="34" charset="0"/>
                 <a:ea typeface="Montserrat" pitchFamily="34" charset="-122"/>
@@ -13163,7 +12921,7 @@
       </p:sp>
       <p:sp>
         <p:nvSpPr>
-          <p:cNvPr id="27" name="Text 24"/>
+          <p:cNvPr id="26" name="Text 23"/>
           <p:cNvSpPr/>
           <p:nvPr/>
         </p:nvSpPr>
@@ -13191,7 +12949,7 @@
             <a:r>
               <a:rPr lang="en-US" sz="1200" dirty="0">
                 <a:solidFill>
-                  <a:srgbClr val="555B66"/>
+                  <a:srgbClr val="AFA9BE"/>
                 </a:solidFill>
                 <a:latin typeface="Montserrat" pitchFamily="34" charset="0"/>
                 <a:ea typeface="Montserrat" pitchFamily="34" charset="-122"/>
@@ -13205,7 +12963,7 @@
       </p:sp>
       <p:sp>
         <p:nvSpPr>
-          <p:cNvPr id="28" name="Shape 25"/>
+          <p:cNvPr id="27" name="Shape 24"/>
           <p:cNvSpPr/>
           <p:nvPr/>
         </p:nvSpPr>
@@ -13220,11 +12978,11 @@
             </a:avLst>
           </a:prstGeom>
           <a:solidFill>
-            <a:srgbClr val="FFFFFF"/>
+            <a:srgbClr val="17141F"/>
           </a:solidFill>
           <a:ln w="12700">
             <a:solidFill>
-              <a:srgbClr val="E6E7EC"/>
+              <a:srgbClr val="2E2A3A"/>
             </a:solidFill>
             <a:prstDash val="solid"/>
           </a:ln>
@@ -13232,7 +12990,7 @@
       </p:sp>
       <p:sp>
         <p:nvSpPr>
-          <p:cNvPr id="29" name="Shape 26"/>
+          <p:cNvPr id="28" name="Shape 25"/>
           <p:cNvSpPr/>
           <p:nvPr/>
         </p:nvSpPr>
@@ -13252,7 +13010,7 @@
       </p:sp>
       <p:sp>
         <p:nvSpPr>
-          <p:cNvPr id="30" name="Text 27"/>
+          <p:cNvPr id="29" name="Text 26"/>
           <p:cNvSpPr/>
           <p:nvPr/>
         </p:nvSpPr>
@@ -13291,7 +13049,7 @@
       </p:sp>
       <p:sp>
         <p:nvSpPr>
-          <p:cNvPr id="31" name="Text 28"/>
+          <p:cNvPr id="30" name="Text 27"/>
           <p:cNvSpPr/>
           <p:nvPr/>
         </p:nvSpPr>
@@ -13316,7 +13074,7 @@
             <a:r>
               <a:rPr lang="en-US" sz="1450" b="1" dirty="0">
                 <a:solidFill>
-                  <a:srgbClr val="111318"/>
+                  <a:srgbClr val="FFFFFF"/>
                 </a:solidFill>
                 <a:latin typeface="Montserrat" pitchFamily="34" charset="0"/>
                 <a:ea typeface="Montserrat" pitchFamily="34" charset="-122"/>
@@ -13330,7 +13088,7 @@
       </p:sp>
       <p:sp>
         <p:nvSpPr>
-          <p:cNvPr id="32" name="Text 29"/>
+          <p:cNvPr id="31" name="Text 28"/>
           <p:cNvSpPr/>
           <p:nvPr/>
         </p:nvSpPr>
@@ -13358,7 +13116,7 @@
             <a:r>
               <a:rPr lang="en-US" sz="1200" dirty="0">
                 <a:solidFill>
-                  <a:srgbClr val="555B66"/>
+                  <a:srgbClr val="AFA9BE"/>
                 </a:solidFill>
                 <a:latin typeface="Montserrat" pitchFamily="34" charset="0"/>
                 <a:ea typeface="Montserrat" pitchFamily="34" charset="-122"/>
@@ -13400,7 +13158,7 @@
             <a:lvl1pPr>
               <a:defRPr sz="850">
                 <a:solidFill>
-                  <a:srgbClr val="9AA1AD"/>
+                  <a:srgbClr val="8A82A0"/>
                 </a:solidFill>
                 <a:latin typeface="Courier New"/>
                 <a:ea typeface="Courier New"/>
@@ -13445,29 +13203,7 @@
       </p:grpSpPr>
       <p:sp>
         <p:nvSpPr>
-          <p:cNvPr id="2" name="Shape 0"/>
-          <p:cNvSpPr/>
-          <p:nvPr/>
-        </p:nvSpPr>
-        <p:spPr>
-          <a:xfrm>
-            <a:off x="231343" y="194767"/>
-            <a:ext cx="11716207" cy="6473952"/>
-          </a:xfrm>
-          <a:prstGeom prst="roundRect">
-            <a:avLst>
-              <a:gd name="adj" fmla="val 3107"/>
-            </a:avLst>
-          </a:prstGeom>
-          <a:solidFill>
-            <a:srgbClr val="FFFFFF"/>
-          </a:solidFill>
-          <a:ln/>
-        </p:spPr>
-      </p:sp>
-      <p:sp>
-        <p:nvSpPr>
-          <p:cNvPr id="3" name="Text 1"/>
+          <p:cNvPr id="2" name="Text 0"/>
           <p:cNvSpPr/>
           <p:nvPr/>
         </p:nvSpPr>
@@ -13492,7 +13228,7 @@
             <a:r>
               <a:rPr lang="en-US" sz="2400" b="1" dirty="0">
                 <a:solidFill>
-                  <a:srgbClr val="111318"/>
+                  <a:srgbClr val="FFFFFF"/>
                 </a:solidFill>
                 <a:latin typeface="Montserrat" pitchFamily="34" charset="0"/>
                 <a:ea typeface="Montserrat" pitchFamily="34" charset="-122"/>
@@ -13506,7 +13242,7 @@
       </p:sp>
       <p:sp>
         <p:nvSpPr>
-          <p:cNvPr id="4" name="Shape 2"/>
+          <p:cNvPr id="3" name="Shape 1"/>
           <p:cNvSpPr/>
           <p:nvPr/>
         </p:nvSpPr>
@@ -13521,14 +13257,14 @@
             </a:avLst>
           </a:prstGeom>
           <a:solidFill>
-            <a:srgbClr val="9A5B12"/>
+            <a:srgbClr val="E8A857"/>
           </a:solidFill>
           <a:ln/>
         </p:spPr>
       </p:sp>
       <p:sp>
         <p:nvSpPr>
-          <p:cNvPr id="5" name="Text 3"/>
+          <p:cNvPr id="4" name="Text 2"/>
           <p:cNvSpPr/>
           <p:nvPr/>
         </p:nvSpPr>
@@ -13553,7 +13289,7 @@
             <a:r>
               <a:rPr lang="en-US" sz="900" b="1" spc="100" kern="0" dirty="0">
                 <a:solidFill>
-                  <a:srgbClr val="FFFFFF"/>
+                  <a:srgbClr val="2A2010"/>
                 </a:solidFill>
                 <a:latin typeface="Courier New" pitchFamily="34" charset="0"/>
                 <a:ea typeface="Courier New" pitchFamily="34" charset="-122"/>
@@ -13567,7 +13303,7 @@
       </p:sp>
       <p:pic>
         <p:nvPicPr>
-          <p:cNvPr id="6" name="Image 0" descr="preencoded.png">    </p:cNvPr>
+          <p:cNvPr id="5" name="Image 0" descr="preencoded.png">    </p:cNvPr>
           <p:cNvPicPr>
             <a:picLocks noChangeAspect="1"/>
           </p:cNvPicPr>
@@ -13591,7 +13327,7 @@
       </p:pic>
       <p:sp>
         <p:nvSpPr>
-          <p:cNvPr id="7" name="Shape 4"/>
+          <p:cNvPr id="6" name="Shape 3"/>
           <p:cNvSpPr/>
           <p:nvPr/>
         </p:nvSpPr>
@@ -13606,11 +13342,11 @@
             </a:avLst>
           </a:prstGeom>
           <a:solidFill>
-            <a:srgbClr val="FFFFFF"/>
+            <a:srgbClr val="17141F"/>
           </a:solidFill>
           <a:ln w="12700">
             <a:solidFill>
-              <a:srgbClr val="E6E7EC"/>
+              <a:srgbClr val="2E2A3A"/>
             </a:solidFill>
             <a:prstDash val="solid"/>
           </a:ln>
@@ -13618,7 +13354,7 @@
       </p:sp>
       <p:sp>
         <p:nvSpPr>
-          <p:cNvPr id="8" name="Shape 5"/>
+          <p:cNvPr id="7" name="Shape 4"/>
           <p:cNvSpPr/>
           <p:nvPr/>
         </p:nvSpPr>
@@ -13631,14 +13367,14 @@
             <a:avLst/>
           </a:prstGeom>
           <a:solidFill>
-            <a:srgbClr val="FBE9E9"/>
+            <a:srgbClr val="2E1418"/>
           </a:solidFill>
           <a:ln/>
         </p:spPr>
       </p:sp>
       <p:sp>
         <p:nvSpPr>
-          <p:cNvPr id="9" name="Shape 6"/>
+          <p:cNvPr id="8" name="Shape 5"/>
           <p:cNvSpPr/>
           <p:nvPr/>
         </p:nvSpPr>
@@ -13651,14 +13387,14 @@
             <a:avLst/>
           </a:prstGeom>
           <a:solidFill>
-            <a:srgbClr val="C62A2A"/>
+            <a:srgbClr val="FF7B7B"/>
           </a:solidFill>
           <a:ln/>
         </p:spPr>
       </p:sp>
       <p:sp>
         <p:nvSpPr>
-          <p:cNvPr id="10" name="Shape 7"/>
+          <p:cNvPr id="9" name="Shape 6"/>
           <p:cNvSpPr/>
           <p:nvPr/>
         </p:nvSpPr>
@@ -13671,14 +13407,14 @@
             <a:avLst/>
           </a:prstGeom>
           <a:solidFill>
-            <a:srgbClr val="C62A2A"/>
+            <a:srgbClr val="FF7B7B"/>
           </a:solidFill>
           <a:ln/>
         </p:spPr>
       </p:sp>
       <p:sp>
         <p:nvSpPr>
-          <p:cNvPr id="11" name="Text 8"/>
+          <p:cNvPr id="10" name="Text 7"/>
           <p:cNvSpPr/>
           <p:nvPr/>
         </p:nvSpPr>
@@ -13703,7 +13439,7 @@
             <a:r>
               <a:rPr lang="en-US" sz="1300" b="1" dirty="0">
                 <a:solidFill>
-                  <a:srgbClr val="111318"/>
+                  <a:srgbClr val="FFFFFF"/>
                 </a:solidFill>
                 <a:latin typeface="Montserrat" pitchFamily="34" charset="0"/>
                 <a:ea typeface="Montserrat" pitchFamily="34" charset="-122"/>
@@ -13717,7 +13453,7 @@
             <a:r>
               <a:rPr lang="en-US" sz="1150" dirty="0">
                 <a:solidFill>
-                  <a:srgbClr val="555B66"/>
+                  <a:srgbClr val="AFA9BE"/>
                 </a:solidFill>
                 <a:latin typeface="Montserrat" pitchFamily="34" charset="0"/>
                 <a:ea typeface="Montserrat" pitchFamily="34" charset="-122"/>
@@ -13731,7 +13467,7 @@
       </p:sp>
       <p:sp>
         <p:nvSpPr>
-          <p:cNvPr id="12" name="Shape 9"/>
+          <p:cNvPr id="11" name="Shape 8"/>
           <p:cNvSpPr/>
           <p:nvPr/>
         </p:nvSpPr>
@@ -13746,11 +13482,11 @@
             </a:avLst>
           </a:prstGeom>
           <a:solidFill>
-            <a:srgbClr val="FFFFFF"/>
+            <a:srgbClr val="17141F"/>
           </a:solidFill>
           <a:ln w="12700">
             <a:solidFill>
-              <a:srgbClr val="E6E7EC"/>
+              <a:srgbClr val="2E2A3A"/>
             </a:solidFill>
             <a:prstDash val="solid"/>
           </a:ln>
@@ -13758,7 +13494,7 @@
       </p:sp>
       <p:sp>
         <p:nvSpPr>
-          <p:cNvPr id="13" name="Shape 10"/>
+          <p:cNvPr id="12" name="Shape 9"/>
           <p:cNvSpPr/>
           <p:nvPr/>
         </p:nvSpPr>
@@ -13771,14 +13507,14 @@
             <a:avLst/>
           </a:prstGeom>
           <a:solidFill>
-            <a:srgbClr val="FBE9E9"/>
+            <a:srgbClr val="2E1418"/>
           </a:solidFill>
           <a:ln/>
         </p:spPr>
       </p:sp>
       <p:sp>
         <p:nvSpPr>
-          <p:cNvPr id="14" name="Shape 11"/>
+          <p:cNvPr id="13" name="Shape 10"/>
           <p:cNvSpPr/>
           <p:nvPr/>
         </p:nvSpPr>
@@ -13791,14 +13527,14 @@
             <a:avLst/>
           </a:prstGeom>
           <a:solidFill>
-            <a:srgbClr val="C62A2A"/>
+            <a:srgbClr val="FF7B7B"/>
           </a:solidFill>
           <a:ln/>
         </p:spPr>
       </p:sp>
       <p:sp>
         <p:nvSpPr>
-          <p:cNvPr id="15" name="Shape 12"/>
+          <p:cNvPr id="14" name="Shape 11"/>
           <p:cNvSpPr/>
           <p:nvPr/>
         </p:nvSpPr>
@@ -13811,14 +13547,14 @@
             <a:avLst/>
           </a:prstGeom>
           <a:solidFill>
-            <a:srgbClr val="C62A2A"/>
+            <a:srgbClr val="FF7B7B"/>
           </a:solidFill>
           <a:ln/>
         </p:spPr>
       </p:sp>
       <p:sp>
         <p:nvSpPr>
-          <p:cNvPr id="16" name="Text 13"/>
+          <p:cNvPr id="15" name="Text 12"/>
           <p:cNvSpPr/>
           <p:nvPr/>
         </p:nvSpPr>
@@ -13843,7 +13579,7 @@
             <a:r>
               <a:rPr lang="en-US" sz="1300" b="1" dirty="0">
                 <a:solidFill>
-                  <a:srgbClr val="111318"/>
+                  <a:srgbClr val="FFFFFF"/>
                 </a:solidFill>
                 <a:latin typeface="Montserrat" pitchFamily="34" charset="0"/>
                 <a:ea typeface="Montserrat" pitchFamily="34" charset="-122"/>
@@ -13857,7 +13593,7 @@
             <a:r>
               <a:rPr lang="en-US" sz="1150" dirty="0">
                 <a:solidFill>
-                  <a:srgbClr val="555B66"/>
+                  <a:srgbClr val="AFA9BE"/>
                 </a:solidFill>
                 <a:latin typeface="Montserrat" pitchFamily="34" charset="0"/>
                 <a:ea typeface="Montserrat" pitchFamily="34" charset="-122"/>
@@ -13871,7 +13607,7 @@
       </p:sp>
       <p:sp>
         <p:nvSpPr>
-          <p:cNvPr id="17" name="Shape 14"/>
+          <p:cNvPr id="16" name="Shape 13"/>
           <p:cNvSpPr/>
           <p:nvPr/>
         </p:nvSpPr>
@@ -13886,11 +13622,11 @@
             </a:avLst>
           </a:prstGeom>
           <a:solidFill>
-            <a:srgbClr val="FFFFFF"/>
+            <a:srgbClr val="17141F"/>
           </a:solidFill>
           <a:ln w="12700">
             <a:solidFill>
-              <a:srgbClr val="E6E7EC"/>
+              <a:srgbClr val="2E2A3A"/>
             </a:solidFill>
             <a:prstDash val="solid"/>
           </a:ln>
@@ -13898,7 +13634,7 @@
       </p:sp>
       <p:sp>
         <p:nvSpPr>
-          <p:cNvPr id="18" name="Shape 15"/>
+          <p:cNvPr id="17" name="Shape 14"/>
           <p:cNvSpPr/>
           <p:nvPr/>
         </p:nvSpPr>
@@ -13911,14 +13647,14 @@
             <a:avLst/>
           </a:prstGeom>
           <a:solidFill>
-            <a:srgbClr val="FBE9E9"/>
+            <a:srgbClr val="2E1418"/>
           </a:solidFill>
           <a:ln/>
         </p:spPr>
       </p:sp>
       <p:sp>
         <p:nvSpPr>
-          <p:cNvPr id="19" name="Shape 16"/>
+          <p:cNvPr id="18" name="Shape 15"/>
           <p:cNvSpPr/>
           <p:nvPr/>
         </p:nvSpPr>
@@ -13931,14 +13667,14 @@
             <a:avLst/>
           </a:prstGeom>
           <a:solidFill>
-            <a:srgbClr val="C62A2A"/>
+            <a:srgbClr val="FF7B7B"/>
           </a:solidFill>
           <a:ln/>
         </p:spPr>
       </p:sp>
       <p:sp>
         <p:nvSpPr>
-          <p:cNvPr id="20" name="Shape 17"/>
+          <p:cNvPr id="19" name="Shape 16"/>
           <p:cNvSpPr/>
           <p:nvPr/>
         </p:nvSpPr>
@@ -13951,14 +13687,14 @@
             <a:avLst/>
           </a:prstGeom>
           <a:solidFill>
-            <a:srgbClr val="C62A2A"/>
+            <a:srgbClr val="FF7B7B"/>
           </a:solidFill>
           <a:ln/>
         </p:spPr>
       </p:sp>
       <p:sp>
         <p:nvSpPr>
-          <p:cNvPr id="21" name="Text 18"/>
+          <p:cNvPr id="20" name="Text 17"/>
           <p:cNvSpPr/>
           <p:nvPr/>
         </p:nvSpPr>
@@ -13983,7 +13719,7 @@
             <a:r>
               <a:rPr lang="en-US" sz="1300" b="1" dirty="0">
                 <a:solidFill>
-                  <a:srgbClr val="111318"/>
+                  <a:srgbClr val="FFFFFF"/>
                 </a:solidFill>
                 <a:latin typeface="Montserrat" pitchFamily="34" charset="0"/>
                 <a:ea typeface="Montserrat" pitchFamily="34" charset="-122"/>
@@ -13997,7 +13733,7 @@
             <a:r>
               <a:rPr lang="en-US" sz="1150" dirty="0">
                 <a:solidFill>
-                  <a:srgbClr val="555B66"/>
+                  <a:srgbClr val="AFA9BE"/>
                 </a:solidFill>
                 <a:latin typeface="Montserrat" pitchFamily="34" charset="0"/>
                 <a:ea typeface="Montserrat" pitchFamily="34" charset="-122"/>
@@ -14011,7 +13747,7 @@
       </p:sp>
       <p:sp>
         <p:nvSpPr>
-          <p:cNvPr id="22" name="Shape 19"/>
+          <p:cNvPr id="21" name="Shape 18"/>
           <p:cNvSpPr/>
           <p:nvPr/>
         </p:nvSpPr>
@@ -14026,11 +13762,11 @@
             </a:avLst>
           </a:prstGeom>
           <a:solidFill>
-            <a:srgbClr val="FFFFFF"/>
+            <a:srgbClr val="17141F"/>
           </a:solidFill>
           <a:ln w="12700">
             <a:solidFill>
-              <a:srgbClr val="E6E7EC"/>
+              <a:srgbClr val="2E2A3A"/>
             </a:solidFill>
             <a:prstDash val="solid"/>
           </a:ln>
@@ -14038,7 +13774,7 @@
       </p:sp>
       <p:sp>
         <p:nvSpPr>
-          <p:cNvPr id="23" name="Shape 20"/>
+          <p:cNvPr id="22" name="Shape 19"/>
           <p:cNvSpPr/>
           <p:nvPr/>
         </p:nvSpPr>
@@ -14051,14 +13787,14 @@
             <a:avLst/>
           </a:prstGeom>
           <a:solidFill>
-            <a:srgbClr val="FBE9E9"/>
+            <a:srgbClr val="2E1418"/>
           </a:solidFill>
           <a:ln/>
         </p:spPr>
       </p:sp>
       <p:sp>
         <p:nvSpPr>
-          <p:cNvPr id="24" name="Shape 21"/>
+          <p:cNvPr id="23" name="Shape 20"/>
           <p:cNvSpPr/>
           <p:nvPr/>
         </p:nvSpPr>
@@ -14071,14 +13807,14 @@
             <a:avLst/>
           </a:prstGeom>
           <a:solidFill>
-            <a:srgbClr val="C62A2A"/>
+            <a:srgbClr val="FF7B7B"/>
           </a:solidFill>
           <a:ln/>
         </p:spPr>
       </p:sp>
       <p:sp>
         <p:nvSpPr>
-          <p:cNvPr id="25" name="Shape 22"/>
+          <p:cNvPr id="24" name="Shape 21"/>
           <p:cNvSpPr/>
           <p:nvPr/>
         </p:nvSpPr>
@@ -14091,14 +13827,14 @@
             <a:avLst/>
           </a:prstGeom>
           <a:solidFill>
-            <a:srgbClr val="C62A2A"/>
+            <a:srgbClr val="FF7B7B"/>
           </a:solidFill>
           <a:ln/>
         </p:spPr>
       </p:sp>
       <p:sp>
         <p:nvSpPr>
-          <p:cNvPr id="26" name="Text 23"/>
+          <p:cNvPr id="25" name="Text 22"/>
           <p:cNvSpPr/>
           <p:nvPr/>
         </p:nvSpPr>
@@ -14123,7 +13859,7 @@
             <a:r>
               <a:rPr lang="en-US" sz="1300" b="1" dirty="0">
                 <a:solidFill>
-                  <a:srgbClr val="111318"/>
+                  <a:srgbClr val="FFFFFF"/>
                 </a:solidFill>
                 <a:latin typeface="Montserrat" pitchFamily="34" charset="0"/>
                 <a:ea typeface="Montserrat" pitchFamily="34" charset="-122"/>
@@ -14137,7 +13873,7 @@
             <a:r>
               <a:rPr lang="en-US" sz="1150" dirty="0">
                 <a:solidFill>
-                  <a:srgbClr val="555B66"/>
+                  <a:srgbClr val="AFA9BE"/>
                 </a:solidFill>
                 <a:latin typeface="Montserrat" pitchFamily="34" charset="0"/>
                 <a:ea typeface="Montserrat" pitchFamily="34" charset="-122"/>
@@ -14151,7 +13887,7 @@
       </p:sp>
       <p:sp>
         <p:nvSpPr>
-          <p:cNvPr id="27" name="Shape 24"/>
+          <p:cNvPr id="26" name="Shape 23"/>
           <p:cNvSpPr/>
           <p:nvPr/>
         </p:nvSpPr>
@@ -14166,11 +13902,11 @@
             </a:avLst>
           </a:prstGeom>
           <a:solidFill>
-            <a:srgbClr val="FFFFFF"/>
+            <a:srgbClr val="17141F"/>
           </a:solidFill>
           <a:ln w="12700">
             <a:solidFill>
-              <a:srgbClr val="E6E7EC"/>
+              <a:srgbClr val="2E2A3A"/>
             </a:solidFill>
             <a:prstDash val="solid"/>
           </a:ln>
@@ -14178,7 +13914,7 @@
       </p:sp>
       <p:sp>
         <p:nvSpPr>
-          <p:cNvPr id="28" name="Shape 25"/>
+          <p:cNvPr id="27" name="Shape 24"/>
           <p:cNvSpPr/>
           <p:nvPr/>
         </p:nvSpPr>
@@ -14191,14 +13927,14 @@
             <a:avLst/>
           </a:prstGeom>
           <a:solidFill>
-            <a:srgbClr val="FBE9E9"/>
+            <a:srgbClr val="2E1418"/>
           </a:solidFill>
           <a:ln/>
         </p:spPr>
       </p:sp>
       <p:sp>
         <p:nvSpPr>
-          <p:cNvPr id="29" name="Shape 26"/>
+          <p:cNvPr id="28" name="Shape 25"/>
           <p:cNvSpPr/>
           <p:nvPr/>
         </p:nvSpPr>
@@ -14211,14 +13947,14 @@
             <a:avLst/>
           </a:prstGeom>
           <a:solidFill>
-            <a:srgbClr val="C62A2A"/>
+            <a:srgbClr val="FF7B7B"/>
           </a:solidFill>
           <a:ln/>
         </p:spPr>
       </p:sp>
       <p:sp>
         <p:nvSpPr>
-          <p:cNvPr id="30" name="Shape 27"/>
+          <p:cNvPr id="29" name="Shape 26"/>
           <p:cNvSpPr/>
           <p:nvPr/>
         </p:nvSpPr>
@@ -14231,14 +13967,14 @@
             <a:avLst/>
           </a:prstGeom>
           <a:solidFill>
-            <a:srgbClr val="C62A2A"/>
+            <a:srgbClr val="FF7B7B"/>
           </a:solidFill>
           <a:ln/>
         </p:spPr>
       </p:sp>
       <p:sp>
         <p:nvSpPr>
-          <p:cNvPr id="31" name="Text 28"/>
+          <p:cNvPr id="30" name="Text 27"/>
           <p:cNvSpPr/>
           <p:nvPr/>
         </p:nvSpPr>
@@ -14263,7 +13999,7 @@
             <a:r>
               <a:rPr lang="en-US" sz="1300" b="1" dirty="0">
                 <a:solidFill>
-                  <a:srgbClr val="111318"/>
+                  <a:srgbClr val="FFFFFF"/>
                 </a:solidFill>
                 <a:latin typeface="Montserrat" pitchFamily="34" charset="0"/>
                 <a:ea typeface="Montserrat" pitchFamily="34" charset="-122"/>
@@ -14277,7 +14013,7 @@
             <a:r>
               <a:rPr lang="en-US" sz="1150" dirty="0">
                 <a:solidFill>
-                  <a:srgbClr val="555B66"/>
+                  <a:srgbClr val="AFA9BE"/>
                 </a:solidFill>
                 <a:latin typeface="Montserrat" pitchFamily="34" charset="0"/>
                 <a:ea typeface="Montserrat" pitchFamily="34" charset="-122"/>
@@ -14319,7 +14055,7 @@
             <a:lvl1pPr>
               <a:defRPr sz="850">
                 <a:solidFill>
-                  <a:srgbClr val="9AA1AD"/>
+                  <a:srgbClr val="8A82A0"/>
                 </a:solidFill>
                 <a:latin typeface="Courier New"/>
                 <a:ea typeface="Courier New"/>
@@ -14364,29 +14100,7 @@
       </p:grpSpPr>
       <p:sp>
         <p:nvSpPr>
-          <p:cNvPr id="2" name="Shape 0"/>
-          <p:cNvSpPr/>
-          <p:nvPr/>
-        </p:nvSpPr>
-        <p:spPr>
-          <a:xfrm>
-            <a:off x="231343" y="194767"/>
-            <a:ext cx="11716207" cy="6473952"/>
-          </a:xfrm>
-          <a:prstGeom prst="roundRect">
-            <a:avLst>
-              <a:gd name="adj" fmla="val 3107"/>
-            </a:avLst>
-          </a:prstGeom>
-          <a:solidFill>
-            <a:srgbClr val="FFFFFF"/>
-          </a:solidFill>
-          <a:ln/>
-        </p:spPr>
-      </p:sp>
-      <p:sp>
-        <p:nvSpPr>
-          <p:cNvPr id="3" name="Text 1"/>
+          <p:cNvPr id="2" name="Text 0"/>
           <p:cNvSpPr/>
           <p:nvPr/>
         </p:nvSpPr>
@@ -14411,7 +14125,7 @@
             <a:r>
               <a:rPr lang="en-US" sz="2400" b="1" dirty="0">
                 <a:solidFill>
-                  <a:srgbClr val="111318"/>
+                  <a:srgbClr val="FFFFFF"/>
                 </a:solidFill>
                 <a:latin typeface="Montserrat" pitchFamily="34" charset="0"/>
                 <a:ea typeface="Montserrat" pitchFamily="34" charset="-122"/>
@@ -14425,7 +14139,7 @@
       </p:sp>
       <p:sp>
         <p:nvSpPr>
-          <p:cNvPr id="4" name="Shape 2"/>
+          <p:cNvPr id="3" name="Shape 1"/>
           <p:cNvSpPr/>
           <p:nvPr/>
         </p:nvSpPr>
@@ -14440,14 +14154,14 @@
             </a:avLst>
           </a:prstGeom>
           <a:solidFill>
-            <a:srgbClr val="1B8A5A"/>
+            <a:srgbClr val="5FD6A0"/>
           </a:solidFill>
           <a:ln/>
         </p:spPr>
       </p:sp>
       <p:sp>
         <p:nvSpPr>
-          <p:cNvPr id="5" name="Text 3"/>
+          <p:cNvPr id="4" name="Text 2"/>
           <p:cNvSpPr/>
           <p:nvPr/>
         </p:nvSpPr>
@@ -14472,7 +14186,7 @@
             <a:r>
               <a:rPr lang="en-US" sz="900" b="1" spc="100" kern="0" dirty="0">
                 <a:solidFill>
-                  <a:srgbClr val="FFFFFF"/>
+                  <a:srgbClr val="102A20"/>
                 </a:solidFill>
                 <a:latin typeface="Courier New" pitchFamily="34" charset="0"/>
                 <a:ea typeface="Courier New" pitchFamily="34" charset="-122"/>
@@ -14486,7 +14200,7 @@
       </p:sp>
       <p:pic>
         <p:nvPicPr>
-          <p:cNvPr id="6" name="Image 0" descr="preencoded.png">    </p:cNvPr>
+          <p:cNvPr id="5" name="Image 0" descr="preencoded.png">    </p:cNvPr>
           <p:cNvPicPr>
             <a:picLocks noChangeAspect="1"/>
           </p:cNvPicPr>
@@ -14510,7 +14224,7 @@
       </p:pic>
       <p:sp>
         <p:nvSpPr>
-          <p:cNvPr id="7" name="Shape 4"/>
+          <p:cNvPr id="6" name="Shape 3"/>
           <p:cNvSpPr/>
           <p:nvPr/>
         </p:nvSpPr>
@@ -14525,11 +14239,11 @@
             </a:avLst>
           </a:prstGeom>
           <a:solidFill>
-            <a:srgbClr val="FFFFFF"/>
+            <a:srgbClr val="17141F"/>
           </a:solidFill>
           <a:ln w="12700">
             <a:solidFill>
-              <a:srgbClr val="E6E7EC"/>
+              <a:srgbClr val="2E2A3A"/>
             </a:solidFill>
             <a:prstDash val="solid"/>
           </a:ln>
@@ -14537,7 +14251,7 @@
       </p:sp>
       <p:sp>
         <p:nvSpPr>
-          <p:cNvPr id="8" name="Text 5"/>
+          <p:cNvPr id="7" name="Text 4"/>
           <p:cNvSpPr/>
           <p:nvPr/>
         </p:nvSpPr>
@@ -14562,7 +14276,7 @@
             <a:r>
               <a:rPr lang="en-US" sz="1450" b="1" dirty="0">
                 <a:solidFill>
-                  <a:srgbClr val="111318"/>
+                  <a:srgbClr val="FFFFFF"/>
                 </a:solidFill>
                 <a:latin typeface="Montserrat" pitchFamily="34" charset="0"/>
                 <a:ea typeface="Montserrat" pitchFamily="34" charset="-122"/>
@@ -14576,7 +14290,7 @@
       </p:sp>
       <p:sp>
         <p:nvSpPr>
-          <p:cNvPr id="9" name="Text 6"/>
+          <p:cNvPr id="8" name="Text 5"/>
           <p:cNvSpPr/>
           <p:nvPr/>
         </p:nvSpPr>
@@ -14604,7 +14318,7 @@
             <a:r>
               <a:rPr lang="en-US" sz="1200" dirty="0">
                 <a:solidFill>
-                  <a:srgbClr val="555B66"/>
+                  <a:srgbClr val="AFA9BE"/>
                 </a:solidFill>
                 <a:latin typeface="Montserrat" pitchFamily="34" charset="0"/>
                 <a:ea typeface="Montserrat" pitchFamily="34" charset="-122"/>
@@ -14633,7 +14347,7 @@
             <a:r>
               <a:rPr lang="en-US" sz="1200" dirty="0">
                 <a:solidFill>
-                  <a:srgbClr val="555B66"/>
+                  <a:srgbClr val="AFA9BE"/>
                 </a:solidFill>
                 <a:latin typeface="Montserrat" pitchFamily="34" charset="0"/>
                 <a:ea typeface="Montserrat" pitchFamily="34" charset="-122"/>
@@ -14662,7 +14376,7 @@
             <a:r>
               <a:rPr lang="en-US" sz="1200" dirty="0">
                 <a:solidFill>
-                  <a:srgbClr val="555B66"/>
+                  <a:srgbClr val="AFA9BE"/>
                 </a:solidFill>
                 <a:latin typeface="Montserrat" pitchFamily="34" charset="0"/>
                 <a:ea typeface="Montserrat" pitchFamily="34" charset="-122"/>
@@ -14676,7 +14390,7 @@
       </p:sp>
       <p:sp>
         <p:nvSpPr>
-          <p:cNvPr id="10" name="Shape 7"/>
+          <p:cNvPr id="9" name="Shape 6"/>
           <p:cNvSpPr/>
           <p:nvPr/>
         </p:nvSpPr>
@@ -14691,14 +14405,14 @@
             </a:avLst>
           </a:prstGeom>
           <a:solidFill>
-            <a:srgbClr val="F8F0E2"/>
+            <a:srgbClr val="2A2010"/>
           </a:solidFill>
           <a:ln/>
         </p:spPr>
       </p:sp>
       <p:sp>
         <p:nvSpPr>
-          <p:cNvPr id="11" name="Text 8"/>
+          <p:cNvPr id="10" name="Text 7"/>
           <p:cNvSpPr/>
           <p:nvPr/>
         </p:nvSpPr>
@@ -14723,7 +14437,7 @@
             <a:r>
               <a:rPr lang="en-US" sz="1450" b="1" dirty="0">
                 <a:solidFill>
-                  <a:srgbClr val="9A5B12"/>
+                  <a:srgbClr val="E8A857"/>
                 </a:solidFill>
                 <a:latin typeface="Montserrat" pitchFamily="34" charset="0"/>
                 <a:ea typeface="Montserrat" pitchFamily="34" charset="-122"/>
@@ -14737,7 +14451,7 @@
       </p:sp>
       <p:sp>
         <p:nvSpPr>
-          <p:cNvPr id="12" name="Text 9"/>
+          <p:cNvPr id="11" name="Text 8"/>
           <p:cNvSpPr/>
           <p:nvPr/>
         </p:nvSpPr>
@@ -14765,7 +14479,7 @@
             <a:r>
               <a:rPr lang="en-US" sz="1200" dirty="0">
                 <a:solidFill>
-                  <a:srgbClr val="111318"/>
+                  <a:srgbClr val="FFFFFF"/>
                 </a:solidFill>
                 <a:latin typeface="Montserrat" pitchFamily="34" charset="0"/>
                 <a:ea typeface="Montserrat" pitchFamily="34" charset="-122"/>
@@ -14779,7 +14493,7 @@
       </p:sp>
       <p:sp>
         <p:nvSpPr>
-          <p:cNvPr id="13" name="Shape 10"/>
+          <p:cNvPr id="12" name="Shape 9"/>
           <p:cNvSpPr/>
           <p:nvPr/>
         </p:nvSpPr>
@@ -14794,11 +14508,11 @@
             </a:avLst>
           </a:prstGeom>
           <a:solidFill>
-            <a:srgbClr val="FFFFFF"/>
+            <a:srgbClr val="17141F"/>
           </a:solidFill>
           <a:ln w="19050">
             <a:solidFill>
-              <a:srgbClr val="5A05F4"/>
+              <a:srgbClr val="C9A6FF"/>
             </a:solidFill>
             <a:prstDash val="solid"/>
           </a:ln>
@@ -14806,7 +14520,7 @@
       </p:sp>
       <p:sp>
         <p:nvSpPr>
-          <p:cNvPr id="14" name="Text 11"/>
+          <p:cNvPr id="13" name="Text 10"/>
           <p:cNvSpPr/>
           <p:nvPr/>
         </p:nvSpPr>
@@ -14831,7 +14545,7 @@
             <a:r>
               <a:rPr lang="en-US" sz="1500" b="1" dirty="0">
                 <a:solidFill>
-                  <a:srgbClr val="5A05F4"/>
+                  <a:srgbClr val="C9A6FF"/>
                 </a:solidFill>
                 <a:latin typeface="Montserrat" pitchFamily="34" charset="0"/>
                 <a:ea typeface="Montserrat" pitchFamily="34" charset="-122"/>
@@ -14845,7 +14559,7 @@
       </p:sp>
       <p:sp>
         <p:nvSpPr>
-          <p:cNvPr id="15" name="Text 12"/>
+          <p:cNvPr id="14" name="Text 11"/>
           <p:cNvSpPr/>
           <p:nvPr/>
         </p:nvSpPr>
@@ -14870,7 +14584,7 @@
             <a:r>
               <a:rPr lang="en-US" sz="1250" dirty="0">
                 <a:solidFill>
-                  <a:srgbClr val="111318"/>
+                  <a:srgbClr val="FFFFFF"/>
                 </a:solidFill>
                 <a:latin typeface="Montserrat" pitchFamily="34" charset="0"/>
                 <a:ea typeface="Montserrat" pitchFamily="34" charset="-122"/>
@@ -14912,7 +14626,7 @@
             <a:lvl1pPr>
               <a:defRPr sz="850">
                 <a:solidFill>
-                  <a:srgbClr val="9AA1AD"/>
+                  <a:srgbClr val="8A82A0"/>
                 </a:solidFill>
                 <a:latin typeface="Courier New"/>
                 <a:ea typeface="Courier New"/>
@@ -15360,9 +15074,14 @@
             </a:avLst>
           </a:prstGeom>
           <a:solidFill>
-            <a:srgbClr val="FFFFFF"/>
+            <a:srgbClr val="17141F"/>
           </a:solidFill>
-          <a:ln/>
+          <a:ln w="12700">
+            <a:solidFill>
+              <a:srgbClr val="2E2A3A"/>
+            </a:solidFill>
+            <a:prstDash val="solid"/>
+          </a:ln>
         </p:spPr>
       </p:sp>
       <p:sp>
@@ -15392,7 +15111,7 @@
             <a:r>
               <a:rPr lang="en-US" sz="1500" b="1" dirty="0">
                 <a:solidFill>
-                  <a:srgbClr val="5A05F4"/>
+                  <a:srgbClr val="C9A6FF"/>
                 </a:solidFill>
                 <a:latin typeface="Montserrat" pitchFamily="34" charset="0"/>
                 <a:ea typeface="Montserrat" pitchFamily="34" charset="-122"/>
@@ -15434,7 +15153,7 @@
             <a:r>
               <a:rPr lang="en-US" sz="1250" dirty="0">
                 <a:solidFill>
-                  <a:srgbClr val="111318"/>
+                  <a:srgbClr val="FFFFFF"/>
                 </a:solidFill>
                 <a:latin typeface="Montserrat" pitchFamily="34" charset="0"/>
                 <a:ea typeface="Montserrat" pitchFamily="34" charset="-122"/>
@@ -15473,29 +15192,7 @@
       </p:grpSpPr>
       <p:sp>
         <p:nvSpPr>
-          <p:cNvPr id="2" name="Shape 0"/>
-          <p:cNvSpPr/>
-          <p:nvPr/>
-        </p:nvSpPr>
-        <p:spPr>
-          <a:xfrm>
-            <a:off x="231343" y="194767"/>
-            <a:ext cx="11716207" cy="6473952"/>
-          </a:xfrm>
-          <a:prstGeom prst="roundRect">
-            <a:avLst>
-              <a:gd name="adj" fmla="val 3107"/>
-            </a:avLst>
-          </a:prstGeom>
-          <a:solidFill>
-            <a:srgbClr val="FFFFFF"/>
-          </a:solidFill>
-          <a:ln/>
-        </p:spPr>
-      </p:sp>
-      <p:sp>
-        <p:nvSpPr>
-          <p:cNvPr id="3" name="Text 1"/>
+          <p:cNvPr id="2" name="Text 0"/>
           <p:cNvSpPr/>
           <p:nvPr/>
         </p:nvSpPr>
@@ -15520,7 +15217,7 @@
             <a:r>
               <a:rPr lang="en-US" sz="2400" b="1" dirty="0">
                 <a:solidFill>
-                  <a:srgbClr val="111318"/>
+                  <a:srgbClr val="FFFFFF"/>
                 </a:solidFill>
                 <a:latin typeface="Montserrat" pitchFamily="34" charset="0"/>
                 <a:ea typeface="Montserrat" pitchFamily="34" charset="-122"/>
@@ -15534,7 +15231,7 @@
       </p:sp>
       <p:sp>
         <p:nvSpPr>
-          <p:cNvPr id="4" name="Shape 2"/>
+          <p:cNvPr id="3" name="Shape 1"/>
           <p:cNvSpPr/>
           <p:nvPr/>
         </p:nvSpPr>
@@ -15549,14 +15246,14 @@
             </a:avLst>
           </a:prstGeom>
           <a:solidFill>
-            <a:srgbClr val="5A05F4"/>
+            <a:srgbClr val="C9A6FF"/>
           </a:solidFill>
           <a:ln/>
         </p:spPr>
       </p:sp>
       <p:sp>
         <p:nvSpPr>
-          <p:cNvPr id="5" name="Text 3"/>
+          <p:cNvPr id="4" name="Text 2"/>
           <p:cNvSpPr/>
           <p:nvPr/>
         </p:nvSpPr>
@@ -15581,7 +15278,7 @@
             <a:r>
               <a:rPr lang="en-US" sz="900" b="1" spc="100" kern="0" dirty="0">
                 <a:solidFill>
-                  <a:srgbClr val="FFFFFF"/>
+                  <a:srgbClr val="1C1140"/>
                 </a:solidFill>
                 <a:latin typeface="Courier New" pitchFamily="34" charset="0"/>
                 <a:ea typeface="Courier New" pitchFamily="34" charset="-122"/>
@@ -15595,7 +15292,7 @@
       </p:sp>
       <p:pic>
         <p:nvPicPr>
-          <p:cNvPr id="6" name="Image 0" descr="preencoded.png">    </p:cNvPr>
+          <p:cNvPr id="5" name="Image 0" descr="preencoded.png">    </p:cNvPr>
           <p:cNvPicPr>
             <a:picLocks noChangeAspect="1"/>
           </p:cNvPicPr>
@@ -15619,7 +15316,7 @@
       </p:pic>
       <p:sp>
         <p:nvSpPr>
-          <p:cNvPr id="7" name="Shape 4"/>
+          <p:cNvPr id="6" name="Shape 3"/>
           <p:cNvSpPr/>
           <p:nvPr/>
         </p:nvSpPr>
@@ -15634,11 +15331,11 @@
             </a:avLst>
           </a:prstGeom>
           <a:solidFill>
-            <a:srgbClr val="FFFFFF"/>
+            <a:srgbClr val="17141F"/>
           </a:solidFill>
           <a:ln w="12700">
             <a:solidFill>
-              <a:srgbClr val="E6E7EC"/>
+              <a:srgbClr val="2E2A3A"/>
             </a:solidFill>
             <a:prstDash val="solid"/>
           </a:ln>
@@ -15646,7 +15343,7 @@
       </p:sp>
       <p:sp>
         <p:nvSpPr>
-          <p:cNvPr id="8" name="Shape 5"/>
+          <p:cNvPr id="7" name="Shape 4"/>
           <p:cNvSpPr/>
           <p:nvPr/>
         </p:nvSpPr>
@@ -15666,7 +15363,7 @@
       </p:sp>
       <p:sp>
         <p:nvSpPr>
-          <p:cNvPr id="9" name="Text 6"/>
+          <p:cNvPr id="8" name="Text 5"/>
           <p:cNvSpPr/>
           <p:nvPr/>
         </p:nvSpPr>
@@ -15705,7 +15402,7 @@
       </p:sp>
       <p:sp>
         <p:nvSpPr>
-          <p:cNvPr id="10" name="Text 7"/>
+          <p:cNvPr id="9" name="Text 6"/>
           <p:cNvSpPr/>
           <p:nvPr/>
         </p:nvSpPr>
@@ -15730,7 +15427,7 @@
             <a:r>
               <a:rPr lang="en-US" sz="1450" b="1" dirty="0">
                 <a:solidFill>
-                  <a:srgbClr val="111318"/>
+                  <a:srgbClr val="FFFFFF"/>
                 </a:solidFill>
                 <a:latin typeface="Montserrat" pitchFamily="34" charset="0"/>
                 <a:ea typeface="Montserrat" pitchFamily="34" charset="-122"/>
@@ -15744,7 +15441,7 @@
       </p:sp>
       <p:sp>
         <p:nvSpPr>
-          <p:cNvPr id="11" name="Shape 8"/>
+          <p:cNvPr id="10" name="Shape 7"/>
           <p:cNvSpPr/>
           <p:nvPr/>
         </p:nvSpPr>
@@ -15759,11 +15456,11 @@
             </a:avLst>
           </a:prstGeom>
           <a:solidFill>
-            <a:srgbClr val="FFFFFF"/>
+            <a:srgbClr val="17141F"/>
           </a:solidFill>
           <a:ln w="12700">
             <a:solidFill>
-              <a:srgbClr val="E6E7EC"/>
+              <a:srgbClr val="2E2A3A"/>
             </a:solidFill>
             <a:prstDash val="solid"/>
           </a:ln>
@@ -15771,7 +15468,7 @@
       </p:sp>
       <p:sp>
         <p:nvSpPr>
-          <p:cNvPr id="12" name="Shape 9"/>
+          <p:cNvPr id="11" name="Shape 8"/>
           <p:cNvSpPr/>
           <p:nvPr/>
         </p:nvSpPr>
@@ -15791,7 +15488,7 @@
       </p:sp>
       <p:sp>
         <p:nvSpPr>
-          <p:cNvPr id="13" name="Text 10"/>
+          <p:cNvPr id="12" name="Text 9"/>
           <p:cNvSpPr/>
           <p:nvPr/>
         </p:nvSpPr>
@@ -15830,7 +15527,7 @@
       </p:sp>
       <p:sp>
         <p:nvSpPr>
-          <p:cNvPr id="14" name="Text 11"/>
+          <p:cNvPr id="13" name="Text 10"/>
           <p:cNvSpPr/>
           <p:nvPr/>
         </p:nvSpPr>
@@ -15855,7 +15552,7 @@
             <a:r>
               <a:rPr lang="en-US" sz="1450" b="1" dirty="0">
                 <a:solidFill>
-                  <a:srgbClr val="111318"/>
+                  <a:srgbClr val="FFFFFF"/>
                 </a:solidFill>
                 <a:latin typeface="Montserrat" pitchFamily="34" charset="0"/>
                 <a:ea typeface="Montserrat" pitchFamily="34" charset="-122"/>
@@ -15869,7 +15566,7 @@
       </p:sp>
       <p:sp>
         <p:nvSpPr>
-          <p:cNvPr id="15" name="Shape 12"/>
+          <p:cNvPr id="14" name="Shape 11"/>
           <p:cNvSpPr/>
           <p:nvPr/>
         </p:nvSpPr>
@@ -15884,11 +15581,11 @@
             </a:avLst>
           </a:prstGeom>
           <a:solidFill>
-            <a:srgbClr val="FFFFFF"/>
+            <a:srgbClr val="17141F"/>
           </a:solidFill>
           <a:ln w="12700">
             <a:solidFill>
-              <a:srgbClr val="E6E7EC"/>
+              <a:srgbClr val="2E2A3A"/>
             </a:solidFill>
             <a:prstDash val="solid"/>
           </a:ln>
@@ -15896,7 +15593,7 @@
       </p:sp>
       <p:sp>
         <p:nvSpPr>
-          <p:cNvPr id="16" name="Shape 13"/>
+          <p:cNvPr id="15" name="Shape 12"/>
           <p:cNvSpPr/>
           <p:nvPr/>
         </p:nvSpPr>
@@ -15916,7 +15613,7 @@
       </p:sp>
       <p:sp>
         <p:nvSpPr>
-          <p:cNvPr id="17" name="Text 14"/>
+          <p:cNvPr id="16" name="Text 13"/>
           <p:cNvSpPr/>
           <p:nvPr/>
         </p:nvSpPr>
@@ -15955,7 +15652,7 @@
       </p:sp>
       <p:sp>
         <p:nvSpPr>
-          <p:cNvPr id="18" name="Text 15"/>
+          <p:cNvPr id="17" name="Text 14"/>
           <p:cNvSpPr/>
           <p:nvPr/>
         </p:nvSpPr>
@@ -15980,7 +15677,7 @@
             <a:r>
               <a:rPr lang="en-US" sz="1450" b="1" dirty="0">
                 <a:solidFill>
-                  <a:srgbClr val="111318"/>
+                  <a:srgbClr val="FFFFFF"/>
                 </a:solidFill>
                 <a:latin typeface="Montserrat" pitchFamily="34" charset="0"/>
                 <a:ea typeface="Montserrat" pitchFamily="34" charset="-122"/>
@@ -15994,7 +15691,7 @@
       </p:sp>
       <p:sp>
         <p:nvSpPr>
-          <p:cNvPr id="19" name="Shape 16"/>
+          <p:cNvPr id="18" name="Shape 15"/>
           <p:cNvSpPr/>
           <p:nvPr/>
         </p:nvSpPr>
@@ -16009,11 +15706,11 @@
             </a:avLst>
           </a:prstGeom>
           <a:solidFill>
-            <a:srgbClr val="FFFFFF"/>
+            <a:srgbClr val="17141F"/>
           </a:solidFill>
           <a:ln w="12700">
             <a:solidFill>
-              <a:srgbClr val="E6E7EC"/>
+              <a:srgbClr val="2E2A3A"/>
             </a:solidFill>
             <a:prstDash val="solid"/>
           </a:ln>
@@ -16021,7 +15718,7 @@
       </p:sp>
       <p:sp>
         <p:nvSpPr>
-          <p:cNvPr id="20" name="Shape 17"/>
+          <p:cNvPr id="19" name="Shape 16"/>
           <p:cNvSpPr/>
           <p:nvPr/>
         </p:nvSpPr>
@@ -16041,7 +15738,7 @@
       </p:sp>
       <p:sp>
         <p:nvSpPr>
-          <p:cNvPr id="21" name="Text 18"/>
+          <p:cNvPr id="20" name="Text 17"/>
           <p:cNvSpPr/>
           <p:nvPr/>
         </p:nvSpPr>
@@ -16080,7 +15777,7 @@
       </p:sp>
       <p:sp>
         <p:nvSpPr>
-          <p:cNvPr id="22" name="Text 19"/>
+          <p:cNvPr id="21" name="Text 18"/>
           <p:cNvSpPr/>
           <p:nvPr/>
         </p:nvSpPr>
@@ -16105,7 +15802,7 @@
             <a:r>
               <a:rPr lang="en-US" sz="1450" b="1" dirty="0">
                 <a:solidFill>
-                  <a:srgbClr val="111318"/>
+                  <a:srgbClr val="FFFFFF"/>
                 </a:solidFill>
                 <a:latin typeface="Montserrat" pitchFamily="34" charset="0"/>
                 <a:ea typeface="Montserrat" pitchFamily="34" charset="-122"/>
@@ -16119,7 +15816,7 @@
       </p:sp>
       <p:sp>
         <p:nvSpPr>
-          <p:cNvPr id="23" name="Shape 20"/>
+          <p:cNvPr id="22" name="Shape 19"/>
           <p:cNvSpPr/>
           <p:nvPr/>
         </p:nvSpPr>
@@ -16134,11 +15831,11 @@
             </a:avLst>
           </a:prstGeom>
           <a:solidFill>
-            <a:srgbClr val="FFFFFF"/>
+            <a:srgbClr val="17141F"/>
           </a:solidFill>
           <a:ln w="12700">
             <a:solidFill>
-              <a:srgbClr val="E6E7EC"/>
+              <a:srgbClr val="2E2A3A"/>
             </a:solidFill>
             <a:prstDash val="solid"/>
           </a:ln>
@@ -16146,7 +15843,7 @@
       </p:sp>
       <p:sp>
         <p:nvSpPr>
-          <p:cNvPr id="24" name="Shape 21"/>
+          <p:cNvPr id="23" name="Shape 20"/>
           <p:cNvSpPr/>
           <p:nvPr/>
         </p:nvSpPr>
@@ -16166,7 +15863,7 @@
       </p:sp>
       <p:sp>
         <p:nvSpPr>
-          <p:cNvPr id="25" name="Text 22"/>
+          <p:cNvPr id="24" name="Text 21"/>
           <p:cNvSpPr/>
           <p:nvPr/>
         </p:nvSpPr>
@@ -16205,7 +15902,7 @@
       </p:sp>
       <p:sp>
         <p:nvSpPr>
-          <p:cNvPr id="26" name="Text 23"/>
+          <p:cNvPr id="25" name="Text 22"/>
           <p:cNvSpPr/>
           <p:nvPr/>
         </p:nvSpPr>
@@ -16230,7 +15927,7 @@
             <a:r>
               <a:rPr lang="en-US" sz="1450" b="1" dirty="0">
                 <a:solidFill>
-                  <a:srgbClr val="111318"/>
+                  <a:srgbClr val="FFFFFF"/>
                 </a:solidFill>
                 <a:latin typeface="Montserrat" pitchFamily="34" charset="0"/>
                 <a:ea typeface="Montserrat" pitchFamily="34" charset="-122"/>
@@ -16244,7 +15941,7 @@
       </p:sp>
       <p:sp>
         <p:nvSpPr>
-          <p:cNvPr id="27" name="Shape 24"/>
+          <p:cNvPr id="26" name="Shape 23"/>
           <p:cNvSpPr/>
           <p:nvPr/>
         </p:nvSpPr>
@@ -16259,11 +15956,11 @@
             </a:avLst>
           </a:prstGeom>
           <a:solidFill>
-            <a:srgbClr val="FFFFFF"/>
+            <a:srgbClr val="17141F"/>
           </a:solidFill>
           <a:ln w="12700">
             <a:solidFill>
-              <a:srgbClr val="E6E7EC"/>
+              <a:srgbClr val="2E2A3A"/>
             </a:solidFill>
             <a:prstDash val="solid"/>
           </a:ln>
@@ -16271,7 +15968,7 @@
       </p:sp>
       <p:sp>
         <p:nvSpPr>
-          <p:cNvPr id="28" name="Shape 25"/>
+          <p:cNvPr id="27" name="Shape 24"/>
           <p:cNvSpPr/>
           <p:nvPr/>
         </p:nvSpPr>
@@ -16291,7 +15988,7 @@
       </p:sp>
       <p:sp>
         <p:nvSpPr>
-          <p:cNvPr id="29" name="Text 26"/>
+          <p:cNvPr id="28" name="Text 25"/>
           <p:cNvSpPr/>
           <p:nvPr/>
         </p:nvSpPr>
@@ -16330,7 +16027,7 @@
       </p:sp>
       <p:sp>
         <p:nvSpPr>
-          <p:cNvPr id="30" name="Text 27"/>
+          <p:cNvPr id="29" name="Text 26"/>
           <p:cNvSpPr/>
           <p:nvPr/>
         </p:nvSpPr>
@@ -16355,7 +16052,7 @@
             <a:r>
               <a:rPr lang="en-US" sz="1450" b="1" dirty="0">
                 <a:solidFill>
-                  <a:srgbClr val="111318"/>
+                  <a:srgbClr val="FFFFFF"/>
                 </a:solidFill>
                 <a:latin typeface="Montserrat" pitchFamily="34" charset="0"/>
                 <a:ea typeface="Montserrat" pitchFamily="34" charset="-122"/>
@@ -16369,7 +16066,7 @@
       </p:sp>
       <p:sp>
         <p:nvSpPr>
-          <p:cNvPr id="31" name="Shape 28"/>
+          <p:cNvPr id="30" name="Shape 27"/>
           <p:cNvSpPr/>
           <p:nvPr/>
         </p:nvSpPr>
@@ -16384,11 +16081,11 @@
             </a:avLst>
           </a:prstGeom>
           <a:solidFill>
-            <a:srgbClr val="FFFFFF"/>
+            <a:srgbClr val="17141F"/>
           </a:solidFill>
           <a:ln w="12700">
             <a:solidFill>
-              <a:srgbClr val="E6E7EC"/>
+              <a:srgbClr val="2E2A3A"/>
             </a:solidFill>
             <a:prstDash val="solid"/>
           </a:ln>
@@ -16396,7 +16093,7 @@
       </p:sp>
       <p:sp>
         <p:nvSpPr>
-          <p:cNvPr id="32" name="Shape 29"/>
+          <p:cNvPr id="31" name="Shape 28"/>
           <p:cNvSpPr/>
           <p:nvPr/>
         </p:nvSpPr>
@@ -16416,7 +16113,7 @@
       </p:sp>
       <p:sp>
         <p:nvSpPr>
-          <p:cNvPr id="33" name="Text 30"/>
+          <p:cNvPr id="32" name="Text 29"/>
           <p:cNvSpPr/>
           <p:nvPr/>
         </p:nvSpPr>
@@ -16455,7 +16152,7 @@
       </p:sp>
       <p:sp>
         <p:nvSpPr>
-          <p:cNvPr id="34" name="Text 31"/>
+          <p:cNvPr id="33" name="Text 30"/>
           <p:cNvSpPr/>
           <p:nvPr/>
         </p:nvSpPr>
@@ -16480,7 +16177,7 @@
             <a:r>
               <a:rPr lang="en-US" sz="1450" b="1" dirty="0">
                 <a:solidFill>
-                  <a:srgbClr val="111318"/>
+                  <a:srgbClr val="FFFFFF"/>
                 </a:solidFill>
                 <a:latin typeface="Montserrat" pitchFamily="34" charset="0"/>
                 <a:ea typeface="Montserrat" pitchFamily="34" charset="-122"/>
@@ -16494,7 +16191,7 @@
       </p:sp>
       <p:sp>
         <p:nvSpPr>
-          <p:cNvPr id="35" name="Shape 32"/>
+          <p:cNvPr id="34" name="Shape 31"/>
           <p:cNvSpPr/>
           <p:nvPr/>
         </p:nvSpPr>
@@ -16509,14 +16206,14 @@
             </a:avLst>
           </a:prstGeom>
           <a:solidFill>
-            <a:srgbClr val="F8F0E2"/>
+            <a:srgbClr val="2A2010"/>
           </a:solidFill>
           <a:ln/>
         </p:spPr>
       </p:sp>
       <p:sp>
         <p:nvSpPr>
-          <p:cNvPr id="36" name="Shape 33"/>
+          <p:cNvPr id="35" name="Shape 32"/>
           <p:cNvSpPr/>
           <p:nvPr/>
         </p:nvSpPr>
@@ -16529,14 +16226,14 @@
             <a:avLst/>
           </a:prstGeom>
           <a:solidFill>
-            <a:srgbClr val="9A5B12"/>
+            <a:srgbClr val="E8A857"/>
           </a:solidFill>
           <a:ln/>
         </p:spPr>
       </p:sp>
       <p:sp>
         <p:nvSpPr>
-          <p:cNvPr id="37" name="Text 34"/>
+          <p:cNvPr id="36" name="Text 33"/>
           <p:cNvSpPr/>
           <p:nvPr/>
         </p:nvSpPr>
@@ -16561,7 +16258,7 @@
             <a:r>
               <a:rPr lang="en-US" sz="1200" b="1" dirty="0">
                 <a:solidFill>
-                  <a:srgbClr val="F8F0E2"/>
+                  <a:srgbClr val="2A2010"/>
                 </a:solidFill>
                 <a:latin typeface="Courier New" pitchFamily="34" charset="0"/>
                 <a:ea typeface="Courier New" pitchFamily="34" charset="-122"/>
@@ -16575,7 +16272,7 @@
       </p:sp>
       <p:sp>
         <p:nvSpPr>
-          <p:cNvPr id="38" name="Text 35"/>
+          <p:cNvPr id="37" name="Text 34"/>
           <p:cNvSpPr/>
           <p:nvPr/>
         </p:nvSpPr>
@@ -16600,7 +16297,7 @@
             <a:r>
               <a:rPr lang="en-US" sz="1450" b="1" dirty="0">
                 <a:solidFill>
-                  <a:srgbClr val="9A5B12"/>
+                  <a:srgbClr val="E8A857"/>
                 </a:solidFill>
                 <a:latin typeface="Montserrat" pitchFamily="34" charset="0"/>
                 <a:ea typeface="Montserrat" pitchFamily="34" charset="-122"/>
@@ -16614,7 +16311,7 @@
       </p:sp>
       <p:sp>
         <p:nvSpPr>
-          <p:cNvPr id="39" name="Shape 36"/>
+          <p:cNvPr id="38" name="Shape 35"/>
           <p:cNvSpPr/>
           <p:nvPr/>
         </p:nvSpPr>
@@ -16629,11 +16326,11 @@
             </a:avLst>
           </a:prstGeom>
           <a:solidFill>
-            <a:srgbClr val="FFFFFF"/>
+            <a:srgbClr val="17141F"/>
           </a:solidFill>
           <a:ln w="12700">
             <a:solidFill>
-              <a:srgbClr val="E6E7EC"/>
+              <a:srgbClr val="2E2A3A"/>
             </a:solidFill>
             <a:prstDash val="solid"/>
           </a:ln>
@@ -16641,7 +16338,7 @@
       </p:sp>
       <p:sp>
         <p:nvSpPr>
-          <p:cNvPr id="40" name="Shape 37"/>
+          <p:cNvPr id="39" name="Shape 36"/>
           <p:cNvSpPr/>
           <p:nvPr/>
         </p:nvSpPr>
@@ -16661,7 +16358,7 @@
       </p:sp>
       <p:sp>
         <p:nvSpPr>
-          <p:cNvPr id="41" name="Text 38"/>
+          <p:cNvPr id="40" name="Text 37"/>
           <p:cNvSpPr/>
           <p:nvPr/>
         </p:nvSpPr>
@@ -16700,7 +16397,7 @@
       </p:sp>
       <p:sp>
         <p:nvSpPr>
-          <p:cNvPr id="42" name="Text 39"/>
+          <p:cNvPr id="41" name="Text 38"/>
           <p:cNvSpPr/>
           <p:nvPr/>
         </p:nvSpPr>
@@ -16725,7 +16422,7 @@
             <a:r>
               <a:rPr lang="en-US" sz="1450" b="1" dirty="0">
                 <a:solidFill>
-                  <a:srgbClr val="111318"/>
+                  <a:srgbClr val="FFFFFF"/>
                 </a:solidFill>
                 <a:latin typeface="Montserrat" pitchFamily="34" charset="0"/>
                 <a:ea typeface="Montserrat" pitchFamily="34" charset="-122"/>
@@ -16739,7 +16436,7 @@
       </p:sp>
       <p:sp>
         <p:nvSpPr>
-          <p:cNvPr id="43" name="Shape 40"/>
+          <p:cNvPr id="42" name="Shape 39"/>
           <p:cNvSpPr/>
           <p:nvPr/>
         </p:nvSpPr>
@@ -16754,11 +16451,11 @@
             </a:avLst>
           </a:prstGeom>
           <a:solidFill>
-            <a:srgbClr val="FFFFFF"/>
+            <a:srgbClr val="17141F"/>
           </a:solidFill>
           <a:ln w="12700">
             <a:solidFill>
-              <a:srgbClr val="E6E7EC"/>
+              <a:srgbClr val="2E2A3A"/>
             </a:solidFill>
             <a:prstDash val="solid"/>
           </a:ln>
@@ -16766,7 +16463,7 @@
       </p:sp>
       <p:sp>
         <p:nvSpPr>
-          <p:cNvPr id="44" name="Shape 41"/>
+          <p:cNvPr id="43" name="Shape 40"/>
           <p:cNvSpPr/>
           <p:nvPr/>
         </p:nvSpPr>
@@ -16786,7 +16483,7 @@
       </p:sp>
       <p:sp>
         <p:nvSpPr>
-          <p:cNvPr id="45" name="Text 42"/>
+          <p:cNvPr id="44" name="Text 41"/>
           <p:cNvSpPr/>
           <p:nvPr/>
         </p:nvSpPr>
@@ -16825,7 +16522,7 @@
       </p:sp>
       <p:sp>
         <p:nvSpPr>
-          <p:cNvPr id="46" name="Text 43"/>
+          <p:cNvPr id="45" name="Text 42"/>
           <p:cNvSpPr/>
           <p:nvPr/>
         </p:nvSpPr>
@@ -16850,7 +16547,7 @@
             <a:r>
               <a:rPr lang="en-US" sz="1450" b="1" dirty="0">
                 <a:solidFill>
-                  <a:srgbClr val="111318"/>
+                  <a:srgbClr val="FFFFFF"/>
                 </a:solidFill>
                 <a:latin typeface="Montserrat" pitchFamily="34" charset="0"/>
                 <a:ea typeface="Montserrat" pitchFamily="34" charset="-122"/>
@@ -16864,7 +16561,7 @@
       </p:sp>
       <p:sp>
         <p:nvSpPr>
-          <p:cNvPr id="47" name="Shape 44"/>
+          <p:cNvPr id="46" name="Shape 43"/>
           <p:cNvSpPr/>
           <p:nvPr/>
         </p:nvSpPr>
@@ -16879,11 +16576,11 @@
             </a:avLst>
           </a:prstGeom>
           <a:solidFill>
-            <a:srgbClr val="FFFFFF"/>
+            <a:srgbClr val="17141F"/>
           </a:solidFill>
           <a:ln w="12700">
             <a:solidFill>
-              <a:srgbClr val="E6E7EC"/>
+              <a:srgbClr val="2E2A3A"/>
             </a:solidFill>
             <a:prstDash val="solid"/>
           </a:ln>
@@ -16891,7 +16588,7 @@
       </p:sp>
       <p:sp>
         <p:nvSpPr>
-          <p:cNvPr id="48" name="Shape 45"/>
+          <p:cNvPr id="47" name="Shape 44"/>
           <p:cNvSpPr/>
           <p:nvPr/>
         </p:nvSpPr>
@@ -16911,7 +16608,7 @@
       </p:sp>
       <p:sp>
         <p:nvSpPr>
-          <p:cNvPr id="49" name="Text 46"/>
+          <p:cNvPr id="48" name="Text 45"/>
           <p:cNvSpPr/>
           <p:nvPr/>
         </p:nvSpPr>
@@ -16950,7 +16647,7 @@
       </p:sp>
       <p:sp>
         <p:nvSpPr>
-          <p:cNvPr id="50" name="Text 47"/>
+          <p:cNvPr id="49" name="Text 46"/>
           <p:cNvSpPr/>
           <p:nvPr/>
         </p:nvSpPr>
@@ -16975,7 +16672,7 @@
             <a:r>
               <a:rPr lang="en-US" sz="1450" b="1" dirty="0">
                 <a:solidFill>
-                  <a:srgbClr val="111318"/>
+                  <a:srgbClr val="FFFFFF"/>
                 </a:solidFill>
                 <a:latin typeface="Montserrat" pitchFamily="34" charset="0"/>
                 <a:ea typeface="Montserrat" pitchFamily="34" charset="-122"/>
@@ -16989,7 +16686,7 @@
       </p:sp>
       <p:sp>
         <p:nvSpPr>
-          <p:cNvPr id="51" name="Shape 48"/>
+          <p:cNvPr id="50" name="Shape 47"/>
           <p:cNvSpPr/>
           <p:nvPr/>
         </p:nvSpPr>
@@ -17004,11 +16701,11 @@
             </a:avLst>
           </a:prstGeom>
           <a:solidFill>
-            <a:srgbClr val="FFFFFF"/>
+            <a:srgbClr val="17141F"/>
           </a:solidFill>
           <a:ln w="12700">
             <a:solidFill>
-              <a:srgbClr val="E6E7EC"/>
+              <a:srgbClr val="2E2A3A"/>
             </a:solidFill>
             <a:prstDash val="solid"/>
           </a:ln>
@@ -17016,7 +16713,7 @@
       </p:sp>
       <p:sp>
         <p:nvSpPr>
-          <p:cNvPr id="52" name="Text 49"/>
+          <p:cNvPr id="51" name="Text 48"/>
           <p:cNvSpPr/>
           <p:nvPr/>
         </p:nvSpPr>
@@ -17044,7 +16741,7 @@
             <a:r>
               <a:rPr lang="en-US" sz="1300" dirty="0">
                 <a:solidFill>
-                  <a:srgbClr val="111318"/>
+                  <a:srgbClr val="FFFFFF"/>
                 </a:solidFill>
                 <a:latin typeface="Montserrat" pitchFamily="34" charset="0"/>
                 <a:ea typeface="Montserrat" pitchFamily="34" charset="-122"/>
@@ -17086,7 +16783,7 @@
             <a:lvl1pPr>
               <a:defRPr sz="850">
                 <a:solidFill>
-                  <a:srgbClr val="9AA1AD"/>
+                  <a:srgbClr val="8A82A0"/>
                 </a:solidFill>
                 <a:latin typeface="Courier New"/>
                 <a:ea typeface="Courier New"/>
@@ -17131,29 +16828,7 @@
       </p:grpSpPr>
       <p:sp>
         <p:nvSpPr>
-          <p:cNvPr id="2" name="Shape 0"/>
-          <p:cNvSpPr/>
-          <p:nvPr/>
-        </p:nvSpPr>
-        <p:spPr>
-          <a:xfrm>
-            <a:off x="231343" y="194767"/>
-            <a:ext cx="11716207" cy="6473952"/>
-          </a:xfrm>
-          <a:prstGeom prst="roundRect">
-            <a:avLst>
-              <a:gd name="adj" fmla="val 3107"/>
-            </a:avLst>
-          </a:prstGeom>
-          <a:solidFill>
-            <a:srgbClr val="FFFFFF"/>
-          </a:solidFill>
-          <a:ln/>
-        </p:spPr>
-      </p:sp>
-      <p:sp>
-        <p:nvSpPr>
-          <p:cNvPr id="3" name="Text 1"/>
+          <p:cNvPr id="2" name="Text 0"/>
           <p:cNvSpPr/>
           <p:nvPr/>
         </p:nvSpPr>
@@ -17178,7 +16853,7 @@
             <a:r>
               <a:rPr lang="en-US" sz="2400" b="1" dirty="0">
                 <a:solidFill>
-                  <a:srgbClr val="111318"/>
+                  <a:srgbClr val="FFFFFF"/>
                 </a:solidFill>
                 <a:latin typeface="Montserrat" pitchFamily="34" charset="0"/>
                 <a:ea typeface="Montserrat" pitchFamily="34" charset="-122"/>
@@ -17192,7 +16867,7 @@
       </p:sp>
       <p:sp>
         <p:nvSpPr>
-          <p:cNvPr id="4" name="Text 2"/>
+          <p:cNvPr id="3" name="Text 1"/>
           <p:cNvSpPr/>
           <p:nvPr/>
         </p:nvSpPr>
@@ -17220,7 +16895,7 @@
             <a:r>
               <a:rPr lang="en-US" sz="1300" dirty="0">
                 <a:solidFill>
-                  <a:srgbClr val="555B66"/>
+                  <a:srgbClr val="AFA9BE"/>
                 </a:solidFill>
                 <a:latin typeface="Montserrat" pitchFamily="34" charset="0"/>
                 <a:ea typeface="Montserrat" pitchFamily="34" charset="-122"/>
@@ -17234,7 +16909,7 @@
       </p:sp>
       <p:sp>
         <p:nvSpPr>
-          <p:cNvPr id="5" name="Shape 3"/>
+          <p:cNvPr id="4" name="Shape 2"/>
           <p:cNvSpPr/>
           <p:nvPr/>
         </p:nvSpPr>
@@ -17249,14 +16924,14 @@
             </a:avLst>
           </a:prstGeom>
           <a:solidFill>
-            <a:srgbClr val="5A05F4"/>
+            <a:srgbClr val="C9A6FF"/>
           </a:solidFill>
           <a:ln/>
         </p:spPr>
       </p:sp>
       <p:sp>
         <p:nvSpPr>
-          <p:cNvPr id="6" name="Text 4"/>
+          <p:cNvPr id="5" name="Text 3"/>
           <p:cNvSpPr/>
           <p:nvPr/>
         </p:nvSpPr>
@@ -17281,7 +16956,7 @@
             <a:r>
               <a:rPr lang="en-US" sz="900" b="1" spc="100" kern="0" dirty="0">
                 <a:solidFill>
-                  <a:srgbClr val="FFFFFF"/>
+                  <a:srgbClr val="1C1140"/>
                 </a:solidFill>
                 <a:latin typeface="Courier New" pitchFamily="34" charset="0"/>
                 <a:ea typeface="Courier New" pitchFamily="34" charset="-122"/>
@@ -17295,7 +16970,7 @@
       </p:sp>
       <p:pic>
         <p:nvPicPr>
-          <p:cNvPr id="7" name="Image 0" descr="preencoded.png">    </p:cNvPr>
+          <p:cNvPr id="6" name="Image 0" descr="preencoded.png">    </p:cNvPr>
           <p:cNvPicPr>
             <a:picLocks noChangeAspect="1"/>
           </p:cNvPicPr>
@@ -17319,7 +16994,7 @@
       </p:pic>
       <p:sp>
         <p:nvSpPr>
-          <p:cNvPr id="8" name="Shape 5"/>
+          <p:cNvPr id="7" name="Shape 4"/>
           <p:cNvSpPr/>
           <p:nvPr/>
         </p:nvSpPr>
@@ -17334,11 +17009,11 @@
             </a:avLst>
           </a:prstGeom>
           <a:solidFill>
-            <a:srgbClr val="FFFFFF"/>
+            <a:srgbClr val="17141F"/>
           </a:solidFill>
           <a:ln w="12700">
             <a:solidFill>
-              <a:srgbClr val="E6E7EC"/>
+              <a:srgbClr val="2E2A3A"/>
             </a:solidFill>
             <a:prstDash val="solid"/>
           </a:ln>
@@ -17346,7 +17021,7 @@
       </p:sp>
       <p:sp>
         <p:nvSpPr>
-          <p:cNvPr id="9" name="Text 6"/>
+          <p:cNvPr id="8" name="Text 5"/>
           <p:cNvSpPr/>
           <p:nvPr/>
         </p:nvSpPr>
@@ -17371,7 +17046,7 @@
             <a:r>
               <a:rPr lang="en-US" sz="1250" b="1" dirty="0">
                 <a:solidFill>
-                  <a:srgbClr val="5A05F4"/>
+                  <a:srgbClr val="C9A6FF"/>
                 </a:solidFill>
                 <a:latin typeface="Courier New" pitchFamily="34" charset="0"/>
                 <a:ea typeface="Courier New" pitchFamily="34" charset="-122"/>
@@ -17385,7 +17060,7 @@
       </p:sp>
       <p:sp>
         <p:nvSpPr>
-          <p:cNvPr id="10" name="Text 7"/>
+          <p:cNvPr id="9" name="Text 6"/>
           <p:cNvSpPr/>
           <p:nvPr/>
         </p:nvSpPr>
@@ -17413,7 +17088,7 @@
             <a:r>
               <a:rPr lang="en-US" sz="1150" dirty="0">
                 <a:solidFill>
-                  <a:srgbClr val="555B66"/>
+                  <a:srgbClr val="AFA9BE"/>
                 </a:solidFill>
                 <a:latin typeface="Montserrat" pitchFamily="34" charset="0"/>
                 <a:ea typeface="Montserrat" pitchFamily="34" charset="-122"/>
@@ -17427,7 +17102,7 @@
       </p:sp>
       <p:sp>
         <p:nvSpPr>
-          <p:cNvPr id="11" name="Shape 8"/>
+          <p:cNvPr id="10" name="Shape 7"/>
           <p:cNvSpPr/>
           <p:nvPr/>
         </p:nvSpPr>
@@ -17442,11 +17117,11 @@
             </a:avLst>
           </a:prstGeom>
           <a:solidFill>
-            <a:srgbClr val="FFFFFF"/>
+            <a:srgbClr val="17141F"/>
           </a:solidFill>
           <a:ln w="12700">
             <a:solidFill>
-              <a:srgbClr val="E6E7EC"/>
+              <a:srgbClr val="2E2A3A"/>
             </a:solidFill>
             <a:prstDash val="solid"/>
           </a:ln>
@@ -17454,7 +17129,7 @@
       </p:sp>
       <p:sp>
         <p:nvSpPr>
-          <p:cNvPr id="12" name="Text 9"/>
+          <p:cNvPr id="11" name="Text 8"/>
           <p:cNvSpPr/>
           <p:nvPr/>
         </p:nvSpPr>
@@ -17479,7 +17154,7 @@
             <a:r>
               <a:rPr lang="en-US" sz="1250" b="1" dirty="0">
                 <a:solidFill>
-                  <a:srgbClr val="5A05F4"/>
+                  <a:srgbClr val="C9A6FF"/>
                 </a:solidFill>
                 <a:latin typeface="Courier New" pitchFamily="34" charset="0"/>
                 <a:ea typeface="Courier New" pitchFamily="34" charset="-122"/>
@@ -17493,7 +17168,7 @@
       </p:sp>
       <p:sp>
         <p:nvSpPr>
-          <p:cNvPr id="13" name="Text 10"/>
+          <p:cNvPr id="12" name="Text 9"/>
           <p:cNvSpPr/>
           <p:nvPr/>
         </p:nvSpPr>
@@ -17521,7 +17196,7 @@
             <a:r>
               <a:rPr lang="en-US" sz="1150" dirty="0">
                 <a:solidFill>
-                  <a:srgbClr val="555B66"/>
+                  <a:srgbClr val="AFA9BE"/>
                 </a:solidFill>
                 <a:latin typeface="Montserrat" pitchFamily="34" charset="0"/>
                 <a:ea typeface="Montserrat" pitchFamily="34" charset="-122"/>
@@ -17535,7 +17210,7 @@
       </p:sp>
       <p:sp>
         <p:nvSpPr>
-          <p:cNvPr id="14" name="Shape 11"/>
+          <p:cNvPr id="13" name="Shape 10"/>
           <p:cNvSpPr/>
           <p:nvPr/>
         </p:nvSpPr>
@@ -17550,11 +17225,11 @@
             </a:avLst>
           </a:prstGeom>
           <a:solidFill>
-            <a:srgbClr val="FFFFFF"/>
+            <a:srgbClr val="17141F"/>
           </a:solidFill>
           <a:ln w="12700">
             <a:solidFill>
-              <a:srgbClr val="E6E7EC"/>
+              <a:srgbClr val="2E2A3A"/>
             </a:solidFill>
             <a:prstDash val="solid"/>
           </a:ln>
@@ -17562,7 +17237,7 @@
       </p:sp>
       <p:sp>
         <p:nvSpPr>
-          <p:cNvPr id="15" name="Text 12"/>
+          <p:cNvPr id="14" name="Text 11"/>
           <p:cNvSpPr/>
           <p:nvPr/>
         </p:nvSpPr>
@@ -17587,7 +17262,7 @@
             <a:r>
               <a:rPr lang="en-US" sz="1250" b="1" dirty="0">
                 <a:solidFill>
-                  <a:srgbClr val="5A05F4"/>
+                  <a:srgbClr val="C9A6FF"/>
                 </a:solidFill>
                 <a:latin typeface="Courier New" pitchFamily="34" charset="0"/>
                 <a:ea typeface="Courier New" pitchFamily="34" charset="-122"/>
@@ -17601,7 +17276,7 @@
       </p:sp>
       <p:sp>
         <p:nvSpPr>
-          <p:cNvPr id="16" name="Text 13"/>
+          <p:cNvPr id="15" name="Text 12"/>
           <p:cNvSpPr/>
           <p:nvPr/>
         </p:nvSpPr>
@@ -17629,7 +17304,7 @@
             <a:r>
               <a:rPr lang="en-US" sz="1150" dirty="0">
                 <a:solidFill>
-                  <a:srgbClr val="555B66"/>
+                  <a:srgbClr val="AFA9BE"/>
                 </a:solidFill>
                 <a:latin typeface="Montserrat" pitchFamily="34" charset="0"/>
                 <a:ea typeface="Montserrat" pitchFamily="34" charset="-122"/>
@@ -17643,7 +17318,7 @@
       </p:sp>
       <p:sp>
         <p:nvSpPr>
-          <p:cNvPr id="17" name="Shape 14"/>
+          <p:cNvPr id="16" name="Shape 13"/>
           <p:cNvSpPr/>
           <p:nvPr/>
         </p:nvSpPr>
@@ -17658,11 +17333,11 @@
             </a:avLst>
           </a:prstGeom>
           <a:solidFill>
-            <a:srgbClr val="FFFFFF"/>
+            <a:srgbClr val="17141F"/>
           </a:solidFill>
           <a:ln w="12700">
             <a:solidFill>
-              <a:srgbClr val="E6E7EC"/>
+              <a:srgbClr val="2E2A3A"/>
             </a:solidFill>
             <a:prstDash val="solid"/>
           </a:ln>
@@ -17670,7 +17345,7 @@
       </p:sp>
       <p:sp>
         <p:nvSpPr>
-          <p:cNvPr id="18" name="Text 15"/>
+          <p:cNvPr id="17" name="Text 14"/>
           <p:cNvSpPr/>
           <p:nvPr/>
         </p:nvSpPr>
@@ -17695,7 +17370,7 @@
             <a:r>
               <a:rPr lang="en-US" sz="1250" b="1" dirty="0">
                 <a:solidFill>
-                  <a:srgbClr val="5A05F4"/>
+                  <a:srgbClr val="C9A6FF"/>
                 </a:solidFill>
                 <a:latin typeface="Courier New" pitchFamily="34" charset="0"/>
                 <a:ea typeface="Courier New" pitchFamily="34" charset="-122"/>
@@ -17709,7 +17384,7 @@
       </p:sp>
       <p:sp>
         <p:nvSpPr>
-          <p:cNvPr id="19" name="Text 16"/>
+          <p:cNvPr id="18" name="Text 15"/>
           <p:cNvSpPr/>
           <p:nvPr/>
         </p:nvSpPr>
@@ -17737,7 +17412,7 @@
             <a:r>
               <a:rPr lang="en-US" sz="1150" dirty="0">
                 <a:solidFill>
-                  <a:srgbClr val="555B66"/>
+                  <a:srgbClr val="AFA9BE"/>
                 </a:solidFill>
                 <a:latin typeface="Montserrat" pitchFamily="34" charset="0"/>
                 <a:ea typeface="Montserrat" pitchFamily="34" charset="-122"/>
@@ -17751,7 +17426,7 @@
       </p:sp>
       <p:sp>
         <p:nvSpPr>
-          <p:cNvPr id="20" name="Shape 17"/>
+          <p:cNvPr id="19" name="Shape 16"/>
           <p:cNvSpPr/>
           <p:nvPr/>
         </p:nvSpPr>
@@ -17766,11 +17441,11 @@
             </a:avLst>
           </a:prstGeom>
           <a:solidFill>
-            <a:srgbClr val="FFFFFF"/>
+            <a:srgbClr val="17141F"/>
           </a:solidFill>
           <a:ln w="12700">
             <a:solidFill>
-              <a:srgbClr val="E6E7EC"/>
+              <a:srgbClr val="2E2A3A"/>
             </a:solidFill>
             <a:prstDash val="solid"/>
           </a:ln>
@@ -17778,7 +17453,7 @@
       </p:sp>
       <p:sp>
         <p:nvSpPr>
-          <p:cNvPr id="21" name="Text 18"/>
+          <p:cNvPr id="20" name="Text 17"/>
           <p:cNvSpPr/>
           <p:nvPr/>
         </p:nvSpPr>
@@ -17803,7 +17478,7 @@
             <a:r>
               <a:rPr lang="en-US" sz="1250" b="1" dirty="0">
                 <a:solidFill>
-                  <a:srgbClr val="5A05F4"/>
+                  <a:srgbClr val="C9A6FF"/>
                 </a:solidFill>
                 <a:latin typeface="Courier New" pitchFamily="34" charset="0"/>
                 <a:ea typeface="Courier New" pitchFamily="34" charset="-122"/>
@@ -17817,7 +17492,7 @@
       </p:sp>
       <p:sp>
         <p:nvSpPr>
-          <p:cNvPr id="22" name="Text 19"/>
+          <p:cNvPr id="21" name="Text 18"/>
           <p:cNvSpPr/>
           <p:nvPr/>
         </p:nvSpPr>
@@ -17845,7 +17520,7 @@
             <a:r>
               <a:rPr lang="en-US" sz="1150" dirty="0">
                 <a:solidFill>
-                  <a:srgbClr val="555B66"/>
+                  <a:srgbClr val="AFA9BE"/>
                 </a:solidFill>
                 <a:latin typeface="Montserrat" pitchFamily="34" charset="0"/>
                 <a:ea typeface="Montserrat" pitchFamily="34" charset="-122"/>
@@ -17859,7 +17534,7 @@
       </p:sp>
       <p:sp>
         <p:nvSpPr>
-          <p:cNvPr id="23" name="Shape 20"/>
+          <p:cNvPr id="22" name="Shape 19"/>
           <p:cNvSpPr/>
           <p:nvPr/>
         </p:nvSpPr>
@@ -17874,11 +17549,11 @@
             </a:avLst>
           </a:prstGeom>
           <a:solidFill>
-            <a:srgbClr val="FFFFFF"/>
+            <a:srgbClr val="17141F"/>
           </a:solidFill>
           <a:ln w="12700">
             <a:solidFill>
-              <a:srgbClr val="E6E7EC"/>
+              <a:srgbClr val="2E2A3A"/>
             </a:solidFill>
             <a:prstDash val="solid"/>
           </a:ln>
@@ -17886,7 +17561,7 @@
       </p:sp>
       <p:sp>
         <p:nvSpPr>
-          <p:cNvPr id="24" name="Text 21"/>
+          <p:cNvPr id="23" name="Text 20"/>
           <p:cNvSpPr/>
           <p:nvPr/>
         </p:nvSpPr>
@@ -17911,7 +17586,7 @@
             <a:r>
               <a:rPr lang="en-US" sz="1250" b="1" dirty="0">
                 <a:solidFill>
-                  <a:srgbClr val="5A05F4"/>
+                  <a:srgbClr val="C9A6FF"/>
                 </a:solidFill>
                 <a:latin typeface="Courier New" pitchFamily="34" charset="0"/>
                 <a:ea typeface="Courier New" pitchFamily="34" charset="-122"/>
@@ -17925,7 +17600,7 @@
       </p:sp>
       <p:sp>
         <p:nvSpPr>
-          <p:cNvPr id="25" name="Text 22"/>
+          <p:cNvPr id="24" name="Text 21"/>
           <p:cNvSpPr/>
           <p:nvPr/>
         </p:nvSpPr>
@@ -17953,7 +17628,7 @@
             <a:r>
               <a:rPr lang="en-US" sz="1150" dirty="0">
                 <a:solidFill>
-                  <a:srgbClr val="555B66"/>
+                  <a:srgbClr val="AFA9BE"/>
                 </a:solidFill>
                 <a:latin typeface="Montserrat" pitchFamily="34" charset="0"/>
                 <a:ea typeface="Montserrat" pitchFamily="34" charset="-122"/>
@@ -17967,7 +17642,7 @@
       </p:sp>
       <p:sp>
         <p:nvSpPr>
-          <p:cNvPr id="26" name="Shape 23"/>
+          <p:cNvPr id="25" name="Shape 22"/>
           <p:cNvSpPr/>
           <p:nvPr/>
         </p:nvSpPr>
@@ -17982,11 +17657,11 @@
             </a:avLst>
           </a:prstGeom>
           <a:solidFill>
-            <a:srgbClr val="FFFFFF"/>
+            <a:srgbClr val="17141F"/>
           </a:solidFill>
           <a:ln w="12700">
             <a:solidFill>
-              <a:srgbClr val="E6E7EC"/>
+              <a:srgbClr val="2E2A3A"/>
             </a:solidFill>
             <a:prstDash val="solid"/>
           </a:ln>
@@ -17994,7 +17669,7 @@
       </p:sp>
       <p:sp>
         <p:nvSpPr>
-          <p:cNvPr id="27" name="Text 24"/>
+          <p:cNvPr id="26" name="Text 23"/>
           <p:cNvSpPr/>
           <p:nvPr/>
         </p:nvSpPr>
@@ -18022,7 +17697,7 @@
             <a:r>
               <a:rPr lang="en-US" sz="1300" dirty="0">
                 <a:solidFill>
-                  <a:srgbClr val="111318"/>
+                  <a:srgbClr val="FFFFFF"/>
                 </a:solidFill>
                 <a:latin typeface="Montserrat" pitchFamily="34" charset="0"/>
                 <a:ea typeface="Montserrat" pitchFamily="34" charset="-122"/>
@@ -18064,7 +17739,7 @@
             <a:lvl1pPr>
               <a:defRPr sz="850">
                 <a:solidFill>
-                  <a:srgbClr val="9AA1AD"/>
+                  <a:srgbClr val="8A82A0"/>
                 </a:solidFill>
                 <a:latin typeface="Courier New"/>
                 <a:ea typeface="Courier New"/>
@@ -18109,29 +17784,7 @@
       </p:grpSpPr>
       <p:sp>
         <p:nvSpPr>
-          <p:cNvPr id="2" name="Shape 0"/>
-          <p:cNvSpPr/>
-          <p:nvPr/>
-        </p:nvSpPr>
-        <p:spPr>
-          <a:xfrm>
-            <a:off x="231343" y="194767"/>
-            <a:ext cx="11716207" cy="6473952"/>
-          </a:xfrm>
-          <a:prstGeom prst="roundRect">
-            <a:avLst>
-              <a:gd name="adj" fmla="val 3107"/>
-            </a:avLst>
-          </a:prstGeom>
-          <a:solidFill>
-            <a:srgbClr val="FFFFFF"/>
-          </a:solidFill>
-          <a:ln/>
-        </p:spPr>
-      </p:sp>
-      <p:sp>
-        <p:nvSpPr>
-          <p:cNvPr id="3" name="Text 1"/>
+          <p:cNvPr id="2" name="Text 0"/>
           <p:cNvSpPr/>
           <p:nvPr/>
         </p:nvSpPr>
@@ -18156,7 +17809,7 @@
             <a:r>
               <a:rPr lang="en-US" sz="2600" b="1" dirty="0">
                 <a:solidFill>
-                  <a:srgbClr val="5A05F4"/>
+                  <a:srgbClr val="C9A6FF"/>
                 </a:solidFill>
                 <a:latin typeface="Courier New" pitchFamily="34" charset="0"/>
                 <a:ea typeface="Courier New" pitchFamily="34" charset="-122"/>
@@ -18170,7 +17823,7 @@
       </p:sp>
       <p:sp>
         <p:nvSpPr>
-          <p:cNvPr id="4" name="Text 2"/>
+          <p:cNvPr id="3" name="Text 1"/>
           <p:cNvSpPr/>
           <p:nvPr/>
         </p:nvSpPr>
@@ -18195,7 +17848,7 @@
             <a:r>
               <a:rPr lang="en-US" sz="2400" b="1" dirty="0">
                 <a:solidFill>
-                  <a:srgbClr val="111318"/>
+                  <a:srgbClr val="FFFFFF"/>
                 </a:solidFill>
                 <a:latin typeface="Montserrat" pitchFamily="34" charset="0"/>
                 <a:ea typeface="Montserrat" pitchFamily="34" charset="-122"/>
@@ -18209,7 +17862,7 @@
       </p:sp>
       <p:sp>
         <p:nvSpPr>
-          <p:cNvPr id="5" name="Shape 3"/>
+          <p:cNvPr id="4" name="Shape 2"/>
           <p:cNvSpPr/>
           <p:nvPr/>
         </p:nvSpPr>
@@ -18224,14 +17877,14 @@
             </a:avLst>
           </a:prstGeom>
           <a:solidFill>
-            <a:srgbClr val="5A05F4"/>
+            <a:srgbClr val="C9A6FF"/>
           </a:solidFill>
           <a:ln/>
         </p:spPr>
       </p:sp>
       <p:sp>
         <p:nvSpPr>
-          <p:cNvPr id="6" name="Text 4"/>
+          <p:cNvPr id="5" name="Text 3"/>
           <p:cNvSpPr/>
           <p:nvPr/>
         </p:nvSpPr>
@@ -18256,7 +17909,7 @@
             <a:r>
               <a:rPr lang="en-US" sz="900" b="1" spc="100" kern="0" dirty="0">
                 <a:solidFill>
-                  <a:srgbClr val="FFFFFF"/>
+                  <a:srgbClr val="1C1140"/>
                 </a:solidFill>
                 <a:latin typeface="Courier New" pitchFamily="34" charset="0"/>
                 <a:ea typeface="Courier New" pitchFamily="34" charset="-122"/>
@@ -18270,7 +17923,7 @@
       </p:sp>
       <p:pic>
         <p:nvPicPr>
-          <p:cNvPr id="7" name="Image 0" descr="preencoded.png">    </p:cNvPr>
+          <p:cNvPr id="6" name="Image 0" descr="preencoded.png">    </p:cNvPr>
           <p:cNvPicPr>
             <a:picLocks noChangeAspect="1"/>
           </p:cNvPicPr>
@@ -18294,7 +17947,7 @@
       </p:pic>
       <p:sp>
         <p:nvSpPr>
-          <p:cNvPr id="8" name="Shape 5"/>
+          <p:cNvPr id="7" name="Shape 4"/>
           <p:cNvSpPr/>
           <p:nvPr/>
         </p:nvSpPr>
@@ -18309,14 +17962,14 @@
             </a:avLst>
           </a:prstGeom>
           <a:solidFill>
-            <a:srgbClr val="FBE9E9"/>
+            <a:srgbClr val="2E1418"/>
           </a:solidFill>
           <a:ln/>
         </p:spPr>
       </p:sp>
       <p:sp>
         <p:nvSpPr>
-          <p:cNvPr id="9" name="Text 6"/>
+          <p:cNvPr id="8" name="Text 5"/>
           <p:cNvSpPr/>
           <p:nvPr/>
         </p:nvSpPr>
@@ -18341,7 +17994,7 @@
             <a:r>
               <a:rPr lang="en-US" sz="1450" b="1" dirty="0">
                 <a:solidFill>
-                  <a:srgbClr val="C62A2A"/>
+                  <a:srgbClr val="FF7B7B"/>
                 </a:solidFill>
                 <a:latin typeface="Montserrat" pitchFamily="34" charset="0"/>
                 <a:ea typeface="Montserrat" pitchFamily="34" charset="-122"/>
@@ -18355,7 +18008,7 @@
       </p:sp>
       <p:sp>
         <p:nvSpPr>
-          <p:cNvPr id="10" name="Text 7"/>
+          <p:cNvPr id="9" name="Text 6"/>
           <p:cNvSpPr/>
           <p:nvPr/>
         </p:nvSpPr>
@@ -18383,7 +18036,7 @@
             <a:r>
               <a:rPr lang="en-US" sz="1200" dirty="0">
                 <a:solidFill>
-                  <a:srgbClr val="111318"/>
+                  <a:srgbClr val="FFFFFF"/>
                 </a:solidFill>
                 <a:latin typeface="Montserrat" pitchFamily="34" charset="0"/>
                 <a:ea typeface="Montserrat" pitchFamily="34" charset="-122"/>
@@ -18397,7 +18050,7 @@
       </p:sp>
       <p:sp>
         <p:nvSpPr>
-          <p:cNvPr id="11" name="Shape 8"/>
+          <p:cNvPr id="10" name="Shape 7"/>
           <p:cNvSpPr/>
           <p:nvPr/>
         </p:nvSpPr>
@@ -18412,14 +18065,14 @@
             </a:avLst>
           </a:prstGeom>
           <a:solidFill>
-            <a:srgbClr val="E9F4EF"/>
+            <a:srgbClr val="102A20"/>
           </a:solidFill>
           <a:ln/>
         </p:spPr>
       </p:sp>
       <p:sp>
         <p:nvSpPr>
-          <p:cNvPr id="12" name="Text 9"/>
+          <p:cNvPr id="11" name="Text 8"/>
           <p:cNvSpPr/>
           <p:nvPr/>
         </p:nvSpPr>
@@ -18444,7 +18097,7 @@
             <a:r>
               <a:rPr lang="en-US" sz="1450" b="1" dirty="0">
                 <a:solidFill>
-                  <a:srgbClr val="1B8A5A"/>
+                  <a:srgbClr val="5FD6A0"/>
                 </a:solidFill>
                 <a:latin typeface="Montserrat" pitchFamily="34" charset="0"/>
                 <a:ea typeface="Montserrat" pitchFamily="34" charset="-122"/>
@@ -18458,7 +18111,7 @@
       </p:sp>
       <p:sp>
         <p:nvSpPr>
-          <p:cNvPr id="13" name="Text 10"/>
+          <p:cNvPr id="12" name="Text 9"/>
           <p:cNvSpPr/>
           <p:nvPr/>
         </p:nvSpPr>
@@ -18486,7 +18139,7 @@
             <a:r>
               <a:rPr lang="en-US" sz="1200" dirty="0">
                 <a:solidFill>
-                  <a:srgbClr val="111318"/>
+                  <a:srgbClr val="FFFFFF"/>
                 </a:solidFill>
                 <a:latin typeface="Montserrat" pitchFamily="34" charset="0"/>
                 <a:ea typeface="Montserrat" pitchFamily="34" charset="-122"/>
@@ -18500,7 +18153,7 @@
       </p:sp>
       <p:sp>
         <p:nvSpPr>
-          <p:cNvPr id="14" name="Shape 11"/>
+          <p:cNvPr id="13" name="Shape 10"/>
           <p:cNvSpPr/>
           <p:nvPr/>
         </p:nvSpPr>
@@ -18522,7 +18175,7 @@
       </p:sp>
       <p:sp>
         <p:nvSpPr>
-          <p:cNvPr id="15" name="Text 12"/>
+          <p:cNvPr id="14" name="Text 11"/>
           <p:cNvSpPr/>
           <p:nvPr/>
         </p:nvSpPr>
@@ -18564,7 +18217,7 @@
       </p:sp>
       <p:sp>
         <p:nvSpPr>
-          <p:cNvPr id="16" name="Shape 13"/>
+          <p:cNvPr id="15" name="Shape 12"/>
           <p:cNvSpPr/>
           <p:nvPr/>
         </p:nvSpPr>
@@ -18579,14 +18232,14 @@
             </a:avLst>
           </a:prstGeom>
           <a:solidFill>
-            <a:srgbClr val="E9F4EF"/>
+            <a:srgbClr val="102A20"/>
           </a:solidFill>
           <a:ln/>
         </p:spPr>
       </p:sp>
       <p:sp>
         <p:nvSpPr>
-          <p:cNvPr id="17" name="Text 14"/>
+          <p:cNvPr id="16" name="Text 13"/>
           <p:cNvSpPr/>
           <p:nvPr/>
         </p:nvSpPr>
@@ -18611,7 +18264,7 @@
             <a:r>
               <a:rPr lang="en-US" sz="950" b="1" spc="150" kern="0" dirty="0">
                 <a:solidFill>
-                  <a:srgbClr val="1B8A5A"/>
+                  <a:srgbClr val="5FD6A0"/>
                 </a:solidFill>
                 <a:latin typeface="Courier New" pitchFamily="34" charset="0"/>
                 <a:ea typeface="Courier New" pitchFamily="34" charset="-122"/>
@@ -18625,7 +18278,7 @@
       </p:sp>
       <p:sp>
         <p:nvSpPr>
-          <p:cNvPr id="18" name="Text 15"/>
+          <p:cNvPr id="17" name="Text 14"/>
           <p:cNvSpPr/>
           <p:nvPr/>
         </p:nvSpPr>
@@ -18653,7 +18306,7 @@
             <a:r>
               <a:rPr lang="en-US" sz="1300" dirty="0">
                 <a:solidFill>
-                  <a:srgbClr val="111318"/>
+                  <a:srgbClr val="FFFFFF"/>
                 </a:solidFill>
                 <a:latin typeface="Montserrat" pitchFamily="34" charset="0"/>
                 <a:ea typeface="Montserrat" pitchFamily="34" charset="-122"/>
@@ -18695,7 +18348,7 @@
             <a:lvl1pPr>
               <a:defRPr sz="850">
                 <a:solidFill>
-                  <a:srgbClr val="9AA1AD"/>
+                  <a:srgbClr val="8A82A0"/>
                 </a:solidFill>
                 <a:latin typeface="Courier New"/>
                 <a:ea typeface="Courier New"/>
@@ -18740,29 +18393,7 @@
       </p:grpSpPr>
       <p:sp>
         <p:nvSpPr>
-          <p:cNvPr id="2" name="Shape 0"/>
-          <p:cNvSpPr/>
-          <p:nvPr/>
-        </p:nvSpPr>
-        <p:spPr>
-          <a:xfrm>
-            <a:off x="231343" y="194767"/>
-            <a:ext cx="11716207" cy="6473952"/>
-          </a:xfrm>
-          <a:prstGeom prst="roundRect">
-            <a:avLst>
-              <a:gd name="adj" fmla="val 3107"/>
-            </a:avLst>
-          </a:prstGeom>
-          <a:solidFill>
-            <a:srgbClr val="FFFFFF"/>
-          </a:solidFill>
-          <a:ln/>
-        </p:spPr>
-      </p:sp>
-      <p:sp>
-        <p:nvSpPr>
-          <p:cNvPr id="3" name="Text 1"/>
+          <p:cNvPr id="2" name="Text 0"/>
           <p:cNvSpPr/>
           <p:nvPr/>
         </p:nvSpPr>
@@ -18787,7 +18418,7 @@
             <a:r>
               <a:rPr lang="en-US" sz="2600" b="1" dirty="0">
                 <a:solidFill>
-                  <a:srgbClr val="5A05F4"/>
+                  <a:srgbClr val="C9A6FF"/>
                 </a:solidFill>
                 <a:latin typeface="Courier New" pitchFamily="34" charset="0"/>
                 <a:ea typeface="Courier New" pitchFamily="34" charset="-122"/>
@@ -18801,7 +18432,7 @@
       </p:sp>
       <p:sp>
         <p:nvSpPr>
-          <p:cNvPr id="4" name="Text 2"/>
+          <p:cNvPr id="3" name="Text 1"/>
           <p:cNvSpPr/>
           <p:nvPr/>
         </p:nvSpPr>
@@ -18826,7 +18457,7 @@
             <a:r>
               <a:rPr lang="en-US" sz="2400" b="1" dirty="0">
                 <a:solidFill>
-                  <a:srgbClr val="111318"/>
+                  <a:srgbClr val="FFFFFF"/>
                 </a:solidFill>
                 <a:latin typeface="Montserrat" pitchFamily="34" charset="0"/>
                 <a:ea typeface="Montserrat" pitchFamily="34" charset="-122"/>
@@ -18840,7 +18471,7 @@
       </p:sp>
       <p:sp>
         <p:nvSpPr>
-          <p:cNvPr id="5" name="Shape 3"/>
+          <p:cNvPr id="4" name="Shape 2"/>
           <p:cNvSpPr/>
           <p:nvPr/>
         </p:nvSpPr>
@@ -18855,14 +18486,14 @@
             </a:avLst>
           </a:prstGeom>
           <a:solidFill>
-            <a:srgbClr val="5A05F4"/>
+            <a:srgbClr val="C9A6FF"/>
           </a:solidFill>
           <a:ln/>
         </p:spPr>
       </p:sp>
       <p:sp>
         <p:nvSpPr>
-          <p:cNvPr id="6" name="Text 4"/>
+          <p:cNvPr id="5" name="Text 3"/>
           <p:cNvSpPr/>
           <p:nvPr/>
         </p:nvSpPr>
@@ -18887,7 +18518,7 @@
             <a:r>
               <a:rPr lang="en-US" sz="900" b="1" spc="100" kern="0" dirty="0">
                 <a:solidFill>
-                  <a:srgbClr val="FFFFFF"/>
+                  <a:srgbClr val="1C1140"/>
                 </a:solidFill>
                 <a:latin typeface="Courier New" pitchFamily="34" charset="0"/>
                 <a:ea typeface="Courier New" pitchFamily="34" charset="-122"/>
@@ -18901,7 +18532,7 @@
       </p:sp>
       <p:pic>
         <p:nvPicPr>
-          <p:cNvPr id="7" name="Image 0" descr="preencoded.png">    </p:cNvPr>
+          <p:cNvPr id="6" name="Image 0" descr="preencoded.png">    </p:cNvPr>
           <p:cNvPicPr>
             <a:picLocks noChangeAspect="1"/>
           </p:cNvPicPr>
@@ -18925,7 +18556,7 @@
       </p:pic>
       <p:sp>
         <p:nvSpPr>
-          <p:cNvPr id="8" name="Shape 5"/>
+          <p:cNvPr id="7" name="Shape 4"/>
           <p:cNvSpPr/>
           <p:nvPr/>
         </p:nvSpPr>
@@ -18940,11 +18571,11 @@
             </a:avLst>
           </a:prstGeom>
           <a:solidFill>
-            <a:srgbClr val="FFFFFF"/>
+            <a:srgbClr val="17141F"/>
           </a:solidFill>
           <a:ln w="12700">
             <a:solidFill>
-              <a:srgbClr val="E6E7EC"/>
+              <a:srgbClr val="2E2A3A"/>
             </a:solidFill>
             <a:prstDash val="solid"/>
           </a:ln>
@@ -18952,7 +18583,7 @@
       </p:sp>
       <p:sp>
         <p:nvSpPr>
-          <p:cNvPr id="9" name="Text 6"/>
+          <p:cNvPr id="8" name="Text 5"/>
           <p:cNvSpPr/>
           <p:nvPr/>
         </p:nvSpPr>
@@ -18977,7 +18608,7 @@
             <a:r>
               <a:rPr lang="en-US" sz="1000" dirty="0">
                 <a:solidFill>
-                  <a:srgbClr val="111318"/>
+                  <a:srgbClr val="FFFFFF"/>
                 </a:solidFill>
                 <a:latin typeface="Courier New" pitchFamily="34" charset="0"/>
                 <a:ea typeface="Courier New" pitchFamily="34" charset="-122"/>
@@ -18991,7 +18622,7 @@
       </p:sp>
       <p:sp>
         <p:nvSpPr>
-          <p:cNvPr id="10" name="Shape 7"/>
+          <p:cNvPr id="9" name="Shape 6"/>
           <p:cNvSpPr/>
           <p:nvPr/>
         </p:nvSpPr>
@@ -19006,7 +18637,7 @@
           <a:noFill/>
           <a:ln w="15875">
             <a:solidFill>
-              <a:srgbClr val="C9B8FB"/>
+              <a:srgbClr val="9B7BE8"/>
             </a:solidFill>
             <a:prstDash val="solid"/>
           </a:ln>
@@ -19014,7 +18645,7 @@
       </p:sp>
       <p:sp>
         <p:nvSpPr>
-          <p:cNvPr id="11" name="Shape 8"/>
+          <p:cNvPr id="10" name="Shape 7"/>
           <p:cNvSpPr/>
           <p:nvPr/>
         </p:nvSpPr>
@@ -19027,14 +18658,14 @@
             <a:avLst/>
           </a:prstGeom>
           <a:solidFill>
-            <a:srgbClr val="C9B8FB"/>
+            <a:srgbClr val="9B7BE8"/>
           </a:solidFill>
           <a:ln/>
         </p:spPr>
       </p:sp>
       <p:sp>
         <p:nvSpPr>
-          <p:cNvPr id="12" name="Shape 9"/>
+          <p:cNvPr id="11" name="Shape 8"/>
           <p:cNvSpPr/>
           <p:nvPr/>
         </p:nvSpPr>
@@ -19049,11 +18680,11 @@
             </a:avLst>
           </a:prstGeom>
           <a:solidFill>
-            <a:srgbClr val="FFFFFF"/>
+            <a:srgbClr val="17141F"/>
           </a:solidFill>
           <a:ln w="12700">
             <a:solidFill>
-              <a:srgbClr val="E6E7EC"/>
+              <a:srgbClr val="2E2A3A"/>
             </a:solidFill>
             <a:prstDash val="solid"/>
           </a:ln>
@@ -19061,7 +18692,7 @@
       </p:sp>
       <p:sp>
         <p:nvSpPr>
-          <p:cNvPr id="13" name="Text 10"/>
+          <p:cNvPr id="12" name="Text 9"/>
           <p:cNvSpPr/>
           <p:nvPr/>
         </p:nvSpPr>
@@ -19086,7 +18717,7 @@
             <a:r>
               <a:rPr lang="en-US" sz="1000" dirty="0">
                 <a:solidFill>
-                  <a:srgbClr val="111318"/>
+                  <a:srgbClr val="FFFFFF"/>
                 </a:solidFill>
                 <a:latin typeface="Courier New" pitchFamily="34" charset="0"/>
                 <a:ea typeface="Courier New" pitchFamily="34" charset="-122"/>
@@ -19100,7 +18731,7 @@
       </p:sp>
       <p:sp>
         <p:nvSpPr>
-          <p:cNvPr id="14" name="Shape 11"/>
+          <p:cNvPr id="13" name="Shape 10"/>
           <p:cNvSpPr/>
           <p:nvPr/>
         </p:nvSpPr>
@@ -19115,7 +18746,7 @@
           <a:noFill/>
           <a:ln w="15875">
             <a:solidFill>
-              <a:srgbClr val="C9B8FB"/>
+              <a:srgbClr val="9B7BE8"/>
             </a:solidFill>
             <a:prstDash val="solid"/>
           </a:ln>
@@ -19123,7 +18754,7 @@
       </p:sp>
       <p:sp>
         <p:nvSpPr>
-          <p:cNvPr id="15" name="Shape 12"/>
+          <p:cNvPr id="14" name="Shape 11"/>
           <p:cNvSpPr/>
           <p:nvPr/>
         </p:nvSpPr>
@@ -19136,14 +18767,14 @@
             <a:avLst/>
           </a:prstGeom>
           <a:solidFill>
-            <a:srgbClr val="C9B8FB"/>
+            <a:srgbClr val="9B7BE8"/>
           </a:solidFill>
           <a:ln/>
         </p:spPr>
       </p:sp>
       <p:sp>
         <p:nvSpPr>
-          <p:cNvPr id="16" name="Shape 13"/>
+          <p:cNvPr id="15" name="Shape 12"/>
           <p:cNvSpPr/>
           <p:nvPr/>
         </p:nvSpPr>
@@ -19158,11 +18789,11 @@
             </a:avLst>
           </a:prstGeom>
           <a:solidFill>
-            <a:srgbClr val="FFFFFF"/>
+            <a:srgbClr val="17141F"/>
           </a:solidFill>
           <a:ln w="12700">
             <a:solidFill>
-              <a:srgbClr val="E6E7EC"/>
+              <a:srgbClr val="2E2A3A"/>
             </a:solidFill>
             <a:prstDash val="solid"/>
           </a:ln>
@@ -19170,7 +18801,7 @@
       </p:sp>
       <p:sp>
         <p:nvSpPr>
-          <p:cNvPr id="17" name="Text 14"/>
+          <p:cNvPr id="16" name="Text 13"/>
           <p:cNvSpPr/>
           <p:nvPr/>
         </p:nvSpPr>
@@ -19195,7 +18826,7 @@
             <a:r>
               <a:rPr lang="en-US" sz="1000" dirty="0">
                 <a:solidFill>
-                  <a:srgbClr val="111318"/>
+                  <a:srgbClr val="FFFFFF"/>
                 </a:solidFill>
                 <a:latin typeface="Courier New" pitchFamily="34" charset="0"/>
                 <a:ea typeface="Courier New" pitchFamily="34" charset="-122"/>
@@ -19209,7 +18840,7 @@
       </p:sp>
       <p:sp>
         <p:nvSpPr>
-          <p:cNvPr id="18" name="Shape 15"/>
+          <p:cNvPr id="17" name="Shape 14"/>
           <p:cNvSpPr/>
           <p:nvPr/>
         </p:nvSpPr>
@@ -19224,7 +18855,7 @@
           <a:noFill/>
           <a:ln w="15875">
             <a:solidFill>
-              <a:srgbClr val="C9B8FB"/>
+              <a:srgbClr val="9B7BE8"/>
             </a:solidFill>
             <a:prstDash val="solid"/>
           </a:ln>
@@ -19232,7 +18863,7 @@
       </p:sp>
       <p:sp>
         <p:nvSpPr>
-          <p:cNvPr id="19" name="Shape 16"/>
+          <p:cNvPr id="18" name="Shape 15"/>
           <p:cNvSpPr/>
           <p:nvPr/>
         </p:nvSpPr>
@@ -19245,14 +18876,14 @@
             <a:avLst/>
           </a:prstGeom>
           <a:solidFill>
-            <a:srgbClr val="C9B8FB"/>
+            <a:srgbClr val="9B7BE8"/>
           </a:solidFill>
           <a:ln/>
         </p:spPr>
       </p:sp>
       <p:sp>
         <p:nvSpPr>
-          <p:cNvPr id="20" name="Shape 17"/>
+          <p:cNvPr id="19" name="Shape 16"/>
           <p:cNvSpPr/>
           <p:nvPr/>
         </p:nvSpPr>
@@ -19267,14 +18898,14 @@
             </a:avLst>
           </a:prstGeom>
           <a:solidFill>
-            <a:srgbClr val="EFEAFE"/>
+            <a:srgbClr val="1C1140"/>
           </a:solidFill>
           <a:ln/>
         </p:spPr>
       </p:sp>
       <p:sp>
         <p:nvSpPr>
-          <p:cNvPr id="21" name="Text 18"/>
+          <p:cNvPr id="20" name="Text 17"/>
           <p:cNvSpPr/>
           <p:nvPr/>
         </p:nvSpPr>
@@ -19299,7 +18930,7 @@
             <a:r>
               <a:rPr lang="en-US" sz="1000" b="1" dirty="0">
                 <a:solidFill>
-                  <a:srgbClr val="5A05F4"/>
+                  <a:srgbClr val="C9A6FF"/>
                 </a:solidFill>
                 <a:latin typeface="Courier New" pitchFamily="34" charset="0"/>
                 <a:ea typeface="Courier New" pitchFamily="34" charset="-122"/>
@@ -19313,7 +18944,7 @@
       </p:sp>
       <p:sp>
         <p:nvSpPr>
-          <p:cNvPr id="22" name="Shape 19"/>
+          <p:cNvPr id="21" name="Shape 18"/>
           <p:cNvSpPr/>
           <p:nvPr/>
         </p:nvSpPr>
@@ -19328,7 +18959,7 @@
           <a:noFill/>
           <a:ln w="15875">
             <a:solidFill>
-              <a:srgbClr val="C9B8FB"/>
+              <a:srgbClr val="9B7BE8"/>
             </a:solidFill>
             <a:prstDash val="solid"/>
           </a:ln>
@@ -19336,7 +18967,7 @@
       </p:sp>
       <p:sp>
         <p:nvSpPr>
-          <p:cNvPr id="23" name="Shape 20"/>
+          <p:cNvPr id="22" name="Shape 19"/>
           <p:cNvSpPr/>
           <p:nvPr/>
         </p:nvSpPr>
@@ -19349,14 +18980,14 @@
             <a:avLst/>
           </a:prstGeom>
           <a:solidFill>
-            <a:srgbClr val="C9B8FB"/>
+            <a:srgbClr val="9B7BE8"/>
           </a:solidFill>
           <a:ln/>
         </p:spPr>
       </p:sp>
       <p:sp>
         <p:nvSpPr>
-          <p:cNvPr id="24" name="Shape 21"/>
+          <p:cNvPr id="23" name="Shape 20"/>
           <p:cNvSpPr/>
           <p:nvPr/>
         </p:nvSpPr>
@@ -19371,14 +19002,14 @@
             </a:avLst>
           </a:prstGeom>
           <a:solidFill>
-            <a:srgbClr val="E9F4EF"/>
+            <a:srgbClr val="102A20"/>
           </a:solidFill>
           <a:ln/>
         </p:spPr>
       </p:sp>
       <p:sp>
         <p:nvSpPr>
-          <p:cNvPr id="25" name="Text 22"/>
+          <p:cNvPr id="24" name="Text 21"/>
           <p:cNvSpPr/>
           <p:nvPr/>
         </p:nvSpPr>
@@ -19403,7 +19034,7 @@
             <a:r>
               <a:rPr lang="en-US" sz="1000" b="1" dirty="0">
                 <a:solidFill>
-                  <a:srgbClr val="1B8A5A"/>
+                  <a:srgbClr val="5FD6A0"/>
                 </a:solidFill>
                 <a:latin typeface="Courier New" pitchFamily="34" charset="0"/>
                 <a:ea typeface="Courier New" pitchFamily="34" charset="-122"/>
@@ -19417,7 +19048,7 @@
       </p:sp>
       <p:sp>
         <p:nvSpPr>
-          <p:cNvPr id="26" name="Shape 23"/>
+          <p:cNvPr id="25" name="Shape 22"/>
           <p:cNvSpPr/>
           <p:nvPr/>
         </p:nvSpPr>
@@ -19432,14 +19063,14 @@
             </a:avLst>
           </a:prstGeom>
           <a:solidFill>
-            <a:srgbClr val="E9F4EF"/>
+            <a:srgbClr val="102A20"/>
           </a:solidFill>
           <a:ln/>
         </p:spPr>
       </p:sp>
       <p:sp>
         <p:nvSpPr>
-          <p:cNvPr id="27" name="Text 24"/>
+          <p:cNvPr id="26" name="Text 23"/>
           <p:cNvSpPr/>
           <p:nvPr/>
         </p:nvSpPr>
@@ -19464,7 +19095,7 @@
             <a:r>
               <a:rPr lang="en-US" sz="1450" b="1" dirty="0">
                 <a:solidFill>
-                  <a:srgbClr val="1B8A5A"/>
+                  <a:srgbClr val="5FD6A0"/>
                 </a:solidFill>
                 <a:latin typeface="Montserrat" pitchFamily="34" charset="0"/>
                 <a:ea typeface="Montserrat" pitchFamily="34" charset="-122"/>
@@ -19478,7 +19109,7 @@
       </p:sp>
       <p:sp>
         <p:nvSpPr>
-          <p:cNvPr id="28" name="Text 25"/>
+          <p:cNvPr id="27" name="Text 24"/>
           <p:cNvSpPr/>
           <p:nvPr/>
         </p:nvSpPr>
@@ -19506,7 +19137,7 @@
             <a:r>
               <a:rPr lang="en-US" sz="1200" dirty="0">
                 <a:solidFill>
-                  <a:srgbClr val="111318"/>
+                  <a:srgbClr val="FFFFFF"/>
                 </a:solidFill>
                 <a:latin typeface="Montserrat" pitchFamily="34" charset="0"/>
                 <a:ea typeface="Montserrat" pitchFamily="34" charset="-122"/>
@@ -19520,7 +19151,7 @@
       </p:sp>
       <p:sp>
         <p:nvSpPr>
-          <p:cNvPr id="29" name="Shape 26"/>
+          <p:cNvPr id="28" name="Shape 25"/>
           <p:cNvSpPr/>
           <p:nvPr/>
         </p:nvSpPr>
@@ -19535,14 +19166,14 @@
             </a:avLst>
           </a:prstGeom>
           <a:solidFill>
-            <a:srgbClr val="EFEAFE"/>
+            <a:srgbClr val="1C1140"/>
           </a:solidFill>
           <a:ln/>
         </p:spPr>
       </p:sp>
       <p:sp>
         <p:nvSpPr>
-          <p:cNvPr id="30" name="Text 27"/>
+          <p:cNvPr id="29" name="Text 26"/>
           <p:cNvSpPr/>
           <p:nvPr/>
         </p:nvSpPr>
@@ -19567,7 +19198,7 @@
             <a:r>
               <a:rPr lang="en-US" sz="1450" b="1" dirty="0">
                 <a:solidFill>
-                  <a:srgbClr val="5A05F4"/>
+                  <a:srgbClr val="C9A6FF"/>
                 </a:solidFill>
                 <a:latin typeface="Montserrat" pitchFamily="34" charset="0"/>
                 <a:ea typeface="Montserrat" pitchFamily="34" charset="-122"/>
@@ -19581,7 +19212,7 @@
       </p:sp>
       <p:sp>
         <p:nvSpPr>
-          <p:cNvPr id="31" name="Text 28"/>
+          <p:cNvPr id="30" name="Text 27"/>
           <p:cNvSpPr/>
           <p:nvPr/>
         </p:nvSpPr>
@@ -19609,7 +19240,7 @@
             <a:r>
               <a:rPr lang="en-US" sz="1200" dirty="0">
                 <a:solidFill>
-                  <a:srgbClr val="111318"/>
+                  <a:srgbClr val="FFFFFF"/>
                 </a:solidFill>
                 <a:latin typeface="Montserrat" pitchFamily="34" charset="0"/>
                 <a:ea typeface="Montserrat" pitchFamily="34" charset="-122"/>
@@ -19623,7 +19254,7 @@
       </p:sp>
       <p:sp>
         <p:nvSpPr>
-          <p:cNvPr id="32" name="Shape 29"/>
+          <p:cNvPr id="31" name="Shape 28"/>
           <p:cNvSpPr/>
           <p:nvPr/>
         </p:nvSpPr>
@@ -19638,11 +19269,11 @@
             </a:avLst>
           </a:prstGeom>
           <a:solidFill>
-            <a:srgbClr val="FFFFFF"/>
+            <a:srgbClr val="17141F"/>
           </a:solidFill>
           <a:ln w="12700">
             <a:solidFill>
-              <a:srgbClr val="E6E7EC"/>
+              <a:srgbClr val="2E2A3A"/>
             </a:solidFill>
             <a:prstDash val="solid"/>
           </a:ln>
@@ -19650,7 +19281,7 @@
       </p:sp>
       <p:sp>
         <p:nvSpPr>
-          <p:cNvPr id="33" name="Text 30"/>
+          <p:cNvPr id="32" name="Text 29"/>
           <p:cNvSpPr/>
           <p:nvPr/>
         </p:nvSpPr>
@@ -19678,7 +19309,7 @@
             <a:r>
               <a:rPr lang="en-US" sz="1300" dirty="0">
                 <a:solidFill>
-                  <a:srgbClr val="111318"/>
+                  <a:srgbClr val="FFFFFF"/>
                 </a:solidFill>
                 <a:latin typeface="Montserrat" pitchFamily="34" charset="0"/>
                 <a:ea typeface="Montserrat" pitchFamily="34" charset="-122"/>
@@ -19720,7 +19351,7 @@
             <a:lvl1pPr>
               <a:defRPr sz="850">
                 <a:solidFill>
-                  <a:srgbClr val="9AA1AD"/>
+                  <a:srgbClr val="8A82A0"/>
                 </a:solidFill>
                 <a:latin typeface="Courier New"/>
                 <a:ea typeface="Courier New"/>
@@ -19765,29 +19396,7 @@
       </p:grpSpPr>
       <p:sp>
         <p:nvSpPr>
-          <p:cNvPr id="2" name="Shape 0"/>
-          <p:cNvSpPr/>
-          <p:nvPr/>
-        </p:nvSpPr>
-        <p:spPr>
-          <a:xfrm>
-            <a:off x="231343" y="194767"/>
-            <a:ext cx="11716207" cy="6473952"/>
-          </a:xfrm>
-          <a:prstGeom prst="roundRect">
-            <a:avLst>
-              <a:gd name="adj" fmla="val 3107"/>
-            </a:avLst>
-          </a:prstGeom>
-          <a:solidFill>
-            <a:srgbClr val="FFFFFF"/>
-          </a:solidFill>
-          <a:ln/>
-        </p:spPr>
-      </p:sp>
-      <p:sp>
-        <p:nvSpPr>
-          <p:cNvPr id="3" name="Text 1"/>
+          <p:cNvPr id="2" name="Text 0"/>
           <p:cNvSpPr/>
           <p:nvPr/>
         </p:nvSpPr>
@@ -19812,7 +19421,7 @@
             <a:r>
               <a:rPr lang="en-US" sz="2600" b="1" dirty="0">
                 <a:solidFill>
-                  <a:srgbClr val="5A05F4"/>
+                  <a:srgbClr val="C9A6FF"/>
                 </a:solidFill>
                 <a:latin typeface="Courier New" pitchFamily="34" charset="0"/>
                 <a:ea typeface="Courier New" pitchFamily="34" charset="-122"/>
@@ -19826,7 +19435,7 @@
       </p:sp>
       <p:sp>
         <p:nvSpPr>
-          <p:cNvPr id="4" name="Text 2"/>
+          <p:cNvPr id="3" name="Text 1"/>
           <p:cNvSpPr/>
           <p:nvPr/>
         </p:nvSpPr>
@@ -19851,7 +19460,7 @@
             <a:r>
               <a:rPr lang="en-US" sz="2400" b="1" dirty="0">
                 <a:solidFill>
-                  <a:srgbClr val="111318"/>
+                  <a:srgbClr val="FFFFFF"/>
                 </a:solidFill>
                 <a:latin typeface="Montserrat" pitchFamily="34" charset="0"/>
                 <a:ea typeface="Montserrat" pitchFamily="34" charset="-122"/>
@@ -19865,7 +19474,7 @@
       </p:sp>
       <p:sp>
         <p:nvSpPr>
-          <p:cNvPr id="5" name="Shape 3"/>
+          <p:cNvPr id="4" name="Shape 2"/>
           <p:cNvSpPr/>
           <p:nvPr/>
         </p:nvSpPr>
@@ -19880,14 +19489,14 @@
             </a:avLst>
           </a:prstGeom>
           <a:solidFill>
-            <a:srgbClr val="5A05F4"/>
+            <a:srgbClr val="C9A6FF"/>
           </a:solidFill>
           <a:ln/>
         </p:spPr>
       </p:sp>
       <p:sp>
         <p:nvSpPr>
-          <p:cNvPr id="6" name="Text 4"/>
+          <p:cNvPr id="5" name="Text 3"/>
           <p:cNvSpPr/>
           <p:nvPr/>
         </p:nvSpPr>
@@ -19912,7 +19521,7 @@
             <a:r>
               <a:rPr lang="en-US" sz="900" b="1" spc="100" kern="0" dirty="0">
                 <a:solidFill>
-                  <a:srgbClr val="FFFFFF"/>
+                  <a:srgbClr val="1C1140"/>
                 </a:solidFill>
                 <a:latin typeface="Courier New" pitchFamily="34" charset="0"/>
                 <a:ea typeface="Courier New" pitchFamily="34" charset="-122"/>
@@ -19926,7 +19535,7 @@
       </p:sp>
       <p:pic>
         <p:nvPicPr>
-          <p:cNvPr id="7" name="Image 0" descr="preencoded.png">    </p:cNvPr>
+          <p:cNvPr id="6" name="Image 0" descr="preencoded.png">    </p:cNvPr>
           <p:cNvPicPr>
             <a:picLocks noChangeAspect="1"/>
           </p:cNvPicPr>
@@ -19950,7 +19559,7 @@
       </p:pic>
       <p:sp>
         <p:nvSpPr>
-          <p:cNvPr id="8" name="Shape 5"/>
+          <p:cNvPr id="7" name="Shape 4"/>
           <p:cNvSpPr/>
           <p:nvPr/>
         </p:nvSpPr>
@@ -19965,11 +19574,11 @@
             </a:avLst>
           </a:prstGeom>
           <a:solidFill>
-            <a:srgbClr val="FFFFFF"/>
+            <a:srgbClr val="17141F"/>
           </a:solidFill>
           <a:ln w="12700">
             <a:solidFill>
-              <a:srgbClr val="E6E7EC"/>
+              <a:srgbClr val="2E2A3A"/>
             </a:solidFill>
             <a:prstDash val="solid"/>
           </a:ln>
@@ -19977,7 +19586,7 @@
       </p:sp>
       <p:sp>
         <p:nvSpPr>
-          <p:cNvPr id="9" name="Text 6"/>
+          <p:cNvPr id="8" name="Text 5"/>
           <p:cNvSpPr/>
           <p:nvPr/>
         </p:nvSpPr>
@@ -20002,7 +19611,7 @@
             <a:r>
               <a:rPr lang="en-US" sz="1350" b="1" dirty="0">
                 <a:solidFill>
-                  <a:srgbClr val="111318"/>
+                  <a:srgbClr val="FFFFFF"/>
                 </a:solidFill>
                 <a:latin typeface="Montserrat" pitchFamily="34" charset="0"/>
                 <a:ea typeface="Montserrat" pitchFamily="34" charset="-122"/>
@@ -20016,7 +19625,7 @@
       </p:sp>
       <p:sp>
         <p:nvSpPr>
-          <p:cNvPr id="10" name="Text 7"/>
+          <p:cNvPr id="9" name="Text 6"/>
           <p:cNvSpPr/>
           <p:nvPr/>
         </p:nvSpPr>
@@ -20041,7 +19650,7 @@
             <a:r>
               <a:rPr lang="en-US" sz="1150" dirty="0">
                 <a:solidFill>
-                  <a:srgbClr val="555B66"/>
+                  <a:srgbClr val="AFA9BE"/>
                 </a:solidFill>
                 <a:latin typeface="Montserrat" pitchFamily="34" charset="0"/>
                 <a:ea typeface="Montserrat" pitchFamily="34" charset="-122"/>
@@ -20055,7 +19664,7 @@
       </p:sp>
       <p:sp>
         <p:nvSpPr>
-          <p:cNvPr id="11" name="Shape 8"/>
+          <p:cNvPr id="10" name="Shape 7"/>
           <p:cNvSpPr/>
           <p:nvPr/>
         </p:nvSpPr>
@@ -20070,14 +19679,14 @@
             </a:avLst>
           </a:prstGeom>
           <a:solidFill>
-            <a:srgbClr val="EFEAFE"/>
+            <a:srgbClr val="1C1140"/>
           </a:solidFill>
           <a:ln/>
         </p:spPr>
       </p:sp>
       <p:sp>
         <p:nvSpPr>
-          <p:cNvPr id="12" name="Text 9"/>
+          <p:cNvPr id="11" name="Text 8"/>
           <p:cNvSpPr/>
           <p:nvPr/>
         </p:nvSpPr>
@@ -20102,7 +19711,7 @@
             <a:r>
               <a:rPr lang="en-US" sz="1350" b="1" dirty="0">
                 <a:solidFill>
-                  <a:srgbClr val="5A05F4"/>
+                  <a:srgbClr val="C9A6FF"/>
                 </a:solidFill>
                 <a:latin typeface="Montserrat" pitchFamily="34" charset="0"/>
                 <a:ea typeface="Montserrat" pitchFamily="34" charset="-122"/>
@@ -20116,7 +19725,7 @@
       </p:sp>
       <p:sp>
         <p:nvSpPr>
-          <p:cNvPr id="13" name="Text 10"/>
+          <p:cNvPr id="12" name="Text 9"/>
           <p:cNvSpPr/>
           <p:nvPr/>
         </p:nvSpPr>
@@ -20141,7 +19750,7 @@
             <a:r>
               <a:rPr lang="en-US" sz="1150" dirty="0">
                 <a:solidFill>
-                  <a:srgbClr val="111318"/>
+                  <a:srgbClr val="FFFFFF"/>
                 </a:solidFill>
                 <a:latin typeface="Montserrat" pitchFamily="34" charset="0"/>
                 <a:ea typeface="Montserrat" pitchFamily="34" charset="-122"/>
@@ -20155,7 +19764,7 @@
       </p:sp>
       <p:sp>
         <p:nvSpPr>
-          <p:cNvPr id="14" name="Shape 11"/>
+          <p:cNvPr id="13" name="Shape 10"/>
           <p:cNvSpPr/>
           <p:nvPr/>
         </p:nvSpPr>
@@ -20170,14 +19779,14 @@
             </a:avLst>
           </a:prstGeom>
           <a:solidFill>
-            <a:srgbClr val="EFEAFE"/>
+            <a:srgbClr val="1C1140"/>
           </a:solidFill>
           <a:ln/>
         </p:spPr>
       </p:sp>
       <p:sp>
         <p:nvSpPr>
-          <p:cNvPr id="15" name="Text 12"/>
+          <p:cNvPr id="14" name="Text 11"/>
           <p:cNvSpPr/>
           <p:nvPr/>
         </p:nvSpPr>
@@ -20202,7 +19811,7 @@
             <a:r>
               <a:rPr lang="en-US" sz="1350" b="1" dirty="0">
                 <a:solidFill>
-                  <a:srgbClr val="5A05F4"/>
+                  <a:srgbClr val="C9A6FF"/>
                 </a:solidFill>
                 <a:latin typeface="Montserrat" pitchFamily="34" charset="0"/>
                 <a:ea typeface="Montserrat" pitchFamily="34" charset="-122"/>
@@ -20216,7 +19825,7 @@
       </p:sp>
       <p:sp>
         <p:nvSpPr>
-          <p:cNvPr id="16" name="Text 13"/>
+          <p:cNvPr id="15" name="Text 12"/>
           <p:cNvSpPr/>
           <p:nvPr/>
         </p:nvSpPr>
@@ -20241,7 +19850,7 @@
             <a:r>
               <a:rPr lang="en-US" sz="1150" dirty="0">
                 <a:solidFill>
-                  <a:srgbClr val="111318"/>
+                  <a:srgbClr val="FFFFFF"/>
                 </a:solidFill>
                 <a:latin typeface="Montserrat" pitchFamily="34" charset="0"/>
                 <a:ea typeface="Montserrat" pitchFamily="34" charset="-122"/>
@@ -20255,7 +19864,7 @@
       </p:sp>
       <p:sp>
         <p:nvSpPr>
-          <p:cNvPr id="17" name="Shape 14"/>
+          <p:cNvPr id="16" name="Shape 13"/>
           <p:cNvSpPr/>
           <p:nvPr/>
         </p:nvSpPr>
@@ -20270,14 +19879,14 @@
             </a:avLst>
           </a:prstGeom>
           <a:solidFill>
-            <a:srgbClr val="FBE9E9"/>
+            <a:srgbClr val="2E1418"/>
           </a:solidFill>
           <a:ln/>
         </p:spPr>
       </p:sp>
       <p:sp>
         <p:nvSpPr>
-          <p:cNvPr id="18" name="Text 15"/>
+          <p:cNvPr id="17" name="Text 14"/>
           <p:cNvSpPr/>
           <p:nvPr/>
         </p:nvSpPr>
@@ -20302,7 +19911,7 @@
             <a:r>
               <a:rPr lang="en-US" sz="1350" b="1" dirty="0">
                 <a:solidFill>
-                  <a:srgbClr val="C62A2A"/>
+                  <a:srgbClr val="FF7B7B"/>
                 </a:solidFill>
                 <a:latin typeface="Montserrat" pitchFamily="34" charset="0"/>
                 <a:ea typeface="Montserrat" pitchFamily="34" charset="-122"/>
@@ -20316,7 +19925,7 @@
       </p:sp>
       <p:sp>
         <p:nvSpPr>
-          <p:cNvPr id="19" name="Text 16"/>
+          <p:cNvPr id="18" name="Text 15"/>
           <p:cNvSpPr/>
           <p:nvPr/>
         </p:nvSpPr>
@@ -20341,7 +19950,7 @@
             <a:r>
               <a:rPr lang="en-US" sz="1150" dirty="0">
                 <a:solidFill>
-                  <a:srgbClr val="111318"/>
+                  <a:srgbClr val="FFFFFF"/>
                 </a:solidFill>
                 <a:latin typeface="Montserrat" pitchFamily="34" charset="0"/>
                 <a:ea typeface="Montserrat" pitchFamily="34" charset="-122"/>
@@ -20355,7 +19964,7 @@
       </p:sp>
       <p:sp>
         <p:nvSpPr>
-          <p:cNvPr id="20" name="Shape 17"/>
+          <p:cNvPr id="19" name="Shape 16"/>
           <p:cNvSpPr/>
           <p:nvPr/>
         </p:nvSpPr>
@@ -20370,11 +19979,11 @@
             </a:avLst>
           </a:prstGeom>
           <a:solidFill>
-            <a:srgbClr val="FFFFFF"/>
+            <a:srgbClr val="17141F"/>
           </a:solidFill>
           <a:ln w="12700">
             <a:solidFill>
-              <a:srgbClr val="E6E7EC"/>
+              <a:srgbClr val="2E2A3A"/>
             </a:solidFill>
             <a:prstDash val="solid"/>
           </a:ln>
@@ -20382,7 +19991,7 @@
       </p:sp>
       <p:sp>
         <p:nvSpPr>
-          <p:cNvPr id="21" name="Text 18"/>
+          <p:cNvPr id="20" name="Text 17"/>
           <p:cNvSpPr/>
           <p:nvPr/>
         </p:nvSpPr>
@@ -20407,7 +20016,7 @@
             <a:r>
               <a:rPr lang="en-US" sz="900" dirty="0">
                 <a:solidFill>
-                  <a:srgbClr val="111318"/>
+                  <a:srgbClr val="FFFFFF"/>
                 </a:solidFill>
                 <a:latin typeface="Courier New" pitchFamily="34" charset="0"/>
                 <a:ea typeface="Courier New" pitchFamily="34" charset="-122"/>
@@ -20421,7 +20030,7 @@
       </p:sp>
       <p:sp>
         <p:nvSpPr>
-          <p:cNvPr id="22" name="Shape 19"/>
+          <p:cNvPr id="21" name="Shape 18"/>
           <p:cNvSpPr/>
           <p:nvPr/>
         </p:nvSpPr>
@@ -20436,7 +20045,7 @@
           <a:noFill/>
           <a:ln w="15875">
             <a:solidFill>
-              <a:srgbClr val="C9B8FB"/>
+              <a:srgbClr val="9B7BE8"/>
             </a:solidFill>
             <a:prstDash val="solid"/>
           </a:ln>
@@ -20444,7 +20053,7 @@
       </p:sp>
       <p:sp>
         <p:nvSpPr>
-          <p:cNvPr id="23" name="Shape 20"/>
+          <p:cNvPr id="22" name="Shape 19"/>
           <p:cNvSpPr/>
           <p:nvPr/>
         </p:nvSpPr>
@@ -20457,14 +20066,14 @@
             <a:avLst/>
           </a:prstGeom>
           <a:solidFill>
-            <a:srgbClr val="C9B8FB"/>
+            <a:srgbClr val="9B7BE8"/>
           </a:solidFill>
           <a:ln/>
         </p:spPr>
       </p:sp>
       <p:sp>
         <p:nvSpPr>
-          <p:cNvPr id="24" name="Shape 21"/>
+          <p:cNvPr id="23" name="Shape 20"/>
           <p:cNvSpPr/>
           <p:nvPr/>
         </p:nvSpPr>
@@ -20479,14 +20088,14 @@
             </a:avLst>
           </a:prstGeom>
           <a:solidFill>
-            <a:srgbClr val="EFEAFE"/>
+            <a:srgbClr val="1C1140"/>
           </a:solidFill>
           <a:ln/>
         </p:spPr>
       </p:sp>
       <p:sp>
         <p:nvSpPr>
-          <p:cNvPr id="25" name="Text 22"/>
+          <p:cNvPr id="24" name="Text 21"/>
           <p:cNvSpPr/>
           <p:nvPr/>
         </p:nvSpPr>
@@ -20511,7 +20120,7 @@
             <a:r>
               <a:rPr lang="en-US" sz="900" b="1" dirty="0">
                 <a:solidFill>
-                  <a:srgbClr val="5A05F4"/>
+                  <a:srgbClr val="C9A6FF"/>
                 </a:solidFill>
                 <a:latin typeface="Courier New" pitchFamily="34" charset="0"/>
                 <a:ea typeface="Courier New" pitchFamily="34" charset="-122"/>
@@ -20525,7 +20134,7 @@
       </p:sp>
       <p:sp>
         <p:nvSpPr>
-          <p:cNvPr id="26" name="Shape 23"/>
+          <p:cNvPr id="25" name="Shape 22"/>
           <p:cNvSpPr/>
           <p:nvPr/>
         </p:nvSpPr>
@@ -20540,7 +20149,7 @@
           <a:noFill/>
           <a:ln w="15875">
             <a:solidFill>
-              <a:srgbClr val="C9B8FB"/>
+              <a:srgbClr val="9B7BE8"/>
             </a:solidFill>
             <a:prstDash val="solid"/>
           </a:ln>
@@ -20548,7 +20157,7 @@
       </p:sp>
       <p:sp>
         <p:nvSpPr>
-          <p:cNvPr id="27" name="Shape 24"/>
+          <p:cNvPr id="26" name="Shape 23"/>
           <p:cNvSpPr/>
           <p:nvPr/>
         </p:nvSpPr>
@@ -20561,14 +20170,14 @@
             <a:avLst/>
           </a:prstGeom>
           <a:solidFill>
-            <a:srgbClr val="C9B8FB"/>
+            <a:srgbClr val="9B7BE8"/>
           </a:solidFill>
           <a:ln/>
         </p:spPr>
       </p:sp>
       <p:sp>
         <p:nvSpPr>
-          <p:cNvPr id="28" name="Shape 25"/>
+          <p:cNvPr id="27" name="Shape 24"/>
           <p:cNvSpPr/>
           <p:nvPr/>
         </p:nvSpPr>
@@ -20583,14 +20192,14 @@
             </a:avLst>
           </a:prstGeom>
           <a:solidFill>
-            <a:srgbClr val="E9F4EF"/>
+            <a:srgbClr val="102A20"/>
           </a:solidFill>
           <a:ln/>
         </p:spPr>
       </p:sp>
       <p:sp>
         <p:nvSpPr>
-          <p:cNvPr id="29" name="Text 26"/>
+          <p:cNvPr id="28" name="Text 25"/>
           <p:cNvSpPr/>
           <p:nvPr/>
         </p:nvSpPr>
@@ -20615,7 +20224,7 @@
             <a:r>
               <a:rPr lang="en-US" sz="900" b="1" dirty="0">
                 <a:solidFill>
-                  <a:srgbClr val="1B8A5A"/>
+                  <a:srgbClr val="5FD6A0"/>
                 </a:solidFill>
                 <a:latin typeface="Courier New" pitchFamily="34" charset="0"/>
                 <a:ea typeface="Courier New" pitchFamily="34" charset="-122"/>
@@ -20629,7 +20238,7 @@
       </p:sp>
       <p:sp>
         <p:nvSpPr>
-          <p:cNvPr id="30" name="Shape 27"/>
+          <p:cNvPr id="29" name="Shape 26"/>
           <p:cNvSpPr/>
           <p:nvPr/>
         </p:nvSpPr>
@@ -20644,7 +20253,7 @@
           <a:noFill/>
           <a:ln w="15875">
             <a:solidFill>
-              <a:srgbClr val="C9B8FB"/>
+              <a:srgbClr val="9B7BE8"/>
             </a:solidFill>
             <a:prstDash val="solid"/>
           </a:ln>
@@ -20652,7 +20261,7 @@
       </p:sp>
       <p:sp>
         <p:nvSpPr>
-          <p:cNvPr id="31" name="Shape 28"/>
+          <p:cNvPr id="30" name="Shape 27"/>
           <p:cNvSpPr/>
           <p:nvPr/>
         </p:nvSpPr>
@@ -20665,14 +20274,14 @@
             <a:avLst/>
           </a:prstGeom>
           <a:solidFill>
-            <a:srgbClr val="C9B8FB"/>
+            <a:srgbClr val="9B7BE8"/>
           </a:solidFill>
           <a:ln/>
         </p:spPr>
       </p:sp>
       <p:sp>
         <p:nvSpPr>
-          <p:cNvPr id="32" name="Shape 29"/>
+          <p:cNvPr id="31" name="Shape 28"/>
           <p:cNvSpPr/>
           <p:nvPr/>
         </p:nvSpPr>
@@ -20687,14 +20296,14 @@
             </a:avLst>
           </a:prstGeom>
           <a:solidFill>
-            <a:srgbClr val="FBE9E9"/>
+            <a:srgbClr val="2E1418"/>
           </a:solidFill>
           <a:ln/>
         </p:spPr>
       </p:sp>
       <p:sp>
         <p:nvSpPr>
-          <p:cNvPr id="33" name="Text 30"/>
+          <p:cNvPr id="32" name="Text 29"/>
           <p:cNvSpPr/>
           <p:nvPr/>
         </p:nvSpPr>
@@ -20719,7 +20328,7 @@
             <a:r>
               <a:rPr lang="en-US" sz="900" b="1" dirty="0">
                 <a:solidFill>
-                  <a:srgbClr val="C62A2A"/>
+                  <a:srgbClr val="FF7B7B"/>
                 </a:solidFill>
                 <a:latin typeface="Courier New" pitchFamily="34" charset="0"/>
                 <a:ea typeface="Courier New" pitchFamily="34" charset="-122"/>
@@ -20733,7 +20342,7 @@
       </p:sp>
       <p:sp>
         <p:nvSpPr>
-          <p:cNvPr id="34" name="Shape 31"/>
+          <p:cNvPr id="33" name="Shape 30"/>
           <p:cNvSpPr/>
           <p:nvPr/>
         </p:nvSpPr>
@@ -20748,14 +20357,14 @@
             </a:avLst>
           </a:prstGeom>
           <a:solidFill>
-            <a:srgbClr val="FBE9E9"/>
+            <a:srgbClr val="2E1418"/>
           </a:solidFill>
           <a:ln/>
         </p:spPr>
       </p:sp>
       <p:sp>
         <p:nvSpPr>
-          <p:cNvPr id="35" name="Text 32"/>
+          <p:cNvPr id="34" name="Text 31"/>
           <p:cNvSpPr/>
           <p:nvPr/>
         </p:nvSpPr>
@@ -20780,7 +20389,7 @@
             <a:r>
               <a:rPr lang="en-US" sz="950" b="1" spc="150" kern="0" dirty="0">
                 <a:solidFill>
-                  <a:srgbClr val="C62A2A"/>
+                  <a:srgbClr val="FF7B7B"/>
                 </a:solidFill>
                 <a:latin typeface="Courier New" pitchFamily="34" charset="0"/>
                 <a:ea typeface="Courier New" pitchFamily="34" charset="-122"/>
@@ -20794,7 +20403,7 @@
       </p:sp>
       <p:sp>
         <p:nvSpPr>
-          <p:cNvPr id="36" name="Text 33"/>
+          <p:cNvPr id="35" name="Text 32"/>
           <p:cNvSpPr/>
           <p:nvPr/>
         </p:nvSpPr>
@@ -20822,7 +20431,7 @@
             <a:r>
               <a:rPr lang="en-US" sz="1300" dirty="0">
                 <a:solidFill>
-                  <a:srgbClr val="111318"/>
+                  <a:srgbClr val="FFFFFF"/>
                 </a:solidFill>
                 <a:latin typeface="Montserrat" pitchFamily="34" charset="0"/>
                 <a:ea typeface="Montserrat" pitchFamily="34" charset="-122"/>
@@ -20836,7 +20445,7 @@
       </p:sp>
       <p:sp>
         <p:nvSpPr>
-          <p:cNvPr id="37" name="Shape 34"/>
+          <p:cNvPr id="36" name="Shape 33"/>
           <p:cNvSpPr/>
           <p:nvPr/>
         </p:nvSpPr>
@@ -20851,14 +20460,14 @@
             </a:avLst>
           </a:prstGeom>
           <a:solidFill>
-            <a:srgbClr val="F8F0E2"/>
+            <a:srgbClr val="2A2010"/>
           </a:solidFill>
           <a:ln/>
         </p:spPr>
       </p:sp>
       <p:sp>
         <p:nvSpPr>
-          <p:cNvPr id="38" name="Text 35"/>
+          <p:cNvPr id="37" name="Text 34"/>
           <p:cNvSpPr/>
           <p:nvPr/>
         </p:nvSpPr>
@@ -20883,7 +20492,7 @@
             <a:r>
               <a:rPr lang="en-US" sz="950" b="1" spc="150" kern="0" dirty="0">
                 <a:solidFill>
-                  <a:srgbClr val="9A5B12"/>
+                  <a:srgbClr val="E8A857"/>
                 </a:solidFill>
                 <a:latin typeface="Courier New" pitchFamily="34" charset="0"/>
                 <a:ea typeface="Courier New" pitchFamily="34" charset="-122"/>
@@ -20897,7 +20506,7 @@
       </p:sp>
       <p:sp>
         <p:nvSpPr>
-          <p:cNvPr id="39" name="Text 36"/>
+          <p:cNvPr id="38" name="Text 35"/>
           <p:cNvSpPr/>
           <p:nvPr/>
         </p:nvSpPr>
@@ -20925,7 +20534,7 @@
             <a:r>
               <a:rPr lang="en-US" sz="1300" dirty="0">
                 <a:solidFill>
-                  <a:srgbClr val="111318"/>
+                  <a:srgbClr val="FFFFFF"/>
                 </a:solidFill>
                 <a:latin typeface="Montserrat" pitchFamily="34" charset="0"/>
                 <a:ea typeface="Montserrat" pitchFamily="34" charset="-122"/>
@@ -20939,7 +20548,7 @@
       </p:sp>
       <p:sp>
         <p:nvSpPr>
-          <p:cNvPr id="40" name="Shape 37"/>
+          <p:cNvPr id="39" name="Shape 36"/>
           <p:cNvSpPr/>
           <p:nvPr/>
         </p:nvSpPr>
@@ -20954,11 +20563,11 @@
             </a:avLst>
           </a:prstGeom>
           <a:solidFill>
-            <a:srgbClr val="FFFFFF"/>
+            <a:srgbClr val="17141F"/>
           </a:solidFill>
           <a:ln w="12700">
             <a:solidFill>
-              <a:srgbClr val="E6E7EC"/>
+              <a:srgbClr val="2E2A3A"/>
             </a:solidFill>
             <a:prstDash val="solid"/>
           </a:ln>
@@ -20966,7 +20575,7 @@
       </p:sp>
       <p:sp>
         <p:nvSpPr>
-          <p:cNvPr id="41" name="Text 38"/>
+          <p:cNvPr id="40" name="Text 37"/>
           <p:cNvSpPr/>
           <p:nvPr/>
         </p:nvSpPr>
@@ -20994,7 +20603,7 @@
             <a:r>
               <a:rPr lang="en-US" sz="1300" dirty="0">
                 <a:solidFill>
-                  <a:srgbClr val="111318"/>
+                  <a:srgbClr val="FFFFFF"/>
                 </a:solidFill>
                 <a:latin typeface="Montserrat" pitchFamily="34" charset="0"/>
                 <a:ea typeface="Montserrat" pitchFamily="34" charset="-122"/>
@@ -21036,7 +20645,7 @@
             <a:lvl1pPr>
               <a:defRPr sz="850">
                 <a:solidFill>
-                  <a:srgbClr val="9AA1AD"/>
+                  <a:srgbClr val="8A82A0"/>
                 </a:solidFill>
                 <a:latin typeface="Courier New"/>
                 <a:ea typeface="Courier New"/>
@@ -21081,29 +20690,7 @@
       </p:grpSpPr>
       <p:sp>
         <p:nvSpPr>
-          <p:cNvPr id="2" name="Shape 0"/>
-          <p:cNvSpPr/>
-          <p:nvPr/>
-        </p:nvSpPr>
-        <p:spPr>
-          <a:xfrm>
-            <a:off x="231343" y="194767"/>
-            <a:ext cx="11716207" cy="6473952"/>
-          </a:xfrm>
-          <a:prstGeom prst="roundRect">
-            <a:avLst>
-              <a:gd name="adj" fmla="val 3107"/>
-            </a:avLst>
-          </a:prstGeom>
-          <a:solidFill>
-            <a:srgbClr val="FFFFFF"/>
-          </a:solidFill>
-          <a:ln/>
-        </p:spPr>
-      </p:sp>
-      <p:sp>
-        <p:nvSpPr>
-          <p:cNvPr id="3" name="Text 1"/>
+          <p:cNvPr id="2" name="Text 0"/>
           <p:cNvSpPr/>
           <p:nvPr/>
         </p:nvSpPr>
@@ -21128,7 +20715,7 @@
             <a:r>
               <a:rPr lang="en-US" sz="2600" b="1" dirty="0">
                 <a:solidFill>
-                  <a:srgbClr val="5A05F4"/>
+                  <a:srgbClr val="C9A6FF"/>
                 </a:solidFill>
                 <a:latin typeface="Courier New" pitchFamily="34" charset="0"/>
                 <a:ea typeface="Courier New" pitchFamily="34" charset="-122"/>
@@ -21142,7 +20729,7 @@
       </p:sp>
       <p:sp>
         <p:nvSpPr>
-          <p:cNvPr id="4" name="Text 2"/>
+          <p:cNvPr id="3" name="Text 1"/>
           <p:cNvSpPr/>
           <p:nvPr/>
         </p:nvSpPr>
@@ -21167,7 +20754,7 @@
             <a:r>
               <a:rPr lang="en-US" sz="2400" b="1" dirty="0">
                 <a:solidFill>
-                  <a:srgbClr val="111318"/>
+                  <a:srgbClr val="FFFFFF"/>
                 </a:solidFill>
                 <a:latin typeface="Montserrat" pitchFamily="34" charset="0"/>
                 <a:ea typeface="Montserrat" pitchFamily="34" charset="-122"/>
@@ -21181,7 +20768,7 @@
       </p:sp>
       <p:sp>
         <p:nvSpPr>
-          <p:cNvPr id="5" name="Shape 3"/>
+          <p:cNvPr id="4" name="Shape 2"/>
           <p:cNvSpPr/>
           <p:nvPr/>
         </p:nvSpPr>
@@ -21196,14 +20783,14 @@
             </a:avLst>
           </a:prstGeom>
           <a:solidFill>
-            <a:srgbClr val="5A05F4"/>
+            <a:srgbClr val="C9A6FF"/>
           </a:solidFill>
           <a:ln/>
         </p:spPr>
       </p:sp>
       <p:sp>
         <p:nvSpPr>
-          <p:cNvPr id="6" name="Text 4"/>
+          <p:cNvPr id="5" name="Text 3"/>
           <p:cNvSpPr/>
           <p:nvPr/>
         </p:nvSpPr>
@@ -21228,7 +20815,7 @@
             <a:r>
               <a:rPr lang="en-US" sz="900" b="1" spc="100" kern="0" dirty="0">
                 <a:solidFill>
-                  <a:srgbClr val="FFFFFF"/>
+                  <a:srgbClr val="1C1140"/>
                 </a:solidFill>
                 <a:latin typeface="Courier New" pitchFamily="34" charset="0"/>
                 <a:ea typeface="Courier New" pitchFamily="34" charset="-122"/>
@@ -21242,7 +20829,7 @@
       </p:sp>
       <p:pic>
         <p:nvPicPr>
-          <p:cNvPr id="7" name="Image 0" descr="preencoded.png">    </p:cNvPr>
+          <p:cNvPr id="6" name="Image 0" descr="preencoded.png">    </p:cNvPr>
           <p:cNvPicPr>
             <a:picLocks noChangeAspect="1"/>
           </p:cNvPicPr>
@@ -21266,7 +20853,7 @@
       </p:pic>
       <p:sp>
         <p:nvSpPr>
-          <p:cNvPr id="8" name="Shape 5"/>
+          <p:cNvPr id="7" name="Shape 4"/>
           <p:cNvSpPr/>
           <p:nvPr/>
         </p:nvSpPr>
@@ -21281,11 +20868,11 @@
             </a:avLst>
           </a:prstGeom>
           <a:solidFill>
-            <a:srgbClr val="F5F4FA"/>
+            <a:srgbClr val="12101A"/>
           </a:solidFill>
           <a:ln w="12700">
             <a:solidFill>
-              <a:srgbClr val="E6E7EC"/>
+              <a:srgbClr val="2E2A3A"/>
             </a:solidFill>
             <a:prstDash val="solid"/>
           </a:ln>
@@ -21293,7 +20880,7 @@
       </p:sp>
       <p:sp>
         <p:nvSpPr>
-          <p:cNvPr id="9" name="Text 6"/>
+          <p:cNvPr id="8" name="Text 5"/>
           <p:cNvSpPr/>
           <p:nvPr/>
         </p:nvSpPr>
@@ -21321,7 +20908,7 @@
             <a:r>
               <a:rPr lang="en-US" sz="1050" dirty="0">
                 <a:solidFill>
-                  <a:srgbClr val="5A05F4"/>
+                  <a:srgbClr val="C9A6FF"/>
                 </a:solidFill>
                 <a:latin typeface="Courier New" pitchFamily="34" charset="0"/>
                 <a:ea typeface="Courier New" pitchFamily="34" charset="-122"/>
@@ -21338,7 +20925,7 @@
             <a:r>
               <a:rPr lang="en-US" sz="1050" dirty="0">
                 <a:solidFill>
-                  <a:srgbClr val="8A7FA6"/>
+                  <a:srgbClr val="8A82A0"/>
                 </a:solidFill>
                 <a:latin typeface="Courier New" pitchFamily="34" charset="0"/>
                 <a:ea typeface="Courier New" pitchFamily="34" charset="-122"/>
@@ -21358,7 +20945,7 @@
             <a:r>
               <a:rPr lang="en-US" sz="1050" dirty="0">
                 <a:solidFill>
-                  <a:srgbClr val="23262F"/>
+                  <a:srgbClr val="D8D4E4"/>
                 </a:solidFill>
                 <a:latin typeface="Courier New" pitchFamily="34" charset="0"/>
                 <a:ea typeface="Courier New" pitchFamily="34" charset="-122"/>
@@ -21378,7 +20965,7 @@
             <a:r>
               <a:rPr lang="en-US" sz="1050" dirty="0">
                 <a:solidFill>
-                  <a:srgbClr val="5A05F4"/>
+                  <a:srgbClr val="C9A6FF"/>
                 </a:solidFill>
                 <a:latin typeface="Courier New" pitchFamily="34" charset="0"/>
                 <a:ea typeface="Courier New" pitchFamily="34" charset="-122"/>
@@ -21398,7 +20985,7 @@
             <a:r>
               <a:rPr lang="en-US" sz="1050" dirty="0">
                 <a:solidFill>
-                  <a:srgbClr val="23262F"/>
+                  <a:srgbClr val="D8D4E4"/>
                 </a:solidFill>
                 <a:latin typeface="Courier New" pitchFamily="34" charset="0"/>
                 <a:ea typeface="Courier New" pitchFamily="34" charset="-122"/>
@@ -21418,7 +21005,7 @@
             <a:r>
               <a:rPr lang="en-US" sz="1050" dirty="0">
                 <a:solidFill>
-                  <a:srgbClr val="23262F"/>
+                  <a:srgbClr val="D8D4E4"/>
                 </a:solidFill>
                 <a:latin typeface="Courier New" pitchFamily="34" charset="0"/>
                 <a:ea typeface="Courier New" pitchFamily="34" charset="-122"/>
@@ -21438,7 +21025,7 @@
             <a:r>
               <a:rPr lang="en-US" sz="1050" dirty="0">
                 <a:solidFill>
-                  <a:srgbClr val="23262F"/>
+                  <a:srgbClr val="D8D4E4"/>
                 </a:solidFill>
                 <a:latin typeface="Courier New" pitchFamily="34" charset="0"/>
                 <a:ea typeface="Courier New" pitchFamily="34" charset="-122"/>
@@ -21458,7 +21045,7 @@
             <a:r>
               <a:rPr lang="en-US" sz="1050" dirty="0">
                 <a:solidFill>
-                  <a:srgbClr val="23262F"/>
+                  <a:srgbClr val="D8D4E4"/>
                 </a:solidFill>
                 <a:latin typeface="Courier New" pitchFamily="34" charset="0"/>
                 <a:ea typeface="Courier New" pitchFamily="34" charset="-122"/>
@@ -21478,7 +21065,7 @@
             <a:r>
               <a:rPr lang="en-US" sz="1050" dirty="0">
                 <a:solidFill>
-                  <a:srgbClr val="5A05F4"/>
+                  <a:srgbClr val="C9A6FF"/>
                 </a:solidFill>
                 <a:latin typeface="Courier New" pitchFamily="34" charset="0"/>
                 <a:ea typeface="Courier New" pitchFamily="34" charset="-122"/>
@@ -21495,7 +21082,7 @@
             <a:r>
               <a:rPr lang="en-US" sz="1050" dirty="0">
                 <a:solidFill>
-                  <a:srgbClr val="8A7FA6"/>
+                  <a:srgbClr val="8A82A0"/>
                 </a:solidFill>
                 <a:latin typeface="Courier New" pitchFamily="34" charset="0"/>
                 <a:ea typeface="Courier New" pitchFamily="34" charset="-122"/>
@@ -21515,7 +21102,7 @@
             <a:r>
               <a:rPr lang="en-US" sz="1050" dirty="0">
                 <a:solidFill>
-                  <a:srgbClr val="5A05F4"/>
+                  <a:srgbClr val="C9A6FF"/>
                 </a:solidFill>
                 <a:latin typeface="Courier New" pitchFamily="34" charset="0"/>
                 <a:ea typeface="Courier New" pitchFamily="34" charset="-122"/>
@@ -21535,7 +21122,7 @@
             <a:r>
               <a:rPr lang="en-US" sz="1050" dirty="0">
                 <a:solidFill>
-                  <a:srgbClr val="23262F"/>
+                  <a:srgbClr val="D8D4E4"/>
                 </a:solidFill>
                 <a:latin typeface="Courier New" pitchFamily="34" charset="0"/>
                 <a:ea typeface="Courier New" pitchFamily="34" charset="-122"/>
@@ -21555,7 +21142,7 @@
             <a:r>
               <a:rPr lang="en-US" sz="1050" dirty="0">
                 <a:solidFill>
-                  <a:srgbClr val="23262F"/>
+                  <a:srgbClr val="D8D4E4"/>
                 </a:solidFill>
                 <a:latin typeface="Courier New" pitchFamily="34" charset="0"/>
                 <a:ea typeface="Courier New" pitchFamily="34" charset="-122"/>
@@ -21575,7 +21162,7 @@
             <a:r>
               <a:rPr lang="en-US" sz="1050" dirty="0">
                 <a:solidFill>
-                  <a:srgbClr val="5A05F4"/>
+                  <a:srgbClr val="C9A6FF"/>
                 </a:solidFill>
                 <a:latin typeface="Courier New" pitchFamily="34" charset="0"/>
                 <a:ea typeface="Courier New" pitchFamily="34" charset="-122"/>
@@ -21592,7 +21179,7 @@
             <a:r>
               <a:rPr lang="en-US" sz="1050" dirty="0">
                 <a:solidFill>
-                  <a:srgbClr val="8A7FA6"/>
+                  <a:srgbClr val="8A82A0"/>
                 </a:solidFill>
                 <a:latin typeface="Courier New" pitchFamily="34" charset="0"/>
                 <a:ea typeface="Courier New" pitchFamily="34" charset="-122"/>
@@ -21612,7 +21199,7 @@
             <a:r>
               <a:rPr lang="en-US" sz="1050" dirty="0">
                 <a:solidFill>
-                  <a:srgbClr val="5A05F4"/>
+                  <a:srgbClr val="C9A6FF"/>
                 </a:solidFill>
                 <a:latin typeface="Courier New" pitchFamily="34" charset="0"/>
                 <a:ea typeface="Courier New" pitchFamily="34" charset="-122"/>
@@ -21629,7 +21216,7 @@
             <a:r>
               <a:rPr lang="en-US" sz="1050" dirty="0">
                 <a:solidFill>
-                  <a:srgbClr val="8A7FA6"/>
+                  <a:srgbClr val="8A82A0"/>
                 </a:solidFill>
                 <a:latin typeface="Courier New" pitchFamily="34" charset="0"/>
                 <a:ea typeface="Courier New" pitchFamily="34" charset="-122"/>
@@ -21643,7 +21230,7 @@
       </p:sp>
       <p:sp>
         <p:nvSpPr>
-          <p:cNvPr id="10" name="Text 7"/>
+          <p:cNvPr id="9" name="Text 6"/>
           <p:cNvSpPr/>
           <p:nvPr/>
         </p:nvSpPr>
@@ -21668,7 +21255,7 @@
             <a:r>
               <a:rPr lang="en-US" sz="1050" b="1" dirty="0">
                 <a:solidFill>
-                  <a:srgbClr val="5A05F4"/>
+                  <a:srgbClr val="C9A6FF"/>
                 </a:solidFill>
                 <a:latin typeface="Courier New" pitchFamily="34" charset="0"/>
                 <a:ea typeface="Courier New" pitchFamily="34" charset="-122"/>
@@ -21682,7 +21269,7 @@
       </p:sp>
       <p:sp>
         <p:nvSpPr>
-          <p:cNvPr id="11" name="Text 8"/>
+          <p:cNvPr id="10" name="Text 7"/>
           <p:cNvSpPr/>
           <p:nvPr/>
         </p:nvSpPr>
@@ -21707,7 +21294,7 @@
             <a:r>
               <a:rPr lang="en-US" sz="1100" dirty="0">
                 <a:solidFill>
-                  <a:srgbClr val="555B66"/>
+                  <a:srgbClr val="AFA9BE"/>
                 </a:solidFill>
                 <a:latin typeface="Montserrat" pitchFamily="34" charset="0"/>
                 <a:ea typeface="Montserrat" pitchFamily="34" charset="-122"/>
@@ -21721,7 +21308,7 @@
       </p:sp>
       <p:sp>
         <p:nvSpPr>
-          <p:cNvPr id="12" name="Text 9"/>
+          <p:cNvPr id="11" name="Text 8"/>
           <p:cNvSpPr/>
           <p:nvPr/>
         </p:nvSpPr>
@@ -21746,7 +21333,7 @@
             <a:r>
               <a:rPr lang="en-US" sz="1050" b="1" dirty="0">
                 <a:solidFill>
-                  <a:srgbClr val="5A05F4"/>
+                  <a:srgbClr val="C9A6FF"/>
                 </a:solidFill>
                 <a:latin typeface="Courier New" pitchFamily="34" charset="0"/>
                 <a:ea typeface="Courier New" pitchFamily="34" charset="-122"/>
@@ -21760,7 +21347,7 @@
       </p:sp>
       <p:sp>
         <p:nvSpPr>
-          <p:cNvPr id="13" name="Text 10"/>
+          <p:cNvPr id="12" name="Text 9"/>
           <p:cNvSpPr/>
           <p:nvPr/>
         </p:nvSpPr>
@@ -21785,7 +21372,7 @@
             <a:r>
               <a:rPr lang="en-US" sz="1100" dirty="0">
                 <a:solidFill>
-                  <a:srgbClr val="555B66"/>
+                  <a:srgbClr val="AFA9BE"/>
                 </a:solidFill>
                 <a:latin typeface="Montserrat" pitchFamily="34" charset="0"/>
                 <a:ea typeface="Montserrat" pitchFamily="34" charset="-122"/>
@@ -21799,7 +21386,7 @@
       </p:sp>
       <p:sp>
         <p:nvSpPr>
-          <p:cNvPr id="14" name="Text 11"/>
+          <p:cNvPr id="13" name="Text 10"/>
           <p:cNvSpPr/>
           <p:nvPr/>
         </p:nvSpPr>
@@ -21824,7 +21411,7 @@
             <a:r>
               <a:rPr lang="en-US" sz="1050" b="1" dirty="0">
                 <a:solidFill>
-                  <a:srgbClr val="5A05F4"/>
+                  <a:srgbClr val="C9A6FF"/>
                 </a:solidFill>
                 <a:latin typeface="Courier New" pitchFamily="34" charset="0"/>
                 <a:ea typeface="Courier New" pitchFamily="34" charset="-122"/>
@@ -21838,7 +21425,7 @@
       </p:sp>
       <p:sp>
         <p:nvSpPr>
-          <p:cNvPr id="15" name="Text 12"/>
+          <p:cNvPr id="14" name="Text 11"/>
           <p:cNvSpPr/>
           <p:nvPr/>
         </p:nvSpPr>
@@ -21863,7 +21450,7 @@
             <a:r>
               <a:rPr lang="en-US" sz="1100" dirty="0">
                 <a:solidFill>
-                  <a:srgbClr val="555B66"/>
+                  <a:srgbClr val="AFA9BE"/>
                 </a:solidFill>
                 <a:latin typeface="Montserrat" pitchFamily="34" charset="0"/>
                 <a:ea typeface="Montserrat" pitchFamily="34" charset="-122"/>
@@ -21877,7 +21464,7 @@
       </p:sp>
       <p:sp>
         <p:nvSpPr>
-          <p:cNvPr id="16" name="Text 13"/>
+          <p:cNvPr id="15" name="Text 12"/>
           <p:cNvSpPr/>
           <p:nvPr/>
         </p:nvSpPr>
@@ -21902,7 +21489,7 @@
             <a:r>
               <a:rPr lang="en-US" sz="1050" b="1" dirty="0">
                 <a:solidFill>
-                  <a:srgbClr val="5A05F4"/>
+                  <a:srgbClr val="C9A6FF"/>
                 </a:solidFill>
                 <a:latin typeface="Courier New" pitchFamily="34" charset="0"/>
                 <a:ea typeface="Courier New" pitchFamily="34" charset="-122"/>
@@ -21916,7 +21503,7 @@
       </p:sp>
       <p:sp>
         <p:nvSpPr>
-          <p:cNvPr id="17" name="Text 14"/>
+          <p:cNvPr id="16" name="Text 13"/>
           <p:cNvSpPr/>
           <p:nvPr/>
         </p:nvSpPr>
@@ -21941,7 +21528,7 @@
             <a:r>
               <a:rPr lang="en-US" sz="1100" dirty="0">
                 <a:solidFill>
-                  <a:srgbClr val="555B66"/>
+                  <a:srgbClr val="AFA9BE"/>
                 </a:solidFill>
                 <a:latin typeface="Montserrat" pitchFamily="34" charset="0"/>
                 <a:ea typeface="Montserrat" pitchFamily="34" charset="-122"/>
@@ -21955,7 +21542,7 @@
       </p:sp>
       <p:sp>
         <p:nvSpPr>
-          <p:cNvPr id="18" name="Text 15"/>
+          <p:cNvPr id="17" name="Text 14"/>
           <p:cNvSpPr/>
           <p:nvPr/>
         </p:nvSpPr>
@@ -21980,7 +21567,7 @@
             <a:r>
               <a:rPr lang="en-US" sz="1050" b="1" dirty="0">
                 <a:solidFill>
-                  <a:srgbClr val="5A05F4"/>
+                  <a:srgbClr val="C9A6FF"/>
                 </a:solidFill>
                 <a:latin typeface="Courier New" pitchFamily="34" charset="0"/>
                 <a:ea typeface="Courier New" pitchFamily="34" charset="-122"/>
@@ -21994,7 +21581,7 @@
       </p:sp>
       <p:sp>
         <p:nvSpPr>
-          <p:cNvPr id="19" name="Text 16"/>
+          <p:cNvPr id="18" name="Text 15"/>
           <p:cNvSpPr/>
           <p:nvPr/>
         </p:nvSpPr>
@@ -22019,7 +21606,7 @@
             <a:r>
               <a:rPr lang="en-US" sz="1100" dirty="0">
                 <a:solidFill>
-                  <a:srgbClr val="555B66"/>
+                  <a:srgbClr val="AFA9BE"/>
                 </a:solidFill>
                 <a:latin typeface="Montserrat" pitchFamily="34" charset="0"/>
                 <a:ea typeface="Montserrat" pitchFamily="34" charset="-122"/>
@@ -22033,7 +21620,7 @@
       </p:sp>
       <p:sp>
         <p:nvSpPr>
-          <p:cNvPr id="20" name="Shape 17"/>
+          <p:cNvPr id="19" name="Shape 16"/>
           <p:cNvSpPr/>
           <p:nvPr/>
         </p:nvSpPr>
@@ -22055,7 +21642,7 @@
       </p:sp>
       <p:sp>
         <p:nvSpPr>
-          <p:cNvPr id="21" name="Text 18"/>
+          <p:cNvPr id="20" name="Text 17"/>
           <p:cNvSpPr/>
           <p:nvPr/>
         </p:nvSpPr>
@@ -22125,7 +21712,7 @@
             <a:lvl1pPr>
               <a:defRPr sz="850">
                 <a:solidFill>
-                  <a:srgbClr val="9AA1AD"/>
+                  <a:srgbClr val="8A82A0"/>
                 </a:solidFill>
                 <a:latin typeface="Courier New"/>
                 <a:ea typeface="Courier New"/>
@@ -22170,29 +21757,7 @@
       </p:grpSpPr>
       <p:sp>
         <p:nvSpPr>
-          <p:cNvPr id="2" name="Shape 0"/>
-          <p:cNvSpPr/>
-          <p:nvPr/>
-        </p:nvSpPr>
-        <p:spPr>
-          <a:xfrm>
-            <a:off x="231343" y="194767"/>
-            <a:ext cx="11716207" cy="6473952"/>
-          </a:xfrm>
-          <a:prstGeom prst="roundRect">
-            <a:avLst>
-              <a:gd name="adj" fmla="val 3107"/>
-            </a:avLst>
-          </a:prstGeom>
-          <a:solidFill>
-            <a:srgbClr val="FFFFFF"/>
-          </a:solidFill>
-          <a:ln/>
-        </p:spPr>
-      </p:sp>
-      <p:sp>
-        <p:nvSpPr>
-          <p:cNvPr id="3" name="Text 1"/>
+          <p:cNvPr id="2" name="Text 0"/>
           <p:cNvSpPr/>
           <p:nvPr/>
         </p:nvSpPr>
@@ -22217,7 +21782,7 @@
             <a:r>
               <a:rPr lang="en-US" sz="2600" b="1" dirty="0">
                 <a:solidFill>
-                  <a:srgbClr val="5A05F4"/>
+                  <a:srgbClr val="C9A6FF"/>
                 </a:solidFill>
                 <a:latin typeface="Courier New" pitchFamily="34" charset="0"/>
                 <a:ea typeface="Courier New" pitchFamily="34" charset="-122"/>
@@ -22231,7 +21796,7 @@
       </p:sp>
       <p:sp>
         <p:nvSpPr>
-          <p:cNvPr id="4" name="Text 2"/>
+          <p:cNvPr id="3" name="Text 1"/>
           <p:cNvSpPr/>
           <p:nvPr/>
         </p:nvSpPr>
@@ -22256,7 +21821,7 @@
             <a:r>
               <a:rPr lang="en-US" sz="2400" b="1" dirty="0">
                 <a:solidFill>
-                  <a:srgbClr val="111318"/>
+                  <a:srgbClr val="FFFFFF"/>
                 </a:solidFill>
                 <a:latin typeface="Montserrat" pitchFamily="34" charset="0"/>
                 <a:ea typeface="Montserrat" pitchFamily="34" charset="-122"/>
@@ -22270,7 +21835,7 @@
       </p:sp>
       <p:sp>
         <p:nvSpPr>
-          <p:cNvPr id="5" name="Shape 3"/>
+          <p:cNvPr id="4" name="Shape 2"/>
           <p:cNvSpPr/>
           <p:nvPr/>
         </p:nvSpPr>
@@ -22285,14 +21850,14 @@
             </a:avLst>
           </a:prstGeom>
           <a:solidFill>
-            <a:srgbClr val="5A05F4"/>
+            <a:srgbClr val="C9A6FF"/>
           </a:solidFill>
           <a:ln/>
         </p:spPr>
       </p:sp>
       <p:sp>
         <p:nvSpPr>
-          <p:cNvPr id="6" name="Text 4"/>
+          <p:cNvPr id="5" name="Text 3"/>
           <p:cNvSpPr/>
           <p:nvPr/>
         </p:nvSpPr>
@@ -22317,7 +21882,7 @@
             <a:r>
               <a:rPr lang="en-US" sz="900" b="1" spc="100" kern="0" dirty="0">
                 <a:solidFill>
-                  <a:srgbClr val="FFFFFF"/>
+                  <a:srgbClr val="1C1140"/>
                 </a:solidFill>
                 <a:latin typeface="Courier New" pitchFamily="34" charset="0"/>
                 <a:ea typeface="Courier New" pitchFamily="34" charset="-122"/>
@@ -22331,7 +21896,7 @@
       </p:sp>
       <p:pic>
         <p:nvPicPr>
-          <p:cNvPr id="7" name="Image 0" descr="preencoded.png">    </p:cNvPr>
+          <p:cNvPr id="6" name="Image 0" descr="preencoded.png">    </p:cNvPr>
           <p:cNvPicPr>
             <a:picLocks noChangeAspect="1"/>
           </p:cNvPicPr>
@@ -22355,7 +21920,7 @@
       </p:pic>
       <p:sp>
         <p:nvSpPr>
-          <p:cNvPr id="8" name="Shape 5"/>
+          <p:cNvPr id="7" name="Shape 4"/>
           <p:cNvSpPr/>
           <p:nvPr/>
         </p:nvSpPr>
@@ -22370,14 +21935,14 @@
             </a:avLst>
           </a:prstGeom>
           <a:solidFill>
-            <a:srgbClr val="FBE9E9"/>
+            <a:srgbClr val="2E1418"/>
           </a:solidFill>
           <a:ln/>
         </p:spPr>
       </p:sp>
       <p:sp>
         <p:nvSpPr>
-          <p:cNvPr id="9" name="Text 6"/>
+          <p:cNvPr id="8" name="Text 5"/>
           <p:cNvSpPr/>
           <p:nvPr/>
         </p:nvSpPr>
@@ -22402,7 +21967,7 @@
             <a:r>
               <a:rPr lang="en-US" sz="1450" b="1" dirty="0">
                 <a:solidFill>
-                  <a:srgbClr val="C62A2A"/>
+                  <a:srgbClr val="FF7B7B"/>
                 </a:solidFill>
                 <a:latin typeface="Montserrat" pitchFamily="34" charset="0"/>
                 <a:ea typeface="Montserrat" pitchFamily="34" charset="-122"/>
@@ -22416,7 +21981,7 @@
       </p:sp>
       <p:sp>
         <p:nvSpPr>
-          <p:cNvPr id="10" name="Text 7"/>
+          <p:cNvPr id="9" name="Text 6"/>
           <p:cNvSpPr/>
           <p:nvPr/>
         </p:nvSpPr>
@@ -22444,7 +22009,7 @@
             <a:r>
               <a:rPr lang="en-US" sz="1200" dirty="0">
                 <a:solidFill>
-                  <a:srgbClr val="111318"/>
+                  <a:srgbClr val="FFFFFF"/>
                 </a:solidFill>
                 <a:latin typeface="Montserrat" pitchFamily="34" charset="0"/>
                 <a:ea typeface="Montserrat" pitchFamily="34" charset="-122"/>
@@ -22458,7 +22023,7 @@
       </p:sp>
       <p:sp>
         <p:nvSpPr>
-          <p:cNvPr id="11" name="Shape 8"/>
+          <p:cNvPr id="10" name="Shape 7"/>
           <p:cNvSpPr/>
           <p:nvPr/>
         </p:nvSpPr>
@@ -22473,14 +22038,14 @@
             </a:avLst>
           </a:prstGeom>
           <a:solidFill>
-            <a:srgbClr val="FBE9E9"/>
+            <a:srgbClr val="2E1418"/>
           </a:solidFill>
           <a:ln/>
         </p:spPr>
       </p:sp>
       <p:sp>
         <p:nvSpPr>
-          <p:cNvPr id="12" name="Text 9"/>
+          <p:cNvPr id="11" name="Text 8"/>
           <p:cNvSpPr/>
           <p:nvPr/>
         </p:nvSpPr>
@@ -22505,7 +22070,7 @@
             <a:r>
               <a:rPr lang="en-US" sz="1450" b="1" dirty="0">
                 <a:solidFill>
-                  <a:srgbClr val="C62A2A"/>
+                  <a:srgbClr val="FF7B7B"/>
                 </a:solidFill>
                 <a:latin typeface="Montserrat" pitchFamily="34" charset="0"/>
                 <a:ea typeface="Montserrat" pitchFamily="34" charset="-122"/>
@@ -22519,7 +22084,7 @@
       </p:sp>
       <p:sp>
         <p:nvSpPr>
-          <p:cNvPr id="13" name="Text 10"/>
+          <p:cNvPr id="12" name="Text 9"/>
           <p:cNvSpPr/>
           <p:nvPr/>
         </p:nvSpPr>
@@ -22547,7 +22112,7 @@
             <a:r>
               <a:rPr lang="en-US" sz="1200" dirty="0">
                 <a:solidFill>
-                  <a:srgbClr val="111318"/>
+                  <a:srgbClr val="FFFFFF"/>
                 </a:solidFill>
                 <a:latin typeface="Montserrat" pitchFamily="34" charset="0"/>
                 <a:ea typeface="Montserrat" pitchFamily="34" charset="-122"/>
@@ -22561,7 +22126,7 @@
       </p:sp>
       <p:sp>
         <p:nvSpPr>
-          <p:cNvPr id="14" name="Shape 11"/>
+          <p:cNvPr id="13" name="Shape 10"/>
           <p:cNvSpPr/>
           <p:nvPr/>
         </p:nvSpPr>
@@ -22583,7 +22148,7 @@
       </p:sp>
       <p:sp>
         <p:nvSpPr>
-          <p:cNvPr id="15" name="Text 12"/>
+          <p:cNvPr id="14" name="Text 11"/>
           <p:cNvSpPr/>
           <p:nvPr/>
         </p:nvSpPr>
@@ -22625,7 +22190,7 @@
       </p:sp>
       <p:sp>
         <p:nvSpPr>
-          <p:cNvPr id="16" name="Shape 13"/>
+          <p:cNvPr id="15" name="Shape 12"/>
           <p:cNvSpPr/>
           <p:nvPr/>
         </p:nvSpPr>
@@ -22640,14 +22205,14 @@
             </a:avLst>
           </a:prstGeom>
           <a:solidFill>
-            <a:srgbClr val="F8F0E2"/>
+            <a:srgbClr val="2A2010"/>
           </a:solidFill>
           <a:ln/>
         </p:spPr>
       </p:sp>
       <p:sp>
         <p:nvSpPr>
-          <p:cNvPr id="17" name="Text 14"/>
+          <p:cNvPr id="16" name="Text 13"/>
           <p:cNvSpPr/>
           <p:nvPr/>
         </p:nvSpPr>
@@ -22672,7 +22237,7 @@
             <a:r>
               <a:rPr lang="en-US" sz="950" b="1" spc="150" kern="0" dirty="0">
                 <a:solidFill>
-                  <a:srgbClr val="9A5B12"/>
+                  <a:srgbClr val="E8A857"/>
                 </a:solidFill>
                 <a:latin typeface="Courier New" pitchFamily="34" charset="0"/>
                 <a:ea typeface="Courier New" pitchFamily="34" charset="-122"/>
@@ -22686,7 +22251,7 @@
       </p:sp>
       <p:sp>
         <p:nvSpPr>
-          <p:cNvPr id="18" name="Text 15"/>
+          <p:cNvPr id="17" name="Text 14"/>
           <p:cNvSpPr/>
           <p:nvPr/>
         </p:nvSpPr>
@@ -22714,7 +22279,7 @@
             <a:r>
               <a:rPr lang="en-US" sz="1300" dirty="0">
                 <a:solidFill>
-                  <a:srgbClr val="111318"/>
+                  <a:srgbClr val="FFFFFF"/>
                 </a:solidFill>
                 <a:latin typeface="Montserrat" pitchFamily="34" charset="0"/>
                 <a:ea typeface="Montserrat" pitchFamily="34" charset="-122"/>
@@ -22756,7 +22321,7 @@
             <a:lvl1pPr>
               <a:defRPr sz="850">
                 <a:solidFill>
-                  <a:srgbClr val="9AA1AD"/>
+                  <a:srgbClr val="8A82A0"/>
                 </a:solidFill>
                 <a:latin typeface="Courier New"/>
                 <a:ea typeface="Courier New"/>

--- a/docs/decks/L11.pptx
+++ b/docs/decks/L11.pptx
@@ -2447,7 +2447,7 @@
         </p:nvSpPr>
         <p:spPr>
           <a:xfrm>
-            <a:off x="11368735" y="6327648"/>
+            <a:off x="11368735" y="6437376"/>
             <a:ext cx="365760" cy="274320"/>
           </a:xfrm>
           <a:prstGeom prst="rect">
@@ -2576,7 +2576,7 @@
         </p:nvSpPr>
         <p:spPr>
           <a:xfrm>
-            <a:off x="11368735" y="6327648"/>
+            <a:off x="11368735" y="6437376"/>
             <a:ext cx="365760" cy="274320"/>
           </a:xfrm>
           <a:prstGeom prst="rect">
@@ -3716,7 +3716,7 @@
         </p:blipFill>
         <p:spPr>
           <a:xfrm>
-            <a:off x="566928" y="6126480"/>
+            <a:off x="566928" y="6254496"/>
             <a:ext cx="1481328" cy="457200"/>
           </a:xfrm>
           <a:prstGeom prst="rect">
@@ -4103,7 +4103,7 @@
         </p:nvSpPr>
         <p:spPr>
           <a:xfrm>
-            <a:off x="11368735" y="6327648"/>
+            <a:off x="11368735" y="6437376"/>
             <a:ext cx="365760" cy="274320"/>
           </a:xfrm>
           <a:prstGeom prst="rect">
@@ -4319,7 +4319,7 @@
         </p:blipFill>
         <p:spPr>
           <a:xfrm>
-            <a:off x="566928" y="6126480"/>
+            <a:off x="566928" y="6254496"/>
             <a:ext cx="1481328" cy="457200"/>
           </a:xfrm>
           <a:prstGeom prst="rect">
@@ -5031,7 +5031,7 @@
         </p:nvSpPr>
         <p:spPr>
           <a:xfrm>
-            <a:off x="11368735" y="6327648"/>
+            <a:off x="11368735" y="6437376"/>
             <a:ext cx="365760" cy="274320"/>
           </a:xfrm>
           <a:prstGeom prst="rect">
@@ -5247,7 +5247,7 @@
         </p:blipFill>
         <p:spPr>
           <a:xfrm>
-            <a:off x="566928" y="6126480"/>
+            <a:off x="566928" y="6254496"/>
             <a:ext cx="1481328" cy="457200"/>
           </a:xfrm>
           <a:prstGeom prst="rect">
@@ -6008,7 +6008,7 @@
         </p:nvSpPr>
         <p:spPr>
           <a:xfrm>
-            <a:off x="11368735" y="6327648"/>
+            <a:off x="11368735" y="6437376"/>
             <a:ext cx="365760" cy="274320"/>
           </a:xfrm>
           <a:prstGeom prst="rect">
@@ -6266,7 +6266,7 @@
         </p:blipFill>
         <p:spPr>
           <a:xfrm>
-            <a:off x="566928" y="6126480"/>
+            <a:off x="566928" y="6254496"/>
             <a:ext cx="1481328" cy="457200"/>
           </a:xfrm>
           <a:prstGeom prst="rect">
@@ -7247,7 +7247,7 @@
         </p:nvSpPr>
         <p:spPr>
           <a:xfrm>
-            <a:off x="11368735" y="6327648"/>
+            <a:off x="11368735" y="6437376"/>
             <a:ext cx="365760" cy="274320"/>
           </a:xfrm>
           <a:prstGeom prst="rect">
@@ -7524,7 +7524,7 @@
         </p:blipFill>
         <p:spPr>
           <a:xfrm>
-            <a:off x="566928" y="6126480"/>
+            <a:off x="566928" y="6254496"/>
             <a:ext cx="1481328" cy="457200"/>
           </a:xfrm>
           <a:prstGeom prst="rect">
@@ -8088,7 +8088,7 @@
         </p:nvSpPr>
         <p:spPr>
           <a:xfrm>
-            <a:off x="11368735" y="6327648"/>
+            <a:off x="11368735" y="6437376"/>
             <a:ext cx="365760" cy="274320"/>
           </a:xfrm>
           <a:prstGeom prst="rect">
@@ -8304,7 +8304,7 @@
         </p:blipFill>
         <p:spPr>
           <a:xfrm>
-            <a:off x="566928" y="6126480"/>
+            <a:off x="566928" y="6254496"/>
             <a:ext cx="1481328" cy="457200"/>
           </a:xfrm>
           <a:prstGeom prst="rect">
@@ -9094,7 +9094,7 @@
         </p:nvSpPr>
         <p:spPr>
           <a:xfrm>
-            <a:off x="11368735" y="6327648"/>
+            <a:off x="11368735" y="6437376"/>
             <a:ext cx="365760" cy="274320"/>
           </a:xfrm>
           <a:prstGeom prst="rect">
@@ -9271,7 +9271,7 @@
         </p:blipFill>
         <p:spPr>
           <a:xfrm>
-            <a:off x="566928" y="6126480"/>
+            <a:off x="566928" y="6254496"/>
             <a:ext cx="1481328" cy="457200"/>
           </a:xfrm>
           <a:prstGeom prst="rect">
@@ -10042,7 +10042,7 @@
         </p:nvSpPr>
         <p:spPr>
           <a:xfrm>
-            <a:off x="11368735" y="6327648"/>
+            <a:off x="11368735" y="6437376"/>
             <a:ext cx="365760" cy="274320"/>
           </a:xfrm>
           <a:prstGeom prst="rect">
@@ -10219,7 +10219,7 @@
         </p:blipFill>
         <p:spPr>
           <a:xfrm>
-            <a:off x="566928" y="6126480"/>
+            <a:off x="566928" y="6254496"/>
             <a:ext cx="1481328" cy="457200"/>
           </a:xfrm>
           <a:prstGeom prst="rect">
@@ -10799,7 +10799,7 @@
         </p:nvSpPr>
         <p:spPr>
           <a:xfrm>
-            <a:off x="11368735" y="6327648"/>
+            <a:off x="11368735" y="6437376"/>
             <a:ext cx="365760" cy="274320"/>
           </a:xfrm>
           <a:prstGeom prst="rect">
@@ -10976,7 +10976,7 @@
         </p:blipFill>
         <p:spPr>
           <a:xfrm>
-            <a:off x="566928" y="6126480"/>
+            <a:off x="566928" y="6254496"/>
             <a:ext cx="1481328" cy="457200"/>
           </a:xfrm>
           <a:prstGeom prst="rect">
@@ -11379,7 +11379,7 @@
         </p:nvSpPr>
         <p:spPr>
           <a:xfrm>
-            <a:off x="11368735" y="6327648"/>
+            <a:off x="11368735" y="6437376"/>
             <a:ext cx="365760" cy="274320"/>
           </a:xfrm>
           <a:prstGeom prst="rect">
@@ -11556,7 +11556,7 @@
         </p:blipFill>
         <p:spPr>
           <a:xfrm>
-            <a:off x="566928" y="6126480"/>
+            <a:off x="566928" y="6254496"/>
             <a:ext cx="1481328" cy="457200"/>
           </a:xfrm>
           <a:prstGeom prst="rect">
@@ -12066,7 +12066,7 @@
         </p:nvSpPr>
         <p:spPr>
           <a:xfrm>
-            <a:off x="11368735" y="6327648"/>
+            <a:off x="11368735" y="6437376"/>
             <a:ext cx="365760" cy="274320"/>
           </a:xfrm>
           <a:prstGeom prst="rect">
@@ -12285,7 +12285,7 @@
         </p:blipFill>
         <p:spPr>
           <a:xfrm>
-            <a:off x="566928" y="6126480"/>
+            <a:off x="566928" y="6254496"/>
             <a:ext cx="1481328" cy="457200"/>
           </a:xfrm>
           <a:prstGeom prst="rect">
@@ -13140,7 +13140,7 @@
         </p:nvSpPr>
         <p:spPr>
           <a:xfrm>
-            <a:off x="11368735" y="6327648"/>
+            <a:off x="11368735" y="6437376"/>
             <a:ext cx="365760" cy="274320"/>
           </a:xfrm>
           <a:prstGeom prst="rect">
@@ -13317,7 +13317,7 @@
         </p:blipFill>
         <p:spPr>
           <a:xfrm>
-            <a:off x="566928" y="6126480"/>
+            <a:off x="566928" y="6254496"/>
             <a:ext cx="1481328" cy="457200"/>
           </a:xfrm>
           <a:prstGeom prst="rect">
@@ -14037,7 +14037,7 @@
         </p:nvSpPr>
         <p:spPr>
           <a:xfrm>
-            <a:off x="11368735" y="6327648"/>
+            <a:off x="11368735" y="6437376"/>
             <a:ext cx="365760" cy="274320"/>
           </a:xfrm>
           <a:prstGeom prst="rect">
@@ -14214,7 +14214,7 @@
         </p:blipFill>
         <p:spPr>
           <a:xfrm>
-            <a:off x="566928" y="6126480"/>
+            <a:off x="566928" y="6254496"/>
             <a:ext cx="1481328" cy="457200"/>
           </a:xfrm>
           <a:prstGeom prst="rect">
@@ -14608,7 +14608,7 @@
         </p:nvSpPr>
         <p:spPr>
           <a:xfrm>
-            <a:off x="11368735" y="6327648"/>
+            <a:off x="11368735" y="6437376"/>
             <a:ext cx="365760" cy="274320"/>
           </a:xfrm>
           <a:prstGeom prst="rect">
@@ -15306,7 +15306,7 @@
         </p:blipFill>
         <p:spPr>
           <a:xfrm>
-            <a:off x="566928" y="6126480"/>
+            <a:off x="566928" y="6254496"/>
             <a:ext cx="1481328" cy="457200"/>
           </a:xfrm>
           <a:prstGeom prst="rect">
@@ -16765,7 +16765,7 @@
         </p:nvSpPr>
         <p:spPr>
           <a:xfrm>
-            <a:off x="11368735" y="6327648"/>
+            <a:off x="11368735" y="6437376"/>
             <a:ext cx="365760" cy="274320"/>
           </a:xfrm>
           <a:prstGeom prst="rect">
@@ -16984,7 +16984,7 @@
         </p:blipFill>
         <p:spPr>
           <a:xfrm>
-            <a:off x="566928" y="6126480"/>
+            <a:off x="566928" y="6254496"/>
             <a:ext cx="1481328" cy="457200"/>
           </a:xfrm>
           <a:prstGeom prst="rect">
@@ -17721,7 +17721,7 @@
         </p:nvSpPr>
         <p:spPr>
           <a:xfrm>
-            <a:off x="11368735" y="6327648"/>
+            <a:off x="11368735" y="6437376"/>
             <a:ext cx="365760" cy="274320"/>
           </a:xfrm>
           <a:prstGeom prst="rect">
@@ -17937,7 +17937,7 @@
         </p:blipFill>
         <p:spPr>
           <a:xfrm>
-            <a:off x="566928" y="6126480"/>
+            <a:off x="566928" y="6254496"/>
             <a:ext cx="1481328" cy="457200"/>
           </a:xfrm>
           <a:prstGeom prst="rect">
@@ -18330,7 +18330,7 @@
         </p:nvSpPr>
         <p:spPr>
           <a:xfrm>
-            <a:off x="11368735" y="6327648"/>
+            <a:off x="11368735" y="6437376"/>
             <a:ext cx="365760" cy="274320"/>
           </a:xfrm>
           <a:prstGeom prst="rect">
@@ -18546,7 +18546,7 @@
         </p:blipFill>
         <p:spPr>
           <a:xfrm>
-            <a:off x="566928" y="6126480"/>
+            <a:off x="566928" y="6254496"/>
             <a:ext cx="1481328" cy="457200"/>
           </a:xfrm>
           <a:prstGeom prst="rect">
@@ -19333,7 +19333,7 @@
         </p:nvSpPr>
         <p:spPr>
           <a:xfrm>
-            <a:off x="11368735" y="6327648"/>
+            <a:off x="11368735" y="6437376"/>
             <a:ext cx="365760" cy="274320"/>
           </a:xfrm>
           <a:prstGeom prst="rect">
@@ -19549,7 +19549,7 @@
         </p:blipFill>
         <p:spPr>
           <a:xfrm>
-            <a:off x="566928" y="6126480"/>
+            <a:off x="566928" y="6254496"/>
             <a:ext cx="1481328" cy="457200"/>
           </a:xfrm>
           <a:prstGeom prst="rect">
@@ -20627,7 +20627,7 @@
         </p:nvSpPr>
         <p:spPr>
           <a:xfrm>
-            <a:off x="11368735" y="6327648"/>
+            <a:off x="11368735" y="6437376"/>
             <a:ext cx="365760" cy="274320"/>
           </a:xfrm>
           <a:prstGeom prst="rect">
@@ -20843,7 +20843,7 @@
         </p:blipFill>
         <p:spPr>
           <a:xfrm>
-            <a:off x="566928" y="6126480"/>
+            <a:off x="566928" y="6254496"/>
             <a:ext cx="1481328" cy="457200"/>
           </a:xfrm>
           <a:prstGeom prst="rect">
@@ -21694,7 +21694,7 @@
         </p:nvSpPr>
         <p:spPr>
           <a:xfrm>
-            <a:off x="11368735" y="6327648"/>
+            <a:off x="11368735" y="6437376"/>
             <a:ext cx="365760" cy="274320"/>
           </a:xfrm>
           <a:prstGeom prst="rect">
@@ -21910,7 +21910,7 @@
         </p:blipFill>
         <p:spPr>
           <a:xfrm>
-            <a:off x="566928" y="6126480"/>
+            <a:off x="566928" y="6254496"/>
             <a:ext cx="1481328" cy="457200"/>
           </a:xfrm>
           <a:prstGeom prst="rect">
@@ -22303,7 +22303,7 @@
         </p:nvSpPr>
         <p:spPr>
           <a:xfrm>
-            <a:off x="11368735" y="6327648"/>
+            <a:off x="11368735" y="6437376"/>
             <a:ext cx="365760" cy="274320"/>
           </a:xfrm>
           <a:prstGeom prst="rect">

--- a/docs/decks/L11.pptx
+++ b/docs/decks/L11.pptx
@@ -3074,17 +3074,17 @@
               <a:buNone/>
             </a:pPr>
             <a:r>
-              <a:rPr lang="en-US" sz="4000" b="1" dirty="0">
+              <a:rPr lang="en-US" sz="3600" dirty="0">
                 <a:solidFill>
                   <a:srgbClr val="FFFFFF"/>
                 </a:solidFill>
-                <a:latin typeface="Montserrat" pitchFamily="34" charset="0"/>
-                <a:ea typeface="Montserrat" pitchFamily="34" charset="-122"/>
-                <a:cs typeface="Montserrat" pitchFamily="34" charset="-120"/>
+                <a:latin typeface="Unbounded" pitchFamily="34" charset="0"/>
+                <a:ea typeface="Unbounded" pitchFamily="34" charset="-122"/>
+                <a:cs typeface="Unbounded" pitchFamily="34" charset="-120"/>
               </a:rPr>
               <a:t>CI/CD quality gates,</a:t>
             </a:r>
-            <a:endParaRPr lang="en-US" sz="4000" dirty="0"/>
+            <a:endParaRPr lang="en-US" sz="3600" dirty="0"/>
           </a:p>
           <a:p>
             <a:pPr indent="0" marL="0">
@@ -3094,17 +3094,17 @@
               <a:buNone/>
             </a:pPr>
             <a:r>
-              <a:rPr lang="en-US" sz="4000" b="1" dirty="0">
+              <a:rPr lang="en-US" sz="3600" dirty="0">
                 <a:solidFill>
                   <a:srgbClr val="FFFFFF"/>
                 </a:solidFill>
-                <a:latin typeface="Montserrat" pitchFamily="34" charset="0"/>
-                <a:ea typeface="Montserrat" pitchFamily="34" charset="-122"/>
-                <a:cs typeface="Montserrat" pitchFamily="34" charset="-120"/>
+                <a:latin typeface="Unbounded" pitchFamily="34" charset="0"/>
+                <a:ea typeface="Unbounded" pitchFamily="34" charset="-122"/>
+                <a:cs typeface="Unbounded" pitchFamily="34" charset="-120"/>
               </a:rPr>
               <a:t>canary і rollback</a:t>
             </a:r>
-            <a:endParaRPr lang="en-US" sz="4000" dirty="0"/>
+            <a:endParaRPr lang="en-US" sz="3600" dirty="0"/>
           </a:p>
         </p:txBody>
       </p:sp>
@@ -3625,13 +3625,13 @@
               <a:buNone/>
             </a:pPr>
             <a:r>
-              <a:rPr lang="en-US" sz="2400" b="1" dirty="0">
+              <a:rPr lang="en-US" sz="2400" dirty="0">
                 <a:solidFill>
                   <a:srgbClr val="FFFFFF"/>
                 </a:solidFill>
-                <a:latin typeface="Montserrat" pitchFamily="34" charset="0"/>
-                <a:ea typeface="Montserrat" pitchFamily="34" charset="-122"/>
-                <a:cs typeface="Montserrat" pitchFamily="34" charset="-120"/>
+                <a:latin typeface="Unbounded" pitchFamily="34" charset="0"/>
+                <a:ea typeface="Unbounded" pitchFamily="34" charset="-122"/>
+                <a:cs typeface="Unbounded" pitchFamily="34" charset="-120"/>
               </a:rPr>
               <a:t>Червоний гейт — подарунок</a:t>
             </a:r>
@@ -4228,13 +4228,13 @@
               <a:buNone/>
             </a:pPr>
             <a:r>
-              <a:rPr lang="en-US" sz="2400" b="1" dirty="0">
+              <a:rPr lang="en-US" sz="2400" dirty="0">
                 <a:solidFill>
                   <a:srgbClr val="FFFFFF"/>
                 </a:solidFill>
-                <a:latin typeface="Montserrat" pitchFamily="34" charset="0"/>
-                <a:ea typeface="Montserrat" pitchFamily="34" charset="-122"/>
-                <a:cs typeface="Montserrat" pitchFamily="34" charset="-120"/>
+                <a:latin typeface="Unbounded" pitchFamily="34" charset="0"/>
+                <a:ea typeface="Unbounded" pitchFamily="34" charset="-122"/>
+                <a:cs typeface="Unbounded" pitchFamily="34" charset="-120"/>
               </a:rPr>
               <a:t>Порядок викочування — частина релізу</a:t>
             </a:r>
@@ -4250,7 +4250,7 @@
         </p:nvSpPr>
         <p:spPr>
           <a:xfrm>
-            <a:off x="1280160" y="1193140"/>
+            <a:off x="1280160" y="1218895"/>
             <a:ext cx="777240" cy="256032"/>
           </a:xfrm>
           <a:prstGeom prst="roundRect">
@@ -4272,7 +4272,7 @@
         </p:nvSpPr>
         <p:spPr>
           <a:xfrm>
-            <a:off x="1280160" y="1193140"/>
+            <a:off x="1280160" y="1218895"/>
             <a:ext cx="777240" cy="256032"/>
           </a:xfrm>
           <a:prstGeom prst="rect">
@@ -5156,13 +5156,13 @@
               <a:buNone/>
             </a:pPr>
             <a:r>
-              <a:rPr lang="en-US" sz="2400" b="1" dirty="0">
+              <a:rPr lang="en-US" sz="2400" dirty="0">
                 <a:solidFill>
                   <a:srgbClr val="FFFFFF"/>
                 </a:solidFill>
-                <a:latin typeface="Montserrat" pitchFamily="34" charset="0"/>
-                <a:ea typeface="Montserrat" pitchFamily="34" charset="-122"/>
-                <a:cs typeface="Montserrat" pitchFamily="34" charset="-120"/>
+                <a:latin typeface="Unbounded" pitchFamily="34" charset="0"/>
+                <a:ea typeface="Unbounded" pitchFamily="34" charset="-122"/>
+                <a:cs typeface="Unbounded" pitchFamily="34" charset="-120"/>
               </a:rPr>
               <a:t>Feature flag і артефакти релізу</a:t>
             </a:r>
@@ -6133,13 +6133,13 @@
               <a:buNone/>
             </a:pPr>
             <a:r>
-              <a:rPr lang="en-US" sz="2400" b="1" dirty="0">
+              <a:rPr lang="en-US" sz="2400" dirty="0">
                 <a:solidFill>
                   <a:srgbClr val="FFFFFF"/>
                 </a:solidFill>
-                <a:latin typeface="Montserrat" pitchFamily="34" charset="0"/>
-                <a:ea typeface="Montserrat" pitchFamily="34" charset="-122"/>
-                <a:cs typeface="Montserrat" pitchFamily="34" charset="-120"/>
+                <a:latin typeface="Unbounded" pitchFamily="34" charset="0"/>
+                <a:ea typeface="Unbounded" pitchFamily="34" charset="-122"/>
+                <a:cs typeface="Unbounded" pitchFamily="34" charset="-120"/>
               </a:rPr>
               <a:t>У гейті живуть не тільки evals</a:t>
             </a:r>
@@ -7372,13 +7372,13 @@
               <a:buNone/>
             </a:pPr>
             <a:r>
-              <a:rPr lang="en-US" sz="2400" b="1" dirty="0">
+              <a:rPr lang="en-US" sz="2400" dirty="0">
                 <a:solidFill>
                   <a:srgbClr val="FFFFFF"/>
                 </a:solidFill>
-                <a:latin typeface="Montserrat" pitchFamily="34" charset="0"/>
-                <a:ea typeface="Montserrat" pitchFamily="34" charset="-122"/>
-                <a:cs typeface="Montserrat" pitchFamily="34" charset="-120"/>
+                <a:latin typeface="Unbounded" pitchFamily="34" charset="0"/>
+                <a:ea typeface="Unbounded" pitchFamily="34" charset="-122"/>
+                <a:cs typeface="Unbounded" pitchFamily="34" charset="-120"/>
               </a:rPr>
               <a:t>Canary: частка трафіку замість усього</a:t>
             </a:r>
@@ -7394,7 +7394,7 @@
         </p:nvSpPr>
         <p:spPr>
           <a:xfrm>
-            <a:off x="1280160" y="1193140"/>
+            <a:off x="1280160" y="1218895"/>
             <a:ext cx="777240" cy="256032"/>
           </a:xfrm>
           <a:prstGeom prst="roundRect">
@@ -7416,7 +7416,7 @@
         </p:nvSpPr>
         <p:spPr>
           <a:xfrm>
-            <a:off x="1280160" y="1193140"/>
+            <a:off x="1280160" y="1218895"/>
             <a:ext cx="777240" cy="256032"/>
           </a:xfrm>
           <a:prstGeom prst="rect">
@@ -7455,7 +7455,7 @@
         </p:nvSpPr>
         <p:spPr>
           <a:xfrm>
-            <a:off x="2167128" y="1193140"/>
+            <a:off x="2167128" y="1218895"/>
             <a:ext cx="864108" cy="256032"/>
           </a:xfrm>
           <a:prstGeom prst="roundRect">
@@ -7477,7 +7477,7 @@
         </p:nvSpPr>
         <p:spPr>
           <a:xfrm>
-            <a:off x="2167128" y="1193140"/>
+            <a:off x="2167128" y="1218895"/>
             <a:ext cx="864108" cy="256032"/>
           </a:xfrm>
           <a:prstGeom prst="rect">
@@ -8213,13 +8213,13 @@
               <a:buNone/>
             </a:pPr>
             <a:r>
-              <a:rPr lang="en-US" sz="2400" b="1" dirty="0">
+              <a:rPr lang="en-US" sz="2400" dirty="0">
                 <a:solidFill>
                   <a:srgbClr val="FFFFFF"/>
                 </a:solidFill>
-                <a:latin typeface="Montserrat" pitchFamily="34" charset="0"/>
-                <a:ea typeface="Montserrat" pitchFamily="34" charset="-122"/>
-                <a:cs typeface="Montserrat" pitchFamily="34" charset="-120"/>
+                <a:latin typeface="Unbounded" pitchFamily="34" charset="0"/>
+                <a:ea typeface="Unbounded" pitchFamily="34" charset="-122"/>
+                <a:cs typeface="Unbounded" pitchFamily="34" charset="-120"/>
               </a:rPr>
               <a:t>Rollback-критерії пишуться до пожежі</a:t>
             </a:r>
@@ -8235,7 +8235,7 @@
         </p:nvSpPr>
         <p:spPr>
           <a:xfrm>
-            <a:off x="1280160" y="1193140"/>
+            <a:off x="1280160" y="1218895"/>
             <a:ext cx="777240" cy="256032"/>
           </a:xfrm>
           <a:prstGeom prst="roundRect">
@@ -8257,7 +8257,7 @@
         </p:nvSpPr>
         <p:spPr>
           <a:xfrm>
-            <a:off x="1280160" y="1193140"/>
+            <a:off x="1280160" y="1218895"/>
             <a:ext cx="777240" cy="256032"/>
           </a:xfrm>
           <a:prstGeom prst="rect">
@@ -9180,13 +9180,13 @@
               <a:buNone/>
             </a:pPr>
             <a:r>
-              <a:rPr lang="en-US" sz="2400" b="1" dirty="0">
+              <a:rPr lang="en-US" sz="2400" dirty="0">
                 <a:solidFill>
                   <a:srgbClr val="FFFFFF"/>
                 </a:solidFill>
-                <a:latin typeface="Montserrat" pitchFamily="34" charset="0"/>
-                <a:ea typeface="Montserrat" pitchFamily="34" charset="-122"/>
-                <a:cs typeface="Montserrat" pitchFamily="34" charset="-120"/>
+                <a:latin typeface="Unbounded" pitchFamily="34" charset="0"/>
+                <a:ea typeface="Unbounded" pitchFamily="34" charset="-122"/>
+                <a:cs typeface="Unbounded" pitchFamily="34" charset="-120"/>
               </a:rPr>
               <a:t>Зараз ви побачите — і навіщо</a:t>
             </a:r>
@@ -10128,13 +10128,13 @@
               <a:buNone/>
             </a:pPr>
             <a:r>
-              <a:rPr lang="en-US" sz="2400" b="1" dirty="0">
+              <a:rPr lang="en-US" sz="2400" dirty="0">
                 <a:solidFill>
                   <a:srgbClr val="FFFFFF"/>
                 </a:solidFill>
-                <a:latin typeface="Montserrat" pitchFamily="34" charset="0"/>
-                <a:ea typeface="Montserrat" pitchFamily="34" charset="-122"/>
-                <a:cs typeface="Montserrat" pitchFamily="34" charset="-120"/>
+                <a:latin typeface="Unbounded" pitchFamily="34" charset="0"/>
+                <a:ea typeface="Unbounded" pitchFamily="34" charset="-122"/>
+                <a:cs typeface="Unbounded" pitchFamily="34" charset="-120"/>
               </a:rPr>
               <a:t>Лабораторна: чотири кроки + опційний</a:t>
             </a:r>
@@ -10150,7 +10150,7 @@
         </p:nvSpPr>
         <p:spPr>
           <a:xfrm>
-            <a:off x="566928" y="1024128"/>
+            <a:off x="566928" y="1218895"/>
             <a:ext cx="950976" cy="256032"/>
           </a:xfrm>
           <a:prstGeom prst="roundRect">
@@ -10172,7 +10172,7 @@
         </p:nvSpPr>
         <p:spPr>
           <a:xfrm>
-            <a:off x="566928" y="1024128"/>
+            <a:off x="566928" y="1218895"/>
             <a:ext cx="950976" cy="256032"/>
           </a:xfrm>
           <a:prstGeom prst="rect">
@@ -10885,13 +10885,13 @@
               <a:buNone/>
             </a:pPr>
             <a:r>
-              <a:rPr lang="en-US" sz="2400" b="1" dirty="0">
+              <a:rPr lang="en-US" sz="2400" dirty="0">
                 <a:solidFill>
                   <a:srgbClr val="FFFFFF"/>
                 </a:solidFill>
-                <a:latin typeface="Montserrat" pitchFamily="34" charset="0"/>
-                <a:ea typeface="Montserrat" pitchFamily="34" charset="-122"/>
-                <a:cs typeface="Montserrat" pitchFamily="34" charset="-120"/>
+                <a:latin typeface="Unbounded" pitchFamily="34" charset="0"/>
+                <a:ea typeface="Unbounded" pitchFamily="34" charset="-122"/>
+                <a:cs typeface="Unbounded" pitchFamily="34" charset="-120"/>
               </a:rPr>
               <a:t>Що це довело</a:t>
             </a:r>
@@ -11465,13 +11465,13 @@
               <a:buNone/>
             </a:pPr>
             <a:r>
-              <a:rPr lang="en-US" sz="2400" b="1" dirty="0">
+              <a:rPr lang="en-US" sz="2400" dirty="0">
                 <a:solidFill>
                   <a:srgbClr val="FFFFFF"/>
                 </a:solidFill>
-                <a:latin typeface="Montserrat" pitchFamily="34" charset="0"/>
-                <a:ea typeface="Montserrat" pitchFamily="34" charset="-122"/>
-                <a:cs typeface="Montserrat" pitchFamily="34" charset="-120"/>
+                <a:latin typeface="Unbounded" pitchFamily="34" charset="0"/>
+                <a:ea typeface="Unbounded" pitchFamily="34" charset="-122"/>
+                <a:cs typeface="Unbounded" pitchFamily="34" charset="-120"/>
               </a:rPr>
               <a:t>Перевір себе</a:t>
             </a:r>
@@ -12152,13 +12152,13 @@
               <a:buNone/>
             </a:pPr>
             <a:r>
-              <a:rPr lang="en-US" sz="2400" b="1" dirty="0">
+              <a:rPr lang="en-US" sz="2400" dirty="0">
                 <a:solidFill>
                   <a:srgbClr val="FFFFFF"/>
                 </a:solidFill>
-                <a:latin typeface="Montserrat" pitchFamily="34" charset="0"/>
-                <a:ea typeface="Montserrat" pitchFamily="34" charset="-122"/>
-                <a:cs typeface="Montserrat" pitchFamily="34" charset="-120"/>
+                <a:latin typeface="Unbounded" pitchFamily="34" charset="0"/>
+                <a:ea typeface="Unbounded" pitchFamily="34" charset="-122"/>
+                <a:cs typeface="Unbounded" pitchFamily="34" charset="-120"/>
               </a:rPr>
               <a:t>Що ви зможете після уроку</a:t>
             </a:r>
@@ -13226,13 +13226,13 @@
               <a:buNone/>
             </a:pPr>
             <a:r>
-              <a:rPr lang="en-US" sz="2400" b="1" dirty="0">
+              <a:rPr lang="en-US" sz="2400" dirty="0">
                 <a:solidFill>
                   <a:srgbClr val="FFFFFF"/>
                 </a:solidFill>
-                <a:latin typeface="Montserrat" pitchFamily="34" charset="0"/>
-                <a:ea typeface="Montserrat" pitchFamily="34" charset="-122"/>
-                <a:cs typeface="Montserrat" pitchFamily="34" charset="-120"/>
+                <a:latin typeface="Unbounded" pitchFamily="34" charset="0"/>
+                <a:ea typeface="Unbounded" pitchFamily="34" charset="-122"/>
+                <a:cs typeface="Unbounded" pitchFamily="34" charset="-120"/>
               </a:rPr>
               <a:t>Антипатерни тижня</a:t>
             </a:r>
@@ -14123,13 +14123,13 @@
               <a:buNone/>
             </a:pPr>
             <a:r>
-              <a:rPr lang="en-US" sz="2400" b="1" dirty="0">
+              <a:rPr lang="en-US" sz="2400" dirty="0">
                 <a:solidFill>
                   <a:srgbClr val="FFFFFF"/>
                 </a:solidFill>
-                <a:latin typeface="Montserrat" pitchFamily="34" charset="0"/>
-                <a:ea typeface="Montserrat" pitchFamily="34" charset="-122"/>
-                <a:cs typeface="Montserrat" pitchFamily="34" charset="-120"/>
+                <a:latin typeface="Unbounded" pitchFamily="34" charset="0"/>
+                <a:ea typeface="Unbounded" pitchFamily="34" charset="-122"/>
+                <a:cs typeface="Unbounded" pitchFamily="34" charset="-120"/>
               </a:rPr>
               <a:t>Домашнє завдання</a:t>
             </a:r>
@@ -15215,13 +15215,13 @@
               <a:buNone/>
             </a:pPr>
             <a:r>
-              <a:rPr lang="en-US" sz="2400" b="1" dirty="0">
+              <a:rPr lang="en-US" sz="2400" dirty="0">
                 <a:solidFill>
                   <a:srgbClr val="FFFFFF"/>
                 </a:solidFill>
-                <a:latin typeface="Montserrat" pitchFamily="34" charset="0"/>
-                <a:ea typeface="Montserrat" pitchFamily="34" charset="-122"/>
-                <a:cs typeface="Montserrat" pitchFamily="34" charset="-120"/>
+                <a:latin typeface="Unbounded" pitchFamily="34" charset="0"/>
+                <a:ea typeface="Unbounded" pitchFamily="34" charset="-122"/>
+                <a:cs typeface="Unbounded" pitchFamily="34" charset="-120"/>
               </a:rPr>
               <a:t>Маршрут на сьогодні</a:t>
             </a:r>
@@ -16851,56 +16851,56 @@
               <a:buNone/>
             </a:pPr>
             <a:r>
-              <a:rPr lang="en-US" sz="2400" b="1" dirty="0">
+              <a:rPr lang="en-US" sz="2400" dirty="0">
                 <a:solidFill>
                   <a:srgbClr val="FFFFFF"/>
+                </a:solidFill>
+                <a:latin typeface="Unbounded" pitchFamily="34" charset="0"/>
+                <a:ea typeface="Unbounded" pitchFamily="34" charset="-122"/>
+                <a:cs typeface="Unbounded" pitchFamily="34" charset="-120"/>
+              </a:rPr>
+              <a:t>Терміни, якими користуватимемось</a:t>
+            </a:r>
+            <a:endParaRPr lang="en-US" sz="2400" dirty="0"/>
+          </a:p>
+        </p:txBody>
+      </p:sp>
+      <p:sp>
+        <p:nvSpPr>
+          <p:cNvPr id="3" name="Text 1"/>
+          <p:cNvSpPr/>
+          <p:nvPr/>
+        </p:nvSpPr>
+        <p:spPr>
+          <a:xfrm>
+            <a:off x="566928" y="1200607"/>
+            <a:ext cx="6839712" cy="256032"/>
+          </a:xfrm>
+          <a:prstGeom prst="rect">
+            <a:avLst/>
+          </a:prstGeom>
+          <a:noFill/>
+          <a:ln/>
+        </p:spPr>
+        <p:txBody>
+          <a:bodyPr wrap="square" lIns="0" tIns="0" rIns="0" bIns="0" rtlCol="0" anchor="t"/>
+          <a:lstStyle/>
+          <a:p>
+            <a:pPr indent="0" marL="0">
+              <a:lnSpc>
+                <a:spcPct val="100000"/>
+              </a:lnSpc>
+              <a:buNone/>
+            </a:pPr>
+            <a:r>
+              <a:rPr lang="en-US" sz="1300" dirty="0">
+                <a:solidFill>
+                  <a:srgbClr val="AFA9BE"/>
                 </a:solidFill>
                 <a:latin typeface="Montserrat" pitchFamily="34" charset="0"/>
                 <a:ea typeface="Montserrat" pitchFamily="34" charset="-122"/>
                 <a:cs typeface="Montserrat" pitchFamily="34" charset="-120"/>
               </a:rPr>
-              <a:t>Терміни, якими користуватимемось</a:t>
-            </a:r>
-            <a:endParaRPr lang="en-US" sz="2400" dirty="0"/>
-          </a:p>
-        </p:txBody>
-      </p:sp>
-      <p:sp>
-        <p:nvSpPr>
-          <p:cNvPr id="3" name="Text 1"/>
-          <p:cNvSpPr/>
-          <p:nvPr/>
-        </p:nvSpPr>
-        <p:spPr>
-          <a:xfrm>
-            <a:off x="566928" y="1005840"/>
-            <a:ext cx="6839712" cy="256032"/>
-          </a:xfrm>
-          <a:prstGeom prst="rect">
-            <a:avLst/>
-          </a:prstGeom>
-          <a:noFill/>
-          <a:ln/>
-        </p:spPr>
-        <p:txBody>
-          <a:bodyPr wrap="square" lIns="0" tIns="0" rIns="0" bIns="0" rtlCol="0" anchor="t"/>
-          <a:lstStyle/>
-          <a:p>
-            <a:pPr indent="0" marL="0">
-              <a:lnSpc>
-                <a:spcPct val="100000"/>
-              </a:lnSpc>
-              <a:buNone/>
-            </a:pPr>
-            <a:r>
-              <a:rPr lang="en-US" sz="1300" dirty="0">
-                <a:solidFill>
-                  <a:srgbClr val="AFA9BE"/>
-                </a:solidFill>
-                <a:latin typeface="Montserrat" pitchFamily="34" charset="0"/>
-                <a:ea typeface="Montserrat" pitchFamily="34" charset="-122"/>
-                <a:cs typeface="Montserrat" pitchFamily="34" charset="-120"/>
-              </a:rPr>
               <a:t>Шість слів сьогоднішнього уроку</a:t>
             </a:r>
             <a:endParaRPr lang="en-US" sz="1300" dirty="0"/>
@@ -16915,7 +16915,7 @@
         </p:nvSpPr>
         <p:spPr>
           <a:xfrm>
-            <a:off x="566928" y="1271016"/>
+            <a:off x="566928" y="1465783"/>
             <a:ext cx="777240" cy="256032"/>
           </a:xfrm>
           <a:prstGeom prst="roundRect">
@@ -16937,7 +16937,7 @@
         </p:nvSpPr>
         <p:spPr>
           <a:xfrm>
-            <a:off x="566928" y="1271016"/>
+            <a:off x="566928" y="1465783"/>
             <a:ext cx="777240" cy="256032"/>
           </a:xfrm>
           <a:prstGeom prst="rect">
@@ -17846,13 +17846,13 @@
               <a:buNone/>
             </a:pPr>
             <a:r>
-              <a:rPr lang="en-US" sz="2400" b="1" dirty="0">
+              <a:rPr lang="en-US" sz="2400" dirty="0">
                 <a:solidFill>
                   <a:srgbClr val="FFFFFF"/>
                 </a:solidFill>
-                <a:latin typeface="Montserrat" pitchFamily="34" charset="0"/>
-                <a:ea typeface="Montserrat" pitchFamily="34" charset="-122"/>
-                <a:cs typeface="Montserrat" pitchFamily="34" charset="-120"/>
+                <a:latin typeface="Unbounded" pitchFamily="34" charset="0"/>
+                <a:ea typeface="Unbounded" pitchFamily="34" charset="-122"/>
+                <a:cs typeface="Unbounded" pitchFamily="34" charset="-120"/>
               </a:rPr>
               <a:t>Чому ручний запуск eval не виживає</a:t>
             </a:r>
@@ -17868,7 +17868,7 @@
         </p:nvSpPr>
         <p:spPr>
           <a:xfrm>
-            <a:off x="1280160" y="1193140"/>
+            <a:off x="1280160" y="1218895"/>
             <a:ext cx="777240" cy="256032"/>
           </a:xfrm>
           <a:prstGeom prst="roundRect">
@@ -17890,7 +17890,7 @@
         </p:nvSpPr>
         <p:spPr>
           <a:xfrm>
-            <a:off x="1280160" y="1193140"/>
+            <a:off x="1280160" y="1218895"/>
             <a:ext cx="777240" cy="256032"/>
           </a:xfrm>
           <a:prstGeom prst="rect">
@@ -18455,13 +18455,13 @@
               <a:buNone/>
             </a:pPr>
             <a:r>
-              <a:rPr lang="en-US" sz="2400" b="1" dirty="0">
+              <a:rPr lang="en-US" sz="2400" dirty="0">
                 <a:solidFill>
                   <a:srgbClr val="FFFFFF"/>
                 </a:solidFill>
-                <a:latin typeface="Montserrat" pitchFamily="34" charset="0"/>
-                <a:ea typeface="Montserrat" pitchFamily="34" charset="-122"/>
-                <a:cs typeface="Montserrat" pitchFamily="34" charset="-120"/>
+                <a:latin typeface="Unbounded" pitchFamily="34" charset="0"/>
+                <a:ea typeface="Unbounded" pitchFamily="34" charset="-122"/>
+                <a:cs typeface="Unbounded" pitchFamily="34" charset="-120"/>
               </a:rPr>
               <a:t>Гейт = ваш eval + exit code + CI</a:t>
             </a:r>
@@ -19458,13 +19458,13 @@
               <a:buNone/>
             </a:pPr>
             <a:r>
-              <a:rPr lang="en-US" sz="2400" b="1" dirty="0">
+              <a:rPr lang="en-US" sz="2400" dirty="0">
                 <a:solidFill>
                   <a:srgbClr val="FFFFFF"/>
                 </a:solidFill>
-                <a:latin typeface="Montserrat" pitchFamily="34" charset="0"/>
-                <a:ea typeface="Montserrat" pitchFamily="34" charset="-122"/>
-                <a:cs typeface="Montserrat" pitchFamily="34" charset="-120"/>
+                <a:latin typeface="Unbounded" pitchFamily="34" charset="0"/>
+                <a:ea typeface="Unbounded" pitchFamily="34" charset="-122"/>
+                <a:cs typeface="Unbounded" pitchFamily="34" charset="-120"/>
               </a:rPr>
               <a:t>Червоний прогін сам по собі merge не блокує</a:t>
             </a:r>
@@ -19480,7 +19480,7 @@
         </p:nvSpPr>
         <p:spPr>
           <a:xfrm>
-            <a:off x="1280160" y="1193140"/>
+            <a:off x="1280160" y="1218895"/>
             <a:ext cx="777240" cy="256032"/>
           </a:xfrm>
           <a:prstGeom prst="roundRect">
@@ -19502,7 +19502,7 @@
         </p:nvSpPr>
         <p:spPr>
           <a:xfrm>
-            <a:off x="1280160" y="1193140"/>
+            <a:off x="1280160" y="1218895"/>
             <a:ext cx="777240" cy="256032"/>
           </a:xfrm>
           <a:prstGeom prst="rect">
@@ -20752,13 +20752,13 @@
               <a:buNone/>
             </a:pPr>
             <a:r>
-              <a:rPr lang="en-US" sz="2400" b="1" dirty="0">
+              <a:rPr lang="en-US" sz="2400" dirty="0">
                 <a:solidFill>
                   <a:srgbClr val="FFFFFF"/>
                 </a:solidFill>
-                <a:latin typeface="Montserrat" pitchFamily="34" charset="0"/>
-                <a:ea typeface="Montserrat" pitchFamily="34" charset="-122"/>
-                <a:cs typeface="Montserrat" pitchFamily="34" charset="-120"/>
+                <a:latin typeface="Unbounded" pitchFamily="34" charset="0"/>
+                <a:ea typeface="Unbounded" pitchFamily="34" charset="-122"/>
+                <a:cs typeface="Unbounded" pitchFamily="34" charset="-120"/>
               </a:rPr>
               <a:t>Розтин eval-gate.yml: кожен крок — граблі</a:t>
             </a:r>
@@ -20774,7 +20774,7 @@
         </p:nvSpPr>
         <p:spPr>
           <a:xfrm>
-            <a:off x="1280160" y="1193140"/>
+            <a:off x="1280160" y="1218895"/>
             <a:ext cx="777240" cy="256032"/>
           </a:xfrm>
           <a:prstGeom prst="roundRect">
@@ -20796,7 +20796,7 @@
         </p:nvSpPr>
         <p:spPr>
           <a:xfrm>
-            <a:off x="1280160" y="1193140"/>
+            <a:off x="1280160" y="1218895"/>
             <a:ext cx="777240" cy="256032"/>
           </a:xfrm>
           <a:prstGeom prst="rect">
@@ -21819,13 +21819,13 @@
               <a:buNone/>
             </a:pPr>
             <a:r>
-              <a:rPr lang="en-US" sz="2400" b="1" dirty="0">
+              <a:rPr lang="en-US" sz="2400" dirty="0">
                 <a:solidFill>
                   <a:srgbClr val="FFFFFF"/>
                 </a:solidFill>
-                <a:latin typeface="Montserrat" pitchFamily="34" charset="0"/>
-                <a:ea typeface="Montserrat" pitchFamily="34" charset="-122"/>
-                <a:cs typeface="Montserrat" pitchFamily="34" charset="-120"/>
+                <a:latin typeface="Unbounded" pitchFamily="34" charset="0"/>
+                <a:ea typeface="Unbounded" pitchFamily="34" charset="-122"/>
+                <a:cs typeface="Unbounded" pitchFamily="34" charset="-120"/>
               </a:rPr>
               <a:t>CI — це інше середовище, і воно вас здивує</a:t>
             </a:r>
@@ -21841,7 +21841,7 @@
         </p:nvSpPr>
         <p:spPr>
           <a:xfrm>
-            <a:off x="1280160" y="1193140"/>
+            <a:off x="1280160" y="1218895"/>
             <a:ext cx="777240" cy="256032"/>
           </a:xfrm>
           <a:prstGeom prst="roundRect">
@@ -21863,7 +21863,7 @@
         </p:nvSpPr>
         <p:spPr>
           <a:xfrm>
-            <a:off x="1280160" y="1193140"/>
+            <a:off x="1280160" y="1218895"/>
             <a:ext cx="777240" cy="256032"/>
           </a:xfrm>
           <a:prstGeom prst="rect">

--- a/docs/decks/L11.pptx
+++ b/docs/decks/L11.pptx
@@ -2465,7 +2465,7 @@
             <a:lvl1pPr>
               <a:defRPr sz="850">
                 <a:solidFill>
-                  <a:srgbClr val="8A82A0"/>
+                  <a:srgbClr val="9A94AA"/>
                 </a:solidFill>
                 <a:latin typeface="Courier New"/>
                 <a:ea typeface="Courier New"/>
@@ -2547,6 +2547,62 @@
 </p:sldLayout>
 </file>
 
+<file path=ppt/slideLayouts/slideLayout3.xml><?xml version="1.0" encoding="utf-8"?>
+<p:sldLayout xmlns:a="http://schemas.openxmlformats.org/drawingml/2006/main" xmlns:r="http://schemas.openxmlformats.org/officeDocument/2006/relationships" xmlns:p="http://schemas.openxmlformats.org/presentationml/2006/main" preserve="1">
+  <p:cSld name="NEO_COVER">
+    <p:bg>
+      <p:bgPr>
+        <a:solidFill>
+          <a:srgbClr val="000000"/>
+        </a:solidFill>
+      </p:bgPr>
+    </p:bg>
+    <p:spTree>
+      <p:nvGrpSpPr>
+        <p:cNvPr id="1" name=""/>
+        <p:cNvGrpSpPr/>
+        <p:nvPr/>
+      </p:nvGrpSpPr>
+      <p:grpSpPr>
+        <a:xfrm>
+          <a:off x="0" y="0"/>
+          <a:ext cx="0" cy="0"/>
+          <a:chOff x="0" y="0"/>
+          <a:chExt cx="0" cy="0"/>
+        </a:xfrm>
+      </p:grpSpPr>
+      <p:pic>
+        <p:nvPicPr>
+          <p:cNvPr id="2" name="Image 0" descr="preencoded.png">    </p:cNvPr>
+          <p:cNvPicPr>
+            <a:picLocks noChangeAspect="1"/>
+          </p:cNvPicPr>
+          <p:nvPr/>
+        </p:nvPicPr>
+        <p:blipFill>
+          <a:blip r:embed="rId1"/>
+          <a:stretch>
+            <a:fillRect/>
+          </a:stretch>
+        </p:blipFill>
+        <p:spPr>
+          <a:xfrm>
+            <a:off x="0" y="0"/>
+            <a:ext cx="12191695" cy="6858000"/>
+          </a:xfrm>
+          <a:prstGeom prst="rect">
+            <a:avLst/>
+          </a:prstGeom>
+        </p:spPr>
+      </p:pic>
+    </p:spTree>
+  </p:cSld>
+  <p:clrMapOvr>
+    <a:masterClrMapping/>
+  </p:clrMapOvr>
+</p:sldLayout>
+</file>
+
 <file path=ppt/slideMasters/slideMaster1.xml><?xml version="1.0" encoding="utf-8"?>
 <p:sldMaster xmlns:a="http://schemas.openxmlformats.org/drawingml/2006/main" xmlns:r="http://schemas.openxmlformats.org/officeDocument/2006/relationships" xmlns:p="http://schemas.openxmlformats.org/presentationml/2006/main">
   <p:cSld>
@@ -2594,7 +2650,7 @@
             <a:lvl1pPr>
               <a:defRPr sz="850">
                 <a:solidFill>
-                  <a:srgbClr val="8A82A0"/>
+                  <a:srgbClr val="9A94AA"/>
                 </a:solidFill>
                 <a:latin typeface="Courier New"/>
                 <a:ea typeface="Courier New"/>
@@ -2618,6 +2674,7 @@
   <p:sldLayoutIdLst>
     <p:sldLayoutId id="2147483649" r:id="rId1"/>
     <p:sldLayoutId id="2147483650" r:id="rId2"/>
+    <p:sldLayoutId id="2147483651" r:id="rId3"/>
   </p:sldLayoutIdLst>
   <p:hf sldNum="0" hdr="0" ftr="0" dt="0"/>
   <p:txStyles>
@@ -2947,7 +3004,7 @@
           </a:prstGeom>
           <a:ln w="12700">
             <a:solidFill>
-              <a:srgbClr val="9B7BE8">
+              <a:srgbClr val="8F72E6">
                 <a:alpha val="24000"/>
               </a:srgbClr>
             </a:solidFill>
@@ -2973,7 +3030,7 @@
           </a:prstGeom>
           <a:ln w="12700">
             <a:solidFill>
-              <a:srgbClr val="9B7BE8">
+              <a:srgbClr val="8F72E6">
                 <a:alpha val="42000"/>
               </a:srgbClr>
             </a:solidFill>
@@ -2999,7 +3056,7 @@
           </a:prstGeom>
           <a:ln w="12700">
             <a:solidFill>
-              <a:srgbClr val="9B7BE8">
+              <a:srgbClr val="8F72E6">
                 <a:alpha val="66000"/>
               </a:srgbClr>
             </a:solidFill>
@@ -3034,7 +3091,7 @@
             <a:r>
               <a:rPr lang="en-US" sz="1200" b="1" spc="300" kern="0" dirty="0">
                 <a:solidFill>
-                  <a:srgbClr val="C9B8FB"/>
+                  <a:srgbClr val="C4B3F5"/>
                 </a:solidFill>
                 <a:latin typeface="Courier New" pitchFamily="34" charset="0"/>
                 <a:ea typeface="Courier New" pitchFamily="34" charset="-122"/>
@@ -3138,7 +3195,7 @@
             <a:r>
               <a:rPr lang="en-US" sz="1500" dirty="0">
                 <a:solidFill>
-                  <a:srgbClr val="C9B8FB"/>
+                  <a:srgbClr val="C4B3F5"/>
                 </a:solidFill>
                 <a:latin typeface="Montserrat" pitchFamily="34" charset="0"/>
                 <a:ea typeface="Montserrat" pitchFamily="34" charset="-122"/>
@@ -3168,7 +3225,7 @@
           </a:prstGeom>
           <a:ln w="12700">
             <a:solidFill>
-              <a:srgbClr val="9B7BE8">
+              <a:srgbClr val="8F72E6">
                 <a:alpha val="60000"/>
               </a:srgbClr>
             </a:solidFill>
@@ -3203,7 +3260,7 @@
             <a:r>
               <a:rPr lang="en-US" sz="900" dirty="0">
                 <a:solidFill>
-                  <a:srgbClr val="C9B8FB"/>
+                  <a:srgbClr val="C4B3F5"/>
                 </a:solidFill>
                 <a:latin typeface="Courier New" pitchFamily="34" charset="0"/>
                 <a:ea typeface="Courier New" pitchFamily="34" charset="-122"/>
@@ -3233,7 +3290,7 @@
           </a:prstGeom>
           <a:ln w="12700">
             <a:solidFill>
-              <a:srgbClr val="9B7BE8">
+              <a:srgbClr val="8F72E6">
                 <a:alpha val="60000"/>
               </a:srgbClr>
             </a:solidFill>
@@ -3268,7 +3325,7 @@
             <a:r>
               <a:rPr lang="en-US" sz="900" dirty="0">
                 <a:solidFill>
-                  <a:srgbClr val="C9B8FB"/>
+                  <a:srgbClr val="C4B3F5"/>
                 </a:solidFill>
                 <a:latin typeface="Courier New" pitchFamily="34" charset="0"/>
                 <a:ea typeface="Courier New" pitchFamily="34" charset="-122"/>
@@ -3298,7 +3355,7 @@
           </a:prstGeom>
           <a:ln w="12700">
             <a:solidFill>
-              <a:srgbClr val="9B7BE8">
+              <a:srgbClr val="8F72E6">
                 <a:alpha val="60000"/>
               </a:srgbClr>
             </a:solidFill>
@@ -3333,7 +3390,7 @@
             <a:r>
               <a:rPr lang="en-US" sz="900" dirty="0">
                 <a:solidFill>
-                  <a:srgbClr val="C9B8FB"/>
+                  <a:srgbClr val="C4B3F5"/>
                 </a:solidFill>
                 <a:latin typeface="Courier New" pitchFamily="34" charset="0"/>
                 <a:ea typeface="Courier New" pitchFamily="34" charset="-122"/>
@@ -3363,7 +3420,7 @@
           </a:prstGeom>
           <a:ln w="12700">
             <a:solidFill>
-              <a:srgbClr val="9B7BE8">
+              <a:srgbClr val="8F72E6">
                 <a:alpha val="60000"/>
               </a:srgbClr>
             </a:solidFill>
@@ -3398,7 +3455,7 @@
             <a:r>
               <a:rPr lang="en-US" sz="900" dirty="0">
                 <a:solidFill>
-                  <a:srgbClr val="C9B8FB"/>
+                  <a:srgbClr val="C4B3F5"/>
                 </a:solidFill>
                 <a:latin typeface="Courier New" pitchFamily="34" charset="0"/>
                 <a:ea typeface="Courier New" pitchFamily="34" charset="-122"/>
@@ -3428,7 +3485,7 @@
           </a:prstGeom>
           <a:ln w="12700">
             <a:solidFill>
-              <a:srgbClr val="9B7BE8">
+              <a:srgbClr val="8F72E6">
                 <a:alpha val="60000"/>
               </a:srgbClr>
             </a:solidFill>
@@ -3463,7 +3520,7 @@
             <a:r>
               <a:rPr lang="en-US" sz="900" dirty="0">
                 <a:solidFill>
-                  <a:srgbClr val="C9B8FB"/>
+                  <a:srgbClr val="C4B3F5"/>
                 </a:solidFill>
                 <a:latin typeface="Courier New" pitchFamily="34" charset="0"/>
                 <a:ea typeface="Courier New" pitchFamily="34" charset="-122"/>
@@ -3588,7 +3645,7 @@
             <a:r>
               <a:rPr lang="en-US" sz="2600" b="1" dirty="0">
                 <a:solidFill>
-                  <a:srgbClr val="C9A6FF"/>
+                  <a:srgbClr val="A98BFF"/>
                 </a:solidFill>
                 <a:latin typeface="Courier New" pitchFamily="34" charset="0"/>
                 <a:ea typeface="Courier New" pitchFamily="34" charset="-122"/>
@@ -3656,9 +3713,14 @@
             </a:avLst>
           </a:prstGeom>
           <a:solidFill>
-            <a:srgbClr val="C9A6FF"/>
+            <a:srgbClr val="1A0B3D"/>
           </a:solidFill>
-          <a:ln/>
+          <a:ln w="12700">
+            <a:solidFill>
+              <a:srgbClr val="5A05F4"/>
+            </a:solidFill>
+            <a:prstDash val="solid"/>
+          </a:ln>
         </p:spPr>
       </p:sp>
       <p:sp>
@@ -3688,7 +3750,7 @@
             <a:r>
               <a:rPr lang="en-US" sz="900" b="1" spc="100" kern="0" dirty="0">
                 <a:solidFill>
-                  <a:srgbClr val="1C1140"/>
+                  <a:srgbClr val="A98BFF"/>
                 </a:solidFill>
                 <a:latin typeface="Courier New" pitchFamily="34" charset="0"/>
                 <a:ea typeface="Courier New" pitchFamily="34" charset="-122"/>
@@ -3741,9 +3803,14 @@
             </a:avLst>
           </a:prstGeom>
           <a:solidFill>
-            <a:srgbClr val="102A20"/>
+            <a:srgbClr val="06180F"/>
           </a:solidFill>
-          <a:ln/>
+          <a:ln w="12700">
+            <a:solidFill>
+              <a:srgbClr val="3FCF8E"/>
+            </a:solidFill>
+            <a:prstDash val="solid"/>
+          </a:ln>
         </p:spPr>
       </p:sp>
       <p:sp>
@@ -3773,7 +3840,7 @@
             <a:r>
               <a:rPr lang="en-US" sz="3000" b="1" dirty="0">
                 <a:solidFill>
-                  <a:srgbClr val="5FD6A0"/>
+                  <a:srgbClr val="3FCF8E"/>
                 </a:solidFill>
                 <a:latin typeface="Montserrat" pitchFamily="34" charset="0"/>
                 <a:ea typeface="Montserrat" pitchFamily="34" charset="-122"/>
@@ -3812,7 +3879,7 @@
             <a:r>
               <a:rPr lang="en-US" sz="1150" dirty="0">
                 <a:solidFill>
-                  <a:srgbClr val="5FD6A0"/>
+                  <a:srgbClr val="C9C4D6"/>
                 </a:solidFill>
                 <a:latin typeface="Montserrat" pitchFamily="34" charset="0"/>
                 <a:ea typeface="Montserrat" pitchFamily="34" charset="-122"/>
@@ -3841,9 +3908,14 @@
             </a:avLst>
           </a:prstGeom>
           <a:solidFill>
-            <a:srgbClr val="2E1418"/>
+            <a:srgbClr val="1A0808"/>
           </a:solidFill>
-          <a:ln/>
+          <a:ln w="12700">
+            <a:solidFill>
+              <a:srgbClr val="FF6B6B"/>
+            </a:solidFill>
+            <a:prstDash val="solid"/>
+          </a:ln>
         </p:spPr>
       </p:sp>
       <p:sp>
@@ -3873,7 +3945,7 @@
             <a:r>
               <a:rPr lang="en-US" sz="3000" b="1" dirty="0">
                 <a:solidFill>
-                  <a:srgbClr val="FF7B7B"/>
+                  <a:srgbClr val="FF6B6B"/>
                 </a:solidFill>
                 <a:latin typeface="Montserrat" pitchFamily="34" charset="0"/>
                 <a:ea typeface="Montserrat" pitchFamily="34" charset="-122"/>
@@ -3912,7 +3984,7 @@
             <a:r>
               <a:rPr lang="en-US" sz="1150" dirty="0">
                 <a:solidFill>
-                  <a:srgbClr val="FF7B7B"/>
+                  <a:srgbClr val="C9C4D6"/>
                 </a:solidFill>
                 <a:latin typeface="Montserrat" pitchFamily="34" charset="0"/>
                 <a:ea typeface="Montserrat" pitchFamily="34" charset="-122"/>
@@ -3941,9 +4013,14 @@
             </a:avLst>
           </a:prstGeom>
           <a:solidFill>
-            <a:srgbClr val="2E1418"/>
+            <a:srgbClr val="1A0808"/>
           </a:solidFill>
-          <a:ln/>
+          <a:ln w="12700">
+            <a:solidFill>
+              <a:srgbClr val="FF6B6B"/>
+            </a:solidFill>
+            <a:prstDash val="solid"/>
+          </a:ln>
         </p:spPr>
       </p:sp>
       <p:sp>
@@ -3973,7 +4050,7 @@
             <a:r>
               <a:rPr lang="en-US" sz="950" b="1" spc="150" kern="0" dirty="0">
                 <a:solidFill>
-                  <a:srgbClr val="FF7B7B"/>
+                  <a:srgbClr val="FF6B6B"/>
                 </a:solidFill>
                 <a:latin typeface="Courier New" pitchFamily="34" charset="0"/>
                 <a:ea typeface="Courier New" pitchFamily="34" charset="-122"/>
@@ -4121,7 +4198,7 @@
             <a:lvl1pPr>
               <a:defRPr sz="850">
                 <a:solidFill>
-                  <a:srgbClr val="8A82A0"/>
+                  <a:srgbClr val="9A94AA"/>
                 </a:solidFill>
                 <a:latin typeface="Courier New"/>
                 <a:ea typeface="Courier New"/>
@@ -4191,7 +4268,7 @@
             <a:r>
               <a:rPr lang="en-US" sz="2600" b="1" dirty="0">
                 <a:solidFill>
-                  <a:srgbClr val="C9A6FF"/>
+                  <a:srgbClr val="A98BFF"/>
                 </a:solidFill>
                 <a:latin typeface="Courier New" pitchFamily="34" charset="0"/>
                 <a:ea typeface="Courier New" pitchFamily="34" charset="-122"/>
@@ -4259,9 +4336,14 @@
             </a:avLst>
           </a:prstGeom>
           <a:solidFill>
-            <a:srgbClr val="C9A6FF"/>
+            <a:srgbClr val="1A0B3D"/>
           </a:solidFill>
-          <a:ln/>
+          <a:ln w="12700">
+            <a:solidFill>
+              <a:srgbClr val="5A05F4"/>
+            </a:solidFill>
+            <a:prstDash val="solid"/>
+          </a:ln>
         </p:spPr>
       </p:sp>
       <p:sp>
@@ -4291,7 +4373,7 @@
             <a:r>
               <a:rPr lang="en-US" sz="900" b="1" spc="100" kern="0" dirty="0">
                 <a:solidFill>
-                  <a:srgbClr val="1C1140"/>
+                  <a:srgbClr val="A98BFF"/>
                 </a:solidFill>
                 <a:latin typeface="Courier New" pitchFamily="34" charset="0"/>
                 <a:ea typeface="Courier New" pitchFamily="34" charset="-122"/>
@@ -4344,9 +4426,14 @@
             </a:avLst>
           </a:prstGeom>
           <a:solidFill>
-            <a:srgbClr val="1C1140"/>
+            <a:srgbClr val="1A0B3D"/>
           </a:solidFill>
-          <a:ln/>
+          <a:ln w="12700">
+            <a:solidFill>
+              <a:srgbClr val="5A05F4"/>
+            </a:solidFill>
+            <a:prstDash val="solid"/>
+          </a:ln>
         </p:spPr>
       </p:sp>
       <p:sp>
@@ -4376,7 +4463,7 @@
             <a:r>
               <a:rPr lang="en-US" sz="1100" b="1" dirty="0">
                 <a:solidFill>
-                  <a:srgbClr val="C9A6FF"/>
+                  <a:srgbClr val="A98BFF"/>
                 </a:solidFill>
                 <a:latin typeface="Courier New" pitchFamily="34" charset="0"/>
                 <a:ea typeface="Courier New" pitchFamily="34" charset="-122"/>
@@ -4405,7 +4492,7 @@
           <a:noFill/>
           <a:ln w="15875">
             <a:solidFill>
-              <a:srgbClr val="9B7BE8"/>
+              <a:srgbClr val="8F72E6"/>
             </a:solidFill>
             <a:prstDash val="solid"/>
           </a:ln>
@@ -4426,7 +4513,7 @@
             <a:avLst/>
           </a:prstGeom>
           <a:solidFill>
-            <a:srgbClr val="9B7BE8"/>
+            <a:srgbClr val="8F72E6"/>
           </a:solidFill>
           <a:ln/>
         </p:spPr>
@@ -4448,11 +4535,11 @@
             </a:avLst>
           </a:prstGeom>
           <a:solidFill>
-            <a:srgbClr val="17141F"/>
+            <a:srgbClr val="000000"/>
           </a:solidFill>
           <a:ln w="12700">
             <a:solidFill>
-              <a:srgbClr val="2E2A3A"/>
+              <a:srgbClr val="5E4F85"/>
             </a:solidFill>
             <a:prstDash val="solid"/>
           </a:ln>
@@ -4514,7 +4601,7 @@
           <a:noFill/>
           <a:ln w="15875">
             <a:solidFill>
-              <a:srgbClr val="9B7BE8"/>
+              <a:srgbClr val="8F72E6"/>
             </a:solidFill>
             <a:prstDash val="solid"/>
           </a:ln>
@@ -4535,7 +4622,7 @@
             <a:avLst/>
           </a:prstGeom>
           <a:solidFill>
-            <a:srgbClr val="9B7BE8"/>
+            <a:srgbClr val="8F72E6"/>
           </a:solidFill>
           <a:ln/>
         </p:spPr>
@@ -4557,11 +4644,11 @@
             </a:avLst>
           </a:prstGeom>
           <a:solidFill>
-            <a:srgbClr val="17141F"/>
+            <a:srgbClr val="000000"/>
           </a:solidFill>
           <a:ln w="12700">
             <a:solidFill>
-              <a:srgbClr val="2E2A3A"/>
+              <a:srgbClr val="5E4F85"/>
             </a:solidFill>
             <a:prstDash val="solid"/>
           </a:ln>
@@ -4633,7 +4720,7 @@
             <a:r>
               <a:rPr lang="en-US" sz="1200" i="1" dirty="0">
                 <a:solidFill>
-                  <a:srgbClr val="AFA9BE"/>
+                  <a:srgbClr val="C9C4D6"/>
                 </a:solidFill>
                 <a:latin typeface="Montserrat" pitchFamily="34" charset="0"/>
                 <a:ea typeface="Montserrat" pitchFamily="34" charset="-122"/>
@@ -4662,11 +4749,11 @@
             </a:avLst>
           </a:prstGeom>
           <a:solidFill>
-            <a:srgbClr val="17141F"/>
+            <a:srgbClr val="000000"/>
           </a:solidFill>
           <a:ln w="12700">
             <a:solidFill>
-              <a:srgbClr val="2E2A3A"/>
+              <a:srgbClr val="5E4F85"/>
             </a:solidFill>
             <a:prstDash val="solid"/>
           </a:ln>
@@ -4738,7 +4825,7 @@
             <a:r>
               <a:rPr lang="en-US" sz="1150" dirty="0">
                 <a:solidFill>
-                  <a:srgbClr val="AFA9BE"/>
+                  <a:srgbClr val="C9C4D6"/>
                 </a:solidFill>
                 <a:latin typeface="Montserrat" pitchFamily="34" charset="0"/>
                 <a:ea typeface="Montserrat" pitchFamily="34" charset="-122"/>
@@ -4767,9 +4854,14 @@
             </a:avLst>
           </a:prstGeom>
           <a:solidFill>
-            <a:srgbClr val="1C1140"/>
+            <a:srgbClr val="1A0B3D"/>
           </a:solidFill>
-          <a:ln/>
+          <a:ln w="12700">
+            <a:solidFill>
+              <a:srgbClr val="5A05F4"/>
+            </a:solidFill>
+            <a:prstDash val="solid"/>
+          </a:ln>
         </p:spPr>
       </p:sp>
       <p:sp>
@@ -4799,7 +4891,7 @@
             <a:r>
               <a:rPr lang="en-US" sz="1350" b="1" dirty="0">
                 <a:solidFill>
-                  <a:srgbClr val="C9A6FF"/>
+                  <a:srgbClr val="A98BFF"/>
                 </a:solidFill>
                 <a:latin typeface="Montserrat" pitchFamily="34" charset="0"/>
                 <a:ea typeface="Montserrat" pitchFamily="34" charset="-122"/>
@@ -4838,7 +4930,7 @@
             <a:r>
               <a:rPr lang="en-US" sz="1150" dirty="0">
                 <a:solidFill>
-                  <a:srgbClr val="FFFFFF"/>
+                  <a:srgbClr val="C9C4D6"/>
                 </a:solidFill>
                 <a:latin typeface="Montserrat" pitchFamily="34" charset="0"/>
                 <a:ea typeface="Montserrat" pitchFamily="34" charset="-122"/>
@@ -4867,11 +4959,11 @@
             </a:avLst>
           </a:prstGeom>
           <a:solidFill>
-            <a:srgbClr val="17141F"/>
+            <a:srgbClr val="000000"/>
           </a:solidFill>
           <a:ln w="12700">
             <a:solidFill>
-              <a:srgbClr val="2E2A3A"/>
+              <a:srgbClr val="5E4F85"/>
             </a:solidFill>
             <a:prstDash val="solid"/>
           </a:ln>
@@ -4943,7 +5035,7 @@
             <a:r>
               <a:rPr lang="en-US" sz="1150" dirty="0">
                 <a:solidFill>
-                  <a:srgbClr val="AFA9BE"/>
+                  <a:srgbClr val="C9C4D6"/>
                 </a:solidFill>
                 <a:latin typeface="Montserrat" pitchFamily="34" charset="0"/>
                 <a:ea typeface="Montserrat" pitchFamily="34" charset="-122"/>
@@ -4972,9 +5064,14 @@
             </a:avLst>
           </a:prstGeom>
           <a:solidFill>
-            <a:srgbClr val="102A20"/>
+            <a:srgbClr val="06180F"/>
           </a:solidFill>
-          <a:ln/>
+          <a:ln w="12700">
+            <a:solidFill>
+              <a:srgbClr val="3FCF8E"/>
+            </a:solidFill>
+            <a:prstDash val="solid"/>
+          </a:ln>
         </p:spPr>
       </p:sp>
       <p:sp>
@@ -5049,7 +5146,7 @@
             <a:lvl1pPr>
               <a:defRPr sz="850">
                 <a:solidFill>
-                  <a:srgbClr val="8A82A0"/>
+                  <a:srgbClr val="9A94AA"/>
                 </a:solidFill>
                 <a:latin typeface="Courier New"/>
                 <a:ea typeface="Courier New"/>
@@ -5119,7 +5216,7 @@
             <a:r>
               <a:rPr lang="en-US" sz="2600" b="1" dirty="0">
                 <a:solidFill>
-                  <a:srgbClr val="C9A6FF"/>
+                  <a:srgbClr val="A98BFF"/>
                 </a:solidFill>
                 <a:latin typeface="Courier New" pitchFamily="34" charset="0"/>
                 <a:ea typeface="Courier New" pitchFamily="34" charset="-122"/>
@@ -5187,9 +5284,14 @@
             </a:avLst>
           </a:prstGeom>
           <a:solidFill>
-            <a:srgbClr val="C9A6FF"/>
+            <a:srgbClr val="1A0B3D"/>
           </a:solidFill>
-          <a:ln/>
+          <a:ln w="12700">
+            <a:solidFill>
+              <a:srgbClr val="5A05F4"/>
+            </a:solidFill>
+            <a:prstDash val="solid"/>
+          </a:ln>
         </p:spPr>
       </p:sp>
       <p:sp>
@@ -5219,7 +5321,7 @@
             <a:r>
               <a:rPr lang="en-US" sz="900" b="1" spc="100" kern="0" dirty="0">
                 <a:solidFill>
-                  <a:srgbClr val="1C1140"/>
+                  <a:srgbClr val="A98BFF"/>
                 </a:solidFill>
                 <a:latin typeface="Courier New" pitchFamily="34" charset="0"/>
                 <a:ea typeface="Courier New" pitchFamily="34" charset="-122"/>
@@ -5272,9 +5374,14 @@
             </a:avLst>
           </a:prstGeom>
           <a:solidFill>
-            <a:srgbClr val="102A20"/>
+            <a:srgbClr val="06180F"/>
           </a:solidFill>
-          <a:ln/>
+          <a:ln w="12700">
+            <a:solidFill>
+              <a:srgbClr val="3FCF8E"/>
+            </a:solidFill>
+            <a:prstDash val="solid"/>
+          </a:ln>
         </p:spPr>
       </p:sp>
       <p:sp>
@@ -5304,7 +5411,7 @@
             <a:r>
               <a:rPr lang="en-US" sz="1450" b="1" dirty="0">
                 <a:solidFill>
-                  <a:srgbClr val="5FD6A0"/>
+                  <a:srgbClr val="3FCF8E"/>
                 </a:solidFill>
                 <a:latin typeface="Montserrat" pitchFamily="34" charset="0"/>
                 <a:ea typeface="Montserrat" pitchFamily="34" charset="-122"/>
@@ -5346,7 +5453,7 @@
             <a:r>
               <a:rPr lang="en-US" sz="1200" dirty="0">
                 <a:solidFill>
-                  <a:srgbClr val="FFFFFF"/>
+                  <a:srgbClr val="C9C4D6"/>
                 </a:solidFill>
                 <a:latin typeface="Montserrat" pitchFamily="34" charset="0"/>
                 <a:ea typeface="Montserrat" pitchFamily="34" charset="-122"/>
@@ -5375,9 +5482,14 @@
             </a:avLst>
           </a:prstGeom>
           <a:solidFill>
-            <a:srgbClr val="1C1140"/>
+            <a:srgbClr val="1A0B3D"/>
           </a:solidFill>
-          <a:ln/>
+          <a:ln w="12700">
+            <a:solidFill>
+              <a:srgbClr val="5A05F4"/>
+            </a:solidFill>
+            <a:prstDash val="solid"/>
+          </a:ln>
         </p:spPr>
       </p:sp>
       <p:sp>
@@ -5407,7 +5519,7 @@
             <a:r>
               <a:rPr lang="en-US" sz="1450" b="1" dirty="0">
                 <a:solidFill>
-                  <a:srgbClr val="C9A6FF"/>
+                  <a:srgbClr val="A98BFF"/>
                 </a:solidFill>
                 <a:latin typeface="Montserrat" pitchFamily="34" charset="0"/>
                 <a:ea typeface="Montserrat" pitchFamily="34" charset="-122"/>
@@ -5449,7 +5561,7 @@
             <a:r>
               <a:rPr lang="en-US" sz="1200" dirty="0">
                 <a:solidFill>
-                  <a:srgbClr val="FFFFFF"/>
+                  <a:srgbClr val="C9C4D6"/>
                 </a:solidFill>
                 <a:latin typeface="Montserrat" pitchFamily="34" charset="0"/>
                 <a:ea typeface="Montserrat" pitchFamily="34" charset="-122"/>
@@ -5478,11 +5590,11 @@
             </a:avLst>
           </a:prstGeom>
           <a:solidFill>
-            <a:srgbClr val="17141F"/>
+            <a:srgbClr val="000000"/>
           </a:solidFill>
           <a:ln w="12700">
             <a:solidFill>
-              <a:srgbClr val="2E2A3A"/>
+              <a:srgbClr val="5E4F85"/>
             </a:solidFill>
             <a:prstDash val="solid"/>
           </a:ln>
@@ -5544,7 +5656,7 @@
           <a:noFill/>
           <a:ln w="15875">
             <a:solidFill>
-              <a:srgbClr val="9B7BE8"/>
+              <a:srgbClr val="8F72E6"/>
             </a:solidFill>
             <a:prstDash val="solid"/>
           </a:ln>
@@ -5565,7 +5677,7 @@
             <a:avLst/>
           </a:prstGeom>
           <a:solidFill>
-            <a:srgbClr val="9B7BE8"/>
+            <a:srgbClr val="8F72E6"/>
           </a:solidFill>
           <a:ln/>
         </p:spPr>
@@ -5587,11 +5699,11 @@
             </a:avLst>
           </a:prstGeom>
           <a:solidFill>
-            <a:srgbClr val="17141F"/>
+            <a:srgbClr val="000000"/>
           </a:solidFill>
           <a:ln w="12700">
             <a:solidFill>
-              <a:srgbClr val="2E2A3A"/>
+              <a:srgbClr val="5E4F85"/>
             </a:solidFill>
             <a:prstDash val="solid"/>
           </a:ln>
@@ -5653,7 +5765,7 @@
           <a:noFill/>
           <a:ln w="15875">
             <a:solidFill>
-              <a:srgbClr val="9B7BE8"/>
+              <a:srgbClr val="8F72E6"/>
             </a:solidFill>
             <a:prstDash val="solid"/>
           </a:ln>
@@ -5674,7 +5786,7 @@
             <a:avLst/>
           </a:prstGeom>
           <a:solidFill>
-            <a:srgbClr val="9B7BE8"/>
+            <a:srgbClr val="8F72E6"/>
           </a:solidFill>
           <a:ln/>
         </p:spPr>
@@ -5696,11 +5808,11 @@
             </a:avLst>
           </a:prstGeom>
           <a:solidFill>
-            <a:srgbClr val="17141F"/>
+            <a:srgbClr val="000000"/>
           </a:solidFill>
           <a:ln w="12700">
             <a:solidFill>
-              <a:srgbClr val="2E2A3A"/>
+              <a:srgbClr val="5E4F85"/>
             </a:solidFill>
             <a:prstDash val="solid"/>
           </a:ln>
@@ -5762,7 +5874,7 @@
           <a:noFill/>
           <a:ln w="15875">
             <a:solidFill>
-              <a:srgbClr val="9B7BE8"/>
+              <a:srgbClr val="8F72E6"/>
             </a:solidFill>
             <a:prstDash val="solid"/>
           </a:ln>
@@ -5783,7 +5895,7 @@
             <a:avLst/>
           </a:prstGeom>
           <a:solidFill>
-            <a:srgbClr val="9B7BE8"/>
+            <a:srgbClr val="8F72E6"/>
           </a:solidFill>
           <a:ln/>
         </p:spPr>
@@ -5805,11 +5917,11 @@
             </a:avLst>
           </a:prstGeom>
           <a:solidFill>
-            <a:srgbClr val="17141F"/>
+            <a:srgbClr val="000000"/>
           </a:solidFill>
           <a:ln w="12700">
             <a:solidFill>
-              <a:srgbClr val="2E2A3A"/>
+              <a:srgbClr val="5E4F85"/>
             </a:solidFill>
             <a:prstDash val="solid"/>
           </a:ln>
@@ -5881,7 +5993,7 @@
             <a:r>
               <a:rPr lang="en-US" sz="1200" i="1" dirty="0">
                 <a:solidFill>
-                  <a:srgbClr val="AFA9BE"/>
+                  <a:srgbClr val="C9C4D6"/>
                 </a:solidFill>
                 <a:latin typeface="Montserrat" pitchFamily="34" charset="0"/>
                 <a:ea typeface="Montserrat" pitchFamily="34" charset="-122"/>
@@ -5910,9 +6022,14 @@
             </a:avLst>
           </a:prstGeom>
           <a:solidFill>
-            <a:srgbClr val="2E1418"/>
+            <a:srgbClr val="1A0808"/>
           </a:solidFill>
-          <a:ln/>
+          <a:ln w="12700">
+            <a:solidFill>
+              <a:srgbClr val="FF6B6B"/>
+            </a:solidFill>
+            <a:prstDash val="solid"/>
+          </a:ln>
         </p:spPr>
       </p:sp>
       <p:sp>
@@ -5942,7 +6059,7 @@
             <a:r>
               <a:rPr lang="en-US" sz="950" b="1" spc="150" kern="0" dirty="0">
                 <a:solidFill>
-                  <a:srgbClr val="FF7B7B"/>
+                  <a:srgbClr val="FF6B6B"/>
                 </a:solidFill>
                 <a:latin typeface="Courier New" pitchFamily="34" charset="0"/>
                 <a:ea typeface="Courier New" pitchFamily="34" charset="-122"/>
@@ -6026,7 +6143,7 @@
             <a:lvl1pPr>
               <a:defRPr sz="850">
                 <a:solidFill>
-                  <a:srgbClr val="8A82A0"/>
+                  <a:srgbClr val="9A94AA"/>
                 </a:solidFill>
                 <a:latin typeface="Courier New"/>
                 <a:ea typeface="Courier New"/>
@@ -6096,7 +6213,7 @@
             <a:r>
               <a:rPr lang="en-US" sz="2600" b="1" dirty="0">
                 <a:solidFill>
-                  <a:srgbClr val="C9A6FF"/>
+                  <a:srgbClr val="A98BFF"/>
                 </a:solidFill>
                 <a:latin typeface="Courier New" pitchFamily="34" charset="0"/>
                 <a:ea typeface="Courier New" pitchFamily="34" charset="-122"/>
@@ -6177,7 +6294,7 @@
             <a:r>
               <a:rPr lang="en-US" sz="1300" dirty="0">
                 <a:solidFill>
-                  <a:srgbClr val="AFA9BE"/>
+                  <a:srgbClr val="C9C4D6"/>
                 </a:solidFill>
                 <a:latin typeface="Montserrat" pitchFamily="34" charset="0"/>
                 <a:ea typeface="Montserrat" pitchFamily="34" charset="-122"/>
@@ -6206,9 +6323,14 @@
             </a:avLst>
           </a:prstGeom>
           <a:solidFill>
-            <a:srgbClr val="C9A6FF"/>
+            <a:srgbClr val="1A0B3D"/>
           </a:solidFill>
-          <a:ln/>
+          <a:ln w="12700">
+            <a:solidFill>
+              <a:srgbClr val="5A05F4"/>
+            </a:solidFill>
+            <a:prstDash val="solid"/>
+          </a:ln>
         </p:spPr>
       </p:sp>
       <p:sp>
@@ -6238,7 +6360,7 @@
             <a:r>
               <a:rPr lang="en-US" sz="900" b="1" spc="100" kern="0" dirty="0">
                 <a:solidFill>
-                  <a:srgbClr val="1C1140"/>
+                  <a:srgbClr val="A98BFF"/>
                 </a:solidFill>
                 <a:latin typeface="Courier New" pitchFamily="34" charset="0"/>
                 <a:ea typeface="Courier New" pitchFamily="34" charset="-122"/>
@@ -6312,7 +6434,7 @@
                       <a:r>
                         <a:rPr lang="en-US" sz="900" b="1" spc="100" kern="0" dirty="0">
                           <a:solidFill>
-                            <a:srgbClr val="AFA9BE"/>
+                            <a:srgbClr val="C9C4D6"/>
                           </a:solidFill>
                           <a:latin typeface="Courier New" pitchFamily="34" charset="0"/>
                           <a:ea typeface="Courier New" pitchFamily="34" charset="-122"/>
@@ -6330,7 +6452,7 @@
                   <a:tcPr marL="73152" marR="73152" marT="73152" marB="73152" anchor="ctr">
                     <a:lnL w="6350" cap="flat" cmpd="sng" algn="ctr">
                       <a:solidFill>
-                        <a:srgbClr val="2E2A3A"/>
+                        <a:srgbClr val="5E4F85"/>
                       </a:solidFill>
                       <a:prstDash val="solid"/>
                       <a:round/>
@@ -6339,7 +6461,7 @@
                     </a:lnL>
                     <a:lnR w="6350" cap="flat" cmpd="sng" algn="ctr">
                       <a:solidFill>
-                        <a:srgbClr val="2E2A3A"/>
+                        <a:srgbClr val="5E4F85"/>
                       </a:solidFill>
                       <a:prstDash val="solid"/>
                       <a:round/>
@@ -6348,7 +6470,7 @@
                     </a:lnR>
                     <a:lnT w="6350" cap="flat" cmpd="sng" algn="ctr">
                       <a:solidFill>
-                        <a:srgbClr val="2E2A3A"/>
+                        <a:srgbClr val="5E4F85"/>
                       </a:solidFill>
                       <a:prstDash val="solid"/>
                       <a:round/>
@@ -6357,7 +6479,7 @@
                     </a:lnT>
                     <a:lnB w="6350" cap="flat" cmpd="sng" algn="ctr">
                       <a:solidFill>
-                        <a:srgbClr val="2E2A3A"/>
+                        <a:srgbClr val="5E4F85"/>
                       </a:solidFill>
                       <a:prstDash val="solid"/>
                       <a:round/>
@@ -6365,7 +6487,7 @@
                       <a:tailEnd type="none" w="med" len="med"/>
                     </a:lnB>
                     <a:solidFill>
-                      <a:srgbClr val="1F1B2A"/>
+                      <a:srgbClr val="1A0B3D"/>
                     </a:solidFill>
                   </a:tcPr>
                 </a:tc>
@@ -6380,7 +6502,7 @@
                       <a:r>
                         <a:rPr lang="en-US" sz="900" b="1" spc="100" kern="0" dirty="0">
                           <a:solidFill>
-                            <a:srgbClr val="AFA9BE"/>
+                            <a:srgbClr val="C9C4D6"/>
                           </a:solidFill>
                           <a:latin typeface="Courier New" pitchFamily="34" charset="0"/>
                           <a:ea typeface="Courier New" pitchFamily="34" charset="-122"/>
@@ -6398,7 +6520,7 @@
                   <a:tcPr marL="73152" marR="73152" marT="73152" marB="73152" anchor="ctr">
                     <a:lnL w="6350" cap="flat" cmpd="sng" algn="ctr">
                       <a:solidFill>
-                        <a:srgbClr val="2E2A3A"/>
+                        <a:srgbClr val="5E4F85"/>
                       </a:solidFill>
                       <a:prstDash val="solid"/>
                       <a:round/>
@@ -6407,7 +6529,7 @@
                     </a:lnL>
                     <a:lnR w="6350" cap="flat" cmpd="sng" algn="ctr">
                       <a:solidFill>
-                        <a:srgbClr val="2E2A3A"/>
+                        <a:srgbClr val="5E4F85"/>
                       </a:solidFill>
                       <a:prstDash val="solid"/>
                       <a:round/>
@@ -6416,7 +6538,7 @@
                     </a:lnR>
                     <a:lnT w="6350" cap="flat" cmpd="sng" algn="ctr">
                       <a:solidFill>
-                        <a:srgbClr val="2E2A3A"/>
+                        <a:srgbClr val="5E4F85"/>
                       </a:solidFill>
                       <a:prstDash val="solid"/>
                       <a:round/>
@@ -6425,7 +6547,7 @@
                     </a:lnT>
                     <a:lnB w="6350" cap="flat" cmpd="sng" algn="ctr">
                       <a:solidFill>
-                        <a:srgbClr val="2E2A3A"/>
+                        <a:srgbClr val="5E4F85"/>
                       </a:solidFill>
                       <a:prstDash val="solid"/>
                       <a:round/>
@@ -6433,7 +6555,7 @@
                       <a:tailEnd type="none" w="med" len="med"/>
                     </a:lnB>
                     <a:solidFill>
-                      <a:srgbClr val="1F1B2A"/>
+                      <a:srgbClr val="1A0B3D"/>
                     </a:solidFill>
                   </a:tcPr>
                 </a:tc>
@@ -6468,7 +6590,7 @@
                   <a:tcPr marL="73152" marR="73152" marT="73152" marB="73152" anchor="ctr">
                     <a:lnL w="6350" cap="flat" cmpd="sng" algn="ctr">
                       <a:solidFill>
-                        <a:srgbClr val="2E2A3A"/>
+                        <a:srgbClr val="5E4F85"/>
                       </a:solidFill>
                       <a:prstDash val="solid"/>
                       <a:round/>
@@ -6477,7 +6599,7 @@
                     </a:lnL>
                     <a:lnR w="6350" cap="flat" cmpd="sng" algn="ctr">
                       <a:solidFill>
-                        <a:srgbClr val="2E2A3A"/>
+                        <a:srgbClr val="5E4F85"/>
                       </a:solidFill>
                       <a:prstDash val="solid"/>
                       <a:round/>
@@ -6486,7 +6608,7 @@
                     </a:lnR>
                     <a:lnT w="6350" cap="flat" cmpd="sng" algn="ctr">
                       <a:solidFill>
-                        <a:srgbClr val="2E2A3A"/>
+                        <a:srgbClr val="5E4F85"/>
                       </a:solidFill>
                       <a:prstDash val="solid"/>
                       <a:round/>
@@ -6495,7 +6617,7 @@
                     </a:lnT>
                     <a:lnB w="6350" cap="flat" cmpd="sng" algn="ctr">
                       <a:solidFill>
-                        <a:srgbClr val="2E2A3A"/>
+                        <a:srgbClr val="5E4F85"/>
                       </a:solidFill>
                       <a:prstDash val="solid"/>
                       <a:round/>
@@ -6503,7 +6625,7 @@
                       <a:tailEnd type="none" w="med" len="med"/>
                     </a:lnB>
                     <a:solidFill>
-                      <a:srgbClr val="17141F"/>
+                      <a:srgbClr val="000000"/>
                     </a:solidFill>
                   </a:tcPr>
                 </a:tc>
@@ -6536,7 +6658,7 @@
                   <a:tcPr marL="73152" marR="73152" marT="73152" marB="73152" anchor="ctr">
                     <a:lnL w="6350" cap="flat" cmpd="sng" algn="ctr">
                       <a:solidFill>
-                        <a:srgbClr val="2E2A3A"/>
+                        <a:srgbClr val="5E4F85"/>
                       </a:solidFill>
                       <a:prstDash val="solid"/>
                       <a:round/>
@@ -6545,7 +6667,7 @@
                     </a:lnL>
                     <a:lnR w="6350" cap="flat" cmpd="sng" algn="ctr">
                       <a:solidFill>
-                        <a:srgbClr val="2E2A3A"/>
+                        <a:srgbClr val="5E4F85"/>
                       </a:solidFill>
                       <a:prstDash val="solid"/>
                       <a:round/>
@@ -6554,7 +6676,7 @@
                     </a:lnR>
                     <a:lnT w="6350" cap="flat" cmpd="sng" algn="ctr">
                       <a:solidFill>
-                        <a:srgbClr val="2E2A3A"/>
+                        <a:srgbClr val="5E4F85"/>
                       </a:solidFill>
                       <a:prstDash val="solid"/>
                       <a:round/>
@@ -6563,7 +6685,7 @@
                     </a:lnT>
                     <a:lnB w="6350" cap="flat" cmpd="sng" algn="ctr">
                       <a:solidFill>
-                        <a:srgbClr val="2E2A3A"/>
+                        <a:srgbClr val="5E4F85"/>
                       </a:solidFill>
                       <a:prstDash val="solid"/>
                       <a:round/>
@@ -6571,7 +6693,7 @@
                       <a:tailEnd type="none" w="med" len="med"/>
                     </a:lnB>
                     <a:solidFill>
-                      <a:srgbClr val="17141F"/>
+                      <a:srgbClr val="000000"/>
                     </a:solidFill>
                   </a:tcPr>
                 </a:tc>
@@ -6606,7 +6728,7 @@
                   <a:tcPr marL="73152" marR="73152" marT="73152" marB="73152" anchor="ctr">
                     <a:lnL w="6350" cap="flat" cmpd="sng" algn="ctr">
                       <a:solidFill>
-                        <a:srgbClr val="2E2A3A"/>
+                        <a:srgbClr val="5E4F85"/>
                       </a:solidFill>
                       <a:prstDash val="solid"/>
                       <a:round/>
@@ -6615,7 +6737,7 @@
                     </a:lnL>
                     <a:lnR w="6350" cap="flat" cmpd="sng" algn="ctr">
                       <a:solidFill>
-                        <a:srgbClr val="2E2A3A"/>
+                        <a:srgbClr val="5E4F85"/>
                       </a:solidFill>
                       <a:prstDash val="solid"/>
                       <a:round/>
@@ -6624,7 +6746,7 @@
                     </a:lnR>
                     <a:lnT w="6350" cap="flat" cmpd="sng" algn="ctr">
                       <a:solidFill>
-                        <a:srgbClr val="2E2A3A"/>
+                        <a:srgbClr val="5E4F85"/>
                       </a:solidFill>
                       <a:prstDash val="solid"/>
                       <a:round/>
@@ -6633,7 +6755,7 @@
                     </a:lnT>
                     <a:lnB w="6350" cap="flat" cmpd="sng" algn="ctr">
                       <a:solidFill>
-                        <a:srgbClr val="2E2A3A"/>
+                        <a:srgbClr val="5E4F85"/>
                       </a:solidFill>
                       <a:prstDash val="solid"/>
                       <a:round/>
@@ -6641,7 +6763,7 @@
                       <a:tailEnd type="none" w="med" len="med"/>
                     </a:lnB>
                     <a:solidFill>
-                      <a:srgbClr val="17141F"/>
+                      <a:srgbClr val="000000"/>
                     </a:solidFill>
                   </a:tcPr>
                 </a:tc>
@@ -6674,7 +6796,7 @@
                   <a:tcPr marL="73152" marR="73152" marT="73152" marB="73152" anchor="ctr">
                     <a:lnL w="6350" cap="flat" cmpd="sng" algn="ctr">
                       <a:solidFill>
-                        <a:srgbClr val="2E2A3A"/>
+                        <a:srgbClr val="5E4F85"/>
                       </a:solidFill>
                       <a:prstDash val="solid"/>
                       <a:round/>
@@ -6683,7 +6805,7 @@
                     </a:lnL>
                     <a:lnR w="6350" cap="flat" cmpd="sng" algn="ctr">
                       <a:solidFill>
-                        <a:srgbClr val="2E2A3A"/>
+                        <a:srgbClr val="5E4F85"/>
                       </a:solidFill>
                       <a:prstDash val="solid"/>
                       <a:round/>
@@ -6692,7 +6814,7 @@
                     </a:lnR>
                     <a:lnT w="6350" cap="flat" cmpd="sng" algn="ctr">
                       <a:solidFill>
-                        <a:srgbClr val="2E2A3A"/>
+                        <a:srgbClr val="5E4F85"/>
                       </a:solidFill>
                       <a:prstDash val="solid"/>
                       <a:round/>
@@ -6701,7 +6823,7 @@
                     </a:lnT>
                     <a:lnB w="6350" cap="flat" cmpd="sng" algn="ctr">
                       <a:solidFill>
-                        <a:srgbClr val="2E2A3A"/>
+                        <a:srgbClr val="5E4F85"/>
                       </a:solidFill>
                       <a:prstDash val="solid"/>
                       <a:round/>
@@ -6709,7 +6831,7 @@
                       <a:tailEnd type="none" w="med" len="med"/>
                     </a:lnB>
                     <a:solidFill>
-                      <a:srgbClr val="17141F"/>
+                      <a:srgbClr val="000000"/>
                     </a:solidFill>
                   </a:tcPr>
                 </a:tc>
@@ -6744,7 +6866,7 @@
                   <a:tcPr marL="73152" marR="73152" marT="73152" marB="73152" anchor="ctr">
                     <a:lnL w="6350" cap="flat" cmpd="sng" algn="ctr">
                       <a:solidFill>
-                        <a:srgbClr val="2E2A3A"/>
+                        <a:srgbClr val="5E4F85"/>
                       </a:solidFill>
                       <a:prstDash val="solid"/>
                       <a:round/>
@@ -6753,7 +6875,7 @@
                     </a:lnL>
                     <a:lnR w="6350" cap="flat" cmpd="sng" algn="ctr">
                       <a:solidFill>
-                        <a:srgbClr val="2E2A3A"/>
+                        <a:srgbClr val="5E4F85"/>
                       </a:solidFill>
                       <a:prstDash val="solid"/>
                       <a:round/>
@@ -6762,7 +6884,7 @@
                     </a:lnR>
                     <a:lnT w="6350" cap="flat" cmpd="sng" algn="ctr">
                       <a:solidFill>
-                        <a:srgbClr val="2E2A3A"/>
+                        <a:srgbClr val="5E4F85"/>
                       </a:solidFill>
                       <a:prstDash val="solid"/>
                       <a:round/>
@@ -6771,7 +6893,7 @@
                     </a:lnT>
                     <a:lnB w="6350" cap="flat" cmpd="sng" algn="ctr">
                       <a:solidFill>
-                        <a:srgbClr val="2E2A3A"/>
+                        <a:srgbClr val="5E4F85"/>
                       </a:solidFill>
                       <a:prstDash val="solid"/>
                       <a:round/>
@@ -6779,7 +6901,7 @@
                       <a:tailEnd type="none" w="med" len="med"/>
                     </a:lnB>
                     <a:solidFill>
-                      <a:srgbClr val="17141F"/>
+                      <a:srgbClr val="000000"/>
                     </a:solidFill>
                   </a:tcPr>
                 </a:tc>
@@ -6812,7 +6934,7 @@
                   <a:tcPr marL="73152" marR="73152" marT="73152" marB="73152" anchor="ctr">
                     <a:lnL w="6350" cap="flat" cmpd="sng" algn="ctr">
                       <a:solidFill>
-                        <a:srgbClr val="2E2A3A"/>
+                        <a:srgbClr val="5E4F85"/>
                       </a:solidFill>
                       <a:prstDash val="solid"/>
                       <a:round/>
@@ -6821,7 +6943,7 @@
                     </a:lnL>
                     <a:lnR w="6350" cap="flat" cmpd="sng" algn="ctr">
                       <a:solidFill>
-                        <a:srgbClr val="2E2A3A"/>
+                        <a:srgbClr val="5E4F85"/>
                       </a:solidFill>
                       <a:prstDash val="solid"/>
                       <a:round/>
@@ -6830,7 +6952,7 @@
                     </a:lnR>
                     <a:lnT w="6350" cap="flat" cmpd="sng" algn="ctr">
                       <a:solidFill>
-                        <a:srgbClr val="2E2A3A"/>
+                        <a:srgbClr val="5E4F85"/>
                       </a:solidFill>
                       <a:prstDash val="solid"/>
                       <a:round/>
@@ -6839,7 +6961,7 @@
                     </a:lnT>
                     <a:lnB w="6350" cap="flat" cmpd="sng" algn="ctr">
                       <a:solidFill>
-                        <a:srgbClr val="2E2A3A"/>
+                        <a:srgbClr val="5E4F85"/>
                       </a:solidFill>
                       <a:prstDash val="solid"/>
                       <a:round/>
@@ -6847,7 +6969,7 @@
                       <a:tailEnd type="none" w="med" len="med"/>
                     </a:lnB>
                     <a:solidFill>
-                      <a:srgbClr val="17141F"/>
+                      <a:srgbClr val="000000"/>
                     </a:solidFill>
                   </a:tcPr>
                 </a:tc>
@@ -6882,7 +7004,7 @@
                   <a:tcPr marL="73152" marR="73152" marT="73152" marB="73152" anchor="ctr">
                     <a:lnL w="6350" cap="flat" cmpd="sng" algn="ctr">
                       <a:solidFill>
-                        <a:srgbClr val="2E2A3A"/>
+                        <a:srgbClr val="5E4F85"/>
                       </a:solidFill>
                       <a:prstDash val="solid"/>
                       <a:round/>
@@ -6891,7 +7013,7 @@
                     </a:lnL>
                     <a:lnR w="6350" cap="flat" cmpd="sng" algn="ctr">
                       <a:solidFill>
-                        <a:srgbClr val="2E2A3A"/>
+                        <a:srgbClr val="5E4F85"/>
                       </a:solidFill>
                       <a:prstDash val="solid"/>
                       <a:round/>
@@ -6900,7 +7022,7 @@
                     </a:lnR>
                     <a:lnT w="6350" cap="flat" cmpd="sng" algn="ctr">
                       <a:solidFill>
-                        <a:srgbClr val="2E2A3A"/>
+                        <a:srgbClr val="5E4F85"/>
                       </a:solidFill>
                       <a:prstDash val="solid"/>
                       <a:round/>
@@ -6909,7 +7031,7 @@
                     </a:lnT>
                     <a:lnB w="6350" cap="flat" cmpd="sng" algn="ctr">
                       <a:solidFill>
-                        <a:srgbClr val="2E2A3A"/>
+                        <a:srgbClr val="5E4F85"/>
                       </a:solidFill>
                       <a:prstDash val="solid"/>
                       <a:round/>
@@ -6917,7 +7039,7 @@
                       <a:tailEnd type="none" w="med" len="med"/>
                     </a:lnB>
                     <a:solidFill>
-                      <a:srgbClr val="17141F"/>
+                      <a:srgbClr val="000000"/>
                     </a:solidFill>
                   </a:tcPr>
                 </a:tc>
@@ -6950,7 +7072,7 @@
                   <a:tcPr marL="73152" marR="73152" marT="73152" marB="73152" anchor="ctr">
                     <a:lnL w="6350" cap="flat" cmpd="sng" algn="ctr">
                       <a:solidFill>
-                        <a:srgbClr val="2E2A3A"/>
+                        <a:srgbClr val="5E4F85"/>
                       </a:solidFill>
                       <a:prstDash val="solid"/>
                       <a:round/>
@@ -6959,7 +7081,7 @@
                     </a:lnL>
                     <a:lnR w="6350" cap="flat" cmpd="sng" algn="ctr">
                       <a:solidFill>
-                        <a:srgbClr val="2E2A3A"/>
+                        <a:srgbClr val="5E4F85"/>
                       </a:solidFill>
                       <a:prstDash val="solid"/>
                       <a:round/>
@@ -6968,7 +7090,7 @@
                     </a:lnR>
                     <a:lnT w="6350" cap="flat" cmpd="sng" algn="ctr">
                       <a:solidFill>
-                        <a:srgbClr val="2E2A3A"/>
+                        <a:srgbClr val="5E4F85"/>
                       </a:solidFill>
                       <a:prstDash val="solid"/>
                       <a:round/>
@@ -6977,7 +7099,7 @@
                     </a:lnT>
                     <a:lnB w="6350" cap="flat" cmpd="sng" algn="ctr">
                       <a:solidFill>
-                        <a:srgbClr val="2E2A3A"/>
+                        <a:srgbClr val="5E4F85"/>
                       </a:solidFill>
                       <a:prstDash val="solid"/>
                       <a:round/>
@@ -6985,7 +7107,7 @@
                       <a:tailEnd type="none" w="med" len="med"/>
                     </a:lnB>
                     <a:solidFill>
-                      <a:srgbClr val="17141F"/>
+                      <a:srgbClr val="000000"/>
                     </a:solidFill>
                   </a:tcPr>
                 </a:tc>
@@ -7002,7 +7124,7 @@
                       <a:r>
                         <a:rPr lang="en-US" sz="1150" b="1" dirty="0">
                           <a:solidFill>
-                            <a:srgbClr val="FF7B7B"/>
+                            <a:srgbClr val="FF6B6B"/>
                           </a:solidFill>
                           <a:latin typeface="Montserrat" pitchFamily="34" charset="0"/>
                           <a:ea typeface="Montserrat" pitchFamily="34" charset="-122"/>
@@ -7020,7 +7142,7 @@
                   <a:tcPr marL="73152" marR="73152" marT="73152" marB="73152" anchor="ctr">
                     <a:lnL w="6350" cap="flat" cmpd="sng" algn="ctr">
                       <a:solidFill>
-                        <a:srgbClr val="2E2A3A"/>
+                        <a:srgbClr val="5E4F85"/>
                       </a:solidFill>
                       <a:prstDash val="solid"/>
                       <a:round/>
@@ -7029,7 +7151,7 @@
                     </a:lnL>
                     <a:lnR w="6350" cap="flat" cmpd="sng" algn="ctr">
                       <a:solidFill>
-                        <a:srgbClr val="2E2A3A"/>
+                        <a:srgbClr val="5E4F85"/>
                       </a:solidFill>
                       <a:prstDash val="solid"/>
                       <a:round/>
@@ -7038,7 +7160,7 @@
                     </a:lnR>
                     <a:lnT w="6350" cap="flat" cmpd="sng" algn="ctr">
                       <a:solidFill>
-                        <a:srgbClr val="2E2A3A"/>
+                        <a:srgbClr val="5E4F85"/>
                       </a:solidFill>
                       <a:prstDash val="solid"/>
                       <a:round/>
@@ -7047,7 +7169,7 @@
                     </a:lnT>
                     <a:lnB w="6350" cap="flat" cmpd="sng" algn="ctr">
                       <a:solidFill>
-                        <a:srgbClr val="2E2A3A"/>
+                        <a:srgbClr val="5E4F85"/>
                       </a:solidFill>
                       <a:prstDash val="solid"/>
                       <a:round/>
@@ -7055,7 +7177,7 @@
                       <a:tailEnd type="none" w="med" len="med"/>
                     </a:lnB>
                     <a:solidFill>
-                      <a:srgbClr val="2E1418"/>
+                      <a:srgbClr val="1A0808"/>
                     </a:solidFill>
                   </a:tcPr>
                 </a:tc>
@@ -7088,7 +7210,7 @@
                   <a:tcPr marL="73152" marR="73152" marT="73152" marB="73152" anchor="ctr">
                     <a:lnL w="6350" cap="flat" cmpd="sng" algn="ctr">
                       <a:solidFill>
-                        <a:srgbClr val="2E2A3A"/>
+                        <a:srgbClr val="5E4F85"/>
                       </a:solidFill>
                       <a:prstDash val="solid"/>
                       <a:round/>
@@ -7097,7 +7219,7 @@
                     </a:lnL>
                     <a:lnR w="6350" cap="flat" cmpd="sng" algn="ctr">
                       <a:solidFill>
-                        <a:srgbClr val="2E2A3A"/>
+                        <a:srgbClr val="5E4F85"/>
                       </a:solidFill>
                       <a:prstDash val="solid"/>
                       <a:round/>
@@ -7106,7 +7228,7 @@
                     </a:lnR>
                     <a:lnT w="6350" cap="flat" cmpd="sng" algn="ctr">
                       <a:solidFill>
-                        <a:srgbClr val="2E2A3A"/>
+                        <a:srgbClr val="5E4F85"/>
                       </a:solidFill>
                       <a:prstDash val="solid"/>
                       <a:round/>
@@ -7115,7 +7237,7 @@
                     </a:lnT>
                     <a:lnB w="6350" cap="flat" cmpd="sng" algn="ctr">
                       <a:solidFill>
-                        <a:srgbClr val="2E2A3A"/>
+                        <a:srgbClr val="5E4F85"/>
                       </a:solidFill>
                       <a:prstDash val="solid"/>
                       <a:round/>
@@ -7123,7 +7245,7 @@
                       <a:tailEnd type="none" w="med" len="med"/>
                     </a:lnB>
                     <a:solidFill>
-                      <a:srgbClr val="2E1418"/>
+                      <a:srgbClr val="1A0808"/>
                     </a:solidFill>
                   </a:tcPr>
                 </a:tc>
@@ -7149,9 +7271,14 @@
             </a:avLst>
           </a:prstGeom>
           <a:solidFill>
-            <a:srgbClr val="102A20"/>
+            <a:srgbClr val="06180F"/>
           </a:solidFill>
-          <a:ln/>
+          <a:ln w="12700">
+            <a:solidFill>
+              <a:srgbClr val="3FCF8E"/>
+            </a:solidFill>
+            <a:prstDash val="solid"/>
+          </a:ln>
         </p:spPr>
       </p:sp>
       <p:sp>
@@ -7181,7 +7308,7 @@
             <a:r>
               <a:rPr lang="en-US" sz="950" b="1" spc="150" kern="0" dirty="0">
                 <a:solidFill>
-                  <a:srgbClr val="5FD6A0"/>
+                  <a:srgbClr val="3FCF8E"/>
                 </a:solidFill>
                 <a:latin typeface="Courier New" pitchFamily="34" charset="0"/>
                 <a:ea typeface="Courier New" pitchFamily="34" charset="-122"/>
@@ -7265,7 +7392,7 @@
             <a:lvl1pPr>
               <a:defRPr sz="850">
                 <a:solidFill>
-                  <a:srgbClr val="8A82A0"/>
+                  <a:srgbClr val="9A94AA"/>
                 </a:solidFill>
                 <a:latin typeface="Courier New"/>
                 <a:ea typeface="Courier New"/>
@@ -7335,7 +7462,7 @@
             <a:r>
               <a:rPr lang="en-US" sz="2600" b="1" dirty="0">
                 <a:solidFill>
-                  <a:srgbClr val="C9A6FF"/>
+                  <a:srgbClr val="A98BFF"/>
                 </a:solidFill>
                 <a:latin typeface="Courier New" pitchFamily="34" charset="0"/>
                 <a:ea typeface="Courier New" pitchFamily="34" charset="-122"/>
@@ -7403,9 +7530,14 @@
             </a:avLst>
           </a:prstGeom>
           <a:solidFill>
-            <a:srgbClr val="C9A6FF"/>
+            <a:srgbClr val="1A0B3D"/>
           </a:solidFill>
-          <a:ln/>
+          <a:ln w="12700">
+            <a:solidFill>
+              <a:srgbClr val="5A05F4"/>
+            </a:solidFill>
+            <a:prstDash val="solid"/>
+          </a:ln>
         </p:spPr>
       </p:sp>
       <p:sp>
@@ -7435,7 +7567,7 @@
             <a:r>
               <a:rPr lang="en-US" sz="900" b="1" spc="100" kern="0" dirty="0">
                 <a:solidFill>
-                  <a:srgbClr val="1C1140"/>
+                  <a:srgbClr val="A98BFF"/>
                 </a:solidFill>
                 <a:latin typeface="Courier New" pitchFamily="34" charset="0"/>
                 <a:ea typeface="Courier New" pitchFamily="34" charset="-122"/>
@@ -7464,9 +7596,14 @@
             </a:avLst>
           </a:prstGeom>
           <a:solidFill>
-            <a:srgbClr val="2A2010"/>
+            <a:srgbClr val="000000"/>
           </a:solidFill>
-          <a:ln/>
+          <a:ln w="12700">
+            <a:solidFill>
+              <a:srgbClr val="5E4F85"/>
+            </a:solidFill>
+            <a:prstDash val="solid"/>
+          </a:ln>
         </p:spPr>
       </p:sp>
       <p:sp>
@@ -7496,7 +7633,7 @@
             <a:r>
               <a:rPr lang="en-US" sz="900" b="1" spc="100" kern="0" dirty="0">
                 <a:solidFill>
-                  <a:srgbClr val="E8A857"/>
+                  <a:srgbClr val="C9C4D6"/>
                 </a:solidFill>
                 <a:latin typeface="Courier New" pitchFamily="34" charset="0"/>
                 <a:ea typeface="Courier New" pitchFamily="34" charset="-122"/>
@@ -7549,9 +7686,14 @@
             </a:avLst>
           </a:prstGeom>
           <a:solidFill>
-            <a:srgbClr val="102A20"/>
+            <a:srgbClr val="06180F"/>
           </a:solidFill>
-          <a:ln/>
+          <a:ln w="12700">
+            <a:solidFill>
+              <a:srgbClr val="3FCF8E"/>
+            </a:solidFill>
+            <a:prstDash val="solid"/>
+          </a:ln>
         </p:spPr>
       </p:sp>
       <p:sp>
@@ -7581,7 +7723,7 @@
             <a:r>
               <a:rPr lang="en-US" sz="1150" b="1" dirty="0">
                 <a:solidFill>
-                  <a:srgbClr val="5FD6A0"/>
+                  <a:srgbClr val="3FCF8E"/>
                 </a:solidFill>
                 <a:latin typeface="Courier New" pitchFamily="34" charset="0"/>
                 <a:ea typeface="Courier New" pitchFamily="34" charset="-122"/>
@@ -7610,7 +7752,7 @@
           <a:noFill/>
           <a:ln w="15875">
             <a:solidFill>
-              <a:srgbClr val="9B7BE8"/>
+              <a:srgbClr val="8F72E6"/>
             </a:solidFill>
             <a:prstDash val="solid"/>
           </a:ln>
@@ -7631,7 +7773,7 @@
             <a:avLst/>
           </a:prstGeom>
           <a:solidFill>
-            <a:srgbClr val="9B7BE8"/>
+            <a:srgbClr val="8F72E6"/>
           </a:solidFill>
           <a:ln/>
         </p:spPr>
@@ -7653,9 +7795,14 @@
             </a:avLst>
           </a:prstGeom>
           <a:solidFill>
-            <a:srgbClr val="2A2010"/>
+            <a:srgbClr val="0B1A38"/>
           </a:solidFill>
-          <a:ln/>
+          <a:ln w="12700">
+            <a:solidFill>
+              <a:srgbClr val="6BA0F8"/>
+            </a:solidFill>
+            <a:prstDash val="solid"/>
+          </a:ln>
         </p:spPr>
       </p:sp>
       <p:sp>
@@ -7685,7 +7832,7 @@
             <a:r>
               <a:rPr lang="en-US" sz="1150" b="1" dirty="0">
                 <a:solidFill>
-                  <a:srgbClr val="E8A857"/>
+                  <a:srgbClr val="6BA0F8"/>
                 </a:solidFill>
                 <a:latin typeface="Courier New" pitchFamily="34" charset="0"/>
                 <a:ea typeface="Courier New" pitchFamily="34" charset="-122"/>
@@ -7714,7 +7861,7 @@
           <a:noFill/>
           <a:ln w="15875">
             <a:solidFill>
-              <a:srgbClr val="9B7BE8"/>
+              <a:srgbClr val="8F72E6"/>
             </a:solidFill>
             <a:prstDash val="solid"/>
           </a:ln>
@@ -7735,7 +7882,7 @@
             <a:avLst/>
           </a:prstGeom>
           <a:solidFill>
-            <a:srgbClr val="9B7BE8"/>
+            <a:srgbClr val="8F72E6"/>
           </a:solidFill>
           <a:ln/>
         </p:spPr>
@@ -7757,9 +7904,14 @@
             </a:avLst>
           </a:prstGeom>
           <a:solidFill>
-            <a:srgbClr val="1C1140"/>
+            <a:srgbClr val="1A0B3D"/>
           </a:solidFill>
-          <a:ln/>
+          <a:ln w="12700">
+            <a:solidFill>
+              <a:srgbClr val="5A05F4"/>
+            </a:solidFill>
+            <a:prstDash val="solid"/>
+          </a:ln>
         </p:spPr>
       </p:sp>
       <p:sp>
@@ -7789,7 +7941,7 @@
             <a:r>
               <a:rPr lang="en-US" sz="1150" b="1" dirty="0">
                 <a:solidFill>
-                  <a:srgbClr val="C9A6FF"/>
+                  <a:srgbClr val="A98BFF"/>
                 </a:solidFill>
                 <a:latin typeface="Courier New" pitchFamily="34" charset="0"/>
                 <a:ea typeface="Courier New" pitchFamily="34" charset="-122"/>
@@ -7818,11 +7970,11 @@
             </a:avLst>
           </a:prstGeom>
           <a:solidFill>
-            <a:srgbClr val="17141F"/>
+            <a:srgbClr val="000000"/>
           </a:solidFill>
           <a:ln w="12700">
             <a:solidFill>
-              <a:srgbClr val="2E2A3A"/>
+              <a:srgbClr val="5E4F85"/>
             </a:solidFill>
             <a:prstDash val="solid"/>
           </a:ln>
@@ -7897,7 +8049,7 @@
             <a:r>
               <a:rPr lang="en-US" sz="1200" dirty="0">
                 <a:solidFill>
-                  <a:srgbClr val="AFA9BE"/>
+                  <a:srgbClr val="C9C4D6"/>
                 </a:solidFill>
                 <a:latin typeface="Montserrat" pitchFamily="34" charset="0"/>
                 <a:ea typeface="Montserrat" pitchFamily="34" charset="-122"/>
@@ -7926,9 +8078,14 @@
             </a:avLst>
           </a:prstGeom>
           <a:solidFill>
-            <a:srgbClr val="1C1140"/>
+            <a:srgbClr val="1A0B3D"/>
           </a:solidFill>
-          <a:ln/>
+          <a:ln w="12700">
+            <a:solidFill>
+              <a:srgbClr val="5A05F4"/>
+            </a:solidFill>
+            <a:prstDash val="solid"/>
+          </a:ln>
         </p:spPr>
       </p:sp>
       <p:sp>
@@ -7958,7 +8115,7 @@
             <a:r>
               <a:rPr lang="en-US" sz="1450" b="1" dirty="0">
                 <a:solidFill>
-                  <a:srgbClr val="C9A6FF"/>
+                  <a:srgbClr val="A98BFF"/>
                 </a:solidFill>
                 <a:latin typeface="Montserrat" pitchFamily="34" charset="0"/>
                 <a:ea typeface="Montserrat" pitchFamily="34" charset="-122"/>
@@ -8000,7 +8157,7 @@
             <a:r>
               <a:rPr lang="en-US" sz="1200" dirty="0">
                 <a:solidFill>
-                  <a:srgbClr val="FFFFFF"/>
+                  <a:srgbClr val="C9C4D6"/>
                 </a:solidFill>
                 <a:latin typeface="Montserrat" pitchFamily="34" charset="0"/>
                 <a:ea typeface="Montserrat" pitchFamily="34" charset="-122"/>
@@ -8029,9 +8186,14 @@
             </a:avLst>
           </a:prstGeom>
           <a:solidFill>
-            <a:srgbClr val="2A2010"/>
+            <a:srgbClr val="0B1A38"/>
           </a:solidFill>
-          <a:ln/>
+          <a:ln w="12700">
+            <a:solidFill>
+              <a:srgbClr val="6BA0F8"/>
+            </a:solidFill>
+            <a:prstDash val="solid"/>
+          </a:ln>
         </p:spPr>
       </p:sp>
       <p:sp>
@@ -8106,7 +8268,7 @@
             <a:lvl1pPr>
               <a:defRPr sz="850">
                 <a:solidFill>
-                  <a:srgbClr val="8A82A0"/>
+                  <a:srgbClr val="9A94AA"/>
                 </a:solidFill>
                 <a:latin typeface="Courier New"/>
                 <a:ea typeface="Courier New"/>
@@ -8176,7 +8338,7 @@
             <a:r>
               <a:rPr lang="en-US" sz="2600" b="1" dirty="0">
                 <a:solidFill>
-                  <a:srgbClr val="C9A6FF"/>
+                  <a:srgbClr val="A98BFF"/>
                 </a:solidFill>
                 <a:latin typeface="Courier New" pitchFamily="34" charset="0"/>
                 <a:ea typeface="Courier New" pitchFamily="34" charset="-122"/>
@@ -8244,9 +8406,14 @@
             </a:avLst>
           </a:prstGeom>
           <a:solidFill>
-            <a:srgbClr val="C9A6FF"/>
+            <a:srgbClr val="1A0B3D"/>
           </a:solidFill>
-          <a:ln/>
+          <a:ln w="12700">
+            <a:solidFill>
+              <a:srgbClr val="5A05F4"/>
+            </a:solidFill>
+            <a:prstDash val="solid"/>
+          </a:ln>
         </p:spPr>
       </p:sp>
       <p:sp>
@@ -8276,7 +8443,7 @@
             <a:r>
               <a:rPr lang="en-US" sz="900" b="1" spc="100" kern="0" dirty="0">
                 <a:solidFill>
-                  <a:srgbClr val="1C1140"/>
+                  <a:srgbClr val="A98BFF"/>
                 </a:solidFill>
                 <a:latin typeface="Courier New" pitchFamily="34" charset="0"/>
                 <a:ea typeface="Courier New" pitchFamily="34" charset="-122"/>
@@ -8329,11 +8496,11 @@
             </a:avLst>
           </a:prstGeom>
           <a:solidFill>
-            <a:srgbClr val="12101A"/>
+            <a:srgbClr val="07060C"/>
           </a:solidFill>
           <a:ln w="12700">
             <a:solidFill>
-              <a:srgbClr val="2E2A3A"/>
+              <a:srgbClr val="5E4F85"/>
             </a:solidFill>
             <a:prstDash val="solid"/>
           </a:ln>
@@ -8369,7 +8536,7 @@
             <a:r>
               <a:rPr lang="en-US" sz="1200" dirty="0">
                 <a:solidFill>
-                  <a:srgbClr val="C9A6FF"/>
+                  <a:srgbClr val="A98BFF"/>
                 </a:solidFill>
                 <a:latin typeface="Courier New" pitchFamily="34" charset="0"/>
                 <a:ea typeface="Courier New" pitchFamily="34" charset="-122"/>
@@ -8389,7 +8556,7 @@
             <a:r>
               <a:rPr lang="en-US" sz="1200" dirty="0">
                 <a:solidFill>
-                  <a:srgbClr val="F0B36B"/>
+                  <a:srgbClr val="C9C4D6"/>
                 </a:solidFill>
                 <a:latin typeface="Courier New" pitchFamily="34" charset="0"/>
                 <a:ea typeface="Courier New" pitchFamily="34" charset="-122"/>
@@ -8406,7 +8573,7 @@
             <a:r>
               <a:rPr lang="en-US" sz="1200" dirty="0">
                 <a:solidFill>
-                  <a:srgbClr val="8A82A0"/>
+                  <a:srgbClr val="9A94AA"/>
                 </a:solidFill>
                 <a:latin typeface="Courier New" pitchFamily="34" charset="0"/>
                 <a:ea typeface="Courier New" pitchFamily="34" charset="-122"/>
@@ -8426,7 +8593,7 @@
             <a:r>
               <a:rPr lang="en-US" sz="1200" dirty="0">
                 <a:solidFill>
-                  <a:srgbClr val="F0B36B"/>
+                  <a:srgbClr val="C9C4D6"/>
                 </a:solidFill>
                 <a:latin typeface="Courier New" pitchFamily="34" charset="0"/>
                 <a:ea typeface="Courier New" pitchFamily="34" charset="-122"/>
@@ -8443,7 +8610,7 @@
             <a:r>
               <a:rPr lang="en-US" sz="1200" dirty="0">
                 <a:solidFill>
-                  <a:srgbClr val="8A82A0"/>
+                  <a:srgbClr val="9A94AA"/>
                 </a:solidFill>
                 <a:latin typeface="Courier New" pitchFamily="34" charset="0"/>
                 <a:ea typeface="Courier New" pitchFamily="34" charset="-122"/>
@@ -8463,7 +8630,7 @@
             <a:r>
               <a:rPr lang="en-US" sz="1200" dirty="0">
                 <a:solidFill>
-                  <a:srgbClr val="F0B36B"/>
+                  <a:srgbClr val="C9C4D6"/>
                 </a:solidFill>
                 <a:latin typeface="Courier New" pitchFamily="34" charset="0"/>
                 <a:ea typeface="Courier New" pitchFamily="34" charset="-122"/>
@@ -8480,7 +8647,7 @@
             <a:r>
               <a:rPr lang="en-US" sz="1200" dirty="0">
                 <a:solidFill>
-                  <a:srgbClr val="8A82A0"/>
+                  <a:srgbClr val="9A94AA"/>
                 </a:solidFill>
                 <a:latin typeface="Courier New" pitchFamily="34" charset="0"/>
                 <a:ea typeface="Courier New" pitchFamily="34" charset="-122"/>
@@ -8500,7 +8667,7 @@
             <a:r>
               <a:rPr lang="en-US" sz="1200" dirty="0">
                 <a:solidFill>
-                  <a:srgbClr val="7FD9A6"/>
+                  <a:srgbClr val="6BA0F8"/>
                 </a:solidFill>
                 <a:latin typeface="Courier New" pitchFamily="34" charset="0"/>
                 <a:ea typeface="Courier New" pitchFamily="34" charset="-122"/>
@@ -8520,7 +8687,7 @@
             <a:r>
               <a:rPr lang="en-US" sz="1200" dirty="0">
                 <a:solidFill>
-                  <a:srgbClr val="7FD9A6"/>
+                  <a:srgbClr val="6BA0F8"/>
                 </a:solidFill>
                 <a:latin typeface="Courier New" pitchFamily="34" charset="0"/>
                 <a:ea typeface="Courier New" pitchFamily="34" charset="-122"/>
@@ -8549,9 +8716,14 @@
             </a:avLst>
           </a:prstGeom>
           <a:solidFill>
-            <a:srgbClr val="102A20"/>
+            <a:srgbClr val="06180F"/>
           </a:solidFill>
-          <a:ln/>
+          <a:ln w="12700">
+            <a:solidFill>
+              <a:srgbClr val="3FCF8E"/>
+            </a:solidFill>
+            <a:prstDash val="solid"/>
+          </a:ln>
         </p:spPr>
       </p:sp>
       <p:sp>
@@ -8569,7 +8741,7 @@
             <a:avLst/>
           </a:prstGeom>
           <a:solidFill>
-            <a:srgbClr val="5FD6A0"/>
+            <a:srgbClr val="5A05F4"/>
           </a:solidFill>
           <a:ln/>
         </p:spPr>
@@ -8601,7 +8773,7 @@
             <a:r>
               <a:rPr lang="en-US" sz="1200" b="1" dirty="0">
                 <a:solidFill>
-                  <a:srgbClr val="102A20"/>
+                  <a:srgbClr val="FFFFFF"/>
                 </a:solidFill>
                 <a:latin typeface="Courier New" pitchFamily="34" charset="0"/>
                 <a:ea typeface="Courier New" pitchFamily="34" charset="-122"/>
@@ -8640,7 +8812,7 @@
             <a:r>
               <a:rPr lang="en-US" sz="1450" b="1" dirty="0">
                 <a:solidFill>
-                  <a:srgbClr val="5FD6A0"/>
+                  <a:srgbClr val="3FCF8E"/>
                 </a:solidFill>
                 <a:latin typeface="Montserrat" pitchFamily="34" charset="0"/>
                 <a:ea typeface="Montserrat" pitchFamily="34" charset="-122"/>
@@ -8682,7 +8854,7 @@
             <a:r>
               <a:rPr lang="en-US" sz="1200" dirty="0">
                 <a:solidFill>
-                  <a:srgbClr val="FFFFFF"/>
+                  <a:srgbClr val="C9C4D6"/>
                 </a:solidFill>
                 <a:latin typeface="Montserrat" pitchFamily="34" charset="0"/>
                 <a:ea typeface="Montserrat" pitchFamily="34" charset="-122"/>
@@ -8711,9 +8883,14 @@
             </a:avLst>
           </a:prstGeom>
           <a:solidFill>
-            <a:srgbClr val="102A20"/>
+            <a:srgbClr val="06180F"/>
           </a:solidFill>
-          <a:ln/>
+          <a:ln w="12700">
+            <a:solidFill>
+              <a:srgbClr val="3FCF8E"/>
+            </a:solidFill>
+            <a:prstDash val="solid"/>
+          </a:ln>
         </p:spPr>
       </p:sp>
       <p:sp>
@@ -8731,7 +8908,7 @@
             <a:avLst/>
           </a:prstGeom>
           <a:solidFill>
-            <a:srgbClr val="5FD6A0"/>
+            <a:srgbClr val="5A05F4"/>
           </a:solidFill>
           <a:ln/>
         </p:spPr>
@@ -8763,7 +8940,7 @@
             <a:r>
               <a:rPr lang="en-US" sz="1200" b="1" dirty="0">
                 <a:solidFill>
-                  <a:srgbClr val="102A20"/>
+                  <a:srgbClr val="FFFFFF"/>
                 </a:solidFill>
                 <a:latin typeface="Courier New" pitchFamily="34" charset="0"/>
                 <a:ea typeface="Courier New" pitchFamily="34" charset="-122"/>
@@ -8802,7 +8979,7 @@
             <a:r>
               <a:rPr lang="en-US" sz="1450" b="1" dirty="0">
                 <a:solidFill>
-                  <a:srgbClr val="5FD6A0"/>
+                  <a:srgbClr val="3FCF8E"/>
                 </a:solidFill>
                 <a:latin typeface="Montserrat" pitchFamily="34" charset="0"/>
                 <a:ea typeface="Montserrat" pitchFamily="34" charset="-122"/>
@@ -8844,7 +9021,7 @@
             <a:r>
               <a:rPr lang="en-US" sz="1200" dirty="0">
                 <a:solidFill>
-                  <a:srgbClr val="FFFFFF"/>
+                  <a:srgbClr val="C9C4D6"/>
                 </a:solidFill>
                 <a:latin typeface="Montserrat" pitchFamily="34" charset="0"/>
                 <a:ea typeface="Montserrat" pitchFamily="34" charset="-122"/>
@@ -8873,9 +9050,14 @@
             </a:avLst>
           </a:prstGeom>
           <a:solidFill>
-            <a:srgbClr val="102A20"/>
+            <a:srgbClr val="06180F"/>
           </a:solidFill>
-          <a:ln/>
+          <a:ln w="12700">
+            <a:solidFill>
+              <a:srgbClr val="3FCF8E"/>
+            </a:solidFill>
+            <a:prstDash val="solid"/>
+          </a:ln>
         </p:spPr>
       </p:sp>
       <p:sp>
@@ -8893,7 +9075,7 @@
             <a:avLst/>
           </a:prstGeom>
           <a:solidFill>
-            <a:srgbClr val="5FD6A0"/>
+            <a:srgbClr val="5A05F4"/>
           </a:solidFill>
           <a:ln/>
         </p:spPr>
@@ -8925,7 +9107,7 @@
             <a:r>
               <a:rPr lang="en-US" sz="1200" b="1" dirty="0">
                 <a:solidFill>
-                  <a:srgbClr val="102A20"/>
+                  <a:srgbClr val="FFFFFF"/>
                 </a:solidFill>
                 <a:latin typeface="Courier New" pitchFamily="34" charset="0"/>
                 <a:ea typeface="Courier New" pitchFamily="34" charset="-122"/>
@@ -8964,7 +9146,7 @@
             <a:r>
               <a:rPr lang="en-US" sz="1450" b="1" dirty="0">
                 <a:solidFill>
-                  <a:srgbClr val="5FD6A0"/>
+                  <a:srgbClr val="3FCF8E"/>
                 </a:solidFill>
                 <a:latin typeface="Montserrat" pitchFamily="34" charset="0"/>
                 <a:ea typeface="Montserrat" pitchFamily="34" charset="-122"/>
@@ -9006,7 +9188,7 @@
             <a:r>
               <a:rPr lang="en-US" sz="1200" dirty="0">
                 <a:solidFill>
-                  <a:srgbClr val="FFFFFF"/>
+                  <a:srgbClr val="C9C4D6"/>
                 </a:solidFill>
                 <a:latin typeface="Montserrat" pitchFamily="34" charset="0"/>
                 <a:ea typeface="Montserrat" pitchFamily="34" charset="-122"/>
@@ -9112,7 +9294,7 @@
             <a:lvl1pPr>
               <a:defRPr sz="850">
                 <a:solidFill>
-                  <a:srgbClr val="8A82A0"/>
+                  <a:srgbClr val="9A94AA"/>
                 </a:solidFill>
                 <a:latin typeface="Courier New"/>
                 <a:ea typeface="Courier New"/>
@@ -9211,7 +9393,7 @@
             </a:avLst>
           </a:prstGeom>
           <a:solidFill>
-            <a:srgbClr val="5FD6A0"/>
+            <a:srgbClr val="5A05F4"/>
           </a:solidFill>
           <a:ln/>
         </p:spPr>
@@ -9243,7 +9425,7 @@
             <a:r>
               <a:rPr lang="en-US" sz="900" b="1" spc="100" kern="0" dirty="0">
                 <a:solidFill>
-                  <a:srgbClr val="102A20"/>
+                  <a:srgbClr val="FFFFFF"/>
                 </a:solidFill>
                 <a:latin typeface="Courier New" pitchFamily="34" charset="0"/>
                 <a:ea typeface="Courier New" pitchFamily="34" charset="-122"/>
@@ -9296,9 +9478,14 @@
             </a:avLst>
           </a:prstGeom>
           <a:solidFill>
-            <a:srgbClr val="102A20"/>
+            <a:srgbClr val="06180F"/>
           </a:solidFill>
-          <a:ln/>
+          <a:ln w="12700">
+            <a:solidFill>
+              <a:srgbClr val="3FCF8E"/>
+            </a:solidFill>
+            <a:prstDash val="solid"/>
+          </a:ln>
         </p:spPr>
       </p:sp>
       <p:sp>
@@ -9316,7 +9503,7 @@
             <a:avLst/>
           </a:prstGeom>
           <a:solidFill>
-            <a:srgbClr val="5FD6A0"/>
+            <a:srgbClr val="5A05F4"/>
           </a:solidFill>
           <a:ln/>
         </p:spPr>
@@ -9348,7 +9535,7 @@
             <a:r>
               <a:rPr lang="en-US" sz="1200" b="1" dirty="0">
                 <a:solidFill>
-                  <a:srgbClr val="102A20"/>
+                  <a:srgbClr val="FFFFFF"/>
                 </a:solidFill>
                 <a:latin typeface="Courier New" pitchFamily="34" charset="0"/>
                 <a:ea typeface="Courier New" pitchFamily="34" charset="-122"/>
@@ -9387,7 +9574,7 @@
             <a:r>
               <a:rPr lang="en-US" sz="1450" b="1" dirty="0">
                 <a:solidFill>
-                  <a:srgbClr val="5FD6A0"/>
+                  <a:srgbClr val="3FCF8E"/>
                 </a:solidFill>
                 <a:latin typeface="Montserrat" pitchFamily="34" charset="0"/>
                 <a:ea typeface="Montserrat" pitchFamily="34" charset="-122"/>
@@ -9429,7 +9616,7 @@
             <a:r>
               <a:rPr lang="en-US" sz="1200" dirty="0">
                 <a:solidFill>
-                  <a:srgbClr val="FFFFFF"/>
+                  <a:srgbClr val="C9C4D6"/>
                 </a:solidFill>
                 <a:latin typeface="Montserrat" pitchFamily="34" charset="0"/>
                 <a:ea typeface="Montserrat" pitchFamily="34" charset="-122"/>
@@ -9458,9 +9645,14 @@
             </a:avLst>
           </a:prstGeom>
           <a:solidFill>
-            <a:srgbClr val="2E1418"/>
+            <a:srgbClr val="1A0808"/>
           </a:solidFill>
-          <a:ln/>
+          <a:ln w="12700">
+            <a:solidFill>
+              <a:srgbClr val="FF6B6B"/>
+            </a:solidFill>
+            <a:prstDash val="solid"/>
+          </a:ln>
         </p:spPr>
       </p:sp>
       <p:sp>
@@ -9478,7 +9670,7 @@
             <a:avLst/>
           </a:prstGeom>
           <a:solidFill>
-            <a:srgbClr val="FF7B7B"/>
+            <a:srgbClr val="5A05F4"/>
           </a:solidFill>
           <a:ln/>
         </p:spPr>
@@ -9510,7 +9702,7 @@
             <a:r>
               <a:rPr lang="en-US" sz="1200" b="1" dirty="0">
                 <a:solidFill>
-                  <a:srgbClr val="2E1418"/>
+                  <a:srgbClr val="FFFFFF"/>
                 </a:solidFill>
                 <a:latin typeface="Courier New" pitchFamily="34" charset="0"/>
                 <a:ea typeface="Courier New" pitchFamily="34" charset="-122"/>
@@ -9549,7 +9741,7 @@
             <a:r>
               <a:rPr lang="en-US" sz="1450" b="1" dirty="0">
                 <a:solidFill>
-                  <a:srgbClr val="FF7B7B"/>
+                  <a:srgbClr val="FF6B6B"/>
                 </a:solidFill>
                 <a:latin typeface="Montserrat" pitchFamily="34" charset="0"/>
                 <a:ea typeface="Montserrat" pitchFamily="34" charset="-122"/>
@@ -9591,7 +9783,7 @@
             <a:r>
               <a:rPr lang="en-US" sz="1200" dirty="0">
                 <a:solidFill>
-                  <a:srgbClr val="FFFFFF"/>
+                  <a:srgbClr val="C9C4D6"/>
                 </a:solidFill>
                 <a:latin typeface="Montserrat" pitchFamily="34" charset="0"/>
                 <a:ea typeface="Montserrat" pitchFamily="34" charset="-122"/>
@@ -9620,9 +9812,14 @@
             </a:avLst>
           </a:prstGeom>
           <a:solidFill>
-            <a:srgbClr val="102A20"/>
+            <a:srgbClr val="06180F"/>
           </a:solidFill>
-          <a:ln/>
+          <a:ln w="12700">
+            <a:solidFill>
+              <a:srgbClr val="3FCF8E"/>
+            </a:solidFill>
+            <a:prstDash val="solid"/>
+          </a:ln>
         </p:spPr>
       </p:sp>
       <p:sp>
@@ -9640,7 +9837,7 @@
             <a:avLst/>
           </a:prstGeom>
           <a:solidFill>
-            <a:srgbClr val="5FD6A0"/>
+            <a:srgbClr val="5A05F4"/>
           </a:solidFill>
           <a:ln/>
         </p:spPr>
@@ -9672,7 +9869,7 @@
             <a:r>
               <a:rPr lang="en-US" sz="1200" b="1" dirty="0">
                 <a:solidFill>
-                  <a:srgbClr val="102A20"/>
+                  <a:srgbClr val="FFFFFF"/>
                 </a:solidFill>
                 <a:latin typeface="Courier New" pitchFamily="34" charset="0"/>
                 <a:ea typeface="Courier New" pitchFamily="34" charset="-122"/>
@@ -9711,7 +9908,7 @@
             <a:r>
               <a:rPr lang="en-US" sz="1450" b="1" dirty="0">
                 <a:solidFill>
-                  <a:srgbClr val="5FD6A0"/>
+                  <a:srgbClr val="3FCF8E"/>
                 </a:solidFill>
                 <a:latin typeface="Montserrat" pitchFamily="34" charset="0"/>
                 <a:ea typeface="Montserrat" pitchFamily="34" charset="-122"/>
@@ -9753,7 +9950,7 @@
             <a:r>
               <a:rPr lang="en-US" sz="1200" dirty="0">
                 <a:solidFill>
-                  <a:srgbClr val="FFFFFF"/>
+                  <a:srgbClr val="C9C4D6"/>
                 </a:solidFill>
                 <a:latin typeface="Montserrat" pitchFamily="34" charset="0"/>
                 <a:ea typeface="Montserrat" pitchFamily="34" charset="-122"/>
@@ -9782,9 +9979,14 @@
             </a:avLst>
           </a:prstGeom>
           <a:solidFill>
-            <a:srgbClr val="102A20"/>
+            <a:srgbClr val="06180F"/>
           </a:solidFill>
-          <a:ln/>
+          <a:ln w="12700">
+            <a:solidFill>
+              <a:srgbClr val="3FCF8E"/>
+            </a:solidFill>
+            <a:prstDash val="solid"/>
+          </a:ln>
         </p:spPr>
       </p:sp>
       <p:sp>
@@ -9802,7 +10004,7 @@
             <a:avLst/>
           </a:prstGeom>
           <a:solidFill>
-            <a:srgbClr val="5FD6A0"/>
+            <a:srgbClr val="5A05F4"/>
           </a:solidFill>
           <a:ln/>
         </p:spPr>
@@ -9834,7 +10036,7 @@
             <a:r>
               <a:rPr lang="en-US" sz="1200" b="1" dirty="0">
                 <a:solidFill>
-                  <a:srgbClr val="102A20"/>
+                  <a:srgbClr val="FFFFFF"/>
                 </a:solidFill>
                 <a:latin typeface="Courier New" pitchFamily="34" charset="0"/>
                 <a:ea typeface="Courier New" pitchFamily="34" charset="-122"/>
@@ -9873,7 +10075,7 @@
             <a:r>
               <a:rPr lang="en-US" sz="1450" b="1" dirty="0">
                 <a:solidFill>
-                  <a:srgbClr val="5FD6A0"/>
+                  <a:srgbClr val="3FCF8E"/>
                 </a:solidFill>
                 <a:latin typeface="Montserrat" pitchFamily="34" charset="0"/>
                 <a:ea typeface="Montserrat" pitchFamily="34" charset="-122"/>
@@ -9915,7 +10117,7 @@
             <a:r>
               <a:rPr lang="en-US" sz="1200" dirty="0">
                 <a:solidFill>
-                  <a:srgbClr val="FFFFFF"/>
+                  <a:srgbClr val="C9C4D6"/>
                 </a:solidFill>
                 <a:latin typeface="Montserrat" pitchFamily="34" charset="0"/>
                 <a:ea typeface="Montserrat" pitchFamily="34" charset="-122"/>
@@ -10060,7 +10262,7 @@
             <a:lvl1pPr>
               <a:defRPr sz="850">
                 <a:solidFill>
-                  <a:srgbClr val="8A82A0"/>
+                  <a:srgbClr val="9A94AA"/>
                 </a:solidFill>
                 <a:latin typeface="Courier New"/>
                 <a:ea typeface="Courier New"/>
@@ -10159,7 +10361,7 @@
             </a:avLst>
           </a:prstGeom>
           <a:solidFill>
-            <a:srgbClr val="5FD6A0"/>
+            <a:srgbClr val="5A05F4"/>
           </a:solidFill>
           <a:ln/>
         </p:spPr>
@@ -10191,7 +10393,7 @@
             <a:r>
               <a:rPr lang="en-US" sz="900" b="1" spc="100" kern="0" dirty="0">
                 <a:solidFill>
-                  <a:srgbClr val="102A20"/>
+                  <a:srgbClr val="FFFFFF"/>
                 </a:solidFill>
                 <a:latin typeface="Courier New" pitchFamily="34" charset="0"/>
                 <a:ea typeface="Courier New" pitchFamily="34" charset="-122"/>
@@ -10242,7 +10444,7 @@
             <a:avLst/>
           </a:prstGeom>
           <a:solidFill>
-            <a:srgbClr val="C9A6FF"/>
+            <a:srgbClr val="A98BFF"/>
           </a:solidFill>
           <a:ln/>
         </p:spPr>
@@ -10274,7 +10476,7 @@
             <a:r>
               <a:rPr lang="en-US" sz="1300" b="1" dirty="0">
                 <a:solidFill>
-                  <a:srgbClr val="1C1140"/>
+                  <a:srgbClr val="1A0B3D"/>
                 </a:solidFill>
                 <a:latin typeface="Courier New" pitchFamily="34" charset="0"/>
                 <a:ea typeface="Courier New" pitchFamily="34" charset="-122"/>
@@ -10327,7 +10529,7 @@
             <a:r>
               <a:rPr lang="en-US" sz="1200" dirty="0">
                 <a:solidFill>
-                  <a:srgbClr val="AFA9BE"/>
+                  <a:srgbClr val="C9C4D6"/>
                 </a:solidFill>
                 <a:latin typeface="Montserrat" pitchFamily="34" charset="0"/>
                 <a:ea typeface="Montserrat" pitchFamily="34" charset="-122"/>
@@ -10354,7 +10556,7 @@
             <a:avLst/>
           </a:prstGeom>
           <a:solidFill>
-            <a:srgbClr val="C9A6FF"/>
+            <a:srgbClr val="A98BFF"/>
           </a:solidFill>
           <a:ln/>
         </p:spPr>
@@ -10386,7 +10588,7 @@
             <a:r>
               <a:rPr lang="en-US" sz="1300" b="1" dirty="0">
                 <a:solidFill>
-                  <a:srgbClr val="1C1140"/>
+                  <a:srgbClr val="1A0B3D"/>
                 </a:solidFill>
                 <a:latin typeface="Courier New" pitchFamily="34" charset="0"/>
                 <a:ea typeface="Courier New" pitchFamily="34" charset="-122"/>
@@ -10439,7 +10641,7 @@
             <a:r>
               <a:rPr lang="en-US" sz="1200" dirty="0">
                 <a:solidFill>
-                  <a:srgbClr val="AFA9BE"/>
+                  <a:srgbClr val="C9C4D6"/>
                 </a:solidFill>
                 <a:latin typeface="Montserrat" pitchFamily="34" charset="0"/>
                 <a:ea typeface="Montserrat" pitchFamily="34" charset="-122"/>
@@ -10466,7 +10668,7 @@
             <a:avLst/>
           </a:prstGeom>
           <a:solidFill>
-            <a:srgbClr val="C9A6FF"/>
+            <a:srgbClr val="A98BFF"/>
           </a:solidFill>
           <a:ln/>
         </p:spPr>
@@ -10498,7 +10700,7 @@
             <a:r>
               <a:rPr lang="en-US" sz="1300" b="1" dirty="0">
                 <a:solidFill>
-                  <a:srgbClr val="1C1140"/>
+                  <a:srgbClr val="1A0B3D"/>
                 </a:solidFill>
                 <a:latin typeface="Courier New" pitchFamily="34" charset="0"/>
                 <a:ea typeface="Courier New" pitchFamily="34" charset="-122"/>
@@ -10551,7 +10753,7 @@
             <a:r>
               <a:rPr lang="en-US" sz="1200" dirty="0">
                 <a:solidFill>
-                  <a:srgbClr val="AFA9BE"/>
+                  <a:srgbClr val="C9C4D6"/>
                 </a:solidFill>
                 <a:latin typeface="Montserrat" pitchFamily="34" charset="0"/>
                 <a:ea typeface="Montserrat" pitchFamily="34" charset="-122"/>
@@ -10578,7 +10780,7 @@
             <a:avLst/>
           </a:prstGeom>
           <a:solidFill>
-            <a:srgbClr val="C9A6FF"/>
+            <a:srgbClr val="A98BFF"/>
           </a:solidFill>
           <a:ln/>
         </p:spPr>
@@ -10610,7 +10812,7 @@
             <a:r>
               <a:rPr lang="en-US" sz="1300" b="1" dirty="0">
                 <a:solidFill>
-                  <a:srgbClr val="1C1140"/>
+                  <a:srgbClr val="1A0B3D"/>
                 </a:solidFill>
                 <a:latin typeface="Courier New" pitchFamily="34" charset="0"/>
                 <a:ea typeface="Courier New" pitchFamily="34" charset="-122"/>
@@ -10663,7 +10865,7 @@
             <a:r>
               <a:rPr lang="en-US" sz="1200" dirty="0">
                 <a:solidFill>
-                  <a:srgbClr val="AFA9BE"/>
+                  <a:srgbClr val="C9C4D6"/>
                 </a:solidFill>
                 <a:latin typeface="Montserrat" pitchFamily="34" charset="0"/>
                 <a:ea typeface="Montserrat" pitchFamily="34" charset="-122"/>
@@ -10690,7 +10892,7 @@
             <a:avLst/>
           </a:prstGeom>
           <a:solidFill>
-            <a:srgbClr val="E8A857"/>
+            <a:srgbClr val="6BA0F8"/>
           </a:solidFill>
           <a:ln/>
         </p:spPr>
@@ -10722,7 +10924,7 @@
             <a:r>
               <a:rPr lang="en-US" sz="1300" b="1" dirty="0">
                 <a:solidFill>
-                  <a:srgbClr val="2A2010"/>
+                  <a:srgbClr val="0B1A38"/>
                 </a:solidFill>
                 <a:latin typeface="Courier New" pitchFamily="34" charset="0"/>
                 <a:ea typeface="Courier New" pitchFamily="34" charset="-122"/>
@@ -10761,7 +10963,7 @@
             <a:r>
               <a:rPr lang="en-US" sz="1400" b="1" dirty="0">
                 <a:solidFill>
-                  <a:srgbClr val="E8A857"/>
+                  <a:srgbClr val="6BA0F8"/>
                 </a:solidFill>
                 <a:latin typeface="Montserrat" pitchFamily="34" charset="0"/>
                 <a:ea typeface="Montserrat" pitchFamily="34" charset="-122"/>
@@ -10775,7 +10977,7 @@
             <a:r>
               <a:rPr lang="en-US" sz="1200" dirty="0">
                 <a:solidFill>
-                  <a:srgbClr val="AFA9BE"/>
+                  <a:srgbClr val="C9C4D6"/>
                 </a:solidFill>
                 <a:latin typeface="Montserrat" pitchFamily="34" charset="0"/>
                 <a:ea typeface="Montserrat" pitchFamily="34" charset="-122"/>
@@ -10817,7 +11019,7 @@
             <a:lvl1pPr>
               <a:defRPr sz="850">
                 <a:solidFill>
-                  <a:srgbClr val="8A82A0"/>
+                  <a:srgbClr val="9A94AA"/>
                 </a:solidFill>
                 <a:latin typeface="Courier New"/>
                 <a:ea typeface="Courier New"/>
@@ -10916,9 +11118,14 @@
             </a:avLst>
           </a:prstGeom>
           <a:solidFill>
-            <a:srgbClr val="E8A857"/>
+            <a:srgbClr val="0B1A38"/>
           </a:solidFill>
-          <a:ln/>
+          <a:ln w="12700">
+            <a:solidFill>
+              <a:srgbClr val="6BA0F8"/>
+            </a:solidFill>
+            <a:prstDash val="solid"/>
+          </a:ln>
         </p:spPr>
       </p:sp>
       <p:sp>
@@ -10948,7 +11155,7 @@
             <a:r>
               <a:rPr lang="en-US" sz="900" b="1" spc="100" kern="0" dirty="0">
                 <a:solidFill>
-                  <a:srgbClr val="2A2010"/>
+                  <a:srgbClr val="6BA0F8"/>
                 </a:solidFill>
                 <a:latin typeface="Courier New" pitchFamily="34" charset="0"/>
                 <a:ea typeface="Courier New" pitchFamily="34" charset="-122"/>
@@ -11001,9 +11208,14 @@
             </a:avLst>
           </a:prstGeom>
           <a:solidFill>
-            <a:srgbClr val="102A20"/>
+            <a:srgbClr val="06180F"/>
           </a:solidFill>
-          <a:ln/>
+          <a:ln w="12700">
+            <a:solidFill>
+              <a:srgbClr val="3FCF8E"/>
+            </a:solidFill>
+            <a:prstDash val="solid"/>
+          </a:ln>
         </p:spPr>
       </p:sp>
       <p:sp>
@@ -11033,7 +11245,7 @@
             <a:r>
               <a:rPr lang="en-US" sz="1450" b="1" dirty="0">
                 <a:solidFill>
-                  <a:srgbClr val="5FD6A0"/>
+                  <a:srgbClr val="3FCF8E"/>
                 </a:solidFill>
                 <a:latin typeface="Montserrat" pitchFamily="34" charset="0"/>
                 <a:ea typeface="Montserrat" pitchFamily="34" charset="-122"/>
@@ -11075,7 +11287,7 @@
             <a:r>
               <a:rPr lang="en-US" sz="1200" dirty="0">
                 <a:solidFill>
-                  <a:srgbClr val="FFFFFF"/>
+                  <a:srgbClr val="C9C4D6"/>
                 </a:solidFill>
                 <a:latin typeface="Montserrat" pitchFamily="34" charset="0"/>
                 <a:ea typeface="Montserrat" pitchFamily="34" charset="-122"/>
@@ -11104,9 +11316,14 @@
             </a:avLst>
           </a:prstGeom>
           <a:solidFill>
-            <a:srgbClr val="1C1140"/>
+            <a:srgbClr val="1A0B3D"/>
           </a:solidFill>
-          <a:ln/>
+          <a:ln w="12700">
+            <a:solidFill>
+              <a:srgbClr val="5A05F4"/>
+            </a:solidFill>
+            <a:prstDash val="solid"/>
+          </a:ln>
         </p:spPr>
       </p:sp>
       <p:sp>
@@ -11136,7 +11353,7 @@
             <a:r>
               <a:rPr lang="en-US" sz="1450" b="1" dirty="0">
                 <a:solidFill>
-                  <a:srgbClr val="C9A6FF"/>
+                  <a:srgbClr val="A98BFF"/>
                 </a:solidFill>
                 <a:latin typeface="Montserrat" pitchFamily="34" charset="0"/>
                 <a:ea typeface="Montserrat" pitchFamily="34" charset="-122"/>
@@ -11178,7 +11395,7 @@
             <a:r>
               <a:rPr lang="en-US" sz="1200" dirty="0">
                 <a:solidFill>
-                  <a:srgbClr val="FFFFFF"/>
+                  <a:srgbClr val="C9C4D6"/>
                 </a:solidFill>
                 <a:latin typeface="Montserrat" pitchFamily="34" charset="0"/>
                 <a:ea typeface="Montserrat" pitchFamily="34" charset="-122"/>
@@ -11207,11 +11424,11 @@
             </a:avLst>
           </a:prstGeom>
           <a:solidFill>
-            <a:srgbClr val="17141F"/>
+            <a:srgbClr val="000000"/>
           </a:solidFill>
           <a:ln w="12700">
             <a:solidFill>
-              <a:srgbClr val="2E2A3A"/>
+              <a:srgbClr val="5E4F85"/>
             </a:solidFill>
             <a:prstDash val="solid"/>
           </a:ln>
@@ -11286,7 +11503,7 @@
             <a:r>
               <a:rPr lang="en-US" sz="1200" dirty="0">
                 <a:solidFill>
-                  <a:srgbClr val="AFA9BE"/>
+                  <a:srgbClr val="C9C4D6"/>
                 </a:solidFill>
                 <a:latin typeface="Montserrat" pitchFamily="34" charset="0"/>
                 <a:ea typeface="Montserrat" pitchFamily="34" charset="-122"/>
@@ -11315,11 +11532,11 @@
             </a:avLst>
           </a:prstGeom>
           <a:solidFill>
-            <a:srgbClr val="17141F"/>
+            <a:srgbClr val="000000"/>
           </a:solidFill>
           <a:ln w="12700">
             <a:solidFill>
-              <a:srgbClr val="2E2A3A"/>
+              <a:srgbClr val="5E4F85"/>
             </a:solidFill>
             <a:prstDash val="solid"/>
           </a:ln>
@@ -11397,7 +11614,7 @@
             <a:lvl1pPr>
               <a:defRPr sz="850">
                 <a:solidFill>
-                  <a:srgbClr val="8A82A0"/>
+                  <a:srgbClr val="9A94AA"/>
                 </a:solidFill>
                 <a:latin typeface="Courier New"/>
                 <a:ea typeface="Courier New"/>
@@ -11496,9 +11713,14 @@
             </a:avLst>
           </a:prstGeom>
           <a:solidFill>
-            <a:srgbClr val="E8A857"/>
+            <a:srgbClr val="0B1A38"/>
           </a:solidFill>
-          <a:ln/>
+          <a:ln w="12700">
+            <a:solidFill>
+              <a:srgbClr val="6BA0F8"/>
+            </a:solidFill>
+            <a:prstDash val="solid"/>
+          </a:ln>
         </p:spPr>
       </p:sp>
       <p:sp>
@@ -11528,7 +11750,7 @@
             <a:r>
               <a:rPr lang="en-US" sz="900" b="1" spc="100" kern="0" dirty="0">
                 <a:solidFill>
-                  <a:srgbClr val="2A2010"/>
+                  <a:srgbClr val="6BA0F8"/>
                 </a:solidFill>
                 <a:latin typeface="Courier New" pitchFamily="34" charset="0"/>
                 <a:ea typeface="Courier New" pitchFamily="34" charset="-122"/>
@@ -11581,11 +11803,11 @@
             </a:avLst>
           </a:prstGeom>
           <a:solidFill>
-            <a:srgbClr val="17141F"/>
+            <a:srgbClr val="000000"/>
           </a:solidFill>
           <a:ln w="12700">
             <a:solidFill>
-              <a:srgbClr val="2E2A3A"/>
+              <a:srgbClr val="5E4F85"/>
             </a:solidFill>
             <a:prstDash val="solid"/>
           </a:ln>
@@ -11608,11 +11830,11 @@
             </a:avLst>
           </a:prstGeom>
           <a:solidFill>
-            <a:srgbClr val="1C1140"/>
+            <a:srgbClr val="1A0B3D"/>
           </a:solidFill>
           <a:ln w="12700">
             <a:solidFill>
-              <a:srgbClr val="C9A6FF"/>
+              <a:srgbClr val="A98BFF"/>
             </a:solidFill>
             <a:prstDash val="solid"/>
           </a:ln>
@@ -11633,7 +11855,7 @@
             <a:avLst/>
           </a:prstGeom>
           <a:solidFill>
-            <a:srgbClr val="C9A6FF"/>
+            <a:srgbClr val="A98BFF"/>
           </a:solidFill>
           <a:ln/>
         </p:spPr>
@@ -11653,7 +11875,7 @@
             <a:avLst/>
           </a:prstGeom>
           <a:solidFill>
-            <a:srgbClr val="C9A6FF"/>
+            <a:srgbClr val="A98BFF"/>
           </a:solidFill>
           <a:ln/>
         </p:spPr>
@@ -11714,11 +11936,11 @@
             </a:avLst>
           </a:prstGeom>
           <a:solidFill>
-            <a:srgbClr val="1C1140"/>
+            <a:srgbClr val="1A0B3D"/>
           </a:solidFill>
           <a:ln w="12700">
             <a:solidFill>
-              <a:srgbClr val="C9A6FF"/>
+              <a:srgbClr val="A98BFF"/>
             </a:solidFill>
             <a:prstDash val="solid"/>
           </a:ln>
@@ -11739,7 +11961,7 @@
             <a:avLst/>
           </a:prstGeom>
           <a:solidFill>
-            <a:srgbClr val="C9A6FF"/>
+            <a:srgbClr val="A98BFF"/>
           </a:solidFill>
           <a:ln/>
         </p:spPr>
@@ -11759,7 +11981,7 @@
             <a:avLst/>
           </a:prstGeom>
           <a:solidFill>
-            <a:srgbClr val="C9A6FF"/>
+            <a:srgbClr val="A98BFF"/>
           </a:solidFill>
           <a:ln/>
         </p:spPr>
@@ -11820,11 +12042,11 @@
             </a:avLst>
           </a:prstGeom>
           <a:solidFill>
-            <a:srgbClr val="1C1140"/>
+            <a:srgbClr val="1A0B3D"/>
           </a:solidFill>
           <a:ln w="12700">
             <a:solidFill>
-              <a:srgbClr val="C9A6FF"/>
+              <a:srgbClr val="A98BFF"/>
             </a:solidFill>
             <a:prstDash val="solid"/>
           </a:ln>
@@ -11845,7 +12067,7 @@
             <a:avLst/>
           </a:prstGeom>
           <a:solidFill>
-            <a:srgbClr val="C9A6FF"/>
+            <a:srgbClr val="A98BFF"/>
           </a:solidFill>
           <a:ln/>
         </p:spPr>
@@ -11865,7 +12087,7 @@
             <a:avLst/>
           </a:prstGeom>
           <a:solidFill>
-            <a:srgbClr val="C9A6FF"/>
+            <a:srgbClr val="A98BFF"/>
           </a:solidFill>
           <a:ln/>
         </p:spPr>
@@ -11926,11 +12148,11 @@
             </a:avLst>
           </a:prstGeom>
           <a:solidFill>
-            <a:srgbClr val="1C1140"/>
+            <a:srgbClr val="1A0B3D"/>
           </a:solidFill>
           <a:ln w="12700">
             <a:solidFill>
-              <a:srgbClr val="C9A6FF"/>
+              <a:srgbClr val="A98BFF"/>
             </a:solidFill>
             <a:prstDash val="solid"/>
           </a:ln>
@@ -11951,7 +12173,7 @@
             <a:avLst/>
           </a:prstGeom>
           <a:solidFill>
-            <a:srgbClr val="C9A6FF"/>
+            <a:srgbClr val="A98BFF"/>
           </a:solidFill>
           <a:ln/>
         </p:spPr>
@@ -11971,7 +12193,7 @@
             <a:avLst/>
           </a:prstGeom>
           <a:solidFill>
-            <a:srgbClr val="C9A6FF"/>
+            <a:srgbClr val="A98BFF"/>
           </a:solidFill>
           <a:ln/>
         </p:spPr>
@@ -12042,7 +12264,7 @@
             <a:r>
               <a:rPr lang="en-US" sz="1200" i="1" dirty="0">
                 <a:solidFill>
-                  <a:srgbClr val="8A82A0"/>
+                  <a:srgbClr val="9A94AA"/>
                 </a:solidFill>
                 <a:latin typeface="Montserrat" pitchFamily="34" charset="0"/>
                 <a:ea typeface="Montserrat" pitchFamily="34" charset="-122"/>
@@ -12084,7 +12306,7 @@
             <a:lvl1pPr>
               <a:defRPr sz="850">
                 <a:solidFill>
-                  <a:srgbClr val="8A82A0"/>
+                  <a:srgbClr val="9A94AA"/>
                 </a:solidFill>
                 <a:latin typeface="Courier New"/>
                 <a:ea typeface="Courier New"/>
@@ -12196,7 +12418,7 @@
             <a:r>
               <a:rPr lang="en-US" sz="1300" dirty="0">
                 <a:solidFill>
-                  <a:srgbClr val="AFA9BE"/>
+                  <a:srgbClr val="C9C4D6"/>
                 </a:solidFill>
                 <a:latin typeface="Montserrat" pitchFamily="34" charset="0"/>
                 <a:ea typeface="Montserrat" pitchFamily="34" charset="-122"/>
@@ -12225,9 +12447,14 @@
             </a:avLst>
           </a:prstGeom>
           <a:solidFill>
-            <a:srgbClr val="C9A6FF"/>
+            <a:srgbClr val="1A0B3D"/>
           </a:solidFill>
-          <a:ln/>
+          <a:ln w="12700">
+            <a:solidFill>
+              <a:srgbClr val="5A05F4"/>
+            </a:solidFill>
+            <a:prstDash val="solid"/>
+          </a:ln>
         </p:spPr>
       </p:sp>
       <p:sp>
@@ -12257,7 +12484,7 @@
             <a:r>
               <a:rPr lang="en-US" sz="900" b="1" spc="100" kern="0" dirty="0">
                 <a:solidFill>
-                  <a:srgbClr val="1C1140"/>
+                  <a:srgbClr val="A98BFF"/>
                 </a:solidFill>
                 <a:latin typeface="Courier New" pitchFamily="34" charset="0"/>
                 <a:ea typeface="Courier New" pitchFamily="34" charset="-122"/>
@@ -12310,11 +12537,11 @@
             </a:avLst>
           </a:prstGeom>
           <a:solidFill>
-            <a:srgbClr val="17141F"/>
+            <a:srgbClr val="000000"/>
           </a:solidFill>
           <a:ln w="12700">
             <a:solidFill>
-              <a:srgbClr val="2E2A3A"/>
+              <a:srgbClr val="5E4F85"/>
             </a:solidFill>
             <a:prstDash val="solid"/>
           </a:ln>
@@ -12448,7 +12675,7 @@
             <a:r>
               <a:rPr lang="en-US" sz="1200" dirty="0">
                 <a:solidFill>
-                  <a:srgbClr val="AFA9BE"/>
+                  <a:srgbClr val="C9C4D6"/>
                 </a:solidFill>
                 <a:latin typeface="Montserrat" pitchFamily="34" charset="0"/>
                 <a:ea typeface="Montserrat" pitchFamily="34" charset="-122"/>
@@ -12477,11 +12704,11 @@
             </a:avLst>
           </a:prstGeom>
           <a:solidFill>
-            <a:srgbClr val="17141F"/>
+            <a:srgbClr val="000000"/>
           </a:solidFill>
           <a:ln w="12700">
             <a:solidFill>
-              <a:srgbClr val="2E2A3A"/>
+              <a:srgbClr val="5E4F85"/>
             </a:solidFill>
             <a:prstDash val="solid"/>
           </a:ln>
@@ -12615,7 +12842,7 @@
             <a:r>
               <a:rPr lang="en-US" sz="1200" dirty="0">
                 <a:solidFill>
-                  <a:srgbClr val="AFA9BE"/>
+                  <a:srgbClr val="C9C4D6"/>
                 </a:solidFill>
                 <a:latin typeface="Montserrat" pitchFamily="34" charset="0"/>
                 <a:ea typeface="Montserrat" pitchFamily="34" charset="-122"/>
@@ -12644,11 +12871,11 @@
             </a:avLst>
           </a:prstGeom>
           <a:solidFill>
-            <a:srgbClr val="17141F"/>
+            <a:srgbClr val="000000"/>
           </a:solidFill>
           <a:ln w="12700">
             <a:solidFill>
-              <a:srgbClr val="2E2A3A"/>
+              <a:srgbClr val="5E4F85"/>
             </a:solidFill>
             <a:prstDash val="solid"/>
           </a:ln>
@@ -12782,7 +13009,7 @@
             <a:r>
               <a:rPr lang="en-US" sz="1200" dirty="0">
                 <a:solidFill>
-                  <a:srgbClr val="AFA9BE"/>
+                  <a:srgbClr val="C9C4D6"/>
                 </a:solidFill>
                 <a:latin typeface="Montserrat" pitchFamily="34" charset="0"/>
                 <a:ea typeface="Montserrat" pitchFamily="34" charset="-122"/>
@@ -12811,11 +13038,11 @@
             </a:avLst>
           </a:prstGeom>
           <a:solidFill>
-            <a:srgbClr val="17141F"/>
+            <a:srgbClr val="000000"/>
           </a:solidFill>
           <a:ln w="12700">
             <a:solidFill>
-              <a:srgbClr val="2E2A3A"/>
+              <a:srgbClr val="5E4F85"/>
             </a:solidFill>
             <a:prstDash val="solid"/>
           </a:ln>
@@ -12949,7 +13176,7 @@
             <a:r>
               <a:rPr lang="en-US" sz="1200" dirty="0">
                 <a:solidFill>
-                  <a:srgbClr val="AFA9BE"/>
+                  <a:srgbClr val="C9C4D6"/>
                 </a:solidFill>
                 <a:latin typeface="Montserrat" pitchFamily="34" charset="0"/>
                 <a:ea typeface="Montserrat" pitchFamily="34" charset="-122"/>
@@ -12978,11 +13205,11 @@
             </a:avLst>
           </a:prstGeom>
           <a:solidFill>
-            <a:srgbClr val="17141F"/>
+            <a:srgbClr val="000000"/>
           </a:solidFill>
           <a:ln w="12700">
             <a:solidFill>
-              <a:srgbClr val="2E2A3A"/>
+              <a:srgbClr val="5E4F85"/>
             </a:solidFill>
             <a:prstDash val="solid"/>
           </a:ln>
@@ -13116,7 +13343,7 @@
             <a:r>
               <a:rPr lang="en-US" sz="1200" dirty="0">
                 <a:solidFill>
-                  <a:srgbClr val="AFA9BE"/>
+                  <a:srgbClr val="C9C4D6"/>
                 </a:solidFill>
                 <a:latin typeface="Montserrat" pitchFamily="34" charset="0"/>
                 <a:ea typeface="Montserrat" pitchFamily="34" charset="-122"/>
@@ -13158,7 +13385,7 @@
             <a:lvl1pPr>
               <a:defRPr sz="850">
                 <a:solidFill>
-                  <a:srgbClr val="8A82A0"/>
+                  <a:srgbClr val="9A94AA"/>
                 </a:solidFill>
                 <a:latin typeface="Courier New"/>
                 <a:ea typeface="Courier New"/>
@@ -13257,9 +13484,14 @@
             </a:avLst>
           </a:prstGeom>
           <a:solidFill>
-            <a:srgbClr val="E8A857"/>
+            <a:srgbClr val="0B1A38"/>
           </a:solidFill>
-          <a:ln/>
+          <a:ln w="12700">
+            <a:solidFill>
+              <a:srgbClr val="6BA0F8"/>
+            </a:solidFill>
+            <a:prstDash val="solid"/>
+          </a:ln>
         </p:spPr>
       </p:sp>
       <p:sp>
@@ -13289,7 +13521,7 @@
             <a:r>
               <a:rPr lang="en-US" sz="900" b="1" spc="100" kern="0" dirty="0">
                 <a:solidFill>
-                  <a:srgbClr val="2A2010"/>
+                  <a:srgbClr val="6BA0F8"/>
                 </a:solidFill>
                 <a:latin typeface="Courier New" pitchFamily="34" charset="0"/>
                 <a:ea typeface="Courier New" pitchFamily="34" charset="-122"/>
@@ -13342,11 +13574,11 @@
             </a:avLst>
           </a:prstGeom>
           <a:solidFill>
-            <a:srgbClr val="17141F"/>
+            <a:srgbClr val="000000"/>
           </a:solidFill>
           <a:ln w="12700">
             <a:solidFill>
-              <a:srgbClr val="2E2A3A"/>
+              <a:srgbClr val="5E4F85"/>
             </a:solidFill>
             <a:prstDash val="solid"/>
           </a:ln>
@@ -13367,7 +13599,7 @@
             <a:avLst/>
           </a:prstGeom>
           <a:solidFill>
-            <a:srgbClr val="2E1418"/>
+            <a:srgbClr val="1A0808"/>
           </a:solidFill>
           <a:ln/>
         </p:spPr>
@@ -13387,7 +13619,7 @@
             <a:avLst/>
           </a:prstGeom>
           <a:solidFill>
-            <a:srgbClr val="FF7B7B"/>
+            <a:srgbClr val="FF6B6B"/>
           </a:solidFill>
           <a:ln/>
         </p:spPr>
@@ -13407,7 +13639,7 @@
             <a:avLst/>
           </a:prstGeom>
           <a:solidFill>
-            <a:srgbClr val="FF7B7B"/>
+            <a:srgbClr val="FF6B6B"/>
           </a:solidFill>
           <a:ln/>
         </p:spPr>
@@ -13453,7 +13685,7 @@
             <a:r>
               <a:rPr lang="en-US" sz="1150" dirty="0">
                 <a:solidFill>
-                  <a:srgbClr val="AFA9BE"/>
+                  <a:srgbClr val="C9C4D6"/>
                 </a:solidFill>
                 <a:latin typeface="Montserrat" pitchFamily="34" charset="0"/>
                 <a:ea typeface="Montserrat" pitchFamily="34" charset="-122"/>
@@ -13482,11 +13714,11 @@
             </a:avLst>
           </a:prstGeom>
           <a:solidFill>
-            <a:srgbClr val="17141F"/>
+            <a:srgbClr val="000000"/>
           </a:solidFill>
           <a:ln w="12700">
             <a:solidFill>
-              <a:srgbClr val="2E2A3A"/>
+              <a:srgbClr val="5E4F85"/>
             </a:solidFill>
             <a:prstDash val="solid"/>
           </a:ln>
@@ -13507,7 +13739,7 @@
             <a:avLst/>
           </a:prstGeom>
           <a:solidFill>
-            <a:srgbClr val="2E1418"/>
+            <a:srgbClr val="1A0808"/>
           </a:solidFill>
           <a:ln/>
         </p:spPr>
@@ -13527,7 +13759,7 @@
             <a:avLst/>
           </a:prstGeom>
           <a:solidFill>
-            <a:srgbClr val="FF7B7B"/>
+            <a:srgbClr val="FF6B6B"/>
           </a:solidFill>
           <a:ln/>
         </p:spPr>
@@ -13547,7 +13779,7 @@
             <a:avLst/>
           </a:prstGeom>
           <a:solidFill>
-            <a:srgbClr val="FF7B7B"/>
+            <a:srgbClr val="FF6B6B"/>
           </a:solidFill>
           <a:ln/>
         </p:spPr>
@@ -13593,7 +13825,7 @@
             <a:r>
               <a:rPr lang="en-US" sz="1150" dirty="0">
                 <a:solidFill>
-                  <a:srgbClr val="AFA9BE"/>
+                  <a:srgbClr val="C9C4D6"/>
                 </a:solidFill>
                 <a:latin typeface="Montserrat" pitchFamily="34" charset="0"/>
                 <a:ea typeface="Montserrat" pitchFamily="34" charset="-122"/>
@@ -13622,11 +13854,11 @@
             </a:avLst>
           </a:prstGeom>
           <a:solidFill>
-            <a:srgbClr val="17141F"/>
+            <a:srgbClr val="000000"/>
           </a:solidFill>
           <a:ln w="12700">
             <a:solidFill>
-              <a:srgbClr val="2E2A3A"/>
+              <a:srgbClr val="5E4F85"/>
             </a:solidFill>
             <a:prstDash val="solid"/>
           </a:ln>
@@ -13647,7 +13879,7 @@
             <a:avLst/>
           </a:prstGeom>
           <a:solidFill>
-            <a:srgbClr val="2E1418"/>
+            <a:srgbClr val="1A0808"/>
           </a:solidFill>
           <a:ln/>
         </p:spPr>
@@ -13667,7 +13899,7 @@
             <a:avLst/>
           </a:prstGeom>
           <a:solidFill>
-            <a:srgbClr val="FF7B7B"/>
+            <a:srgbClr val="FF6B6B"/>
           </a:solidFill>
           <a:ln/>
         </p:spPr>
@@ -13687,7 +13919,7 @@
             <a:avLst/>
           </a:prstGeom>
           <a:solidFill>
-            <a:srgbClr val="FF7B7B"/>
+            <a:srgbClr val="FF6B6B"/>
           </a:solidFill>
           <a:ln/>
         </p:spPr>
@@ -13733,7 +13965,7 @@
             <a:r>
               <a:rPr lang="en-US" sz="1150" dirty="0">
                 <a:solidFill>
-                  <a:srgbClr val="AFA9BE"/>
+                  <a:srgbClr val="C9C4D6"/>
                 </a:solidFill>
                 <a:latin typeface="Montserrat" pitchFamily="34" charset="0"/>
                 <a:ea typeface="Montserrat" pitchFamily="34" charset="-122"/>
@@ -13762,11 +13994,11 @@
             </a:avLst>
           </a:prstGeom>
           <a:solidFill>
-            <a:srgbClr val="17141F"/>
+            <a:srgbClr val="000000"/>
           </a:solidFill>
           <a:ln w="12700">
             <a:solidFill>
-              <a:srgbClr val="2E2A3A"/>
+              <a:srgbClr val="5E4F85"/>
             </a:solidFill>
             <a:prstDash val="solid"/>
           </a:ln>
@@ -13787,7 +14019,7 @@
             <a:avLst/>
           </a:prstGeom>
           <a:solidFill>
-            <a:srgbClr val="2E1418"/>
+            <a:srgbClr val="1A0808"/>
           </a:solidFill>
           <a:ln/>
         </p:spPr>
@@ -13807,7 +14039,7 @@
             <a:avLst/>
           </a:prstGeom>
           <a:solidFill>
-            <a:srgbClr val="FF7B7B"/>
+            <a:srgbClr val="FF6B6B"/>
           </a:solidFill>
           <a:ln/>
         </p:spPr>
@@ -13827,7 +14059,7 @@
             <a:avLst/>
           </a:prstGeom>
           <a:solidFill>
-            <a:srgbClr val="FF7B7B"/>
+            <a:srgbClr val="FF6B6B"/>
           </a:solidFill>
           <a:ln/>
         </p:spPr>
@@ -13873,7 +14105,7 @@
             <a:r>
               <a:rPr lang="en-US" sz="1150" dirty="0">
                 <a:solidFill>
-                  <a:srgbClr val="AFA9BE"/>
+                  <a:srgbClr val="C9C4D6"/>
                 </a:solidFill>
                 <a:latin typeface="Montserrat" pitchFamily="34" charset="0"/>
                 <a:ea typeface="Montserrat" pitchFamily="34" charset="-122"/>
@@ -13902,11 +14134,11 @@
             </a:avLst>
           </a:prstGeom>
           <a:solidFill>
-            <a:srgbClr val="17141F"/>
+            <a:srgbClr val="000000"/>
           </a:solidFill>
           <a:ln w="12700">
             <a:solidFill>
-              <a:srgbClr val="2E2A3A"/>
+              <a:srgbClr val="5E4F85"/>
             </a:solidFill>
             <a:prstDash val="solid"/>
           </a:ln>
@@ -13927,7 +14159,7 @@
             <a:avLst/>
           </a:prstGeom>
           <a:solidFill>
-            <a:srgbClr val="2E1418"/>
+            <a:srgbClr val="1A0808"/>
           </a:solidFill>
           <a:ln/>
         </p:spPr>
@@ -13947,7 +14179,7 @@
             <a:avLst/>
           </a:prstGeom>
           <a:solidFill>
-            <a:srgbClr val="FF7B7B"/>
+            <a:srgbClr val="FF6B6B"/>
           </a:solidFill>
           <a:ln/>
         </p:spPr>
@@ -13967,7 +14199,7 @@
             <a:avLst/>
           </a:prstGeom>
           <a:solidFill>
-            <a:srgbClr val="FF7B7B"/>
+            <a:srgbClr val="FF6B6B"/>
           </a:solidFill>
           <a:ln/>
         </p:spPr>
@@ -14013,7 +14245,7 @@
             <a:r>
               <a:rPr lang="en-US" sz="1150" dirty="0">
                 <a:solidFill>
-                  <a:srgbClr val="AFA9BE"/>
+                  <a:srgbClr val="C9C4D6"/>
                 </a:solidFill>
                 <a:latin typeface="Montserrat" pitchFamily="34" charset="0"/>
                 <a:ea typeface="Montserrat" pitchFamily="34" charset="-122"/>
@@ -14055,7 +14287,7 @@
             <a:lvl1pPr>
               <a:defRPr sz="850">
                 <a:solidFill>
-                  <a:srgbClr val="8A82A0"/>
+                  <a:srgbClr val="9A94AA"/>
                 </a:solidFill>
                 <a:latin typeface="Courier New"/>
                 <a:ea typeface="Courier New"/>
@@ -14154,7 +14386,7 @@
             </a:avLst>
           </a:prstGeom>
           <a:solidFill>
-            <a:srgbClr val="5FD6A0"/>
+            <a:srgbClr val="5A05F4"/>
           </a:solidFill>
           <a:ln/>
         </p:spPr>
@@ -14186,7 +14418,7 @@
             <a:r>
               <a:rPr lang="en-US" sz="900" b="1" spc="100" kern="0" dirty="0">
                 <a:solidFill>
-                  <a:srgbClr val="102A20"/>
+                  <a:srgbClr val="FFFFFF"/>
                 </a:solidFill>
                 <a:latin typeface="Courier New" pitchFamily="34" charset="0"/>
                 <a:ea typeface="Courier New" pitchFamily="34" charset="-122"/>
@@ -14239,11 +14471,11 @@
             </a:avLst>
           </a:prstGeom>
           <a:solidFill>
-            <a:srgbClr val="17141F"/>
+            <a:srgbClr val="000000"/>
           </a:solidFill>
           <a:ln w="12700">
             <a:solidFill>
-              <a:srgbClr val="2E2A3A"/>
+              <a:srgbClr val="5E4F85"/>
             </a:solidFill>
             <a:prstDash val="solid"/>
           </a:ln>
@@ -14318,7 +14550,7 @@
             <a:r>
               <a:rPr lang="en-US" sz="1200" dirty="0">
                 <a:solidFill>
-                  <a:srgbClr val="AFA9BE"/>
+                  <a:srgbClr val="C9C4D6"/>
                 </a:solidFill>
                 <a:latin typeface="Montserrat" pitchFamily="34" charset="0"/>
                 <a:ea typeface="Montserrat" pitchFamily="34" charset="-122"/>
@@ -14347,7 +14579,7 @@
             <a:r>
               <a:rPr lang="en-US" sz="1200" dirty="0">
                 <a:solidFill>
-                  <a:srgbClr val="AFA9BE"/>
+                  <a:srgbClr val="C9C4D6"/>
                 </a:solidFill>
                 <a:latin typeface="Montserrat" pitchFamily="34" charset="0"/>
                 <a:ea typeface="Montserrat" pitchFamily="34" charset="-122"/>
@@ -14376,7 +14608,7 @@
             <a:r>
               <a:rPr lang="en-US" sz="1200" dirty="0">
                 <a:solidFill>
-                  <a:srgbClr val="AFA9BE"/>
+                  <a:srgbClr val="C9C4D6"/>
                 </a:solidFill>
                 <a:latin typeface="Montserrat" pitchFamily="34" charset="0"/>
                 <a:ea typeface="Montserrat" pitchFamily="34" charset="-122"/>
@@ -14405,9 +14637,14 @@
             </a:avLst>
           </a:prstGeom>
           <a:solidFill>
-            <a:srgbClr val="2A2010"/>
+            <a:srgbClr val="0B1A38"/>
           </a:solidFill>
-          <a:ln/>
+          <a:ln w="12700">
+            <a:solidFill>
+              <a:srgbClr val="6BA0F8"/>
+            </a:solidFill>
+            <a:prstDash val="solid"/>
+          </a:ln>
         </p:spPr>
       </p:sp>
       <p:sp>
@@ -14437,7 +14674,7 @@
             <a:r>
               <a:rPr lang="en-US" sz="1450" b="1" dirty="0">
                 <a:solidFill>
-                  <a:srgbClr val="E8A857"/>
+                  <a:srgbClr val="6BA0F8"/>
                 </a:solidFill>
                 <a:latin typeface="Montserrat" pitchFamily="34" charset="0"/>
                 <a:ea typeface="Montserrat" pitchFamily="34" charset="-122"/>
@@ -14479,7 +14716,7 @@
             <a:r>
               <a:rPr lang="en-US" sz="1200" dirty="0">
                 <a:solidFill>
-                  <a:srgbClr val="FFFFFF"/>
+                  <a:srgbClr val="C9C4D6"/>
                 </a:solidFill>
                 <a:latin typeface="Montserrat" pitchFamily="34" charset="0"/>
                 <a:ea typeface="Montserrat" pitchFamily="34" charset="-122"/>
@@ -14508,11 +14745,11 @@
             </a:avLst>
           </a:prstGeom>
           <a:solidFill>
-            <a:srgbClr val="17141F"/>
+            <a:srgbClr val="000000"/>
           </a:solidFill>
           <a:ln w="19050">
             <a:solidFill>
-              <a:srgbClr val="C9A6FF"/>
+              <a:srgbClr val="A98BFF"/>
             </a:solidFill>
             <a:prstDash val="solid"/>
           </a:ln>
@@ -14545,7 +14782,7 @@
             <a:r>
               <a:rPr lang="en-US" sz="1500" b="1" dirty="0">
                 <a:solidFill>
-                  <a:srgbClr val="C9A6FF"/>
+                  <a:srgbClr val="A98BFF"/>
                 </a:solidFill>
                 <a:latin typeface="Montserrat" pitchFamily="34" charset="0"/>
                 <a:ea typeface="Montserrat" pitchFamily="34" charset="-122"/>
@@ -14626,7 +14863,7 @@
             <a:lvl1pPr>
               <a:defRPr sz="850">
                 <a:solidFill>
-                  <a:srgbClr val="8A82A0"/>
+                  <a:srgbClr val="9A94AA"/>
                 </a:solidFill>
                 <a:latin typeface="Courier New"/>
                 <a:ea typeface="Courier New"/>
@@ -14735,7 +14972,7 @@
             <a:r>
               <a:rPr lang="en-US" sz="1100" b="1" spc="300" kern="0" dirty="0">
                 <a:solidFill>
-                  <a:srgbClr val="C9B8FB"/>
+                  <a:srgbClr val="C4B3F5"/>
                 </a:solidFill>
                 <a:latin typeface="Courier New" pitchFamily="34" charset="0"/>
                 <a:ea typeface="Courier New" pitchFamily="34" charset="-122"/>
@@ -15074,11 +15311,11 @@
             </a:avLst>
           </a:prstGeom>
           <a:solidFill>
-            <a:srgbClr val="17141F"/>
+            <a:srgbClr val="000000"/>
           </a:solidFill>
           <a:ln w="12700">
             <a:solidFill>
-              <a:srgbClr val="2E2A3A"/>
+              <a:srgbClr val="5E4F85"/>
             </a:solidFill>
             <a:prstDash val="solid"/>
           </a:ln>
@@ -15111,7 +15348,7 @@
             <a:r>
               <a:rPr lang="en-US" sz="1500" b="1" dirty="0">
                 <a:solidFill>
-                  <a:srgbClr val="C9A6FF"/>
+                  <a:srgbClr val="A98BFF"/>
                 </a:solidFill>
                 <a:latin typeface="Montserrat" pitchFamily="34" charset="0"/>
                 <a:ea typeface="Montserrat" pitchFamily="34" charset="-122"/>
@@ -15246,9 +15483,14 @@
             </a:avLst>
           </a:prstGeom>
           <a:solidFill>
-            <a:srgbClr val="C9A6FF"/>
+            <a:srgbClr val="1A0B3D"/>
           </a:solidFill>
-          <a:ln/>
+          <a:ln w="12700">
+            <a:solidFill>
+              <a:srgbClr val="5A05F4"/>
+            </a:solidFill>
+            <a:prstDash val="solid"/>
+          </a:ln>
         </p:spPr>
       </p:sp>
       <p:sp>
@@ -15278,7 +15520,7 @@
             <a:r>
               <a:rPr lang="en-US" sz="900" b="1" spc="100" kern="0" dirty="0">
                 <a:solidFill>
-                  <a:srgbClr val="1C1140"/>
+                  <a:srgbClr val="A98BFF"/>
                 </a:solidFill>
                 <a:latin typeface="Courier New" pitchFamily="34" charset="0"/>
                 <a:ea typeface="Courier New" pitchFamily="34" charset="-122"/>
@@ -15331,11 +15573,11 @@
             </a:avLst>
           </a:prstGeom>
           <a:solidFill>
-            <a:srgbClr val="17141F"/>
+            <a:srgbClr val="000000"/>
           </a:solidFill>
           <a:ln w="12700">
             <a:solidFill>
-              <a:srgbClr val="2E2A3A"/>
+              <a:srgbClr val="5E4F85"/>
             </a:solidFill>
             <a:prstDash val="solid"/>
           </a:ln>
@@ -15456,11 +15698,11 @@
             </a:avLst>
           </a:prstGeom>
           <a:solidFill>
-            <a:srgbClr val="17141F"/>
+            <a:srgbClr val="000000"/>
           </a:solidFill>
           <a:ln w="12700">
             <a:solidFill>
-              <a:srgbClr val="2E2A3A"/>
+              <a:srgbClr val="5E4F85"/>
             </a:solidFill>
             <a:prstDash val="solid"/>
           </a:ln>
@@ -15581,11 +15823,11 @@
             </a:avLst>
           </a:prstGeom>
           <a:solidFill>
-            <a:srgbClr val="17141F"/>
+            <a:srgbClr val="000000"/>
           </a:solidFill>
           <a:ln w="12700">
             <a:solidFill>
-              <a:srgbClr val="2E2A3A"/>
+              <a:srgbClr val="5E4F85"/>
             </a:solidFill>
             <a:prstDash val="solid"/>
           </a:ln>
@@ -15706,11 +15948,11 @@
             </a:avLst>
           </a:prstGeom>
           <a:solidFill>
-            <a:srgbClr val="17141F"/>
+            <a:srgbClr val="000000"/>
           </a:solidFill>
           <a:ln w="12700">
             <a:solidFill>
-              <a:srgbClr val="2E2A3A"/>
+              <a:srgbClr val="5E4F85"/>
             </a:solidFill>
             <a:prstDash val="solid"/>
           </a:ln>
@@ -15831,11 +16073,11 @@
             </a:avLst>
           </a:prstGeom>
           <a:solidFill>
-            <a:srgbClr val="17141F"/>
+            <a:srgbClr val="000000"/>
           </a:solidFill>
           <a:ln w="12700">
             <a:solidFill>
-              <a:srgbClr val="2E2A3A"/>
+              <a:srgbClr val="5E4F85"/>
             </a:solidFill>
             <a:prstDash val="solid"/>
           </a:ln>
@@ -15956,11 +16198,11 @@
             </a:avLst>
           </a:prstGeom>
           <a:solidFill>
-            <a:srgbClr val="17141F"/>
+            <a:srgbClr val="000000"/>
           </a:solidFill>
           <a:ln w="12700">
             <a:solidFill>
-              <a:srgbClr val="2E2A3A"/>
+              <a:srgbClr val="5E4F85"/>
             </a:solidFill>
             <a:prstDash val="solid"/>
           </a:ln>
@@ -16081,11 +16323,11 @@
             </a:avLst>
           </a:prstGeom>
           <a:solidFill>
-            <a:srgbClr val="17141F"/>
+            <a:srgbClr val="000000"/>
           </a:solidFill>
           <a:ln w="12700">
             <a:solidFill>
-              <a:srgbClr val="2E2A3A"/>
+              <a:srgbClr val="5E4F85"/>
             </a:solidFill>
             <a:prstDash val="solid"/>
           </a:ln>
@@ -16206,9 +16448,14 @@
             </a:avLst>
           </a:prstGeom>
           <a:solidFill>
-            <a:srgbClr val="2A2010"/>
+            <a:srgbClr val="0B1A38"/>
           </a:solidFill>
-          <a:ln/>
+          <a:ln w="12700">
+            <a:solidFill>
+              <a:srgbClr val="6BA0F8"/>
+            </a:solidFill>
+            <a:prstDash val="solid"/>
+          </a:ln>
         </p:spPr>
       </p:sp>
       <p:sp>
@@ -16226,7 +16473,7 @@
             <a:avLst/>
           </a:prstGeom>
           <a:solidFill>
-            <a:srgbClr val="E8A857"/>
+            <a:srgbClr val="5A05F4"/>
           </a:solidFill>
           <a:ln/>
         </p:spPr>
@@ -16258,7 +16505,7 @@
             <a:r>
               <a:rPr lang="en-US" sz="1200" b="1" dirty="0">
                 <a:solidFill>
-                  <a:srgbClr val="2A2010"/>
+                  <a:srgbClr val="FFFFFF"/>
                 </a:solidFill>
                 <a:latin typeface="Courier New" pitchFamily="34" charset="0"/>
                 <a:ea typeface="Courier New" pitchFamily="34" charset="-122"/>
@@ -16297,7 +16544,7 @@
             <a:r>
               <a:rPr lang="en-US" sz="1450" b="1" dirty="0">
                 <a:solidFill>
-                  <a:srgbClr val="E8A857"/>
+                  <a:srgbClr val="6BA0F8"/>
                 </a:solidFill>
                 <a:latin typeface="Montserrat" pitchFamily="34" charset="0"/>
                 <a:ea typeface="Montserrat" pitchFamily="34" charset="-122"/>
@@ -16326,11 +16573,11 @@
             </a:avLst>
           </a:prstGeom>
           <a:solidFill>
-            <a:srgbClr val="17141F"/>
+            <a:srgbClr val="000000"/>
           </a:solidFill>
           <a:ln w="12700">
             <a:solidFill>
-              <a:srgbClr val="2E2A3A"/>
+              <a:srgbClr val="5E4F85"/>
             </a:solidFill>
             <a:prstDash val="solid"/>
           </a:ln>
@@ -16451,11 +16698,11 @@
             </a:avLst>
           </a:prstGeom>
           <a:solidFill>
-            <a:srgbClr val="17141F"/>
+            <a:srgbClr val="000000"/>
           </a:solidFill>
           <a:ln w="12700">
             <a:solidFill>
-              <a:srgbClr val="2E2A3A"/>
+              <a:srgbClr val="5E4F85"/>
             </a:solidFill>
             <a:prstDash val="solid"/>
           </a:ln>
@@ -16576,11 +16823,11 @@
             </a:avLst>
           </a:prstGeom>
           <a:solidFill>
-            <a:srgbClr val="17141F"/>
+            <a:srgbClr val="000000"/>
           </a:solidFill>
           <a:ln w="12700">
             <a:solidFill>
-              <a:srgbClr val="2E2A3A"/>
+              <a:srgbClr val="5E4F85"/>
             </a:solidFill>
             <a:prstDash val="solid"/>
           </a:ln>
@@ -16701,11 +16948,11 @@
             </a:avLst>
           </a:prstGeom>
           <a:solidFill>
-            <a:srgbClr val="17141F"/>
+            <a:srgbClr val="000000"/>
           </a:solidFill>
           <a:ln w="12700">
             <a:solidFill>
-              <a:srgbClr val="2E2A3A"/>
+              <a:srgbClr val="5E4F85"/>
             </a:solidFill>
             <a:prstDash val="solid"/>
           </a:ln>
@@ -16783,7 +17030,7 @@
             <a:lvl1pPr>
               <a:defRPr sz="850">
                 <a:solidFill>
-                  <a:srgbClr val="8A82A0"/>
+                  <a:srgbClr val="9A94AA"/>
                 </a:solidFill>
                 <a:latin typeface="Courier New"/>
                 <a:ea typeface="Courier New"/>
@@ -16895,7 +17142,7 @@
             <a:r>
               <a:rPr lang="en-US" sz="1300" dirty="0">
                 <a:solidFill>
-                  <a:srgbClr val="AFA9BE"/>
+                  <a:srgbClr val="C9C4D6"/>
                 </a:solidFill>
                 <a:latin typeface="Montserrat" pitchFamily="34" charset="0"/>
                 <a:ea typeface="Montserrat" pitchFamily="34" charset="-122"/>
@@ -16924,9 +17171,14 @@
             </a:avLst>
           </a:prstGeom>
           <a:solidFill>
-            <a:srgbClr val="C9A6FF"/>
+            <a:srgbClr val="1A0B3D"/>
           </a:solidFill>
-          <a:ln/>
+          <a:ln w="12700">
+            <a:solidFill>
+              <a:srgbClr val="5A05F4"/>
+            </a:solidFill>
+            <a:prstDash val="solid"/>
+          </a:ln>
         </p:spPr>
       </p:sp>
       <p:sp>
@@ -16956,7 +17208,7 @@
             <a:r>
               <a:rPr lang="en-US" sz="900" b="1" spc="100" kern="0" dirty="0">
                 <a:solidFill>
-                  <a:srgbClr val="1C1140"/>
+                  <a:srgbClr val="A98BFF"/>
                 </a:solidFill>
                 <a:latin typeface="Courier New" pitchFamily="34" charset="0"/>
                 <a:ea typeface="Courier New" pitchFamily="34" charset="-122"/>
@@ -17009,11 +17261,11 @@
             </a:avLst>
           </a:prstGeom>
           <a:solidFill>
-            <a:srgbClr val="17141F"/>
+            <a:srgbClr val="000000"/>
           </a:solidFill>
           <a:ln w="12700">
             <a:solidFill>
-              <a:srgbClr val="2E2A3A"/>
+              <a:srgbClr val="5E4F85"/>
             </a:solidFill>
             <a:prstDash val="solid"/>
           </a:ln>
@@ -17046,7 +17298,7 @@
             <a:r>
               <a:rPr lang="en-US" sz="1250" b="1" dirty="0">
                 <a:solidFill>
-                  <a:srgbClr val="C9A6FF"/>
+                  <a:srgbClr val="A98BFF"/>
                 </a:solidFill>
                 <a:latin typeface="Courier New" pitchFamily="34" charset="0"/>
                 <a:ea typeface="Courier New" pitchFamily="34" charset="-122"/>
@@ -17088,7 +17340,7 @@
             <a:r>
               <a:rPr lang="en-US" sz="1150" dirty="0">
                 <a:solidFill>
-                  <a:srgbClr val="AFA9BE"/>
+                  <a:srgbClr val="C9C4D6"/>
                 </a:solidFill>
                 <a:latin typeface="Montserrat" pitchFamily="34" charset="0"/>
                 <a:ea typeface="Montserrat" pitchFamily="34" charset="-122"/>
@@ -17117,11 +17369,11 @@
             </a:avLst>
           </a:prstGeom>
           <a:solidFill>
-            <a:srgbClr val="17141F"/>
+            <a:srgbClr val="000000"/>
           </a:solidFill>
           <a:ln w="12700">
             <a:solidFill>
-              <a:srgbClr val="2E2A3A"/>
+              <a:srgbClr val="5E4F85"/>
             </a:solidFill>
             <a:prstDash val="solid"/>
           </a:ln>
@@ -17154,7 +17406,7 @@
             <a:r>
               <a:rPr lang="en-US" sz="1250" b="1" dirty="0">
                 <a:solidFill>
-                  <a:srgbClr val="C9A6FF"/>
+                  <a:srgbClr val="A98BFF"/>
                 </a:solidFill>
                 <a:latin typeface="Courier New" pitchFamily="34" charset="0"/>
                 <a:ea typeface="Courier New" pitchFamily="34" charset="-122"/>
@@ -17196,7 +17448,7 @@
             <a:r>
               <a:rPr lang="en-US" sz="1150" dirty="0">
                 <a:solidFill>
-                  <a:srgbClr val="AFA9BE"/>
+                  <a:srgbClr val="C9C4D6"/>
                 </a:solidFill>
                 <a:latin typeface="Montserrat" pitchFamily="34" charset="0"/>
                 <a:ea typeface="Montserrat" pitchFamily="34" charset="-122"/>
@@ -17225,11 +17477,11 @@
             </a:avLst>
           </a:prstGeom>
           <a:solidFill>
-            <a:srgbClr val="17141F"/>
+            <a:srgbClr val="000000"/>
           </a:solidFill>
           <a:ln w="12700">
             <a:solidFill>
-              <a:srgbClr val="2E2A3A"/>
+              <a:srgbClr val="5E4F85"/>
             </a:solidFill>
             <a:prstDash val="solid"/>
           </a:ln>
@@ -17262,7 +17514,7 @@
             <a:r>
               <a:rPr lang="en-US" sz="1250" b="1" dirty="0">
                 <a:solidFill>
-                  <a:srgbClr val="C9A6FF"/>
+                  <a:srgbClr val="A98BFF"/>
                 </a:solidFill>
                 <a:latin typeface="Courier New" pitchFamily="34" charset="0"/>
                 <a:ea typeface="Courier New" pitchFamily="34" charset="-122"/>
@@ -17304,7 +17556,7 @@
             <a:r>
               <a:rPr lang="en-US" sz="1150" dirty="0">
                 <a:solidFill>
-                  <a:srgbClr val="AFA9BE"/>
+                  <a:srgbClr val="C9C4D6"/>
                 </a:solidFill>
                 <a:latin typeface="Montserrat" pitchFamily="34" charset="0"/>
                 <a:ea typeface="Montserrat" pitchFamily="34" charset="-122"/>
@@ -17333,11 +17585,11 @@
             </a:avLst>
           </a:prstGeom>
           <a:solidFill>
-            <a:srgbClr val="17141F"/>
+            <a:srgbClr val="000000"/>
           </a:solidFill>
           <a:ln w="12700">
             <a:solidFill>
-              <a:srgbClr val="2E2A3A"/>
+              <a:srgbClr val="5E4F85"/>
             </a:solidFill>
             <a:prstDash val="solid"/>
           </a:ln>
@@ -17370,7 +17622,7 @@
             <a:r>
               <a:rPr lang="en-US" sz="1250" b="1" dirty="0">
                 <a:solidFill>
-                  <a:srgbClr val="C9A6FF"/>
+                  <a:srgbClr val="A98BFF"/>
                 </a:solidFill>
                 <a:latin typeface="Courier New" pitchFamily="34" charset="0"/>
                 <a:ea typeface="Courier New" pitchFamily="34" charset="-122"/>
@@ -17412,7 +17664,7 @@
             <a:r>
               <a:rPr lang="en-US" sz="1150" dirty="0">
                 <a:solidFill>
-                  <a:srgbClr val="AFA9BE"/>
+                  <a:srgbClr val="C9C4D6"/>
                 </a:solidFill>
                 <a:latin typeface="Montserrat" pitchFamily="34" charset="0"/>
                 <a:ea typeface="Montserrat" pitchFamily="34" charset="-122"/>
@@ -17441,11 +17693,11 @@
             </a:avLst>
           </a:prstGeom>
           <a:solidFill>
-            <a:srgbClr val="17141F"/>
+            <a:srgbClr val="000000"/>
           </a:solidFill>
           <a:ln w="12700">
             <a:solidFill>
-              <a:srgbClr val="2E2A3A"/>
+              <a:srgbClr val="5E4F85"/>
             </a:solidFill>
             <a:prstDash val="solid"/>
           </a:ln>
@@ -17478,7 +17730,7 @@
             <a:r>
               <a:rPr lang="en-US" sz="1250" b="1" dirty="0">
                 <a:solidFill>
-                  <a:srgbClr val="C9A6FF"/>
+                  <a:srgbClr val="A98BFF"/>
                 </a:solidFill>
                 <a:latin typeface="Courier New" pitchFamily="34" charset="0"/>
                 <a:ea typeface="Courier New" pitchFamily="34" charset="-122"/>
@@ -17520,7 +17772,7 @@
             <a:r>
               <a:rPr lang="en-US" sz="1150" dirty="0">
                 <a:solidFill>
-                  <a:srgbClr val="AFA9BE"/>
+                  <a:srgbClr val="C9C4D6"/>
                 </a:solidFill>
                 <a:latin typeface="Montserrat" pitchFamily="34" charset="0"/>
                 <a:ea typeface="Montserrat" pitchFamily="34" charset="-122"/>
@@ -17549,11 +17801,11 @@
             </a:avLst>
           </a:prstGeom>
           <a:solidFill>
-            <a:srgbClr val="17141F"/>
+            <a:srgbClr val="000000"/>
           </a:solidFill>
           <a:ln w="12700">
             <a:solidFill>
-              <a:srgbClr val="2E2A3A"/>
+              <a:srgbClr val="5E4F85"/>
             </a:solidFill>
             <a:prstDash val="solid"/>
           </a:ln>
@@ -17586,7 +17838,7 @@
             <a:r>
               <a:rPr lang="en-US" sz="1250" b="1" dirty="0">
                 <a:solidFill>
-                  <a:srgbClr val="C9A6FF"/>
+                  <a:srgbClr val="A98BFF"/>
                 </a:solidFill>
                 <a:latin typeface="Courier New" pitchFamily="34" charset="0"/>
                 <a:ea typeface="Courier New" pitchFamily="34" charset="-122"/>
@@ -17628,7 +17880,7 @@
             <a:r>
               <a:rPr lang="en-US" sz="1150" dirty="0">
                 <a:solidFill>
-                  <a:srgbClr val="AFA9BE"/>
+                  <a:srgbClr val="C9C4D6"/>
                 </a:solidFill>
                 <a:latin typeface="Montserrat" pitchFamily="34" charset="0"/>
                 <a:ea typeface="Montserrat" pitchFamily="34" charset="-122"/>
@@ -17657,11 +17909,11 @@
             </a:avLst>
           </a:prstGeom>
           <a:solidFill>
-            <a:srgbClr val="17141F"/>
+            <a:srgbClr val="000000"/>
           </a:solidFill>
           <a:ln w="12700">
             <a:solidFill>
-              <a:srgbClr val="2E2A3A"/>
+              <a:srgbClr val="5E4F85"/>
             </a:solidFill>
             <a:prstDash val="solid"/>
           </a:ln>
@@ -17739,7 +17991,7 @@
             <a:lvl1pPr>
               <a:defRPr sz="850">
                 <a:solidFill>
-                  <a:srgbClr val="8A82A0"/>
+                  <a:srgbClr val="9A94AA"/>
                 </a:solidFill>
                 <a:latin typeface="Courier New"/>
                 <a:ea typeface="Courier New"/>
@@ -17809,7 +18061,7 @@
             <a:r>
               <a:rPr lang="en-US" sz="2600" b="1" dirty="0">
                 <a:solidFill>
-                  <a:srgbClr val="C9A6FF"/>
+                  <a:srgbClr val="A98BFF"/>
                 </a:solidFill>
                 <a:latin typeface="Courier New" pitchFamily="34" charset="0"/>
                 <a:ea typeface="Courier New" pitchFamily="34" charset="-122"/>
@@ -17877,9 +18129,14 @@
             </a:avLst>
           </a:prstGeom>
           <a:solidFill>
-            <a:srgbClr val="C9A6FF"/>
+            <a:srgbClr val="1A0B3D"/>
           </a:solidFill>
-          <a:ln/>
+          <a:ln w="12700">
+            <a:solidFill>
+              <a:srgbClr val="5A05F4"/>
+            </a:solidFill>
+            <a:prstDash val="solid"/>
+          </a:ln>
         </p:spPr>
       </p:sp>
       <p:sp>
@@ -17909,7 +18166,7 @@
             <a:r>
               <a:rPr lang="en-US" sz="900" b="1" spc="100" kern="0" dirty="0">
                 <a:solidFill>
-                  <a:srgbClr val="1C1140"/>
+                  <a:srgbClr val="A98BFF"/>
                 </a:solidFill>
                 <a:latin typeface="Courier New" pitchFamily="34" charset="0"/>
                 <a:ea typeface="Courier New" pitchFamily="34" charset="-122"/>
@@ -17962,9 +18219,14 @@
             </a:avLst>
           </a:prstGeom>
           <a:solidFill>
-            <a:srgbClr val="2E1418"/>
+            <a:srgbClr val="1A0808"/>
           </a:solidFill>
-          <a:ln/>
+          <a:ln w="12700">
+            <a:solidFill>
+              <a:srgbClr val="FF6B6B"/>
+            </a:solidFill>
+            <a:prstDash val="solid"/>
+          </a:ln>
         </p:spPr>
       </p:sp>
       <p:sp>
@@ -17994,7 +18256,7 @@
             <a:r>
               <a:rPr lang="en-US" sz="1450" b="1" dirty="0">
                 <a:solidFill>
-                  <a:srgbClr val="FF7B7B"/>
+                  <a:srgbClr val="FF6B6B"/>
                 </a:solidFill>
                 <a:latin typeface="Montserrat" pitchFamily="34" charset="0"/>
                 <a:ea typeface="Montserrat" pitchFamily="34" charset="-122"/>
@@ -18036,7 +18298,7 @@
             <a:r>
               <a:rPr lang="en-US" sz="1200" dirty="0">
                 <a:solidFill>
-                  <a:srgbClr val="FFFFFF"/>
+                  <a:srgbClr val="C9C4D6"/>
                 </a:solidFill>
                 <a:latin typeface="Montserrat" pitchFamily="34" charset="0"/>
                 <a:ea typeface="Montserrat" pitchFamily="34" charset="-122"/>
@@ -18065,9 +18327,14 @@
             </a:avLst>
           </a:prstGeom>
           <a:solidFill>
-            <a:srgbClr val="102A20"/>
+            <a:srgbClr val="06180F"/>
           </a:solidFill>
-          <a:ln/>
+          <a:ln w="12700">
+            <a:solidFill>
+              <a:srgbClr val="3FCF8E"/>
+            </a:solidFill>
+            <a:prstDash val="solid"/>
+          </a:ln>
         </p:spPr>
       </p:sp>
       <p:sp>
@@ -18097,7 +18364,7 @@
             <a:r>
               <a:rPr lang="en-US" sz="1450" b="1" dirty="0">
                 <a:solidFill>
-                  <a:srgbClr val="5FD6A0"/>
+                  <a:srgbClr val="3FCF8E"/>
                 </a:solidFill>
                 <a:latin typeface="Montserrat" pitchFamily="34" charset="0"/>
                 <a:ea typeface="Montserrat" pitchFamily="34" charset="-122"/>
@@ -18139,7 +18406,7 @@
             <a:r>
               <a:rPr lang="en-US" sz="1200" dirty="0">
                 <a:solidFill>
-                  <a:srgbClr val="FFFFFF"/>
+                  <a:srgbClr val="C9C4D6"/>
                 </a:solidFill>
                 <a:latin typeface="Montserrat" pitchFamily="34" charset="0"/>
                 <a:ea typeface="Montserrat" pitchFamily="34" charset="-122"/>
@@ -18232,9 +18499,14 @@
             </a:avLst>
           </a:prstGeom>
           <a:solidFill>
-            <a:srgbClr val="102A20"/>
+            <a:srgbClr val="06180F"/>
           </a:solidFill>
-          <a:ln/>
+          <a:ln w="12700">
+            <a:solidFill>
+              <a:srgbClr val="3FCF8E"/>
+            </a:solidFill>
+            <a:prstDash val="solid"/>
+          </a:ln>
         </p:spPr>
       </p:sp>
       <p:sp>
@@ -18264,7 +18536,7 @@
             <a:r>
               <a:rPr lang="en-US" sz="950" b="1" spc="150" kern="0" dirty="0">
                 <a:solidFill>
-                  <a:srgbClr val="5FD6A0"/>
+                  <a:srgbClr val="3FCF8E"/>
                 </a:solidFill>
                 <a:latin typeface="Courier New" pitchFamily="34" charset="0"/>
                 <a:ea typeface="Courier New" pitchFamily="34" charset="-122"/>
@@ -18348,7 +18620,7 @@
             <a:lvl1pPr>
               <a:defRPr sz="850">
                 <a:solidFill>
-                  <a:srgbClr val="8A82A0"/>
+                  <a:srgbClr val="9A94AA"/>
                 </a:solidFill>
                 <a:latin typeface="Courier New"/>
                 <a:ea typeface="Courier New"/>
@@ -18418,7 +18690,7 @@
             <a:r>
               <a:rPr lang="en-US" sz="2600" b="1" dirty="0">
                 <a:solidFill>
-                  <a:srgbClr val="C9A6FF"/>
+                  <a:srgbClr val="A98BFF"/>
                 </a:solidFill>
                 <a:latin typeface="Courier New" pitchFamily="34" charset="0"/>
                 <a:ea typeface="Courier New" pitchFamily="34" charset="-122"/>
@@ -18486,9 +18758,14 @@
             </a:avLst>
           </a:prstGeom>
           <a:solidFill>
-            <a:srgbClr val="C9A6FF"/>
+            <a:srgbClr val="1A0B3D"/>
           </a:solidFill>
-          <a:ln/>
+          <a:ln w="12700">
+            <a:solidFill>
+              <a:srgbClr val="5A05F4"/>
+            </a:solidFill>
+            <a:prstDash val="solid"/>
+          </a:ln>
         </p:spPr>
       </p:sp>
       <p:sp>
@@ -18518,7 +18795,7 @@
             <a:r>
               <a:rPr lang="en-US" sz="900" b="1" spc="100" kern="0" dirty="0">
                 <a:solidFill>
-                  <a:srgbClr val="1C1140"/>
+                  <a:srgbClr val="A98BFF"/>
                 </a:solidFill>
                 <a:latin typeface="Courier New" pitchFamily="34" charset="0"/>
                 <a:ea typeface="Courier New" pitchFamily="34" charset="-122"/>
@@ -18571,11 +18848,11 @@
             </a:avLst>
           </a:prstGeom>
           <a:solidFill>
-            <a:srgbClr val="17141F"/>
+            <a:srgbClr val="000000"/>
           </a:solidFill>
           <a:ln w="12700">
             <a:solidFill>
-              <a:srgbClr val="2E2A3A"/>
+              <a:srgbClr val="5E4F85"/>
             </a:solidFill>
             <a:prstDash val="solid"/>
           </a:ln>
@@ -18637,7 +18914,7 @@
           <a:noFill/>
           <a:ln w="15875">
             <a:solidFill>
-              <a:srgbClr val="9B7BE8"/>
+              <a:srgbClr val="8F72E6"/>
             </a:solidFill>
             <a:prstDash val="solid"/>
           </a:ln>
@@ -18658,7 +18935,7 @@
             <a:avLst/>
           </a:prstGeom>
           <a:solidFill>
-            <a:srgbClr val="9B7BE8"/>
+            <a:srgbClr val="8F72E6"/>
           </a:solidFill>
           <a:ln/>
         </p:spPr>
@@ -18680,11 +18957,11 @@
             </a:avLst>
           </a:prstGeom>
           <a:solidFill>
-            <a:srgbClr val="17141F"/>
+            <a:srgbClr val="000000"/>
           </a:solidFill>
           <a:ln w="12700">
             <a:solidFill>
-              <a:srgbClr val="2E2A3A"/>
+              <a:srgbClr val="5E4F85"/>
             </a:solidFill>
             <a:prstDash val="solid"/>
           </a:ln>
@@ -18746,7 +19023,7 @@
           <a:noFill/>
           <a:ln w="15875">
             <a:solidFill>
-              <a:srgbClr val="9B7BE8"/>
+              <a:srgbClr val="8F72E6"/>
             </a:solidFill>
             <a:prstDash val="solid"/>
           </a:ln>
@@ -18767,7 +19044,7 @@
             <a:avLst/>
           </a:prstGeom>
           <a:solidFill>
-            <a:srgbClr val="9B7BE8"/>
+            <a:srgbClr val="8F72E6"/>
           </a:solidFill>
           <a:ln/>
         </p:spPr>
@@ -18789,11 +19066,11 @@
             </a:avLst>
           </a:prstGeom>
           <a:solidFill>
-            <a:srgbClr val="17141F"/>
+            <a:srgbClr val="000000"/>
           </a:solidFill>
           <a:ln w="12700">
             <a:solidFill>
-              <a:srgbClr val="2E2A3A"/>
+              <a:srgbClr val="5E4F85"/>
             </a:solidFill>
             <a:prstDash val="solid"/>
           </a:ln>
@@ -18855,7 +19132,7 @@
           <a:noFill/>
           <a:ln w="15875">
             <a:solidFill>
-              <a:srgbClr val="9B7BE8"/>
+              <a:srgbClr val="8F72E6"/>
             </a:solidFill>
             <a:prstDash val="solid"/>
           </a:ln>
@@ -18876,7 +19153,7 @@
             <a:avLst/>
           </a:prstGeom>
           <a:solidFill>
-            <a:srgbClr val="9B7BE8"/>
+            <a:srgbClr val="8F72E6"/>
           </a:solidFill>
           <a:ln/>
         </p:spPr>
@@ -18898,9 +19175,14 @@
             </a:avLst>
           </a:prstGeom>
           <a:solidFill>
-            <a:srgbClr val="1C1140"/>
+            <a:srgbClr val="1A0B3D"/>
           </a:solidFill>
-          <a:ln/>
+          <a:ln w="12700">
+            <a:solidFill>
+              <a:srgbClr val="5A05F4"/>
+            </a:solidFill>
+            <a:prstDash val="solid"/>
+          </a:ln>
         </p:spPr>
       </p:sp>
       <p:sp>
@@ -18930,7 +19212,7 @@
             <a:r>
               <a:rPr lang="en-US" sz="1000" b="1" dirty="0">
                 <a:solidFill>
-                  <a:srgbClr val="C9A6FF"/>
+                  <a:srgbClr val="A98BFF"/>
                 </a:solidFill>
                 <a:latin typeface="Courier New" pitchFamily="34" charset="0"/>
                 <a:ea typeface="Courier New" pitchFamily="34" charset="-122"/>
@@ -18959,7 +19241,7 @@
           <a:noFill/>
           <a:ln w="15875">
             <a:solidFill>
-              <a:srgbClr val="9B7BE8"/>
+              <a:srgbClr val="8F72E6"/>
             </a:solidFill>
             <a:prstDash val="solid"/>
           </a:ln>
@@ -18980,7 +19262,7 @@
             <a:avLst/>
           </a:prstGeom>
           <a:solidFill>
-            <a:srgbClr val="9B7BE8"/>
+            <a:srgbClr val="8F72E6"/>
           </a:solidFill>
           <a:ln/>
         </p:spPr>
@@ -19002,9 +19284,14 @@
             </a:avLst>
           </a:prstGeom>
           <a:solidFill>
-            <a:srgbClr val="102A20"/>
+            <a:srgbClr val="06180F"/>
           </a:solidFill>
-          <a:ln/>
+          <a:ln w="12700">
+            <a:solidFill>
+              <a:srgbClr val="3FCF8E"/>
+            </a:solidFill>
+            <a:prstDash val="solid"/>
+          </a:ln>
         </p:spPr>
       </p:sp>
       <p:sp>
@@ -19034,7 +19321,7 @@
             <a:r>
               <a:rPr lang="en-US" sz="1000" b="1" dirty="0">
                 <a:solidFill>
-                  <a:srgbClr val="5FD6A0"/>
+                  <a:srgbClr val="3FCF8E"/>
                 </a:solidFill>
                 <a:latin typeface="Courier New" pitchFamily="34" charset="0"/>
                 <a:ea typeface="Courier New" pitchFamily="34" charset="-122"/>
@@ -19063,9 +19350,14 @@
             </a:avLst>
           </a:prstGeom>
           <a:solidFill>
-            <a:srgbClr val="102A20"/>
+            <a:srgbClr val="06180F"/>
           </a:solidFill>
-          <a:ln/>
+          <a:ln w="12700">
+            <a:solidFill>
+              <a:srgbClr val="3FCF8E"/>
+            </a:solidFill>
+            <a:prstDash val="solid"/>
+          </a:ln>
         </p:spPr>
       </p:sp>
       <p:sp>
@@ -19095,7 +19387,7 @@
             <a:r>
               <a:rPr lang="en-US" sz="1450" b="1" dirty="0">
                 <a:solidFill>
-                  <a:srgbClr val="5FD6A0"/>
+                  <a:srgbClr val="3FCF8E"/>
                 </a:solidFill>
                 <a:latin typeface="Montserrat" pitchFamily="34" charset="0"/>
                 <a:ea typeface="Montserrat" pitchFamily="34" charset="-122"/>
@@ -19137,7 +19429,7 @@
             <a:r>
               <a:rPr lang="en-US" sz="1200" dirty="0">
                 <a:solidFill>
-                  <a:srgbClr val="FFFFFF"/>
+                  <a:srgbClr val="C9C4D6"/>
                 </a:solidFill>
                 <a:latin typeface="Montserrat" pitchFamily="34" charset="0"/>
                 <a:ea typeface="Montserrat" pitchFamily="34" charset="-122"/>
@@ -19166,9 +19458,14 @@
             </a:avLst>
           </a:prstGeom>
           <a:solidFill>
-            <a:srgbClr val="1C1140"/>
+            <a:srgbClr val="1A0B3D"/>
           </a:solidFill>
-          <a:ln/>
+          <a:ln w="12700">
+            <a:solidFill>
+              <a:srgbClr val="5A05F4"/>
+            </a:solidFill>
+            <a:prstDash val="solid"/>
+          </a:ln>
         </p:spPr>
       </p:sp>
       <p:sp>
@@ -19198,7 +19495,7 @@
             <a:r>
               <a:rPr lang="en-US" sz="1450" b="1" dirty="0">
                 <a:solidFill>
-                  <a:srgbClr val="C9A6FF"/>
+                  <a:srgbClr val="A98BFF"/>
                 </a:solidFill>
                 <a:latin typeface="Montserrat" pitchFamily="34" charset="0"/>
                 <a:ea typeface="Montserrat" pitchFamily="34" charset="-122"/>
@@ -19240,7 +19537,7 @@
             <a:r>
               <a:rPr lang="en-US" sz="1200" dirty="0">
                 <a:solidFill>
-                  <a:srgbClr val="FFFFFF"/>
+                  <a:srgbClr val="C9C4D6"/>
                 </a:solidFill>
                 <a:latin typeface="Montserrat" pitchFamily="34" charset="0"/>
                 <a:ea typeface="Montserrat" pitchFamily="34" charset="-122"/>
@@ -19269,11 +19566,11 @@
             </a:avLst>
           </a:prstGeom>
           <a:solidFill>
-            <a:srgbClr val="17141F"/>
+            <a:srgbClr val="000000"/>
           </a:solidFill>
           <a:ln w="12700">
             <a:solidFill>
-              <a:srgbClr val="2E2A3A"/>
+              <a:srgbClr val="5E4F85"/>
             </a:solidFill>
             <a:prstDash val="solid"/>
           </a:ln>
@@ -19351,7 +19648,7 @@
             <a:lvl1pPr>
               <a:defRPr sz="850">
                 <a:solidFill>
-                  <a:srgbClr val="8A82A0"/>
+                  <a:srgbClr val="9A94AA"/>
                 </a:solidFill>
                 <a:latin typeface="Courier New"/>
                 <a:ea typeface="Courier New"/>
@@ -19421,7 +19718,7 @@
             <a:r>
               <a:rPr lang="en-US" sz="2600" b="1" dirty="0">
                 <a:solidFill>
-                  <a:srgbClr val="C9A6FF"/>
+                  <a:srgbClr val="A98BFF"/>
                 </a:solidFill>
                 <a:latin typeface="Courier New" pitchFamily="34" charset="0"/>
                 <a:ea typeface="Courier New" pitchFamily="34" charset="-122"/>
@@ -19489,9 +19786,14 @@
             </a:avLst>
           </a:prstGeom>
           <a:solidFill>
-            <a:srgbClr val="C9A6FF"/>
+            <a:srgbClr val="1A0B3D"/>
           </a:solidFill>
-          <a:ln/>
+          <a:ln w="12700">
+            <a:solidFill>
+              <a:srgbClr val="5A05F4"/>
+            </a:solidFill>
+            <a:prstDash val="solid"/>
+          </a:ln>
         </p:spPr>
       </p:sp>
       <p:sp>
@@ -19521,7 +19823,7 @@
             <a:r>
               <a:rPr lang="en-US" sz="900" b="1" spc="100" kern="0" dirty="0">
                 <a:solidFill>
-                  <a:srgbClr val="1C1140"/>
+                  <a:srgbClr val="A98BFF"/>
                 </a:solidFill>
                 <a:latin typeface="Courier New" pitchFamily="34" charset="0"/>
                 <a:ea typeface="Courier New" pitchFamily="34" charset="-122"/>
@@ -19574,11 +19876,11 @@
             </a:avLst>
           </a:prstGeom>
           <a:solidFill>
-            <a:srgbClr val="17141F"/>
+            <a:srgbClr val="000000"/>
           </a:solidFill>
           <a:ln w="12700">
             <a:solidFill>
-              <a:srgbClr val="2E2A3A"/>
+              <a:srgbClr val="5E4F85"/>
             </a:solidFill>
             <a:prstDash val="solid"/>
           </a:ln>
@@ -19650,7 +19952,7 @@
             <a:r>
               <a:rPr lang="en-US" sz="1150" dirty="0">
                 <a:solidFill>
-                  <a:srgbClr val="AFA9BE"/>
+                  <a:srgbClr val="C9C4D6"/>
                 </a:solidFill>
                 <a:latin typeface="Montserrat" pitchFamily="34" charset="0"/>
                 <a:ea typeface="Montserrat" pitchFamily="34" charset="-122"/>
@@ -19679,9 +19981,14 @@
             </a:avLst>
           </a:prstGeom>
           <a:solidFill>
-            <a:srgbClr val="1C1140"/>
+            <a:srgbClr val="1A0B3D"/>
           </a:solidFill>
-          <a:ln/>
+          <a:ln w="12700">
+            <a:solidFill>
+              <a:srgbClr val="5A05F4"/>
+            </a:solidFill>
+            <a:prstDash val="solid"/>
+          </a:ln>
         </p:spPr>
       </p:sp>
       <p:sp>
@@ -19711,7 +20018,7 @@
             <a:r>
               <a:rPr lang="en-US" sz="1350" b="1" dirty="0">
                 <a:solidFill>
-                  <a:srgbClr val="C9A6FF"/>
+                  <a:srgbClr val="A98BFF"/>
                 </a:solidFill>
                 <a:latin typeface="Montserrat" pitchFamily="34" charset="0"/>
                 <a:ea typeface="Montserrat" pitchFamily="34" charset="-122"/>
@@ -19750,7 +20057,7 @@
             <a:r>
               <a:rPr lang="en-US" sz="1150" dirty="0">
                 <a:solidFill>
-                  <a:srgbClr val="FFFFFF"/>
+                  <a:srgbClr val="C9C4D6"/>
                 </a:solidFill>
                 <a:latin typeface="Montserrat" pitchFamily="34" charset="0"/>
                 <a:ea typeface="Montserrat" pitchFamily="34" charset="-122"/>
@@ -19779,9 +20086,14 @@
             </a:avLst>
           </a:prstGeom>
           <a:solidFill>
-            <a:srgbClr val="1C1140"/>
+            <a:srgbClr val="1A0B3D"/>
           </a:solidFill>
-          <a:ln/>
+          <a:ln w="12700">
+            <a:solidFill>
+              <a:srgbClr val="5A05F4"/>
+            </a:solidFill>
+            <a:prstDash val="solid"/>
+          </a:ln>
         </p:spPr>
       </p:sp>
       <p:sp>
@@ -19811,7 +20123,7 @@
             <a:r>
               <a:rPr lang="en-US" sz="1350" b="1" dirty="0">
                 <a:solidFill>
-                  <a:srgbClr val="C9A6FF"/>
+                  <a:srgbClr val="A98BFF"/>
                 </a:solidFill>
                 <a:latin typeface="Montserrat" pitchFamily="34" charset="0"/>
                 <a:ea typeface="Montserrat" pitchFamily="34" charset="-122"/>
@@ -19850,7 +20162,7 @@
             <a:r>
               <a:rPr lang="en-US" sz="1150" dirty="0">
                 <a:solidFill>
-                  <a:srgbClr val="FFFFFF"/>
+                  <a:srgbClr val="C9C4D6"/>
                 </a:solidFill>
                 <a:latin typeface="Montserrat" pitchFamily="34" charset="0"/>
                 <a:ea typeface="Montserrat" pitchFamily="34" charset="-122"/>
@@ -19879,9 +20191,14 @@
             </a:avLst>
           </a:prstGeom>
           <a:solidFill>
-            <a:srgbClr val="2E1418"/>
+            <a:srgbClr val="1A0808"/>
           </a:solidFill>
-          <a:ln/>
+          <a:ln w="12700">
+            <a:solidFill>
+              <a:srgbClr val="FF6B6B"/>
+            </a:solidFill>
+            <a:prstDash val="solid"/>
+          </a:ln>
         </p:spPr>
       </p:sp>
       <p:sp>
@@ -19911,7 +20228,7 @@
             <a:r>
               <a:rPr lang="en-US" sz="1350" b="1" dirty="0">
                 <a:solidFill>
-                  <a:srgbClr val="FF7B7B"/>
+                  <a:srgbClr val="FF6B6B"/>
                 </a:solidFill>
                 <a:latin typeface="Montserrat" pitchFamily="34" charset="0"/>
                 <a:ea typeface="Montserrat" pitchFamily="34" charset="-122"/>
@@ -19950,7 +20267,7 @@
             <a:r>
               <a:rPr lang="en-US" sz="1150" dirty="0">
                 <a:solidFill>
-                  <a:srgbClr val="FFFFFF"/>
+                  <a:srgbClr val="C9C4D6"/>
                 </a:solidFill>
                 <a:latin typeface="Montserrat" pitchFamily="34" charset="0"/>
                 <a:ea typeface="Montserrat" pitchFamily="34" charset="-122"/>
@@ -19979,11 +20296,11 @@
             </a:avLst>
           </a:prstGeom>
           <a:solidFill>
-            <a:srgbClr val="17141F"/>
+            <a:srgbClr val="000000"/>
           </a:solidFill>
           <a:ln w="12700">
             <a:solidFill>
-              <a:srgbClr val="2E2A3A"/>
+              <a:srgbClr val="5E4F85"/>
             </a:solidFill>
             <a:prstDash val="solid"/>
           </a:ln>
@@ -20045,7 +20362,7 @@
           <a:noFill/>
           <a:ln w="15875">
             <a:solidFill>
-              <a:srgbClr val="9B7BE8"/>
+              <a:srgbClr val="8F72E6"/>
             </a:solidFill>
             <a:prstDash val="solid"/>
           </a:ln>
@@ -20066,7 +20383,7 @@
             <a:avLst/>
           </a:prstGeom>
           <a:solidFill>
-            <a:srgbClr val="9B7BE8"/>
+            <a:srgbClr val="8F72E6"/>
           </a:solidFill>
           <a:ln/>
         </p:spPr>
@@ -20088,9 +20405,14 @@
             </a:avLst>
           </a:prstGeom>
           <a:solidFill>
-            <a:srgbClr val="1C1140"/>
+            <a:srgbClr val="1A0B3D"/>
           </a:solidFill>
-          <a:ln/>
+          <a:ln w="12700">
+            <a:solidFill>
+              <a:srgbClr val="5A05F4"/>
+            </a:solidFill>
+            <a:prstDash val="solid"/>
+          </a:ln>
         </p:spPr>
       </p:sp>
       <p:sp>
@@ -20120,7 +20442,7 @@
             <a:r>
               <a:rPr lang="en-US" sz="900" b="1" dirty="0">
                 <a:solidFill>
-                  <a:srgbClr val="C9A6FF"/>
+                  <a:srgbClr val="A98BFF"/>
                 </a:solidFill>
                 <a:latin typeface="Courier New" pitchFamily="34" charset="0"/>
                 <a:ea typeface="Courier New" pitchFamily="34" charset="-122"/>
@@ -20149,7 +20471,7 @@
           <a:noFill/>
           <a:ln w="15875">
             <a:solidFill>
-              <a:srgbClr val="9B7BE8"/>
+              <a:srgbClr val="8F72E6"/>
             </a:solidFill>
             <a:prstDash val="solid"/>
           </a:ln>
@@ -20170,7 +20492,7 @@
             <a:avLst/>
           </a:prstGeom>
           <a:solidFill>
-            <a:srgbClr val="9B7BE8"/>
+            <a:srgbClr val="8F72E6"/>
           </a:solidFill>
           <a:ln/>
         </p:spPr>
@@ -20192,9 +20514,14 @@
             </a:avLst>
           </a:prstGeom>
           <a:solidFill>
-            <a:srgbClr val="102A20"/>
+            <a:srgbClr val="06180F"/>
           </a:solidFill>
-          <a:ln/>
+          <a:ln w="12700">
+            <a:solidFill>
+              <a:srgbClr val="3FCF8E"/>
+            </a:solidFill>
+            <a:prstDash val="solid"/>
+          </a:ln>
         </p:spPr>
       </p:sp>
       <p:sp>
@@ -20224,7 +20551,7 @@
             <a:r>
               <a:rPr lang="en-US" sz="900" b="1" dirty="0">
                 <a:solidFill>
-                  <a:srgbClr val="5FD6A0"/>
+                  <a:srgbClr val="3FCF8E"/>
                 </a:solidFill>
                 <a:latin typeface="Courier New" pitchFamily="34" charset="0"/>
                 <a:ea typeface="Courier New" pitchFamily="34" charset="-122"/>
@@ -20253,7 +20580,7 @@
           <a:noFill/>
           <a:ln w="15875">
             <a:solidFill>
-              <a:srgbClr val="9B7BE8"/>
+              <a:srgbClr val="8F72E6"/>
             </a:solidFill>
             <a:prstDash val="solid"/>
           </a:ln>
@@ -20274,7 +20601,7 @@
             <a:avLst/>
           </a:prstGeom>
           <a:solidFill>
-            <a:srgbClr val="9B7BE8"/>
+            <a:srgbClr val="8F72E6"/>
           </a:solidFill>
           <a:ln/>
         </p:spPr>
@@ -20296,9 +20623,14 @@
             </a:avLst>
           </a:prstGeom>
           <a:solidFill>
-            <a:srgbClr val="2E1418"/>
+            <a:srgbClr val="1A0808"/>
           </a:solidFill>
-          <a:ln/>
+          <a:ln w="12700">
+            <a:solidFill>
+              <a:srgbClr val="FF6B6B"/>
+            </a:solidFill>
+            <a:prstDash val="solid"/>
+          </a:ln>
         </p:spPr>
       </p:sp>
       <p:sp>
@@ -20328,7 +20660,7 @@
             <a:r>
               <a:rPr lang="en-US" sz="900" b="1" dirty="0">
                 <a:solidFill>
-                  <a:srgbClr val="FF7B7B"/>
+                  <a:srgbClr val="FF6B6B"/>
                 </a:solidFill>
                 <a:latin typeface="Courier New" pitchFamily="34" charset="0"/>
                 <a:ea typeface="Courier New" pitchFamily="34" charset="-122"/>
@@ -20357,9 +20689,14 @@
             </a:avLst>
           </a:prstGeom>
           <a:solidFill>
-            <a:srgbClr val="2E1418"/>
+            <a:srgbClr val="1A0808"/>
           </a:solidFill>
-          <a:ln/>
+          <a:ln w="12700">
+            <a:solidFill>
+              <a:srgbClr val="FF6B6B"/>
+            </a:solidFill>
+            <a:prstDash val="solid"/>
+          </a:ln>
         </p:spPr>
       </p:sp>
       <p:sp>
@@ -20389,7 +20726,7 @@
             <a:r>
               <a:rPr lang="en-US" sz="950" b="1" spc="150" kern="0" dirty="0">
                 <a:solidFill>
-                  <a:srgbClr val="FF7B7B"/>
+                  <a:srgbClr val="FF6B6B"/>
                 </a:solidFill>
                 <a:latin typeface="Courier New" pitchFamily="34" charset="0"/>
                 <a:ea typeface="Courier New" pitchFamily="34" charset="-122"/>
@@ -20460,9 +20797,14 @@
             </a:avLst>
           </a:prstGeom>
           <a:solidFill>
-            <a:srgbClr val="2A2010"/>
+            <a:srgbClr val="0B1A38"/>
           </a:solidFill>
-          <a:ln/>
+          <a:ln w="12700">
+            <a:solidFill>
+              <a:srgbClr val="6BA0F8"/>
+            </a:solidFill>
+            <a:prstDash val="solid"/>
+          </a:ln>
         </p:spPr>
       </p:sp>
       <p:sp>
@@ -20492,7 +20834,7 @@
             <a:r>
               <a:rPr lang="en-US" sz="950" b="1" spc="150" kern="0" dirty="0">
                 <a:solidFill>
-                  <a:srgbClr val="E8A857"/>
+                  <a:srgbClr val="6BA0F8"/>
                 </a:solidFill>
                 <a:latin typeface="Courier New" pitchFamily="34" charset="0"/>
                 <a:ea typeface="Courier New" pitchFamily="34" charset="-122"/>
@@ -20563,11 +20905,11 @@
             </a:avLst>
           </a:prstGeom>
           <a:solidFill>
-            <a:srgbClr val="17141F"/>
+            <a:srgbClr val="000000"/>
           </a:solidFill>
           <a:ln w="12700">
             <a:solidFill>
-              <a:srgbClr val="2E2A3A"/>
+              <a:srgbClr val="5E4F85"/>
             </a:solidFill>
             <a:prstDash val="solid"/>
           </a:ln>
@@ -20645,7 +20987,7 @@
             <a:lvl1pPr>
               <a:defRPr sz="850">
                 <a:solidFill>
-                  <a:srgbClr val="8A82A0"/>
+                  <a:srgbClr val="9A94AA"/>
                 </a:solidFill>
                 <a:latin typeface="Courier New"/>
                 <a:ea typeface="Courier New"/>
@@ -20715,7 +21057,7 @@
             <a:r>
               <a:rPr lang="en-US" sz="2600" b="1" dirty="0">
                 <a:solidFill>
-                  <a:srgbClr val="C9A6FF"/>
+                  <a:srgbClr val="A98BFF"/>
                 </a:solidFill>
                 <a:latin typeface="Courier New" pitchFamily="34" charset="0"/>
                 <a:ea typeface="Courier New" pitchFamily="34" charset="-122"/>
@@ -20783,9 +21125,14 @@
             </a:avLst>
           </a:prstGeom>
           <a:solidFill>
-            <a:srgbClr val="C9A6FF"/>
+            <a:srgbClr val="1A0B3D"/>
           </a:solidFill>
-          <a:ln/>
+          <a:ln w="12700">
+            <a:solidFill>
+              <a:srgbClr val="5A05F4"/>
+            </a:solidFill>
+            <a:prstDash val="solid"/>
+          </a:ln>
         </p:spPr>
       </p:sp>
       <p:sp>
@@ -20815,7 +21162,7 @@
             <a:r>
               <a:rPr lang="en-US" sz="900" b="1" spc="100" kern="0" dirty="0">
                 <a:solidFill>
-                  <a:srgbClr val="1C1140"/>
+                  <a:srgbClr val="A98BFF"/>
                 </a:solidFill>
                 <a:latin typeface="Courier New" pitchFamily="34" charset="0"/>
                 <a:ea typeface="Courier New" pitchFamily="34" charset="-122"/>
@@ -20868,11 +21215,11 @@
             </a:avLst>
           </a:prstGeom>
           <a:solidFill>
-            <a:srgbClr val="12101A"/>
+            <a:srgbClr val="07060C"/>
           </a:solidFill>
           <a:ln w="12700">
             <a:solidFill>
-              <a:srgbClr val="2E2A3A"/>
+              <a:srgbClr val="5E4F85"/>
             </a:solidFill>
             <a:prstDash val="solid"/>
           </a:ln>
@@ -20908,7 +21255,7 @@
             <a:r>
               <a:rPr lang="en-US" sz="1050" dirty="0">
                 <a:solidFill>
-                  <a:srgbClr val="C9A6FF"/>
+                  <a:srgbClr val="A98BFF"/>
                 </a:solidFill>
                 <a:latin typeface="Courier New" pitchFamily="34" charset="0"/>
                 <a:ea typeface="Courier New" pitchFamily="34" charset="-122"/>
@@ -20925,7 +21272,7 @@
             <a:r>
               <a:rPr lang="en-US" sz="1050" dirty="0">
                 <a:solidFill>
-                  <a:srgbClr val="8A82A0"/>
+                  <a:srgbClr val="9A94AA"/>
                 </a:solidFill>
                 <a:latin typeface="Courier New" pitchFamily="34" charset="0"/>
                 <a:ea typeface="Courier New" pitchFamily="34" charset="-122"/>
@@ -20965,7 +21312,7 @@
             <a:r>
               <a:rPr lang="en-US" sz="1050" dirty="0">
                 <a:solidFill>
-                  <a:srgbClr val="C9A6FF"/>
+                  <a:srgbClr val="A98BFF"/>
                 </a:solidFill>
                 <a:latin typeface="Courier New" pitchFamily="34" charset="0"/>
                 <a:ea typeface="Courier New" pitchFamily="34" charset="-122"/>
@@ -21065,7 +21412,7 @@
             <a:r>
               <a:rPr lang="en-US" sz="1050" dirty="0">
                 <a:solidFill>
-                  <a:srgbClr val="C9A6FF"/>
+                  <a:srgbClr val="A98BFF"/>
                 </a:solidFill>
                 <a:latin typeface="Courier New" pitchFamily="34" charset="0"/>
                 <a:ea typeface="Courier New" pitchFamily="34" charset="-122"/>
@@ -21082,7 +21429,7 @@
             <a:r>
               <a:rPr lang="en-US" sz="1050" dirty="0">
                 <a:solidFill>
-                  <a:srgbClr val="8A82A0"/>
+                  <a:srgbClr val="9A94AA"/>
                 </a:solidFill>
                 <a:latin typeface="Courier New" pitchFamily="34" charset="0"/>
                 <a:ea typeface="Courier New" pitchFamily="34" charset="-122"/>
@@ -21102,7 +21449,7 @@
             <a:r>
               <a:rPr lang="en-US" sz="1050" dirty="0">
                 <a:solidFill>
-                  <a:srgbClr val="C9A6FF"/>
+                  <a:srgbClr val="A98BFF"/>
                 </a:solidFill>
                 <a:latin typeface="Courier New" pitchFamily="34" charset="0"/>
                 <a:ea typeface="Courier New" pitchFamily="34" charset="-122"/>
@@ -21162,7 +21509,7 @@
             <a:r>
               <a:rPr lang="en-US" sz="1050" dirty="0">
                 <a:solidFill>
-                  <a:srgbClr val="C9A6FF"/>
+                  <a:srgbClr val="A98BFF"/>
                 </a:solidFill>
                 <a:latin typeface="Courier New" pitchFamily="34" charset="0"/>
                 <a:ea typeface="Courier New" pitchFamily="34" charset="-122"/>
@@ -21179,7 +21526,7 @@
             <a:r>
               <a:rPr lang="en-US" sz="1050" dirty="0">
                 <a:solidFill>
-                  <a:srgbClr val="8A82A0"/>
+                  <a:srgbClr val="9A94AA"/>
                 </a:solidFill>
                 <a:latin typeface="Courier New" pitchFamily="34" charset="0"/>
                 <a:ea typeface="Courier New" pitchFamily="34" charset="-122"/>
@@ -21199,7 +21546,7 @@
             <a:r>
               <a:rPr lang="en-US" sz="1050" dirty="0">
                 <a:solidFill>
-                  <a:srgbClr val="C9A6FF"/>
+                  <a:srgbClr val="A98BFF"/>
                 </a:solidFill>
                 <a:latin typeface="Courier New" pitchFamily="34" charset="0"/>
                 <a:ea typeface="Courier New" pitchFamily="34" charset="-122"/>
@@ -21216,7 +21563,7 @@
             <a:r>
               <a:rPr lang="en-US" sz="1050" dirty="0">
                 <a:solidFill>
-                  <a:srgbClr val="8A82A0"/>
+                  <a:srgbClr val="9A94AA"/>
                 </a:solidFill>
                 <a:latin typeface="Courier New" pitchFamily="34" charset="0"/>
                 <a:ea typeface="Courier New" pitchFamily="34" charset="-122"/>
@@ -21255,7 +21602,7 @@
             <a:r>
               <a:rPr lang="en-US" sz="1050" b="1" dirty="0">
                 <a:solidFill>
-                  <a:srgbClr val="C9A6FF"/>
+                  <a:srgbClr val="A98BFF"/>
                 </a:solidFill>
                 <a:latin typeface="Courier New" pitchFamily="34" charset="0"/>
                 <a:ea typeface="Courier New" pitchFamily="34" charset="-122"/>
@@ -21294,7 +21641,7 @@
             <a:r>
               <a:rPr lang="en-US" sz="1100" dirty="0">
                 <a:solidFill>
-                  <a:srgbClr val="AFA9BE"/>
+                  <a:srgbClr val="C9C4D6"/>
                 </a:solidFill>
                 <a:latin typeface="Montserrat" pitchFamily="34" charset="0"/>
                 <a:ea typeface="Montserrat" pitchFamily="34" charset="-122"/>
@@ -21333,7 +21680,7 @@
             <a:r>
               <a:rPr lang="en-US" sz="1050" b="1" dirty="0">
                 <a:solidFill>
-                  <a:srgbClr val="C9A6FF"/>
+                  <a:srgbClr val="A98BFF"/>
                 </a:solidFill>
                 <a:latin typeface="Courier New" pitchFamily="34" charset="0"/>
                 <a:ea typeface="Courier New" pitchFamily="34" charset="-122"/>
@@ -21372,7 +21719,7 @@
             <a:r>
               <a:rPr lang="en-US" sz="1100" dirty="0">
                 <a:solidFill>
-                  <a:srgbClr val="AFA9BE"/>
+                  <a:srgbClr val="C9C4D6"/>
                 </a:solidFill>
                 <a:latin typeface="Montserrat" pitchFamily="34" charset="0"/>
                 <a:ea typeface="Montserrat" pitchFamily="34" charset="-122"/>
@@ -21411,7 +21758,7 @@
             <a:r>
               <a:rPr lang="en-US" sz="1050" b="1" dirty="0">
                 <a:solidFill>
-                  <a:srgbClr val="C9A6FF"/>
+                  <a:srgbClr val="A98BFF"/>
                 </a:solidFill>
                 <a:latin typeface="Courier New" pitchFamily="34" charset="0"/>
                 <a:ea typeface="Courier New" pitchFamily="34" charset="-122"/>
@@ -21450,7 +21797,7 @@
             <a:r>
               <a:rPr lang="en-US" sz="1100" dirty="0">
                 <a:solidFill>
-                  <a:srgbClr val="AFA9BE"/>
+                  <a:srgbClr val="C9C4D6"/>
                 </a:solidFill>
                 <a:latin typeface="Montserrat" pitchFamily="34" charset="0"/>
                 <a:ea typeface="Montserrat" pitchFamily="34" charset="-122"/>
@@ -21489,7 +21836,7 @@
             <a:r>
               <a:rPr lang="en-US" sz="1050" b="1" dirty="0">
                 <a:solidFill>
-                  <a:srgbClr val="C9A6FF"/>
+                  <a:srgbClr val="A98BFF"/>
                 </a:solidFill>
                 <a:latin typeface="Courier New" pitchFamily="34" charset="0"/>
                 <a:ea typeface="Courier New" pitchFamily="34" charset="-122"/>
@@ -21528,7 +21875,7 @@
             <a:r>
               <a:rPr lang="en-US" sz="1100" dirty="0">
                 <a:solidFill>
-                  <a:srgbClr val="AFA9BE"/>
+                  <a:srgbClr val="C9C4D6"/>
                 </a:solidFill>
                 <a:latin typeface="Montserrat" pitchFamily="34" charset="0"/>
                 <a:ea typeface="Montserrat" pitchFamily="34" charset="-122"/>
@@ -21567,7 +21914,7 @@
             <a:r>
               <a:rPr lang="en-US" sz="1050" b="1" dirty="0">
                 <a:solidFill>
-                  <a:srgbClr val="C9A6FF"/>
+                  <a:srgbClr val="A98BFF"/>
                 </a:solidFill>
                 <a:latin typeface="Courier New" pitchFamily="34" charset="0"/>
                 <a:ea typeface="Courier New" pitchFamily="34" charset="-122"/>
@@ -21606,7 +21953,7 @@
             <a:r>
               <a:rPr lang="en-US" sz="1100" dirty="0">
                 <a:solidFill>
-                  <a:srgbClr val="AFA9BE"/>
+                  <a:srgbClr val="C9C4D6"/>
                 </a:solidFill>
                 <a:latin typeface="Montserrat" pitchFamily="34" charset="0"/>
                 <a:ea typeface="Montserrat" pitchFamily="34" charset="-122"/>
@@ -21712,7 +22059,7 @@
             <a:lvl1pPr>
               <a:defRPr sz="850">
                 <a:solidFill>
-                  <a:srgbClr val="8A82A0"/>
+                  <a:srgbClr val="9A94AA"/>
                 </a:solidFill>
                 <a:latin typeface="Courier New"/>
                 <a:ea typeface="Courier New"/>
@@ -21782,7 +22129,7 @@
             <a:r>
               <a:rPr lang="en-US" sz="2600" b="1" dirty="0">
                 <a:solidFill>
-                  <a:srgbClr val="C9A6FF"/>
+                  <a:srgbClr val="A98BFF"/>
                 </a:solidFill>
                 <a:latin typeface="Courier New" pitchFamily="34" charset="0"/>
                 <a:ea typeface="Courier New" pitchFamily="34" charset="-122"/>
@@ -21850,9 +22197,14 @@
             </a:avLst>
           </a:prstGeom>
           <a:solidFill>
-            <a:srgbClr val="C9A6FF"/>
+            <a:srgbClr val="1A0B3D"/>
           </a:solidFill>
-          <a:ln/>
+          <a:ln w="12700">
+            <a:solidFill>
+              <a:srgbClr val="5A05F4"/>
+            </a:solidFill>
+            <a:prstDash val="solid"/>
+          </a:ln>
         </p:spPr>
       </p:sp>
       <p:sp>
@@ -21882,7 +22234,7 @@
             <a:r>
               <a:rPr lang="en-US" sz="900" b="1" spc="100" kern="0" dirty="0">
                 <a:solidFill>
-                  <a:srgbClr val="1C1140"/>
+                  <a:srgbClr val="A98BFF"/>
                 </a:solidFill>
                 <a:latin typeface="Courier New" pitchFamily="34" charset="0"/>
                 <a:ea typeface="Courier New" pitchFamily="34" charset="-122"/>
@@ -21935,9 +22287,14 @@
             </a:avLst>
           </a:prstGeom>
           <a:solidFill>
-            <a:srgbClr val="2E1418"/>
+            <a:srgbClr val="1A0808"/>
           </a:solidFill>
-          <a:ln/>
+          <a:ln w="12700">
+            <a:solidFill>
+              <a:srgbClr val="FF6B6B"/>
+            </a:solidFill>
+            <a:prstDash val="solid"/>
+          </a:ln>
         </p:spPr>
       </p:sp>
       <p:sp>
@@ -21967,7 +22324,7 @@
             <a:r>
               <a:rPr lang="en-US" sz="1450" b="1" dirty="0">
                 <a:solidFill>
-                  <a:srgbClr val="FF7B7B"/>
+                  <a:srgbClr val="FF6B6B"/>
                 </a:solidFill>
                 <a:latin typeface="Montserrat" pitchFamily="34" charset="0"/>
                 <a:ea typeface="Montserrat" pitchFamily="34" charset="-122"/>
@@ -22009,7 +22366,7 @@
             <a:r>
               <a:rPr lang="en-US" sz="1200" dirty="0">
                 <a:solidFill>
-                  <a:srgbClr val="FFFFFF"/>
+                  <a:srgbClr val="C9C4D6"/>
                 </a:solidFill>
                 <a:latin typeface="Montserrat" pitchFamily="34" charset="0"/>
                 <a:ea typeface="Montserrat" pitchFamily="34" charset="-122"/>
@@ -22038,9 +22395,14 @@
             </a:avLst>
           </a:prstGeom>
           <a:solidFill>
-            <a:srgbClr val="2E1418"/>
+            <a:srgbClr val="1A0808"/>
           </a:solidFill>
-          <a:ln/>
+          <a:ln w="12700">
+            <a:solidFill>
+              <a:srgbClr val="FF6B6B"/>
+            </a:solidFill>
+            <a:prstDash val="solid"/>
+          </a:ln>
         </p:spPr>
       </p:sp>
       <p:sp>
@@ -22070,7 +22432,7 @@
             <a:r>
               <a:rPr lang="en-US" sz="1450" b="1" dirty="0">
                 <a:solidFill>
-                  <a:srgbClr val="FF7B7B"/>
+                  <a:srgbClr val="FF6B6B"/>
                 </a:solidFill>
                 <a:latin typeface="Montserrat" pitchFamily="34" charset="0"/>
                 <a:ea typeface="Montserrat" pitchFamily="34" charset="-122"/>
@@ -22112,7 +22474,7 @@
             <a:r>
               <a:rPr lang="en-US" sz="1200" dirty="0">
                 <a:solidFill>
-                  <a:srgbClr val="FFFFFF"/>
+                  <a:srgbClr val="C9C4D6"/>
                 </a:solidFill>
                 <a:latin typeface="Montserrat" pitchFamily="34" charset="0"/>
                 <a:ea typeface="Montserrat" pitchFamily="34" charset="-122"/>
@@ -22205,9 +22567,14 @@
             </a:avLst>
           </a:prstGeom>
           <a:solidFill>
-            <a:srgbClr val="2A2010"/>
+            <a:srgbClr val="0B1A38"/>
           </a:solidFill>
-          <a:ln/>
+          <a:ln w="12700">
+            <a:solidFill>
+              <a:srgbClr val="6BA0F8"/>
+            </a:solidFill>
+            <a:prstDash val="solid"/>
+          </a:ln>
         </p:spPr>
       </p:sp>
       <p:sp>
@@ -22237,7 +22604,7 @@
             <a:r>
               <a:rPr lang="en-US" sz="950" b="1" spc="150" kern="0" dirty="0">
                 <a:solidFill>
-                  <a:srgbClr val="E8A857"/>
+                  <a:srgbClr val="6BA0F8"/>
                 </a:solidFill>
                 <a:latin typeface="Courier New" pitchFamily="34" charset="0"/>
                 <a:ea typeface="Courier New" pitchFamily="34" charset="-122"/>
@@ -22321,7 +22688,7 @@
             <a:lvl1pPr>
               <a:defRPr sz="850">
                 <a:solidFill>
-                  <a:srgbClr val="8A82A0"/>
+                  <a:srgbClr val="9A94AA"/>
                 </a:solidFill>
                 <a:latin typeface="Courier New"/>
                 <a:ea typeface="Courier New"/>

--- a/docs/decks/L11.pptx
+++ b/docs/decks/L11.pptx
@@ -12400,11 +12400,11 @@
         <p:spPr>
           <a:xfrm>
             <a:off x="566928" y="1783080"/>
-            <a:ext cx="3520440" cy="1463040"/>
+            <a:ext cx="3520440" cy="1874520"/>
           </a:xfrm>
           <a:prstGeom prst="roundRect">
             <a:avLst>
-              <a:gd name="adj" fmla="val 7500"/>
+              <a:gd name="adj" fmla="val 5854"/>
             </a:avLst>
           </a:prstGeom>
           <a:solidFill>
@@ -12520,7 +12520,7 @@
         <p:spPr>
           <a:xfrm>
             <a:off x="768096" y="2468880"/>
-            <a:ext cx="3118104" cy="621792"/>
+            <a:ext cx="3118104" cy="1033272"/>
           </a:xfrm>
           <a:prstGeom prst="rect">
             <a:avLst/>
@@ -12562,11 +12562,11 @@
         <p:spPr>
           <a:xfrm>
             <a:off x="4270248" y="1783080"/>
-            <a:ext cx="3520440" cy="1463040"/>
+            <a:ext cx="3520440" cy="1874520"/>
           </a:xfrm>
           <a:prstGeom prst="roundRect">
             <a:avLst>
-              <a:gd name="adj" fmla="val 7500"/>
+              <a:gd name="adj" fmla="val 5854"/>
             </a:avLst>
           </a:prstGeom>
           <a:solidFill>
@@ -12682,7 +12682,7 @@
         <p:spPr>
           <a:xfrm>
             <a:off x="4471416" y="2468880"/>
-            <a:ext cx="3118104" cy="621792"/>
+            <a:ext cx="3118104" cy="1033272"/>
           </a:xfrm>
           <a:prstGeom prst="rect">
             <a:avLst/>
@@ -12724,11 +12724,11 @@
         <p:spPr>
           <a:xfrm>
             <a:off x="7973568" y="1783080"/>
-            <a:ext cx="3520440" cy="1463040"/>
+            <a:ext cx="3520440" cy="1874520"/>
           </a:xfrm>
           <a:prstGeom prst="roundRect">
             <a:avLst>
-              <a:gd name="adj" fmla="val 7500"/>
+              <a:gd name="adj" fmla="val 5854"/>
             </a:avLst>
           </a:prstGeom>
           <a:solidFill>
@@ -12844,7 +12844,7 @@
         <p:spPr>
           <a:xfrm>
             <a:off x="8174736" y="2468880"/>
-            <a:ext cx="3118104" cy="621792"/>
+            <a:ext cx="3118104" cy="1033272"/>
           </a:xfrm>
           <a:prstGeom prst="rect">
             <a:avLst/>
@@ -12885,12 +12885,12 @@
         </p:nvSpPr>
         <p:spPr>
           <a:xfrm>
-            <a:off x="566928" y="3520440"/>
-            <a:ext cx="3520440" cy="1463040"/>
+            <a:off x="566928" y="3886200"/>
+            <a:ext cx="3520440" cy="1874520"/>
           </a:xfrm>
           <a:prstGeom prst="roundRect">
             <a:avLst>
-              <a:gd name="adj" fmla="val 7500"/>
+              <a:gd name="adj" fmla="val 5854"/>
             </a:avLst>
           </a:prstGeom>
           <a:solidFill>
@@ -12907,7 +12907,7 @@
         </p:nvSpPr>
         <p:spPr>
           <a:xfrm>
-            <a:off x="768096" y="3703320"/>
+            <a:off x="768096" y="4069080"/>
             <a:ext cx="384048" cy="384048"/>
           </a:xfrm>
           <a:prstGeom prst="ellipse">
@@ -12927,7 +12927,7 @@
         </p:nvSpPr>
         <p:spPr>
           <a:xfrm>
-            <a:off x="768096" y="3703320"/>
+            <a:off x="768096" y="4069080"/>
             <a:ext cx="384048" cy="384048"/>
           </a:xfrm>
           <a:prstGeom prst="rect">
@@ -12966,7 +12966,7 @@
         </p:nvSpPr>
         <p:spPr>
           <a:xfrm>
-            <a:off x="1280160" y="3675888"/>
+            <a:off x="1280160" y="4041648"/>
             <a:ext cx="2606040" cy="438912"/>
           </a:xfrm>
           <a:prstGeom prst="rect">
@@ -13005,8 +13005,8 @@
         </p:nvSpPr>
         <p:spPr>
           <a:xfrm>
-            <a:off x="768096" y="4206240"/>
-            <a:ext cx="3118104" cy="621792"/>
+            <a:off x="768096" y="4572000"/>
+            <a:ext cx="3118104" cy="1033272"/>
           </a:xfrm>
           <a:prstGeom prst="rect">
             <a:avLst/>
@@ -13047,12 +13047,12 @@
         </p:nvSpPr>
         <p:spPr>
           <a:xfrm>
-            <a:off x="4270248" y="3520440"/>
-            <a:ext cx="3520440" cy="1463040"/>
+            <a:off x="4270248" y="3886200"/>
+            <a:ext cx="3520440" cy="1874520"/>
           </a:xfrm>
           <a:prstGeom prst="roundRect">
             <a:avLst>
-              <a:gd name="adj" fmla="val 7500"/>
+              <a:gd name="adj" fmla="val 5854"/>
             </a:avLst>
           </a:prstGeom>
           <a:solidFill>
@@ -13069,7 +13069,7 @@
         </p:nvSpPr>
         <p:spPr>
           <a:xfrm>
-            <a:off x="4471416" y="3703320"/>
+            <a:off x="4471416" y="4069080"/>
             <a:ext cx="384048" cy="384048"/>
           </a:xfrm>
           <a:prstGeom prst="ellipse">
@@ -13089,7 +13089,7 @@
         </p:nvSpPr>
         <p:spPr>
           <a:xfrm>
-            <a:off x="4471416" y="3703320"/>
+            <a:off x="4471416" y="4069080"/>
             <a:ext cx="384048" cy="384048"/>
           </a:xfrm>
           <a:prstGeom prst="rect">
@@ -13128,7 +13128,7 @@
         </p:nvSpPr>
         <p:spPr>
           <a:xfrm>
-            <a:off x="4983480" y="3675888"/>
+            <a:off x="4983480" y="4041648"/>
             <a:ext cx="2606040" cy="438912"/>
           </a:xfrm>
           <a:prstGeom prst="rect">
@@ -13167,8 +13167,8 @@
         </p:nvSpPr>
         <p:spPr>
           <a:xfrm>
-            <a:off x="4471416" y="4206240"/>
-            <a:ext cx="3118104" cy="621792"/>
+            <a:off x="4471416" y="4572000"/>
+            <a:ext cx="3118104" cy="1033272"/>
           </a:xfrm>
           <a:prstGeom prst="rect">
             <a:avLst/>
@@ -13576,11 +13576,11 @@
         <p:spPr>
           <a:xfrm>
             <a:off x="566928" y="1737360"/>
-            <a:ext cx="3566160" cy="1828800"/>
+            <a:ext cx="3566160" cy="2148840"/>
           </a:xfrm>
           <a:prstGeom prst="roundRect">
             <a:avLst>
-              <a:gd name="adj" fmla="val 6000"/>
+              <a:gd name="adj" fmla="val 5106"/>
             </a:avLst>
           </a:prstGeom>
           <a:solidFill>
@@ -13637,7 +13637,7 @@
         <p:spPr>
           <a:xfrm>
             <a:off x="768096" y="2423160"/>
-            <a:ext cx="3163824" cy="987552"/>
+            <a:ext cx="3163824" cy="1307592"/>
           </a:xfrm>
           <a:prstGeom prst="rect">
             <a:avLst/>
@@ -13679,11 +13679,11 @@
         <p:spPr>
           <a:xfrm>
             <a:off x="4315968" y="1737360"/>
-            <a:ext cx="3566160" cy="1828800"/>
+            <a:ext cx="3566160" cy="2148840"/>
           </a:xfrm>
           <a:prstGeom prst="roundRect">
             <a:avLst>
-              <a:gd name="adj" fmla="val 6000"/>
+              <a:gd name="adj" fmla="val 5106"/>
             </a:avLst>
           </a:prstGeom>
           <a:solidFill>
@@ -13740,7 +13740,7 @@
         <p:spPr>
           <a:xfrm>
             <a:off x="4517136" y="2423160"/>
-            <a:ext cx="3163824" cy="987552"/>
+            <a:ext cx="3163824" cy="1307592"/>
           </a:xfrm>
           <a:prstGeom prst="rect">
             <a:avLst/>
@@ -13782,11 +13782,11 @@
         <p:spPr>
           <a:xfrm>
             <a:off x="8065008" y="1737360"/>
-            <a:ext cx="3566160" cy="1828800"/>
+            <a:ext cx="3566160" cy="2148840"/>
           </a:xfrm>
           <a:prstGeom prst="roundRect">
             <a:avLst>
-              <a:gd name="adj" fmla="val 6000"/>
+              <a:gd name="adj" fmla="val 5106"/>
             </a:avLst>
           </a:prstGeom>
           <a:solidFill>
@@ -13843,7 +13843,7 @@
         <p:spPr>
           <a:xfrm>
             <a:off x="8266176" y="2423160"/>
-            <a:ext cx="3163824" cy="987552"/>
+            <a:ext cx="3163824" cy="1307592"/>
           </a:xfrm>
           <a:prstGeom prst="rect">
             <a:avLst/>
@@ -13884,12 +13884,12 @@
         </p:nvSpPr>
         <p:spPr>
           <a:xfrm>
-            <a:off x="566928" y="3977640"/>
-            <a:ext cx="11064240" cy="1234440"/>
+            <a:off x="566928" y="4297680"/>
+            <a:ext cx="11064240" cy="1600200"/>
           </a:xfrm>
           <a:prstGeom prst="roundRect">
             <a:avLst>
-              <a:gd name="adj" fmla="val 8889"/>
+              <a:gd name="adj" fmla="val 6857"/>
             </a:avLst>
           </a:prstGeom>
           <a:solidFill>
@@ -13911,8 +13911,8 @@
         </p:nvSpPr>
         <p:spPr>
           <a:xfrm>
-            <a:off x="786384" y="4123944"/>
-            <a:ext cx="10625328" cy="941832"/>
+            <a:off x="786384" y="4443984"/>
+            <a:ext cx="10625328" cy="1307592"/>
           </a:xfrm>
           <a:prstGeom prst="rect">
             <a:avLst/>
@@ -14178,11 +14178,11 @@
         <p:spPr>
           <a:xfrm>
             <a:off x="566928" y="1783080"/>
-            <a:ext cx="11064240" cy="1874520"/>
+            <a:ext cx="11064240" cy="3657600"/>
           </a:xfrm>
           <a:prstGeom prst="roundRect">
             <a:avLst>
-              <a:gd name="adj" fmla="val 5854"/>
+              <a:gd name="adj" fmla="val 3000"/>
             </a:avLst>
           </a:prstGeom>
           <a:solidFill>
@@ -14204,7 +14204,7 @@
         </p:nvSpPr>
         <p:spPr>
           <a:xfrm>
-            <a:off x="978408" y="2157984"/>
+            <a:off x="978408" y="2706624"/>
             <a:ext cx="256032" cy="256032"/>
           </a:xfrm>
           <a:prstGeom prst="roundRect">
@@ -14231,7 +14231,7 @@
         </p:nvSpPr>
         <p:spPr>
           <a:xfrm rot="2700000">
-            <a:off x="1041227" y="2297430"/>
+            <a:off x="1041227" y="2846070"/>
             <a:ext cx="58156" cy="27432"/>
           </a:xfrm>
           <a:prstGeom prst="rect">
@@ -14251,7 +14251,7 @@
         </p:nvSpPr>
         <p:spPr>
           <a:xfrm rot="-3000000">
-            <a:off x="1069025" y="2271370"/>
+            <a:off x="1069025" y="2820010"/>
             <a:ext cx="121432" cy="27432"/>
           </a:xfrm>
           <a:prstGeom prst="rect">
@@ -14271,8 +14271,8 @@
         </p:nvSpPr>
         <p:spPr>
           <a:xfrm>
-            <a:off x="1362456" y="2103120"/>
-            <a:ext cx="4617720" cy="384048"/>
+            <a:off x="1362456" y="2505456"/>
+            <a:ext cx="4617720" cy="658368"/>
           </a:xfrm>
           <a:prstGeom prst="rect">
             <a:avLst/>
@@ -14288,7 +14288,7 @@
               <a:buNone/>
             </a:pPr>
             <a:r>
-              <a:rPr lang="en-US" sz="1250" dirty="0">
+              <a:rPr lang="en-US" sz="1400" dirty="0">
                 <a:solidFill>
                   <a:srgbClr val="000000"/>
                 </a:solidFill>
@@ -14298,7 +14298,7 @@
               </a:rPr>
               <a:t>в історії Actions є червоний і зелений прогін</a:t>
             </a:r>
-            <a:endParaRPr lang="en-US" sz="1250" dirty="0"/>
+            <a:endParaRPr lang="en-US" sz="1400" dirty="0"/>
           </a:p>
         </p:txBody>
       </p:sp>
@@ -14310,7 +14310,7 @@
         </p:nvSpPr>
         <p:spPr>
           <a:xfrm>
-            <a:off x="978408" y="2724912"/>
+            <a:off x="978408" y="4169664"/>
             <a:ext cx="256032" cy="256032"/>
           </a:xfrm>
           <a:prstGeom prst="roundRect">
@@ -14337,7 +14337,7 @@
         </p:nvSpPr>
         <p:spPr>
           <a:xfrm rot="2700000">
-            <a:off x="1041227" y="2864358"/>
+            <a:off x="1041227" y="4309110"/>
             <a:ext cx="58156" cy="27432"/>
           </a:xfrm>
           <a:prstGeom prst="rect">
@@ -14357,7 +14357,7 @@
         </p:nvSpPr>
         <p:spPr>
           <a:xfrm rot="-3000000">
-            <a:off x="1069025" y="2838298"/>
+            <a:off x="1069025" y="4283050"/>
             <a:ext cx="121432" cy="27432"/>
           </a:xfrm>
           <a:prstGeom prst="rect">
@@ -14377,8 +14377,8 @@
         </p:nvSpPr>
         <p:spPr>
           <a:xfrm>
-            <a:off x="1362456" y="2670048"/>
-            <a:ext cx="4617720" cy="384048"/>
+            <a:off x="1362456" y="3968496"/>
+            <a:ext cx="4617720" cy="658368"/>
           </a:xfrm>
           <a:prstGeom prst="rect">
             <a:avLst/>
@@ -14394,7 +14394,7 @@
               <a:buNone/>
             </a:pPr>
             <a:r>
-              <a:rPr lang="en-US" sz="1250" dirty="0">
+              <a:rPr lang="en-US" sz="1400" dirty="0">
                 <a:solidFill>
                   <a:srgbClr val="000000"/>
                 </a:solidFill>
@@ -14404,7 +14404,7 @@
               </a:rPr>
               <a:t>merge червоного PR справді заблокований</a:t>
             </a:r>
-            <a:endParaRPr lang="en-US" sz="1250" dirty="0"/>
+            <a:endParaRPr lang="en-US" sz="1400" dirty="0"/>
           </a:p>
         </p:txBody>
       </p:sp>
@@ -14416,7 +14416,7 @@
         </p:nvSpPr>
         <p:spPr>
           <a:xfrm>
-            <a:off x="6144768" y="2157984"/>
+            <a:off x="6144768" y="2706624"/>
             <a:ext cx="256032" cy="256032"/>
           </a:xfrm>
           <a:prstGeom prst="roundRect">
@@ -14443,7 +14443,7 @@
         </p:nvSpPr>
         <p:spPr>
           <a:xfrm rot="2700000">
-            <a:off x="6207587" y="2297430"/>
+            <a:off x="6207587" y="2846070"/>
             <a:ext cx="58156" cy="27432"/>
           </a:xfrm>
           <a:prstGeom prst="rect">
@@ -14463,7 +14463,7 @@
         </p:nvSpPr>
         <p:spPr>
           <a:xfrm rot="-3000000">
-            <a:off x="6235385" y="2271370"/>
+            <a:off x="6235385" y="2820010"/>
             <a:ext cx="121432" cy="27432"/>
           </a:xfrm>
           <a:prstGeom prst="rect">
@@ -14483,8 +14483,8 @@
         </p:nvSpPr>
         <p:spPr>
           <a:xfrm>
-            <a:off x="6528816" y="2103120"/>
-            <a:ext cx="4617720" cy="384048"/>
+            <a:off x="6528816" y="2505456"/>
+            <a:ext cx="4617720" cy="658368"/>
           </a:xfrm>
           <a:prstGeom prst="rect">
             <a:avLst/>
@@ -14500,7 +14500,7 @@
               <a:buNone/>
             </a:pPr>
             <a:r>
-              <a:rPr lang="en-US" sz="1250" dirty="0">
+              <a:rPr lang="en-US" sz="1400" dirty="0">
                 <a:solidFill>
                   <a:srgbClr val="000000"/>
                 </a:solidFill>
@@ -14510,7 +14510,7 @@
               </a:rPr>
               <a:t>rollback-критерії записані: умова, хто, чим</a:t>
             </a:r>
-            <a:endParaRPr lang="en-US" sz="1250" dirty="0"/>
+            <a:endParaRPr lang="en-US" sz="1400" dirty="0"/>
           </a:p>
         </p:txBody>
       </p:sp>
@@ -14522,7 +14522,7 @@
         </p:nvSpPr>
         <p:spPr>
           <a:xfrm>
-            <a:off x="6144768" y="2724912"/>
+            <a:off x="6144768" y="4169664"/>
             <a:ext cx="256032" cy="256032"/>
           </a:xfrm>
           <a:prstGeom prst="roundRect">
@@ -14549,7 +14549,7 @@
         </p:nvSpPr>
         <p:spPr>
           <a:xfrm rot="2700000">
-            <a:off x="6207587" y="2864358"/>
+            <a:off x="6207587" y="4309110"/>
             <a:ext cx="58156" cy="27432"/>
           </a:xfrm>
           <a:prstGeom prst="rect">
@@ -14569,7 +14569,7 @@
         </p:nvSpPr>
         <p:spPr>
           <a:xfrm rot="-3000000">
-            <a:off x="6235385" y="2838298"/>
+            <a:off x="6235385" y="4283050"/>
             <a:ext cx="121432" cy="27432"/>
           </a:xfrm>
           <a:prstGeom prst="rect">
@@ -14589,8 +14589,8 @@
         </p:nvSpPr>
         <p:spPr>
           <a:xfrm>
-            <a:off x="6528816" y="2670048"/>
-            <a:ext cx="4617720" cy="384048"/>
+            <a:off x="6528816" y="3968496"/>
+            <a:ext cx="4617720" cy="658368"/>
           </a:xfrm>
           <a:prstGeom prst="rect">
             <a:avLst/>
@@ -14606,7 +14606,7 @@
               <a:buNone/>
             </a:pPr>
             <a:r>
-              <a:rPr lang="en-US" sz="1250" dirty="0">
+              <a:rPr lang="en-US" sz="1400" dirty="0">
                 <a:solidFill>
                   <a:srgbClr val="000000"/>
                 </a:solidFill>
@@ -14616,7 +14616,7 @@
               </a:rPr>
               <a:t>поясню, чому читач деплоїться перед писарем</a:t>
             </a:r>
-            <a:endParaRPr lang="en-US" sz="1250" dirty="0"/>
+            <a:endParaRPr lang="en-US" sz="1400" dirty="0"/>
           </a:p>
         </p:txBody>
       </p:sp>
@@ -14628,7 +14628,7 @@
         </p:nvSpPr>
         <p:spPr>
           <a:xfrm>
-            <a:off x="566928" y="3886200"/>
+            <a:off x="566928" y="5669280"/>
             <a:ext cx="10972800" cy="320040"/>
           </a:xfrm>
           <a:prstGeom prst="rect">
@@ -18605,11 +18605,11 @@
         <p:spPr>
           <a:xfrm>
             <a:off x="566928" y="1783080"/>
-            <a:ext cx="3553968" cy="1188720"/>
+            <a:ext cx="3553968" cy="1481328"/>
           </a:xfrm>
           <a:prstGeom prst="roundRect">
             <a:avLst>
-              <a:gd name="adj" fmla="val 7692"/>
+              <a:gd name="adj" fmla="val 6173"/>
             </a:avLst>
           </a:prstGeom>
           <a:solidFill>
@@ -18671,7 +18671,7 @@
         <p:spPr>
           <a:xfrm>
             <a:off x="749808" y="2203704"/>
-            <a:ext cx="3188208" cy="658368"/>
+            <a:ext cx="3188208" cy="950976"/>
           </a:xfrm>
           <a:prstGeom prst="rect">
             <a:avLst/>
@@ -18713,11 +18713,11 @@
         <p:spPr>
           <a:xfrm>
             <a:off x="4322064" y="1783080"/>
-            <a:ext cx="3553968" cy="1188720"/>
+            <a:ext cx="3553968" cy="1481328"/>
           </a:xfrm>
           <a:prstGeom prst="roundRect">
             <a:avLst>
-              <a:gd name="adj" fmla="val 7692"/>
+              <a:gd name="adj" fmla="val 6173"/>
             </a:avLst>
           </a:prstGeom>
           <a:solidFill>
@@ -18779,7 +18779,7 @@
         <p:spPr>
           <a:xfrm>
             <a:off x="4504944" y="2203704"/>
-            <a:ext cx="3188208" cy="658368"/>
+            <a:ext cx="3188208" cy="950976"/>
           </a:xfrm>
           <a:prstGeom prst="rect">
             <a:avLst/>
@@ -18821,11 +18821,11 @@
         <p:spPr>
           <a:xfrm>
             <a:off x="8077200" y="1783080"/>
-            <a:ext cx="3553968" cy="1188720"/>
+            <a:ext cx="3553968" cy="1481328"/>
           </a:xfrm>
           <a:prstGeom prst="roundRect">
             <a:avLst>
-              <a:gd name="adj" fmla="val 7692"/>
+              <a:gd name="adj" fmla="val 6173"/>
             </a:avLst>
           </a:prstGeom>
           <a:solidFill>
@@ -18887,7 +18887,7 @@
         <p:spPr>
           <a:xfrm>
             <a:off x="8260080" y="2203704"/>
-            <a:ext cx="3188208" cy="658368"/>
+            <a:ext cx="3188208" cy="950976"/>
           </a:xfrm>
           <a:prstGeom prst="rect">
             <a:avLst/>
@@ -18928,12 +18928,12 @@
         </p:nvSpPr>
         <p:spPr>
           <a:xfrm>
-            <a:off x="566928" y="3172968"/>
-            <a:ext cx="3553968" cy="1188720"/>
+            <a:off x="566928" y="3465576"/>
+            <a:ext cx="3553968" cy="1481328"/>
           </a:xfrm>
           <a:prstGeom prst="roundRect">
             <a:avLst>
-              <a:gd name="adj" fmla="val 7692"/>
+              <a:gd name="adj" fmla="val 6173"/>
             </a:avLst>
           </a:prstGeom>
           <a:solidFill>
@@ -18955,7 +18955,7 @@
         </p:nvSpPr>
         <p:spPr>
           <a:xfrm>
-            <a:off x="749808" y="3282696"/>
+            <a:off x="749808" y="3575304"/>
             <a:ext cx="3188208" cy="310896"/>
           </a:xfrm>
           <a:prstGeom prst="rect">
@@ -18994,8 +18994,8 @@
         </p:nvSpPr>
         <p:spPr>
           <a:xfrm>
-            <a:off x="749808" y="3593592"/>
-            <a:ext cx="3188208" cy="658368"/>
+            <a:off x="749808" y="3886200"/>
+            <a:ext cx="3188208" cy="950976"/>
           </a:xfrm>
           <a:prstGeom prst="rect">
             <a:avLst/>
@@ -19036,12 +19036,12 @@
         </p:nvSpPr>
         <p:spPr>
           <a:xfrm>
-            <a:off x="4322064" y="3172968"/>
-            <a:ext cx="3553968" cy="1188720"/>
+            <a:off x="4322064" y="3465576"/>
+            <a:ext cx="3553968" cy="1481328"/>
           </a:xfrm>
           <a:prstGeom prst="roundRect">
             <a:avLst>
-              <a:gd name="adj" fmla="val 7692"/>
+              <a:gd name="adj" fmla="val 6173"/>
             </a:avLst>
           </a:prstGeom>
           <a:solidFill>
@@ -19063,7 +19063,7 @@
         </p:nvSpPr>
         <p:spPr>
           <a:xfrm>
-            <a:off x="4504944" y="3282696"/>
+            <a:off x="4504944" y="3575304"/>
             <a:ext cx="3188208" cy="310896"/>
           </a:xfrm>
           <a:prstGeom prst="rect">
@@ -19102,8 +19102,8 @@
         </p:nvSpPr>
         <p:spPr>
           <a:xfrm>
-            <a:off x="4504944" y="3593592"/>
-            <a:ext cx="3188208" cy="658368"/>
+            <a:off x="4504944" y="3886200"/>
+            <a:ext cx="3188208" cy="950976"/>
           </a:xfrm>
           <a:prstGeom prst="rect">
             <a:avLst/>
@@ -19144,12 +19144,12 @@
         </p:nvSpPr>
         <p:spPr>
           <a:xfrm>
-            <a:off x="8077200" y="3172968"/>
-            <a:ext cx="3553968" cy="1188720"/>
+            <a:off x="8077200" y="3465576"/>
+            <a:ext cx="3553968" cy="1481328"/>
           </a:xfrm>
           <a:prstGeom prst="roundRect">
             <a:avLst>
-              <a:gd name="adj" fmla="val 7692"/>
+              <a:gd name="adj" fmla="val 6173"/>
             </a:avLst>
           </a:prstGeom>
           <a:solidFill>
@@ -19171,7 +19171,7 @@
         </p:nvSpPr>
         <p:spPr>
           <a:xfrm>
-            <a:off x="8260080" y="3282696"/>
+            <a:off x="8260080" y="3575304"/>
             <a:ext cx="3188208" cy="310896"/>
           </a:xfrm>
           <a:prstGeom prst="rect">
@@ -19210,8 +19210,8 @@
         </p:nvSpPr>
         <p:spPr>
           <a:xfrm>
-            <a:off x="8260080" y="3593592"/>
-            <a:ext cx="3188208" cy="658368"/>
+            <a:off x="8260080" y="3886200"/>
+            <a:ext cx="3188208" cy="950976"/>
           </a:xfrm>
           <a:prstGeom prst="rect">
             <a:avLst/>
@@ -19252,7 +19252,7 @@
         </p:nvSpPr>
         <p:spPr>
           <a:xfrm>
-            <a:off x="566928" y="4526280"/>
+            <a:off x="566928" y="5138928"/>
             <a:ext cx="11064240" cy="777240"/>
           </a:xfrm>
           <a:prstGeom prst="roundRect">
@@ -19279,7 +19279,7 @@
         </p:nvSpPr>
         <p:spPr>
           <a:xfrm>
-            <a:off x="786384" y="4672584"/>
+            <a:off x="786384" y="5285232"/>
             <a:ext cx="10625328" cy="484632"/>
           </a:xfrm>
           <a:prstGeom prst="rect">

--- a/docs/decks/L11.pptx
+++ b/docs/decks/L11.pptx
@@ -30,9 +30,10 @@
     <p:sldId id="278" r:id="rId24"/>
     <p:sldId id="279" r:id="rId25"/>
     <p:sldId id="280" r:id="rId26"/>
+    <p:sldId id="281" r:id="rId27"/>
   </p:sldIdLst>
   <p:notesMasterIdLst>
-    <p:notesMasterId r:id="rId27"/>
+    <p:notesMasterId r:id="rId28"/>
   </p:notesMasterIdLst>
   <p:sldSz cx="12192000" cy="6858000"/>
   <p:notesSz cx="6858000" cy="12192000"/>
@@ -2046,6 +2047,94 @@
             <a:fld id="{F7021451-1387-4CA6-816F-3879F97B5CBC}" type="slidenum">
               <a:rPr lang="en-US"/>
               <a:t>25</a:t>
+            </a:fld>
+            <a:endParaRPr lang="en-US"/>
+          </a:p>
+        </p:txBody>
+      </p:sp>
+    </p:spTree>
+    <p:extLst>
+      <p:ext uri="{BB962C8B-B14F-4D97-AF65-F5344CB8AC3E}">
+        <p14:creationId xmlns:p14="http://schemas.microsoft.com/office/powerpoint/2010/main" val="1024086991"/>
+      </p:ext>
+    </p:extLst>
+  </p:cSld>
+  <p:clrMapOvr>
+    <a:masterClrMapping/>
+  </p:clrMapOvr>
+</p:notes>
+</file>
+
+<file path=ppt/notesSlides/notesSlide26.xml><?xml version="1.0" encoding="utf-8"?>
+<p:notes xmlns:a="http://schemas.openxmlformats.org/drawingml/2006/main" xmlns:r="http://schemas.openxmlformats.org/officeDocument/2006/relationships" xmlns:p="http://schemas.openxmlformats.org/presentationml/2006/main">
+  <p:cSld>
+    <p:spTree>
+      <p:nvGrpSpPr>
+        <p:cNvPr id="1" name=""/>
+        <p:cNvGrpSpPr/>
+        <p:nvPr/>
+      </p:nvGrpSpPr>
+      <p:grpSpPr>
+        <a:xfrm>
+          <a:off x="0" y="0"/>
+          <a:ext cx="0" cy="0"/>
+          <a:chOff x="0" y="0"/>
+          <a:chExt cx="0" cy="0"/>
+        </a:xfrm>
+      </p:grpSpPr>
+      <p:sp>
+        <p:nvSpPr>
+          <p:cNvPr id="2" name="Slide Image Placeholder 1"/>
+          <p:cNvSpPr>
+            <a:spLocks noGrp="1" noRot="1" noChangeAspect="1"/>
+          </p:cNvSpPr>
+          <p:nvPr>
+            <p:ph type="sldImg"/>
+          </p:nvPr>
+        </p:nvSpPr>
+        <p:spPr/>
+      </p:sp>
+      <p:sp>
+        <p:nvSpPr>
+          <p:cNvPr id="3" name="Notes Placeholder 2"/>
+          <p:cNvSpPr>
+            <a:spLocks noGrp="1"/>
+          </p:cNvSpPr>
+          <p:nvPr>
+            <p:ph type="body" idx="1"/>
+          </p:nvPr>
+        </p:nvSpPr>
+        <p:spPr/>
+        <p:txBody>
+          <a:bodyPr/>
+          <a:lstStyle/>
+          <a:p>
+            <a:r>
+              <a:rPr lang="en-US" dirty="0"/>
+              <a:t/>
+            </a:r>
+            <a:endParaRPr lang="en-US" dirty="0"/>
+          </a:p>
+        </p:txBody>
+      </p:sp>
+      <p:sp>
+        <p:nvSpPr>
+          <p:cNvPr id="4" name="Slide Number Placeholder 3"/>
+          <p:cNvSpPr>
+            <a:spLocks noGrp="1"/>
+          </p:cNvSpPr>
+          <p:nvPr>
+            <p:ph type="sldNum" sz="quarter" idx="10"/>
+          </p:nvPr>
+        </p:nvSpPr>
+        <p:spPr/>
+        <p:txBody>
+          <a:bodyPr/>
+          <a:lstStyle/>
+          <a:p>
+            <a:fld id="{F7021451-1387-4CA6-816F-3879F97B5CBC}" type="slidenum">
+              <a:rPr lang="en-US"/>
+              <a:t>26</a:t>
             </a:fld>
             <a:endParaRPr lang="en-US"/>
           </a:p>
@@ -16773,6 +16862,109 @@
 </p:sld>
 </file>
 
+<file path=ppt/slides/slide26.xml><?xml version="1.0" encoding="utf-8"?>
+<p:sld xmlns:a="http://schemas.openxmlformats.org/drawingml/2006/main" xmlns:r="http://schemas.openxmlformats.org/officeDocument/2006/relationships" xmlns:p="http://schemas.openxmlformats.org/presentationml/2006/main">
+  <p:cSld name="Slide 26">
+    <p:spTree>
+      <p:nvGrpSpPr>
+        <p:cNvPr id="1" name=""/>
+        <p:cNvGrpSpPr/>
+        <p:nvPr/>
+      </p:nvGrpSpPr>
+      <p:grpSpPr>
+        <a:xfrm>
+          <a:off x="0" y="0"/>
+          <a:ext cx="0" cy="0"/>
+          <a:chOff x="0" y="0"/>
+          <a:chExt cx="0" cy="0"/>
+        </a:xfrm>
+      </p:grpSpPr>
+      <p:sp>
+        <p:nvSpPr>
+          <p:cNvPr id="2" name="Text 0"/>
+          <p:cNvSpPr/>
+          <p:nvPr/>
+        </p:nvSpPr>
+        <p:spPr>
+          <a:xfrm>
+            <a:off x="566928" y="384048"/>
+            <a:ext cx="5486400" cy="274320"/>
+          </a:xfrm>
+          <a:prstGeom prst="rect">
+            <a:avLst/>
+          </a:prstGeom>
+          <a:noFill/>
+          <a:ln/>
+        </p:spPr>
+        <p:txBody>
+          <a:bodyPr wrap="square" lIns="0" tIns="0" rIns="0" bIns="0" rtlCol="0" anchor="ctr"/>
+          <a:lstStyle/>
+          <a:p>
+            <a:pPr indent="0" marL="0">
+              <a:buNone/>
+            </a:pPr>
+            <a:r>
+              <a:rPr lang="en-US" sz="1200" b="1" spc="400" kern="0" dirty="0">
+                <a:solidFill>
+                  <a:srgbClr val="FFFFFF"/>
+                </a:solidFill>
+                <a:latin typeface="Montserrat" pitchFamily="34" charset="0"/>
+                <a:ea typeface="Montserrat" pitchFamily="34" charset="-122"/>
+                <a:cs typeface="Montserrat" pitchFamily="34" charset="-120"/>
+              </a:rPr>
+              <a:t>NEOVERSITY</a:t>
+            </a:r>
+            <a:endParaRPr lang="en-US" sz="1200" dirty="0"/>
+          </a:p>
+        </p:txBody>
+      </p:sp>
+      <p:sp>
+        <p:nvSpPr>
+          <p:cNvPr id="3" name="Text 1"/>
+          <p:cNvSpPr/>
+          <p:nvPr/>
+        </p:nvSpPr>
+        <p:spPr>
+          <a:xfrm>
+            <a:off x="566928" y="2834640"/>
+            <a:ext cx="11064240" cy="1463040"/>
+          </a:xfrm>
+          <a:prstGeom prst="rect">
+            <a:avLst/>
+          </a:prstGeom>
+          <a:noFill/>
+          <a:ln/>
+        </p:spPr>
+        <p:txBody>
+          <a:bodyPr wrap="square" lIns="0" tIns="0" rIns="0" bIns="0" rtlCol="0" anchor="ctr"/>
+          <a:lstStyle/>
+          <a:p>
+            <a:pPr indent="0" marL="0">
+              <a:buNone/>
+            </a:pPr>
+            <a:r>
+              <a:rPr lang="en-US" sz="7300" dirty="0">
+                <a:solidFill>
+                  <a:srgbClr val="FFFFFF"/>
+                </a:solidFill>
+                <a:latin typeface="Unbounded" pitchFamily="34" charset="0"/>
+                <a:ea typeface="Unbounded" pitchFamily="34" charset="-122"/>
+                <a:cs typeface="Unbounded" pitchFamily="34" charset="-120"/>
+              </a:rPr>
+              <a:t>ДЯКУЮ</a:t>
+            </a:r>
+            <a:endParaRPr lang="en-US" sz="7300" dirty="0"/>
+          </a:p>
+        </p:txBody>
+      </p:sp>
+    </p:spTree>
+  </p:cSld>
+  <p:clrMapOvr>
+    <a:masterClrMapping/>
+  </p:clrMapOvr>
+</p:sld>
+</file>
+
 <file path=ppt/slides/slide3.xml><?xml version="1.0" encoding="utf-8"?>
 <p:sld xmlns:a="http://schemas.openxmlformats.org/drawingml/2006/main" xmlns:r="http://schemas.openxmlformats.org/officeDocument/2006/relationships" xmlns:p="http://schemas.openxmlformats.org/presentationml/2006/main">
   <p:cSld name="Slide 3">

--- a/docs/decks/L11.pptx
+++ b/docs/decks/L11.pptx
@@ -7481,7 +7481,7 @@
                       <a:tailEnd type="none" w="med" len="med"/>
                     </a:lnB>
                     <a:solidFill>
-                      <a:srgbClr val="000000"/>
+                      <a:srgbClr val="5A05F4"/>
                     </a:solidFill>
                   </a:tcPr>
                 </a:tc>
@@ -7549,7 +7549,7 @@
                       <a:tailEnd type="none" w="med" len="med"/>
                     </a:lnB>
                     <a:solidFill>
-                      <a:srgbClr val="000000"/>
+                      <a:srgbClr val="5A05F4"/>
                     </a:solidFill>
                   </a:tcPr>
                 </a:tc>
@@ -8118,7 +8118,7 @@
                       <a:r>
                         <a:rPr lang="en-US" sz="1150" b="1" dirty="0">
                           <a:solidFill>
-                            <a:srgbClr val="FF6B6B"/>
+                            <a:srgbClr val="B3261E"/>
                           </a:solidFill>
                           <a:latin typeface="Montserrat" pitchFamily="34" charset="0"/>
                           <a:ea typeface="Montserrat" pitchFamily="34" charset="-122"/>
@@ -8171,7 +8171,7 @@
                       <a:tailEnd type="none" w="med" len="med"/>
                     </a:lnB>
                     <a:solidFill>
-                      <a:srgbClr val="000000"/>
+                      <a:srgbClr val="F5F3FA"/>
                     </a:solidFill>
                   </a:tcPr>
                 </a:tc>
@@ -8186,7 +8186,7 @@
                       <a:r>
                         <a:rPr lang="en-US" sz="1150" dirty="0">
                           <a:solidFill>
-                            <a:srgbClr val="FF6B6B"/>
+                            <a:srgbClr val="B3261E"/>
                           </a:solidFill>
                           <a:latin typeface="Montserrat" pitchFamily="34" charset="0"/>
                           <a:ea typeface="Montserrat" pitchFamily="34" charset="-122"/>
@@ -8239,7 +8239,7 @@
                       <a:tailEnd type="none" w="med" len="med"/>
                     </a:lnB>
                     <a:solidFill>
-                      <a:srgbClr val="000000"/>
+                      <a:srgbClr val="F5F3FA"/>
                     </a:solidFill>
                   </a:tcPr>
                 </a:tc>

--- a/docs/decks/L11.pptx
+++ b/docs/decks/L11.pptx
@@ -7422,7 +7422,7 @@
                     <a:bodyPr/>
                     <a:lstStyle/>
                     <a:p>
-                      <a:pPr indent="0" marL="0">
+                      <a:pPr algn="ctr" indent="0" marL="0">
                         <a:buNone/>
                       </a:pPr>
                       <a:r>
@@ -7490,7 +7490,7 @@
                     <a:bodyPr/>
                     <a:lstStyle/>
                     <a:p>
-                      <a:pPr indent="0" marL="0">
+                      <a:pPr algn="ctr" indent="0" marL="0">
                         <a:buNone/>
                       </a:pPr>
                       <a:r>

--- a/docs/decks/L11.pptx
+++ b/docs/decks/L11.pptx
@@ -4,6 +4,9 @@
   <p:sldMasterIdLst>
     <p:sldMasterId id="2147483648" r:id="rId1"/>
   </p:sldMasterIdLst>
+  <p:notesMasterIdLst>
+    <p:notesMasterId r:id="rId28"/>
+  </p:notesMasterIdLst>
   <p:sldIdLst>
     <p:sldId id="256" r:id="rId2"/>
     <p:sldId id="257" r:id="rId3"/>
@@ -32,9 +35,6 @@
     <p:sldId id="280" r:id="rId26"/>
     <p:sldId id="281" r:id="rId27"/>
   </p:sldIdLst>
-  <p:notesMasterIdLst>
-    <p:notesMasterId r:id="rId28"/>
-  </p:notesMasterIdLst>
   <p:sldSz cx="12192000" cy="6858000"/>
   <p:notesSz cx="6858000" cy="12192000"/>
   <p:defaultTextStyle>
@@ -129,6 +129,11 @@
       </a:defRPr>
     </a:lvl9pPr>
   </p:defaultTextStyle>
+  <p:extLst>
+    <p:ext uri="{EFAFB233-063F-42B5-8137-9DF3F51BA10A}">
+      <p15:sldGuideLst xmlns:p15="http://schemas.microsoft.com/office/powerpoint/2012/main"/>
+    </p:ext>
+  </p:extLst>
 </p:presentation>
 </file>
 
@@ -154,234 +159,10 @@
           <a:chExt cx="0" cy="0"/>
         </a:xfrm>
       </p:grpSpPr>
-      <p:sp>
-        <p:nvSpPr>
-          <p:cNvPr id="2" name="Header Placeholder 1"/>
-          <p:cNvSpPr>
-            <a:spLocks noGrp="1"/>
-          </p:cNvSpPr>
-          <p:nvPr>
-            <p:ph type="hdr" sz="quarter"/>
-          </p:nvPr>
-        </p:nvSpPr>
-        <p:spPr>
-          <a:xfrm>
-            <a:off x="0" y="0"/>
-            <a:ext cx="2971800" cy="458788"/>
-          </a:xfrm>
-          <a:prstGeom prst="rect">
-            <a:avLst/>
-          </a:prstGeom>
-        </p:spPr>
-        <p:txBody>
-          <a:bodyPr vert="horz" lIns="91440" tIns="45720" rIns="91440" bIns="45720" rtlCol="0"/>
-          <a:lstStyle>
-            <a:lvl1pPr algn="l">
-              <a:defRPr sz="1200"/>
-            </a:lvl1pPr>
-          </a:lstStyle>
-          <a:p>
-            <a:endParaRPr lang="en-US"/>
-          </a:p>
-        </p:txBody>
-      </p:sp>
-      <p:sp>
-        <p:nvSpPr>
-          <p:cNvPr id="3" name="Date Placeholder 2"/>
-          <p:cNvSpPr>
-            <a:spLocks noGrp="1"/>
-          </p:cNvSpPr>
-          <p:nvPr>
-            <p:ph type="dt" idx="1"/>
-          </p:nvPr>
-        </p:nvSpPr>
-        <p:spPr>
-          <a:xfrm>
-            <a:off x="3884613" y="0"/>
-            <a:ext cx="2971800" cy="458788"/>
-          </a:xfrm>
-          <a:prstGeom prst="rect">
-            <a:avLst/>
-          </a:prstGeom>
-        </p:spPr>
-        <p:txBody>
-          <a:bodyPr vert="horz" lIns="91440" tIns="45720" rIns="91440" bIns="45720" rtlCol="0"/>
-          <a:lstStyle>
-            <a:lvl1pPr algn="r">
-              <a:defRPr sz="1200"/>
-            </a:lvl1pPr>
-          </a:lstStyle>
-          <a:p>
-            <a:fld id="{5282F153-3F37-0F45-9E97-73ACFA13230C}" type="datetimeFigureOut">
-              <a:rPr lang="en-US"/>
-              <a:t>7/23/19</a:t>
-            </a:fld>
-            <a:endParaRPr lang="en-US"/>
-          </a:p>
-        </p:txBody>
-      </p:sp>
-      <p:sp>
-        <p:nvSpPr>
-          <p:cNvPr id="4" name="Slide Image Placeholder 3"/>
-          <p:cNvSpPr>
-            <a:spLocks noGrp="1" noRot="1" noChangeAspect="1"/>
-          </p:cNvSpPr>
-          <p:nvPr>
-            <p:ph type="sldImg" idx="2"/>
-          </p:nvPr>
-        </p:nvSpPr>
-        <p:spPr>
-          <a:xfrm>
-            <a:off x="685800" y="1143000"/>
-            <a:ext cx="5486400" cy="3086100"/>
-          </a:xfrm>
-          <a:prstGeom prst="rect">
-            <a:avLst/>
-          </a:prstGeom>
-          <a:noFill/>
-          <a:ln w="12700">
-            <a:solidFill>
-              <a:prstClr val="black"/>
-            </a:solidFill>
-          </a:ln>
-        </p:spPr>
-        <p:txBody>
-          <a:bodyPr vert="horz" lIns="91440" tIns="45720" rIns="91440" bIns="45720" rtlCol="0" anchor="ctr"/>
-          <a:lstStyle/>
-          <a:p>
-            <a:endParaRPr lang="en-US"/>
-          </a:p>
-        </p:txBody>
-      </p:sp>
-      <p:sp>
-        <p:nvSpPr>
-          <p:cNvPr id="5" name="Notes Placeholder 4"/>
-          <p:cNvSpPr>
-            <a:spLocks noGrp="1"/>
-          </p:cNvSpPr>
-          <p:nvPr>
-            <p:ph type="body" sz="quarter" idx="3"/>
-          </p:nvPr>
-        </p:nvSpPr>
-        <p:spPr>
-          <a:xfrm>
-            <a:off x="685800" y="4400550"/>
-            <a:ext cx="5486400" cy="3600450"/>
-          </a:xfrm>
-          <a:prstGeom prst="rect">
-            <a:avLst/>
-          </a:prstGeom>
-        </p:spPr>
-        <p:txBody>
-          <a:bodyPr vert="horz" lIns="91440" tIns="45720" rIns="91440" bIns="45720" rtlCol="0"/>
-          <a:lstStyle/>
-          <a:p>
-            <a:pPr lvl="0"/>
-            <a:r>
-              <a:rPr lang="en-US"/>
-              <a:t>Click to edit Master text styles</a:t>
-            </a:r>
-          </a:p>
-          <a:p>
-            <a:pPr lvl="1"/>
-            <a:r>
-              <a:rPr lang="en-US"/>
-              <a:t>Second level</a:t>
-            </a:r>
-          </a:p>
-          <a:p>
-            <a:pPr lvl="2"/>
-            <a:r>
-              <a:rPr lang="en-US"/>
-              <a:t>Third level</a:t>
-            </a:r>
-          </a:p>
-          <a:p>
-            <a:pPr lvl="3"/>
-            <a:r>
-              <a:rPr lang="en-US"/>
-              <a:t>Fourth level</a:t>
-            </a:r>
-          </a:p>
-          <a:p>
-            <a:pPr lvl="4"/>
-            <a:r>
-              <a:rPr lang="en-US"/>
-              <a:t>Fifth level</a:t>
-            </a:r>
-          </a:p>
-        </p:txBody>
-      </p:sp>
-      <p:sp>
-        <p:nvSpPr>
-          <p:cNvPr id="6" name="Footer Placeholder 5"/>
-          <p:cNvSpPr>
-            <a:spLocks noGrp="1"/>
-          </p:cNvSpPr>
-          <p:nvPr>
-            <p:ph type="ftr" sz="quarter" idx="4"/>
-          </p:nvPr>
-        </p:nvSpPr>
-        <p:spPr>
-          <a:xfrm>
-            <a:off x="0" y="8685213"/>
-            <a:ext cx="2971800" cy="458787"/>
-          </a:xfrm>
-          <a:prstGeom prst="rect">
-            <a:avLst/>
-          </a:prstGeom>
-        </p:spPr>
-        <p:txBody>
-          <a:bodyPr vert="horz" lIns="91440" tIns="45720" rIns="91440" bIns="45720" rtlCol="0" anchor="b"/>
-          <a:lstStyle>
-            <a:lvl1pPr algn="l">
-              <a:defRPr sz="1200"/>
-            </a:lvl1pPr>
-          </a:lstStyle>
-          <a:p>
-            <a:endParaRPr lang="en-US"/>
-          </a:p>
-        </p:txBody>
-      </p:sp>
-      <p:sp>
-        <p:nvSpPr>
-          <p:cNvPr id="7" name="Slide Number Placeholder 6"/>
-          <p:cNvSpPr>
-            <a:spLocks noGrp="1"/>
-          </p:cNvSpPr>
-          <p:nvPr>
-            <p:ph type="sldNum" sz="quarter" idx="5"/>
-          </p:nvPr>
-        </p:nvSpPr>
-        <p:spPr>
-          <a:xfrm>
-            <a:off x="3884613" y="8685213"/>
-            <a:ext cx="2971800" cy="458787"/>
-          </a:xfrm>
-          <a:prstGeom prst="rect">
-            <a:avLst/>
-          </a:prstGeom>
-        </p:spPr>
-        <p:txBody>
-          <a:bodyPr vert="horz" lIns="91440" tIns="45720" rIns="91440" bIns="45720" rtlCol="0" anchor="b"/>
-          <a:lstStyle>
-            <a:lvl1pPr algn="r">
-              <a:defRPr sz="1200"/>
-            </a:lvl1pPr>
-          </a:lstStyle>
-          <a:p>
-            <a:fld id="{CE5E9CC1-C706-0F49-92D6-E571CC5EEA8F}" type="slidenum">
-              <a:rPr lang="en-US"/>
-              <a:t>‹#›</a:t>
-            </a:fld>
-            <a:endParaRPr lang="en-US"/>
-          </a:p>
-        </p:txBody>
-      </p:sp>
     </p:spTree>
     <p:extLst>
       <p:ext uri="{BB962C8B-B14F-4D97-AF65-F5344CB8AC3E}">
-        <p14:creationId xmlns:p14="http://schemas.microsoft.com/office/powerpoint/2010/main" val="1024086991"/>
+        <p14:creationId xmlns:p14="http://schemas.microsoft.com/office/powerpoint/2010/main" val="323881790"/>
       </p:ext>
     </p:extLst>
   </p:cSld>
@@ -525,10 +306,6 @@
           <a:bodyPr/>
           <a:lstStyle/>
           <a:p>
-            <a:r>
-              <a:rPr lang="en-US" dirty="0"/>
-              <a:t/>
-            </a:r>
             <a:endParaRPr lang="en-US" dirty="0"/>
           </a:p>
         </p:txBody>
@@ -613,10 +390,6 @@
           <a:bodyPr/>
           <a:lstStyle/>
           <a:p>
-            <a:r>
-              <a:rPr lang="en-US" dirty="0"/>
-              <a:t/>
-            </a:r>
             <a:endParaRPr lang="en-US" dirty="0"/>
           </a:p>
         </p:txBody>
@@ -701,10 +474,6 @@
           <a:bodyPr/>
           <a:lstStyle/>
           <a:p>
-            <a:r>
-              <a:rPr lang="en-US" dirty="0"/>
-              <a:t/>
-            </a:r>
             <a:endParaRPr lang="en-US" dirty="0"/>
           </a:p>
         </p:txBody>
@@ -789,10 +558,6 @@
           <a:bodyPr/>
           <a:lstStyle/>
           <a:p>
-            <a:r>
-              <a:rPr lang="en-US" dirty="0"/>
-              <a:t/>
-            </a:r>
             <a:endParaRPr lang="en-US" dirty="0"/>
           </a:p>
         </p:txBody>
@@ -877,10 +642,6 @@
           <a:bodyPr/>
           <a:lstStyle/>
           <a:p>
-            <a:r>
-              <a:rPr lang="en-US" dirty="0"/>
-              <a:t/>
-            </a:r>
             <a:endParaRPr lang="en-US" dirty="0"/>
           </a:p>
         </p:txBody>
@@ -965,10 +726,6 @@
           <a:bodyPr/>
           <a:lstStyle/>
           <a:p>
-            <a:r>
-              <a:rPr lang="en-US" dirty="0"/>
-              <a:t/>
-            </a:r>
             <a:endParaRPr lang="en-US" dirty="0"/>
           </a:p>
         </p:txBody>
@@ -1053,10 +810,6 @@
           <a:bodyPr/>
           <a:lstStyle/>
           <a:p>
-            <a:r>
-              <a:rPr lang="en-US" dirty="0"/>
-              <a:t/>
-            </a:r>
             <a:endParaRPr lang="en-US" dirty="0"/>
           </a:p>
         </p:txBody>
@@ -1141,10 +894,6 @@
           <a:bodyPr/>
           <a:lstStyle/>
           <a:p>
-            <a:r>
-              <a:rPr lang="en-US" dirty="0"/>
-              <a:t/>
-            </a:r>
             <a:endParaRPr lang="en-US" dirty="0"/>
           </a:p>
         </p:txBody>
@@ -1229,10 +978,6 @@
           <a:bodyPr/>
           <a:lstStyle/>
           <a:p>
-            <a:r>
-              <a:rPr lang="en-US" dirty="0"/>
-              <a:t/>
-            </a:r>
             <a:endParaRPr lang="en-US" dirty="0"/>
           </a:p>
         </p:txBody>
@@ -1317,10 +1062,6 @@
           <a:bodyPr/>
           <a:lstStyle/>
           <a:p>
-            <a:r>
-              <a:rPr lang="en-US" dirty="0"/>
-              <a:t/>
-            </a:r>
             <a:endParaRPr lang="en-US" dirty="0"/>
           </a:p>
         </p:txBody>
@@ -1405,10 +1146,6 @@
           <a:bodyPr/>
           <a:lstStyle/>
           <a:p>
-            <a:r>
-              <a:rPr lang="en-US" dirty="0"/>
-              <a:t/>
-            </a:r>
             <a:endParaRPr lang="en-US" dirty="0"/>
           </a:p>
         </p:txBody>
@@ -1493,10 +1230,6 @@
           <a:bodyPr/>
           <a:lstStyle/>
           <a:p>
-            <a:r>
-              <a:rPr lang="en-US" dirty="0"/>
-              <a:t/>
-            </a:r>
             <a:endParaRPr lang="en-US" dirty="0"/>
           </a:p>
         </p:txBody>
@@ -1581,10 +1314,6 @@
           <a:bodyPr/>
           <a:lstStyle/>
           <a:p>
-            <a:r>
-              <a:rPr lang="en-US" dirty="0"/>
-              <a:t/>
-            </a:r>
             <a:endParaRPr lang="en-US" dirty="0"/>
           </a:p>
         </p:txBody>
@@ -1669,10 +1398,6 @@
           <a:bodyPr/>
           <a:lstStyle/>
           <a:p>
-            <a:r>
-              <a:rPr lang="en-US" dirty="0"/>
-              <a:t/>
-            </a:r>
             <a:endParaRPr lang="en-US" dirty="0"/>
           </a:p>
         </p:txBody>
@@ -1757,10 +1482,6 @@
           <a:bodyPr/>
           <a:lstStyle/>
           <a:p>
-            <a:r>
-              <a:rPr lang="en-US" dirty="0"/>
-              <a:t/>
-            </a:r>
             <a:endParaRPr lang="en-US" dirty="0"/>
           </a:p>
         </p:txBody>
@@ -1845,10 +1566,6 @@
           <a:bodyPr/>
           <a:lstStyle/>
           <a:p>
-            <a:r>
-              <a:rPr lang="en-US" dirty="0"/>
-              <a:t/>
-            </a:r>
             <a:endParaRPr lang="en-US" dirty="0"/>
           </a:p>
         </p:txBody>
@@ -1933,10 +1650,6 @@
           <a:bodyPr/>
           <a:lstStyle/>
           <a:p>
-            <a:r>
-              <a:rPr lang="en-US" dirty="0"/>
-              <a:t/>
-            </a:r>
             <a:endParaRPr lang="en-US" dirty="0"/>
           </a:p>
         </p:txBody>
@@ -2021,10 +1734,6 @@
           <a:bodyPr/>
           <a:lstStyle/>
           <a:p>
-            <a:r>
-              <a:rPr lang="en-US" dirty="0"/>
-              <a:t/>
-            </a:r>
             <a:endParaRPr lang="en-US" dirty="0"/>
           </a:p>
         </p:txBody>
@@ -2109,10 +1818,6 @@
           <a:bodyPr/>
           <a:lstStyle/>
           <a:p>
-            <a:r>
-              <a:rPr lang="en-US" dirty="0"/>
-              <a:t/>
-            </a:r>
             <a:endParaRPr lang="en-US" dirty="0"/>
           </a:p>
         </p:txBody>
@@ -2197,10 +1902,6 @@
           <a:bodyPr/>
           <a:lstStyle/>
           <a:p>
-            <a:r>
-              <a:rPr lang="en-US" dirty="0"/>
-              <a:t/>
-            </a:r>
             <a:endParaRPr lang="en-US" dirty="0"/>
           </a:p>
         </p:txBody>
@@ -2285,10 +1986,6 @@
           <a:bodyPr/>
           <a:lstStyle/>
           <a:p>
-            <a:r>
-              <a:rPr lang="en-US" dirty="0"/>
-              <a:t/>
-            </a:r>
             <a:endParaRPr lang="en-US" dirty="0"/>
           </a:p>
         </p:txBody>
@@ -2373,10 +2070,6 @@
           <a:bodyPr/>
           <a:lstStyle/>
           <a:p>
-            <a:r>
-              <a:rPr lang="en-US" dirty="0"/>
-              <a:t/>
-            </a:r>
             <a:endParaRPr lang="en-US" dirty="0"/>
           </a:p>
         </p:txBody>
@@ -2461,10 +2154,6 @@
           <a:bodyPr/>
           <a:lstStyle/>
           <a:p>
-            <a:r>
-              <a:rPr lang="en-US" dirty="0"/>
-              <a:t/>
-            </a:r>
             <a:endParaRPr lang="en-US" dirty="0"/>
           </a:p>
         </p:txBody>
@@ -2549,10 +2238,6 @@
           <a:bodyPr/>
           <a:lstStyle/>
           <a:p>
-            <a:r>
-              <a:rPr lang="en-US" dirty="0"/>
-              <a:t/>
-            </a:r>
             <a:endParaRPr lang="en-US" dirty="0"/>
           </a:p>
         </p:txBody>
@@ -2637,10 +2322,6 @@
           <a:bodyPr/>
           <a:lstStyle/>
           <a:p>
-            <a:r>
-              <a:rPr lang="en-US" dirty="0"/>
-              <a:t/>
-            </a:r>
             <a:endParaRPr lang="en-US" dirty="0"/>
           </a:p>
         </p:txBody>
@@ -2725,10 +2406,6 @@
           <a:bodyPr/>
           <a:lstStyle/>
           <a:p>
-            <a:r>
-              <a:rPr lang="en-US" dirty="0"/>
-              <a:t/>
-            </a:r>
             <a:endParaRPr lang="en-US" dirty="0"/>
           </a:p>
         </p:txBody>
@@ -2811,7 +2488,7 @@
           </a:prstGeom>
           <a:extLst>
             <a:ext uri="{C572A759-6A51-4108-AA02-DFA0A04FC94B}">
-              <ma14:wrappingTextBoxFlag xmlns:ma14="http://schemas.microsoft.com/office/mac/drawingml/2011/main" val="0"/>
+              <ma14:wrappingTextBoxFlag xmlns:ma14="http://schemas.microsoft.com/office/mac/drawingml/2011/main" xmlns="" val="0"/>
             </a:ext>
           </a:extLst>
         </p:spPr>
@@ -2832,8 +2509,8 @@
           <a:p>
             <a:pPr algn="l"/>
             <a:fld id="{F7021451-1387-4CA6-816F-3879F97B5CBC}" type="slidenum">
-              <a:rPr b="0" lang="en-US"/>
-              <a:t>1000</a:t>
+              <a:rPr lang="en-US" b="0"/>
+              <a:t>‹#›</a:t>
             </a:fld>
             <a:endParaRPr lang="en-US"/>
           </a:p>
@@ -2855,6 +2532,7 @@
         <a:solidFill>
           <a:srgbClr val="000000"/>
         </a:solidFill>
+        <a:effectLst/>
       </p:bgPr>
     </p:bg>
     <p:spTree>
@@ -2873,14 +2551,14 @@
       </p:grpSpPr>
       <p:pic>
         <p:nvPicPr>
-          <p:cNvPr id="2" name="Image 0" descr="preencoded.png">    </p:cNvPr>
+          <p:cNvPr id="2" name="Image 0" descr="preencoded.png"/>
           <p:cNvPicPr>
             <a:picLocks noChangeAspect="1"/>
           </p:cNvPicPr>
           <p:nvPr/>
         </p:nvPicPr>
         <p:blipFill>
-          <a:blip r:embed="rId1"/>
+          <a:blip r:embed="rId2"/>
           <a:stretch>
             <a:fillRect/>
           </a:stretch>
@@ -2911,6 +2589,7 @@
         <a:solidFill>
           <a:srgbClr val="000000"/>
         </a:solidFill>
+        <a:effectLst/>
       </p:bgPr>
     </p:bg>
     <p:spTree>
@@ -2929,14 +2608,14 @@
       </p:grpSpPr>
       <p:pic>
         <p:nvPicPr>
-          <p:cNvPr id="2" name="Image 0" descr="preencoded.png">    </p:cNvPr>
+          <p:cNvPr id="2" name="Image 0" descr="preencoded.png"/>
           <p:cNvPicPr>
             <a:picLocks noChangeAspect="1"/>
           </p:cNvPicPr>
           <p:nvPr/>
         </p:nvPicPr>
         <p:blipFill>
-          <a:blip r:embed="rId1"/>
+          <a:blip r:embed="rId2"/>
           <a:stretch>
             <a:fillRect/>
           </a:stretch>
@@ -2967,6 +2646,7 @@
         <a:solidFill>
           <a:srgbClr val="000000"/>
         </a:solidFill>
+        <a:effectLst/>
       </p:bgPr>
     </p:bg>
     <p:spTree>
@@ -2985,14 +2665,14 @@
       </p:grpSpPr>
       <p:pic>
         <p:nvPicPr>
-          <p:cNvPr id="2" name="Image 0" descr="preencoded.png">    </p:cNvPr>
+          <p:cNvPr id="2" name="Image 0" descr="preencoded.png"/>
           <p:cNvPicPr>
             <a:picLocks noChangeAspect="1"/>
           </p:cNvPicPr>
           <p:nvPr/>
         </p:nvPicPr>
         <p:blipFill>
-          <a:blip r:embed="rId1"/>
+          <a:blip r:embed="rId2"/>
           <a:stretch>
             <a:fillRect/>
           </a:stretch>
@@ -3018,6 +2698,11 @@
 <file path=ppt/slideMasters/slideMaster1.xml><?xml version="1.0" encoding="utf-8"?>
 <p:sldMaster xmlns:a="http://schemas.openxmlformats.org/drawingml/2006/main" xmlns:r="http://schemas.openxmlformats.org/officeDocument/2006/relationships" xmlns:p="http://schemas.openxmlformats.org/presentationml/2006/main">
   <p:cSld>
+    <p:bg>
+      <p:bgRef idx="1001">
+        <a:schemeClr val="bg1"/>
+      </p:bgRef>
+    </p:bg>
     <p:spTree>
       <p:nvGrpSpPr>
         <p:cNvPr id="1" name=""/>
@@ -3052,7 +2737,7 @@
           </a:prstGeom>
           <a:extLst>
             <a:ext uri="{C572A759-6A51-4108-AA02-DFA0A04FC94B}">
-              <ma14:wrappingTextBoxFlag xmlns:ma14="http://schemas.microsoft.com/office/mac/drawingml/2011/main" val="0"/>
+              <ma14:wrappingTextBoxFlag xmlns:ma14="http://schemas.microsoft.com/office/mac/drawingml/2011/main" xmlns="" val="0"/>
             </a:ext>
           </a:extLst>
         </p:spPr>
@@ -3073,8 +2758,8 @@
           <a:p>
             <a:pPr algn="l"/>
             <a:fld id="{F7021451-1387-4CA6-816F-3879F97B5CBC}" type="slidenum">
-              <a:rPr b="0" lang="en-US"/>
-              <a:t>null</a:t>
+              <a:rPr lang="en-US" b="0"/>
+              <a:t>‹#›</a:t>
             </a:fld>
             <a:endParaRPr lang="en-US"/>
           </a:p>
@@ -3381,11 +3066,11 @@
           <a:bodyPr wrap="square" lIns="0" tIns="0" rIns="0" bIns="0" rtlCol="0" anchor="ctr"/>
           <a:lstStyle/>
           <a:p>
-            <a:pPr indent="0" marL="0">
-              <a:buNone/>
-            </a:pPr>
-            <a:r>
-              <a:rPr lang="en-US" sz="1200" b="1" spc="400" kern="0" dirty="0">
+            <a:pPr marL="0" indent="0">
+              <a:buNone/>
+            </a:pPr>
+            <a:r>
+              <a:rPr lang="en-US" sz="1200" b="1" kern="0" spc="400" dirty="0">
                 <a:solidFill>
                   <a:srgbClr val="FFFFFF"/>
                 </a:solidFill>
@@ -3420,11 +3105,11 @@
           <a:bodyPr wrap="square" lIns="0" tIns="0" rIns="0" bIns="0" rtlCol="0" anchor="ctr"/>
           <a:lstStyle/>
           <a:p>
-            <a:pPr indent="0" marL="0">
-              <a:buNone/>
-            </a:pPr>
-            <a:r>
-              <a:rPr lang="en-US" sz="1200" b="1" spc="300" kern="0" dirty="0">
+            <a:pPr marL="0" indent="0">
+              <a:buNone/>
+            </a:pPr>
+            <a:r>
+              <a:rPr lang="en-US" sz="1200" b="1" kern="0" spc="300" dirty="0">
                 <a:solidFill>
                   <a:srgbClr val="C4B3F5"/>
                 </a:solidFill>
@@ -3459,7 +3144,7 @@
           <a:bodyPr wrap="square" lIns="0" tIns="0" rIns="0" bIns="0" rtlCol="0" anchor="t"/>
           <a:lstStyle/>
           <a:p>
-            <a:pPr indent="0" marL="0">
+            <a:pPr marL="0" indent="0">
               <a:lnSpc>
                 <a:spcPct val="102000"/>
               </a:lnSpc>
@@ -3479,7 +3164,7 @@
             <a:endParaRPr lang="en-US" sz="3600" dirty="0"/>
           </a:p>
           <a:p>
-            <a:pPr indent="0" marL="0">
+            <a:pPr marL="0" indent="0">
               <a:lnSpc>
                 <a:spcPct val="102000"/>
               </a:lnSpc>
@@ -3521,7 +3206,7 @@
           <a:bodyPr wrap="square" lIns="0" tIns="0" rIns="0" bIns="0" rtlCol="0" anchor="ctr"/>
           <a:lstStyle/>
           <a:p>
-            <a:pPr indent="0" marL="0">
+            <a:pPr marL="0" indent="0">
               <a:lnSpc>
                 <a:spcPct val="120000"/>
               </a:lnSpc>
@@ -3589,7 +3274,7 @@
           <a:bodyPr wrap="square" lIns="0" tIns="0" rIns="0" bIns="0" rtlCol="0" anchor="ctr"/>
           <a:lstStyle/>
           <a:p>
-            <a:pPr algn="ctr" indent="0" marL="0">
+            <a:pPr marL="0" indent="0" algn="ctr">
               <a:buNone/>
             </a:pPr>
             <a:r>
@@ -3654,7 +3339,7 @@
           <a:bodyPr wrap="square" lIns="0" tIns="0" rIns="0" bIns="0" rtlCol="0" anchor="ctr"/>
           <a:lstStyle/>
           <a:p>
-            <a:pPr algn="ctr" indent="0" marL="0">
+            <a:pPr marL="0" indent="0" algn="ctr">
               <a:buNone/>
             </a:pPr>
             <a:r>
@@ -3719,7 +3404,7 @@
           <a:bodyPr wrap="square" lIns="0" tIns="0" rIns="0" bIns="0" rtlCol="0" anchor="ctr"/>
           <a:lstStyle/>
           <a:p>
-            <a:pPr algn="ctr" indent="0" marL="0">
+            <a:pPr marL="0" indent="0" algn="ctr">
               <a:buNone/>
             </a:pPr>
             <a:r>
@@ -3784,7 +3469,7 @@
           <a:bodyPr wrap="square" lIns="0" tIns="0" rIns="0" bIns="0" rtlCol="0" anchor="ctr"/>
           <a:lstStyle/>
           <a:p>
-            <a:pPr algn="ctr" indent="0" marL="0">
+            <a:pPr marL="0" indent="0" algn="ctr">
               <a:buNone/>
             </a:pPr>
             <a:r>
@@ -3849,7 +3534,7 @@
           <a:bodyPr wrap="square" lIns="0" tIns="0" rIns="0" bIns="0" rtlCol="0" anchor="ctr"/>
           <a:lstStyle/>
           <a:p>
-            <a:pPr algn="ctr" indent="0" marL="0">
+            <a:pPr marL="0" indent="0" algn="ctr">
               <a:buNone/>
             </a:pPr>
             <a:r>
@@ -3910,7 +3595,7 @@
           <a:bodyPr wrap="square" lIns="0" tIns="0" rIns="0" bIns="0" rtlCol="0" anchor="ctr"/>
           <a:lstStyle/>
           <a:p>
-            <a:pPr algn="ctr" indent="0" marL="0">
+            <a:pPr marL="0" indent="0" algn="ctr">
               <a:buNone/>
             </a:pPr>
             <a:r>
@@ -3996,7 +3681,7 @@
           <a:bodyPr wrap="square" lIns="0" tIns="0" rIns="0" bIns="0" rtlCol="0" anchor="ctr"/>
           <a:lstStyle/>
           <a:p>
-            <a:pPr algn="l" indent="0" marL="0">
+            <a:pPr marL="0" indent="0" algn="l">
               <a:buNone/>
             </a:pPr>
             <a:r>
@@ -4035,7 +3720,7 @@
           <a:bodyPr wrap="square" lIns="0" tIns="0" rIns="0" bIns="0" rtlCol="0" anchor="ctr"/>
           <a:lstStyle/>
           <a:p>
-            <a:pPr indent="0" marL="0">
+            <a:pPr marL="0" indent="0">
               <a:buNone/>
             </a:pPr>
             <a:r>
@@ -4101,11 +3786,11 @@
           <a:bodyPr wrap="square" lIns="0" tIns="0" rIns="0" bIns="0" rtlCol="0" anchor="ctr"/>
           <a:lstStyle/>
           <a:p>
-            <a:pPr algn="ctr" indent="0" marL="0">
-              <a:buNone/>
-            </a:pPr>
-            <a:r>
-              <a:rPr lang="en-US" sz="900" b="1" spc="100" kern="0" dirty="0">
+            <a:pPr marL="0" indent="0" algn="ctr">
+              <a:buNone/>
+            </a:pPr>
+            <a:r>
+              <a:rPr lang="en-US" sz="900" b="1" kern="0" spc="100" dirty="0">
                 <a:solidFill>
                   <a:srgbClr val="5A05F4"/>
                 </a:solidFill>
@@ -4121,14 +3806,14 @@
       </p:sp>
       <p:pic>
         <p:nvPicPr>
-          <p:cNvPr id="7" name="Image 0" descr="preencoded.png">    </p:cNvPr>
+          <p:cNvPr id="7" name="Image 0" descr="preencoded.png"/>
           <p:cNvPicPr>
             <a:picLocks noChangeAspect="1"/>
           </p:cNvPicPr>
           <p:nvPr/>
         </p:nvPicPr>
         <p:blipFill>
-          <a:blip r:embed="rId1"/>
+          <a:blip r:embed="rId3"/>
           <a:stretch>
             <a:fillRect/>
           </a:stretch>
@@ -4186,7 +3871,7 @@
           <a:bodyPr wrap="square" lIns="0" tIns="0" rIns="0" bIns="0" rtlCol="0" anchor="ctr"/>
           <a:lstStyle/>
           <a:p>
-            <a:pPr indent="0" marL="0">
+            <a:pPr marL="0" indent="0">
               <a:buNone/>
             </a:pPr>
             <a:r>
@@ -4225,7 +3910,7 @@
           <a:bodyPr wrap="square" lIns="0" tIns="0" rIns="0" bIns="0" rtlCol="0" anchor="t"/>
           <a:lstStyle/>
           <a:p>
-            <a:pPr indent="0" marL="0">
+            <a:pPr marL="0" indent="0">
               <a:lnSpc>
                 <a:spcPct val="108000"/>
               </a:lnSpc>
@@ -4289,7 +3974,7 @@
           <a:bodyPr wrap="square" lIns="0" tIns="0" rIns="0" bIns="0" rtlCol="0" anchor="ctr"/>
           <a:lstStyle/>
           <a:p>
-            <a:pPr indent="0" marL="0">
+            <a:pPr marL="0" indent="0">
               <a:buNone/>
             </a:pPr>
             <a:r>
@@ -4328,7 +4013,7 @@
           <a:bodyPr wrap="square" lIns="0" tIns="0" rIns="0" bIns="0" rtlCol="0" anchor="t"/>
           <a:lstStyle/>
           <a:p>
-            <a:pPr indent="0" marL="0">
+            <a:pPr marL="0" indent="0">
               <a:lnSpc>
                 <a:spcPct val="108000"/>
               </a:lnSpc>
@@ -4392,7 +4077,7 @@
           <a:bodyPr wrap="square" lIns="0" tIns="0" rIns="0" bIns="0" rtlCol="0" anchor="ctr"/>
           <a:lstStyle/>
           <a:p>
-            <a:pPr indent="0" marL="0">
+            <a:pPr marL="0" indent="0">
               <a:lnSpc>
                 <a:spcPct val="112000"/>
               </a:lnSpc>
@@ -4461,11 +4146,11 @@
           <a:bodyPr wrap="square" lIns="0" tIns="0" rIns="0" bIns="0" rtlCol="0" anchor="ctr"/>
           <a:lstStyle/>
           <a:p>
-            <a:pPr indent="0" marL="0">
-              <a:buNone/>
-            </a:pPr>
-            <a:r>
-              <a:rPr lang="en-US" sz="950" b="1" spc="150" kern="0" dirty="0">
+            <a:pPr marL="0" indent="0">
+              <a:buNone/>
+            </a:pPr>
+            <a:r>
+              <a:rPr lang="en-US" sz="950" b="1" kern="0" spc="150" dirty="0">
                 <a:solidFill>
                   <a:srgbClr val="1A4FBF"/>
                 </a:solidFill>
@@ -4500,7 +4185,7 @@
           <a:bodyPr wrap="square" lIns="0" tIns="0" rIns="0" bIns="0" rtlCol="0" anchor="ctr"/>
           <a:lstStyle/>
           <a:p>
-            <a:pPr indent="0" marL="0">
+            <a:pPr marL="0" indent="0">
               <a:lnSpc>
                 <a:spcPct val="112000"/>
               </a:lnSpc>
@@ -4541,7 +4226,7 @@
           </a:prstGeom>
           <a:extLst>
             <a:ext uri="{C572A759-6A51-4108-AA02-DFA0A04FC94B}">
-              <ma14:wrappingTextBoxFlag xmlns:ma14="http://schemas.microsoft.com/office/mac/drawingml/2011/main" val="0"/>
+              <ma14:wrappingTextBoxFlag xmlns:ma14="http://schemas.microsoft.com/office/mac/drawingml/2011/main" xmlns="" val="0"/>
             </a:ext>
           </a:extLst>
         </p:spPr>
@@ -4562,7 +4247,7 @@
           <a:p>
             <a:pPr algn="l"/>
             <a:fld id="{F7021451-1387-4CA6-816F-3879F97B5CBC}" type="slidenum">
-              <a:rPr b="0" lang="en-US"/>
+              <a:rPr lang="en-US" b="0"/>
               <a:t>10</a:t>
             </a:fld>
             <a:endParaRPr lang="en-US"/>
@@ -4637,7 +4322,7 @@
           <a:bodyPr wrap="square" lIns="0" tIns="0" rIns="0" bIns="0" rtlCol="0" anchor="ctr"/>
           <a:lstStyle/>
           <a:p>
-            <a:pPr algn="l" indent="0" marL="0">
+            <a:pPr marL="0" indent="0" algn="l">
               <a:buNone/>
             </a:pPr>
             <a:r>
@@ -4676,7 +4361,7 @@
           <a:bodyPr wrap="square" lIns="0" tIns="0" rIns="0" bIns="0" rtlCol="0" anchor="ctr"/>
           <a:lstStyle/>
           <a:p>
-            <a:pPr indent="0" marL="0">
+            <a:pPr marL="0" indent="0">
               <a:buNone/>
             </a:pPr>
             <a:r>
@@ -4742,11 +4427,11 @@
           <a:bodyPr wrap="square" lIns="0" tIns="0" rIns="0" bIns="0" rtlCol="0" anchor="ctr"/>
           <a:lstStyle/>
           <a:p>
-            <a:pPr algn="ctr" indent="0" marL="0">
-              <a:buNone/>
-            </a:pPr>
-            <a:r>
-              <a:rPr lang="en-US" sz="900" b="1" spc="100" kern="0" dirty="0">
+            <a:pPr marL="0" indent="0" algn="ctr">
+              <a:buNone/>
+            </a:pPr>
+            <a:r>
+              <a:rPr lang="en-US" sz="900" b="1" kern="0" spc="100" dirty="0">
                 <a:solidFill>
                   <a:srgbClr val="5A05F4"/>
                 </a:solidFill>
@@ -4762,14 +4447,14 @@
       </p:sp>
       <p:pic>
         <p:nvPicPr>
-          <p:cNvPr id="7" name="Image 0" descr="preencoded.png">    </p:cNvPr>
+          <p:cNvPr id="7" name="Image 0" descr="preencoded.png"/>
           <p:cNvPicPr>
             <a:picLocks noChangeAspect="1"/>
           </p:cNvPicPr>
           <p:nvPr/>
         </p:nvPicPr>
         <p:blipFill>
-          <a:blip r:embed="rId1"/>
+          <a:blip r:embed="rId3"/>
           <a:stretch>
             <a:fillRect/>
           </a:stretch>
@@ -4827,7 +4512,7 @@
           <a:bodyPr wrap="square" lIns="0" tIns="0" rIns="0" bIns="0" rtlCol="0" anchor="ctr"/>
           <a:lstStyle/>
           <a:p>
-            <a:pPr indent="0" marL="0">
+            <a:pPr marL="0" indent="0">
               <a:buNone/>
             </a:pPr>
             <a:r>
@@ -4866,7 +4551,7 @@
           <a:bodyPr wrap="square" lIns="0" tIns="0" rIns="0" bIns="0" rtlCol="0" anchor="t"/>
           <a:lstStyle/>
           <a:p>
-            <a:pPr indent="0" marL="0">
+            <a:pPr marL="0" indent="0">
               <a:buNone/>
             </a:pPr>
             <a:r>
@@ -4927,7 +4612,7 @@
           <a:bodyPr wrap="square" lIns="0" tIns="0" rIns="0" bIns="0" rtlCol="0" anchor="ctr"/>
           <a:lstStyle/>
           <a:p>
-            <a:pPr indent="0" marL="0">
+            <a:pPr marL="0" indent="0">
               <a:buNone/>
             </a:pPr>
             <a:r>
@@ -4966,7 +4651,7 @@
           <a:bodyPr wrap="square" lIns="0" tIns="0" rIns="0" bIns="0" rtlCol="0" anchor="t"/>
           <a:lstStyle/>
           <a:p>
-            <a:pPr indent="0" marL="0">
+            <a:pPr marL="0" indent="0">
               <a:buNone/>
             </a:pPr>
             <a:r>
@@ -5032,11 +4717,11 @@
           <a:bodyPr wrap="square" lIns="0" tIns="0" rIns="0" bIns="0" rtlCol="0" anchor="ctr"/>
           <a:lstStyle/>
           <a:p>
-            <a:pPr indent="0" marL="0">
-              <a:buNone/>
-            </a:pPr>
-            <a:r>
-              <a:rPr lang="en-US" sz="950" b="1" spc="150" kern="0" dirty="0">
+            <a:pPr marL="0" indent="0">
+              <a:buNone/>
+            </a:pPr>
+            <a:r>
+              <a:rPr lang="en-US" sz="950" b="1" kern="0" spc="150" dirty="0">
                 <a:solidFill>
                   <a:srgbClr val="B3261E"/>
                 </a:solidFill>
@@ -5071,7 +4756,7 @@
           <a:bodyPr wrap="square" lIns="0" tIns="0" rIns="0" bIns="0" rtlCol="0" anchor="ctr"/>
           <a:lstStyle/>
           <a:p>
-            <a:pPr indent="0" marL="0">
+            <a:pPr marL="0" indent="0">
               <a:lnSpc>
                 <a:spcPct val="112000"/>
               </a:lnSpc>
@@ -5135,7 +4820,7 @@
           <a:bodyPr wrap="square" lIns="0" tIns="0" rIns="0" bIns="0" rtlCol="0" anchor="ctr"/>
           <a:lstStyle/>
           <a:p>
-            <a:pPr indent="0" marL="0">
+            <a:pPr marL="0" indent="0">
               <a:lnSpc>
                 <a:spcPct val="112000"/>
               </a:lnSpc>
@@ -5176,7 +4861,7 @@
           </a:prstGeom>
           <a:extLst>
             <a:ext uri="{C572A759-6A51-4108-AA02-DFA0A04FC94B}">
-              <ma14:wrappingTextBoxFlag xmlns:ma14="http://schemas.microsoft.com/office/mac/drawingml/2011/main" val="0"/>
+              <ma14:wrappingTextBoxFlag xmlns:ma14="http://schemas.microsoft.com/office/mac/drawingml/2011/main" xmlns="" val="0"/>
             </a:ext>
           </a:extLst>
         </p:spPr>
@@ -5197,7 +4882,7 @@
           <a:p>
             <a:pPr algn="l"/>
             <a:fld id="{F7021451-1387-4CA6-816F-3879F97B5CBC}" type="slidenum">
-              <a:rPr b="0" lang="en-US"/>
+              <a:rPr lang="en-US" b="0"/>
               <a:t>11</a:t>
             </a:fld>
             <a:endParaRPr lang="en-US"/>
@@ -5272,7 +4957,7 @@
           <a:bodyPr wrap="square" lIns="0" tIns="0" rIns="0" bIns="0" rtlCol="0" anchor="ctr"/>
           <a:lstStyle/>
           <a:p>
-            <a:pPr algn="l" indent="0" marL="0">
+            <a:pPr marL="0" indent="0" algn="l">
               <a:buNone/>
             </a:pPr>
             <a:r>
@@ -5311,7 +4996,7 @@
           <a:bodyPr wrap="square" lIns="0" tIns="0" rIns="0" bIns="0" rtlCol="0" anchor="ctr"/>
           <a:lstStyle/>
           <a:p>
-            <a:pPr indent="0" marL="0">
+            <a:pPr marL="0" indent="0">
               <a:buNone/>
             </a:pPr>
             <a:r>
@@ -5377,11 +5062,11 @@
           <a:bodyPr wrap="square" lIns="0" tIns="0" rIns="0" bIns="0" rtlCol="0" anchor="ctr"/>
           <a:lstStyle/>
           <a:p>
-            <a:pPr algn="ctr" indent="0" marL="0">
-              <a:buNone/>
-            </a:pPr>
-            <a:r>
-              <a:rPr lang="en-US" sz="900" b="1" spc="100" kern="0" dirty="0">
+            <a:pPr marL="0" indent="0" algn="ctr">
+              <a:buNone/>
+            </a:pPr>
+            <a:r>
+              <a:rPr lang="en-US" sz="900" b="1" kern="0" spc="100" dirty="0">
                 <a:solidFill>
                   <a:srgbClr val="5A05F4"/>
                 </a:solidFill>
@@ -5397,14 +5082,14 @@
       </p:sp>
       <p:pic>
         <p:nvPicPr>
-          <p:cNvPr id="7" name="Image 0" descr="preencoded.png">    </p:cNvPr>
+          <p:cNvPr id="7" name="Image 0" descr="preencoded.png"/>
           <p:cNvPicPr>
             <a:picLocks noChangeAspect="1"/>
           </p:cNvPicPr>
           <p:nvPr/>
         </p:nvPicPr>
         <p:blipFill>
-          <a:blip r:embed="rId1"/>
+          <a:blip r:embed="rId3"/>
           <a:stretch>
             <a:fillRect/>
           </a:stretch>
@@ -5462,7 +5147,7 @@
           <a:bodyPr wrap="square" lIns="0" tIns="0" rIns="0" bIns="0" rtlCol="0" anchor="ctr"/>
           <a:lstStyle/>
           <a:p>
-            <a:pPr algn="ctr" indent="0" marL="0">
+            <a:pPr marL="0" indent="0" algn="ctr">
               <a:buNone/>
             </a:pPr>
             <a:r>
@@ -5566,7 +5251,7 @@
           <a:bodyPr wrap="square" lIns="0" tIns="0" rIns="0" bIns="0" rtlCol="0" anchor="ctr"/>
           <a:lstStyle/>
           <a:p>
-            <a:pPr algn="ctr" indent="0" marL="0">
+            <a:pPr marL="0" indent="0" algn="ctr">
               <a:buNone/>
             </a:pPr>
             <a:r>
@@ -5670,7 +5355,7 @@
           <a:bodyPr wrap="square" lIns="0" tIns="0" rIns="0" bIns="0" rtlCol="0" anchor="ctr"/>
           <a:lstStyle/>
           <a:p>
-            <a:pPr algn="ctr" indent="0" marL="0">
+            <a:pPr marL="0" indent="0" algn="ctr">
               <a:buNone/>
             </a:pPr>
             <a:r>
@@ -5709,7 +5394,7 @@
           <a:bodyPr wrap="square" lIns="0" tIns="0" rIns="0" bIns="0" rtlCol="0" anchor="ctr"/>
           <a:lstStyle/>
           <a:p>
-            <a:pPr indent="0" marL="0">
+            <a:pPr marL="0" indent="0">
               <a:buNone/>
             </a:pPr>
             <a:r>
@@ -5770,7 +5455,7 @@
           <a:bodyPr wrap="square" lIns="0" tIns="0" rIns="0" bIns="0" rtlCol="0" anchor="ctr"/>
           <a:lstStyle/>
           <a:p>
-            <a:pPr indent="0" marL="0">
+            <a:pPr marL="0" indent="0">
               <a:buNone/>
             </a:pPr>
             <a:r>
@@ -5809,7 +5494,7 @@
           <a:bodyPr wrap="square" lIns="0" tIns="0" rIns="0" bIns="0" rtlCol="0" anchor="ctr"/>
           <a:lstStyle/>
           <a:p>
-            <a:pPr indent="0" marL="0">
+            <a:pPr marL="0" indent="0">
               <a:buNone/>
             </a:pPr>
             <a:r>
@@ -5870,7 +5555,7 @@
           <a:bodyPr wrap="square" lIns="0" tIns="0" rIns="0" bIns="0" rtlCol="0" anchor="ctr"/>
           <a:lstStyle/>
           <a:p>
-            <a:pPr indent="0" marL="0">
+            <a:pPr marL="0" indent="0">
               <a:buNone/>
             </a:pPr>
             <a:r>
@@ -5909,7 +5594,7 @@
           <a:bodyPr wrap="square" lIns="0" tIns="0" rIns="0" bIns="0" rtlCol="0" anchor="ctr"/>
           <a:lstStyle/>
           <a:p>
-            <a:pPr indent="0" marL="0">
+            <a:pPr marL="0" indent="0">
               <a:buNone/>
             </a:pPr>
             <a:r>
@@ -5970,7 +5655,7 @@
           <a:bodyPr wrap="square" lIns="0" tIns="0" rIns="0" bIns="0" rtlCol="0" anchor="ctr"/>
           <a:lstStyle/>
           <a:p>
-            <a:pPr indent="0" marL="0">
+            <a:pPr marL="0" indent="0">
               <a:buNone/>
             </a:pPr>
             <a:r>
@@ -6009,7 +5694,7 @@
           <a:bodyPr wrap="square" lIns="0" tIns="0" rIns="0" bIns="0" rtlCol="0" anchor="ctr"/>
           <a:lstStyle/>
           <a:p>
-            <a:pPr indent="0" marL="0">
+            <a:pPr marL="0" indent="0">
               <a:buNone/>
             </a:pPr>
             <a:r>
@@ -6075,7 +5760,7 @@
           <a:bodyPr wrap="square" lIns="0" tIns="0" rIns="0" bIns="0" rtlCol="0" anchor="ctr"/>
           <a:lstStyle/>
           <a:p>
-            <a:pPr indent="0" marL="0">
+            <a:pPr marL="0" indent="0">
               <a:lnSpc>
                 <a:spcPct val="112000"/>
               </a:lnSpc>
@@ -6098,7 +5783,7 @@
       </p:sp>
       <p:sp>
         <p:nvSpPr>
-          <p:cNvPr id="25" name="Slide Number Placeholder 0"/>
+          <p:cNvPr id="30" name="Slide Number Placeholder 0"/>
           <p:cNvSpPr>
             <a:spLocks noGrp="1"/>
           </p:cNvSpPr>
@@ -6116,7 +5801,7 @@
           </a:prstGeom>
           <a:extLst>
             <a:ext uri="{C572A759-6A51-4108-AA02-DFA0A04FC94B}">
-              <ma14:wrappingTextBoxFlag xmlns:ma14="http://schemas.microsoft.com/office/mac/drawingml/2011/main" val="0"/>
+              <ma14:wrappingTextBoxFlag xmlns:ma14="http://schemas.microsoft.com/office/mac/drawingml/2011/main" xmlns="" val="0"/>
             </a:ext>
           </a:extLst>
         </p:spPr>
@@ -6137,7 +5822,7 @@
           <a:p>
             <a:pPr algn="l"/>
             <a:fld id="{F7021451-1387-4CA6-816F-3879F97B5CBC}" type="slidenum">
-              <a:rPr b="0" lang="en-US"/>
+              <a:rPr lang="en-US" b="0"/>
               <a:t>12</a:t>
             </a:fld>
             <a:endParaRPr lang="en-US"/>
@@ -6212,7 +5897,7 @@
           <a:bodyPr wrap="square" lIns="0" tIns="0" rIns="0" bIns="0" rtlCol="0" anchor="ctr"/>
           <a:lstStyle/>
           <a:p>
-            <a:pPr algn="l" indent="0" marL="0">
+            <a:pPr marL="0" indent="0" algn="l">
               <a:buNone/>
             </a:pPr>
             <a:r>
@@ -6251,7 +5936,7 @@
           <a:bodyPr wrap="square" lIns="0" tIns="0" rIns="0" bIns="0" rtlCol="0" anchor="ctr"/>
           <a:lstStyle/>
           <a:p>
-            <a:pPr indent="0" marL="0">
+            <a:pPr marL="0" indent="0">
               <a:buNone/>
             </a:pPr>
             <a:r>
@@ -6317,11 +6002,11 @@
           <a:bodyPr wrap="square" lIns="0" tIns="0" rIns="0" bIns="0" rtlCol="0" anchor="ctr"/>
           <a:lstStyle/>
           <a:p>
-            <a:pPr algn="ctr" indent="0" marL="0">
-              <a:buNone/>
-            </a:pPr>
-            <a:r>
-              <a:rPr lang="en-US" sz="900" b="1" spc="100" kern="0" dirty="0">
+            <a:pPr marL="0" indent="0" algn="ctr">
+              <a:buNone/>
+            </a:pPr>
+            <a:r>
+              <a:rPr lang="en-US" sz="900" b="1" kern="0" spc="100" dirty="0">
                 <a:solidFill>
                   <a:srgbClr val="5A05F4"/>
                 </a:solidFill>
@@ -6337,14 +6022,14 @@
       </p:sp>
       <p:pic>
         <p:nvPicPr>
-          <p:cNvPr id="7" name="Image 0" descr="preencoded.png">    </p:cNvPr>
+          <p:cNvPr id="7" name="Image 0" descr="preencoded.png"/>
           <p:cNvPicPr>
             <a:picLocks noChangeAspect="1"/>
           </p:cNvPicPr>
           <p:nvPr/>
         </p:nvPicPr>
         <p:blipFill>
-          <a:blip r:embed="rId1"/>
+          <a:blip r:embed="rId3"/>
           <a:stretch>
             <a:fillRect/>
           </a:stretch>
@@ -6402,7 +6087,7 @@
           <a:bodyPr wrap="square" lIns="0" tIns="0" rIns="0" bIns="0" rtlCol="0" anchor="ctr"/>
           <a:lstStyle/>
           <a:p>
-            <a:pPr indent="0" marL="0">
+            <a:pPr marL="0" indent="0">
               <a:buNone/>
             </a:pPr>
             <a:r>
@@ -6441,7 +6126,7 @@
           <a:bodyPr wrap="square" lIns="0" tIns="0" rIns="0" bIns="0" rtlCol="0" anchor="t"/>
           <a:lstStyle/>
           <a:p>
-            <a:pPr indent="0" marL="0">
+            <a:pPr marL="0" indent="0">
               <a:lnSpc>
                 <a:spcPct val="108000"/>
               </a:lnSpc>
@@ -6505,7 +6190,7 @@
           <a:bodyPr wrap="square" lIns="0" tIns="0" rIns="0" bIns="0" rtlCol="0" anchor="ctr"/>
           <a:lstStyle/>
           <a:p>
-            <a:pPr indent="0" marL="0">
+            <a:pPr marL="0" indent="0">
               <a:buNone/>
             </a:pPr>
             <a:r>
@@ -6544,7 +6229,7 @@
           <a:bodyPr wrap="square" lIns="0" tIns="0" rIns="0" bIns="0" rtlCol="0" anchor="t"/>
           <a:lstStyle/>
           <a:p>
-            <a:pPr indent="0" marL="0">
+            <a:pPr marL="0" indent="0">
               <a:lnSpc>
                 <a:spcPct val="108000"/>
               </a:lnSpc>
@@ -6608,7 +6293,7 @@
           <a:bodyPr wrap="square" lIns="0" tIns="0" rIns="0" bIns="0" rtlCol="0" anchor="ctr"/>
           <a:lstStyle/>
           <a:p>
-            <a:pPr algn="ctr" indent="0" marL="0">
+            <a:pPr marL="0" indent="0" algn="ctr">
               <a:buNone/>
             </a:pPr>
             <a:r>
@@ -6712,7 +6397,7 @@
           <a:bodyPr wrap="square" lIns="0" tIns="0" rIns="0" bIns="0" rtlCol="0" anchor="ctr"/>
           <a:lstStyle/>
           <a:p>
-            <a:pPr algn="ctr" indent="0" marL="0">
+            <a:pPr marL="0" indent="0" algn="ctr">
               <a:buNone/>
             </a:pPr>
             <a:r>
@@ -6816,7 +6501,7 @@
           <a:bodyPr wrap="square" lIns="0" tIns="0" rIns="0" bIns="0" rtlCol="0" anchor="ctr"/>
           <a:lstStyle/>
           <a:p>
-            <a:pPr algn="ctr" indent="0" marL="0">
+            <a:pPr marL="0" indent="0" algn="ctr">
               <a:buNone/>
             </a:pPr>
             <a:r>
@@ -6920,7 +6605,7 @@
           <a:bodyPr wrap="square" lIns="0" tIns="0" rIns="0" bIns="0" rtlCol="0" anchor="ctr"/>
           <a:lstStyle/>
           <a:p>
-            <a:pPr algn="ctr" indent="0" marL="0">
+            <a:pPr marL="0" indent="0" algn="ctr">
               <a:buNone/>
             </a:pPr>
             <a:r>
@@ -6959,7 +6644,7 @@
           <a:bodyPr wrap="square" lIns="0" tIns="0" rIns="0" bIns="0" rtlCol="0" anchor="ctr"/>
           <a:lstStyle/>
           <a:p>
-            <a:pPr indent="0" marL="0">
+            <a:pPr marL="0" indent="0">
               <a:buNone/>
             </a:pPr>
             <a:r>
@@ -7025,11 +6710,11 @@
           <a:bodyPr wrap="square" lIns="0" tIns="0" rIns="0" bIns="0" rtlCol="0" anchor="ctr"/>
           <a:lstStyle/>
           <a:p>
-            <a:pPr indent="0" marL="0">
-              <a:buNone/>
-            </a:pPr>
-            <a:r>
-              <a:rPr lang="en-US" sz="950" b="1" spc="150" kern="0" dirty="0">
+            <a:pPr marL="0" indent="0">
+              <a:buNone/>
+            </a:pPr>
+            <a:r>
+              <a:rPr lang="en-US" sz="950" b="1" kern="0" spc="150" dirty="0">
                 <a:solidFill>
                   <a:srgbClr val="B3261E"/>
                 </a:solidFill>
@@ -7064,7 +6749,7 @@
           <a:bodyPr wrap="square" lIns="0" tIns="0" rIns="0" bIns="0" rtlCol="0" anchor="ctr"/>
           <a:lstStyle/>
           <a:p>
-            <a:pPr indent="0" marL="0">
+            <a:pPr marL="0" indent="0">
               <a:lnSpc>
                 <a:spcPct val="112000"/>
               </a:lnSpc>
@@ -7087,7 +6772,7 @@
       </p:sp>
       <p:sp>
         <p:nvSpPr>
-          <p:cNvPr id="25" name="Slide Number Placeholder 0"/>
+          <p:cNvPr id="32" name="Slide Number Placeholder 0"/>
           <p:cNvSpPr>
             <a:spLocks noGrp="1"/>
           </p:cNvSpPr>
@@ -7105,7 +6790,7 @@
           </a:prstGeom>
           <a:extLst>
             <a:ext uri="{C572A759-6A51-4108-AA02-DFA0A04FC94B}">
-              <ma14:wrappingTextBoxFlag xmlns:ma14="http://schemas.microsoft.com/office/mac/drawingml/2011/main" val="0"/>
+              <ma14:wrappingTextBoxFlag xmlns:ma14="http://schemas.microsoft.com/office/mac/drawingml/2011/main" xmlns="" val="0"/>
             </a:ext>
           </a:extLst>
         </p:spPr>
@@ -7126,7 +6811,7 @@
           <a:p>
             <a:pPr algn="l"/>
             <a:fld id="{F7021451-1387-4CA6-816F-3879F97B5CBC}" type="slidenum">
-              <a:rPr b="0" lang="en-US"/>
+              <a:rPr lang="en-US" b="0"/>
               <a:t>13</a:t>
             </a:fld>
             <a:endParaRPr lang="en-US"/>
@@ -7201,7 +6886,7 @@
           <a:bodyPr wrap="square" lIns="0" tIns="0" rIns="0" bIns="0" rtlCol="0" anchor="ctr"/>
           <a:lstStyle/>
           <a:p>
-            <a:pPr algn="l" indent="0" marL="0">
+            <a:pPr marL="0" indent="0" algn="l">
               <a:buNone/>
             </a:pPr>
             <a:r>
@@ -7240,7 +6925,7 @@
           <a:bodyPr wrap="square" lIns="0" tIns="0" rIns="0" bIns="0" rtlCol="0" anchor="ctr"/>
           <a:lstStyle/>
           <a:p>
-            <a:pPr indent="0" marL="0">
+            <a:pPr marL="0" indent="0">
               <a:buNone/>
             </a:pPr>
             <a:r>
@@ -7279,7 +6964,7 @@
           <a:bodyPr wrap="square" lIns="0" tIns="0" rIns="0" bIns="0" rtlCol="0" anchor="t"/>
           <a:lstStyle/>
           <a:p>
-            <a:pPr indent="0" marL="0">
+            <a:pPr marL="0" indent="0">
               <a:lnSpc>
                 <a:spcPct val="100000"/>
               </a:lnSpc>
@@ -7348,11 +7033,11 @@
           <a:bodyPr wrap="square" lIns="0" tIns="0" rIns="0" bIns="0" rtlCol="0" anchor="ctr"/>
           <a:lstStyle/>
           <a:p>
-            <a:pPr algn="ctr" indent="0" marL="0">
-              <a:buNone/>
-            </a:pPr>
-            <a:r>
-              <a:rPr lang="en-US" sz="900" b="1" spc="100" kern="0" dirty="0">
+            <a:pPr marL="0" indent="0" algn="ctr">
+              <a:buNone/>
+            </a:pPr>
+            <a:r>
+              <a:rPr lang="en-US" sz="900" b="1" kern="0" spc="100" dirty="0">
                 <a:solidFill>
                   <a:srgbClr val="5A05F4"/>
                 </a:solidFill>
@@ -7368,14 +7053,14 @@
       </p:sp>
       <p:pic>
         <p:nvPicPr>
-          <p:cNvPr id="8" name="Image 0" descr="preencoded.png">    </p:cNvPr>
+          <p:cNvPr id="8" name="Image 0" descr="preencoded.png"/>
           <p:cNvPicPr>
             <a:picLocks noChangeAspect="1"/>
           </p:cNvPicPr>
           <p:nvPr/>
         </p:nvPicPr>
         <p:blipFill>
-          <a:blip r:embed="rId1"/>
+          <a:blip r:embed="rId3"/>
           <a:stretch>
             <a:fillRect/>
           </a:stretch>
@@ -7406,15 +7091,27 @@
         </p:nvGraphicFramePr>
         <p:xfrm>
           <a:off x="566928" y="1783080"/>
-          <a:ext cx="11064240" cy="914400"/>
+          <a:ext cx="11064240" cy="3182112"/>
         </p:xfrm>
         <a:graphic>
           <a:graphicData uri="http://schemas.openxmlformats.org/drawingml/2006/table">
             <a:tbl>
               <a:tblPr/>
               <a:tblGrid>
-                <a:gridCol w="5120640"/>
-                <a:gridCol w="5943600"/>
+                <a:gridCol w="5120640">
+                  <a:extLst>
+                    <a:ext uri="{9D8B030D-6E8A-4147-A177-3AD203B41FA5}">
+                      <a16:colId xmlns:a16="http://schemas.microsoft.com/office/drawing/2014/main" val="20000"/>
+                    </a:ext>
+                  </a:extLst>
+                </a:gridCol>
+                <a:gridCol w="5943600">
+                  <a:extLst>
+                    <a:ext uri="{9D8B030D-6E8A-4147-A177-3AD203B41FA5}">
+                      <a16:colId xmlns:a16="http://schemas.microsoft.com/office/drawing/2014/main" val="20001"/>
+                    </a:ext>
+                  </a:extLst>
+                </a:gridCol>
               </a:tblGrid>
               <a:tr h="530352">
                 <a:tc>
@@ -7422,11 +7119,11 @@
                     <a:bodyPr/>
                     <a:lstStyle/>
                     <a:p>
-                      <a:pPr algn="ctr" indent="0" marL="0">
+                      <a:pPr marL="0" indent="0" algn="ctr">
                         <a:buNone/>
                       </a:pPr>
                       <a:r>
-                        <a:rPr lang="en-US" sz="900" b="1" spc="100" kern="0" dirty="0">
+                        <a:rPr lang="en-US" sz="900" b="1" kern="0" spc="100" dirty="0">
                           <a:solidFill>
                             <a:srgbClr val="FFFFFF"/>
                           </a:solidFill>
@@ -7490,11 +7187,11 @@
                     <a:bodyPr/>
                     <a:lstStyle/>
                     <a:p>
-                      <a:pPr algn="ctr" indent="0" marL="0">
+                      <a:pPr marL="0" indent="0" algn="ctr">
                         <a:buNone/>
                       </a:pPr>
                       <a:r>
-                        <a:rPr lang="en-US" sz="900" b="1" spc="100" kern="0" dirty="0">
+                        <a:rPr lang="en-US" sz="900" b="1" kern="0" spc="100" dirty="0">
                           <a:solidFill>
                             <a:srgbClr val="FFFFFF"/>
                           </a:solidFill>
@@ -7553,6 +7250,11 @@
                     </a:solidFill>
                   </a:tcPr>
                 </a:tc>
+                <a:extLst>
+                  <a:ext uri="{0D108BD9-81ED-4DB2-BD59-A6C34878D82A}">
+                    <a16:rowId xmlns:a16="http://schemas.microsoft.com/office/drawing/2014/main" val="10000"/>
+                  </a:ext>
+                </a:extLst>
               </a:tr>
               <a:tr h="530352">
                 <a:tc>
@@ -7560,7 +7262,7 @@
                     <a:bodyPr/>
                     <a:lstStyle/>
                     <a:p>
-                      <a:pPr indent="0" marL="0">
+                      <a:pPr marL="0" indent="0">
                         <a:buNone/>
                       </a:pPr>
                       <a:r>
@@ -7628,7 +7330,7 @@
                     <a:bodyPr/>
                     <a:lstStyle/>
                     <a:p>
-                      <a:pPr indent="0" marL="0">
+                      <a:pPr marL="0" indent="0">
                         <a:buNone/>
                       </a:pPr>
                       <a:r>
@@ -7691,6 +7393,11 @@
                     </a:solidFill>
                   </a:tcPr>
                 </a:tc>
+                <a:extLst>
+                  <a:ext uri="{0D108BD9-81ED-4DB2-BD59-A6C34878D82A}">
+                    <a16:rowId xmlns:a16="http://schemas.microsoft.com/office/drawing/2014/main" val="10001"/>
+                  </a:ext>
+                </a:extLst>
               </a:tr>
               <a:tr h="530352">
                 <a:tc>
@@ -7698,7 +7405,7 @@
                     <a:bodyPr/>
                     <a:lstStyle/>
                     <a:p>
-                      <a:pPr indent="0" marL="0">
+                      <a:pPr marL="0" indent="0">
                         <a:buNone/>
                       </a:pPr>
                       <a:r>
@@ -7766,7 +7473,7 @@
                     <a:bodyPr/>
                     <a:lstStyle/>
                     <a:p>
-                      <a:pPr indent="0" marL="0">
+                      <a:pPr marL="0" indent="0">
                         <a:buNone/>
                       </a:pPr>
                       <a:r>
@@ -7829,6 +7536,11 @@
                     </a:solidFill>
                   </a:tcPr>
                 </a:tc>
+                <a:extLst>
+                  <a:ext uri="{0D108BD9-81ED-4DB2-BD59-A6C34878D82A}">
+                    <a16:rowId xmlns:a16="http://schemas.microsoft.com/office/drawing/2014/main" val="10002"/>
+                  </a:ext>
+                </a:extLst>
               </a:tr>
               <a:tr h="530352">
                 <a:tc>
@@ -7836,7 +7548,7 @@
                     <a:bodyPr/>
                     <a:lstStyle/>
                     <a:p>
-                      <a:pPr indent="0" marL="0">
+                      <a:pPr marL="0" indent="0">
                         <a:buNone/>
                       </a:pPr>
                       <a:r>
@@ -7904,7 +7616,7 @@
                     <a:bodyPr/>
                     <a:lstStyle/>
                     <a:p>
-                      <a:pPr indent="0" marL="0">
+                      <a:pPr marL="0" indent="0">
                         <a:buNone/>
                       </a:pPr>
                       <a:r>
@@ -7967,6 +7679,11 @@
                     </a:solidFill>
                   </a:tcPr>
                 </a:tc>
+                <a:extLst>
+                  <a:ext uri="{0D108BD9-81ED-4DB2-BD59-A6C34878D82A}">
+                    <a16:rowId xmlns:a16="http://schemas.microsoft.com/office/drawing/2014/main" val="10003"/>
+                  </a:ext>
+                </a:extLst>
               </a:tr>
               <a:tr h="530352">
                 <a:tc>
@@ -7974,7 +7691,7 @@
                     <a:bodyPr/>
                     <a:lstStyle/>
                     <a:p>
-                      <a:pPr indent="0" marL="0">
+                      <a:pPr marL="0" indent="0">
                         <a:buNone/>
                       </a:pPr>
                       <a:r>
@@ -8042,7 +7759,7 @@
                     <a:bodyPr/>
                     <a:lstStyle/>
                     <a:p>
-                      <a:pPr indent="0" marL="0">
+                      <a:pPr marL="0" indent="0">
                         <a:buNone/>
                       </a:pPr>
                       <a:r>
@@ -8105,6 +7822,11 @@
                     </a:solidFill>
                   </a:tcPr>
                 </a:tc>
+                <a:extLst>
+                  <a:ext uri="{0D108BD9-81ED-4DB2-BD59-A6C34878D82A}">
+                    <a16:rowId xmlns:a16="http://schemas.microsoft.com/office/drawing/2014/main" val="10004"/>
+                  </a:ext>
+                </a:extLst>
               </a:tr>
               <a:tr h="530352">
                 <a:tc>
@@ -8112,7 +7834,7 @@
                     <a:bodyPr/>
                     <a:lstStyle/>
                     <a:p>
-                      <a:pPr indent="0" marL="0">
+                      <a:pPr marL="0" indent="0">
                         <a:buNone/>
                       </a:pPr>
                       <a:r>
@@ -8180,7 +7902,7 @@
                     <a:bodyPr/>
                     <a:lstStyle/>
                     <a:p>
-                      <a:pPr indent="0" marL="0">
+                      <a:pPr marL="0" indent="0">
                         <a:buNone/>
                       </a:pPr>
                       <a:r>
@@ -8243,6 +7965,11 @@
                     </a:solidFill>
                   </a:tcPr>
                 </a:tc>
+                <a:extLst>
+                  <a:ext uri="{0D108BD9-81ED-4DB2-BD59-A6C34878D82A}">
+                    <a16:rowId xmlns:a16="http://schemas.microsoft.com/office/drawing/2014/main" val="10005"/>
+                  </a:ext>
+                </a:extLst>
               </a:tr>
             </a:tbl>
           </a:graphicData>
@@ -8296,11 +8023,11 @@
           <a:bodyPr wrap="square" lIns="0" tIns="0" rIns="0" bIns="0" rtlCol="0" anchor="ctr"/>
           <a:lstStyle/>
           <a:p>
-            <a:pPr indent="0" marL="0">
-              <a:buNone/>
-            </a:pPr>
-            <a:r>
-              <a:rPr lang="en-US" sz="950" b="1" spc="150" kern="0" dirty="0">
+            <a:pPr marL="0" indent="0">
+              <a:buNone/>
+            </a:pPr>
+            <a:r>
+              <a:rPr lang="en-US" sz="950" b="1" kern="0" spc="150" dirty="0">
                 <a:solidFill>
                   <a:srgbClr val="106B41"/>
                 </a:solidFill>
@@ -8335,7 +8062,7 @@
           <a:bodyPr wrap="square" lIns="0" tIns="0" rIns="0" bIns="0" rtlCol="0" anchor="ctr"/>
           <a:lstStyle/>
           <a:p>
-            <a:pPr indent="0" marL="0">
+            <a:pPr marL="0" indent="0">
               <a:lnSpc>
                 <a:spcPct val="112000"/>
               </a:lnSpc>
@@ -8376,7 +8103,7 @@
           </a:prstGeom>
           <a:extLst>
             <a:ext uri="{C572A759-6A51-4108-AA02-DFA0A04FC94B}">
-              <ma14:wrappingTextBoxFlag xmlns:ma14="http://schemas.microsoft.com/office/mac/drawingml/2011/main" val="0"/>
+              <ma14:wrappingTextBoxFlag xmlns:ma14="http://schemas.microsoft.com/office/mac/drawingml/2011/main" xmlns="" val="0"/>
             </a:ext>
           </a:extLst>
         </p:spPr>
@@ -8397,7 +8124,7 @@
           <a:p>
             <a:pPr algn="l"/>
             <a:fld id="{F7021451-1387-4CA6-816F-3879F97B5CBC}" type="slidenum">
-              <a:rPr b="0" lang="en-US"/>
+              <a:rPr lang="en-US" b="0"/>
               <a:t>14</a:t>
             </a:fld>
             <a:endParaRPr lang="en-US"/>
@@ -8472,7 +8199,7 @@
           <a:bodyPr wrap="square" lIns="0" tIns="0" rIns="0" bIns="0" rtlCol="0" anchor="ctr"/>
           <a:lstStyle/>
           <a:p>
-            <a:pPr algn="l" indent="0" marL="0">
+            <a:pPr marL="0" indent="0" algn="l">
               <a:buNone/>
             </a:pPr>
             <a:r>
@@ -8511,7 +8238,7 @@
           <a:bodyPr wrap="square" lIns="0" tIns="0" rIns="0" bIns="0" rtlCol="0" anchor="ctr"/>
           <a:lstStyle/>
           <a:p>
-            <a:pPr indent="0" marL="0">
+            <a:pPr marL="0" indent="0">
               <a:buNone/>
             </a:pPr>
             <a:r>
@@ -8577,11 +8304,11 @@
           <a:bodyPr wrap="square" lIns="0" tIns="0" rIns="0" bIns="0" rtlCol="0" anchor="ctr"/>
           <a:lstStyle/>
           <a:p>
-            <a:pPr algn="ctr" indent="0" marL="0">
-              <a:buNone/>
-            </a:pPr>
-            <a:r>
-              <a:rPr lang="en-US" sz="900" b="1" spc="100" kern="0" dirty="0">
+            <a:pPr marL="0" indent="0" algn="ctr">
+              <a:buNone/>
+            </a:pPr>
+            <a:r>
+              <a:rPr lang="en-US" sz="900" b="1" kern="0" spc="100" dirty="0">
                 <a:solidFill>
                   <a:srgbClr val="5A05F4"/>
                 </a:solidFill>
@@ -8643,11 +8370,11 @@
           <a:bodyPr wrap="square" lIns="0" tIns="0" rIns="0" bIns="0" rtlCol="0" anchor="ctr"/>
           <a:lstStyle/>
           <a:p>
-            <a:pPr algn="ctr" indent="0" marL="0">
-              <a:buNone/>
-            </a:pPr>
-            <a:r>
-              <a:rPr lang="en-US" sz="900" b="1" spc="100" kern="0" dirty="0">
+            <a:pPr marL="0" indent="0" algn="ctr">
+              <a:buNone/>
+            </a:pPr>
+            <a:r>
+              <a:rPr lang="en-US" sz="900" b="1" kern="0" spc="100" dirty="0">
                 <a:solidFill>
                   <a:srgbClr val="434343"/>
                 </a:solidFill>
@@ -8663,14 +8390,14 @@
       </p:sp>
       <p:pic>
         <p:nvPicPr>
-          <p:cNvPr id="9" name="Image 0" descr="preencoded.png">    </p:cNvPr>
+          <p:cNvPr id="9" name="Image 0" descr="preencoded.png"/>
           <p:cNvPicPr>
             <a:picLocks noChangeAspect="1"/>
           </p:cNvPicPr>
           <p:nvPr/>
         </p:nvPicPr>
         <p:blipFill>
-          <a:blip r:embed="rId1"/>
+          <a:blip r:embed="rId3"/>
           <a:stretch>
             <a:fillRect/>
           </a:stretch>
@@ -8728,7 +8455,7 @@
           <a:bodyPr wrap="square" lIns="0" tIns="0" rIns="0" bIns="0" rtlCol="0" anchor="ctr"/>
           <a:lstStyle/>
           <a:p>
-            <a:pPr algn="ctr" indent="0" marL="0">
+            <a:pPr marL="0" indent="0" algn="ctr">
               <a:buNone/>
             </a:pPr>
             <a:r>
@@ -8832,7 +8559,7 @@
           <a:bodyPr wrap="square" lIns="0" tIns="0" rIns="0" bIns="0" rtlCol="0" anchor="ctr"/>
           <a:lstStyle/>
           <a:p>
-            <a:pPr algn="ctr" indent="0" marL="0">
+            <a:pPr marL="0" indent="0" algn="ctr">
               <a:buNone/>
             </a:pPr>
             <a:r>
@@ -8936,7 +8663,7 @@
           <a:bodyPr wrap="square" lIns="0" tIns="0" rIns="0" bIns="0" rtlCol="0" anchor="ctr"/>
           <a:lstStyle/>
           <a:p>
-            <a:pPr algn="ctr" indent="0" marL="0">
+            <a:pPr marL="0" indent="0" algn="ctr">
               <a:buNone/>
             </a:pPr>
             <a:r>
@@ -8997,7 +8724,7 @@
           <a:bodyPr wrap="square" lIns="0" tIns="0" rIns="0" bIns="0" rtlCol="0" anchor="ctr"/>
           <a:lstStyle/>
           <a:p>
-            <a:pPr indent="0" marL="0">
+            <a:pPr marL="0" indent="0">
               <a:buNone/>
             </a:pPr>
             <a:r>
@@ -9036,7 +8763,7 @@
           <a:bodyPr wrap="square" lIns="0" tIns="0" rIns="0" bIns="0" rtlCol="0" anchor="t"/>
           <a:lstStyle/>
           <a:p>
-            <a:pPr indent="0" marL="0">
+            <a:pPr marL="0" indent="0">
               <a:lnSpc>
                 <a:spcPct val="108000"/>
               </a:lnSpc>
@@ -9100,7 +8827,7 @@
           <a:bodyPr wrap="square" lIns="0" tIns="0" rIns="0" bIns="0" rtlCol="0" anchor="ctr"/>
           <a:lstStyle/>
           <a:p>
-            <a:pPr indent="0" marL="0">
+            <a:pPr marL="0" indent="0">
               <a:buNone/>
             </a:pPr>
             <a:r>
@@ -9139,7 +8866,7 @@
           <a:bodyPr wrap="square" lIns="0" tIns="0" rIns="0" bIns="0" rtlCol="0" anchor="t"/>
           <a:lstStyle/>
           <a:p>
-            <a:pPr indent="0" marL="0">
+            <a:pPr marL="0" indent="0">
               <a:lnSpc>
                 <a:spcPct val="108000"/>
               </a:lnSpc>
@@ -9208,7 +8935,7 @@
           <a:bodyPr wrap="square" lIns="0" tIns="0" rIns="0" bIns="0" rtlCol="0" anchor="ctr"/>
           <a:lstStyle/>
           <a:p>
-            <a:pPr indent="0" marL="0">
+            <a:pPr marL="0" indent="0">
               <a:lnSpc>
                 <a:spcPct val="112000"/>
               </a:lnSpc>
@@ -9231,7 +8958,7 @@
       </p:sp>
       <p:sp>
         <p:nvSpPr>
-          <p:cNvPr id="25" name="Slide Number Placeholder 0"/>
+          <p:cNvPr id="28" name="Slide Number Placeholder 0"/>
           <p:cNvSpPr>
             <a:spLocks noGrp="1"/>
           </p:cNvSpPr>
@@ -9249,7 +8976,7 @@
           </a:prstGeom>
           <a:extLst>
             <a:ext uri="{C572A759-6A51-4108-AA02-DFA0A04FC94B}">
-              <ma14:wrappingTextBoxFlag xmlns:ma14="http://schemas.microsoft.com/office/mac/drawingml/2011/main" val="0"/>
+              <ma14:wrappingTextBoxFlag xmlns:ma14="http://schemas.microsoft.com/office/mac/drawingml/2011/main" xmlns="" val="0"/>
             </a:ext>
           </a:extLst>
         </p:spPr>
@@ -9270,7 +8997,7 @@
           <a:p>
             <a:pPr algn="l"/>
             <a:fld id="{F7021451-1387-4CA6-816F-3879F97B5CBC}" type="slidenum">
-              <a:rPr b="0" lang="en-US"/>
+              <a:rPr lang="en-US" b="0"/>
               <a:t>15</a:t>
             </a:fld>
             <a:endParaRPr lang="en-US"/>
@@ -9345,7 +9072,7 @@
           <a:bodyPr wrap="square" lIns="0" tIns="0" rIns="0" bIns="0" rtlCol="0" anchor="ctr"/>
           <a:lstStyle/>
           <a:p>
-            <a:pPr algn="l" indent="0" marL="0">
+            <a:pPr marL="0" indent="0" algn="l">
               <a:buNone/>
             </a:pPr>
             <a:r>
@@ -9384,7 +9111,7 @@
           <a:bodyPr wrap="square" lIns="0" tIns="0" rIns="0" bIns="0" rtlCol="0" anchor="ctr"/>
           <a:lstStyle/>
           <a:p>
-            <a:pPr indent="0" marL="0">
+            <a:pPr marL="0" indent="0">
               <a:buNone/>
             </a:pPr>
             <a:r>
@@ -9450,11 +9177,11 @@
           <a:bodyPr wrap="square" lIns="0" tIns="0" rIns="0" bIns="0" rtlCol="0" anchor="ctr"/>
           <a:lstStyle/>
           <a:p>
-            <a:pPr algn="ctr" indent="0" marL="0">
-              <a:buNone/>
-            </a:pPr>
-            <a:r>
-              <a:rPr lang="en-US" sz="900" b="1" spc="100" kern="0" dirty="0">
+            <a:pPr marL="0" indent="0" algn="ctr">
+              <a:buNone/>
+            </a:pPr>
+            <a:r>
+              <a:rPr lang="en-US" sz="900" b="1" kern="0" spc="100" dirty="0">
                 <a:solidFill>
                   <a:srgbClr val="5A05F4"/>
                 </a:solidFill>
@@ -9470,14 +9197,14 @@
       </p:sp>
       <p:pic>
         <p:nvPicPr>
-          <p:cNvPr id="7" name="Image 0" descr="preencoded.png">    </p:cNvPr>
+          <p:cNvPr id="7" name="Image 0" descr="preencoded.png"/>
           <p:cNvPicPr>
             <a:picLocks noChangeAspect="1"/>
           </p:cNvPicPr>
           <p:nvPr/>
         </p:nvPicPr>
         <p:blipFill>
-          <a:blip r:embed="rId1"/>
+          <a:blip r:embed="rId3"/>
           <a:stretch>
             <a:fillRect/>
           </a:stretch>
@@ -9540,7 +9267,7 @@
           <a:bodyPr wrap="square" lIns="0" tIns="0" rIns="0" bIns="0" rtlCol="0" anchor="t"/>
           <a:lstStyle/>
           <a:p>
-            <a:pPr indent="0" marL="0">
+            <a:pPr marL="0" indent="0">
               <a:lnSpc>
                 <a:spcPct val="130000"/>
               </a:lnSpc>
@@ -9560,7 +9287,7 @@
             <a:endParaRPr lang="en-US" sz="1200" dirty="0"/>
           </a:p>
           <a:p>
-            <a:pPr indent="0" marL="0">
+            <a:pPr marL="0" indent="0">
               <a:lnSpc>
                 <a:spcPct val="130000"/>
               </a:lnSpc>
@@ -9577,7 +9304,21 @@
               </a:rPr>
               <a:t>  eval pass rate &lt; 5/6         </a:t>
             </a:r>
-            <a:pPr indent="0" marL="0">
+            <a:r>
+              <a:rPr lang="en-US" sz="1200" dirty="0">
+                <a:solidFill>
+                  <a:srgbClr val="9A94AA"/>
+                </a:solidFill>
+                <a:latin typeface="Courier New" pitchFamily="34" charset="0"/>
+                <a:ea typeface="Courier New" pitchFamily="34" charset="-122"/>
+                <a:cs typeface="Courier New" pitchFamily="34" charset="-120"/>
+              </a:rPr>
+              <a:t>(прогін після деплою)</a:t>
+            </a:r>
+            <a:endParaRPr lang="en-US" sz="1200" dirty="0"/>
+          </a:p>
+          <a:p>
+            <a:pPr marL="0" indent="0">
               <a:lnSpc>
                 <a:spcPct val="130000"/>
               </a:lnSpc>
@@ -9586,18 +9327,29 @@
             <a:r>
               <a:rPr lang="en-US" sz="1200" dirty="0">
                 <a:solidFill>
-                  <a:srgbClr val="9A94AA"/>
+                  <a:srgbClr val="C9C4D6"/>
                 </a:solidFill>
                 <a:latin typeface="Courier New" pitchFamily="34" charset="0"/>
                 <a:ea typeface="Courier New" pitchFamily="34" charset="-122"/>
                 <a:cs typeface="Courier New" pitchFamily="34" charset="-120"/>
               </a:rPr>
-              <a:t>(прогін після деплою)</a:t>
+              <a:t>  або fallback_events зростає  </a:t>
+            </a:r>
+            <a:r>
+              <a:rPr lang="en-US" sz="1200" dirty="0">
+                <a:solidFill>
+                  <a:srgbClr val="9A94AA"/>
+                </a:solidFill>
+                <a:latin typeface="Courier New" pitchFamily="34" charset="0"/>
+                <a:ea typeface="Courier New" pitchFamily="34" charset="-122"/>
+                <a:cs typeface="Courier New" pitchFamily="34" charset="-120"/>
+              </a:rPr>
+              <a:t>протягом 15 хв</a:t>
             </a:r>
             <a:endParaRPr lang="en-US" sz="1200" dirty="0"/>
           </a:p>
           <a:p>
-            <a:pPr indent="0" marL="0">
+            <a:pPr marL="0" indent="0">
               <a:lnSpc>
                 <a:spcPct val="130000"/>
               </a:lnSpc>
@@ -9612,9 +9364,23 @@
                 <a:ea typeface="Courier New" pitchFamily="34" charset="-122"/>
                 <a:cs typeface="Courier New" pitchFamily="34" charset="-120"/>
               </a:rPr>
-              <a:t>  або fallback_events зростає  </a:t>
-            </a:r>
-            <a:pPr indent="0" marL="0">
+              <a:t>  або error rate &gt; 5%          </a:t>
+            </a:r>
+            <a:r>
+              <a:rPr lang="en-US" sz="1200" dirty="0">
+                <a:solidFill>
+                  <a:srgbClr val="9A94AA"/>
+                </a:solidFill>
+                <a:latin typeface="Courier New" pitchFamily="34" charset="0"/>
+                <a:ea typeface="Courier New" pitchFamily="34" charset="-122"/>
+                <a:cs typeface="Courier New" pitchFamily="34" charset="-120"/>
+              </a:rPr>
+              <a:t>протягом 15 хв</a:t>
+            </a:r>
+            <a:endParaRPr lang="en-US" sz="1200" dirty="0"/>
+          </a:p>
+          <a:p>
+            <a:pPr marL="0" indent="0">
               <a:lnSpc>
                 <a:spcPct val="130000"/>
               </a:lnSpc>
@@ -9623,75 +9389,18 @@
             <a:r>
               <a:rPr lang="en-US" sz="1200" dirty="0">
                 <a:solidFill>
-                  <a:srgbClr val="9A94AA"/>
+                  <a:srgbClr val="6BA0F8"/>
                 </a:solidFill>
                 <a:latin typeface="Courier New" pitchFamily="34" charset="0"/>
                 <a:ea typeface="Courier New" pitchFamily="34" charset="-122"/>
                 <a:cs typeface="Courier New" pitchFamily="34" charset="-120"/>
               </a:rPr>
-              <a:t>протягом 15 хв</a:t>
+              <a:t>Хто смикає: черговий, без погоджень.</a:t>
             </a:r>
             <a:endParaRPr lang="en-US" sz="1200" dirty="0"/>
           </a:p>
           <a:p>
-            <a:pPr indent="0" marL="0">
-              <a:lnSpc>
-                <a:spcPct val="130000"/>
-              </a:lnSpc>
-              <a:buNone/>
-            </a:pPr>
-            <a:r>
-              <a:rPr lang="en-US" sz="1200" dirty="0">
-                <a:solidFill>
-                  <a:srgbClr val="C9C4D6"/>
-                </a:solidFill>
-                <a:latin typeface="Courier New" pitchFamily="34" charset="0"/>
-                <a:ea typeface="Courier New" pitchFamily="34" charset="-122"/>
-                <a:cs typeface="Courier New" pitchFamily="34" charset="-120"/>
-              </a:rPr>
-              <a:t>  або error rate &gt; 5%          </a:t>
-            </a:r>
-            <a:pPr indent="0" marL="0">
-              <a:lnSpc>
-                <a:spcPct val="130000"/>
-              </a:lnSpc>
-              <a:buNone/>
-            </a:pPr>
-            <a:r>
-              <a:rPr lang="en-US" sz="1200" dirty="0">
-                <a:solidFill>
-                  <a:srgbClr val="9A94AA"/>
-                </a:solidFill>
-                <a:latin typeface="Courier New" pitchFamily="34" charset="0"/>
-                <a:ea typeface="Courier New" pitchFamily="34" charset="-122"/>
-                <a:cs typeface="Courier New" pitchFamily="34" charset="-120"/>
-              </a:rPr>
-              <a:t>протягом 15 хв</a:t>
-            </a:r>
-            <a:endParaRPr lang="en-US" sz="1200" dirty="0"/>
-          </a:p>
-          <a:p>
-            <a:pPr indent="0" marL="0">
-              <a:lnSpc>
-                <a:spcPct val="130000"/>
-              </a:lnSpc>
-              <a:buNone/>
-            </a:pPr>
-            <a:r>
-              <a:rPr lang="en-US" sz="1200" dirty="0">
-                <a:solidFill>
-                  <a:srgbClr val="6BA0F8"/>
-                </a:solidFill>
-                <a:latin typeface="Courier New" pitchFamily="34" charset="0"/>
-                <a:ea typeface="Courier New" pitchFamily="34" charset="-122"/>
-                <a:cs typeface="Courier New" pitchFamily="34" charset="-120"/>
-              </a:rPr>
-              <a:t>Хто смикає: черговий, без погоджень.</a:t>
-            </a:r>
-            <a:endParaRPr lang="en-US" sz="1200" dirty="0"/>
-          </a:p>
-          <a:p>
-            <a:pPr indent="0" marL="0">
+            <a:pPr marL="0" indent="0">
               <a:lnSpc>
                 <a:spcPct val="130000"/>
               </a:lnSpc>
@@ -9775,7 +9484,7 @@
           <a:bodyPr wrap="square" lIns="0" tIns="0" rIns="0" bIns="0" rtlCol="0" anchor="ctr"/>
           <a:lstStyle/>
           <a:p>
-            <a:pPr algn="ctr" indent="0" marL="0">
+            <a:pPr marL="0" indent="0" algn="ctr">
               <a:buNone/>
             </a:pPr>
             <a:r>
@@ -9814,7 +9523,7 @@
           <a:bodyPr wrap="square" lIns="0" tIns="0" rIns="0" bIns="0" rtlCol="0" anchor="ctr"/>
           <a:lstStyle/>
           <a:p>
-            <a:pPr indent="0" marL="0">
+            <a:pPr marL="0" indent="0">
               <a:buNone/>
             </a:pPr>
             <a:r>
@@ -9853,7 +9562,7 @@
           <a:bodyPr wrap="square" lIns="0" tIns="0" rIns="0" bIns="0" rtlCol="0" anchor="t"/>
           <a:lstStyle/>
           <a:p>
-            <a:pPr indent="0" marL="0">
+            <a:pPr marL="0" indent="0">
               <a:lnSpc>
                 <a:spcPct val="108000"/>
               </a:lnSpc>
@@ -9937,7 +9646,7 @@
           <a:bodyPr wrap="square" lIns="0" tIns="0" rIns="0" bIns="0" rtlCol="0" anchor="ctr"/>
           <a:lstStyle/>
           <a:p>
-            <a:pPr algn="ctr" indent="0" marL="0">
+            <a:pPr marL="0" indent="0" algn="ctr">
               <a:buNone/>
             </a:pPr>
             <a:r>
@@ -9976,7 +9685,7 @@
           <a:bodyPr wrap="square" lIns="0" tIns="0" rIns="0" bIns="0" rtlCol="0" anchor="ctr"/>
           <a:lstStyle/>
           <a:p>
-            <a:pPr indent="0" marL="0">
+            <a:pPr marL="0" indent="0">
               <a:buNone/>
             </a:pPr>
             <a:r>
@@ -10015,7 +9724,7 @@
           <a:bodyPr wrap="square" lIns="0" tIns="0" rIns="0" bIns="0" rtlCol="0" anchor="t"/>
           <a:lstStyle/>
           <a:p>
-            <a:pPr indent="0" marL="0">
+            <a:pPr marL="0" indent="0">
               <a:lnSpc>
                 <a:spcPct val="108000"/>
               </a:lnSpc>
@@ -10045,7 +9754,7 @@
         <p:spPr>
           <a:xfrm>
             <a:off x="7973568" y="4023360"/>
-            <a:ext cx="3520440" cy="1463040"/>
+            <a:ext cx="3657600" cy="1463040"/>
           </a:xfrm>
           <a:prstGeom prst="roundRect">
             <a:avLst>
@@ -10099,7 +9808,7 @@
           <a:bodyPr wrap="square" lIns="0" tIns="0" rIns="0" bIns="0" rtlCol="0" anchor="ctr"/>
           <a:lstStyle/>
           <a:p>
-            <a:pPr algn="ctr" indent="0" marL="0">
+            <a:pPr marL="0" indent="0" algn="ctr">
               <a:buNone/>
             </a:pPr>
             <a:r>
@@ -10138,7 +9847,7 @@
           <a:bodyPr wrap="square" lIns="0" tIns="0" rIns="0" bIns="0" rtlCol="0" anchor="ctr"/>
           <a:lstStyle/>
           <a:p>
-            <a:pPr indent="0" marL="0">
+            <a:pPr marL="0" indent="0">
               <a:buNone/>
             </a:pPr>
             <a:r>
@@ -10177,7 +9886,7 @@
           <a:bodyPr wrap="square" lIns="0" tIns="0" rIns="0" bIns="0" rtlCol="0" anchor="t"/>
           <a:lstStyle/>
           <a:p>
-            <a:pPr indent="0" marL="0">
+            <a:pPr marL="0" indent="0">
               <a:lnSpc>
                 <a:spcPct val="108000"/>
               </a:lnSpc>
@@ -10241,7 +9950,7 @@
           <a:bodyPr wrap="square" lIns="0" tIns="0" rIns="0" bIns="0" rtlCol="0" anchor="ctr"/>
           <a:lstStyle/>
           <a:p>
-            <a:pPr indent="0" marL="0">
+            <a:pPr marL="0" indent="0">
               <a:lnSpc>
                 <a:spcPct val="112000"/>
               </a:lnSpc>
@@ -10264,7 +9973,7 @@
       </p:sp>
       <p:sp>
         <p:nvSpPr>
-          <p:cNvPr id="25" name="Slide Number Placeholder 0"/>
+          <p:cNvPr id="27" name="Slide Number Placeholder 0"/>
           <p:cNvSpPr>
             <a:spLocks noGrp="1"/>
           </p:cNvSpPr>
@@ -10282,7 +9991,7 @@
           </a:prstGeom>
           <a:extLst>
             <a:ext uri="{C572A759-6A51-4108-AA02-DFA0A04FC94B}">
-              <ma14:wrappingTextBoxFlag xmlns:ma14="http://schemas.microsoft.com/office/mac/drawingml/2011/main" val="0"/>
+              <ma14:wrappingTextBoxFlag xmlns:ma14="http://schemas.microsoft.com/office/mac/drawingml/2011/main" xmlns="" val="0"/>
             </a:ext>
           </a:extLst>
         </p:spPr>
@@ -10303,7 +10012,7 @@
           <a:p>
             <a:pPr algn="l"/>
             <a:fld id="{F7021451-1387-4CA6-816F-3879F97B5CBC}" type="slidenum">
-              <a:rPr b="0" lang="en-US"/>
+              <a:rPr lang="en-US" b="0"/>
               <a:t>16</a:t>
             </a:fld>
             <a:endParaRPr lang="en-US"/>
@@ -10356,11 +10065,11 @@
           <a:bodyPr wrap="square" lIns="0" tIns="0" rIns="0" bIns="0" rtlCol="0" anchor="ctr"/>
           <a:lstStyle/>
           <a:p>
-            <a:pPr indent="0" marL="0">
-              <a:buNone/>
-            </a:pPr>
-            <a:r>
-              <a:rPr lang="en-US" sz="1200" b="1" spc="400" kern="0" dirty="0">
+            <a:pPr marL="0" indent="0">
+              <a:buNone/>
+            </a:pPr>
+            <a:r>
+              <a:rPr lang="en-US" sz="1200" b="1" kern="0" spc="400" dirty="0">
                 <a:solidFill>
                   <a:srgbClr val="FFFFFF"/>
                 </a:solidFill>
@@ -10395,7 +10104,7 @@
           <a:bodyPr wrap="square" lIns="0" tIns="0" rIns="0" bIns="0" rtlCol="0" anchor="ctr"/>
           <a:lstStyle/>
           <a:p>
-            <a:pPr indent="0" marL="0">
+            <a:pPr marL="0" indent="0">
               <a:buNone/>
             </a:pPr>
             <a:r>
@@ -10434,7 +10143,7 @@
           <a:bodyPr wrap="square" lIns="0" tIns="0" rIns="0" bIns="0" rtlCol="0" anchor="t"/>
           <a:lstStyle/>
           <a:p>
-            <a:pPr indent="0" marL="0">
+            <a:pPr marL="0" indent="0">
               <a:buNone/>
             </a:pPr>
             <a:r>
@@ -10495,7 +10204,7 @@
           <a:bodyPr wrap="square" lIns="0" tIns="0" rIns="0" bIns="0" rtlCol="0" anchor="ctr"/>
           <a:lstStyle/>
           <a:p>
-            <a:pPr algn="ctr" indent="0" marL="0">
+            <a:pPr marL="0" indent="0" algn="ctr">
               <a:buNone/>
             </a:pPr>
             <a:r>
@@ -10581,7 +10290,7 @@
           <a:bodyPr wrap="square" lIns="0" tIns="0" rIns="0" bIns="0" rtlCol="0" anchor="ctr"/>
           <a:lstStyle/>
           <a:p>
-            <a:pPr indent="0" marL="0">
+            <a:pPr marL="0" indent="0">
               <a:buNone/>
             </a:pPr>
             <a:r>
@@ -10642,11 +10351,11 @@
           <a:bodyPr wrap="square" lIns="0" tIns="0" rIns="0" bIns="0" rtlCol="0" anchor="ctr"/>
           <a:lstStyle/>
           <a:p>
-            <a:pPr algn="ctr" indent="0" marL="0">
-              <a:buNone/>
-            </a:pPr>
-            <a:r>
-              <a:rPr lang="en-US" sz="900" b="1" spc="100" kern="0" dirty="0">
+            <a:pPr marL="0" indent="0" algn="ctr">
+              <a:buNone/>
+            </a:pPr>
+            <a:r>
+              <a:rPr lang="en-US" sz="900" b="1" kern="0" spc="100" dirty="0">
                 <a:solidFill>
                   <a:srgbClr val="FFFFFF"/>
                 </a:solidFill>
@@ -10662,14 +10371,14 @@
       </p:sp>
       <p:pic>
         <p:nvPicPr>
-          <p:cNvPr id="6" name="Image 0" descr="preencoded.png">    </p:cNvPr>
+          <p:cNvPr id="6" name="Image 0" descr="preencoded.png"/>
           <p:cNvPicPr>
             <a:picLocks noChangeAspect="1"/>
           </p:cNvPicPr>
           <p:nvPr/>
         </p:nvPicPr>
         <p:blipFill>
-          <a:blip r:embed="rId1"/>
+          <a:blip r:embed="rId3"/>
           <a:stretch>
             <a:fillRect/>
           </a:stretch>
@@ -10747,7 +10456,7 @@
           <a:bodyPr wrap="square" lIns="0" tIns="0" rIns="0" bIns="0" rtlCol="0" anchor="ctr"/>
           <a:lstStyle/>
           <a:p>
-            <a:pPr algn="ctr" indent="0" marL="0">
+            <a:pPr marL="0" indent="0" algn="ctr">
               <a:buNone/>
             </a:pPr>
             <a:r>
@@ -10786,7 +10495,7 @@
           <a:bodyPr wrap="square" lIns="0" tIns="0" rIns="0" bIns="0" rtlCol="0" anchor="ctr"/>
           <a:lstStyle/>
           <a:p>
-            <a:pPr indent="0" marL="0">
+            <a:pPr marL="0" indent="0">
               <a:buNone/>
             </a:pPr>
             <a:r>
@@ -10825,7 +10534,7 @@
           <a:bodyPr wrap="square" lIns="0" tIns="0" rIns="0" bIns="0" rtlCol="0" anchor="t"/>
           <a:lstStyle/>
           <a:p>
-            <a:pPr indent="0" marL="0">
+            <a:pPr marL="0" indent="0">
               <a:lnSpc>
                 <a:spcPct val="108000"/>
               </a:lnSpc>
@@ -10909,7 +10618,7 @@
           <a:bodyPr wrap="square" lIns="0" tIns="0" rIns="0" bIns="0" rtlCol="0" anchor="ctr"/>
           <a:lstStyle/>
           <a:p>
-            <a:pPr algn="ctr" indent="0" marL="0">
+            <a:pPr marL="0" indent="0" algn="ctr">
               <a:buNone/>
             </a:pPr>
             <a:r>
@@ -10948,7 +10657,7 @@
           <a:bodyPr wrap="square" lIns="0" tIns="0" rIns="0" bIns="0" rtlCol="0" anchor="ctr"/>
           <a:lstStyle/>
           <a:p>
-            <a:pPr indent="0" marL="0">
+            <a:pPr marL="0" indent="0">
               <a:buNone/>
             </a:pPr>
             <a:r>
@@ -10987,7 +10696,7 @@
           <a:bodyPr wrap="square" lIns="0" tIns="0" rIns="0" bIns="0" rtlCol="0" anchor="t"/>
           <a:lstStyle/>
           <a:p>
-            <a:pPr indent="0" marL="0">
+            <a:pPr marL="0" indent="0">
               <a:lnSpc>
                 <a:spcPct val="108000"/>
               </a:lnSpc>
@@ -11071,7 +10780,7 @@
           <a:bodyPr wrap="square" lIns="0" tIns="0" rIns="0" bIns="0" rtlCol="0" anchor="ctr"/>
           <a:lstStyle/>
           <a:p>
-            <a:pPr algn="ctr" indent="0" marL="0">
+            <a:pPr marL="0" indent="0" algn="ctr">
               <a:buNone/>
             </a:pPr>
             <a:r>
@@ -11110,7 +10819,7 @@
           <a:bodyPr wrap="square" lIns="0" tIns="0" rIns="0" bIns="0" rtlCol="0" anchor="ctr"/>
           <a:lstStyle/>
           <a:p>
-            <a:pPr indent="0" marL="0">
+            <a:pPr marL="0" indent="0">
               <a:buNone/>
             </a:pPr>
             <a:r>
@@ -11149,7 +10858,7 @@
           <a:bodyPr wrap="square" lIns="0" tIns="0" rIns="0" bIns="0" rtlCol="0" anchor="t"/>
           <a:lstStyle/>
           <a:p>
-            <a:pPr indent="0" marL="0">
+            <a:pPr marL="0" indent="0">
               <a:lnSpc>
                 <a:spcPct val="108000"/>
               </a:lnSpc>
@@ -11233,7 +10942,7 @@
           <a:bodyPr wrap="square" lIns="0" tIns="0" rIns="0" bIns="0" rtlCol="0" anchor="ctr"/>
           <a:lstStyle/>
           <a:p>
-            <a:pPr algn="ctr" indent="0" marL="0">
+            <a:pPr marL="0" indent="0" algn="ctr">
               <a:buNone/>
             </a:pPr>
             <a:r>
@@ -11272,7 +10981,7 @@
           <a:bodyPr wrap="square" lIns="0" tIns="0" rIns="0" bIns="0" rtlCol="0" anchor="ctr"/>
           <a:lstStyle/>
           <a:p>
-            <a:pPr indent="0" marL="0">
+            <a:pPr marL="0" indent="0">
               <a:buNone/>
             </a:pPr>
             <a:r>
@@ -11311,7 +11020,7 @@
           <a:bodyPr wrap="square" lIns="0" tIns="0" rIns="0" bIns="0" rtlCol="0" anchor="t"/>
           <a:lstStyle/>
           <a:p>
-            <a:pPr indent="0" marL="0">
+            <a:pPr marL="0" indent="0">
               <a:lnSpc>
                 <a:spcPct val="108000"/>
               </a:lnSpc>
@@ -11341,7 +11050,7 @@
         <p:spPr>
           <a:xfrm>
             <a:off x="566928" y="5074920"/>
-            <a:ext cx="11064240" cy="1051560"/>
+            <a:ext cx="11247120" cy="1051560"/>
           </a:xfrm>
           <a:prstGeom prst="roundRect">
             <a:avLst>
@@ -11375,11 +11084,11 @@
           <a:bodyPr wrap="square" lIns="0" tIns="0" rIns="0" bIns="0" rtlCol="0" anchor="ctr"/>
           <a:lstStyle/>
           <a:p>
-            <a:pPr indent="0" marL="0">
-              <a:buNone/>
-            </a:pPr>
-            <a:r>
-              <a:rPr lang="en-US" sz="950" b="1" spc="150" kern="0" dirty="0">
+            <a:pPr marL="0" indent="0">
+              <a:buNone/>
+            </a:pPr>
+            <a:r>
+              <a:rPr lang="en-US" sz="950" b="1" kern="0" spc="150" dirty="0">
                 <a:solidFill>
                   <a:srgbClr val="FFFFFF"/>
                 </a:solidFill>
@@ -11414,7 +11123,7 @@
           <a:bodyPr wrap="square" lIns="0" tIns="0" rIns="0" bIns="0" rtlCol="0" anchor="ctr"/>
           <a:lstStyle/>
           <a:p>
-            <a:pPr indent="0" marL="0">
+            <a:pPr marL="0" indent="0">
               <a:lnSpc>
                 <a:spcPct val="112000"/>
               </a:lnSpc>
@@ -11437,7 +11146,7 @@
       </p:sp>
       <p:sp>
         <p:nvSpPr>
-          <p:cNvPr id="25" name="Slide Number Placeholder 0"/>
+          <p:cNvPr id="30" name="Slide Number Placeholder 0"/>
           <p:cNvSpPr>
             <a:spLocks noGrp="1"/>
           </p:cNvSpPr>
@@ -11455,7 +11164,7 @@
           </a:prstGeom>
           <a:extLst>
             <a:ext uri="{C572A759-6A51-4108-AA02-DFA0A04FC94B}">
-              <ma14:wrappingTextBoxFlag xmlns:ma14="http://schemas.microsoft.com/office/mac/drawingml/2011/main" val="0"/>
+              <ma14:wrappingTextBoxFlag xmlns:ma14="http://schemas.microsoft.com/office/mac/drawingml/2011/main" xmlns="" val="0"/>
             </a:ext>
           </a:extLst>
         </p:spPr>
@@ -11476,7 +11185,7 @@
           <a:p>
             <a:pPr algn="l"/>
             <a:fld id="{F7021451-1387-4CA6-816F-3879F97B5CBC}" type="slidenum">
-              <a:rPr b="0" lang="en-US"/>
+              <a:rPr lang="en-US" b="0"/>
               <a:t>18</a:t>
             </a:fld>
             <a:endParaRPr lang="en-US"/>
@@ -11551,7 +11260,7 @@
           <a:bodyPr wrap="square" lIns="0" tIns="0" rIns="0" bIns="0" rtlCol="0" anchor="ctr"/>
           <a:lstStyle/>
           <a:p>
-            <a:pPr indent="0" marL="0">
+            <a:pPr marL="0" indent="0">
               <a:buNone/>
             </a:pPr>
             <a:r>
@@ -11612,11 +11321,11 @@
           <a:bodyPr wrap="square" lIns="0" tIns="0" rIns="0" bIns="0" rtlCol="0" anchor="ctr"/>
           <a:lstStyle/>
           <a:p>
-            <a:pPr algn="ctr" indent="0" marL="0">
-              <a:buNone/>
-            </a:pPr>
-            <a:r>
-              <a:rPr lang="en-US" sz="900" b="1" spc="100" kern="0" dirty="0">
+            <a:pPr marL="0" indent="0" algn="ctr">
+              <a:buNone/>
+            </a:pPr>
+            <a:r>
+              <a:rPr lang="en-US" sz="900" b="1" kern="0" spc="100" dirty="0">
                 <a:solidFill>
                   <a:srgbClr val="FFFFFF"/>
                 </a:solidFill>
@@ -11632,14 +11341,14 @@
       </p:sp>
       <p:pic>
         <p:nvPicPr>
-          <p:cNvPr id="6" name="Image 0" descr="preencoded.png">    </p:cNvPr>
+          <p:cNvPr id="6" name="Image 0" descr="preencoded.png"/>
           <p:cNvPicPr>
             <a:picLocks noChangeAspect="1"/>
           </p:cNvPicPr>
           <p:nvPr/>
         </p:nvPicPr>
         <p:blipFill>
-          <a:blip r:embed="rId1"/>
+          <a:blip r:embed="rId3"/>
           <a:stretch>
             <a:fillRect/>
           </a:stretch>
@@ -11695,7 +11404,7 @@
           <a:bodyPr wrap="square" lIns="0" tIns="0" rIns="0" bIns="0" rtlCol="0" anchor="ctr"/>
           <a:lstStyle/>
           <a:p>
-            <a:pPr algn="ctr" indent="0" marL="0">
+            <a:pPr marL="0" indent="0" algn="ctr">
               <a:buNone/>
             </a:pPr>
             <a:r>
@@ -11734,7 +11443,7 @@
           <a:bodyPr wrap="square" lIns="0" tIns="0" rIns="0" bIns="0" rtlCol="0" anchor="ctr"/>
           <a:lstStyle/>
           <a:p>
-            <a:pPr indent="0" marL="0">
+            <a:pPr marL="0" indent="0">
               <a:buNone/>
             </a:pPr>
             <a:r>
@@ -11748,9 +11457,6 @@
               </a:rPr>
               <a:t>Прочитати workflow  </a:t>
             </a:r>
-            <a:pPr indent="0" marL="0">
-              <a:buNone/>
-            </a:pPr>
             <a:r>
               <a:rPr lang="en-US" sz="1200" dirty="0">
                 <a:solidFill>
@@ -11807,7 +11513,7 @@
           <a:bodyPr wrap="square" lIns="0" tIns="0" rIns="0" bIns="0" rtlCol="0" anchor="ctr"/>
           <a:lstStyle/>
           <a:p>
-            <a:pPr algn="ctr" indent="0" marL="0">
+            <a:pPr marL="0" indent="0" algn="ctr">
               <a:buNone/>
             </a:pPr>
             <a:r>
@@ -11846,7 +11552,7 @@
           <a:bodyPr wrap="square" lIns="0" tIns="0" rIns="0" bIns="0" rtlCol="0" anchor="ctr"/>
           <a:lstStyle/>
           <a:p>
-            <a:pPr indent="0" marL="0">
+            <a:pPr marL="0" indent="0">
               <a:buNone/>
             </a:pPr>
             <a:r>
@@ -11860,9 +11566,6 @@
               </a:rPr>
               <a:t>Зламати навмисно  </a:t>
             </a:r>
-            <a:pPr indent="0" marL="0">
-              <a:buNone/>
-            </a:pPr>
             <a:r>
               <a:rPr lang="en-US" sz="1200" dirty="0">
                 <a:solidFill>
@@ -11919,7 +11622,7 @@
           <a:bodyPr wrap="square" lIns="0" tIns="0" rIns="0" bIns="0" rtlCol="0" anchor="ctr"/>
           <a:lstStyle/>
           <a:p>
-            <a:pPr algn="ctr" indent="0" marL="0">
+            <a:pPr marL="0" indent="0" algn="ctr">
               <a:buNone/>
             </a:pPr>
             <a:r>
@@ -11958,7 +11661,7 @@
           <a:bodyPr wrap="square" lIns="0" tIns="0" rIns="0" bIns="0" rtlCol="0" anchor="ctr"/>
           <a:lstStyle/>
           <a:p>
-            <a:pPr indent="0" marL="0">
+            <a:pPr marL="0" indent="0">
               <a:buNone/>
             </a:pPr>
             <a:r>
@@ -11972,9 +11675,6 @@
               </a:rPr>
               <a:t>Полагодити  </a:t>
             </a:r>
-            <a:pPr indent="0" marL="0">
-              <a:buNone/>
-            </a:pPr>
             <a:r>
               <a:rPr lang="en-US" sz="1200" dirty="0">
                 <a:solidFill>
@@ -12031,7 +11731,7 @@
           <a:bodyPr wrap="square" lIns="0" tIns="0" rIns="0" bIns="0" rtlCol="0" anchor="ctr"/>
           <a:lstStyle/>
           <a:p>
-            <a:pPr algn="ctr" indent="0" marL="0">
+            <a:pPr marL="0" indent="0" algn="ctr">
               <a:buNone/>
             </a:pPr>
             <a:r>
@@ -12070,7 +11770,7 @@
           <a:bodyPr wrap="square" lIns="0" tIns="0" rIns="0" bIns="0" rtlCol="0" anchor="ctr"/>
           <a:lstStyle/>
           <a:p>
-            <a:pPr indent="0" marL="0">
+            <a:pPr marL="0" indent="0">
               <a:buNone/>
             </a:pPr>
             <a:r>
@@ -12084,9 +11784,6 @@
               </a:rPr>
               <a:t>Увімкнути protection  </a:t>
             </a:r>
-            <a:pPr indent="0" marL="0">
-              <a:buNone/>
-            </a:pPr>
             <a:r>
               <a:rPr lang="en-US" sz="1200" dirty="0">
                 <a:solidFill>
@@ -12143,7 +11840,7 @@
           <a:bodyPr wrap="square" lIns="0" tIns="0" rIns="0" bIns="0" rtlCol="0" anchor="ctr"/>
           <a:lstStyle/>
           <a:p>
-            <a:pPr algn="ctr" indent="0" marL="0">
+            <a:pPr marL="0" indent="0" algn="ctr">
               <a:buNone/>
             </a:pPr>
             <a:r>
@@ -12182,7 +11879,7 @@
           <a:bodyPr wrap="square" lIns="0" tIns="0" rIns="0" bIns="0" rtlCol="0" anchor="ctr"/>
           <a:lstStyle/>
           <a:p>
-            <a:pPr indent="0" marL="0">
+            <a:pPr marL="0" indent="0">
               <a:buNone/>
             </a:pPr>
             <a:r>
@@ -12196,9 +11893,6 @@
               </a:rPr>
               <a:t>Canary-план · опційно  </a:t>
             </a:r>
-            <a:pPr indent="0" marL="0">
-              <a:buNone/>
-            </a:pPr>
             <a:r>
               <a:rPr lang="en-US" sz="1200" dirty="0">
                 <a:solidFill>
@@ -12234,7 +11928,7 @@
           </a:prstGeom>
           <a:extLst>
             <a:ext uri="{C572A759-6A51-4108-AA02-DFA0A04FC94B}">
-              <ma14:wrappingTextBoxFlag xmlns:ma14="http://schemas.microsoft.com/office/mac/drawingml/2011/main" val="0"/>
+              <ma14:wrappingTextBoxFlag xmlns:ma14="http://schemas.microsoft.com/office/mac/drawingml/2011/main" xmlns="" val="0"/>
             </a:ext>
           </a:extLst>
         </p:spPr>
@@ -12255,7 +11949,7 @@
           <a:p>
             <a:pPr algn="l"/>
             <a:fld id="{F7021451-1387-4CA6-816F-3879F97B5CBC}" type="slidenum">
-              <a:rPr b="0" lang="en-US"/>
+              <a:rPr lang="en-US" b="0"/>
               <a:t>19</a:t>
             </a:fld>
             <a:endParaRPr lang="en-US"/>
@@ -12330,7 +12024,7 @@
           <a:bodyPr wrap="square" lIns="0" tIns="0" rIns="0" bIns="0" rtlCol="0" anchor="ctr"/>
           <a:lstStyle/>
           <a:p>
-            <a:pPr indent="0" marL="0">
+            <a:pPr marL="0" indent="0">
               <a:buNone/>
             </a:pPr>
             <a:r>
@@ -12369,7 +12063,7 @@
           <a:bodyPr wrap="square" lIns="0" tIns="0" rIns="0" bIns="0" rtlCol="0" anchor="t"/>
           <a:lstStyle/>
           <a:p>
-            <a:pPr indent="0" marL="0">
+            <a:pPr marL="0" indent="0">
               <a:lnSpc>
                 <a:spcPct val="100000"/>
               </a:lnSpc>
@@ -12438,11 +12132,11 @@
           <a:bodyPr wrap="square" lIns="0" tIns="0" rIns="0" bIns="0" rtlCol="0" anchor="ctr"/>
           <a:lstStyle/>
           <a:p>
-            <a:pPr algn="ctr" indent="0" marL="0">
-              <a:buNone/>
-            </a:pPr>
-            <a:r>
-              <a:rPr lang="en-US" sz="900" b="1" spc="100" kern="0" dirty="0">
+            <a:pPr marL="0" indent="0" algn="ctr">
+              <a:buNone/>
+            </a:pPr>
+            <a:r>
+              <a:rPr lang="en-US" sz="900" b="1" kern="0" spc="100" dirty="0">
                 <a:solidFill>
                   <a:srgbClr val="5A05F4"/>
                 </a:solidFill>
@@ -12458,14 +12152,14 @@
       </p:sp>
       <p:pic>
         <p:nvPicPr>
-          <p:cNvPr id="7" name="Image 0" descr="preencoded.png">    </p:cNvPr>
+          <p:cNvPr id="7" name="Image 0" descr="preencoded.png"/>
           <p:cNvPicPr>
             <a:picLocks noChangeAspect="1"/>
           </p:cNvPicPr>
           <p:nvPr/>
         </p:nvPicPr>
         <p:blipFill>
-          <a:blip r:embed="rId1"/>
+          <a:blip r:embed="rId3"/>
           <a:stretch>
             <a:fillRect/>
           </a:stretch>
@@ -12543,7 +12237,7 @@
           <a:bodyPr wrap="square" lIns="0" tIns="0" rIns="0" bIns="0" rtlCol="0" anchor="ctr"/>
           <a:lstStyle/>
           <a:p>
-            <a:pPr algn="ctr" indent="0" marL="0">
+            <a:pPr marL="0" indent="0" algn="ctr">
               <a:buNone/>
             </a:pPr>
             <a:r>
@@ -12582,7 +12276,7 @@
           <a:bodyPr wrap="square" lIns="0" tIns="0" rIns="0" bIns="0" rtlCol="0" anchor="ctr"/>
           <a:lstStyle/>
           <a:p>
-            <a:pPr indent="0" marL="0">
+            <a:pPr marL="0" indent="0">
               <a:buNone/>
             </a:pPr>
             <a:r>
@@ -12621,7 +12315,7 @@
           <a:bodyPr wrap="square" lIns="0" tIns="0" rIns="0" bIns="0" rtlCol="0" anchor="t"/>
           <a:lstStyle/>
           <a:p>
-            <a:pPr indent="0" marL="0">
+            <a:pPr marL="0" indent="0">
               <a:lnSpc>
                 <a:spcPct val="108000"/>
               </a:lnSpc>
@@ -12705,7 +12399,7 @@
           <a:bodyPr wrap="square" lIns="0" tIns="0" rIns="0" bIns="0" rtlCol="0" anchor="ctr"/>
           <a:lstStyle/>
           <a:p>
-            <a:pPr algn="ctr" indent="0" marL="0">
+            <a:pPr marL="0" indent="0" algn="ctr">
               <a:buNone/>
             </a:pPr>
             <a:r>
@@ -12744,7 +12438,7 @@
           <a:bodyPr wrap="square" lIns="0" tIns="0" rIns="0" bIns="0" rtlCol="0" anchor="ctr"/>
           <a:lstStyle/>
           <a:p>
-            <a:pPr indent="0" marL="0">
+            <a:pPr marL="0" indent="0">
               <a:buNone/>
             </a:pPr>
             <a:r>
@@ -12783,7 +12477,7 @@
           <a:bodyPr wrap="square" lIns="0" tIns="0" rIns="0" bIns="0" rtlCol="0" anchor="t"/>
           <a:lstStyle/>
           <a:p>
-            <a:pPr indent="0" marL="0">
+            <a:pPr marL="0" indent="0">
               <a:lnSpc>
                 <a:spcPct val="108000"/>
               </a:lnSpc>
@@ -12867,7 +12561,7 @@
           <a:bodyPr wrap="square" lIns="0" tIns="0" rIns="0" bIns="0" rtlCol="0" anchor="ctr"/>
           <a:lstStyle/>
           <a:p>
-            <a:pPr algn="ctr" indent="0" marL="0">
+            <a:pPr marL="0" indent="0" algn="ctr">
               <a:buNone/>
             </a:pPr>
             <a:r>
@@ -12906,7 +12600,7 @@
           <a:bodyPr wrap="square" lIns="0" tIns="0" rIns="0" bIns="0" rtlCol="0" anchor="ctr"/>
           <a:lstStyle/>
           <a:p>
-            <a:pPr indent="0" marL="0">
+            <a:pPr marL="0" indent="0">
               <a:buNone/>
             </a:pPr>
             <a:r>
@@ -12945,7 +12639,7 @@
           <a:bodyPr wrap="square" lIns="0" tIns="0" rIns="0" bIns="0" rtlCol="0" anchor="t"/>
           <a:lstStyle/>
           <a:p>
-            <a:pPr indent="0" marL="0">
+            <a:pPr marL="0" indent="0">
               <a:lnSpc>
                 <a:spcPct val="108000"/>
               </a:lnSpc>
@@ -13029,7 +12723,7 @@
           <a:bodyPr wrap="square" lIns="0" tIns="0" rIns="0" bIns="0" rtlCol="0" anchor="ctr"/>
           <a:lstStyle/>
           <a:p>
-            <a:pPr algn="ctr" indent="0" marL="0">
+            <a:pPr marL="0" indent="0" algn="ctr">
               <a:buNone/>
             </a:pPr>
             <a:r>
@@ -13068,7 +12762,7 @@
           <a:bodyPr wrap="square" lIns="0" tIns="0" rIns="0" bIns="0" rtlCol="0" anchor="ctr"/>
           <a:lstStyle/>
           <a:p>
-            <a:pPr indent="0" marL="0">
+            <a:pPr marL="0" indent="0">
               <a:buNone/>
             </a:pPr>
             <a:r>
@@ -13107,7 +12801,7 @@
           <a:bodyPr wrap="square" lIns="0" tIns="0" rIns="0" bIns="0" rtlCol="0" anchor="t"/>
           <a:lstStyle/>
           <a:p>
-            <a:pPr indent="0" marL="0">
+            <a:pPr marL="0" indent="0">
               <a:lnSpc>
                 <a:spcPct val="108000"/>
               </a:lnSpc>
@@ -13191,7 +12885,7 @@
           <a:bodyPr wrap="square" lIns="0" tIns="0" rIns="0" bIns="0" rtlCol="0" anchor="ctr"/>
           <a:lstStyle/>
           <a:p>
-            <a:pPr algn="ctr" indent="0" marL="0">
+            <a:pPr marL="0" indent="0" algn="ctr">
               <a:buNone/>
             </a:pPr>
             <a:r>
@@ -13230,7 +12924,7 @@
           <a:bodyPr wrap="square" lIns="0" tIns="0" rIns="0" bIns="0" rtlCol="0" anchor="ctr"/>
           <a:lstStyle/>
           <a:p>
-            <a:pPr indent="0" marL="0">
+            <a:pPr marL="0" indent="0">
               <a:buNone/>
             </a:pPr>
             <a:r>
@@ -13269,7 +12963,7 @@
           <a:bodyPr wrap="square" lIns="0" tIns="0" rIns="0" bIns="0" rtlCol="0" anchor="t"/>
           <a:lstStyle/>
           <a:p>
-            <a:pPr indent="0" marL="0">
+            <a:pPr marL="0" indent="0">
               <a:lnSpc>
                 <a:spcPct val="108000"/>
               </a:lnSpc>
@@ -13292,7 +12986,7 @@
       </p:sp>
       <p:sp>
         <p:nvSpPr>
-          <p:cNvPr id="25" name="Slide Number Placeholder 0"/>
+          <p:cNvPr id="33" name="Slide Number Placeholder 0"/>
           <p:cNvSpPr>
             <a:spLocks noGrp="1"/>
           </p:cNvSpPr>
@@ -13310,7 +13004,7 @@
           </a:prstGeom>
           <a:extLst>
             <a:ext uri="{C572A759-6A51-4108-AA02-DFA0A04FC94B}">
-              <ma14:wrappingTextBoxFlag xmlns:ma14="http://schemas.microsoft.com/office/mac/drawingml/2011/main" val="0"/>
+              <ma14:wrappingTextBoxFlag xmlns:ma14="http://schemas.microsoft.com/office/mac/drawingml/2011/main" xmlns="" val="0"/>
             </a:ext>
           </a:extLst>
         </p:spPr>
@@ -13331,7 +13025,7 @@
           <a:p>
             <a:pPr algn="l"/>
             <a:fld id="{F7021451-1387-4CA6-816F-3879F97B5CBC}" type="slidenum">
-              <a:rPr b="0" lang="en-US"/>
+              <a:rPr lang="en-US" b="0"/>
               <a:t>2</a:t>
             </a:fld>
             <a:endParaRPr lang="en-US"/>
@@ -13384,11 +13078,11 @@
           <a:bodyPr wrap="square" lIns="0" tIns="0" rIns="0" bIns="0" rtlCol="0" anchor="ctr"/>
           <a:lstStyle/>
           <a:p>
-            <a:pPr indent="0" marL="0">
-              <a:buNone/>
-            </a:pPr>
-            <a:r>
-              <a:rPr lang="en-US" sz="1200" b="1" spc="400" kern="0" dirty="0">
+            <a:pPr marL="0" indent="0">
+              <a:buNone/>
+            </a:pPr>
+            <a:r>
+              <a:rPr lang="en-US" sz="1200" b="1" kern="0" spc="400" dirty="0">
                 <a:solidFill>
                   <a:srgbClr val="FFFFFF"/>
                 </a:solidFill>
@@ -13423,7 +13117,7 @@
           <a:bodyPr wrap="square" lIns="0" tIns="0" rIns="0" bIns="0" rtlCol="0" anchor="ctr"/>
           <a:lstStyle/>
           <a:p>
-            <a:pPr indent="0" marL="0">
+            <a:pPr marL="0" indent="0">
               <a:buNone/>
             </a:pPr>
             <a:r>
@@ -13462,7 +13156,7 @@
           <a:bodyPr wrap="square" lIns="0" tIns="0" rIns="0" bIns="0" rtlCol="0" anchor="t"/>
           <a:lstStyle/>
           <a:p>
-            <a:pPr indent="0" marL="0">
+            <a:pPr marL="0" indent="0">
               <a:buNone/>
             </a:pPr>
             <a:r>
@@ -13548,7 +13242,7 @@
           <a:bodyPr wrap="square" lIns="0" tIns="0" rIns="0" bIns="0" rtlCol="0" anchor="ctr"/>
           <a:lstStyle/>
           <a:p>
-            <a:pPr indent="0" marL="0">
+            <a:pPr marL="0" indent="0">
               <a:buNone/>
             </a:pPr>
             <a:r>
@@ -13614,11 +13308,11 @@
           <a:bodyPr wrap="square" lIns="0" tIns="0" rIns="0" bIns="0" rtlCol="0" anchor="ctr"/>
           <a:lstStyle/>
           <a:p>
-            <a:pPr algn="ctr" indent="0" marL="0">
-              <a:buNone/>
-            </a:pPr>
-            <a:r>
-              <a:rPr lang="en-US" sz="900" b="1" spc="100" kern="0" dirty="0">
+            <a:pPr marL="0" indent="0" algn="ctr">
+              <a:buNone/>
+            </a:pPr>
+            <a:r>
+              <a:rPr lang="en-US" sz="900" b="1" kern="0" spc="100" dirty="0">
                 <a:solidFill>
                   <a:srgbClr val="1A4FBF"/>
                 </a:solidFill>
@@ -13634,14 +13328,14 @@
       </p:sp>
       <p:pic>
         <p:nvPicPr>
-          <p:cNvPr id="6" name="Image 0" descr="preencoded.png">    </p:cNvPr>
+          <p:cNvPr id="6" name="Image 0" descr="preencoded.png"/>
           <p:cNvPicPr>
             <a:picLocks noChangeAspect="1"/>
           </p:cNvPicPr>
           <p:nvPr/>
         </p:nvPicPr>
         <p:blipFill>
-          <a:blip r:embed="rId1"/>
+          <a:blip r:embed="rId3"/>
           <a:stretch>
             <a:fillRect/>
           </a:stretch>
@@ -13699,7 +13393,7 @@
           <a:bodyPr wrap="square" lIns="0" tIns="0" rIns="0" bIns="0" rtlCol="0" anchor="ctr"/>
           <a:lstStyle/>
           <a:p>
-            <a:pPr indent="0" marL="0">
+            <a:pPr marL="0" indent="0">
               <a:buNone/>
             </a:pPr>
             <a:r>
@@ -13738,7 +13432,7 @@
           <a:bodyPr wrap="square" lIns="0" tIns="0" rIns="0" bIns="0" rtlCol="0" anchor="t"/>
           <a:lstStyle/>
           <a:p>
-            <a:pPr indent="0" marL="0">
+            <a:pPr marL="0" indent="0">
               <a:lnSpc>
                 <a:spcPct val="108000"/>
               </a:lnSpc>
@@ -13802,7 +13496,7 @@
           <a:bodyPr wrap="square" lIns="0" tIns="0" rIns="0" bIns="0" rtlCol="0" anchor="ctr"/>
           <a:lstStyle/>
           <a:p>
-            <a:pPr indent="0" marL="0">
+            <a:pPr marL="0" indent="0">
               <a:buNone/>
             </a:pPr>
             <a:r>
@@ -13841,7 +13535,7 @@
           <a:bodyPr wrap="square" lIns="0" tIns="0" rIns="0" bIns="0" rtlCol="0" anchor="t"/>
           <a:lstStyle/>
           <a:p>
-            <a:pPr indent="0" marL="0">
+            <a:pPr marL="0" indent="0">
               <a:lnSpc>
                 <a:spcPct val="108000"/>
               </a:lnSpc>
@@ -13905,7 +13599,7 @@
           <a:bodyPr wrap="square" lIns="0" tIns="0" rIns="0" bIns="0" rtlCol="0" anchor="ctr"/>
           <a:lstStyle/>
           <a:p>
-            <a:pPr indent="0" marL="0">
+            <a:pPr marL="0" indent="0">
               <a:buNone/>
             </a:pPr>
             <a:r>
@@ -13944,7 +13638,7 @@
           <a:bodyPr wrap="square" lIns="0" tIns="0" rIns="0" bIns="0" rtlCol="0" anchor="t"/>
           <a:lstStyle/>
           <a:p>
-            <a:pPr indent="0" marL="0">
+            <a:pPr marL="0" indent="0">
               <a:lnSpc>
                 <a:spcPct val="108000"/>
               </a:lnSpc>
@@ -14013,7 +13707,7 @@
           <a:bodyPr wrap="square" lIns="0" tIns="0" rIns="0" bIns="0" rtlCol="0" anchor="ctr"/>
           <a:lstStyle/>
           <a:p>
-            <a:pPr indent="0" marL="0">
+            <a:pPr marL="0" indent="0">
               <a:lnSpc>
                 <a:spcPct val="112000"/>
               </a:lnSpc>
@@ -14054,7 +13748,7 @@
           </a:prstGeom>
           <a:extLst>
             <a:ext uri="{C572A759-6A51-4108-AA02-DFA0A04FC94B}">
-              <ma14:wrappingTextBoxFlag xmlns:ma14="http://schemas.microsoft.com/office/mac/drawingml/2011/main" val="0"/>
+              <ma14:wrappingTextBoxFlag xmlns:ma14="http://schemas.microsoft.com/office/mac/drawingml/2011/main" xmlns="" val="0"/>
             </a:ext>
           </a:extLst>
         </p:spPr>
@@ -14075,7 +13769,7 @@
           <a:p>
             <a:pPr algn="l"/>
             <a:fld id="{F7021451-1387-4CA6-816F-3879F97B5CBC}" type="slidenum">
-              <a:rPr b="0" lang="en-US"/>
+              <a:rPr lang="en-US" b="0"/>
               <a:t>21</a:t>
             </a:fld>
             <a:endParaRPr lang="en-US"/>
@@ -14150,7 +13844,7 @@
           <a:bodyPr wrap="square" lIns="0" tIns="0" rIns="0" bIns="0" rtlCol="0" anchor="ctr"/>
           <a:lstStyle/>
           <a:p>
-            <a:pPr indent="0" marL="0">
+            <a:pPr marL="0" indent="0">
               <a:buNone/>
             </a:pPr>
             <a:r>
@@ -14216,11 +13910,11 @@
           <a:bodyPr wrap="square" lIns="0" tIns="0" rIns="0" bIns="0" rtlCol="0" anchor="ctr"/>
           <a:lstStyle/>
           <a:p>
-            <a:pPr algn="ctr" indent="0" marL="0">
-              <a:buNone/>
-            </a:pPr>
-            <a:r>
-              <a:rPr lang="en-US" sz="900" b="1" spc="100" kern="0" dirty="0">
+            <a:pPr marL="0" indent="0" algn="ctr">
+              <a:buNone/>
+            </a:pPr>
+            <a:r>
+              <a:rPr lang="en-US" sz="900" b="1" kern="0" spc="100" dirty="0">
                 <a:solidFill>
                   <a:srgbClr val="1A4FBF"/>
                 </a:solidFill>
@@ -14236,14 +13930,14 @@
       </p:sp>
       <p:pic>
         <p:nvPicPr>
-          <p:cNvPr id="6" name="Image 0" descr="preencoded.png">    </p:cNvPr>
+          <p:cNvPr id="6" name="Image 0" descr="preencoded.png"/>
           <p:cNvPicPr>
             <a:picLocks noChangeAspect="1"/>
           </p:cNvPicPr>
           <p:nvPr/>
         </p:nvPicPr>
         <p:blipFill>
-          <a:blip r:embed="rId1"/>
+          <a:blip r:embed="rId3"/>
           <a:stretch>
             <a:fillRect/>
           </a:stretch>
@@ -14373,7 +14067,7 @@
           <a:bodyPr wrap="square" lIns="0" tIns="0" rIns="0" bIns="0" rtlCol="0" anchor="ctr"/>
           <a:lstStyle/>
           <a:p>
-            <a:pPr indent="0" marL="0">
+            <a:pPr marL="0" indent="0">
               <a:buNone/>
             </a:pPr>
             <a:r>
@@ -14479,7 +14173,7 @@
           <a:bodyPr wrap="square" lIns="0" tIns="0" rIns="0" bIns="0" rtlCol="0" anchor="ctr"/>
           <a:lstStyle/>
           <a:p>
-            <a:pPr indent="0" marL="0">
+            <a:pPr marL="0" indent="0">
               <a:buNone/>
             </a:pPr>
             <a:r>
@@ -14585,7 +14279,7 @@
           <a:bodyPr wrap="square" lIns="0" tIns="0" rIns="0" bIns="0" rtlCol="0" anchor="ctr"/>
           <a:lstStyle/>
           <a:p>
-            <a:pPr indent="0" marL="0">
+            <a:pPr marL="0" indent="0">
               <a:buNone/>
             </a:pPr>
             <a:r>
@@ -14691,7 +14385,7 @@
           <a:bodyPr wrap="square" lIns="0" tIns="0" rIns="0" bIns="0" rtlCol="0" anchor="ctr"/>
           <a:lstStyle/>
           <a:p>
-            <a:pPr indent="0" marL="0">
+            <a:pPr marL="0" indent="0">
               <a:buNone/>
             </a:pPr>
             <a:r>
@@ -14730,7 +14424,7 @@
           <a:bodyPr wrap="square" lIns="0" tIns="0" rIns="0" bIns="0" rtlCol="0" anchor="ctr"/>
           <a:lstStyle/>
           <a:p>
-            <a:pPr indent="0" marL="0">
+            <a:pPr marL="0" indent="0">
               <a:buNone/>
             </a:pPr>
             <a:r>
@@ -14768,7 +14462,7 @@
           </a:prstGeom>
           <a:extLst>
             <a:ext uri="{C572A759-6A51-4108-AA02-DFA0A04FC94B}">
-              <ma14:wrappingTextBoxFlag xmlns:ma14="http://schemas.microsoft.com/office/mac/drawingml/2011/main" val="0"/>
+              <ma14:wrappingTextBoxFlag xmlns:ma14="http://schemas.microsoft.com/office/mac/drawingml/2011/main" xmlns="" val="0"/>
             </a:ext>
           </a:extLst>
         </p:spPr>
@@ -14789,7 +14483,7 @@
           <a:p>
             <a:pPr algn="l"/>
             <a:fld id="{F7021451-1387-4CA6-816F-3879F97B5CBC}" type="slidenum">
-              <a:rPr b="0" lang="en-US"/>
+              <a:rPr lang="en-US" b="0"/>
               <a:t>22</a:t>
             </a:fld>
             <a:endParaRPr lang="en-US"/>
@@ -14864,7 +14558,7 @@
           <a:bodyPr wrap="square" lIns="0" tIns="0" rIns="0" bIns="0" rtlCol="0" anchor="ctr"/>
           <a:lstStyle/>
           <a:p>
-            <a:pPr indent="0" marL="0">
+            <a:pPr marL="0" indent="0">
               <a:buNone/>
             </a:pPr>
             <a:r>
@@ -14930,11 +14624,11 @@
           <a:bodyPr wrap="square" lIns="0" tIns="0" rIns="0" bIns="0" rtlCol="0" anchor="ctr"/>
           <a:lstStyle/>
           <a:p>
-            <a:pPr algn="ctr" indent="0" marL="0">
-              <a:buNone/>
-            </a:pPr>
-            <a:r>
-              <a:rPr lang="en-US" sz="900" b="1" spc="100" kern="0" dirty="0">
+            <a:pPr marL="0" indent="0" algn="ctr">
+              <a:buNone/>
+            </a:pPr>
+            <a:r>
+              <a:rPr lang="en-US" sz="900" b="1" kern="0" spc="100" dirty="0">
                 <a:solidFill>
                   <a:srgbClr val="1A4FBF"/>
                 </a:solidFill>
@@ -14950,14 +14644,14 @@
       </p:sp>
       <p:pic>
         <p:nvPicPr>
-          <p:cNvPr id="6" name="Image 0" descr="preencoded.png">    </p:cNvPr>
+          <p:cNvPr id="6" name="Image 0" descr="preencoded.png"/>
           <p:cNvPicPr>
             <a:picLocks noChangeAspect="1"/>
           </p:cNvPicPr>
           <p:nvPr/>
         </p:nvPicPr>
         <p:blipFill>
-          <a:blip r:embed="rId1"/>
+          <a:blip r:embed="rId3"/>
           <a:stretch>
             <a:fillRect/>
           </a:stretch>
@@ -15085,7 +14779,7 @@
           <a:bodyPr wrap="square" lIns="0" tIns="0" rIns="0" bIns="0" rtlCol="0" anchor="ctr"/>
           <a:lstStyle/>
           <a:p>
-            <a:pPr indent="0" marL="0">
+            <a:pPr marL="0" indent="0">
               <a:buNone/>
             </a:pPr>
             <a:r>
@@ -15099,9 +14793,6 @@
               </a:rPr>
               <a:t>Мерж повз червоний гейт   </a:t>
             </a:r>
-            <a:pPr indent="0" marL="0">
-              <a:buNone/>
-            </a:pPr>
             <a:r>
               <a:rPr lang="en-US" sz="1150" dirty="0">
                 <a:solidFill>
@@ -15230,7 +14921,7 @@
           <a:bodyPr wrap="square" lIns="0" tIns="0" rIns="0" bIns="0" rtlCol="0" anchor="ctr"/>
           <a:lstStyle/>
           <a:p>
-            <a:pPr indent="0" marL="0">
+            <a:pPr marL="0" indent="0">
               <a:buNone/>
             </a:pPr>
             <a:r>
@@ -15244,9 +14935,6 @@
               </a:rPr>
               <a:t>Protection на неіснуючий чек   </a:t>
             </a:r>
-            <a:pPr indent="0" marL="0">
-              <a:buNone/>
-            </a:pPr>
             <a:r>
               <a:rPr lang="en-US" sz="1150" dirty="0">
                 <a:solidFill>
@@ -15375,7 +15063,7 @@
           <a:bodyPr wrap="square" lIns="0" tIns="0" rIns="0" bIns="0" rtlCol="0" anchor="ctr"/>
           <a:lstStyle/>
           <a:p>
-            <a:pPr indent="0" marL="0">
+            <a:pPr marL="0" indent="0">
               <a:buNone/>
             </a:pPr>
             <a:r>
@@ -15389,9 +15077,6 @@
               </a:rPr>
               <a:t>Гейт, що триває пів години   </a:t>
             </a:r>
-            <a:pPr indent="0" marL="0">
-              <a:buNone/>
-            </a:pPr>
             <a:r>
               <a:rPr lang="en-US" sz="1150" dirty="0">
                 <a:solidFill>
@@ -15520,7 +15205,7 @@
           <a:bodyPr wrap="square" lIns="0" tIns="0" rIns="0" bIns="0" rtlCol="0" anchor="ctr"/>
           <a:lstStyle/>
           <a:p>
-            <a:pPr indent="0" marL="0">
+            <a:pPr marL="0" indent="0">
               <a:buNone/>
             </a:pPr>
             <a:r>
@@ -15534,9 +15219,6 @@
               </a:rPr>
               <a:t>Feature flag без плану прибирання   </a:t>
             </a:r>
-            <a:pPr indent="0" marL="0">
-              <a:buNone/>
-            </a:pPr>
             <a:r>
               <a:rPr lang="en-US" sz="1150" dirty="0">
                 <a:solidFill>
@@ -15665,7 +15347,7 @@
           <a:bodyPr wrap="square" lIns="0" tIns="0" rIns="0" bIns="0" rtlCol="0" anchor="ctr"/>
           <a:lstStyle/>
           <a:p>
-            <a:pPr indent="0" marL="0">
+            <a:pPr marL="0" indent="0">
               <a:buNone/>
             </a:pPr>
             <a:r>
@@ -15679,9 +15361,6 @@
               </a:rPr>
               <a:t>Rollback-критерії під час інциденту   </a:t>
             </a:r>
-            <a:pPr indent="0" marL="0">
-              <a:buNone/>
-            </a:pPr>
             <a:r>
               <a:rPr lang="en-US" sz="1150" dirty="0">
                 <a:solidFill>
@@ -15699,7 +15378,7 @@
       </p:sp>
       <p:sp>
         <p:nvSpPr>
-          <p:cNvPr id="25" name="Slide Number Placeholder 0"/>
+          <p:cNvPr id="32" name="Slide Number Placeholder 0"/>
           <p:cNvSpPr>
             <a:spLocks noGrp="1"/>
           </p:cNvSpPr>
@@ -15717,7 +15396,7 @@
           </a:prstGeom>
           <a:extLst>
             <a:ext uri="{C572A759-6A51-4108-AA02-DFA0A04FC94B}">
-              <ma14:wrappingTextBoxFlag xmlns:ma14="http://schemas.microsoft.com/office/mac/drawingml/2011/main" val="0"/>
+              <ma14:wrappingTextBoxFlag xmlns:ma14="http://schemas.microsoft.com/office/mac/drawingml/2011/main" xmlns="" val="0"/>
             </a:ext>
           </a:extLst>
         </p:spPr>
@@ -15738,7 +15417,7 @@
           <a:p>
             <a:pPr algn="l"/>
             <a:fld id="{F7021451-1387-4CA6-816F-3879F97B5CBC}" type="slidenum">
-              <a:rPr b="0" lang="en-US"/>
+              <a:rPr lang="en-US" b="0"/>
               <a:t>23</a:t>
             </a:fld>
             <a:endParaRPr lang="en-US"/>
@@ -15813,7 +15492,7 @@
           <a:bodyPr wrap="square" lIns="0" tIns="0" rIns="0" bIns="0" rtlCol="0" anchor="ctr"/>
           <a:lstStyle/>
           <a:p>
-            <a:pPr indent="0" marL="0">
+            <a:pPr marL="0" indent="0">
               <a:buNone/>
             </a:pPr>
             <a:r>
@@ -15874,11 +15553,11 @@
           <a:bodyPr wrap="square" lIns="0" tIns="0" rIns="0" bIns="0" rtlCol="0" anchor="ctr"/>
           <a:lstStyle/>
           <a:p>
-            <a:pPr algn="ctr" indent="0" marL="0">
-              <a:buNone/>
-            </a:pPr>
-            <a:r>
-              <a:rPr lang="en-US" sz="900" b="1" spc="100" kern="0" dirty="0">
+            <a:pPr marL="0" indent="0" algn="ctr">
+              <a:buNone/>
+            </a:pPr>
+            <a:r>
+              <a:rPr lang="en-US" sz="900" b="1" kern="0" spc="100" dirty="0">
                 <a:solidFill>
                   <a:srgbClr val="FFFFFF"/>
                 </a:solidFill>
@@ -15894,14 +15573,14 @@
       </p:sp>
       <p:pic>
         <p:nvPicPr>
-          <p:cNvPr id="6" name="Image 0" descr="preencoded.png">    </p:cNvPr>
+          <p:cNvPr id="6" name="Image 0" descr="preencoded.png"/>
           <p:cNvPicPr>
             <a:picLocks noChangeAspect="1"/>
           </p:cNvPicPr>
           <p:nvPr/>
         </p:nvPicPr>
         <p:blipFill>
-          <a:blip r:embed="rId1"/>
+          <a:blip r:embed="rId3"/>
           <a:stretch>
             <a:fillRect/>
           </a:stretch>
@@ -15959,7 +15638,7 @@
           <a:bodyPr wrap="square" lIns="0" tIns="0" rIns="0" bIns="0" rtlCol="0" anchor="ctr"/>
           <a:lstStyle/>
           <a:p>
-            <a:pPr indent="0" marL="0">
+            <a:pPr marL="0" indent="0">
               <a:buNone/>
             </a:pPr>
             <a:r>
@@ -15998,7 +15677,7 @@
           <a:bodyPr wrap="square" lIns="0" tIns="0" rIns="0" bIns="0" rtlCol="0" anchor="t"/>
           <a:lstStyle/>
           <a:p>
-            <a:pPr indent="0" marL="0">
+            <a:pPr marL="0" indent="0">
               <a:lnSpc>
                 <a:spcPct val="108000"/>
               </a:lnSpc>
@@ -16018,7 +15697,7 @@
             <a:endParaRPr lang="en-US" sz="1200" dirty="0"/>
           </a:p>
           <a:p>
-            <a:pPr indent="0" marL="0">
+            <a:pPr marL="0" indent="0">
               <a:lnSpc>
                 <a:spcPct val="108000"/>
               </a:lnSpc>
@@ -16027,7 +15706,7 @@
             <a:endParaRPr lang="en-US" sz="1200" dirty="0"/>
           </a:p>
           <a:p>
-            <a:pPr indent="0" marL="0">
+            <a:pPr marL="0" indent="0">
               <a:lnSpc>
                 <a:spcPct val="108000"/>
               </a:lnSpc>
@@ -16047,7 +15726,7 @@
             <a:endParaRPr lang="en-US" sz="1200" dirty="0"/>
           </a:p>
           <a:p>
-            <a:pPr indent="0" marL="0">
+            <a:pPr marL="0" indent="0">
               <a:lnSpc>
                 <a:spcPct val="108000"/>
               </a:lnSpc>
@@ -16056,7 +15735,7 @@
             <a:endParaRPr lang="en-US" sz="1200" dirty="0"/>
           </a:p>
           <a:p>
-            <a:pPr indent="0" marL="0">
+            <a:pPr marL="0" indent="0">
               <a:lnSpc>
                 <a:spcPct val="108000"/>
               </a:lnSpc>
@@ -16120,7 +15799,7 @@
           <a:bodyPr wrap="square" lIns="0" tIns="0" rIns="0" bIns="0" rtlCol="0" anchor="ctr"/>
           <a:lstStyle/>
           <a:p>
-            <a:pPr indent="0" marL="0">
+            <a:pPr marL="0" indent="0">
               <a:buNone/>
             </a:pPr>
             <a:r>
@@ -16159,7 +15838,7 @@
           <a:bodyPr wrap="square" lIns="0" tIns="0" rIns="0" bIns="0" rtlCol="0" anchor="t"/>
           <a:lstStyle/>
           <a:p>
-            <a:pPr indent="0" marL="0">
+            <a:pPr marL="0" indent="0">
               <a:lnSpc>
                 <a:spcPct val="108000"/>
               </a:lnSpc>
@@ -16228,7 +15907,7 @@
           <a:bodyPr wrap="square" lIns="0" tIns="0" rIns="0" bIns="0" rtlCol="0" anchor="ctr"/>
           <a:lstStyle/>
           <a:p>
-            <a:pPr indent="0" marL="0">
+            <a:pPr marL="0" indent="0">
               <a:buNone/>
             </a:pPr>
             <a:r>
@@ -16267,7 +15946,7 @@
           <a:bodyPr wrap="square" lIns="0" tIns="0" rIns="0" bIns="0" rtlCol="0" anchor="t"/>
           <a:lstStyle/>
           <a:p>
-            <a:pPr indent="0" marL="0">
+            <a:pPr marL="0" indent="0">
               <a:buNone/>
             </a:pPr>
             <a:r>
@@ -16305,7 +15984,7 @@
           </a:prstGeom>
           <a:extLst>
             <a:ext uri="{C572A759-6A51-4108-AA02-DFA0A04FC94B}">
-              <ma14:wrappingTextBoxFlag xmlns:ma14="http://schemas.microsoft.com/office/mac/drawingml/2011/main" val="0"/>
+              <ma14:wrappingTextBoxFlag xmlns:ma14="http://schemas.microsoft.com/office/mac/drawingml/2011/main" xmlns="" val="0"/>
             </a:ext>
           </a:extLst>
         </p:spPr>
@@ -16326,7 +16005,7 @@
           <a:p>
             <a:pPr algn="l"/>
             <a:fld id="{F7021451-1387-4CA6-816F-3879F97B5CBC}" type="slidenum">
-              <a:rPr b="0" lang="en-US"/>
+              <a:rPr lang="en-US" b="0"/>
               <a:t>24</a:t>
             </a:fld>
             <a:endParaRPr lang="en-US"/>
@@ -16379,11 +16058,11 @@
           <a:bodyPr wrap="square" lIns="0" tIns="0" rIns="0" bIns="0" rtlCol="0" anchor="ctr"/>
           <a:lstStyle/>
           <a:p>
-            <a:pPr indent="0" marL="0">
-              <a:buNone/>
-            </a:pPr>
-            <a:r>
-              <a:rPr lang="en-US" sz="1200" b="1" spc="400" kern="0" dirty="0">
+            <a:pPr marL="0" indent="0">
+              <a:buNone/>
+            </a:pPr>
+            <a:r>
+              <a:rPr lang="en-US" sz="1200" b="1" kern="0" spc="400" dirty="0">
                 <a:solidFill>
                   <a:srgbClr val="FFFFFF"/>
                 </a:solidFill>
@@ -16418,11 +16097,11 @@
           <a:bodyPr wrap="square" lIns="0" tIns="0" rIns="0" bIns="0" rtlCol="0" anchor="ctr"/>
           <a:lstStyle/>
           <a:p>
-            <a:pPr indent="0" marL="0">
-              <a:buNone/>
-            </a:pPr>
-            <a:r>
-              <a:rPr lang="en-US" sz="1100" b="1" spc="300" kern="0" dirty="0">
+            <a:pPr marL="0" indent="0">
+              <a:buNone/>
+            </a:pPr>
+            <a:r>
+              <a:rPr lang="en-US" sz="1100" b="1" kern="0" spc="300" dirty="0">
                 <a:solidFill>
                   <a:srgbClr val="C4B3F5"/>
                 </a:solidFill>
@@ -16477,7 +16156,7 @@
           <a:bodyPr wrap="square" lIns="0" tIns="0" rIns="0" bIns="0" rtlCol="0" anchor="t"/>
           <a:lstStyle/>
           <a:p>
-            <a:pPr indent="0" marL="0">
+            <a:pPr marL="0" indent="0">
               <a:lnSpc>
                 <a:spcPct val="110000"/>
               </a:lnSpc>
@@ -16539,7 +16218,7 @@
           <a:bodyPr wrap="square" lIns="0" tIns="0" rIns="0" bIns="0" rtlCol="0" anchor="t"/>
           <a:lstStyle/>
           <a:p>
-            <a:pPr indent="0" marL="0">
+            <a:pPr marL="0" indent="0">
               <a:lnSpc>
                 <a:spcPct val="110000"/>
               </a:lnSpc>
@@ -16601,7 +16280,7 @@
           <a:bodyPr wrap="square" lIns="0" tIns="0" rIns="0" bIns="0" rtlCol="0" anchor="t"/>
           <a:lstStyle/>
           <a:p>
-            <a:pPr indent="0" marL="0">
+            <a:pPr marL="0" indent="0">
               <a:lnSpc>
                 <a:spcPct val="110000"/>
               </a:lnSpc>
@@ -16663,7 +16342,7 @@
           <a:bodyPr wrap="square" lIns="0" tIns="0" rIns="0" bIns="0" rtlCol="0" anchor="t"/>
           <a:lstStyle/>
           <a:p>
-            <a:pPr indent="0" marL="0">
+            <a:pPr marL="0" indent="0">
               <a:lnSpc>
                 <a:spcPct val="110000"/>
               </a:lnSpc>
@@ -16725,7 +16404,7 @@
           <a:bodyPr wrap="square" lIns="0" tIns="0" rIns="0" bIns="0" rtlCol="0" anchor="t"/>
           <a:lstStyle/>
           <a:p>
-            <a:pPr indent="0" marL="0">
+            <a:pPr marL="0" indent="0">
               <a:lnSpc>
                 <a:spcPct val="110000"/>
               </a:lnSpc>
@@ -16794,7 +16473,7 @@
           <a:bodyPr wrap="square" lIns="0" tIns="0" rIns="0" bIns="0" rtlCol="0" anchor="ctr"/>
           <a:lstStyle/>
           <a:p>
-            <a:pPr indent="0" marL="0">
+            <a:pPr marL="0" indent="0">
               <a:buNone/>
             </a:pPr>
             <a:r>
@@ -16833,7 +16512,7 @@
           <a:bodyPr wrap="square" lIns="0" tIns="0" rIns="0" bIns="0" rtlCol="0" anchor="t"/>
           <a:lstStyle/>
           <a:p>
-            <a:pPr indent="0" marL="0">
+            <a:pPr marL="0" indent="0">
               <a:lnSpc>
                 <a:spcPct val="115000"/>
               </a:lnSpc>
@@ -16900,11 +16579,11 @@
           <a:bodyPr wrap="square" lIns="0" tIns="0" rIns="0" bIns="0" rtlCol="0" anchor="ctr"/>
           <a:lstStyle/>
           <a:p>
-            <a:pPr indent="0" marL="0">
-              <a:buNone/>
-            </a:pPr>
-            <a:r>
-              <a:rPr lang="en-US" sz="1200" b="1" spc="400" kern="0" dirty="0">
+            <a:pPr marL="0" indent="0">
+              <a:buNone/>
+            </a:pPr>
+            <a:r>
+              <a:rPr lang="en-US" sz="1200" b="1" kern="0" spc="400" dirty="0">
                 <a:solidFill>
                   <a:srgbClr val="FFFFFF"/>
                 </a:solidFill>
@@ -16939,7 +16618,7 @@
           <a:bodyPr wrap="square" lIns="0" tIns="0" rIns="0" bIns="0" rtlCol="0" anchor="ctr"/>
           <a:lstStyle/>
           <a:p>
-            <a:pPr indent="0" marL="0">
+            <a:pPr marL="0" indent="0">
               <a:buNone/>
             </a:pPr>
             <a:r>
@@ -17025,7 +16704,7 @@
           <a:bodyPr wrap="square" lIns="0" tIns="0" rIns="0" bIns="0" rtlCol="0" anchor="ctr"/>
           <a:lstStyle/>
           <a:p>
-            <a:pPr indent="0" marL="0">
+            <a:pPr marL="0" indent="0">
               <a:buNone/>
             </a:pPr>
             <a:r>
@@ -17091,11 +16770,11 @@
           <a:bodyPr wrap="square" lIns="0" tIns="0" rIns="0" bIns="0" rtlCol="0" anchor="ctr"/>
           <a:lstStyle/>
           <a:p>
-            <a:pPr algn="ctr" indent="0" marL="0">
-              <a:buNone/>
-            </a:pPr>
-            <a:r>
-              <a:rPr lang="en-US" sz="900" b="1" spc="100" kern="0" dirty="0">
+            <a:pPr marL="0" indent="0" algn="ctr">
+              <a:buNone/>
+            </a:pPr>
+            <a:r>
+              <a:rPr lang="en-US" sz="900" b="1" kern="0" spc="100" dirty="0">
                 <a:solidFill>
                   <a:srgbClr val="5A05F4"/>
                 </a:solidFill>
@@ -17111,14 +16790,14 @@
       </p:sp>
       <p:pic>
         <p:nvPicPr>
-          <p:cNvPr id="6" name="Image 0" descr="preencoded.png">    </p:cNvPr>
+          <p:cNvPr id="6" name="Image 0" descr="preencoded.png"/>
           <p:cNvPicPr>
             <a:picLocks noChangeAspect="1"/>
           </p:cNvPicPr>
           <p:nvPr/>
         </p:nvPicPr>
         <p:blipFill>
-          <a:blip r:embed="rId1"/>
+          <a:blip r:embed="rId3"/>
           <a:stretch>
             <a:fillRect/>
           </a:stretch>
@@ -17196,7 +16875,7 @@
           <a:bodyPr wrap="square" lIns="0" tIns="0" rIns="0" bIns="0" rtlCol="0" anchor="ctr"/>
           <a:lstStyle/>
           <a:p>
-            <a:pPr algn="ctr" indent="0" marL="0">
+            <a:pPr marL="0" indent="0" algn="ctr">
               <a:buNone/>
             </a:pPr>
             <a:r>
@@ -17235,7 +16914,7 @@
           <a:bodyPr wrap="square" lIns="0" tIns="0" rIns="0" bIns="0" rtlCol="0" anchor="ctr"/>
           <a:lstStyle/>
           <a:p>
-            <a:pPr indent="0" marL="0">
+            <a:pPr marL="0" indent="0">
               <a:buNone/>
             </a:pPr>
             <a:r>
@@ -17316,7 +16995,7 @@
           <a:bodyPr wrap="square" lIns="0" tIns="0" rIns="0" bIns="0" rtlCol="0" anchor="ctr"/>
           <a:lstStyle/>
           <a:p>
-            <a:pPr algn="ctr" indent="0" marL="0">
+            <a:pPr marL="0" indent="0" algn="ctr">
               <a:buNone/>
             </a:pPr>
             <a:r>
@@ -17355,7 +17034,7 @@
           <a:bodyPr wrap="square" lIns="0" tIns="0" rIns="0" bIns="0" rtlCol="0" anchor="ctr"/>
           <a:lstStyle/>
           <a:p>
-            <a:pPr indent="0" marL="0">
+            <a:pPr marL="0" indent="0">
               <a:buNone/>
             </a:pPr>
             <a:r>
@@ -17436,7 +17115,7 @@
           <a:bodyPr wrap="square" lIns="0" tIns="0" rIns="0" bIns="0" rtlCol="0" anchor="ctr"/>
           <a:lstStyle/>
           <a:p>
-            <a:pPr algn="ctr" indent="0" marL="0">
+            <a:pPr marL="0" indent="0" algn="ctr">
               <a:buNone/>
             </a:pPr>
             <a:r>
@@ -17475,7 +17154,7 @@
           <a:bodyPr wrap="square" lIns="0" tIns="0" rIns="0" bIns="0" rtlCol="0" anchor="ctr"/>
           <a:lstStyle/>
           <a:p>
-            <a:pPr indent="0" marL="0">
+            <a:pPr marL="0" indent="0">
               <a:buNone/>
             </a:pPr>
             <a:r>
@@ -17556,7 +17235,7 @@
           <a:bodyPr wrap="square" lIns="0" tIns="0" rIns="0" bIns="0" rtlCol="0" anchor="ctr"/>
           <a:lstStyle/>
           <a:p>
-            <a:pPr algn="ctr" indent="0" marL="0">
+            <a:pPr marL="0" indent="0" algn="ctr">
               <a:buNone/>
             </a:pPr>
             <a:r>
@@ -17595,7 +17274,7 @@
           <a:bodyPr wrap="square" lIns="0" tIns="0" rIns="0" bIns="0" rtlCol="0" anchor="ctr"/>
           <a:lstStyle/>
           <a:p>
-            <a:pPr indent="0" marL="0">
+            <a:pPr marL="0" indent="0">
               <a:buNone/>
             </a:pPr>
             <a:r>
@@ -17676,7 +17355,7 @@
           <a:bodyPr wrap="square" lIns="0" tIns="0" rIns="0" bIns="0" rtlCol="0" anchor="ctr"/>
           <a:lstStyle/>
           <a:p>
-            <a:pPr algn="ctr" indent="0" marL="0">
+            <a:pPr marL="0" indent="0" algn="ctr">
               <a:buNone/>
             </a:pPr>
             <a:r>
@@ -17715,7 +17394,7 @@
           <a:bodyPr wrap="square" lIns="0" tIns="0" rIns="0" bIns="0" rtlCol="0" anchor="ctr"/>
           <a:lstStyle/>
           <a:p>
-            <a:pPr indent="0" marL="0">
+            <a:pPr marL="0" indent="0">
               <a:buNone/>
             </a:pPr>
             <a:r>
@@ -17796,7 +17475,7 @@
           <a:bodyPr wrap="square" lIns="0" tIns="0" rIns="0" bIns="0" rtlCol="0" anchor="ctr"/>
           <a:lstStyle/>
           <a:p>
-            <a:pPr algn="ctr" indent="0" marL="0">
+            <a:pPr marL="0" indent="0" algn="ctr">
               <a:buNone/>
             </a:pPr>
             <a:r>
@@ -17835,7 +17514,7 @@
           <a:bodyPr wrap="square" lIns="0" tIns="0" rIns="0" bIns="0" rtlCol="0" anchor="ctr"/>
           <a:lstStyle/>
           <a:p>
-            <a:pPr indent="0" marL="0">
+            <a:pPr marL="0" indent="0">
               <a:buNone/>
             </a:pPr>
             <a:r>
@@ -17916,7 +17595,7 @@
           <a:bodyPr wrap="square" lIns="0" tIns="0" rIns="0" bIns="0" rtlCol="0" anchor="ctr"/>
           <a:lstStyle/>
           <a:p>
-            <a:pPr algn="ctr" indent="0" marL="0">
+            <a:pPr marL="0" indent="0" algn="ctr">
               <a:buNone/>
             </a:pPr>
             <a:r>
@@ -17955,7 +17634,7 @@
           <a:bodyPr wrap="square" lIns="0" tIns="0" rIns="0" bIns="0" rtlCol="0" anchor="ctr"/>
           <a:lstStyle/>
           <a:p>
-            <a:pPr indent="0" marL="0">
+            <a:pPr marL="0" indent="0">
               <a:buNone/>
             </a:pPr>
             <a:r>
@@ -18036,7 +17715,7 @@
           <a:bodyPr wrap="square" lIns="0" tIns="0" rIns="0" bIns="0" rtlCol="0" anchor="ctr"/>
           <a:lstStyle/>
           <a:p>
-            <a:pPr algn="ctr" indent="0" marL="0">
+            <a:pPr marL="0" indent="0" algn="ctr">
               <a:buNone/>
             </a:pPr>
             <a:r>
@@ -18075,7 +17754,7 @@
           <a:bodyPr wrap="square" lIns="0" tIns="0" rIns="0" bIns="0" rtlCol="0" anchor="ctr"/>
           <a:lstStyle/>
           <a:p>
-            <a:pPr indent="0" marL="0">
+            <a:pPr marL="0" indent="0">
               <a:buNone/>
             </a:pPr>
             <a:r>
@@ -18156,7 +17835,7 @@
           <a:bodyPr wrap="square" lIns="0" tIns="0" rIns="0" bIns="0" rtlCol="0" anchor="ctr"/>
           <a:lstStyle/>
           <a:p>
-            <a:pPr algn="ctr" indent="0" marL="0">
+            <a:pPr marL="0" indent="0" algn="ctr">
               <a:buNone/>
             </a:pPr>
             <a:r>
@@ -18195,7 +17874,7 @@
           <a:bodyPr wrap="square" lIns="0" tIns="0" rIns="0" bIns="0" rtlCol="0" anchor="ctr"/>
           <a:lstStyle/>
           <a:p>
-            <a:pPr indent="0" marL="0">
+            <a:pPr marL="0" indent="0">
               <a:buNone/>
             </a:pPr>
             <a:r>
@@ -18276,7 +17955,7 @@
           <a:bodyPr wrap="square" lIns="0" tIns="0" rIns="0" bIns="0" rtlCol="0" anchor="ctr"/>
           <a:lstStyle/>
           <a:p>
-            <a:pPr algn="ctr" indent="0" marL="0">
+            <a:pPr marL="0" indent="0" algn="ctr">
               <a:buNone/>
             </a:pPr>
             <a:r>
@@ -18315,7 +17994,7 @@
           <a:bodyPr wrap="square" lIns="0" tIns="0" rIns="0" bIns="0" rtlCol="0" anchor="ctr"/>
           <a:lstStyle/>
           <a:p>
-            <a:pPr indent="0" marL="0">
+            <a:pPr marL="0" indent="0">
               <a:buNone/>
             </a:pPr>
             <a:r>
@@ -18396,7 +18075,7 @@
           <a:bodyPr wrap="square" lIns="0" tIns="0" rIns="0" bIns="0" rtlCol="0" anchor="ctr"/>
           <a:lstStyle/>
           <a:p>
-            <a:pPr algn="ctr" indent="0" marL="0">
+            <a:pPr marL="0" indent="0" algn="ctr">
               <a:buNone/>
             </a:pPr>
             <a:r>
@@ -18435,7 +18114,7 @@
           <a:bodyPr wrap="square" lIns="0" tIns="0" rIns="0" bIns="0" rtlCol="0" anchor="ctr"/>
           <a:lstStyle/>
           <a:p>
-            <a:pPr indent="0" marL="0">
+            <a:pPr marL="0" indent="0">
               <a:buNone/>
             </a:pPr>
             <a:r>
@@ -18462,7 +18141,7 @@
         <p:spPr>
           <a:xfrm>
             <a:off x="566928" y="5779008"/>
-            <a:ext cx="11064240" cy="402336"/>
+            <a:ext cx="10927080" cy="402336"/>
           </a:xfrm>
           <a:prstGeom prst="roundRect">
             <a:avLst>
@@ -18501,7 +18180,7 @@
           <a:bodyPr wrap="square" lIns="0" tIns="0" rIns="0" bIns="0" rtlCol="0" anchor="ctr"/>
           <a:lstStyle/>
           <a:p>
-            <a:pPr indent="0" marL="0">
+            <a:pPr marL="0" indent="0">
               <a:lnSpc>
                 <a:spcPct val="112000"/>
               </a:lnSpc>
@@ -18524,7 +18203,7 @@
       </p:sp>
       <p:sp>
         <p:nvSpPr>
-          <p:cNvPr id="25" name="Slide Number Placeholder 0"/>
+          <p:cNvPr id="53" name="Slide Number Placeholder 0"/>
           <p:cNvSpPr>
             <a:spLocks noGrp="1"/>
           </p:cNvSpPr>
@@ -18542,7 +18221,7 @@
           </a:prstGeom>
           <a:extLst>
             <a:ext uri="{C572A759-6A51-4108-AA02-DFA0A04FC94B}">
-              <ma14:wrappingTextBoxFlag xmlns:ma14="http://schemas.microsoft.com/office/mac/drawingml/2011/main" val="0"/>
+              <ma14:wrappingTextBoxFlag xmlns:ma14="http://schemas.microsoft.com/office/mac/drawingml/2011/main" xmlns="" val="0"/>
             </a:ext>
           </a:extLst>
         </p:spPr>
@@ -18563,7 +18242,7 @@
           <a:p>
             <a:pPr algn="l"/>
             <a:fld id="{F7021451-1387-4CA6-816F-3879F97B5CBC}" type="slidenum">
-              <a:rPr b="0" lang="en-US"/>
+              <a:rPr lang="en-US" b="0"/>
               <a:t>3</a:t>
             </a:fld>
             <a:endParaRPr lang="en-US"/>
@@ -18638,7 +18317,7 @@
           <a:bodyPr wrap="square" lIns="0" tIns="0" rIns="0" bIns="0" rtlCol="0" anchor="ctr"/>
           <a:lstStyle/>
           <a:p>
-            <a:pPr indent="0" marL="0">
+            <a:pPr marL="0" indent="0">
               <a:buNone/>
             </a:pPr>
             <a:r>
@@ -18677,7 +18356,7 @@
           <a:bodyPr wrap="square" lIns="0" tIns="0" rIns="0" bIns="0" rtlCol="0" anchor="t"/>
           <a:lstStyle/>
           <a:p>
-            <a:pPr indent="0" marL="0">
+            <a:pPr marL="0" indent="0">
               <a:lnSpc>
                 <a:spcPct val="100000"/>
               </a:lnSpc>
@@ -18746,11 +18425,11 @@
           <a:bodyPr wrap="square" lIns="0" tIns="0" rIns="0" bIns="0" rtlCol="0" anchor="ctr"/>
           <a:lstStyle/>
           <a:p>
-            <a:pPr algn="ctr" indent="0" marL="0">
-              <a:buNone/>
-            </a:pPr>
-            <a:r>
-              <a:rPr lang="en-US" sz="900" b="1" spc="100" kern="0" dirty="0">
+            <a:pPr marL="0" indent="0" algn="ctr">
+              <a:buNone/>
+            </a:pPr>
+            <a:r>
+              <a:rPr lang="en-US" sz="900" b="1" kern="0" spc="100" dirty="0">
                 <a:solidFill>
                   <a:srgbClr val="5A05F4"/>
                 </a:solidFill>
@@ -18766,14 +18445,14 @@
       </p:sp>
       <p:pic>
         <p:nvPicPr>
-          <p:cNvPr id="7" name="Image 0" descr="preencoded.png">    </p:cNvPr>
+          <p:cNvPr id="7" name="Image 0" descr="preencoded.png"/>
           <p:cNvPicPr>
             <a:picLocks noChangeAspect="1"/>
           </p:cNvPicPr>
           <p:nvPr/>
         </p:nvPicPr>
         <p:blipFill>
-          <a:blip r:embed="rId1"/>
+          <a:blip r:embed="rId3"/>
           <a:stretch>
             <a:fillRect/>
           </a:stretch>
@@ -18836,7 +18515,7 @@
           <a:bodyPr wrap="square" lIns="0" tIns="0" rIns="0" bIns="0" rtlCol="0" anchor="ctr"/>
           <a:lstStyle/>
           <a:p>
-            <a:pPr indent="0" marL="0">
+            <a:pPr marL="0" indent="0">
               <a:buNone/>
             </a:pPr>
             <a:r>
@@ -18875,7 +18554,7 @@
           <a:bodyPr wrap="square" lIns="0" tIns="0" rIns="0" bIns="0" rtlCol="0" anchor="t"/>
           <a:lstStyle/>
           <a:p>
-            <a:pPr indent="0" marL="0">
+            <a:pPr marL="0" indent="0">
               <a:lnSpc>
                 <a:spcPct val="105000"/>
               </a:lnSpc>
@@ -18944,7 +18623,7 @@
           <a:bodyPr wrap="square" lIns="0" tIns="0" rIns="0" bIns="0" rtlCol="0" anchor="ctr"/>
           <a:lstStyle/>
           <a:p>
-            <a:pPr indent="0" marL="0">
+            <a:pPr marL="0" indent="0">
               <a:buNone/>
             </a:pPr>
             <a:r>
@@ -18983,7 +18662,7 @@
           <a:bodyPr wrap="square" lIns="0" tIns="0" rIns="0" bIns="0" rtlCol="0" anchor="t"/>
           <a:lstStyle/>
           <a:p>
-            <a:pPr indent="0" marL="0">
+            <a:pPr marL="0" indent="0">
               <a:lnSpc>
                 <a:spcPct val="105000"/>
               </a:lnSpc>
@@ -19052,7 +18731,7 @@
           <a:bodyPr wrap="square" lIns="0" tIns="0" rIns="0" bIns="0" rtlCol="0" anchor="ctr"/>
           <a:lstStyle/>
           <a:p>
-            <a:pPr indent="0" marL="0">
+            <a:pPr marL="0" indent="0">
               <a:buNone/>
             </a:pPr>
             <a:r>
@@ -19091,7 +18770,7 @@
           <a:bodyPr wrap="square" lIns="0" tIns="0" rIns="0" bIns="0" rtlCol="0" anchor="t"/>
           <a:lstStyle/>
           <a:p>
-            <a:pPr indent="0" marL="0">
+            <a:pPr marL="0" indent="0">
               <a:lnSpc>
                 <a:spcPct val="105000"/>
               </a:lnSpc>
@@ -19160,7 +18839,7 @@
           <a:bodyPr wrap="square" lIns="0" tIns="0" rIns="0" bIns="0" rtlCol="0" anchor="ctr"/>
           <a:lstStyle/>
           <a:p>
-            <a:pPr indent="0" marL="0">
+            <a:pPr marL="0" indent="0">
               <a:buNone/>
             </a:pPr>
             <a:r>
@@ -19199,7 +18878,7 @@
           <a:bodyPr wrap="square" lIns="0" tIns="0" rIns="0" bIns="0" rtlCol="0" anchor="t"/>
           <a:lstStyle/>
           <a:p>
-            <a:pPr indent="0" marL="0">
+            <a:pPr marL="0" indent="0">
               <a:lnSpc>
                 <a:spcPct val="105000"/>
               </a:lnSpc>
@@ -19268,7 +18947,7 @@
           <a:bodyPr wrap="square" lIns="0" tIns="0" rIns="0" bIns="0" rtlCol="0" anchor="ctr"/>
           <a:lstStyle/>
           <a:p>
-            <a:pPr indent="0" marL="0">
+            <a:pPr marL="0" indent="0">
               <a:buNone/>
             </a:pPr>
             <a:r>
@@ -19307,7 +18986,7 @@
           <a:bodyPr wrap="square" lIns="0" tIns="0" rIns="0" bIns="0" rtlCol="0" anchor="t"/>
           <a:lstStyle/>
           <a:p>
-            <a:pPr indent="0" marL="0">
+            <a:pPr marL="0" indent="0">
               <a:lnSpc>
                 <a:spcPct val="105000"/>
               </a:lnSpc>
@@ -19376,7 +19055,7 @@
           <a:bodyPr wrap="square" lIns="0" tIns="0" rIns="0" bIns="0" rtlCol="0" anchor="ctr"/>
           <a:lstStyle/>
           <a:p>
-            <a:pPr indent="0" marL="0">
+            <a:pPr marL="0" indent="0">
               <a:buNone/>
             </a:pPr>
             <a:r>
@@ -19415,7 +19094,7 @@
           <a:bodyPr wrap="square" lIns="0" tIns="0" rIns="0" bIns="0" rtlCol="0" anchor="t"/>
           <a:lstStyle/>
           <a:p>
-            <a:pPr indent="0" marL="0">
+            <a:pPr marL="0" indent="0">
               <a:lnSpc>
                 <a:spcPct val="105000"/>
               </a:lnSpc>
@@ -19484,7 +19163,7 @@
           <a:bodyPr wrap="square" lIns="0" tIns="0" rIns="0" bIns="0" rtlCol="0" anchor="ctr"/>
           <a:lstStyle/>
           <a:p>
-            <a:pPr indent="0" marL="0">
+            <a:pPr marL="0" indent="0">
               <a:lnSpc>
                 <a:spcPct val="112000"/>
               </a:lnSpc>
@@ -19507,7 +19186,7 @@
       </p:sp>
       <p:sp>
         <p:nvSpPr>
-          <p:cNvPr id="25" name="Slide Number Placeholder 0"/>
+          <p:cNvPr id="28" name="Slide Number Placeholder 0"/>
           <p:cNvSpPr>
             <a:spLocks noGrp="1"/>
           </p:cNvSpPr>
@@ -19525,7 +19204,7 @@
           </a:prstGeom>
           <a:extLst>
             <a:ext uri="{C572A759-6A51-4108-AA02-DFA0A04FC94B}">
-              <ma14:wrappingTextBoxFlag xmlns:ma14="http://schemas.microsoft.com/office/mac/drawingml/2011/main" val="0"/>
+              <ma14:wrappingTextBoxFlag xmlns:ma14="http://schemas.microsoft.com/office/mac/drawingml/2011/main" xmlns="" val="0"/>
             </a:ext>
           </a:extLst>
         </p:spPr>
@@ -19546,7 +19225,7 @@
           <a:p>
             <a:pPr algn="l"/>
             <a:fld id="{F7021451-1387-4CA6-816F-3879F97B5CBC}" type="slidenum">
-              <a:rPr b="0" lang="en-US"/>
+              <a:rPr lang="en-US" b="0"/>
               <a:t>4</a:t>
             </a:fld>
             <a:endParaRPr lang="en-US"/>
@@ -19599,11 +19278,11 @@
           <a:bodyPr wrap="square" lIns="0" tIns="0" rIns="0" bIns="0" rtlCol="0" anchor="ctr"/>
           <a:lstStyle/>
           <a:p>
-            <a:pPr indent="0" marL="0">
-              <a:buNone/>
-            </a:pPr>
-            <a:r>
-              <a:rPr lang="en-US" sz="1200" b="1" spc="400" kern="0" dirty="0">
+            <a:pPr marL="0" indent="0">
+              <a:buNone/>
+            </a:pPr>
+            <a:r>
+              <a:rPr lang="en-US" sz="1200" b="1" kern="0" spc="400" dirty="0">
                 <a:solidFill>
                   <a:srgbClr val="FFFFFF"/>
                 </a:solidFill>
@@ -19638,7 +19317,7 @@
           <a:bodyPr wrap="square" lIns="0" tIns="0" rIns="0" bIns="0" rtlCol="0" anchor="ctr"/>
           <a:lstStyle/>
           <a:p>
-            <a:pPr indent="0" marL="0">
+            <a:pPr marL="0" indent="0">
               <a:buNone/>
             </a:pPr>
             <a:r>
@@ -19677,7 +19356,7 @@
           <a:bodyPr wrap="square" lIns="0" tIns="0" rIns="0" bIns="0" rtlCol="0" anchor="t"/>
           <a:lstStyle/>
           <a:p>
-            <a:pPr indent="0" marL="0">
+            <a:pPr marL="0" indent="0">
               <a:buNone/>
             </a:pPr>
             <a:r>
@@ -19763,7 +19442,7 @@
           <a:bodyPr wrap="square" lIns="0" tIns="0" rIns="0" bIns="0" rtlCol="0" anchor="ctr"/>
           <a:lstStyle/>
           <a:p>
-            <a:pPr algn="l" indent="0" marL="0">
+            <a:pPr marL="0" indent="0" algn="l">
               <a:buNone/>
             </a:pPr>
             <a:r>
@@ -19802,7 +19481,7 @@
           <a:bodyPr wrap="square" lIns="0" tIns="0" rIns="0" bIns="0" rtlCol="0" anchor="ctr"/>
           <a:lstStyle/>
           <a:p>
-            <a:pPr indent="0" marL="0">
+            <a:pPr marL="0" indent="0">
               <a:buNone/>
             </a:pPr>
             <a:r>
@@ -19868,11 +19547,11 @@
           <a:bodyPr wrap="square" lIns="0" tIns="0" rIns="0" bIns="0" rtlCol="0" anchor="ctr"/>
           <a:lstStyle/>
           <a:p>
-            <a:pPr algn="ctr" indent="0" marL="0">
-              <a:buNone/>
-            </a:pPr>
-            <a:r>
-              <a:rPr lang="en-US" sz="900" b="1" spc="100" kern="0" dirty="0">
+            <a:pPr marL="0" indent="0" algn="ctr">
+              <a:buNone/>
+            </a:pPr>
+            <a:r>
+              <a:rPr lang="en-US" sz="900" b="1" kern="0" spc="100" dirty="0">
                 <a:solidFill>
                   <a:srgbClr val="5A05F4"/>
                 </a:solidFill>
@@ -19888,14 +19567,14 @@
       </p:sp>
       <p:pic>
         <p:nvPicPr>
-          <p:cNvPr id="7" name="Image 0" descr="preencoded.png">    </p:cNvPr>
+          <p:cNvPr id="7" name="Image 0" descr="preencoded.png"/>
           <p:cNvPicPr>
             <a:picLocks noChangeAspect="1"/>
           </p:cNvPicPr>
           <p:nvPr/>
         </p:nvPicPr>
         <p:blipFill>
-          <a:blip r:embed="rId1"/>
+          <a:blip r:embed="rId3"/>
           <a:stretch>
             <a:fillRect/>
           </a:stretch>
@@ -19953,7 +19632,7 @@
           <a:bodyPr wrap="square" lIns="0" tIns="0" rIns="0" bIns="0" rtlCol="0" anchor="ctr"/>
           <a:lstStyle/>
           <a:p>
-            <a:pPr indent="0" marL="0">
+            <a:pPr marL="0" indent="0">
               <a:buNone/>
             </a:pPr>
             <a:r>
@@ -19992,7 +19671,7 @@
           <a:bodyPr wrap="square" lIns="0" tIns="0" rIns="0" bIns="0" rtlCol="0" anchor="t"/>
           <a:lstStyle/>
           <a:p>
-            <a:pPr indent="0" marL="0">
+            <a:pPr marL="0" indent="0">
               <a:lnSpc>
                 <a:spcPct val="108000"/>
               </a:lnSpc>
@@ -20056,7 +19735,7 @@
           <a:bodyPr wrap="square" lIns="0" tIns="0" rIns="0" bIns="0" rtlCol="0" anchor="ctr"/>
           <a:lstStyle/>
           <a:p>
-            <a:pPr indent="0" marL="0">
+            <a:pPr marL="0" indent="0">
               <a:buNone/>
             </a:pPr>
             <a:r>
@@ -20095,7 +19774,7 @@
           <a:bodyPr wrap="square" lIns="0" tIns="0" rIns="0" bIns="0" rtlCol="0" anchor="t"/>
           <a:lstStyle/>
           <a:p>
-            <a:pPr indent="0" marL="0">
+            <a:pPr marL="0" indent="0">
               <a:lnSpc>
                 <a:spcPct val="108000"/>
               </a:lnSpc>
@@ -20159,7 +19838,7 @@
           <a:bodyPr wrap="square" lIns="0" tIns="0" rIns="0" bIns="0" rtlCol="0" anchor="ctr"/>
           <a:lstStyle/>
           <a:p>
-            <a:pPr indent="0" marL="0">
+            <a:pPr marL="0" indent="0">
               <a:lnSpc>
                 <a:spcPct val="112000"/>
               </a:lnSpc>
@@ -20228,11 +19907,11 @@
           <a:bodyPr wrap="square" lIns="0" tIns="0" rIns="0" bIns="0" rtlCol="0" anchor="ctr"/>
           <a:lstStyle/>
           <a:p>
-            <a:pPr indent="0" marL="0">
-              <a:buNone/>
-            </a:pPr>
-            <a:r>
-              <a:rPr lang="en-US" sz="950" b="1" spc="150" kern="0" dirty="0">
+            <a:pPr marL="0" indent="0">
+              <a:buNone/>
+            </a:pPr>
+            <a:r>
+              <a:rPr lang="en-US" sz="950" b="1" kern="0" spc="150" dirty="0">
                 <a:solidFill>
                   <a:srgbClr val="106B41"/>
                 </a:solidFill>
@@ -20267,7 +19946,7 @@
           <a:bodyPr wrap="square" lIns="0" tIns="0" rIns="0" bIns="0" rtlCol="0" anchor="ctr"/>
           <a:lstStyle/>
           <a:p>
-            <a:pPr indent="0" marL="0">
+            <a:pPr marL="0" indent="0">
               <a:lnSpc>
                 <a:spcPct val="112000"/>
               </a:lnSpc>
@@ -20308,7 +19987,7 @@
           </a:prstGeom>
           <a:extLst>
             <a:ext uri="{C572A759-6A51-4108-AA02-DFA0A04FC94B}">
-              <ma14:wrappingTextBoxFlag xmlns:ma14="http://schemas.microsoft.com/office/mac/drawingml/2011/main" val="0"/>
+              <ma14:wrappingTextBoxFlag xmlns:ma14="http://schemas.microsoft.com/office/mac/drawingml/2011/main" xmlns="" val="0"/>
             </a:ext>
           </a:extLst>
         </p:spPr>
@@ -20329,7 +20008,7 @@
           <a:p>
             <a:pPr algn="l"/>
             <a:fld id="{F7021451-1387-4CA6-816F-3879F97B5CBC}" type="slidenum">
-              <a:rPr b="0" lang="en-US"/>
+              <a:rPr lang="en-US" b="0"/>
               <a:t>6</a:t>
             </a:fld>
             <a:endParaRPr lang="en-US"/>
@@ -20404,7 +20083,7 @@
           <a:bodyPr wrap="square" lIns="0" tIns="0" rIns="0" bIns="0" rtlCol="0" anchor="ctr"/>
           <a:lstStyle/>
           <a:p>
-            <a:pPr algn="l" indent="0" marL="0">
+            <a:pPr marL="0" indent="0" algn="l">
               <a:buNone/>
             </a:pPr>
             <a:r>
@@ -20443,7 +20122,7 @@
           <a:bodyPr wrap="square" lIns="0" tIns="0" rIns="0" bIns="0" rtlCol="0" anchor="ctr"/>
           <a:lstStyle/>
           <a:p>
-            <a:pPr indent="0" marL="0">
+            <a:pPr marL="0" indent="0">
               <a:buNone/>
             </a:pPr>
             <a:r>
@@ -20509,11 +20188,11 @@
           <a:bodyPr wrap="square" lIns="0" tIns="0" rIns="0" bIns="0" rtlCol="0" anchor="ctr"/>
           <a:lstStyle/>
           <a:p>
-            <a:pPr algn="ctr" indent="0" marL="0">
-              <a:buNone/>
-            </a:pPr>
-            <a:r>
-              <a:rPr lang="en-US" sz="900" b="1" spc="100" kern="0" dirty="0">
+            <a:pPr marL="0" indent="0" algn="ctr">
+              <a:buNone/>
+            </a:pPr>
+            <a:r>
+              <a:rPr lang="en-US" sz="900" b="1" kern="0" spc="100" dirty="0">
                 <a:solidFill>
                   <a:srgbClr val="5A05F4"/>
                 </a:solidFill>
@@ -20529,14 +20208,14 @@
       </p:sp>
       <p:pic>
         <p:nvPicPr>
-          <p:cNvPr id="7" name="Image 0" descr="preencoded.png">    </p:cNvPr>
+          <p:cNvPr id="7" name="Image 0" descr="preencoded.png"/>
           <p:cNvPicPr>
             <a:picLocks noChangeAspect="1"/>
           </p:cNvPicPr>
           <p:nvPr/>
         </p:nvPicPr>
         <p:blipFill>
-          <a:blip r:embed="rId1"/>
+          <a:blip r:embed="rId3"/>
           <a:stretch>
             <a:fillRect/>
           </a:stretch>
@@ -20594,7 +20273,7 @@
           <a:bodyPr wrap="square" lIns="0" tIns="0" rIns="0" bIns="0" rtlCol="0" anchor="ctr"/>
           <a:lstStyle/>
           <a:p>
-            <a:pPr algn="ctr" indent="0" marL="0">
+            <a:pPr marL="0" indent="0" algn="ctr">
               <a:buNone/>
             </a:pPr>
             <a:r>
@@ -20698,7 +20377,7 @@
           <a:bodyPr wrap="square" lIns="0" tIns="0" rIns="0" bIns="0" rtlCol="0" anchor="ctr"/>
           <a:lstStyle/>
           <a:p>
-            <a:pPr algn="ctr" indent="0" marL="0">
+            <a:pPr marL="0" indent="0" algn="ctr">
               <a:buNone/>
             </a:pPr>
             <a:r>
@@ -20802,7 +20481,7 @@
           <a:bodyPr wrap="square" lIns="0" tIns="0" rIns="0" bIns="0" rtlCol="0" anchor="ctr"/>
           <a:lstStyle/>
           <a:p>
-            <a:pPr algn="ctr" indent="0" marL="0">
+            <a:pPr marL="0" indent="0" algn="ctr">
               <a:buNone/>
             </a:pPr>
             <a:r>
@@ -20906,7 +20585,7 @@
           <a:bodyPr wrap="square" lIns="0" tIns="0" rIns="0" bIns="0" rtlCol="0" anchor="ctr"/>
           <a:lstStyle/>
           <a:p>
-            <a:pPr algn="ctr" indent="0" marL="0">
+            <a:pPr marL="0" indent="0" algn="ctr">
               <a:buNone/>
             </a:pPr>
             <a:r>
@@ -21010,7 +20689,7 @@
           <a:bodyPr wrap="square" lIns="0" tIns="0" rIns="0" bIns="0" rtlCol="0" anchor="ctr"/>
           <a:lstStyle/>
           <a:p>
-            <a:pPr algn="ctr" indent="0" marL="0">
+            <a:pPr marL="0" indent="0" algn="ctr">
               <a:buNone/>
             </a:pPr>
             <a:r>
@@ -21071,7 +20750,7 @@
           <a:bodyPr wrap="square" lIns="0" tIns="0" rIns="0" bIns="0" rtlCol="0" anchor="ctr"/>
           <a:lstStyle/>
           <a:p>
-            <a:pPr indent="0" marL="0">
+            <a:pPr marL="0" indent="0">
               <a:buNone/>
             </a:pPr>
             <a:r>
@@ -21110,7 +20789,7 @@
           <a:bodyPr wrap="square" lIns="0" tIns="0" rIns="0" bIns="0" rtlCol="0" anchor="t"/>
           <a:lstStyle/>
           <a:p>
-            <a:pPr indent="0" marL="0">
+            <a:pPr marL="0" indent="0">
               <a:lnSpc>
                 <a:spcPct val="108000"/>
               </a:lnSpc>
@@ -21174,7 +20853,7 @@
           <a:bodyPr wrap="square" lIns="0" tIns="0" rIns="0" bIns="0" rtlCol="0" anchor="ctr"/>
           <a:lstStyle/>
           <a:p>
-            <a:pPr indent="0" marL="0">
+            <a:pPr marL="0" indent="0">
               <a:buNone/>
             </a:pPr>
             <a:r>
@@ -21213,7 +20892,7 @@
           <a:bodyPr wrap="square" lIns="0" tIns="0" rIns="0" bIns="0" rtlCol="0" anchor="t"/>
           <a:lstStyle/>
           <a:p>
-            <a:pPr indent="0" marL="0">
+            <a:pPr marL="0" indent="0">
               <a:lnSpc>
                 <a:spcPct val="108000"/>
               </a:lnSpc>
@@ -21282,7 +20961,7 @@
           <a:bodyPr wrap="square" lIns="0" tIns="0" rIns="0" bIns="0" rtlCol="0" anchor="ctr"/>
           <a:lstStyle/>
           <a:p>
-            <a:pPr indent="0" marL="0">
+            <a:pPr marL="0" indent="0">
               <a:lnSpc>
                 <a:spcPct val="112000"/>
               </a:lnSpc>
@@ -21305,7 +20984,7 @@
       </p:sp>
       <p:sp>
         <p:nvSpPr>
-          <p:cNvPr id="25" name="Slide Number Placeholder 0"/>
+          <p:cNvPr id="34" name="Slide Number Placeholder 0"/>
           <p:cNvSpPr>
             <a:spLocks noGrp="1"/>
           </p:cNvSpPr>
@@ -21323,7 +21002,7 @@
           </a:prstGeom>
           <a:extLst>
             <a:ext uri="{C572A759-6A51-4108-AA02-DFA0A04FC94B}">
-              <ma14:wrappingTextBoxFlag xmlns:ma14="http://schemas.microsoft.com/office/mac/drawingml/2011/main" val="0"/>
+              <ma14:wrappingTextBoxFlag xmlns:ma14="http://schemas.microsoft.com/office/mac/drawingml/2011/main" xmlns="" val="0"/>
             </a:ext>
           </a:extLst>
         </p:spPr>
@@ -21344,7 +21023,7 @@
           <a:p>
             <a:pPr algn="l"/>
             <a:fld id="{F7021451-1387-4CA6-816F-3879F97B5CBC}" type="slidenum">
-              <a:rPr b="0" lang="en-US"/>
+              <a:rPr lang="en-US" b="0"/>
               <a:t>7</a:t>
             </a:fld>
             <a:endParaRPr lang="en-US"/>
@@ -21419,7 +21098,7 @@
           <a:bodyPr wrap="square" lIns="0" tIns="0" rIns="0" bIns="0" rtlCol="0" anchor="ctr"/>
           <a:lstStyle/>
           <a:p>
-            <a:pPr algn="l" indent="0" marL="0">
+            <a:pPr marL="0" indent="0" algn="l">
               <a:buNone/>
             </a:pPr>
             <a:r>
@@ -21458,7 +21137,7 @@
           <a:bodyPr wrap="square" lIns="0" tIns="0" rIns="0" bIns="0" rtlCol="0" anchor="ctr"/>
           <a:lstStyle/>
           <a:p>
-            <a:pPr indent="0" marL="0">
+            <a:pPr marL="0" indent="0">
               <a:buNone/>
             </a:pPr>
             <a:r>
@@ -21524,11 +21203,11 @@
           <a:bodyPr wrap="square" lIns="0" tIns="0" rIns="0" bIns="0" rtlCol="0" anchor="ctr"/>
           <a:lstStyle/>
           <a:p>
-            <a:pPr algn="ctr" indent="0" marL="0">
-              <a:buNone/>
-            </a:pPr>
-            <a:r>
-              <a:rPr lang="en-US" sz="900" b="1" spc="100" kern="0" dirty="0">
+            <a:pPr marL="0" indent="0" algn="ctr">
+              <a:buNone/>
+            </a:pPr>
+            <a:r>
+              <a:rPr lang="en-US" sz="900" b="1" kern="0" spc="100" dirty="0">
                 <a:solidFill>
                   <a:srgbClr val="5A05F4"/>
                 </a:solidFill>
@@ -21544,14 +21223,14 @@
       </p:sp>
       <p:pic>
         <p:nvPicPr>
-          <p:cNvPr id="7" name="Image 0" descr="preencoded.png">    </p:cNvPr>
+          <p:cNvPr id="7" name="Image 0" descr="preencoded.png"/>
           <p:cNvPicPr>
             <a:picLocks noChangeAspect="1"/>
           </p:cNvPicPr>
           <p:nvPr/>
         </p:nvPicPr>
         <p:blipFill>
-          <a:blip r:embed="rId1"/>
+          <a:blip r:embed="rId3"/>
           <a:stretch>
             <a:fillRect/>
           </a:stretch>
@@ -21609,7 +21288,7 @@
           <a:bodyPr wrap="square" lIns="0" tIns="0" rIns="0" bIns="0" rtlCol="0" anchor="ctr"/>
           <a:lstStyle/>
           <a:p>
-            <a:pPr indent="0" marL="0">
+            <a:pPr marL="0" indent="0">
               <a:buNone/>
             </a:pPr>
             <a:r>
@@ -21648,7 +21327,7 @@
           <a:bodyPr wrap="square" lIns="0" tIns="0" rIns="0" bIns="0" rtlCol="0" anchor="ctr"/>
           <a:lstStyle/>
           <a:p>
-            <a:pPr indent="0" marL="0">
+            <a:pPr marL="0" indent="0">
               <a:buNone/>
             </a:pPr>
             <a:r>
@@ -21709,7 +21388,7 @@
           <a:bodyPr wrap="square" lIns="0" tIns="0" rIns="0" bIns="0" rtlCol="0" anchor="ctr"/>
           <a:lstStyle/>
           <a:p>
-            <a:pPr indent="0" marL="0">
+            <a:pPr marL="0" indent="0">
               <a:buNone/>
             </a:pPr>
             <a:r>
@@ -21748,7 +21427,7 @@
           <a:bodyPr wrap="square" lIns="0" tIns="0" rIns="0" bIns="0" rtlCol="0" anchor="ctr"/>
           <a:lstStyle/>
           <a:p>
-            <a:pPr indent="0" marL="0">
+            <a:pPr marL="0" indent="0">
               <a:buNone/>
             </a:pPr>
             <a:r>
@@ -21809,7 +21488,7 @@
           <a:bodyPr wrap="square" lIns="0" tIns="0" rIns="0" bIns="0" rtlCol="0" anchor="ctr"/>
           <a:lstStyle/>
           <a:p>
-            <a:pPr indent="0" marL="0">
+            <a:pPr marL="0" indent="0">
               <a:buNone/>
             </a:pPr>
             <a:r>
@@ -21848,7 +21527,7 @@
           <a:bodyPr wrap="square" lIns="0" tIns="0" rIns="0" bIns="0" rtlCol="0" anchor="ctr"/>
           <a:lstStyle/>
           <a:p>
-            <a:pPr indent="0" marL="0">
+            <a:pPr marL="0" indent="0">
               <a:buNone/>
             </a:pPr>
             <a:r>
@@ -21909,7 +21588,7 @@
           <a:bodyPr wrap="square" lIns="0" tIns="0" rIns="0" bIns="0" rtlCol="0" anchor="ctr"/>
           <a:lstStyle/>
           <a:p>
-            <a:pPr indent="0" marL="0">
+            <a:pPr marL="0" indent="0">
               <a:buNone/>
             </a:pPr>
             <a:r>
@@ -21948,7 +21627,7 @@
           <a:bodyPr wrap="square" lIns="0" tIns="0" rIns="0" bIns="0" rtlCol="0" anchor="ctr"/>
           <a:lstStyle/>
           <a:p>
-            <a:pPr indent="0" marL="0">
+            <a:pPr marL="0" indent="0">
               <a:buNone/>
             </a:pPr>
             <a:r>
@@ -22009,7 +21688,7 @@
           <a:bodyPr wrap="square" lIns="0" tIns="0" rIns="0" bIns="0" rtlCol="0" anchor="ctr"/>
           <a:lstStyle/>
           <a:p>
-            <a:pPr algn="ctr" indent="0" marL="0">
+            <a:pPr marL="0" indent="0" algn="ctr">
               <a:buNone/>
             </a:pPr>
             <a:r>
@@ -22113,7 +21792,7 @@
           <a:bodyPr wrap="square" lIns="0" tIns="0" rIns="0" bIns="0" rtlCol="0" anchor="ctr"/>
           <a:lstStyle/>
           <a:p>
-            <a:pPr algn="ctr" indent="0" marL="0">
+            <a:pPr marL="0" indent="0" algn="ctr">
               <a:buNone/>
             </a:pPr>
             <a:r>
@@ -22217,7 +21896,7 @@
           <a:bodyPr wrap="square" lIns="0" tIns="0" rIns="0" bIns="0" rtlCol="0" anchor="ctr"/>
           <a:lstStyle/>
           <a:p>
-            <a:pPr algn="ctr" indent="0" marL="0">
+            <a:pPr marL="0" indent="0" algn="ctr">
               <a:buNone/>
             </a:pPr>
             <a:r>
@@ -22321,7 +22000,7 @@
           <a:bodyPr wrap="square" lIns="0" tIns="0" rIns="0" bIns="0" rtlCol="0" anchor="ctr"/>
           <a:lstStyle/>
           <a:p>
-            <a:pPr algn="ctr" indent="0" marL="0">
+            <a:pPr marL="0" indent="0" algn="ctr">
               <a:buNone/>
             </a:pPr>
             <a:r>
@@ -22387,11 +22066,11 @@
           <a:bodyPr wrap="square" lIns="0" tIns="0" rIns="0" bIns="0" rtlCol="0" anchor="ctr"/>
           <a:lstStyle/>
           <a:p>
-            <a:pPr indent="0" marL="0">
-              <a:buNone/>
-            </a:pPr>
-            <a:r>
-              <a:rPr lang="en-US" sz="950" b="1" spc="150" kern="0" dirty="0">
+            <a:pPr marL="0" indent="0">
+              <a:buNone/>
+            </a:pPr>
+            <a:r>
+              <a:rPr lang="en-US" sz="950" b="1" kern="0" spc="150" dirty="0">
                 <a:solidFill>
                   <a:srgbClr val="B3261E"/>
                 </a:solidFill>
@@ -22426,7 +22105,7 @@
           <a:bodyPr wrap="square" lIns="0" tIns="0" rIns="0" bIns="0" rtlCol="0" anchor="ctr"/>
           <a:lstStyle/>
           <a:p>
-            <a:pPr indent="0" marL="0">
+            <a:pPr marL="0" indent="0">
               <a:lnSpc>
                 <a:spcPct val="112000"/>
               </a:lnSpc>
@@ -22495,11 +22174,11 @@
           <a:bodyPr wrap="square" lIns="0" tIns="0" rIns="0" bIns="0" rtlCol="0" anchor="ctr"/>
           <a:lstStyle/>
           <a:p>
-            <a:pPr indent="0" marL="0">
-              <a:buNone/>
-            </a:pPr>
-            <a:r>
-              <a:rPr lang="en-US" sz="950" b="1" spc="150" kern="0" dirty="0">
+            <a:pPr marL="0" indent="0">
+              <a:buNone/>
+            </a:pPr>
+            <a:r>
+              <a:rPr lang="en-US" sz="950" b="1" kern="0" spc="150" dirty="0">
                 <a:solidFill>
                   <a:srgbClr val="1A4FBF"/>
                 </a:solidFill>
@@ -22534,7 +22213,7 @@
           <a:bodyPr wrap="square" lIns="0" tIns="0" rIns="0" bIns="0" rtlCol="0" anchor="ctr"/>
           <a:lstStyle/>
           <a:p>
-            <a:pPr indent="0" marL="0">
+            <a:pPr marL="0" indent="0">
               <a:lnSpc>
                 <a:spcPct val="112000"/>
               </a:lnSpc>
@@ -22603,7 +22282,7 @@
           <a:bodyPr wrap="square" lIns="0" tIns="0" rIns="0" bIns="0" rtlCol="0" anchor="ctr"/>
           <a:lstStyle/>
           <a:p>
-            <a:pPr indent="0" marL="0">
+            <a:pPr marL="0" indent="0">
               <a:lnSpc>
                 <a:spcPct val="112000"/>
               </a:lnSpc>
@@ -22626,7 +22305,7 @@
       </p:sp>
       <p:sp>
         <p:nvSpPr>
-          <p:cNvPr id="25" name="Slide Number Placeholder 0"/>
+          <p:cNvPr id="42" name="Slide Number Placeholder 0"/>
           <p:cNvSpPr>
             <a:spLocks noGrp="1"/>
           </p:cNvSpPr>
@@ -22644,7 +22323,7 @@
           </a:prstGeom>
           <a:extLst>
             <a:ext uri="{C572A759-6A51-4108-AA02-DFA0A04FC94B}">
-              <ma14:wrappingTextBoxFlag xmlns:ma14="http://schemas.microsoft.com/office/mac/drawingml/2011/main" val="0"/>
+              <ma14:wrappingTextBoxFlag xmlns:ma14="http://schemas.microsoft.com/office/mac/drawingml/2011/main" xmlns="" val="0"/>
             </a:ext>
           </a:extLst>
         </p:spPr>
@@ -22665,7 +22344,7 @@
           <a:p>
             <a:pPr algn="l"/>
             <a:fld id="{F7021451-1387-4CA6-816F-3879F97B5CBC}" type="slidenum">
-              <a:rPr b="0" lang="en-US"/>
+              <a:rPr lang="en-US" b="0"/>
               <a:t>8</a:t>
             </a:fld>
             <a:endParaRPr lang="en-US"/>
@@ -22740,7 +22419,7 @@
           <a:bodyPr wrap="square" lIns="0" tIns="0" rIns="0" bIns="0" rtlCol="0" anchor="ctr"/>
           <a:lstStyle/>
           <a:p>
-            <a:pPr algn="l" indent="0" marL="0">
+            <a:pPr marL="0" indent="0" algn="l">
               <a:buNone/>
             </a:pPr>
             <a:r>
@@ -22779,7 +22458,7 @@
           <a:bodyPr wrap="square" lIns="0" tIns="0" rIns="0" bIns="0" rtlCol="0" anchor="ctr"/>
           <a:lstStyle/>
           <a:p>
-            <a:pPr indent="0" marL="0">
+            <a:pPr marL="0" indent="0">
               <a:buNone/>
             </a:pPr>
             <a:r>
@@ -22845,11 +22524,11 @@
           <a:bodyPr wrap="square" lIns="0" tIns="0" rIns="0" bIns="0" rtlCol="0" anchor="ctr"/>
           <a:lstStyle/>
           <a:p>
-            <a:pPr algn="ctr" indent="0" marL="0">
-              <a:buNone/>
-            </a:pPr>
-            <a:r>
-              <a:rPr lang="en-US" sz="900" b="1" spc="100" kern="0" dirty="0">
+            <a:pPr marL="0" indent="0" algn="ctr">
+              <a:buNone/>
+            </a:pPr>
+            <a:r>
+              <a:rPr lang="en-US" sz="900" b="1" kern="0" spc="100" dirty="0">
                 <a:solidFill>
                   <a:srgbClr val="5A05F4"/>
                 </a:solidFill>
@@ -22865,14 +22544,14 @@
       </p:sp>
       <p:pic>
         <p:nvPicPr>
-          <p:cNvPr id="7" name="Image 0" descr="preencoded.png">    </p:cNvPr>
+          <p:cNvPr id="7" name="Image 0" descr="preencoded.png"/>
           <p:cNvPicPr>
             <a:picLocks noChangeAspect="1"/>
           </p:cNvPicPr>
           <p:nvPr/>
         </p:nvPicPr>
         <p:blipFill>
-          <a:blip r:embed="rId1"/>
+          <a:blip r:embed="rId3"/>
           <a:stretch>
             <a:fillRect/>
           </a:stretch>
@@ -22935,7 +22614,7 @@
           <a:bodyPr wrap="square" lIns="0" tIns="0" rIns="0" bIns="0" rtlCol="0" anchor="t"/>
           <a:lstStyle/>
           <a:p>
-            <a:pPr indent="0" marL="0">
+            <a:pPr marL="0" indent="0">
               <a:lnSpc>
                 <a:spcPct val="130000"/>
               </a:lnSpc>
@@ -22952,7 +22631,21 @@
               </a:rPr>
               <a:t>- name: Up stack        </a:t>
             </a:r>
-            <a:pPr indent="0" marL="0">
+            <a:r>
+              <a:rPr lang="en-US" sz="1050" dirty="0">
+                <a:solidFill>
+                  <a:srgbClr val="9A94AA"/>
+                </a:solidFill>
+                <a:latin typeface="Courier New" pitchFamily="34" charset="0"/>
+                <a:ea typeface="Courier New" pitchFamily="34" charset="-122"/>
+                <a:cs typeface="Courier New" pitchFamily="34" charset="-120"/>
+              </a:rPr>
+              <a:t># без UI — для evals не потрібен</a:t>
+            </a:r>
+            <a:endParaRPr lang="en-US" sz="1050" dirty="0"/>
+          </a:p>
+          <a:p>
+            <a:pPr marL="0" indent="0">
               <a:lnSpc>
                 <a:spcPct val="130000"/>
               </a:lnSpc>
@@ -22961,18 +22654,18 @@
             <a:r>
               <a:rPr lang="en-US" sz="1050" dirty="0">
                 <a:solidFill>
-                  <a:srgbClr val="9A94AA"/>
+                  <a:srgbClr val="D8D4E4"/>
                 </a:solidFill>
                 <a:latin typeface="Courier New" pitchFamily="34" charset="0"/>
                 <a:ea typeface="Courier New" pitchFamily="34" charset="-122"/>
                 <a:cs typeface="Courier New" pitchFamily="34" charset="-120"/>
               </a:rPr>
-              <a:t># без UI — для evals не потрібен</a:t>
+              <a:t>  run: docker compose up -d --build service</a:t>
             </a:r>
             <a:endParaRPr lang="en-US" sz="1050" dirty="0"/>
           </a:p>
           <a:p>
-            <a:pPr indent="0" marL="0">
+            <a:pPr marL="0" indent="0">
               <a:lnSpc>
                 <a:spcPct val="130000"/>
               </a:lnSpc>
@@ -22981,18 +22674,18 @@
             <a:r>
               <a:rPr lang="en-US" sz="1050" dirty="0">
                 <a:solidFill>
-                  <a:srgbClr val="D8D4E4"/>
+                  <a:srgbClr val="A98BFF"/>
                 </a:solidFill>
                 <a:latin typeface="Courier New" pitchFamily="34" charset="0"/>
                 <a:ea typeface="Courier New" pitchFamily="34" charset="-122"/>
                 <a:cs typeface="Courier New" pitchFamily="34" charset="-120"/>
               </a:rPr>
-              <a:t>  run: docker compose up -d --build service</a:t>
+              <a:t>- name: Wait for service</a:t>
             </a:r>
             <a:endParaRPr lang="en-US" sz="1050" dirty="0"/>
           </a:p>
           <a:p>
-            <a:pPr indent="0" marL="0">
+            <a:pPr marL="0" indent="0">
               <a:lnSpc>
                 <a:spcPct val="130000"/>
               </a:lnSpc>
@@ -23001,18 +22694,18 @@
             <a:r>
               <a:rPr lang="en-US" sz="1050" dirty="0">
                 <a:solidFill>
-                  <a:srgbClr val="A98BFF"/>
+                  <a:srgbClr val="D8D4E4"/>
                 </a:solidFill>
                 <a:latin typeface="Courier New" pitchFamily="34" charset="0"/>
                 <a:ea typeface="Courier New" pitchFamily="34" charset="-122"/>
                 <a:cs typeface="Courier New" pitchFamily="34" charset="-120"/>
               </a:rPr>
-              <a:t>- name: Wait for service</a:t>
+              <a:t>  run: for i in $(seq 1 40); do</a:t>
             </a:r>
             <a:endParaRPr lang="en-US" sz="1050" dirty="0"/>
           </a:p>
           <a:p>
-            <a:pPr indent="0" marL="0">
+            <a:pPr marL="0" indent="0">
               <a:lnSpc>
                 <a:spcPct val="130000"/>
               </a:lnSpc>
@@ -23027,12 +22720,12 @@
                 <a:ea typeface="Courier New" pitchFamily="34" charset="-122"/>
                 <a:cs typeface="Courier New" pitchFamily="34" charset="-120"/>
               </a:rPr>
-              <a:t>  run: for i in $(seq 1 40); do</a:t>
+              <a:t>         if curl -sf localhost:8080/health; then exit 0; fi</a:t>
             </a:r>
             <a:endParaRPr lang="en-US" sz="1050" dirty="0"/>
           </a:p>
           <a:p>
-            <a:pPr indent="0" marL="0">
+            <a:pPr marL="0" indent="0">
               <a:lnSpc>
                 <a:spcPct val="130000"/>
               </a:lnSpc>
@@ -23047,12 +22740,12 @@
                 <a:ea typeface="Courier New" pitchFamily="34" charset="-122"/>
                 <a:cs typeface="Courier New" pitchFamily="34" charset="-120"/>
               </a:rPr>
-              <a:t>         if curl -sf localhost:8080/health; then exit 0; fi</a:t>
+              <a:t>         sleep 5</a:t>
             </a:r>
             <a:endParaRPr lang="en-US" sz="1050" dirty="0"/>
           </a:p>
           <a:p>
-            <a:pPr indent="0" marL="0">
+            <a:pPr marL="0" indent="0">
               <a:lnSpc>
                 <a:spcPct val="130000"/>
               </a:lnSpc>
@@ -23067,12 +22760,12 @@
                 <a:ea typeface="Courier New" pitchFamily="34" charset="-122"/>
                 <a:cs typeface="Courier New" pitchFamily="34" charset="-120"/>
               </a:rPr>
-              <a:t>         sleep 5</a:t>
+              <a:t>       done; docker compose logs; exit 1</a:t>
             </a:r>
             <a:endParaRPr lang="en-US" sz="1050" dirty="0"/>
           </a:p>
           <a:p>
-            <a:pPr indent="0" marL="0">
+            <a:pPr marL="0" indent="0">
               <a:lnSpc>
                 <a:spcPct val="130000"/>
               </a:lnSpc>
@@ -23081,18 +22774,29 @@
             <a:r>
               <a:rPr lang="en-US" sz="1050" dirty="0">
                 <a:solidFill>
-                  <a:srgbClr val="D8D4E4"/>
+                  <a:srgbClr val="A98BFF"/>
                 </a:solidFill>
                 <a:latin typeface="Courier New" pitchFamily="34" charset="0"/>
                 <a:ea typeface="Courier New" pitchFamily="34" charset="-122"/>
                 <a:cs typeface="Courier New" pitchFamily="34" charset="-120"/>
               </a:rPr>
-              <a:t>       done; docker compose logs; exit 1</a:t>
+              <a:t>- name: Wait for gateway   </a:t>
+            </a:r>
+            <a:r>
+              <a:rPr lang="en-US" sz="1050" dirty="0">
+                <a:solidFill>
+                  <a:srgbClr val="9A94AA"/>
+                </a:solidFill>
+                <a:latin typeface="Courier New" pitchFamily="34" charset="0"/>
+                <a:ea typeface="Courier New" pitchFamily="34" charset="-122"/>
+                <a:cs typeface="Courier New" pitchFamily="34" charset="-120"/>
+              </a:rPr>
+              <a:t># холодний LiteLLM: 500</a:t>
             </a:r>
             <a:endParaRPr lang="en-US" sz="1050" dirty="0"/>
           </a:p>
           <a:p>
-            <a:pPr indent="0" marL="0">
+            <a:pPr marL="0" indent="0">
               <a:lnSpc>
                 <a:spcPct val="130000"/>
               </a:lnSpc>
@@ -23107,9 +22811,12 @@
                 <a:ea typeface="Courier New" pitchFamily="34" charset="-122"/>
                 <a:cs typeface="Courier New" pitchFamily="34" charset="-120"/>
               </a:rPr>
-              <a:t>- name: Wait for gateway   </a:t>
-            </a:r>
-            <a:pPr indent="0" marL="0">
+              <a:t>- name: Evals</a:t>
+            </a:r>
+            <a:endParaRPr lang="en-US" sz="1050" dirty="0"/>
+          </a:p>
+          <a:p>
+            <a:pPr marL="0" indent="0">
               <a:lnSpc>
                 <a:spcPct val="130000"/>
               </a:lnSpc>
@@ -23118,18 +22825,18 @@
             <a:r>
               <a:rPr lang="en-US" sz="1050" dirty="0">
                 <a:solidFill>
-                  <a:srgbClr val="9A94AA"/>
+                  <a:srgbClr val="D8D4E4"/>
                 </a:solidFill>
                 <a:latin typeface="Courier New" pitchFamily="34" charset="0"/>
                 <a:ea typeface="Courier New" pitchFamily="34" charset="-122"/>
                 <a:cs typeface="Courier New" pitchFamily="34" charset="-120"/>
               </a:rPr>
-              <a:t># холодний LiteLLM: 500</a:t>
+              <a:t>  run: python evals/run.py --dataset evals/golden.jsonl \</a:t>
             </a:r>
             <a:endParaRPr lang="en-US" sz="1050" dirty="0"/>
           </a:p>
           <a:p>
-            <a:pPr indent="0" marL="0">
+            <a:pPr marL="0" indent="0">
               <a:lnSpc>
                 <a:spcPct val="130000"/>
               </a:lnSpc>
@@ -23138,18 +22845,18 @@
             <a:r>
               <a:rPr lang="en-US" sz="1050" dirty="0">
                 <a:solidFill>
-                  <a:srgbClr val="A98BFF"/>
+                  <a:srgbClr val="D8D4E4"/>
                 </a:solidFill>
                 <a:latin typeface="Courier New" pitchFamily="34" charset="0"/>
                 <a:ea typeface="Courier New" pitchFamily="34" charset="-122"/>
                 <a:cs typeface="Courier New" pitchFamily="34" charset="-120"/>
               </a:rPr>
-              <a:t>- name: Evals</a:t>
+              <a:t>         --threshold 5</a:t>
             </a:r>
             <a:endParaRPr lang="en-US" sz="1050" dirty="0"/>
           </a:p>
           <a:p>
-            <a:pPr indent="0" marL="0">
+            <a:pPr marL="0" indent="0">
               <a:lnSpc>
                 <a:spcPct val="130000"/>
               </a:lnSpc>
@@ -23158,18 +22865,29 @@
             <a:r>
               <a:rPr lang="en-US" sz="1050" dirty="0">
                 <a:solidFill>
-                  <a:srgbClr val="D8D4E4"/>
+                  <a:srgbClr val="A98BFF"/>
                 </a:solidFill>
                 <a:latin typeface="Courier New" pitchFamily="34" charset="0"/>
                 <a:ea typeface="Courier New" pitchFamily="34" charset="-122"/>
                 <a:cs typeface="Courier New" pitchFamily="34" charset="-120"/>
               </a:rPr>
-              <a:t>  run: python evals/run.py --dataset evals/golden.jsonl \</a:t>
+              <a:t>- name: Logs on failure   </a:t>
+            </a:r>
+            <a:r>
+              <a:rPr lang="en-US" sz="1050" dirty="0">
+                <a:solidFill>
+                  <a:srgbClr val="9A94AA"/>
+                </a:solidFill>
+                <a:latin typeface="Courier New" pitchFamily="34" charset="0"/>
+                <a:ea typeface="Courier New" pitchFamily="34" charset="-122"/>
+                <a:cs typeface="Courier New" pitchFamily="34" charset="-120"/>
+              </a:rPr>
+              <a:t># if: failure()</a:t>
             </a:r>
             <a:endParaRPr lang="en-US" sz="1050" dirty="0"/>
           </a:p>
           <a:p>
-            <a:pPr indent="0" marL="0">
+            <a:pPr marL="0" indent="0">
               <a:lnSpc>
                 <a:spcPct val="130000"/>
               </a:lnSpc>
@@ -23178,87 +22896,219 @@
             <a:r>
               <a:rPr lang="en-US" sz="1050" dirty="0">
                 <a:solidFill>
-                  <a:srgbClr val="D8D4E4"/>
+                  <a:srgbClr val="A98BFF"/>
                 </a:solidFill>
                 <a:latin typeface="Courier New" pitchFamily="34" charset="0"/>
                 <a:ea typeface="Courier New" pitchFamily="34" charset="-122"/>
                 <a:cs typeface="Courier New" pitchFamily="34" charset="-120"/>
               </a:rPr>
-              <a:t>         --threshold 5</a:t>
-            </a:r>
-            <a:endParaRPr lang="en-US" sz="1050" dirty="0"/>
-          </a:p>
-          <a:p>
-            <a:pPr indent="0" marL="0">
-              <a:lnSpc>
-                <a:spcPct val="130000"/>
-              </a:lnSpc>
-              <a:buNone/>
-            </a:pPr>
+              <a:t>- name: Down              </a:t>
+            </a:r>
             <a:r>
               <a:rPr lang="en-US" sz="1050" dirty="0">
                 <a:solidFill>
-                  <a:srgbClr val="A98BFF"/>
+                  <a:srgbClr val="9A94AA"/>
                 </a:solidFill>
                 <a:latin typeface="Courier New" pitchFamily="34" charset="0"/>
                 <a:ea typeface="Courier New" pitchFamily="34" charset="-122"/>
                 <a:cs typeface="Courier New" pitchFamily="34" charset="-120"/>
               </a:rPr>
-              <a:t>- name: Logs on failure   </a:t>
-            </a:r>
-            <a:pPr indent="0" marL="0">
-              <a:lnSpc>
-                <a:spcPct val="130000"/>
-              </a:lnSpc>
-              <a:buNone/>
-            </a:pPr>
-            <a:r>
-              <a:rPr lang="en-US" sz="1050" dirty="0">
-                <a:solidFill>
-                  <a:srgbClr val="9A94AA"/>
+              <a:t># if: always()</a:t>
+            </a:r>
+            <a:endParaRPr lang="en-US" sz="1050" dirty="0"/>
+          </a:p>
+        </p:txBody>
+      </p:sp>
+      <p:sp>
+        <p:nvSpPr>
+          <p:cNvPr id="10" name="Text 7"/>
+          <p:cNvSpPr/>
+          <p:nvPr/>
+        </p:nvSpPr>
+        <p:spPr>
+          <a:xfrm>
+            <a:off x="7498080" y="1783080"/>
+            <a:ext cx="4114800" cy="292608"/>
+          </a:xfrm>
+          <a:prstGeom prst="rect">
+            <a:avLst/>
+          </a:prstGeom>
+          <a:noFill/>
+          <a:ln/>
+        </p:spPr>
+        <p:txBody>
+          <a:bodyPr wrap="square" lIns="0" tIns="0" rIns="0" bIns="0" rtlCol="0" anchor="ctr"/>
+          <a:lstStyle/>
+          <a:p>
+            <a:pPr marL="0" indent="0">
+              <a:buNone/>
+            </a:pPr>
+            <a:r>
+              <a:rPr lang="en-US" sz="1050" b="1" dirty="0">
+                <a:solidFill>
+                  <a:srgbClr val="5A05F4"/>
                 </a:solidFill>
                 <a:latin typeface="Courier New" pitchFamily="34" charset="0"/>
                 <a:ea typeface="Courier New" pitchFamily="34" charset="-122"/>
                 <a:cs typeface="Courier New" pitchFamily="34" charset="-120"/>
               </a:rPr>
-              <a:t># if: failure()</a:t>
+              <a:t>без UI</a:t>
             </a:r>
             <a:endParaRPr lang="en-US" sz="1050" dirty="0"/>
           </a:p>
-          <a:p>
-            <a:pPr indent="0" marL="0">
-              <a:lnSpc>
-                <a:spcPct val="130000"/>
-              </a:lnSpc>
-              <a:buNone/>
-            </a:pPr>
-            <a:r>
-              <a:rPr lang="en-US" sz="1050" dirty="0">
-                <a:solidFill>
-                  <a:srgbClr val="A98BFF"/>
+        </p:txBody>
+      </p:sp>
+      <p:sp>
+        <p:nvSpPr>
+          <p:cNvPr id="11" name="Text 8"/>
+          <p:cNvSpPr/>
+          <p:nvPr/>
+        </p:nvSpPr>
+        <p:spPr>
+          <a:xfrm>
+            <a:off x="7498080" y="2057400"/>
+            <a:ext cx="4114800" cy="365760"/>
+          </a:xfrm>
+          <a:prstGeom prst="rect">
+            <a:avLst/>
+          </a:prstGeom>
+          <a:noFill/>
+          <a:ln/>
+        </p:spPr>
+        <p:txBody>
+          <a:bodyPr wrap="square" lIns="0" tIns="0" rIns="0" bIns="0" rtlCol="0" anchor="ctr"/>
+          <a:lstStyle/>
+          <a:p>
+            <a:pPr marL="0" indent="0">
+              <a:buNone/>
+            </a:pPr>
+            <a:r>
+              <a:rPr lang="en-US" sz="1100" dirty="0">
+                <a:solidFill>
+                  <a:srgbClr val="434343"/>
+                </a:solidFill>
+                <a:latin typeface="Montserrat" pitchFamily="34" charset="0"/>
+                <a:ea typeface="Montserrat" pitchFamily="34" charset="-122"/>
+                <a:cs typeface="Montserrat" pitchFamily="34" charset="-120"/>
+              </a:rPr>
+              <a:t>збірка фронтенду в CI — марні хвилини</a:t>
+            </a:r>
+            <a:endParaRPr lang="en-US" sz="1100" dirty="0"/>
+          </a:p>
+        </p:txBody>
+      </p:sp>
+      <p:sp>
+        <p:nvSpPr>
+          <p:cNvPr id="12" name="Text 9"/>
+          <p:cNvSpPr/>
+          <p:nvPr/>
+        </p:nvSpPr>
+        <p:spPr>
+          <a:xfrm>
+            <a:off x="7498080" y="2441448"/>
+            <a:ext cx="4114800" cy="292608"/>
+          </a:xfrm>
+          <a:prstGeom prst="rect">
+            <a:avLst/>
+          </a:prstGeom>
+          <a:noFill/>
+          <a:ln/>
+        </p:spPr>
+        <p:txBody>
+          <a:bodyPr wrap="square" lIns="0" tIns="0" rIns="0" bIns="0" rtlCol="0" anchor="ctr"/>
+          <a:lstStyle/>
+          <a:p>
+            <a:pPr marL="0" indent="0">
+              <a:buNone/>
+            </a:pPr>
+            <a:r>
+              <a:rPr lang="en-US" sz="1050" b="1" dirty="0">
+                <a:solidFill>
+                  <a:srgbClr val="5A05F4"/>
                 </a:solidFill>
                 <a:latin typeface="Courier New" pitchFamily="34" charset="0"/>
                 <a:ea typeface="Courier New" pitchFamily="34" charset="-122"/>
                 <a:cs typeface="Courier New" pitchFamily="34" charset="-120"/>
               </a:rPr>
-              <a:t>- name: Down              </a:t>
-            </a:r>
-            <a:pPr indent="0" marL="0">
-              <a:lnSpc>
-                <a:spcPct val="130000"/>
-              </a:lnSpc>
-              <a:buNone/>
-            </a:pPr>
-            <a:r>
-              <a:rPr lang="en-US" sz="1050" dirty="0">
-                <a:solidFill>
-                  <a:srgbClr val="9A94AA"/>
+              <a:t>if curl; then</a:t>
+            </a:r>
+            <a:endParaRPr lang="en-US" sz="1050" dirty="0"/>
+          </a:p>
+        </p:txBody>
+      </p:sp>
+      <p:sp>
+        <p:nvSpPr>
+          <p:cNvPr id="13" name="Text 10"/>
+          <p:cNvSpPr/>
+          <p:nvPr/>
+        </p:nvSpPr>
+        <p:spPr>
+          <a:xfrm>
+            <a:off x="7498080" y="2715768"/>
+            <a:ext cx="4114800" cy="365760"/>
+          </a:xfrm>
+          <a:prstGeom prst="rect">
+            <a:avLst/>
+          </a:prstGeom>
+          <a:noFill/>
+          <a:ln/>
+        </p:spPr>
+        <p:txBody>
+          <a:bodyPr wrap="square" lIns="0" tIns="0" rIns="0" bIns="0" rtlCol="0" anchor="ctr"/>
+          <a:lstStyle/>
+          <a:p>
+            <a:pPr marL="0" indent="0">
+              <a:buNone/>
+            </a:pPr>
+            <a:r>
+              <a:rPr lang="en-US" sz="1100" dirty="0">
+                <a:solidFill>
+                  <a:srgbClr val="434343"/>
+                </a:solidFill>
+                <a:latin typeface="Montserrat" pitchFamily="34" charset="0"/>
+                <a:ea typeface="Montserrat" pitchFamily="34" charset="-122"/>
+                <a:cs typeface="Montserrat" pitchFamily="34" charset="-120"/>
+              </a:rPr>
+              <a:t>а не curl &amp;&amp; — bash -e вб'є крок на першій невдачі</a:t>
+            </a:r>
+            <a:endParaRPr lang="en-US" sz="1100" dirty="0"/>
+          </a:p>
+        </p:txBody>
+      </p:sp>
+      <p:sp>
+        <p:nvSpPr>
+          <p:cNvPr id="14" name="Text 11"/>
+          <p:cNvSpPr/>
+          <p:nvPr/>
+        </p:nvSpPr>
+        <p:spPr>
+          <a:xfrm>
+            <a:off x="7498080" y="3099816"/>
+            <a:ext cx="4114800" cy="292608"/>
+          </a:xfrm>
+          <a:prstGeom prst="rect">
+            <a:avLst/>
+          </a:prstGeom>
+          <a:noFill/>
+          <a:ln/>
+        </p:spPr>
+        <p:txBody>
+          <a:bodyPr wrap="square" lIns="0" tIns="0" rIns="0" bIns="0" rtlCol="0" anchor="ctr"/>
+          <a:lstStyle/>
+          <a:p>
+            <a:pPr marL="0" indent="0">
+              <a:buNone/>
+            </a:pPr>
+            <a:r>
+              <a:rPr lang="en-US" sz="1050" b="1" dirty="0">
+                <a:solidFill>
+                  <a:srgbClr val="5A05F4"/>
                 </a:solidFill>
                 <a:latin typeface="Courier New" pitchFamily="34" charset="0"/>
                 <a:ea typeface="Courier New" pitchFamily="34" charset="-122"/>
                 <a:cs typeface="Courier New" pitchFamily="34" charset="-120"/>
               </a:rPr>
-              <a:t># if: always()</a:t>
+              <a:t>wait gateway</a:t>
             </a:r>
             <a:endParaRPr lang="en-US" sz="1050" dirty="0"/>
           </a:p>
@@ -23266,13 +23116,52 @@
       </p:sp>
       <p:sp>
         <p:nvSpPr>
-          <p:cNvPr id="10" name="Text 7"/>
-          <p:cNvSpPr/>
-          <p:nvPr/>
-        </p:nvSpPr>
-        <p:spPr>
-          <a:xfrm>
-            <a:off x="7498080" y="1783080"/>
+          <p:cNvPr id="15" name="Text 12"/>
+          <p:cNvSpPr/>
+          <p:nvPr/>
+        </p:nvSpPr>
+        <p:spPr>
+          <a:xfrm>
+            <a:off x="7498080" y="3374136"/>
+            <a:ext cx="4114800" cy="365760"/>
+          </a:xfrm>
+          <a:prstGeom prst="rect">
+            <a:avLst/>
+          </a:prstGeom>
+          <a:noFill/>
+          <a:ln/>
+        </p:spPr>
+        <p:txBody>
+          <a:bodyPr wrap="square" lIns="0" tIns="0" rIns="0" bIns="0" rtlCol="0" anchor="ctr"/>
+          <a:lstStyle/>
+          <a:p>
+            <a:pPr marL="0" indent="0">
+              <a:buNone/>
+            </a:pPr>
+            <a:r>
+              <a:rPr lang="en-US" sz="1100" dirty="0">
+                <a:solidFill>
+                  <a:srgbClr val="434343"/>
+                </a:solidFill>
+                <a:latin typeface="Montserrat" pitchFamily="34" charset="0"/>
+                <a:ea typeface="Montserrat" pitchFamily="34" charset="-122"/>
+                <a:cs typeface="Montserrat" pitchFamily="34" charset="-120"/>
+              </a:rPr>
+              <a:t>окреме очікування: холодний адаптер дає 500</a:t>
+            </a:r>
+            <a:endParaRPr lang="en-US" sz="1100" dirty="0"/>
+          </a:p>
+        </p:txBody>
+      </p:sp>
+      <p:sp>
+        <p:nvSpPr>
+          <p:cNvPr id="16" name="Text 13"/>
+          <p:cNvSpPr/>
+          <p:nvPr/>
+        </p:nvSpPr>
+        <p:spPr>
+          <a:xfrm>
+            <a:off x="7498080" y="3758184"/>
             <a:ext cx="4114800" cy="292608"/>
           </a:xfrm>
           <a:prstGeom prst="rect">
@@ -23285,7 +23174,7 @@
           <a:bodyPr wrap="square" lIns="0" tIns="0" rIns="0" bIns="0" rtlCol="0" anchor="ctr"/>
           <a:lstStyle/>
           <a:p>
-            <a:pPr indent="0" marL="0">
+            <a:pPr marL="0" indent="0">
               <a:buNone/>
             </a:pPr>
             <a:r>
@@ -23297,7 +23186,7 @@
                 <a:ea typeface="Courier New" pitchFamily="34" charset="-122"/>
                 <a:cs typeface="Courier New" pitchFamily="34" charset="-120"/>
               </a:rPr>
-              <a:t>без UI</a:t>
+              <a:t>logs on failure</a:t>
             </a:r>
             <a:endParaRPr lang="en-US" sz="1050" dirty="0"/>
           </a:p>
@@ -23305,13 +23194,13 @@
       </p:sp>
       <p:sp>
         <p:nvSpPr>
-          <p:cNvPr id="11" name="Text 8"/>
-          <p:cNvSpPr/>
-          <p:nvPr/>
-        </p:nvSpPr>
-        <p:spPr>
-          <a:xfrm>
-            <a:off x="7498080" y="2057400"/>
+          <p:cNvPr id="17" name="Text 14"/>
+          <p:cNvSpPr/>
+          <p:nvPr/>
+        </p:nvSpPr>
+        <p:spPr>
+          <a:xfrm>
+            <a:off x="7498080" y="4032504"/>
             <a:ext cx="4114800" cy="365760"/>
           </a:xfrm>
           <a:prstGeom prst="rect">
@@ -23324,7 +23213,7 @@
           <a:bodyPr wrap="square" lIns="0" tIns="0" rIns="0" bIns="0" rtlCol="0" anchor="ctr"/>
           <a:lstStyle/>
           <a:p>
-            <a:pPr indent="0" marL="0">
+            <a:pPr marL="0" indent="0">
               <a:buNone/>
             </a:pPr>
             <a:r>
@@ -23336,7 +23225,7 @@
                 <a:ea typeface="Montserrat" pitchFamily="34" charset="-122"/>
                 <a:cs typeface="Montserrat" pitchFamily="34" charset="-120"/>
               </a:rPr>
-              <a:t>збірка фронтенду в CI — марні хвилини</a:t>
+              <a:t>червоний без логів — загадка; з логами — діагноз</a:t>
             </a:r>
             <a:endParaRPr lang="en-US" sz="1100" dirty="0"/>
           </a:p>
@@ -23344,13 +23233,13 @@
       </p:sp>
       <p:sp>
         <p:nvSpPr>
-          <p:cNvPr id="12" name="Text 9"/>
-          <p:cNvSpPr/>
-          <p:nvPr/>
-        </p:nvSpPr>
-        <p:spPr>
-          <a:xfrm>
-            <a:off x="7498080" y="2441448"/>
+          <p:cNvPr id="18" name="Text 15"/>
+          <p:cNvSpPr/>
+          <p:nvPr/>
+        </p:nvSpPr>
+        <p:spPr>
+          <a:xfrm>
+            <a:off x="7498080" y="4416552"/>
             <a:ext cx="4114800" cy="292608"/>
           </a:xfrm>
           <a:prstGeom prst="rect">
@@ -23363,7 +23252,7 @@
           <a:bodyPr wrap="square" lIns="0" tIns="0" rIns="0" bIns="0" rtlCol="0" anchor="ctr"/>
           <a:lstStyle/>
           <a:p>
-            <a:pPr indent="0" marL="0">
+            <a:pPr marL="0" indent="0">
               <a:buNone/>
             </a:pPr>
             <a:r>
@@ -23375,240 +23264,6 @@
                 <a:ea typeface="Courier New" pitchFamily="34" charset="-122"/>
                 <a:cs typeface="Courier New" pitchFamily="34" charset="-120"/>
               </a:rPr>
-              <a:t>if curl; then</a:t>
-            </a:r>
-            <a:endParaRPr lang="en-US" sz="1050" dirty="0"/>
-          </a:p>
-        </p:txBody>
-      </p:sp>
-      <p:sp>
-        <p:nvSpPr>
-          <p:cNvPr id="13" name="Text 10"/>
-          <p:cNvSpPr/>
-          <p:nvPr/>
-        </p:nvSpPr>
-        <p:spPr>
-          <a:xfrm>
-            <a:off x="7498080" y="2715768"/>
-            <a:ext cx="4114800" cy="365760"/>
-          </a:xfrm>
-          <a:prstGeom prst="rect">
-            <a:avLst/>
-          </a:prstGeom>
-          <a:noFill/>
-          <a:ln/>
-        </p:spPr>
-        <p:txBody>
-          <a:bodyPr wrap="square" lIns="0" tIns="0" rIns="0" bIns="0" rtlCol="0" anchor="ctr"/>
-          <a:lstStyle/>
-          <a:p>
-            <a:pPr indent="0" marL="0">
-              <a:buNone/>
-            </a:pPr>
-            <a:r>
-              <a:rPr lang="en-US" sz="1100" dirty="0">
-                <a:solidFill>
-                  <a:srgbClr val="434343"/>
-                </a:solidFill>
-                <a:latin typeface="Montserrat" pitchFamily="34" charset="0"/>
-                <a:ea typeface="Montserrat" pitchFamily="34" charset="-122"/>
-                <a:cs typeface="Montserrat" pitchFamily="34" charset="-120"/>
-              </a:rPr>
-              <a:t>а не curl &amp;&amp; — bash -e вб'є крок на першій невдачі</a:t>
-            </a:r>
-            <a:endParaRPr lang="en-US" sz="1100" dirty="0"/>
-          </a:p>
-        </p:txBody>
-      </p:sp>
-      <p:sp>
-        <p:nvSpPr>
-          <p:cNvPr id="14" name="Text 11"/>
-          <p:cNvSpPr/>
-          <p:nvPr/>
-        </p:nvSpPr>
-        <p:spPr>
-          <a:xfrm>
-            <a:off x="7498080" y="3099816"/>
-            <a:ext cx="4114800" cy="292608"/>
-          </a:xfrm>
-          <a:prstGeom prst="rect">
-            <a:avLst/>
-          </a:prstGeom>
-          <a:noFill/>
-          <a:ln/>
-        </p:spPr>
-        <p:txBody>
-          <a:bodyPr wrap="square" lIns="0" tIns="0" rIns="0" bIns="0" rtlCol="0" anchor="ctr"/>
-          <a:lstStyle/>
-          <a:p>
-            <a:pPr indent="0" marL="0">
-              <a:buNone/>
-            </a:pPr>
-            <a:r>
-              <a:rPr lang="en-US" sz="1050" b="1" dirty="0">
-                <a:solidFill>
-                  <a:srgbClr val="5A05F4"/>
-                </a:solidFill>
-                <a:latin typeface="Courier New" pitchFamily="34" charset="0"/>
-                <a:ea typeface="Courier New" pitchFamily="34" charset="-122"/>
-                <a:cs typeface="Courier New" pitchFamily="34" charset="-120"/>
-              </a:rPr>
-              <a:t>wait gateway</a:t>
-            </a:r>
-            <a:endParaRPr lang="en-US" sz="1050" dirty="0"/>
-          </a:p>
-        </p:txBody>
-      </p:sp>
-      <p:sp>
-        <p:nvSpPr>
-          <p:cNvPr id="15" name="Text 12"/>
-          <p:cNvSpPr/>
-          <p:nvPr/>
-        </p:nvSpPr>
-        <p:spPr>
-          <a:xfrm>
-            <a:off x="7498080" y="3374136"/>
-            <a:ext cx="4114800" cy="365760"/>
-          </a:xfrm>
-          <a:prstGeom prst="rect">
-            <a:avLst/>
-          </a:prstGeom>
-          <a:noFill/>
-          <a:ln/>
-        </p:spPr>
-        <p:txBody>
-          <a:bodyPr wrap="square" lIns="0" tIns="0" rIns="0" bIns="0" rtlCol="0" anchor="ctr"/>
-          <a:lstStyle/>
-          <a:p>
-            <a:pPr indent="0" marL="0">
-              <a:buNone/>
-            </a:pPr>
-            <a:r>
-              <a:rPr lang="en-US" sz="1100" dirty="0">
-                <a:solidFill>
-                  <a:srgbClr val="434343"/>
-                </a:solidFill>
-                <a:latin typeface="Montserrat" pitchFamily="34" charset="0"/>
-                <a:ea typeface="Montserrat" pitchFamily="34" charset="-122"/>
-                <a:cs typeface="Montserrat" pitchFamily="34" charset="-120"/>
-              </a:rPr>
-              <a:t>окреме очікування: холодний адаптер дає 500</a:t>
-            </a:r>
-            <a:endParaRPr lang="en-US" sz="1100" dirty="0"/>
-          </a:p>
-        </p:txBody>
-      </p:sp>
-      <p:sp>
-        <p:nvSpPr>
-          <p:cNvPr id="16" name="Text 13"/>
-          <p:cNvSpPr/>
-          <p:nvPr/>
-        </p:nvSpPr>
-        <p:spPr>
-          <a:xfrm>
-            <a:off x="7498080" y="3758184"/>
-            <a:ext cx="4114800" cy="292608"/>
-          </a:xfrm>
-          <a:prstGeom prst="rect">
-            <a:avLst/>
-          </a:prstGeom>
-          <a:noFill/>
-          <a:ln/>
-        </p:spPr>
-        <p:txBody>
-          <a:bodyPr wrap="square" lIns="0" tIns="0" rIns="0" bIns="0" rtlCol="0" anchor="ctr"/>
-          <a:lstStyle/>
-          <a:p>
-            <a:pPr indent="0" marL="0">
-              <a:buNone/>
-            </a:pPr>
-            <a:r>
-              <a:rPr lang="en-US" sz="1050" b="1" dirty="0">
-                <a:solidFill>
-                  <a:srgbClr val="5A05F4"/>
-                </a:solidFill>
-                <a:latin typeface="Courier New" pitchFamily="34" charset="0"/>
-                <a:ea typeface="Courier New" pitchFamily="34" charset="-122"/>
-                <a:cs typeface="Courier New" pitchFamily="34" charset="-120"/>
-              </a:rPr>
-              <a:t>logs on failure</a:t>
-            </a:r>
-            <a:endParaRPr lang="en-US" sz="1050" dirty="0"/>
-          </a:p>
-        </p:txBody>
-      </p:sp>
-      <p:sp>
-        <p:nvSpPr>
-          <p:cNvPr id="17" name="Text 14"/>
-          <p:cNvSpPr/>
-          <p:nvPr/>
-        </p:nvSpPr>
-        <p:spPr>
-          <a:xfrm>
-            <a:off x="7498080" y="4032504"/>
-            <a:ext cx="4114800" cy="365760"/>
-          </a:xfrm>
-          <a:prstGeom prst="rect">
-            <a:avLst/>
-          </a:prstGeom>
-          <a:noFill/>
-          <a:ln/>
-        </p:spPr>
-        <p:txBody>
-          <a:bodyPr wrap="square" lIns="0" tIns="0" rIns="0" bIns="0" rtlCol="0" anchor="ctr"/>
-          <a:lstStyle/>
-          <a:p>
-            <a:pPr indent="0" marL="0">
-              <a:buNone/>
-            </a:pPr>
-            <a:r>
-              <a:rPr lang="en-US" sz="1100" dirty="0">
-                <a:solidFill>
-                  <a:srgbClr val="434343"/>
-                </a:solidFill>
-                <a:latin typeface="Montserrat" pitchFamily="34" charset="0"/>
-                <a:ea typeface="Montserrat" pitchFamily="34" charset="-122"/>
-                <a:cs typeface="Montserrat" pitchFamily="34" charset="-120"/>
-              </a:rPr>
-              <a:t>червоний без логів — загадка; з логами — діагноз</a:t>
-            </a:r>
-            <a:endParaRPr lang="en-US" sz="1100" dirty="0"/>
-          </a:p>
-        </p:txBody>
-      </p:sp>
-      <p:sp>
-        <p:nvSpPr>
-          <p:cNvPr id="18" name="Text 15"/>
-          <p:cNvSpPr/>
-          <p:nvPr/>
-        </p:nvSpPr>
-        <p:spPr>
-          <a:xfrm>
-            <a:off x="7498080" y="4416552"/>
-            <a:ext cx="4114800" cy="292608"/>
-          </a:xfrm>
-          <a:prstGeom prst="rect">
-            <a:avLst/>
-          </a:prstGeom>
-          <a:noFill/>
-          <a:ln/>
-        </p:spPr>
-        <p:txBody>
-          <a:bodyPr wrap="square" lIns="0" tIns="0" rIns="0" bIns="0" rtlCol="0" anchor="ctr"/>
-          <a:lstStyle/>
-          <a:p>
-            <a:pPr indent="0" marL="0">
-              <a:buNone/>
-            </a:pPr>
-            <a:r>
-              <a:rPr lang="en-US" sz="1050" b="1" dirty="0">
-                <a:solidFill>
-                  <a:srgbClr val="5A05F4"/>
-                </a:solidFill>
-                <a:latin typeface="Courier New" pitchFamily="34" charset="0"/>
-                <a:ea typeface="Courier New" pitchFamily="34" charset="-122"/>
-                <a:cs typeface="Courier New" pitchFamily="34" charset="-120"/>
-              </a:rPr>
               <a:t>down · always()</a:t>
             </a:r>
             <a:endParaRPr lang="en-US" sz="1050" dirty="0"/>
@@ -23636,7 +23291,7 @@
           <a:bodyPr wrap="square" lIns="0" tIns="0" rIns="0" bIns="0" rtlCol="0" anchor="ctr"/>
           <a:lstStyle/>
           <a:p>
-            <a:pPr indent="0" marL="0">
+            <a:pPr marL="0" indent="0">
               <a:buNone/>
             </a:pPr>
             <a:r>
@@ -23697,7 +23352,7 @@
           <a:bodyPr wrap="square" lIns="0" tIns="0" rIns="0" bIns="0" rtlCol="0" anchor="ctr"/>
           <a:lstStyle/>
           <a:p>
-            <a:pPr indent="0" marL="0">
+            <a:pPr marL="0" indent="0">
               <a:lnSpc>
                 <a:spcPct val="112000"/>
               </a:lnSpc>
@@ -23738,7 +23393,7 @@
           </a:prstGeom>
           <a:extLst>
             <a:ext uri="{C572A759-6A51-4108-AA02-DFA0A04FC94B}">
-              <ma14:wrappingTextBoxFlag xmlns:ma14="http://schemas.microsoft.com/office/mac/drawingml/2011/main" val="0"/>
+              <ma14:wrappingTextBoxFlag xmlns:ma14="http://schemas.microsoft.com/office/mac/drawingml/2011/main" xmlns="" val="0"/>
             </a:ext>
           </a:extLst>
         </p:spPr>
@@ -23759,7 +23414,7 @@
           <a:p>
             <a:pPr algn="l"/>
             <a:fld id="{F7021451-1387-4CA6-816F-3879F97B5CBC}" type="slidenum">
-              <a:rPr b="0" lang="en-US"/>
+              <a:rPr lang="en-US" b="0"/>
               <a:t>9</a:t>
             </a:fld>
             <a:endParaRPr lang="en-US"/>
@@ -24067,4 +23722,299 @@
     </a:ext>
   </a:extLst>
 </a:theme>
+</file>
+
+<file path=ppt/theme/theme2.xml><?xml version="1.0" encoding="utf-8"?>
+<a:theme xmlns:a="http://schemas.openxmlformats.org/drawingml/2006/main" name="Office Theme">
+  <a:themeElements>
+    <a:clrScheme name="Office">
+      <a:dk1>
+        <a:sysClr val="windowText" lastClr="000000"/>
+      </a:dk1>
+      <a:lt1>
+        <a:sysClr val="window" lastClr="FFFFFF"/>
+      </a:lt1>
+      <a:dk2>
+        <a:srgbClr val="44546A"/>
+      </a:dk2>
+      <a:lt2>
+        <a:srgbClr val="E7E6E6"/>
+      </a:lt2>
+      <a:accent1>
+        <a:srgbClr val="4472C4"/>
+      </a:accent1>
+      <a:accent2>
+        <a:srgbClr val="ED7D31"/>
+      </a:accent2>
+      <a:accent3>
+        <a:srgbClr val="A5A5A5"/>
+      </a:accent3>
+      <a:accent4>
+        <a:srgbClr val="FFC000"/>
+      </a:accent4>
+      <a:accent5>
+        <a:srgbClr val="5B9BD5"/>
+      </a:accent5>
+      <a:accent6>
+        <a:srgbClr val="70AD47"/>
+      </a:accent6>
+      <a:hlink>
+        <a:srgbClr val="0563C1"/>
+      </a:hlink>
+      <a:folHlink>
+        <a:srgbClr val="954F72"/>
+      </a:folHlink>
+    </a:clrScheme>
+    <a:fontScheme name="Office">
+      <a:majorFont>
+        <a:latin typeface="Calibri Light" panose="020F0302020204030204"/>
+        <a:ea typeface=""/>
+        <a:cs typeface=""/>
+        <a:font script="Jpan" typeface="游ゴシック Light"/>
+        <a:font script="Hang" typeface="맑은 고딕"/>
+        <a:font script="Hans" typeface="等线 Light"/>
+        <a:font script="Hant" typeface="新細明體"/>
+        <a:font script="Arab" typeface="Times New Roman"/>
+        <a:font script="Hebr" typeface="Times New Roman"/>
+        <a:font script="Thai" typeface="Angsana New"/>
+        <a:font script="Ethi" typeface="Nyala"/>
+        <a:font script="Beng" typeface="Vrinda"/>
+        <a:font script="Gujr" typeface="Shruti"/>
+        <a:font script="Khmr" typeface="MoolBoran"/>
+        <a:font script="Knda" typeface="Tunga"/>
+        <a:font script="Guru" typeface="Raavi"/>
+        <a:font script="Cans" typeface="Euphemia"/>
+        <a:font script="Cher" typeface="Plantagenet Cherokee"/>
+        <a:font script="Yiii" typeface="Microsoft Yi Baiti"/>
+        <a:font script="Tibt" typeface="Microsoft Himalaya"/>
+        <a:font script="Thaa" typeface="MV Boli"/>
+        <a:font script="Deva" typeface="Mangal"/>
+        <a:font script="Telu" typeface="Gautami"/>
+        <a:font script="Taml" typeface="Latha"/>
+        <a:font script="Syrc" typeface="Estrangelo Edessa"/>
+        <a:font script="Orya" typeface="Kalinga"/>
+        <a:font script="Mlym" typeface="Kartika"/>
+        <a:font script="Laoo" typeface="DokChampa"/>
+        <a:font script="Sinh" typeface="Iskoola Pota"/>
+        <a:font script="Mong" typeface="Mongolian Baiti"/>
+        <a:font script="Viet" typeface="Times New Roman"/>
+        <a:font script="Uigh" typeface="Microsoft Uighur"/>
+        <a:font script="Geor" typeface="Sylfaen"/>
+        <a:font script="Armn" typeface="Arial"/>
+        <a:font script="Bugi" typeface="Leelawadee UI"/>
+        <a:font script="Bopo" typeface="Microsoft JhengHei"/>
+        <a:font script="Java" typeface="Javanese Text"/>
+        <a:font script="Lisu" typeface="Segoe UI"/>
+        <a:font script="Mymr" typeface="Myanmar Text"/>
+        <a:font script="Nkoo" typeface="Ebrima"/>
+        <a:font script="Olck" typeface="Nirmala UI"/>
+        <a:font script="Osma" typeface="Ebrima"/>
+        <a:font script="Phag" typeface="Phagspa"/>
+        <a:font script="Syrn" typeface="Estrangelo Edessa"/>
+        <a:font script="Syrj" typeface="Estrangelo Edessa"/>
+        <a:font script="Syre" typeface="Estrangelo Edessa"/>
+        <a:font script="Sora" typeface="Nirmala UI"/>
+        <a:font script="Tale" typeface="Microsoft Tai Le"/>
+        <a:font script="Talu" typeface="Microsoft New Tai Lue"/>
+        <a:font script="Tfng" typeface="Ebrima"/>
+      </a:majorFont>
+      <a:minorFont>
+        <a:latin typeface="Calibri" panose="020F0502020204030204"/>
+        <a:ea typeface=""/>
+        <a:cs typeface=""/>
+        <a:font script="Jpan" typeface="游ゴシック"/>
+        <a:font script="Hang" typeface="맑은 고딕"/>
+        <a:font script="Hans" typeface="等线"/>
+        <a:font script="Hant" typeface="新細明體"/>
+        <a:font script="Arab" typeface="Arial"/>
+        <a:font script="Hebr" typeface="Arial"/>
+        <a:font script="Thai" typeface="Cordia New"/>
+        <a:font script="Ethi" typeface="Nyala"/>
+        <a:font script="Beng" typeface="Vrinda"/>
+        <a:font script="Gujr" typeface="Shruti"/>
+        <a:font script="Khmr" typeface="DaunPenh"/>
+        <a:font script="Knda" typeface="Tunga"/>
+        <a:font script="Guru" typeface="Raavi"/>
+        <a:font script="Cans" typeface="Euphemia"/>
+        <a:font script="Cher" typeface="Plantagenet Cherokee"/>
+        <a:font script="Yiii" typeface="Microsoft Yi Baiti"/>
+        <a:font script="Tibt" typeface="Microsoft Himalaya"/>
+        <a:font script="Thaa" typeface="MV Boli"/>
+        <a:font script="Deva" typeface="Mangal"/>
+        <a:font script="Telu" typeface="Gautami"/>
+        <a:font script="Taml" typeface="Latha"/>
+        <a:font script="Syrc" typeface="Estrangelo Edessa"/>
+        <a:font script="Orya" typeface="Kalinga"/>
+        <a:font script="Mlym" typeface="Kartika"/>
+        <a:font script="Laoo" typeface="DokChampa"/>
+        <a:font script="Sinh" typeface="Iskoola Pota"/>
+        <a:font script="Mong" typeface="Mongolian Baiti"/>
+        <a:font script="Viet" typeface="Arial"/>
+        <a:font script="Uigh" typeface="Microsoft Uighur"/>
+        <a:font script="Geor" typeface="Sylfaen"/>
+        <a:font script="Armn" typeface="Arial"/>
+        <a:font script="Bugi" typeface="Leelawadee UI"/>
+        <a:font script="Bopo" typeface="Microsoft JhengHei"/>
+        <a:font script="Java" typeface="Javanese Text"/>
+        <a:font script="Lisu" typeface="Segoe UI"/>
+        <a:font script="Mymr" typeface="Myanmar Text"/>
+        <a:font script="Nkoo" typeface="Ebrima"/>
+        <a:font script="Olck" typeface="Nirmala UI"/>
+        <a:font script="Osma" typeface="Ebrima"/>
+        <a:font script="Phag" typeface="Phagspa"/>
+        <a:font script="Syrn" typeface="Estrangelo Edessa"/>
+        <a:font script="Syrj" typeface="Estrangelo Edessa"/>
+        <a:font script="Syre" typeface="Estrangelo Edessa"/>
+        <a:font script="Sora" typeface="Nirmala UI"/>
+        <a:font script="Tale" typeface="Microsoft Tai Le"/>
+        <a:font script="Talu" typeface="Microsoft New Tai Lue"/>
+        <a:font script="Tfng" typeface="Ebrima"/>
+      </a:minorFont>
+    </a:fontScheme>
+    <a:fmtScheme name="Office">
+      <a:fillStyleLst>
+        <a:solidFill>
+          <a:schemeClr val="phClr"/>
+        </a:solidFill>
+        <a:gradFill rotWithShape="1">
+          <a:gsLst>
+            <a:gs pos="0">
+              <a:schemeClr val="phClr">
+                <a:lumMod val="110000"/>
+                <a:satMod val="105000"/>
+                <a:tint val="67000"/>
+              </a:schemeClr>
+            </a:gs>
+            <a:gs pos="50000">
+              <a:schemeClr val="phClr">
+                <a:lumMod val="105000"/>
+                <a:satMod val="103000"/>
+                <a:tint val="73000"/>
+              </a:schemeClr>
+            </a:gs>
+            <a:gs pos="100000">
+              <a:schemeClr val="phClr">
+                <a:lumMod val="105000"/>
+                <a:satMod val="109000"/>
+                <a:tint val="81000"/>
+              </a:schemeClr>
+            </a:gs>
+          </a:gsLst>
+          <a:lin ang="5400000" scaled="0"/>
+        </a:gradFill>
+        <a:gradFill rotWithShape="1">
+          <a:gsLst>
+            <a:gs pos="0">
+              <a:schemeClr val="phClr">
+                <a:satMod val="103000"/>
+                <a:lumMod val="102000"/>
+                <a:tint val="94000"/>
+              </a:schemeClr>
+            </a:gs>
+            <a:gs pos="50000">
+              <a:schemeClr val="phClr">
+                <a:satMod val="110000"/>
+                <a:lumMod val="100000"/>
+                <a:shade val="100000"/>
+              </a:schemeClr>
+            </a:gs>
+            <a:gs pos="100000">
+              <a:schemeClr val="phClr">
+                <a:lumMod val="99000"/>
+                <a:satMod val="120000"/>
+                <a:shade val="78000"/>
+              </a:schemeClr>
+            </a:gs>
+          </a:gsLst>
+          <a:lin ang="5400000" scaled="0"/>
+        </a:gradFill>
+      </a:fillStyleLst>
+      <a:lnStyleLst>
+        <a:ln w="6350" cap="flat" cmpd="sng" algn="ctr">
+          <a:solidFill>
+            <a:schemeClr val="phClr"/>
+          </a:solidFill>
+          <a:prstDash val="solid"/>
+          <a:miter lim="800000"/>
+        </a:ln>
+        <a:ln w="12700" cap="flat" cmpd="sng" algn="ctr">
+          <a:solidFill>
+            <a:schemeClr val="phClr"/>
+          </a:solidFill>
+          <a:prstDash val="solid"/>
+          <a:miter lim="800000"/>
+        </a:ln>
+        <a:ln w="19050" cap="flat" cmpd="sng" algn="ctr">
+          <a:solidFill>
+            <a:schemeClr val="phClr"/>
+          </a:solidFill>
+          <a:prstDash val="solid"/>
+          <a:miter lim="800000"/>
+        </a:ln>
+      </a:lnStyleLst>
+      <a:effectStyleLst>
+        <a:effectStyle>
+          <a:effectLst/>
+        </a:effectStyle>
+        <a:effectStyle>
+          <a:effectLst/>
+        </a:effectStyle>
+        <a:effectStyle>
+          <a:effectLst>
+            <a:outerShdw blurRad="57150" dist="19050" dir="5400000" algn="ctr" rotWithShape="0">
+              <a:srgbClr val="000000">
+                <a:alpha val="63000"/>
+              </a:srgbClr>
+            </a:outerShdw>
+          </a:effectLst>
+        </a:effectStyle>
+      </a:effectStyleLst>
+      <a:bgFillStyleLst>
+        <a:solidFill>
+          <a:schemeClr val="phClr"/>
+        </a:solidFill>
+        <a:solidFill>
+          <a:schemeClr val="phClr">
+            <a:tint val="95000"/>
+            <a:satMod val="170000"/>
+          </a:schemeClr>
+        </a:solidFill>
+        <a:gradFill rotWithShape="1">
+          <a:gsLst>
+            <a:gs pos="0">
+              <a:schemeClr val="phClr">
+                <a:tint val="93000"/>
+                <a:satMod val="150000"/>
+                <a:shade val="98000"/>
+                <a:lumMod val="102000"/>
+              </a:schemeClr>
+            </a:gs>
+            <a:gs pos="50000">
+              <a:schemeClr val="phClr">
+                <a:tint val="98000"/>
+                <a:satMod val="130000"/>
+                <a:shade val="90000"/>
+                <a:lumMod val="103000"/>
+              </a:schemeClr>
+            </a:gs>
+            <a:gs pos="100000">
+              <a:schemeClr val="phClr">
+                <a:shade val="63000"/>
+                <a:satMod val="120000"/>
+              </a:schemeClr>
+            </a:gs>
+          </a:gsLst>
+          <a:lin ang="5400000" scaled="0"/>
+        </a:gradFill>
+      </a:bgFillStyleLst>
+    </a:fmtScheme>
+  </a:themeElements>
+  <a:objectDefaults/>
+  <a:extraClrSchemeLst/>
+  <a:extLst>
+    <a:ext uri="{05A4C25C-085E-4340-85A3-A5531E510DB2}">
+      <thm15:themeFamily xmlns:thm15="http://schemas.microsoft.com/office/thememl/2012/main" name="Office Theme" id="{62F939B6-93AF-4DB8-9C6B-D6C7DFDC589F}" vid="{4A3C46E8-61CC-4603-A589-7422A47A8E4A}"/>
+    </a:ext>
+  </a:extLst>
+</a:theme>
 </file>
--- a/docs/decks/L11.pptx
+++ b/docs/decks/L11.pptx
@@ -4,9 +4,6 @@
   <p:sldMasterIdLst>
     <p:sldMasterId id="2147483648" r:id="rId1"/>
   </p:sldMasterIdLst>
-  <p:notesMasterIdLst>
-    <p:notesMasterId r:id="rId28"/>
-  </p:notesMasterIdLst>
   <p:sldIdLst>
     <p:sldId id="256" r:id="rId2"/>
     <p:sldId id="257" r:id="rId3"/>
@@ -35,6 +32,9 @@
     <p:sldId id="280" r:id="rId26"/>
     <p:sldId id="281" r:id="rId27"/>
   </p:sldIdLst>
+  <p:notesMasterIdLst>
+    <p:notesMasterId r:id="rId28"/>
+  </p:notesMasterIdLst>
   <p:sldSz cx="12192000" cy="6858000"/>
   <p:notesSz cx="6858000" cy="12192000"/>
   <p:defaultTextStyle>
@@ -129,11 +129,6 @@
       </a:defRPr>
     </a:lvl9pPr>
   </p:defaultTextStyle>
-  <p:extLst>
-    <p:ext uri="{EFAFB233-063F-42B5-8137-9DF3F51BA10A}">
-      <p15:sldGuideLst xmlns:p15="http://schemas.microsoft.com/office/powerpoint/2012/main"/>
-    </p:ext>
-  </p:extLst>
 </p:presentation>
 </file>
 
@@ -159,10 +154,234 @@
           <a:chExt cx="0" cy="0"/>
         </a:xfrm>
       </p:grpSpPr>
+      <p:sp>
+        <p:nvSpPr>
+          <p:cNvPr id="2" name="Header Placeholder 1"/>
+          <p:cNvSpPr>
+            <a:spLocks noGrp="1"/>
+          </p:cNvSpPr>
+          <p:nvPr>
+            <p:ph type="hdr" sz="quarter"/>
+          </p:nvPr>
+        </p:nvSpPr>
+        <p:spPr>
+          <a:xfrm>
+            <a:off x="0" y="0"/>
+            <a:ext cx="2971800" cy="458788"/>
+          </a:xfrm>
+          <a:prstGeom prst="rect">
+            <a:avLst/>
+          </a:prstGeom>
+        </p:spPr>
+        <p:txBody>
+          <a:bodyPr vert="horz" lIns="91440" tIns="45720" rIns="91440" bIns="45720" rtlCol="0"/>
+          <a:lstStyle>
+            <a:lvl1pPr algn="l">
+              <a:defRPr sz="1200"/>
+            </a:lvl1pPr>
+          </a:lstStyle>
+          <a:p>
+            <a:endParaRPr lang="en-US"/>
+          </a:p>
+        </p:txBody>
+      </p:sp>
+      <p:sp>
+        <p:nvSpPr>
+          <p:cNvPr id="3" name="Date Placeholder 2"/>
+          <p:cNvSpPr>
+            <a:spLocks noGrp="1"/>
+          </p:cNvSpPr>
+          <p:nvPr>
+            <p:ph type="dt" idx="1"/>
+          </p:nvPr>
+        </p:nvSpPr>
+        <p:spPr>
+          <a:xfrm>
+            <a:off x="3884613" y="0"/>
+            <a:ext cx="2971800" cy="458788"/>
+          </a:xfrm>
+          <a:prstGeom prst="rect">
+            <a:avLst/>
+          </a:prstGeom>
+        </p:spPr>
+        <p:txBody>
+          <a:bodyPr vert="horz" lIns="91440" tIns="45720" rIns="91440" bIns="45720" rtlCol="0"/>
+          <a:lstStyle>
+            <a:lvl1pPr algn="r">
+              <a:defRPr sz="1200"/>
+            </a:lvl1pPr>
+          </a:lstStyle>
+          <a:p>
+            <a:fld id="{5282F153-3F37-0F45-9E97-73ACFA13230C}" type="datetimeFigureOut">
+              <a:rPr lang="en-US"/>
+              <a:t>7/23/19</a:t>
+            </a:fld>
+            <a:endParaRPr lang="en-US"/>
+          </a:p>
+        </p:txBody>
+      </p:sp>
+      <p:sp>
+        <p:nvSpPr>
+          <p:cNvPr id="4" name="Slide Image Placeholder 3"/>
+          <p:cNvSpPr>
+            <a:spLocks noGrp="1" noRot="1" noChangeAspect="1"/>
+          </p:cNvSpPr>
+          <p:nvPr>
+            <p:ph type="sldImg" idx="2"/>
+          </p:nvPr>
+        </p:nvSpPr>
+        <p:spPr>
+          <a:xfrm>
+            <a:off x="685800" y="1143000"/>
+            <a:ext cx="5486400" cy="3086100"/>
+          </a:xfrm>
+          <a:prstGeom prst="rect">
+            <a:avLst/>
+          </a:prstGeom>
+          <a:noFill/>
+          <a:ln w="12700">
+            <a:solidFill>
+              <a:prstClr val="black"/>
+            </a:solidFill>
+          </a:ln>
+        </p:spPr>
+        <p:txBody>
+          <a:bodyPr vert="horz" lIns="91440" tIns="45720" rIns="91440" bIns="45720" rtlCol="0" anchor="ctr"/>
+          <a:lstStyle/>
+          <a:p>
+            <a:endParaRPr lang="en-US"/>
+          </a:p>
+        </p:txBody>
+      </p:sp>
+      <p:sp>
+        <p:nvSpPr>
+          <p:cNvPr id="5" name="Notes Placeholder 4"/>
+          <p:cNvSpPr>
+            <a:spLocks noGrp="1"/>
+          </p:cNvSpPr>
+          <p:nvPr>
+            <p:ph type="body" sz="quarter" idx="3"/>
+          </p:nvPr>
+        </p:nvSpPr>
+        <p:spPr>
+          <a:xfrm>
+            <a:off x="685800" y="4400550"/>
+            <a:ext cx="5486400" cy="3600450"/>
+          </a:xfrm>
+          <a:prstGeom prst="rect">
+            <a:avLst/>
+          </a:prstGeom>
+        </p:spPr>
+        <p:txBody>
+          <a:bodyPr vert="horz" lIns="91440" tIns="45720" rIns="91440" bIns="45720" rtlCol="0"/>
+          <a:lstStyle/>
+          <a:p>
+            <a:pPr lvl="0"/>
+            <a:r>
+              <a:rPr lang="en-US"/>
+              <a:t>Click to edit Master text styles</a:t>
+            </a:r>
+          </a:p>
+          <a:p>
+            <a:pPr lvl="1"/>
+            <a:r>
+              <a:rPr lang="en-US"/>
+              <a:t>Second level</a:t>
+            </a:r>
+          </a:p>
+          <a:p>
+            <a:pPr lvl="2"/>
+            <a:r>
+              <a:rPr lang="en-US"/>
+              <a:t>Third level</a:t>
+            </a:r>
+          </a:p>
+          <a:p>
+            <a:pPr lvl="3"/>
+            <a:r>
+              <a:rPr lang="en-US"/>
+              <a:t>Fourth level</a:t>
+            </a:r>
+          </a:p>
+          <a:p>
+            <a:pPr lvl="4"/>
+            <a:r>
+              <a:rPr lang="en-US"/>
+              <a:t>Fifth level</a:t>
+            </a:r>
+          </a:p>
+        </p:txBody>
+      </p:sp>
+      <p:sp>
+        <p:nvSpPr>
+          <p:cNvPr id="6" name="Footer Placeholder 5"/>
+          <p:cNvSpPr>
+            <a:spLocks noGrp="1"/>
+          </p:cNvSpPr>
+          <p:nvPr>
+            <p:ph type="ftr" sz="quarter" idx="4"/>
+          </p:nvPr>
+        </p:nvSpPr>
+        <p:spPr>
+          <a:xfrm>
+            <a:off x="0" y="8685213"/>
+            <a:ext cx="2971800" cy="458787"/>
+          </a:xfrm>
+          <a:prstGeom prst="rect">
+            <a:avLst/>
+          </a:prstGeom>
+        </p:spPr>
+        <p:txBody>
+          <a:bodyPr vert="horz" lIns="91440" tIns="45720" rIns="91440" bIns="45720" rtlCol="0" anchor="b"/>
+          <a:lstStyle>
+            <a:lvl1pPr algn="l">
+              <a:defRPr sz="1200"/>
+            </a:lvl1pPr>
+          </a:lstStyle>
+          <a:p>
+            <a:endParaRPr lang="en-US"/>
+          </a:p>
+        </p:txBody>
+      </p:sp>
+      <p:sp>
+        <p:nvSpPr>
+          <p:cNvPr id="7" name="Slide Number Placeholder 6"/>
+          <p:cNvSpPr>
+            <a:spLocks noGrp="1"/>
+          </p:cNvSpPr>
+          <p:nvPr>
+            <p:ph type="sldNum" sz="quarter" idx="5"/>
+          </p:nvPr>
+        </p:nvSpPr>
+        <p:spPr>
+          <a:xfrm>
+            <a:off x="3884613" y="8685213"/>
+            <a:ext cx="2971800" cy="458787"/>
+          </a:xfrm>
+          <a:prstGeom prst="rect">
+            <a:avLst/>
+          </a:prstGeom>
+        </p:spPr>
+        <p:txBody>
+          <a:bodyPr vert="horz" lIns="91440" tIns="45720" rIns="91440" bIns="45720" rtlCol="0" anchor="b"/>
+          <a:lstStyle>
+            <a:lvl1pPr algn="r">
+              <a:defRPr sz="1200"/>
+            </a:lvl1pPr>
+          </a:lstStyle>
+          <a:p>
+            <a:fld id="{CE5E9CC1-C706-0F49-92D6-E571CC5EEA8F}" type="slidenum">
+              <a:rPr lang="en-US"/>
+              <a:t>‹#›</a:t>
+            </a:fld>
+            <a:endParaRPr lang="en-US"/>
+          </a:p>
+        </p:txBody>
+      </p:sp>
     </p:spTree>
     <p:extLst>
       <p:ext uri="{BB962C8B-B14F-4D97-AF65-F5344CB8AC3E}">
-        <p14:creationId xmlns:p14="http://schemas.microsoft.com/office/powerpoint/2010/main" val="323881790"/>
+        <p14:creationId xmlns:p14="http://schemas.microsoft.com/office/powerpoint/2010/main" val="1024086991"/>
       </p:ext>
     </p:extLst>
   </p:cSld>
@@ -306,6 +525,10 @@
           <a:bodyPr/>
           <a:lstStyle/>
           <a:p>
+            <a:r>
+              <a:rPr lang="en-US" dirty="0"/>
+              <a:t/>
+            </a:r>
             <a:endParaRPr lang="en-US" dirty="0"/>
           </a:p>
         </p:txBody>
@@ -390,6 +613,10 @@
           <a:bodyPr/>
           <a:lstStyle/>
           <a:p>
+            <a:r>
+              <a:rPr lang="en-US" dirty="0"/>
+              <a:t/>
+            </a:r>
             <a:endParaRPr lang="en-US" dirty="0"/>
           </a:p>
         </p:txBody>
@@ -474,6 +701,10 @@
           <a:bodyPr/>
           <a:lstStyle/>
           <a:p>
+            <a:r>
+              <a:rPr lang="en-US" dirty="0"/>
+              <a:t/>
+            </a:r>
             <a:endParaRPr lang="en-US" dirty="0"/>
           </a:p>
         </p:txBody>
@@ -558,6 +789,10 @@
           <a:bodyPr/>
           <a:lstStyle/>
           <a:p>
+            <a:r>
+              <a:rPr lang="en-US" dirty="0"/>
+              <a:t/>
+            </a:r>
             <a:endParaRPr lang="en-US" dirty="0"/>
           </a:p>
         </p:txBody>
@@ -642,6 +877,10 @@
           <a:bodyPr/>
           <a:lstStyle/>
           <a:p>
+            <a:r>
+              <a:rPr lang="en-US" dirty="0"/>
+              <a:t/>
+            </a:r>
             <a:endParaRPr lang="en-US" dirty="0"/>
           </a:p>
         </p:txBody>
@@ -726,6 +965,10 @@
           <a:bodyPr/>
           <a:lstStyle/>
           <a:p>
+            <a:r>
+              <a:rPr lang="en-US" dirty="0"/>
+              <a:t/>
+            </a:r>
             <a:endParaRPr lang="en-US" dirty="0"/>
           </a:p>
         </p:txBody>
@@ -810,6 +1053,10 @@
           <a:bodyPr/>
           <a:lstStyle/>
           <a:p>
+            <a:r>
+              <a:rPr lang="en-US" dirty="0"/>
+              <a:t/>
+            </a:r>
             <a:endParaRPr lang="en-US" dirty="0"/>
           </a:p>
         </p:txBody>
@@ -894,6 +1141,10 @@
           <a:bodyPr/>
           <a:lstStyle/>
           <a:p>
+            <a:r>
+              <a:rPr lang="en-US" dirty="0"/>
+              <a:t/>
+            </a:r>
             <a:endParaRPr lang="en-US" dirty="0"/>
           </a:p>
         </p:txBody>
@@ -978,6 +1229,10 @@
           <a:bodyPr/>
           <a:lstStyle/>
           <a:p>
+            <a:r>
+              <a:rPr lang="en-US" dirty="0"/>
+              <a:t/>
+            </a:r>
             <a:endParaRPr lang="en-US" dirty="0"/>
           </a:p>
         </p:txBody>
@@ -1062,6 +1317,10 @@
           <a:bodyPr/>
           <a:lstStyle/>
           <a:p>
+            <a:r>
+              <a:rPr lang="en-US" dirty="0"/>
+              <a:t/>
+            </a:r>
             <a:endParaRPr lang="en-US" dirty="0"/>
           </a:p>
         </p:txBody>
@@ -1146,6 +1405,10 @@
           <a:bodyPr/>
           <a:lstStyle/>
           <a:p>
+            <a:r>
+              <a:rPr lang="en-US" dirty="0"/>
+              <a:t/>
+            </a:r>
             <a:endParaRPr lang="en-US" dirty="0"/>
           </a:p>
         </p:txBody>
@@ -1230,6 +1493,10 @@
           <a:bodyPr/>
           <a:lstStyle/>
           <a:p>
+            <a:r>
+              <a:rPr lang="en-US" dirty="0"/>
+              <a:t/>
+            </a:r>
             <a:endParaRPr lang="en-US" dirty="0"/>
           </a:p>
         </p:txBody>
@@ -1314,6 +1581,10 @@
           <a:bodyPr/>
           <a:lstStyle/>
           <a:p>
+            <a:r>
+              <a:rPr lang="en-US" dirty="0"/>
+              <a:t/>
+            </a:r>
             <a:endParaRPr lang="en-US" dirty="0"/>
           </a:p>
         </p:txBody>
@@ -1398,6 +1669,10 @@
           <a:bodyPr/>
           <a:lstStyle/>
           <a:p>
+            <a:r>
+              <a:rPr lang="en-US" dirty="0"/>
+              <a:t/>
+            </a:r>
             <a:endParaRPr lang="en-US" dirty="0"/>
           </a:p>
         </p:txBody>
@@ -1482,6 +1757,10 @@
           <a:bodyPr/>
           <a:lstStyle/>
           <a:p>
+            <a:r>
+              <a:rPr lang="en-US" dirty="0"/>
+              <a:t/>
+            </a:r>
             <a:endParaRPr lang="en-US" dirty="0"/>
           </a:p>
         </p:txBody>
@@ -1566,6 +1845,10 @@
           <a:bodyPr/>
           <a:lstStyle/>
           <a:p>
+            <a:r>
+              <a:rPr lang="en-US" dirty="0"/>
+              <a:t/>
+            </a:r>
             <a:endParaRPr lang="en-US" dirty="0"/>
           </a:p>
         </p:txBody>
@@ -1650,6 +1933,10 @@
           <a:bodyPr/>
           <a:lstStyle/>
           <a:p>
+            <a:r>
+              <a:rPr lang="en-US" dirty="0"/>
+              <a:t/>
+            </a:r>
             <a:endParaRPr lang="en-US" dirty="0"/>
           </a:p>
         </p:txBody>
@@ -1734,6 +2021,10 @@
           <a:bodyPr/>
           <a:lstStyle/>
           <a:p>
+            <a:r>
+              <a:rPr lang="en-US" dirty="0"/>
+              <a:t/>
+            </a:r>
             <a:endParaRPr lang="en-US" dirty="0"/>
           </a:p>
         </p:txBody>
@@ -1818,6 +2109,10 @@
           <a:bodyPr/>
           <a:lstStyle/>
           <a:p>
+            <a:r>
+              <a:rPr lang="en-US" dirty="0"/>
+              <a:t/>
+            </a:r>
             <a:endParaRPr lang="en-US" dirty="0"/>
           </a:p>
         </p:txBody>
@@ -1902,6 +2197,10 @@
           <a:bodyPr/>
           <a:lstStyle/>
           <a:p>
+            <a:r>
+              <a:rPr lang="en-US" dirty="0"/>
+              <a:t/>
+            </a:r>
             <a:endParaRPr lang="en-US" dirty="0"/>
           </a:p>
         </p:txBody>
@@ -1986,6 +2285,10 @@
           <a:bodyPr/>
           <a:lstStyle/>
           <a:p>
+            <a:r>
+              <a:rPr lang="en-US" dirty="0"/>
+              <a:t/>
+            </a:r>
             <a:endParaRPr lang="en-US" dirty="0"/>
           </a:p>
         </p:txBody>
@@ -2070,6 +2373,10 @@
           <a:bodyPr/>
           <a:lstStyle/>
           <a:p>
+            <a:r>
+              <a:rPr lang="en-US" dirty="0"/>
+              <a:t/>
+            </a:r>
             <a:endParaRPr lang="en-US" dirty="0"/>
           </a:p>
         </p:txBody>
@@ -2154,6 +2461,10 @@
           <a:bodyPr/>
           <a:lstStyle/>
           <a:p>
+            <a:r>
+              <a:rPr lang="en-US" dirty="0"/>
+              <a:t/>
+            </a:r>
             <a:endParaRPr lang="en-US" dirty="0"/>
           </a:p>
         </p:txBody>
@@ -2238,6 +2549,10 @@
           <a:bodyPr/>
           <a:lstStyle/>
           <a:p>
+            <a:r>
+              <a:rPr lang="en-US" dirty="0"/>
+              <a:t/>
+            </a:r>
             <a:endParaRPr lang="en-US" dirty="0"/>
           </a:p>
         </p:txBody>
@@ -2322,6 +2637,10 @@
           <a:bodyPr/>
           <a:lstStyle/>
           <a:p>
+            <a:r>
+              <a:rPr lang="en-US" dirty="0"/>
+              <a:t/>
+            </a:r>
             <a:endParaRPr lang="en-US" dirty="0"/>
           </a:p>
         </p:txBody>
@@ -2406,6 +2725,10 @@
           <a:bodyPr/>
           <a:lstStyle/>
           <a:p>
+            <a:r>
+              <a:rPr lang="en-US" dirty="0"/>
+              <a:t/>
+            </a:r>
             <a:endParaRPr lang="en-US" dirty="0"/>
           </a:p>
         </p:txBody>
@@ -2488,7 +2811,7 @@
           </a:prstGeom>
           <a:extLst>
             <a:ext uri="{C572A759-6A51-4108-AA02-DFA0A04FC94B}">
-              <ma14:wrappingTextBoxFlag xmlns:ma14="http://schemas.microsoft.com/office/mac/drawingml/2011/main" xmlns="" val="0"/>
+              <ma14:wrappingTextBoxFlag xmlns:ma14="http://schemas.microsoft.com/office/mac/drawingml/2011/main" val="0"/>
             </a:ext>
           </a:extLst>
         </p:spPr>
@@ -2509,8 +2832,8 @@
           <a:p>
             <a:pPr algn="l"/>
             <a:fld id="{F7021451-1387-4CA6-816F-3879F97B5CBC}" type="slidenum">
-              <a:rPr lang="en-US" b="0"/>
-              <a:t>‹#›</a:t>
+              <a:rPr b="0" lang="en-US"/>
+              <a:t>1000</a:t>
             </a:fld>
             <a:endParaRPr lang="en-US"/>
           </a:p>
@@ -2532,7 +2855,6 @@
         <a:solidFill>
           <a:srgbClr val="000000"/>
         </a:solidFill>
-        <a:effectLst/>
       </p:bgPr>
     </p:bg>
     <p:spTree>
@@ -2551,14 +2873,14 @@
       </p:grpSpPr>
       <p:pic>
         <p:nvPicPr>
-          <p:cNvPr id="2" name="Image 0" descr="preencoded.png"/>
+          <p:cNvPr id="2" name="Image 0" descr="preencoded.png">    </p:cNvPr>
           <p:cNvPicPr>
             <a:picLocks noChangeAspect="1"/>
           </p:cNvPicPr>
           <p:nvPr/>
         </p:nvPicPr>
         <p:blipFill>
-          <a:blip r:embed="rId2"/>
+          <a:blip r:embed="rId1"/>
           <a:stretch>
             <a:fillRect/>
           </a:stretch>
@@ -2589,7 +2911,6 @@
         <a:solidFill>
           <a:srgbClr val="000000"/>
         </a:solidFill>
-        <a:effectLst/>
       </p:bgPr>
     </p:bg>
     <p:spTree>
@@ -2608,14 +2929,14 @@
       </p:grpSpPr>
       <p:pic>
         <p:nvPicPr>
-          <p:cNvPr id="2" name="Image 0" descr="preencoded.png"/>
+          <p:cNvPr id="2" name="Image 0" descr="preencoded.png">    </p:cNvPr>
           <p:cNvPicPr>
             <a:picLocks noChangeAspect="1"/>
           </p:cNvPicPr>
           <p:nvPr/>
         </p:nvPicPr>
         <p:blipFill>
-          <a:blip r:embed="rId2"/>
+          <a:blip r:embed="rId1"/>
           <a:stretch>
             <a:fillRect/>
           </a:stretch>
@@ -2646,7 +2967,6 @@
         <a:solidFill>
           <a:srgbClr val="000000"/>
         </a:solidFill>
-        <a:effectLst/>
       </p:bgPr>
     </p:bg>
     <p:spTree>
@@ -2665,14 +2985,14 @@
       </p:grpSpPr>
       <p:pic>
         <p:nvPicPr>
-          <p:cNvPr id="2" name="Image 0" descr="preencoded.png"/>
+          <p:cNvPr id="2" name="Image 0" descr="preencoded.png">    </p:cNvPr>
           <p:cNvPicPr>
             <a:picLocks noChangeAspect="1"/>
           </p:cNvPicPr>
           <p:nvPr/>
         </p:nvPicPr>
         <p:blipFill>
-          <a:blip r:embed="rId2"/>
+          <a:blip r:embed="rId1"/>
           <a:stretch>
             <a:fillRect/>
           </a:stretch>
@@ -2698,11 +3018,6 @@
 <file path=ppt/slideMasters/slideMaster1.xml><?xml version="1.0" encoding="utf-8"?>
 <p:sldMaster xmlns:a="http://schemas.openxmlformats.org/drawingml/2006/main" xmlns:r="http://schemas.openxmlformats.org/officeDocument/2006/relationships" xmlns:p="http://schemas.openxmlformats.org/presentationml/2006/main">
   <p:cSld>
-    <p:bg>
-      <p:bgRef idx="1001">
-        <a:schemeClr val="bg1"/>
-      </p:bgRef>
-    </p:bg>
     <p:spTree>
       <p:nvGrpSpPr>
         <p:cNvPr id="1" name=""/>
@@ -2737,7 +3052,7 @@
           </a:prstGeom>
           <a:extLst>
             <a:ext uri="{C572A759-6A51-4108-AA02-DFA0A04FC94B}">
-              <ma14:wrappingTextBoxFlag xmlns:ma14="http://schemas.microsoft.com/office/mac/drawingml/2011/main" xmlns="" val="0"/>
+              <ma14:wrappingTextBoxFlag xmlns:ma14="http://schemas.microsoft.com/office/mac/drawingml/2011/main" val="0"/>
             </a:ext>
           </a:extLst>
         </p:spPr>
@@ -2758,8 +3073,8 @@
           <a:p>
             <a:pPr algn="l"/>
             <a:fld id="{F7021451-1387-4CA6-816F-3879F97B5CBC}" type="slidenum">
-              <a:rPr lang="en-US" b="0"/>
-              <a:t>‹#›</a:t>
+              <a:rPr b="0" lang="en-US"/>
+              <a:t>null</a:t>
             </a:fld>
             <a:endParaRPr lang="en-US"/>
           </a:p>
@@ -3066,11 +3381,11 @@
           <a:bodyPr wrap="square" lIns="0" tIns="0" rIns="0" bIns="0" rtlCol="0" anchor="ctr"/>
           <a:lstStyle/>
           <a:p>
-            <a:pPr marL="0" indent="0">
-              <a:buNone/>
-            </a:pPr>
-            <a:r>
-              <a:rPr lang="en-US" sz="1200" b="1" kern="0" spc="400" dirty="0">
+            <a:pPr indent="0" marL="0">
+              <a:buNone/>
+            </a:pPr>
+            <a:r>
+              <a:rPr lang="en-US" sz="1200" b="1" spc="400" kern="0" dirty="0">
                 <a:solidFill>
                   <a:srgbClr val="FFFFFF"/>
                 </a:solidFill>
@@ -3105,11 +3420,11 @@
           <a:bodyPr wrap="square" lIns="0" tIns="0" rIns="0" bIns="0" rtlCol="0" anchor="ctr"/>
           <a:lstStyle/>
           <a:p>
-            <a:pPr marL="0" indent="0">
-              <a:buNone/>
-            </a:pPr>
-            <a:r>
-              <a:rPr lang="en-US" sz="1200" b="1" kern="0" spc="300" dirty="0">
+            <a:pPr indent="0" marL="0">
+              <a:buNone/>
+            </a:pPr>
+            <a:r>
+              <a:rPr lang="en-US" sz="1200" b="1" spc="300" kern="0" dirty="0">
                 <a:solidFill>
                   <a:srgbClr val="C4B3F5"/>
                 </a:solidFill>
@@ -3144,7 +3459,7 @@
           <a:bodyPr wrap="square" lIns="0" tIns="0" rIns="0" bIns="0" rtlCol="0" anchor="t"/>
           <a:lstStyle/>
           <a:p>
-            <a:pPr marL="0" indent="0">
+            <a:pPr indent="0" marL="0">
               <a:lnSpc>
                 <a:spcPct val="102000"/>
               </a:lnSpc>
@@ -3164,7 +3479,7 @@
             <a:endParaRPr lang="en-US" sz="3600" dirty="0"/>
           </a:p>
           <a:p>
-            <a:pPr marL="0" indent="0">
+            <a:pPr indent="0" marL="0">
               <a:lnSpc>
                 <a:spcPct val="102000"/>
               </a:lnSpc>
@@ -3206,7 +3521,7 @@
           <a:bodyPr wrap="square" lIns="0" tIns="0" rIns="0" bIns="0" rtlCol="0" anchor="ctr"/>
           <a:lstStyle/>
           <a:p>
-            <a:pPr marL="0" indent="0">
+            <a:pPr indent="0" marL="0">
               <a:lnSpc>
                 <a:spcPct val="120000"/>
               </a:lnSpc>
@@ -3274,7 +3589,7 @@
           <a:bodyPr wrap="square" lIns="0" tIns="0" rIns="0" bIns="0" rtlCol="0" anchor="ctr"/>
           <a:lstStyle/>
           <a:p>
-            <a:pPr marL="0" indent="0" algn="ctr">
+            <a:pPr algn="ctr" indent="0" marL="0">
               <a:buNone/>
             </a:pPr>
             <a:r>
@@ -3339,7 +3654,7 @@
           <a:bodyPr wrap="square" lIns="0" tIns="0" rIns="0" bIns="0" rtlCol="0" anchor="ctr"/>
           <a:lstStyle/>
           <a:p>
-            <a:pPr marL="0" indent="0" algn="ctr">
+            <a:pPr algn="ctr" indent="0" marL="0">
               <a:buNone/>
             </a:pPr>
             <a:r>
@@ -3404,7 +3719,7 @@
           <a:bodyPr wrap="square" lIns="0" tIns="0" rIns="0" bIns="0" rtlCol="0" anchor="ctr"/>
           <a:lstStyle/>
           <a:p>
-            <a:pPr marL="0" indent="0" algn="ctr">
+            <a:pPr algn="ctr" indent="0" marL="0">
               <a:buNone/>
             </a:pPr>
             <a:r>
@@ -3469,7 +3784,7 @@
           <a:bodyPr wrap="square" lIns="0" tIns="0" rIns="0" bIns="0" rtlCol="0" anchor="ctr"/>
           <a:lstStyle/>
           <a:p>
-            <a:pPr marL="0" indent="0" algn="ctr">
+            <a:pPr algn="ctr" indent="0" marL="0">
               <a:buNone/>
             </a:pPr>
             <a:r>
@@ -3534,7 +3849,7 @@
           <a:bodyPr wrap="square" lIns="0" tIns="0" rIns="0" bIns="0" rtlCol="0" anchor="ctr"/>
           <a:lstStyle/>
           <a:p>
-            <a:pPr marL="0" indent="0" algn="ctr">
+            <a:pPr algn="ctr" indent="0" marL="0">
               <a:buNone/>
             </a:pPr>
             <a:r>
@@ -3595,7 +3910,7 @@
           <a:bodyPr wrap="square" lIns="0" tIns="0" rIns="0" bIns="0" rtlCol="0" anchor="ctr"/>
           <a:lstStyle/>
           <a:p>
-            <a:pPr marL="0" indent="0" algn="ctr">
+            <a:pPr algn="ctr" indent="0" marL="0">
               <a:buNone/>
             </a:pPr>
             <a:r>
@@ -3681,7 +3996,7 @@
           <a:bodyPr wrap="square" lIns="0" tIns="0" rIns="0" bIns="0" rtlCol="0" anchor="ctr"/>
           <a:lstStyle/>
           <a:p>
-            <a:pPr marL="0" indent="0" algn="l">
+            <a:pPr algn="l" indent="0" marL="0">
               <a:buNone/>
             </a:pPr>
             <a:r>
@@ -3720,7 +4035,7 @@
           <a:bodyPr wrap="square" lIns="0" tIns="0" rIns="0" bIns="0" rtlCol="0" anchor="ctr"/>
           <a:lstStyle/>
           <a:p>
-            <a:pPr marL="0" indent="0">
+            <a:pPr indent="0" marL="0">
               <a:buNone/>
             </a:pPr>
             <a:r>
@@ -3786,11 +4101,11 @@
           <a:bodyPr wrap="square" lIns="0" tIns="0" rIns="0" bIns="0" rtlCol="0" anchor="ctr"/>
           <a:lstStyle/>
           <a:p>
-            <a:pPr marL="0" indent="0" algn="ctr">
-              <a:buNone/>
-            </a:pPr>
-            <a:r>
-              <a:rPr lang="en-US" sz="900" b="1" kern="0" spc="100" dirty="0">
+            <a:pPr algn="ctr" indent="0" marL="0">
+              <a:buNone/>
+            </a:pPr>
+            <a:r>
+              <a:rPr lang="en-US" sz="900" b="1" spc="100" kern="0" dirty="0">
                 <a:solidFill>
                   <a:srgbClr val="5A05F4"/>
                 </a:solidFill>
@@ -3806,14 +4121,14 @@
       </p:sp>
       <p:pic>
         <p:nvPicPr>
-          <p:cNvPr id="7" name="Image 0" descr="preencoded.png"/>
+          <p:cNvPr id="7" name="Image 0" descr="preencoded.png">    </p:cNvPr>
           <p:cNvPicPr>
             <a:picLocks noChangeAspect="1"/>
           </p:cNvPicPr>
           <p:nvPr/>
         </p:nvPicPr>
         <p:blipFill>
-          <a:blip r:embed="rId3"/>
+          <a:blip r:embed="rId1"/>
           <a:stretch>
             <a:fillRect/>
           </a:stretch>
@@ -3871,7 +4186,7 @@
           <a:bodyPr wrap="square" lIns="0" tIns="0" rIns="0" bIns="0" rtlCol="0" anchor="ctr"/>
           <a:lstStyle/>
           <a:p>
-            <a:pPr marL="0" indent="0">
+            <a:pPr indent="0" marL="0">
               <a:buNone/>
             </a:pPr>
             <a:r>
@@ -3910,7 +4225,7 @@
           <a:bodyPr wrap="square" lIns="0" tIns="0" rIns="0" bIns="0" rtlCol="0" anchor="t"/>
           <a:lstStyle/>
           <a:p>
-            <a:pPr marL="0" indent="0">
+            <a:pPr indent="0" marL="0">
               <a:lnSpc>
                 <a:spcPct val="108000"/>
               </a:lnSpc>
@@ -3974,7 +4289,7 @@
           <a:bodyPr wrap="square" lIns="0" tIns="0" rIns="0" bIns="0" rtlCol="0" anchor="ctr"/>
           <a:lstStyle/>
           <a:p>
-            <a:pPr marL="0" indent="0">
+            <a:pPr indent="0" marL="0">
               <a:buNone/>
             </a:pPr>
             <a:r>
@@ -4013,7 +4328,7 @@
           <a:bodyPr wrap="square" lIns="0" tIns="0" rIns="0" bIns="0" rtlCol="0" anchor="t"/>
           <a:lstStyle/>
           <a:p>
-            <a:pPr marL="0" indent="0">
+            <a:pPr indent="0" marL="0">
               <a:lnSpc>
                 <a:spcPct val="108000"/>
               </a:lnSpc>
@@ -4077,7 +4392,7 @@
           <a:bodyPr wrap="square" lIns="0" tIns="0" rIns="0" bIns="0" rtlCol="0" anchor="ctr"/>
           <a:lstStyle/>
           <a:p>
-            <a:pPr marL="0" indent="0">
+            <a:pPr indent="0" marL="0">
               <a:lnSpc>
                 <a:spcPct val="112000"/>
               </a:lnSpc>
@@ -4127,14 +4442,34 @@
       </p:sp>
       <p:sp>
         <p:nvSpPr>
-          <p:cNvPr id="17" name="Text 14"/>
-          <p:cNvSpPr/>
-          <p:nvPr/>
-        </p:nvSpPr>
-        <p:spPr>
-          <a:xfrm>
-            <a:off x="786384" y="5111496"/>
-            <a:ext cx="10625328" cy="219456"/>
+          <p:cNvPr id="17" name="Shape 14"/>
+          <p:cNvSpPr/>
+          <p:nvPr/>
+        </p:nvSpPr>
+        <p:spPr>
+          <a:xfrm>
+            <a:off x="749808" y="5262372"/>
+            <a:ext cx="310896" cy="310896"/>
+          </a:xfrm>
+          <a:prstGeom prst="ellipse">
+            <a:avLst/>
+          </a:prstGeom>
+          <a:solidFill>
+            <a:srgbClr val="1A4FBF"/>
+          </a:solidFill>
+          <a:ln/>
+        </p:spPr>
+      </p:sp>
+      <p:sp>
+        <p:nvSpPr>
+          <p:cNvPr id="18" name="Text 15"/>
+          <p:cNvSpPr/>
+          <p:nvPr/>
+        </p:nvSpPr>
+        <p:spPr>
+          <a:xfrm>
+            <a:off x="749808" y="5262372"/>
+            <a:ext cx="310896" cy="310896"/>
           </a:xfrm>
           <a:prstGeom prst="rect">
             <a:avLst/>
@@ -4146,11 +4481,50 @@
           <a:bodyPr wrap="square" lIns="0" tIns="0" rIns="0" bIns="0" rtlCol="0" anchor="ctr"/>
           <a:lstStyle/>
           <a:p>
-            <a:pPr marL="0" indent="0">
-              <a:buNone/>
-            </a:pPr>
-            <a:r>
-              <a:rPr lang="en-US" sz="950" b="1" kern="0" spc="150" dirty="0">
+            <a:pPr algn="ctr" indent="0" marL="0">
+              <a:buNone/>
+            </a:pPr>
+            <a:r>
+              <a:rPr lang="en-US" sz="1200" b="1" dirty="0">
+                <a:solidFill>
+                  <a:srgbClr val="FFFFFF"/>
+                </a:solidFill>
+                <a:latin typeface="Arial" pitchFamily="34" charset="0"/>
+                <a:ea typeface="Arial" pitchFamily="34" charset="-122"/>
+                <a:cs typeface="Arial" pitchFamily="34" charset="-120"/>
+              </a:rPr>
+              <a:t>★</a:t>
+            </a:r>
+            <a:endParaRPr lang="en-US" sz="1200" dirty="0"/>
+          </a:p>
+        </p:txBody>
+      </p:sp>
+      <p:sp>
+        <p:nvSpPr>
+          <p:cNvPr id="19" name="Text 16"/>
+          <p:cNvSpPr/>
+          <p:nvPr/>
+        </p:nvSpPr>
+        <p:spPr>
+          <a:xfrm>
+            <a:off x="1243584" y="5111496"/>
+            <a:ext cx="10168128" cy="219456"/>
+          </a:xfrm>
+          <a:prstGeom prst="rect">
+            <a:avLst/>
+          </a:prstGeom>
+          <a:noFill/>
+          <a:ln/>
+        </p:spPr>
+        <p:txBody>
+          <a:bodyPr wrap="square" lIns="0" tIns="0" rIns="0" bIns="0" rtlCol="0" anchor="ctr"/>
+          <a:lstStyle/>
+          <a:p>
+            <a:pPr indent="0" marL="0">
+              <a:buNone/>
+            </a:pPr>
+            <a:r>
+              <a:rPr lang="en-US" sz="950" b="1" spc="150" kern="0" dirty="0">
                 <a:solidFill>
                   <a:srgbClr val="1A4FBF"/>
                 </a:solidFill>
@@ -4158,7 +4532,7 @@
                 <a:ea typeface="Courier New" pitchFamily="34" charset="-122"/>
                 <a:cs typeface="Courier New" pitchFamily="34" charset="-120"/>
               </a:rPr>
-              <a:t>ЛАЙФХАК</a:t>
+              <a:t>ПОРАДА</a:t>
             </a:r>
             <a:endParaRPr lang="en-US" sz="950" dirty="0"/>
           </a:p>
@@ -4166,14 +4540,14 @@
       </p:sp>
       <p:sp>
         <p:nvSpPr>
-          <p:cNvPr id="18" name="Text 15"/>
-          <p:cNvSpPr/>
-          <p:nvPr/>
-        </p:nvSpPr>
-        <p:spPr>
-          <a:xfrm>
-            <a:off x="786384" y="5367528"/>
-            <a:ext cx="10625328" cy="356616"/>
+          <p:cNvPr id="20" name="Text 17"/>
+          <p:cNvSpPr/>
+          <p:nvPr/>
+        </p:nvSpPr>
+        <p:spPr>
+          <a:xfrm>
+            <a:off x="1243584" y="5367528"/>
+            <a:ext cx="10168128" cy="356616"/>
           </a:xfrm>
           <a:prstGeom prst="rect">
             <a:avLst/>
@@ -4185,7 +4559,7 @@
           <a:bodyPr wrap="square" lIns="0" tIns="0" rIns="0" bIns="0" rtlCol="0" anchor="ctr"/>
           <a:lstStyle/>
           <a:p>
-            <a:pPr marL="0" indent="0">
+            <a:pPr indent="0" marL="0">
               <a:lnSpc>
                 <a:spcPct val="112000"/>
               </a:lnSpc>
@@ -4226,7 +4600,7 @@
           </a:prstGeom>
           <a:extLst>
             <a:ext uri="{C572A759-6A51-4108-AA02-DFA0A04FC94B}">
-              <ma14:wrappingTextBoxFlag xmlns:ma14="http://schemas.microsoft.com/office/mac/drawingml/2011/main" xmlns="" val="0"/>
+              <ma14:wrappingTextBoxFlag xmlns:ma14="http://schemas.microsoft.com/office/mac/drawingml/2011/main" val="0"/>
             </a:ext>
           </a:extLst>
         </p:spPr>
@@ -4247,7 +4621,7 @@
           <a:p>
             <a:pPr algn="l"/>
             <a:fld id="{F7021451-1387-4CA6-816F-3879F97B5CBC}" type="slidenum">
-              <a:rPr lang="en-US" b="0"/>
+              <a:rPr b="0" lang="en-US"/>
               <a:t>10</a:t>
             </a:fld>
             <a:endParaRPr lang="en-US"/>
@@ -4322,7 +4696,7 @@
           <a:bodyPr wrap="square" lIns="0" tIns="0" rIns="0" bIns="0" rtlCol="0" anchor="ctr"/>
           <a:lstStyle/>
           <a:p>
-            <a:pPr marL="0" indent="0" algn="l">
+            <a:pPr algn="l" indent="0" marL="0">
               <a:buNone/>
             </a:pPr>
             <a:r>
@@ -4361,7 +4735,7 @@
           <a:bodyPr wrap="square" lIns="0" tIns="0" rIns="0" bIns="0" rtlCol="0" anchor="ctr"/>
           <a:lstStyle/>
           <a:p>
-            <a:pPr marL="0" indent="0">
+            <a:pPr indent="0" marL="0">
               <a:buNone/>
             </a:pPr>
             <a:r>
@@ -4427,11 +4801,11 @@
           <a:bodyPr wrap="square" lIns="0" tIns="0" rIns="0" bIns="0" rtlCol="0" anchor="ctr"/>
           <a:lstStyle/>
           <a:p>
-            <a:pPr marL="0" indent="0" algn="ctr">
-              <a:buNone/>
-            </a:pPr>
-            <a:r>
-              <a:rPr lang="en-US" sz="900" b="1" kern="0" spc="100" dirty="0">
+            <a:pPr algn="ctr" indent="0" marL="0">
+              <a:buNone/>
+            </a:pPr>
+            <a:r>
+              <a:rPr lang="en-US" sz="900" b="1" spc="100" kern="0" dirty="0">
                 <a:solidFill>
                   <a:srgbClr val="5A05F4"/>
                 </a:solidFill>
@@ -4447,14 +4821,14 @@
       </p:sp>
       <p:pic>
         <p:nvPicPr>
-          <p:cNvPr id="7" name="Image 0" descr="preencoded.png"/>
+          <p:cNvPr id="7" name="Image 0" descr="preencoded.png">    </p:cNvPr>
           <p:cNvPicPr>
             <a:picLocks noChangeAspect="1"/>
           </p:cNvPicPr>
           <p:nvPr/>
         </p:nvPicPr>
         <p:blipFill>
-          <a:blip r:embed="rId3"/>
+          <a:blip r:embed="rId1"/>
           <a:stretch>
             <a:fillRect/>
           </a:stretch>
@@ -4512,7 +4886,7 @@
           <a:bodyPr wrap="square" lIns="0" tIns="0" rIns="0" bIns="0" rtlCol="0" anchor="ctr"/>
           <a:lstStyle/>
           <a:p>
-            <a:pPr marL="0" indent="0">
+            <a:pPr indent="0" marL="0">
               <a:buNone/>
             </a:pPr>
             <a:r>
@@ -4551,7 +4925,7 @@
           <a:bodyPr wrap="square" lIns="0" tIns="0" rIns="0" bIns="0" rtlCol="0" anchor="t"/>
           <a:lstStyle/>
           <a:p>
-            <a:pPr marL="0" indent="0">
+            <a:pPr indent="0" marL="0">
               <a:buNone/>
             </a:pPr>
             <a:r>
@@ -4612,7 +4986,7 @@
           <a:bodyPr wrap="square" lIns="0" tIns="0" rIns="0" bIns="0" rtlCol="0" anchor="ctr"/>
           <a:lstStyle/>
           <a:p>
-            <a:pPr marL="0" indent="0">
+            <a:pPr indent="0" marL="0">
               <a:buNone/>
             </a:pPr>
             <a:r>
@@ -4651,7 +5025,7 @@
           <a:bodyPr wrap="square" lIns="0" tIns="0" rIns="0" bIns="0" rtlCol="0" anchor="t"/>
           <a:lstStyle/>
           <a:p>
-            <a:pPr marL="0" indent="0">
+            <a:pPr indent="0" marL="0">
               <a:buNone/>
             </a:pPr>
             <a:r>
@@ -4698,14 +5072,34 @@
       </p:sp>
       <p:sp>
         <p:nvSpPr>
-          <p:cNvPr id="15" name="Text 12"/>
-          <p:cNvSpPr/>
-          <p:nvPr/>
-        </p:nvSpPr>
-        <p:spPr>
-          <a:xfrm>
-            <a:off x="786384" y="3465576"/>
-            <a:ext cx="10625328" cy="219456"/>
+          <p:cNvPr id="15" name="Shape 12"/>
+          <p:cNvSpPr/>
+          <p:nvPr/>
+        </p:nvSpPr>
+        <p:spPr>
+          <a:xfrm>
+            <a:off x="749808" y="3913632"/>
+            <a:ext cx="310896" cy="310896"/>
+          </a:xfrm>
+          <a:prstGeom prst="ellipse">
+            <a:avLst/>
+          </a:prstGeom>
+          <a:solidFill>
+            <a:srgbClr val="B3261E"/>
+          </a:solidFill>
+          <a:ln/>
+        </p:spPr>
+      </p:sp>
+      <p:sp>
+        <p:nvSpPr>
+          <p:cNvPr id="16" name="Text 13"/>
+          <p:cNvSpPr/>
+          <p:nvPr/>
+        </p:nvSpPr>
+        <p:spPr>
+          <a:xfrm>
+            <a:off x="749808" y="3913632"/>
+            <a:ext cx="310896" cy="310896"/>
           </a:xfrm>
           <a:prstGeom prst="rect">
             <a:avLst/>
@@ -4717,11 +5111,50 @@
           <a:bodyPr wrap="square" lIns="0" tIns="0" rIns="0" bIns="0" rtlCol="0" anchor="ctr"/>
           <a:lstStyle/>
           <a:p>
-            <a:pPr marL="0" indent="0">
-              <a:buNone/>
-            </a:pPr>
-            <a:r>
-              <a:rPr lang="en-US" sz="950" b="1" kern="0" spc="150" dirty="0">
+            <a:pPr algn="ctr" indent="0" marL="0">
+              <a:buNone/>
+            </a:pPr>
+            <a:r>
+              <a:rPr lang="en-US" sz="1200" b="1" dirty="0">
+                <a:solidFill>
+                  <a:srgbClr val="FFFFFF"/>
+                </a:solidFill>
+                <a:latin typeface="Arial" pitchFamily="34" charset="0"/>
+                <a:ea typeface="Arial" pitchFamily="34" charset="-122"/>
+                <a:cs typeface="Arial" pitchFamily="34" charset="-120"/>
+              </a:rPr>
+              <a:t>✕</a:t>
+            </a:r>
+            <a:endParaRPr lang="en-US" sz="1200" dirty="0"/>
+          </a:p>
+        </p:txBody>
+      </p:sp>
+      <p:sp>
+        <p:nvSpPr>
+          <p:cNvPr id="17" name="Text 14"/>
+          <p:cNvSpPr/>
+          <p:nvPr/>
+        </p:nvSpPr>
+        <p:spPr>
+          <a:xfrm>
+            <a:off x="1243584" y="3465576"/>
+            <a:ext cx="10168128" cy="219456"/>
+          </a:xfrm>
+          <a:prstGeom prst="rect">
+            <a:avLst/>
+          </a:prstGeom>
+          <a:noFill/>
+          <a:ln/>
+        </p:spPr>
+        <p:txBody>
+          <a:bodyPr wrap="square" lIns="0" tIns="0" rIns="0" bIns="0" rtlCol="0" anchor="ctr"/>
+          <a:lstStyle/>
+          <a:p>
+            <a:pPr indent="0" marL="0">
+              <a:buNone/>
+            </a:pPr>
+            <a:r>
+              <a:rPr lang="en-US" sz="950" b="1" spc="150" kern="0" dirty="0">
                 <a:solidFill>
                   <a:srgbClr val="B3261E"/>
                 </a:solidFill>
@@ -4737,14 +5170,14 @@
       </p:sp>
       <p:sp>
         <p:nvSpPr>
-          <p:cNvPr id="16" name="Text 13"/>
-          <p:cNvSpPr/>
-          <p:nvPr/>
-        </p:nvSpPr>
-        <p:spPr>
-          <a:xfrm>
-            <a:off x="786384" y="3721608"/>
-            <a:ext cx="10625328" cy="950976"/>
+          <p:cNvPr id="18" name="Text 15"/>
+          <p:cNvSpPr/>
+          <p:nvPr/>
+        </p:nvSpPr>
+        <p:spPr>
+          <a:xfrm>
+            <a:off x="1243584" y="3721608"/>
+            <a:ext cx="10168128" cy="950976"/>
           </a:xfrm>
           <a:prstGeom prst="rect">
             <a:avLst/>
@@ -4756,7 +5189,7 @@
           <a:bodyPr wrap="square" lIns="0" tIns="0" rIns="0" bIns="0" rtlCol="0" anchor="ctr"/>
           <a:lstStyle/>
           <a:p>
-            <a:pPr marL="0" indent="0">
+            <a:pPr indent="0" marL="0">
               <a:lnSpc>
                 <a:spcPct val="112000"/>
               </a:lnSpc>
@@ -4779,7 +5212,7 @@
       </p:sp>
       <p:sp>
         <p:nvSpPr>
-          <p:cNvPr id="17" name="Shape 14"/>
+          <p:cNvPr id="19" name="Shape 16"/>
           <p:cNvSpPr/>
           <p:nvPr/>
         </p:nvSpPr>
@@ -4801,7 +5234,7 @@
       </p:sp>
       <p:sp>
         <p:nvSpPr>
-          <p:cNvPr id="18" name="Text 15"/>
+          <p:cNvPr id="20" name="Text 17"/>
           <p:cNvSpPr/>
           <p:nvPr/>
         </p:nvSpPr>
@@ -4820,7 +5253,7 @@
           <a:bodyPr wrap="square" lIns="0" tIns="0" rIns="0" bIns="0" rtlCol="0" anchor="ctr"/>
           <a:lstStyle/>
           <a:p>
-            <a:pPr marL="0" indent="0">
+            <a:pPr indent="0" marL="0">
               <a:lnSpc>
                 <a:spcPct val="112000"/>
               </a:lnSpc>
@@ -4861,7 +5294,7 @@
           </a:prstGeom>
           <a:extLst>
             <a:ext uri="{C572A759-6A51-4108-AA02-DFA0A04FC94B}">
-              <ma14:wrappingTextBoxFlag xmlns:ma14="http://schemas.microsoft.com/office/mac/drawingml/2011/main" xmlns="" val="0"/>
+              <ma14:wrappingTextBoxFlag xmlns:ma14="http://schemas.microsoft.com/office/mac/drawingml/2011/main" val="0"/>
             </a:ext>
           </a:extLst>
         </p:spPr>
@@ -4882,7 +5315,7 @@
           <a:p>
             <a:pPr algn="l"/>
             <a:fld id="{F7021451-1387-4CA6-816F-3879F97B5CBC}" type="slidenum">
-              <a:rPr lang="en-US" b="0"/>
+              <a:rPr b="0" lang="en-US"/>
               <a:t>11</a:t>
             </a:fld>
             <a:endParaRPr lang="en-US"/>
@@ -4957,7 +5390,7 @@
           <a:bodyPr wrap="square" lIns="0" tIns="0" rIns="0" bIns="0" rtlCol="0" anchor="ctr"/>
           <a:lstStyle/>
           <a:p>
-            <a:pPr marL="0" indent="0" algn="l">
+            <a:pPr algn="l" indent="0" marL="0">
               <a:buNone/>
             </a:pPr>
             <a:r>
@@ -4996,7 +5429,7 @@
           <a:bodyPr wrap="square" lIns="0" tIns="0" rIns="0" bIns="0" rtlCol="0" anchor="ctr"/>
           <a:lstStyle/>
           <a:p>
-            <a:pPr marL="0" indent="0">
+            <a:pPr indent="0" marL="0">
               <a:buNone/>
             </a:pPr>
             <a:r>
@@ -5062,11 +5495,11 @@
           <a:bodyPr wrap="square" lIns="0" tIns="0" rIns="0" bIns="0" rtlCol="0" anchor="ctr"/>
           <a:lstStyle/>
           <a:p>
-            <a:pPr marL="0" indent="0" algn="ctr">
-              <a:buNone/>
-            </a:pPr>
-            <a:r>
-              <a:rPr lang="en-US" sz="900" b="1" kern="0" spc="100" dirty="0">
+            <a:pPr algn="ctr" indent="0" marL="0">
+              <a:buNone/>
+            </a:pPr>
+            <a:r>
+              <a:rPr lang="en-US" sz="900" b="1" spc="100" kern="0" dirty="0">
                 <a:solidFill>
                   <a:srgbClr val="5A05F4"/>
                 </a:solidFill>
@@ -5082,14 +5515,14 @@
       </p:sp>
       <p:pic>
         <p:nvPicPr>
-          <p:cNvPr id="7" name="Image 0" descr="preencoded.png"/>
+          <p:cNvPr id="7" name="Image 0" descr="preencoded.png">    </p:cNvPr>
           <p:cNvPicPr>
             <a:picLocks noChangeAspect="1"/>
           </p:cNvPicPr>
           <p:nvPr/>
         </p:nvPicPr>
         <p:blipFill>
-          <a:blip r:embed="rId3"/>
+          <a:blip r:embed="rId1"/>
           <a:stretch>
             <a:fillRect/>
           </a:stretch>
@@ -5147,7 +5580,7 @@
           <a:bodyPr wrap="square" lIns="0" tIns="0" rIns="0" bIns="0" rtlCol="0" anchor="ctr"/>
           <a:lstStyle/>
           <a:p>
-            <a:pPr marL="0" indent="0" algn="ctr">
+            <a:pPr algn="ctr" indent="0" marL="0">
               <a:buNone/>
             </a:pPr>
             <a:r>
@@ -5251,7 +5684,7 @@
           <a:bodyPr wrap="square" lIns="0" tIns="0" rIns="0" bIns="0" rtlCol="0" anchor="ctr"/>
           <a:lstStyle/>
           <a:p>
-            <a:pPr marL="0" indent="0" algn="ctr">
+            <a:pPr algn="ctr" indent="0" marL="0">
               <a:buNone/>
             </a:pPr>
             <a:r>
@@ -5355,7 +5788,7 @@
           <a:bodyPr wrap="square" lIns="0" tIns="0" rIns="0" bIns="0" rtlCol="0" anchor="ctr"/>
           <a:lstStyle/>
           <a:p>
-            <a:pPr marL="0" indent="0" algn="ctr">
+            <a:pPr algn="ctr" indent="0" marL="0">
               <a:buNone/>
             </a:pPr>
             <a:r>
@@ -5394,7 +5827,7 @@
           <a:bodyPr wrap="square" lIns="0" tIns="0" rIns="0" bIns="0" rtlCol="0" anchor="ctr"/>
           <a:lstStyle/>
           <a:p>
-            <a:pPr marL="0" indent="0">
+            <a:pPr indent="0" marL="0">
               <a:buNone/>
             </a:pPr>
             <a:r>
@@ -5455,7 +5888,7 @@
           <a:bodyPr wrap="square" lIns="0" tIns="0" rIns="0" bIns="0" rtlCol="0" anchor="ctr"/>
           <a:lstStyle/>
           <a:p>
-            <a:pPr marL="0" indent="0">
+            <a:pPr indent="0" marL="0">
               <a:buNone/>
             </a:pPr>
             <a:r>
@@ -5494,7 +5927,7 @@
           <a:bodyPr wrap="square" lIns="0" tIns="0" rIns="0" bIns="0" rtlCol="0" anchor="ctr"/>
           <a:lstStyle/>
           <a:p>
-            <a:pPr marL="0" indent="0">
+            <a:pPr indent="0" marL="0">
               <a:buNone/>
             </a:pPr>
             <a:r>
@@ -5555,7 +5988,7 @@
           <a:bodyPr wrap="square" lIns="0" tIns="0" rIns="0" bIns="0" rtlCol="0" anchor="ctr"/>
           <a:lstStyle/>
           <a:p>
-            <a:pPr marL="0" indent="0">
+            <a:pPr indent="0" marL="0">
               <a:buNone/>
             </a:pPr>
             <a:r>
@@ -5594,7 +6027,7 @@
           <a:bodyPr wrap="square" lIns="0" tIns="0" rIns="0" bIns="0" rtlCol="0" anchor="ctr"/>
           <a:lstStyle/>
           <a:p>
-            <a:pPr marL="0" indent="0">
+            <a:pPr indent="0" marL="0">
               <a:buNone/>
             </a:pPr>
             <a:r>
@@ -5655,7 +6088,7 @@
           <a:bodyPr wrap="square" lIns="0" tIns="0" rIns="0" bIns="0" rtlCol="0" anchor="ctr"/>
           <a:lstStyle/>
           <a:p>
-            <a:pPr marL="0" indent="0">
+            <a:pPr indent="0" marL="0">
               <a:buNone/>
             </a:pPr>
             <a:r>
@@ -5694,7 +6127,7 @@
           <a:bodyPr wrap="square" lIns="0" tIns="0" rIns="0" bIns="0" rtlCol="0" anchor="ctr"/>
           <a:lstStyle/>
           <a:p>
-            <a:pPr marL="0" indent="0">
+            <a:pPr indent="0" marL="0">
               <a:buNone/>
             </a:pPr>
             <a:r>
@@ -5760,7 +6193,7 @@
           <a:bodyPr wrap="square" lIns="0" tIns="0" rIns="0" bIns="0" rtlCol="0" anchor="ctr"/>
           <a:lstStyle/>
           <a:p>
-            <a:pPr marL="0" indent="0">
+            <a:pPr indent="0" marL="0">
               <a:lnSpc>
                 <a:spcPct val="112000"/>
               </a:lnSpc>
@@ -5783,7 +6216,7 @@
       </p:sp>
       <p:sp>
         <p:nvSpPr>
-          <p:cNvPr id="30" name="Slide Number Placeholder 0"/>
+          <p:cNvPr id="25" name="Slide Number Placeholder 0"/>
           <p:cNvSpPr>
             <a:spLocks noGrp="1"/>
           </p:cNvSpPr>
@@ -5801,7 +6234,7 @@
           </a:prstGeom>
           <a:extLst>
             <a:ext uri="{C572A759-6A51-4108-AA02-DFA0A04FC94B}">
-              <ma14:wrappingTextBoxFlag xmlns:ma14="http://schemas.microsoft.com/office/mac/drawingml/2011/main" xmlns="" val="0"/>
+              <ma14:wrappingTextBoxFlag xmlns:ma14="http://schemas.microsoft.com/office/mac/drawingml/2011/main" val="0"/>
             </a:ext>
           </a:extLst>
         </p:spPr>
@@ -5822,7 +6255,7 @@
           <a:p>
             <a:pPr algn="l"/>
             <a:fld id="{F7021451-1387-4CA6-816F-3879F97B5CBC}" type="slidenum">
-              <a:rPr lang="en-US" b="0"/>
+              <a:rPr b="0" lang="en-US"/>
               <a:t>12</a:t>
             </a:fld>
             <a:endParaRPr lang="en-US"/>
@@ -5897,7 +6330,7 @@
           <a:bodyPr wrap="square" lIns="0" tIns="0" rIns="0" bIns="0" rtlCol="0" anchor="ctr"/>
           <a:lstStyle/>
           <a:p>
-            <a:pPr marL="0" indent="0" algn="l">
+            <a:pPr algn="l" indent="0" marL="0">
               <a:buNone/>
             </a:pPr>
             <a:r>
@@ -5936,7 +6369,7 @@
           <a:bodyPr wrap="square" lIns="0" tIns="0" rIns="0" bIns="0" rtlCol="0" anchor="ctr"/>
           <a:lstStyle/>
           <a:p>
-            <a:pPr marL="0" indent="0">
+            <a:pPr indent="0" marL="0">
               <a:buNone/>
             </a:pPr>
             <a:r>
@@ -6002,11 +6435,11 @@
           <a:bodyPr wrap="square" lIns="0" tIns="0" rIns="0" bIns="0" rtlCol="0" anchor="ctr"/>
           <a:lstStyle/>
           <a:p>
-            <a:pPr marL="0" indent="0" algn="ctr">
-              <a:buNone/>
-            </a:pPr>
-            <a:r>
-              <a:rPr lang="en-US" sz="900" b="1" kern="0" spc="100" dirty="0">
+            <a:pPr algn="ctr" indent="0" marL="0">
+              <a:buNone/>
+            </a:pPr>
+            <a:r>
+              <a:rPr lang="en-US" sz="900" b="1" spc="100" kern="0" dirty="0">
                 <a:solidFill>
                   <a:srgbClr val="5A05F4"/>
                 </a:solidFill>
@@ -6022,14 +6455,14 @@
       </p:sp>
       <p:pic>
         <p:nvPicPr>
-          <p:cNvPr id="7" name="Image 0" descr="preencoded.png"/>
+          <p:cNvPr id="7" name="Image 0" descr="preencoded.png">    </p:cNvPr>
           <p:cNvPicPr>
             <a:picLocks noChangeAspect="1"/>
           </p:cNvPicPr>
           <p:nvPr/>
         </p:nvPicPr>
         <p:blipFill>
-          <a:blip r:embed="rId3"/>
+          <a:blip r:embed="rId1"/>
           <a:stretch>
             <a:fillRect/>
           </a:stretch>
@@ -6087,7 +6520,7 @@
           <a:bodyPr wrap="square" lIns="0" tIns="0" rIns="0" bIns="0" rtlCol="0" anchor="ctr"/>
           <a:lstStyle/>
           <a:p>
-            <a:pPr marL="0" indent="0">
+            <a:pPr indent="0" marL="0">
               <a:buNone/>
             </a:pPr>
             <a:r>
@@ -6126,7 +6559,7 @@
           <a:bodyPr wrap="square" lIns="0" tIns="0" rIns="0" bIns="0" rtlCol="0" anchor="t"/>
           <a:lstStyle/>
           <a:p>
-            <a:pPr marL="0" indent="0">
+            <a:pPr indent="0" marL="0">
               <a:lnSpc>
                 <a:spcPct val="108000"/>
               </a:lnSpc>
@@ -6190,7 +6623,7 @@
           <a:bodyPr wrap="square" lIns="0" tIns="0" rIns="0" bIns="0" rtlCol="0" anchor="ctr"/>
           <a:lstStyle/>
           <a:p>
-            <a:pPr marL="0" indent="0">
+            <a:pPr indent="0" marL="0">
               <a:buNone/>
             </a:pPr>
             <a:r>
@@ -6229,7 +6662,7 @@
           <a:bodyPr wrap="square" lIns="0" tIns="0" rIns="0" bIns="0" rtlCol="0" anchor="t"/>
           <a:lstStyle/>
           <a:p>
-            <a:pPr marL="0" indent="0">
+            <a:pPr indent="0" marL="0">
               <a:lnSpc>
                 <a:spcPct val="108000"/>
               </a:lnSpc>
@@ -6293,7 +6726,7 @@
           <a:bodyPr wrap="square" lIns="0" tIns="0" rIns="0" bIns="0" rtlCol="0" anchor="ctr"/>
           <a:lstStyle/>
           <a:p>
-            <a:pPr marL="0" indent="0" algn="ctr">
+            <a:pPr algn="ctr" indent="0" marL="0">
               <a:buNone/>
             </a:pPr>
             <a:r>
@@ -6397,7 +6830,7 @@
           <a:bodyPr wrap="square" lIns="0" tIns="0" rIns="0" bIns="0" rtlCol="0" anchor="ctr"/>
           <a:lstStyle/>
           <a:p>
-            <a:pPr marL="0" indent="0" algn="ctr">
+            <a:pPr algn="ctr" indent="0" marL="0">
               <a:buNone/>
             </a:pPr>
             <a:r>
@@ -6501,7 +6934,7 @@
           <a:bodyPr wrap="square" lIns="0" tIns="0" rIns="0" bIns="0" rtlCol="0" anchor="ctr"/>
           <a:lstStyle/>
           <a:p>
-            <a:pPr marL="0" indent="0" algn="ctr">
+            <a:pPr algn="ctr" indent="0" marL="0">
               <a:buNone/>
             </a:pPr>
             <a:r>
@@ -6605,7 +7038,7 @@
           <a:bodyPr wrap="square" lIns="0" tIns="0" rIns="0" bIns="0" rtlCol="0" anchor="ctr"/>
           <a:lstStyle/>
           <a:p>
-            <a:pPr marL="0" indent="0" algn="ctr">
+            <a:pPr algn="ctr" indent="0" marL="0">
               <a:buNone/>
             </a:pPr>
             <a:r>
@@ -6644,7 +7077,7 @@
           <a:bodyPr wrap="square" lIns="0" tIns="0" rIns="0" bIns="0" rtlCol="0" anchor="ctr"/>
           <a:lstStyle/>
           <a:p>
-            <a:pPr marL="0" indent="0">
+            <a:pPr indent="0" marL="0">
               <a:buNone/>
             </a:pPr>
             <a:r>
@@ -6691,14 +7124,34 @@
       </p:sp>
       <p:sp>
         <p:nvSpPr>
-          <p:cNvPr id="30" name="Text 27"/>
-          <p:cNvSpPr/>
-          <p:nvPr/>
-        </p:nvSpPr>
-        <p:spPr>
-          <a:xfrm>
-            <a:off x="786384" y="4882896"/>
-            <a:ext cx="10625328" cy="219456"/>
+          <p:cNvPr id="30" name="Shape 27"/>
+          <p:cNvSpPr/>
+          <p:nvPr/>
+        </p:nvSpPr>
+        <p:spPr>
+          <a:xfrm>
+            <a:off x="749808" y="5148072"/>
+            <a:ext cx="310896" cy="310896"/>
+          </a:xfrm>
+          <a:prstGeom prst="ellipse">
+            <a:avLst/>
+          </a:prstGeom>
+          <a:solidFill>
+            <a:srgbClr val="B3261E"/>
+          </a:solidFill>
+          <a:ln/>
+        </p:spPr>
+      </p:sp>
+      <p:sp>
+        <p:nvSpPr>
+          <p:cNvPr id="31" name="Text 28"/>
+          <p:cNvSpPr/>
+          <p:nvPr/>
+        </p:nvSpPr>
+        <p:spPr>
+          <a:xfrm>
+            <a:off x="749808" y="5148072"/>
+            <a:ext cx="310896" cy="310896"/>
           </a:xfrm>
           <a:prstGeom prst="rect">
             <a:avLst/>
@@ -6710,11 +7163,50 @@
           <a:bodyPr wrap="square" lIns="0" tIns="0" rIns="0" bIns="0" rtlCol="0" anchor="ctr"/>
           <a:lstStyle/>
           <a:p>
-            <a:pPr marL="0" indent="0">
-              <a:buNone/>
-            </a:pPr>
-            <a:r>
-              <a:rPr lang="en-US" sz="950" b="1" kern="0" spc="150" dirty="0">
+            <a:pPr algn="ctr" indent="0" marL="0">
+              <a:buNone/>
+            </a:pPr>
+            <a:r>
+              <a:rPr lang="en-US" sz="1200" b="1" dirty="0">
+                <a:solidFill>
+                  <a:srgbClr val="FFFFFF"/>
+                </a:solidFill>
+                <a:latin typeface="Arial" pitchFamily="34" charset="0"/>
+                <a:ea typeface="Arial" pitchFamily="34" charset="-122"/>
+                <a:cs typeface="Arial" pitchFamily="34" charset="-120"/>
+              </a:rPr>
+              <a:t>✕</a:t>
+            </a:r>
+            <a:endParaRPr lang="en-US" sz="1200" dirty="0"/>
+          </a:p>
+        </p:txBody>
+      </p:sp>
+      <p:sp>
+        <p:nvSpPr>
+          <p:cNvPr id="32" name="Text 29"/>
+          <p:cNvSpPr/>
+          <p:nvPr/>
+        </p:nvSpPr>
+        <p:spPr>
+          <a:xfrm>
+            <a:off x="1243584" y="4882896"/>
+            <a:ext cx="10168128" cy="219456"/>
+          </a:xfrm>
+          <a:prstGeom prst="rect">
+            <a:avLst/>
+          </a:prstGeom>
+          <a:noFill/>
+          <a:ln/>
+        </p:spPr>
+        <p:txBody>
+          <a:bodyPr wrap="square" lIns="0" tIns="0" rIns="0" bIns="0" rtlCol="0" anchor="ctr"/>
+          <a:lstStyle/>
+          <a:p>
+            <a:pPr indent="0" marL="0">
+              <a:buNone/>
+            </a:pPr>
+            <a:r>
+              <a:rPr lang="en-US" sz="950" b="1" spc="150" kern="0" dirty="0">
                 <a:solidFill>
                   <a:srgbClr val="B3261E"/>
                 </a:solidFill>
@@ -6730,14 +7222,14 @@
       </p:sp>
       <p:sp>
         <p:nvSpPr>
-          <p:cNvPr id="31" name="Text 28"/>
-          <p:cNvSpPr/>
-          <p:nvPr/>
-        </p:nvSpPr>
-        <p:spPr>
-          <a:xfrm>
-            <a:off x="786384" y="5138928"/>
-            <a:ext cx="10625328" cy="585216"/>
+          <p:cNvPr id="33" name="Text 30"/>
+          <p:cNvSpPr/>
+          <p:nvPr/>
+        </p:nvSpPr>
+        <p:spPr>
+          <a:xfrm>
+            <a:off x="1243584" y="5138928"/>
+            <a:ext cx="10168128" cy="585216"/>
           </a:xfrm>
           <a:prstGeom prst="rect">
             <a:avLst/>
@@ -6749,7 +7241,7 @@
           <a:bodyPr wrap="square" lIns="0" tIns="0" rIns="0" bIns="0" rtlCol="0" anchor="ctr"/>
           <a:lstStyle/>
           <a:p>
-            <a:pPr marL="0" indent="0">
+            <a:pPr indent="0" marL="0">
               <a:lnSpc>
                 <a:spcPct val="112000"/>
               </a:lnSpc>
@@ -6772,7 +7264,7 @@
       </p:sp>
       <p:sp>
         <p:nvSpPr>
-          <p:cNvPr id="32" name="Slide Number Placeholder 0"/>
+          <p:cNvPr id="25" name="Slide Number Placeholder 0"/>
           <p:cNvSpPr>
             <a:spLocks noGrp="1"/>
           </p:cNvSpPr>
@@ -6790,7 +7282,7 @@
           </a:prstGeom>
           <a:extLst>
             <a:ext uri="{C572A759-6A51-4108-AA02-DFA0A04FC94B}">
-              <ma14:wrappingTextBoxFlag xmlns:ma14="http://schemas.microsoft.com/office/mac/drawingml/2011/main" xmlns="" val="0"/>
+              <ma14:wrappingTextBoxFlag xmlns:ma14="http://schemas.microsoft.com/office/mac/drawingml/2011/main" val="0"/>
             </a:ext>
           </a:extLst>
         </p:spPr>
@@ -6811,7 +7303,7 @@
           <a:p>
             <a:pPr algn="l"/>
             <a:fld id="{F7021451-1387-4CA6-816F-3879F97B5CBC}" type="slidenum">
-              <a:rPr lang="en-US" b="0"/>
+              <a:rPr b="0" lang="en-US"/>
               <a:t>13</a:t>
             </a:fld>
             <a:endParaRPr lang="en-US"/>
@@ -6886,7 +7378,7 @@
           <a:bodyPr wrap="square" lIns="0" tIns="0" rIns="0" bIns="0" rtlCol="0" anchor="ctr"/>
           <a:lstStyle/>
           <a:p>
-            <a:pPr marL="0" indent="0" algn="l">
+            <a:pPr algn="l" indent="0" marL="0">
               <a:buNone/>
             </a:pPr>
             <a:r>
@@ -6925,7 +7417,7 @@
           <a:bodyPr wrap="square" lIns="0" tIns="0" rIns="0" bIns="0" rtlCol="0" anchor="ctr"/>
           <a:lstStyle/>
           <a:p>
-            <a:pPr marL="0" indent="0">
+            <a:pPr indent="0" marL="0">
               <a:buNone/>
             </a:pPr>
             <a:r>
@@ -6964,7 +7456,7 @@
           <a:bodyPr wrap="square" lIns="0" tIns="0" rIns="0" bIns="0" rtlCol="0" anchor="t"/>
           <a:lstStyle/>
           <a:p>
-            <a:pPr marL="0" indent="0">
+            <a:pPr indent="0" marL="0">
               <a:lnSpc>
                 <a:spcPct val="100000"/>
               </a:lnSpc>
@@ -7033,11 +7525,11 @@
           <a:bodyPr wrap="square" lIns="0" tIns="0" rIns="0" bIns="0" rtlCol="0" anchor="ctr"/>
           <a:lstStyle/>
           <a:p>
-            <a:pPr marL="0" indent="0" algn="ctr">
-              <a:buNone/>
-            </a:pPr>
-            <a:r>
-              <a:rPr lang="en-US" sz="900" b="1" kern="0" spc="100" dirty="0">
+            <a:pPr algn="ctr" indent="0" marL="0">
+              <a:buNone/>
+            </a:pPr>
+            <a:r>
+              <a:rPr lang="en-US" sz="900" b="1" spc="100" kern="0" dirty="0">
                 <a:solidFill>
                   <a:srgbClr val="5A05F4"/>
                 </a:solidFill>
@@ -7053,14 +7545,14 @@
       </p:sp>
       <p:pic>
         <p:nvPicPr>
-          <p:cNvPr id="8" name="Image 0" descr="preencoded.png"/>
+          <p:cNvPr id="8" name="Image 0" descr="preencoded.png">    </p:cNvPr>
           <p:cNvPicPr>
             <a:picLocks noChangeAspect="1"/>
           </p:cNvPicPr>
           <p:nvPr/>
         </p:nvPicPr>
         <p:blipFill>
-          <a:blip r:embed="rId3"/>
+          <a:blip r:embed="rId1"/>
           <a:stretch>
             <a:fillRect/>
           </a:stretch>
@@ -7091,27 +7583,15 @@
         </p:nvGraphicFramePr>
         <p:xfrm>
           <a:off x="566928" y="1783080"/>
-          <a:ext cx="11064240" cy="3182112"/>
+          <a:ext cx="11064240" cy="914400"/>
         </p:xfrm>
         <a:graphic>
           <a:graphicData uri="http://schemas.openxmlformats.org/drawingml/2006/table">
             <a:tbl>
               <a:tblPr/>
               <a:tblGrid>
-                <a:gridCol w="5120640">
-                  <a:extLst>
-                    <a:ext uri="{9D8B030D-6E8A-4147-A177-3AD203B41FA5}">
-                      <a16:colId xmlns:a16="http://schemas.microsoft.com/office/drawing/2014/main" val="20000"/>
-                    </a:ext>
-                  </a:extLst>
-                </a:gridCol>
-                <a:gridCol w="5943600">
-                  <a:extLst>
-                    <a:ext uri="{9D8B030D-6E8A-4147-A177-3AD203B41FA5}">
-                      <a16:colId xmlns:a16="http://schemas.microsoft.com/office/drawing/2014/main" val="20001"/>
-                    </a:ext>
-                  </a:extLst>
-                </a:gridCol>
+                <a:gridCol w="5120640"/>
+                <a:gridCol w="5943600"/>
               </a:tblGrid>
               <a:tr h="530352">
                 <a:tc>
@@ -7119,11 +7599,11 @@
                     <a:bodyPr/>
                     <a:lstStyle/>
                     <a:p>
-                      <a:pPr marL="0" indent="0" algn="ctr">
+                      <a:pPr algn="ctr" indent="0" marL="0">
                         <a:buNone/>
                       </a:pPr>
                       <a:r>
-                        <a:rPr lang="en-US" sz="900" b="1" kern="0" spc="100" dirty="0">
+                        <a:rPr lang="en-US" sz="900" b="1" spc="100" kern="0" dirty="0">
                           <a:solidFill>
                             <a:srgbClr val="FFFFFF"/>
                           </a:solidFill>
@@ -7187,11 +7667,11 @@
                     <a:bodyPr/>
                     <a:lstStyle/>
                     <a:p>
-                      <a:pPr marL="0" indent="0" algn="ctr">
+                      <a:pPr algn="ctr" indent="0" marL="0">
                         <a:buNone/>
                       </a:pPr>
                       <a:r>
-                        <a:rPr lang="en-US" sz="900" b="1" kern="0" spc="100" dirty="0">
+                        <a:rPr lang="en-US" sz="900" b="1" spc="100" kern="0" dirty="0">
                           <a:solidFill>
                             <a:srgbClr val="FFFFFF"/>
                           </a:solidFill>
@@ -7250,11 +7730,6 @@
                     </a:solidFill>
                   </a:tcPr>
                 </a:tc>
-                <a:extLst>
-                  <a:ext uri="{0D108BD9-81ED-4DB2-BD59-A6C34878D82A}">
-                    <a16:rowId xmlns:a16="http://schemas.microsoft.com/office/drawing/2014/main" val="10000"/>
-                  </a:ext>
-                </a:extLst>
               </a:tr>
               <a:tr h="530352">
                 <a:tc>
@@ -7262,7 +7737,7 @@
                     <a:bodyPr/>
                     <a:lstStyle/>
                     <a:p>
-                      <a:pPr marL="0" indent="0">
+                      <a:pPr indent="0" marL="0">
                         <a:buNone/>
                       </a:pPr>
                       <a:r>
@@ -7330,7 +7805,7 @@
                     <a:bodyPr/>
                     <a:lstStyle/>
                     <a:p>
-                      <a:pPr marL="0" indent="0">
+                      <a:pPr indent="0" marL="0">
                         <a:buNone/>
                       </a:pPr>
                       <a:r>
@@ -7393,11 +7868,6 @@
                     </a:solidFill>
                   </a:tcPr>
                 </a:tc>
-                <a:extLst>
-                  <a:ext uri="{0D108BD9-81ED-4DB2-BD59-A6C34878D82A}">
-                    <a16:rowId xmlns:a16="http://schemas.microsoft.com/office/drawing/2014/main" val="10001"/>
-                  </a:ext>
-                </a:extLst>
               </a:tr>
               <a:tr h="530352">
                 <a:tc>
@@ -7405,7 +7875,7 @@
                     <a:bodyPr/>
                     <a:lstStyle/>
                     <a:p>
-                      <a:pPr marL="0" indent="0">
+                      <a:pPr indent="0" marL="0">
                         <a:buNone/>
                       </a:pPr>
                       <a:r>
@@ -7473,7 +7943,7 @@
                     <a:bodyPr/>
                     <a:lstStyle/>
                     <a:p>
-                      <a:pPr marL="0" indent="0">
+                      <a:pPr indent="0" marL="0">
                         <a:buNone/>
                       </a:pPr>
                       <a:r>
@@ -7536,11 +8006,6 @@
                     </a:solidFill>
                   </a:tcPr>
                 </a:tc>
-                <a:extLst>
-                  <a:ext uri="{0D108BD9-81ED-4DB2-BD59-A6C34878D82A}">
-                    <a16:rowId xmlns:a16="http://schemas.microsoft.com/office/drawing/2014/main" val="10002"/>
-                  </a:ext>
-                </a:extLst>
               </a:tr>
               <a:tr h="530352">
                 <a:tc>
@@ -7548,7 +8013,7 @@
                     <a:bodyPr/>
                     <a:lstStyle/>
                     <a:p>
-                      <a:pPr marL="0" indent="0">
+                      <a:pPr indent="0" marL="0">
                         <a:buNone/>
                       </a:pPr>
                       <a:r>
@@ -7616,7 +8081,7 @@
                     <a:bodyPr/>
                     <a:lstStyle/>
                     <a:p>
-                      <a:pPr marL="0" indent="0">
+                      <a:pPr indent="0" marL="0">
                         <a:buNone/>
                       </a:pPr>
                       <a:r>
@@ -7679,11 +8144,6 @@
                     </a:solidFill>
                   </a:tcPr>
                 </a:tc>
-                <a:extLst>
-                  <a:ext uri="{0D108BD9-81ED-4DB2-BD59-A6C34878D82A}">
-                    <a16:rowId xmlns:a16="http://schemas.microsoft.com/office/drawing/2014/main" val="10003"/>
-                  </a:ext>
-                </a:extLst>
               </a:tr>
               <a:tr h="530352">
                 <a:tc>
@@ -7691,7 +8151,7 @@
                     <a:bodyPr/>
                     <a:lstStyle/>
                     <a:p>
-                      <a:pPr marL="0" indent="0">
+                      <a:pPr indent="0" marL="0">
                         <a:buNone/>
                       </a:pPr>
                       <a:r>
@@ -7759,7 +8219,7 @@
                     <a:bodyPr/>
                     <a:lstStyle/>
                     <a:p>
-                      <a:pPr marL="0" indent="0">
+                      <a:pPr indent="0" marL="0">
                         <a:buNone/>
                       </a:pPr>
                       <a:r>
@@ -7822,11 +8282,6 @@
                     </a:solidFill>
                   </a:tcPr>
                 </a:tc>
-                <a:extLst>
-                  <a:ext uri="{0D108BD9-81ED-4DB2-BD59-A6C34878D82A}">
-                    <a16:rowId xmlns:a16="http://schemas.microsoft.com/office/drawing/2014/main" val="10004"/>
-                  </a:ext>
-                </a:extLst>
               </a:tr>
               <a:tr h="530352">
                 <a:tc>
@@ -7834,7 +8289,7 @@
                     <a:bodyPr/>
                     <a:lstStyle/>
                     <a:p>
-                      <a:pPr marL="0" indent="0">
+                      <a:pPr indent="0" marL="0">
                         <a:buNone/>
                       </a:pPr>
                       <a:r>
@@ -7902,7 +8357,7 @@
                     <a:bodyPr/>
                     <a:lstStyle/>
                     <a:p>
-                      <a:pPr marL="0" indent="0">
+                      <a:pPr indent="0" marL="0">
                         <a:buNone/>
                       </a:pPr>
                       <a:r>
@@ -7965,11 +8420,6 @@
                     </a:solidFill>
                   </a:tcPr>
                 </a:tc>
-                <a:extLst>
-                  <a:ext uri="{0D108BD9-81ED-4DB2-BD59-A6C34878D82A}">
-                    <a16:rowId xmlns:a16="http://schemas.microsoft.com/office/drawing/2014/main" val="10005"/>
-                  </a:ext>
-                </a:extLst>
               </a:tr>
             </a:tbl>
           </a:graphicData>
@@ -8023,11 +8473,11 @@
           <a:bodyPr wrap="square" lIns="0" tIns="0" rIns="0" bIns="0" rtlCol="0" anchor="ctr"/>
           <a:lstStyle/>
           <a:p>
-            <a:pPr marL="0" indent="0">
-              <a:buNone/>
-            </a:pPr>
-            <a:r>
-              <a:rPr lang="en-US" sz="950" b="1" kern="0" spc="150" dirty="0">
+            <a:pPr indent="0" marL="0">
+              <a:buNone/>
+            </a:pPr>
+            <a:r>
+              <a:rPr lang="en-US" sz="950" b="1" spc="150" kern="0" dirty="0">
                 <a:solidFill>
                   <a:srgbClr val="106B41"/>
                 </a:solidFill>
@@ -8062,7 +8512,7 @@
           <a:bodyPr wrap="square" lIns="0" tIns="0" rIns="0" bIns="0" rtlCol="0" anchor="ctr"/>
           <a:lstStyle/>
           <a:p>
-            <a:pPr marL="0" indent="0">
+            <a:pPr indent="0" marL="0">
               <a:lnSpc>
                 <a:spcPct val="112000"/>
               </a:lnSpc>
@@ -8103,7 +8553,7 @@
           </a:prstGeom>
           <a:extLst>
             <a:ext uri="{C572A759-6A51-4108-AA02-DFA0A04FC94B}">
-              <ma14:wrappingTextBoxFlag xmlns:ma14="http://schemas.microsoft.com/office/mac/drawingml/2011/main" xmlns="" val="0"/>
+              <ma14:wrappingTextBoxFlag xmlns:ma14="http://schemas.microsoft.com/office/mac/drawingml/2011/main" val="0"/>
             </a:ext>
           </a:extLst>
         </p:spPr>
@@ -8124,7 +8574,7 @@
           <a:p>
             <a:pPr algn="l"/>
             <a:fld id="{F7021451-1387-4CA6-816F-3879F97B5CBC}" type="slidenum">
-              <a:rPr lang="en-US" b="0"/>
+              <a:rPr b="0" lang="en-US"/>
               <a:t>14</a:t>
             </a:fld>
             <a:endParaRPr lang="en-US"/>
@@ -8199,7 +8649,7 @@
           <a:bodyPr wrap="square" lIns="0" tIns="0" rIns="0" bIns="0" rtlCol="0" anchor="ctr"/>
           <a:lstStyle/>
           <a:p>
-            <a:pPr marL="0" indent="0" algn="l">
+            <a:pPr algn="l" indent="0" marL="0">
               <a:buNone/>
             </a:pPr>
             <a:r>
@@ -8238,7 +8688,7 @@
           <a:bodyPr wrap="square" lIns="0" tIns="0" rIns="0" bIns="0" rtlCol="0" anchor="ctr"/>
           <a:lstStyle/>
           <a:p>
-            <a:pPr marL="0" indent="0">
+            <a:pPr indent="0" marL="0">
               <a:buNone/>
             </a:pPr>
             <a:r>
@@ -8304,11 +8754,11 @@
           <a:bodyPr wrap="square" lIns="0" tIns="0" rIns="0" bIns="0" rtlCol="0" anchor="ctr"/>
           <a:lstStyle/>
           <a:p>
-            <a:pPr marL="0" indent="0" algn="ctr">
-              <a:buNone/>
-            </a:pPr>
-            <a:r>
-              <a:rPr lang="en-US" sz="900" b="1" kern="0" spc="100" dirty="0">
+            <a:pPr algn="ctr" indent="0" marL="0">
+              <a:buNone/>
+            </a:pPr>
+            <a:r>
+              <a:rPr lang="en-US" sz="900" b="1" spc="100" kern="0" dirty="0">
                 <a:solidFill>
                   <a:srgbClr val="5A05F4"/>
                 </a:solidFill>
@@ -8370,11 +8820,11 @@
           <a:bodyPr wrap="square" lIns="0" tIns="0" rIns="0" bIns="0" rtlCol="0" anchor="ctr"/>
           <a:lstStyle/>
           <a:p>
-            <a:pPr marL="0" indent="0" algn="ctr">
-              <a:buNone/>
-            </a:pPr>
-            <a:r>
-              <a:rPr lang="en-US" sz="900" b="1" kern="0" spc="100" dirty="0">
+            <a:pPr algn="ctr" indent="0" marL="0">
+              <a:buNone/>
+            </a:pPr>
+            <a:r>
+              <a:rPr lang="en-US" sz="900" b="1" spc="100" kern="0" dirty="0">
                 <a:solidFill>
                   <a:srgbClr val="434343"/>
                 </a:solidFill>
@@ -8390,14 +8840,14 @@
       </p:sp>
       <p:pic>
         <p:nvPicPr>
-          <p:cNvPr id="9" name="Image 0" descr="preencoded.png"/>
+          <p:cNvPr id="9" name="Image 0" descr="preencoded.png">    </p:cNvPr>
           <p:cNvPicPr>
             <a:picLocks noChangeAspect="1"/>
           </p:cNvPicPr>
           <p:nvPr/>
         </p:nvPicPr>
         <p:blipFill>
-          <a:blip r:embed="rId3"/>
+          <a:blip r:embed="rId1"/>
           <a:stretch>
             <a:fillRect/>
           </a:stretch>
@@ -8455,7 +8905,7 @@
           <a:bodyPr wrap="square" lIns="0" tIns="0" rIns="0" bIns="0" rtlCol="0" anchor="ctr"/>
           <a:lstStyle/>
           <a:p>
-            <a:pPr marL="0" indent="0" algn="ctr">
+            <a:pPr algn="ctr" indent="0" marL="0">
               <a:buNone/>
             </a:pPr>
             <a:r>
@@ -8559,7 +9009,7 @@
           <a:bodyPr wrap="square" lIns="0" tIns="0" rIns="0" bIns="0" rtlCol="0" anchor="ctr"/>
           <a:lstStyle/>
           <a:p>
-            <a:pPr marL="0" indent="0" algn="ctr">
+            <a:pPr algn="ctr" indent="0" marL="0">
               <a:buNone/>
             </a:pPr>
             <a:r>
@@ -8663,7 +9113,7 @@
           <a:bodyPr wrap="square" lIns="0" tIns="0" rIns="0" bIns="0" rtlCol="0" anchor="ctr"/>
           <a:lstStyle/>
           <a:p>
-            <a:pPr marL="0" indent="0" algn="ctr">
+            <a:pPr algn="ctr" indent="0" marL="0">
               <a:buNone/>
             </a:pPr>
             <a:r>
@@ -8724,7 +9174,7 @@
           <a:bodyPr wrap="square" lIns="0" tIns="0" rIns="0" bIns="0" rtlCol="0" anchor="ctr"/>
           <a:lstStyle/>
           <a:p>
-            <a:pPr marL="0" indent="0">
+            <a:pPr indent="0" marL="0">
               <a:buNone/>
             </a:pPr>
             <a:r>
@@ -8763,7 +9213,7 @@
           <a:bodyPr wrap="square" lIns="0" tIns="0" rIns="0" bIns="0" rtlCol="0" anchor="t"/>
           <a:lstStyle/>
           <a:p>
-            <a:pPr marL="0" indent="0">
+            <a:pPr indent="0" marL="0">
               <a:lnSpc>
                 <a:spcPct val="108000"/>
               </a:lnSpc>
@@ -8827,7 +9277,7 @@
           <a:bodyPr wrap="square" lIns="0" tIns="0" rIns="0" bIns="0" rtlCol="0" anchor="ctr"/>
           <a:lstStyle/>
           <a:p>
-            <a:pPr marL="0" indent="0">
+            <a:pPr indent="0" marL="0">
               <a:buNone/>
             </a:pPr>
             <a:r>
@@ -8866,7 +9316,7 @@
           <a:bodyPr wrap="square" lIns="0" tIns="0" rIns="0" bIns="0" rtlCol="0" anchor="t"/>
           <a:lstStyle/>
           <a:p>
-            <a:pPr marL="0" indent="0">
+            <a:pPr indent="0" marL="0">
               <a:lnSpc>
                 <a:spcPct val="108000"/>
               </a:lnSpc>
@@ -8935,7 +9385,7 @@
           <a:bodyPr wrap="square" lIns="0" tIns="0" rIns="0" bIns="0" rtlCol="0" anchor="ctr"/>
           <a:lstStyle/>
           <a:p>
-            <a:pPr marL="0" indent="0">
+            <a:pPr indent="0" marL="0">
               <a:lnSpc>
                 <a:spcPct val="112000"/>
               </a:lnSpc>
@@ -8958,7 +9408,7 @@
       </p:sp>
       <p:sp>
         <p:nvSpPr>
-          <p:cNvPr id="28" name="Slide Number Placeholder 0"/>
+          <p:cNvPr id="25" name="Slide Number Placeholder 0"/>
           <p:cNvSpPr>
             <a:spLocks noGrp="1"/>
           </p:cNvSpPr>
@@ -8976,7 +9426,7 @@
           </a:prstGeom>
           <a:extLst>
             <a:ext uri="{C572A759-6A51-4108-AA02-DFA0A04FC94B}">
-              <ma14:wrappingTextBoxFlag xmlns:ma14="http://schemas.microsoft.com/office/mac/drawingml/2011/main" xmlns="" val="0"/>
+              <ma14:wrappingTextBoxFlag xmlns:ma14="http://schemas.microsoft.com/office/mac/drawingml/2011/main" val="0"/>
             </a:ext>
           </a:extLst>
         </p:spPr>
@@ -8997,7 +9447,7 @@
           <a:p>
             <a:pPr algn="l"/>
             <a:fld id="{F7021451-1387-4CA6-816F-3879F97B5CBC}" type="slidenum">
-              <a:rPr lang="en-US" b="0"/>
+              <a:rPr b="0" lang="en-US"/>
               <a:t>15</a:t>
             </a:fld>
             <a:endParaRPr lang="en-US"/>
@@ -9072,7 +9522,7 @@
           <a:bodyPr wrap="square" lIns="0" tIns="0" rIns="0" bIns="0" rtlCol="0" anchor="ctr"/>
           <a:lstStyle/>
           <a:p>
-            <a:pPr marL="0" indent="0" algn="l">
+            <a:pPr algn="l" indent="0" marL="0">
               <a:buNone/>
             </a:pPr>
             <a:r>
@@ -9111,7 +9561,7 @@
           <a:bodyPr wrap="square" lIns="0" tIns="0" rIns="0" bIns="0" rtlCol="0" anchor="ctr"/>
           <a:lstStyle/>
           <a:p>
-            <a:pPr marL="0" indent="0">
+            <a:pPr indent="0" marL="0">
               <a:buNone/>
             </a:pPr>
             <a:r>
@@ -9177,11 +9627,11 @@
           <a:bodyPr wrap="square" lIns="0" tIns="0" rIns="0" bIns="0" rtlCol="0" anchor="ctr"/>
           <a:lstStyle/>
           <a:p>
-            <a:pPr marL="0" indent="0" algn="ctr">
-              <a:buNone/>
-            </a:pPr>
-            <a:r>
-              <a:rPr lang="en-US" sz="900" b="1" kern="0" spc="100" dirty="0">
+            <a:pPr algn="ctr" indent="0" marL="0">
+              <a:buNone/>
+            </a:pPr>
+            <a:r>
+              <a:rPr lang="en-US" sz="900" b="1" spc="100" kern="0" dirty="0">
                 <a:solidFill>
                   <a:srgbClr val="5A05F4"/>
                 </a:solidFill>
@@ -9197,14 +9647,14 @@
       </p:sp>
       <p:pic>
         <p:nvPicPr>
-          <p:cNvPr id="7" name="Image 0" descr="preencoded.png"/>
+          <p:cNvPr id="7" name="Image 0" descr="preencoded.png">    </p:cNvPr>
           <p:cNvPicPr>
             <a:picLocks noChangeAspect="1"/>
           </p:cNvPicPr>
           <p:nvPr/>
         </p:nvPicPr>
         <p:blipFill>
-          <a:blip r:embed="rId3"/>
+          <a:blip r:embed="rId1"/>
           <a:stretch>
             <a:fillRect/>
           </a:stretch>
@@ -9267,7 +9717,7 @@
           <a:bodyPr wrap="square" lIns="0" tIns="0" rIns="0" bIns="0" rtlCol="0" anchor="t"/>
           <a:lstStyle/>
           <a:p>
-            <a:pPr marL="0" indent="0">
+            <a:pPr indent="0" marL="0">
               <a:lnSpc>
                 <a:spcPct val="130000"/>
               </a:lnSpc>
@@ -9287,7 +9737,7 @@
             <a:endParaRPr lang="en-US" sz="1200" dirty="0"/>
           </a:p>
           <a:p>
-            <a:pPr marL="0" indent="0">
+            <a:pPr indent="0" marL="0">
               <a:lnSpc>
                 <a:spcPct val="130000"/>
               </a:lnSpc>
@@ -9304,6 +9754,12 @@
               </a:rPr>
               <a:t>  eval pass rate &lt; 5/6         </a:t>
             </a:r>
+            <a:pPr indent="0" marL="0">
+              <a:lnSpc>
+                <a:spcPct val="130000"/>
+              </a:lnSpc>
+              <a:buNone/>
+            </a:pPr>
             <a:r>
               <a:rPr lang="en-US" sz="1200" dirty="0">
                 <a:solidFill>
@@ -9318,7 +9774,7 @@
             <a:endParaRPr lang="en-US" sz="1200" dirty="0"/>
           </a:p>
           <a:p>
-            <a:pPr marL="0" indent="0">
+            <a:pPr indent="0" marL="0">
               <a:lnSpc>
                 <a:spcPct val="130000"/>
               </a:lnSpc>
@@ -9335,6 +9791,12 @@
               </a:rPr>
               <a:t>  або fallback_events зростає  </a:t>
             </a:r>
+            <a:pPr indent="0" marL="0">
+              <a:lnSpc>
+                <a:spcPct val="130000"/>
+              </a:lnSpc>
+              <a:buNone/>
+            </a:pPr>
             <a:r>
               <a:rPr lang="en-US" sz="1200" dirty="0">
                 <a:solidFill>
@@ -9349,7 +9811,7 @@
             <a:endParaRPr lang="en-US" sz="1200" dirty="0"/>
           </a:p>
           <a:p>
-            <a:pPr marL="0" indent="0">
+            <a:pPr indent="0" marL="0">
               <a:lnSpc>
                 <a:spcPct val="130000"/>
               </a:lnSpc>
@@ -9366,6 +9828,12 @@
               </a:rPr>
               <a:t>  або error rate &gt; 5%          </a:t>
             </a:r>
+            <a:pPr indent="0" marL="0">
+              <a:lnSpc>
+                <a:spcPct val="130000"/>
+              </a:lnSpc>
+              <a:buNone/>
+            </a:pPr>
             <a:r>
               <a:rPr lang="en-US" sz="1200" dirty="0">
                 <a:solidFill>
@@ -9380,7 +9848,7 @@
             <a:endParaRPr lang="en-US" sz="1200" dirty="0"/>
           </a:p>
           <a:p>
-            <a:pPr marL="0" indent="0">
+            <a:pPr indent="0" marL="0">
               <a:lnSpc>
                 <a:spcPct val="130000"/>
               </a:lnSpc>
@@ -9400,7 +9868,7 @@
             <a:endParaRPr lang="en-US" sz="1200" dirty="0"/>
           </a:p>
           <a:p>
-            <a:pPr marL="0" indent="0">
+            <a:pPr indent="0" marL="0">
               <a:lnSpc>
                 <a:spcPct val="130000"/>
               </a:lnSpc>
@@ -9484,7 +9952,7 @@
           <a:bodyPr wrap="square" lIns="0" tIns="0" rIns="0" bIns="0" rtlCol="0" anchor="ctr"/>
           <a:lstStyle/>
           <a:p>
-            <a:pPr marL="0" indent="0" algn="ctr">
+            <a:pPr algn="ctr" indent="0" marL="0">
               <a:buNone/>
             </a:pPr>
             <a:r>
@@ -9523,7 +9991,7 @@
           <a:bodyPr wrap="square" lIns="0" tIns="0" rIns="0" bIns="0" rtlCol="0" anchor="ctr"/>
           <a:lstStyle/>
           <a:p>
-            <a:pPr marL="0" indent="0">
+            <a:pPr indent="0" marL="0">
               <a:buNone/>
             </a:pPr>
             <a:r>
@@ -9562,7 +10030,7 @@
           <a:bodyPr wrap="square" lIns="0" tIns="0" rIns="0" bIns="0" rtlCol="0" anchor="t"/>
           <a:lstStyle/>
           <a:p>
-            <a:pPr marL="0" indent="0">
+            <a:pPr indent="0" marL="0">
               <a:lnSpc>
                 <a:spcPct val="108000"/>
               </a:lnSpc>
@@ -9646,7 +10114,7 @@
           <a:bodyPr wrap="square" lIns="0" tIns="0" rIns="0" bIns="0" rtlCol="0" anchor="ctr"/>
           <a:lstStyle/>
           <a:p>
-            <a:pPr marL="0" indent="0" algn="ctr">
+            <a:pPr algn="ctr" indent="0" marL="0">
               <a:buNone/>
             </a:pPr>
             <a:r>
@@ -9685,7 +10153,7 @@
           <a:bodyPr wrap="square" lIns="0" tIns="0" rIns="0" bIns="0" rtlCol="0" anchor="ctr"/>
           <a:lstStyle/>
           <a:p>
-            <a:pPr marL="0" indent="0">
+            <a:pPr indent="0" marL="0">
               <a:buNone/>
             </a:pPr>
             <a:r>
@@ -9724,7 +10192,7 @@
           <a:bodyPr wrap="square" lIns="0" tIns="0" rIns="0" bIns="0" rtlCol="0" anchor="t"/>
           <a:lstStyle/>
           <a:p>
-            <a:pPr marL="0" indent="0">
+            <a:pPr indent="0" marL="0">
               <a:lnSpc>
                 <a:spcPct val="108000"/>
               </a:lnSpc>
@@ -9754,7 +10222,7 @@
         <p:spPr>
           <a:xfrm>
             <a:off x="7973568" y="4023360"/>
-            <a:ext cx="3657600" cy="1463040"/>
+            <a:ext cx="3520440" cy="1463040"/>
           </a:xfrm>
           <a:prstGeom prst="roundRect">
             <a:avLst>
@@ -9808,7 +10276,7 @@
           <a:bodyPr wrap="square" lIns="0" tIns="0" rIns="0" bIns="0" rtlCol="0" anchor="ctr"/>
           <a:lstStyle/>
           <a:p>
-            <a:pPr marL="0" indent="0" algn="ctr">
+            <a:pPr algn="ctr" indent="0" marL="0">
               <a:buNone/>
             </a:pPr>
             <a:r>
@@ -9847,7 +10315,7 @@
           <a:bodyPr wrap="square" lIns="0" tIns="0" rIns="0" bIns="0" rtlCol="0" anchor="ctr"/>
           <a:lstStyle/>
           <a:p>
-            <a:pPr marL="0" indent="0">
+            <a:pPr indent="0" marL="0">
               <a:buNone/>
             </a:pPr>
             <a:r>
@@ -9886,7 +10354,7 @@
           <a:bodyPr wrap="square" lIns="0" tIns="0" rIns="0" bIns="0" rtlCol="0" anchor="t"/>
           <a:lstStyle/>
           <a:p>
-            <a:pPr marL="0" indent="0">
+            <a:pPr indent="0" marL="0">
               <a:lnSpc>
                 <a:spcPct val="108000"/>
               </a:lnSpc>
@@ -9950,7 +10418,7 @@
           <a:bodyPr wrap="square" lIns="0" tIns="0" rIns="0" bIns="0" rtlCol="0" anchor="ctr"/>
           <a:lstStyle/>
           <a:p>
-            <a:pPr marL="0" indent="0">
+            <a:pPr indent="0" marL="0">
               <a:lnSpc>
                 <a:spcPct val="112000"/>
               </a:lnSpc>
@@ -9973,7 +10441,7 @@
       </p:sp>
       <p:sp>
         <p:nvSpPr>
-          <p:cNvPr id="27" name="Slide Number Placeholder 0"/>
+          <p:cNvPr id="25" name="Slide Number Placeholder 0"/>
           <p:cNvSpPr>
             <a:spLocks noGrp="1"/>
           </p:cNvSpPr>
@@ -9991,7 +10459,7 @@
           </a:prstGeom>
           <a:extLst>
             <a:ext uri="{C572A759-6A51-4108-AA02-DFA0A04FC94B}">
-              <ma14:wrappingTextBoxFlag xmlns:ma14="http://schemas.microsoft.com/office/mac/drawingml/2011/main" xmlns="" val="0"/>
+              <ma14:wrappingTextBoxFlag xmlns:ma14="http://schemas.microsoft.com/office/mac/drawingml/2011/main" val="0"/>
             </a:ext>
           </a:extLst>
         </p:spPr>
@@ -10012,7 +10480,7 @@
           <a:p>
             <a:pPr algn="l"/>
             <a:fld id="{F7021451-1387-4CA6-816F-3879F97B5CBC}" type="slidenum">
-              <a:rPr lang="en-US" b="0"/>
+              <a:rPr b="0" lang="en-US"/>
               <a:t>16</a:t>
             </a:fld>
             <a:endParaRPr lang="en-US"/>
@@ -10065,11 +10533,11 @@
           <a:bodyPr wrap="square" lIns="0" tIns="0" rIns="0" bIns="0" rtlCol="0" anchor="ctr"/>
           <a:lstStyle/>
           <a:p>
-            <a:pPr marL="0" indent="0">
-              <a:buNone/>
-            </a:pPr>
-            <a:r>
-              <a:rPr lang="en-US" sz="1200" b="1" kern="0" spc="400" dirty="0">
+            <a:pPr indent="0" marL="0">
+              <a:buNone/>
+            </a:pPr>
+            <a:r>
+              <a:rPr lang="en-US" sz="1200" b="1" spc="400" kern="0" dirty="0">
                 <a:solidFill>
                   <a:srgbClr val="FFFFFF"/>
                 </a:solidFill>
@@ -10104,7 +10572,7 @@
           <a:bodyPr wrap="square" lIns="0" tIns="0" rIns="0" bIns="0" rtlCol="0" anchor="ctr"/>
           <a:lstStyle/>
           <a:p>
-            <a:pPr marL="0" indent="0">
+            <a:pPr indent="0" marL="0">
               <a:buNone/>
             </a:pPr>
             <a:r>
@@ -10143,7 +10611,7 @@
           <a:bodyPr wrap="square" lIns="0" tIns="0" rIns="0" bIns="0" rtlCol="0" anchor="t"/>
           <a:lstStyle/>
           <a:p>
-            <a:pPr marL="0" indent="0">
+            <a:pPr indent="0" marL="0">
               <a:buNone/>
             </a:pPr>
             <a:r>
@@ -10204,7 +10672,7 @@
           <a:bodyPr wrap="square" lIns="0" tIns="0" rIns="0" bIns="0" rtlCol="0" anchor="ctr"/>
           <a:lstStyle/>
           <a:p>
-            <a:pPr marL="0" indent="0" algn="ctr">
+            <a:pPr algn="ctr" indent="0" marL="0">
               <a:buNone/>
             </a:pPr>
             <a:r>
@@ -10290,7 +10758,7 @@
           <a:bodyPr wrap="square" lIns="0" tIns="0" rIns="0" bIns="0" rtlCol="0" anchor="ctr"/>
           <a:lstStyle/>
           <a:p>
-            <a:pPr marL="0" indent="0">
+            <a:pPr indent="0" marL="0">
               <a:buNone/>
             </a:pPr>
             <a:r>
@@ -10351,11 +10819,11 @@
           <a:bodyPr wrap="square" lIns="0" tIns="0" rIns="0" bIns="0" rtlCol="0" anchor="ctr"/>
           <a:lstStyle/>
           <a:p>
-            <a:pPr marL="0" indent="0" algn="ctr">
-              <a:buNone/>
-            </a:pPr>
-            <a:r>
-              <a:rPr lang="en-US" sz="900" b="1" kern="0" spc="100" dirty="0">
+            <a:pPr algn="ctr" indent="0" marL="0">
+              <a:buNone/>
+            </a:pPr>
+            <a:r>
+              <a:rPr lang="en-US" sz="900" b="1" spc="100" kern="0" dirty="0">
                 <a:solidFill>
                   <a:srgbClr val="FFFFFF"/>
                 </a:solidFill>
@@ -10371,14 +10839,14 @@
       </p:sp>
       <p:pic>
         <p:nvPicPr>
-          <p:cNvPr id="6" name="Image 0" descr="preencoded.png"/>
+          <p:cNvPr id="6" name="Image 0" descr="preencoded.png">    </p:cNvPr>
           <p:cNvPicPr>
             <a:picLocks noChangeAspect="1"/>
           </p:cNvPicPr>
           <p:nvPr/>
         </p:nvPicPr>
         <p:blipFill>
-          <a:blip r:embed="rId3"/>
+          <a:blip r:embed="rId1"/>
           <a:stretch>
             <a:fillRect/>
           </a:stretch>
@@ -10456,7 +10924,7 @@
           <a:bodyPr wrap="square" lIns="0" tIns="0" rIns="0" bIns="0" rtlCol="0" anchor="ctr"/>
           <a:lstStyle/>
           <a:p>
-            <a:pPr marL="0" indent="0" algn="ctr">
+            <a:pPr algn="ctr" indent="0" marL="0">
               <a:buNone/>
             </a:pPr>
             <a:r>
@@ -10495,7 +10963,7 @@
           <a:bodyPr wrap="square" lIns="0" tIns="0" rIns="0" bIns="0" rtlCol="0" anchor="ctr"/>
           <a:lstStyle/>
           <a:p>
-            <a:pPr marL="0" indent="0">
+            <a:pPr indent="0" marL="0">
               <a:buNone/>
             </a:pPr>
             <a:r>
@@ -10534,7 +11002,7 @@
           <a:bodyPr wrap="square" lIns="0" tIns="0" rIns="0" bIns="0" rtlCol="0" anchor="t"/>
           <a:lstStyle/>
           <a:p>
-            <a:pPr marL="0" indent="0">
+            <a:pPr indent="0" marL="0">
               <a:lnSpc>
                 <a:spcPct val="108000"/>
               </a:lnSpc>
@@ -10549,7 +11017,7 @@
                 <a:ea typeface="Montserrat" pitchFamily="34" charset="-122"/>
                 <a:cs typeface="Montserrat" pitchFamily="34" charset="-120"/>
               </a:rPr>
-              <a:t>кожен крок — відповідь на конкретні граблі</a:t>
+              <a:t>кожен крок — відповідь на конкретну проблему</a:t>
             </a:r>
             <a:endParaRPr lang="en-US" sz="1200" dirty="0"/>
           </a:p>
@@ -10618,7 +11086,7 @@
           <a:bodyPr wrap="square" lIns="0" tIns="0" rIns="0" bIns="0" rtlCol="0" anchor="ctr"/>
           <a:lstStyle/>
           <a:p>
-            <a:pPr marL="0" indent="0" algn="ctr">
+            <a:pPr algn="ctr" indent="0" marL="0">
               <a:buNone/>
             </a:pPr>
             <a:r>
@@ -10657,7 +11125,7 @@
           <a:bodyPr wrap="square" lIns="0" tIns="0" rIns="0" bIns="0" rtlCol="0" anchor="ctr"/>
           <a:lstStyle/>
           <a:p>
-            <a:pPr marL="0" indent="0">
+            <a:pPr indent="0" marL="0">
               <a:buNone/>
             </a:pPr>
             <a:r>
@@ -10696,7 +11164,7 @@
           <a:bodyPr wrap="square" lIns="0" tIns="0" rIns="0" bIns="0" rtlCol="0" anchor="t"/>
           <a:lstStyle/>
           <a:p>
-            <a:pPr marL="0" indent="0">
+            <a:pPr indent="0" marL="0">
               <a:lnSpc>
                 <a:spcPct val="108000"/>
               </a:lnSpc>
@@ -10780,7 +11248,7 @@
           <a:bodyPr wrap="square" lIns="0" tIns="0" rIns="0" bIns="0" rtlCol="0" anchor="ctr"/>
           <a:lstStyle/>
           <a:p>
-            <a:pPr marL="0" indent="0" algn="ctr">
+            <a:pPr algn="ctr" indent="0" marL="0">
               <a:buNone/>
             </a:pPr>
             <a:r>
@@ -10819,7 +11287,7 @@
           <a:bodyPr wrap="square" lIns="0" tIns="0" rIns="0" bIns="0" rtlCol="0" anchor="ctr"/>
           <a:lstStyle/>
           <a:p>
-            <a:pPr marL="0" indent="0">
+            <a:pPr indent="0" marL="0">
               <a:buNone/>
             </a:pPr>
             <a:r>
@@ -10858,7 +11326,7 @@
           <a:bodyPr wrap="square" lIns="0" tIns="0" rIns="0" bIns="0" rtlCol="0" anchor="t"/>
           <a:lstStyle/>
           <a:p>
-            <a:pPr marL="0" indent="0">
+            <a:pPr indent="0" marL="0">
               <a:lnSpc>
                 <a:spcPct val="108000"/>
               </a:lnSpc>
@@ -10942,7 +11410,7 @@
           <a:bodyPr wrap="square" lIns="0" tIns="0" rIns="0" bIns="0" rtlCol="0" anchor="ctr"/>
           <a:lstStyle/>
           <a:p>
-            <a:pPr marL="0" indent="0" algn="ctr">
+            <a:pPr algn="ctr" indent="0" marL="0">
               <a:buNone/>
             </a:pPr>
             <a:r>
@@ -10981,7 +11449,7 @@
           <a:bodyPr wrap="square" lIns="0" tIns="0" rIns="0" bIns="0" rtlCol="0" anchor="ctr"/>
           <a:lstStyle/>
           <a:p>
-            <a:pPr marL="0" indent="0">
+            <a:pPr indent="0" marL="0">
               <a:buNone/>
             </a:pPr>
             <a:r>
@@ -11020,7 +11488,7 @@
           <a:bodyPr wrap="square" lIns="0" tIns="0" rIns="0" bIns="0" rtlCol="0" anchor="t"/>
           <a:lstStyle/>
           <a:p>
-            <a:pPr marL="0" indent="0">
+            <a:pPr indent="0" marL="0">
               <a:lnSpc>
                 <a:spcPct val="108000"/>
               </a:lnSpc>
@@ -11050,7 +11518,7 @@
         <p:spPr>
           <a:xfrm>
             <a:off x="566928" y="5074920"/>
-            <a:ext cx="11247120" cy="1051560"/>
+            <a:ext cx="11064240" cy="1051560"/>
           </a:xfrm>
           <a:prstGeom prst="roundRect">
             <a:avLst>
@@ -11065,14 +11533,34 @@
       </p:sp>
       <p:sp>
         <p:nvSpPr>
-          <p:cNvPr id="28" name="Text 25"/>
-          <p:cNvSpPr/>
-          <p:nvPr/>
-        </p:nvSpPr>
-        <p:spPr>
-          <a:xfrm>
-            <a:off x="786384" y="5202936"/>
-            <a:ext cx="10625328" cy="219456"/>
+          <p:cNvPr id="28" name="Shape 25"/>
+          <p:cNvSpPr/>
+          <p:nvPr/>
+        </p:nvSpPr>
+        <p:spPr>
+          <a:xfrm>
+            <a:off x="749808" y="5445252"/>
+            <a:ext cx="310896" cy="310896"/>
+          </a:xfrm>
+          <a:prstGeom prst="ellipse">
+            <a:avLst/>
+          </a:prstGeom>
+          <a:solidFill>
+            <a:srgbClr val="FFFFFF"/>
+          </a:solidFill>
+          <a:ln/>
+        </p:spPr>
+      </p:sp>
+      <p:sp>
+        <p:nvSpPr>
+          <p:cNvPr id="29" name="Text 26"/>
+          <p:cNvSpPr/>
+          <p:nvPr/>
+        </p:nvSpPr>
+        <p:spPr>
+          <a:xfrm>
+            <a:off x="749808" y="5445252"/>
+            <a:ext cx="310896" cy="310896"/>
           </a:xfrm>
           <a:prstGeom prst="rect">
             <a:avLst/>
@@ -11084,11 +11572,50 @@
           <a:bodyPr wrap="square" lIns="0" tIns="0" rIns="0" bIns="0" rtlCol="0" anchor="ctr"/>
           <a:lstStyle/>
           <a:p>
-            <a:pPr marL="0" indent="0">
-              <a:buNone/>
-            </a:pPr>
-            <a:r>
-              <a:rPr lang="en-US" sz="950" b="1" kern="0" spc="150" dirty="0">
+            <a:pPr algn="ctr" indent="0" marL="0">
+              <a:buNone/>
+            </a:pPr>
+            <a:r>
+              <a:rPr lang="en-US" sz="1200" b="1" dirty="0">
+                <a:solidFill>
+                  <a:srgbClr val="5A05F4"/>
+                </a:solidFill>
+                <a:latin typeface="Arial" pitchFamily="34" charset="0"/>
+                <a:ea typeface="Arial" pitchFamily="34" charset="-122"/>
+                <a:cs typeface="Arial" pitchFamily="34" charset="-120"/>
+              </a:rPr>
+              <a:t>?</a:t>
+            </a:r>
+            <a:endParaRPr lang="en-US" sz="1200" dirty="0"/>
+          </a:p>
+        </p:txBody>
+      </p:sp>
+      <p:sp>
+        <p:nvSpPr>
+          <p:cNvPr id="30" name="Text 27"/>
+          <p:cNvSpPr/>
+          <p:nvPr/>
+        </p:nvSpPr>
+        <p:spPr>
+          <a:xfrm>
+            <a:off x="1243584" y="5202936"/>
+            <a:ext cx="10168128" cy="219456"/>
+          </a:xfrm>
+          <a:prstGeom prst="rect">
+            <a:avLst/>
+          </a:prstGeom>
+          <a:noFill/>
+          <a:ln/>
+        </p:spPr>
+        <p:txBody>
+          <a:bodyPr wrap="square" lIns="0" tIns="0" rIns="0" bIns="0" rtlCol="0" anchor="ctr"/>
+          <a:lstStyle/>
+          <a:p>
+            <a:pPr indent="0" marL="0">
+              <a:buNone/>
+            </a:pPr>
+            <a:r>
+              <a:rPr lang="en-US" sz="950" b="1" spc="150" kern="0" dirty="0">
                 <a:solidFill>
                   <a:srgbClr val="FFFFFF"/>
                 </a:solidFill>
@@ -11104,14 +11631,14 @@
       </p:sp>
       <p:sp>
         <p:nvSpPr>
-          <p:cNvPr id="29" name="Text 26"/>
-          <p:cNvSpPr/>
-          <p:nvPr/>
-        </p:nvSpPr>
-        <p:spPr>
-          <a:xfrm>
-            <a:off x="786384" y="5458968"/>
-            <a:ext cx="10625328" cy="539496"/>
+          <p:cNvPr id="31" name="Text 28"/>
+          <p:cNvSpPr/>
+          <p:nvPr/>
+        </p:nvSpPr>
+        <p:spPr>
+          <a:xfrm>
+            <a:off x="1243584" y="5458968"/>
+            <a:ext cx="10168128" cy="539496"/>
           </a:xfrm>
           <a:prstGeom prst="rect">
             <a:avLst/>
@@ -11123,7 +11650,7 @@
           <a:bodyPr wrap="square" lIns="0" tIns="0" rIns="0" bIns="0" rtlCol="0" anchor="ctr"/>
           <a:lstStyle/>
           <a:p>
-            <a:pPr marL="0" indent="0">
+            <a:pPr indent="0" marL="0">
               <a:lnSpc>
                 <a:spcPct val="112000"/>
               </a:lnSpc>
@@ -11146,7 +11673,7 @@
       </p:sp>
       <p:sp>
         <p:nvSpPr>
-          <p:cNvPr id="30" name="Slide Number Placeholder 0"/>
+          <p:cNvPr id="25" name="Slide Number Placeholder 0"/>
           <p:cNvSpPr>
             <a:spLocks noGrp="1"/>
           </p:cNvSpPr>
@@ -11164,7 +11691,7 @@
           </a:prstGeom>
           <a:extLst>
             <a:ext uri="{C572A759-6A51-4108-AA02-DFA0A04FC94B}">
-              <ma14:wrappingTextBoxFlag xmlns:ma14="http://schemas.microsoft.com/office/mac/drawingml/2011/main" xmlns="" val="0"/>
+              <ma14:wrappingTextBoxFlag xmlns:ma14="http://schemas.microsoft.com/office/mac/drawingml/2011/main" val="0"/>
             </a:ext>
           </a:extLst>
         </p:spPr>
@@ -11185,7 +11712,7 @@
           <a:p>
             <a:pPr algn="l"/>
             <a:fld id="{F7021451-1387-4CA6-816F-3879F97B5CBC}" type="slidenum">
-              <a:rPr lang="en-US" b="0"/>
+              <a:rPr b="0" lang="en-US"/>
               <a:t>18</a:t>
             </a:fld>
             <a:endParaRPr lang="en-US"/>
@@ -11260,7 +11787,7 @@
           <a:bodyPr wrap="square" lIns="0" tIns="0" rIns="0" bIns="0" rtlCol="0" anchor="ctr"/>
           <a:lstStyle/>
           <a:p>
-            <a:pPr marL="0" indent="0">
+            <a:pPr indent="0" marL="0">
               <a:buNone/>
             </a:pPr>
             <a:r>
@@ -11321,11 +11848,11 @@
           <a:bodyPr wrap="square" lIns="0" tIns="0" rIns="0" bIns="0" rtlCol="0" anchor="ctr"/>
           <a:lstStyle/>
           <a:p>
-            <a:pPr marL="0" indent="0" algn="ctr">
-              <a:buNone/>
-            </a:pPr>
-            <a:r>
-              <a:rPr lang="en-US" sz="900" b="1" kern="0" spc="100" dirty="0">
+            <a:pPr algn="ctr" indent="0" marL="0">
+              <a:buNone/>
+            </a:pPr>
+            <a:r>
+              <a:rPr lang="en-US" sz="900" b="1" spc="100" kern="0" dirty="0">
                 <a:solidFill>
                   <a:srgbClr val="FFFFFF"/>
                 </a:solidFill>
@@ -11341,14 +11868,14 @@
       </p:sp>
       <p:pic>
         <p:nvPicPr>
-          <p:cNvPr id="6" name="Image 0" descr="preencoded.png"/>
+          <p:cNvPr id="6" name="Image 0" descr="preencoded.png">    </p:cNvPr>
           <p:cNvPicPr>
             <a:picLocks noChangeAspect="1"/>
           </p:cNvPicPr>
           <p:nvPr/>
         </p:nvPicPr>
         <p:blipFill>
-          <a:blip r:embed="rId3"/>
+          <a:blip r:embed="rId1"/>
           <a:stretch>
             <a:fillRect/>
           </a:stretch>
@@ -11404,7 +11931,7 @@
           <a:bodyPr wrap="square" lIns="0" tIns="0" rIns="0" bIns="0" rtlCol="0" anchor="ctr"/>
           <a:lstStyle/>
           <a:p>
-            <a:pPr marL="0" indent="0" algn="ctr">
+            <a:pPr algn="ctr" indent="0" marL="0">
               <a:buNone/>
             </a:pPr>
             <a:r>
@@ -11443,7 +11970,7 @@
           <a:bodyPr wrap="square" lIns="0" tIns="0" rIns="0" bIns="0" rtlCol="0" anchor="ctr"/>
           <a:lstStyle/>
           <a:p>
-            <a:pPr marL="0" indent="0">
+            <a:pPr indent="0" marL="0">
               <a:buNone/>
             </a:pPr>
             <a:r>
@@ -11457,6 +11984,9 @@
               </a:rPr>
               <a:t>Прочитати workflow  </a:t>
             </a:r>
+            <a:pPr indent="0" marL="0">
+              <a:buNone/>
+            </a:pPr>
             <a:r>
               <a:rPr lang="en-US" sz="1200" dirty="0">
                 <a:solidFill>
@@ -11513,7 +12043,7 @@
           <a:bodyPr wrap="square" lIns="0" tIns="0" rIns="0" bIns="0" rtlCol="0" anchor="ctr"/>
           <a:lstStyle/>
           <a:p>
-            <a:pPr marL="0" indent="0" algn="ctr">
+            <a:pPr algn="ctr" indent="0" marL="0">
               <a:buNone/>
             </a:pPr>
             <a:r>
@@ -11552,7 +12082,7 @@
           <a:bodyPr wrap="square" lIns="0" tIns="0" rIns="0" bIns="0" rtlCol="0" anchor="ctr"/>
           <a:lstStyle/>
           <a:p>
-            <a:pPr marL="0" indent="0">
+            <a:pPr indent="0" marL="0">
               <a:buNone/>
             </a:pPr>
             <a:r>
@@ -11566,6 +12096,9 @@
               </a:rPr>
               <a:t>Зламати навмисно  </a:t>
             </a:r>
+            <a:pPr indent="0" marL="0">
+              <a:buNone/>
+            </a:pPr>
             <a:r>
               <a:rPr lang="en-US" sz="1200" dirty="0">
                 <a:solidFill>
@@ -11622,7 +12155,7 @@
           <a:bodyPr wrap="square" lIns="0" tIns="0" rIns="0" bIns="0" rtlCol="0" anchor="ctr"/>
           <a:lstStyle/>
           <a:p>
-            <a:pPr marL="0" indent="0" algn="ctr">
+            <a:pPr algn="ctr" indent="0" marL="0">
               <a:buNone/>
             </a:pPr>
             <a:r>
@@ -11661,7 +12194,7 @@
           <a:bodyPr wrap="square" lIns="0" tIns="0" rIns="0" bIns="0" rtlCol="0" anchor="ctr"/>
           <a:lstStyle/>
           <a:p>
-            <a:pPr marL="0" indent="0">
+            <a:pPr indent="0" marL="0">
               <a:buNone/>
             </a:pPr>
             <a:r>
@@ -11675,6 +12208,9 @@
               </a:rPr>
               <a:t>Полагодити  </a:t>
             </a:r>
+            <a:pPr indent="0" marL="0">
+              <a:buNone/>
+            </a:pPr>
             <a:r>
               <a:rPr lang="en-US" sz="1200" dirty="0">
                 <a:solidFill>
@@ -11731,7 +12267,7 @@
           <a:bodyPr wrap="square" lIns="0" tIns="0" rIns="0" bIns="0" rtlCol="0" anchor="ctr"/>
           <a:lstStyle/>
           <a:p>
-            <a:pPr marL="0" indent="0" algn="ctr">
+            <a:pPr algn="ctr" indent="0" marL="0">
               <a:buNone/>
             </a:pPr>
             <a:r>
@@ -11770,7 +12306,7 @@
           <a:bodyPr wrap="square" lIns="0" tIns="0" rIns="0" bIns="0" rtlCol="0" anchor="ctr"/>
           <a:lstStyle/>
           <a:p>
-            <a:pPr marL="0" indent="0">
+            <a:pPr indent="0" marL="0">
               <a:buNone/>
             </a:pPr>
             <a:r>
@@ -11784,6 +12320,9 @@
               </a:rPr>
               <a:t>Увімкнути protection  </a:t>
             </a:r>
+            <a:pPr indent="0" marL="0">
+              <a:buNone/>
+            </a:pPr>
             <a:r>
               <a:rPr lang="en-US" sz="1200" dirty="0">
                 <a:solidFill>
@@ -11840,7 +12379,7 @@
           <a:bodyPr wrap="square" lIns="0" tIns="0" rIns="0" bIns="0" rtlCol="0" anchor="ctr"/>
           <a:lstStyle/>
           <a:p>
-            <a:pPr marL="0" indent="0" algn="ctr">
+            <a:pPr algn="ctr" indent="0" marL="0">
               <a:buNone/>
             </a:pPr>
             <a:r>
@@ -11879,7 +12418,7 @@
           <a:bodyPr wrap="square" lIns="0" tIns="0" rIns="0" bIns="0" rtlCol="0" anchor="ctr"/>
           <a:lstStyle/>
           <a:p>
-            <a:pPr marL="0" indent="0">
+            <a:pPr indent="0" marL="0">
               <a:buNone/>
             </a:pPr>
             <a:r>
@@ -11893,6 +12432,9 @@
               </a:rPr>
               <a:t>Canary-план · опційно  </a:t>
             </a:r>
+            <a:pPr indent="0" marL="0">
+              <a:buNone/>
+            </a:pPr>
             <a:r>
               <a:rPr lang="en-US" sz="1200" dirty="0">
                 <a:solidFill>
@@ -11928,7 +12470,7 @@
           </a:prstGeom>
           <a:extLst>
             <a:ext uri="{C572A759-6A51-4108-AA02-DFA0A04FC94B}">
-              <ma14:wrappingTextBoxFlag xmlns:ma14="http://schemas.microsoft.com/office/mac/drawingml/2011/main" xmlns="" val="0"/>
+              <ma14:wrappingTextBoxFlag xmlns:ma14="http://schemas.microsoft.com/office/mac/drawingml/2011/main" val="0"/>
             </a:ext>
           </a:extLst>
         </p:spPr>
@@ -11949,7 +12491,7 @@
           <a:p>
             <a:pPr algn="l"/>
             <a:fld id="{F7021451-1387-4CA6-816F-3879F97B5CBC}" type="slidenum">
-              <a:rPr lang="en-US" b="0"/>
+              <a:rPr b="0" lang="en-US"/>
               <a:t>19</a:t>
             </a:fld>
             <a:endParaRPr lang="en-US"/>
@@ -12024,7 +12566,7 @@
           <a:bodyPr wrap="square" lIns="0" tIns="0" rIns="0" bIns="0" rtlCol="0" anchor="ctr"/>
           <a:lstStyle/>
           <a:p>
-            <a:pPr marL="0" indent="0">
+            <a:pPr indent="0" marL="0">
               <a:buNone/>
             </a:pPr>
             <a:r>
@@ -12063,7 +12605,7 @@
           <a:bodyPr wrap="square" lIns="0" tIns="0" rIns="0" bIns="0" rtlCol="0" anchor="t"/>
           <a:lstStyle/>
           <a:p>
-            <a:pPr marL="0" indent="0">
+            <a:pPr indent="0" marL="0">
               <a:lnSpc>
                 <a:spcPct val="100000"/>
               </a:lnSpc>
@@ -12132,11 +12674,11 @@
           <a:bodyPr wrap="square" lIns="0" tIns="0" rIns="0" bIns="0" rtlCol="0" anchor="ctr"/>
           <a:lstStyle/>
           <a:p>
-            <a:pPr marL="0" indent="0" algn="ctr">
-              <a:buNone/>
-            </a:pPr>
-            <a:r>
-              <a:rPr lang="en-US" sz="900" b="1" kern="0" spc="100" dirty="0">
+            <a:pPr algn="ctr" indent="0" marL="0">
+              <a:buNone/>
+            </a:pPr>
+            <a:r>
+              <a:rPr lang="en-US" sz="900" b="1" spc="100" kern="0" dirty="0">
                 <a:solidFill>
                   <a:srgbClr val="5A05F4"/>
                 </a:solidFill>
@@ -12152,14 +12694,14 @@
       </p:sp>
       <p:pic>
         <p:nvPicPr>
-          <p:cNvPr id="7" name="Image 0" descr="preencoded.png"/>
+          <p:cNvPr id="7" name="Image 0" descr="preencoded.png">    </p:cNvPr>
           <p:cNvPicPr>
             <a:picLocks noChangeAspect="1"/>
           </p:cNvPicPr>
           <p:nvPr/>
         </p:nvPicPr>
         <p:blipFill>
-          <a:blip r:embed="rId3"/>
+          <a:blip r:embed="rId1"/>
           <a:stretch>
             <a:fillRect/>
           </a:stretch>
@@ -12237,7 +12779,7 @@
           <a:bodyPr wrap="square" lIns="0" tIns="0" rIns="0" bIns="0" rtlCol="0" anchor="ctr"/>
           <a:lstStyle/>
           <a:p>
-            <a:pPr marL="0" indent="0" algn="ctr">
+            <a:pPr algn="ctr" indent="0" marL="0">
               <a:buNone/>
             </a:pPr>
             <a:r>
@@ -12276,7 +12818,7 @@
           <a:bodyPr wrap="square" lIns="0" tIns="0" rIns="0" bIns="0" rtlCol="0" anchor="ctr"/>
           <a:lstStyle/>
           <a:p>
-            <a:pPr marL="0" indent="0">
+            <a:pPr indent="0" marL="0">
               <a:buNone/>
             </a:pPr>
             <a:r>
@@ -12315,7 +12857,7 @@
           <a:bodyPr wrap="square" lIns="0" tIns="0" rIns="0" bIns="0" rtlCol="0" anchor="t"/>
           <a:lstStyle/>
           <a:p>
-            <a:pPr marL="0" indent="0">
+            <a:pPr indent="0" marL="0">
               <a:lnSpc>
                 <a:spcPct val="108000"/>
               </a:lnSpc>
@@ -12399,7 +12941,7 @@
           <a:bodyPr wrap="square" lIns="0" tIns="0" rIns="0" bIns="0" rtlCol="0" anchor="ctr"/>
           <a:lstStyle/>
           <a:p>
-            <a:pPr marL="0" indent="0" algn="ctr">
+            <a:pPr algn="ctr" indent="0" marL="0">
               <a:buNone/>
             </a:pPr>
             <a:r>
@@ -12438,7 +12980,7 @@
           <a:bodyPr wrap="square" lIns="0" tIns="0" rIns="0" bIns="0" rtlCol="0" anchor="ctr"/>
           <a:lstStyle/>
           <a:p>
-            <a:pPr marL="0" indent="0">
+            <a:pPr indent="0" marL="0">
               <a:buNone/>
             </a:pPr>
             <a:r>
@@ -12477,7 +13019,7 @@
           <a:bodyPr wrap="square" lIns="0" tIns="0" rIns="0" bIns="0" rtlCol="0" anchor="t"/>
           <a:lstStyle/>
           <a:p>
-            <a:pPr marL="0" indent="0">
+            <a:pPr indent="0" marL="0">
               <a:lnSpc>
                 <a:spcPct val="108000"/>
               </a:lnSpc>
@@ -12561,7 +13103,7 @@
           <a:bodyPr wrap="square" lIns="0" tIns="0" rIns="0" bIns="0" rtlCol="0" anchor="ctr"/>
           <a:lstStyle/>
           <a:p>
-            <a:pPr marL="0" indent="0" algn="ctr">
+            <a:pPr algn="ctr" indent="0" marL="0">
               <a:buNone/>
             </a:pPr>
             <a:r>
@@ -12600,7 +13142,7 @@
           <a:bodyPr wrap="square" lIns="0" tIns="0" rIns="0" bIns="0" rtlCol="0" anchor="ctr"/>
           <a:lstStyle/>
           <a:p>
-            <a:pPr marL="0" indent="0">
+            <a:pPr indent="0" marL="0">
               <a:buNone/>
             </a:pPr>
             <a:r>
@@ -12639,7 +13181,7 @@
           <a:bodyPr wrap="square" lIns="0" tIns="0" rIns="0" bIns="0" rtlCol="0" anchor="t"/>
           <a:lstStyle/>
           <a:p>
-            <a:pPr marL="0" indent="0">
+            <a:pPr indent="0" marL="0">
               <a:lnSpc>
                 <a:spcPct val="108000"/>
               </a:lnSpc>
@@ -12723,7 +13265,7 @@
           <a:bodyPr wrap="square" lIns="0" tIns="0" rIns="0" bIns="0" rtlCol="0" anchor="ctr"/>
           <a:lstStyle/>
           <a:p>
-            <a:pPr marL="0" indent="0" algn="ctr">
+            <a:pPr algn="ctr" indent="0" marL="0">
               <a:buNone/>
             </a:pPr>
             <a:r>
@@ -12762,7 +13304,7 @@
           <a:bodyPr wrap="square" lIns="0" tIns="0" rIns="0" bIns="0" rtlCol="0" anchor="ctr"/>
           <a:lstStyle/>
           <a:p>
-            <a:pPr marL="0" indent="0">
+            <a:pPr indent="0" marL="0">
               <a:buNone/>
             </a:pPr>
             <a:r>
@@ -12801,7 +13343,7 @@
           <a:bodyPr wrap="square" lIns="0" tIns="0" rIns="0" bIns="0" rtlCol="0" anchor="t"/>
           <a:lstStyle/>
           <a:p>
-            <a:pPr marL="0" indent="0">
+            <a:pPr indent="0" marL="0">
               <a:lnSpc>
                 <a:spcPct val="108000"/>
               </a:lnSpc>
@@ -12885,7 +13427,7 @@
           <a:bodyPr wrap="square" lIns="0" tIns="0" rIns="0" bIns="0" rtlCol="0" anchor="ctr"/>
           <a:lstStyle/>
           <a:p>
-            <a:pPr marL="0" indent="0" algn="ctr">
+            <a:pPr algn="ctr" indent="0" marL="0">
               <a:buNone/>
             </a:pPr>
             <a:r>
@@ -12924,7 +13466,7 @@
           <a:bodyPr wrap="square" lIns="0" tIns="0" rIns="0" bIns="0" rtlCol="0" anchor="ctr"/>
           <a:lstStyle/>
           <a:p>
-            <a:pPr marL="0" indent="0">
+            <a:pPr indent="0" marL="0">
               <a:buNone/>
             </a:pPr>
             <a:r>
@@ -12963,7 +13505,7 @@
           <a:bodyPr wrap="square" lIns="0" tIns="0" rIns="0" bIns="0" rtlCol="0" anchor="t"/>
           <a:lstStyle/>
           <a:p>
-            <a:pPr marL="0" indent="0">
+            <a:pPr indent="0" marL="0">
               <a:lnSpc>
                 <a:spcPct val="108000"/>
               </a:lnSpc>
@@ -12986,7 +13528,7 @@
       </p:sp>
       <p:sp>
         <p:nvSpPr>
-          <p:cNvPr id="33" name="Slide Number Placeholder 0"/>
+          <p:cNvPr id="25" name="Slide Number Placeholder 0"/>
           <p:cNvSpPr>
             <a:spLocks noGrp="1"/>
           </p:cNvSpPr>
@@ -13004,7 +13546,7 @@
           </a:prstGeom>
           <a:extLst>
             <a:ext uri="{C572A759-6A51-4108-AA02-DFA0A04FC94B}">
-              <ma14:wrappingTextBoxFlag xmlns:ma14="http://schemas.microsoft.com/office/mac/drawingml/2011/main" xmlns="" val="0"/>
+              <ma14:wrappingTextBoxFlag xmlns:ma14="http://schemas.microsoft.com/office/mac/drawingml/2011/main" val="0"/>
             </a:ext>
           </a:extLst>
         </p:spPr>
@@ -13025,7 +13567,7 @@
           <a:p>
             <a:pPr algn="l"/>
             <a:fld id="{F7021451-1387-4CA6-816F-3879F97B5CBC}" type="slidenum">
-              <a:rPr lang="en-US" b="0"/>
+              <a:rPr b="0" lang="en-US"/>
               <a:t>2</a:t>
             </a:fld>
             <a:endParaRPr lang="en-US"/>
@@ -13078,11 +13620,11 @@
           <a:bodyPr wrap="square" lIns="0" tIns="0" rIns="0" bIns="0" rtlCol="0" anchor="ctr"/>
           <a:lstStyle/>
           <a:p>
-            <a:pPr marL="0" indent="0">
-              <a:buNone/>
-            </a:pPr>
-            <a:r>
-              <a:rPr lang="en-US" sz="1200" b="1" kern="0" spc="400" dirty="0">
+            <a:pPr indent="0" marL="0">
+              <a:buNone/>
+            </a:pPr>
+            <a:r>
+              <a:rPr lang="en-US" sz="1200" b="1" spc="400" kern="0" dirty="0">
                 <a:solidFill>
                   <a:srgbClr val="FFFFFF"/>
                 </a:solidFill>
@@ -13117,7 +13659,7 @@
           <a:bodyPr wrap="square" lIns="0" tIns="0" rIns="0" bIns="0" rtlCol="0" anchor="ctr"/>
           <a:lstStyle/>
           <a:p>
-            <a:pPr marL="0" indent="0">
+            <a:pPr indent="0" marL="0">
               <a:buNone/>
             </a:pPr>
             <a:r>
@@ -13156,7 +13698,7 @@
           <a:bodyPr wrap="square" lIns="0" tIns="0" rIns="0" bIns="0" rtlCol="0" anchor="t"/>
           <a:lstStyle/>
           <a:p>
-            <a:pPr marL="0" indent="0">
+            <a:pPr indent="0" marL="0">
               <a:buNone/>
             </a:pPr>
             <a:r>
@@ -13242,7 +13784,7 @@
           <a:bodyPr wrap="square" lIns="0" tIns="0" rIns="0" bIns="0" rtlCol="0" anchor="ctr"/>
           <a:lstStyle/>
           <a:p>
-            <a:pPr marL="0" indent="0">
+            <a:pPr indent="0" marL="0">
               <a:buNone/>
             </a:pPr>
             <a:r>
@@ -13308,11 +13850,11 @@
           <a:bodyPr wrap="square" lIns="0" tIns="0" rIns="0" bIns="0" rtlCol="0" anchor="ctr"/>
           <a:lstStyle/>
           <a:p>
-            <a:pPr marL="0" indent="0" algn="ctr">
-              <a:buNone/>
-            </a:pPr>
-            <a:r>
-              <a:rPr lang="en-US" sz="900" b="1" kern="0" spc="100" dirty="0">
+            <a:pPr algn="ctr" indent="0" marL="0">
+              <a:buNone/>
+            </a:pPr>
+            <a:r>
+              <a:rPr lang="en-US" sz="900" b="1" spc="100" kern="0" dirty="0">
                 <a:solidFill>
                   <a:srgbClr val="1A4FBF"/>
                 </a:solidFill>
@@ -13328,14 +13870,14 @@
       </p:sp>
       <p:pic>
         <p:nvPicPr>
-          <p:cNvPr id="6" name="Image 0" descr="preencoded.png"/>
+          <p:cNvPr id="6" name="Image 0" descr="preencoded.png">    </p:cNvPr>
           <p:cNvPicPr>
             <a:picLocks noChangeAspect="1"/>
           </p:cNvPicPr>
           <p:nvPr/>
         </p:nvPicPr>
         <p:blipFill>
-          <a:blip r:embed="rId3"/>
+          <a:blip r:embed="rId1"/>
           <a:stretch>
             <a:fillRect/>
           </a:stretch>
@@ -13393,7 +13935,7 @@
           <a:bodyPr wrap="square" lIns="0" tIns="0" rIns="0" bIns="0" rtlCol="0" anchor="ctr"/>
           <a:lstStyle/>
           <a:p>
-            <a:pPr marL="0" indent="0">
+            <a:pPr indent="0" marL="0">
               <a:buNone/>
             </a:pPr>
             <a:r>
@@ -13432,7 +13974,7 @@
           <a:bodyPr wrap="square" lIns="0" tIns="0" rIns="0" bIns="0" rtlCol="0" anchor="t"/>
           <a:lstStyle/>
           <a:p>
-            <a:pPr marL="0" indent="0">
+            <a:pPr indent="0" marL="0">
               <a:lnSpc>
                 <a:spcPct val="108000"/>
               </a:lnSpc>
@@ -13496,7 +14038,7 @@
           <a:bodyPr wrap="square" lIns="0" tIns="0" rIns="0" bIns="0" rtlCol="0" anchor="ctr"/>
           <a:lstStyle/>
           <a:p>
-            <a:pPr marL="0" indent="0">
+            <a:pPr indent="0" marL="0">
               <a:buNone/>
             </a:pPr>
             <a:r>
@@ -13535,7 +14077,7 @@
           <a:bodyPr wrap="square" lIns="0" tIns="0" rIns="0" bIns="0" rtlCol="0" anchor="t"/>
           <a:lstStyle/>
           <a:p>
-            <a:pPr marL="0" indent="0">
+            <a:pPr indent="0" marL="0">
               <a:lnSpc>
                 <a:spcPct val="108000"/>
               </a:lnSpc>
@@ -13599,7 +14141,7 @@
           <a:bodyPr wrap="square" lIns="0" tIns="0" rIns="0" bIns="0" rtlCol="0" anchor="ctr"/>
           <a:lstStyle/>
           <a:p>
-            <a:pPr marL="0" indent="0">
+            <a:pPr indent="0" marL="0">
               <a:buNone/>
             </a:pPr>
             <a:r>
@@ -13638,7 +14180,7 @@
           <a:bodyPr wrap="square" lIns="0" tIns="0" rIns="0" bIns="0" rtlCol="0" anchor="t"/>
           <a:lstStyle/>
           <a:p>
-            <a:pPr marL="0" indent="0">
+            <a:pPr indent="0" marL="0">
               <a:lnSpc>
                 <a:spcPct val="108000"/>
               </a:lnSpc>
@@ -13707,7 +14249,7 @@
           <a:bodyPr wrap="square" lIns="0" tIns="0" rIns="0" bIns="0" rtlCol="0" anchor="ctr"/>
           <a:lstStyle/>
           <a:p>
-            <a:pPr marL="0" indent="0">
+            <a:pPr indent="0" marL="0">
               <a:lnSpc>
                 <a:spcPct val="112000"/>
               </a:lnSpc>
@@ -13748,7 +14290,7 @@
           </a:prstGeom>
           <a:extLst>
             <a:ext uri="{C572A759-6A51-4108-AA02-DFA0A04FC94B}">
-              <ma14:wrappingTextBoxFlag xmlns:ma14="http://schemas.microsoft.com/office/mac/drawingml/2011/main" xmlns="" val="0"/>
+              <ma14:wrappingTextBoxFlag xmlns:ma14="http://schemas.microsoft.com/office/mac/drawingml/2011/main" val="0"/>
             </a:ext>
           </a:extLst>
         </p:spPr>
@@ -13769,7 +14311,7 @@
           <a:p>
             <a:pPr algn="l"/>
             <a:fld id="{F7021451-1387-4CA6-816F-3879F97B5CBC}" type="slidenum">
-              <a:rPr lang="en-US" b="0"/>
+              <a:rPr b="0" lang="en-US"/>
               <a:t>21</a:t>
             </a:fld>
             <a:endParaRPr lang="en-US"/>
@@ -13844,7 +14386,7 @@
           <a:bodyPr wrap="square" lIns="0" tIns="0" rIns="0" bIns="0" rtlCol="0" anchor="ctr"/>
           <a:lstStyle/>
           <a:p>
-            <a:pPr marL="0" indent="0">
+            <a:pPr indent="0" marL="0">
               <a:buNone/>
             </a:pPr>
             <a:r>
@@ -13910,11 +14452,11 @@
           <a:bodyPr wrap="square" lIns="0" tIns="0" rIns="0" bIns="0" rtlCol="0" anchor="ctr"/>
           <a:lstStyle/>
           <a:p>
-            <a:pPr marL="0" indent="0" algn="ctr">
-              <a:buNone/>
-            </a:pPr>
-            <a:r>
-              <a:rPr lang="en-US" sz="900" b="1" kern="0" spc="100" dirty="0">
+            <a:pPr algn="ctr" indent="0" marL="0">
+              <a:buNone/>
+            </a:pPr>
+            <a:r>
+              <a:rPr lang="en-US" sz="900" b="1" spc="100" kern="0" dirty="0">
                 <a:solidFill>
                   <a:srgbClr val="1A4FBF"/>
                 </a:solidFill>
@@ -13930,14 +14472,14 @@
       </p:sp>
       <p:pic>
         <p:nvPicPr>
-          <p:cNvPr id="6" name="Image 0" descr="preencoded.png"/>
+          <p:cNvPr id="6" name="Image 0" descr="preencoded.png">    </p:cNvPr>
           <p:cNvPicPr>
             <a:picLocks noChangeAspect="1"/>
           </p:cNvPicPr>
           <p:nvPr/>
         </p:nvPicPr>
         <p:blipFill>
-          <a:blip r:embed="rId3"/>
+          <a:blip r:embed="rId1"/>
           <a:stretch>
             <a:fillRect/>
           </a:stretch>
@@ -14067,7 +14609,7 @@
           <a:bodyPr wrap="square" lIns="0" tIns="0" rIns="0" bIns="0" rtlCol="0" anchor="ctr"/>
           <a:lstStyle/>
           <a:p>
-            <a:pPr marL="0" indent="0">
+            <a:pPr indent="0" marL="0">
               <a:buNone/>
             </a:pPr>
             <a:r>
@@ -14173,7 +14715,7 @@
           <a:bodyPr wrap="square" lIns="0" tIns="0" rIns="0" bIns="0" rtlCol="0" anchor="ctr"/>
           <a:lstStyle/>
           <a:p>
-            <a:pPr marL="0" indent="0">
+            <a:pPr indent="0" marL="0">
               <a:buNone/>
             </a:pPr>
             <a:r>
@@ -14279,7 +14821,7 @@
           <a:bodyPr wrap="square" lIns="0" tIns="0" rIns="0" bIns="0" rtlCol="0" anchor="ctr"/>
           <a:lstStyle/>
           <a:p>
-            <a:pPr marL="0" indent="0">
+            <a:pPr indent="0" marL="0">
               <a:buNone/>
             </a:pPr>
             <a:r>
@@ -14385,7 +14927,7 @@
           <a:bodyPr wrap="square" lIns="0" tIns="0" rIns="0" bIns="0" rtlCol="0" anchor="ctr"/>
           <a:lstStyle/>
           <a:p>
-            <a:pPr marL="0" indent="0">
+            <a:pPr indent="0" marL="0">
               <a:buNone/>
             </a:pPr>
             <a:r>
@@ -14424,7 +14966,7 @@
           <a:bodyPr wrap="square" lIns="0" tIns="0" rIns="0" bIns="0" rtlCol="0" anchor="ctr"/>
           <a:lstStyle/>
           <a:p>
-            <a:pPr marL="0" indent="0">
+            <a:pPr indent="0" marL="0">
               <a:buNone/>
             </a:pPr>
             <a:r>
@@ -14462,7 +15004,7 @@
           </a:prstGeom>
           <a:extLst>
             <a:ext uri="{C572A759-6A51-4108-AA02-DFA0A04FC94B}">
-              <ma14:wrappingTextBoxFlag xmlns:ma14="http://schemas.microsoft.com/office/mac/drawingml/2011/main" xmlns="" val="0"/>
+              <ma14:wrappingTextBoxFlag xmlns:ma14="http://schemas.microsoft.com/office/mac/drawingml/2011/main" val="0"/>
             </a:ext>
           </a:extLst>
         </p:spPr>
@@ -14483,7 +15025,7 @@
           <a:p>
             <a:pPr algn="l"/>
             <a:fld id="{F7021451-1387-4CA6-816F-3879F97B5CBC}" type="slidenum">
-              <a:rPr lang="en-US" b="0"/>
+              <a:rPr b="0" lang="en-US"/>
               <a:t>22</a:t>
             </a:fld>
             <a:endParaRPr lang="en-US"/>
@@ -14558,7 +15100,7 @@
           <a:bodyPr wrap="square" lIns="0" tIns="0" rIns="0" bIns="0" rtlCol="0" anchor="ctr"/>
           <a:lstStyle/>
           <a:p>
-            <a:pPr marL="0" indent="0">
+            <a:pPr indent="0" marL="0">
               <a:buNone/>
             </a:pPr>
             <a:r>
@@ -14624,11 +15166,11 @@
           <a:bodyPr wrap="square" lIns="0" tIns="0" rIns="0" bIns="0" rtlCol="0" anchor="ctr"/>
           <a:lstStyle/>
           <a:p>
-            <a:pPr marL="0" indent="0" algn="ctr">
-              <a:buNone/>
-            </a:pPr>
-            <a:r>
-              <a:rPr lang="en-US" sz="900" b="1" kern="0" spc="100" dirty="0">
+            <a:pPr algn="ctr" indent="0" marL="0">
+              <a:buNone/>
+            </a:pPr>
+            <a:r>
+              <a:rPr lang="en-US" sz="900" b="1" spc="100" kern="0" dirty="0">
                 <a:solidFill>
                   <a:srgbClr val="1A4FBF"/>
                 </a:solidFill>
@@ -14644,14 +15186,14 @@
       </p:sp>
       <p:pic>
         <p:nvPicPr>
-          <p:cNvPr id="6" name="Image 0" descr="preencoded.png"/>
+          <p:cNvPr id="6" name="Image 0" descr="preencoded.png">    </p:cNvPr>
           <p:cNvPicPr>
             <a:picLocks noChangeAspect="1"/>
           </p:cNvPicPr>
           <p:nvPr/>
         </p:nvPicPr>
         <p:blipFill>
-          <a:blip r:embed="rId3"/>
+          <a:blip r:embed="rId1"/>
           <a:stretch>
             <a:fillRect/>
           </a:stretch>
@@ -14779,7 +15321,7 @@
           <a:bodyPr wrap="square" lIns="0" tIns="0" rIns="0" bIns="0" rtlCol="0" anchor="ctr"/>
           <a:lstStyle/>
           <a:p>
-            <a:pPr marL="0" indent="0">
+            <a:pPr indent="0" marL="0">
               <a:buNone/>
             </a:pPr>
             <a:r>
@@ -14793,6 +15335,9 @@
               </a:rPr>
               <a:t>Мерж повз червоний гейт   </a:t>
             </a:r>
+            <a:pPr indent="0" marL="0">
+              <a:buNone/>
+            </a:pPr>
             <a:r>
               <a:rPr lang="en-US" sz="1150" dirty="0">
                 <a:solidFill>
@@ -14921,7 +15466,7 @@
           <a:bodyPr wrap="square" lIns="0" tIns="0" rIns="0" bIns="0" rtlCol="0" anchor="ctr"/>
           <a:lstStyle/>
           <a:p>
-            <a:pPr marL="0" indent="0">
+            <a:pPr indent="0" marL="0">
               <a:buNone/>
             </a:pPr>
             <a:r>
@@ -14935,6 +15480,9 @@
               </a:rPr>
               <a:t>Protection на неіснуючий чек   </a:t>
             </a:r>
+            <a:pPr indent="0" marL="0">
+              <a:buNone/>
+            </a:pPr>
             <a:r>
               <a:rPr lang="en-US" sz="1150" dirty="0">
                 <a:solidFill>
@@ -15063,7 +15611,7 @@
           <a:bodyPr wrap="square" lIns="0" tIns="0" rIns="0" bIns="0" rtlCol="0" anchor="ctr"/>
           <a:lstStyle/>
           <a:p>
-            <a:pPr marL="0" indent="0">
+            <a:pPr indent="0" marL="0">
               <a:buNone/>
             </a:pPr>
             <a:r>
@@ -15077,6 +15625,9 @@
               </a:rPr>
               <a:t>Гейт, що триває пів години   </a:t>
             </a:r>
+            <a:pPr indent="0" marL="0">
+              <a:buNone/>
+            </a:pPr>
             <a:r>
               <a:rPr lang="en-US" sz="1150" dirty="0">
                 <a:solidFill>
@@ -15205,7 +15756,7 @@
           <a:bodyPr wrap="square" lIns="0" tIns="0" rIns="0" bIns="0" rtlCol="0" anchor="ctr"/>
           <a:lstStyle/>
           <a:p>
-            <a:pPr marL="0" indent="0">
+            <a:pPr indent="0" marL="0">
               <a:buNone/>
             </a:pPr>
             <a:r>
@@ -15219,6 +15770,9 @@
               </a:rPr>
               <a:t>Feature flag без плану прибирання   </a:t>
             </a:r>
+            <a:pPr indent="0" marL="0">
+              <a:buNone/>
+            </a:pPr>
             <a:r>
               <a:rPr lang="en-US" sz="1150" dirty="0">
                 <a:solidFill>
@@ -15347,7 +15901,7 @@
           <a:bodyPr wrap="square" lIns="0" tIns="0" rIns="0" bIns="0" rtlCol="0" anchor="ctr"/>
           <a:lstStyle/>
           <a:p>
-            <a:pPr marL="0" indent="0">
+            <a:pPr indent="0" marL="0">
               <a:buNone/>
             </a:pPr>
             <a:r>
@@ -15361,6 +15915,9 @@
               </a:rPr>
               <a:t>Rollback-критерії під час інциденту   </a:t>
             </a:r>
+            <a:pPr indent="0" marL="0">
+              <a:buNone/>
+            </a:pPr>
             <a:r>
               <a:rPr lang="en-US" sz="1150" dirty="0">
                 <a:solidFill>
@@ -15378,7 +15935,7 @@
       </p:sp>
       <p:sp>
         <p:nvSpPr>
-          <p:cNvPr id="32" name="Slide Number Placeholder 0"/>
+          <p:cNvPr id="25" name="Slide Number Placeholder 0"/>
           <p:cNvSpPr>
             <a:spLocks noGrp="1"/>
           </p:cNvSpPr>
@@ -15396,7 +15953,7 @@
           </a:prstGeom>
           <a:extLst>
             <a:ext uri="{C572A759-6A51-4108-AA02-DFA0A04FC94B}">
-              <ma14:wrappingTextBoxFlag xmlns:ma14="http://schemas.microsoft.com/office/mac/drawingml/2011/main" xmlns="" val="0"/>
+              <ma14:wrappingTextBoxFlag xmlns:ma14="http://schemas.microsoft.com/office/mac/drawingml/2011/main" val="0"/>
             </a:ext>
           </a:extLst>
         </p:spPr>
@@ -15417,7 +15974,7 @@
           <a:p>
             <a:pPr algn="l"/>
             <a:fld id="{F7021451-1387-4CA6-816F-3879F97B5CBC}" type="slidenum">
-              <a:rPr lang="en-US" b="0"/>
+              <a:rPr b="0" lang="en-US"/>
               <a:t>23</a:t>
             </a:fld>
             <a:endParaRPr lang="en-US"/>
@@ -15492,7 +16049,7 @@
           <a:bodyPr wrap="square" lIns="0" tIns="0" rIns="0" bIns="0" rtlCol="0" anchor="ctr"/>
           <a:lstStyle/>
           <a:p>
-            <a:pPr marL="0" indent="0">
+            <a:pPr indent="0" marL="0">
               <a:buNone/>
             </a:pPr>
             <a:r>
@@ -15553,11 +16110,11 @@
           <a:bodyPr wrap="square" lIns="0" tIns="0" rIns="0" bIns="0" rtlCol="0" anchor="ctr"/>
           <a:lstStyle/>
           <a:p>
-            <a:pPr marL="0" indent="0" algn="ctr">
-              <a:buNone/>
-            </a:pPr>
-            <a:r>
-              <a:rPr lang="en-US" sz="900" b="1" kern="0" spc="100" dirty="0">
+            <a:pPr algn="ctr" indent="0" marL="0">
+              <a:buNone/>
+            </a:pPr>
+            <a:r>
+              <a:rPr lang="en-US" sz="900" b="1" spc="100" kern="0" dirty="0">
                 <a:solidFill>
                   <a:srgbClr val="FFFFFF"/>
                 </a:solidFill>
@@ -15573,14 +16130,14 @@
       </p:sp>
       <p:pic>
         <p:nvPicPr>
-          <p:cNvPr id="6" name="Image 0" descr="preencoded.png"/>
+          <p:cNvPr id="6" name="Image 0" descr="preencoded.png">    </p:cNvPr>
           <p:cNvPicPr>
             <a:picLocks noChangeAspect="1"/>
           </p:cNvPicPr>
           <p:nvPr/>
         </p:nvPicPr>
         <p:blipFill>
-          <a:blip r:embed="rId3"/>
+          <a:blip r:embed="rId1"/>
           <a:stretch>
             <a:fillRect/>
           </a:stretch>
@@ -15638,7 +16195,7 @@
           <a:bodyPr wrap="square" lIns="0" tIns="0" rIns="0" bIns="0" rtlCol="0" anchor="ctr"/>
           <a:lstStyle/>
           <a:p>
-            <a:pPr marL="0" indent="0">
+            <a:pPr indent="0" marL="0">
               <a:buNone/>
             </a:pPr>
             <a:r>
@@ -15677,7 +16234,7 @@
           <a:bodyPr wrap="square" lIns="0" tIns="0" rIns="0" bIns="0" rtlCol="0" anchor="t"/>
           <a:lstStyle/>
           <a:p>
-            <a:pPr marL="0" indent="0">
+            <a:pPr indent="0" marL="0">
               <a:lnSpc>
                 <a:spcPct val="108000"/>
               </a:lnSpc>
@@ -15697,7 +16254,7 @@
             <a:endParaRPr lang="en-US" sz="1200" dirty="0"/>
           </a:p>
           <a:p>
-            <a:pPr marL="0" indent="0">
+            <a:pPr indent="0" marL="0">
               <a:lnSpc>
                 <a:spcPct val="108000"/>
               </a:lnSpc>
@@ -15706,7 +16263,7 @@
             <a:endParaRPr lang="en-US" sz="1200" dirty="0"/>
           </a:p>
           <a:p>
-            <a:pPr marL="0" indent="0">
+            <a:pPr indent="0" marL="0">
               <a:lnSpc>
                 <a:spcPct val="108000"/>
               </a:lnSpc>
@@ -15726,7 +16283,7 @@
             <a:endParaRPr lang="en-US" sz="1200" dirty="0"/>
           </a:p>
           <a:p>
-            <a:pPr marL="0" indent="0">
+            <a:pPr indent="0" marL="0">
               <a:lnSpc>
                 <a:spcPct val="108000"/>
               </a:lnSpc>
@@ -15735,7 +16292,7 @@
             <a:endParaRPr lang="en-US" sz="1200" dirty="0"/>
           </a:p>
           <a:p>
-            <a:pPr marL="0" indent="0">
+            <a:pPr indent="0" marL="0">
               <a:lnSpc>
                 <a:spcPct val="108000"/>
               </a:lnSpc>
@@ -15799,7 +16356,7 @@
           <a:bodyPr wrap="square" lIns="0" tIns="0" rIns="0" bIns="0" rtlCol="0" anchor="ctr"/>
           <a:lstStyle/>
           <a:p>
-            <a:pPr marL="0" indent="0">
+            <a:pPr indent="0" marL="0">
               <a:buNone/>
             </a:pPr>
             <a:r>
@@ -15838,7 +16395,7 @@
           <a:bodyPr wrap="square" lIns="0" tIns="0" rIns="0" bIns="0" rtlCol="0" anchor="t"/>
           <a:lstStyle/>
           <a:p>
-            <a:pPr marL="0" indent="0">
+            <a:pPr indent="0" marL="0">
               <a:lnSpc>
                 <a:spcPct val="108000"/>
               </a:lnSpc>
@@ -15907,7 +16464,7 @@
           <a:bodyPr wrap="square" lIns="0" tIns="0" rIns="0" bIns="0" rtlCol="0" anchor="ctr"/>
           <a:lstStyle/>
           <a:p>
-            <a:pPr marL="0" indent="0">
+            <a:pPr indent="0" marL="0">
               <a:buNone/>
             </a:pPr>
             <a:r>
@@ -15946,7 +16503,7 @@
           <a:bodyPr wrap="square" lIns="0" tIns="0" rIns="0" bIns="0" rtlCol="0" anchor="t"/>
           <a:lstStyle/>
           <a:p>
-            <a:pPr marL="0" indent="0">
+            <a:pPr indent="0" marL="0">
               <a:buNone/>
             </a:pPr>
             <a:r>
@@ -15984,7 +16541,7 @@
           </a:prstGeom>
           <a:extLst>
             <a:ext uri="{C572A759-6A51-4108-AA02-DFA0A04FC94B}">
-              <ma14:wrappingTextBoxFlag xmlns:ma14="http://schemas.microsoft.com/office/mac/drawingml/2011/main" xmlns="" val="0"/>
+              <ma14:wrappingTextBoxFlag xmlns:ma14="http://schemas.microsoft.com/office/mac/drawingml/2011/main" val="0"/>
             </a:ext>
           </a:extLst>
         </p:spPr>
@@ -16005,7 +16562,7 @@
           <a:p>
             <a:pPr algn="l"/>
             <a:fld id="{F7021451-1387-4CA6-816F-3879F97B5CBC}" type="slidenum">
-              <a:rPr lang="en-US" b="0"/>
+              <a:rPr b="0" lang="en-US"/>
               <a:t>24</a:t>
             </a:fld>
             <a:endParaRPr lang="en-US"/>
@@ -16058,11 +16615,11 @@
           <a:bodyPr wrap="square" lIns="0" tIns="0" rIns="0" bIns="0" rtlCol="0" anchor="ctr"/>
           <a:lstStyle/>
           <a:p>
-            <a:pPr marL="0" indent="0">
-              <a:buNone/>
-            </a:pPr>
-            <a:r>
-              <a:rPr lang="en-US" sz="1200" b="1" kern="0" spc="400" dirty="0">
+            <a:pPr indent="0" marL="0">
+              <a:buNone/>
+            </a:pPr>
+            <a:r>
+              <a:rPr lang="en-US" sz="1200" b="1" spc="400" kern="0" dirty="0">
                 <a:solidFill>
                   <a:srgbClr val="FFFFFF"/>
                 </a:solidFill>
@@ -16097,11 +16654,11 @@
           <a:bodyPr wrap="square" lIns="0" tIns="0" rIns="0" bIns="0" rtlCol="0" anchor="ctr"/>
           <a:lstStyle/>
           <a:p>
-            <a:pPr marL="0" indent="0">
-              <a:buNone/>
-            </a:pPr>
-            <a:r>
-              <a:rPr lang="en-US" sz="1100" b="1" kern="0" spc="300" dirty="0">
+            <a:pPr indent="0" marL="0">
+              <a:buNone/>
+            </a:pPr>
+            <a:r>
+              <a:rPr lang="en-US" sz="1100" b="1" spc="300" kern="0" dirty="0">
                 <a:solidFill>
                   <a:srgbClr val="C4B3F5"/>
                 </a:solidFill>
@@ -16156,7 +16713,7 @@
           <a:bodyPr wrap="square" lIns="0" tIns="0" rIns="0" bIns="0" rtlCol="0" anchor="t"/>
           <a:lstStyle/>
           <a:p>
-            <a:pPr marL="0" indent="0">
+            <a:pPr indent="0" marL="0">
               <a:lnSpc>
                 <a:spcPct val="110000"/>
               </a:lnSpc>
@@ -16218,7 +16775,7 @@
           <a:bodyPr wrap="square" lIns="0" tIns="0" rIns="0" bIns="0" rtlCol="0" anchor="t"/>
           <a:lstStyle/>
           <a:p>
-            <a:pPr marL="0" indent="0">
+            <a:pPr indent="0" marL="0">
               <a:lnSpc>
                 <a:spcPct val="110000"/>
               </a:lnSpc>
@@ -16280,7 +16837,7 @@
           <a:bodyPr wrap="square" lIns="0" tIns="0" rIns="0" bIns="0" rtlCol="0" anchor="t"/>
           <a:lstStyle/>
           <a:p>
-            <a:pPr marL="0" indent="0">
+            <a:pPr indent="0" marL="0">
               <a:lnSpc>
                 <a:spcPct val="110000"/>
               </a:lnSpc>
@@ -16342,7 +16899,7 @@
           <a:bodyPr wrap="square" lIns="0" tIns="0" rIns="0" bIns="0" rtlCol="0" anchor="t"/>
           <a:lstStyle/>
           <a:p>
-            <a:pPr marL="0" indent="0">
+            <a:pPr indent="0" marL="0">
               <a:lnSpc>
                 <a:spcPct val="110000"/>
               </a:lnSpc>
@@ -16404,7 +16961,7 @@
           <a:bodyPr wrap="square" lIns="0" tIns="0" rIns="0" bIns="0" rtlCol="0" anchor="t"/>
           <a:lstStyle/>
           <a:p>
-            <a:pPr marL="0" indent="0">
+            <a:pPr indent="0" marL="0">
               <a:lnSpc>
                 <a:spcPct val="110000"/>
               </a:lnSpc>
@@ -16473,7 +17030,7 @@
           <a:bodyPr wrap="square" lIns="0" tIns="0" rIns="0" bIns="0" rtlCol="0" anchor="ctr"/>
           <a:lstStyle/>
           <a:p>
-            <a:pPr marL="0" indent="0">
+            <a:pPr indent="0" marL="0">
               <a:buNone/>
             </a:pPr>
             <a:r>
@@ -16512,7 +17069,7 @@
           <a:bodyPr wrap="square" lIns="0" tIns="0" rIns="0" bIns="0" rtlCol="0" anchor="t"/>
           <a:lstStyle/>
           <a:p>
-            <a:pPr marL="0" indent="0">
+            <a:pPr indent="0" marL="0">
               <a:lnSpc>
                 <a:spcPct val="115000"/>
               </a:lnSpc>
@@ -16579,11 +17136,11 @@
           <a:bodyPr wrap="square" lIns="0" tIns="0" rIns="0" bIns="0" rtlCol="0" anchor="ctr"/>
           <a:lstStyle/>
           <a:p>
-            <a:pPr marL="0" indent="0">
-              <a:buNone/>
-            </a:pPr>
-            <a:r>
-              <a:rPr lang="en-US" sz="1200" b="1" kern="0" spc="400" dirty="0">
+            <a:pPr indent="0" marL="0">
+              <a:buNone/>
+            </a:pPr>
+            <a:r>
+              <a:rPr lang="en-US" sz="1200" b="1" spc="400" kern="0" dirty="0">
                 <a:solidFill>
                   <a:srgbClr val="FFFFFF"/>
                 </a:solidFill>
@@ -16618,7 +17175,7 @@
           <a:bodyPr wrap="square" lIns="0" tIns="0" rIns="0" bIns="0" rtlCol="0" anchor="ctr"/>
           <a:lstStyle/>
           <a:p>
-            <a:pPr marL="0" indent="0">
+            <a:pPr indent="0" marL="0">
               <a:buNone/>
             </a:pPr>
             <a:r>
@@ -16704,7 +17261,7 @@
           <a:bodyPr wrap="square" lIns="0" tIns="0" rIns="0" bIns="0" rtlCol="0" anchor="ctr"/>
           <a:lstStyle/>
           <a:p>
-            <a:pPr marL="0" indent="0">
+            <a:pPr indent="0" marL="0">
               <a:buNone/>
             </a:pPr>
             <a:r>
@@ -16770,11 +17327,11 @@
           <a:bodyPr wrap="square" lIns="0" tIns="0" rIns="0" bIns="0" rtlCol="0" anchor="ctr"/>
           <a:lstStyle/>
           <a:p>
-            <a:pPr marL="0" indent="0" algn="ctr">
-              <a:buNone/>
-            </a:pPr>
-            <a:r>
-              <a:rPr lang="en-US" sz="900" b="1" kern="0" spc="100" dirty="0">
+            <a:pPr algn="ctr" indent="0" marL="0">
+              <a:buNone/>
+            </a:pPr>
+            <a:r>
+              <a:rPr lang="en-US" sz="900" b="1" spc="100" kern="0" dirty="0">
                 <a:solidFill>
                   <a:srgbClr val="5A05F4"/>
                 </a:solidFill>
@@ -16790,14 +17347,14 @@
       </p:sp>
       <p:pic>
         <p:nvPicPr>
-          <p:cNvPr id="6" name="Image 0" descr="preencoded.png"/>
+          <p:cNvPr id="6" name="Image 0" descr="preencoded.png">    </p:cNvPr>
           <p:cNvPicPr>
             <a:picLocks noChangeAspect="1"/>
           </p:cNvPicPr>
           <p:nvPr/>
         </p:nvPicPr>
         <p:blipFill>
-          <a:blip r:embed="rId3"/>
+          <a:blip r:embed="rId1"/>
           <a:stretch>
             <a:fillRect/>
           </a:stretch>
@@ -16875,7 +17432,7 @@
           <a:bodyPr wrap="square" lIns="0" tIns="0" rIns="0" bIns="0" rtlCol="0" anchor="ctr"/>
           <a:lstStyle/>
           <a:p>
-            <a:pPr marL="0" indent="0" algn="ctr">
+            <a:pPr algn="ctr" indent="0" marL="0">
               <a:buNone/>
             </a:pPr>
             <a:r>
@@ -16914,7 +17471,7 @@
           <a:bodyPr wrap="square" lIns="0" tIns="0" rIns="0" bIns="0" rtlCol="0" anchor="ctr"/>
           <a:lstStyle/>
           <a:p>
-            <a:pPr marL="0" indent="0">
+            <a:pPr indent="0" marL="0">
               <a:buNone/>
             </a:pPr>
             <a:r>
@@ -16995,7 +17552,7 @@
           <a:bodyPr wrap="square" lIns="0" tIns="0" rIns="0" bIns="0" rtlCol="0" anchor="ctr"/>
           <a:lstStyle/>
           <a:p>
-            <a:pPr marL="0" indent="0" algn="ctr">
+            <a:pPr algn="ctr" indent="0" marL="0">
               <a:buNone/>
             </a:pPr>
             <a:r>
@@ -17034,7 +17591,7 @@
           <a:bodyPr wrap="square" lIns="0" tIns="0" rIns="0" bIns="0" rtlCol="0" anchor="ctr"/>
           <a:lstStyle/>
           <a:p>
-            <a:pPr marL="0" indent="0">
+            <a:pPr indent="0" marL="0">
               <a:buNone/>
             </a:pPr>
             <a:r>
@@ -17115,7 +17672,7 @@
           <a:bodyPr wrap="square" lIns="0" tIns="0" rIns="0" bIns="0" rtlCol="0" anchor="ctr"/>
           <a:lstStyle/>
           <a:p>
-            <a:pPr marL="0" indent="0" algn="ctr">
+            <a:pPr algn="ctr" indent="0" marL="0">
               <a:buNone/>
             </a:pPr>
             <a:r>
@@ -17154,7 +17711,7 @@
           <a:bodyPr wrap="square" lIns="0" tIns="0" rIns="0" bIns="0" rtlCol="0" anchor="ctr"/>
           <a:lstStyle/>
           <a:p>
-            <a:pPr marL="0" indent="0">
+            <a:pPr indent="0" marL="0">
               <a:buNone/>
             </a:pPr>
             <a:r>
@@ -17235,7 +17792,7 @@
           <a:bodyPr wrap="square" lIns="0" tIns="0" rIns="0" bIns="0" rtlCol="0" anchor="ctr"/>
           <a:lstStyle/>
           <a:p>
-            <a:pPr marL="0" indent="0" algn="ctr">
+            <a:pPr algn="ctr" indent="0" marL="0">
               <a:buNone/>
             </a:pPr>
             <a:r>
@@ -17274,7 +17831,7 @@
           <a:bodyPr wrap="square" lIns="0" tIns="0" rIns="0" bIns="0" rtlCol="0" anchor="ctr"/>
           <a:lstStyle/>
           <a:p>
-            <a:pPr marL="0" indent="0">
+            <a:pPr indent="0" marL="0">
               <a:buNone/>
             </a:pPr>
             <a:r>
@@ -17355,7 +17912,7 @@
           <a:bodyPr wrap="square" lIns="0" tIns="0" rIns="0" bIns="0" rtlCol="0" anchor="ctr"/>
           <a:lstStyle/>
           <a:p>
-            <a:pPr marL="0" indent="0" algn="ctr">
+            <a:pPr algn="ctr" indent="0" marL="0">
               <a:buNone/>
             </a:pPr>
             <a:r>
@@ -17394,7 +17951,7 @@
           <a:bodyPr wrap="square" lIns="0" tIns="0" rIns="0" bIns="0" rtlCol="0" anchor="ctr"/>
           <a:lstStyle/>
           <a:p>
-            <a:pPr marL="0" indent="0">
+            <a:pPr indent="0" marL="0">
               <a:buNone/>
             </a:pPr>
             <a:r>
@@ -17475,7 +18032,7 @@
           <a:bodyPr wrap="square" lIns="0" tIns="0" rIns="0" bIns="0" rtlCol="0" anchor="ctr"/>
           <a:lstStyle/>
           <a:p>
-            <a:pPr marL="0" indent="0" algn="ctr">
+            <a:pPr algn="ctr" indent="0" marL="0">
               <a:buNone/>
             </a:pPr>
             <a:r>
@@ -17514,7 +18071,7 @@
           <a:bodyPr wrap="square" lIns="0" tIns="0" rIns="0" bIns="0" rtlCol="0" anchor="ctr"/>
           <a:lstStyle/>
           <a:p>
-            <a:pPr marL="0" indent="0">
+            <a:pPr indent="0" marL="0">
               <a:buNone/>
             </a:pPr>
             <a:r>
@@ -17595,7 +18152,7 @@
           <a:bodyPr wrap="square" lIns="0" tIns="0" rIns="0" bIns="0" rtlCol="0" anchor="ctr"/>
           <a:lstStyle/>
           <a:p>
-            <a:pPr marL="0" indent="0" algn="ctr">
+            <a:pPr algn="ctr" indent="0" marL="0">
               <a:buNone/>
             </a:pPr>
             <a:r>
@@ -17634,7 +18191,7 @@
           <a:bodyPr wrap="square" lIns="0" tIns="0" rIns="0" bIns="0" rtlCol="0" anchor="ctr"/>
           <a:lstStyle/>
           <a:p>
-            <a:pPr marL="0" indent="0">
+            <a:pPr indent="0" marL="0">
               <a:buNone/>
             </a:pPr>
             <a:r>
@@ -17715,7 +18272,7 @@
           <a:bodyPr wrap="square" lIns="0" tIns="0" rIns="0" bIns="0" rtlCol="0" anchor="ctr"/>
           <a:lstStyle/>
           <a:p>
-            <a:pPr marL="0" indent="0" algn="ctr">
+            <a:pPr algn="ctr" indent="0" marL="0">
               <a:buNone/>
             </a:pPr>
             <a:r>
@@ -17754,7 +18311,7 @@
           <a:bodyPr wrap="square" lIns="0" tIns="0" rIns="0" bIns="0" rtlCol="0" anchor="ctr"/>
           <a:lstStyle/>
           <a:p>
-            <a:pPr marL="0" indent="0">
+            <a:pPr indent="0" marL="0">
               <a:buNone/>
             </a:pPr>
             <a:r>
@@ -17835,7 +18392,7 @@
           <a:bodyPr wrap="square" lIns="0" tIns="0" rIns="0" bIns="0" rtlCol="0" anchor="ctr"/>
           <a:lstStyle/>
           <a:p>
-            <a:pPr marL="0" indent="0" algn="ctr">
+            <a:pPr algn="ctr" indent="0" marL="0">
               <a:buNone/>
             </a:pPr>
             <a:r>
@@ -17874,7 +18431,7 @@
           <a:bodyPr wrap="square" lIns="0" tIns="0" rIns="0" bIns="0" rtlCol="0" anchor="ctr"/>
           <a:lstStyle/>
           <a:p>
-            <a:pPr marL="0" indent="0">
+            <a:pPr indent="0" marL="0">
               <a:buNone/>
             </a:pPr>
             <a:r>
@@ -17955,7 +18512,7 @@
           <a:bodyPr wrap="square" lIns="0" tIns="0" rIns="0" bIns="0" rtlCol="0" anchor="ctr"/>
           <a:lstStyle/>
           <a:p>
-            <a:pPr marL="0" indent="0" algn="ctr">
+            <a:pPr algn="ctr" indent="0" marL="0">
               <a:buNone/>
             </a:pPr>
             <a:r>
@@ -17994,7 +18551,7 @@
           <a:bodyPr wrap="square" lIns="0" tIns="0" rIns="0" bIns="0" rtlCol="0" anchor="ctr"/>
           <a:lstStyle/>
           <a:p>
-            <a:pPr marL="0" indent="0">
+            <a:pPr indent="0" marL="0">
               <a:buNone/>
             </a:pPr>
             <a:r>
@@ -18075,7 +18632,7 @@
           <a:bodyPr wrap="square" lIns="0" tIns="0" rIns="0" bIns="0" rtlCol="0" anchor="ctr"/>
           <a:lstStyle/>
           <a:p>
-            <a:pPr marL="0" indent="0" algn="ctr">
+            <a:pPr algn="ctr" indent="0" marL="0">
               <a:buNone/>
             </a:pPr>
             <a:r>
@@ -18114,7 +18671,7 @@
           <a:bodyPr wrap="square" lIns="0" tIns="0" rIns="0" bIns="0" rtlCol="0" anchor="ctr"/>
           <a:lstStyle/>
           <a:p>
-            <a:pPr marL="0" indent="0">
+            <a:pPr indent="0" marL="0">
               <a:buNone/>
             </a:pPr>
             <a:r>
@@ -18141,7 +18698,7 @@
         <p:spPr>
           <a:xfrm>
             <a:off x="566928" y="5779008"/>
-            <a:ext cx="10927080" cy="402336"/>
+            <a:ext cx="11064240" cy="402336"/>
           </a:xfrm>
           <a:prstGeom prst="roundRect">
             <a:avLst>
@@ -18180,7 +18737,7 @@
           <a:bodyPr wrap="square" lIns="0" tIns="0" rIns="0" bIns="0" rtlCol="0" anchor="ctr"/>
           <a:lstStyle/>
           <a:p>
-            <a:pPr marL="0" indent="0">
+            <a:pPr indent="0" marL="0">
               <a:lnSpc>
                 <a:spcPct val="112000"/>
               </a:lnSpc>
@@ -18203,7 +18760,7 @@
       </p:sp>
       <p:sp>
         <p:nvSpPr>
-          <p:cNvPr id="53" name="Slide Number Placeholder 0"/>
+          <p:cNvPr id="25" name="Slide Number Placeholder 0"/>
           <p:cNvSpPr>
             <a:spLocks noGrp="1"/>
           </p:cNvSpPr>
@@ -18221,7 +18778,7 @@
           </a:prstGeom>
           <a:extLst>
             <a:ext uri="{C572A759-6A51-4108-AA02-DFA0A04FC94B}">
-              <ma14:wrappingTextBoxFlag xmlns:ma14="http://schemas.microsoft.com/office/mac/drawingml/2011/main" xmlns="" val="0"/>
+              <ma14:wrappingTextBoxFlag xmlns:ma14="http://schemas.microsoft.com/office/mac/drawingml/2011/main" val="0"/>
             </a:ext>
           </a:extLst>
         </p:spPr>
@@ -18242,7 +18799,7 @@
           <a:p>
             <a:pPr algn="l"/>
             <a:fld id="{F7021451-1387-4CA6-816F-3879F97B5CBC}" type="slidenum">
-              <a:rPr lang="en-US" b="0"/>
+              <a:rPr b="0" lang="en-US"/>
               <a:t>3</a:t>
             </a:fld>
             <a:endParaRPr lang="en-US"/>
@@ -18317,7 +18874,7 @@
           <a:bodyPr wrap="square" lIns="0" tIns="0" rIns="0" bIns="0" rtlCol="0" anchor="ctr"/>
           <a:lstStyle/>
           <a:p>
-            <a:pPr marL="0" indent="0">
+            <a:pPr indent="0" marL="0">
               <a:buNone/>
             </a:pPr>
             <a:r>
@@ -18356,7 +18913,7 @@
           <a:bodyPr wrap="square" lIns="0" tIns="0" rIns="0" bIns="0" rtlCol="0" anchor="t"/>
           <a:lstStyle/>
           <a:p>
-            <a:pPr marL="0" indent="0">
+            <a:pPr indent="0" marL="0">
               <a:lnSpc>
                 <a:spcPct val="100000"/>
               </a:lnSpc>
@@ -18425,11 +18982,11 @@
           <a:bodyPr wrap="square" lIns="0" tIns="0" rIns="0" bIns="0" rtlCol="0" anchor="ctr"/>
           <a:lstStyle/>
           <a:p>
-            <a:pPr marL="0" indent="0" algn="ctr">
-              <a:buNone/>
-            </a:pPr>
-            <a:r>
-              <a:rPr lang="en-US" sz="900" b="1" kern="0" spc="100" dirty="0">
+            <a:pPr algn="ctr" indent="0" marL="0">
+              <a:buNone/>
+            </a:pPr>
+            <a:r>
+              <a:rPr lang="en-US" sz="900" b="1" spc="100" kern="0" dirty="0">
                 <a:solidFill>
                   <a:srgbClr val="5A05F4"/>
                 </a:solidFill>
@@ -18445,14 +19002,14 @@
       </p:sp>
       <p:pic>
         <p:nvPicPr>
-          <p:cNvPr id="7" name="Image 0" descr="preencoded.png"/>
+          <p:cNvPr id="7" name="Image 0" descr="preencoded.png">    </p:cNvPr>
           <p:cNvPicPr>
             <a:picLocks noChangeAspect="1"/>
           </p:cNvPicPr>
           <p:nvPr/>
         </p:nvPicPr>
         <p:blipFill>
-          <a:blip r:embed="rId3"/>
+          <a:blip r:embed="rId1"/>
           <a:stretch>
             <a:fillRect/>
           </a:stretch>
@@ -18515,7 +19072,7 @@
           <a:bodyPr wrap="square" lIns="0" tIns="0" rIns="0" bIns="0" rtlCol="0" anchor="ctr"/>
           <a:lstStyle/>
           <a:p>
-            <a:pPr marL="0" indent="0">
+            <a:pPr indent="0" marL="0">
               <a:buNone/>
             </a:pPr>
             <a:r>
@@ -18554,7 +19111,7 @@
           <a:bodyPr wrap="square" lIns="0" tIns="0" rIns="0" bIns="0" rtlCol="0" anchor="t"/>
           <a:lstStyle/>
           <a:p>
-            <a:pPr marL="0" indent="0">
+            <a:pPr indent="0" marL="0">
               <a:lnSpc>
                 <a:spcPct val="105000"/>
               </a:lnSpc>
@@ -18623,7 +19180,7 @@
           <a:bodyPr wrap="square" lIns="0" tIns="0" rIns="0" bIns="0" rtlCol="0" anchor="ctr"/>
           <a:lstStyle/>
           <a:p>
-            <a:pPr marL="0" indent="0">
+            <a:pPr indent="0" marL="0">
               <a:buNone/>
             </a:pPr>
             <a:r>
@@ -18662,7 +19219,7 @@
           <a:bodyPr wrap="square" lIns="0" tIns="0" rIns="0" bIns="0" rtlCol="0" anchor="t"/>
           <a:lstStyle/>
           <a:p>
-            <a:pPr marL="0" indent="0">
+            <a:pPr indent="0" marL="0">
               <a:lnSpc>
                 <a:spcPct val="105000"/>
               </a:lnSpc>
@@ -18731,7 +19288,7 @@
           <a:bodyPr wrap="square" lIns="0" tIns="0" rIns="0" bIns="0" rtlCol="0" anchor="ctr"/>
           <a:lstStyle/>
           <a:p>
-            <a:pPr marL="0" indent="0">
+            <a:pPr indent="0" marL="0">
               <a:buNone/>
             </a:pPr>
             <a:r>
@@ -18770,7 +19327,7 @@
           <a:bodyPr wrap="square" lIns="0" tIns="0" rIns="0" bIns="0" rtlCol="0" anchor="t"/>
           <a:lstStyle/>
           <a:p>
-            <a:pPr marL="0" indent="0">
+            <a:pPr indent="0" marL="0">
               <a:lnSpc>
                 <a:spcPct val="105000"/>
               </a:lnSpc>
@@ -18839,7 +19396,7 @@
           <a:bodyPr wrap="square" lIns="0" tIns="0" rIns="0" bIns="0" rtlCol="0" anchor="ctr"/>
           <a:lstStyle/>
           <a:p>
-            <a:pPr marL="0" indent="0">
+            <a:pPr indent="0" marL="0">
               <a:buNone/>
             </a:pPr>
             <a:r>
@@ -18878,7 +19435,7 @@
           <a:bodyPr wrap="square" lIns="0" tIns="0" rIns="0" bIns="0" rtlCol="0" anchor="t"/>
           <a:lstStyle/>
           <a:p>
-            <a:pPr marL="0" indent="0">
+            <a:pPr indent="0" marL="0">
               <a:lnSpc>
                 <a:spcPct val="105000"/>
               </a:lnSpc>
@@ -18947,7 +19504,7 @@
           <a:bodyPr wrap="square" lIns="0" tIns="0" rIns="0" bIns="0" rtlCol="0" anchor="ctr"/>
           <a:lstStyle/>
           <a:p>
-            <a:pPr marL="0" indent="0">
+            <a:pPr indent="0" marL="0">
               <a:buNone/>
             </a:pPr>
             <a:r>
@@ -18986,7 +19543,7 @@
           <a:bodyPr wrap="square" lIns="0" tIns="0" rIns="0" bIns="0" rtlCol="0" anchor="t"/>
           <a:lstStyle/>
           <a:p>
-            <a:pPr marL="0" indent="0">
+            <a:pPr indent="0" marL="0">
               <a:lnSpc>
                 <a:spcPct val="105000"/>
               </a:lnSpc>
@@ -19055,7 +19612,7 @@
           <a:bodyPr wrap="square" lIns="0" tIns="0" rIns="0" bIns="0" rtlCol="0" anchor="ctr"/>
           <a:lstStyle/>
           <a:p>
-            <a:pPr marL="0" indent="0">
+            <a:pPr indent="0" marL="0">
               <a:buNone/>
             </a:pPr>
             <a:r>
@@ -19094,7 +19651,7 @@
           <a:bodyPr wrap="square" lIns="0" tIns="0" rIns="0" bIns="0" rtlCol="0" anchor="t"/>
           <a:lstStyle/>
           <a:p>
-            <a:pPr marL="0" indent="0">
+            <a:pPr indent="0" marL="0">
               <a:lnSpc>
                 <a:spcPct val="105000"/>
               </a:lnSpc>
@@ -19163,7 +19720,7 @@
           <a:bodyPr wrap="square" lIns="0" tIns="0" rIns="0" bIns="0" rtlCol="0" anchor="ctr"/>
           <a:lstStyle/>
           <a:p>
-            <a:pPr marL="0" indent="0">
+            <a:pPr indent="0" marL="0">
               <a:lnSpc>
                 <a:spcPct val="112000"/>
               </a:lnSpc>
@@ -19186,7 +19743,7 @@
       </p:sp>
       <p:sp>
         <p:nvSpPr>
-          <p:cNvPr id="28" name="Slide Number Placeholder 0"/>
+          <p:cNvPr id="25" name="Slide Number Placeholder 0"/>
           <p:cNvSpPr>
             <a:spLocks noGrp="1"/>
           </p:cNvSpPr>
@@ -19204,7 +19761,7 @@
           </a:prstGeom>
           <a:extLst>
             <a:ext uri="{C572A759-6A51-4108-AA02-DFA0A04FC94B}">
-              <ma14:wrappingTextBoxFlag xmlns:ma14="http://schemas.microsoft.com/office/mac/drawingml/2011/main" xmlns="" val="0"/>
+              <ma14:wrappingTextBoxFlag xmlns:ma14="http://schemas.microsoft.com/office/mac/drawingml/2011/main" val="0"/>
             </a:ext>
           </a:extLst>
         </p:spPr>
@@ -19225,7 +19782,7 @@
           <a:p>
             <a:pPr algn="l"/>
             <a:fld id="{F7021451-1387-4CA6-816F-3879F97B5CBC}" type="slidenum">
-              <a:rPr lang="en-US" b="0"/>
+              <a:rPr b="0" lang="en-US"/>
               <a:t>4</a:t>
             </a:fld>
             <a:endParaRPr lang="en-US"/>
@@ -19278,11 +19835,11 @@
           <a:bodyPr wrap="square" lIns="0" tIns="0" rIns="0" bIns="0" rtlCol="0" anchor="ctr"/>
           <a:lstStyle/>
           <a:p>
-            <a:pPr marL="0" indent="0">
-              <a:buNone/>
-            </a:pPr>
-            <a:r>
-              <a:rPr lang="en-US" sz="1200" b="1" kern="0" spc="400" dirty="0">
+            <a:pPr indent="0" marL="0">
+              <a:buNone/>
+            </a:pPr>
+            <a:r>
+              <a:rPr lang="en-US" sz="1200" b="1" spc="400" kern="0" dirty="0">
                 <a:solidFill>
                   <a:srgbClr val="FFFFFF"/>
                 </a:solidFill>
@@ -19317,7 +19874,7 @@
           <a:bodyPr wrap="square" lIns="0" tIns="0" rIns="0" bIns="0" rtlCol="0" anchor="ctr"/>
           <a:lstStyle/>
           <a:p>
-            <a:pPr marL="0" indent="0">
+            <a:pPr indent="0" marL="0">
               <a:buNone/>
             </a:pPr>
             <a:r>
@@ -19356,7 +19913,7 @@
           <a:bodyPr wrap="square" lIns="0" tIns="0" rIns="0" bIns="0" rtlCol="0" anchor="t"/>
           <a:lstStyle/>
           <a:p>
-            <a:pPr marL="0" indent="0">
+            <a:pPr indent="0" marL="0">
               <a:buNone/>
             </a:pPr>
             <a:r>
@@ -19442,7 +19999,7 @@
           <a:bodyPr wrap="square" lIns="0" tIns="0" rIns="0" bIns="0" rtlCol="0" anchor="ctr"/>
           <a:lstStyle/>
           <a:p>
-            <a:pPr marL="0" indent="0" algn="l">
+            <a:pPr algn="l" indent="0" marL="0">
               <a:buNone/>
             </a:pPr>
             <a:r>
@@ -19481,7 +20038,7 @@
           <a:bodyPr wrap="square" lIns="0" tIns="0" rIns="0" bIns="0" rtlCol="0" anchor="ctr"/>
           <a:lstStyle/>
           <a:p>
-            <a:pPr marL="0" indent="0">
+            <a:pPr indent="0" marL="0">
               <a:buNone/>
             </a:pPr>
             <a:r>
@@ -19547,11 +20104,11 @@
           <a:bodyPr wrap="square" lIns="0" tIns="0" rIns="0" bIns="0" rtlCol="0" anchor="ctr"/>
           <a:lstStyle/>
           <a:p>
-            <a:pPr marL="0" indent="0" algn="ctr">
-              <a:buNone/>
-            </a:pPr>
-            <a:r>
-              <a:rPr lang="en-US" sz="900" b="1" kern="0" spc="100" dirty="0">
+            <a:pPr algn="ctr" indent="0" marL="0">
+              <a:buNone/>
+            </a:pPr>
+            <a:r>
+              <a:rPr lang="en-US" sz="900" b="1" spc="100" kern="0" dirty="0">
                 <a:solidFill>
                   <a:srgbClr val="5A05F4"/>
                 </a:solidFill>
@@ -19567,14 +20124,14 @@
       </p:sp>
       <p:pic>
         <p:nvPicPr>
-          <p:cNvPr id="7" name="Image 0" descr="preencoded.png"/>
+          <p:cNvPr id="7" name="Image 0" descr="preencoded.png">    </p:cNvPr>
           <p:cNvPicPr>
             <a:picLocks noChangeAspect="1"/>
           </p:cNvPicPr>
           <p:nvPr/>
         </p:nvPicPr>
         <p:blipFill>
-          <a:blip r:embed="rId3"/>
+          <a:blip r:embed="rId1"/>
           <a:stretch>
             <a:fillRect/>
           </a:stretch>
@@ -19632,7 +20189,7 @@
           <a:bodyPr wrap="square" lIns="0" tIns="0" rIns="0" bIns="0" rtlCol="0" anchor="ctr"/>
           <a:lstStyle/>
           <a:p>
-            <a:pPr marL="0" indent="0">
+            <a:pPr indent="0" marL="0">
               <a:buNone/>
             </a:pPr>
             <a:r>
@@ -19671,7 +20228,7 @@
           <a:bodyPr wrap="square" lIns="0" tIns="0" rIns="0" bIns="0" rtlCol="0" anchor="t"/>
           <a:lstStyle/>
           <a:p>
-            <a:pPr marL="0" indent="0">
+            <a:pPr indent="0" marL="0">
               <a:lnSpc>
                 <a:spcPct val="108000"/>
               </a:lnSpc>
@@ -19735,7 +20292,7 @@
           <a:bodyPr wrap="square" lIns="0" tIns="0" rIns="0" bIns="0" rtlCol="0" anchor="ctr"/>
           <a:lstStyle/>
           <a:p>
-            <a:pPr marL="0" indent="0">
+            <a:pPr indent="0" marL="0">
               <a:buNone/>
             </a:pPr>
             <a:r>
@@ -19774,7 +20331,7 @@
           <a:bodyPr wrap="square" lIns="0" tIns="0" rIns="0" bIns="0" rtlCol="0" anchor="t"/>
           <a:lstStyle/>
           <a:p>
-            <a:pPr marL="0" indent="0">
+            <a:pPr indent="0" marL="0">
               <a:lnSpc>
                 <a:spcPct val="108000"/>
               </a:lnSpc>
@@ -19838,7 +20395,7 @@
           <a:bodyPr wrap="square" lIns="0" tIns="0" rIns="0" bIns="0" rtlCol="0" anchor="ctr"/>
           <a:lstStyle/>
           <a:p>
-            <a:pPr marL="0" indent="0">
+            <a:pPr indent="0" marL="0">
               <a:lnSpc>
                 <a:spcPct val="112000"/>
               </a:lnSpc>
@@ -19888,14 +20445,34 @@
       </p:sp>
       <p:sp>
         <p:nvSpPr>
-          <p:cNvPr id="17" name="Text 14"/>
-          <p:cNvSpPr/>
-          <p:nvPr/>
-        </p:nvSpPr>
-        <p:spPr>
-          <a:xfrm>
-            <a:off x="786384" y="5020056"/>
-            <a:ext cx="10625328" cy="219456"/>
+          <p:cNvPr id="17" name="Shape 14"/>
+          <p:cNvSpPr/>
+          <p:nvPr/>
+        </p:nvSpPr>
+        <p:spPr>
+          <a:xfrm>
+            <a:off x="749808" y="5216652"/>
+            <a:ext cx="310896" cy="310896"/>
+          </a:xfrm>
+          <a:prstGeom prst="ellipse">
+            <a:avLst/>
+          </a:prstGeom>
+          <a:solidFill>
+            <a:srgbClr val="106B41"/>
+          </a:solidFill>
+          <a:ln/>
+        </p:spPr>
+      </p:sp>
+      <p:sp>
+        <p:nvSpPr>
+          <p:cNvPr id="18" name="Text 15"/>
+          <p:cNvSpPr/>
+          <p:nvPr/>
+        </p:nvSpPr>
+        <p:spPr>
+          <a:xfrm>
+            <a:off x="749808" y="5216652"/>
+            <a:ext cx="310896" cy="310896"/>
           </a:xfrm>
           <a:prstGeom prst="rect">
             <a:avLst/>
@@ -19907,11 +20484,50 @@
           <a:bodyPr wrap="square" lIns="0" tIns="0" rIns="0" bIns="0" rtlCol="0" anchor="ctr"/>
           <a:lstStyle/>
           <a:p>
-            <a:pPr marL="0" indent="0">
-              <a:buNone/>
-            </a:pPr>
-            <a:r>
-              <a:rPr lang="en-US" sz="950" b="1" kern="0" spc="150" dirty="0">
+            <a:pPr algn="ctr" indent="0" marL="0">
+              <a:buNone/>
+            </a:pPr>
+            <a:r>
+              <a:rPr lang="en-US" sz="1200" b="1" dirty="0">
+                <a:solidFill>
+                  <a:srgbClr val="FFFFFF"/>
+                </a:solidFill>
+                <a:latin typeface="Arial" pitchFamily="34" charset="0"/>
+                <a:ea typeface="Arial" pitchFamily="34" charset="-122"/>
+                <a:cs typeface="Arial" pitchFamily="34" charset="-120"/>
+              </a:rPr>
+              <a:t>◆</a:t>
+            </a:r>
+            <a:endParaRPr lang="en-US" sz="1200" dirty="0"/>
+          </a:p>
+        </p:txBody>
+      </p:sp>
+      <p:sp>
+        <p:nvSpPr>
+          <p:cNvPr id="19" name="Text 16"/>
+          <p:cNvSpPr/>
+          <p:nvPr/>
+        </p:nvSpPr>
+        <p:spPr>
+          <a:xfrm>
+            <a:off x="1243584" y="5020056"/>
+            <a:ext cx="10168128" cy="219456"/>
+          </a:xfrm>
+          <a:prstGeom prst="rect">
+            <a:avLst/>
+          </a:prstGeom>
+          <a:noFill/>
+          <a:ln/>
+        </p:spPr>
+        <p:txBody>
+          <a:bodyPr wrap="square" lIns="0" tIns="0" rIns="0" bIns="0" rtlCol="0" anchor="ctr"/>
+          <a:lstStyle/>
+          <a:p>
+            <a:pPr indent="0" marL="0">
+              <a:buNone/>
+            </a:pPr>
+            <a:r>
+              <a:rPr lang="en-US" sz="950" b="1" spc="150" kern="0" dirty="0">
                 <a:solidFill>
                   <a:srgbClr val="106B41"/>
                 </a:solidFill>
@@ -19927,14 +20543,14 @@
       </p:sp>
       <p:sp>
         <p:nvSpPr>
-          <p:cNvPr id="18" name="Text 15"/>
-          <p:cNvSpPr/>
-          <p:nvPr/>
-        </p:nvSpPr>
-        <p:spPr>
-          <a:xfrm>
-            <a:off x="786384" y="5276088"/>
-            <a:ext cx="10625328" cy="448056"/>
+          <p:cNvPr id="20" name="Text 17"/>
+          <p:cNvSpPr/>
+          <p:nvPr/>
+        </p:nvSpPr>
+        <p:spPr>
+          <a:xfrm>
+            <a:off x="1243584" y="5276088"/>
+            <a:ext cx="10168128" cy="448056"/>
           </a:xfrm>
           <a:prstGeom prst="rect">
             <a:avLst/>
@@ -19946,7 +20562,7 @@
           <a:bodyPr wrap="square" lIns="0" tIns="0" rIns="0" bIns="0" rtlCol="0" anchor="ctr"/>
           <a:lstStyle/>
           <a:p>
-            <a:pPr marL="0" indent="0">
+            <a:pPr indent="0" marL="0">
               <a:lnSpc>
                 <a:spcPct val="112000"/>
               </a:lnSpc>
@@ -19987,7 +20603,7 @@
           </a:prstGeom>
           <a:extLst>
             <a:ext uri="{C572A759-6A51-4108-AA02-DFA0A04FC94B}">
-              <ma14:wrappingTextBoxFlag xmlns:ma14="http://schemas.microsoft.com/office/mac/drawingml/2011/main" xmlns="" val="0"/>
+              <ma14:wrappingTextBoxFlag xmlns:ma14="http://schemas.microsoft.com/office/mac/drawingml/2011/main" val="0"/>
             </a:ext>
           </a:extLst>
         </p:spPr>
@@ -20008,7 +20624,7 @@
           <a:p>
             <a:pPr algn="l"/>
             <a:fld id="{F7021451-1387-4CA6-816F-3879F97B5CBC}" type="slidenum">
-              <a:rPr lang="en-US" b="0"/>
+              <a:rPr b="0" lang="en-US"/>
               <a:t>6</a:t>
             </a:fld>
             <a:endParaRPr lang="en-US"/>
@@ -20083,7 +20699,7 @@
           <a:bodyPr wrap="square" lIns="0" tIns="0" rIns="0" bIns="0" rtlCol="0" anchor="ctr"/>
           <a:lstStyle/>
           <a:p>
-            <a:pPr marL="0" indent="0" algn="l">
+            <a:pPr algn="l" indent="0" marL="0">
               <a:buNone/>
             </a:pPr>
             <a:r>
@@ -20122,7 +20738,7 @@
           <a:bodyPr wrap="square" lIns="0" tIns="0" rIns="0" bIns="0" rtlCol="0" anchor="ctr"/>
           <a:lstStyle/>
           <a:p>
-            <a:pPr marL="0" indent="0">
+            <a:pPr indent="0" marL="0">
               <a:buNone/>
             </a:pPr>
             <a:r>
@@ -20188,11 +20804,11 @@
           <a:bodyPr wrap="square" lIns="0" tIns="0" rIns="0" bIns="0" rtlCol="0" anchor="ctr"/>
           <a:lstStyle/>
           <a:p>
-            <a:pPr marL="0" indent="0" algn="ctr">
-              <a:buNone/>
-            </a:pPr>
-            <a:r>
-              <a:rPr lang="en-US" sz="900" b="1" kern="0" spc="100" dirty="0">
+            <a:pPr algn="ctr" indent="0" marL="0">
+              <a:buNone/>
+            </a:pPr>
+            <a:r>
+              <a:rPr lang="en-US" sz="900" b="1" spc="100" kern="0" dirty="0">
                 <a:solidFill>
                   <a:srgbClr val="5A05F4"/>
                 </a:solidFill>
@@ -20208,14 +20824,14 @@
       </p:sp>
       <p:pic>
         <p:nvPicPr>
-          <p:cNvPr id="7" name="Image 0" descr="preencoded.png"/>
+          <p:cNvPr id="7" name="Image 0" descr="preencoded.png">    </p:cNvPr>
           <p:cNvPicPr>
             <a:picLocks noChangeAspect="1"/>
           </p:cNvPicPr>
           <p:nvPr/>
         </p:nvPicPr>
         <p:blipFill>
-          <a:blip r:embed="rId3"/>
+          <a:blip r:embed="rId1"/>
           <a:stretch>
             <a:fillRect/>
           </a:stretch>
@@ -20273,7 +20889,7 @@
           <a:bodyPr wrap="square" lIns="0" tIns="0" rIns="0" bIns="0" rtlCol="0" anchor="ctr"/>
           <a:lstStyle/>
           <a:p>
-            <a:pPr marL="0" indent="0" algn="ctr">
+            <a:pPr algn="ctr" indent="0" marL="0">
               <a:buNone/>
             </a:pPr>
             <a:r>
@@ -20377,7 +20993,7 @@
           <a:bodyPr wrap="square" lIns="0" tIns="0" rIns="0" bIns="0" rtlCol="0" anchor="ctr"/>
           <a:lstStyle/>
           <a:p>
-            <a:pPr marL="0" indent="0" algn="ctr">
+            <a:pPr algn="ctr" indent="0" marL="0">
               <a:buNone/>
             </a:pPr>
             <a:r>
@@ -20481,7 +21097,7 @@
           <a:bodyPr wrap="square" lIns="0" tIns="0" rIns="0" bIns="0" rtlCol="0" anchor="ctr"/>
           <a:lstStyle/>
           <a:p>
-            <a:pPr marL="0" indent="0" algn="ctr">
+            <a:pPr algn="ctr" indent="0" marL="0">
               <a:buNone/>
             </a:pPr>
             <a:r>
@@ -20585,7 +21201,7 @@
           <a:bodyPr wrap="square" lIns="0" tIns="0" rIns="0" bIns="0" rtlCol="0" anchor="ctr"/>
           <a:lstStyle/>
           <a:p>
-            <a:pPr marL="0" indent="0" algn="ctr">
+            <a:pPr algn="ctr" indent="0" marL="0">
               <a:buNone/>
             </a:pPr>
             <a:r>
@@ -20689,7 +21305,7 @@
           <a:bodyPr wrap="square" lIns="0" tIns="0" rIns="0" bIns="0" rtlCol="0" anchor="ctr"/>
           <a:lstStyle/>
           <a:p>
-            <a:pPr marL="0" indent="0" algn="ctr">
+            <a:pPr algn="ctr" indent="0" marL="0">
               <a:buNone/>
             </a:pPr>
             <a:r>
@@ -20750,7 +21366,7 @@
           <a:bodyPr wrap="square" lIns="0" tIns="0" rIns="0" bIns="0" rtlCol="0" anchor="ctr"/>
           <a:lstStyle/>
           <a:p>
-            <a:pPr marL="0" indent="0">
+            <a:pPr indent="0" marL="0">
               <a:buNone/>
             </a:pPr>
             <a:r>
@@ -20789,7 +21405,7 @@
           <a:bodyPr wrap="square" lIns="0" tIns="0" rIns="0" bIns="0" rtlCol="0" anchor="t"/>
           <a:lstStyle/>
           <a:p>
-            <a:pPr marL="0" indent="0">
+            <a:pPr indent="0" marL="0">
               <a:lnSpc>
                 <a:spcPct val="108000"/>
               </a:lnSpc>
@@ -20853,7 +21469,7 @@
           <a:bodyPr wrap="square" lIns="0" tIns="0" rIns="0" bIns="0" rtlCol="0" anchor="ctr"/>
           <a:lstStyle/>
           <a:p>
-            <a:pPr marL="0" indent="0">
+            <a:pPr indent="0" marL="0">
               <a:buNone/>
             </a:pPr>
             <a:r>
@@ -20892,7 +21508,7 @@
           <a:bodyPr wrap="square" lIns="0" tIns="0" rIns="0" bIns="0" rtlCol="0" anchor="t"/>
           <a:lstStyle/>
           <a:p>
-            <a:pPr marL="0" indent="0">
+            <a:pPr indent="0" marL="0">
               <a:lnSpc>
                 <a:spcPct val="108000"/>
               </a:lnSpc>
@@ -20961,7 +21577,7 @@
           <a:bodyPr wrap="square" lIns="0" tIns="0" rIns="0" bIns="0" rtlCol="0" anchor="ctr"/>
           <a:lstStyle/>
           <a:p>
-            <a:pPr marL="0" indent="0">
+            <a:pPr indent="0" marL="0">
               <a:lnSpc>
                 <a:spcPct val="112000"/>
               </a:lnSpc>
@@ -20984,7 +21600,7 @@
       </p:sp>
       <p:sp>
         <p:nvSpPr>
-          <p:cNvPr id="34" name="Slide Number Placeholder 0"/>
+          <p:cNvPr id="25" name="Slide Number Placeholder 0"/>
           <p:cNvSpPr>
             <a:spLocks noGrp="1"/>
           </p:cNvSpPr>
@@ -21002,7 +21618,7 @@
           </a:prstGeom>
           <a:extLst>
             <a:ext uri="{C572A759-6A51-4108-AA02-DFA0A04FC94B}">
-              <ma14:wrappingTextBoxFlag xmlns:ma14="http://schemas.microsoft.com/office/mac/drawingml/2011/main" xmlns="" val="0"/>
+              <ma14:wrappingTextBoxFlag xmlns:ma14="http://schemas.microsoft.com/office/mac/drawingml/2011/main" val="0"/>
             </a:ext>
           </a:extLst>
         </p:spPr>
@@ -21023,7 +21639,7 @@
           <a:p>
             <a:pPr algn="l"/>
             <a:fld id="{F7021451-1387-4CA6-816F-3879F97B5CBC}" type="slidenum">
-              <a:rPr lang="en-US" b="0"/>
+              <a:rPr b="0" lang="en-US"/>
               <a:t>7</a:t>
             </a:fld>
             <a:endParaRPr lang="en-US"/>
@@ -21098,7 +21714,7 @@
           <a:bodyPr wrap="square" lIns="0" tIns="0" rIns="0" bIns="0" rtlCol="0" anchor="ctr"/>
           <a:lstStyle/>
           <a:p>
-            <a:pPr marL="0" indent="0" algn="l">
+            <a:pPr algn="l" indent="0" marL="0">
               <a:buNone/>
             </a:pPr>
             <a:r>
@@ -21137,7 +21753,7 @@
           <a:bodyPr wrap="square" lIns="0" tIns="0" rIns="0" bIns="0" rtlCol="0" anchor="ctr"/>
           <a:lstStyle/>
           <a:p>
-            <a:pPr marL="0" indent="0">
+            <a:pPr indent="0" marL="0">
               <a:buNone/>
             </a:pPr>
             <a:r>
@@ -21203,11 +21819,11 @@
           <a:bodyPr wrap="square" lIns="0" tIns="0" rIns="0" bIns="0" rtlCol="0" anchor="ctr"/>
           <a:lstStyle/>
           <a:p>
-            <a:pPr marL="0" indent="0" algn="ctr">
-              <a:buNone/>
-            </a:pPr>
-            <a:r>
-              <a:rPr lang="en-US" sz="900" b="1" kern="0" spc="100" dirty="0">
+            <a:pPr algn="ctr" indent="0" marL="0">
+              <a:buNone/>
+            </a:pPr>
+            <a:r>
+              <a:rPr lang="en-US" sz="900" b="1" spc="100" kern="0" dirty="0">
                 <a:solidFill>
                   <a:srgbClr val="5A05F4"/>
                 </a:solidFill>
@@ -21223,14 +21839,14 @@
       </p:sp>
       <p:pic>
         <p:nvPicPr>
-          <p:cNvPr id="7" name="Image 0" descr="preencoded.png"/>
+          <p:cNvPr id="7" name="Image 0" descr="preencoded.png">    </p:cNvPr>
           <p:cNvPicPr>
             <a:picLocks noChangeAspect="1"/>
           </p:cNvPicPr>
           <p:nvPr/>
         </p:nvPicPr>
         <p:blipFill>
-          <a:blip r:embed="rId3"/>
+          <a:blip r:embed="rId1"/>
           <a:stretch>
             <a:fillRect/>
           </a:stretch>
@@ -21288,7 +21904,7 @@
           <a:bodyPr wrap="square" lIns="0" tIns="0" rIns="0" bIns="0" rtlCol="0" anchor="ctr"/>
           <a:lstStyle/>
           <a:p>
-            <a:pPr marL="0" indent="0">
+            <a:pPr indent="0" marL="0">
               <a:buNone/>
             </a:pPr>
             <a:r>
@@ -21327,7 +21943,7 @@
           <a:bodyPr wrap="square" lIns="0" tIns="0" rIns="0" bIns="0" rtlCol="0" anchor="ctr"/>
           <a:lstStyle/>
           <a:p>
-            <a:pPr marL="0" indent="0">
+            <a:pPr indent="0" marL="0">
               <a:buNone/>
             </a:pPr>
             <a:r>
@@ -21388,7 +22004,7 @@
           <a:bodyPr wrap="square" lIns="0" tIns="0" rIns="0" bIns="0" rtlCol="0" anchor="ctr"/>
           <a:lstStyle/>
           <a:p>
-            <a:pPr marL="0" indent="0">
+            <a:pPr indent="0" marL="0">
               <a:buNone/>
             </a:pPr>
             <a:r>
@@ -21427,7 +22043,7 @@
           <a:bodyPr wrap="square" lIns="0" tIns="0" rIns="0" bIns="0" rtlCol="0" anchor="ctr"/>
           <a:lstStyle/>
           <a:p>
-            <a:pPr marL="0" indent="0">
+            <a:pPr indent="0" marL="0">
               <a:buNone/>
             </a:pPr>
             <a:r>
@@ -21488,7 +22104,7 @@
           <a:bodyPr wrap="square" lIns="0" tIns="0" rIns="0" bIns="0" rtlCol="0" anchor="ctr"/>
           <a:lstStyle/>
           <a:p>
-            <a:pPr marL="0" indent="0">
+            <a:pPr indent="0" marL="0">
               <a:buNone/>
             </a:pPr>
             <a:r>
@@ -21527,7 +22143,7 @@
           <a:bodyPr wrap="square" lIns="0" tIns="0" rIns="0" bIns="0" rtlCol="0" anchor="ctr"/>
           <a:lstStyle/>
           <a:p>
-            <a:pPr marL="0" indent="0">
+            <a:pPr indent="0" marL="0">
               <a:buNone/>
             </a:pPr>
             <a:r>
@@ -21588,7 +22204,7 @@
           <a:bodyPr wrap="square" lIns="0" tIns="0" rIns="0" bIns="0" rtlCol="0" anchor="ctr"/>
           <a:lstStyle/>
           <a:p>
-            <a:pPr marL="0" indent="0">
+            <a:pPr indent="0" marL="0">
               <a:buNone/>
             </a:pPr>
             <a:r>
@@ -21627,7 +22243,7 @@
           <a:bodyPr wrap="square" lIns="0" tIns="0" rIns="0" bIns="0" rtlCol="0" anchor="ctr"/>
           <a:lstStyle/>
           <a:p>
-            <a:pPr marL="0" indent="0">
+            <a:pPr indent="0" marL="0">
               <a:buNone/>
             </a:pPr>
             <a:r>
@@ -21688,7 +22304,7 @@
           <a:bodyPr wrap="square" lIns="0" tIns="0" rIns="0" bIns="0" rtlCol="0" anchor="ctr"/>
           <a:lstStyle/>
           <a:p>
-            <a:pPr marL="0" indent="0" algn="ctr">
+            <a:pPr algn="ctr" indent="0" marL="0">
               <a:buNone/>
             </a:pPr>
             <a:r>
@@ -21792,7 +22408,7 @@
           <a:bodyPr wrap="square" lIns="0" tIns="0" rIns="0" bIns="0" rtlCol="0" anchor="ctr"/>
           <a:lstStyle/>
           <a:p>
-            <a:pPr marL="0" indent="0" algn="ctr">
+            <a:pPr algn="ctr" indent="0" marL="0">
               <a:buNone/>
             </a:pPr>
             <a:r>
@@ -21896,7 +22512,7 @@
           <a:bodyPr wrap="square" lIns="0" tIns="0" rIns="0" bIns="0" rtlCol="0" anchor="ctr"/>
           <a:lstStyle/>
           <a:p>
-            <a:pPr marL="0" indent="0" algn="ctr">
+            <a:pPr algn="ctr" indent="0" marL="0">
               <a:buNone/>
             </a:pPr>
             <a:r>
@@ -22000,7 +22616,7 @@
           <a:bodyPr wrap="square" lIns="0" tIns="0" rIns="0" bIns="0" rtlCol="0" anchor="ctr"/>
           <a:lstStyle/>
           <a:p>
-            <a:pPr marL="0" indent="0" algn="ctr">
+            <a:pPr algn="ctr" indent="0" marL="0">
               <a:buNone/>
             </a:pPr>
             <a:r>
@@ -22066,11 +22682,11 @@
           <a:bodyPr wrap="square" lIns="0" tIns="0" rIns="0" bIns="0" rtlCol="0" anchor="ctr"/>
           <a:lstStyle/>
           <a:p>
-            <a:pPr marL="0" indent="0">
-              <a:buNone/>
-            </a:pPr>
-            <a:r>
-              <a:rPr lang="en-US" sz="950" b="1" kern="0" spc="150" dirty="0">
+            <a:pPr indent="0" marL="0">
+              <a:buNone/>
+            </a:pPr>
+            <a:r>
+              <a:rPr lang="en-US" sz="950" b="1" spc="150" kern="0" dirty="0">
                 <a:solidFill>
                   <a:srgbClr val="B3261E"/>
                 </a:solidFill>
@@ -22105,7 +22721,7 @@
           <a:bodyPr wrap="square" lIns="0" tIns="0" rIns="0" bIns="0" rtlCol="0" anchor="ctr"/>
           <a:lstStyle/>
           <a:p>
-            <a:pPr marL="0" indent="0">
+            <a:pPr indent="0" marL="0">
               <a:lnSpc>
                 <a:spcPct val="112000"/>
               </a:lnSpc>
@@ -22174,11 +22790,11 @@
           <a:bodyPr wrap="square" lIns="0" tIns="0" rIns="0" bIns="0" rtlCol="0" anchor="ctr"/>
           <a:lstStyle/>
           <a:p>
-            <a:pPr marL="0" indent="0">
-              <a:buNone/>
-            </a:pPr>
-            <a:r>
-              <a:rPr lang="en-US" sz="950" b="1" kern="0" spc="150" dirty="0">
+            <a:pPr indent="0" marL="0">
+              <a:buNone/>
+            </a:pPr>
+            <a:r>
+              <a:rPr lang="en-US" sz="950" b="1" spc="150" kern="0" dirty="0">
                 <a:solidFill>
                   <a:srgbClr val="1A4FBF"/>
                 </a:solidFill>
@@ -22213,7 +22829,7 @@
           <a:bodyPr wrap="square" lIns="0" tIns="0" rIns="0" bIns="0" rtlCol="0" anchor="ctr"/>
           <a:lstStyle/>
           <a:p>
-            <a:pPr marL="0" indent="0">
+            <a:pPr indent="0" marL="0">
               <a:lnSpc>
                 <a:spcPct val="112000"/>
               </a:lnSpc>
@@ -22282,7 +22898,7 @@
           <a:bodyPr wrap="square" lIns="0" tIns="0" rIns="0" bIns="0" rtlCol="0" anchor="ctr"/>
           <a:lstStyle/>
           <a:p>
-            <a:pPr marL="0" indent="0">
+            <a:pPr indent="0" marL="0">
               <a:lnSpc>
                 <a:spcPct val="112000"/>
               </a:lnSpc>
@@ -22305,7 +22921,7 @@
       </p:sp>
       <p:sp>
         <p:nvSpPr>
-          <p:cNvPr id="42" name="Slide Number Placeholder 0"/>
+          <p:cNvPr id="25" name="Slide Number Placeholder 0"/>
           <p:cNvSpPr>
             <a:spLocks noGrp="1"/>
           </p:cNvSpPr>
@@ -22323,7 +22939,7 @@
           </a:prstGeom>
           <a:extLst>
             <a:ext uri="{C572A759-6A51-4108-AA02-DFA0A04FC94B}">
-              <ma14:wrappingTextBoxFlag xmlns:ma14="http://schemas.microsoft.com/office/mac/drawingml/2011/main" xmlns="" val="0"/>
+              <ma14:wrappingTextBoxFlag xmlns:ma14="http://schemas.microsoft.com/office/mac/drawingml/2011/main" val="0"/>
             </a:ext>
           </a:extLst>
         </p:spPr>
@@ -22344,7 +22960,7 @@
           <a:p>
             <a:pPr algn="l"/>
             <a:fld id="{F7021451-1387-4CA6-816F-3879F97B5CBC}" type="slidenum">
-              <a:rPr lang="en-US" b="0"/>
+              <a:rPr b="0" lang="en-US"/>
               <a:t>8</a:t>
             </a:fld>
             <a:endParaRPr lang="en-US"/>
@@ -22419,7 +23035,7 @@
           <a:bodyPr wrap="square" lIns="0" tIns="0" rIns="0" bIns="0" rtlCol="0" anchor="ctr"/>
           <a:lstStyle/>
           <a:p>
-            <a:pPr marL="0" indent="0" algn="l">
+            <a:pPr algn="l" indent="0" marL="0">
               <a:buNone/>
             </a:pPr>
             <a:r>
@@ -22458,7 +23074,7 @@
           <a:bodyPr wrap="square" lIns="0" tIns="0" rIns="0" bIns="0" rtlCol="0" anchor="ctr"/>
           <a:lstStyle/>
           <a:p>
-            <a:pPr marL="0" indent="0">
+            <a:pPr indent="0" marL="0">
               <a:buNone/>
             </a:pPr>
             <a:r>
@@ -22470,7 +23086,7 @@
                 <a:ea typeface="Unbounded" pitchFamily="34" charset="-122"/>
                 <a:cs typeface="Unbounded" pitchFamily="34" charset="-120"/>
               </a:rPr>
-              <a:t>Розтин eval-gate.yml: кожен крок — граблі</a:t>
+              <a:t>Розтин eval-gate.yml: кожен крок має причину</a:t>
             </a:r>
             <a:endParaRPr lang="en-US" sz="2400" dirty="0"/>
           </a:p>
@@ -22524,11 +23140,11 @@
           <a:bodyPr wrap="square" lIns="0" tIns="0" rIns="0" bIns="0" rtlCol="0" anchor="ctr"/>
           <a:lstStyle/>
           <a:p>
-            <a:pPr marL="0" indent="0" algn="ctr">
-              <a:buNone/>
-            </a:pPr>
-            <a:r>
-              <a:rPr lang="en-US" sz="900" b="1" kern="0" spc="100" dirty="0">
+            <a:pPr algn="ctr" indent="0" marL="0">
+              <a:buNone/>
+            </a:pPr>
+            <a:r>
+              <a:rPr lang="en-US" sz="900" b="1" spc="100" kern="0" dirty="0">
                 <a:solidFill>
                   <a:srgbClr val="5A05F4"/>
                 </a:solidFill>
@@ -22544,14 +23160,14 @@
       </p:sp>
       <p:pic>
         <p:nvPicPr>
-          <p:cNvPr id="7" name="Image 0" descr="preencoded.png"/>
+          <p:cNvPr id="7" name="Image 0" descr="preencoded.png">    </p:cNvPr>
           <p:cNvPicPr>
             <a:picLocks noChangeAspect="1"/>
           </p:cNvPicPr>
           <p:nvPr/>
         </p:nvPicPr>
         <p:blipFill>
-          <a:blip r:embed="rId3"/>
+          <a:blip r:embed="rId1"/>
           <a:stretch>
             <a:fillRect/>
           </a:stretch>
@@ -22614,7 +23230,7 @@
           <a:bodyPr wrap="square" lIns="0" tIns="0" rIns="0" bIns="0" rtlCol="0" anchor="t"/>
           <a:lstStyle/>
           <a:p>
-            <a:pPr marL="0" indent="0">
+            <a:pPr indent="0" marL="0">
               <a:lnSpc>
                 <a:spcPct val="130000"/>
               </a:lnSpc>
@@ -22631,6 +23247,12 @@
               </a:rPr>
               <a:t>- name: Up stack        </a:t>
             </a:r>
+            <a:pPr indent="0" marL="0">
+              <a:lnSpc>
+                <a:spcPct val="130000"/>
+              </a:lnSpc>
+              <a:buNone/>
+            </a:pPr>
             <a:r>
               <a:rPr lang="en-US" sz="1050" dirty="0">
                 <a:solidFill>
@@ -22645,7 +23267,7 @@
             <a:endParaRPr lang="en-US" sz="1050" dirty="0"/>
           </a:p>
           <a:p>
-            <a:pPr marL="0" indent="0">
+            <a:pPr indent="0" marL="0">
               <a:lnSpc>
                 <a:spcPct val="130000"/>
               </a:lnSpc>
@@ -22665,7 +23287,7 @@
             <a:endParaRPr lang="en-US" sz="1050" dirty="0"/>
           </a:p>
           <a:p>
-            <a:pPr marL="0" indent="0">
+            <a:pPr indent="0" marL="0">
               <a:lnSpc>
                 <a:spcPct val="130000"/>
               </a:lnSpc>
@@ -22685,7 +23307,7 @@
             <a:endParaRPr lang="en-US" sz="1050" dirty="0"/>
           </a:p>
           <a:p>
-            <a:pPr marL="0" indent="0">
+            <a:pPr indent="0" marL="0">
               <a:lnSpc>
                 <a:spcPct val="130000"/>
               </a:lnSpc>
@@ -22705,7 +23327,7 @@
             <a:endParaRPr lang="en-US" sz="1050" dirty="0"/>
           </a:p>
           <a:p>
-            <a:pPr marL="0" indent="0">
+            <a:pPr indent="0" marL="0">
               <a:lnSpc>
                 <a:spcPct val="130000"/>
               </a:lnSpc>
@@ -22725,7 +23347,7 @@
             <a:endParaRPr lang="en-US" sz="1050" dirty="0"/>
           </a:p>
           <a:p>
-            <a:pPr marL="0" indent="0">
+            <a:pPr indent="0" marL="0">
               <a:lnSpc>
                 <a:spcPct val="130000"/>
               </a:lnSpc>
@@ -22745,7 +23367,7 @@
             <a:endParaRPr lang="en-US" sz="1050" dirty="0"/>
           </a:p>
           <a:p>
-            <a:pPr marL="0" indent="0">
+            <a:pPr indent="0" marL="0">
               <a:lnSpc>
                 <a:spcPct val="130000"/>
               </a:lnSpc>
@@ -22765,7 +23387,7 @@
             <a:endParaRPr lang="en-US" sz="1050" dirty="0"/>
           </a:p>
           <a:p>
-            <a:pPr marL="0" indent="0">
+            <a:pPr indent="0" marL="0">
               <a:lnSpc>
                 <a:spcPct val="130000"/>
               </a:lnSpc>
@@ -22782,6 +23404,12 @@
               </a:rPr>
               <a:t>- name: Wait for gateway   </a:t>
             </a:r>
+            <a:pPr indent="0" marL="0">
+              <a:lnSpc>
+                <a:spcPct val="130000"/>
+              </a:lnSpc>
+              <a:buNone/>
+            </a:pPr>
             <a:r>
               <a:rPr lang="en-US" sz="1050" dirty="0">
                 <a:solidFill>
@@ -22796,7 +23424,7 @@
             <a:endParaRPr lang="en-US" sz="1050" dirty="0"/>
           </a:p>
           <a:p>
-            <a:pPr marL="0" indent="0">
+            <a:pPr indent="0" marL="0">
               <a:lnSpc>
                 <a:spcPct val="130000"/>
               </a:lnSpc>
@@ -22816,7 +23444,7 @@
             <a:endParaRPr lang="en-US" sz="1050" dirty="0"/>
           </a:p>
           <a:p>
-            <a:pPr marL="0" indent="0">
+            <a:pPr indent="0" marL="0">
               <a:lnSpc>
                 <a:spcPct val="130000"/>
               </a:lnSpc>
@@ -22836,7 +23464,7 @@
             <a:endParaRPr lang="en-US" sz="1050" dirty="0"/>
           </a:p>
           <a:p>
-            <a:pPr marL="0" indent="0">
+            <a:pPr indent="0" marL="0">
               <a:lnSpc>
                 <a:spcPct val="130000"/>
               </a:lnSpc>
@@ -22856,7 +23484,7 @@
             <a:endParaRPr lang="en-US" sz="1050" dirty="0"/>
           </a:p>
           <a:p>
-            <a:pPr marL="0" indent="0">
+            <a:pPr indent="0" marL="0">
               <a:lnSpc>
                 <a:spcPct val="130000"/>
               </a:lnSpc>
@@ -22873,6 +23501,12 @@
               </a:rPr>
               <a:t>- name: Logs on failure   </a:t>
             </a:r>
+            <a:pPr indent="0" marL="0">
+              <a:lnSpc>
+                <a:spcPct val="130000"/>
+              </a:lnSpc>
+              <a:buNone/>
+            </a:pPr>
             <a:r>
               <a:rPr lang="en-US" sz="1050" dirty="0">
                 <a:solidFill>
@@ -22887,7 +23521,7 @@
             <a:endParaRPr lang="en-US" sz="1050" dirty="0"/>
           </a:p>
           <a:p>
-            <a:pPr marL="0" indent="0">
+            <a:pPr indent="0" marL="0">
               <a:lnSpc>
                 <a:spcPct val="130000"/>
               </a:lnSpc>
@@ -22904,6 +23538,12 @@
               </a:rPr>
               <a:t>- name: Down              </a:t>
             </a:r>
+            <a:pPr indent="0" marL="0">
+              <a:lnSpc>
+                <a:spcPct val="130000"/>
+              </a:lnSpc>
+              <a:buNone/>
+            </a:pPr>
             <a:r>
               <a:rPr lang="en-US" sz="1050" dirty="0">
                 <a:solidFill>
@@ -22940,7 +23580,7 @@
           <a:bodyPr wrap="square" lIns="0" tIns="0" rIns="0" bIns="0" rtlCol="0" anchor="ctr"/>
           <a:lstStyle/>
           <a:p>
-            <a:pPr marL="0" indent="0">
+            <a:pPr indent="0" marL="0">
               <a:buNone/>
             </a:pPr>
             <a:r>
@@ -22979,7 +23619,7 @@
           <a:bodyPr wrap="square" lIns="0" tIns="0" rIns="0" bIns="0" rtlCol="0" anchor="ctr"/>
           <a:lstStyle/>
           <a:p>
-            <a:pPr marL="0" indent="0">
+            <a:pPr indent="0" marL="0">
               <a:buNone/>
             </a:pPr>
             <a:r>
@@ -23018,7 +23658,7 @@
           <a:bodyPr wrap="square" lIns="0" tIns="0" rIns="0" bIns="0" rtlCol="0" anchor="ctr"/>
           <a:lstStyle/>
           <a:p>
-            <a:pPr marL="0" indent="0">
+            <a:pPr indent="0" marL="0">
               <a:buNone/>
             </a:pPr>
             <a:r>
@@ -23057,7 +23697,7 @@
           <a:bodyPr wrap="square" lIns="0" tIns="0" rIns="0" bIns="0" rtlCol="0" anchor="ctr"/>
           <a:lstStyle/>
           <a:p>
-            <a:pPr marL="0" indent="0">
+            <a:pPr indent="0" marL="0">
               <a:buNone/>
             </a:pPr>
             <a:r>
@@ -23096,7 +23736,7 @@
           <a:bodyPr wrap="square" lIns="0" tIns="0" rIns="0" bIns="0" rtlCol="0" anchor="ctr"/>
           <a:lstStyle/>
           <a:p>
-            <a:pPr marL="0" indent="0">
+            <a:pPr indent="0" marL="0">
               <a:buNone/>
             </a:pPr>
             <a:r>
@@ -23135,7 +23775,7 @@
           <a:bodyPr wrap="square" lIns="0" tIns="0" rIns="0" bIns="0" rtlCol="0" anchor="ctr"/>
           <a:lstStyle/>
           <a:p>
-            <a:pPr marL="0" indent="0">
+            <a:pPr indent="0" marL="0">
               <a:buNone/>
             </a:pPr>
             <a:r>
@@ -23174,7 +23814,7 @@
           <a:bodyPr wrap="square" lIns="0" tIns="0" rIns="0" bIns="0" rtlCol="0" anchor="ctr"/>
           <a:lstStyle/>
           <a:p>
-            <a:pPr marL="0" indent="0">
+            <a:pPr indent="0" marL="0">
               <a:buNone/>
             </a:pPr>
             <a:r>
@@ -23213,7 +23853,7 @@
           <a:bodyPr wrap="square" lIns="0" tIns="0" rIns="0" bIns="0" rtlCol="0" anchor="ctr"/>
           <a:lstStyle/>
           <a:p>
-            <a:pPr marL="0" indent="0">
+            <a:pPr indent="0" marL="0">
               <a:buNone/>
             </a:pPr>
             <a:r>
@@ -23252,7 +23892,7 @@
           <a:bodyPr wrap="square" lIns="0" tIns="0" rIns="0" bIns="0" rtlCol="0" anchor="ctr"/>
           <a:lstStyle/>
           <a:p>
-            <a:pPr marL="0" indent="0">
+            <a:pPr indent="0" marL="0">
               <a:buNone/>
             </a:pPr>
             <a:r>
@@ -23291,7 +23931,7 @@
           <a:bodyPr wrap="square" lIns="0" tIns="0" rIns="0" bIns="0" rtlCol="0" anchor="ctr"/>
           <a:lstStyle/>
           <a:p>
-            <a:pPr marL="0" indent="0">
+            <a:pPr indent="0" marL="0">
               <a:buNone/>
             </a:pPr>
             <a:r>
@@ -23352,7 +23992,7 @@
           <a:bodyPr wrap="square" lIns="0" tIns="0" rIns="0" bIns="0" rtlCol="0" anchor="ctr"/>
           <a:lstStyle/>
           <a:p>
-            <a:pPr marL="0" indent="0">
+            <a:pPr indent="0" marL="0">
               <a:lnSpc>
                 <a:spcPct val="112000"/>
               </a:lnSpc>
@@ -23393,7 +24033,7 @@
           </a:prstGeom>
           <a:extLst>
             <a:ext uri="{C572A759-6A51-4108-AA02-DFA0A04FC94B}">
-              <ma14:wrappingTextBoxFlag xmlns:ma14="http://schemas.microsoft.com/office/mac/drawingml/2011/main" xmlns="" val="0"/>
+              <ma14:wrappingTextBoxFlag xmlns:ma14="http://schemas.microsoft.com/office/mac/drawingml/2011/main" val="0"/>
             </a:ext>
           </a:extLst>
         </p:spPr>
@@ -23414,7 +24054,7 @@
           <a:p>
             <a:pPr algn="l"/>
             <a:fld id="{F7021451-1387-4CA6-816F-3879F97B5CBC}" type="slidenum">
-              <a:rPr lang="en-US" b="0"/>
+              <a:rPr b="0" lang="en-US"/>
               <a:t>9</a:t>
             </a:fld>
             <a:endParaRPr lang="en-US"/>
@@ -23722,299 +24362,4 @@
     </a:ext>
   </a:extLst>
 </a:theme>
-</file>
-
-<file path=ppt/theme/theme2.xml><?xml version="1.0" encoding="utf-8"?>
-<a:theme xmlns:a="http://schemas.openxmlformats.org/drawingml/2006/main" name="Office Theme">
-  <a:themeElements>
-    <a:clrScheme name="Office">
-      <a:dk1>
-        <a:sysClr val="windowText" lastClr="000000"/>
-      </a:dk1>
-      <a:lt1>
-        <a:sysClr val="window" lastClr="FFFFFF"/>
-      </a:lt1>
-      <a:dk2>
-        <a:srgbClr val="44546A"/>
-      </a:dk2>
-      <a:lt2>
-        <a:srgbClr val="E7E6E6"/>
-      </a:lt2>
-      <a:accent1>
-        <a:srgbClr val="4472C4"/>
-      </a:accent1>
-      <a:accent2>
-        <a:srgbClr val="ED7D31"/>
-      </a:accent2>
-      <a:accent3>
-        <a:srgbClr val="A5A5A5"/>
-      </a:accent3>
-      <a:accent4>
-        <a:srgbClr val="FFC000"/>
-      </a:accent4>
-      <a:accent5>
-        <a:srgbClr val="5B9BD5"/>
-      </a:accent5>
-      <a:accent6>
-        <a:srgbClr val="70AD47"/>
-      </a:accent6>
-      <a:hlink>
-        <a:srgbClr val="0563C1"/>
-      </a:hlink>
-      <a:folHlink>
-        <a:srgbClr val="954F72"/>
-      </a:folHlink>
-    </a:clrScheme>
-    <a:fontScheme name="Office">
-      <a:majorFont>
-        <a:latin typeface="Calibri Light" panose="020F0302020204030204"/>
-        <a:ea typeface=""/>
-        <a:cs typeface=""/>
-        <a:font script="Jpan" typeface="游ゴシック Light"/>
-        <a:font script="Hang" typeface="맑은 고딕"/>
-        <a:font script="Hans" typeface="等线 Light"/>
-        <a:font script="Hant" typeface="新細明體"/>
-        <a:font script="Arab" typeface="Times New Roman"/>
-        <a:font script="Hebr" typeface="Times New Roman"/>
-        <a:font script="Thai" typeface="Angsana New"/>
-        <a:font script="Ethi" typeface="Nyala"/>
-        <a:font script="Beng" typeface="Vrinda"/>
-        <a:font script="Gujr" typeface="Shruti"/>
-        <a:font script="Khmr" typeface="MoolBoran"/>
-        <a:font script="Knda" typeface="Tunga"/>
-        <a:font script="Guru" typeface="Raavi"/>
-        <a:font script="Cans" typeface="Euphemia"/>
-        <a:font script="Cher" typeface="Plantagenet Cherokee"/>
-        <a:font script="Yiii" typeface="Microsoft Yi Baiti"/>
-        <a:font script="Tibt" typeface="Microsoft Himalaya"/>
-        <a:font script="Thaa" typeface="MV Boli"/>
-        <a:font script="Deva" typeface="Mangal"/>
-        <a:font script="Telu" typeface="Gautami"/>
-        <a:font script="Taml" typeface="Latha"/>
-        <a:font script="Syrc" typeface="Estrangelo Edessa"/>
-        <a:font script="Orya" typeface="Kalinga"/>
-        <a:font script="Mlym" typeface="Kartika"/>
-        <a:font script="Laoo" typeface="DokChampa"/>
-        <a:font script="Sinh" typeface="Iskoola Pota"/>
-        <a:font script="Mong" typeface="Mongolian Baiti"/>
-        <a:font script="Viet" typeface="Times New Roman"/>
-        <a:font script="Uigh" typeface="Microsoft Uighur"/>
-        <a:font script="Geor" typeface="Sylfaen"/>
-        <a:font script="Armn" typeface="Arial"/>
-        <a:font script="Bugi" typeface="Leelawadee UI"/>
-        <a:font script="Bopo" typeface="Microsoft JhengHei"/>
-        <a:font script="Java" typeface="Javanese Text"/>
-        <a:font script="Lisu" typeface="Segoe UI"/>
-        <a:font script="Mymr" typeface="Myanmar Text"/>
-        <a:font script="Nkoo" typeface="Ebrima"/>
-        <a:font script="Olck" typeface="Nirmala UI"/>
-        <a:font script="Osma" typeface="Ebrima"/>
-        <a:font script="Phag" typeface="Phagspa"/>
-        <a:font script="Syrn" typeface="Estrangelo Edessa"/>
-        <a:font script="Syrj" typeface="Estrangelo Edessa"/>
-        <a:font script="Syre" typeface="Estrangelo Edessa"/>
-        <a:font script="Sora" typeface="Nirmala UI"/>
-        <a:font script="Tale" typeface="Microsoft Tai Le"/>
-        <a:font script="Talu" typeface="Microsoft New Tai Lue"/>
-        <a:font script="Tfng" typeface="Ebrima"/>
-      </a:majorFont>
-      <a:minorFont>
-        <a:latin typeface="Calibri" panose="020F0502020204030204"/>
-        <a:ea typeface=""/>
-        <a:cs typeface=""/>
-        <a:font script="Jpan" typeface="游ゴシック"/>
-        <a:font script="Hang" typeface="맑은 고딕"/>
-        <a:font script="Hans" typeface="等线"/>
-        <a:font script="Hant" typeface="新細明體"/>
-        <a:font script="Arab" typeface="Arial"/>
-        <a:font script="Hebr" typeface="Arial"/>
-        <a:font script="Thai" typeface="Cordia New"/>
-        <a:font script="Ethi" typeface="Nyala"/>
-        <a:font script="Beng" typeface="Vrinda"/>
-        <a:font script="Gujr" typeface="Shruti"/>
-        <a:font script="Khmr" typeface="DaunPenh"/>
-        <a:font script="Knda" typeface="Tunga"/>
-        <a:font script="Guru" typeface="Raavi"/>
-        <a:font script="Cans" typeface="Euphemia"/>
-        <a:font script="Cher" typeface="Plantagenet Cherokee"/>
-        <a:font script="Yiii" typeface="Microsoft Yi Baiti"/>
-        <a:font script="Tibt" typeface="Microsoft Himalaya"/>
-        <a:font script="Thaa" typeface="MV Boli"/>
-        <a:font script="Deva" typeface="Mangal"/>
-        <a:font script="Telu" typeface="Gautami"/>
-        <a:font script="Taml" typeface="Latha"/>
-        <a:font script="Syrc" typeface="Estrangelo Edessa"/>
-        <a:font script="Orya" typeface="Kalinga"/>
-        <a:font script="Mlym" typeface="Kartika"/>
-        <a:font script="Laoo" typeface="DokChampa"/>
-        <a:font script="Sinh" typeface="Iskoola Pota"/>
-        <a:font script="Mong" typeface="Mongolian Baiti"/>
-        <a:font script="Viet" typeface="Arial"/>
-        <a:font script="Uigh" typeface="Microsoft Uighur"/>
-        <a:font script="Geor" typeface="Sylfaen"/>
-        <a:font script="Armn" typeface="Arial"/>
-        <a:font script="Bugi" typeface="Leelawadee UI"/>
-        <a:font script="Bopo" typeface="Microsoft JhengHei"/>
-        <a:font script="Java" typeface="Javanese Text"/>
-        <a:font script="Lisu" typeface="Segoe UI"/>
-        <a:font script="Mymr" typeface="Myanmar Text"/>
-        <a:font script="Nkoo" typeface="Ebrima"/>
-        <a:font script="Olck" typeface="Nirmala UI"/>
-        <a:font script="Osma" typeface="Ebrima"/>
-        <a:font script="Phag" typeface="Phagspa"/>
-        <a:font script="Syrn" typeface="Estrangelo Edessa"/>
-        <a:font script="Syrj" typeface="Estrangelo Edessa"/>
-        <a:font script="Syre" typeface="Estrangelo Edessa"/>
-        <a:font script="Sora" typeface="Nirmala UI"/>
-        <a:font script="Tale" typeface="Microsoft Tai Le"/>
-        <a:font script="Talu" typeface="Microsoft New Tai Lue"/>
-        <a:font script="Tfng" typeface="Ebrima"/>
-      </a:minorFont>
-    </a:fontScheme>
-    <a:fmtScheme name="Office">
-      <a:fillStyleLst>
-        <a:solidFill>
-          <a:schemeClr val="phClr"/>
-        </a:solidFill>
-        <a:gradFill rotWithShape="1">
-          <a:gsLst>
-            <a:gs pos="0">
-              <a:schemeClr val="phClr">
-                <a:lumMod val="110000"/>
-                <a:satMod val="105000"/>
-                <a:tint val="67000"/>
-              </a:schemeClr>
-            </a:gs>
-            <a:gs pos="50000">
-              <a:schemeClr val="phClr">
-                <a:lumMod val="105000"/>
-                <a:satMod val="103000"/>
-                <a:tint val="73000"/>
-              </a:schemeClr>
-            </a:gs>
-            <a:gs pos="100000">
-              <a:schemeClr val="phClr">
-                <a:lumMod val="105000"/>
-                <a:satMod val="109000"/>
-                <a:tint val="81000"/>
-              </a:schemeClr>
-            </a:gs>
-          </a:gsLst>
-          <a:lin ang="5400000" scaled="0"/>
-        </a:gradFill>
-        <a:gradFill rotWithShape="1">
-          <a:gsLst>
-            <a:gs pos="0">
-              <a:schemeClr val="phClr">
-                <a:satMod val="103000"/>
-                <a:lumMod val="102000"/>
-                <a:tint val="94000"/>
-              </a:schemeClr>
-            </a:gs>
-            <a:gs pos="50000">
-              <a:schemeClr val="phClr">
-                <a:satMod val="110000"/>
-                <a:lumMod val="100000"/>
-                <a:shade val="100000"/>
-              </a:schemeClr>
-            </a:gs>
-            <a:gs pos="100000">
-              <a:schemeClr val="phClr">
-                <a:lumMod val="99000"/>
-                <a:satMod val="120000"/>
-                <a:shade val="78000"/>
-              </a:schemeClr>
-            </a:gs>
-          </a:gsLst>
-          <a:lin ang="5400000" scaled="0"/>
-        </a:gradFill>
-      </a:fillStyleLst>
-      <a:lnStyleLst>
-        <a:ln w="6350" cap="flat" cmpd="sng" algn="ctr">
-          <a:solidFill>
-            <a:schemeClr val="phClr"/>
-          </a:solidFill>
-          <a:prstDash val="solid"/>
-          <a:miter lim="800000"/>
-        </a:ln>
-        <a:ln w="12700" cap="flat" cmpd="sng" algn="ctr">
-          <a:solidFill>
-            <a:schemeClr val="phClr"/>
-          </a:solidFill>
-          <a:prstDash val="solid"/>
-          <a:miter lim="800000"/>
-        </a:ln>
-        <a:ln w="19050" cap="flat" cmpd="sng" algn="ctr">
-          <a:solidFill>
-            <a:schemeClr val="phClr"/>
-          </a:solidFill>
-          <a:prstDash val="solid"/>
-          <a:miter lim="800000"/>
-        </a:ln>
-      </a:lnStyleLst>
-      <a:effectStyleLst>
-        <a:effectStyle>
-          <a:effectLst/>
-        </a:effectStyle>
-        <a:effectStyle>
-          <a:effectLst/>
-        </a:effectStyle>
-        <a:effectStyle>
-          <a:effectLst>
-            <a:outerShdw blurRad="57150" dist="19050" dir="5400000" algn="ctr" rotWithShape="0">
-              <a:srgbClr val="000000">
-                <a:alpha val="63000"/>
-              </a:srgbClr>
-            </a:outerShdw>
-          </a:effectLst>
-        </a:effectStyle>
-      </a:effectStyleLst>
-      <a:bgFillStyleLst>
-        <a:solidFill>
-          <a:schemeClr val="phClr"/>
-        </a:solidFill>
-        <a:solidFill>
-          <a:schemeClr val="phClr">
-            <a:tint val="95000"/>
-            <a:satMod val="170000"/>
-          </a:schemeClr>
-        </a:solidFill>
-        <a:gradFill rotWithShape="1">
-          <a:gsLst>
-            <a:gs pos="0">
-              <a:schemeClr val="phClr">
-                <a:tint val="93000"/>
-                <a:satMod val="150000"/>
-                <a:shade val="98000"/>
-                <a:lumMod val="102000"/>
-              </a:schemeClr>
-            </a:gs>
-            <a:gs pos="50000">
-              <a:schemeClr val="phClr">
-                <a:tint val="98000"/>
-                <a:satMod val="130000"/>
-                <a:shade val="90000"/>
-                <a:lumMod val="103000"/>
-              </a:schemeClr>
-            </a:gs>
-            <a:gs pos="100000">
-              <a:schemeClr val="phClr">
-                <a:shade val="63000"/>
-                <a:satMod val="120000"/>
-              </a:schemeClr>
-            </a:gs>
-          </a:gsLst>
-          <a:lin ang="5400000" scaled="0"/>
-        </a:gradFill>
-      </a:bgFillStyleLst>
-    </a:fmtScheme>
-  </a:themeElements>
-  <a:objectDefaults/>
-  <a:extraClrSchemeLst/>
-  <a:extLst>
-    <a:ext uri="{05A4C25C-085E-4340-85A3-A5531E510DB2}">
-      <thm15:themeFamily xmlns:thm15="http://schemas.microsoft.com/office/thememl/2012/main" name="Office Theme" id="{62F939B6-93AF-4DB8-9C6B-D6C7DFDC589F}" vid="{4A3C46E8-61CC-4603-A589-7422A47A8E4A}"/>
-    </a:ext>
-  </a:extLst>
-</a:theme>
 </file>
--- a/docs/decks/L11.pptx
+++ b/docs/decks/L11.pptx
@@ -3432,7 +3432,7 @@
                 <a:ea typeface="Courier New" pitchFamily="34" charset="-122"/>
                 <a:cs typeface="Courier New" pitchFamily="34" charset="-120"/>
               </a:rPr>
-              <a:t>ТИЖДЕНЬ 6 · УРОК 11 З 12</a:t>
+              <a:t>ТИЖДЕНЬ 6 · ТЕМА 11 З 12</a:t>
             </a:r>
             <a:endParaRPr lang="en-US" sz="1200" dirty="0"/>
           </a:p>
@@ -3536,7 +3536,7 @@
                 <a:ea typeface="Montserrat" pitchFamily="34" charset="-122"/>
                 <a:cs typeface="Montserrat" pitchFamily="34" charset="-120"/>
               </a:rPr>
-              <a:t>Зміна промпта — це реліз, повторюємо ми з другого уроку. Сьогодні вона нарешті проходить релізний процес: eval-гейт на кожен PR, який фізично не пускає регресію в main.</a:t>
+              <a:t>Зміна промпта — це реліз, повторюємо ми з другої теми. Сьогодні вона нарешті проходить релізний процес: eval-гейт на кожен PR, який фізично не пускає регресію в main.</a:t>
             </a:r>
             <a:endParaRPr lang="en-US" sz="1500" dirty="0"/>
           </a:p>
@@ -4047,7 +4047,7 @@
                 <a:ea typeface="Unbounded" pitchFamily="34" charset="-122"/>
                 <a:cs typeface="Unbounded" pitchFamily="34" charset="-120"/>
               </a:rPr>
-              <a:t>CI — це інше середовище, і воно вас здивує</a:t>
+              <a:t>CI — це інше середовище, і воно Вас здивує</a:t>
             </a:r>
             <a:endParaRPr lang="en-US" sz="2400" dirty="0"/>
           </a:p>
@@ -6574,7 +6574,7 @@
                 <a:ea typeface="Montserrat" pitchFamily="34" charset="-122"/>
                 <a:cs typeface="Montserrat" pitchFamily="34" charset="-120"/>
               </a:rPr>
-              <a:t>активація попередньої версії — секунди, без деплою (урок 2)</a:t>
+              <a:t>активація попередньої версії — секунди, без деплою (Тема 2)</a:t>
             </a:r>
             <a:endParaRPr lang="en-US" sz="1200" dirty="0"/>
           </a:p>
@@ -8093,7 +8093,7 @@
                           <a:ea typeface="Montserrat" pitchFamily="34" charset="-122"/>
                           <a:cs typeface="Montserrat" pitchFamily="34" charset="-120"/>
                         </a:rPr>
-                        <a:t>інакше cost_usd тихо стає null, і облік бреше (урок 4)</a:t>
+                        <a:t>інакше cost_usd тихо стає null, і облік бреше (Тема 4)</a:t>
                       </a:r>
                       <a:endParaRPr lang="en-US" sz="1150" dirty="0">
                         <a:latin typeface="Montserrat" charset="0"/>
@@ -8231,7 +8231,7 @@
                           <a:ea typeface="Montserrat" pitchFamily="34" charset="-122"/>
                           <a:cs typeface="Montserrat" pitchFamily="34" charset="-120"/>
                         </a:rPr>
-                        <a:t>«регресія без коміта» від оновлення провайдера (урок 3)</a:t>
+                        <a:t>«регресія без коміта» від оновлення провайдера (Тема 3)</a:t>
                       </a:r>
                       <a:endParaRPr lang="en-US" sz="1150" dirty="0">
                         <a:latin typeface="Montserrat" charset="0"/>
@@ -9228,7 +9228,7 @@
                 <a:ea typeface="Montserrat" pitchFamily="34" charset="-122"/>
                 <a:cs typeface="Montserrat" pitchFamily="34" charset="-120"/>
               </a:rPr>
-              <a:t>routing (урок 3) + реєстр версій (урок 2) + лог (урок 1) — усе вже є</a:t>
+              <a:t>routing (Тема 3) + реєстр версій (Тема 2) + лог (Тема 1) — усе вже є</a:t>
             </a:r>
             <a:endParaRPr lang="en-US" sz="1200" dirty="0"/>
           </a:p>
@@ -10770,7 +10770,7 @@
                 <a:ea typeface="Unbounded" pitchFamily="34" charset="-122"/>
                 <a:cs typeface="Unbounded" pitchFamily="34" charset="-120"/>
               </a:rPr>
-              <a:t>Зараз ви побачите — і навіщо</a:t>
+              <a:t>Зараз Ви побачите — і навіщо</a:t>
             </a:r>
             <a:endParaRPr lang="en-US" sz="2400" dirty="0"/>
           </a:p>
@@ -11665,7 +11665,7 @@
                 <a:ea typeface="Montserrat" pitchFamily="34" charset="-122"/>
                 <a:cs typeface="Montserrat" pitchFamily="34" charset="-120"/>
               </a:rPr>
-              <a:t>Побачити, як якість перестає залежати від дисципліни: перевірка, яку ви вміли робити руками, стає умовою мержу — і працює без вас.</a:t>
+              <a:t>Побачити, як якість перестає залежати від дисципліни: перевірка, яку Ви вміли робити руками, стає умовою мержу — і працює без Вас.</a:t>
             </a:r>
             <a:endParaRPr lang="en-US" sz="1300" dirty="0"/>
           </a:p>
@@ -12578,7 +12578,7 @@
                 <a:ea typeface="Unbounded" pitchFamily="34" charset="-122"/>
                 <a:cs typeface="Unbounded" pitchFamily="34" charset="-120"/>
               </a:rPr>
-              <a:t>Що ви зможете після уроку</a:t>
+              <a:t>Що Ви зможете після теми</a:t>
             </a:r>
             <a:endParaRPr lang="en-US" sz="2400" dirty="0"/>
           </a:p>
@@ -14264,7 +14264,7 @@
                 <a:ea typeface="Montserrat" pitchFamily="34" charset="-122"/>
                 <a:cs typeface="Montserrat" pitchFamily="34" charset="-120"/>
               </a:rPr>
-              <a:t>Контур замкнувся: зміна проходить перевірку, перевірка блокує регресію, відкат описаний. Лишилося зібрати це в operating model — останній урок.</a:t>
+              <a:t>Контур замкнувся: зміна проходить перевірку, перевірка блокує регресію, відкат описаний. Лишилося зібрати це в operating model — остання тема.</a:t>
             </a:r>
             <a:endParaRPr lang="en-US" sz="1300" dirty="0"/>
           </a:p>
@@ -16476,7 +16476,7 @@
                 <a:ea typeface="Montserrat" pitchFamily="34" charset="-122"/>
                 <a:cs typeface="Montserrat" pitchFamily="34" charset="-120"/>
               </a:rPr>
-              <a:t>ДЗ тижня 6 — після наступного уроку</a:t>
+              <a:t>ДЗ тижня 6 — після наступної теми</a:t>
             </a:r>
             <a:endParaRPr lang="en-US" sz="1500" dirty="0"/>
           </a:p>
@@ -16666,7 +16666,7 @@
                 <a:ea typeface="Courier New" pitchFamily="34" charset="-122"/>
                 <a:cs typeface="Courier New" pitchFamily="34" charset="-120"/>
               </a:rPr>
-              <a:t>ПІДСУМОК УРОКУ 11</a:t>
+              <a:t>ПІДСУМОК ТЕМИ 11</a:t>
             </a:r>
             <a:endParaRPr lang="en-US" sz="1100" dirty="0"/>
           </a:p>
@@ -16790,7 +16790,7 @@
                 <a:ea typeface="Montserrat" pitchFamily="34" charset="-122"/>
                 <a:cs typeface="Montserrat" pitchFamily="34" charset="-120"/>
               </a:rPr>
-              <a:t>гейт = ваш eval + exit code + CI; нового коду майже немає</a:t>
+              <a:t>гейт = Ваш eval + exit code + CI; нового коду майже немає</a:t>
             </a:r>
             <a:endParaRPr lang="en-US" sz="1500" dirty="0"/>
           </a:p>
@@ -17042,7 +17042,7 @@
                 <a:ea typeface="Montserrat" pitchFamily="34" charset="-122"/>
                 <a:cs typeface="Montserrat" pitchFamily="34" charset="-120"/>
               </a:rPr>
-              <a:t>Наступний крок → Урок 12 · Фінал: LLMOps operating model</a:t>
+              <a:t>Наступний крок → Тема 12 · Фінал: LLMOps operating model</a:t>
             </a:r>
             <a:endParaRPr lang="en-US" sz="1500" dirty="0"/>
           </a:p>
@@ -17084,7 +17084,7 @@
                 <a:ea typeface="Montserrat" pitchFamily="34" charset="-122"/>
                 <a:cs typeface="Montserrat" pitchFamily="34" charset="-120"/>
               </a:rPr>
-              <a:t>Механізми зібрані й захищені гейтом. Останній урок — про те, як це живе далі: цикл роботи з якістю, розбір інциденту за рунбуком, KPI, які показують керівництву, і чесний план перенесення практик у свою команду.</a:t>
+              <a:t>Механізми зібрані й захищені гейтом. Остання тема — про те, як це живе далі: цикл роботи з якістю, розбір інциденту за рунбуком, KPI, які показують керівництву, і чесний план перенесення практик у свою команду.</a:t>
             </a:r>
             <a:endParaRPr lang="en-US" sz="1250" dirty="0"/>
           </a:p>
@@ -18928,7 +18928,7 @@
                 <a:ea typeface="Montserrat" pitchFamily="34" charset="-122"/>
                 <a:cs typeface="Montserrat" pitchFamily="34" charset="-120"/>
               </a:rPr>
-              <a:t>Шість слів сьогоднішнього уроку</a:t>
+              <a:t>Шість слів сьогоднішньої теми</a:t>
             </a:r>
             <a:endParaRPr lang="en-US" sz="1300" dirty="0"/>
           </a:p>
@@ -20750,7 +20750,7 @@
                 <a:ea typeface="Unbounded" pitchFamily="34" charset="-122"/>
                 <a:cs typeface="Unbounded" pitchFamily="34" charset="-120"/>
               </a:rPr>
-              <a:t>Гейт = ваш eval + exit code + CI</a:t>
+              <a:t>Гейт = Ваш eval + exit code + CI</a:t>
             </a:r>
             <a:endParaRPr lang="en-US" sz="2400" dirty="0"/>
           </a:p>
@@ -21420,7 +21420,7 @@
                 <a:ea typeface="Montserrat" pitchFamily="34" charset="-122"/>
                 <a:cs typeface="Montserrat" pitchFamily="34" charset="-120"/>
               </a:rPr>
-              <a:t>run.py повертає 0/1 (урок 10), стек — одна команда (урок 1), поріг обраний і обґрунтований</a:t>
+              <a:t>run.py повертає 0/1 (Тема 10), стек — одна команда (Тема 1), поріг обраний і обґрунтований</a:t>
             </a:r>
             <a:endParaRPr lang="en-US" sz="1200" dirty="0"/>
           </a:p>
@@ -21592,7 +21592,7 @@
                 <a:ea typeface="Montserrat" pitchFamily="34" charset="-122"/>
                 <a:cs typeface="Montserrat" pitchFamily="34" charset="-120"/>
               </a:rPr>
-              <a:t>CI лише виконує у чистому середовищі те, що ви вже вміли робити руками. Нового коду майже немає — з'являється невідворотність.</a:t>
+              <a:t>CI лише виконує у чистому середовищі те, що Ви вже вміли робити руками. Нового коду майже немає — з'являється невідворотність.</a:t>
             </a:r>
             <a:endParaRPr lang="en-US" sz="1300" dirty="0"/>
           </a:p>
@@ -21955,7 +21955,7 @@
                 <a:ea typeface="Montserrat" pitchFamily="34" charset="-122"/>
                 <a:cs typeface="Montserrat" pitchFamily="34" charset="-120"/>
               </a:rPr>
-              <a:t>у репозиторії, де живе ваш main</a:t>
+              <a:t>у репозиторії, де живе Ваш main</a:t>
             </a:r>
             <a:endParaRPr lang="en-US" sz="1150" dirty="0"/>
           </a:p>

--- a/docs/decks/L11.pptx
+++ b/docs/decks/L11.pptx
@@ -4357,15 +4357,97 @@
         </p:nvSpPr>
         <p:spPr>
           <a:xfrm>
-            <a:off x="566928" y="3749040"/>
-            <a:ext cx="11064240" cy="1097280"/>
+            <a:off x="566928" y="3703320"/>
+            <a:ext cx="1463040" cy="512064"/>
           </a:xfrm>
           <a:prstGeom prst="roundRect">
             <a:avLst>
-              <a:gd name="adj" fmla="val 10000"/>
+              <a:gd name="adj" fmla="val 17857"/>
             </a:avLst>
           </a:prstGeom>
           <a:solidFill>
+            <a:srgbClr val="000000"/>
+          </a:solidFill>
+          <a:ln/>
+        </p:spPr>
+      </p:sp>
+      <p:sp>
+        <p:nvSpPr>
+          <p:cNvPr id="15" name="Text 12"/>
+          <p:cNvSpPr/>
+          <p:nvPr/>
+        </p:nvSpPr>
+        <p:spPr>
+          <a:xfrm>
+            <a:off x="621792" y="3703320"/>
+            <a:ext cx="1353312" cy="512064"/>
+          </a:xfrm>
+          <a:prstGeom prst="rect">
+            <a:avLst/>
+          </a:prstGeom>
+          <a:noFill/>
+          <a:ln/>
+        </p:spPr>
+        <p:txBody>
+          <a:bodyPr wrap="square" lIns="0" tIns="0" rIns="0" bIns="0" rtlCol="0" anchor="ctr"/>
+          <a:lstStyle/>
+          <a:p>
+            <a:pPr algn="ctr" indent="0" marL="0">
+              <a:buNone/>
+            </a:pPr>
+            <a:r>
+              <a:rPr lang="en-US" sz="1000" dirty="0">
+                <a:solidFill>
+                  <a:srgbClr val="FFFFFF"/>
+                </a:solidFill>
+                <a:latin typeface="Courier New" pitchFamily="34" charset="0"/>
+                <a:ea typeface="Courier New" pitchFamily="34" charset="-122"/>
+                <a:cs typeface="Courier New" pitchFamily="34" charset="-120"/>
+              </a:rPr>
+              <a:t>up stack</a:t>
+            </a:r>
+            <a:endParaRPr lang="en-US" sz="1000" dirty="0"/>
+          </a:p>
+        </p:txBody>
+      </p:sp>
+      <p:sp>
+        <p:nvSpPr>
+          <p:cNvPr id="16" name="Shape 13"/>
+          <p:cNvSpPr/>
+          <p:nvPr/>
+        </p:nvSpPr>
+        <p:spPr>
+          <a:xfrm>
+            <a:off x="2121408" y="3959352"/>
+            <a:ext cx="164592" cy="0"/>
+          </a:xfrm>
+          <a:prstGeom prst="line">
+            <a:avLst/>
+          </a:prstGeom>
+          <a:noFill/>
+          <a:ln w="15875">
+            <a:solidFill>
+              <a:srgbClr val="5A05F4"/>
+            </a:solidFill>
+            <a:prstDash val="solid"/>
+          </a:ln>
+        </p:spPr>
+      </p:sp>
+      <p:sp>
+        <p:nvSpPr>
+          <p:cNvPr id="17" name="Shape 14"/>
+          <p:cNvSpPr/>
+          <p:nvPr/>
+        </p:nvSpPr>
+        <p:spPr>
+          <a:xfrm rot="5400000">
+            <a:off x="2249424" y="3890772"/>
+            <a:ext cx="146304" cy="137160"/>
+          </a:xfrm>
+          <a:prstGeom prst="triangle">
+            <a:avLst/>
+          </a:prstGeom>
+          <a:solidFill>
             <a:srgbClr val="5A05F4"/>
           </a:solidFill>
           <a:ln/>
@@ -4373,14 +4455,591 @@
       </p:sp>
       <p:sp>
         <p:nvSpPr>
-          <p:cNvPr id="15" name="Text 12"/>
-          <p:cNvSpPr/>
-          <p:nvPr/>
-        </p:nvSpPr>
-        <p:spPr>
-          <a:xfrm>
-            <a:off x="786384" y="3895344"/>
-            <a:ext cx="10625328" cy="804672"/>
+          <p:cNvPr id="18" name="Shape 15"/>
+          <p:cNvSpPr/>
+          <p:nvPr/>
+        </p:nvSpPr>
+        <p:spPr>
+          <a:xfrm>
+            <a:off x="2487168" y="3703320"/>
+            <a:ext cx="1463040" cy="512064"/>
+          </a:xfrm>
+          <a:prstGeom prst="roundRect">
+            <a:avLst>
+              <a:gd name="adj" fmla="val 17857"/>
+            </a:avLst>
+          </a:prstGeom>
+          <a:solidFill>
+            <a:srgbClr val="000000"/>
+          </a:solidFill>
+          <a:ln/>
+        </p:spPr>
+      </p:sp>
+      <p:sp>
+        <p:nvSpPr>
+          <p:cNvPr id="19" name="Text 16"/>
+          <p:cNvSpPr/>
+          <p:nvPr/>
+        </p:nvSpPr>
+        <p:spPr>
+          <a:xfrm>
+            <a:off x="2542032" y="3703320"/>
+            <a:ext cx="1353312" cy="512064"/>
+          </a:xfrm>
+          <a:prstGeom prst="rect">
+            <a:avLst/>
+          </a:prstGeom>
+          <a:noFill/>
+          <a:ln/>
+        </p:spPr>
+        <p:txBody>
+          <a:bodyPr wrap="square" lIns="0" tIns="0" rIns="0" bIns="0" rtlCol="0" anchor="ctr"/>
+          <a:lstStyle/>
+          <a:p>
+            <a:pPr algn="ctr" indent="0" marL="0">
+              <a:buNone/>
+            </a:pPr>
+            <a:r>
+              <a:rPr lang="en-US" sz="1000" b="1" dirty="0">
+                <a:solidFill>
+                  <a:srgbClr val="FF6B6B"/>
+                </a:solidFill>
+                <a:latin typeface="Courier New" pitchFamily="34" charset="0"/>
+                <a:ea typeface="Courier New" pitchFamily="34" charset="-122"/>
+                <a:cs typeface="Courier New" pitchFamily="34" charset="-120"/>
+              </a:rPr>
+              <a:t>wait service</a:t>
+            </a:r>
+            <a:endParaRPr lang="en-US" sz="1000" dirty="0"/>
+          </a:p>
+        </p:txBody>
+      </p:sp>
+      <p:sp>
+        <p:nvSpPr>
+          <p:cNvPr id="20" name="Text 17"/>
+          <p:cNvSpPr/>
+          <p:nvPr/>
+        </p:nvSpPr>
+        <p:spPr>
+          <a:xfrm>
+            <a:off x="2487168" y="4251960"/>
+            <a:ext cx="1463040" cy="274320"/>
+          </a:xfrm>
+          <a:prstGeom prst="rect">
+            <a:avLst/>
+          </a:prstGeom>
+          <a:noFill/>
+          <a:ln/>
+        </p:spPr>
+        <p:txBody>
+          <a:bodyPr wrap="square" lIns="0" tIns="0" rIns="0" bIns="0" rtlCol="0" anchor="ctr"/>
+          <a:lstStyle/>
+          <a:p>
+            <a:pPr algn="ctr" indent="0" marL="0">
+              <a:buNone/>
+            </a:pPr>
+            <a:r>
+              <a:rPr lang="en-US" sz="1000" dirty="0">
+                <a:solidFill>
+                  <a:srgbClr val="6B6B6B"/>
+                </a:solidFill>
+                <a:latin typeface="Montserrat" pitchFamily="34" charset="0"/>
+                <a:ea typeface="Montserrat" pitchFamily="34" charset="-122"/>
+                <a:cs typeface="Montserrat" pitchFamily="34" charset="-120"/>
+              </a:rPr>
+              <a:t>цикл замість bash -e</a:t>
+            </a:r>
+            <a:endParaRPr lang="en-US" sz="1000" dirty="0"/>
+          </a:p>
+        </p:txBody>
+      </p:sp>
+      <p:sp>
+        <p:nvSpPr>
+          <p:cNvPr id="21" name="Shape 18"/>
+          <p:cNvSpPr/>
+          <p:nvPr/>
+        </p:nvSpPr>
+        <p:spPr>
+          <a:xfrm>
+            <a:off x="4041648" y="3959352"/>
+            <a:ext cx="164592" cy="0"/>
+          </a:xfrm>
+          <a:prstGeom prst="line">
+            <a:avLst/>
+          </a:prstGeom>
+          <a:noFill/>
+          <a:ln w="15875">
+            <a:solidFill>
+              <a:srgbClr val="5A05F4"/>
+            </a:solidFill>
+            <a:prstDash val="solid"/>
+          </a:ln>
+        </p:spPr>
+      </p:sp>
+      <p:sp>
+        <p:nvSpPr>
+          <p:cNvPr id="22" name="Shape 19"/>
+          <p:cNvSpPr/>
+          <p:nvPr/>
+        </p:nvSpPr>
+        <p:spPr>
+          <a:xfrm rot="5400000">
+            <a:off x="4169664" y="3890772"/>
+            <a:ext cx="146304" cy="137160"/>
+          </a:xfrm>
+          <a:prstGeom prst="triangle">
+            <a:avLst/>
+          </a:prstGeom>
+          <a:solidFill>
+            <a:srgbClr val="5A05F4"/>
+          </a:solidFill>
+          <a:ln/>
+        </p:spPr>
+      </p:sp>
+      <p:sp>
+        <p:nvSpPr>
+          <p:cNvPr id="23" name="Shape 20"/>
+          <p:cNvSpPr/>
+          <p:nvPr/>
+        </p:nvSpPr>
+        <p:spPr>
+          <a:xfrm>
+            <a:off x="4407408" y="3703320"/>
+            <a:ext cx="1463040" cy="512064"/>
+          </a:xfrm>
+          <a:prstGeom prst="roundRect">
+            <a:avLst>
+              <a:gd name="adj" fmla="val 17857"/>
+            </a:avLst>
+          </a:prstGeom>
+          <a:solidFill>
+            <a:srgbClr val="000000"/>
+          </a:solidFill>
+          <a:ln/>
+        </p:spPr>
+      </p:sp>
+      <p:sp>
+        <p:nvSpPr>
+          <p:cNvPr id="24" name="Text 21"/>
+          <p:cNvSpPr/>
+          <p:nvPr/>
+        </p:nvSpPr>
+        <p:spPr>
+          <a:xfrm>
+            <a:off x="4462272" y="3703320"/>
+            <a:ext cx="1353312" cy="512064"/>
+          </a:xfrm>
+          <a:prstGeom prst="rect">
+            <a:avLst/>
+          </a:prstGeom>
+          <a:noFill/>
+          <a:ln/>
+        </p:spPr>
+        <p:txBody>
+          <a:bodyPr wrap="square" lIns="0" tIns="0" rIns="0" bIns="0" rtlCol="0" anchor="ctr"/>
+          <a:lstStyle/>
+          <a:p>
+            <a:pPr algn="ctr" indent="0" marL="0">
+              <a:buNone/>
+            </a:pPr>
+            <a:r>
+              <a:rPr lang="en-US" sz="1000" b="1" dirty="0">
+                <a:solidFill>
+                  <a:srgbClr val="FF6B6B"/>
+                </a:solidFill>
+                <a:latin typeface="Courier New" pitchFamily="34" charset="0"/>
+                <a:ea typeface="Courier New" pitchFamily="34" charset="-122"/>
+                <a:cs typeface="Courier New" pitchFamily="34" charset="-120"/>
+              </a:rPr>
+              <a:t>wait gateway</a:t>
+            </a:r>
+            <a:endParaRPr lang="en-US" sz="1000" dirty="0"/>
+          </a:p>
+        </p:txBody>
+      </p:sp>
+      <p:sp>
+        <p:nvSpPr>
+          <p:cNvPr id="25" name="Text 22"/>
+          <p:cNvSpPr/>
+          <p:nvPr/>
+        </p:nvSpPr>
+        <p:spPr>
+          <a:xfrm>
+            <a:off x="4407408" y="4251960"/>
+            <a:ext cx="1463040" cy="274320"/>
+          </a:xfrm>
+          <a:prstGeom prst="rect">
+            <a:avLst/>
+          </a:prstGeom>
+          <a:noFill/>
+          <a:ln/>
+        </p:spPr>
+        <p:txBody>
+          <a:bodyPr wrap="square" lIns="0" tIns="0" rIns="0" bIns="0" rtlCol="0" anchor="ctr"/>
+          <a:lstStyle/>
+          <a:p>
+            <a:pPr algn="ctr" indent="0" marL="0">
+              <a:buNone/>
+            </a:pPr>
+            <a:r>
+              <a:rPr lang="en-US" sz="1000" dirty="0">
+                <a:solidFill>
+                  <a:srgbClr val="6B6B6B"/>
+                </a:solidFill>
+                <a:latin typeface="Montserrat" pitchFamily="34" charset="0"/>
+                <a:ea typeface="Montserrat" pitchFamily="34" charset="-122"/>
+                <a:cs typeface="Montserrat" pitchFamily="34" charset="-120"/>
+              </a:rPr>
+              <a:t>холодний старт</a:t>
+            </a:r>
+            <a:endParaRPr lang="en-US" sz="1000" dirty="0"/>
+          </a:p>
+        </p:txBody>
+      </p:sp>
+      <p:sp>
+        <p:nvSpPr>
+          <p:cNvPr id="26" name="Shape 23"/>
+          <p:cNvSpPr/>
+          <p:nvPr/>
+        </p:nvSpPr>
+        <p:spPr>
+          <a:xfrm>
+            <a:off x="5961888" y="3959352"/>
+            <a:ext cx="164592" cy="0"/>
+          </a:xfrm>
+          <a:prstGeom prst="line">
+            <a:avLst/>
+          </a:prstGeom>
+          <a:noFill/>
+          <a:ln w="15875">
+            <a:solidFill>
+              <a:srgbClr val="5A05F4"/>
+            </a:solidFill>
+            <a:prstDash val="solid"/>
+          </a:ln>
+        </p:spPr>
+      </p:sp>
+      <p:sp>
+        <p:nvSpPr>
+          <p:cNvPr id="27" name="Shape 24"/>
+          <p:cNvSpPr/>
+          <p:nvPr/>
+        </p:nvSpPr>
+        <p:spPr>
+          <a:xfrm rot="5400000">
+            <a:off x="6089904" y="3890772"/>
+            <a:ext cx="146304" cy="137160"/>
+          </a:xfrm>
+          <a:prstGeom prst="triangle">
+            <a:avLst/>
+          </a:prstGeom>
+          <a:solidFill>
+            <a:srgbClr val="5A05F4"/>
+          </a:solidFill>
+          <a:ln/>
+        </p:spPr>
+      </p:sp>
+      <p:sp>
+        <p:nvSpPr>
+          <p:cNvPr id="28" name="Shape 25"/>
+          <p:cNvSpPr/>
+          <p:nvPr/>
+        </p:nvSpPr>
+        <p:spPr>
+          <a:xfrm>
+            <a:off x="6327648" y="3703320"/>
+            <a:ext cx="1463040" cy="512064"/>
+          </a:xfrm>
+          <a:prstGeom prst="roundRect">
+            <a:avLst>
+              <a:gd name="adj" fmla="val 17857"/>
+            </a:avLst>
+          </a:prstGeom>
+          <a:solidFill>
+            <a:srgbClr val="000000"/>
+          </a:solidFill>
+          <a:ln/>
+        </p:spPr>
+      </p:sp>
+      <p:sp>
+        <p:nvSpPr>
+          <p:cNvPr id="29" name="Text 26"/>
+          <p:cNvSpPr/>
+          <p:nvPr/>
+        </p:nvSpPr>
+        <p:spPr>
+          <a:xfrm>
+            <a:off x="6382512" y="3703320"/>
+            <a:ext cx="1353312" cy="512064"/>
+          </a:xfrm>
+          <a:prstGeom prst="rect">
+            <a:avLst/>
+          </a:prstGeom>
+          <a:noFill/>
+          <a:ln/>
+        </p:spPr>
+        <p:txBody>
+          <a:bodyPr wrap="square" lIns="0" tIns="0" rIns="0" bIns="0" rtlCol="0" anchor="ctr"/>
+          <a:lstStyle/>
+          <a:p>
+            <a:pPr algn="ctr" indent="0" marL="0">
+              <a:buNone/>
+            </a:pPr>
+            <a:r>
+              <a:rPr lang="en-US" sz="1000" b="1" dirty="0">
+                <a:solidFill>
+                  <a:srgbClr val="A98BFF"/>
+                </a:solidFill>
+                <a:latin typeface="Courier New" pitchFamily="34" charset="0"/>
+                <a:ea typeface="Courier New" pitchFamily="34" charset="-122"/>
+                <a:cs typeface="Courier New" pitchFamily="34" charset="-120"/>
+              </a:rPr>
+              <a:t>evals</a:t>
+            </a:r>
+            <a:endParaRPr lang="en-US" sz="1000" dirty="0"/>
+          </a:p>
+        </p:txBody>
+      </p:sp>
+      <p:sp>
+        <p:nvSpPr>
+          <p:cNvPr id="30" name="Shape 27"/>
+          <p:cNvSpPr/>
+          <p:nvPr/>
+        </p:nvSpPr>
+        <p:spPr>
+          <a:xfrm>
+            <a:off x="7882128" y="3959352"/>
+            <a:ext cx="164592" cy="0"/>
+          </a:xfrm>
+          <a:prstGeom prst="line">
+            <a:avLst/>
+          </a:prstGeom>
+          <a:noFill/>
+          <a:ln w="15875">
+            <a:solidFill>
+              <a:srgbClr val="5A05F4"/>
+            </a:solidFill>
+            <a:prstDash val="solid"/>
+          </a:ln>
+        </p:spPr>
+      </p:sp>
+      <p:sp>
+        <p:nvSpPr>
+          <p:cNvPr id="31" name="Shape 28"/>
+          <p:cNvSpPr/>
+          <p:nvPr/>
+        </p:nvSpPr>
+        <p:spPr>
+          <a:xfrm rot="5400000">
+            <a:off x="8010144" y="3890772"/>
+            <a:ext cx="146304" cy="137160"/>
+          </a:xfrm>
+          <a:prstGeom prst="triangle">
+            <a:avLst/>
+          </a:prstGeom>
+          <a:solidFill>
+            <a:srgbClr val="5A05F4"/>
+          </a:solidFill>
+          <a:ln/>
+        </p:spPr>
+      </p:sp>
+      <p:sp>
+        <p:nvSpPr>
+          <p:cNvPr id="32" name="Shape 29"/>
+          <p:cNvSpPr/>
+          <p:nvPr/>
+        </p:nvSpPr>
+        <p:spPr>
+          <a:xfrm>
+            <a:off x="8247888" y="3703320"/>
+            <a:ext cx="1463040" cy="512064"/>
+          </a:xfrm>
+          <a:prstGeom prst="roundRect">
+            <a:avLst>
+              <a:gd name="adj" fmla="val 17857"/>
+            </a:avLst>
+          </a:prstGeom>
+          <a:solidFill>
+            <a:srgbClr val="000000"/>
+          </a:solidFill>
+          <a:ln/>
+        </p:spPr>
+      </p:sp>
+      <p:sp>
+        <p:nvSpPr>
+          <p:cNvPr id="33" name="Text 30"/>
+          <p:cNvSpPr/>
+          <p:nvPr/>
+        </p:nvSpPr>
+        <p:spPr>
+          <a:xfrm>
+            <a:off x="8302752" y="3703320"/>
+            <a:ext cx="1353312" cy="512064"/>
+          </a:xfrm>
+          <a:prstGeom prst="rect">
+            <a:avLst/>
+          </a:prstGeom>
+          <a:noFill/>
+          <a:ln/>
+        </p:spPr>
+        <p:txBody>
+          <a:bodyPr wrap="square" lIns="0" tIns="0" rIns="0" bIns="0" rtlCol="0" anchor="ctr"/>
+          <a:lstStyle/>
+          <a:p>
+            <a:pPr algn="ctr" indent="0" marL="0">
+              <a:buNone/>
+            </a:pPr>
+            <a:r>
+              <a:rPr lang="en-US" sz="1000" b="1" dirty="0">
+                <a:solidFill>
+                  <a:srgbClr val="6BA0F8"/>
+                </a:solidFill>
+                <a:latin typeface="Courier New" pitchFamily="34" charset="0"/>
+                <a:ea typeface="Courier New" pitchFamily="34" charset="-122"/>
+                <a:cs typeface="Courier New" pitchFamily="34" charset="-120"/>
+              </a:rPr>
+              <a:t>logs on failure</a:t>
+            </a:r>
+            <a:endParaRPr lang="en-US" sz="1000" dirty="0"/>
+          </a:p>
+        </p:txBody>
+      </p:sp>
+      <p:sp>
+        <p:nvSpPr>
+          <p:cNvPr id="34" name="Shape 31"/>
+          <p:cNvSpPr/>
+          <p:nvPr/>
+        </p:nvSpPr>
+        <p:spPr>
+          <a:xfrm>
+            <a:off x="9802368" y="3959352"/>
+            <a:ext cx="164592" cy="0"/>
+          </a:xfrm>
+          <a:prstGeom prst="line">
+            <a:avLst/>
+          </a:prstGeom>
+          <a:noFill/>
+          <a:ln w="15875">
+            <a:solidFill>
+              <a:srgbClr val="5A05F4"/>
+            </a:solidFill>
+            <a:prstDash val="solid"/>
+          </a:ln>
+        </p:spPr>
+      </p:sp>
+      <p:sp>
+        <p:nvSpPr>
+          <p:cNvPr id="35" name="Shape 32"/>
+          <p:cNvSpPr/>
+          <p:nvPr/>
+        </p:nvSpPr>
+        <p:spPr>
+          <a:xfrm rot="5400000">
+            <a:off x="9930384" y="3890772"/>
+            <a:ext cx="146304" cy="137160"/>
+          </a:xfrm>
+          <a:prstGeom prst="triangle">
+            <a:avLst/>
+          </a:prstGeom>
+          <a:solidFill>
+            <a:srgbClr val="5A05F4"/>
+          </a:solidFill>
+          <a:ln/>
+        </p:spPr>
+      </p:sp>
+      <p:sp>
+        <p:nvSpPr>
+          <p:cNvPr id="36" name="Shape 33"/>
+          <p:cNvSpPr/>
+          <p:nvPr/>
+        </p:nvSpPr>
+        <p:spPr>
+          <a:xfrm>
+            <a:off x="10168128" y="3703320"/>
+            <a:ext cx="1463040" cy="512064"/>
+          </a:xfrm>
+          <a:prstGeom prst="roundRect">
+            <a:avLst>
+              <a:gd name="adj" fmla="val 17857"/>
+            </a:avLst>
+          </a:prstGeom>
+          <a:solidFill>
+            <a:srgbClr val="000000"/>
+          </a:solidFill>
+          <a:ln/>
+        </p:spPr>
+      </p:sp>
+      <p:sp>
+        <p:nvSpPr>
+          <p:cNvPr id="37" name="Text 34"/>
+          <p:cNvSpPr/>
+          <p:nvPr/>
+        </p:nvSpPr>
+        <p:spPr>
+          <a:xfrm>
+            <a:off x="10222992" y="3703320"/>
+            <a:ext cx="1353312" cy="512064"/>
+          </a:xfrm>
+          <a:prstGeom prst="rect">
+            <a:avLst/>
+          </a:prstGeom>
+          <a:noFill/>
+          <a:ln/>
+        </p:spPr>
+        <p:txBody>
+          <a:bodyPr wrap="square" lIns="0" tIns="0" rIns="0" bIns="0" rtlCol="0" anchor="ctr"/>
+          <a:lstStyle/>
+          <a:p>
+            <a:pPr algn="ctr" indent="0" marL="0">
+              <a:buNone/>
+            </a:pPr>
+            <a:r>
+              <a:rPr lang="en-US" sz="1000" b="1" dirty="0">
+                <a:solidFill>
+                  <a:srgbClr val="3FCF8E"/>
+                </a:solidFill>
+                <a:latin typeface="Courier New" pitchFamily="34" charset="0"/>
+                <a:ea typeface="Courier New" pitchFamily="34" charset="-122"/>
+                <a:cs typeface="Courier New" pitchFamily="34" charset="-120"/>
+              </a:rPr>
+              <a:t>down · always</a:t>
+            </a:r>
+            <a:endParaRPr lang="en-US" sz="1000" dirty="0"/>
+          </a:p>
+        </p:txBody>
+      </p:sp>
+      <p:sp>
+        <p:nvSpPr>
+          <p:cNvPr id="38" name="Shape 35"/>
+          <p:cNvSpPr/>
+          <p:nvPr/>
+        </p:nvSpPr>
+        <p:spPr>
+          <a:xfrm>
+            <a:off x="566928" y="4572000"/>
+            <a:ext cx="11064240" cy="640080"/>
+          </a:xfrm>
+          <a:prstGeom prst="roundRect">
+            <a:avLst>
+              <a:gd name="adj" fmla="val 17143"/>
+            </a:avLst>
+          </a:prstGeom>
+          <a:solidFill>
+            <a:srgbClr val="5A05F4"/>
+          </a:solidFill>
+          <a:ln/>
+        </p:spPr>
+      </p:sp>
+      <p:sp>
+        <p:nvSpPr>
+          <p:cNvPr id="39" name="Text 36"/>
+          <p:cNvSpPr/>
+          <p:nvPr/>
+        </p:nvSpPr>
+        <p:spPr>
+          <a:xfrm>
+            <a:off x="786384" y="4718304"/>
+            <a:ext cx="10625328" cy="347472"/>
           </a:xfrm>
           <a:prstGeom prst="rect">
             <a:avLst/>
@@ -4415,18 +5074,18 @@
       </p:sp>
       <p:sp>
         <p:nvSpPr>
-          <p:cNvPr id="16" name="Shape 13"/>
-          <p:cNvSpPr/>
-          <p:nvPr/>
-        </p:nvSpPr>
-        <p:spPr>
-          <a:xfrm>
-            <a:off x="566928" y="4983480"/>
-            <a:ext cx="11064240" cy="868680"/>
+          <p:cNvPr id="40" name="Shape 37"/>
+          <p:cNvSpPr/>
+          <p:nvPr/>
+        </p:nvSpPr>
+        <p:spPr>
+          <a:xfrm>
+            <a:off x="566928" y="5349240"/>
+            <a:ext cx="11064240" cy="777240"/>
           </a:xfrm>
           <a:prstGeom prst="roundRect">
             <a:avLst>
-              <a:gd name="adj" fmla="val 12632"/>
+              <a:gd name="adj" fmla="val 14118"/>
             </a:avLst>
           </a:prstGeom>
           <a:solidFill>
@@ -4442,13 +5101,13 @@
       </p:sp>
       <p:sp>
         <p:nvSpPr>
-          <p:cNvPr id="17" name="Shape 14"/>
-          <p:cNvSpPr/>
-          <p:nvPr/>
-        </p:nvSpPr>
-        <p:spPr>
-          <a:xfrm>
-            <a:off x="749808" y="5262372"/>
+          <p:cNvPr id="41" name="Shape 38"/>
+          <p:cNvSpPr/>
+          <p:nvPr/>
+        </p:nvSpPr>
+        <p:spPr>
+          <a:xfrm>
+            <a:off x="749808" y="5582412"/>
             <a:ext cx="310896" cy="310896"/>
           </a:xfrm>
           <a:prstGeom prst="ellipse">
@@ -4462,13 +5121,13 @@
       </p:sp>
       <p:sp>
         <p:nvSpPr>
-          <p:cNvPr id="18" name="Text 15"/>
-          <p:cNvSpPr/>
-          <p:nvPr/>
-        </p:nvSpPr>
-        <p:spPr>
-          <a:xfrm>
-            <a:off x="749808" y="5262372"/>
+          <p:cNvPr id="42" name="Text 39"/>
+          <p:cNvSpPr/>
+          <p:nvPr/>
+        </p:nvSpPr>
+        <p:spPr>
+          <a:xfrm>
+            <a:off x="749808" y="5582412"/>
             <a:ext cx="310896" cy="310896"/>
           </a:xfrm>
           <a:prstGeom prst="rect">
@@ -4501,13 +5160,13 @@
       </p:sp>
       <p:sp>
         <p:nvSpPr>
-          <p:cNvPr id="19" name="Text 16"/>
-          <p:cNvSpPr/>
-          <p:nvPr/>
-        </p:nvSpPr>
-        <p:spPr>
-          <a:xfrm>
-            <a:off x="1243584" y="5111496"/>
+          <p:cNvPr id="43" name="Text 40"/>
+          <p:cNvSpPr/>
+          <p:nvPr/>
+        </p:nvSpPr>
+        <p:spPr>
+          <a:xfrm>
+            <a:off x="1243584" y="5477256"/>
             <a:ext cx="10168128" cy="219456"/>
           </a:xfrm>
           <a:prstGeom prst="rect">
@@ -4540,14 +5199,14 @@
       </p:sp>
       <p:sp>
         <p:nvSpPr>
-          <p:cNvPr id="20" name="Text 17"/>
-          <p:cNvSpPr/>
-          <p:nvPr/>
-        </p:nvSpPr>
-        <p:spPr>
-          <a:xfrm>
-            <a:off x="1243584" y="5367528"/>
-            <a:ext cx="10168128" cy="356616"/>
+          <p:cNvPr id="44" name="Text 41"/>
+          <p:cNvSpPr/>
+          <p:nvPr/>
+        </p:nvSpPr>
+        <p:spPr>
+          <a:xfrm>
+            <a:off x="1243584" y="5733288"/>
+            <a:ext cx="10168128" cy="265176"/>
           </a:xfrm>
           <a:prstGeom prst="rect">
             <a:avLst/>
@@ -20360,15 +21019,97 @@
         </p:nvSpPr>
         <p:spPr>
           <a:xfrm>
-            <a:off x="566928" y="3657600"/>
-            <a:ext cx="11064240" cy="1097280"/>
+            <a:off x="566928" y="3611880"/>
+            <a:ext cx="2423160" cy="512064"/>
           </a:xfrm>
           <a:prstGeom prst="roundRect">
             <a:avLst>
-              <a:gd name="adj" fmla="val 10000"/>
+              <a:gd name="adj" fmla="val 17857"/>
             </a:avLst>
           </a:prstGeom>
           <a:solidFill>
+            <a:srgbClr val="000000"/>
+          </a:solidFill>
+          <a:ln/>
+        </p:spPr>
+      </p:sp>
+      <p:sp>
+        <p:nvSpPr>
+          <p:cNvPr id="15" name="Text 12"/>
+          <p:cNvSpPr/>
+          <p:nvPr/>
+        </p:nvSpPr>
+        <p:spPr>
+          <a:xfrm>
+            <a:off x="621792" y="3611880"/>
+            <a:ext cx="2313432" cy="512064"/>
+          </a:xfrm>
+          <a:prstGeom prst="rect">
+            <a:avLst/>
+          </a:prstGeom>
+          <a:noFill/>
+          <a:ln/>
+        </p:spPr>
+        <p:txBody>
+          <a:bodyPr wrap="square" lIns="0" tIns="0" rIns="0" bIns="0" rtlCol="0" anchor="ctr"/>
+          <a:lstStyle/>
+          <a:p>
+            <a:pPr algn="ctr" indent="0" marL="0">
+              <a:buNone/>
+            </a:pPr>
+            <a:r>
+              <a:rPr lang="en-US" sz="1050" dirty="0">
+                <a:solidFill>
+                  <a:srgbClr val="FFFFFF"/>
+                </a:solidFill>
+                <a:latin typeface="Courier New" pitchFamily="34" charset="0"/>
+                <a:ea typeface="Courier New" pitchFamily="34" charset="-122"/>
+                <a:cs typeface="Courier New" pitchFamily="34" charset="-120"/>
+              </a:rPr>
+              <a:t>PR: зміна промпта</a:t>
+            </a:r>
+            <a:endParaRPr lang="en-US" sz="1050" dirty="0"/>
+          </a:p>
+        </p:txBody>
+      </p:sp>
+      <p:sp>
+        <p:nvSpPr>
+          <p:cNvPr id="16" name="Shape 13"/>
+          <p:cNvSpPr/>
+          <p:nvPr/>
+        </p:nvSpPr>
+        <p:spPr>
+          <a:xfrm>
+            <a:off x="3081528" y="3867912"/>
+            <a:ext cx="164592" cy="0"/>
+          </a:xfrm>
+          <a:prstGeom prst="line">
+            <a:avLst/>
+          </a:prstGeom>
+          <a:noFill/>
+          <a:ln w="15875">
+            <a:solidFill>
+              <a:srgbClr val="5A05F4"/>
+            </a:solidFill>
+            <a:prstDash val="solid"/>
+          </a:ln>
+        </p:spPr>
+      </p:sp>
+      <p:sp>
+        <p:nvSpPr>
+          <p:cNvPr id="17" name="Shape 14"/>
+          <p:cNvSpPr/>
+          <p:nvPr/>
+        </p:nvSpPr>
+        <p:spPr>
+          <a:xfrm rot="5400000">
+            <a:off x="3209544" y="3799332"/>
+            <a:ext cx="146304" cy="137160"/>
+          </a:xfrm>
+          <a:prstGeom prst="triangle">
+            <a:avLst/>
+          </a:prstGeom>
+          <a:solidFill>
             <a:srgbClr val="5A05F4"/>
           </a:solidFill>
           <a:ln/>
@@ -20376,14 +21117,344 @@
       </p:sp>
       <p:sp>
         <p:nvSpPr>
-          <p:cNvPr id="15" name="Text 12"/>
-          <p:cNvSpPr/>
-          <p:nvPr/>
-        </p:nvSpPr>
-        <p:spPr>
-          <a:xfrm>
-            <a:off x="786384" y="3803904"/>
-            <a:ext cx="10625328" cy="804672"/>
+          <p:cNvPr id="18" name="Shape 15"/>
+          <p:cNvSpPr/>
+          <p:nvPr/>
+        </p:nvSpPr>
+        <p:spPr>
+          <a:xfrm>
+            <a:off x="3447288" y="3611880"/>
+            <a:ext cx="2423160" cy="512064"/>
+          </a:xfrm>
+          <a:prstGeom prst="roundRect">
+            <a:avLst>
+              <a:gd name="adj" fmla="val 17857"/>
+            </a:avLst>
+          </a:prstGeom>
+          <a:solidFill>
+            <a:srgbClr val="000000"/>
+          </a:solidFill>
+          <a:ln/>
+        </p:spPr>
+      </p:sp>
+      <p:sp>
+        <p:nvSpPr>
+          <p:cNvPr id="19" name="Text 16"/>
+          <p:cNvSpPr/>
+          <p:nvPr/>
+        </p:nvSpPr>
+        <p:spPr>
+          <a:xfrm>
+            <a:off x="3502152" y="3611880"/>
+            <a:ext cx="2313432" cy="512064"/>
+          </a:xfrm>
+          <a:prstGeom prst="rect">
+            <a:avLst/>
+          </a:prstGeom>
+          <a:noFill/>
+          <a:ln/>
+        </p:spPr>
+        <p:txBody>
+          <a:bodyPr wrap="square" lIns="0" tIns="0" rIns="0" bIns="0" rtlCol="0" anchor="ctr"/>
+          <a:lstStyle/>
+          <a:p>
+            <a:pPr algn="ctr" indent="0" marL="0">
+              <a:buNone/>
+            </a:pPr>
+            <a:r>
+              <a:rPr lang="en-US" sz="1050" b="1" dirty="0">
+                <a:solidFill>
+                  <a:srgbClr val="A98BFF"/>
+                </a:solidFill>
+                <a:latin typeface="Courier New" pitchFamily="34" charset="0"/>
+                <a:ea typeface="Courier New" pitchFamily="34" charset="-122"/>
+                <a:cs typeface="Courier New" pitchFamily="34" charset="-120"/>
+              </a:rPr>
+              <a:t>Actions: eval-гейт</a:t>
+            </a:r>
+            <a:endParaRPr lang="en-US" sz="1050" dirty="0"/>
+          </a:p>
+        </p:txBody>
+      </p:sp>
+      <p:sp>
+        <p:nvSpPr>
+          <p:cNvPr id="20" name="Text 17"/>
+          <p:cNvSpPr/>
+          <p:nvPr/>
+        </p:nvSpPr>
+        <p:spPr>
+          <a:xfrm>
+            <a:off x="3447288" y="4160520"/>
+            <a:ext cx="2423160" cy="274320"/>
+          </a:xfrm>
+          <a:prstGeom prst="rect">
+            <a:avLst/>
+          </a:prstGeom>
+          <a:noFill/>
+          <a:ln/>
+        </p:spPr>
+        <p:txBody>
+          <a:bodyPr wrap="square" lIns="0" tIns="0" rIns="0" bIns="0" rtlCol="0" anchor="ctr"/>
+          <a:lstStyle/>
+          <a:p>
+            <a:pPr algn="ctr" indent="0" marL="0">
+              <a:buNone/>
+            </a:pPr>
+            <a:r>
+              <a:rPr lang="en-US" sz="1000" dirty="0">
+                <a:solidFill>
+                  <a:srgbClr val="6B6B6B"/>
+                </a:solidFill>
+                <a:latin typeface="Montserrat" pitchFamily="34" charset="0"/>
+                <a:ea typeface="Montserrat" pitchFamily="34" charset="-122"/>
+                <a:cs typeface="Montserrat" pitchFamily="34" charset="-120"/>
+              </a:rPr>
+              <a:t>запускає механізм, не людина</a:t>
+            </a:r>
+            <a:endParaRPr lang="en-US" sz="1000" dirty="0"/>
+          </a:p>
+        </p:txBody>
+      </p:sp>
+      <p:sp>
+        <p:nvSpPr>
+          <p:cNvPr id="21" name="Shape 18"/>
+          <p:cNvSpPr/>
+          <p:nvPr/>
+        </p:nvSpPr>
+        <p:spPr>
+          <a:xfrm>
+            <a:off x="5961888" y="3867912"/>
+            <a:ext cx="164592" cy="0"/>
+          </a:xfrm>
+          <a:prstGeom prst="line">
+            <a:avLst/>
+          </a:prstGeom>
+          <a:noFill/>
+          <a:ln w="15875">
+            <a:solidFill>
+              <a:srgbClr val="5A05F4"/>
+            </a:solidFill>
+            <a:prstDash val="solid"/>
+          </a:ln>
+        </p:spPr>
+      </p:sp>
+      <p:sp>
+        <p:nvSpPr>
+          <p:cNvPr id="22" name="Shape 19"/>
+          <p:cNvSpPr/>
+          <p:nvPr/>
+        </p:nvSpPr>
+        <p:spPr>
+          <a:xfrm rot="5400000">
+            <a:off x="6089904" y="3799332"/>
+            <a:ext cx="146304" cy="137160"/>
+          </a:xfrm>
+          <a:prstGeom prst="triangle">
+            <a:avLst/>
+          </a:prstGeom>
+          <a:solidFill>
+            <a:srgbClr val="5A05F4"/>
+          </a:solidFill>
+          <a:ln/>
+        </p:spPr>
+      </p:sp>
+      <p:sp>
+        <p:nvSpPr>
+          <p:cNvPr id="23" name="Shape 20"/>
+          <p:cNvSpPr/>
+          <p:nvPr/>
+        </p:nvSpPr>
+        <p:spPr>
+          <a:xfrm>
+            <a:off x="6327648" y="3611880"/>
+            <a:ext cx="2423160" cy="512064"/>
+          </a:xfrm>
+          <a:prstGeom prst="roundRect">
+            <a:avLst>
+              <a:gd name="adj" fmla="val 17857"/>
+            </a:avLst>
+          </a:prstGeom>
+          <a:solidFill>
+            <a:srgbClr val="000000"/>
+          </a:solidFill>
+          <a:ln/>
+        </p:spPr>
+      </p:sp>
+      <p:sp>
+        <p:nvSpPr>
+          <p:cNvPr id="24" name="Text 21"/>
+          <p:cNvSpPr/>
+          <p:nvPr/>
+        </p:nvSpPr>
+        <p:spPr>
+          <a:xfrm>
+            <a:off x="6382512" y="3611880"/>
+            <a:ext cx="2313432" cy="512064"/>
+          </a:xfrm>
+          <a:prstGeom prst="rect">
+            <a:avLst/>
+          </a:prstGeom>
+          <a:noFill/>
+          <a:ln/>
+        </p:spPr>
+        <p:txBody>
+          <a:bodyPr wrap="square" lIns="0" tIns="0" rIns="0" bIns="0" rtlCol="0" anchor="ctr"/>
+          <a:lstStyle/>
+          <a:p>
+            <a:pPr algn="ctr" indent="0" marL="0">
+              <a:buNone/>
+            </a:pPr>
+            <a:r>
+              <a:rPr lang="en-US" sz="1050" b="1" dirty="0">
+                <a:solidFill>
+                  <a:srgbClr val="FF6B6B"/>
+                </a:solidFill>
+                <a:latin typeface="Courier New" pitchFamily="34" charset="0"/>
+                <a:ea typeface="Courier New" pitchFamily="34" charset="-122"/>
+                <a:cs typeface="Courier New" pitchFamily="34" charset="-120"/>
+              </a:rPr>
+              <a:t>червоний → merge заблоковано</a:t>
+            </a:r>
+            <a:endParaRPr lang="en-US" sz="1050" dirty="0"/>
+          </a:p>
+        </p:txBody>
+      </p:sp>
+      <p:sp>
+        <p:nvSpPr>
+          <p:cNvPr id="25" name="Shape 22"/>
+          <p:cNvSpPr/>
+          <p:nvPr/>
+        </p:nvSpPr>
+        <p:spPr>
+          <a:xfrm>
+            <a:off x="8842248" y="3867912"/>
+            <a:ext cx="164592" cy="0"/>
+          </a:xfrm>
+          <a:prstGeom prst="line">
+            <a:avLst/>
+          </a:prstGeom>
+          <a:noFill/>
+          <a:ln w="15875">
+            <a:solidFill>
+              <a:srgbClr val="5A05F4"/>
+            </a:solidFill>
+            <a:prstDash val="solid"/>
+          </a:ln>
+        </p:spPr>
+      </p:sp>
+      <p:sp>
+        <p:nvSpPr>
+          <p:cNvPr id="26" name="Shape 23"/>
+          <p:cNvSpPr/>
+          <p:nvPr/>
+        </p:nvSpPr>
+        <p:spPr>
+          <a:xfrm rot="5400000">
+            <a:off x="8970264" y="3799332"/>
+            <a:ext cx="146304" cy="137160"/>
+          </a:xfrm>
+          <a:prstGeom prst="triangle">
+            <a:avLst/>
+          </a:prstGeom>
+          <a:solidFill>
+            <a:srgbClr val="5A05F4"/>
+          </a:solidFill>
+          <a:ln/>
+        </p:spPr>
+      </p:sp>
+      <p:sp>
+        <p:nvSpPr>
+          <p:cNvPr id="27" name="Shape 24"/>
+          <p:cNvSpPr/>
+          <p:nvPr/>
+        </p:nvSpPr>
+        <p:spPr>
+          <a:xfrm>
+            <a:off x="9208008" y="3611880"/>
+            <a:ext cx="2423160" cy="512064"/>
+          </a:xfrm>
+          <a:prstGeom prst="roundRect">
+            <a:avLst>
+              <a:gd name="adj" fmla="val 17857"/>
+            </a:avLst>
+          </a:prstGeom>
+          <a:solidFill>
+            <a:srgbClr val="000000"/>
+          </a:solidFill>
+          <a:ln/>
+        </p:spPr>
+      </p:sp>
+      <p:sp>
+        <p:nvSpPr>
+          <p:cNvPr id="28" name="Text 25"/>
+          <p:cNvSpPr/>
+          <p:nvPr/>
+        </p:nvSpPr>
+        <p:spPr>
+          <a:xfrm>
+            <a:off x="9262872" y="3611880"/>
+            <a:ext cx="2313432" cy="512064"/>
+          </a:xfrm>
+          <a:prstGeom prst="rect">
+            <a:avLst/>
+          </a:prstGeom>
+          <a:noFill/>
+          <a:ln/>
+        </p:spPr>
+        <p:txBody>
+          <a:bodyPr wrap="square" lIns="0" tIns="0" rIns="0" bIns="0" rtlCol="0" anchor="ctr"/>
+          <a:lstStyle/>
+          <a:p>
+            <a:pPr algn="ctr" indent="0" marL="0">
+              <a:buNone/>
+            </a:pPr>
+            <a:r>
+              <a:rPr lang="en-US" sz="1050" b="1" dirty="0">
+                <a:solidFill>
+                  <a:srgbClr val="3FCF8E"/>
+                </a:solidFill>
+                <a:latin typeface="Courier New" pitchFamily="34" charset="0"/>
+                <a:ea typeface="Courier New" pitchFamily="34" charset="-122"/>
+                <a:cs typeface="Courier New" pitchFamily="34" charset="-120"/>
+              </a:rPr>
+              <a:t>зелений → merge</a:t>
+            </a:r>
+            <a:endParaRPr lang="en-US" sz="1050" dirty="0"/>
+          </a:p>
+        </p:txBody>
+      </p:sp>
+      <p:sp>
+        <p:nvSpPr>
+          <p:cNvPr id="29" name="Shape 26"/>
+          <p:cNvSpPr/>
+          <p:nvPr/>
+        </p:nvSpPr>
+        <p:spPr>
+          <a:xfrm>
+            <a:off x="566928" y="4526280"/>
+            <a:ext cx="11064240" cy="640080"/>
+          </a:xfrm>
+          <a:prstGeom prst="roundRect">
+            <a:avLst>
+              <a:gd name="adj" fmla="val 17143"/>
+            </a:avLst>
+          </a:prstGeom>
+          <a:solidFill>
+            <a:srgbClr val="5A05F4"/>
+          </a:solidFill>
+          <a:ln/>
+        </p:spPr>
+      </p:sp>
+      <p:sp>
+        <p:nvSpPr>
+          <p:cNvPr id="30" name="Text 27"/>
+          <p:cNvSpPr/>
+          <p:nvPr/>
+        </p:nvSpPr>
+        <p:spPr>
+          <a:xfrm>
+            <a:off x="786384" y="4672584"/>
+            <a:ext cx="10625328" cy="347472"/>
           </a:xfrm>
           <a:prstGeom prst="rect">
             <a:avLst/>
@@ -20418,18 +21489,18 @@
       </p:sp>
       <p:sp>
         <p:nvSpPr>
-          <p:cNvPr id="16" name="Shape 13"/>
-          <p:cNvSpPr/>
-          <p:nvPr/>
-        </p:nvSpPr>
-        <p:spPr>
-          <a:xfrm>
-            <a:off x="566928" y="4892040"/>
-            <a:ext cx="11064240" cy="960120"/>
+          <p:cNvPr id="31" name="Shape 28"/>
+          <p:cNvSpPr/>
+          <p:nvPr/>
+        </p:nvSpPr>
+        <p:spPr>
+          <a:xfrm>
+            <a:off x="566928" y="5303520"/>
+            <a:ext cx="11064240" cy="822960"/>
           </a:xfrm>
           <a:prstGeom prst="roundRect">
             <a:avLst>
-              <a:gd name="adj" fmla="val 11429"/>
+              <a:gd name="adj" fmla="val 13333"/>
             </a:avLst>
           </a:prstGeom>
           <a:solidFill>
@@ -20445,13 +21516,13 @@
       </p:sp>
       <p:sp>
         <p:nvSpPr>
-          <p:cNvPr id="17" name="Shape 14"/>
-          <p:cNvSpPr/>
-          <p:nvPr/>
-        </p:nvSpPr>
-        <p:spPr>
-          <a:xfrm>
-            <a:off x="749808" y="5216652"/>
+          <p:cNvPr id="32" name="Shape 29"/>
+          <p:cNvSpPr/>
+          <p:nvPr/>
+        </p:nvSpPr>
+        <p:spPr>
+          <a:xfrm>
+            <a:off x="749808" y="5559552"/>
             <a:ext cx="310896" cy="310896"/>
           </a:xfrm>
           <a:prstGeom prst="ellipse">
@@ -20465,13 +21536,13 @@
       </p:sp>
       <p:sp>
         <p:nvSpPr>
-          <p:cNvPr id="18" name="Text 15"/>
-          <p:cNvSpPr/>
-          <p:nvPr/>
-        </p:nvSpPr>
-        <p:spPr>
-          <a:xfrm>
-            <a:off x="749808" y="5216652"/>
+          <p:cNvPr id="33" name="Text 30"/>
+          <p:cNvSpPr/>
+          <p:nvPr/>
+        </p:nvSpPr>
+        <p:spPr>
+          <a:xfrm>
+            <a:off x="749808" y="5559552"/>
             <a:ext cx="310896" cy="310896"/>
           </a:xfrm>
           <a:prstGeom prst="rect">
@@ -20504,13 +21575,13 @@
       </p:sp>
       <p:sp>
         <p:nvSpPr>
-          <p:cNvPr id="19" name="Text 16"/>
-          <p:cNvSpPr/>
-          <p:nvPr/>
-        </p:nvSpPr>
-        <p:spPr>
-          <a:xfrm>
-            <a:off x="1243584" y="5020056"/>
+          <p:cNvPr id="34" name="Text 31"/>
+          <p:cNvSpPr/>
+          <p:nvPr/>
+        </p:nvSpPr>
+        <p:spPr>
+          <a:xfrm>
+            <a:off x="1243584" y="5431536"/>
             <a:ext cx="10168128" cy="219456"/>
           </a:xfrm>
           <a:prstGeom prst="rect">
@@ -20543,14 +21614,14 @@
       </p:sp>
       <p:sp>
         <p:nvSpPr>
-          <p:cNvPr id="20" name="Text 17"/>
-          <p:cNvSpPr/>
-          <p:nvPr/>
-        </p:nvSpPr>
-        <p:spPr>
-          <a:xfrm>
-            <a:off x="1243584" y="5276088"/>
-            <a:ext cx="10168128" cy="448056"/>
+          <p:cNvPr id="35" name="Text 32"/>
+          <p:cNvSpPr/>
+          <p:nvPr/>
+        </p:nvSpPr>
+        <p:spPr>
+          <a:xfrm>
+            <a:off x="1243584" y="5687568"/>
+            <a:ext cx="10168128" cy="310896"/>
           </a:xfrm>
           <a:prstGeom prst="rect">
             <a:avLst/>

--- a/docs/decks/L11.pptx
+++ b/docs/decks/L11.pptx
@@ -11529,7 +11529,7 @@
         <p:spPr>
           <a:xfrm>
             <a:off x="566928" y="1737360"/>
-            <a:ext cx="5532120" cy="1463040"/>
+            <a:ext cx="3611880" cy="1463040"/>
           </a:xfrm>
           <a:prstGeom prst="roundRect">
             <a:avLst>
@@ -11610,7 +11610,7 @@
         <p:spPr>
           <a:xfrm>
             <a:off x="1280160" y="1892808"/>
-            <a:ext cx="4617720" cy="438912"/>
+            <a:ext cx="2697480" cy="438912"/>
           </a:xfrm>
           <a:prstGeom prst="rect">
             <a:avLst/>
@@ -11649,7 +11649,7 @@
         <p:spPr>
           <a:xfrm>
             <a:off x="768096" y="2423160"/>
-            <a:ext cx="5129784" cy="621792"/>
+            <a:ext cx="3209544" cy="621792"/>
           </a:xfrm>
           <a:prstGeom prst="rect">
             <a:avLst/>
@@ -11690,8 +11690,8 @@
         </p:nvSpPr>
         <p:spPr>
           <a:xfrm>
-            <a:off x="6281928" y="1737360"/>
-            <a:ext cx="5532120" cy="1463040"/>
+            <a:off x="4361688" y="1737360"/>
+            <a:ext cx="3611880" cy="1463040"/>
           </a:xfrm>
           <a:prstGeom prst="roundRect">
             <a:avLst>
@@ -11712,7 +11712,7 @@
         </p:nvSpPr>
         <p:spPr>
           <a:xfrm>
-            <a:off x="6483096" y="1920240"/>
+            <a:off x="4562856" y="1920240"/>
             <a:ext cx="384048" cy="384048"/>
           </a:xfrm>
           <a:prstGeom prst="ellipse">
@@ -11732,7 +11732,7 @@
         </p:nvSpPr>
         <p:spPr>
           <a:xfrm>
-            <a:off x="6483096" y="1920240"/>
+            <a:off x="4562856" y="1920240"/>
             <a:ext cx="384048" cy="384048"/>
           </a:xfrm>
           <a:prstGeom prst="rect">
@@ -11771,8 +11771,8 @@
         </p:nvSpPr>
         <p:spPr>
           <a:xfrm>
-            <a:off x="6995160" y="1892808"/>
-            <a:ext cx="4617720" cy="438912"/>
+            <a:off x="5074920" y="1892808"/>
+            <a:ext cx="2697480" cy="438912"/>
           </a:xfrm>
           <a:prstGeom prst="rect">
             <a:avLst/>
@@ -11810,8 +11810,8 @@
         </p:nvSpPr>
         <p:spPr>
           <a:xfrm>
-            <a:off x="6483096" y="2423160"/>
-            <a:ext cx="5129784" cy="621792"/>
+            <a:off x="4562856" y="2423160"/>
+            <a:ext cx="3209544" cy="621792"/>
           </a:xfrm>
           <a:prstGeom prst="rect">
             <a:avLst/>
@@ -11853,7 +11853,7 @@
         <p:spPr>
           <a:xfrm>
             <a:off x="566928" y="3383280"/>
-            <a:ext cx="5532120" cy="1463040"/>
+            <a:ext cx="3611880" cy="1463040"/>
           </a:xfrm>
           <a:prstGeom prst="roundRect">
             <a:avLst>
@@ -11934,7 +11934,7 @@
         <p:spPr>
           <a:xfrm>
             <a:off x="1280160" y="3538728"/>
-            <a:ext cx="4617720" cy="438912"/>
+            <a:ext cx="2697480" cy="438912"/>
           </a:xfrm>
           <a:prstGeom prst="rect">
             <a:avLst/>
@@ -11973,7 +11973,7 @@
         <p:spPr>
           <a:xfrm>
             <a:off x="768096" y="4069080"/>
-            <a:ext cx="5129784" cy="621792"/>
+            <a:ext cx="3209544" cy="621792"/>
           </a:xfrm>
           <a:prstGeom prst="rect">
             <a:avLst/>
@@ -12014,8 +12014,8 @@
         </p:nvSpPr>
         <p:spPr>
           <a:xfrm>
-            <a:off x="6281928" y="3383280"/>
-            <a:ext cx="5532120" cy="1463040"/>
+            <a:off x="4361688" y="3383280"/>
+            <a:ext cx="3611880" cy="1463040"/>
           </a:xfrm>
           <a:prstGeom prst="roundRect">
             <a:avLst>
@@ -12036,7 +12036,7 @@
         </p:nvSpPr>
         <p:spPr>
           <a:xfrm>
-            <a:off x="6483096" y="3566160"/>
+            <a:off x="4562856" y="3566160"/>
             <a:ext cx="384048" cy="384048"/>
           </a:xfrm>
           <a:prstGeom prst="ellipse">
@@ -12056,7 +12056,7 @@
         </p:nvSpPr>
         <p:spPr>
           <a:xfrm>
-            <a:off x="6483096" y="3566160"/>
+            <a:off x="4562856" y="3566160"/>
             <a:ext cx="384048" cy="384048"/>
           </a:xfrm>
           <a:prstGeom prst="rect">
@@ -12095,8 +12095,8 @@
         </p:nvSpPr>
         <p:spPr>
           <a:xfrm>
-            <a:off x="6995160" y="3538728"/>
-            <a:ext cx="4617720" cy="438912"/>
+            <a:off x="5074920" y="3538728"/>
+            <a:ext cx="2697480" cy="438912"/>
           </a:xfrm>
           <a:prstGeom prst="rect">
             <a:avLst/>
@@ -12134,8 +12134,8 @@
         </p:nvSpPr>
         <p:spPr>
           <a:xfrm>
-            <a:off x="6483096" y="4069080"/>
-            <a:ext cx="5129784" cy="621792"/>
+            <a:off x="4562856" y="4069080"/>
+            <a:ext cx="3209544" cy="621792"/>
           </a:xfrm>
           <a:prstGeom prst="rect">
             <a:avLst/>
@@ -12176,6 +12176,484 @@
         </p:nvSpPr>
         <p:spPr>
           <a:xfrm>
+            <a:off x="8156448" y="1737360"/>
+            <a:ext cx="3474720" cy="3108960"/>
+          </a:xfrm>
+          <a:prstGeom prst="roundRect">
+            <a:avLst>
+              <a:gd name="adj" fmla="val 2353"/>
+            </a:avLst>
+          </a:prstGeom>
+          <a:solidFill>
+            <a:srgbClr val="0A0810"/>
+          </a:solidFill>
+          <a:ln w="12700">
+            <a:solidFill>
+              <a:srgbClr val="D9D9D9"/>
+            </a:solidFill>
+            <a:prstDash val="solid"/>
+          </a:ln>
+        </p:spPr>
+      </p:sp>
+      <p:sp>
+        <p:nvSpPr>
+          <p:cNvPr id="28" name="Shape 25"/>
+          <p:cNvSpPr/>
+          <p:nvPr/>
+        </p:nvSpPr>
+        <p:spPr>
+          <a:xfrm>
+            <a:off x="8284464" y="1856232"/>
+            <a:ext cx="73152" cy="73152"/>
+          </a:xfrm>
+          <a:prstGeom prst="ellipse">
+            <a:avLst/>
+          </a:prstGeom>
+          <a:solidFill>
+            <a:srgbClr val="FF6B6B"/>
+          </a:solidFill>
+          <a:ln/>
+        </p:spPr>
+      </p:sp>
+      <p:sp>
+        <p:nvSpPr>
+          <p:cNvPr id="29" name="Shape 26"/>
+          <p:cNvSpPr/>
+          <p:nvPr/>
+        </p:nvSpPr>
+        <p:spPr>
+          <a:xfrm>
+            <a:off x="8430768" y="1856232"/>
+            <a:ext cx="73152" cy="73152"/>
+          </a:xfrm>
+          <a:prstGeom prst="ellipse">
+            <a:avLst/>
+          </a:prstGeom>
+          <a:solidFill>
+            <a:srgbClr val="6BA0F8"/>
+          </a:solidFill>
+          <a:ln/>
+        </p:spPr>
+      </p:sp>
+      <p:sp>
+        <p:nvSpPr>
+          <p:cNvPr id="30" name="Shape 27"/>
+          <p:cNvSpPr/>
+          <p:nvPr/>
+        </p:nvSpPr>
+        <p:spPr>
+          <a:xfrm>
+            <a:off x="8577072" y="1856232"/>
+            <a:ext cx="73152" cy="73152"/>
+          </a:xfrm>
+          <a:prstGeom prst="ellipse">
+            <a:avLst/>
+          </a:prstGeom>
+          <a:solidFill>
+            <a:srgbClr val="3FCF8E"/>
+          </a:solidFill>
+          <a:ln/>
+        </p:spPr>
+      </p:sp>
+      <p:sp>
+        <p:nvSpPr>
+          <p:cNvPr id="31" name="Text 28"/>
+          <p:cNvSpPr/>
+          <p:nvPr/>
+        </p:nvSpPr>
+        <p:spPr>
+          <a:xfrm>
+            <a:off x="8759952" y="1737360"/>
+            <a:ext cx="2761488" cy="310896"/>
+          </a:xfrm>
+          <a:prstGeom prst="rect">
+            <a:avLst/>
+          </a:prstGeom>
+          <a:noFill/>
+          <a:ln/>
+        </p:spPr>
+        <p:txBody>
+          <a:bodyPr wrap="square" lIns="0" tIns="0" rIns="0" bIns="0" rtlCol="0" anchor="ctr"/>
+          <a:lstStyle/>
+          <a:p>
+            <a:pPr indent="0" marL="0">
+              <a:buNone/>
+            </a:pPr>
+            <a:r>
+              <a:rPr lang="en-US" sz="800" dirty="0">
+                <a:solidFill>
+                  <a:srgbClr val="9A94AA"/>
+                </a:solidFill>
+                <a:latin typeface="Courier New" pitchFamily="34" charset="0"/>
+                <a:ea typeface="Courier New" pitchFamily="34" charset="-122"/>
+                <a:cs typeface="Courier New" pitchFamily="34" charset="-120"/>
+              </a:rPr>
+              <a:t>github · PR #1 · checks</a:t>
+            </a:r>
+            <a:endParaRPr lang="en-US" sz="800" dirty="0"/>
+          </a:p>
+        </p:txBody>
+      </p:sp>
+      <p:sp>
+        <p:nvSpPr>
+          <p:cNvPr id="32" name="Shape 29"/>
+          <p:cNvSpPr/>
+          <p:nvPr/>
+        </p:nvSpPr>
+        <p:spPr>
+          <a:xfrm>
+            <a:off x="8156448" y="2048256"/>
+            <a:ext cx="3474720" cy="0"/>
+          </a:xfrm>
+          <a:prstGeom prst="line">
+            <a:avLst/>
+          </a:prstGeom>
+          <a:noFill/>
+          <a:ln w="9525">
+            <a:solidFill>
+              <a:srgbClr val="2A2438"/>
+            </a:solidFill>
+            <a:prstDash val="solid"/>
+          </a:ln>
+        </p:spPr>
+      </p:sp>
+      <p:sp>
+        <p:nvSpPr>
+          <p:cNvPr id="33" name="Text 30"/>
+          <p:cNvSpPr/>
+          <p:nvPr/>
+        </p:nvSpPr>
+        <p:spPr>
+          <a:xfrm>
+            <a:off x="8321040" y="2157984"/>
+            <a:ext cx="3145536" cy="221513"/>
+          </a:xfrm>
+          <a:prstGeom prst="rect">
+            <a:avLst/>
+          </a:prstGeom>
+          <a:noFill/>
+          <a:ln/>
+        </p:spPr>
+        <p:txBody>
+          <a:bodyPr wrap="square" lIns="0" tIns="0" rIns="0" bIns="0" rtlCol="0" anchor="ctr"/>
+          <a:lstStyle/>
+          <a:p>
+            <a:pPr indent="0" marL="0">
+              <a:buNone/>
+            </a:pPr>
+            <a:r>
+              <a:rPr lang="en-US" sz="950" b="1" dirty="0">
+                <a:solidFill>
+                  <a:srgbClr val="FF6B6B"/>
+                </a:solidFill>
+                <a:latin typeface="Courier New" pitchFamily="34" charset="0"/>
+                <a:ea typeface="Courier New" pitchFamily="34" charset="-122"/>
+                <a:cs typeface="Courier New" pitchFamily="34" charset="-120"/>
+              </a:rPr>
+              <a:t>✗ eval — failed</a:t>
+            </a:r>
+            <a:endParaRPr lang="en-US" sz="950" dirty="0"/>
+          </a:p>
+        </p:txBody>
+      </p:sp>
+      <p:sp>
+        <p:nvSpPr>
+          <p:cNvPr id="34" name="Text 31"/>
+          <p:cNvSpPr/>
+          <p:nvPr/>
+        </p:nvSpPr>
+        <p:spPr>
+          <a:xfrm>
+            <a:off x="8321040" y="2379497"/>
+            <a:ext cx="3145536" cy="221513"/>
+          </a:xfrm>
+          <a:prstGeom prst="rect">
+            <a:avLst/>
+          </a:prstGeom>
+          <a:noFill/>
+          <a:ln/>
+        </p:spPr>
+        <p:txBody>
+          <a:bodyPr wrap="square" lIns="0" tIns="0" rIns="0" bIns="0" rtlCol="0" anchor="ctr"/>
+          <a:lstStyle/>
+          <a:p>
+            <a:pPr indent="0" marL="0">
+              <a:buNone/>
+            </a:pPr>
+            <a:r>
+              <a:rPr lang="en-US" sz="950" dirty="0">
+                <a:solidFill>
+                  <a:srgbClr val="9A94AA"/>
+                </a:solidFill>
+                <a:latin typeface="Courier New" pitchFamily="34" charset="0"/>
+                <a:ea typeface="Courier New" pitchFamily="34" charset="-122"/>
+                <a:cs typeface="Courier New" pitchFamily="34" charset="-120"/>
+              </a:rPr>
+              <a:t>  3/6 passed · threshold 5</a:t>
+            </a:r>
+            <a:endParaRPr lang="en-US" sz="950" dirty="0"/>
+          </a:p>
+        </p:txBody>
+      </p:sp>
+      <p:sp>
+        <p:nvSpPr>
+          <p:cNvPr id="35" name="Text 32"/>
+          <p:cNvSpPr/>
+          <p:nvPr/>
+        </p:nvSpPr>
+        <p:spPr>
+          <a:xfrm>
+            <a:off x="8321040" y="2601011"/>
+            <a:ext cx="3145536" cy="221513"/>
+          </a:xfrm>
+          <a:prstGeom prst="rect">
+            <a:avLst/>
+          </a:prstGeom>
+          <a:noFill/>
+          <a:ln/>
+        </p:spPr>
+        <p:txBody>
+          <a:bodyPr wrap="square" lIns="0" tIns="0" rIns="0" bIns="0" rtlCol="0" anchor="ctr"/>
+          <a:lstStyle/>
+          <a:p>
+            <a:pPr indent="0" marL="0">
+              <a:buNone/>
+            </a:pPr>
+            <a:r>
+              <a:rPr lang="en-US" sz="950" dirty="0">
+                <a:solidFill>
+                  <a:srgbClr val="FF6B6B"/>
+                </a:solidFill>
+                <a:latin typeface="Courier New" pitchFamily="34" charset="0"/>
+                <a:ea typeface="Courier New" pitchFamily="34" charset="-122"/>
+                <a:cs typeface="Courier New" pitchFamily="34" charset="-120"/>
+              </a:rPr>
+              <a:t>  Merging is blocked</a:t>
+            </a:r>
+            <a:endParaRPr lang="en-US" sz="950" dirty="0"/>
+          </a:p>
+        </p:txBody>
+      </p:sp>
+      <p:sp>
+        <p:nvSpPr>
+          <p:cNvPr id="36" name="Text 33"/>
+          <p:cNvSpPr/>
+          <p:nvPr/>
+        </p:nvSpPr>
+        <p:spPr>
+          <a:xfrm>
+            <a:off x="8321040" y="2822524"/>
+            <a:ext cx="3145536" cy="221513"/>
+          </a:xfrm>
+          <a:prstGeom prst="rect">
+            <a:avLst/>
+          </a:prstGeom>
+          <a:noFill/>
+          <a:ln/>
+        </p:spPr>
+        <p:txBody>
+          <a:bodyPr wrap="square" lIns="0" tIns="0" rIns="0" bIns="0" rtlCol="0" anchor="ctr"/>
+          <a:lstStyle/>
+          <a:p>
+            <a:pPr indent="0" marL="0">
+              <a:buNone/>
+            </a:pPr>
+            <a:endParaRPr lang="en-US" sz="950" dirty="0"/>
+          </a:p>
+        </p:txBody>
+      </p:sp>
+      <p:sp>
+        <p:nvSpPr>
+          <p:cNvPr id="37" name="Text 34"/>
+          <p:cNvSpPr/>
+          <p:nvPr/>
+        </p:nvSpPr>
+        <p:spPr>
+          <a:xfrm>
+            <a:off x="8321040" y="3044038"/>
+            <a:ext cx="3145536" cy="221513"/>
+          </a:xfrm>
+          <a:prstGeom prst="rect">
+            <a:avLst/>
+          </a:prstGeom>
+          <a:noFill/>
+          <a:ln/>
+        </p:spPr>
+        <p:txBody>
+          <a:bodyPr wrap="square" lIns="0" tIns="0" rIns="0" bIns="0" rtlCol="0" anchor="ctr"/>
+          <a:lstStyle/>
+          <a:p>
+            <a:pPr indent="0" marL="0">
+              <a:buNone/>
+            </a:pPr>
+            <a:r>
+              <a:rPr lang="en-US" sz="950" dirty="0">
+                <a:solidFill>
+                  <a:srgbClr val="9A94AA"/>
+                </a:solidFill>
+                <a:latin typeface="Courier New" pitchFamily="34" charset="0"/>
+                <a:ea typeface="Courier New" pitchFamily="34" charset="-122"/>
+                <a:cs typeface="Courier New" pitchFamily="34" charset="-120"/>
+              </a:rPr>
+              <a:t>push: fix prompt</a:t>
+            </a:r>
+            <a:endParaRPr lang="en-US" sz="950" dirty="0"/>
+          </a:p>
+        </p:txBody>
+      </p:sp>
+      <p:sp>
+        <p:nvSpPr>
+          <p:cNvPr id="38" name="Text 35"/>
+          <p:cNvSpPr/>
+          <p:nvPr/>
+        </p:nvSpPr>
+        <p:spPr>
+          <a:xfrm>
+            <a:off x="8321040" y="3265551"/>
+            <a:ext cx="3145536" cy="221513"/>
+          </a:xfrm>
+          <a:prstGeom prst="rect">
+            <a:avLst/>
+          </a:prstGeom>
+          <a:noFill/>
+          <a:ln/>
+        </p:spPr>
+        <p:txBody>
+          <a:bodyPr wrap="square" lIns="0" tIns="0" rIns="0" bIns="0" rtlCol="0" anchor="ctr"/>
+          <a:lstStyle/>
+          <a:p>
+            <a:pPr indent="0" marL="0">
+              <a:buNone/>
+            </a:pPr>
+            <a:endParaRPr lang="en-US" sz="950" dirty="0"/>
+          </a:p>
+        </p:txBody>
+      </p:sp>
+      <p:sp>
+        <p:nvSpPr>
+          <p:cNvPr id="39" name="Text 36"/>
+          <p:cNvSpPr/>
+          <p:nvPr/>
+        </p:nvSpPr>
+        <p:spPr>
+          <a:xfrm>
+            <a:off x="8321040" y="3487064"/>
+            <a:ext cx="3145536" cy="221513"/>
+          </a:xfrm>
+          <a:prstGeom prst="rect">
+            <a:avLst/>
+          </a:prstGeom>
+          <a:noFill/>
+          <a:ln/>
+        </p:spPr>
+        <p:txBody>
+          <a:bodyPr wrap="square" lIns="0" tIns="0" rIns="0" bIns="0" rtlCol="0" anchor="ctr"/>
+          <a:lstStyle/>
+          <a:p>
+            <a:pPr indent="0" marL="0">
+              <a:buNone/>
+            </a:pPr>
+            <a:r>
+              <a:rPr lang="en-US" sz="950" b="1" dirty="0">
+                <a:solidFill>
+                  <a:srgbClr val="3FCF8E"/>
+                </a:solidFill>
+                <a:latin typeface="Courier New" pitchFamily="34" charset="0"/>
+                <a:ea typeface="Courier New" pitchFamily="34" charset="-122"/>
+                <a:cs typeface="Courier New" pitchFamily="34" charset="-120"/>
+              </a:rPr>
+              <a:t>✓ eval — passed</a:t>
+            </a:r>
+            <a:endParaRPr lang="en-US" sz="950" dirty="0"/>
+          </a:p>
+        </p:txBody>
+      </p:sp>
+      <p:sp>
+        <p:nvSpPr>
+          <p:cNvPr id="40" name="Text 37"/>
+          <p:cNvSpPr/>
+          <p:nvPr/>
+        </p:nvSpPr>
+        <p:spPr>
+          <a:xfrm>
+            <a:off x="8321040" y="3708578"/>
+            <a:ext cx="3145536" cy="221513"/>
+          </a:xfrm>
+          <a:prstGeom prst="rect">
+            <a:avLst/>
+          </a:prstGeom>
+          <a:noFill/>
+          <a:ln/>
+        </p:spPr>
+        <p:txBody>
+          <a:bodyPr wrap="square" lIns="0" tIns="0" rIns="0" bIns="0" rtlCol="0" anchor="ctr"/>
+          <a:lstStyle/>
+          <a:p>
+            <a:pPr indent="0" marL="0">
+              <a:buNone/>
+            </a:pPr>
+            <a:r>
+              <a:rPr lang="en-US" sz="950" dirty="0">
+                <a:solidFill>
+                  <a:srgbClr val="9A94AA"/>
+                </a:solidFill>
+                <a:latin typeface="Courier New" pitchFamily="34" charset="0"/>
+                <a:ea typeface="Courier New" pitchFamily="34" charset="-122"/>
+                <a:cs typeface="Courier New" pitchFamily="34" charset="-120"/>
+              </a:rPr>
+              <a:t>  6/6 passed · threshold 5</a:t>
+            </a:r>
+            <a:endParaRPr lang="en-US" sz="950" dirty="0"/>
+          </a:p>
+        </p:txBody>
+      </p:sp>
+      <p:sp>
+        <p:nvSpPr>
+          <p:cNvPr id="41" name="Text 38"/>
+          <p:cNvSpPr/>
+          <p:nvPr/>
+        </p:nvSpPr>
+        <p:spPr>
+          <a:xfrm>
+            <a:off x="8321040" y="3930091"/>
+            <a:ext cx="3145536" cy="221513"/>
+          </a:xfrm>
+          <a:prstGeom prst="rect">
+            <a:avLst/>
+          </a:prstGeom>
+          <a:noFill/>
+          <a:ln/>
+        </p:spPr>
+        <p:txBody>
+          <a:bodyPr wrap="square" lIns="0" tIns="0" rIns="0" bIns="0" rtlCol="0" anchor="ctr"/>
+          <a:lstStyle/>
+          <a:p>
+            <a:pPr indent="0" marL="0">
+              <a:buNone/>
+            </a:pPr>
+            <a:r>
+              <a:rPr lang="en-US" sz="950" dirty="0">
+                <a:solidFill>
+                  <a:srgbClr val="3FCF8E"/>
+                </a:solidFill>
+                <a:latin typeface="Courier New" pitchFamily="34" charset="0"/>
+                <a:ea typeface="Courier New" pitchFamily="34" charset="-122"/>
+                <a:cs typeface="Courier New" pitchFamily="34" charset="-120"/>
+              </a:rPr>
+              <a:t>  Merge pull request</a:t>
+            </a:r>
+            <a:endParaRPr lang="en-US" sz="950" dirty="0"/>
+          </a:p>
+        </p:txBody>
+      </p:sp>
+      <p:sp>
+        <p:nvSpPr>
+          <p:cNvPr id="42" name="Shape 39"/>
+          <p:cNvSpPr/>
+          <p:nvPr/>
+        </p:nvSpPr>
+        <p:spPr>
+          <a:xfrm>
             <a:off x="566928" y="5074920"/>
             <a:ext cx="11064240" cy="1051560"/>
           </a:xfrm>
@@ -12192,7 +12670,7 @@
       </p:sp>
       <p:sp>
         <p:nvSpPr>
-          <p:cNvPr id="28" name="Shape 25"/>
+          <p:cNvPr id="43" name="Shape 40"/>
           <p:cNvSpPr/>
           <p:nvPr/>
         </p:nvSpPr>
@@ -12212,7 +12690,7 @@
       </p:sp>
       <p:sp>
         <p:nvSpPr>
-          <p:cNvPr id="29" name="Text 26"/>
+          <p:cNvPr id="44" name="Text 41"/>
           <p:cNvSpPr/>
           <p:nvPr/>
         </p:nvSpPr>
@@ -12251,7 +12729,7 @@
       </p:sp>
       <p:sp>
         <p:nvSpPr>
-          <p:cNvPr id="30" name="Text 27"/>
+          <p:cNvPr id="45" name="Text 42"/>
           <p:cNvSpPr/>
           <p:nvPr/>
         </p:nvSpPr>
@@ -12290,7 +12768,7 @@
       </p:sp>
       <p:sp>
         <p:nvSpPr>
-          <p:cNvPr id="31" name="Text 28"/>
+          <p:cNvPr id="46" name="Text 43"/>
           <p:cNvSpPr/>
           <p:nvPr/>
         </p:nvSpPr>
@@ -14560,11 +15038,11 @@
         <p:spPr>
           <a:xfrm>
             <a:off x="566928" y="1737360"/>
-            <a:ext cx="3566160" cy="2148840"/>
+            <a:ext cx="7223760" cy="1051560"/>
           </a:xfrm>
           <a:prstGeom prst="roundRect">
             <a:avLst>
-              <a:gd name="adj" fmla="val 5106"/>
+              <a:gd name="adj" fmla="val 10435"/>
             </a:avLst>
           </a:prstGeom>
           <a:solidFill>
@@ -14582,7 +15060,7 @@
         <p:spPr>
           <a:xfrm>
             <a:off x="768096" y="1892808"/>
-            <a:ext cx="3163824" cy="438912"/>
+            <a:ext cx="6821424" cy="438912"/>
           </a:xfrm>
           <a:prstGeom prst="rect">
             <a:avLst/>
@@ -14621,7 +15099,7 @@
         <p:spPr>
           <a:xfrm>
             <a:off x="768096" y="2423160"/>
-            <a:ext cx="3163824" cy="1307592"/>
+            <a:ext cx="6821424" cy="210312"/>
           </a:xfrm>
           <a:prstGeom prst="rect">
             <a:avLst/>
@@ -14662,12 +15140,12 @@
         </p:nvSpPr>
         <p:spPr>
           <a:xfrm>
-            <a:off x="4315968" y="1737360"/>
-            <a:ext cx="3566160" cy="2148840"/>
+            <a:off x="566928" y="2926080"/>
+            <a:ext cx="7223760" cy="1051560"/>
           </a:xfrm>
           <a:prstGeom prst="roundRect">
             <a:avLst>
-              <a:gd name="adj" fmla="val 5106"/>
+              <a:gd name="adj" fmla="val 10435"/>
             </a:avLst>
           </a:prstGeom>
           <a:solidFill>
@@ -14684,8 +15162,8 @@
         </p:nvSpPr>
         <p:spPr>
           <a:xfrm>
-            <a:off x="4517136" y="1892808"/>
-            <a:ext cx="3163824" cy="438912"/>
+            <a:off x="768096" y="3081528"/>
+            <a:ext cx="6821424" cy="438912"/>
           </a:xfrm>
           <a:prstGeom prst="rect">
             <a:avLst/>
@@ -14723,8 +15201,8 @@
         </p:nvSpPr>
         <p:spPr>
           <a:xfrm>
-            <a:off x="4517136" y="2423160"/>
-            <a:ext cx="3163824" cy="1307592"/>
+            <a:off x="768096" y="3611880"/>
+            <a:ext cx="6821424" cy="210312"/>
           </a:xfrm>
           <a:prstGeom prst="rect">
             <a:avLst/>
@@ -14765,12 +15243,12 @@
         </p:nvSpPr>
         <p:spPr>
           <a:xfrm>
-            <a:off x="8065008" y="1737360"/>
-            <a:ext cx="3566160" cy="2148840"/>
+            <a:off x="566928" y="4114800"/>
+            <a:ext cx="7223760" cy="1051560"/>
           </a:xfrm>
           <a:prstGeom prst="roundRect">
             <a:avLst>
-              <a:gd name="adj" fmla="val 5106"/>
+              <a:gd name="adj" fmla="val 10435"/>
             </a:avLst>
           </a:prstGeom>
           <a:solidFill>
@@ -14787,8 +15265,8 @@
         </p:nvSpPr>
         <p:spPr>
           <a:xfrm>
-            <a:off x="8266176" y="1892808"/>
-            <a:ext cx="3163824" cy="438912"/>
+            <a:off x="768096" y="4270248"/>
+            <a:ext cx="6821424" cy="438912"/>
           </a:xfrm>
           <a:prstGeom prst="rect">
             <a:avLst/>
@@ -14826,8 +15304,8 @@
         </p:nvSpPr>
         <p:spPr>
           <a:xfrm>
-            <a:off x="8266176" y="2423160"/>
-            <a:ext cx="3163824" cy="1307592"/>
+            <a:off x="768096" y="4800600"/>
+            <a:ext cx="6821424" cy="210312"/>
           </a:xfrm>
           <a:prstGeom prst="rect">
             <a:avLst/>
@@ -14868,16 +15346,16 @@
         </p:nvSpPr>
         <p:spPr>
           <a:xfrm>
-            <a:off x="566928" y="4297680"/>
-            <a:ext cx="11064240" cy="1600200"/>
+            <a:off x="8156448" y="1737360"/>
+            <a:ext cx="3474720" cy="3429000"/>
           </a:xfrm>
           <a:prstGeom prst="roundRect">
             <a:avLst>
-              <a:gd name="adj" fmla="val 6857"/>
+              <a:gd name="adj" fmla="val 2133"/>
             </a:avLst>
           </a:prstGeom>
           <a:solidFill>
-            <a:srgbClr val="FFFFFF"/>
+            <a:srgbClr val="0A0810"/>
           </a:solidFill>
           <a:ln w="12700">
             <a:solidFill>
@@ -14889,14 +15367,520 @@
       </p:sp>
       <p:sp>
         <p:nvSpPr>
-          <p:cNvPr id="17" name="Text 14"/>
-          <p:cNvSpPr/>
-          <p:nvPr/>
-        </p:nvSpPr>
-        <p:spPr>
-          <a:xfrm>
-            <a:off x="786384" y="4443984"/>
-            <a:ext cx="10625328" cy="1307592"/>
+          <p:cNvPr id="17" name="Shape 14"/>
+          <p:cNvSpPr/>
+          <p:nvPr/>
+        </p:nvSpPr>
+        <p:spPr>
+          <a:xfrm>
+            <a:off x="8284464" y="1856232"/>
+            <a:ext cx="73152" cy="73152"/>
+          </a:xfrm>
+          <a:prstGeom prst="ellipse">
+            <a:avLst/>
+          </a:prstGeom>
+          <a:solidFill>
+            <a:srgbClr val="FF6B6B"/>
+          </a:solidFill>
+          <a:ln/>
+        </p:spPr>
+      </p:sp>
+      <p:sp>
+        <p:nvSpPr>
+          <p:cNvPr id="18" name="Shape 15"/>
+          <p:cNvSpPr/>
+          <p:nvPr/>
+        </p:nvSpPr>
+        <p:spPr>
+          <a:xfrm>
+            <a:off x="8430768" y="1856232"/>
+            <a:ext cx="73152" cy="73152"/>
+          </a:xfrm>
+          <a:prstGeom prst="ellipse">
+            <a:avLst/>
+          </a:prstGeom>
+          <a:solidFill>
+            <a:srgbClr val="6BA0F8"/>
+          </a:solidFill>
+          <a:ln/>
+        </p:spPr>
+      </p:sp>
+      <p:sp>
+        <p:nvSpPr>
+          <p:cNvPr id="19" name="Shape 16"/>
+          <p:cNvSpPr/>
+          <p:nvPr/>
+        </p:nvSpPr>
+        <p:spPr>
+          <a:xfrm>
+            <a:off x="8577072" y="1856232"/>
+            <a:ext cx="73152" cy="73152"/>
+          </a:xfrm>
+          <a:prstGeom prst="ellipse">
+            <a:avLst/>
+          </a:prstGeom>
+          <a:solidFill>
+            <a:srgbClr val="3FCF8E"/>
+          </a:solidFill>
+          <a:ln/>
+        </p:spPr>
+      </p:sp>
+      <p:sp>
+        <p:nvSpPr>
+          <p:cNvPr id="20" name="Text 17"/>
+          <p:cNvSpPr/>
+          <p:nvPr/>
+        </p:nvSpPr>
+        <p:spPr>
+          <a:xfrm>
+            <a:off x="8759952" y="1737360"/>
+            <a:ext cx="2761488" cy="310896"/>
+          </a:xfrm>
+          <a:prstGeom prst="rect">
+            <a:avLst/>
+          </a:prstGeom>
+          <a:noFill/>
+          <a:ln/>
+        </p:spPr>
+        <p:txBody>
+          <a:bodyPr wrap="square" lIns="0" tIns="0" rIns="0" bIns="0" rtlCol="0" anchor="ctr"/>
+          <a:lstStyle/>
+          <a:p>
+            <a:pPr indent="0" marL="0">
+              <a:buNone/>
+            </a:pPr>
+            <a:r>
+              <a:rPr lang="en-US" sz="800" dirty="0">
+                <a:solidFill>
+                  <a:srgbClr val="9A94AA"/>
+                </a:solidFill>
+                <a:latin typeface="Courier New" pitchFamily="34" charset="0"/>
+                <a:ea typeface="Courier New" pitchFamily="34" charset="-122"/>
+                <a:cs typeface="Courier New" pitchFamily="34" charset="-120"/>
+              </a:rPr>
+              <a:t>github · branch protection</a:t>
+            </a:r>
+            <a:endParaRPr lang="en-US" sz="800" dirty="0"/>
+          </a:p>
+        </p:txBody>
+      </p:sp>
+      <p:sp>
+        <p:nvSpPr>
+          <p:cNvPr id="21" name="Shape 18"/>
+          <p:cNvSpPr/>
+          <p:nvPr/>
+        </p:nvSpPr>
+        <p:spPr>
+          <a:xfrm>
+            <a:off x="8156448" y="2048256"/>
+            <a:ext cx="3474720" cy="0"/>
+          </a:xfrm>
+          <a:prstGeom prst="line">
+            <a:avLst/>
+          </a:prstGeom>
+          <a:noFill/>
+          <a:ln w="9525">
+            <a:solidFill>
+              <a:srgbClr val="2A2438"/>
+            </a:solidFill>
+            <a:prstDash val="solid"/>
+          </a:ln>
+        </p:spPr>
+      </p:sp>
+      <p:sp>
+        <p:nvSpPr>
+          <p:cNvPr id="22" name="Text 19"/>
+          <p:cNvSpPr/>
+          <p:nvPr/>
+        </p:nvSpPr>
+        <p:spPr>
+          <a:xfrm>
+            <a:off x="8321040" y="2157984"/>
+            <a:ext cx="3145536" cy="221513"/>
+          </a:xfrm>
+          <a:prstGeom prst="rect">
+            <a:avLst/>
+          </a:prstGeom>
+          <a:noFill/>
+          <a:ln/>
+        </p:spPr>
+        <p:txBody>
+          <a:bodyPr wrap="square" lIns="0" tIns="0" rIns="0" bIns="0" rtlCol="0" anchor="ctr"/>
+          <a:lstStyle/>
+          <a:p>
+            <a:pPr indent="0" marL="0">
+              <a:buNone/>
+            </a:pPr>
+            <a:r>
+              <a:rPr lang="en-US" sz="950" dirty="0">
+                <a:solidFill>
+                  <a:srgbClr val="D8D4E4"/>
+                </a:solidFill>
+                <a:latin typeface="Courier New" pitchFamily="34" charset="0"/>
+                <a:ea typeface="Courier New" pitchFamily="34" charset="-122"/>
+                <a:cs typeface="Courier New" pitchFamily="34" charset="-120"/>
+              </a:rPr>
+              <a:t>Require status checks</a:t>
+            </a:r>
+            <a:endParaRPr lang="en-US" sz="950" dirty="0"/>
+          </a:p>
+        </p:txBody>
+      </p:sp>
+      <p:sp>
+        <p:nvSpPr>
+          <p:cNvPr id="23" name="Text 20"/>
+          <p:cNvSpPr/>
+          <p:nvPr/>
+        </p:nvSpPr>
+        <p:spPr>
+          <a:xfrm>
+            <a:off x="8321040" y="2379497"/>
+            <a:ext cx="3145536" cy="221513"/>
+          </a:xfrm>
+          <a:prstGeom prst="rect">
+            <a:avLst/>
+          </a:prstGeom>
+          <a:noFill/>
+          <a:ln/>
+        </p:spPr>
+        <p:txBody>
+          <a:bodyPr wrap="square" lIns="0" tIns="0" rIns="0" bIns="0" rtlCol="0" anchor="ctr"/>
+          <a:lstStyle/>
+          <a:p>
+            <a:pPr indent="0" marL="0">
+              <a:buNone/>
+            </a:pPr>
+            <a:r>
+              <a:rPr lang="en-US" sz="950" dirty="0">
+                <a:solidFill>
+                  <a:srgbClr val="3FCF8E"/>
+                </a:solidFill>
+                <a:latin typeface="Courier New" pitchFamily="34" charset="0"/>
+                <a:ea typeface="Courier New" pitchFamily="34" charset="-122"/>
+                <a:cs typeface="Courier New" pitchFamily="34" charset="-120"/>
+              </a:rPr>
+              <a:t> ✓ required: eval (job)</a:t>
+            </a:r>
+            <a:endParaRPr lang="en-US" sz="950" dirty="0"/>
+          </a:p>
+        </p:txBody>
+      </p:sp>
+      <p:sp>
+        <p:nvSpPr>
+          <p:cNvPr id="24" name="Text 21"/>
+          <p:cNvSpPr/>
+          <p:nvPr/>
+        </p:nvSpPr>
+        <p:spPr>
+          <a:xfrm>
+            <a:off x="8321040" y="2601011"/>
+            <a:ext cx="3145536" cy="221513"/>
+          </a:xfrm>
+          <a:prstGeom prst="rect">
+            <a:avLst/>
+          </a:prstGeom>
+          <a:noFill/>
+          <a:ln/>
+        </p:spPr>
+        <p:txBody>
+          <a:bodyPr wrap="square" lIns="0" tIns="0" rIns="0" bIns="0" rtlCol="0" anchor="ctr"/>
+          <a:lstStyle/>
+          <a:p>
+            <a:pPr indent="0" marL="0">
+              <a:buNone/>
+            </a:pPr>
+            <a:endParaRPr lang="en-US" sz="950" dirty="0"/>
+          </a:p>
+        </p:txBody>
+      </p:sp>
+      <p:sp>
+        <p:nvSpPr>
+          <p:cNvPr id="25" name="Text 22"/>
+          <p:cNvSpPr/>
+          <p:nvPr/>
+        </p:nvSpPr>
+        <p:spPr>
+          <a:xfrm>
+            <a:off x="8321040" y="2822524"/>
+            <a:ext cx="3145536" cy="221513"/>
+          </a:xfrm>
+          <a:prstGeom prst="rect">
+            <a:avLst/>
+          </a:prstGeom>
+          <a:noFill/>
+          <a:ln/>
+        </p:spPr>
+        <p:txBody>
+          <a:bodyPr wrap="square" lIns="0" tIns="0" rIns="0" bIns="0" rtlCol="0" anchor="ctr"/>
+          <a:lstStyle/>
+          <a:p>
+            <a:pPr indent="0" marL="0">
+              <a:buNone/>
+            </a:pPr>
+            <a:r>
+              <a:rPr lang="en-US" sz="950" dirty="0">
+                <a:solidFill>
+                  <a:srgbClr val="FF6B6B"/>
+                </a:solidFill>
+                <a:latin typeface="Courier New" pitchFamily="34" charset="0"/>
+                <a:ea typeface="Courier New" pitchFamily="34" charset="-122"/>
+                <a:cs typeface="Courier New" pitchFamily="34" charset="-120"/>
+              </a:rPr>
+              <a:t>PR #1  eval ✗</a:t>
+            </a:r>
+            <a:endParaRPr lang="en-US" sz="950" dirty="0"/>
+          </a:p>
+        </p:txBody>
+      </p:sp>
+      <p:sp>
+        <p:nvSpPr>
+          <p:cNvPr id="26" name="Text 23"/>
+          <p:cNvSpPr/>
+          <p:nvPr/>
+        </p:nvSpPr>
+        <p:spPr>
+          <a:xfrm>
+            <a:off x="8321040" y="3044038"/>
+            <a:ext cx="3145536" cy="221513"/>
+          </a:xfrm>
+          <a:prstGeom prst="rect">
+            <a:avLst/>
+          </a:prstGeom>
+          <a:noFill/>
+          <a:ln/>
+        </p:spPr>
+        <p:txBody>
+          <a:bodyPr wrap="square" lIns="0" tIns="0" rIns="0" bIns="0" rtlCol="0" anchor="ctr"/>
+          <a:lstStyle/>
+          <a:p>
+            <a:pPr indent="0" marL="0">
+              <a:buNone/>
+            </a:pPr>
+            <a:r>
+              <a:rPr lang="en-US" sz="950" dirty="0">
+                <a:solidFill>
+                  <a:srgbClr val="FF6B6B"/>
+                </a:solidFill>
+                <a:latin typeface="Courier New" pitchFamily="34" charset="0"/>
+                <a:ea typeface="Courier New" pitchFamily="34" charset="-122"/>
+                <a:cs typeface="Courier New" pitchFamily="34" charset="-120"/>
+              </a:rPr>
+              <a:t>  Merging is blocked</a:t>
+            </a:r>
+            <a:endParaRPr lang="en-US" sz="950" dirty="0"/>
+          </a:p>
+        </p:txBody>
+      </p:sp>
+      <p:sp>
+        <p:nvSpPr>
+          <p:cNvPr id="27" name="Text 24"/>
+          <p:cNvSpPr/>
+          <p:nvPr/>
+        </p:nvSpPr>
+        <p:spPr>
+          <a:xfrm>
+            <a:off x="8321040" y="3265551"/>
+            <a:ext cx="3145536" cy="221513"/>
+          </a:xfrm>
+          <a:prstGeom prst="rect">
+            <a:avLst/>
+          </a:prstGeom>
+          <a:noFill/>
+          <a:ln/>
+        </p:spPr>
+        <p:txBody>
+          <a:bodyPr wrap="square" lIns="0" tIns="0" rIns="0" bIns="0" rtlCol="0" anchor="ctr"/>
+          <a:lstStyle/>
+          <a:p>
+            <a:pPr indent="0" marL="0">
+              <a:buNone/>
+            </a:pPr>
+            <a:endParaRPr lang="en-US" sz="950" dirty="0"/>
+          </a:p>
+        </p:txBody>
+      </p:sp>
+      <p:sp>
+        <p:nvSpPr>
+          <p:cNvPr id="28" name="Text 25"/>
+          <p:cNvSpPr/>
+          <p:nvPr/>
+        </p:nvSpPr>
+        <p:spPr>
+          <a:xfrm>
+            <a:off x="8321040" y="3487064"/>
+            <a:ext cx="3145536" cy="221513"/>
+          </a:xfrm>
+          <a:prstGeom prst="rect">
+            <a:avLst/>
+          </a:prstGeom>
+          <a:noFill/>
+          <a:ln/>
+        </p:spPr>
+        <p:txBody>
+          <a:bodyPr wrap="square" lIns="0" tIns="0" rIns="0" bIns="0" rtlCol="0" anchor="ctr"/>
+          <a:lstStyle/>
+          <a:p>
+            <a:pPr indent="0" marL="0">
+              <a:buNone/>
+            </a:pPr>
+            <a:r>
+              <a:rPr lang="en-US" sz="950" dirty="0">
+                <a:solidFill>
+                  <a:srgbClr val="3FCF8E"/>
+                </a:solidFill>
+                <a:latin typeface="Courier New" pitchFamily="34" charset="0"/>
+                <a:ea typeface="Courier New" pitchFamily="34" charset="-122"/>
+                <a:cs typeface="Courier New" pitchFamily="34" charset="-120"/>
+              </a:rPr>
+              <a:t>PR #1  eval ✓</a:t>
+            </a:r>
+            <a:endParaRPr lang="en-US" sz="950" dirty="0"/>
+          </a:p>
+        </p:txBody>
+      </p:sp>
+      <p:sp>
+        <p:nvSpPr>
+          <p:cNvPr id="29" name="Text 26"/>
+          <p:cNvSpPr/>
+          <p:nvPr/>
+        </p:nvSpPr>
+        <p:spPr>
+          <a:xfrm>
+            <a:off x="8321040" y="3708578"/>
+            <a:ext cx="3145536" cy="221513"/>
+          </a:xfrm>
+          <a:prstGeom prst="rect">
+            <a:avLst/>
+          </a:prstGeom>
+          <a:noFill/>
+          <a:ln/>
+        </p:spPr>
+        <p:txBody>
+          <a:bodyPr wrap="square" lIns="0" tIns="0" rIns="0" bIns="0" rtlCol="0" anchor="ctr"/>
+          <a:lstStyle/>
+          <a:p>
+            <a:pPr indent="0" marL="0">
+              <a:buNone/>
+            </a:pPr>
+            <a:r>
+              <a:rPr lang="en-US" sz="950" dirty="0">
+                <a:solidFill>
+                  <a:srgbClr val="3FCF8E"/>
+                </a:solidFill>
+                <a:latin typeface="Courier New" pitchFamily="34" charset="0"/>
+                <a:ea typeface="Courier New" pitchFamily="34" charset="-122"/>
+                <a:cs typeface="Courier New" pitchFamily="34" charset="-120"/>
+              </a:rPr>
+              <a:t>  Merge pull request</a:t>
+            </a:r>
+            <a:endParaRPr lang="en-US" sz="950" dirty="0"/>
+          </a:p>
+        </p:txBody>
+      </p:sp>
+      <p:sp>
+        <p:nvSpPr>
+          <p:cNvPr id="30" name="Text 27"/>
+          <p:cNvSpPr/>
+          <p:nvPr/>
+        </p:nvSpPr>
+        <p:spPr>
+          <a:xfrm>
+            <a:off x="8321040" y="3930091"/>
+            <a:ext cx="3145536" cy="221513"/>
+          </a:xfrm>
+          <a:prstGeom prst="rect">
+            <a:avLst/>
+          </a:prstGeom>
+          <a:noFill/>
+          <a:ln/>
+        </p:spPr>
+        <p:txBody>
+          <a:bodyPr wrap="square" lIns="0" tIns="0" rIns="0" bIns="0" rtlCol="0" anchor="ctr"/>
+          <a:lstStyle/>
+          <a:p>
+            <a:pPr indent="0" marL="0">
+              <a:buNone/>
+            </a:pPr>
+            <a:endParaRPr lang="en-US" sz="950" dirty="0"/>
+          </a:p>
+        </p:txBody>
+      </p:sp>
+      <p:sp>
+        <p:nvSpPr>
+          <p:cNvPr id="31" name="Text 28"/>
+          <p:cNvSpPr/>
+          <p:nvPr/>
+        </p:nvSpPr>
+        <p:spPr>
+          <a:xfrm>
+            <a:off x="8321040" y="4151605"/>
+            <a:ext cx="3145536" cy="221513"/>
+          </a:xfrm>
+          <a:prstGeom prst="rect">
+            <a:avLst/>
+          </a:prstGeom>
+          <a:noFill/>
+          <a:ln/>
+        </p:spPr>
+        <p:txBody>
+          <a:bodyPr wrap="square" lIns="0" tIns="0" rIns="0" bIns="0" rtlCol="0" anchor="ctr"/>
+          <a:lstStyle/>
+          <a:p>
+            <a:pPr indent="0" marL="0">
+              <a:buNone/>
+            </a:pPr>
+            <a:r>
+              <a:rPr lang="en-US" sz="950" dirty="0">
+                <a:solidFill>
+                  <a:srgbClr val="6BA0F8"/>
+                </a:solidFill>
+                <a:latin typeface="Courier New" pitchFamily="34" charset="0"/>
+                <a:ea typeface="Courier New" pitchFamily="34" charset="-122"/>
+                <a:cs typeface="Courier New" pitchFamily="34" charset="-120"/>
+              </a:rPr>
+              <a:t>rollback: activate v2 · &lt; 1 хв</a:t>
+            </a:r>
+            <a:endParaRPr lang="en-US" sz="950" dirty="0"/>
+          </a:p>
+        </p:txBody>
+      </p:sp>
+      <p:sp>
+        <p:nvSpPr>
+          <p:cNvPr id="32" name="Shape 29"/>
+          <p:cNvSpPr/>
+          <p:nvPr/>
+        </p:nvSpPr>
+        <p:spPr>
+          <a:xfrm>
+            <a:off x="566928" y="5349240"/>
+            <a:ext cx="11064240" cy="731520"/>
+          </a:xfrm>
+          <a:prstGeom prst="roundRect">
+            <a:avLst>
+              <a:gd name="adj" fmla="val 15000"/>
+            </a:avLst>
+          </a:prstGeom>
+          <a:solidFill>
+            <a:srgbClr val="FFFFFF"/>
+          </a:solidFill>
+          <a:ln w="12700">
+            <a:solidFill>
+              <a:srgbClr val="D9D9D9"/>
+            </a:solidFill>
+            <a:prstDash val="solid"/>
+          </a:ln>
+        </p:spPr>
+      </p:sp>
+      <p:sp>
+        <p:nvSpPr>
+          <p:cNvPr id="33" name="Text 30"/>
+          <p:cNvSpPr/>
+          <p:nvPr/>
+        </p:nvSpPr>
+        <p:spPr>
+          <a:xfrm>
+            <a:off x="786384" y="5495544"/>
+            <a:ext cx="10625328" cy="438912"/>
           </a:xfrm>
           <a:prstGeom prst="rect">
             <a:avLst/>

--- a/docs/decks/L11.pptx
+++ b/docs/decks/L11.pptx
@@ -10411,7 +10411,7 @@
                 <a:ea typeface="Courier New" pitchFamily="34" charset="-122"/>
                 <a:cs typeface="Courier New" pitchFamily="34" charset="-120"/>
               </a:rPr>
-              <a:t>  eval pass rate &lt; 5/6         </a:t>
+              <a:t>  eval pass rate &lt; поріг (5/6) </a:t>
             </a:r>
             <a:pPr indent="0" marL="0">
               <a:lnSpc>
@@ -14847,7 +14847,7 @@
                 <a:ea typeface="Montserrat" pitchFamily="34" charset="-122"/>
                 <a:cs typeface="Montserrat" pitchFamily="34" charset="-120"/>
               </a:rPr>
-              <a:t>що це довело · перевір себе · антипатерни тижня</a:t>
+              <a:t>що це довело · перевірте себе · антипатерни тижня</a:t>
             </a:r>
             <a:endParaRPr lang="en-US" sz="1500" dirty="0"/>
           </a:p>
@@ -16041,7 +16041,7 @@
                 <a:ea typeface="Unbounded" pitchFamily="34" charset="-122"/>
                 <a:cs typeface="Unbounded" pitchFamily="34" charset="-120"/>
               </a:rPr>
-              <a:t>Перевір себе</a:t>
+              <a:t>Перевірте себе</a:t>
             </a:r>
             <a:endParaRPr lang="en-US" sz="2400" dirty="0"/>
           </a:p>
@@ -17135,7 +17135,7 @@
                 <a:ea typeface="Montserrat" pitchFamily="34" charset="-122"/>
                 <a:cs typeface="Montserrat" pitchFamily="34" charset="-120"/>
               </a:rPr>
-              <a:t>захист, який нічого не блокує, гірший за відсутній</a:t>
+              <a:t>чек ніколи не звітує; PR застрягають на «Expected» — і захист знімають</a:t>
             </a:r>
             <a:endParaRPr lang="en-US" sz="1300" dirty="0"/>
           </a:p>
@@ -24791,7 +24791,7 @@
                 <a:ea typeface="Montserrat" pitchFamily="34" charset="-122"/>
                 <a:cs typeface="Montserrat" pitchFamily="34" charset="-120"/>
               </a:rPr>
-              <a:t>У списку — назва job (eval), а не workflow. Неіснуючий чек нічого не блокує.</a:t>
+              <a:t>У списку — назва job (eval), а не workflow. Неіснуючий чек ніколи не звітує — PR застрягає на «Expected».</a:t>
             </a:r>
             <a:endParaRPr lang="en-US" sz="1300" dirty="0"/>
           </a:p>
